--- a/slides/Lecture_Chapter09.pptx
+++ b/slides/Lecture_Chapter09.pptx
@@ -328,7 +328,7 @@
           <a:p>
             <a:fld id="{3E22BF2E-04DA-469E-97C5-BB68A0368813}" type="datetimeFigureOut">
               <a:rPr lang="en-US" smtClean="0"/>
-              <a:t>11/7/2025</a:t>
+              <a:t>11/29/2025</a:t>
             </a:fld>
             <a:endParaRPr lang="en-US"/>
           </a:p>
@@ -526,7 +526,7 @@
           <a:p>
             <a:fld id="{3E22BF2E-04DA-469E-97C5-BB68A0368813}" type="datetimeFigureOut">
               <a:rPr lang="en-US" smtClean="0"/>
-              <a:t>11/7/2025</a:t>
+              <a:t>11/29/2025</a:t>
             </a:fld>
             <a:endParaRPr lang="en-US"/>
           </a:p>
@@ -734,7 +734,7 @@
           <a:p>
             <a:fld id="{3E22BF2E-04DA-469E-97C5-BB68A0368813}" type="datetimeFigureOut">
               <a:rPr lang="en-US" smtClean="0"/>
-              <a:t>11/7/2025</a:t>
+              <a:t>11/29/2025</a:t>
             </a:fld>
             <a:endParaRPr lang="en-US"/>
           </a:p>
@@ -942,7 +942,7 @@
           <a:p>
             <a:fld id="{3E22BF2E-04DA-469E-97C5-BB68A0368813}" type="datetimeFigureOut">
               <a:rPr lang="en-US" smtClean="0"/>
-              <a:t>11/7/2025</a:t>
+              <a:t>11/29/2025</a:t>
             </a:fld>
             <a:endParaRPr lang="en-US"/>
           </a:p>
@@ -1217,7 +1217,7 @@
           <a:p>
             <a:fld id="{3E22BF2E-04DA-469E-97C5-BB68A0368813}" type="datetimeFigureOut">
               <a:rPr lang="en-US" smtClean="0"/>
-              <a:t>11/7/2025</a:t>
+              <a:t>11/29/2025</a:t>
             </a:fld>
             <a:endParaRPr lang="en-US"/>
           </a:p>
@@ -1482,7 +1482,7 @@
           <a:p>
             <a:fld id="{3E22BF2E-04DA-469E-97C5-BB68A0368813}" type="datetimeFigureOut">
               <a:rPr lang="en-US" smtClean="0"/>
-              <a:t>11/7/2025</a:t>
+              <a:t>11/29/2025</a:t>
             </a:fld>
             <a:endParaRPr lang="en-US"/>
           </a:p>
@@ -1894,7 +1894,7 @@
           <a:p>
             <a:fld id="{3E22BF2E-04DA-469E-97C5-BB68A0368813}" type="datetimeFigureOut">
               <a:rPr lang="en-US" smtClean="0"/>
-              <a:t>11/7/2025</a:t>
+              <a:t>11/29/2025</a:t>
             </a:fld>
             <a:endParaRPr lang="en-US"/>
           </a:p>
@@ -2035,7 +2035,7 @@
           <a:p>
             <a:fld id="{3E22BF2E-04DA-469E-97C5-BB68A0368813}" type="datetimeFigureOut">
               <a:rPr lang="en-US" smtClean="0"/>
-              <a:t>11/7/2025</a:t>
+              <a:t>11/29/2025</a:t>
             </a:fld>
             <a:endParaRPr lang="en-US"/>
           </a:p>
@@ -2148,7 +2148,7 @@
           <a:p>
             <a:fld id="{3E22BF2E-04DA-469E-97C5-BB68A0368813}" type="datetimeFigureOut">
               <a:rPr lang="en-US" smtClean="0"/>
-              <a:t>11/7/2025</a:t>
+              <a:t>11/29/2025</a:t>
             </a:fld>
             <a:endParaRPr lang="en-US"/>
           </a:p>
@@ -2459,7 +2459,7 @@
           <a:p>
             <a:fld id="{3E22BF2E-04DA-469E-97C5-BB68A0368813}" type="datetimeFigureOut">
               <a:rPr lang="en-US" smtClean="0"/>
-              <a:t>11/7/2025</a:t>
+              <a:t>11/29/2025</a:t>
             </a:fld>
             <a:endParaRPr lang="en-US"/>
           </a:p>
@@ -2747,7 +2747,7 @@
           <a:p>
             <a:fld id="{3E22BF2E-04DA-469E-97C5-BB68A0368813}" type="datetimeFigureOut">
               <a:rPr lang="en-US" smtClean="0"/>
-              <a:t>11/7/2025</a:t>
+              <a:t>11/29/2025</a:t>
             </a:fld>
             <a:endParaRPr lang="en-US"/>
           </a:p>
@@ -2988,7 +2988,7 @@
           <a:p>
             <a:fld id="{3E22BF2E-04DA-469E-97C5-BB68A0368813}" type="datetimeFigureOut">
               <a:rPr lang="en-US" smtClean="0"/>
-              <a:t>11/7/2025</a:t>
+              <a:t>11/29/2025</a:t>
             </a:fld>
             <a:endParaRPr lang="en-US"/>
           </a:p>
@@ -3505,7 +3505,7 @@
         </p:blipFill>
         <p:spPr bwMode="auto">
           <a:xfrm>
-            <a:off x="3653200" y="-18278"/>
+            <a:off x="3523485" y="10"/>
             <a:ext cx="8668512" cy="6857990"/>
           </a:xfrm>
           <a:prstGeom prst="rect">
@@ -3965,6 +3965,53 @@
           </a:prstGeom>
         </p:spPr>
       </p:pic>
+      <p:pic>
+        <p:nvPicPr>
+          <p:cNvPr id="6" name="Picture 5">
+            <a:extLst>
+              <a:ext uri="{FF2B5EF4-FFF2-40B4-BE49-F238E27FC236}">
+                <a16:creationId xmlns:a16="http://schemas.microsoft.com/office/drawing/2014/main" id="{8AD28C7D-14A3-CFEB-3DEC-2E01272844F2}"/>
+              </a:ext>
+            </a:extLst>
+          </p:cNvPr>
+          <p:cNvPicPr>
+            <a:picLocks noChangeAspect="1" noChangeArrowheads="1"/>
+          </p:cNvPicPr>
+          <p:nvPr/>
+        </p:nvPicPr>
+        <p:blipFill>
+          <a:blip r:embed="rId5">
+            <a:extLst>
+              <a:ext uri="{28A0092B-C50C-407E-A947-70E740481C1C}">
+                <a14:useLocalDpi xmlns:a14="http://schemas.microsoft.com/office/drawing/2010/main" val="0"/>
+              </a:ext>
+            </a:extLst>
+          </a:blip>
+          <a:srcRect/>
+          <a:stretch>
+            <a:fillRect/>
+          </a:stretch>
+        </p:blipFill>
+        <p:spPr bwMode="auto">
+          <a:xfrm>
+            <a:off x="7816072" y="145911"/>
+            <a:ext cx="4182403" cy="1000945"/>
+          </a:xfrm>
+          <a:prstGeom prst="rect">
+            <a:avLst/>
+          </a:prstGeom>
+          <a:noFill/>
+          <a:extLst>
+            <a:ext uri="{909E8E84-426E-40DD-AFC4-6F175D3DCCD1}">
+              <a14:hiddenFill xmlns:a14="http://schemas.microsoft.com/office/drawing/2010/main">
+                <a:solidFill>
+                  <a:srgbClr val="FFFFFF"/>
+                </a:solidFill>
+              </a14:hiddenFill>
+            </a:ext>
+          </a:extLst>
+        </p:spPr>
+      </p:pic>
     </p:spTree>
     <p:extLst>
       <p:ext uri="{BB962C8B-B14F-4D97-AF65-F5344CB8AC3E}">
@@ -3995,8 +4042,8 @@
           <a:chExt cx="0" cy="0"/>
         </a:xfrm>
       </p:grpSpPr>
-      <mc:AlternateContent xmlns:mc="http://schemas.openxmlformats.org/markup-compatibility/2006">
-        <mc:Choice xmlns:a14="http://schemas.microsoft.com/office/drawing/2010/main" Requires="a14">
+      <mc:AlternateContent xmlns:mc="http://schemas.openxmlformats.org/markup-compatibility/2006" xmlns:a14="http://schemas.microsoft.com/office/drawing/2010/main">
+        <mc:Choice Requires="a14">
           <p:sp>
             <p:nvSpPr>
               <p:cNvPr id="3" name="Content Placeholder 2">
@@ -5435,7 +5482,7 @@
             </p:txBody>
           </p:sp>
         </mc:Choice>
-        <mc:Fallback>
+        <mc:Fallback xmlns="">
           <p:sp>
             <p:nvSpPr>
               <p:cNvPr id="3" name="Content Placeholder 2">
@@ -5507,8 +5554,8 @@
           </a:p>
         </p:txBody>
       </p:sp>
-      <mc:AlternateContent xmlns:mc="http://schemas.openxmlformats.org/markup-compatibility/2006">
-        <mc:Choice xmlns:a14="http://schemas.microsoft.com/office/drawing/2010/main" Requires="a14">
+      <mc:AlternateContent xmlns:mc="http://schemas.openxmlformats.org/markup-compatibility/2006" xmlns:a14="http://schemas.microsoft.com/office/drawing/2010/main">
+        <mc:Choice Requires="a14">
           <p:sp>
             <p:nvSpPr>
               <p:cNvPr id="6" name="Speech Bubble: Rectangle with Corners Rounded 5">
@@ -5673,7 +5720,7 @@
             </p:txBody>
           </p:sp>
         </mc:Choice>
-        <mc:Fallback>
+        <mc:Fallback xmlns="">
           <p:sp>
             <p:nvSpPr>
               <p:cNvPr id="6" name="Speech Bubble: Rectangle with Corners Rounded 5">
@@ -5776,8 +5823,8 @@
           </a:p>
         </p:txBody>
       </p:sp>
-      <mc:AlternateContent xmlns:mc="http://schemas.openxmlformats.org/markup-compatibility/2006">
-        <mc:Choice xmlns:a14="http://schemas.microsoft.com/office/drawing/2010/main" Requires="a14">
+      <mc:AlternateContent xmlns:mc="http://schemas.openxmlformats.org/markup-compatibility/2006" xmlns:a14="http://schemas.microsoft.com/office/drawing/2010/main">
+        <mc:Choice Requires="a14">
           <p:sp>
             <p:nvSpPr>
               <p:cNvPr id="10" name="Speech Bubble: Rectangle with Corners Rounded 9">
@@ -5857,7 +5904,7 @@
             </p:txBody>
           </p:sp>
         </mc:Choice>
-        <mc:Fallback>
+        <mc:Fallback xmlns="">
           <p:sp>
             <p:nvSpPr>
               <p:cNvPr id="10" name="Speech Bubble: Rectangle with Corners Rounded 9">
@@ -5969,8 +6016,8 @@
           </a:p>
         </p:txBody>
       </p:sp>
-      <mc:AlternateContent xmlns:mc="http://schemas.openxmlformats.org/markup-compatibility/2006">
-        <mc:Choice xmlns:a14="http://schemas.microsoft.com/office/drawing/2010/main" Requires="a14">
+      <mc:AlternateContent xmlns:mc="http://schemas.openxmlformats.org/markup-compatibility/2006" xmlns:a14="http://schemas.microsoft.com/office/drawing/2010/main">
+        <mc:Choice Requires="a14">
           <p:sp>
             <p:nvSpPr>
               <p:cNvPr id="3" name="Content Placeholder 2">
@@ -6469,7 +6516,7 @@
             </p:txBody>
           </p:sp>
         </mc:Choice>
-        <mc:Fallback>
+        <mc:Fallback xmlns="">
           <p:sp>
             <p:nvSpPr>
               <p:cNvPr id="3" name="Content Placeholder 2">
@@ -6567,8 +6614,8 @@
           </a:p>
         </p:txBody>
       </p:sp>
-      <mc:AlternateContent xmlns:mc="http://schemas.openxmlformats.org/markup-compatibility/2006">
-        <mc:Choice xmlns:a14="http://schemas.microsoft.com/office/drawing/2010/main" Requires="a14">
+      <mc:AlternateContent xmlns:mc="http://schemas.openxmlformats.org/markup-compatibility/2006" xmlns:a14="http://schemas.microsoft.com/office/drawing/2010/main">
+        <mc:Choice Requires="a14">
           <p:sp>
             <p:nvSpPr>
               <p:cNvPr id="3" name="Content Placeholder 2">
@@ -6708,13 +6755,7 @@
                           <a:rPr lang="en-US" b="0" i="1" smtClean="0">
                             <a:latin typeface="Cambria Math" panose="02040503050406030204" pitchFamily="18" charset="0"/>
                           </a:rPr>
-                          <m:t>+</m:t>
-                        </m:r>
-                        <m:r>
-                          <a:rPr lang="en-US" b="0" i="1" smtClean="0">
-                            <a:latin typeface="Cambria Math" panose="02040503050406030204" pitchFamily="18" charset="0"/>
-                          </a:rPr>
-                          <m:t>1</m:t>
+                          <m:t>+1</m:t>
                         </m:r>
                       </m:sub>
                     </m:sSub>
@@ -7151,13 +7192,7 @@
                           <a:rPr lang="en-US" i="1">
                             <a:latin typeface="Cambria Math" panose="02040503050406030204" pitchFamily="18" charset="0"/>
                           </a:rPr>
-                          <m:t>+</m:t>
-                        </m:r>
-                        <m:r>
-                          <a:rPr lang="en-US" i="1">
-                            <a:latin typeface="Cambria Math" panose="02040503050406030204" pitchFamily="18" charset="0"/>
-                          </a:rPr>
-                          <m:t>1</m:t>
+                          <m:t>+1</m:t>
                         </m:r>
                       </m:sub>
                     </m:sSub>
@@ -7754,7 +7789,7 @@
             </p:txBody>
           </p:sp>
         </mc:Choice>
-        <mc:Fallback>
+        <mc:Fallback xmlns="">
           <p:sp>
             <p:nvSpPr>
               <p:cNvPr id="3" name="Content Placeholder 2">
@@ -7882,8 +7917,8 @@
           </a:prstGeom>
         </p:spPr>
       </p:pic>
-      <mc:AlternateContent xmlns:mc="http://schemas.openxmlformats.org/markup-compatibility/2006">
-        <mc:Choice xmlns:a14="http://schemas.microsoft.com/office/drawing/2010/main" Requires="a14">
+      <mc:AlternateContent xmlns:mc="http://schemas.openxmlformats.org/markup-compatibility/2006" xmlns:a14="http://schemas.microsoft.com/office/drawing/2010/main">
+        <mc:Choice Requires="a14">
           <p:sp>
             <p:nvSpPr>
               <p:cNvPr id="7" name="TextBox 6">
@@ -7996,13 +8031,7 @@
                             <a:rPr lang="en-US" i="1">
                               <a:latin typeface="Cambria Math" panose="02040503050406030204" pitchFamily="18" charset="0"/>
                             </a:rPr>
-                            <m:t>=</m:t>
-                          </m:r>
-                          <m:r>
-                            <a:rPr lang="en-US" i="1">
-                              <a:latin typeface="Cambria Math" panose="02040503050406030204" pitchFamily="18" charset="0"/>
-                            </a:rPr>
-                            <m:t>0</m:t>
+                            <m:t>=0</m:t>
                           </m:r>
                         </m:sub>
                         <m:sup>
@@ -8078,13 +8107,7 @@
                                 <a:rPr lang="en-US" i="1">
                                   <a:latin typeface="Cambria Math" panose="02040503050406030204" pitchFamily="18" charset="0"/>
                                 </a:rPr>
-                                <m:t>+</m:t>
-                              </m:r>
-                              <m:r>
-                                <a:rPr lang="en-US" i="1">
-                                  <a:latin typeface="Cambria Math" panose="02040503050406030204" pitchFamily="18" charset="0"/>
-                                </a:rPr>
-                                <m:t>1</m:t>
+                                <m:t>+1</m:t>
                               </m:r>
                             </m:sub>
                           </m:sSub>
@@ -8098,7 +8121,7 @@
             </p:txBody>
           </p:sp>
         </mc:Choice>
-        <mc:Fallback>
+        <mc:Fallback xmlns="">
           <p:sp>
             <p:nvSpPr>
               <p:cNvPr id="7" name="TextBox 6">
@@ -8313,7 +8336,7 @@
               <a:p>
                 <a:r>
                   <a:rPr lang="en-US" dirty="0"/>
-                  <a:t>If we still use the approach then it is called a semi-gradient method.</a:t>
+                  <a:t>If we still use the approach, then it is called a semi-gradient method.</a:t>
                 </a:r>
               </a:p>
               <a:p>
@@ -8529,8 +8552,8 @@
           </a:fontRef>
         </p:style>
       </p:cxnSp>
-      <mc:AlternateContent xmlns:mc="http://schemas.openxmlformats.org/markup-compatibility/2006">
-        <mc:Choice xmlns:a14="http://schemas.microsoft.com/office/drawing/2010/main" Requires="a14">
+      <mc:AlternateContent xmlns:mc="http://schemas.openxmlformats.org/markup-compatibility/2006" xmlns:a14="http://schemas.microsoft.com/office/drawing/2010/main">
+        <mc:Choice Requires="a14">
           <p:sp>
             <p:nvSpPr>
               <p:cNvPr id="9" name="Speech Bubble: Rectangle with Corners Rounded 8">
@@ -8625,7 +8648,7 @@
             </p:txBody>
           </p:sp>
         </mc:Choice>
-        <mc:Fallback>
+        <mc:Fallback xmlns="">
           <p:sp>
             <p:nvSpPr>
               <p:cNvPr id="9" name="Speech Bubble: Rectangle with Corners Rounded 8">
@@ -9562,7 +9585,15 @@
                 <a:pPr lvl="1"/>
                 <a:r>
                   <a:rPr lang="en-US" dirty="0"/>
-                  <a:t>Has only one optimum and is guaranteed to converge to the global minimum of </a:t>
+                  <a:t>Has only one optimum and is </a:t>
+                </a:r>
+                <a:r>
+                  <a:rPr lang="en-US" b="1" dirty="0"/>
+                  <a:t>guaranteed to converge </a:t>
+                </a:r>
+                <a:r>
+                  <a:rPr lang="en-US" dirty="0"/>
+                  <a:t>to the global minimum of </a:t>
                 </a:r>
                 <a14:m>
                   <m:oMath xmlns:m="http://schemas.openxmlformats.org/officeDocument/2006/math">
@@ -9635,7 +9666,7 @@
               <a:blipFill>
                 <a:blip r:embed="rId2"/>
                 <a:stretch>
-                  <a:fillRect l="-812" t="-2806" r="-522" b="-1786"/>
+                  <a:fillRect l="-812" t="-2806" b="-1786"/>
                 </a:stretch>
               </a:blipFill>
             </p:spPr>
@@ -9902,8 +9933,8 @@
           </a:p>
         </p:txBody>
       </p:sp>
-      <mc:AlternateContent xmlns:mc="http://schemas.openxmlformats.org/markup-compatibility/2006">
-        <mc:Choice xmlns:a14="http://schemas.microsoft.com/office/drawing/2010/main" Requires="a14">
+      <mc:AlternateContent xmlns:mc="http://schemas.openxmlformats.org/markup-compatibility/2006" xmlns:a14="http://schemas.microsoft.com/office/drawing/2010/main">
+        <mc:Choice Requires="a14">
           <p:sp>
             <p:nvSpPr>
               <p:cNvPr id="3" name="Content Placeholder 2">
@@ -10200,7 +10231,7 @@
             </p:txBody>
           </p:sp>
         </mc:Choice>
-        <mc:Fallback>
+        <mc:Fallback xmlns="">
           <p:sp>
             <p:nvSpPr>
               <p:cNvPr id="3" name="Content Placeholder 2">
@@ -10334,8 +10365,8 @@
                 </a:prstGeom>
               </p:spPr>
             </p:pic>
-            <mc:AlternateContent xmlns:mc="http://schemas.openxmlformats.org/markup-compatibility/2006">
-              <mc:Choice xmlns:a14="http://schemas.microsoft.com/office/drawing/2010/main" Requires="a14">
+            <mc:AlternateContent xmlns:mc="http://schemas.openxmlformats.org/markup-compatibility/2006" xmlns:a14="http://schemas.microsoft.com/office/drawing/2010/main">
+              <mc:Choice Requires="a14">
                 <p:sp>
                   <p:nvSpPr>
                     <p:cNvPr id="6" name="TextBox 5">
@@ -10364,6 +10395,7 @@
                     </a:bodyPr>
                     <a:lstStyle/>
                     <a:p>
+                      <a:pPr/>
                       <a14:m>
                         <m:oMathPara xmlns:m="http://schemas.openxmlformats.org/officeDocument/2006/math">
                           <m:oMathParaPr>
@@ -10390,7 +10422,7 @@
                   </p:txBody>
                 </p:sp>
               </mc:Choice>
-              <mc:Fallback>
+              <mc:Fallback xmlns="">
                 <p:sp>
                   <p:nvSpPr>
                     <p:cNvPr id="6" name="TextBox 5">
@@ -10435,8 +10467,8 @@
                 </p:sp>
               </mc:Fallback>
             </mc:AlternateContent>
-            <mc:AlternateContent xmlns:mc="http://schemas.openxmlformats.org/markup-compatibility/2006">
-              <mc:Choice xmlns:a14="http://schemas.microsoft.com/office/drawing/2010/main" Requires="a14">
+            <mc:AlternateContent xmlns:mc="http://schemas.openxmlformats.org/markup-compatibility/2006" xmlns:a14="http://schemas.microsoft.com/office/drawing/2010/main">
+              <mc:Choice Requires="a14">
                 <p:sp>
                   <p:nvSpPr>
                     <p:cNvPr id="7" name="TextBox 6">
@@ -10465,6 +10497,7 @@
                     </a:bodyPr>
                     <a:lstStyle/>
                     <a:p>
+                      <a:pPr/>
                       <a14:m>
                         <m:oMathPara xmlns:m="http://schemas.openxmlformats.org/officeDocument/2006/math">
                           <m:oMathParaPr>
@@ -10491,7 +10524,7 @@
                   </p:txBody>
                 </p:sp>
               </mc:Choice>
-              <mc:Fallback>
+              <mc:Fallback xmlns="">
                 <p:sp>
                   <p:nvSpPr>
                     <p:cNvPr id="7" name="TextBox 6">
@@ -10536,8 +10569,8 @@
                 </p:sp>
               </mc:Fallback>
             </mc:AlternateContent>
-            <mc:AlternateContent xmlns:mc="http://schemas.openxmlformats.org/markup-compatibility/2006">
-              <mc:Choice xmlns:a14="http://schemas.microsoft.com/office/drawing/2010/main" Requires="a14">
+            <mc:AlternateContent xmlns:mc="http://schemas.openxmlformats.org/markup-compatibility/2006" xmlns:a14="http://schemas.microsoft.com/office/drawing/2010/main">
+              <mc:Choice Requires="a14">
                 <p:sp>
                   <p:nvSpPr>
                     <p:cNvPr id="8" name="TextBox 7">
@@ -10566,6 +10599,7 @@
                     </a:bodyPr>
                     <a:lstStyle/>
                     <a:p>
+                      <a:pPr/>
                       <a14:m>
                         <m:oMathPara xmlns:m="http://schemas.openxmlformats.org/officeDocument/2006/math">
                           <m:oMathParaPr>
@@ -10592,7 +10626,7 @@
                   </p:txBody>
                 </p:sp>
               </mc:Choice>
-              <mc:Fallback>
+              <mc:Fallback xmlns="">
                 <p:sp>
                   <p:nvSpPr>
                     <p:cNvPr id="8" name="TextBox 7">
@@ -10637,8 +10671,8 @@
                 </p:sp>
               </mc:Fallback>
             </mc:AlternateContent>
-            <mc:AlternateContent xmlns:mc="http://schemas.openxmlformats.org/markup-compatibility/2006">
-              <mc:Choice xmlns:a14="http://schemas.microsoft.com/office/drawing/2010/main" Requires="a14">
+            <mc:AlternateContent xmlns:mc="http://schemas.openxmlformats.org/markup-compatibility/2006" xmlns:a14="http://schemas.microsoft.com/office/drawing/2010/main">
+              <mc:Choice Requires="a14">
                 <p:sp>
                   <p:nvSpPr>
                     <p:cNvPr id="9" name="TextBox 8">
@@ -10667,6 +10701,7 @@
                     </a:bodyPr>
                     <a:lstStyle/>
                     <a:p>
+                      <a:pPr/>
                       <a14:m>
                         <m:oMathPara xmlns:m="http://schemas.openxmlformats.org/officeDocument/2006/math">
                           <m:oMathParaPr>
@@ -10693,7 +10728,7 @@
                   </p:txBody>
                 </p:sp>
               </mc:Choice>
-              <mc:Fallback>
+              <mc:Fallback xmlns="">
                 <p:sp>
                   <p:nvSpPr>
                     <p:cNvPr id="9" name="TextBox 8">
@@ -10889,8 +10924,8 @@
               </a:fontRef>
             </p:style>
           </p:cxnSp>
-          <mc:AlternateContent xmlns:mc="http://schemas.openxmlformats.org/markup-compatibility/2006">
-            <mc:Choice xmlns:a14="http://schemas.microsoft.com/office/drawing/2010/main" Requires="a14">
+          <mc:AlternateContent xmlns:mc="http://schemas.openxmlformats.org/markup-compatibility/2006" xmlns:a14="http://schemas.microsoft.com/office/drawing/2010/main">
+            <mc:Choice Requires="a14">
               <p:sp>
                 <p:nvSpPr>
                   <p:cNvPr id="24" name="TextBox 23">
@@ -10919,6 +10954,7 @@
                   </a:bodyPr>
                   <a:lstStyle/>
                   <a:p>
+                    <a:pPr/>
                     <a14:m>
                       <m:oMathPara xmlns:m="http://schemas.openxmlformats.org/officeDocument/2006/math">
                         <m:oMathParaPr>
@@ -10939,7 +10975,7 @@
                 </p:txBody>
               </p:sp>
             </mc:Choice>
-            <mc:Fallback>
+            <mc:Fallback xmlns="">
               <p:sp>
                 <p:nvSpPr>
                   <p:cNvPr id="24" name="TextBox 23">
@@ -11026,8 +11062,8 @@
             </p:style>
           </p:cxnSp>
         </p:grpSp>
-        <mc:AlternateContent xmlns:mc="http://schemas.openxmlformats.org/markup-compatibility/2006">
-          <mc:Choice xmlns:a14="http://schemas.microsoft.com/office/drawing/2010/main" Requires="a14">
+        <mc:AlternateContent xmlns:mc="http://schemas.openxmlformats.org/markup-compatibility/2006" xmlns:a14="http://schemas.microsoft.com/office/drawing/2010/main">
+          <mc:Choice Requires="a14">
             <p:sp>
               <p:nvSpPr>
                 <p:cNvPr id="29" name="TextBox 28">
@@ -11088,7 +11124,7 @@
               </p:txBody>
             </p:sp>
           </mc:Choice>
-          <mc:Fallback>
+          <mc:Fallback xmlns="">
             <p:sp>
               <p:nvSpPr>
                 <p:cNvPr id="29" name="TextBox 28">
@@ -11134,8 +11170,8 @@
           </mc:Fallback>
         </mc:AlternateContent>
       </p:grpSp>
-      <mc:AlternateContent xmlns:mc="http://schemas.openxmlformats.org/markup-compatibility/2006">
-        <mc:Choice xmlns:a14="http://schemas.microsoft.com/office/drawing/2010/main" Requires="a14">
+      <mc:AlternateContent xmlns:mc="http://schemas.openxmlformats.org/markup-compatibility/2006" xmlns:a14="http://schemas.microsoft.com/office/drawing/2010/main">
+        <mc:Choice Requires="a14">
           <p:sp>
             <p:nvSpPr>
               <p:cNvPr id="32" name="Rectangle: Rounded Corners 31">
@@ -11200,7 +11236,7 @@
             </p:txBody>
           </p:sp>
         </mc:Choice>
-        <mc:Fallback>
+        <mc:Fallback xmlns="">
           <p:sp>
             <p:nvSpPr>
               <p:cNvPr id="32" name="Rectangle: Rounded Corners 31">
@@ -14277,8 +14313,8 @@
           </a:p>
         </p:txBody>
       </p:sp>
-      <mc:AlternateContent xmlns:mc="http://schemas.openxmlformats.org/markup-compatibility/2006">
-        <mc:Choice xmlns:a14="http://schemas.microsoft.com/office/drawing/2010/main" Requires="a14">
+      <mc:AlternateContent xmlns:mc="http://schemas.openxmlformats.org/markup-compatibility/2006" xmlns:a14="http://schemas.microsoft.com/office/drawing/2010/main">
+        <mc:Choice Requires="a14">
           <p:sp>
             <p:nvSpPr>
               <p:cNvPr id="3" name="Content Placeholder 2">
@@ -14772,19 +14808,7 @@
                       <a:rPr lang="en-US" b="0" i="1" smtClean="0">
                         <a:latin typeface="Cambria Math" panose="02040503050406030204" pitchFamily="18" charset="0"/>
                       </a:rPr>
-                      <m:t>∈{</m:t>
-                    </m:r>
-                    <m:r>
-                      <a:rPr lang="en-US" b="0" i="1" smtClean="0">
-                        <a:latin typeface="Cambria Math" panose="02040503050406030204" pitchFamily="18" charset="0"/>
-                      </a:rPr>
-                      <m:t>0</m:t>
-                    </m:r>
-                    <m:r>
-                      <a:rPr lang="en-US" b="0" i="1" smtClean="0">
-                        <a:latin typeface="Cambria Math" panose="02040503050406030204" pitchFamily="18" charset="0"/>
-                      </a:rPr>
-                      <m:t>,…,</m:t>
+                      <m:t>∈{0,…,</m:t>
                     </m:r>
                     <m:r>
                       <a:rPr lang="en-US" b="0" i="1" smtClean="0">
@@ -14816,19 +14840,7 @@
                       <a:rPr lang="en-US" b="0" i="1" smtClean="0">
                         <a:latin typeface="Cambria Math" panose="02040503050406030204" pitchFamily="18" charset="0"/>
                       </a:rPr>
-                      <m:t>=</m:t>
-                    </m:r>
-                    <m:r>
-                      <a:rPr lang="en-US" b="0" i="1" smtClean="0">
-                        <a:latin typeface="Cambria Math" panose="02040503050406030204" pitchFamily="18" charset="0"/>
-                      </a:rPr>
-                      <m:t>1</m:t>
-                    </m:r>
-                    <m:r>
-                      <a:rPr lang="en-US" b="0" i="1" smtClean="0">
-                        <a:latin typeface="Cambria Math" panose="02040503050406030204" pitchFamily="18" charset="0"/>
-                      </a:rPr>
-                      <m:t>,…,</m:t>
+                      <m:t>=1,…,</m:t>
                     </m:r>
                     <m:r>
                       <a:rPr lang="en-US" b="0" i="1" smtClean="0">
@@ -14854,19 +14866,7 @@
                       <a:rPr lang="en-US" b="0" i="1" smtClean="0">
                         <a:latin typeface="Cambria Math" panose="02040503050406030204" pitchFamily="18" charset="0"/>
                       </a:rPr>
-                      <m:t>=</m:t>
-                    </m:r>
-                    <m:r>
-                      <a:rPr lang="en-US" b="0" i="1" smtClean="0">
-                        <a:latin typeface="Cambria Math" panose="02040503050406030204" pitchFamily="18" charset="0"/>
-                      </a:rPr>
-                      <m:t>1</m:t>
-                    </m:r>
-                    <m:r>
-                      <a:rPr lang="en-US" b="0" i="1" smtClean="0">
-                        <a:latin typeface="Cambria Math" panose="02040503050406030204" pitchFamily="18" charset="0"/>
-                      </a:rPr>
-                      <m:t>,…,</m:t>
+                      <m:t>=1,…,</m:t>
                     </m:r>
                     <m:sSup>
                       <m:sSupPr>
@@ -14896,13 +14896,7 @@
                               <a:rPr lang="en-US" b="0" i="1" smtClean="0">
                                 <a:latin typeface="Cambria Math" panose="02040503050406030204" pitchFamily="18" charset="0"/>
                               </a:rPr>
-                              <m:t>+</m:t>
-                            </m:r>
-                            <m:r>
-                              <a:rPr lang="en-US" b="0" i="1" smtClean="0">
-                                <a:latin typeface="Cambria Math" panose="02040503050406030204" pitchFamily="18" charset="0"/>
-                              </a:rPr>
-                              <m:t>1</m:t>
+                              <m:t>+1</m:t>
                             </m:r>
                           </m:e>
                         </m:d>
@@ -14923,7 +14917,7 @@
             </p:txBody>
           </p:sp>
         </mc:Choice>
-        <mc:Fallback>
+        <mc:Fallback xmlns="">
           <p:sp>
             <p:nvSpPr>
               <p:cNvPr id="3" name="Content Placeholder 2">
@@ -14998,8 +14992,8 @@
           </a:prstGeom>
         </p:spPr>
       </p:pic>
-      <mc:AlternateContent xmlns:mc="http://schemas.openxmlformats.org/markup-compatibility/2006">
-        <mc:Choice xmlns:a14="http://schemas.microsoft.com/office/drawing/2010/main" Requires="a14">
+      <mc:AlternateContent xmlns:mc="http://schemas.openxmlformats.org/markup-compatibility/2006" xmlns:a14="http://schemas.microsoft.com/office/drawing/2010/main">
+        <mc:Choice Requires="a14">
           <p:sp>
             <p:nvSpPr>
               <p:cNvPr id="5" name="TextBox 4">
@@ -15053,7 +15047,7 @@
             </p:txBody>
           </p:sp>
         </mc:Choice>
-        <mc:Fallback>
+        <mc:Fallback xmlns="">
           <p:sp>
             <p:nvSpPr>
               <p:cNvPr id="5" name="TextBox 4">
@@ -15204,8 +15198,8 @@
           </a:p>
         </p:txBody>
       </p:sp>
-      <mc:AlternateContent xmlns:mc="http://schemas.openxmlformats.org/markup-compatibility/2006">
-        <mc:Choice xmlns:a14="http://schemas.microsoft.com/office/drawing/2010/main" Requires="a14">
+      <mc:AlternateContent xmlns:mc="http://schemas.openxmlformats.org/markup-compatibility/2006" xmlns:a14="http://schemas.microsoft.com/office/drawing/2010/main">
+        <mc:Choice Requires="a14">
           <p:sp>
             <p:nvSpPr>
               <p:cNvPr id="41" name="TextBox 40">
@@ -15234,6 +15228,7 @@
               </a:bodyPr>
               <a:lstStyle/>
               <a:p>
+                <a:pPr/>
                 <a14:m>
                   <m:oMathPara xmlns:m="http://schemas.openxmlformats.org/officeDocument/2006/math">
                     <m:oMathParaPr>
@@ -15250,31 +15245,7 @@
                         <a:rPr lang="en-US" sz="1400" b="0" i="1" smtClean="0">
                           <a:latin typeface="Cambria Math" panose="02040503050406030204" pitchFamily="18" charset="0"/>
                         </a:rPr>
-                        <m:t>=(.</m:t>
-                      </m:r>
-                      <m:r>
-                        <a:rPr lang="en-US" sz="1400" b="0" i="1" smtClean="0">
-                          <a:latin typeface="Cambria Math" panose="02040503050406030204" pitchFamily="18" charset="0"/>
-                        </a:rPr>
-                        <m:t>5</m:t>
-                      </m:r>
-                      <m:r>
-                        <a:rPr lang="en-US" sz="1400" b="0" i="1" smtClean="0">
-                          <a:latin typeface="Cambria Math" panose="02040503050406030204" pitchFamily="18" charset="0"/>
-                        </a:rPr>
-                        <m:t>,.</m:t>
-                      </m:r>
-                      <m:r>
-                        <a:rPr lang="en-US" sz="1400" b="0" i="1" smtClean="0">
-                          <a:latin typeface="Cambria Math" panose="02040503050406030204" pitchFamily="18" charset="0"/>
-                        </a:rPr>
-                        <m:t>8</m:t>
-                      </m:r>
-                      <m:r>
-                        <a:rPr lang="en-US" sz="1400" b="0" i="1" smtClean="0">
-                          <a:latin typeface="Cambria Math" panose="02040503050406030204" pitchFamily="18" charset="0"/>
-                        </a:rPr>
-                        <m:t>)</m:t>
+                        <m:t>=(.5,.8)</m:t>
                       </m:r>
                     </m:oMath>
                   </m:oMathPara>
@@ -15398,25 +15369,7 @@
                                   <a:rPr lang="en-US" sz="1400" b="0" i="1" smtClean="0">
                                     <a:latin typeface="Cambria Math" panose="02040503050406030204" pitchFamily="18" charset="0"/>
                                   </a:rPr>
-                                  <m:t>.</m:t>
-                                </m:r>
-                                <m:r>
-                                  <a:rPr lang="en-US" sz="1400" b="0" i="1" smtClean="0">
-                                    <a:latin typeface="Cambria Math" panose="02040503050406030204" pitchFamily="18" charset="0"/>
-                                  </a:rPr>
-                                  <m:t>5</m:t>
-                                </m:r>
-                                <m:r>
-                                  <a:rPr lang="en-US" sz="1400" b="0" i="1" smtClean="0">
-                                    <a:latin typeface="Cambria Math" panose="02040503050406030204" pitchFamily="18" charset="0"/>
-                                  </a:rPr>
-                                  <m:t>,.</m:t>
-                                </m:r>
-                                <m:r>
-                                  <a:rPr lang="en-US" sz="1400" b="0" i="1" smtClean="0">
-                                    <a:latin typeface="Cambria Math" panose="02040503050406030204" pitchFamily="18" charset="0"/>
-                                  </a:rPr>
-                                  <m:t>8</m:t>
+                                  <m:t>.5,.8</m:t>
                                 </m:r>
                               </m:e>
                             </m:d>
@@ -15434,31 +15387,7 @@
                           <a:rPr lang="en-US" sz="1400" b="0" i="1" smtClean="0">
                             <a:latin typeface="Cambria Math" panose="02040503050406030204" pitchFamily="18" charset="0"/>
                           </a:rPr>
-                          <m:t>(</m:t>
-                        </m:r>
-                        <m:r>
-                          <a:rPr lang="en-US" sz="1400" b="0" i="1" smtClean="0">
-                            <a:latin typeface="Cambria Math" panose="02040503050406030204" pitchFamily="18" charset="0"/>
-                          </a:rPr>
-                          <m:t>0</m:t>
-                        </m:r>
-                        <m:r>
-                          <a:rPr lang="en-US" sz="1400" b="0" i="1" smtClean="0">
-                            <a:latin typeface="Cambria Math" panose="02040503050406030204" pitchFamily="18" charset="0"/>
-                          </a:rPr>
-                          <m:t>,</m:t>
-                        </m:r>
-                        <m:r>
-                          <a:rPr lang="en-US" sz="1400" b="0" i="1" smtClean="0">
-                            <a:latin typeface="Cambria Math" panose="02040503050406030204" pitchFamily="18" charset="0"/>
-                          </a:rPr>
-                          <m:t>1</m:t>
-                        </m:r>
-                        <m:r>
-                          <a:rPr lang="en-US" sz="1400" b="0" i="1" smtClean="0">
-                            <a:latin typeface="Cambria Math" panose="02040503050406030204" pitchFamily="18" charset="0"/>
-                          </a:rPr>
-                          <m:t>))</m:t>
+                          <m:t>(0,1))</m:t>
                         </m:r>
                       </m:e>
                     </m:func>
@@ -15466,13 +15395,7 @@
                       <a:rPr lang="en-US" sz="1400" b="0" i="1" smtClean="0">
                         <a:latin typeface="Cambria Math" panose="02040503050406030204" pitchFamily="18" charset="0"/>
                       </a:rPr>
-                      <m:t>=−.</m:t>
-                    </m:r>
-                    <m:r>
-                      <a:rPr lang="en-US" sz="1400" b="0" i="1" smtClean="0">
-                        <a:latin typeface="Cambria Math" panose="02040503050406030204" pitchFamily="18" charset="0"/>
-                      </a:rPr>
-                      <m:t>8</m:t>
+                      <m:t>=−.8</m:t>
                     </m:r>
                   </m:oMath>
                 </a14:m>
@@ -15595,25 +15518,7 @@
                                   <a:rPr lang="en-US" sz="1400" i="1">
                                     <a:latin typeface="Cambria Math" panose="02040503050406030204" pitchFamily="18" charset="0"/>
                                   </a:rPr>
-                                  <m:t>.</m:t>
-                                </m:r>
-                                <m:r>
-                                  <a:rPr lang="en-US" sz="1400" i="1">
-                                    <a:latin typeface="Cambria Math" panose="02040503050406030204" pitchFamily="18" charset="0"/>
-                                  </a:rPr>
-                                  <m:t>5</m:t>
-                                </m:r>
-                                <m:r>
-                                  <a:rPr lang="en-US" sz="1400" i="1">
-                                    <a:latin typeface="Cambria Math" panose="02040503050406030204" pitchFamily="18" charset="0"/>
-                                  </a:rPr>
-                                  <m:t>,.</m:t>
-                                </m:r>
-                                <m:r>
-                                  <a:rPr lang="en-US" sz="1400" i="1">
-                                    <a:latin typeface="Cambria Math" panose="02040503050406030204" pitchFamily="18" charset="0"/>
-                                  </a:rPr>
-                                  <m:t>8</m:t>
+                                  <m:t>.5,.8</m:t>
                                 </m:r>
                               </m:e>
                             </m:d>
@@ -15655,13 +15560,7 @@
                           <a:rPr lang="en-US" sz="1400" i="1">
                             <a:latin typeface="Cambria Math" panose="02040503050406030204" pitchFamily="18" charset="0"/>
                           </a:rPr>
-                          <m:t>)</m:t>
-                        </m:r>
-                        <m:r>
-                          <a:rPr lang="en-US" sz="1400" i="1">
-                            <a:latin typeface="Cambria Math" panose="02040503050406030204" pitchFamily="18" charset="0"/>
-                          </a:rPr>
-                          <m:t>)</m:t>
+                          <m:t>))</m:t>
                         </m:r>
                       </m:e>
                     </m:func>
@@ -15675,13 +15574,7 @@
                       <a:rPr lang="en-US" sz="1400" b="0" i="1" smtClean="0">
                         <a:latin typeface="Cambria Math" panose="02040503050406030204" pitchFamily="18" charset="0"/>
                       </a:rPr>
-                      <m:t>    </m:t>
-                    </m:r>
-                    <m:r>
-                      <a:rPr lang="en-US" sz="1400" b="0" i="1" smtClean="0">
-                        <a:latin typeface="Cambria Math" panose="02040503050406030204" pitchFamily="18" charset="0"/>
-                      </a:rPr>
-                      <m:t>0</m:t>
+                      <m:t>    0</m:t>
                     </m:r>
                   </m:oMath>
                 </a14:m>
@@ -15801,25 +15694,7 @@
                                   <a:rPr lang="en-US" sz="1400" i="1">
                                     <a:latin typeface="Cambria Math" panose="02040503050406030204" pitchFamily="18" charset="0"/>
                                   </a:rPr>
-                                  <m:t>.</m:t>
-                                </m:r>
-                                <m:r>
-                                  <a:rPr lang="en-US" sz="1400" i="1">
-                                    <a:latin typeface="Cambria Math" panose="02040503050406030204" pitchFamily="18" charset="0"/>
-                                  </a:rPr>
-                                  <m:t>5</m:t>
-                                </m:r>
-                                <m:r>
-                                  <a:rPr lang="en-US" sz="1400" i="1">
-                                    <a:latin typeface="Cambria Math" panose="02040503050406030204" pitchFamily="18" charset="0"/>
-                                  </a:rPr>
-                                  <m:t>,.</m:t>
-                                </m:r>
-                                <m:r>
-                                  <a:rPr lang="en-US" sz="1400" i="1">
-                                    <a:latin typeface="Cambria Math" panose="02040503050406030204" pitchFamily="18" charset="0"/>
-                                  </a:rPr>
-                                  <m:t>8</m:t>
+                                  <m:t>.5,.8</m:t>
                                 </m:r>
                               </m:e>
                             </m:d>
@@ -15849,19 +15724,7 @@
                           <a:rPr lang="en-US" sz="1400" i="1">
                             <a:latin typeface="Cambria Math" panose="02040503050406030204" pitchFamily="18" charset="0"/>
                           </a:rPr>
-                          <m:t>,</m:t>
-                        </m:r>
-                        <m:r>
-                          <a:rPr lang="en-US" sz="1400" i="1">
-                            <a:latin typeface="Cambria Math" panose="02040503050406030204" pitchFamily="18" charset="0"/>
-                          </a:rPr>
-                          <m:t>1</m:t>
-                        </m:r>
-                        <m:r>
-                          <a:rPr lang="en-US" sz="1400" i="1">
-                            <a:latin typeface="Cambria Math" panose="02040503050406030204" pitchFamily="18" charset="0"/>
-                          </a:rPr>
-                          <m:t>))</m:t>
+                          <m:t>,1))</m:t>
                         </m:r>
                       </m:e>
                     </m:func>
@@ -15995,25 +15858,7 @@
                                   <a:rPr lang="en-US" sz="1400" i="1">
                                     <a:latin typeface="Cambria Math" panose="02040503050406030204" pitchFamily="18" charset="0"/>
                                   </a:rPr>
-                                  <m:t>.</m:t>
-                                </m:r>
-                                <m:r>
-                                  <a:rPr lang="en-US" sz="1400" i="1">
-                                    <a:latin typeface="Cambria Math" panose="02040503050406030204" pitchFamily="18" charset="0"/>
-                                  </a:rPr>
-                                  <m:t>5</m:t>
-                                </m:r>
-                                <m:r>
-                                  <a:rPr lang="en-US" sz="1400" i="1">
-                                    <a:latin typeface="Cambria Math" panose="02040503050406030204" pitchFamily="18" charset="0"/>
-                                  </a:rPr>
-                                  <m:t>,.</m:t>
-                                </m:r>
-                                <m:r>
-                                  <a:rPr lang="en-US" sz="1400" i="1">
-                                    <a:latin typeface="Cambria Math" panose="02040503050406030204" pitchFamily="18" charset="0"/>
-                                  </a:rPr>
-                                  <m:t>8</m:t>
+                                  <m:t>.5,.8</m:t>
                                 </m:r>
                               </m:e>
                             </m:d>
@@ -16031,37 +15876,19 @@
                           <a:rPr lang="en-US" sz="1400" i="1">
                             <a:latin typeface="Cambria Math" panose="02040503050406030204" pitchFamily="18" charset="0"/>
                           </a:rPr>
-                          <m:t>(</m:t>
+                          <m:t>(0,</m:t>
+                        </m:r>
+                        <m:r>
+                          <a:rPr lang="en-US" sz="1400" b="0" i="1" smtClean="0">
+                            <a:latin typeface="Cambria Math" panose="02040503050406030204" pitchFamily="18" charset="0"/>
+                          </a:rPr>
+                          <m:t>5</m:t>
                         </m:r>
                         <m:r>
                           <a:rPr lang="en-US" sz="1400" i="1">
                             <a:latin typeface="Cambria Math" panose="02040503050406030204" pitchFamily="18" charset="0"/>
                           </a:rPr>
-                          <m:t>0</m:t>
-                        </m:r>
-                        <m:r>
-                          <a:rPr lang="en-US" sz="1400" i="1">
-                            <a:latin typeface="Cambria Math" panose="02040503050406030204" pitchFamily="18" charset="0"/>
-                          </a:rPr>
-                          <m:t>,</m:t>
-                        </m:r>
-                        <m:r>
-                          <a:rPr lang="en-US" sz="1400" b="0" i="1" smtClean="0">
-                            <a:latin typeface="Cambria Math" panose="02040503050406030204" pitchFamily="18" charset="0"/>
-                          </a:rPr>
-                          <m:t>5</m:t>
-                        </m:r>
-                        <m:r>
-                          <a:rPr lang="en-US" sz="1400" i="1">
-                            <a:latin typeface="Cambria Math" panose="02040503050406030204" pitchFamily="18" charset="0"/>
-                          </a:rPr>
-                          <m:t>)</m:t>
-                        </m:r>
-                        <m:r>
-                          <a:rPr lang="en-US" sz="1400" i="1">
-                            <a:latin typeface="Cambria Math" panose="02040503050406030204" pitchFamily="18" charset="0"/>
-                          </a:rPr>
-                          <m:t>)</m:t>
+                          <m:t>))</m:t>
                         </m:r>
                       </m:e>
                     </m:func>
@@ -16075,13 +15902,7 @@
                       <a:rPr lang="en-US" sz="1400" b="0" i="1" smtClean="0">
                         <a:latin typeface="Cambria Math" panose="02040503050406030204" pitchFamily="18" charset="0"/>
                       </a:rPr>
-                      <m:t>    </m:t>
-                    </m:r>
-                    <m:r>
-                      <a:rPr lang="en-US" sz="1400" b="0" i="1" smtClean="0">
-                        <a:latin typeface="Cambria Math" panose="02040503050406030204" pitchFamily="18" charset="0"/>
-                      </a:rPr>
-                      <m:t>1</m:t>
+                      <m:t>    1</m:t>
                     </m:r>
                   </m:oMath>
                 </a14:m>
@@ -16201,25 +16022,7 @@
                                   <a:rPr lang="en-US" sz="1400" i="1">
                                     <a:latin typeface="Cambria Math" panose="02040503050406030204" pitchFamily="18" charset="0"/>
                                   </a:rPr>
-                                  <m:t>.</m:t>
-                                </m:r>
-                                <m:r>
-                                  <a:rPr lang="en-US" sz="1400" i="1">
-                                    <a:latin typeface="Cambria Math" panose="02040503050406030204" pitchFamily="18" charset="0"/>
-                                  </a:rPr>
-                                  <m:t>5</m:t>
-                                </m:r>
-                                <m:r>
-                                  <a:rPr lang="en-US" sz="1400" i="1">
-                                    <a:latin typeface="Cambria Math" panose="02040503050406030204" pitchFamily="18" charset="0"/>
-                                  </a:rPr>
-                                  <m:t>,.</m:t>
-                                </m:r>
-                                <m:r>
-                                  <a:rPr lang="en-US" sz="1400" i="1">
-                                    <a:latin typeface="Cambria Math" panose="02040503050406030204" pitchFamily="18" charset="0"/>
-                                  </a:rPr>
-                                  <m:t>8</m:t>
+                                  <m:t>.5,.8</m:t>
                                 </m:r>
                               </m:e>
                             </m:d>
@@ -16261,13 +16064,7 @@
                           <a:rPr lang="en-US" sz="1400" i="1">
                             <a:latin typeface="Cambria Math" panose="02040503050406030204" pitchFamily="18" charset="0"/>
                           </a:rPr>
-                          <m:t>)</m:t>
-                        </m:r>
-                        <m:r>
-                          <a:rPr lang="en-US" sz="1400" i="1">
-                            <a:latin typeface="Cambria Math" panose="02040503050406030204" pitchFamily="18" charset="0"/>
-                          </a:rPr>
-                          <m:t>)</m:t>
+                          <m:t>))</m:t>
                         </m:r>
                       </m:e>
                     </m:func>
@@ -16413,25 +16210,7 @@
                                   <a:rPr lang="en-US" sz="1400" i="1">
                                     <a:latin typeface="Cambria Math" panose="02040503050406030204" pitchFamily="18" charset="0"/>
                                   </a:rPr>
-                                  <m:t>.</m:t>
-                                </m:r>
-                                <m:r>
-                                  <a:rPr lang="en-US" sz="1400" i="1">
-                                    <a:latin typeface="Cambria Math" panose="02040503050406030204" pitchFamily="18" charset="0"/>
-                                  </a:rPr>
-                                  <m:t>5</m:t>
-                                </m:r>
-                                <m:r>
-                                  <a:rPr lang="en-US" sz="1400" i="1">
-                                    <a:latin typeface="Cambria Math" panose="02040503050406030204" pitchFamily="18" charset="0"/>
-                                  </a:rPr>
-                                  <m:t>,.</m:t>
-                                </m:r>
-                                <m:r>
-                                  <a:rPr lang="en-US" sz="1400" i="1">
-                                    <a:latin typeface="Cambria Math" panose="02040503050406030204" pitchFamily="18" charset="0"/>
-                                  </a:rPr>
-                                  <m:t>8</m:t>
+                                  <m:t>.5,.8</m:t>
                                 </m:r>
                               </m:e>
                             </m:d>
@@ -16473,13 +16252,7 @@
                           <a:rPr lang="en-US" sz="1400" i="1">
                             <a:latin typeface="Cambria Math" panose="02040503050406030204" pitchFamily="18" charset="0"/>
                           </a:rPr>
-                          <m:t>)</m:t>
-                        </m:r>
-                        <m:r>
-                          <a:rPr lang="en-US" sz="1400" i="1">
-                            <a:latin typeface="Cambria Math" panose="02040503050406030204" pitchFamily="18" charset="0"/>
-                          </a:rPr>
-                          <m:t>)</m:t>
+                          <m:t>))</m:t>
                         </m:r>
                       </m:e>
                     </m:func>
@@ -16493,13 +16266,7 @@
                       <a:rPr lang="en-US" sz="1400" b="0" i="0" smtClean="0">
                         <a:latin typeface="Cambria Math" panose="02040503050406030204" pitchFamily="18" charset="0"/>
                       </a:rPr>
-                      <m:t>    </m:t>
-                    </m:r>
-                    <m:r>
-                      <a:rPr lang="en-US" sz="1400" b="0" i="0" smtClean="0">
-                        <a:latin typeface="Cambria Math" panose="02040503050406030204" pitchFamily="18" charset="0"/>
-                      </a:rPr>
-                      <m:t>1</m:t>
+                      <m:t>    1</m:t>
                     </m:r>
                   </m:oMath>
                 </a14:m>
@@ -16514,7 +16281,7 @@
             </p:txBody>
           </p:sp>
         </mc:Choice>
-        <mc:Fallback>
+        <mc:Fallback xmlns="">
           <p:sp>
             <p:nvSpPr>
               <p:cNvPr id="41" name="TextBox 40">
@@ -17649,8 +17416,8 @@
           </p:txBody>
         </p:sp>
       </p:grpSp>
-      <mc:AlternateContent xmlns:mc="http://schemas.openxmlformats.org/markup-compatibility/2006">
-        <mc:Choice xmlns:a14="http://schemas.microsoft.com/office/drawing/2010/main" Requires="a14">
+      <mc:AlternateContent xmlns:mc="http://schemas.openxmlformats.org/markup-compatibility/2006" xmlns:a14="http://schemas.microsoft.com/office/drawing/2010/main">
+        <mc:Choice Requires="a14">
           <p:sp>
             <p:nvSpPr>
               <p:cNvPr id="46" name="Speech Bubble: Rectangle with Corners Rounded 45">
@@ -17742,7 +17509,7 @@
             </p:txBody>
           </p:sp>
         </mc:Choice>
-        <mc:Fallback>
+        <mc:Fallback xmlns="">
           <p:sp>
             <p:nvSpPr>
               <p:cNvPr id="46" name="Speech Bubble: Rectangle with Corners Rounded 45">
@@ -18086,8 +17853,8 @@
           </a:p>
         </p:txBody>
       </p:sp>
-      <mc:AlternateContent xmlns:mc="http://schemas.openxmlformats.org/markup-compatibility/2006">
-        <mc:Choice xmlns:a14="http://schemas.microsoft.com/office/drawing/2010/main" Requires="a14">
+      <mc:AlternateContent xmlns:mc="http://schemas.openxmlformats.org/markup-compatibility/2006" xmlns:a14="http://schemas.microsoft.com/office/drawing/2010/main">
+        <mc:Choice Requires="a14">
           <p:sp>
             <p:nvSpPr>
               <p:cNvPr id="3" name="Content Placeholder 2">
@@ -18225,7 +17992,7 @@
             </p:txBody>
           </p:sp>
         </mc:Choice>
-        <mc:Fallback>
+        <mc:Fallback xmlns="">
           <p:sp>
             <p:nvSpPr>
               <p:cNvPr id="3" name="Content Placeholder 2">
@@ -18299,8 +18066,8 @@
           </a:prstGeom>
         </p:spPr>
       </p:pic>
-      <mc:AlternateContent xmlns:mc="http://schemas.openxmlformats.org/markup-compatibility/2006">
-        <mc:Choice xmlns:a14="http://schemas.microsoft.com/office/drawing/2010/main" Requires="a14">
+      <mc:AlternateContent xmlns:mc="http://schemas.openxmlformats.org/markup-compatibility/2006" xmlns:a14="http://schemas.microsoft.com/office/drawing/2010/main">
+        <mc:Choice Requires="a14">
           <p:sp>
             <p:nvSpPr>
               <p:cNvPr id="6" name="TextBox 5">
@@ -18393,7 +18160,7 @@
             </p:txBody>
           </p:sp>
         </mc:Choice>
-        <mc:Fallback>
+        <mc:Fallback xmlns="">
           <p:sp>
             <p:nvSpPr>
               <p:cNvPr id="6" name="TextBox 5">
@@ -19471,8 +19238,8 @@
           </a:p>
         </p:txBody>
       </p:sp>
-      <mc:AlternateContent xmlns:mc="http://schemas.openxmlformats.org/markup-compatibility/2006">
-        <mc:Choice xmlns:a14="http://schemas.microsoft.com/office/drawing/2010/main" Requires="a14">
+      <mc:AlternateContent xmlns:mc="http://schemas.openxmlformats.org/markup-compatibility/2006" xmlns:a14="http://schemas.microsoft.com/office/drawing/2010/main">
+        <mc:Choice Requires="a14">
           <p:sp>
             <p:nvSpPr>
               <p:cNvPr id="3" name="Content Placeholder 2">
@@ -20045,7 +19812,7 @@
             </p:txBody>
           </p:sp>
         </mc:Choice>
-        <mc:Fallback>
+        <mc:Fallback xmlns="">
           <p:sp>
             <p:nvSpPr>
               <p:cNvPr id="3" name="Content Placeholder 2">
@@ -20298,16 +20065,21 @@
             <p:ph idx="1"/>
           </p:nvPr>
         </p:nvSpPr>
-        <p:spPr/>
+        <p:spPr>
+          <a:xfrm>
+            <a:off x="838200" y="1397330"/>
+            <a:ext cx="7166773" cy="4779633"/>
+          </a:xfrm>
+        </p:spPr>
         <p:txBody>
           <a:bodyPr>
-            <a:normAutofit/>
+            <a:normAutofit fontScale="62500" lnSpcReduction="20000"/>
           </a:bodyPr>
           <a:lstStyle/>
           <a:p>
             <a:r>
               <a:rPr lang="en-US" dirty="0"/>
-              <a:t>Uses simple networks with a single hidden layer or deep learning.</a:t>
+              <a:t>Uses simple networks with a single hidden layer or deep architectures to approximate the value function.</a:t>
             </a:r>
           </a:p>
           <a:p>
@@ -20348,7 +20120,19 @@
             <a:pPr lvl="1"/>
             <a:r>
               <a:rPr lang="en-US" dirty="0"/>
-              <a:t>Deep Residual learning…</a:t>
+              <a:t>Deep residual learning…</a:t>
+            </a:r>
+          </a:p>
+          <a:p>
+            <a:r>
+              <a:rPr lang="en-US" dirty="0"/>
+              <a:t>Networks are trained like linear models using SGD. For deep networks this uses backpropagation.</a:t>
+            </a:r>
+          </a:p>
+          <a:p>
+            <a:r>
+              <a:rPr lang="en-US" dirty="0"/>
+              <a:t>ANNs are non-linear universal approximators so they can learn any value function.</a:t>
             </a:r>
           </a:p>
           <a:p>
@@ -20357,11 +20141,3343 @@
           <a:p>
             <a:r>
               <a:rPr lang="en-US" dirty="0"/>
-              <a:t>Networks are trained like linear models using SGD (backpropagation)</a:t>
+              <a:t>Issues due to nonlinearity: </a:t>
+            </a:r>
+          </a:p>
+          <a:p>
+            <a:pPr lvl="1"/>
+            <a:r>
+              <a:rPr lang="en-US" dirty="0"/>
+              <a:t>Instability </a:t>
+            </a:r>
+          </a:p>
+          <a:p>
+            <a:pPr lvl="1"/>
+            <a:r>
+              <a:rPr lang="en-US" dirty="0"/>
+              <a:t>Convergence is not guaranteed. </a:t>
+            </a:r>
+          </a:p>
+          <a:p>
+            <a:pPr lvl="1"/>
+            <a:endParaRPr lang="en-US" dirty="0"/>
+          </a:p>
+          <a:p>
+            <a:r>
+              <a:rPr lang="en-US" dirty="0"/>
+              <a:t>More in Deep Reinforcement Learning (DRL).</a:t>
             </a:r>
           </a:p>
         </p:txBody>
       </p:sp>
+      <p:grpSp>
+        <p:nvGrpSpPr>
+          <p:cNvPr id="5" name="Group 4">
+            <a:extLst>
+              <a:ext uri="{FF2B5EF4-FFF2-40B4-BE49-F238E27FC236}">
+                <a16:creationId xmlns:a16="http://schemas.microsoft.com/office/drawing/2014/main" id="{0257D9AD-0CBD-4A1C-5DC3-AB0B9432D641}"/>
+              </a:ext>
+              <a:ext uri="{C183D7F6-B498-43B3-948B-1728B52AA6E4}">
+                <adec:decorative xmlns:adec="http://schemas.microsoft.com/office/drawing/2017/decorative" val="1"/>
+              </a:ext>
+            </a:extLst>
+          </p:cNvPr>
+          <p:cNvGrpSpPr/>
+          <p:nvPr/>
+        </p:nvGrpSpPr>
+        <p:grpSpPr>
+          <a:xfrm>
+            <a:off x="8207189" y="1193884"/>
+            <a:ext cx="3920629" cy="2021412"/>
+            <a:chOff x="1129787" y="3714030"/>
+            <a:chExt cx="3920629" cy="2021412"/>
+          </a:xfrm>
+        </p:grpSpPr>
+        <p:sp>
+          <p:nvSpPr>
+            <p:cNvPr id="7" name="TextBox 6">
+              <a:extLst>
+                <a:ext uri="{FF2B5EF4-FFF2-40B4-BE49-F238E27FC236}">
+                  <a16:creationId xmlns:a16="http://schemas.microsoft.com/office/drawing/2014/main" id="{88F9D100-703C-DDBE-4B03-BEFD2675E182}"/>
+                </a:ext>
+                <a:ext uri="{C183D7F6-B498-43B3-948B-1728B52AA6E4}">
+                  <adec:decorative xmlns:adec="http://schemas.microsoft.com/office/drawing/2017/decorative" val="0"/>
+                </a:ext>
+              </a:extLst>
+            </p:cNvPr>
+            <p:cNvSpPr txBox="1"/>
+            <p:nvPr/>
+          </p:nvSpPr>
+          <p:spPr>
+            <a:xfrm>
+              <a:off x="1865224" y="5366110"/>
+              <a:ext cx="1911973" cy="369332"/>
+            </a:xfrm>
+            <a:prstGeom prst="rect">
+              <a:avLst/>
+            </a:prstGeom>
+            <a:noFill/>
+          </p:spPr>
+          <p:txBody>
+            <a:bodyPr wrap="square" rtlCol="0">
+              <a:spAutoFit/>
+            </a:bodyPr>
+            <a:lstStyle/>
+            <a:p>
+              <a:pPr algn="ctr"/>
+              <a:r>
+                <a:rPr lang="en-US" dirty="0"/>
+                <a:t>Q-network</a:t>
+              </a:r>
+            </a:p>
+          </p:txBody>
+        </p:sp>
+        <p:grpSp>
+          <p:nvGrpSpPr>
+            <p:cNvPr id="8" name="Group 7">
+              <a:extLst>
+                <a:ext uri="{FF2B5EF4-FFF2-40B4-BE49-F238E27FC236}">
+                  <a16:creationId xmlns:a16="http://schemas.microsoft.com/office/drawing/2014/main" id="{271A9B85-1B4A-D529-9559-9A776B1E0331}"/>
+                </a:ext>
+                <a:ext uri="{C183D7F6-B498-43B3-948B-1728B52AA6E4}">
+                  <adec:decorative xmlns:adec="http://schemas.microsoft.com/office/drawing/2017/decorative" val="1"/>
+                </a:ext>
+              </a:extLst>
+            </p:cNvPr>
+            <p:cNvGrpSpPr/>
+            <p:nvPr/>
+          </p:nvGrpSpPr>
+          <p:grpSpPr>
+            <a:xfrm>
+              <a:off x="2124428" y="4079165"/>
+              <a:ext cx="1295400" cy="1235724"/>
+              <a:chOff x="4410942" y="4599774"/>
+              <a:chExt cx="1577400" cy="1648626"/>
+            </a:xfrm>
+          </p:grpSpPr>
+          <p:sp>
+            <p:nvSpPr>
+              <p:cNvPr id="16" name="Oval 15">
+                <a:extLst>
+                  <a:ext uri="{FF2B5EF4-FFF2-40B4-BE49-F238E27FC236}">
+                    <a16:creationId xmlns:a16="http://schemas.microsoft.com/office/drawing/2014/main" id="{7FB21E2A-FC1F-C47C-298D-A8BE4E31C4B6}"/>
+                  </a:ext>
+                </a:extLst>
+              </p:cNvPr>
+              <p:cNvSpPr/>
+              <p:nvPr/>
+            </p:nvSpPr>
+            <p:spPr>
+              <a:xfrm>
+                <a:off x="4889892" y="4752174"/>
+                <a:ext cx="152400" cy="179456"/>
+              </a:xfrm>
+              <a:prstGeom prst="ellipse">
+                <a:avLst/>
+              </a:prstGeom>
+            </p:spPr>
+            <p:style>
+              <a:lnRef idx="2">
+                <a:schemeClr val="accent6">
+                  <a:shade val="15000"/>
+                </a:schemeClr>
+              </a:lnRef>
+              <a:fillRef idx="1">
+                <a:schemeClr val="accent6"/>
+              </a:fillRef>
+              <a:effectRef idx="0">
+                <a:schemeClr val="accent6"/>
+              </a:effectRef>
+              <a:fontRef idx="minor">
+                <a:schemeClr val="lt1"/>
+              </a:fontRef>
+            </p:style>
+            <p:txBody>
+              <a:bodyPr rtlCol="0" anchor="ctr"/>
+              <a:lstStyle/>
+              <a:p>
+                <a:pPr algn="ctr"/>
+                <a:endParaRPr lang="en-US"/>
+              </a:p>
+            </p:txBody>
+          </p:sp>
+          <p:sp>
+            <p:nvSpPr>
+              <p:cNvPr id="17" name="Oval 16">
+                <a:extLst>
+                  <a:ext uri="{FF2B5EF4-FFF2-40B4-BE49-F238E27FC236}">
+                    <a16:creationId xmlns:a16="http://schemas.microsoft.com/office/drawing/2014/main" id="{3BAD4EA1-AE93-3F2B-EC3E-F51B2C66811C}"/>
+                  </a:ext>
+                </a:extLst>
+              </p:cNvPr>
+              <p:cNvSpPr/>
+              <p:nvPr/>
+            </p:nvSpPr>
+            <p:spPr>
+              <a:xfrm>
+                <a:off x="4889892" y="5007830"/>
+                <a:ext cx="152400" cy="179456"/>
+              </a:xfrm>
+              <a:prstGeom prst="ellipse">
+                <a:avLst/>
+              </a:prstGeom>
+            </p:spPr>
+            <p:style>
+              <a:lnRef idx="2">
+                <a:schemeClr val="accent6">
+                  <a:shade val="15000"/>
+                </a:schemeClr>
+              </a:lnRef>
+              <a:fillRef idx="1">
+                <a:schemeClr val="accent6"/>
+              </a:fillRef>
+              <a:effectRef idx="0">
+                <a:schemeClr val="accent6"/>
+              </a:effectRef>
+              <a:fontRef idx="minor">
+                <a:schemeClr val="lt1"/>
+              </a:fontRef>
+            </p:style>
+            <p:txBody>
+              <a:bodyPr rtlCol="0" anchor="ctr"/>
+              <a:lstStyle/>
+              <a:p>
+                <a:pPr algn="ctr"/>
+                <a:endParaRPr lang="en-US"/>
+              </a:p>
+            </p:txBody>
+          </p:sp>
+          <p:sp>
+            <p:nvSpPr>
+              <p:cNvPr id="18" name="Oval 17">
+                <a:extLst>
+                  <a:ext uri="{FF2B5EF4-FFF2-40B4-BE49-F238E27FC236}">
+                    <a16:creationId xmlns:a16="http://schemas.microsoft.com/office/drawing/2014/main" id="{E3C39F9D-742D-29FD-62B5-DCCFB700DAFE}"/>
+                  </a:ext>
+                </a:extLst>
+              </p:cNvPr>
+              <p:cNvSpPr/>
+              <p:nvPr/>
+            </p:nvSpPr>
+            <p:spPr>
+              <a:xfrm>
+                <a:off x="4889892" y="5285574"/>
+                <a:ext cx="152400" cy="179456"/>
+              </a:xfrm>
+              <a:prstGeom prst="ellipse">
+                <a:avLst/>
+              </a:prstGeom>
+            </p:spPr>
+            <p:style>
+              <a:lnRef idx="2">
+                <a:schemeClr val="accent6">
+                  <a:shade val="15000"/>
+                </a:schemeClr>
+              </a:lnRef>
+              <a:fillRef idx="1">
+                <a:schemeClr val="accent6"/>
+              </a:fillRef>
+              <a:effectRef idx="0">
+                <a:schemeClr val="accent6"/>
+              </a:effectRef>
+              <a:fontRef idx="minor">
+                <a:schemeClr val="lt1"/>
+              </a:fontRef>
+            </p:style>
+            <p:txBody>
+              <a:bodyPr rtlCol="0" anchor="ctr"/>
+              <a:lstStyle/>
+              <a:p>
+                <a:pPr algn="ctr"/>
+                <a:endParaRPr lang="en-US"/>
+              </a:p>
+            </p:txBody>
+          </p:sp>
+          <p:sp>
+            <p:nvSpPr>
+              <p:cNvPr id="19" name="Oval 18">
+                <a:extLst>
+                  <a:ext uri="{FF2B5EF4-FFF2-40B4-BE49-F238E27FC236}">
+                    <a16:creationId xmlns:a16="http://schemas.microsoft.com/office/drawing/2014/main" id="{639BE8FB-3F89-4604-BFD7-75A85BD6D11C}"/>
+                  </a:ext>
+                </a:extLst>
+              </p:cNvPr>
+              <p:cNvSpPr/>
+              <p:nvPr/>
+            </p:nvSpPr>
+            <p:spPr>
+              <a:xfrm>
+                <a:off x="4889892" y="5590374"/>
+                <a:ext cx="152400" cy="179456"/>
+              </a:xfrm>
+              <a:prstGeom prst="ellipse">
+                <a:avLst/>
+              </a:prstGeom>
+            </p:spPr>
+            <p:style>
+              <a:lnRef idx="2">
+                <a:schemeClr val="accent6">
+                  <a:shade val="15000"/>
+                </a:schemeClr>
+              </a:lnRef>
+              <a:fillRef idx="1">
+                <a:schemeClr val="accent6"/>
+              </a:fillRef>
+              <a:effectRef idx="0">
+                <a:schemeClr val="accent6"/>
+              </a:effectRef>
+              <a:fontRef idx="minor">
+                <a:schemeClr val="lt1"/>
+              </a:fontRef>
+            </p:style>
+            <p:txBody>
+              <a:bodyPr rtlCol="0" anchor="ctr"/>
+              <a:lstStyle/>
+              <a:p>
+                <a:pPr algn="ctr"/>
+                <a:endParaRPr lang="en-US"/>
+              </a:p>
+            </p:txBody>
+          </p:sp>
+          <p:sp>
+            <p:nvSpPr>
+              <p:cNvPr id="20" name="Oval 19">
+                <a:extLst>
+                  <a:ext uri="{FF2B5EF4-FFF2-40B4-BE49-F238E27FC236}">
+                    <a16:creationId xmlns:a16="http://schemas.microsoft.com/office/drawing/2014/main" id="{A4EC46C8-4F64-09FC-B2F0-A56DD6F92E13}"/>
+                  </a:ext>
+                </a:extLst>
+              </p:cNvPr>
+              <p:cNvSpPr/>
+              <p:nvPr/>
+            </p:nvSpPr>
+            <p:spPr>
+              <a:xfrm>
+                <a:off x="5347092" y="4904574"/>
+                <a:ext cx="152400" cy="179456"/>
+              </a:xfrm>
+              <a:prstGeom prst="ellipse">
+                <a:avLst/>
+              </a:prstGeom>
+            </p:spPr>
+            <p:style>
+              <a:lnRef idx="2">
+                <a:schemeClr val="accent6">
+                  <a:shade val="15000"/>
+                </a:schemeClr>
+              </a:lnRef>
+              <a:fillRef idx="1">
+                <a:schemeClr val="accent6"/>
+              </a:fillRef>
+              <a:effectRef idx="0">
+                <a:schemeClr val="accent6"/>
+              </a:effectRef>
+              <a:fontRef idx="minor">
+                <a:schemeClr val="lt1"/>
+              </a:fontRef>
+            </p:style>
+            <p:txBody>
+              <a:bodyPr rtlCol="0" anchor="ctr"/>
+              <a:lstStyle/>
+              <a:p>
+                <a:pPr algn="ctr"/>
+                <a:endParaRPr lang="en-US"/>
+              </a:p>
+            </p:txBody>
+          </p:sp>
+          <p:sp>
+            <p:nvSpPr>
+              <p:cNvPr id="21" name="Oval 20">
+                <a:extLst>
+                  <a:ext uri="{FF2B5EF4-FFF2-40B4-BE49-F238E27FC236}">
+                    <a16:creationId xmlns:a16="http://schemas.microsoft.com/office/drawing/2014/main" id="{EC7B4CEF-D65D-35AC-4A87-5A2F28622CC6}"/>
+                  </a:ext>
+                </a:extLst>
+              </p:cNvPr>
+              <p:cNvSpPr/>
+              <p:nvPr/>
+            </p:nvSpPr>
+            <p:spPr>
+              <a:xfrm>
+                <a:off x="5347092" y="5133174"/>
+                <a:ext cx="152400" cy="179456"/>
+              </a:xfrm>
+              <a:prstGeom prst="ellipse">
+                <a:avLst/>
+              </a:prstGeom>
+            </p:spPr>
+            <p:style>
+              <a:lnRef idx="2">
+                <a:schemeClr val="accent6">
+                  <a:shade val="15000"/>
+                </a:schemeClr>
+              </a:lnRef>
+              <a:fillRef idx="1">
+                <a:schemeClr val="accent6"/>
+              </a:fillRef>
+              <a:effectRef idx="0">
+                <a:schemeClr val="accent6"/>
+              </a:effectRef>
+              <a:fontRef idx="minor">
+                <a:schemeClr val="lt1"/>
+              </a:fontRef>
+            </p:style>
+            <p:txBody>
+              <a:bodyPr rtlCol="0" anchor="ctr"/>
+              <a:lstStyle/>
+              <a:p>
+                <a:pPr algn="ctr"/>
+                <a:endParaRPr lang="en-US"/>
+              </a:p>
+            </p:txBody>
+          </p:sp>
+          <p:sp>
+            <p:nvSpPr>
+              <p:cNvPr id="22" name="Oval 21">
+                <a:extLst>
+                  <a:ext uri="{FF2B5EF4-FFF2-40B4-BE49-F238E27FC236}">
+                    <a16:creationId xmlns:a16="http://schemas.microsoft.com/office/drawing/2014/main" id="{60546C22-9126-A64F-1E08-4A0774EC5C52}"/>
+                  </a:ext>
+                </a:extLst>
+              </p:cNvPr>
+              <p:cNvSpPr/>
+              <p:nvPr/>
+            </p:nvSpPr>
+            <p:spPr>
+              <a:xfrm>
+                <a:off x="5347092" y="5437974"/>
+                <a:ext cx="152400" cy="179456"/>
+              </a:xfrm>
+              <a:prstGeom prst="ellipse">
+                <a:avLst/>
+              </a:prstGeom>
+            </p:spPr>
+            <p:style>
+              <a:lnRef idx="2">
+                <a:schemeClr val="accent6">
+                  <a:shade val="15000"/>
+                </a:schemeClr>
+              </a:lnRef>
+              <a:fillRef idx="1">
+                <a:schemeClr val="accent6"/>
+              </a:fillRef>
+              <a:effectRef idx="0">
+                <a:schemeClr val="accent6"/>
+              </a:effectRef>
+              <a:fontRef idx="minor">
+                <a:schemeClr val="lt1"/>
+              </a:fontRef>
+            </p:style>
+            <p:txBody>
+              <a:bodyPr rtlCol="0" anchor="ctr"/>
+              <a:lstStyle/>
+              <a:p>
+                <a:pPr algn="ctr"/>
+                <a:endParaRPr lang="en-US"/>
+              </a:p>
+            </p:txBody>
+          </p:sp>
+          <p:sp>
+            <p:nvSpPr>
+              <p:cNvPr id="23" name="Oval 22">
+                <a:extLst>
+                  <a:ext uri="{FF2B5EF4-FFF2-40B4-BE49-F238E27FC236}">
+                    <a16:creationId xmlns:a16="http://schemas.microsoft.com/office/drawing/2014/main" id="{9711B356-C322-9A0F-23AA-24070E83601E}"/>
+                  </a:ext>
+                </a:extLst>
+              </p:cNvPr>
+              <p:cNvSpPr/>
+              <p:nvPr/>
+            </p:nvSpPr>
+            <p:spPr>
+              <a:xfrm>
+                <a:off x="5835942" y="4752949"/>
+                <a:ext cx="152400" cy="179456"/>
+              </a:xfrm>
+              <a:prstGeom prst="ellipse">
+                <a:avLst/>
+              </a:prstGeom>
+            </p:spPr>
+            <p:style>
+              <a:lnRef idx="2">
+                <a:schemeClr val="accent6">
+                  <a:shade val="15000"/>
+                </a:schemeClr>
+              </a:lnRef>
+              <a:fillRef idx="1">
+                <a:schemeClr val="accent6"/>
+              </a:fillRef>
+              <a:effectRef idx="0">
+                <a:schemeClr val="accent6"/>
+              </a:effectRef>
+              <a:fontRef idx="minor">
+                <a:schemeClr val="lt1"/>
+              </a:fontRef>
+            </p:style>
+            <p:txBody>
+              <a:bodyPr rtlCol="0" anchor="ctr"/>
+              <a:lstStyle/>
+              <a:p>
+                <a:pPr algn="ctr"/>
+                <a:endParaRPr lang="en-US"/>
+              </a:p>
+            </p:txBody>
+          </p:sp>
+          <p:sp>
+            <p:nvSpPr>
+              <p:cNvPr id="24" name="Oval 23">
+                <a:extLst>
+                  <a:ext uri="{FF2B5EF4-FFF2-40B4-BE49-F238E27FC236}">
+                    <a16:creationId xmlns:a16="http://schemas.microsoft.com/office/drawing/2014/main" id="{321E1B89-F118-CEDE-1ACF-AE210F91AD89}"/>
+                  </a:ext>
+                </a:extLst>
+              </p:cNvPr>
+              <p:cNvSpPr/>
+              <p:nvPr/>
+            </p:nvSpPr>
+            <p:spPr>
+              <a:xfrm>
+                <a:off x="5835942" y="5030693"/>
+                <a:ext cx="152400" cy="179456"/>
+              </a:xfrm>
+              <a:prstGeom prst="ellipse">
+                <a:avLst/>
+              </a:prstGeom>
+            </p:spPr>
+            <p:style>
+              <a:lnRef idx="2">
+                <a:schemeClr val="accent6">
+                  <a:shade val="15000"/>
+                </a:schemeClr>
+              </a:lnRef>
+              <a:fillRef idx="1">
+                <a:schemeClr val="accent6"/>
+              </a:fillRef>
+              <a:effectRef idx="0">
+                <a:schemeClr val="accent6"/>
+              </a:effectRef>
+              <a:fontRef idx="minor">
+                <a:schemeClr val="lt1"/>
+              </a:fontRef>
+            </p:style>
+            <p:txBody>
+              <a:bodyPr rtlCol="0" anchor="ctr"/>
+              <a:lstStyle/>
+              <a:p>
+                <a:pPr algn="ctr"/>
+                <a:endParaRPr lang="en-US"/>
+              </a:p>
+            </p:txBody>
+          </p:sp>
+          <p:sp>
+            <p:nvSpPr>
+              <p:cNvPr id="25" name="Oval 24">
+                <a:extLst>
+                  <a:ext uri="{FF2B5EF4-FFF2-40B4-BE49-F238E27FC236}">
+                    <a16:creationId xmlns:a16="http://schemas.microsoft.com/office/drawing/2014/main" id="{5F536921-5DB2-C484-80A6-5E9CF04774B8}"/>
+                  </a:ext>
+                </a:extLst>
+              </p:cNvPr>
+              <p:cNvSpPr/>
+              <p:nvPr/>
+            </p:nvSpPr>
+            <p:spPr>
+              <a:xfrm>
+                <a:off x="5835942" y="5335493"/>
+                <a:ext cx="152400" cy="179456"/>
+              </a:xfrm>
+              <a:prstGeom prst="ellipse">
+                <a:avLst/>
+              </a:prstGeom>
+            </p:spPr>
+            <p:style>
+              <a:lnRef idx="2">
+                <a:schemeClr val="accent6">
+                  <a:shade val="15000"/>
+                </a:schemeClr>
+              </a:lnRef>
+              <a:fillRef idx="1">
+                <a:schemeClr val="accent6"/>
+              </a:fillRef>
+              <a:effectRef idx="0">
+                <a:schemeClr val="accent6"/>
+              </a:effectRef>
+              <a:fontRef idx="minor">
+                <a:schemeClr val="lt1"/>
+              </a:fontRef>
+            </p:style>
+            <p:txBody>
+              <a:bodyPr rtlCol="0" anchor="ctr"/>
+              <a:lstStyle/>
+              <a:p>
+                <a:pPr algn="ctr"/>
+                <a:endParaRPr lang="en-US"/>
+              </a:p>
+            </p:txBody>
+          </p:sp>
+          <p:sp>
+            <p:nvSpPr>
+              <p:cNvPr id="26" name="Oval 25">
+                <a:extLst>
+                  <a:ext uri="{FF2B5EF4-FFF2-40B4-BE49-F238E27FC236}">
+                    <a16:creationId xmlns:a16="http://schemas.microsoft.com/office/drawing/2014/main" id="{476A5DB0-1825-8BF6-77D6-0FF244514DE9}"/>
+                  </a:ext>
+                </a:extLst>
+              </p:cNvPr>
+              <p:cNvSpPr/>
+              <p:nvPr/>
+            </p:nvSpPr>
+            <p:spPr>
+              <a:xfrm>
+                <a:off x="5835942" y="5640293"/>
+                <a:ext cx="152400" cy="179456"/>
+              </a:xfrm>
+              <a:prstGeom prst="ellipse">
+                <a:avLst/>
+              </a:prstGeom>
+            </p:spPr>
+            <p:style>
+              <a:lnRef idx="2">
+                <a:schemeClr val="accent6">
+                  <a:shade val="15000"/>
+                </a:schemeClr>
+              </a:lnRef>
+              <a:fillRef idx="1">
+                <a:schemeClr val="accent6"/>
+              </a:fillRef>
+              <a:effectRef idx="0">
+                <a:schemeClr val="accent6"/>
+              </a:effectRef>
+              <a:fontRef idx="minor">
+                <a:schemeClr val="lt1"/>
+              </a:fontRef>
+            </p:style>
+            <p:txBody>
+              <a:bodyPr rtlCol="0" anchor="ctr"/>
+              <a:lstStyle/>
+              <a:p>
+                <a:pPr algn="ctr"/>
+                <a:endParaRPr lang="en-US"/>
+              </a:p>
+            </p:txBody>
+          </p:sp>
+          <p:sp>
+            <p:nvSpPr>
+              <p:cNvPr id="27" name="Oval 26">
+                <a:extLst>
+                  <a:ext uri="{FF2B5EF4-FFF2-40B4-BE49-F238E27FC236}">
+                    <a16:creationId xmlns:a16="http://schemas.microsoft.com/office/drawing/2014/main" id="{260347EC-E155-6D6A-8B70-F0ED6F48A3E7}"/>
+                  </a:ext>
+                </a:extLst>
+              </p:cNvPr>
+              <p:cNvSpPr/>
+              <p:nvPr/>
+            </p:nvSpPr>
+            <p:spPr>
+              <a:xfrm>
+                <a:off x="4889892" y="5895174"/>
+                <a:ext cx="152400" cy="179456"/>
+              </a:xfrm>
+              <a:prstGeom prst="ellipse">
+                <a:avLst/>
+              </a:prstGeom>
+            </p:spPr>
+            <p:style>
+              <a:lnRef idx="2">
+                <a:schemeClr val="accent6">
+                  <a:shade val="15000"/>
+                </a:schemeClr>
+              </a:lnRef>
+              <a:fillRef idx="1">
+                <a:schemeClr val="accent6"/>
+              </a:fillRef>
+              <a:effectRef idx="0">
+                <a:schemeClr val="accent6"/>
+              </a:effectRef>
+              <a:fontRef idx="minor">
+                <a:schemeClr val="lt1"/>
+              </a:fontRef>
+            </p:style>
+            <p:txBody>
+              <a:bodyPr rtlCol="0" anchor="ctr"/>
+              <a:lstStyle/>
+              <a:p>
+                <a:pPr algn="ctr"/>
+                <a:endParaRPr lang="en-US"/>
+              </a:p>
+            </p:txBody>
+          </p:sp>
+          <p:sp>
+            <p:nvSpPr>
+              <p:cNvPr id="28" name="Oval 27">
+                <a:extLst>
+                  <a:ext uri="{FF2B5EF4-FFF2-40B4-BE49-F238E27FC236}">
+                    <a16:creationId xmlns:a16="http://schemas.microsoft.com/office/drawing/2014/main" id="{8A82D0AB-4B22-7144-C127-03639736A49C}"/>
+                  </a:ext>
+                </a:extLst>
+              </p:cNvPr>
+              <p:cNvSpPr/>
+              <p:nvPr/>
+            </p:nvSpPr>
+            <p:spPr>
+              <a:xfrm>
+                <a:off x="5347092" y="5742774"/>
+                <a:ext cx="152400" cy="179456"/>
+              </a:xfrm>
+              <a:prstGeom prst="ellipse">
+                <a:avLst/>
+              </a:prstGeom>
+            </p:spPr>
+            <p:style>
+              <a:lnRef idx="2">
+                <a:schemeClr val="accent6">
+                  <a:shade val="15000"/>
+                </a:schemeClr>
+              </a:lnRef>
+              <a:fillRef idx="1">
+                <a:schemeClr val="accent6"/>
+              </a:fillRef>
+              <a:effectRef idx="0">
+                <a:schemeClr val="accent6"/>
+              </a:effectRef>
+              <a:fontRef idx="minor">
+                <a:schemeClr val="lt1"/>
+              </a:fontRef>
+            </p:style>
+            <p:txBody>
+              <a:bodyPr rtlCol="0" anchor="ctr"/>
+              <a:lstStyle/>
+              <a:p>
+                <a:pPr algn="ctr"/>
+                <a:endParaRPr lang="en-US"/>
+              </a:p>
+            </p:txBody>
+          </p:sp>
+          <p:sp>
+            <p:nvSpPr>
+              <p:cNvPr id="29" name="Oval 28">
+                <a:extLst>
+                  <a:ext uri="{FF2B5EF4-FFF2-40B4-BE49-F238E27FC236}">
+                    <a16:creationId xmlns:a16="http://schemas.microsoft.com/office/drawing/2014/main" id="{D2F65F11-4D6B-FB28-45ED-118C8249D263}"/>
+                  </a:ext>
+                </a:extLst>
+              </p:cNvPr>
+              <p:cNvSpPr/>
+              <p:nvPr/>
+            </p:nvSpPr>
+            <p:spPr>
+              <a:xfrm>
+                <a:off x="5835942" y="5945093"/>
+                <a:ext cx="152400" cy="179456"/>
+              </a:xfrm>
+              <a:prstGeom prst="ellipse">
+                <a:avLst/>
+              </a:prstGeom>
+            </p:spPr>
+            <p:style>
+              <a:lnRef idx="2">
+                <a:schemeClr val="accent6">
+                  <a:shade val="15000"/>
+                </a:schemeClr>
+              </a:lnRef>
+              <a:fillRef idx="1">
+                <a:schemeClr val="accent6"/>
+              </a:fillRef>
+              <a:effectRef idx="0">
+                <a:schemeClr val="accent6"/>
+              </a:effectRef>
+              <a:fontRef idx="minor">
+                <a:schemeClr val="lt1"/>
+              </a:fontRef>
+            </p:style>
+            <p:txBody>
+              <a:bodyPr rtlCol="0" anchor="ctr"/>
+              <a:lstStyle/>
+              <a:p>
+                <a:pPr algn="ctr"/>
+                <a:endParaRPr lang="en-US"/>
+              </a:p>
+            </p:txBody>
+          </p:sp>
+          <p:cxnSp>
+            <p:nvCxnSpPr>
+              <p:cNvPr id="30" name="Straight Connector 29">
+                <a:extLst>
+                  <a:ext uri="{FF2B5EF4-FFF2-40B4-BE49-F238E27FC236}">
+                    <a16:creationId xmlns:a16="http://schemas.microsoft.com/office/drawing/2014/main" id="{27796F2B-63A7-0E97-6307-14CC5EC0C7EF}"/>
+                  </a:ext>
+                </a:extLst>
+              </p:cNvPr>
+              <p:cNvCxnSpPr>
+                <a:cxnSpLocks/>
+                <a:stCxn id="16" idx="6"/>
+                <a:endCxn id="20" idx="1"/>
+              </p:cNvCxnSpPr>
+              <p:nvPr/>
+            </p:nvCxnSpPr>
+            <p:spPr>
+              <a:xfrm>
+                <a:off x="5042292" y="4841902"/>
+                <a:ext cx="327118" cy="88953"/>
+              </a:xfrm>
+              <a:prstGeom prst="line">
+                <a:avLst/>
+              </a:prstGeom>
+            </p:spPr>
+            <p:style>
+              <a:lnRef idx="2">
+                <a:schemeClr val="accent6">
+                  <a:shade val="15000"/>
+                </a:schemeClr>
+              </a:lnRef>
+              <a:fillRef idx="1">
+                <a:schemeClr val="accent6"/>
+              </a:fillRef>
+              <a:effectRef idx="0">
+                <a:schemeClr val="accent6"/>
+              </a:effectRef>
+              <a:fontRef idx="minor">
+                <a:schemeClr val="lt1"/>
+              </a:fontRef>
+            </p:style>
+          </p:cxnSp>
+          <p:cxnSp>
+            <p:nvCxnSpPr>
+              <p:cNvPr id="31" name="Straight Connector 30">
+                <a:extLst>
+                  <a:ext uri="{FF2B5EF4-FFF2-40B4-BE49-F238E27FC236}">
+                    <a16:creationId xmlns:a16="http://schemas.microsoft.com/office/drawing/2014/main" id="{C3F73F8A-57DC-A45F-80D1-597D8D1E7A7C}"/>
+                  </a:ext>
+                </a:extLst>
+              </p:cNvPr>
+              <p:cNvCxnSpPr>
+                <a:cxnSpLocks/>
+                <a:stCxn id="17" idx="6"/>
+                <a:endCxn id="20" idx="2"/>
+              </p:cNvCxnSpPr>
+              <p:nvPr/>
+            </p:nvCxnSpPr>
+            <p:spPr>
+              <a:xfrm flipV="1">
+                <a:off x="5042292" y="4994302"/>
+                <a:ext cx="304800" cy="103256"/>
+              </a:xfrm>
+              <a:prstGeom prst="line">
+                <a:avLst/>
+              </a:prstGeom>
+            </p:spPr>
+            <p:style>
+              <a:lnRef idx="2">
+                <a:schemeClr val="accent6">
+                  <a:shade val="15000"/>
+                </a:schemeClr>
+              </a:lnRef>
+              <a:fillRef idx="1">
+                <a:schemeClr val="accent6"/>
+              </a:fillRef>
+              <a:effectRef idx="0">
+                <a:schemeClr val="accent6"/>
+              </a:effectRef>
+              <a:fontRef idx="minor">
+                <a:schemeClr val="lt1"/>
+              </a:fontRef>
+            </p:style>
+          </p:cxnSp>
+          <p:cxnSp>
+            <p:nvCxnSpPr>
+              <p:cNvPr id="32" name="Straight Connector 31">
+                <a:extLst>
+                  <a:ext uri="{FF2B5EF4-FFF2-40B4-BE49-F238E27FC236}">
+                    <a16:creationId xmlns:a16="http://schemas.microsoft.com/office/drawing/2014/main" id="{D5DB5C0F-C3BC-E7BF-2F36-26E6DF3833FB}"/>
+                  </a:ext>
+                </a:extLst>
+              </p:cNvPr>
+              <p:cNvCxnSpPr>
+                <a:cxnSpLocks/>
+                <a:stCxn id="18" idx="6"/>
+                <a:endCxn id="21" idx="2"/>
+              </p:cNvCxnSpPr>
+              <p:nvPr/>
+            </p:nvCxnSpPr>
+            <p:spPr>
+              <a:xfrm flipV="1">
+                <a:off x="5042292" y="5222902"/>
+                <a:ext cx="304800" cy="152400"/>
+              </a:xfrm>
+              <a:prstGeom prst="line">
+                <a:avLst/>
+              </a:prstGeom>
+            </p:spPr>
+            <p:style>
+              <a:lnRef idx="2">
+                <a:schemeClr val="accent6">
+                  <a:shade val="15000"/>
+                </a:schemeClr>
+              </a:lnRef>
+              <a:fillRef idx="1">
+                <a:schemeClr val="accent6"/>
+              </a:fillRef>
+              <a:effectRef idx="0">
+                <a:schemeClr val="accent6"/>
+              </a:effectRef>
+              <a:fontRef idx="minor">
+                <a:schemeClr val="lt1"/>
+              </a:fontRef>
+            </p:style>
+          </p:cxnSp>
+          <p:cxnSp>
+            <p:nvCxnSpPr>
+              <p:cNvPr id="33" name="Straight Connector 32">
+                <a:extLst>
+                  <a:ext uri="{FF2B5EF4-FFF2-40B4-BE49-F238E27FC236}">
+                    <a16:creationId xmlns:a16="http://schemas.microsoft.com/office/drawing/2014/main" id="{F39FF92C-6BBC-294B-AFCF-1E61772F3555}"/>
+                  </a:ext>
+                </a:extLst>
+              </p:cNvPr>
+              <p:cNvCxnSpPr>
+                <a:cxnSpLocks/>
+                <a:stCxn id="17" idx="6"/>
+                <a:endCxn id="21" idx="2"/>
+              </p:cNvCxnSpPr>
+              <p:nvPr/>
+            </p:nvCxnSpPr>
+            <p:spPr>
+              <a:xfrm>
+                <a:off x="5042292" y="5097558"/>
+                <a:ext cx="304800" cy="125344"/>
+              </a:xfrm>
+              <a:prstGeom prst="line">
+                <a:avLst/>
+              </a:prstGeom>
+            </p:spPr>
+            <p:style>
+              <a:lnRef idx="2">
+                <a:schemeClr val="accent6">
+                  <a:shade val="15000"/>
+                </a:schemeClr>
+              </a:lnRef>
+              <a:fillRef idx="1">
+                <a:schemeClr val="accent6"/>
+              </a:fillRef>
+              <a:effectRef idx="0">
+                <a:schemeClr val="accent6"/>
+              </a:effectRef>
+              <a:fontRef idx="minor">
+                <a:schemeClr val="lt1"/>
+              </a:fontRef>
+            </p:style>
+          </p:cxnSp>
+          <p:cxnSp>
+            <p:nvCxnSpPr>
+              <p:cNvPr id="34" name="Straight Connector 33">
+                <a:extLst>
+                  <a:ext uri="{FF2B5EF4-FFF2-40B4-BE49-F238E27FC236}">
+                    <a16:creationId xmlns:a16="http://schemas.microsoft.com/office/drawing/2014/main" id="{304B9364-CECA-C424-2C90-35A01CFD7A25}"/>
+                  </a:ext>
+                </a:extLst>
+              </p:cNvPr>
+              <p:cNvCxnSpPr>
+                <a:cxnSpLocks/>
+                <a:stCxn id="19" idx="6"/>
+                <a:endCxn id="22" idx="2"/>
+              </p:cNvCxnSpPr>
+              <p:nvPr/>
+            </p:nvCxnSpPr>
+            <p:spPr>
+              <a:xfrm flipV="1">
+                <a:off x="5042292" y="5527702"/>
+                <a:ext cx="304800" cy="152400"/>
+              </a:xfrm>
+              <a:prstGeom prst="line">
+                <a:avLst/>
+              </a:prstGeom>
+            </p:spPr>
+            <p:style>
+              <a:lnRef idx="2">
+                <a:schemeClr val="accent6">
+                  <a:shade val="15000"/>
+                </a:schemeClr>
+              </a:lnRef>
+              <a:fillRef idx="1">
+                <a:schemeClr val="accent6"/>
+              </a:fillRef>
+              <a:effectRef idx="0">
+                <a:schemeClr val="accent6"/>
+              </a:effectRef>
+              <a:fontRef idx="minor">
+                <a:schemeClr val="lt1"/>
+              </a:fontRef>
+            </p:style>
+          </p:cxnSp>
+          <p:cxnSp>
+            <p:nvCxnSpPr>
+              <p:cNvPr id="35" name="Straight Connector 34">
+                <a:extLst>
+                  <a:ext uri="{FF2B5EF4-FFF2-40B4-BE49-F238E27FC236}">
+                    <a16:creationId xmlns:a16="http://schemas.microsoft.com/office/drawing/2014/main" id="{BA59CCCC-0AE5-2C78-1EA0-C8E66CD0B57E}"/>
+                  </a:ext>
+                </a:extLst>
+              </p:cNvPr>
+              <p:cNvCxnSpPr>
+                <a:cxnSpLocks/>
+                <a:stCxn id="18" idx="6"/>
+                <a:endCxn id="22" idx="2"/>
+              </p:cNvCxnSpPr>
+              <p:nvPr/>
+            </p:nvCxnSpPr>
+            <p:spPr>
+              <a:xfrm>
+                <a:off x="5042293" y="5375303"/>
+                <a:ext cx="304800" cy="152400"/>
+              </a:xfrm>
+              <a:prstGeom prst="line">
+                <a:avLst/>
+              </a:prstGeom>
+            </p:spPr>
+            <p:style>
+              <a:lnRef idx="2">
+                <a:schemeClr val="accent6">
+                  <a:shade val="15000"/>
+                </a:schemeClr>
+              </a:lnRef>
+              <a:fillRef idx="1">
+                <a:schemeClr val="accent6"/>
+              </a:fillRef>
+              <a:effectRef idx="0">
+                <a:schemeClr val="accent6"/>
+              </a:effectRef>
+              <a:fontRef idx="minor">
+                <a:schemeClr val="lt1"/>
+              </a:fontRef>
+            </p:style>
+          </p:cxnSp>
+          <p:cxnSp>
+            <p:nvCxnSpPr>
+              <p:cNvPr id="36" name="Straight Connector 35">
+                <a:extLst>
+                  <a:ext uri="{FF2B5EF4-FFF2-40B4-BE49-F238E27FC236}">
+                    <a16:creationId xmlns:a16="http://schemas.microsoft.com/office/drawing/2014/main" id="{4A3D70BA-B5F3-FBDA-53EC-95B34536CA9D}"/>
+                  </a:ext>
+                </a:extLst>
+              </p:cNvPr>
+              <p:cNvCxnSpPr>
+                <a:cxnSpLocks/>
+                <a:stCxn id="19" idx="6"/>
+                <a:endCxn id="28" idx="2"/>
+              </p:cNvCxnSpPr>
+              <p:nvPr/>
+            </p:nvCxnSpPr>
+            <p:spPr>
+              <a:xfrm>
+                <a:off x="5042292" y="5680102"/>
+                <a:ext cx="304800" cy="152400"/>
+              </a:xfrm>
+              <a:prstGeom prst="line">
+                <a:avLst/>
+              </a:prstGeom>
+            </p:spPr>
+            <p:style>
+              <a:lnRef idx="2">
+                <a:schemeClr val="accent6">
+                  <a:shade val="15000"/>
+                </a:schemeClr>
+              </a:lnRef>
+              <a:fillRef idx="1">
+                <a:schemeClr val="accent6"/>
+              </a:fillRef>
+              <a:effectRef idx="0">
+                <a:schemeClr val="accent6"/>
+              </a:effectRef>
+              <a:fontRef idx="minor">
+                <a:schemeClr val="lt1"/>
+              </a:fontRef>
+            </p:style>
+          </p:cxnSp>
+          <p:cxnSp>
+            <p:nvCxnSpPr>
+              <p:cNvPr id="37" name="Straight Connector 36">
+                <a:extLst>
+                  <a:ext uri="{FF2B5EF4-FFF2-40B4-BE49-F238E27FC236}">
+                    <a16:creationId xmlns:a16="http://schemas.microsoft.com/office/drawing/2014/main" id="{34FC3790-1DF2-D828-D120-0BF4696D2466}"/>
+                  </a:ext>
+                </a:extLst>
+              </p:cNvPr>
+              <p:cNvCxnSpPr>
+                <a:cxnSpLocks/>
+                <a:stCxn id="27" idx="6"/>
+                <a:endCxn id="28" idx="2"/>
+              </p:cNvCxnSpPr>
+              <p:nvPr/>
+            </p:nvCxnSpPr>
+            <p:spPr>
+              <a:xfrm flipV="1">
+                <a:off x="5042292" y="5832502"/>
+                <a:ext cx="304800" cy="152400"/>
+              </a:xfrm>
+              <a:prstGeom prst="line">
+                <a:avLst/>
+              </a:prstGeom>
+            </p:spPr>
+            <p:style>
+              <a:lnRef idx="2">
+                <a:schemeClr val="accent6">
+                  <a:shade val="15000"/>
+                </a:schemeClr>
+              </a:lnRef>
+              <a:fillRef idx="1">
+                <a:schemeClr val="accent6"/>
+              </a:fillRef>
+              <a:effectRef idx="0">
+                <a:schemeClr val="accent6"/>
+              </a:effectRef>
+              <a:fontRef idx="minor">
+                <a:schemeClr val="lt1"/>
+              </a:fontRef>
+            </p:style>
+          </p:cxnSp>
+          <p:cxnSp>
+            <p:nvCxnSpPr>
+              <p:cNvPr id="38" name="Straight Connector 37">
+                <a:extLst>
+                  <a:ext uri="{FF2B5EF4-FFF2-40B4-BE49-F238E27FC236}">
+                    <a16:creationId xmlns:a16="http://schemas.microsoft.com/office/drawing/2014/main" id="{4B3FE80B-AAF9-65B2-6618-6FBA7687BD74}"/>
+                  </a:ext>
+                </a:extLst>
+              </p:cNvPr>
+              <p:cNvCxnSpPr>
+                <a:cxnSpLocks/>
+                <a:stCxn id="27" idx="6"/>
+                <a:endCxn id="22" idx="2"/>
+              </p:cNvCxnSpPr>
+              <p:nvPr/>
+            </p:nvCxnSpPr>
+            <p:spPr>
+              <a:xfrm flipV="1">
+                <a:off x="5042292" y="5527702"/>
+                <a:ext cx="304800" cy="457200"/>
+              </a:xfrm>
+              <a:prstGeom prst="line">
+                <a:avLst/>
+              </a:prstGeom>
+            </p:spPr>
+            <p:style>
+              <a:lnRef idx="2">
+                <a:schemeClr val="accent6">
+                  <a:shade val="15000"/>
+                </a:schemeClr>
+              </a:lnRef>
+              <a:fillRef idx="1">
+                <a:schemeClr val="accent6"/>
+              </a:fillRef>
+              <a:effectRef idx="0">
+                <a:schemeClr val="accent6"/>
+              </a:effectRef>
+              <a:fontRef idx="minor">
+                <a:schemeClr val="lt1"/>
+              </a:fontRef>
+            </p:style>
+          </p:cxnSp>
+          <p:cxnSp>
+            <p:nvCxnSpPr>
+              <p:cNvPr id="39" name="Straight Connector 38">
+                <a:extLst>
+                  <a:ext uri="{FF2B5EF4-FFF2-40B4-BE49-F238E27FC236}">
+                    <a16:creationId xmlns:a16="http://schemas.microsoft.com/office/drawing/2014/main" id="{60381267-2CEF-0E11-929C-DD78D5BF1536}"/>
+                  </a:ext>
+                </a:extLst>
+              </p:cNvPr>
+              <p:cNvCxnSpPr>
+                <a:cxnSpLocks/>
+                <a:stCxn id="19" idx="6"/>
+                <a:endCxn id="21" idx="3"/>
+              </p:cNvCxnSpPr>
+              <p:nvPr/>
+            </p:nvCxnSpPr>
+            <p:spPr>
+              <a:xfrm flipV="1">
+                <a:off x="5042292" y="5286349"/>
+                <a:ext cx="327118" cy="393753"/>
+              </a:xfrm>
+              <a:prstGeom prst="line">
+                <a:avLst/>
+              </a:prstGeom>
+            </p:spPr>
+            <p:style>
+              <a:lnRef idx="2">
+                <a:schemeClr val="accent6">
+                  <a:shade val="15000"/>
+                </a:schemeClr>
+              </a:lnRef>
+              <a:fillRef idx="1">
+                <a:schemeClr val="accent6"/>
+              </a:fillRef>
+              <a:effectRef idx="0">
+                <a:schemeClr val="accent6"/>
+              </a:effectRef>
+              <a:fontRef idx="minor">
+                <a:schemeClr val="lt1"/>
+              </a:fontRef>
+            </p:style>
+          </p:cxnSp>
+          <p:cxnSp>
+            <p:nvCxnSpPr>
+              <p:cNvPr id="40" name="Straight Connector 39">
+                <a:extLst>
+                  <a:ext uri="{FF2B5EF4-FFF2-40B4-BE49-F238E27FC236}">
+                    <a16:creationId xmlns:a16="http://schemas.microsoft.com/office/drawing/2014/main" id="{801AFF4B-B3F2-B01A-3B78-D854F556ACEC}"/>
+                  </a:ext>
+                </a:extLst>
+              </p:cNvPr>
+              <p:cNvCxnSpPr>
+                <a:cxnSpLocks/>
+                <a:stCxn id="18" idx="6"/>
+                <a:endCxn id="20" idx="3"/>
+              </p:cNvCxnSpPr>
+              <p:nvPr/>
+            </p:nvCxnSpPr>
+            <p:spPr>
+              <a:xfrm flipV="1">
+                <a:off x="5042292" y="5057749"/>
+                <a:ext cx="327118" cy="317553"/>
+              </a:xfrm>
+              <a:prstGeom prst="line">
+                <a:avLst/>
+              </a:prstGeom>
+            </p:spPr>
+            <p:style>
+              <a:lnRef idx="2">
+                <a:schemeClr val="accent6">
+                  <a:shade val="15000"/>
+                </a:schemeClr>
+              </a:lnRef>
+              <a:fillRef idx="1">
+                <a:schemeClr val="accent6"/>
+              </a:fillRef>
+              <a:effectRef idx="0">
+                <a:schemeClr val="accent6"/>
+              </a:effectRef>
+              <a:fontRef idx="minor">
+                <a:schemeClr val="lt1"/>
+              </a:fontRef>
+            </p:style>
+          </p:cxnSp>
+          <p:cxnSp>
+            <p:nvCxnSpPr>
+              <p:cNvPr id="41" name="Straight Connector 40">
+                <a:extLst>
+                  <a:ext uri="{FF2B5EF4-FFF2-40B4-BE49-F238E27FC236}">
+                    <a16:creationId xmlns:a16="http://schemas.microsoft.com/office/drawing/2014/main" id="{8559B934-D7F1-93EE-752D-3B2FFF4009A7}"/>
+                  </a:ext>
+                </a:extLst>
+              </p:cNvPr>
+              <p:cNvCxnSpPr>
+                <a:cxnSpLocks/>
+                <a:stCxn id="16" idx="6"/>
+                <a:endCxn id="21" idx="1"/>
+              </p:cNvCxnSpPr>
+              <p:nvPr/>
+            </p:nvCxnSpPr>
+            <p:spPr>
+              <a:xfrm>
+                <a:off x="5042292" y="4841902"/>
+                <a:ext cx="327118" cy="317553"/>
+              </a:xfrm>
+              <a:prstGeom prst="line">
+                <a:avLst/>
+              </a:prstGeom>
+            </p:spPr>
+            <p:style>
+              <a:lnRef idx="2">
+                <a:schemeClr val="accent6">
+                  <a:shade val="15000"/>
+                </a:schemeClr>
+              </a:lnRef>
+              <a:fillRef idx="1">
+                <a:schemeClr val="accent6"/>
+              </a:fillRef>
+              <a:effectRef idx="0">
+                <a:schemeClr val="accent6"/>
+              </a:effectRef>
+              <a:fontRef idx="minor">
+                <a:schemeClr val="lt1"/>
+              </a:fontRef>
+            </p:style>
+          </p:cxnSp>
+          <p:cxnSp>
+            <p:nvCxnSpPr>
+              <p:cNvPr id="42" name="Straight Connector 41">
+                <a:extLst>
+                  <a:ext uri="{FF2B5EF4-FFF2-40B4-BE49-F238E27FC236}">
+                    <a16:creationId xmlns:a16="http://schemas.microsoft.com/office/drawing/2014/main" id="{EBB7651F-3179-6134-080A-D638453A6BF9}"/>
+                  </a:ext>
+                </a:extLst>
+              </p:cNvPr>
+              <p:cNvCxnSpPr>
+                <a:cxnSpLocks/>
+                <a:stCxn id="18" idx="6"/>
+                <a:endCxn id="28" idx="2"/>
+              </p:cNvCxnSpPr>
+              <p:nvPr/>
+            </p:nvCxnSpPr>
+            <p:spPr>
+              <a:xfrm>
+                <a:off x="5042292" y="5375302"/>
+                <a:ext cx="304800" cy="457200"/>
+              </a:xfrm>
+              <a:prstGeom prst="line">
+                <a:avLst/>
+              </a:prstGeom>
+            </p:spPr>
+            <p:style>
+              <a:lnRef idx="2">
+                <a:schemeClr val="accent6">
+                  <a:shade val="15000"/>
+                </a:schemeClr>
+              </a:lnRef>
+              <a:fillRef idx="1">
+                <a:schemeClr val="accent6"/>
+              </a:fillRef>
+              <a:effectRef idx="0">
+                <a:schemeClr val="accent6"/>
+              </a:effectRef>
+              <a:fontRef idx="minor">
+                <a:schemeClr val="lt1"/>
+              </a:fontRef>
+            </p:style>
+          </p:cxnSp>
+          <p:cxnSp>
+            <p:nvCxnSpPr>
+              <p:cNvPr id="43" name="Straight Connector 42">
+                <a:extLst>
+                  <a:ext uri="{FF2B5EF4-FFF2-40B4-BE49-F238E27FC236}">
+                    <a16:creationId xmlns:a16="http://schemas.microsoft.com/office/drawing/2014/main" id="{97768FA7-7107-9EE3-4CF5-BED604BA12B4}"/>
+                  </a:ext>
+                </a:extLst>
+              </p:cNvPr>
+              <p:cNvCxnSpPr>
+                <a:cxnSpLocks/>
+                <a:stCxn id="20" idx="6"/>
+                <a:endCxn id="23" idx="2"/>
+              </p:cNvCxnSpPr>
+              <p:nvPr/>
+            </p:nvCxnSpPr>
+            <p:spPr>
+              <a:xfrm flipV="1">
+                <a:off x="5499492" y="4842677"/>
+                <a:ext cx="336450" cy="151625"/>
+              </a:xfrm>
+              <a:prstGeom prst="line">
+                <a:avLst/>
+              </a:prstGeom>
+            </p:spPr>
+            <p:style>
+              <a:lnRef idx="2">
+                <a:schemeClr val="accent6">
+                  <a:shade val="15000"/>
+                </a:schemeClr>
+              </a:lnRef>
+              <a:fillRef idx="1">
+                <a:schemeClr val="accent6"/>
+              </a:fillRef>
+              <a:effectRef idx="0">
+                <a:schemeClr val="accent6"/>
+              </a:effectRef>
+              <a:fontRef idx="minor">
+                <a:schemeClr val="lt1"/>
+              </a:fontRef>
+            </p:style>
+          </p:cxnSp>
+          <p:cxnSp>
+            <p:nvCxnSpPr>
+              <p:cNvPr id="44" name="Straight Connector 43">
+                <a:extLst>
+                  <a:ext uri="{FF2B5EF4-FFF2-40B4-BE49-F238E27FC236}">
+                    <a16:creationId xmlns:a16="http://schemas.microsoft.com/office/drawing/2014/main" id="{095E9CCD-ABC3-13F9-ECC9-827AF855E2C0}"/>
+                  </a:ext>
+                </a:extLst>
+              </p:cNvPr>
+              <p:cNvCxnSpPr>
+                <a:cxnSpLocks/>
+                <a:stCxn id="21" idx="6"/>
+                <a:endCxn id="23" idx="2"/>
+              </p:cNvCxnSpPr>
+              <p:nvPr/>
+            </p:nvCxnSpPr>
+            <p:spPr>
+              <a:xfrm flipV="1">
+                <a:off x="5499492" y="4842677"/>
+                <a:ext cx="336450" cy="380225"/>
+              </a:xfrm>
+              <a:prstGeom prst="line">
+                <a:avLst/>
+              </a:prstGeom>
+            </p:spPr>
+            <p:style>
+              <a:lnRef idx="2">
+                <a:schemeClr val="accent6">
+                  <a:shade val="15000"/>
+                </a:schemeClr>
+              </a:lnRef>
+              <a:fillRef idx="1">
+                <a:schemeClr val="accent6"/>
+              </a:fillRef>
+              <a:effectRef idx="0">
+                <a:schemeClr val="accent6"/>
+              </a:effectRef>
+              <a:fontRef idx="minor">
+                <a:schemeClr val="lt1"/>
+              </a:fontRef>
+            </p:style>
+          </p:cxnSp>
+          <p:cxnSp>
+            <p:nvCxnSpPr>
+              <p:cNvPr id="45" name="Straight Connector 44">
+                <a:extLst>
+                  <a:ext uri="{FF2B5EF4-FFF2-40B4-BE49-F238E27FC236}">
+                    <a16:creationId xmlns:a16="http://schemas.microsoft.com/office/drawing/2014/main" id="{422BC3BC-0F09-E9C3-3E7B-7A68129217BF}"/>
+                  </a:ext>
+                </a:extLst>
+              </p:cNvPr>
+              <p:cNvCxnSpPr>
+                <a:cxnSpLocks/>
+                <a:stCxn id="22" idx="6"/>
+                <a:endCxn id="24" idx="2"/>
+              </p:cNvCxnSpPr>
+              <p:nvPr/>
+            </p:nvCxnSpPr>
+            <p:spPr>
+              <a:xfrm flipV="1">
+                <a:off x="5499492" y="5120421"/>
+                <a:ext cx="336450" cy="407281"/>
+              </a:xfrm>
+              <a:prstGeom prst="line">
+                <a:avLst/>
+              </a:prstGeom>
+            </p:spPr>
+            <p:style>
+              <a:lnRef idx="2">
+                <a:schemeClr val="accent6">
+                  <a:shade val="15000"/>
+                </a:schemeClr>
+              </a:lnRef>
+              <a:fillRef idx="1">
+                <a:schemeClr val="accent6"/>
+              </a:fillRef>
+              <a:effectRef idx="0">
+                <a:schemeClr val="accent6"/>
+              </a:effectRef>
+              <a:fontRef idx="minor">
+                <a:schemeClr val="lt1"/>
+              </a:fontRef>
+            </p:style>
+          </p:cxnSp>
+          <p:cxnSp>
+            <p:nvCxnSpPr>
+              <p:cNvPr id="46" name="Straight Connector 45">
+                <a:extLst>
+                  <a:ext uri="{FF2B5EF4-FFF2-40B4-BE49-F238E27FC236}">
+                    <a16:creationId xmlns:a16="http://schemas.microsoft.com/office/drawing/2014/main" id="{4CF7CFB2-1A13-84D6-B350-16A20A15ABE7}"/>
+                  </a:ext>
+                </a:extLst>
+              </p:cNvPr>
+              <p:cNvCxnSpPr>
+                <a:cxnSpLocks/>
+                <a:stCxn id="28" idx="6"/>
+                <a:endCxn id="25" idx="2"/>
+              </p:cNvCxnSpPr>
+              <p:nvPr/>
+            </p:nvCxnSpPr>
+            <p:spPr>
+              <a:xfrm flipV="1">
+                <a:off x="5499492" y="5425221"/>
+                <a:ext cx="336450" cy="407281"/>
+              </a:xfrm>
+              <a:prstGeom prst="line">
+                <a:avLst/>
+              </a:prstGeom>
+            </p:spPr>
+            <p:style>
+              <a:lnRef idx="2">
+                <a:schemeClr val="accent6">
+                  <a:shade val="15000"/>
+                </a:schemeClr>
+              </a:lnRef>
+              <a:fillRef idx="1">
+                <a:schemeClr val="accent6"/>
+              </a:fillRef>
+              <a:effectRef idx="0">
+                <a:schemeClr val="accent6"/>
+              </a:effectRef>
+              <a:fontRef idx="minor">
+                <a:schemeClr val="lt1"/>
+              </a:fontRef>
+            </p:style>
+          </p:cxnSp>
+          <p:cxnSp>
+            <p:nvCxnSpPr>
+              <p:cNvPr id="47" name="Straight Connector 46">
+                <a:extLst>
+                  <a:ext uri="{FF2B5EF4-FFF2-40B4-BE49-F238E27FC236}">
+                    <a16:creationId xmlns:a16="http://schemas.microsoft.com/office/drawing/2014/main" id="{08E1EA95-D224-CC1B-A05D-B02B7F97D75D}"/>
+                  </a:ext>
+                </a:extLst>
+              </p:cNvPr>
+              <p:cNvCxnSpPr>
+                <a:cxnSpLocks/>
+                <a:stCxn id="28" idx="6"/>
+                <a:endCxn id="29" idx="1"/>
+              </p:cNvCxnSpPr>
+              <p:nvPr/>
+            </p:nvCxnSpPr>
+            <p:spPr>
+              <a:xfrm>
+                <a:off x="5499492" y="5832502"/>
+                <a:ext cx="358768" cy="138872"/>
+              </a:xfrm>
+              <a:prstGeom prst="line">
+                <a:avLst/>
+              </a:prstGeom>
+            </p:spPr>
+            <p:style>
+              <a:lnRef idx="2">
+                <a:schemeClr val="accent6">
+                  <a:shade val="15000"/>
+                </a:schemeClr>
+              </a:lnRef>
+              <a:fillRef idx="1">
+                <a:schemeClr val="accent6"/>
+              </a:fillRef>
+              <a:effectRef idx="0">
+                <a:schemeClr val="accent6"/>
+              </a:effectRef>
+              <a:fontRef idx="minor">
+                <a:schemeClr val="lt1"/>
+              </a:fontRef>
+            </p:style>
+          </p:cxnSp>
+          <p:cxnSp>
+            <p:nvCxnSpPr>
+              <p:cNvPr id="48" name="Straight Connector 47">
+                <a:extLst>
+                  <a:ext uri="{FF2B5EF4-FFF2-40B4-BE49-F238E27FC236}">
+                    <a16:creationId xmlns:a16="http://schemas.microsoft.com/office/drawing/2014/main" id="{0188BEB8-B6D3-254E-9973-3B815ECA03F5}"/>
+                  </a:ext>
+                </a:extLst>
+              </p:cNvPr>
+              <p:cNvCxnSpPr>
+                <a:cxnSpLocks/>
+                <a:stCxn id="28" idx="6"/>
+                <a:endCxn id="26" idx="2"/>
+              </p:cNvCxnSpPr>
+              <p:nvPr/>
+            </p:nvCxnSpPr>
+            <p:spPr>
+              <a:xfrm flipV="1">
+                <a:off x="5499492" y="5730021"/>
+                <a:ext cx="336450" cy="102481"/>
+              </a:xfrm>
+              <a:prstGeom prst="line">
+                <a:avLst/>
+              </a:prstGeom>
+            </p:spPr>
+            <p:style>
+              <a:lnRef idx="2">
+                <a:schemeClr val="accent6">
+                  <a:shade val="15000"/>
+                </a:schemeClr>
+              </a:lnRef>
+              <a:fillRef idx="1">
+                <a:schemeClr val="accent6"/>
+              </a:fillRef>
+              <a:effectRef idx="0">
+                <a:schemeClr val="accent6"/>
+              </a:effectRef>
+              <a:fontRef idx="minor">
+                <a:schemeClr val="lt1"/>
+              </a:fontRef>
+            </p:style>
+          </p:cxnSp>
+          <p:cxnSp>
+            <p:nvCxnSpPr>
+              <p:cNvPr id="49" name="Straight Connector 48">
+                <a:extLst>
+                  <a:ext uri="{FF2B5EF4-FFF2-40B4-BE49-F238E27FC236}">
+                    <a16:creationId xmlns:a16="http://schemas.microsoft.com/office/drawing/2014/main" id="{1D17DFB6-AA71-8F68-FF79-EC751F089E90}"/>
+                  </a:ext>
+                </a:extLst>
+              </p:cNvPr>
+              <p:cNvCxnSpPr>
+                <a:cxnSpLocks/>
+                <a:stCxn id="22" idx="6"/>
+                <a:endCxn id="25" idx="2"/>
+              </p:cNvCxnSpPr>
+              <p:nvPr/>
+            </p:nvCxnSpPr>
+            <p:spPr>
+              <a:xfrm flipV="1">
+                <a:off x="5499492" y="5425221"/>
+                <a:ext cx="336450" cy="102481"/>
+              </a:xfrm>
+              <a:prstGeom prst="line">
+                <a:avLst/>
+              </a:prstGeom>
+            </p:spPr>
+            <p:style>
+              <a:lnRef idx="2">
+                <a:schemeClr val="accent6">
+                  <a:shade val="15000"/>
+                </a:schemeClr>
+              </a:lnRef>
+              <a:fillRef idx="1">
+                <a:schemeClr val="accent6"/>
+              </a:fillRef>
+              <a:effectRef idx="0">
+                <a:schemeClr val="accent6"/>
+              </a:effectRef>
+              <a:fontRef idx="minor">
+                <a:schemeClr val="lt1"/>
+              </a:fontRef>
+            </p:style>
+          </p:cxnSp>
+          <p:cxnSp>
+            <p:nvCxnSpPr>
+              <p:cNvPr id="50" name="Straight Connector 49">
+                <a:extLst>
+                  <a:ext uri="{FF2B5EF4-FFF2-40B4-BE49-F238E27FC236}">
+                    <a16:creationId xmlns:a16="http://schemas.microsoft.com/office/drawing/2014/main" id="{78F68341-3125-C0C0-1673-D12F007B60CC}"/>
+                  </a:ext>
+                </a:extLst>
+              </p:cNvPr>
+              <p:cNvCxnSpPr>
+                <a:cxnSpLocks/>
+                <a:stCxn id="20" idx="6"/>
+                <a:endCxn id="24" idx="2"/>
+              </p:cNvCxnSpPr>
+              <p:nvPr/>
+            </p:nvCxnSpPr>
+            <p:spPr>
+              <a:xfrm>
+                <a:off x="5499493" y="4994303"/>
+                <a:ext cx="336449" cy="126119"/>
+              </a:xfrm>
+              <a:prstGeom prst="line">
+                <a:avLst/>
+              </a:prstGeom>
+            </p:spPr>
+            <p:style>
+              <a:lnRef idx="2">
+                <a:schemeClr val="accent6">
+                  <a:shade val="15000"/>
+                </a:schemeClr>
+              </a:lnRef>
+              <a:fillRef idx="1">
+                <a:schemeClr val="accent6"/>
+              </a:fillRef>
+              <a:effectRef idx="0">
+                <a:schemeClr val="accent6"/>
+              </a:effectRef>
+              <a:fontRef idx="minor">
+                <a:schemeClr val="lt1"/>
+              </a:fontRef>
+            </p:style>
+          </p:cxnSp>
+          <p:cxnSp>
+            <p:nvCxnSpPr>
+              <p:cNvPr id="51" name="Straight Connector 50">
+                <a:extLst>
+                  <a:ext uri="{FF2B5EF4-FFF2-40B4-BE49-F238E27FC236}">
+                    <a16:creationId xmlns:a16="http://schemas.microsoft.com/office/drawing/2014/main" id="{7A57FBA7-07FD-305A-4785-EA97B8F9368A}"/>
+                  </a:ext>
+                </a:extLst>
+              </p:cNvPr>
+              <p:cNvCxnSpPr>
+                <a:cxnSpLocks/>
+                <a:stCxn id="21" idx="6"/>
+                <a:endCxn id="25" idx="2"/>
+              </p:cNvCxnSpPr>
+              <p:nvPr/>
+            </p:nvCxnSpPr>
+            <p:spPr>
+              <a:xfrm>
+                <a:off x="5499492" y="5222902"/>
+                <a:ext cx="336450" cy="202319"/>
+              </a:xfrm>
+              <a:prstGeom prst="line">
+                <a:avLst/>
+              </a:prstGeom>
+            </p:spPr>
+            <p:style>
+              <a:lnRef idx="2">
+                <a:schemeClr val="accent6">
+                  <a:shade val="15000"/>
+                </a:schemeClr>
+              </a:lnRef>
+              <a:fillRef idx="1">
+                <a:schemeClr val="accent6"/>
+              </a:fillRef>
+              <a:effectRef idx="0">
+                <a:schemeClr val="accent6"/>
+              </a:effectRef>
+              <a:fontRef idx="minor">
+                <a:schemeClr val="lt1"/>
+              </a:fontRef>
+            </p:style>
+          </p:cxnSp>
+          <p:cxnSp>
+            <p:nvCxnSpPr>
+              <p:cNvPr id="52" name="Straight Connector 51">
+                <a:extLst>
+                  <a:ext uri="{FF2B5EF4-FFF2-40B4-BE49-F238E27FC236}">
+                    <a16:creationId xmlns:a16="http://schemas.microsoft.com/office/drawing/2014/main" id="{98003135-66B0-AD7D-0DA6-5196EE358797}"/>
+                  </a:ext>
+                </a:extLst>
+              </p:cNvPr>
+              <p:cNvCxnSpPr>
+                <a:cxnSpLocks/>
+                <a:stCxn id="22" idx="6"/>
+                <a:endCxn id="26" idx="2"/>
+              </p:cNvCxnSpPr>
+              <p:nvPr/>
+            </p:nvCxnSpPr>
+            <p:spPr>
+              <a:xfrm>
+                <a:off x="5499492" y="5527702"/>
+                <a:ext cx="336450" cy="202319"/>
+              </a:xfrm>
+              <a:prstGeom prst="line">
+                <a:avLst/>
+              </a:prstGeom>
+            </p:spPr>
+            <p:style>
+              <a:lnRef idx="2">
+                <a:schemeClr val="accent6">
+                  <a:shade val="15000"/>
+                </a:schemeClr>
+              </a:lnRef>
+              <a:fillRef idx="1">
+                <a:schemeClr val="accent6"/>
+              </a:fillRef>
+              <a:effectRef idx="0">
+                <a:schemeClr val="accent6"/>
+              </a:effectRef>
+              <a:fontRef idx="minor">
+                <a:schemeClr val="lt1"/>
+              </a:fontRef>
+            </p:style>
+          </p:cxnSp>
+          <p:cxnSp>
+            <p:nvCxnSpPr>
+              <p:cNvPr id="53" name="Straight Connector 52">
+                <a:extLst>
+                  <a:ext uri="{FF2B5EF4-FFF2-40B4-BE49-F238E27FC236}">
+                    <a16:creationId xmlns:a16="http://schemas.microsoft.com/office/drawing/2014/main" id="{6C7D412B-882B-04FD-338F-41824C21705E}"/>
+                  </a:ext>
+                </a:extLst>
+              </p:cNvPr>
+              <p:cNvCxnSpPr>
+                <a:cxnSpLocks/>
+                <a:stCxn id="20" idx="6"/>
+                <a:endCxn id="25" idx="2"/>
+              </p:cNvCxnSpPr>
+              <p:nvPr/>
+            </p:nvCxnSpPr>
+            <p:spPr>
+              <a:xfrm>
+                <a:off x="5499492" y="4994302"/>
+                <a:ext cx="336450" cy="430919"/>
+              </a:xfrm>
+              <a:prstGeom prst="line">
+                <a:avLst/>
+              </a:prstGeom>
+            </p:spPr>
+            <p:style>
+              <a:lnRef idx="2">
+                <a:schemeClr val="accent6">
+                  <a:shade val="15000"/>
+                </a:schemeClr>
+              </a:lnRef>
+              <a:fillRef idx="1">
+                <a:schemeClr val="accent6"/>
+              </a:fillRef>
+              <a:effectRef idx="0">
+                <a:schemeClr val="accent6"/>
+              </a:effectRef>
+              <a:fontRef idx="minor">
+                <a:schemeClr val="lt1"/>
+              </a:fontRef>
+            </p:style>
+          </p:cxnSp>
+          <p:cxnSp>
+            <p:nvCxnSpPr>
+              <p:cNvPr id="54" name="Straight Connector 53">
+                <a:extLst>
+                  <a:ext uri="{FF2B5EF4-FFF2-40B4-BE49-F238E27FC236}">
+                    <a16:creationId xmlns:a16="http://schemas.microsoft.com/office/drawing/2014/main" id="{F55FE66B-71A4-C4B6-21FA-2A6C559C0915}"/>
+                  </a:ext>
+                </a:extLst>
+              </p:cNvPr>
+              <p:cNvCxnSpPr>
+                <a:cxnSpLocks/>
+                <a:stCxn id="22" idx="6"/>
+                <a:endCxn id="23" idx="2"/>
+              </p:cNvCxnSpPr>
+              <p:nvPr/>
+            </p:nvCxnSpPr>
+            <p:spPr>
+              <a:xfrm flipV="1">
+                <a:off x="5499492" y="4842677"/>
+                <a:ext cx="336450" cy="685025"/>
+              </a:xfrm>
+              <a:prstGeom prst="line">
+                <a:avLst/>
+              </a:prstGeom>
+            </p:spPr>
+            <p:style>
+              <a:lnRef idx="2">
+                <a:schemeClr val="accent6">
+                  <a:shade val="15000"/>
+                </a:schemeClr>
+              </a:lnRef>
+              <a:fillRef idx="1">
+                <a:schemeClr val="accent6"/>
+              </a:fillRef>
+              <a:effectRef idx="0">
+                <a:schemeClr val="accent6"/>
+              </a:effectRef>
+              <a:fontRef idx="minor">
+                <a:schemeClr val="lt1"/>
+              </a:fontRef>
+            </p:style>
+          </p:cxnSp>
+          <p:cxnSp>
+            <p:nvCxnSpPr>
+              <p:cNvPr id="55" name="Straight Connector 54">
+                <a:extLst>
+                  <a:ext uri="{FF2B5EF4-FFF2-40B4-BE49-F238E27FC236}">
+                    <a16:creationId xmlns:a16="http://schemas.microsoft.com/office/drawing/2014/main" id="{E6E60BE8-2F9D-83F8-D75B-9A56A6804C1F}"/>
+                  </a:ext>
+                </a:extLst>
+              </p:cNvPr>
+              <p:cNvCxnSpPr>
+                <a:cxnSpLocks/>
+                <a:stCxn id="22" idx="6"/>
+                <a:endCxn id="29" idx="1"/>
+              </p:cNvCxnSpPr>
+              <p:nvPr/>
+            </p:nvCxnSpPr>
+            <p:spPr>
+              <a:xfrm>
+                <a:off x="5499492" y="5527702"/>
+                <a:ext cx="358768" cy="443672"/>
+              </a:xfrm>
+              <a:prstGeom prst="line">
+                <a:avLst/>
+              </a:prstGeom>
+            </p:spPr>
+            <p:style>
+              <a:lnRef idx="2">
+                <a:schemeClr val="accent6">
+                  <a:shade val="15000"/>
+                </a:schemeClr>
+              </a:lnRef>
+              <a:fillRef idx="1">
+                <a:schemeClr val="accent6"/>
+              </a:fillRef>
+              <a:effectRef idx="0">
+                <a:schemeClr val="accent6"/>
+              </a:effectRef>
+              <a:fontRef idx="minor">
+                <a:schemeClr val="lt1"/>
+              </a:fontRef>
+            </p:style>
+          </p:cxnSp>
+          <p:cxnSp>
+            <p:nvCxnSpPr>
+              <p:cNvPr id="56" name="Straight Connector 55">
+                <a:extLst>
+                  <a:ext uri="{FF2B5EF4-FFF2-40B4-BE49-F238E27FC236}">
+                    <a16:creationId xmlns:a16="http://schemas.microsoft.com/office/drawing/2014/main" id="{50DCD506-4009-4481-F793-B6A53AE2C895}"/>
+                  </a:ext>
+                </a:extLst>
+              </p:cNvPr>
+              <p:cNvCxnSpPr>
+                <a:cxnSpLocks/>
+                <a:stCxn id="28" idx="6"/>
+                <a:endCxn id="24" idx="2"/>
+              </p:cNvCxnSpPr>
+              <p:nvPr/>
+            </p:nvCxnSpPr>
+            <p:spPr>
+              <a:xfrm flipV="1">
+                <a:off x="5499492" y="5120421"/>
+                <a:ext cx="336450" cy="712081"/>
+              </a:xfrm>
+              <a:prstGeom prst="line">
+                <a:avLst/>
+              </a:prstGeom>
+            </p:spPr>
+            <p:style>
+              <a:lnRef idx="2">
+                <a:schemeClr val="accent6">
+                  <a:shade val="15000"/>
+                </a:schemeClr>
+              </a:lnRef>
+              <a:fillRef idx="1">
+                <a:schemeClr val="accent6"/>
+              </a:fillRef>
+              <a:effectRef idx="0">
+                <a:schemeClr val="accent6"/>
+              </a:effectRef>
+              <a:fontRef idx="minor">
+                <a:schemeClr val="lt1"/>
+              </a:fontRef>
+            </p:style>
+          </p:cxnSp>
+          <p:sp>
+            <p:nvSpPr>
+              <p:cNvPr id="57" name="Oval 56">
+                <a:extLst>
+                  <a:ext uri="{FF2B5EF4-FFF2-40B4-BE49-F238E27FC236}">
+                    <a16:creationId xmlns:a16="http://schemas.microsoft.com/office/drawing/2014/main" id="{00C28748-FF53-E351-27D0-0D444FD49688}"/>
+                  </a:ext>
+                </a:extLst>
+              </p:cNvPr>
+              <p:cNvSpPr/>
+              <p:nvPr/>
+            </p:nvSpPr>
+            <p:spPr>
+              <a:xfrm>
+                <a:off x="4410942" y="4599774"/>
+                <a:ext cx="152400" cy="179456"/>
+              </a:xfrm>
+              <a:prstGeom prst="ellipse">
+                <a:avLst/>
+              </a:prstGeom>
+            </p:spPr>
+            <p:style>
+              <a:lnRef idx="2">
+                <a:schemeClr val="accent6">
+                  <a:shade val="15000"/>
+                </a:schemeClr>
+              </a:lnRef>
+              <a:fillRef idx="1">
+                <a:schemeClr val="accent6"/>
+              </a:fillRef>
+              <a:effectRef idx="0">
+                <a:schemeClr val="accent6"/>
+              </a:effectRef>
+              <a:fontRef idx="minor">
+                <a:schemeClr val="lt1"/>
+              </a:fontRef>
+            </p:style>
+            <p:txBody>
+              <a:bodyPr rtlCol="0" anchor="ctr"/>
+              <a:lstStyle/>
+              <a:p>
+                <a:pPr algn="ctr"/>
+                <a:endParaRPr lang="en-US"/>
+              </a:p>
+            </p:txBody>
+          </p:sp>
+          <p:sp>
+            <p:nvSpPr>
+              <p:cNvPr id="58" name="Oval 57">
+                <a:extLst>
+                  <a:ext uri="{FF2B5EF4-FFF2-40B4-BE49-F238E27FC236}">
+                    <a16:creationId xmlns:a16="http://schemas.microsoft.com/office/drawing/2014/main" id="{4A8D2B5D-45F5-3DA8-8B01-D6A7AF787EC4}"/>
+                  </a:ext>
+                </a:extLst>
+              </p:cNvPr>
+              <p:cNvSpPr/>
+              <p:nvPr/>
+            </p:nvSpPr>
+            <p:spPr>
+              <a:xfrm>
+                <a:off x="4410942" y="4855430"/>
+                <a:ext cx="152400" cy="179456"/>
+              </a:xfrm>
+              <a:prstGeom prst="ellipse">
+                <a:avLst/>
+              </a:prstGeom>
+            </p:spPr>
+            <p:style>
+              <a:lnRef idx="2">
+                <a:schemeClr val="accent6">
+                  <a:shade val="15000"/>
+                </a:schemeClr>
+              </a:lnRef>
+              <a:fillRef idx="1">
+                <a:schemeClr val="accent6"/>
+              </a:fillRef>
+              <a:effectRef idx="0">
+                <a:schemeClr val="accent6"/>
+              </a:effectRef>
+              <a:fontRef idx="minor">
+                <a:schemeClr val="lt1"/>
+              </a:fontRef>
+            </p:style>
+            <p:txBody>
+              <a:bodyPr rtlCol="0" anchor="ctr"/>
+              <a:lstStyle/>
+              <a:p>
+                <a:pPr algn="ctr"/>
+                <a:endParaRPr lang="en-US"/>
+              </a:p>
+            </p:txBody>
+          </p:sp>
+          <p:sp>
+            <p:nvSpPr>
+              <p:cNvPr id="59" name="Oval 58">
+                <a:extLst>
+                  <a:ext uri="{FF2B5EF4-FFF2-40B4-BE49-F238E27FC236}">
+                    <a16:creationId xmlns:a16="http://schemas.microsoft.com/office/drawing/2014/main" id="{61340BA5-0FA4-2B48-A20F-446C4E67EFA9}"/>
+                  </a:ext>
+                </a:extLst>
+              </p:cNvPr>
+              <p:cNvSpPr/>
+              <p:nvPr/>
+            </p:nvSpPr>
+            <p:spPr>
+              <a:xfrm>
+                <a:off x="4410942" y="5133174"/>
+                <a:ext cx="152400" cy="179456"/>
+              </a:xfrm>
+              <a:prstGeom prst="ellipse">
+                <a:avLst/>
+              </a:prstGeom>
+            </p:spPr>
+            <p:style>
+              <a:lnRef idx="2">
+                <a:schemeClr val="accent6">
+                  <a:shade val="15000"/>
+                </a:schemeClr>
+              </a:lnRef>
+              <a:fillRef idx="1">
+                <a:schemeClr val="accent6"/>
+              </a:fillRef>
+              <a:effectRef idx="0">
+                <a:schemeClr val="accent6"/>
+              </a:effectRef>
+              <a:fontRef idx="minor">
+                <a:schemeClr val="lt1"/>
+              </a:fontRef>
+            </p:style>
+            <p:txBody>
+              <a:bodyPr rtlCol="0" anchor="ctr"/>
+              <a:lstStyle/>
+              <a:p>
+                <a:pPr algn="ctr"/>
+                <a:endParaRPr lang="en-US"/>
+              </a:p>
+            </p:txBody>
+          </p:sp>
+          <p:sp>
+            <p:nvSpPr>
+              <p:cNvPr id="60" name="Oval 59">
+                <a:extLst>
+                  <a:ext uri="{FF2B5EF4-FFF2-40B4-BE49-F238E27FC236}">
+                    <a16:creationId xmlns:a16="http://schemas.microsoft.com/office/drawing/2014/main" id="{01F66A9F-4E4A-C01B-AEE5-737E36093FA6}"/>
+                  </a:ext>
+                </a:extLst>
+              </p:cNvPr>
+              <p:cNvSpPr/>
+              <p:nvPr/>
+            </p:nvSpPr>
+            <p:spPr>
+              <a:xfrm>
+                <a:off x="4410942" y="5437974"/>
+                <a:ext cx="152400" cy="179456"/>
+              </a:xfrm>
+              <a:prstGeom prst="ellipse">
+                <a:avLst/>
+              </a:prstGeom>
+            </p:spPr>
+            <p:style>
+              <a:lnRef idx="2">
+                <a:schemeClr val="accent6">
+                  <a:shade val="15000"/>
+                </a:schemeClr>
+              </a:lnRef>
+              <a:fillRef idx="1">
+                <a:schemeClr val="accent6"/>
+              </a:fillRef>
+              <a:effectRef idx="0">
+                <a:schemeClr val="accent6"/>
+              </a:effectRef>
+              <a:fontRef idx="minor">
+                <a:schemeClr val="lt1"/>
+              </a:fontRef>
+            </p:style>
+            <p:txBody>
+              <a:bodyPr rtlCol="0" anchor="ctr"/>
+              <a:lstStyle/>
+              <a:p>
+                <a:pPr algn="ctr"/>
+                <a:endParaRPr lang="en-US"/>
+              </a:p>
+            </p:txBody>
+          </p:sp>
+          <p:sp>
+            <p:nvSpPr>
+              <p:cNvPr id="61" name="Oval 60">
+                <a:extLst>
+                  <a:ext uri="{FF2B5EF4-FFF2-40B4-BE49-F238E27FC236}">
+                    <a16:creationId xmlns:a16="http://schemas.microsoft.com/office/drawing/2014/main" id="{314720C6-6CE3-C5D5-F9DE-FABFCB0C5D7B}"/>
+                  </a:ext>
+                </a:extLst>
+              </p:cNvPr>
+              <p:cNvSpPr/>
+              <p:nvPr/>
+            </p:nvSpPr>
+            <p:spPr>
+              <a:xfrm>
+                <a:off x="4410942" y="5742774"/>
+                <a:ext cx="152400" cy="179456"/>
+              </a:xfrm>
+              <a:prstGeom prst="ellipse">
+                <a:avLst/>
+              </a:prstGeom>
+            </p:spPr>
+            <p:style>
+              <a:lnRef idx="2">
+                <a:schemeClr val="accent6">
+                  <a:shade val="15000"/>
+                </a:schemeClr>
+              </a:lnRef>
+              <a:fillRef idx="1">
+                <a:schemeClr val="accent6"/>
+              </a:fillRef>
+              <a:effectRef idx="0">
+                <a:schemeClr val="accent6"/>
+              </a:effectRef>
+              <a:fontRef idx="minor">
+                <a:schemeClr val="lt1"/>
+              </a:fontRef>
+            </p:style>
+            <p:txBody>
+              <a:bodyPr rtlCol="0" anchor="ctr"/>
+              <a:lstStyle/>
+              <a:p>
+                <a:pPr algn="ctr"/>
+                <a:endParaRPr lang="en-US"/>
+              </a:p>
+            </p:txBody>
+          </p:sp>
+          <p:sp>
+            <p:nvSpPr>
+              <p:cNvPr id="62" name="Oval 61">
+                <a:extLst>
+                  <a:ext uri="{FF2B5EF4-FFF2-40B4-BE49-F238E27FC236}">
+                    <a16:creationId xmlns:a16="http://schemas.microsoft.com/office/drawing/2014/main" id="{489773CD-21BD-3EE0-360D-51D67D8A5C6F}"/>
+                  </a:ext>
+                </a:extLst>
+              </p:cNvPr>
+              <p:cNvSpPr/>
+              <p:nvPr/>
+            </p:nvSpPr>
+            <p:spPr>
+              <a:xfrm>
+                <a:off x="4419600" y="6068944"/>
+                <a:ext cx="152400" cy="179456"/>
+              </a:xfrm>
+              <a:prstGeom prst="ellipse">
+                <a:avLst/>
+              </a:prstGeom>
+            </p:spPr>
+            <p:style>
+              <a:lnRef idx="2">
+                <a:schemeClr val="accent6">
+                  <a:shade val="15000"/>
+                </a:schemeClr>
+              </a:lnRef>
+              <a:fillRef idx="1">
+                <a:schemeClr val="accent6"/>
+              </a:fillRef>
+              <a:effectRef idx="0">
+                <a:schemeClr val="accent6"/>
+              </a:effectRef>
+              <a:fontRef idx="minor">
+                <a:schemeClr val="lt1"/>
+              </a:fontRef>
+            </p:style>
+            <p:txBody>
+              <a:bodyPr rtlCol="0" anchor="ctr"/>
+              <a:lstStyle/>
+              <a:p>
+                <a:pPr algn="ctr"/>
+                <a:endParaRPr lang="en-US"/>
+              </a:p>
+            </p:txBody>
+          </p:sp>
+          <p:cxnSp>
+            <p:nvCxnSpPr>
+              <p:cNvPr id="63" name="Straight Connector 62">
+                <a:extLst>
+                  <a:ext uri="{FF2B5EF4-FFF2-40B4-BE49-F238E27FC236}">
+                    <a16:creationId xmlns:a16="http://schemas.microsoft.com/office/drawing/2014/main" id="{BB414F5E-8241-5027-4E23-4A12B53B57B8}"/>
+                  </a:ext>
+                </a:extLst>
+              </p:cNvPr>
+              <p:cNvCxnSpPr>
+                <a:cxnSpLocks/>
+                <a:stCxn id="57" idx="6"/>
+                <a:endCxn id="16" idx="2"/>
+              </p:cNvCxnSpPr>
+              <p:nvPr/>
+            </p:nvCxnSpPr>
+            <p:spPr>
+              <a:xfrm>
+                <a:off x="4563342" y="4689502"/>
+                <a:ext cx="326550" cy="152400"/>
+              </a:xfrm>
+              <a:prstGeom prst="line">
+                <a:avLst/>
+              </a:prstGeom>
+            </p:spPr>
+            <p:style>
+              <a:lnRef idx="2">
+                <a:schemeClr val="accent6">
+                  <a:shade val="15000"/>
+                </a:schemeClr>
+              </a:lnRef>
+              <a:fillRef idx="1">
+                <a:schemeClr val="accent6"/>
+              </a:fillRef>
+              <a:effectRef idx="0">
+                <a:schemeClr val="accent6"/>
+              </a:effectRef>
+              <a:fontRef idx="minor">
+                <a:schemeClr val="lt1"/>
+              </a:fontRef>
+            </p:style>
+          </p:cxnSp>
+          <p:cxnSp>
+            <p:nvCxnSpPr>
+              <p:cNvPr id="64" name="Straight Connector 63">
+                <a:extLst>
+                  <a:ext uri="{FF2B5EF4-FFF2-40B4-BE49-F238E27FC236}">
+                    <a16:creationId xmlns:a16="http://schemas.microsoft.com/office/drawing/2014/main" id="{D90444DD-A8C4-5857-E3B0-85BB598A7AFD}"/>
+                  </a:ext>
+                </a:extLst>
+              </p:cNvPr>
+              <p:cNvCxnSpPr>
+                <a:cxnSpLocks/>
+                <a:stCxn id="58" idx="6"/>
+                <a:endCxn id="17" idx="2"/>
+              </p:cNvCxnSpPr>
+              <p:nvPr/>
+            </p:nvCxnSpPr>
+            <p:spPr>
+              <a:xfrm>
+                <a:off x="4563342" y="4945158"/>
+                <a:ext cx="326550" cy="152400"/>
+              </a:xfrm>
+              <a:prstGeom prst="line">
+                <a:avLst/>
+              </a:prstGeom>
+            </p:spPr>
+            <p:style>
+              <a:lnRef idx="2">
+                <a:schemeClr val="accent6">
+                  <a:shade val="15000"/>
+                </a:schemeClr>
+              </a:lnRef>
+              <a:fillRef idx="1">
+                <a:schemeClr val="accent6"/>
+              </a:fillRef>
+              <a:effectRef idx="0">
+                <a:schemeClr val="accent6"/>
+              </a:effectRef>
+              <a:fontRef idx="minor">
+                <a:schemeClr val="lt1"/>
+              </a:fontRef>
+            </p:style>
+          </p:cxnSp>
+          <p:cxnSp>
+            <p:nvCxnSpPr>
+              <p:cNvPr id="65" name="Straight Connector 64">
+                <a:extLst>
+                  <a:ext uri="{FF2B5EF4-FFF2-40B4-BE49-F238E27FC236}">
+                    <a16:creationId xmlns:a16="http://schemas.microsoft.com/office/drawing/2014/main" id="{3BB81A97-E6EE-C92D-14E5-FD6C8F2B51EA}"/>
+                  </a:ext>
+                </a:extLst>
+              </p:cNvPr>
+              <p:cNvCxnSpPr>
+                <a:cxnSpLocks/>
+                <a:stCxn id="59" idx="6"/>
+                <a:endCxn id="18" idx="2"/>
+              </p:cNvCxnSpPr>
+              <p:nvPr/>
+            </p:nvCxnSpPr>
+            <p:spPr>
+              <a:xfrm>
+                <a:off x="4563342" y="5222902"/>
+                <a:ext cx="326550" cy="152400"/>
+              </a:xfrm>
+              <a:prstGeom prst="line">
+                <a:avLst/>
+              </a:prstGeom>
+            </p:spPr>
+            <p:style>
+              <a:lnRef idx="2">
+                <a:schemeClr val="accent6">
+                  <a:shade val="15000"/>
+                </a:schemeClr>
+              </a:lnRef>
+              <a:fillRef idx="1">
+                <a:schemeClr val="accent6"/>
+              </a:fillRef>
+              <a:effectRef idx="0">
+                <a:schemeClr val="accent6"/>
+              </a:effectRef>
+              <a:fontRef idx="minor">
+                <a:schemeClr val="lt1"/>
+              </a:fontRef>
+            </p:style>
+          </p:cxnSp>
+          <p:cxnSp>
+            <p:nvCxnSpPr>
+              <p:cNvPr id="66" name="Straight Connector 65">
+                <a:extLst>
+                  <a:ext uri="{FF2B5EF4-FFF2-40B4-BE49-F238E27FC236}">
+                    <a16:creationId xmlns:a16="http://schemas.microsoft.com/office/drawing/2014/main" id="{6F4BCBB8-7FBC-A678-BB24-8FDA8C2BD55D}"/>
+                  </a:ext>
+                </a:extLst>
+              </p:cNvPr>
+              <p:cNvCxnSpPr>
+                <a:cxnSpLocks/>
+                <a:stCxn id="60" idx="6"/>
+                <a:endCxn id="19" idx="2"/>
+              </p:cNvCxnSpPr>
+              <p:nvPr/>
+            </p:nvCxnSpPr>
+            <p:spPr>
+              <a:xfrm>
+                <a:off x="4563342" y="5527702"/>
+                <a:ext cx="326550" cy="152400"/>
+              </a:xfrm>
+              <a:prstGeom prst="line">
+                <a:avLst/>
+              </a:prstGeom>
+            </p:spPr>
+            <p:style>
+              <a:lnRef idx="2">
+                <a:schemeClr val="accent6">
+                  <a:shade val="15000"/>
+                </a:schemeClr>
+              </a:lnRef>
+              <a:fillRef idx="1">
+                <a:schemeClr val="accent6"/>
+              </a:fillRef>
+              <a:effectRef idx="0">
+                <a:schemeClr val="accent6"/>
+              </a:effectRef>
+              <a:fontRef idx="minor">
+                <a:schemeClr val="lt1"/>
+              </a:fontRef>
+            </p:style>
+          </p:cxnSp>
+          <p:cxnSp>
+            <p:nvCxnSpPr>
+              <p:cNvPr id="67" name="Straight Connector 66">
+                <a:extLst>
+                  <a:ext uri="{FF2B5EF4-FFF2-40B4-BE49-F238E27FC236}">
+                    <a16:creationId xmlns:a16="http://schemas.microsoft.com/office/drawing/2014/main" id="{A8852BA3-C2AC-80FC-4FED-933262B58AE3}"/>
+                  </a:ext>
+                </a:extLst>
+              </p:cNvPr>
+              <p:cNvCxnSpPr>
+                <a:cxnSpLocks/>
+                <a:stCxn id="61" idx="6"/>
+                <a:endCxn id="27" idx="2"/>
+              </p:cNvCxnSpPr>
+              <p:nvPr/>
+            </p:nvCxnSpPr>
+            <p:spPr>
+              <a:xfrm>
+                <a:off x="4563342" y="5832502"/>
+                <a:ext cx="326550" cy="152400"/>
+              </a:xfrm>
+              <a:prstGeom prst="line">
+                <a:avLst/>
+              </a:prstGeom>
+            </p:spPr>
+            <p:style>
+              <a:lnRef idx="2">
+                <a:schemeClr val="accent6">
+                  <a:shade val="15000"/>
+                </a:schemeClr>
+              </a:lnRef>
+              <a:fillRef idx="1">
+                <a:schemeClr val="accent6"/>
+              </a:fillRef>
+              <a:effectRef idx="0">
+                <a:schemeClr val="accent6"/>
+              </a:effectRef>
+              <a:fontRef idx="minor">
+                <a:schemeClr val="lt1"/>
+              </a:fontRef>
+            </p:style>
+          </p:cxnSp>
+          <p:cxnSp>
+            <p:nvCxnSpPr>
+              <p:cNvPr id="68" name="Straight Connector 67">
+                <a:extLst>
+                  <a:ext uri="{FF2B5EF4-FFF2-40B4-BE49-F238E27FC236}">
+                    <a16:creationId xmlns:a16="http://schemas.microsoft.com/office/drawing/2014/main" id="{FE1F15E3-558E-DB8C-B876-0F6075AEC866}"/>
+                  </a:ext>
+                </a:extLst>
+              </p:cNvPr>
+              <p:cNvCxnSpPr>
+                <a:cxnSpLocks/>
+                <a:stCxn id="62" idx="6"/>
+                <a:endCxn id="27" idx="2"/>
+              </p:cNvCxnSpPr>
+              <p:nvPr/>
+            </p:nvCxnSpPr>
+            <p:spPr>
+              <a:xfrm flipV="1">
+                <a:off x="4572000" y="5984902"/>
+                <a:ext cx="317892" cy="173770"/>
+              </a:xfrm>
+              <a:prstGeom prst="line">
+                <a:avLst/>
+              </a:prstGeom>
+            </p:spPr>
+            <p:style>
+              <a:lnRef idx="2">
+                <a:schemeClr val="accent6">
+                  <a:shade val="15000"/>
+                </a:schemeClr>
+              </a:lnRef>
+              <a:fillRef idx="1">
+                <a:schemeClr val="accent6"/>
+              </a:fillRef>
+              <a:effectRef idx="0">
+                <a:schemeClr val="accent6"/>
+              </a:effectRef>
+              <a:fontRef idx="minor">
+                <a:schemeClr val="lt1"/>
+              </a:fontRef>
+            </p:style>
+          </p:cxnSp>
+          <p:cxnSp>
+            <p:nvCxnSpPr>
+              <p:cNvPr id="69" name="Straight Connector 68">
+                <a:extLst>
+                  <a:ext uri="{FF2B5EF4-FFF2-40B4-BE49-F238E27FC236}">
+                    <a16:creationId xmlns:a16="http://schemas.microsoft.com/office/drawing/2014/main" id="{1FCA1830-B362-5F50-9E34-8813C17EDC6C}"/>
+                  </a:ext>
+                </a:extLst>
+              </p:cNvPr>
+              <p:cNvCxnSpPr>
+                <a:cxnSpLocks/>
+                <a:stCxn id="61" idx="6"/>
+                <a:endCxn id="19" idx="2"/>
+              </p:cNvCxnSpPr>
+              <p:nvPr/>
+            </p:nvCxnSpPr>
+            <p:spPr>
+              <a:xfrm flipV="1">
+                <a:off x="4563342" y="5680102"/>
+                <a:ext cx="326550" cy="152400"/>
+              </a:xfrm>
+              <a:prstGeom prst="line">
+                <a:avLst/>
+              </a:prstGeom>
+            </p:spPr>
+            <p:style>
+              <a:lnRef idx="2">
+                <a:schemeClr val="accent6">
+                  <a:shade val="15000"/>
+                </a:schemeClr>
+              </a:lnRef>
+              <a:fillRef idx="1">
+                <a:schemeClr val="accent6"/>
+              </a:fillRef>
+              <a:effectRef idx="0">
+                <a:schemeClr val="accent6"/>
+              </a:effectRef>
+              <a:fontRef idx="minor">
+                <a:schemeClr val="lt1"/>
+              </a:fontRef>
+            </p:style>
+          </p:cxnSp>
+          <p:cxnSp>
+            <p:nvCxnSpPr>
+              <p:cNvPr id="70" name="Straight Connector 69">
+                <a:extLst>
+                  <a:ext uri="{FF2B5EF4-FFF2-40B4-BE49-F238E27FC236}">
+                    <a16:creationId xmlns:a16="http://schemas.microsoft.com/office/drawing/2014/main" id="{1EF48651-4159-154A-6453-8B9938BDA8B4}"/>
+                  </a:ext>
+                </a:extLst>
+              </p:cNvPr>
+              <p:cNvCxnSpPr>
+                <a:cxnSpLocks/>
+                <a:stCxn id="59" idx="6"/>
+                <a:endCxn id="17" idx="2"/>
+              </p:cNvCxnSpPr>
+              <p:nvPr/>
+            </p:nvCxnSpPr>
+            <p:spPr>
+              <a:xfrm flipV="1">
+                <a:off x="4563342" y="5097558"/>
+                <a:ext cx="326550" cy="125344"/>
+              </a:xfrm>
+              <a:prstGeom prst="line">
+                <a:avLst/>
+              </a:prstGeom>
+            </p:spPr>
+            <p:style>
+              <a:lnRef idx="2">
+                <a:schemeClr val="accent6">
+                  <a:shade val="15000"/>
+                </a:schemeClr>
+              </a:lnRef>
+              <a:fillRef idx="1">
+                <a:schemeClr val="accent6"/>
+              </a:fillRef>
+              <a:effectRef idx="0">
+                <a:schemeClr val="accent6"/>
+              </a:effectRef>
+              <a:fontRef idx="minor">
+                <a:schemeClr val="lt1"/>
+              </a:fontRef>
+            </p:style>
+          </p:cxnSp>
+          <p:cxnSp>
+            <p:nvCxnSpPr>
+              <p:cNvPr id="71" name="Straight Connector 70">
+                <a:extLst>
+                  <a:ext uri="{FF2B5EF4-FFF2-40B4-BE49-F238E27FC236}">
+                    <a16:creationId xmlns:a16="http://schemas.microsoft.com/office/drawing/2014/main" id="{80448020-70A1-A910-082E-59929EA1FF25}"/>
+                  </a:ext>
+                </a:extLst>
+              </p:cNvPr>
+              <p:cNvCxnSpPr>
+                <a:cxnSpLocks/>
+                <a:stCxn id="58" idx="6"/>
+                <a:endCxn id="16" idx="2"/>
+              </p:cNvCxnSpPr>
+              <p:nvPr/>
+            </p:nvCxnSpPr>
+            <p:spPr>
+              <a:xfrm flipV="1">
+                <a:off x="4563342" y="4841902"/>
+                <a:ext cx="326550" cy="103256"/>
+              </a:xfrm>
+              <a:prstGeom prst="line">
+                <a:avLst/>
+              </a:prstGeom>
+            </p:spPr>
+            <p:style>
+              <a:lnRef idx="2">
+                <a:schemeClr val="accent6">
+                  <a:shade val="15000"/>
+                </a:schemeClr>
+              </a:lnRef>
+              <a:fillRef idx="1">
+                <a:schemeClr val="accent6"/>
+              </a:fillRef>
+              <a:effectRef idx="0">
+                <a:schemeClr val="accent6"/>
+              </a:effectRef>
+              <a:fontRef idx="minor">
+                <a:schemeClr val="lt1"/>
+              </a:fontRef>
+            </p:style>
+          </p:cxnSp>
+          <p:cxnSp>
+            <p:nvCxnSpPr>
+              <p:cNvPr id="72" name="Straight Connector 71">
+                <a:extLst>
+                  <a:ext uri="{FF2B5EF4-FFF2-40B4-BE49-F238E27FC236}">
+                    <a16:creationId xmlns:a16="http://schemas.microsoft.com/office/drawing/2014/main" id="{7265FB6E-3B91-CCDD-D22A-D5C44BD12B6C}"/>
+                  </a:ext>
+                </a:extLst>
+              </p:cNvPr>
+              <p:cNvCxnSpPr>
+                <a:cxnSpLocks/>
+                <a:stCxn id="60" idx="6"/>
+                <a:endCxn id="27" idx="2"/>
+              </p:cNvCxnSpPr>
+              <p:nvPr/>
+            </p:nvCxnSpPr>
+            <p:spPr>
+              <a:xfrm>
+                <a:off x="4563342" y="5527702"/>
+                <a:ext cx="326550" cy="457200"/>
+              </a:xfrm>
+              <a:prstGeom prst="line">
+                <a:avLst/>
+              </a:prstGeom>
+            </p:spPr>
+            <p:style>
+              <a:lnRef idx="2">
+                <a:schemeClr val="accent6">
+                  <a:shade val="15000"/>
+                </a:schemeClr>
+              </a:lnRef>
+              <a:fillRef idx="1">
+                <a:schemeClr val="accent6"/>
+              </a:fillRef>
+              <a:effectRef idx="0">
+                <a:schemeClr val="accent6"/>
+              </a:effectRef>
+              <a:fontRef idx="minor">
+                <a:schemeClr val="lt1"/>
+              </a:fontRef>
+            </p:style>
+          </p:cxnSp>
+          <p:cxnSp>
+            <p:nvCxnSpPr>
+              <p:cNvPr id="73" name="Straight Connector 72">
+                <a:extLst>
+                  <a:ext uri="{FF2B5EF4-FFF2-40B4-BE49-F238E27FC236}">
+                    <a16:creationId xmlns:a16="http://schemas.microsoft.com/office/drawing/2014/main" id="{FA4F705C-5542-F763-441D-BFF2A498D292}"/>
+                  </a:ext>
+                </a:extLst>
+              </p:cNvPr>
+              <p:cNvCxnSpPr>
+                <a:cxnSpLocks/>
+                <a:stCxn id="58" idx="6"/>
+                <a:endCxn id="19" idx="2"/>
+              </p:cNvCxnSpPr>
+              <p:nvPr/>
+            </p:nvCxnSpPr>
+            <p:spPr>
+              <a:xfrm>
+                <a:off x="4563342" y="4945158"/>
+                <a:ext cx="326550" cy="734944"/>
+              </a:xfrm>
+              <a:prstGeom prst="line">
+                <a:avLst/>
+              </a:prstGeom>
+            </p:spPr>
+            <p:style>
+              <a:lnRef idx="2">
+                <a:schemeClr val="accent6">
+                  <a:shade val="15000"/>
+                </a:schemeClr>
+              </a:lnRef>
+              <a:fillRef idx="1">
+                <a:schemeClr val="accent6"/>
+              </a:fillRef>
+              <a:effectRef idx="0">
+                <a:schemeClr val="accent6"/>
+              </a:effectRef>
+              <a:fontRef idx="minor">
+                <a:schemeClr val="lt1"/>
+              </a:fontRef>
+            </p:style>
+          </p:cxnSp>
+          <p:cxnSp>
+            <p:nvCxnSpPr>
+              <p:cNvPr id="74" name="Straight Connector 73">
+                <a:extLst>
+                  <a:ext uri="{FF2B5EF4-FFF2-40B4-BE49-F238E27FC236}">
+                    <a16:creationId xmlns:a16="http://schemas.microsoft.com/office/drawing/2014/main" id="{4DD1EE5A-DBDA-A435-A0FE-B0F46195C9FE}"/>
+                  </a:ext>
+                </a:extLst>
+              </p:cNvPr>
+              <p:cNvCxnSpPr>
+                <a:cxnSpLocks/>
+                <a:stCxn id="60" idx="6"/>
+                <a:endCxn id="16" idx="2"/>
+              </p:cNvCxnSpPr>
+              <p:nvPr/>
+            </p:nvCxnSpPr>
+            <p:spPr>
+              <a:xfrm flipV="1">
+                <a:off x="4563342" y="4841902"/>
+                <a:ext cx="326550" cy="685800"/>
+              </a:xfrm>
+              <a:prstGeom prst="line">
+                <a:avLst/>
+              </a:prstGeom>
+            </p:spPr>
+            <p:style>
+              <a:lnRef idx="2">
+                <a:schemeClr val="accent6">
+                  <a:shade val="15000"/>
+                </a:schemeClr>
+              </a:lnRef>
+              <a:fillRef idx="1">
+                <a:schemeClr val="accent6"/>
+              </a:fillRef>
+              <a:effectRef idx="0">
+                <a:schemeClr val="accent6"/>
+              </a:effectRef>
+              <a:fontRef idx="minor">
+                <a:schemeClr val="lt1"/>
+              </a:fontRef>
+            </p:style>
+          </p:cxnSp>
+          <p:cxnSp>
+            <p:nvCxnSpPr>
+              <p:cNvPr id="75" name="Straight Connector 74">
+                <a:extLst>
+                  <a:ext uri="{FF2B5EF4-FFF2-40B4-BE49-F238E27FC236}">
+                    <a16:creationId xmlns:a16="http://schemas.microsoft.com/office/drawing/2014/main" id="{F2CD7630-D715-77D3-4388-FEC10B362B3E}"/>
+                  </a:ext>
+                </a:extLst>
+              </p:cNvPr>
+              <p:cNvCxnSpPr>
+                <a:cxnSpLocks/>
+                <a:stCxn id="62" idx="6"/>
+                <a:endCxn id="19" idx="2"/>
+              </p:cNvCxnSpPr>
+              <p:nvPr/>
+            </p:nvCxnSpPr>
+            <p:spPr>
+              <a:xfrm flipV="1">
+                <a:off x="4572000" y="5680102"/>
+                <a:ext cx="317892" cy="478570"/>
+              </a:xfrm>
+              <a:prstGeom prst="line">
+                <a:avLst/>
+              </a:prstGeom>
+            </p:spPr>
+            <p:style>
+              <a:lnRef idx="2">
+                <a:schemeClr val="accent6">
+                  <a:shade val="15000"/>
+                </a:schemeClr>
+              </a:lnRef>
+              <a:fillRef idx="1">
+                <a:schemeClr val="accent6"/>
+              </a:fillRef>
+              <a:effectRef idx="0">
+                <a:schemeClr val="accent6"/>
+              </a:effectRef>
+              <a:fontRef idx="minor">
+                <a:schemeClr val="lt1"/>
+              </a:fontRef>
+            </p:style>
+          </p:cxnSp>
+          <p:cxnSp>
+            <p:nvCxnSpPr>
+              <p:cNvPr id="76" name="Straight Connector 75">
+                <a:extLst>
+                  <a:ext uri="{FF2B5EF4-FFF2-40B4-BE49-F238E27FC236}">
+                    <a16:creationId xmlns:a16="http://schemas.microsoft.com/office/drawing/2014/main" id="{BD975B8D-9E37-8D2F-28BA-F3EDE1F7EE16}"/>
+                  </a:ext>
+                </a:extLst>
+              </p:cNvPr>
+              <p:cNvCxnSpPr>
+                <a:cxnSpLocks/>
+                <a:stCxn id="61" idx="6"/>
+                <a:endCxn id="18" idx="2"/>
+              </p:cNvCxnSpPr>
+              <p:nvPr/>
+            </p:nvCxnSpPr>
+            <p:spPr>
+              <a:xfrm flipV="1">
+                <a:off x="4563342" y="5375302"/>
+                <a:ext cx="326550" cy="457200"/>
+              </a:xfrm>
+              <a:prstGeom prst="line">
+                <a:avLst/>
+              </a:prstGeom>
+            </p:spPr>
+            <p:style>
+              <a:lnRef idx="2">
+                <a:schemeClr val="accent6">
+                  <a:shade val="15000"/>
+                </a:schemeClr>
+              </a:lnRef>
+              <a:fillRef idx="1">
+                <a:schemeClr val="accent6"/>
+              </a:fillRef>
+              <a:effectRef idx="0">
+                <a:schemeClr val="accent6"/>
+              </a:effectRef>
+              <a:fontRef idx="minor">
+                <a:schemeClr val="lt1"/>
+              </a:fontRef>
+            </p:style>
+          </p:cxnSp>
+        </p:grpSp>
+        <p:sp>
+          <p:nvSpPr>
+            <p:cNvPr id="9" name="Arrow: Right 8">
+              <a:extLst>
+                <a:ext uri="{FF2B5EF4-FFF2-40B4-BE49-F238E27FC236}">
+                  <a16:creationId xmlns:a16="http://schemas.microsoft.com/office/drawing/2014/main" id="{AF98EC6D-855B-0FE0-C4A7-C06D726E8163}"/>
+                </a:ext>
+                <a:ext uri="{C183D7F6-B498-43B3-948B-1728B52AA6E4}">
+                  <adec:decorative xmlns:adec="http://schemas.microsoft.com/office/drawing/2017/decorative" val="1"/>
+                </a:ext>
+              </a:extLst>
+            </p:cNvPr>
+            <p:cNvSpPr/>
+            <p:nvPr/>
+          </p:nvSpPr>
+          <p:spPr>
+            <a:xfrm>
+              <a:off x="1442560" y="4430327"/>
+              <a:ext cx="425911" cy="533400"/>
+            </a:xfrm>
+            <a:prstGeom prst="rightArrow">
+              <a:avLst/>
+            </a:prstGeom>
+          </p:spPr>
+          <p:style>
+            <a:lnRef idx="3">
+              <a:schemeClr val="lt1"/>
+            </a:lnRef>
+            <a:fillRef idx="1">
+              <a:schemeClr val="accent6"/>
+            </a:fillRef>
+            <a:effectRef idx="1">
+              <a:schemeClr val="accent6"/>
+            </a:effectRef>
+            <a:fontRef idx="minor">
+              <a:schemeClr val="lt1"/>
+            </a:fontRef>
+          </p:style>
+          <p:txBody>
+            <a:bodyPr rtlCol="0" anchor="ctr"/>
+            <a:lstStyle/>
+            <a:p>
+              <a:pPr algn="ctr"/>
+              <a:endParaRPr lang="en-US"/>
+            </a:p>
+          </p:txBody>
+        </p:sp>
+        <mc:AlternateContent xmlns:mc="http://schemas.openxmlformats.org/markup-compatibility/2006" xmlns:a14="http://schemas.microsoft.com/office/drawing/2010/main">
+          <mc:Choice Requires="a14">
+            <p:sp>
+              <p:nvSpPr>
+                <p:cNvPr id="10" name="TextBox 9">
+                  <a:extLst>
+                    <a:ext uri="{FF2B5EF4-FFF2-40B4-BE49-F238E27FC236}">
+                      <a16:creationId xmlns:a16="http://schemas.microsoft.com/office/drawing/2014/main" id="{D5B92B9B-D738-DDDF-6386-B86A4D93CD90}"/>
+                    </a:ext>
+                    <a:ext uri="{C183D7F6-B498-43B3-948B-1728B52AA6E4}">
+                      <adec:decorative xmlns:adec="http://schemas.microsoft.com/office/drawing/2017/decorative" val="1"/>
+                    </a:ext>
+                  </a:extLst>
+                </p:cNvPr>
+                <p:cNvSpPr txBox="1"/>
+                <p:nvPr/>
+              </p:nvSpPr>
+              <p:spPr>
+                <a:xfrm>
+                  <a:off x="1129787" y="4514865"/>
+                  <a:ext cx="349711" cy="369332"/>
+                </a:xfrm>
+                <a:prstGeom prst="rect">
+                  <a:avLst/>
+                </a:prstGeom>
+                <a:noFill/>
+              </p:spPr>
+              <p:txBody>
+                <a:bodyPr wrap="none" rtlCol="0">
+                  <a:spAutoFit/>
+                </a:bodyPr>
+                <a:lstStyle/>
+                <a:p>
+                  <a:pPr/>
+                  <a14:m>
+                    <m:oMathPara xmlns:m="http://schemas.openxmlformats.org/officeDocument/2006/math">
+                      <m:oMathParaPr>
+                        <m:jc m:val="centerGroup"/>
+                      </m:oMathParaPr>
+                      <m:oMath xmlns:m="http://schemas.openxmlformats.org/officeDocument/2006/math">
+                        <m:r>
+                          <a:rPr lang="en-US" i="1" dirty="0" smtClean="0">
+                            <a:latin typeface="Cambria Math" panose="02040503050406030204" pitchFamily="18" charset="0"/>
+                          </a:rPr>
+                          <m:t>𝑠</m:t>
+                        </m:r>
+                      </m:oMath>
+                    </m:oMathPara>
+                  </a14:m>
+                  <a:endParaRPr lang="en-US" dirty="0"/>
+                </a:p>
+              </p:txBody>
+            </p:sp>
+          </mc:Choice>
+          <mc:Fallback xmlns="">
+            <p:sp>
+              <p:nvSpPr>
+                <p:cNvPr id="194" name="TextBox 193">
+                  <a:extLst>
+                    <a:ext uri="{FF2B5EF4-FFF2-40B4-BE49-F238E27FC236}">
+                      <a16:creationId xmlns:a16="http://schemas.microsoft.com/office/drawing/2014/main" id="{5FAAFD66-2140-E45A-471D-39F874312E32}"/>
+                    </a:ext>
+                    <a:ext uri="{C183D7F6-B498-43B3-948B-1728B52AA6E4}">
+                      <adec:decorative xmlns:adec="http://schemas.microsoft.com/office/drawing/2017/decorative" val="1"/>
+                    </a:ext>
+                  </a:extLst>
+                </p:cNvPr>
+                <p:cNvSpPr txBox="1">
+                  <a:spLocks noRot="1" noChangeAspect="1" noMove="1" noResize="1" noEditPoints="1" noAdjustHandles="1" noChangeArrowheads="1" noChangeShapeType="1" noTextEdit="1"/>
+                </p:cNvSpPr>
+                <p:nvPr/>
+              </p:nvSpPr>
+              <p:spPr>
+                <a:xfrm>
+                  <a:off x="1129787" y="4514865"/>
+                  <a:ext cx="349711" cy="369332"/>
+                </a:xfrm>
+                <a:prstGeom prst="rect">
+                  <a:avLst/>
+                </a:prstGeom>
+                <a:blipFill>
+                  <a:blip r:embed="rId6"/>
+                  <a:stretch>
+                    <a:fillRect/>
+                  </a:stretch>
+                </a:blipFill>
+              </p:spPr>
+              <p:txBody>
+                <a:bodyPr/>
+                <a:lstStyle/>
+                <a:p>
+                  <a:r>
+                    <a:rPr lang="en-US">
+                      <a:noFill/>
+                    </a:rPr>
+                    <a:t> </a:t>
+                  </a:r>
+                </a:p>
+              </p:txBody>
+            </p:sp>
+          </mc:Fallback>
+        </mc:AlternateContent>
+        <p:sp>
+          <p:nvSpPr>
+            <p:cNvPr id="11" name="Arrow: Right 10">
+              <a:extLst>
+                <a:ext uri="{FF2B5EF4-FFF2-40B4-BE49-F238E27FC236}">
+                  <a16:creationId xmlns:a16="http://schemas.microsoft.com/office/drawing/2014/main" id="{4F388507-8243-2023-9C95-1E027192755E}"/>
+                </a:ext>
+                <a:ext uri="{C183D7F6-B498-43B3-948B-1728B52AA6E4}">
+                  <adec:decorative xmlns:adec="http://schemas.microsoft.com/office/drawing/2017/decorative" val="1"/>
+                </a:ext>
+              </a:extLst>
+            </p:cNvPr>
+            <p:cNvSpPr/>
+            <p:nvPr/>
+          </p:nvSpPr>
+          <p:spPr>
+            <a:xfrm>
+              <a:off x="3810000" y="4491358"/>
+              <a:ext cx="384215" cy="503703"/>
+            </a:xfrm>
+            <a:prstGeom prst="rightArrow">
+              <a:avLst/>
+            </a:prstGeom>
+          </p:spPr>
+          <p:style>
+            <a:lnRef idx="3">
+              <a:schemeClr val="lt1"/>
+            </a:lnRef>
+            <a:fillRef idx="1">
+              <a:schemeClr val="accent6"/>
+            </a:fillRef>
+            <a:effectRef idx="1">
+              <a:schemeClr val="accent6"/>
+            </a:effectRef>
+            <a:fontRef idx="minor">
+              <a:schemeClr val="lt1"/>
+            </a:fontRef>
+          </p:style>
+          <p:txBody>
+            <a:bodyPr rtlCol="0" anchor="ctr"/>
+            <a:lstStyle/>
+            <a:p>
+              <a:pPr algn="ctr"/>
+              <a:endParaRPr lang="en-US"/>
+            </a:p>
+          </p:txBody>
+        </p:sp>
+        <mc:AlternateContent xmlns:mc="http://schemas.openxmlformats.org/markup-compatibility/2006" xmlns:a14="http://schemas.microsoft.com/office/drawing/2010/main">
+          <mc:Choice Requires="a14">
+            <p:sp>
+              <p:nvSpPr>
+                <p:cNvPr id="12" name="TextBox 11">
+                  <a:extLst>
+                    <a:ext uri="{FF2B5EF4-FFF2-40B4-BE49-F238E27FC236}">
+                      <a16:creationId xmlns:a16="http://schemas.microsoft.com/office/drawing/2014/main" id="{D3E0B561-EBCC-0059-D5AC-D92389C66148}"/>
+                    </a:ext>
+                    <a:ext uri="{C183D7F6-B498-43B3-948B-1728B52AA6E4}">
+                      <adec:decorative xmlns:adec="http://schemas.microsoft.com/office/drawing/2017/decorative" val="1"/>
+                    </a:ext>
+                  </a:extLst>
+                </p:cNvPr>
+                <p:cNvSpPr txBox="1"/>
+                <p:nvPr/>
+              </p:nvSpPr>
+              <p:spPr>
+                <a:xfrm>
+                  <a:off x="4125676" y="4556563"/>
+                  <a:ext cx="924740" cy="369332"/>
+                </a:xfrm>
+                <a:prstGeom prst="rect">
+                  <a:avLst/>
+                </a:prstGeom>
+                <a:noFill/>
+              </p:spPr>
+              <p:txBody>
+                <a:bodyPr wrap="none" rtlCol="0">
+                  <a:spAutoFit/>
+                </a:bodyPr>
+                <a:lstStyle/>
+                <a:p>
+                  <a:pPr/>
+                  <a14:m>
+                    <m:oMathPara xmlns:m="http://schemas.openxmlformats.org/officeDocument/2006/math">
+                      <m:oMathParaPr>
+                        <m:jc m:val="centerGroup"/>
+                      </m:oMathParaPr>
+                      <m:oMath xmlns:m="http://schemas.openxmlformats.org/officeDocument/2006/math">
+                        <m:r>
+                          <a:rPr lang="en-US" b="0" i="1" dirty="0" smtClean="0">
+                            <a:latin typeface="Cambria Math" panose="02040503050406030204" pitchFamily="18" charset="0"/>
+                          </a:rPr>
+                          <m:t>𝑄</m:t>
+                        </m:r>
+                        <m:r>
+                          <a:rPr lang="en-US" b="0" i="1" dirty="0" smtClean="0">
+                            <a:latin typeface="Cambria Math" panose="02040503050406030204" pitchFamily="18" charset="0"/>
+                          </a:rPr>
+                          <m:t>(</m:t>
+                        </m:r>
+                        <m:r>
+                          <a:rPr lang="en-US" i="1" dirty="0" smtClean="0">
+                            <a:latin typeface="Cambria Math" panose="02040503050406030204" pitchFamily="18" charset="0"/>
+                          </a:rPr>
+                          <m:t>𝑠</m:t>
+                        </m:r>
+                        <m:r>
+                          <a:rPr lang="en-US" i="1" dirty="0" smtClean="0">
+                            <a:latin typeface="Cambria Math" panose="02040503050406030204" pitchFamily="18" charset="0"/>
+                          </a:rPr>
+                          <m:t>, </m:t>
+                        </m:r>
+                        <m:r>
+                          <a:rPr lang="en-US" i="1" dirty="0">
+                            <a:latin typeface="Cambria Math" panose="02040503050406030204" pitchFamily="18" charset="0"/>
+                          </a:rPr>
+                          <m:t>𝑎</m:t>
+                        </m:r>
+                        <m:r>
+                          <a:rPr lang="en-US" b="0" i="1" dirty="0" smtClean="0">
+                            <a:latin typeface="Cambria Math" panose="02040503050406030204" pitchFamily="18" charset="0"/>
+                          </a:rPr>
+                          <m:t>)</m:t>
+                        </m:r>
+                      </m:oMath>
+                    </m:oMathPara>
+                  </a14:m>
+                  <a:endParaRPr lang="en-US" dirty="0"/>
+                </a:p>
+              </p:txBody>
+            </p:sp>
+          </mc:Choice>
+          <mc:Fallback xmlns="">
+            <p:sp>
+              <p:nvSpPr>
+                <p:cNvPr id="196" name="TextBox 195">
+                  <a:extLst>
+                    <a:ext uri="{FF2B5EF4-FFF2-40B4-BE49-F238E27FC236}">
+                      <a16:creationId xmlns:a16="http://schemas.microsoft.com/office/drawing/2014/main" id="{D64E343A-1D3A-216C-1B9D-C48B77179E88}"/>
+                    </a:ext>
+                    <a:ext uri="{C183D7F6-B498-43B3-948B-1728B52AA6E4}">
+                      <adec:decorative xmlns:adec="http://schemas.microsoft.com/office/drawing/2017/decorative" val="1"/>
+                    </a:ext>
+                  </a:extLst>
+                </p:cNvPr>
+                <p:cNvSpPr txBox="1">
+                  <a:spLocks noRot="1" noChangeAspect="1" noMove="1" noResize="1" noEditPoints="1" noAdjustHandles="1" noChangeArrowheads="1" noChangeShapeType="1" noTextEdit="1"/>
+                </p:cNvSpPr>
+                <p:nvPr/>
+              </p:nvSpPr>
+              <p:spPr>
+                <a:xfrm>
+                  <a:off x="4125676" y="4556563"/>
+                  <a:ext cx="924740" cy="369332"/>
+                </a:xfrm>
+                <a:prstGeom prst="rect">
+                  <a:avLst/>
+                </a:prstGeom>
+                <a:blipFill>
+                  <a:blip r:embed="rId7"/>
+                  <a:stretch>
+                    <a:fillRect b="-13115"/>
+                  </a:stretch>
+                </a:blipFill>
+              </p:spPr>
+              <p:txBody>
+                <a:bodyPr/>
+                <a:lstStyle/>
+                <a:p>
+                  <a:r>
+                    <a:rPr lang="en-US">
+                      <a:noFill/>
+                    </a:rPr>
+                    <a:t> </a:t>
+                  </a:r>
+                </a:p>
+              </p:txBody>
+            </p:sp>
+          </mc:Fallback>
+        </mc:AlternateContent>
+        <mc:AlternateContent xmlns:mc="http://schemas.openxmlformats.org/markup-compatibility/2006" xmlns:a14="http://schemas.microsoft.com/office/drawing/2010/main">
+          <mc:Choice Requires="a14">
+            <p:sp>
+              <p:nvSpPr>
+                <p:cNvPr id="13" name="TextBox 12">
+                  <a:extLst>
+                    <a:ext uri="{FF2B5EF4-FFF2-40B4-BE49-F238E27FC236}">
+                      <a16:creationId xmlns:a16="http://schemas.microsoft.com/office/drawing/2014/main" id="{F255FDF8-7D33-04F7-B561-C50954518D66}"/>
+                    </a:ext>
+                    <a:ext uri="{C183D7F6-B498-43B3-948B-1728B52AA6E4}">
+                      <adec:decorative xmlns:adec="http://schemas.microsoft.com/office/drawing/2017/decorative" val="1"/>
+                    </a:ext>
+                  </a:extLst>
+                </p:cNvPr>
+                <p:cNvSpPr txBox="1"/>
+                <p:nvPr/>
+              </p:nvSpPr>
+              <p:spPr>
+                <a:xfrm>
+                  <a:off x="1994915" y="3714030"/>
+                  <a:ext cx="363881" cy="369332"/>
+                </a:xfrm>
+                <a:prstGeom prst="rect">
+                  <a:avLst/>
+                </a:prstGeom>
+                <a:noFill/>
+              </p:spPr>
+              <p:txBody>
+                <a:bodyPr wrap="none" rtlCol="0">
+                  <a:spAutoFit/>
+                </a:bodyPr>
+                <a:lstStyle/>
+                <a:p>
+                  <a:pPr/>
+                  <a14:m>
+                    <m:oMathPara xmlns:m="http://schemas.openxmlformats.org/officeDocument/2006/math">
+                      <m:oMathParaPr>
+                        <m:jc m:val="centerGroup"/>
+                      </m:oMathParaPr>
+                      <m:oMath xmlns:m="http://schemas.openxmlformats.org/officeDocument/2006/math">
+                        <m:r>
+                          <a:rPr lang="en-US" b="0" i="1" dirty="0" smtClean="0">
+                            <a:latin typeface="Cambria Math" panose="02040503050406030204" pitchFamily="18" charset="0"/>
+                          </a:rPr>
+                          <m:t>𝑆</m:t>
+                        </m:r>
+                      </m:oMath>
+                    </m:oMathPara>
+                  </a14:m>
+                  <a:endParaRPr lang="en-US" dirty="0"/>
+                </a:p>
+              </p:txBody>
+            </p:sp>
+          </mc:Choice>
+          <mc:Fallback xmlns="">
+            <p:sp>
+              <p:nvSpPr>
+                <p:cNvPr id="197" name="TextBox 196">
+                  <a:extLst>
+                    <a:ext uri="{FF2B5EF4-FFF2-40B4-BE49-F238E27FC236}">
+                      <a16:creationId xmlns:a16="http://schemas.microsoft.com/office/drawing/2014/main" id="{25BA0203-B417-18D9-5155-AC948C3DB147}"/>
+                    </a:ext>
+                    <a:ext uri="{C183D7F6-B498-43B3-948B-1728B52AA6E4}">
+                      <adec:decorative xmlns:adec="http://schemas.microsoft.com/office/drawing/2017/decorative" val="1"/>
+                    </a:ext>
+                  </a:extLst>
+                </p:cNvPr>
+                <p:cNvSpPr txBox="1">
+                  <a:spLocks noRot="1" noChangeAspect="1" noMove="1" noResize="1" noEditPoints="1" noAdjustHandles="1" noChangeArrowheads="1" noChangeShapeType="1" noTextEdit="1"/>
+                </p:cNvSpPr>
+                <p:nvPr/>
+              </p:nvSpPr>
+              <p:spPr>
+                <a:xfrm>
+                  <a:off x="1994915" y="3714030"/>
+                  <a:ext cx="363881" cy="369332"/>
+                </a:xfrm>
+                <a:prstGeom prst="rect">
+                  <a:avLst/>
+                </a:prstGeom>
+                <a:blipFill>
+                  <a:blip r:embed="rId8"/>
+                  <a:stretch>
+                    <a:fillRect/>
+                  </a:stretch>
+                </a:blipFill>
+              </p:spPr>
+              <p:txBody>
+                <a:bodyPr/>
+                <a:lstStyle/>
+                <a:p>
+                  <a:r>
+                    <a:rPr lang="en-US">
+                      <a:noFill/>
+                    </a:rPr>
+                    <a:t> </a:t>
+                  </a:r>
+                </a:p>
+              </p:txBody>
+            </p:sp>
+          </mc:Fallback>
+        </mc:AlternateContent>
+        <mc:AlternateContent xmlns:mc="http://schemas.openxmlformats.org/markup-compatibility/2006" xmlns:a14="http://schemas.microsoft.com/office/drawing/2010/main">
+          <mc:Choice Requires="a14">
+            <p:sp>
+              <p:nvSpPr>
+                <p:cNvPr id="14" name="TextBox 13">
+                  <a:extLst>
+                    <a:ext uri="{FF2B5EF4-FFF2-40B4-BE49-F238E27FC236}">
+                      <a16:creationId xmlns:a16="http://schemas.microsoft.com/office/drawing/2014/main" id="{2157799B-2D3B-C607-6CF1-8B0D8B6AB88C}"/>
+                    </a:ext>
+                    <a:ext uri="{C183D7F6-B498-43B3-948B-1728B52AA6E4}">
+                      <adec:decorative xmlns:adec="http://schemas.microsoft.com/office/drawing/2017/decorative" val="1"/>
+                    </a:ext>
+                  </a:extLst>
+                </p:cNvPr>
+                <p:cNvSpPr txBox="1"/>
+                <p:nvPr/>
+              </p:nvSpPr>
+              <p:spPr>
+                <a:xfrm>
+                  <a:off x="3182394" y="3851318"/>
+                  <a:ext cx="385683" cy="369332"/>
+                </a:xfrm>
+                <a:prstGeom prst="rect">
+                  <a:avLst/>
+                </a:prstGeom>
+                <a:noFill/>
+              </p:spPr>
+              <p:txBody>
+                <a:bodyPr wrap="none" rtlCol="0">
+                  <a:spAutoFit/>
+                </a:bodyPr>
+                <a:lstStyle/>
+                <a:p>
+                  <a:pPr/>
+                  <a14:m>
+                    <m:oMathPara xmlns:m="http://schemas.openxmlformats.org/officeDocument/2006/math">
+                      <m:oMathParaPr>
+                        <m:jc m:val="centerGroup"/>
+                      </m:oMathParaPr>
+                      <m:oMath xmlns:m="http://schemas.openxmlformats.org/officeDocument/2006/math">
+                        <m:r>
+                          <a:rPr lang="en-US" b="0" i="1" dirty="0" smtClean="0">
+                            <a:latin typeface="Cambria Math" panose="02040503050406030204" pitchFamily="18" charset="0"/>
+                          </a:rPr>
+                          <m:t>𝐴</m:t>
+                        </m:r>
+                      </m:oMath>
+                    </m:oMathPara>
+                  </a14:m>
+                  <a:endParaRPr lang="en-US" dirty="0"/>
+                </a:p>
+              </p:txBody>
+            </p:sp>
+          </mc:Choice>
+          <mc:Fallback xmlns="">
+            <p:sp>
+              <p:nvSpPr>
+                <p:cNvPr id="198" name="TextBox 197">
+                  <a:extLst>
+                    <a:ext uri="{FF2B5EF4-FFF2-40B4-BE49-F238E27FC236}">
+                      <a16:creationId xmlns:a16="http://schemas.microsoft.com/office/drawing/2014/main" id="{5F8BBD95-CC36-0F7B-4420-D48D811414FE}"/>
+                    </a:ext>
+                    <a:ext uri="{C183D7F6-B498-43B3-948B-1728B52AA6E4}">
+                      <adec:decorative xmlns:adec="http://schemas.microsoft.com/office/drawing/2017/decorative" val="1"/>
+                    </a:ext>
+                  </a:extLst>
+                </p:cNvPr>
+                <p:cNvSpPr txBox="1">
+                  <a:spLocks noRot="1" noChangeAspect="1" noMove="1" noResize="1" noEditPoints="1" noAdjustHandles="1" noChangeArrowheads="1" noChangeShapeType="1" noTextEdit="1"/>
+                </p:cNvSpPr>
+                <p:nvPr/>
+              </p:nvSpPr>
+              <p:spPr>
+                <a:xfrm>
+                  <a:off x="3182394" y="3851318"/>
+                  <a:ext cx="385683" cy="369332"/>
+                </a:xfrm>
+                <a:prstGeom prst="rect">
+                  <a:avLst/>
+                </a:prstGeom>
+                <a:blipFill>
+                  <a:blip r:embed="rId9"/>
+                  <a:stretch>
+                    <a:fillRect/>
+                  </a:stretch>
+                </a:blipFill>
+              </p:spPr>
+              <p:txBody>
+                <a:bodyPr/>
+                <a:lstStyle/>
+                <a:p>
+                  <a:r>
+                    <a:rPr lang="en-US">
+                      <a:noFill/>
+                    </a:rPr>
+                    <a:t> </a:t>
+                  </a:r>
+                </a:p>
+              </p:txBody>
+            </p:sp>
+          </mc:Fallback>
+        </mc:AlternateContent>
+        <p:sp>
+          <p:nvSpPr>
+            <p:cNvPr id="15" name="Right Brace 14">
+              <a:extLst>
+                <a:ext uri="{FF2B5EF4-FFF2-40B4-BE49-F238E27FC236}">
+                  <a16:creationId xmlns:a16="http://schemas.microsoft.com/office/drawing/2014/main" id="{2CB9A9E0-78D5-B59D-111A-5D705578C964}"/>
+                </a:ext>
+                <a:ext uri="{C183D7F6-B498-43B3-948B-1728B52AA6E4}">
+                  <adec:decorative xmlns:adec="http://schemas.microsoft.com/office/drawing/2017/decorative" val="1"/>
+                </a:ext>
+              </a:extLst>
+            </p:cNvPr>
+            <p:cNvSpPr/>
+            <p:nvPr/>
+          </p:nvSpPr>
+          <p:spPr>
+            <a:xfrm>
+              <a:off x="3515217" y="4209556"/>
+              <a:ext cx="113460" cy="1038077"/>
+            </a:xfrm>
+            <a:prstGeom prst="rightBrace">
+              <a:avLst/>
+            </a:prstGeom>
+          </p:spPr>
+          <p:style>
+            <a:lnRef idx="3">
+              <a:schemeClr val="accent6"/>
+            </a:lnRef>
+            <a:fillRef idx="0">
+              <a:schemeClr val="accent6"/>
+            </a:fillRef>
+            <a:effectRef idx="2">
+              <a:schemeClr val="accent6"/>
+            </a:effectRef>
+            <a:fontRef idx="minor">
+              <a:schemeClr val="tx1"/>
+            </a:fontRef>
+          </p:style>
+          <p:txBody>
+            <a:bodyPr rtlCol="0" anchor="ctr"/>
+            <a:lstStyle/>
+            <a:p>
+              <a:pPr algn="ctr"/>
+              <a:endParaRPr lang="en-US"/>
+            </a:p>
+          </p:txBody>
+        </p:sp>
+      </p:grpSp>
     </p:spTree>
     <p:extLst>
       <p:ext uri="{BB962C8B-B14F-4D97-AF65-F5344CB8AC3E}">
@@ -20503,8 +23619,8 @@
           </a:p>
         </p:txBody>
       </p:sp>
-      <mc:AlternateContent xmlns:mc="http://schemas.openxmlformats.org/markup-compatibility/2006">
-        <mc:Choice xmlns:a14="http://schemas.microsoft.com/office/drawing/2010/main" Requires="a14">
+      <mc:AlternateContent xmlns:mc="http://schemas.openxmlformats.org/markup-compatibility/2006" xmlns:a14="http://schemas.microsoft.com/office/drawing/2010/main">
+        <mc:Choice Requires="a14">
           <p:sp>
             <p:nvSpPr>
               <p:cNvPr id="5" name="Content Placeholder 4">
@@ -21593,16 +24709,7 @@
                               <a:rPr lang="en-US" b="0" i="0" smtClean="0">
                                 <a:latin typeface="Cambria Math" panose="02040503050406030204" pitchFamily="18" charset="0"/>
                               </a:rPr>
-                              <m:t>arg</m:t>
-                            </m:r>
-                            <m:r>
-                              <m:rPr>
-                                <m:sty m:val="p"/>
-                              </m:rPr>
-                              <a:rPr lang="en-US" b="0" i="0" smtClean="0">
-                                <a:latin typeface="Cambria Math" panose="02040503050406030204" pitchFamily="18" charset="0"/>
-                              </a:rPr>
-                              <m:t>max</m:t>
+                              <m:t>argmax</m:t>
                             </m:r>
                           </m:e>
                           <m:lim>
@@ -21749,7 +24856,7 @@
             </p:txBody>
           </p:sp>
         </mc:Choice>
-        <mc:Fallback>
+        <mc:Fallback xmlns="">
           <p:sp>
             <p:nvSpPr>
               <p:cNvPr id="5" name="Content Placeholder 4">
@@ -21935,8 +25042,8 @@
           </a:p>
         </p:txBody>
       </p:sp>
-      <mc:AlternateContent xmlns:mc="http://schemas.openxmlformats.org/markup-compatibility/2006">
-        <mc:Choice xmlns:a14="http://schemas.microsoft.com/office/drawing/2010/main" Requires="a14">
+      <mc:AlternateContent xmlns:mc="http://schemas.openxmlformats.org/markup-compatibility/2006" xmlns:a14="http://schemas.microsoft.com/office/drawing/2010/main">
+        <mc:Choice Requires="a14">
           <p:sp>
             <p:nvSpPr>
               <p:cNvPr id="3" name="Content Placeholder 2">
@@ -22022,7 +25129,7 @@
             </p:txBody>
           </p:sp>
         </mc:Choice>
-        <mc:Fallback>
+        <mc:Fallback xmlns="">
           <p:sp>
             <p:nvSpPr>
               <p:cNvPr id="3" name="Content Placeholder 2">
@@ -22292,8 +25399,8 @@
           </a:p>
         </p:txBody>
       </p:sp>
-      <mc:AlternateContent xmlns:mc="http://schemas.openxmlformats.org/markup-compatibility/2006">
-        <mc:Choice xmlns:a14="http://schemas.microsoft.com/office/drawing/2010/main" Requires="a14">
+      <mc:AlternateContent xmlns:mc="http://schemas.openxmlformats.org/markup-compatibility/2006" xmlns:a14="http://schemas.microsoft.com/office/drawing/2010/main">
+        <mc:Choice Requires="a14">
           <p:sp>
             <p:nvSpPr>
               <p:cNvPr id="3" name="Content Placeholder 2">
@@ -22512,7 +25619,7 @@
             </p:txBody>
           </p:sp>
         </mc:Choice>
-        <mc:Fallback>
+        <mc:Fallback xmlns="">
           <p:sp>
             <p:nvSpPr>
               <p:cNvPr id="3" name="Content Placeholder 2">
@@ -22610,8 +25717,8 @@
           </a:p>
         </p:txBody>
       </p:sp>
-      <mc:AlternateContent xmlns:mc="http://schemas.openxmlformats.org/markup-compatibility/2006" xmlns:a14="http://schemas.microsoft.com/office/drawing/2010/main">
-        <mc:Choice Requires="a14">
+      <mc:AlternateContent xmlns:mc="http://schemas.openxmlformats.org/markup-compatibility/2006">
+        <mc:Choice xmlns:a14="http://schemas.microsoft.com/office/drawing/2010/main" Requires="a14">
           <p:sp>
             <p:nvSpPr>
               <p:cNvPr id="5" name="Content Placeholder 4">
@@ -22636,8 +25743,12 @@
               <a:lstStyle/>
               <a:p>
                 <a:r>
+                  <a:rPr lang="en-US" b="1" dirty="0"/>
+                  <a:t>Issue</a:t>
+                </a:r>
+                <a:r>
                   <a:rPr lang="en-US" dirty="0"/>
-                  <a:t>Issue: Tabular methods do not scale for large state spaces.</a:t>
+                  <a:t>: Tabular methods do not scale for large state spaces.</a:t>
                 </a:r>
               </a:p>
               <a:p>
@@ -22665,8 +25776,12 @@
               </a:p>
               <a:p>
                 <a:r>
+                  <a:rPr lang="en-US" b="1" dirty="0"/>
+                  <a:t>Idea</a:t>
+                </a:r>
+                <a:r>
                   <a:rPr lang="en-US" dirty="0"/>
-                  <a:t>Idea: try to find an approximate value function for policy </a:t>
+                  <a:t>: try to find an approximate value function for policy </a:t>
                 </a:r>
                 <a14:m>
                   <m:oMath xmlns:m="http://schemas.openxmlformats.org/officeDocument/2006/math">
@@ -22849,7 +25964,7 @@
             </p:txBody>
           </p:sp>
         </mc:Choice>
-        <mc:Fallback xmlns="">
+        <mc:Fallback>
           <p:sp>
             <p:nvSpPr>
               <p:cNvPr id="5" name="Content Placeholder 4">
@@ -23876,8 +26991,8 @@
           </p:sp>
         </mc:Fallback>
       </mc:AlternateContent>
-      <mc:AlternateContent xmlns:mc="http://schemas.openxmlformats.org/markup-compatibility/2006">
-        <mc:Choice xmlns:a14="http://schemas.microsoft.com/office/drawing/2010/main" Requires="a14">
+      <mc:AlternateContent xmlns:mc="http://schemas.openxmlformats.org/markup-compatibility/2006" xmlns:a14="http://schemas.microsoft.com/office/drawing/2010/main">
+        <mc:Choice Requires="a14">
           <p:sp>
             <p:nvSpPr>
               <p:cNvPr id="3" name="Content Placeholder 2">
@@ -24056,19 +27171,7 @@
                       <a:rPr lang="en-US" b="0" i="1" smtClean="0">
                         <a:latin typeface="Cambria Math" panose="02040503050406030204" pitchFamily="18" charset="0"/>
                       </a:rPr>
-                      <m:t>≥</m:t>
-                    </m:r>
-                    <m:r>
-                      <a:rPr lang="en-US" b="0" i="1" smtClean="0">
-                        <a:latin typeface="Cambria Math" panose="02040503050406030204" pitchFamily="18" charset="0"/>
-                      </a:rPr>
-                      <m:t>0</m:t>
-                    </m:r>
-                    <m:r>
-                      <a:rPr lang="en-US" b="0" i="1" smtClean="0">
-                        <a:latin typeface="Cambria Math" panose="02040503050406030204" pitchFamily="18" charset="0"/>
-                      </a:rPr>
-                      <m:t>;</m:t>
+                      <m:t>≥0;</m:t>
                     </m:r>
                     <m:nary>
                       <m:naryPr>
@@ -24119,13 +27222,7 @@
                       <a:rPr lang="en-US" b="0" i="1" smtClean="0">
                         <a:latin typeface="Cambria Math" panose="02040503050406030204" pitchFamily="18" charset="0"/>
                       </a:rPr>
-                      <m:t>=</m:t>
-                    </m:r>
-                    <m:r>
-                      <a:rPr lang="en-US" b="0" i="1" smtClean="0">
-                        <a:latin typeface="Cambria Math" panose="02040503050406030204" pitchFamily="18" charset="0"/>
-                      </a:rPr>
-                      <m:t>1</m:t>
+                      <m:t>=1</m:t>
                     </m:r>
                   </m:oMath>
                 </a14:m>
@@ -24432,7 +27529,7 @@
             </p:txBody>
           </p:sp>
         </mc:Choice>
-        <mc:Fallback>
+        <mc:Fallback xmlns="">
           <p:sp>
             <p:nvSpPr>
               <p:cNvPr id="3" name="Content Placeholder 2">
@@ -24985,8 +28082,8 @@
           </a:p>
         </p:txBody>
       </p:sp>
-      <mc:AlternateContent xmlns:mc="http://schemas.openxmlformats.org/markup-compatibility/2006">
-        <mc:Choice xmlns:a14="http://schemas.microsoft.com/office/drawing/2010/main" Requires="a14">
+      <mc:AlternateContent xmlns:mc="http://schemas.openxmlformats.org/markup-compatibility/2006" xmlns:a14="http://schemas.microsoft.com/office/drawing/2010/main">
+        <mc:Choice Requires="a14">
           <p:sp>
             <p:nvSpPr>
               <p:cNvPr id="3" name="Content Placeholder 2">
@@ -25620,7 +28717,7 @@
             </p:txBody>
           </p:sp>
         </mc:Choice>
-        <mc:Fallback>
+        <mc:Fallback xmlns="">
           <p:sp>
             <p:nvSpPr>
               <p:cNvPr id="3" name="Content Placeholder 2">

--- a/slides/Lecture_Chapter09.pptx
+++ b/slides/Lecture_Chapter09.pptx
@@ -6,36 +6,37 @@
   </p:sldMasterIdLst>
   <p:sldIdLst>
     <p:sldId id="256" r:id="rId2"/>
-    <p:sldId id="384" r:id="rId3"/>
-    <p:sldId id="393" r:id="rId4"/>
-    <p:sldId id="394" r:id="rId5"/>
-    <p:sldId id="395" r:id="rId6"/>
-    <p:sldId id="396" r:id="rId7"/>
-    <p:sldId id="397" r:id="rId8"/>
-    <p:sldId id="398" r:id="rId9"/>
-    <p:sldId id="399" r:id="rId10"/>
-    <p:sldId id="400" r:id="rId11"/>
-    <p:sldId id="401" r:id="rId12"/>
-    <p:sldId id="405" r:id="rId13"/>
-    <p:sldId id="403" r:id="rId14"/>
-    <p:sldId id="402" r:id="rId15"/>
-    <p:sldId id="404" r:id="rId16"/>
-    <p:sldId id="406" r:id="rId17"/>
-    <p:sldId id="407" r:id="rId18"/>
-    <p:sldId id="409" r:id="rId19"/>
-    <p:sldId id="413" r:id="rId20"/>
-    <p:sldId id="417" r:id="rId21"/>
-    <p:sldId id="418" r:id="rId22"/>
-    <p:sldId id="412" r:id="rId23"/>
-    <p:sldId id="420" r:id="rId24"/>
-    <p:sldId id="410" r:id="rId25"/>
-    <p:sldId id="411" r:id="rId26"/>
-    <p:sldId id="414" r:id="rId27"/>
-    <p:sldId id="421" r:id="rId28"/>
-    <p:sldId id="415" r:id="rId29"/>
-    <p:sldId id="422" r:id="rId30"/>
-    <p:sldId id="423" r:id="rId31"/>
-    <p:sldId id="424" r:id="rId32"/>
+    <p:sldId id="313" r:id="rId3"/>
+    <p:sldId id="478" r:id="rId4"/>
+    <p:sldId id="393" r:id="rId5"/>
+    <p:sldId id="394" r:id="rId6"/>
+    <p:sldId id="395" r:id="rId7"/>
+    <p:sldId id="396" r:id="rId8"/>
+    <p:sldId id="397" r:id="rId9"/>
+    <p:sldId id="398" r:id="rId10"/>
+    <p:sldId id="399" r:id="rId11"/>
+    <p:sldId id="400" r:id="rId12"/>
+    <p:sldId id="401" r:id="rId13"/>
+    <p:sldId id="405" r:id="rId14"/>
+    <p:sldId id="403" r:id="rId15"/>
+    <p:sldId id="402" r:id="rId16"/>
+    <p:sldId id="404" r:id="rId17"/>
+    <p:sldId id="406" r:id="rId18"/>
+    <p:sldId id="407" r:id="rId19"/>
+    <p:sldId id="409" r:id="rId20"/>
+    <p:sldId id="413" r:id="rId21"/>
+    <p:sldId id="417" r:id="rId22"/>
+    <p:sldId id="418" r:id="rId23"/>
+    <p:sldId id="412" r:id="rId24"/>
+    <p:sldId id="420" r:id="rId25"/>
+    <p:sldId id="410" r:id="rId26"/>
+    <p:sldId id="411" r:id="rId27"/>
+    <p:sldId id="414" r:id="rId28"/>
+    <p:sldId id="421" r:id="rId29"/>
+    <p:sldId id="415" r:id="rId30"/>
+    <p:sldId id="422" r:id="rId31"/>
+    <p:sldId id="423" r:id="rId32"/>
+    <p:sldId id="424" r:id="rId33"/>
   </p:sldIdLst>
   <p:sldSz cx="12192000" cy="6858000"/>
   <p:notesSz cx="6858000" cy="9144000"/>
@@ -140,7 +141,8 @@
         <p14:section name="Default Section" id="{83286E67-F0F0-421C-8F74-7B93ABA17FBF}">
           <p14:sldIdLst>
             <p14:sldId id="256"/>
-            <p14:sldId id="384"/>
+            <p14:sldId id="313"/>
+            <p14:sldId id="478"/>
             <p14:sldId id="393"/>
             <p14:sldId id="394"/>
             <p14:sldId id="395"/>
@@ -328,7 +330,7 @@
           <a:p>
             <a:fld id="{3E22BF2E-04DA-469E-97C5-BB68A0368813}" type="datetimeFigureOut">
               <a:rPr lang="en-US" smtClean="0"/>
-              <a:t>11/29/2025</a:t>
+              <a:t>2/6/2026</a:t>
             </a:fld>
             <a:endParaRPr lang="en-US"/>
           </a:p>
@@ -526,7 +528,7 @@
           <a:p>
             <a:fld id="{3E22BF2E-04DA-469E-97C5-BB68A0368813}" type="datetimeFigureOut">
               <a:rPr lang="en-US" smtClean="0"/>
-              <a:t>11/29/2025</a:t>
+              <a:t>2/6/2026</a:t>
             </a:fld>
             <a:endParaRPr lang="en-US"/>
           </a:p>
@@ -734,7 +736,7 @@
           <a:p>
             <a:fld id="{3E22BF2E-04DA-469E-97C5-BB68A0368813}" type="datetimeFigureOut">
               <a:rPr lang="en-US" smtClean="0"/>
-              <a:t>11/29/2025</a:t>
+              <a:t>2/6/2026</a:t>
             </a:fld>
             <a:endParaRPr lang="en-US"/>
           </a:p>
@@ -942,7 +944,7 @@
           <a:p>
             <a:fld id="{3E22BF2E-04DA-469E-97C5-BB68A0368813}" type="datetimeFigureOut">
               <a:rPr lang="en-US" smtClean="0"/>
-              <a:t>11/29/2025</a:t>
+              <a:t>2/6/2026</a:t>
             </a:fld>
             <a:endParaRPr lang="en-US"/>
           </a:p>
@@ -1217,7 +1219,7 @@
           <a:p>
             <a:fld id="{3E22BF2E-04DA-469E-97C5-BB68A0368813}" type="datetimeFigureOut">
               <a:rPr lang="en-US" smtClean="0"/>
-              <a:t>11/29/2025</a:t>
+              <a:t>2/6/2026</a:t>
             </a:fld>
             <a:endParaRPr lang="en-US"/>
           </a:p>
@@ -1482,7 +1484,7 @@
           <a:p>
             <a:fld id="{3E22BF2E-04DA-469E-97C5-BB68A0368813}" type="datetimeFigureOut">
               <a:rPr lang="en-US" smtClean="0"/>
-              <a:t>11/29/2025</a:t>
+              <a:t>2/6/2026</a:t>
             </a:fld>
             <a:endParaRPr lang="en-US"/>
           </a:p>
@@ -1894,7 +1896,7 @@
           <a:p>
             <a:fld id="{3E22BF2E-04DA-469E-97C5-BB68A0368813}" type="datetimeFigureOut">
               <a:rPr lang="en-US" smtClean="0"/>
-              <a:t>11/29/2025</a:t>
+              <a:t>2/6/2026</a:t>
             </a:fld>
             <a:endParaRPr lang="en-US"/>
           </a:p>
@@ -2035,7 +2037,7 @@
           <a:p>
             <a:fld id="{3E22BF2E-04DA-469E-97C5-BB68A0368813}" type="datetimeFigureOut">
               <a:rPr lang="en-US" smtClean="0"/>
-              <a:t>11/29/2025</a:t>
+              <a:t>2/6/2026</a:t>
             </a:fld>
             <a:endParaRPr lang="en-US"/>
           </a:p>
@@ -2148,7 +2150,7 @@
           <a:p>
             <a:fld id="{3E22BF2E-04DA-469E-97C5-BB68A0368813}" type="datetimeFigureOut">
               <a:rPr lang="en-US" smtClean="0"/>
-              <a:t>11/29/2025</a:t>
+              <a:t>2/6/2026</a:t>
             </a:fld>
             <a:endParaRPr lang="en-US"/>
           </a:p>
@@ -2459,7 +2461,7 @@
           <a:p>
             <a:fld id="{3E22BF2E-04DA-469E-97C5-BB68A0368813}" type="datetimeFigureOut">
               <a:rPr lang="en-US" smtClean="0"/>
-              <a:t>11/29/2025</a:t>
+              <a:t>2/6/2026</a:t>
             </a:fld>
             <a:endParaRPr lang="en-US"/>
           </a:p>
@@ -2747,7 +2749,7 @@
           <a:p>
             <a:fld id="{3E22BF2E-04DA-469E-97C5-BB68A0368813}" type="datetimeFigureOut">
               <a:rPr lang="en-US" smtClean="0"/>
-              <a:t>11/29/2025</a:t>
+              <a:t>2/6/2026</a:t>
             </a:fld>
             <a:endParaRPr lang="en-US"/>
           </a:p>
@@ -2988,7 +2990,7 @@
           <a:p>
             <a:fld id="{3E22BF2E-04DA-469E-97C5-BB68A0368813}" type="datetimeFigureOut">
               <a:rPr lang="en-US" smtClean="0"/>
-              <a:t>11/29/2025</a:t>
+              <a:t>2/6/2026</a:t>
             </a:fld>
             <a:endParaRPr lang="en-US"/>
           </a:p>
@@ -4042,6 +4044,739 @@
           <a:chExt cx="0" cy="0"/>
         </a:xfrm>
       </p:grpSpPr>
+      <p:sp>
+        <p:nvSpPr>
+          <p:cNvPr id="2" name="Title 1">
+            <a:extLst>
+              <a:ext uri="{FF2B5EF4-FFF2-40B4-BE49-F238E27FC236}">
+                <a16:creationId xmlns:a16="http://schemas.microsoft.com/office/drawing/2014/main" id="{A1B4BBCF-186E-BC4F-CAA3-DBB46E3E57A9}"/>
+              </a:ext>
+            </a:extLst>
+          </p:cNvPr>
+          <p:cNvSpPr>
+            <a:spLocks noGrp="1"/>
+          </p:cNvSpPr>
+          <p:nvPr>
+            <p:ph type="title"/>
+          </p:nvPr>
+        </p:nvSpPr>
+        <p:spPr/>
+        <p:txBody>
+          <a:bodyPr/>
+          <a:lstStyle/>
+          <a:p>
+            <a:r>
+              <a:rPr lang="en-US" dirty="0"/>
+              <a:t>Learning Method</a:t>
+            </a:r>
+          </a:p>
+        </p:txBody>
+      </p:sp>
+      <mc:AlternateContent xmlns:mc="http://schemas.openxmlformats.org/markup-compatibility/2006" xmlns:a14="http://schemas.microsoft.com/office/drawing/2010/main">
+        <mc:Choice Requires="a14">
+          <p:sp>
+            <p:nvSpPr>
+              <p:cNvPr id="3" name="Content Placeholder 2">
+                <a:extLst>
+                  <a:ext uri="{FF2B5EF4-FFF2-40B4-BE49-F238E27FC236}">
+                    <a16:creationId xmlns:a16="http://schemas.microsoft.com/office/drawing/2014/main" id="{429671F6-58E1-5895-8D89-7778F6212AA2}"/>
+                  </a:ext>
+                </a:extLst>
+              </p:cNvPr>
+              <p:cNvSpPr>
+                <a:spLocks noGrp="1"/>
+              </p:cNvSpPr>
+              <p:nvPr>
+                <p:ph idx="1"/>
+              </p:nvPr>
+            </p:nvSpPr>
+            <p:spPr/>
+            <p:txBody>
+              <a:bodyPr>
+                <a:normAutofit lnSpcReduction="10000"/>
+              </a:bodyPr>
+              <a:lstStyle/>
+              <a:p>
+                <a:pPr marL="0" indent="0">
+                  <a:buNone/>
+                </a:pPr>
+                <a:r>
+                  <a:rPr lang="en-US" b="1" dirty="0"/>
+                  <a:t>Setup</a:t>
+                </a:r>
+              </a:p>
+              <a:p>
+                <a:r>
+                  <a:rPr lang="en-US" dirty="0"/>
+                  <a:t>We use </a:t>
+                </a:r>
+                <a14:m>
+                  <m:oMath xmlns:m="http://schemas.openxmlformats.org/officeDocument/2006/math">
+                    <m:r>
+                      <a:rPr lang="en-US" b="1" i="1">
+                        <a:latin typeface="Cambria Math" panose="02040503050406030204" pitchFamily="18" charset="0"/>
+                      </a:rPr>
+                      <m:t>𝒘</m:t>
+                    </m:r>
+                    <m:r>
+                      <a:rPr lang="en-US" b="1" i="1">
+                        <a:latin typeface="Cambria Math" panose="02040503050406030204" pitchFamily="18" charset="0"/>
+                      </a:rPr>
+                      <m:t> </m:t>
+                    </m:r>
+                    <m:r>
+                      <a:rPr lang="en-US" i="1">
+                        <a:latin typeface="Cambria Math" panose="02040503050406030204" pitchFamily="18" charset="0"/>
+                      </a:rPr>
+                      <m:t>≝</m:t>
+                    </m:r>
+                    <m:sSup>
+                      <m:sSupPr>
+                        <m:ctrlPr>
+                          <a:rPr lang="en-US" i="1">
+                            <a:latin typeface="Cambria Math" panose="02040503050406030204" pitchFamily="18" charset="0"/>
+                          </a:rPr>
+                        </m:ctrlPr>
+                      </m:sSupPr>
+                      <m:e>
+                        <m:d>
+                          <m:dPr>
+                            <m:ctrlPr>
+                              <a:rPr lang="en-US" i="1">
+                                <a:latin typeface="Cambria Math" panose="02040503050406030204" pitchFamily="18" charset="0"/>
+                              </a:rPr>
+                            </m:ctrlPr>
+                          </m:dPr>
+                          <m:e>
+                            <m:sSub>
+                              <m:sSubPr>
+                                <m:ctrlPr>
+                                  <a:rPr lang="en-US" i="1">
+                                    <a:latin typeface="Cambria Math" panose="02040503050406030204" pitchFamily="18" charset="0"/>
+                                  </a:rPr>
+                                </m:ctrlPr>
+                              </m:sSubPr>
+                              <m:e>
+                                <m:r>
+                                  <a:rPr lang="en-US" i="1">
+                                    <a:latin typeface="Cambria Math" panose="02040503050406030204" pitchFamily="18" charset="0"/>
+                                  </a:rPr>
+                                  <m:t>𝑤</m:t>
+                                </m:r>
+                              </m:e>
+                              <m:sub>
+                                <m:r>
+                                  <a:rPr lang="en-US" i="1">
+                                    <a:latin typeface="Cambria Math" panose="02040503050406030204" pitchFamily="18" charset="0"/>
+                                  </a:rPr>
+                                  <m:t>1</m:t>
+                                </m:r>
+                              </m:sub>
+                            </m:sSub>
+                            <m:r>
+                              <a:rPr lang="en-US" i="1">
+                                <a:latin typeface="Cambria Math" panose="02040503050406030204" pitchFamily="18" charset="0"/>
+                              </a:rPr>
+                              <m:t>,</m:t>
+                            </m:r>
+                            <m:sSub>
+                              <m:sSubPr>
+                                <m:ctrlPr>
+                                  <a:rPr lang="en-US" i="1">
+                                    <a:latin typeface="Cambria Math" panose="02040503050406030204" pitchFamily="18" charset="0"/>
+                                  </a:rPr>
+                                </m:ctrlPr>
+                              </m:sSubPr>
+                              <m:e>
+                                <m:r>
+                                  <a:rPr lang="en-US" i="1">
+                                    <a:latin typeface="Cambria Math" panose="02040503050406030204" pitchFamily="18" charset="0"/>
+                                  </a:rPr>
+                                  <m:t>𝑤</m:t>
+                                </m:r>
+                              </m:e>
+                              <m:sub>
+                                <m:r>
+                                  <a:rPr lang="en-US" i="1">
+                                    <a:latin typeface="Cambria Math" panose="02040503050406030204" pitchFamily="18" charset="0"/>
+                                  </a:rPr>
+                                  <m:t>2</m:t>
+                                </m:r>
+                              </m:sub>
+                            </m:sSub>
+                            <m:r>
+                              <a:rPr lang="en-US" i="1">
+                                <a:latin typeface="Cambria Math" panose="02040503050406030204" pitchFamily="18" charset="0"/>
+                              </a:rPr>
+                              <m:t>,…,</m:t>
+                            </m:r>
+                            <m:sSub>
+                              <m:sSubPr>
+                                <m:ctrlPr>
+                                  <a:rPr lang="en-US" i="1">
+                                    <a:latin typeface="Cambria Math" panose="02040503050406030204" pitchFamily="18" charset="0"/>
+                                  </a:rPr>
+                                </m:ctrlPr>
+                              </m:sSubPr>
+                              <m:e>
+                                <m:r>
+                                  <a:rPr lang="en-US" i="1">
+                                    <a:latin typeface="Cambria Math" panose="02040503050406030204" pitchFamily="18" charset="0"/>
+                                  </a:rPr>
+                                  <m:t>𝑤</m:t>
+                                </m:r>
+                              </m:e>
+                              <m:sub>
+                                <m:r>
+                                  <a:rPr lang="en-US" i="1">
+                                    <a:latin typeface="Cambria Math" panose="02040503050406030204" pitchFamily="18" charset="0"/>
+                                  </a:rPr>
+                                  <m:t>𝑑</m:t>
+                                </m:r>
+                              </m:sub>
+                            </m:sSub>
+                          </m:e>
+                        </m:d>
+                      </m:e>
+                      <m:sup>
+                        <m:r>
+                          <a:rPr lang="en-US" i="1">
+                            <a:latin typeface="Cambria Math" panose="02040503050406030204" pitchFamily="18" charset="0"/>
+                          </a:rPr>
+                          <m:t>⊤</m:t>
+                        </m:r>
+                      </m:sup>
+                    </m:sSup>
+                    <m:r>
+                      <a:rPr lang="en-US" i="1">
+                        <a:latin typeface="Cambria Math" panose="02040503050406030204" pitchFamily="18" charset="0"/>
+                        <a:ea typeface="Cambria Math" panose="02040503050406030204" pitchFamily="18" charset="0"/>
+                      </a:rPr>
+                      <m:t> </m:t>
+                    </m:r>
+                  </m:oMath>
+                </a14:m>
+                <a:endParaRPr lang="en-US" dirty="0"/>
+              </a:p>
+              <a:p>
+                <a:r>
+                  <a:rPr lang="en-US" dirty="0"/>
+                  <a:t>C</a:t>
+                </a:r>
+                <a14:m>
+                  <m:oMath xmlns:m="http://schemas.openxmlformats.org/officeDocument/2006/math">
+                    <m:r>
+                      <m:rPr>
+                        <m:sty m:val="p"/>
+                      </m:rPr>
+                      <a:rPr lang="en-US" b="0" i="0" smtClean="0">
+                        <a:latin typeface="Cambria Math" panose="02040503050406030204" pitchFamily="18" charset="0"/>
+                      </a:rPr>
+                      <m:t>hoo</m:t>
+                    </m:r>
+                    <m:r>
+                      <a:rPr lang="en-US" b="0" i="1" smtClean="0">
+                        <a:latin typeface="Cambria Math" panose="02040503050406030204" pitchFamily="18" charset="0"/>
+                      </a:rPr>
+                      <m:t>𝑠𝑒</m:t>
+                    </m:r>
+                    <m:r>
+                      <a:rPr lang="en-US" b="0" i="1" smtClean="0">
+                        <a:latin typeface="Cambria Math" panose="02040503050406030204" pitchFamily="18" charset="0"/>
+                      </a:rPr>
+                      <m:t> </m:t>
+                    </m:r>
+                    <m:acc>
+                      <m:accPr>
+                        <m:chr m:val="̂"/>
+                        <m:ctrlPr>
+                          <a:rPr lang="en-US" i="1">
+                            <a:latin typeface="Cambria Math" panose="02040503050406030204" pitchFamily="18" charset="0"/>
+                          </a:rPr>
+                        </m:ctrlPr>
+                      </m:accPr>
+                      <m:e>
+                        <m:r>
+                          <a:rPr lang="en-US" i="1">
+                            <a:latin typeface="Cambria Math" panose="02040503050406030204" pitchFamily="18" charset="0"/>
+                          </a:rPr>
+                          <m:t>𝑣</m:t>
+                        </m:r>
+                      </m:e>
+                    </m:acc>
+                    <m:d>
+                      <m:dPr>
+                        <m:ctrlPr>
+                          <a:rPr lang="en-US" i="1" dirty="0">
+                            <a:latin typeface="Cambria Math" panose="02040503050406030204" pitchFamily="18" charset="0"/>
+                          </a:rPr>
+                        </m:ctrlPr>
+                      </m:dPr>
+                      <m:e>
+                        <m:r>
+                          <a:rPr lang="en-US" i="1">
+                            <a:latin typeface="Cambria Math" panose="02040503050406030204" pitchFamily="18" charset="0"/>
+                          </a:rPr>
+                          <m:t>𝑠</m:t>
+                        </m:r>
+                        <m:r>
+                          <a:rPr lang="en-US" i="1">
+                            <a:latin typeface="Cambria Math" panose="02040503050406030204" pitchFamily="18" charset="0"/>
+                          </a:rPr>
+                          <m:t>,</m:t>
+                        </m:r>
+                        <m:r>
+                          <a:rPr lang="en-US" b="1" i="1">
+                            <a:latin typeface="Cambria Math" panose="02040503050406030204" pitchFamily="18" charset="0"/>
+                          </a:rPr>
+                          <m:t>𝒘</m:t>
+                        </m:r>
+                      </m:e>
+                    </m:d>
+                    <m:r>
+                      <a:rPr lang="en-US" i="1">
+                        <a:latin typeface="Cambria Math" panose="02040503050406030204" pitchFamily="18" charset="0"/>
+                      </a:rPr>
+                      <m:t>≈</m:t>
+                    </m:r>
+                    <m:sSub>
+                      <m:sSubPr>
+                        <m:ctrlPr>
+                          <a:rPr lang="en-US" i="1">
+                            <a:latin typeface="Cambria Math" panose="02040503050406030204" pitchFamily="18" charset="0"/>
+                          </a:rPr>
+                        </m:ctrlPr>
+                      </m:sSubPr>
+                      <m:e>
+                        <m:r>
+                          <a:rPr lang="en-US" i="1">
+                            <a:latin typeface="Cambria Math" panose="02040503050406030204" pitchFamily="18" charset="0"/>
+                          </a:rPr>
+                          <m:t>𝑣</m:t>
+                        </m:r>
+                      </m:e>
+                      <m:sub>
+                        <m:r>
+                          <a:rPr lang="en-US" i="1">
+                            <a:latin typeface="Cambria Math" panose="02040503050406030204" pitchFamily="18" charset="0"/>
+                          </a:rPr>
+                          <m:t>𝜋</m:t>
+                        </m:r>
+                      </m:sub>
+                    </m:sSub>
+                  </m:oMath>
+                </a14:m>
+                <a:r>
+                  <a:rPr lang="en-US" dirty="0"/>
+                  <a:t> as a </a:t>
+                </a:r>
+                <a:r>
+                  <a:rPr lang="en-US" b="1" dirty="0"/>
+                  <a:t>differentiable function </a:t>
+                </a:r>
+                <a:r>
+                  <a:rPr lang="en-US" dirty="0"/>
+                  <a:t>of </a:t>
+                </a:r>
+                <a14:m>
+                  <m:oMath xmlns:m="http://schemas.openxmlformats.org/officeDocument/2006/math">
+                    <m:r>
+                      <a:rPr lang="en-US" b="1" i="1" smtClean="0">
+                        <a:latin typeface="Cambria Math" panose="02040503050406030204" pitchFamily="18" charset="0"/>
+                      </a:rPr>
+                      <m:t>𝒘</m:t>
+                    </m:r>
+                  </m:oMath>
+                </a14:m>
+                <a:r>
+                  <a:rPr lang="en-US" dirty="0"/>
+                  <a:t> for all </a:t>
+                </a:r>
+                <a14:m>
+                  <m:oMath xmlns:m="http://schemas.openxmlformats.org/officeDocument/2006/math">
+                    <m:r>
+                      <a:rPr lang="en-US" b="0" i="1" smtClean="0">
+                        <a:latin typeface="Cambria Math" panose="02040503050406030204" pitchFamily="18" charset="0"/>
+                      </a:rPr>
+                      <m:t>𝑠</m:t>
+                    </m:r>
+                    <m:r>
+                      <a:rPr lang="en-US" b="0" i="1" smtClean="0">
+                        <a:latin typeface="Cambria Math" panose="02040503050406030204" pitchFamily="18" charset="0"/>
+                        <a:ea typeface="Cambria Math" panose="02040503050406030204" pitchFamily="18" charset="0"/>
+                      </a:rPr>
+                      <m:t>=</m:t>
+                    </m:r>
+                    <m:r>
+                      <a:rPr lang="en-US" b="0" i="1" smtClean="0">
+                        <a:latin typeface="Cambria Math" panose="02040503050406030204" pitchFamily="18" charset="0"/>
+                        <a:ea typeface="Cambria Math" panose="02040503050406030204" pitchFamily="18" charset="0"/>
+                      </a:rPr>
+                      <m:t>𝒮</m:t>
+                    </m:r>
+                  </m:oMath>
+                </a14:m>
+                <a:endParaRPr lang="en-US" b="0" dirty="0">
+                  <a:ea typeface="Cambria Math" panose="02040503050406030204" pitchFamily="18" charset="0"/>
+                </a:endParaRPr>
+              </a:p>
+              <a:p>
+                <a:endParaRPr lang="en-US" dirty="0"/>
+              </a:p>
+              <a:p>
+                <a:pPr marL="0" indent="0">
+                  <a:buNone/>
+                </a:pPr>
+                <a:r>
+                  <a:rPr lang="en-US" b="1" dirty="0"/>
+                  <a:t>Updates</a:t>
+                </a:r>
+              </a:p>
+              <a:p>
+                <a:r>
+                  <a:rPr lang="en-US" dirty="0"/>
+                  <a:t>Following </a:t>
+                </a:r>
+                <a14:m>
+                  <m:oMath xmlns:m="http://schemas.openxmlformats.org/officeDocument/2006/math">
+                    <m:r>
+                      <a:rPr lang="en-US" b="0" i="1" smtClean="0">
+                        <a:latin typeface="Cambria Math" panose="02040503050406030204" pitchFamily="18" charset="0"/>
+                      </a:rPr>
+                      <m:t>𝜋</m:t>
+                    </m:r>
+                  </m:oMath>
+                </a14:m>
+                <a:r>
+                  <a:rPr lang="en-US" dirty="0"/>
+                  <a:t>, we observe at each discrete time step </a:t>
+                </a:r>
+                <a14:m>
+                  <m:oMath xmlns:m="http://schemas.openxmlformats.org/officeDocument/2006/math">
+                    <m:r>
+                      <a:rPr lang="en-US" b="0" i="1" smtClean="0">
+                        <a:latin typeface="Cambria Math" panose="02040503050406030204" pitchFamily="18" charset="0"/>
+                      </a:rPr>
+                      <m:t>𝑡</m:t>
+                    </m:r>
+                    <m:r>
+                      <a:rPr lang="en-US" b="0" i="1" smtClean="0">
+                        <a:latin typeface="Cambria Math" panose="02040503050406030204" pitchFamily="18" charset="0"/>
+                      </a:rPr>
+                      <m:t>=0, 1, 2, 3, …</m:t>
+                    </m:r>
+                    <m:r>
+                      <a:rPr lang="en-US" b="1" i="0" smtClean="0">
+                        <a:latin typeface="Cambria Math" panose="02040503050406030204" pitchFamily="18" charset="0"/>
+                      </a:rPr>
+                      <m:t> </m:t>
+                    </m:r>
+                  </m:oMath>
+                </a14:m>
+                <a:r>
+                  <a:rPr lang="en-US" dirty="0"/>
+                  <a:t>a new examples </a:t>
+                </a:r>
+                <a14:m>
+                  <m:oMath xmlns:m="http://schemas.openxmlformats.org/officeDocument/2006/math">
+                    <m:sSub>
+                      <m:sSubPr>
+                        <m:ctrlPr>
+                          <a:rPr lang="en-US" b="0" i="1" smtClean="0">
+                            <a:latin typeface="Cambria Math" panose="02040503050406030204" pitchFamily="18" charset="0"/>
+                          </a:rPr>
+                        </m:ctrlPr>
+                      </m:sSubPr>
+                      <m:e>
+                        <m:r>
+                          <a:rPr lang="en-US" b="0" i="1" smtClean="0">
+                            <a:latin typeface="Cambria Math" panose="02040503050406030204" pitchFamily="18" charset="0"/>
+                          </a:rPr>
+                          <m:t>𝑆</m:t>
+                        </m:r>
+                      </m:e>
+                      <m:sub>
+                        <m:r>
+                          <a:rPr lang="en-US" b="0" i="1" smtClean="0">
+                            <a:latin typeface="Cambria Math" panose="02040503050406030204" pitchFamily="18" charset="0"/>
+                          </a:rPr>
+                          <m:t>𝑡</m:t>
+                        </m:r>
+                      </m:sub>
+                    </m:sSub>
+                    <m:r>
+                      <a:rPr lang="en-US" b="0" i="1" smtClean="0">
+                        <a:latin typeface="Cambria Math" panose="02040503050406030204" pitchFamily="18" charset="0"/>
+                        <a:ea typeface="Cambria Math" panose="02040503050406030204" pitchFamily="18" charset="0"/>
+                      </a:rPr>
+                      <m:t>↦</m:t>
+                    </m:r>
+                    <m:sSub>
+                      <m:sSubPr>
+                        <m:ctrlPr>
+                          <a:rPr lang="en-US" b="0" i="1" smtClean="0">
+                            <a:latin typeface="Cambria Math" panose="02040503050406030204" pitchFamily="18" charset="0"/>
+                            <a:ea typeface="Cambria Math" panose="02040503050406030204" pitchFamily="18" charset="0"/>
+                          </a:rPr>
+                        </m:ctrlPr>
+                      </m:sSubPr>
+                      <m:e>
+                        <m:r>
+                          <a:rPr lang="en-US" b="0" i="1" smtClean="0">
+                            <a:latin typeface="Cambria Math" panose="02040503050406030204" pitchFamily="18" charset="0"/>
+                            <a:ea typeface="Cambria Math" panose="02040503050406030204" pitchFamily="18" charset="0"/>
+                          </a:rPr>
+                          <m:t>𝑣</m:t>
+                        </m:r>
+                      </m:e>
+                      <m:sub>
+                        <m:r>
+                          <a:rPr lang="en-US" b="0" i="1" smtClean="0">
+                            <a:latin typeface="Cambria Math" panose="02040503050406030204" pitchFamily="18" charset="0"/>
+                            <a:ea typeface="Cambria Math" panose="02040503050406030204" pitchFamily="18" charset="0"/>
+                          </a:rPr>
+                          <m:t>𝜋</m:t>
+                        </m:r>
+                      </m:sub>
+                    </m:sSub>
+                    <m:r>
+                      <a:rPr lang="en-US" b="0" i="1" smtClean="0">
+                        <a:latin typeface="Cambria Math" panose="02040503050406030204" pitchFamily="18" charset="0"/>
+                        <a:ea typeface="Cambria Math" panose="02040503050406030204" pitchFamily="18" charset="0"/>
+                      </a:rPr>
+                      <m:t>(</m:t>
+                    </m:r>
+                    <m:sSub>
+                      <m:sSubPr>
+                        <m:ctrlPr>
+                          <a:rPr lang="en-US" b="0" i="1" smtClean="0">
+                            <a:latin typeface="Cambria Math" panose="02040503050406030204" pitchFamily="18" charset="0"/>
+                            <a:ea typeface="Cambria Math" panose="02040503050406030204" pitchFamily="18" charset="0"/>
+                          </a:rPr>
+                        </m:ctrlPr>
+                      </m:sSubPr>
+                      <m:e>
+                        <m:r>
+                          <a:rPr lang="en-US" b="0" i="1" smtClean="0">
+                            <a:latin typeface="Cambria Math" panose="02040503050406030204" pitchFamily="18" charset="0"/>
+                            <a:ea typeface="Cambria Math" panose="02040503050406030204" pitchFamily="18" charset="0"/>
+                          </a:rPr>
+                          <m:t>𝑆</m:t>
+                        </m:r>
+                      </m:e>
+                      <m:sub>
+                        <m:r>
+                          <a:rPr lang="en-US" b="0" i="1" smtClean="0">
+                            <a:latin typeface="Cambria Math" panose="02040503050406030204" pitchFamily="18" charset="0"/>
+                            <a:ea typeface="Cambria Math" panose="02040503050406030204" pitchFamily="18" charset="0"/>
+                          </a:rPr>
+                          <m:t>𝑡</m:t>
+                        </m:r>
+                      </m:sub>
+                    </m:sSub>
+                    <m:r>
+                      <a:rPr lang="en-US" b="0" i="1" smtClean="0">
+                        <a:latin typeface="Cambria Math" panose="02040503050406030204" pitchFamily="18" charset="0"/>
+                        <a:ea typeface="Cambria Math" panose="02040503050406030204" pitchFamily="18" charset="0"/>
+                      </a:rPr>
+                      <m:t>)</m:t>
+                    </m:r>
+                  </m:oMath>
+                </a14:m>
+                <a:r>
+                  <a:rPr lang="en-US" dirty="0"/>
+                  <a:t>.</a:t>
+                </a:r>
+              </a:p>
+              <a:p>
+                <a:r>
+                  <a:rPr lang="en-US" dirty="0"/>
+                  <a:t>We assume examples appear following the distribution </a:t>
+                </a:r>
+                <a14:m>
+                  <m:oMath xmlns:m="http://schemas.openxmlformats.org/officeDocument/2006/math">
+                    <m:r>
+                      <a:rPr lang="en-US" b="0" i="1" smtClean="0">
+                        <a:latin typeface="Cambria Math" panose="02040503050406030204" pitchFamily="18" charset="0"/>
+                      </a:rPr>
+                      <m:t>𝜇</m:t>
+                    </m:r>
+                  </m:oMath>
+                </a14:m>
+                <a:r>
+                  <a:rPr lang="en-US" dirty="0"/>
+                  <a:t>.</a:t>
+                </a:r>
+              </a:p>
+              <a:p>
+                <a:r>
+                  <a:rPr lang="en-US" dirty="0"/>
+                  <a:t>Update </a:t>
+                </a:r>
+                <a14:m>
+                  <m:oMath xmlns:m="http://schemas.openxmlformats.org/officeDocument/2006/math">
+                    <m:r>
+                      <a:rPr lang="en-US" b="1" i="1">
+                        <a:latin typeface="Cambria Math" panose="02040503050406030204" pitchFamily="18" charset="0"/>
+                      </a:rPr>
+                      <m:t>𝒘</m:t>
+                    </m:r>
+                  </m:oMath>
+                </a14:m>
+                <a:r>
+                  <a:rPr lang="en-US" dirty="0"/>
+                  <a:t> (we use </a:t>
+                </a:r>
+                <a14:m>
+                  <m:oMath xmlns:m="http://schemas.openxmlformats.org/officeDocument/2006/math">
+                    <m:sSub>
+                      <m:sSubPr>
+                        <m:ctrlPr>
+                          <a:rPr lang="en-US" b="1" i="1" smtClean="0">
+                            <a:latin typeface="Cambria Math" panose="02040503050406030204" pitchFamily="18" charset="0"/>
+                          </a:rPr>
+                        </m:ctrlPr>
+                      </m:sSubPr>
+                      <m:e>
+                        <m:r>
+                          <a:rPr lang="en-US" b="1" i="1">
+                            <a:latin typeface="Cambria Math" panose="02040503050406030204" pitchFamily="18" charset="0"/>
+                          </a:rPr>
+                          <m:t>𝒘</m:t>
+                        </m:r>
+                      </m:e>
+                      <m:sub>
+                        <m:r>
+                          <a:rPr lang="en-US" b="0" i="1" smtClean="0">
+                            <a:latin typeface="Cambria Math" panose="02040503050406030204" pitchFamily="18" charset="0"/>
+                          </a:rPr>
+                          <m:t>𝑡</m:t>
+                        </m:r>
+                      </m:sub>
+                    </m:sSub>
+                  </m:oMath>
+                </a14:m>
+                <a:r>
+                  <a:rPr lang="en-US" dirty="0"/>
+                  <a:t> for the weights at time </a:t>
+                </a:r>
+                <a14:m>
+                  <m:oMath xmlns:m="http://schemas.openxmlformats.org/officeDocument/2006/math">
+                    <m:r>
+                      <a:rPr lang="en-US" b="0" i="1" smtClean="0">
+                        <a:latin typeface="Cambria Math" panose="02040503050406030204" pitchFamily="18" charset="0"/>
+                      </a:rPr>
+                      <m:t>𝑡</m:t>
+                    </m:r>
+                  </m:oMath>
+                </a14:m>
+                <a:r>
+                  <a:rPr lang="en-US" dirty="0"/>
+                  <a:t>) to minimize </a:t>
+                </a:r>
+                <a14:m>
+                  <m:oMath xmlns:m="http://schemas.openxmlformats.org/officeDocument/2006/math">
+                    <m:acc>
+                      <m:accPr>
+                        <m:chr m:val="̅"/>
+                        <m:ctrlPr>
+                          <a:rPr lang="en-US" i="1" smtClean="0">
+                            <a:latin typeface="Cambria Math" panose="02040503050406030204" pitchFamily="18" charset="0"/>
+                          </a:rPr>
+                        </m:ctrlPr>
+                      </m:accPr>
+                      <m:e>
+                        <m:r>
+                          <a:rPr lang="en-US" b="0" i="1" smtClean="0">
+                            <a:latin typeface="Cambria Math" panose="02040503050406030204" pitchFamily="18" charset="0"/>
+                          </a:rPr>
+                          <m:t>𝑉𝐸</m:t>
+                        </m:r>
+                      </m:e>
+                    </m:acc>
+                  </m:oMath>
+                </a14:m>
+                <a:endParaRPr lang="en-US" dirty="0"/>
+              </a:p>
+              <a:p>
+                <a:endParaRPr lang="en-US" dirty="0"/>
+              </a:p>
+              <a:p>
+                <a:endParaRPr lang="en-US" dirty="0"/>
+              </a:p>
+            </p:txBody>
+          </p:sp>
+        </mc:Choice>
+        <mc:Fallback xmlns="">
+          <p:sp>
+            <p:nvSpPr>
+              <p:cNvPr id="3" name="Content Placeholder 2">
+                <a:extLst>
+                  <a:ext uri="{FF2B5EF4-FFF2-40B4-BE49-F238E27FC236}">
+                    <a16:creationId xmlns:a16="http://schemas.microsoft.com/office/drawing/2014/main" id="{429671F6-58E1-5895-8D89-7778F6212AA2}"/>
+                  </a:ext>
+                </a:extLst>
+              </p:cNvPr>
+              <p:cNvSpPr>
+                <a:spLocks noGrp="1" noRot="1" noChangeAspect="1" noMove="1" noResize="1" noEditPoints="1" noAdjustHandles="1" noChangeArrowheads="1" noChangeShapeType="1" noTextEdit="1"/>
+              </p:cNvSpPr>
+              <p:nvPr>
+                <p:ph idx="1"/>
+              </p:nvPr>
+            </p:nvSpPr>
+            <p:spPr>
+              <a:blipFill>
+                <a:blip r:embed="rId2"/>
+                <a:stretch>
+                  <a:fillRect l="-1217" t="-2806"/>
+                </a:stretch>
+              </a:blipFill>
+            </p:spPr>
+            <p:txBody>
+              <a:bodyPr/>
+              <a:lstStyle/>
+              <a:p>
+                <a:r>
+                  <a:rPr lang="en-US">
+                    <a:noFill/>
+                  </a:rPr>
+                  <a:t> </a:t>
+                </a:r>
+              </a:p>
+            </p:txBody>
+          </p:sp>
+        </mc:Fallback>
+      </mc:AlternateContent>
+    </p:spTree>
+    <p:extLst>
+      <p:ext uri="{BB962C8B-B14F-4D97-AF65-F5344CB8AC3E}">
+        <p14:creationId xmlns:p14="http://schemas.microsoft.com/office/powerpoint/2010/main" val="764715246"/>
+      </p:ext>
+    </p:extLst>
+  </p:cSld>
+  <p:clrMapOvr>
+    <a:masterClrMapping/>
+  </p:clrMapOvr>
+</p:sld>
+</file>
+
+<file path=ppt/slides/slide11.xml><?xml version="1.0" encoding="utf-8"?>
+<p:sld xmlns:a="http://schemas.openxmlformats.org/drawingml/2006/main" xmlns:r="http://schemas.openxmlformats.org/officeDocument/2006/relationships" xmlns:p="http://schemas.openxmlformats.org/presentationml/2006/main">
+  <p:cSld>
+    <p:spTree>
+      <p:nvGrpSpPr>
+        <p:cNvPr id="1" name=""/>
+        <p:cNvGrpSpPr/>
+        <p:nvPr/>
+      </p:nvGrpSpPr>
+      <p:grpSpPr>
+        <a:xfrm>
+          <a:off x="0" y="0"/>
+          <a:ext cx="0" cy="0"/>
+          <a:chOff x="0" y="0"/>
+          <a:chExt cx="0" cy="0"/>
+        </a:xfrm>
+      </p:grpSpPr>
       <mc:AlternateContent xmlns:mc="http://schemas.openxmlformats.org/markup-compatibility/2006" xmlns:a14="http://schemas.microsoft.com/office/drawing/2010/main">
         <mc:Choice Requires="a14">
           <p:sp>
@@ -5966,7 +6701,7 @@
 </p:sld>
 </file>
 
-<file path=ppt/slides/slide11.xml><?xml version="1.0" encoding="utf-8"?>
+<file path=ppt/slides/slide12.xml><?xml version="1.0" encoding="utf-8"?>
 <p:sld xmlns:a="http://schemas.openxmlformats.org/drawingml/2006/main" xmlns:r="http://schemas.openxmlformats.org/officeDocument/2006/relationships" xmlns:p="http://schemas.openxmlformats.org/presentationml/2006/main">
   <p:cSld>
     <p:spTree>
@@ -6569,7 +7304,7 @@
 </p:sld>
 </file>
 
-<file path=ppt/slides/slide12.xml><?xml version="1.0" encoding="utf-8"?>
+<file path=ppt/slides/slide13.xml><?xml version="1.0" encoding="utf-8"?>
 <p:sld xmlns:a="http://schemas.openxmlformats.org/drawingml/2006/main" xmlns:r="http://schemas.openxmlformats.org/officeDocument/2006/relationships" xmlns:p="http://schemas.openxmlformats.org/presentationml/2006/main">
   <p:cSld>
     <p:spTree>
@@ -7842,7 +8577,7 @@
 </p:sld>
 </file>
 
-<file path=ppt/slides/slide13.xml><?xml version="1.0" encoding="utf-8"?>
+<file path=ppt/slides/slide14.xml><?xml version="1.0" encoding="utf-8"?>
 <p:sld xmlns:a="http://schemas.openxmlformats.org/drawingml/2006/main" xmlns:r="http://schemas.openxmlformats.org/officeDocument/2006/relationships" xmlns:p="http://schemas.openxmlformats.org/presentationml/2006/main">
   <p:cSld>
     <p:spTree>
@@ -8183,7 +8918,7 @@
 </p:sld>
 </file>
 
-<file path=ppt/slides/slide14.xml><?xml version="1.0" encoding="utf-8"?>
+<file path=ppt/slides/slide15.xml><?xml version="1.0" encoding="utf-8"?>
 <p:sld xmlns:a="http://schemas.openxmlformats.org/drawingml/2006/main" xmlns:r="http://schemas.openxmlformats.org/officeDocument/2006/relationships" xmlns:p="http://schemas.openxmlformats.org/presentationml/2006/main">
   <p:cSld>
     <p:spTree>
@@ -8228,8 +8963,8 @@
           </a:p>
         </p:txBody>
       </p:sp>
-      <mc:AlternateContent xmlns:mc="http://schemas.openxmlformats.org/markup-compatibility/2006">
-        <mc:Choice xmlns:a14="http://schemas.microsoft.com/office/drawing/2010/main" Requires="a14">
+      <mc:AlternateContent xmlns:mc="http://schemas.openxmlformats.org/markup-compatibility/2006" xmlns:a14="http://schemas.microsoft.com/office/drawing/2010/main">
+        <mc:Choice Requires="a14">
           <p:sp>
             <p:nvSpPr>
               <p:cNvPr id="3" name="Content Placeholder 2">
@@ -8386,7 +9121,7 @@
             </p:txBody>
           </p:sp>
         </mc:Choice>
-        <mc:Fallback>
+        <mc:Fallback xmlns="">
           <p:sp>
             <p:nvSpPr>
               <p:cNvPr id="3" name="Content Placeholder 2">
@@ -8439,7 +9174,7 @@
 </p:sld>
 </file>
 
-<file path=ppt/slides/slide15.xml><?xml version="1.0" encoding="utf-8"?>
+<file path=ppt/slides/slide16.xml><?xml version="1.0" encoding="utf-8"?>
 <p:sld xmlns:a="http://schemas.openxmlformats.org/drawingml/2006/main" xmlns:r="http://schemas.openxmlformats.org/officeDocument/2006/relationships" xmlns:p="http://schemas.openxmlformats.org/presentationml/2006/main">
   <p:cSld>
     <p:spTree>
@@ -8710,7 +9445,7 @@
 </p:sld>
 </file>
 
-<file path=ppt/slides/slide16.xml><?xml version="1.0" encoding="utf-8"?>
+<file path=ppt/slides/slide17.xml><?xml version="1.0" encoding="utf-8"?>
 <p:sld xmlns:a="http://schemas.openxmlformats.org/drawingml/2006/main" xmlns:r="http://schemas.openxmlformats.org/officeDocument/2006/relationships" xmlns:p="http://schemas.openxmlformats.org/presentationml/2006/main">
   <p:cSld>
     <p:spTree>
@@ -8796,7 +9531,7 @@
 </p:sld>
 </file>
 
-<file path=ppt/slides/slide17.xml><?xml version="1.0" encoding="utf-8"?>
+<file path=ppt/slides/slide18.xml><?xml version="1.0" encoding="utf-8"?>
 <p:sld xmlns:a="http://schemas.openxmlformats.org/drawingml/2006/main" xmlns:r="http://schemas.openxmlformats.org/officeDocument/2006/relationships" xmlns:p="http://schemas.openxmlformats.org/presentationml/2006/main">
   <p:cSld>
     <p:spTree>
@@ -8841,8 +9576,8 @@
           </a:p>
         </p:txBody>
       </p:sp>
-      <mc:AlternateContent xmlns:mc="http://schemas.openxmlformats.org/markup-compatibility/2006">
-        <mc:Choice xmlns:a14="http://schemas.microsoft.com/office/drawing/2010/main" Requires="a14">
+      <mc:AlternateContent xmlns:mc="http://schemas.openxmlformats.org/markup-compatibility/2006" xmlns:a14="http://schemas.microsoft.com/office/drawing/2010/main">
+        <mc:Choice Requires="a14">
           <p:sp>
             <p:nvSpPr>
               <p:cNvPr id="3" name="Content Placeholder 2">
@@ -9645,7 +10380,7 @@
             </p:txBody>
           </p:sp>
         </mc:Choice>
-        <mc:Fallback>
+        <mc:Fallback xmlns="">
           <p:sp>
             <p:nvSpPr>
               <p:cNvPr id="3" name="Content Placeholder 2">
@@ -9698,7 +10433,7 @@
 </p:sld>
 </file>
 
-<file path=ppt/slides/slide18.xml><?xml version="1.0" encoding="utf-8"?>
+<file path=ppt/slides/slide19.xml><?xml version="1.0" encoding="utf-8"?>
 <p:sld xmlns:a="http://schemas.openxmlformats.org/drawingml/2006/main" xmlns:r="http://schemas.openxmlformats.org/officeDocument/2006/relationships" xmlns:p="http://schemas.openxmlformats.org/presentationml/2006/main">
   <p:cSld>
     <p:spTree>
@@ -9888,7 +10623,189 @@
 </p:sld>
 </file>
 
-<file path=ppt/slides/slide19.xml><?xml version="1.0" encoding="utf-8"?>
+<file path=ppt/slides/slide2.xml><?xml version="1.0" encoding="utf-8"?>
+<p:sld xmlns:a="http://schemas.openxmlformats.org/drawingml/2006/main" xmlns:r="http://schemas.openxmlformats.org/officeDocument/2006/relationships" xmlns:p="http://schemas.openxmlformats.org/presentationml/2006/main">
+  <p:cSld>
+    <p:spTree>
+      <p:nvGrpSpPr>
+        <p:cNvPr id="1" name=""/>
+        <p:cNvGrpSpPr/>
+        <p:nvPr/>
+      </p:nvGrpSpPr>
+      <p:grpSpPr>
+        <a:xfrm>
+          <a:off x="0" y="0"/>
+          <a:ext cx="0" cy="0"/>
+          <a:chOff x="0" y="0"/>
+          <a:chExt cx="0" cy="0"/>
+        </a:xfrm>
+      </p:grpSpPr>
+      <p:sp>
+        <p:nvSpPr>
+          <p:cNvPr id="2" name="Title 1">
+            <a:extLst>
+              <a:ext uri="{FF2B5EF4-FFF2-40B4-BE49-F238E27FC236}">
+                <a16:creationId xmlns:a16="http://schemas.microsoft.com/office/drawing/2014/main" id="{9E7A3493-2ED6-DF09-F569-7F3DCA81AB18}"/>
+              </a:ext>
+            </a:extLst>
+          </p:cNvPr>
+          <p:cNvSpPr>
+            <a:spLocks noGrp="1"/>
+          </p:cNvSpPr>
+          <p:nvPr>
+            <p:ph type="title"/>
+          </p:nvPr>
+        </p:nvSpPr>
+        <p:spPr/>
+        <p:txBody>
+          <a:bodyPr/>
+          <a:lstStyle/>
+          <a:p>
+            <a:r>
+              <a:rPr lang="en-US" dirty="0"/>
+              <a:t>Topics of this Course</a:t>
+            </a:r>
+          </a:p>
+        </p:txBody>
+      </p:sp>
+      <p:sp>
+        <p:nvSpPr>
+          <p:cNvPr id="3" name="Content Placeholder 2">
+            <a:extLst>
+              <a:ext uri="{FF2B5EF4-FFF2-40B4-BE49-F238E27FC236}">
+                <a16:creationId xmlns:a16="http://schemas.microsoft.com/office/drawing/2014/main" id="{8F95E019-92A5-79AC-D777-59B4926F61AA}"/>
+              </a:ext>
+            </a:extLst>
+          </p:cNvPr>
+          <p:cNvSpPr>
+            <a:spLocks noGrp="1"/>
+          </p:cNvSpPr>
+          <p:nvPr>
+            <p:ph idx="1"/>
+          </p:nvPr>
+        </p:nvSpPr>
+        <p:spPr/>
+        <p:txBody>
+          <a:bodyPr>
+            <a:normAutofit fontScale="85000" lnSpcReduction="20000"/>
+          </a:bodyPr>
+          <a:lstStyle/>
+          <a:p>
+            <a:r>
+              <a:rPr lang="en-US" dirty="0"/>
+              <a:t>Introduction to reinforcement learning</a:t>
+            </a:r>
+          </a:p>
+          <a:p>
+            <a:r>
+              <a:rPr lang="en-US" dirty="0"/>
+              <a:t>Markov decision processes</a:t>
+            </a:r>
+          </a:p>
+          <a:p>
+            <a:r>
+              <a:rPr lang="en-US" dirty="0"/>
+              <a:t>Part I: Tabular Methods</a:t>
+            </a:r>
+          </a:p>
+          <a:p>
+            <a:pPr lvl="1"/>
+            <a:r>
+              <a:rPr lang="en-US" dirty="0"/>
+              <a:t>Dynamic programming</a:t>
+            </a:r>
+          </a:p>
+          <a:p>
+            <a:pPr lvl="1"/>
+            <a:r>
+              <a:rPr lang="en-US" dirty="0"/>
+              <a:t>Monte Carlo methods</a:t>
+            </a:r>
+          </a:p>
+          <a:p>
+            <a:pPr lvl="1"/>
+            <a:r>
+              <a:rPr lang="en-US" dirty="0"/>
+              <a:t>Temporal-difference learning</a:t>
+            </a:r>
+          </a:p>
+          <a:p>
+            <a:pPr lvl="1"/>
+            <a:r>
+              <a:rPr lang="en-US" dirty="0"/>
+              <a:t>Multi-step bootstrapping</a:t>
+            </a:r>
+          </a:p>
+          <a:p>
+            <a:pPr lvl="1"/>
+            <a:r>
+              <a:rPr lang="en-US" dirty="0"/>
+              <a:t>Planning and learning with tabular methods</a:t>
+            </a:r>
+          </a:p>
+          <a:p>
+            <a:r>
+              <a:rPr lang="en-US" b="1" dirty="0"/>
+              <a:t>Part II: Approximate Solution Methods</a:t>
+            </a:r>
+          </a:p>
+          <a:p>
+            <a:pPr lvl="1"/>
+            <a:r>
+              <a:rPr lang="en-US" b="1" dirty="0"/>
+              <a:t>Prediction and Control using Approximation</a:t>
+            </a:r>
+          </a:p>
+          <a:p>
+            <a:pPr lvl="1"/>
+            <a:r>
+              <a:rPr lang="en-US" dirty="0"/>
+              <a:t>Eligibility Traces</a:t>
+            </a:r>
+          </a:p>
+          <a:p>
+            <a:pPr lvl="1"/>
+            <a:r>
+              <a:rPr lang="en-US" dirty="0"/>
+              <a:t>Policy Gradient Methods</a:t>
+            </a:r>
+          </a:p>
+          <a:p>
+            <a:r>
+              <a:rPr lang="en-US" dirty="0"/>
+              <a:t>Part III: Modern RL Methods</a:t>
+            </a:r>
+          </a:p>
+          <a:p>
+            <a:pPr lvl="1"/>
+            <a:r>
+              <a:rPr lang="en-US" dirty="0"/>
+              <a:t>Deep Reinforcement Learning</a:t>
+            </a:r>
+          </a:p>
+          <a:p>
+            <a:pPr lvl="1"/>
+            <a:r>
+              <a:rPr lang="en-US" dirty="0"/>
+              <a:t>Current Applications</a:t>
+            </a:r>
+          </a:p>
+        </p:txBody>
+      </p:sp>
+    </p:spTree>
+    <p:extLst>
+      <p:ext uri="{BB962C8B-B14F-4D97-AF65-F5344CB8AC3E}">
+        <p14:creationId xmlns:p14="http://schemas.microsoft.com/office/powerpoint/2010/main" val="3653367536"/>
+      </p:ext>
+    </p:extLst>
+  </p:cSld>
+  <p:clrMapOvr>
+    <a:masterClrMapping/>
+  </p:clrMapOvr>
+</p:sld>
+</file>
+
+<file path=ppt/slides/slide20.xml><?xml version="1.0" encoding="utf-8"?>
 <p:sld xmlns:a="http://schemas.openxmlformats.org/drawingml/2006/main" xmlns:r="http://schemas.openxmlformats.org/officeDocument/2006/relationships" xmlns:p="http://schemas.openxmlformats.org/presentationml/2006/main">
   <p:cSld>
     <p:spTree>
@@ -11294,2975 +12211,7 @@
 </p:sld>
 </file>
 
-<file path=ppt/slides/slide2.xml><?xml version="1.0" encoding="utf-8"?>
-<p:sld xmlns:a="http://schemas.openxmlformats.org/drawingml/2006/main" xmlns:r="http://schemas.openxmlformats.org/officeDocument/2006/relationships" xmlns:p="http://schemas.openxmlformats.org/presentationml/2006/main">
-  <p:cSld>
-    <p:spTree>
-      <p:nvGrpSpPr>
-        <p:cNvPr id="1" name=""/>
-        <p:cNvGrpSpPr/>
-        <p:nvPr/>
-      </p:nvGrpSpPr>
-      <p:grpSpPr>
-        <a:xfrm>
-          <a:off x="0" y="0"/>
-          <a:ext cx="0" cy="0"/>
-          <a:chOff x="0" y="0"/>
-          <a:chExt cx="0" cy="0"/>
-        </a:xfrm>
-      </p:grpSpPr>
-      <p:sp>
-        <p:nvSpPr>
-          <p:cNvPr id="2" name="Title 1">
-            <a:extLst>
-              <a:ext uri="{FF2B5EF4-FFF2-40B4-BE49-F238E27FC236}">
-                <a16:creationId xmlns:a16="http://schemas.microsoft.com/office/drawing/2014/main" id="{5BA4E1A2-75E3-3C9C-6C10-EE078C5AD54A}"/>
-              </a:ext>
-            </a:extLst>
-          </p:cNvPr>
-          <p:cNvSpPr>
-            <a:spLocks noGrp="1"/>
-          </p:cNvSpPr>
-          <p:nvPr>
-            <p:ph type="title"/>
-          </p:nvPr>
-        </p:nvSpPr>
-        <p:spPr/>
-        <p:txBody>
-          <a:bodyPr/>
-          <a:lstStyle/>
-          <a:p>
-            <a:r>
-              <a:rPr lang="en-US" dirty="0"/>
-              <a:t>Summary of Notation</a:t>
-            </a:r>
-          </a:p>
-        </p:txBody>
-      </p:sp>
-      <mc:AlternateContent xmlns:mc="http://schemas.openxmlformats.org/markup-compatibility/2006" xmlns:a14="http://schemas.microsoft.com/office/drawing/2010/main">
-        <mc:Choice Requires="a14">
-          <p:sp>
-            <p:nvSpPr>
-              <p:cNvPr id="3" name="Content Placeholder 2">
-                <a:extLst>
-                  <a:ext uri="{FF2B5EF4-FFF2-40B4-BE49-F238E27FC236}">
-                    <a16:creationId xmlns:a16="http://schemas.microsoft.com/office/drawing/2014/main" id="{47E69C9C-42B6-9B0F-9AE0-20D17703E490}"/>
-                  </a:ext>
-                </a:extLst>
-              </p:cNvPr>
-              <p:cNvSpPr>
-                <a:spLocks noGrp="1"/>
-              </p:cNvSpPr>
-              <p:nvPr>
-                <p:ph idx="1"/>
-              </p:nvPr>
-            </p:nvSpPr>
-            <p:spPr>
-              <a:xfrm>
-                <a:off x="6211474" y="1140632"/>
-                <a:ext cx="5273179" cy="2049857"/>
-              </a:xfrm>
-            </p:spPr>
-            <p:style>
-              <a:lnRef idx="2">
-                <a:schemeClr val="accent2"/>
-              </a:lnRef>
-              <a:fillRef idx="1">
-                <a:schemeClr val="lt1"/>
-              </a:fillRef>
-              <a:effectRef idx="0">
-                <a:schemeClr val="accent2"/>
-              </a:effectRef>
-              <a:fontRef idx="minor">
-                <a:schemeClr val="dk1"/>
-              </a:fontRef>
-            </p:style>
-            <p:txBody>
-              <a:bodyPr>
-                <a:spAutoFit/>
-              </a:bodyPr>
-              <a:lstStyle/>
-              <a:p>
-                <a:pPr marL="0" indent="0">
-                  <a:lnSpc>
-                    <a:spcPct val="100000"/>
-                  </a:lnSpc>
-                  <a:spcBef>
-                    <a:spcPts val="0"/>
-                  </a:spcBef>
-                  <a:buNone/>
-                </a:pPr>
-                <a:r>
-                  <a:rPr lang="en-US" sz="1200" b="1" dirty="0"/>
-                  <a:t>Value Function</a:t>
-                </a:r>
-                <a:endParaRPr lang="en-US" sz="1200" i="1" dirty="0">
-                  <a:latin typeface="Cambria Math" panose="02040503050406030204" pitchFamily="18" charset="0"/>
-                </a:endParaRPr>
-              </a:p>
-              <a:p>
-                <a:pPr marL="0" indent="0">
-                  <a:lnSpc>
-                    <a:spcPct val="100000"/>
-                  </a:lnSpc>
-                  <a:spcBef>
-                    <a:spcPts val="0"/>
-                  </a:spcBef>
-                  <a:buNone/>
-                </a:pPr>
-                <a14:m>
-                  <m:oMath xmlns:m="http://schemas.openxmlformats.org/officeDocument/2006/math">
-                    <m:sSub>
-                      <m:sSubPr>
-                        <m:ctrlPr>
-                          <a:rPr lang="en-US" sz="1200" i="1" dirty="0" smtClean="0">
-                            <a:latin typeface="Cambria Math" panose="02040503050406030204" pitchFamily="18" charset="0"/>
-                          </a:rPr>
-                        </m:ctrlPr>
-                      </m:sSubPr>
-                      <m:e>
-                        <m:r>
-                          <a:rPr lang="en-US" sz="1200" i="1" dirty="0">
-                            <a:latin typeface="Cambria Math" panose="02040503050406030204" pitchFamily="18" charset="0"/>
-                          </a:rPr>
-                          <m:t>𝐺</m:t>
-                        </m:r>
-                      </m:e>
-                      <m:sub>
-                        <m:r>
-                          <a:rPr lang="en-US" sz="1200" i="1" dirty="0">
-                            <a:latin typeface="Cambria Math" panose="02040503050406030204" pitchFamily="18" charset="0"/>
-                          </a:rPr>
-                          <m:t>𝑡</m:t>
-                        </m:r>
-                      </m:sub>
-                    </m:sSub>
-                  </m:oMath>
-                </a14:m>
-                <a:r>
-                  <a:rPr lang="en-US" sz="1200" dirty="0"/>
-                  <a:t> 	return (cumulative reward) following time </a:t>
-                </a:r>
-                <a14:m>
-                  <m:oMath xmlns:m="http://schemas.openxmlformats.org/officeDocument/2006/math">
-                    <m:r>
-                      <a:rPr lang="en-US" sz="1200" i="1" dirty="0">
-                        <a:latin typeface="Cambria Math" panose="02040503050406030204" pitchFamily="18" charset="0"/>
-                      </a:rPr>
-                      <m:t>𝑡</m:t>
-                    </m:r>
-                  </m:oMath>
-                </a14:m>
-                <a:endParaRPr lang="en-US" sz="1200" dirty="0"/>
-              </a:p>
-              <a:p>
-                <a:pPr marL="0" indent="0">
-                  <a:lnSpc>
-                    <a:spcPct val="100000"/>
-                  </a:lnSpc>
-                  <a:spcBef>
-                    <a:spcPts val="0"/>
-                  </a:spcBef>
-                  <a:buNone/>
-                </a:pPr>
-                <a14:m>
-                  <m:oMath xmlns:m="http://schemas.openxmlformats.org/officeDocument/2006/math">
-                    <m:sSub>
-                      <m:sSubPr>
-                        <m:ctrlPr>
-                          <a:rPr lang="en-US" sz="1200" i="1" dirty="0">
-                            <a:solidFill>
-                              <a:schemeClr val="tx1"/>
-                            </a:solidFill>
-                            <a:latin typeface="Cambria Math" panose="02040503050406030204" pitchFamily="18" charset="0"/>
-                          </a:rPr>
-                        </m:ctrlPr>
-                      </m:sSubPr>
-                      <m:e>
-                        <m:r>
-                          <a:rPr lang="en-US" sz="1200" i="1" dirty="0">
-                            <a:solidFill>
-                              <a:schemeClr val="tx1"/>
-                            </a:solidFill>
-                            <a:latin typeface="Cambria Math" panose="02040503050406030204" pitchFamily="18" charset="0"/>
-                          </a:rPr>
-                          <m:t>𝐺</m:t>
-                        </m:r>
-                      </m:e>
-                      <m:sub>
-                        <m:r>
-                          <a:rPr lang="en-US" sz="1200" i="1" dirty="0">
-                            <a:solidFill>
-                              <a:schemeClr val="tx1"/>
-                            </a:solidFill>
-                            <a:latin typeface="Cambria Math" panose="02040503050406030204" pitchFamily="18" charset="0"/>
-                          </a:rPr>
-                          <m:t>𝑡</m:t>
-                        </m:r>
-                        <m:r>
-                          <a:rPr lang="en-US" sz="1200" i="1" dirty="0">
-                            <a:solidFill>
-                              <a:schemeClr val="tx1"/>
-                            </a:solidFill>
-                            <a:latin typeface="Cambria Math" panose="02040503050406030204" pitchFamily="18" charset="0"/>
-                          </a:rPr>
-                          <m:t>:</m:t>
-                        </m:r>
-                        <m:r>
-                          <a:rPr lang="en-US" sz="1200" i="1" dirty="0">
-                            <a:solidFill>
-                              <a:schemeClr val="tx1"/>
-                            </a:solidFill>
-                            <a:latin typeface="Cambria Math" panose="02040503050406030204" pitchFamily="18" charset="0"/>
-                          </a:rPr>
-                          <m:t>h</m:t>
-                        </m:r>
-                      </m:sub>
-                    </m:sSub>
-                  </m:oMath>
-                </a14:m>
-                <a:r>
-                  <a:rPr lang="en-US" sz="1200" dirty="0">
-                    <a:solidFill>
-                      <a:schemeClr val="tx1"/>
-                    </a:solidFill>
-                  </a:rPr>
-                  <a:t>	return from </a:t>
-                </a:r>
-                <a14:m>
-                  <m:oMath xmlns:m="http://schemas.openxmlformats.org/officeDocument/2006/math">
-                    <m:r>
-                      <a:rPr lang="en-US" sz="1200" i="1" dirty="0">
-                        <a:solidFill>
-                          <a:schemeClr val="tx1"/>
-                        </a:solidFill>
-                        <a:latin typeface="Cambria Math" panose="02040503050406030204" pitchFamily="18" charset="0"/>
-                      </a:rPr>
-                      <m:t>𝑡</m:t>
-                    </m:r>
-                  </m:oMath>
-                </a14:m>
-                <a:r>
-                  <a:rPr lang="en-US" sz="1200" dirty="0">
-                    <a:solidFill>
-                      <a:schemeClr val="tx1"/>
-                    </a:solidFill>
-                  </a:rPr>
-                  <a:t> to </a:t>
-                </a:r>
-                <a14:m>
-                  <m:oMath xmlns:m="http://schemas.openxmlformats.org/officeDocument/2006/math">
-                    <m:r>
-                      <a:rPr lang="en-US" sz="1200" i="1" dirty="0">
-                        <a:solidFill>
-                          <a:schemeClr val="tx1"/>
-                        </a:solidFill>
-                        <a:latin typeface="Cambria Math" panose="02040503050406030204" pitchFamily="18" charset="0"/>
-                      </a:rPr>
-                      <m:t>h</m:t>
-                    </m:r>
-                  </m:oMath>
-                </a14:m>
-                <a:r>
-                  <a:rPr lang="en-US" sz="1200" dirty="0">
-                    <a:solidFill>
-                      <a:schemeClr val="tx1"/>
-                    </a:solidFill>
-                  </a:rPr>
-                  <a:t> (discounted and corrected)</a:t>
-                </a:r>
-                <a:endParaRPr lang="en-US" sz="1200" dirty="0"/>
-              </a:p>
-              <a:p>
-                <a:pPr marL="0" indent="0">
-                  <a:lnSpc>
-                    <a:spcPct val="100000"/>
-                  </a:lnSpc>
-                  <a:spcBef>
-                    <a:spcPts val="0"/>
-                  </a:spcBef>
-                  <a:buNone/>
-                </a:pPr>
-                <a14:m>
-                  <m:oMath xmlns:m="http://schemas.openxmlformats.org/officeDocument/2006/math">
-                    <m:sSub>
-                      <m:sSubPr>
-                        <m:ctrlPr>
-                          <a:rPr lang="en-US" sz="1200" i="1" dirty="0">
-                            <a:latin typeface="Cambria Math" panose="02040503050406030204" pitchFamily="18" charset="0"/>
-                          </a:rPr>
-                        </m:ctrlPr>
-                      </m:sSubPr>
-                      <m:e>
-                        <m:r>
-                          <a:rPr lang="en-US" sz="1200" i="1" dirty="0">
-                            <a:latin typeface="Cambria Math" panose="02040503050406030204" pitchFamily="18" charset="0"/>
-                          </a:rPr>
-                          <m:t>𝑣</m:t>
-                        </m:r>
-                      </m:e>
-                      <m:sub>
-                        <m:r>
-                          <a:rPr lang="en-US" sz="1200" i="1" dirty="0">
-                            <a:latin typeface="Cambria Math" panose="02040503050406030204" pitchFamily="18" charset="0"/>
-                          </a:rPr>
-                          <m:t>𝜋</m:t>
-                        </m:r>
-                      </m:sub>
-                    </m:sSub>
-                    <m:r>
-                      <a:rPr lang="en-US" sz="1200" i="1" dirty="0">
-                        <a:latin typeface="Cambria Math" panose="02040503050406030204" pitchFamily="18" charset="0"/>
-                      </a:rPr>
-                      <m:t>(</m:t>
-                    </m:r>
-                    <m:r>
-                      <a:rPr lang="en-US" sz="1200" i="1" dirty="0">
-                        <a:latin typeface="Cambria Math" panose="02040503050406030204" pitchFamily="18" charset="0"/>
-                      </a:rPr>
-                      <m:t>𝑠</m:t>
-                    </m:r>
-                    <m:r>
-                      <a:rPr lang="en-US" sz="1200" i="1" dirty="0">
-                        <a:latin typeface="Cambria Math" panose="02040503050406030204" pitchFamily="18" charset="0"/>
-                      </a:rPr>
-                      <m:t>)</m:t>
-                    </m:r>
-                  </m:oMath>
-                </a14:m>
-                <a:r>
-                  <a:rPr lang="en-US" sz="1200" dirty="0"/>
-                  <a:t>	value of state </a:t>
-                </a:r>
-                <a14:m>
-                  <m:oMath xmlns:m="http://schemas.openxmlformats.org/officeDocument/2006/math">
-                    <m:r>
-                      <a:rPr lang="en-US" sz="1200" i="1" dirty="0">
-                        <a:latin typeface="Cambria Math" panose="02040503050406030204" pitchFamily="18" charset="0"/>
-                      </a:rPr>
-                      <m:t>𝑠</m:t>
-                    </m:r>
-                  </m:oMath>
-                </a14:m>
-                <a:r>
-                  <a:rPr lang="en-US" sz="1200" dirty="0"/>
-                  <a:t> under policy </a:t>
-                </a:r>
-                <a14:m>
-                  <m:oMath xmlns:m="http://schemas.openxmlformats.org/officeDocument/2006/math">
-                    <m:r>
-                      <a:rPr lang="en-US" sz="1200" i="1" dirty="0">
-                        <a:latin typeface="Cambria Math" panose="02040503050406030204" pitchFamily="18" charset="0"/>
-                      </a:rPr>
-                      <m:t>𝜋</m:t>
-                    </m:r>
-                  </m:oMath>
-                </a14:m>
-                <a:r>
-                  <a:rPr lang="en-US" sz="1200" dirty="0"/>
-                  <a:t> (expected return)</a:t>
-                </a:r>
-              </a:p>
-              <a:p>
-                <a:pPr marL="0" indent="0">
-                  <a:lnSpc>
-                    <a:spcPct val="100000"/>
-                  </a:lnSpc>
-                  <a:spcBef>
-                    <a:spcPts val="0"/>
-                  </a:spcBef>
-                  <a:buNone/>
-                </a:pPr>
-                <a14:m>
-                  <m:oMath xmlns:m="http://schemas.openxmlformats.org/officeDocument/2006/math">
-                    <m:sSub>
-                      <m:sSubPr>
-                        <m:ctrlPr>
-                          <a:rPr lang="en-US" sz="1200" i="1" dirty="0">
-                            <a:latin typeface="Cambria Math" panose="02040503050406030204" pitchFamily="18" charset="0"/>
-                          </a:rPr>
-                        </m:ctrlPr>
-                      </m:sSubPr>
-                      <m:e>
-                        <m:r>
-                          <a:rPr lang="en-US" sz="1200" i="1" dirty="0">
-                            <a:latin typeface="Cambria Math" panose="02040503050406030204" pitchFamily="18" charset="0"/>
-                          </a:rPr>
-                          <m:t>𝑣</m:t>
-                        </m:r>
-                      </m:e>
-                      <m:sub>
-                        <m:r>
-                          <a:rPr lang="en-US" sz="1200" i="1" dirty="0">
-                            <a:latin typeface="Cambria Math" panose="02040503050406030204" pitchFamily="18" charset="0"/>
-                          </a:rPr>
-                          <m:t>∗</m:t>
-                        </m:r>
-                      </m:sub>
-                    </m:sSub>
-                    <m:r>
-                      <a:rPr lang="en-US" sz="1200" i="1" dirty="0">
-                        <a:latin typeface="Cambria Math" panose="02040503050406030204" pitchFamily="18" charset="0"/>
-                      </a:rPr>
-                      <m:t>(</m:t>
-                    </m:r>
-                    <m:r>
-                      <a:rPr lang="en-US" sz="1200" i="1" dirty="0">
-                        <a:latin typeface="Cambria Math" panose="02040503050406030204" pitchFamily="18" charset="0"/>
-                      </a:rPr>
-                      <m:t>𝑠</m:t>
-                    </m:r>
-                    <m:r>
-                      <a:rPr lang="en-US" sz="1200" i="1" dirty="0">
-                        <a:latin typeface="Cambria Math" panose="02040503050406030204" pitchFamily="18" charset="0"/>
-                      </a:rPr>
-                      <m:t>)</m:t>
-                    </m:r>
-                  </m:oMath>
-                </a14:m>
-                <a:r>
-                  <a:rPr lang="en-US" sz="1200" dirty="0"/>
-                  <a:t>	value of state s under the optimal policy</a:t>
-                </a:r>
-              </a:p>
-              <a:p>
-                <a:pPr marL="0" indent="0">
-                  <a:lnSpc>
-                    <a:spcPct val="100000"/>
-                  </a:lnSpc>
-                  <a:spcBef>
-                    <a:spcPts val="0"/>
-                  </a:spcBef>
-                  <a:buNone/>
-                </a:pPr>
-                <a14:m>
-                  <m:oMath xmlns:m="http://schemas.openxmlformats.org/officeDocument/2006/math">
-                    <m:sSub>
-                      <m:sSubPr>
-                        <m:ctrlPr>
-                          <a:rPr lang="en-US" sz="1200" i="1" dirty="0">
-                            <a:latin typeface="Cambria Math" panose="02040503050406030204" pitchFamily="18" charset="0"/>
-                          </a:rPr>
-                        </m:ctrlPr>
-                      </m:sSubPr>
-                      <m:e>
-                        <m:r>
-                          <a:rPr lang="en-US" sz="1200" i="1" dirty="0">
-                            <a:latin typeface="Cambria Math" panose="02040503050406030204" pitchFamily="18" charset="0"/>
-                          </a:rPr>
-                          <m:t>𝑞</m:t>
-                        </m:r>
-                      </m:e>
-                      <m:sub>
-                        <m:r>
-                          <a:rPr lang="en-US" sz="1200" i="1" dirty="0">
-                            <a:latin typeface="Cambria Math" panose="02040503050406030204" pitchFamily="18" charset="0"/>
-                          </a:rPr>
-                          <m:t>𝜋</m:t>
-                        </m:r>
-                      </m:sub>
-                    </m:sSub>
-                    <m:r>
-                      <a:rPr lang="en-US" sz="1200" i="1" dirty="0">
-                        <a:latin typeface="Cambria Math" panose="02040503050406030204" pitchFamily="18" charset="0"/>
-                      </a:rPr>
-                      <m:t>(</m:t>
-                    </m:r>
-                    <m:r>
-                      <a:rPr lang="en-US" sz="1200" i="1" dirty="0">
-                        <a:latin typeface="Cambria Math" panose="02040503050406030204" pitchFamily="18" charset="0"/>
-                      </a:rPr>
-                      <m:t>𝑠</m:t>
-                    </m:r>
-                    <m:r>
-                      <a:rPr lang="en-US" sz="1200" i="1" dirty="0">
-                        <a:latin typeface="Cambria Math" panose="02040503050406030204" pitchFamily="18" charset="0"/>
-                      </a:rPr>
-                      <m:t>,</m:t>
-                    </m:r>
-                    <m:r>
-                      <a:rPr lang="en-US" sz="1200" i="1" dirty="0">
-                        <a:latin typeface="Cambria Math" panose="02040503050406030204" pitchFamily="18" charset="0"/>
-                      </a:rPr>
-                      <m:t>𝑎</m:t>
-                    </m:r>
-                    <m:r>
-                      <a:rPr lang="en-US" sz="1200" i="1" dirty="0">
-                        <a:latin typeface="Cambria Math" panose="02040503050406030204" pitchFamily="18" charset="0"/>
-                      </a:rPr>
-                      <m:t>)</m:t>
-                    </m:r>
-                  </m:oMath>
-                </a14:m>
-                <a:r>
-                  <a:rPr lang="en-US" sz="1200" dirty="0"/>
-                  <a:t>	value of taking action </a:t>
-                </a:r>
-                <a14:m>
-                  <m:oMath xmlns:m="http://schemas.openxmlformats.org/officeDocument/2006/math">
-                    <m:r>
-                      <a:rPr lang="en-US" sz="1200" i="1" dirty="0">
-                        <a:latin typeface="Cambria Math" panose="02040503050406030204" pitchFamily="18" charset="0"/>
-                      </a:rPr>
-                      <m:t>𝑎</m:t>
-                    </m:r>
-                  </m:oMath>
-                </a14:m>
-                <a:r>
-                  <a:rPr lang="en-US" sz="1200" dirty="0"/>
-                  <a:t> in state </a:t>
-                </a:r>
-                <a14:m>
-                  <m:oMath xmlns:m="http://schemas.openxmlformats.org/officeDocument/2006/math">
-                    <m:r>
-                      <a:rPr lang="en-US" sz="1200" i="1" dirty="0" smtClean="0">
-                        <a:latin typeface="Cambria Math" panose="02040503050406030204" pitchFamily="18" charset="0"/>
-                      </a:rPr>
-                      <m:t>𝑠</m:t>
-                    </m:r>
-                  </m:oMath>
-                </a14:m>
-                <a:r>
-                  <a:rPr lang="en-US" sz="1200" dirty="0"/>
-                  <a:t> under policy </a:t>
-                </a:r>
-                <a14:m>
-                  <m:oMath xmlns:m="http://schemas.openxmlformats.org/officeDocument/2006/math">
-                    <m:r>
-                      <a:rPr lang="en-US" sz="1200" i="1" dirty="0">
-                        <a:latin typeface="Cambria Math" panose="02040503050406030204" pitchFamily="18" charset="0"/>
-                      </a:rPr>
-                      <m:t>𝜋</m:t>
-                    </m:r>
-                  </m:oMath>
-                </a14:m>
-                <a:endParaRPr lang="en-US" sz="1200" dirty="0"/>
-              </a:p>
-              <a:p>
-                <a:pPr marL="0" indent="0">
-                  <a:lnSpc>
-                    <a:spcPct val="100000"/>
-                  </a:lnSpc>
-                  <a:spcBef>
-                    <a:spcPts val="0"/>
-                  </a:spcBef>
-                  <a:buNone/>
-                </a:pPr>
-                <a14:m>
-                  <m:oMath xmlns:m="http://schemas.openxmlformats.org/officeDocument/2006/math">
-                    <m:sSub>
-                      <m:sSubPr>
-                        <m:ctrlPr>
-                          <a:rPr lang="en-US" sz="1200" i="1" dirty="0">
-                            <a:latin typeface="Cambria Math" panose="02040503050406030204" pitchFamily="18" charset="0"/>
-                          </a:rPr>
-                        </m:ctrlPr>
-                      </m:sSubPr>
-                      <m:e>
-                        <m:r>
-                          <a:rPr lang="en-US" sz="1200" i="1" dirty="0">
-                            <a:latin typeface="Cambria Math" panose="02040503050406030204" pitchFamily="18" charset="0"/>
-                          </a:rPr>
-                          <m:t>𝑞</m:t>
-                        </m:r>
-                      </m:e>
-                      <m:sub>
-                        <m:r>
-                          <a:rPr lang="en-US" sz="1200" i="1" dirty="0">
-                            <a:latin typeface="Cambria Math" panose="02040503050406030204" pitchFamily="18" charset="0"/>
-                          </a:rPr>
-                          <m:t>∗</m:t>
-                        </m:r>
-                      </m:sub>
-                    </m:sSub>
-                    <m:r>
-                      <a:rPr lang="en-US" sz="1200" i="1" dirty="0">
-                        <a:latin typeface="Cambria Math" panose="02040503050406030204" pitchFamily="18" charset="0"/>
-                      </a:rPr>
-                      <m:t>(</m:t>
-                    </m:r>
-                    <m:r>
-                      <a:rPr lang="en-US" sz="1200" i="1" dirty="0">
-                        <a:latin typeface="Cambria Math" panose="02040503050406030204" pitchFamily="18" charset="0"/>
-                      </a:rPr>
-                      <m:t>𝑠</m:t>
-                    </m:r>
-                    <m:r>
-                      <a:rPr lang="en-US" sz="1200" i="1" dirty="0">
-                        <a:latin typeface="Cambria Math" panose="02040503050406030204" pitchFamily="18" charset="0"/>
-                      </a:rPr>
-                      <m:t>,</m:t>
-                    </m:r>
-                    <m:r>
-                      <a:rPr lang="en-US" sz="1200" i="1" dirty="0">
-                        <a:latin typeface="Cambria Math" panose="02040503050406030204" pitchFamily="18" charset="0"/>
-                      </a:rPr>
-                      <m:t>𝑎</m:t>
-                    </m:r>
-                    <m:r>
-                      <a:rPr lang="en-US" sz="1200" i="1" dirty="0">
-                        <a:latin typeface="Cambria Math" panose="02040503050406030204" pitchFamily="18" charset="0"/>
-                      </a:rPr>
-                      <m:t>)</m:t>
-                    </m:r>
-                  </m:oMath>
-                </a14:m>
-                <a:r>
-                  <a:rPr lang="en-US" sz="1200" dirty="0"/>
-                  <a:t>	value of taking action </a:t>
-                </a:r>
-                <a14:m>
-                  <m:oMath xmlns:m="http://schemas.openxmlformats.org/officeDocument/2006/math">
-                    <m:r>
-                      <a:rPr lang="en-US" sz="1200" i="1" dirty="0">
-                        <a:latin typeface="Cambria Math" panose="02040503050406030204" pitchFamily="18" charset="0"/>
-                      </a:rPr>
-                      <m:t>𝑎</m:t>
-                    </m:r>
-                  </m:oMath>
-                </a14:m>
-                <a:r>
-                  <a:rPr lang="en-US" sz="1200" dirty="0"/>
-                  <a:t> in state </a:t>
-                </a:r>
-                <a14:m>
-                  <m:oMath xmlns:m="http://schemas.openxmlformats.org/officeDocument/2006/math">
-                    <m:r>
-                      <a:rPr lang="en-US" sz="1200" i="1" dirty="0" smtClean="0">
-                        <a:latin typeface="Cambria Math" panose="02040503050406030204" pitchFamily="18" charset="0"/>
-                      </a:rPr>
-                      <m:t>𝑠</m:t>
-                    </m:r>
-                  </m:oMath>
-                </a14:m>
-                <a:r>
-                  <a:rPr lang="en-US" sz="1200" dirty="0"/>
-                  <a:t> under the optimal policy</a:t>
-                </a:r>
-              </a:p>
-              <a:p>
-                <a:pPr marL="0" indent="0">
-                  <a:spcBef>
-                    <a:spcPts val="0"/>
-                  </a:spcBef>
-                  <a:buNone/>
-                </a:pPr>
-                <a14:m>
-                  <m:oMath xmlns:m="http://schemas.openxmlformats.org/officeDocument/2006/math">
-                    <m:r>
-                      <a:rPr lang="en-US" sz="1200" i="1" dirty="0">
-                        <a:solidFill>
-                          <a:schemeClr val="tx1"/>
-                        </a:solidFill>
-                        <a:latin typeface="Cambria Math" panose="02040503050406030204" pitchFamily="18" charset="0"/>
-                      </a:rPr>
-                      <m:t>𝑉</m:t>
-                    </m:r>
-                    <m:r>
-                      <a:rPr lang="en-US" sz="1200" i="1" dirty="0">
-                        <a:solidFill>
-                          <a:schemeClr val="tx1"/>
-                        </a:solidFill>
-                        <a:latin typeface="Cambria Math" panose="02040503050406030204" pitchFamily="18" charset="0"/>
-                      </a:rPr>
-                      <m:t>, </m:t>
-                    </m:r>
-                    <m:sSub>
-                      <m:sSubPr>
-                        <m:ctrlPr>
-                          <a:rPr lang="en-US" sz="1200" i="1" dirty="0">
-                            <a:solidFill>
-                              <a:schemeClr val="tx1"/>
-                            </a:solidFill>
-                            <a:latin typeface="Cambria Math" panose="02040503050406030204" pitchFamily="18" charset="0"/>
-                          </a:rPr>
-                        </m:ctrlPr>
-                      </m:sSubPr>
-                      <m:e>
-                        <m:r>
-                          <a:rPr lang="en-US" sz="1200" i="1" dirty="0">
-                            <a:solidFill>
-                              <a:schemeClr val="tx1"/>
-                            </a:solidFill>
-                            <a:latin typeface="Cambria Math" panose="02040503050406030204" pitchFamily="18" charset="0"/>
-                          </a:rPr>
-                          <m:t>𝑉</m:t>
-                        </m:r>
-                      </m:e>
-                      <m:sub>
-                        <m:r>
-                          <a:rPr lang="en-US" sz="1200" i="1" dirty="0">
-                            <a:solidFill>
-                              <a:schemeClr val="tx1"/>
-                            </a:solidFill>
-                            <a:latin typeface="Cambria Math" panose="02040503050406030204" pitchFamily="18" charset="0"/>
-                          </a:rPr>
-                          <m:t>𝑡</m:t>
-                        </m:r>
-                      </m:sub>
-                    </m:sSub>
-                    <m:r>
-                      <a:rPr lang="en-US" sz="1200" i="1" dirty="0">
-                        <a:solidFill>
-                          <a:schemeClr val="tx1"/>
-                        </a:solidFill>
-                        <a:latin typeface="Cambria Math" panose="02040503050406030204" pitchFamily="18" charset="0"/>
-                      </a:rPr>
-                      <m:t> </m:t>
-                    </m:r>
-                  </m:oMath>
-                </a14:m>
-                <a:r>
-                  <a:rPr lang="en-US" sz="1200" dirty="0">
-                    <a:solidFill>
-                      <a:schemeClr val="tx1"/>
-                    </a:solidFill>
-                  </a:rPr>
-                  <a:t>	array estimates of state-value function </a:t>
-                </a:r>
-                <a14:m>
-                  <m:oMath xmlns:m="http://schemas.openxmlformats.org/officeDocument/2006/math">
-                    <m:sSub>
-                      <m:sSubPr>
-                        <m:ctrlPr>
-                          <a:rPr lang="en-US" sz="1200" i="1" dirty="0">
-                            <a:solidFill>
-                              <a:schemeClr val="tx1"/>
-                            </a:solidFill>
-                            <a:latin typeface="Cambria Math" panose="02040503050406030204" pitchFamily="18" charset="0"/>
-                          </a:rPr>
-                        </m:ctrlPr>
-                      </m:sSubPr>
-                      <m:e>
-                        <m:r>
-                          <a:rPr lang="en-US" sz="1200" i="1" dirty="0">
-                            <a:solidFill>
-                              <a:schemeClr val="tx1"/>
-                            </a:solidFill>
-                            <a:latin typeface="Cambria Math" panose="02040503050406030204" pitchFamily="18" charset="0"/>
-                          </a:rPr>
-                          <m:t>𝑣</m:t>
-                        </m:r>
-                      </m:e>
-                      <m:sub>
-                        <m:r>
-                          <a:rPr lang="en-US" sz="1200" i="1" dirty="0">
-                            <a:solidFill>
-                              <a:schemeClr val="tx1"/>
-                            </a:solidFill>
-                            <a:latin typeface="Cambria Math" panose="02040503050406030204" pitchFamily="18" charset="0"/>
-                          </a:rPr>
-                          <m:t>𝜋</m:t>
-                        </m:r>
-                      </m:sub>
-                    </m:sSub>
-                    <m:r>
-                      <a:rPr lang="en-US" sz="1200" i="1" dirty="0">
-                        <a:solidFill>
-                          <a:schemeClr val="tx1"/>
-                        </a:solidFill>
-                        <a:latin typeface="Cambria Math" panose="02040503050406030204" pitchFamily="18" charset="0"/>
-                      </a:rPr>
-                      <m:t> </m:t>
-                    </m:r>
-                  </m:oMath>
-                </a14:m>
-                <a:r>
-                  <a:rPr lang="en-US" sz="1200" dirty="0">
-                    <a:solidFill>
-                      <a:schemeClr val="tx1"/>
-                    </a:solidFill>
-                  </a:rPr>
-                  <a:t>or </a:t>
-                </a:r>
-                <a14:m>
-                  <m:oMath xmlns:m="http://schemas.openxmlformats.org/officeDocument/2006/math">
-                    <m:sSub>
-                      <m:sSubPr>
-                        <m:ctrlPr>
-                          <a:rPr lang="en-US" sz="1200" i="1" dirty="0">
-                            <a:solidFill>
-                              <a:schemeClr val="tx1"/>
-                            </a:solidFill>
-                            <a:latin typeface="Cambria Math" panose="02040503050406030204" pitchFamily="18" charset="0"/>
-                          </a:rPr>
-                        </m:ctrlPr>
-                      </m:sSubPr>
-                      <m:e>
-                        <m:r>
-                          <a:rPr lang="en-US" sz="1200" i="1" dirty="0">
-                            <a:solidFill>
-                              <a:schemeClr val="tx1"/>
-                            </a:solidFill>
-                            <a:latin typeface="Cambria Math" panose="02040503050406030204" pitchFamily="18" charset="0"/>
-                          </a:rPr>
-                          <m:t>𝑣</m:t>
-                        </m:r>
-                      </m:e>
-                      <m:sub>
-                        <m:r>
-                          <a:rPr lang="en-US" sz="1200" i="1" dirty="0">
-                            <a:solidFill>
-                              <a:schemeClr val="tx1"/>
-                            </a:solidFill>
-                            <a:latin typeface="Cambria Math" panose="02040503050406030204" pitchFamily="18" charset="0"/>
-                          </a:rPr>
-                          <m:t>∗</m:t>
-                        </m:r>
-                      </m:sub>
-                    </m:sSub>
-                    <m:r>
-                      <a:rPr lang="en-US" sz="1200" i="1" dirty="0">
-                        <a:solidFill>
-                          <a:schemeClr val="tx1"/>
-                        </a:solidFill>
-                        <a:latin typeface="Cambria Math" panose="02040503050406030204" pitchFamily="18" charset="0"/>
-                      </a:rPr>
-                      <m:t> </m:t>
-                    </m:r>
-                  </m:oMath>
-                </a14:m>
-                <a:endParaRPr lang="en-US" sz="1200" dirty="0">
-                  <a:solidFill>
-                    <a:schemeClr val="tx1"/>
-                  </a:solidFill>
-                </a:endParaRPr>
-              </a:p>
-              <a:p>
-                <a:pPr marL="0" indent="0">
-                  <a:spcBef>
-                    <a:spcPts val="0"/>
-                  </a:spcBef>
-                  <a:buNone/>
-                </a:pPr>
-                <a14:m>
-                  <m:oMath xmlns:m="http://schemas.openxmlformats.org/officeDocument/2006/math">
-                    <m:r>
-                      <a:rPr lang="en-US" sz="1200" i="1" dirty="0">
-                        <a:solidFill>
-                          <a:schemeClr val="tx1"/>
-                        </a:solidFill>
-                        <a:latin typeface="Cambria Math" panose="02040503050406030204" pitchFamily="18" charset="0"/>
-                      </a:rPr>
-                      <m:t>𝑄</m:t>
-                    </m:r>
-                    <m:r>
-                      <a:rPr lang="en-US" sz="1200" i="1" dirty="0">
-                        <a:solidFill>
-                          <a:schemeClr val="tx1"/>
-                        </a:solidFill>
-                        <a:latin typeface="Cambria Math" panose="02040503050406030204" pitchFamily="18" charset="0"/>
-                      </a:rPr>
-                      <m:t>,</m:t>
-                    </m:r>
-                    <m:sSub>
-                      <m:sSubPr>
-                        <m:ctrlPr>
-                          <a:rPr lang="en-US" sz="1200" i="1" dirty="0">
-                            <a:solidFill>
-                              <a:schemeClr val="tx1"/>
-                            </a:solidFill>
-                            <a:latin typeface="Cambria Math" panose="02040503050406030204" pitchFamily="18" charset="0"/>
-                          </a:rPr>
-                        </m:ctrlPr>
-                      </m:sSubPr>
-                      <m:e>
-                        <m:r>
-                          <a:rPr lang="en-US" sz="1200" i="1" dirty="0">
-                            <a:solidFill>
-                              <a:schemeClr val="tx1"/>
-                            </a:solidFill>
-                            <a:latin typeface="Cambria Math" panose="02040503050406030204" pitchFamily="18" charset="0"/>
-                          </a:rPr>
-                          <m:t>𝑄</m:t>
-                        </m:r>
-                      </m:e>
-                      <m:sub>
-                        <m:r>
-                          <a:rPr lang="en-US" sz="1200" i="1" dirty="0">
-                            <a:solidFill>
-                              <a:schemeClr val="tx1"/>
-                            </a:solidFill>
-                            <a:latin typeface="Cambria Math" panose="02040503050406030204" pitchFamily="18" charset="0"/>
-                          </a:rPr>
-                          <m:t>𝑡</m:t>
-                        </m:r>
-                      </m:sub>
-                    </m:sSub>
-                    <m:r>
-                      <a:rPr lang="en-US" sz="1200" i="1" dirty="0">
-                        <a:solidFill>
-                          <a:schemeClr val="tx1"/>
-                        </a:solidFill>
-                        <a:latin typeface="Cambria Math" panose="02040503050406030204" pitchFamily="18" charset="0"/>
-                      </a:rPr>
-                      <m:t> </m:t>
-                    </m:r>
-                  </m:oMath>
-                </a14:m>
-                <a:r>
-                  <a:rPr lang="en-US" sz="1200" dirty="0">
-                    <a:solidFill>
-                      <a:schemeClr val="tx1"/>
-                    </a:solidFill>
-                  </a:rPr>
-                  <a:t>	array estimates of action-value function </a:t>
-                </a:r>
-                <a14:m>
-                  <m:oMath xmlns:m="http://schemas.openxmlformats.org/officeDocument/2006/math">
-                    <m:sSub>
-                      <m:sSubPr>
-                        <m:ctrlPr>
-                          <a:rPr lang="en-US" sz="1200" i="1" dirty="0">
-                            <a:solidFill>
-                              <a:schemeClr val="tx1"/>
-                            </a:solidFill>
-                            <a:latin typeface="Cambria Math" panose="02040503050406030204" pitchFamily="18" charset="0"/>
-                          </a:rPr>
-                        </m:ctrlPr>
-                      </m:sSubPr>
-                      <m:e>
-                        <m:r>
-                          <a:rPr lang="en-US" sz="1200" i="1" dirty="0">
-                            <a:solidFill>
-                              <a:schemeClr val="tx1"/>
-                            </a:solidFill>
-                            <a:latin typeface="Cambria Math" panose="02040503050406030204" pitchFamily="18" charset="0"/>
-                          </a:rPr>
-                          <m:t>𝑞</m:t>
-                        </m:r>
-                      </m:e>
-                      <m:sub>
-                        <m:r>
-                          <a:rPr lang="en-US" sz="1200" i="1" dirty="0">
-                            <a:solidFill>
-                              <a:schemeClr val="tx1"/>
-                            </a:solidFill>
-                            <a:latin typeface="Cambria Math" panose="02040503050406030204" pitchFamily="18" charset="0"/>
-                          </a:rPr>
-                          <m:t>𝜋</m:t>
-                        </m:r>
-                      </m:sub>
-                    </m:sSub>
-                    <m:r>
-                      <a:rPr lang="en-US" sz="1200" i="1" dirty="0">
-                        <a:solidFill>
-                          <a:schemeClr val="tx1"/>
-                        </a:solidFill>
-                        <a:latin typeface="Cambria Math" panose="02040503050406030204" pitchFamily="18" charset="0"/>
-                      </a:rPr>
-                      <m:t> </m:t>
-                    </m:r>
-                  </m:oMath>
-                </a14:m>
-                <a:r>
-                  <a:rPr lang="en-US" sz="1200" dirty="0">
-                    <a:solidFill>
-                      <a:schemeClr val="tx1"/>
-                    </a:solidFill>
-                  </a:rPr>
-                  <a:t>or </a:t>
-                </a:r>
-                <a14:m>
-                  <m:oMath xmlns:m="http://schemas.openxmlformats.org/officeDocument/2006/math">
-                    <m:sSub>
-                      <m:sSubPr>
-                        <m:ctrlPr>
-                          <a:rPr lang="en-US" sz="1200" i="1" dirty="0">
-                            <a:solidFill>
-                              <a:schemeClr val="tx1"/>
-                            </a:solidFill>
-                            <a:latin typeface="Cambria Math" panose="02040503050406030204" pitchFamily="18" charset="0"/>
-                          </a:rPr>
-                        </m:ctrlPr>
-                      </m:sSubPr>
-                      <m:e>
-                        <m:r>
-                          <a:rPr lang="en-US" sz="1200" i="1" dirty="0">
-                            <a:solidFill>
-                              <a:schemeClr val="tx1"/>
-                            </a:solidFill>
-                            <a:latin typeface="Cambria Math" panose="02040503050406030204" pitchFamily="18" charset="0"/>
-                          </a:rPr>
-                          <m:t>𝑣</m:t>
-                        </m:r>
-                      </m:e>
-                      <m:sub>
-                        <m:r>
-                          <a:rPr lang="en-US" sz="1200" i="1" dirty="0">
-                            <a:solidFill>
-                              <a:schemeClr val="tx1"/>
-                            </a:solidFill>
-                            <a:latin typeface="Cambria Math" panose="02040503050406030204" pitchFamily="18" charset="0"/>
-                          </a:rPr>
-                          <m:t>∗</m:t>
-                        </m:r>
-                      </m:sub>
-                    </m:sSub>
-                  </m:oMath>
-                </a14:m>
-                <a:endParaRPr lang="en-US" sz="1200" dirty="0">
-                  <a:solidFill>
-                    <a:schemeClr val="tx1"/>
-                  </a:solidFill>
-                </a:endParaRPr>
-              </a:p>
-              <a:p>
-                <a:pPr marL="0" indent="0">
-                  <a:spcBef>
-                    <a:spcPts val="0"/>
-                  </a:spcBef>
-                  <a:buNone/>
-                </a:pPr>
-                <a14:m>
-                  <m:oMath xmlns:m="http://schemas.openxmlformats.org/officeDocument/2006/math">
-                    <m:sSub>
-                      <m:sSubPr>
-                        <m:ctrlPr>
-                          <a:rPr lang="en-US" sz="1200" i="1" dirty="0">
-                            <a:solidFill>
-                              <a:schemeClr val="tx1"/>
-                            </a:solidFill>
-                            <a:latin typeface="Cambria Math" panose="02040503050406030204" pitchFamily="18" charset="0"/>
-                          </a:rPr>
-                        </m:ctrlPr>
-                      </m:sSubPr>
-                      <m:e>
-                        <m:acc>
-                          <m:accPr>
-                            <m:chr m:val="̅"/>
-                            <m:ctrlPr>
-                              <a:rPr lang="en-US" sz="1200" i="1" dirty="0">
-                                <a:solidFill>
-                                  <a:schemeClr val="tx1"/>
-                                </a:solidFill>
-                                <a:latin typeface="Cambria Math" panose="02040503050406030204" pitchFamily="18" charset="0"/>
-                              </a:rPr>
-                            </m:ctrlPr>
-                          </m:accPr>
-                          <m:e>
-                            <m:r>
-                              <a:rPr lang="en-US" sz="1200" i="1" dirty="0">
-                                <a:solidFill>
-                                  <a:schemeClr val="tx1"/>
-                                </a:solidFill>
-                                <a:latin typeface="Cambria Math" panose="02040503050406030204" pitchFamily="18" charset="0"/>
-                              </a:rPr>
-                              <m:t>𝑉</m:t>
-                            </m:r>
-                          </m:e>
-                        </m:acc>
-                      </m:e>
-                      <m:sub>
-                        <m:r>
-                          <a:rPr lang="en-US" sz="1200" i="1" dirty="0">
-                            <a:solidFill>
-                              <a:schemeClr val="tx1"/>
-                            </a:solidFill>
-                            <a:latin typeface="Cambria Math" panose="02040503050406030204" pitchFamily="18" charset="0"/>
-                          </a:rPr>
-                          <m:t>𝑡</m:t>
-                        </m:r>
-                      </m:sub>
-                    </m:sSub>
-                    <m:r>
-                      <a:rPr lang="en-US" sz="1200" i="1" dirty="0">
-                        <a:solidFill>
-                          <a:schemeClr val="tx1"/>
-                        </a:solidFill>
-                        <a:latin typeface="Cambria Math" panose="02040503050406030204" pitchFamily="18" charset="0"/>
-                      </a:rPr>
-                      <m:t>(</m:t>
-                    </m:r>
-                    <m:r>
-                      <a:rPr lang="en-US" sz="1200" i="1" dirty="0">
-                        <a:solidFill>
-                          <a:schemeClr val="tx1"/>
-                        </a:solidFill>
-                        <a:latin typeface="Cambria Math" panose="02040503050406030204" pitchFamily="18" charset="0"/>
-                      </a:rPr>
-                      <m:t>𝑠</m:t>
-                    </m:r>
-                    <m:r>
-                      <a:rPr lang="en-US" sz="1200" i="1" dirty="0">
-                        <a:solidFill>
-                          <a:schemeClr val="tx1"/>
-                        </a:solidFill>
-                        <a:latin typeface="Cambria Math" panose="02040503050406030204" pitchFamily="18" charset="0"/>
-                      </a:rPr>
-                      <m:t>) </m:t>
-                    </m:r>
-                  </m:oMath>
-                </a14:m>
-                <a:r>
-                  <a:rPr lang="en-US" sz="1200" dirty="0">
-                    <a:solidFill>
-                      <a:schemeClr val="tx1"/>
-                    </a:solidFill>
-                  </a:rPr>
-                  <a:t>	expected approximate action value</a:t>
-                </a:r>
-              </a:p>
-              <a:p>
-                <a:pPr marL="0" indent="0">
-                  <a:spcBef>
-                    <a:spcPts val="0"/>
-                  </a:spcBef>
-                  <a:buNone/>
-                </a:pPr>
-                <a14:m>
-                  <m:oMath xmlns:m="http://schemas.openxmlformats.org/officeDocument/2006/math">
-                    <m:sSub>
-                      <m:sSubPr>
-                        <m:ctrlPr>
-                          <a:rPr lang="en-US" sz="1200" i="1" dirty="0">
-                            <a:solidFill>
-                              <a:schemeClr val="tx1"/>
-                            </a:solidFill>
-                            <a:latin typeface="Cambria Math" panose="02040503050406030204" pitchFamily="18" charset="0"/>
-                          </a:rPr>
-                        </m:ctrlPr>
-                      </m:sSubPr>
-                      <m:e>
-                        <m:r>
-                          <a:rPr lang="en-US" sz="1200" i="1" dirty="0">
-                            <a:solidFill>
-                              <a:schemeClr val="tx1"/>
-                            </a:solidFill>
-                            <a:latin typeface="Cambria Math" panose="02040503050406030204" pitchFamily="18" charset="0"/>
-                          </a:rPr>
-                          <m:t>𝑈</m:t>
-                        </m:r>
-                      </m:e>
-                      <m:sub>
-                        <m:r>
-                          <a:rPr lang="en-US" sz="1200" i="1" dirty="0">
-                            <a:solidFill>
-                              <a:schemeClr val="tx1"/>
-                            </a:solidFill>
-                            <a:latin typeface="Cambria Math" panose="02040503050406030204" pitchFamily="18" charset="0"/>
-                          </a:rPr>
-                          <m:t>𝑡</m:t>
-                        </m:r>
-                      </m:sub>
-                    </m:sSub>
-                  </m:oMath>
-                </a14:m>
-                <a:r>
-                  <a:rPr lang="en-US" sz="1200" dirty="0">
-                    <a:solidFill>
-                      <a:schemeClr val="tx1"/>
-                    </a:solidFill>
-                  </a:rPr>
-                  <a:t>	target for estimate at time</a:t>
-                </a:r>
-                <a14:m>
-                  <m:oMath xmlns:m="http://schemas.openxmlformats.org/officeDocument/2006/math">
-                    <m:r>
-                      <a:rPr lang="en-US" sz="1200" i="1" dirty="0">
-                        <a:solidFill>
-                          <a:schemeClr val="tx1"/>
-                        </a:solidFill>
-                        <a:latin typeface="Cambria Math" panose="02040503050406030204" pitchFamily="18" charset="0"/>
-                      </a:rPr>
-                      <m:t> </m:t>
-                    </m:r>
-                    <m:r>
-                      <a:rPr lang="en-US" sz="1200" i="1" dirty="0">
-                        <a:solidFill>
-                          <a:schemeClr val="tx1"/>
-                        </a:solidFill>
-                        <a:latin typeface="Cambria Math" panose="02040503050406030204" pitchFamily="18" charset="0"/>
-                      </a:rPr>
-                      <m:t>𝑡</m:t>
-                    </m:r>
-                  </m:oMath>
-                </a14:m>
-                <a:endParaRPr lang="en-US" sz="1200" dirty="0">
-                  <a:solidFill>
-                    <a:schemeClr val="tx1"/>
-                  </a:solidFill>
-                </a:endParaRPr>
-              </a:p>
-            </p:txBody>
-          </p:sp>
-        </mc:Choice>
-        <mc:Fallback xmlns="">
-          <p:sp>
-            <p:nvSpPr>
-              <p:cNvPr id="3" name="Content Placeholder 2">
-                <a:extLst>
-                  <a:ext uri="{FF2B5EF4-FFF2-40B4-BE49-F238E27FC236}">
-                    <a16:creationId xmlns:a16="http://schemas.microsoft.com/office/drawing/2014/main" id="{47E69C9C-42B6-9B0F-9AE0-20D17703E490}"/>
-                  </a:ext>
-                </a:extLst>
-              </p:cNvPr>
-              <p:cNvSpPr>
-                <a:spLocks noGrp="1" noRot="1" noChangeAspect="1" noMove="1" noResize="1" noEditPoints="1" noAdjustHandles="1" noChangeArrowheads="1" noChangeShapeType="1" noTextEdit="1"/>
-              </p:cNvSpPr>
-              <p:nvPr>
-                <p:ph idx="1"/>
-              </p:nvPr>
-            </p:nvSpPr>
-            <p:spPr>
-              <a:xfrm>
-                <a:off x="6211474" y="1140632"/>
-                <a:ext cx="5273179" cy="2049857"/>
-              </a:xfrm>
-              <a:blipFill>
-                <a:blip r:embed="rId2"/>
-                <a:stretch>
-                  <a:fillRect b="-885"/>
-                </a:stretch>
-              </a:blipFill>
-            </p:spPr>
-            <p:txBody>
-              <a:bodyPr/>
-              <a:lstStyle/>
-              <a:p>
-                <a:r>
-                  <a:rPr lang="en-US">
-                    <a:noFill/>
-                  </a:rPr>
-                  <a:t> </a:t>
-                </a:r>
-              </a:p>
-            </p:txBody>
-          </p:sp>
-        </mc:Fallback>
-      </mc:AlternateContent>
-      <mc:AlternateContent xmlns:mc="http://schemas.openxmlformats.org/markup-compatibility/2006" xmlns:a14="http://schemas.microsoft.com/office/drawing/2010/main">
-        <mc:Choice Requires="a14">
-          <p:sp>
-            <p:nvSpPr>
-              <p:cNvPr id="10" name="TextBox 9">
-                <a:extLst>
-                  <a:ext uri="{FF2B5EF4-FFF2-40B4-BE49-F238E27FC236}">
-                    <a16:creationId xmlns:a16="http://schemas.microsoft.com/office/drawing/2014/main" id="{5CD475E5-BE3B-5594-57DC-46A17411F2F9}"/>
-                  </a:ext>
-                </a:extLst>
-              </p:cNvPr>
-              <p:cNvSpPr txBox="1"/>
-              <p:nvPr/>
-            </p:nvSpPr>
-            <p:spPr>
-              <a:xfrm>
-                <a:off x="822820" y="1124198"/>
-                <a:ext cx="5273179" cy="2308324"/>
-              </a:xfrm>
-              <a:prstGeom prst="rect">
-                <a:avLst/>
-              </a:prstGeom>
-            </p:spPr>
-            <p:style>
-              <a:lnRef idx="2">
-                <a:schemeClr val="accent2"/>
-              </a:lnRef>
-              <a:fillRef idx="1">
-                <a:schemeClr val="lt1"/>
-              </a:fillRef>
-              <a:effectRef idx="0">
-                <a:schemeClr val="accent2"/>
-              </a:effectRef>
-              <a:fontRef idx="minor">
-                <a:schemeClr val="dk1"/>
-              </a:fontRef>
-            </p:style>
-            <p:txBody>
-              <a:bodyPr wrap="square">
-                <a:spAutoFit/>
-              </a:bodyPr>
-              <a:lstStyle/>
-              <a:p>
-                <a:r>
-                  <a:rPr lang="en-US" sz="1200" b="1" dirty="0"/>
-                  <a:t>General</a:t>
-                </a:r>
-                <a:endParaRPr lang="en-US" sz="1200" dirty="0"/>
-              </a:p>
-              <a:p>
-                <a14:m>
-                  <m:oMath xmlns:m="http://schemas.openxmlformats.org/officeDocument/2006/math">
-                    <m:r>
-                      <a:rPr lang="en-US" sz="1200" i="1" dirty="0" smtClean="0">
-                        <a:latin typeface="Cambria Math" panose="02040503050406030204" pitchFamily="18" charset="0"/>
-                      </a:rPr>
-                      <m:t>𝑋</m:t>
-                    </m:r>
-                  </m:oMath>
-                </a14:m>
-                <a:r>
-                  <a:rPr lang="en-US" sz="1200" dirty="0"/>
-                  <a:t>	capital letters: random variables</a:t>
-                </a:r>
-                <a:br>
-                  <a:rPr lang="en-US" sz="1200" dirty="0"/>
-                </a:br>
-                <a14:m>
-                  <m:oMath xmlns:m="http://schemas.openxmlformats.org/officeDocument/2006/math">
-                    <m:r>
-                      <a:rPr lang="en-US" sz="1200" b="0" i="1" smtClean="0">
-                        <a:latin typeface="Cambria Math" panose="02040503050406030204" pitchFamily="18" charset="0"/>
-                      </a:rPr>
-                      <m:t>𝑥</m:t>
-                    </m:r>
-                    <m:r>
-                      <a:rPr lang="en-US" sz="1200" b="0" i="0" smtClean="0">
-                        <a:latin typeface="Cambria Math" panose="02040503050406030204" pitchFamily="18" charset="0"/>
-                      </a:rPr>
-                      <m:t>, </m:t>
-                    </m:r>
-                    <m:r>
-                      <a:rPr lang="en-US" sz="1200" b="0" i="1" smtClean="0">
-                        <a:latin typeface="Cambria Math" panose="02040503050406030204" pitchFamily="18" charset="0"/>
-                      </a:rPr>
-                      <m:t>𝑝</m:t>
-                    </m:r>
-                  </m:oMath>
-                </a14:m>
-                <a:r>
-                  <a:rPr lang="en-US" sz="1200" dirty="0"/>
-                  <a:t>	lower-case letters: realizations of random variables </a:t>
-                </a:r>
-                <a:br>
-                  <a:rPr lang="en-US" sz="1200" dirty="0"/>
-                </a:br>
-                <a:r>
-                  <a:rPr lang="en-US" sz="1200" dirty="0"/>
-                  <a:t>	or scalar functions</a:t>
-                </a:r>
-              </a:p>
-              <a:p>
-                <a14:m>
-                  <m:oMath xmlns:m="http://schemas.openxmlformats.org/officeDocument/2006/math">
-                    <m:r>
-                      <a:rPr lang="en-US" sz="1200" b="1" i="1" smtClean="0">
-                        <a:latin typeface="Cambria Math" panose="02040503050406030204" pitchFamily="18" charset="0"/>
-                      </a:rPr>
-                      <m:t>𝒘</m:t>
-                    </m:r>
-                  </m:oMath>
-                </a14:m>
-                <a:r>
-                  <a:rPr lang="en-US" sz="1200" dirty="0"/>
-                  <a:t> 	Bold lower-case letters: real-valued vectors </a:t>
-                </a:r>
-                <a:br>
-                  <a:rPr lang="en-US" sz="1200" dirty="0"/>
-                </a:br>
-                <a:r>
-                  <a:rPr lang="en-US" sz="1200" dirty="0"/>
-                  <a:t>	(even if random variables)</a:t>
-                </a:r>
-              </a:p>
-              <a:p>
-                <a14:m>
-                  <m:oMath xmlns:m="http://schemas.openxmlformats.org/officeDocument/2006/math">
-                    <m:r>
-                      <a:rPr lang="en-US" sz="1200" b="1" i="1" smtClean="0">
-                        <a:latin typeface="Cambria Math" panose="02040503050406030204" pitchFamily="18" charset="0"/>
-                      </a:rPr>
-                      <m:t>𝑾</m:t>
-                    </m:r>
-                  </m:oMath>
-                </a14:m>
-                <a:r>
-                  <a:rPr lang="en-US" sz="1200" dirty="0"/>
-                  <a:t>	bold capitals: matrices</a:t>
-                </a:r>
-              </a:p>
-              <a:p>
-                <a14:m>
-                  <m:oMath xmlns:m="http://schemas.openxmlformats.org/officeDocument/2006/math">
-                    <m:r>
-                      <a:rPr lang="en-US" sz="1200" b="0" i="1" smtClean="0">
-                        <a:latin typeface="Cambria Math" panose="02040503050406030204" pitchFamily="18" charset="0"/>
-                      </a:rPr>
-                      <m:t>𝛼</m:t>
-                    </m:r>
-                  </m:oMath>
-                </a14:m>
-                <a:r>
-                  <a:rPr lang="en-US" sz="1200" dirty="0"/>
-                  <a:t>	Greek letters: parameters (vectors if in bolt)</a:t>
-                </a:r>
-              </a:p>
-              <a:p>
-                <a14:m>
-                  <m:oMath xmlns:m="http://schemas.openxmlformats.org/officeDocument/2006/math">
-                    <m:r>
-                      <m:rPr>
-                        <m:sty m:val="p"/>
-                      </m:rPr>
-                      <a:rPr lang="en-US" sz="1200" i="1" dirty="0">
-                        <a:latin typeface="Cambria Math" panose="02040503050406030204" pitchFamily="18" charset="0"/>
-                      </a:rPr>
-                      <m:t>Pr</m:t>
-                    </m:r>
-                    <m:r>
-                      <a:rPr lang="en-US" sz="1200" i="1" dirty="0">
-                        <a:latin typeface="Cambria Math" panose="02040503050406030204" pitchFamily="18" charset="0"/>
-                      </a:rPr>
-                      <m:t>⁡{</m:t>
-                    </m:r>
-                    <m:r>
-                      <a:rPr lang="en-US" sz="1200" i="1" dirty="0">
-                        <a:latin typeface="Cambria Math" panose="02040503050406030204" pitchFamily="18" charset="0"/>
-                      </a:rPr>
-                      <m:t>𝑋</m:t>
-                    </m:r>
-                    <m:r>
-                      <a:rPr lang="en-US" sz="1200" i="1" dirty="0">
-                        <a:latin typeface="Cambria Math" panose="02040503050406030204" pitchFamily="18" charset="0"/>
-                      </a:rPr>
-                      <m:t>=</m:t>
-                    </m:r>
-                    <m:r>
-                      <a:rPr lang="en-US" sz="1200" i="1" dirty="0">
-                        <a:latin typeface="Cambria Math" panose="02040503050406030204" pitchFamily="18" charset="0"/>
-                      </a:rPr>
-                      <m:t>𝑥</m:t>
-                    </m:r>
-                    <m:r>
-                      <a:rPr lang="en-US" sz="1200" i="1" dirty="0">
-                        <a:latin typeface="Cambria Math" panose="02040503050406030204" pitchFamily="18" charset="0"/>
-                      </a:rPr>
-                      <m:t>}</m:t>
-                    </m:r>
-                  </m:oMath>
-                </a14:m>
-                <a:r>
-                  <a:rPr lang="en-US" sz="1200" dirty="0"/>
-                  <a:t>	probability that a random variable </a:t>
-                </a:r>
-                <a14:m>
-                  <m:oMath xmlns:m="http://schemas.openxmlformats.org/officeDocument/2006/math">
-                    <m:r>
-                      <a:rPr lang="en-US" sz="1200" i="1" dirty="0">
-                        <a:latin typeface="Cambria Math" panose="02040503050406030204" pitchFamily="18" charset="0"/>
-                      </a:rPr>
-                      <m:t>𝑋</m:t>
-                    </m:r>
-                  </m:oMath>
-                </a14:m>
-                <a:r>
-                  <a:rPr lang="en-US" sz="1200" dirty="0"/>
-                  <a:t> takes on the value </a:t>
-                </a:r>
-                <a14:m>
-                  <m:oMath xmlns:m="http://schemas.openxmlformats.org/officeDocument/2006/math">
-                    <m:r>
-                      <a:rPr lang="en-US" sz="1200" i="1" dirty="0">
-                        <a:latin typeface="Cambria Math" panose="02040503050406030204" pitchFamily="18" charset="0"/>
-                      </a:rPr>
-                      <m:t>𝑥</m:t>
-                    </m:r>
-                  </m:oMath>
-                </a14:m>
-                <a:endParaRPr lang="en-US" sz="1200" dirty="0"/>
-              </a:p>
-              <a:p>
-                <a14:m>
-                  <m:oMath xmlns:m="http://schemas.openxmlformats.org/officeDocument/2006/math">
-                    <m:r>
-                      <a:rPr lang="en-US" sz="1200" i="1" dirty="0">
-                        <a:latin typeface="Cambria Math" panose="02040503050406030204" pitchFamily="18" charset="0"/>
-                      </a:rPr>
-                      <m:t>𝑋</m:t>
-                    </m:r>
-                    <m:r>
-                      <a:rPr lang="en-US" sz="1200" i="1" dirty="0">
-                        <a:latin typeface="Cambria Math" panose="02040503050406030204" pitchFamily="18" charset="0"/>
-                      </a:rPr>
-                      <m:t>~</m:t>
-                    </m:r>
-                    <m:r>
-                      <a:rPr lang="en-US" sz="1200" i="1" dirty="0">
-                        <a:latin typeface="Cambria Math" panose="02040503050406030204" pitchFamily="18" charset="0"/>
-                      </a:rPr>
-                      <m:t>𝑝</m:t>
-                    </m:r>
-                  </m:oMath>
-                </a14:m>
-                <a:r>
-                  <a:rPr lang="en-US" sz="1200" dirty="0"/>
-                  <a:t>	random variable </a:t>
-                </a:r>
-                <a14:m>
-                  <m:oMath xmlns:m="http://schemas.openxmlformats.org/officeDocument/2006/math">
-                    <m:r>
-                      <a:rPr lang="en-US" sz="1200" i="1" dirty="0">
-                        <a:latin typeface="Cambria Math" panose="02040503050406030204" pitchFamily="18" charset="0"/>
-                      </a:rPr>
-                      <m:t>𝑋</m:t>
-                    </m:r>
-                  </m:oMath>
-                </a14:m>
-                <a:r>
-                  <a:rPr lang="en-US" sz="1200" dirty="0"/>
-                  <a:t> selected from distribution</a:t>
-                </a:r>
-                <a14:m>
-                  <m:oMath xmlns:m="http://schemas.openxmlformats.org/officeDocument/2006/math">
-                    <m:r>
-                      <a:rPr lang="en-US" sz="1200" i="1">
-                        <a:latin typeface="Cambria Math" panose="02040503050406030204" pitchFamily="18" charset="0"/>
-                      </a:rPr>
-                      <m:t>𝑝</m:t>
-                    </m:r>
-                    <m:d>
-                      <m:dPr>
-                        <m:ctrlPr>
-                          <a:rPr lang="en-US" sz="1200" i="1">
-                            <a:latin typeface="Cambria Math" panose="02040503050406030204" pitchFamily="18" charset="0"/>
-                          </a:rPr>
-                        </m:ctrlPr>
-                      </m:dPr>
-                      <m:e>
-                        <m:r>
-                          <a:rPr lang="en-US" sz="1200" i="1">
-                            <a:latin typeface="Cambria Math" panose="02040503050406030204" pitchFamily="18" charset="0"/>
-                          </a:rPr>
-                          <m:t>𝑥</m:t>
-                        </m:r>
-                      </m:e>
-                    </m:d>
-                    <m:r>
-                      <a:rPr lang="en-US" sz="1200" i="1">
-                        <a:latin typeface="Cambria Math" panose="02040503050406030204" pitchFamily="18" charset="0"/>
-                      </a:rPr>
-                      <m:t>=</m:t>
-                    </m:r>
-                    <m:r>
-                      <m:rPr>
-                        <m:sty m:val="p"/>
-                      </m:rPr>
-                      <a:rPr lang="en-US" sz="1200">
-                        <a:latin typeface="Cambria Math" panose="02040503050406030204" pitchFamily="18" charset="0"/>
-                      </a:rPr>
-                      <m:t>Pr</m:t>
-                    </m:r>
-                    <m:r>
-                      <a:rPr lang="en-US" sz="1200" i="1">
-                        <a:latin typeface="Cambria Math" panose="02040503050406030204" pitchFamily="18" charset="0"/>
-                      </a:rPr>
-                      <m:t>⁡{</m:t>
-                    </m:r>
-                    <m:r>
-                      <a:rPr lang="en-US" sz="1200" i="1">
-                        <a:latin typeface="Cambria Math" panose="02040503050406030204" pitchFamily="18" charset="0"/>
-                      </a:rPr>
-                      <m:t>𝑋</m:t>
-                    </m:r>
-                    <m:r>
-                      <a:rPr lang="en-US" sz="1200" i="1">
-                        <a:latin typeface="Cambria Math" panose="02040503050406030204" pitchFamily="18" charset="0"/>
-                      </a:rPr>
-                      <m:t>=</m:t>
-                    </m:r>
-                    <m:r>
-                      <a:rPr lang="en-US" sz="1200" i="1">
-                        <a:latin typeface="Cambria Math" panose="02040503050406030204" pitchFamily="18" charset="0"/>
-                      </a:rPr>
-                      <m:t>𝑥</m:t>
-                    </m:r>
-                    <m:r>
-                      <a:rPr lang="en-US" sz="1200" i="1">
-                        <a:latin typeface="Cambria Math" panose="02040503050406030204" pitchFamily="18" charset="0"/>
-                      </a:rPr>
-                      <m:t>}</m:t>
-                    </m:r>
-                  </m:oMath>
-                </a14:m>
-                <a:endParaRPr lang="en-US" sz="1200" dirty="0"/>
-              </a:p>
-              <a:p>
-                <a14:m>
-                  <m:oMath xmlns:m="http://schemas.openxmlformats.org/officeDocument/2006/math">
-                    <m:r>
-                      <a:rPr lang="en-US" sz="1200" i="1">
-                        <a:latin typeface="Cambria Math" panose="02040503050406030204" pitchFamily="18" charset="0"/>
-                        <a:ea typeface="Cambria Math" panose="02040503050406030204" pitchFamily="18" charset="0"/>
-                      </a:rPr>
-                      <m:t>𝔼</m:t>
-                    </m:r>
-                    <m:r>
-                      <a:rPr lang="en-US" sz="1200" i="1">
-                        <a:latin typeface="Cambria Math" panose="02040503050406030204" pitchFamily="18" charset="0"/>
-                        <a:ea typeface="Cambria Math" panose="02040503050406030204" pitchFamily="18" charset="0"/>
-                      </a:rPr>
-                      <m:t>[</m:t>
-                    </m:r>
-                    <m:r>
-                      <a:rPr lang="en-US" sz="1200" i="1">
-                        <a:latin typeface="Cambria Math" panose="02040503050406030204" pitchFamily="18" charset="0"/>
-                        <a:ea typeface="Cambria Math" panose="02040503050406030204" pitchFamily="18" charset="0"/>
-                      </a:rPr>
-                      <m:t>𝑋</m:t>
-                    </m:r>
-                    <m:r>
-                      <a:rPr lang="en-US" sz="1200" i="1">
-                        <a:latin typeface="Cambria Math" panose="02040503050406030204" pitchFamily="18" charset="0"/>
-                        <a:ea typeface="Cambria Math" panose="02040503050406030204" pitchFamily="18" charset="0"/>
-                      </a:rPr>
-                      <m:t>]</m:t>
-                    </m:r>
-                  </m:oMath>
-                </a14:m>
-                <a:r>
-                  <a:rPr lang="en-US" sz="1200" dirty="0"/>
-                  <a:t>	expectation of a random variable </a:t>
-                </a:r>
-                <a14:m>
-                  <m:oMath xmlns:m="http://schemas.openxmlformats.org/officeDocument/2006/math">
-                    <m:r>
-                      <a:rPr lang="en-US" sz="1200" i="1" dirty="0">
-                        <a:latin typeface="Cambria Math" panose="02040503050406030204" pitchFamily="18" charset="0"/>
-                      </a:rPr>
-                      <m:t>𝑋</m:t>
-                    </m:r>
-                  </m:oMath>
-                </a14:m>
-                <a:r>
-                  <a:rPr lang="en-US" sz="1200" dirty="0"/>
-                  <a:t>, i.e.,</a:t>
-                </a:r>
-                <a14:m>
-                  <m:oMath xmlns:m="http://schemas.openxmlformats.org/officeDocument/2006/math">
-                    <m:r>
-                      <a:rPr lang="en-US" sz="1200" i="1">
-                        <a:latin typeface="Cambria Math" panose="02040503050406030204" pitchFamily="18" charset="0"/>
-                        <a:ea typeface="Cambria Math" panose="02040503050406030204" pitchFamily="18" charset="0"/>
-                      </a:rPr>
-                      <m:t>𝔼</m:t>
-                    </m:r>
-                    <m:d>
-                      <m:dPr>
-                        <m:begChr m:val="["/>
-                        <m:endChr m:val="]"/>
-                        <m:ctrlPr>
-                          <a:rPr lang="en-US" sz="1200" i="1">
-                            <a:latin typeface="Cambria Math" panose="02040503050406030204" pitchFamily="18" charset="0"/>
-                            <a:ea typeface="Cambria Math" panose="02040503050406030204" pitchFamily="18" charset="0"/>
-                          </a:rPr>
-                        </m:ctrlPr>
-                      </m:dPr>
-                      <m:e>
-                        <m:r>
-                          <a:rPr lang="en-US" sz="1200" i="1">
-                            <a:latin typeface="Cambria Math" panose="02040503050406030204" pitchFamily="18" charset="0"/>
-                            <a:ea typeface="Cambria Math" panose="02040503050406030204" pitchFamily="18" charset="0"/>
-                          </a:rPr>
-                          <m:t>𝑋</m:t>
-                        </m:r>
-                      </m:e>
-                    </m:d>
-                    <m:r>
-                      <a:rPr lang="en-US" sz="1200" i="1">
-                        <a:latin typeface="Cambria Math" panose="02040503050406030204" pitchFamily="18" charset="0"/>
-                        <a:ea typeface="Cambria Math" panose="02040503050406030204" pitchFamily="18" charset="0"/>
-                      </a:rPr>
-                      <m:t>=</m:t>
-                    </m:r>
-                    <m:nary>
-                      <m:naryPr>
-                        <m:chr m:val="∑"/>
-                        <m:supHide m:val="on"/>
-                        <m:ctrlPr>
-                          <a:rPr lang="en-US" sz="1200" i="1">
-                            <a:latin typeface="Cambria Math" panose="02040503050406030204" pitchFamily="18" charset="0"/>
-                            <a:ea typeface="Cambria Math" panose="02040503050406030204" pitchFamily="18" charset="0"/>
-                          </a:rPr>
-                        </m:ctrlPr>
-                      </m:naryPr>
-                      <m:sub>
-                        <m:r>
-                          <a:rPr lang="en-US" sz="1200" i="1">
-                            <a:latin typeface="Cambria Math" panose="02040503050406030204" pitchFamily="18" charset="0"/>
-                            <a:ea typeface="Cambria Math" panose="02040503050406030204" pitchFamily="18" charset="0"/>
-                          </a:rPr>
-                          <m:t>𝑥</m:t>
-                        </m:r>
-                      </m:sub>
-                      <m:sup/>
-                      <m:e>
-                        <m:r>
-                          <a:rPr lang="en-US" sz="1200" i="1">
-                            <a:latin typeface="Cambria Math" panose="02040503050406030204" pitchFamily="18" charset="0"/>
-                            <a:ea typeface="Cambria Math" panose="02040503050406030204" pitchFamily="18" charset="0"/>
-                          </a:rPr>
-                          <m:t>𝑝</m:t>
-                        </m:r>
-                        <m:d>
-                          <m:dPr>
-                            <m:ctrlPr>
-                              <a:rPr lang="en-US" sz="1200" i="1">
-                                <a:latin typeface="Cambria Math" panose="02040503050406030204" pitchFamily="18" charset="0"/>
-                                <a:ea typeface="Cambria Math" panose="02040503050406030204" pitchFamily="18" charset="0"/>
-                              </a:rPr>
-                            </m:ctrlPr>
-                          </m:dPr>
-                          <m:e>
-                            <m:r>
-                              <a:rPr lang="en-US" sz="1200" i="1">
-                                <a:latin typeface="Cambria Math" panose="02040503050406030204" pitchFamily="18" charset="0"/>
-                                <a:ea typeface="Cambria Math" panose="02040503050406030204" pitchFamily="18" charset="0"/>
-                              </a:rPr>
-                              <m:t>𝑥</m:t>
-                            </m:r>
-                          </m:e>
-                        </m:d>
-                        <m:r>
-                          <a:rPr lang="en-US" sz="1200" i="1">
-                            <a:latin typeface="Cambria Math" panose="02040503050406030204" pitchFamily="18" charset="0"/>
-                            <a:ea typeface="Cambria Math" panose="02040503050406030204" pitchFamily="18" charset="0"/>
-                          </a:rPr>
-                          <m:t>𝑥</m:t>
-                        </m:r>
-                      </m:e>
-                    </m:nary>
-                  </m:oMath>
-                </a14:m>
-                <a:endParaRPr lang="en-US" sz="1200" dirty="0">
-                  <a:ea typeface="Cambria Math" panose="02040503050406030204" pitchFamily="18" charset="0"/>
-                </a:endParaRPr>
-              </a:p>
-              <a:p>
-                <a14:m>
-                  <m:oMath xmlns:m="http://schemas.openxmlformats.org/officeDocument/2006/math">
-                    <m:sSub>
-                      <m:sSubPr>
-                        <m:ctrlPr>
-                          <a:rPr lang="en-US" sz="1200" i="1" dirty="0">
-                            <a:latin typeface="Cambria Math" panose="02040503050406030204" pitchFamily="18" charset="0"/>
-                          </a:rPr>
-                        </m:ctrlPr>
-                      </m:sSubPr>
-                      <m:e>
-                        <m:r>
-                          <m:rPr>
-                            <m:sty m:val="p"/>
-                          </m:rPr>
-                          <a:rPr lang="en-US" sz="1200" dirty="0">
-                            <a:latin typeface="Cambria Math" panose="02040503050406030204" pitchFamily="18" charset="0"/>
-                          </a:rPr>
-                          <m:t>argmax</m:t>
-                        </m:r>
-                      </m:e>
-                      <m:sub>
-                        <m:r>
-                          <m:rPr>
-                            <m:sty m:val="p"/>
-                          </m:rPr>
-                          <a:rPr lang="en-US" sz="1200" dirty="0">
-                            <a:latin typeface="Cambria Math" panose="02040503050406030204" pitchFamily="18" charset="0"/>
-                          </a:rPr>
-                          <m:t>a</m:t>
-                        </m:r>
-                      </m:sub>
-                    </m:sSub>
-                    <m:r>
-                      <a:rPr lang="en-US" sz="1200" dirty="0">
-                        <a:latin typeface="Cambria Math" panose="02040503050406030204" pitchFamily="18" charset="0"/>
-                      </a:rPr>
-                      <m:t> </m:t>
-                    </m:r>
-                    <m:r>
-                      <a:rPr lang="en-US" sz="1200" i="1" dirty="0">
-                        <a:latin typeface="Cambria Math" panose="02040503050406030204" pitchFamily="18" charset="0"/>
-                      </a:rPr>
-                      <m:t>𝑓</m:t>
-                    </m:r>
-                    <m:r>
-                      <a:rPr lang="en-US" sz="1200" i="1" dirty="0">
-                        <a:latin typeface="Cambria Math" panose="02040503050406030204" pitchFamily="18" charset="0"/>
-                      </a:rPr>
-                      <m:t>(</m:t>
-                    </m:r>
-                    <m:r>
-                      <a:rPr lang="en-US" sz="1200" i="1" dirty="0">
-                        <a:latin typeface="Cambria Math" panose="02040503050406030204" pitchFamily="18" charset="0"/>
-                      </a:rPr>
-                      <m:t>𝑎</m:t>
-                    </m:r>
-                    <m:r>
-                      <a:rPr lang="en-US" sz="1200" i="1" dirty="0">
-                        <a:latin typeface="Cambria Math" panose="02040503050406030204" pitchFamily="18" charset="0"/>
-                      </a:rPr>
-                      <m:t>)</m:t>
-                    </m:r>
-                  </m:oMath>
-                </a14:m>
-                <a:r>
-                  <a:rPr lang="en-US" sz="1200" dirty="0"/>
-                  <a:t> a value of action </a:t>
-                </a:r>
-                <a14:m>
-                  <m:oMath xmlns:m="http://schemas.openxmlformats.org/officeDocument/2006/math">
-                    <m:r>
-                      <a:rPr lang="en-US" sz="1200" i="1" dirty="0">
-                        <a:latin typeface="Cambria Math" panose="02040503050406030204" pitchFamily="18" charset="0"/>
-                      </a:rPr>
-                      <m:t>𝑎</m:t>
-                    </m:r>
-                  </m:oMath>
-                </a14:m>
-                <a:r>
-                  <a:rPr lang="en-US" sz="1200" dirty="0"/>
-                  <a:t> at which </a:t>
-                </a:r>
-                <a14:m>
-                  <m:oMath xmlns:m="http://schemas.openxmlformats.org/officeDocument/2006/math">
-                    <m:r>
-                      <a:rPr lang="en-US" sz="1200" i="1" dirty="0">
-                        <a:latin typeface="Cambria Math" panose="02040503050406030204" pitchFamily="18" charset="0"/>
-                      </a:rPr>
-                      <m:t>𝑓</m:t>
-                    </m:r>
-                    <m:r>
-                      <a:rPr lang="en-US" sz="1200" i="1" dirty="0">
-                        <a:latin typeface="Cambria Math" panose="02040503050406030204" pitchFamily="18" charset="0"/>
-                      </a:rPr>
-                      <m:t>(</m:t>
-                    </m:r>
-                    <m:r>
-                      <a:rPr lang="en-US" sz="1200" i="1" dirty="0">
-                        <a:latin typeface="Cambria Math" panose="02040503050406030204" pitchFamily="18" charset="0"/>
-                      </a:rPr>
-                      <m:t>𝑎</m:t>
-                    </m:r>
-                    <m:r>
-                      <a:rPr lang="en-US" sz="1200" i="1" dirty="0">
-                        <a:latin typeface="Cambria Math" panose="02040503050406030204" pitchFamily="18" charset="0"/>
-                      </a:rPr>
-                      <m:t>)</m:t>
-                    </m:r>
-                  </m:oMath>
-                </a14:m>
-                <a:r>
-                  <a:rPr lang="en-US" sz="1200" dirty="0"/>
-                  <a:t> takes its maximal value</a:t>
-                </a:r>
-              </a:p>
-            </p:txBody>
-          </p:sp>
-        </mc:Choice>
-        <mc:Fallback xmlns="">
-          <p:sp>
-            <p:nvSpPr>
-              <p:cNvPr id="10" name="TextBox 9">
-                <a:extLst>
-                  <a:ext uri="{FF2B5EF4-FFF2-40B4-BE49-F238E27FC236}">
-                    <a16:creationId xmlns:a16="http://schemas.microsoft.com/office/drawing/2014/main" id="{5CD475E5-BE3B-5594-57DC-46A17411F2F9}"/>
-                  </a:ext>
-                </a:extLst>
-              </p:cNvPr>
-              <p:cNvSpPr txBox="1">
-                <a:spLocks noRot="1" noChangeAspect="1" noMove="1" noResize="1" noEditPoints="1" noAdjustHandles="1" noChangeArrowheads="1" noChangeShapeType="1" noTextEdit="1"/>
-              </p:cNvSpPr>
-              <p:nvPr/>
-            </p:nvSpPr>
-            <p:spPr>
-              <a:xfrm>
-                <a:off x="822820" y="1124198"/>
-                <a:ext cx="5273179" cy="2308324"/>
-              </a:xfrm>
-              <a:prstGeom prst="rect">
-                <a:avLst/>
-              </a:prstGeom>
-              <a:blipFill>
-                <a:blip r:embed="rId3"/>
-                <a:stretch>
-                  <a:fillRect b="-9424"/>
-                </a:stretch>
-              </a:blipFill>
-            </p:spPr>
-            <p:txBody>
-              <a:bodyPr/>
-              <a:lstStyle/>
-              <a:p>
-                <a:r>
-                  <a:rPr lang="en-US">
-                    <a:noFill/>
-                  </a:rPr>
-                  <a:t> </a:t>
-                </a:r>
-              </a:p>
-            </p:txBody>
-          </p:sp>
-        </mc:Fallback>
-      </mc:AlternateContent>
-      <mc:AlternateContent xmlns:mc="http://schemas.openxmlformats.org/markup-compatibility/2006" xmlns:a14="http://schemas.microsoft.com/office/drawing/2010/main">
-        <mc:Choice Requires="a14">
-          <p:sp>
-            <p:nvSpPr>
-              <p:cNvPr id="11" name="Content Placeholder 2">
-                <a:extLst>
-                  <a:ext uri="{FF2B5EF4-FFF2-40B4-BE49-F238E27FC236}">
-                    <a16:creationId xmlns:a16="http://schemas.microsoft.com/office/drawing/2014/main" id="{6F45EA4F-65F9-5141-0B09-C395CF9CA7A0}"/>
-                  </a:ext>
-                </a:extLst>
-              </p:cNvPr>
-              <p:cNvSpPr txBox="1">
-                <a:spLocks/>
-              </p:cNvSpPr>
-              <p:nvPr/>
-            </p:nvSpPr>
-            <p:spPr>
-              <a:xfrm>
-                <a:off x="822819" y="3570646"/>
-                <a:ext cx="5273179" cy="2985823"/>
-              </a:xfrm>
-              <a:prstGeom prst="rect">
-                <a:avLst/>
-              </a:prstGeom>
-            </p:spPr>
-            <p:style>
-              <a:lnRef idx="2">
-                <a:schemeClr val="accent2"/>
-              </a:lnRef>
-              <a:fillRef idx="1">
-                <a:schemeClr val="lt1"/>
-              </a:fillRef>
-              <a:effectRef idx="0">
-                <a:schemeClr val="accent2"/>
-              </a:effectRef>
-              <a:fontRef idx="minor">
-                <a:schemeClr val="dk1"/>
-              </a:fontRef>
-            </p:style>
-            <p:txBody>
-              <a:bodyPr vert="horz" lIns="91440" tIns="45720" rIns="91440" bIns="45720" rtlCol="0">
-                <a:spAutoFit/>
-              </a:bodyPr>
-              <a:lstStyle>
-                <a:lvl1pPr marL="228600" indent="-228600" algn="l" defTabSz="914400" rtl="0" eaLnBrk="1" latinLnBrk="0" hangingPunct="1">
-                  <a:lnSpc>
-                    <a:spcPct val="90000"/>
-                  </a:lnSpc>
-                  <a:spcBef>
-                    <a:spcPts val="1000"/>
-                  </a:spcBef>
-                  <a:buFont typeface="Arial" panose="020B0604020202020204" pitchFamily="34" charset="0"/>
-                  <a:buChar char="•"/>
-                  <a:defRPr sz="2800" kern="1200">
-                    <a:solidFill>
-                      <a:schemeClr val="tx1"/>
-                    </a:solidFill>
-                    <a:latin typeface="+mn-lt"/>
-                    <a:ea typeface="+mn-ea"/>
-                    <a:cs typeface="+mn-cs"/>
-                  </a:defRPr>
-                </a:lvl1pPr>
-                <a:lvl2pPr marL="685800" indent="-228600" algn="l" defTabSz="914400" rtl="0" eaLnBrk="1" latinLnBrk="0" hangingPunct="1">
-                  <a:lnSpc>
-                    <a:spcPct val="90000"/>
-                  </a:lnSpc>
-                  <a:spcBef>
-                    <a:spcPts val="500"/>
-                  </a:spcBef>
-                  <a:buFont typeface="Arial" panose="020B0604020202020204" pitchFamily="34" charset="0"/>
-                  <a:buChar char="•"/>
-                  <a:defRPr sz="2400" kern="1200">
-                    <a:solidFill>
-                      <a:schemeClr val="tx1"/>
-                    </a:solidFill>
-                    <a:latin typeface="+mn-lt"/>
-                    <a:ea typeface="+mn-ea"/>
-                    <a:cs typeface="+mn-cs"/>
-                  </a:defRPr>
-                </a:lvl2pPr>
-                <a:lvl3pPr marL="1143000" indent="-228600" algn="l" defTabSz="914400" rtl="0" eaLnBrk="1" latinLnBrk="0" hangingPunct="1">
-                  <a:lnSpc>
-                    <a:spcPct val="90000"/>
-                  </a:lnSpc>
-                  <a:spcBef>
-                    <a:spcPts val="500"/>
-                  </a:spcBef>
-                  <a:buFont typeface="Arial" panose="020B0604020202020204" pitchFamily="34" charset="0"/>
-                  <a:buChar char="•"/>
-                  <a:defRPr sz="2000" kern="1200">
-                    <a:solidFill>
-                      <a:schemeClr val="tx1"/>
-                    </a:solidFill>
-                    <a:latin typeface="+mn-lt"/>
-                    <a:ea typeface="+mn-ea"/>
-                    <a:cs typeface="+mn-cs"/>
-                  </a:defRPr>
-                </a:lvl3pPr>
-                <a:lvl4pPr marL="1600200" indent="-228600" algn="l" defTabSz="914400" rtl="0" eaLnBrk="1" latinLnBrk="0" hangingPunct="1">
-                  <a:lnSpc>
-                    <a:spcPct val="90000"/>
-                  </a:lnSpc>
-                  <a:spcBef>
-                    <a:spcPts val="500"/>
-                  </a:spcBef>
-                  <a:buFont typeface="Arial" panose="020B0604020202020204" pitchFamily="34" charset="0"/>
-                  <a:buChar char="•"/>
-                  <a:defRPr sz="1800" kern="1200">
-                    <a:solidFill>
-                      <a:schemeClr val="tx1"/>
-                    </a:solidFill>
-                    <a:latin typeface="+mn-lt"/>
-                    <a:ea typeface="+mn-ea"/>
-                    <a:cs typeface="+mn-cs"/>
-                  </a:defRPr>
-                </a:lvl4pPr>
-                <a:lvl5pPr marL="2057400" indent="-228600" algn="l" defTabSz="914400" rtl="0" eaLnBrk="1" latinLnBrk="0" hangingPunct="1">
-                  <a:lnSpc>
-                    <a:spcPct val="90000"/>
-                  </a:lnSpc>
-                  <a:spcBef>
-                    <a:spcPts val="500"/>
-                  </a:spcBef>
-                  <a:buFont typeface="Arial" panose="020B0604020202020204" pitchFamily="34" charset="0"/>
-                  <a:buChar char="•"/>
-                  <a:defRPr sz="1800" kern="1200">
-                    <a:solidFill>
-                      <a:schemeClr val="tx1"/>
-                    </a:solidFill>
-                    <a:latin typeface="+mn-lt"/>
-                    <a:ea typeface="+mn-ea"/>
-                    <a:cs typeface="+mn-cs"/>
-                  </a:defRPr>
-                </a:lvl5pPr>
-                <a:lvl6pPr marL="2514600" indent="-228600" algn="l" defTabSz="914400" rtl="0" eaLnBrk="1" latinLnBrk="0" hangingPunct="1">
-                  <a:lnSpc>
-                    <a:spcPct val="90000"/>
-                  </a:lnSpc>
-                  <a:spcBef>
-                    <a:spcPts val="500"/>
-                  </a:spcBef>
-                  <a:buFont typeface="Arial" panose="020B0604020202020204" pitchFamily="34" charset="0"/>
-                  <a:buChar char="•"/>
-                  <a:defRPr sz="1800" kern="1200">
-                    <a:solidFill>
-                      <a:schemeClr val="tx1"/>
-                    </a:solidFill>
-                    <a:latin typeface="+mn-lt"/>
-                    <a:ea typeface="+mn-ea"/>
-                    <a:cs typeface="+mn-cs"/>
-                  </a:defRPr>
-                </a:lvl6pPr>
-                <a:lvl7pPr marL="2971800" indent="-228600" algn="l" defTabSz="914400" rtl="0" eaLnBrk="1" latinLnBrk="0" hangingPunct="1">
-                  <a:lnSpc>
-                    <a:spcPct val="90000"/>
-                  </a:lnSpc>
-                  <a:spcBef>
-                    <a:spcPts val="500"/>
-                  </a:spcBef>
-                  <a:buFont typeface="Arial" panose="020B0604020202020204" pitchFamily="34" charset="0"/>
-                  <a:buChar char="•"/>
-                  <a:defRPr sz="1800" kern="1200">
-                    <a:solidFill>
-                      <a:schemeClr val="tx1"/>
-                    </a:solidFill>
-                    <a:latin typeface="+mn-lt"/>
-                    <a:ea typeface="+mn-ea"/>
-                    <a:cs typeface="+mn-cs"/>
-                  </a:defRPr>
-                </a:lvl7pPr>
-                <a:lvl8pPr marL="3429000" indent="-228600" algn="l" defTabSz="914400" rtl="0" eaLnBrk="1" latinLnBrk="0" hangingPunct="1">
-                  <a:lnSpc>
-                    <a:spcPct val="90000"/>
-                  </a:lnSpc>
-                  <a:spcBef>
-                    <a:spcPts val="500"/>
-                  </a:spcBef>
-                  <a:buFont typeface="Arial" panose="020B0604020202020204" pitchFamily="34" charset="0"/>
-                  <a:buChar char="•"/>
-                  <a:defRPr sz="1800" kern="1200">
-                    <a:solidFill>
-                      <a:schemeClr val="tx1"/>
-                    </a:solidFill>
-                    <a:latin typeface="+mn-lt"/>
-                    <a:ea typeface="+mn-ea"/>
-                    <a:cs typeface="+mn-cs"/>
-                  </a:defRPr>
-                </a:lvl8pPr>
-                <a:lvl9pPr marL="3886200" indent="-228600" algn="l" defTabSz="914400" rtl="0" eaLnBrk="1" latinLnBrk="0" hangingPunct="1">
-                  <a:lnSpc>
-                    <a:spcPct val="90000"/>
-                  </a:lnSpc>
-                  <a:spcBef>
-                    <a:spcPts val="500"/>
-                  </a:spcBef>
-                  <a:buFont typeface="Arial" panose="020B0604020202020204" pitchFamily="34" charset="0"/>
-                  <a:buChar char="•"/>
-                  <a:defRPr sz="1800" kern="1200">
-                    <a:solidFill>
-                      <a:schemeClr val="tx1"/>
-                    </a:solidFill>
-                    <a:latin typeface="+mn-lt"/>
-                    <a:ea typeface="+mn-ea"/>
-                    <a:cs typeface="+mn-cs"/>
-                  </a:defRPr>
-                </a:lvl9pPr>
-              </a:lstStyle>
-              <a:p>
-                <a:pPr marL="0" indent="0">
-                  <a:spcBef>
-                    <a:spcPts val="0"/>
-                  </a:spcBef>
-                  <a:buNone/>
-                </a:pPr>
-                <a:r>
-                  <a:rPr lang="en-US" sz="1200" b="1" dirty="0"/>
-                  <a:t>MDP</a:t>
-                </a:r>
-              </a:p>
-              <a:p>
-                <a:pPr marL="0" indent="0">
-                  <a:spcBef>
-                    <a:spcPts val="0"/>
-                  </a:spcBef>
-                  <a:buNone/>
-                </a:pPr>
-                <a14:m>
-                  <m:oMath xmlns:m="http://schemas.openxmlformats.org/officeDocument/2006/math">
-                    <m:r>
-                      <a:rPr lang="en-US" sz="1200" i="1" dirty="0" smtClean="0">
-                        <a:latin typeface="Cambria Math" panose="02040503050406030204" pitchFamily="18" charset="0"/>
-                      </a:rPr>
-                      <m:t>𝑠</m:t>
-                    </m:r>
-                    <m:r>
-                      <a:rPr lang="en-US" sz="1200" i="1" dirty="0" smtClean="0">
-                        <a:latin typeface="Cambria Math" panose="02040503050406030204" pitchFamily="18" charset="0"/>
-                      </a:rPr>
-                      <m:t>, </m:t>
-                    </m:r>
-                    <m:r>
-                      <a:rPr lang="en-US" sz="1200" i="1" dirty="0" smtClean="0">
-                        <a:latin typeface="Cambria Math" panose="02040503050406030204" pitchFamily="18" charset="0"/>
-                      </a:rPr>
-                      <m:t>𝑠</m:t>
-                    </m:r>
-                    <m:r>
-                      <a:rPr lang="en-US" sz="1200" b="0" i="1" dirty="0" smtClean="0">
-                        <a:latin typeface="Cambria Math" panose="02040503050406030204" pitchFamily="18" charset="0"/>
-                      </a:rPr>
-                      <m:t>′</m:t>
-                    </m:r>
-                  </m:oMath>
-                </a14:m>
-                <a:r>
-                  <a:rPr lang="en-US" sz="1200" dirty="0"/>
-                  <a:t> 	states</a:t>
-                </a:r>
-              </a:p>
-              <a:p>
-                <a:pPr marL="0" indent="0">
-                  <a:spcBef>
-                    <a:spcPts val="0"/>
-                  </a:spcBef>
-                  <a:buNone/>
-                </a:pPr>
-                <a14:m>
-                  <m:oMath xmlns:m="http://schemas.openxmlformats.org/officeDocument/2006/math">
-                    <m:r>
-                      <a:rPr lang="en-US" sz="1200" i="1" dirty="0" smtClean="0">
-                        <a:latin typeface="Cambria Math" panose="02040503050406030204" pitchFamily="18" charset="0"/>
-                      </a:rPr>
-                      <m:t>𝑎</m:t>
-                    </m:r>
-                  </m:oMath>
-                </a14:m>
-                <a:r>
-                  <a:rPr lang="en-US" sz="1200" dirty="0"/>
-                  <a:t> 	an action</a:t>
-                </a:r>
-              </a:p>
-              <a:p>
-                <a:pPr marL="0" indent="0">
-                  <a:spcBef>
-                    <a:spcPts val="0"/>
-                  </a:spcBef>
-                  <a:buNone/>
-                </a:pPr>
-                <a14:m>
-                  <m:oMath xmlns:m="http://schemas.openxmlformats.org/officeDocument/2006/math">
-                    <m:r>
-                      <a:rPr lang="en-US" sz="1200" i="1" dirty="0" smtClean="0">
-                        <a:latin typeface="Cambria Math" panose="02040503050406030204" pitchFamily="18" charset="0"/>
-                      </a:rPr>
-                      <m:t>𝑟</m:t>
-                    </m:r>
-                  </m:oMath>
-                </a14:m>
-                <a:r>
-                  <a:rPr lang="en-US" sz="1200" dirty="0"/>
-                  <a:t> 	a reward</a:t>
-                </a:r>
-              </a:p>
-              <a:p>
-                <a:pPr marL="0" indent="0">
-                  <a:spcBef>
-                    <a:spcPts val="0"/>
-                  </a:spcBef>
-                  <a:buNone/>
-                </a:pPr>
-                <a14:m>
-                  <m:oMath xmlns:m="http://schemas.openxmlformats.org/officeDocument/2006/math">
-                    <m:r>
-                      <a:rPr lang="en-US" sz="1200" i="1" dirty="0" smtClean="0">
-                        <a:latin typeface="Cambria Math" panose="02040503050406030204" pitchFamily="18" charset="0"/>
-                        <a:ea typeface="Cambria Math" panose="02040503050406030204" pitchFamily="18" charset="0"/>
-                      </a:rPr>
-                      <m:t>𝒮</m:t>
-                    </m:r>
-                  </m:oMath>
-                </a14:m>
-                <a:r>
-                  <a:rPr lang="en-US" sz="1200" dirty="0"/>
-                  <a:t> 	set of all (nonterminal) states, </a:t>
-                </a:r>
-                <a14:m>
-                  <m:oMath xmlns:m="http://schemas.openxmlformats.org/officeDocument/2006/math">
-                    <m:sSup>
-                      <m:sSupPr>
-                        <m:ctrlPr>
-                          <a:rPr lang="en-US" sz="1200" b="0" i="1" dirty="0" smtClean="0">
-                            <a:latin typeface="Cambria Math" panose="02040503050406030204" pitchFamily="18" charset="0"/>
-                            <a:ea typeface="Cambria Math" panose="02040503050406030204" pitchFamily="18" charset="0"/>
-                          </a:rPr>
-                        </m:ctrlPr>
-                      </m:sSupPr>
-                      <m:e>
-                        <m:r>
-                          <a:rPr lang="en-US" sz="1200" i="1" dirty="0">
-                            <a:latin typeface="Cambria Math" panose="02040503050406030204" pitchFamily="18" charset="0"/>
-                            <a:ea typeface="Cambria Math" panose="02040503050406030204" pitchFamily="18" charset="0"/>
-                          </a:rPr>
-                          <m:t>𝒮</m:t>
-                        </m:r>
-                      </m:e>
-                      <m:sup>
-                        <m:r>
-                          <a:rPr lang="en-US" sz="1200" b="0" i="1" dirty="0" smtClean="0">
-                            <a:latin typeface="Cambria Math" panose="02040503050406030204" pitchFamily="18" charset="0"/>
-                            <a:ea typeface="Cambria Math" panose="02040503050406030204" pitchFamily="18" charset="0"/>
-                          </a:rPr>
-                          <m:t>+</m:t>
-                        </m:r>
-                      </m:sup>
-                    </m:sSup>
-                  </m:oMath>
-                </a14:m>
-                <a:r>
-                  <a:rPr lang="en-US" sz="1200" dirty="0"/>
-                  <a:t> are all states </a:t>
-                </a:r>
-              </a:p>
-              <a:p>
-                <a:pPr marL="0" indent="0">
-                  <a:spcBef>
-                    <a:spcPts val="0"/>
-                  </a:spcBef>
-                  <a:buNone/>
-                </a:pPr>
-                <a14:m>
-                  <m:oMath xmlns:m="http://schemas.openxmlformats.org/officeDocument/2006/math">
-                    <m:r>
-                      <a:rPr lang="en-US" sz="1200" i="1" dirty="0" smtClean="0">
-                        <a:latin typeface="Cambria Math" panose="02040503050406030204" pitchFamily="18" charset="0"/>
-                        <a:ea typeface="Cambria Math" panose="02040503050406030204" pitchFamily="18" charset="0"/>
-                      </a:rPr>
-                      <m:t>𝒜</m:t>
-                    </m:r>
-                    <m:r>
-                      <a:rPr lang="en-US" sz="1200" i="1" dirty="0">
-                        <a:latin typeface="Cambria Math" panose="02040503050406030204" pitchFamily="18" charset="0"/>
-                      </a:rPr>
-                      <m:t>(</m:t>
-                    </m:r>
-                    <m:r>
-                      <a:rPr lang="en-US" sz="1200" i="1" dirty="0">
-                        <a:latin typeface="Cambria Math" panose="02040503050406030204" pitchFamily="18" charset="0"/>
-                      </a:rPr>
-                      <m:t>𝑠</m:t>
-                    </m:r>
-                    <m:r>
-                      <a:rPr lang="en-US" sz="1200" i="1" dirty="0">
-                        <a:latin typeface="Cambria Math" panose="02040503050406030204" pitchFamily="18" charset="0"/>
-                      </a:rPr>
-                      <m:t>)</m:t>
-                    </m:r>
-                  </m:oMath>
-                </a14:m>
-                <a:r>
-                  <a:rPr lang="en-US" sz="1200" dirty="0"/>
-                  <a:t>	set of all actions available in state </a:t>
-                </a:r>
-                <a14:m>
-                  <m:oMath xmlns:m="http://schemas.openxmlformats.org/officeDocument/2006/math">
-                    <m:r>
-                      <a:rPr lang="en-US" sz="1200" i="1" dirty="0" smtClean="0">
-                        <a:latin typeface="Cambria Math" panose="02040503050406030204" pitchFamily="18" charset="0"/>
-                      </a:rPr>
-                      <m:t>𝑠</m:t>
-                    </m:r>
-                  </m:oMath>
-                </a14:m>
-                <a:endParaRPr lang="en-US" sz="1200" dirty="0"/>
-              </a:p>
-              <a:p>
-                <a:pPr marL="0" indent="0">
-                  <a:spcBef>
-                    <a:spcPts val="0"/>
-                  </a:spcBef>
-                  <a:buNone/>
-                </a:pPr>
-                <a14:m>
-                  <m:oMath xmlns:m="http://schemas.openxmlformats.org/officeDocument/2006/math">
-                    <m:r>
-                      <a:rPr lang="en-US" sz="1200" i="1">
-                        <a:latin typeface="Cambria Math" panose="02040503050406030204" pitchFamily="18" charset="0"/>
-                      </a:rPr>
-                      <m:t>𝛾</m:t>
-                    </m:r>
-                  </m:oMath>
-                </a14:m>
-                <a:r>
-                  <a:rPr lang="en-US" sz="1200" dirty="0"/>
-                  <a:t> 	discount-rate parameter</a:t>
-                </a:r>
-                <a:endParaRPr lang="en-US" sz="1200" i="1" dirty="0">
-                  <a:latin typeface="Cambria Math" panose="02040503050406030204" pitchFamily="18" charset="0"/>
-                </a:endParaRPr>
-              </a:p>
-              <a:p>
-                <a:pPr marL="0" indent="0">
-                  <a:spcBef>
-                    <a:spcPts val="0"/>
-                  </a:spcBef>
-                  <a:buNone/>
-                </a:pPr>
-                <a14:m>
-                  <m:oMath xmlns:m="http://schemas.openxmlformats.org/officeDocument/2006/math">
-                    <m:r>
-                      <a:rPr lang="en-US" sz="1200" i="1" dirty="0" smtClean="0">
-                        <a:latin typeface="Cambria Math" panose="02040503050406030204" pitchFamily="18" charset="0"/>
-                      </a:rPr>
-                      <m:t>𝑡</m:t>
-                    </m:r>
-                  </m:oMath>
-                </a14:m>
-                <a:r>
-                  <a:rPr lang="en-US" sz="1200" dirty="0"/>
-                  <a:t> 	discrete time step</a:t>
-                </a:r>
-              </a:p>
-              <a:p>
-                <a:pPr marL="0" indent="0">
-                  <a:spcBef>
-                    <a:spcPts val="0"/>
-                  </a:spcBef>
-                  <a:buNone/>
-                </a:pPr>
-                <a14:m>
-                  <m:oMath xmlns:m="http://schemas.openxmlformats.org/officeDocument/2006/math">
-                    <m:r>
-                      <a:rPr lang="en-US" sz="1200" i="1" dirty="0" smtClean="0">
-                        <a:latin typeface="Cambria Math" panose="02040503050406030204" pitchFamily="18" charset="0"/>
-                      </a:rPr>
-                      <m:t>𝑇</m:t>
-                    </m:r>
-                  </m:oMath>
-                </a14:m>
-                <a:r>
-                  <a:rPr lang="en-US" sz="1200" dirty="0"/>
-                  <a:t> 	final time step of an episode (a.k.a. horizon)</a:t>
-                </a:r>
-              </a:p>
-              <a:p>
-                <a:pPr marL="0" indent="0">
-                  <a:spcBef>
-                    <a:spcPts val="0"/>
-                  </a:spcBef>
-                  <a:buNone/>
-                </a:pPr>
-                <a14:m>
-                  <m:oMath xmlns:m="http://schemas.openxmlformats.org/officeDocument/2006/math">
-                    <m:sSub>
-                      <m:sSubPr>
-                        <m:ctrlPr>
-                          <a:rPr lang="en-US" sz="1200" b="0" i="1" dirty="0" smtClean="0">
-                            <a:latin typeface="Cambria Math" panose="02040503050406030204" pitchFamily="18" charset="0"/>
-                          </a:rPr>
-                        </m:ctrlPr>
-                      </m:sSubPr>
-                      <m:e>
-                        <m:r>
-                          <a:rPr lang="en-US" sz="1200" i="1" dirty="0" smtClean="0">
-                            <a:latin typeface="Cambria Math" panose="02040503050406030204" pitchFamily="18" charset="0"/>
-                          </a:rPr>
-                          <m:t>𝐴</m:t>
-                        </m:r>
-                      </m:e>
-                      <m:sub>
-                        <m:r>
-                          <a:rPr lang="en-US" sz="1200" b="0" i="1" dirty="0" smtClean="0">
-                            <a:latin typeface="Cambria Math" panose="02040503050406030204" pitchFamily="18" charset="0"/>
-                          </a:rPr>
-                          <m:t>𝑡</m:t>
-                        </m:r>
-                      </m:sub>
-                    </m:sSub>
-                  </m:oMath>
-                </a14:m>
-                <a:r>
-                  <a:rPr lang="en-US" sz="1200" dirty="0"/>
-                  <a:t> 	random variable for the action at time </a:t>
-                </a:r>
-                <a14:m>
-                  <m:oMath xmlns:m="http://schemas.openxmlformats.org/officeDocument/2006/math">
-                    <m:r>
-                      <a:rPr lang="en-US" sz="1200" i="1" dirty="0" smtClean="0">
-                        <a:latin typeface="Cambria Math" panose="02040503050406030204" pitchFamily="18" charset="0"/>
-                      </a:rPr>
-                      <m:t>𝑡</m:t>
-                    </m:r>
-                  </m:oMath>
-                </a14:m>
-                <a:endParaRPr lang="en-US" sz="1200" dirty="0"/>
-              </a:p>
-              <a:p>
-                <a:pPr marL="0" indent="0">
-                  <a:spcBef>
-                    <a:spcPts val="0"/>
-                  </a:spcBef>
-                  <a:buNone/>
-                </a:pPr>
-                <a14:m>
-                  <m:oMath xmlns:m="http://schemas.openxmlformats.org/officeDocument/2006/math">
-                    <m:sSub>
-                      <m:sSubPr>
-                        <m:ctrlPr>
-                          <a:rPr lang="en-US" sz="1200" b="0" i="1" dirty="0" smtClean="0">
-                            <a:latin typeface="Cambria Math" panose="02040503050406030204" pitchFamily="18" charset="0"/>
-                          </a:rPr>
-                        </m:ctrlPr>
-                      </m:sSubPr>
-                      <m:e>
-                        <m:r>
-                          <a:rPr lang="en-US" sz="1200" i="1" dirty="0" smtClean="0">
-                            <a:latin typeface="Cambria Math" panose="02040503050406030204" pitchFamily="18" charset="0"/>
-                          </a:rPr>
-                          <m:t>𝑆</m:t>
-                        </m:r>
-                      </m:e>
-                      <m:sub>
-                        <m:r>
-                          <a:rPr lang="en-US" sz="1200" b="0" i="1" dirty="0" smtClean="0">
-                            <a:latin typeface="Cambria Math" panose="02040503050406030204" pitchFamily="18" charset="0"/>
-                          </a:rPr>
-                          <m:t>𝑡</m:t>
-                        </m:r>
-                      </m:sub>
-                    </m:sSub>
-                  </m:oMath>
-                </a14:m>
-                <a:r>
-                  <a:rPr lang="en-US" sz="1200" dirty="0"/>
-                  <a:t>	random variable for the state at time </a:t>
-                </a:r>
-                <a14:m>
-                  <m:oMath xmlns:m="http://schemas.openxmlformats.org/officeDocument/2006/math">
-                    <m:r>
-                      <a:rPr lang="en-US" sz="1200" i="1" dirty="0" smtClean="0">
-                        <a:latin typeface="Cambria Math" panose="02040503050406030204" pitchFamily="18" charset="0"/>
-                      </a:rPr>
-                      <m:t>𝑡</m:t>
-                    </m:r>
-                  </m:oMath>
-                </a14:m>
-                <a:endParaRPr lang="en-US" sz="1200" dirty="0"/>
-              </a:p>
-              <a:p>
-                <a:pPr marL="0" indent="0">
-                  <a:spcBef>
-                    <a:spcPts val="0"/>
-                  </a:spcBef>
-                  <a:buNone/>
-                </a:pPr>
-                <a14:m>
-                  <m:oMath xmlns:m="http://schemas.openxmlformats.org/officeDocument/2006/math">
-                    <m:sSub>
-                      <m:sSubPr>
-                        <m:ctrlPr>
-                          <a:rPr lang="en-US" sz="1200" b="0" i="1" dirty="0" smtClean="0">
-                            <a:latin typeface="Cambria Math" panose="02040503050406030204" pitchFamily="18" charset="0"/>
-                          </a:rPr>
-                        </m:ctrlPr>
-                      </m:sSubPr>
-                      <m:e>
-                        <m:r>
-                          <a:rPr lang="en-US" sz="1200" i="1" dirty="0" smtClean="0">
-                            <a:latin typeface="Cambria Math" panose="02040503050406030204" pitchFamily="18" charset="0"/>
-                          </a:rPr>
-                          <m:t>𝑅</m:t>
-                        </m:r>
-                      </m:e>
-                      <m:sub>
-                        <m:r>
-                          <a:rPr lang="en-US" sz="1200" b="0" i="1" dirty="0" smtClean="0">
-                            <a:latin typeface="Cambria Math" panose="02040503050406030204" pitchFamily="18" charset="0"/>
-                          </a:rPr>
-                          <m:t>𝑡</m:t>
-                        </m:r>
-                      </m:sub>
-                    </m:sSub>
-                  </m:oMath>
-                </a14:m>
-                <a:r>
-                  <a:rPr lang="en-US" sz="1200" dirty="0"/>
-                  <a:t> 	random variable for the reward at time </a:t>
-                </a:r>
-                <a14:m>
-                  <m:oMath xmlns:m="http://schemas.openxmlformats.org/officeDocument/2006/math">
-                    <m:r>
-                      <a:rPr lang="en-US" sz="1200" i="1" dirty="0" smtClean="0">
-                        <a:latin typeface="Cambria Math" panose="02040503050406030204" pitchFamily="18" charset="0"/>
-                      </a:rPr>
-                      <m:t>𝑡</m:t>
-                    </m:r>
-                  </m:oMath>
-                </a14:m>
-                <a:endParaRPr lang="en-US" sz="1200" dirty="0"/>
-              </a:p>
-              <a:p>
-                <a:pPr marL="0" indent="0">
-                  <a:lnSpc>
-                    <a:spcPct val="100000"/>
-                  </a:lnSpc>
-                  <a:spcBef>
-                    <a:spcPts val="0"/>
-                  </a:spcBef>
-                  <a:buNone/>
-                </a:pPr>
-                <a14:m>
-                  <m:oMath xmlns:m="http://schemas.openxmlformats.org/officeDocument/2006/math">
-                    <m:r>
-                      <a:rPr lang="en-US" sz="1200" i="1" dirty="0">
-                        <a:latin typeface="Cambria Math" panose="02040503050406030204" pitchFamily="18" charset="0"/>
-                      </a:rPr>
-                      <m:t>𝑝</m:t>
-                    </m:r>
-                    <m:d>
-                      <m:dPr>
-                        <m:endChr m:val="|"/>
-                        <m:ctrlPr>
-                          <a:rPr lang="en-US" sz="1200" i="1" dirty="0">
-                            <a:latin typeface="Cambria Math" panose="02040503050406030204" pitchFamily="18" charset="0"/>
-                          </a:rPr>
-                        </m:ctrlPr>
-                      </m:dPr>
-                      <m:e>
-                        <m:sSup>
-                          <m:sSupPr>
-                            <m:ctrlPr>
-                              <a:rPr lang="en-US" sz="1200" i="1" dirty="0">
-                                <a:latin typeface="Cambria Math" panose="02040503050406030204" pitchFamily="18" charset="0"/>
-                              </a:rPr>
-                            </m:ctrlPr>
-                          </m:sSupPr>
-                          <m:e>
-                            <m:r>
-                              <a:rPr lang="en-US" sz="1200" i="1" dirty="0">
-                                <a:latin typeface="Cambria Math" panose="02040503050406030204" pitchFamily="18" charset="0"/>
-                              </a:rPr>
-                              <m:t>𝑠</m:t>
-                            </m:r>
-                          </m:e>
-                          <m:sup>
-                            <m:r>
-                              <a:rPr lang="en-US" sz="1200" i="1" dirty="0">
-                                <a:latin typeface="Cambria Math" panose="02040503050406030204" pitchFamily="18" charset="0"/>
-                              </a:rPr>
-                              <m:t>′</m:t>
-                            </m:r>
-                          </m:sup>
-                        </m:sSup>
-                        <m:r>
-                          <a:rPr lang="en-US" sz="1200" b="0" i="1" dirty="0" smtClean="0">
-                            <a:latin typeface="Cambria Math" panose="02040503050406030204" pitchFamily="18" charset="0"/>
-                          </a:rPr>
-                          <m:t>,</m:t>
-                        </m:r>
-                        <m:r>
-                          <a:rPr lang="en-US" sz="1200" b="0" i="1" dirty="0" smtClean="0">
-                            <a:latin typeface="Cambria Math" panose="02040503050406030204" pitchFamily="18" charset="0"/>
-                          </a:rPr>
-                          <m:t>𝑟</m:t>
-                        </m:r>
-                        <m:r>
-                          <a:rPr lang="en-US" sz="1200" i="1" dirty="0">
-                            <a:latin typeface="Cambria Math" panose="02040503050406030204" pitchFamily="18" charset="0"/>
-                          </a:rPr>
-                          <m:t> </m:t>
-                        </m:r>
-                      </m:e>
-                    </m:d>
-                    <m:r>
-                      <a:rPr lang="en-US" sz="1200" i="1" dirty="0">
-                        <a:latin typeface="Cambria Math" panose="02040503050406030204" pitchFamily="18" charset="0"/>
-                      </a:rPr>
-                      <m:t>𝑠</m:t>
-                    </m:r>
-                    <m:r>
-                      <a:rPr lang="en-US" sz="1200" i="1" dirty="0">
-                        <a:latin typeface="Cambria Math" panose="02040503050406030204" pitchFamily="18" charset="0"/>
-                      </a:rPr>
-                      <m:t>, </m:t>
-                    </m:r>
-                    <m:r>
-                      <a:rPr lang="en-US" sz="1200" i="1" dirty="0">
-                        <a:latin typeface="Cambria Math" panose="02040503050406030204" pitchFamily="18" charset="0"/>
-                      </a:rPr>
-                      <m:t>𝑎</m:t>
-                    </m:r>
-                    <m:r>
-                      <a:rPr lang="en-US" sz="1200" i="1" dirty="0">
-                        <a:latin typeface="Cambria Math" panose="02040503050406030204" pitchFamily="18" charset="0"/>
-                      </a:rPr>
-                      <m:t>)</m:t>
-                    </m:r>
-                  </m:oMath>
-                </a14:m>
-                <a:r>
-                  <a:rPr lang="en-US" sz="1200" dirty="0"/>
-                  <a:t>	probability of transition to state </a:t>
-                </a:r>
-                <a14:m>
-                  <m:oMath xmlns:m="http://schemas.openxmlformats.org/officeDocument/2006/math">
-                    <m:r>
-                      <a:rPr lang="en-US" sz="1200" i="1" dirty="0">
-                        <a:latin typeface="Cambria Math" panose="02040503050406030204" pitchFamily="18" charset="0"/>
-                      </a:rPr>
-                      <m:t>𝑠</m:t>
-                    </m:r>
-                    <m:r>
-                      <a:rPr lang="en-US" sz="1200" i="1" dirty="0">
-                        <a:latin typeface="Cambria Math" panose="02040503050406030204" pitchFamily="18" charset="0"/>
-                      </a:rPr>
-                      <m:t>′</m:t>
-                    </m:r>
-                  </m:oMath>
-                </a14:m>
-                <a:r>
-                  <a:rPr lang="en-US" sz="1200" dirty="0"/>
-                  <a:t> and receiving reward </a:t>
-                </a:r>
-                <a14:m>
-                  <m:oMath xmlns:m="http://schemas.openxmlformats.org/officeDocument/2006/math">
-                    <m:r>
-                      <a:rPr lang="en-US" sz="1200" b="0" i="1" smtClean="0">
-                        <a:latin typeface="Cambria Math" panose="02040503050406030204" pitchFamily="18" charset="0"/>
-                      </a:rPr>
-                      <m:t>𝑟</m:t>
-                    </m:r>
-                  </m:oMath>
-                </a14:m>
-                <a:r>
-                  <a:rPr lang="en-US" sz="1200" dirty="0"/>
-                  <a:t>, </a:t>
-                </a:r>
-                <a:br>
-                  <a:rPr lang="en-US" sz="1200" dirty="0"/>
-                </a:br>
-                <a:r>
-                  <a:rPr lang="en-US" sz="1200" dirty="0"/>
-                  <a:t>	from state </a:t>
-                </a:r>
-                <a14:m>
-                  <m:oMath xmlns:m="http://schemas.openxmlformats.org/officeDocument/2006/math">
-                    <m:r>
-                      <a:rPr lang="en-US" sz="1200" i="1" dirty="0">
-                        <a:latin typeface="Cambria Math" panose="02040503050406030204" pitchFamily="18" charset="0"/>
-                      </a:rPr>
-                      <m:t>𝑠</m:t>
-                    </m:r>
-                  </m:oMath>
-                </a14:m>
-                <a:r>
-                  <a:rPr lang="en-US" sz="1200" dirty="0"/>
-                  <a:t> taking action </a:t>
-                </a:r>
-                <a14:m>
-                  <m:oMath xmlns:m="http://schemas.openxmlformats.org/officeDocument/2006/math">
-                    <m:r>
-                      <a:rPr lang="en-US" sz="1200" i="1" dirty="0">
-                        <a:latin typeface="Cambria Math" panose="02040503050406030204" pitchFamily="18" charset="0"/>
-                      </a:rPr>
-                      <m:t>𝑎</m:t>
-                    </m:r>
-                  </m:oMath>
-                </a14:m>
-                <a:endParaRPr lang="en-US" sz="1200" dirty="0"/>
-              </a:p>
-              <a:p>
-                <a:pPr marL="0" indent="0">
-                  <a:lnSpc>
-                    <a:spcPct val="100000"/>
-                  </a:lnSpc>
-                  <a:spcBef>
-                    <a:spcPts val="0"/>
-                  </a:spcBef>
-                  <a:buNone/>
-                </a:pPr>
-                <a:r>
-                  <a:rPr lang="en-US" sz="1200" dirty="0"/>
-                  <a:t>	expected immediate reward from state </a:t>
-                </a:r>
-                <a14:m>
-                  <m:oMath xmlns:m="http://schemas.openxmlformats.org/officeDocument/2006/math">
-                    <m:r>
-                      <a:rPr lang="en-US" sz="1200" i="1" dirty="0">
-                        <a:latin typeface="Cambria Math" panose="02040503050406030204" pitchFamily="18" charset="0"/>
-                      </a:rPr>
-                      <m:t>𝑠</m:t>
-                    </m:r>
-                  </m:oMath>
-                </a14:m>
-                <a:r>
-                  <a:rPr lang="en-US" sz="1200" dirty="0"/>
-                  <a:t> after action </a:t>
-                </a:r>
-                <a14:m>
-                  <m:oMath xmlns:m="http://schemas.openxmlformats.org/officeDocument/2006/math">
-                    <m:r>
-                      <a:rPr lang="en-US" sz="1200" i="1" dirty="0">
-                        <a:latin typeface="Cambria Math" panose="02040503050406030204" pitchFamily="18" charset="0"/>
-                      </a:rPr>
-                      <m:t>𝑎</m:t>
-                    </m:r>
-                  </m:oMath>
-                </a14:m>
-                <a:endParaRPr lang="en-US" sz="1200" i="1" dirty="0">
-                  <a:latin typeface="Cambria Math" panose="02040503050406030204" pitchFamily="18" charset="0"/>
-                </a:endParaRPr>
-              </a:p>
-              <a:p>
-                <a:pPr marL="0" indent="0">
-                  <a:spcBef>
-                    <a:spcPts val="0"/>
-                  </a:spcBef>
-                  <a:buNone/>
-                </a:pPr>
-                <a14:m>
-                  <m:oMath xmlns:m="http://schemas.openxmlformats.org/officeDocument/2006/math">
-                    <m:r>
-                      <a:rPr lang="en-US" sz="1200" i="1" dirty="0">
-                        <a:latin typeface="Cambria Math" panose="02040503050406030204" pitchFamily="18" charset="0"/>
-                      </a:rPr>
-                      <m:t>𝜋</m:t>
-                    </m:r>
-                    <m:r>
-                      <a:rPr lang="en-US" sz="1200" i="1" dirty="0">
-                        <a:latin typeface="Cambria Math" panose="02040503050406030204" pitchFamily="18" charset="0"/>
-                      </a:rPr>
-                      <m:t>(</m:t>
-                    </m:r>
-                    <m:r>
-                      <a:rPr lang="en-US" sz="1200" i="1" dirty="0" err="1">
-                        <a:latin typeface="Cambria Math" panose="02040503050406030204" pitchFamily="18" charset="0"/>
-                      </a:rPr>
-                      <m:t>𝑎</m:t>
-                    </m:r>
-                    <m:r>
-                      <a:rPr lang="en-US" sz="1200" i="1" dirty="0" err="1">
-                        <a:latin typeface="Cambria Math" panose="02040503050406030204" pitchFamily="18" charset="0"/>
-                      </a:rPr>
-                      <m:t>|</m:t>
-                    </m:r>
-                    <m:r>
-                      <a:rPr lang="en-US" sz="1200" i="1" dirty="0" err="1">
-                        <a:latin typeface="Cambria Math" panose="02040503050406030204" pitchFamily="18" charset="0"/>
-                      </a:rPr>
-                      <m:t>𝑠</m:t>
-                    </m:r>
-                    <m:r>
-                      <a:rPr lang="en-US" sz="1200" i="1" dirty="0">
-                        <a:latin typeface="Cambria Math" panose="02040503050406030204" pitchFamily="18" charset="0"/>
-                      </a:rPr>
-                      <m:t>)</m:t>
-                    </m:r>
-                  </m:oMath>
-                </a14:m>
-                <a:r>
-                  <a:rPr lang="en-US" sz="1200" dirty="0"/>
-                  <a:t>	probability of taking action </a:t>
-                </a:r>
-                <a14:m>
-                  <m:oMath xmlns:m="http://schemas.openxmlformats.org/officeDocument/2006/math">
-                    <m:r>
-                      <a:rPr lang="en-US" sz="1200" i="1" dirty="0">
-                        <a:latin typeface="Cambria Math" panose="02040503050406030204" pitchFamily="18" charset="0"/>
-                      </a:rPr>
-                      <m:t>𝑎</m:t>
-                    </m:r>
-                  </m:oMath>
-                </a14:m>
-                <a:r>
-                  <a:rPr lang="en-US" sz="1200" dirty="0"/>
-                  <a:t> in state </a:t>
-                </a:r>
-                <a14:m>
-                  <m:oMath xmlns:m="http://schemas.openxmlformats.org/officeDocument/2006/math">
-                    <m:r>
-                      <a:rPr lang="en-US" sz="1200" i="1" dirty="0">
-                        <a:latin typeface="Cambria Math" panose="02040503050406030204" pitchFamily="18" charset="0"/>
-                      </a:rPr>
-                      <m:t>𝑠</m:t>
-                    </m:r>
-                  </m:oMath>
-                </a14:m>
-                <a:r>
-                  <a:rPr lang="en-US" sz="1200" dirty="0"/>
-                  <a:t> under stochastic policy </a:t>
-                </a:r>
-                <a14:m>
-                  <m:oMath xmlns:m="http://schemas.openxmlformats.org/officeDocument/2006/math">
-                    <m:r>
-                      <a:rPr lang="en-US" sz="1200" i="1" dirty="0">
-                        <a:latin typeface="Cambria Math" panose="02040503050406030204" pitchFamily="18" charset="0"/>
-                      </a:rPr>
-                      <m:t>𝜋</m:t>
-                    </m:r>
-                  </m:oMath>
-                </a14:m>
-                <a:endParaRPr lang="en-US" sz="1200" dirty="0">
-                  <a:ea typeface="Cambria Math" panose="02040503050406030204" pitchFamily="18" charset="0"/>
-                </a:endParaRPr>
-              </a:p>
-              <a:p>
-                <a:pPr marL="0" indent="0">
-                  <a:spcBef>
-                    <a:spcPts val="0"/>
-                  </a:spcBef>
-                  <a:buNone/>
-                </a:pPr>
-                <a14:m>
-                  <m:oMath xmlns:m="http://schemas.openxmlformats.org/officeDocument/2006/math">
-                    <m:r>
-                      <a:rPr lang="en-US" sz="1200" i="1" dirty="0" smtClean="0">
-                        <a:latin typeface="Cambria Math" panose="02040503050406030204" pitchFamily="18" charset="0"/>
-                      </a:rPr>
-                      <m:t>𝜋</m:t>
-                    </m:r>
-                    <m:r>
-                      <a:rPr lang="en-US" sz="1200" i="1" dirty="0" smtClean="0">
-                        <a:latin typeface="Cambria Math" panose="02040503050406030204" pitchFamily="18" charset="0"/>
-                      </a:rPr>
-                      <m:t>(</m:t>
-                    </m:r>
-                    <m:r>
-                      <a:rPr lang="en-US" sz="1200" i="1" dirty="0" smtClean="0">
-                        <a:latin typeface="Cambria Math" panose="02040503050406030204" pitchFamily="18" charset="0"/>
-                      </a:rPr>
-                      <m:t>𝑠</m:t>
-                    </m:r>
-                    <m:r>
-                      <a:rPr lang="en-US" sz="1200" i="1" dirty="0" smtClean="0">
-                        <a:latin typeface="Cambria Math" panose="02040503050406030204" pitchFamily="18" charset="0"/>
-                      </a:rPr>
-                      <m:t>)</m:t>
-                    </m:r>
-                  </m:oMath>
-                </a14:m>
-                <a:r>
-                  <a:rPr lang="en-US" sz="1200" dirty="0"/>
-                  <a:t>	action taken in state </a:t>
-                </a:r>
-                <a14:m>
-                  <m:oMath xmlns:m="http://schemas.openxmlformats.org/officeDocument/2006/math">
-                    <m:r>
-                      <a:rPr lang="en-US" sz="1200" i="1" dirty="0" smtClean="0">
-                        <a:latin typeface="Cambria Math" panose="02040503050406030204" pitchFamily="18" charset="0"/>
-                      </a:rPr>
-                      <m:t>𝑠</m:t>
-                    </m:r>
-                  </m:oMath>
-                </a14:m>
-                <a:r>
-                  <a:rPr lang="en-US" sz="1200" dirty="0"/>
-                  <a:t> under deterministic policy </a:t>
-                </a:r>
-                <a14:m>
-                  <m:oMath xmlns:m="http://schemas.openxmlformats.org/officeDocument/2006/math">
-                    <m:r>
-                      <a:rPr lang="en-US" sz="1200" b="0" i="1" dirty="0" smtClean="0">
-                        <a:latin typeface="Cambria Math" panose="02040503050406030204" pitchFamily="18" charset="0"/>
-                      </a:rPr>
-                      <m:t>𝜋</m:t>
-                    </m:r>
-                  </m:oMath>
-                </a14:m>
-                <a:endParaRPr lang="en-US" sz="1200" dirty="0"/>
-              </a:p>
-            </p:txBody>
-          </p:sp>
-        </mc:Choice>
-        <mc:Fallback xmlns="">
-          <p:sp>
-            <p:nvSpPr>
-              <p:cNvPr id="11" name="Content Placeholder 2">
-                <a:extLst>
-                  <a:ext uri="{FF2B5EF4-FFF2-40B4-BE49-F238E27FC236}">
-                    <a16:creationId xmlns:a16="http://schemas.microsoft.com/office/drawing/2014/main" id="{6F45EA4F-65F9-5141-0B09-C395CF9CA7A0}"/>
-                  </a:ext>
-                </a:extLst>
-              </p:cNvPr>
-              <p:cNvSpPr txBox="1">
-                <a:spLocks noRot="1" noChangeAspect="1" noMove="1" noResize="1" noEditPoints="1" noAdjustHandles="1" noChangeArrowheads="1" noChangeShapeType="1" noTextEdit="1"/>
-              </p:cNvSpPr>
-              <p:nvPr/>
-            </p:nvSpPr>
-            <p:spPr>
-              <a:xfrm>
-                <a:off x="822819" y="3570646"/>
-                <a:ext cx="5273179" cy="2985823"/>
-              </a:xfrm>
-              <a:prstGeom prst="rect">
-                <a:avLst/>
-              </a:prstGeom>
-              <a:blipFill>
-                <a:blip r:embed="rId4"/>
-                <a:stretch>
-                  <a:fillRect t="-609"/>
-                </a:stretch>
-              </a:blipFill>
-            </p:spPr>
-            <p:txBody>
-              <a:bodyPr/>
-              <a:lstStyle/>
-              <a:p>
-                <a:r>
-                  <a:rPr lang="en-US">
-                    <a:noFill/>
-                  </a:rPr>
-                  <a:t> </a:t>
-                </a:r>
-              </a:p>
-            </p:txBody>
-          </p:sp>
-        </mc:Fallback>
-      </mc:AlternateContent>
-    </p:spTree>
-    <p:extLst>
-      <p:ext uri="{BB962C8B-B14F-4D97-AF65-F5344CB8AC3E}">
-        <p14:creationId xmlns:p14="http://schemas.microsoft.com/office/powerpoint/2010/main" val="920694018"/>
-      </p:ext>
-    </p:extLst>
-  </p:cSld>
-  <p:clrMapOvr>
-    <a:masterClrMapping/>
-  </p:clrMapOvr>
-</p:sld>
-</file>
-
-<file path=ppt/slides/slide20.xml><?xml version="1.0" encoding="utf-8"?>
+<file path=ppt/slides/slide21.xml><?xml version="1.0" encoding="utf-8"?>
 <p:sld xmlns:a="http://schemas.openxmlformats.org/drawingml/2006/main" xmlns:r="http://schemas.openxmlformats.org/officeDocument/2006/relationships" xmlns:p="http://schemas.openxmlformats.org/presentationml/2006/main">
   <p:cSld>
     <p:spTree>
@@ -17722,7 +15671,7 @@
 </p:sld>
 </file>
 
-<file path=ppt/slides/slide21.xml><?xml version="1.0" encoding="utf-8"?>
+<file path=ppt/slides/slide22.xml><?xml version="1.0" encoding="utf-8"?>
 <p:sld xmlns:a="http://schemas.openxmlformats.org/drawingml/2006/main" xmlns:r="http://schemas.openxmlformats.org/officeDocument/2006/relationships" xmlns:p="http://schemas.openxmlformats.org/presentationml/2006/main">
   <p:cSld>
     <p:spTree>
@@ -17808,7 +15757,7 @@
 </p:sld>
 </file>
 
-<file path=ppt/slides/slide22.xml><?xml version="1.0" encoding="utf-8"?>
+<file path=ppt/slides/slide23.xml><?xml version="1.0" encoding="utf-8"?>
 <p:sld xmlns:a="http://schemas.openxmlformats.org/drawingml/2006/main" xmlns:r="http://schemas.openxmlformats.org/officeDocument/2006/relationships" xmlns:p="http://schemas.openxmlformats.org/presentationml/2006/main">
   <p:cSld>
     <p:spTree>
@@ -19182,7 +17131,7 @@
 </p:sld>
 </file>
 
-<file path=ppt/slides/slide23.xml><?xml version="1.0" encoding="utf-8"?>
+<file path=ppt/slides/slide24.xml><?xml version="1.0" encoding="utf-8"?>
 <p:sld xmlns:a="http://schemas.openxmlformats.org/drawingml/2006/main" xmlns:r="http://schemas.openxmlformats.org/officeDocument/2006/relationships" xmlns:p="http://schemas.openxmlformats.org/presentationml/2006/main">
   <p:cSld>
     <p:spTree>
@@ -19918,7 +17867,7 @@
 </p:sld>
 </file>
 
-<file path=ppt/slides/slide24.xml><?xml version="1.0" encoding="utf-8"?>
+<file path=ppt/slides/slide25.xml><?xml version="1.0" encoding="utf-8"?>
 <p:sld xmlns:a="http://schemas.openxmlformats.org/drawingml/2006/main" xmlns:r="http://schemas.openxmlformats.org/officeDocument/2006/relationships" xmlns:p="http://schemas.openxmlformats.org/presentationml/2006/main">
   <p:cSld>
     <p:spTree>
@@ -20004,7 +17953,7 @@
 </p:sld>
 </file>
 
-<file path=ppt/slides/slide25.xml><?xml version="1.0" encoding="utf-8"?>
+<file path=ppt/slides/slide26.xml><?xml version="1.0" encoding="utf-8"?>
 <p:sld xmlns:a="http://schemas.openxmlformats.org/drawingml/2006/main" xmlns:r="http://schemas.openxmlformats.org/officeDocument/2006/relationships" xmlns:p="http://schemas.openxmlformats.org/presentationml/2006/main">
   <p:cSld>
     <p:spTree>
@@ -23491,7 +21440,7 @@
 </p:sld>
 </file>
 
-<file path=ppt/slides/slide26.xml><?xml version="1.0" encoding="utf-8"?>
+<file path=ppt/slides/slide27.xml><?xml version="1.0" encoding="utf-8"?>
 <p:sld xmlns:a="http://schemas.openxmlformats.org/drawingml/2006/main" xmlns:r="http://schemas.openxmlformats.org/officeDocument/2006/relationships" xmlns:p="http://schemas.openxmlformats.org/presentationml/2006/main">
   <p:cSld>
     <p:spTree>
@@ -23574,7 +21523,7 @@
 </p:sld>
 </file>
 
-<file path=ppt/slides/slide27.xml><?xml version="1.0" encoding="utf-8"?>
+<file path=ppt/slides/slide28.xml><?xml version="1.0" encoding="utf-8"?>
 <p:sld xmlns:a="http://schemas.openxmlformats.org/drawingml/2006/main" xmlns:r="http://schemas.openxmlformats.org/officeDocument/2006/relationships" xmlns:p="http://schemas.openxmlformats.org/presentationml/2006/main">
   <p:cSld>
     <p:spTree>
@@ -24909,7 +22858,7 @@
 </p:sld>
 </file>
 
-<file path=ppt/slides/slide28.xml><?xml version="1.0" encoding="utf-8"?>
+<file path=ppt/slides/slide29.xml><?xml version="1.0" encoding="utf-8"?>
 <p:sld xmlns:a="http://schemas.openxmlformats.org/drawingml/2006/main" xmlns:r="http://schemas.openxmlformats.org/officeDocument/2006/relationships" xmlns:p="http://schemas.openxmlformats.org/presentationml/2006/main">
   <p:cSld>
     <p:spTree>
@@ -24997,7 +22946,3151 @@
 </p:sld>
 </file>
 
-<file path=ppt/slides/slide29.xml><?xml version="1.0" encoding="utf-8"?>
+<file path=ppt/slides/slide3.xml><?xml version="1.0" encoding="utf-8"?>
+<p:sld xmlns:a="http://schemas.openxmlformats.org/drawingml/2006/main" xmlns:r="http://schemas.openxmlformats.org/officeDocument/2006/relationships" xmlns:p="http://schemas.openxmlformats.org/presentationml/2006/main">
+  <p:cSld>
+    <p:spTree>
+      <p:nvGrpSpPr>
+        <p:cNvPr id="1" name=""/>
+        <p:cNvGrpSpPr/>
+        <p:nvPr/>
+      </p:nvGrpSpPr>
+      <p:grpSpPr>
+        <a:xfrm>
+          <a:off x="0" y="0"/>
+          <a:ext cx="0" cy="0"/>
+          <a:chOff x="0" y="0"/>
+          <a:chExt cx="0" cy="0"/>
+        </a:xfrm>
+      </p:grpSpPr>
+      <p:sp>
+        <p:nvSpPr>
+          <p:cNvPr id="2" name="Title 1">
+            <a:extLst>
+              <a:ext uri="{FF2B5EF4-FFF2-40B4-BE49-F238E27FC236}">
+                <a16:creationId xmlns:a16="http://schemas.microsoft.com/office/drawing/2014/main" id="{5BA4E1A2-75E3-3C9C-6C10-EE078C5AD54A}"/>
+              </a:ext>
+            </a:extLst>
+          </p:cNvPr>
+          <p:cNvSpPr>
+            <a:spLocks noGrp="1"/>
+          </p:cNvSpPr>
+          <p:nvPr>
+            <p:ph type="title"/>
+          </p:nvPr>
+        </p:nvSpPr>
+        <p:spPr/>
+        <p:txBody>
+          <a:bodyPr/>
+          <a:lstStyle/>
+          <a:p>
+            <a:r>
+              <a:rPr lang="en-US" dirty="0"/>
+              <a:t>Summary of Notation</a:t>
+            </a:r>
+          </a:p>
+        </p:txBody>
+      </p:sp>
+      <mc:AlternateContent xmlns:mc="http://schemas.openxmlformats.org/markup-compatibility/2006" xmlns:a14="http://schemas.microsoft.com/office/drawing/2010/main">
+        <mc:Choice Requires="a14">
+          <p:sp>
+            <p:nvSpPr>
+              <p:cNvPr id="3" name="Content Placeholder 2">
+                <a:extLst>
+                  <a:ext uri="{FF2B5EF4-FFF2-40B4-BE49-F238E27FC236}">
+                    <a16:creationId xmlns:a16="http://schemas.microsoft.com/office/drawing/2014/main" id="{47E69C9C-42B6-9B0F-9AE0-20D17703E490}"/>
+                  </a:ext>
+                </a:extLst>
+              </p:cNvPr>
+              <p:cNvSpPr>
+                <a:spLocks noGrp="1"/>
+              </p:cNvSpPr>
+              <p:nvPr>
+                <p:ph idx="1"/>
+              </p:nvPr>
+            </p:nvSpPr>
+            <p:spPr>
+              <a:xfrm>
+                <a:off x="822819" y="3658891"/>
+                <a:ext cx="5273179" cy="1902124"/>
+              </a:xfrm>
+            </p:spPr>
+            <p:style>
+              <a:lnRef idx="2">
+                <a:schemeClr val="accent2"/>
+              </a:lnRef>
+              <a:fillRef idx="1">
+                <a:schemeClr val="lt1"/>
+              </a:fillRef>
+              <a:effectRef idx="0">
+                <a:schemeClr val="accent2"/>
+              </a:effectRef>
+              <a:fontRef idx="minor">
+                <a:schemeClr val="dk1"/>
+              </a:fontRef>
+            </p:style>
+            <p:txBody>
+              <a:bodyPr>
+                <a:spAutoFit/>
+              </a:bodyPr>
+              <a:lstStyle/>
+              <a:p>
+                <a:pPr marL="0" indent="0">
+                  <a:lnSpc>
+                    <a:spcPct val="100000"/>
+                  </a:lnSpc>
+                  <a:spcBef>
+                    <a:spcPts val="0"/>
+                  </a:spcBef>
+                  <a:buNone/>
+                </a:pPr>
+                <a:r>
+                  <a:rPr lang="en-US" sz="1200" b="1" dirty="0"/>
+                  <a:t>Value Function</a:t>
+                </a:r>
+                <a:endParaRPr lang="en-US" sz="1200" i="1" dirty="0">
+                  <a:latin typeface="Cambria Math" panose="02040503050406030204" pitchFamily="18" charset="0"/>
+                </a:endParaRPr>
+              </a:p>
+              <a:p>
+                <a:pPr marL="0" indent="0">
+                  <a:lnSpc>
+                    <a:spcPct val="100000"/>
+                  </a:lnSpc>
+                  <a:spcBef>
+                    <a:spcPts val="0"/>
+                  </a:spcBef>
+                  <a:buNone/>
+                </a:pPr>
+                <a14:m>
+                  <m:oMath xmlns:m="http://schemas.openxmlformats.org/officeDocument/2006/math">
+                    <m:sSub>
+                      <m:sSubPr>
+                        <m:ctrlPr>
+                          <a:rPr lang="en-US" sz="1200" i="1" dirty="0" smtClean="0">
+                            <a:latin typeface="Cambria Math" panose="02040503050406030204" pitchFamily="18" charset="0"/>
+                          </a:rPr>
+                        </m:ctrlPr>
+                      </m:sSubPr>
+                      <m:e>
+                        <m:r>
+                          <a:rPr lang="en-US" sz="1200" i="1" dirty="0">
+                            <a:latin typeface="Cambria Math" panose="02040503050406030204" pitchFamily="18" charset="0"/>
+                          </a:rPr>
+                          <m:t>𝐺</m:t>
+                        </m:r>
+                      </m:e>
+                      <m:sub>
+                        <m:r>
+                          <a:rPr lang="en-US" sz="1200" i="1" dirty="0">
+                            <a:latin typeface="Cambria Math" panose="02040503050406030204" pitchFamily="18" charset="0"/>
+                          </a:rPr>
+                          <m:t>𝑡</m:t>
+                        </m:r>
+                      </m:sub>
+                    </m:sSub>
+                  </m:oMath>
+                </a14:m>
+                <a:r>
+                  <a:rPr lang="en-US" sz="1200" dirty="0"/>
+                  <a:t> 	return (cumulative reward) following time </a:t>
+                </a:r>
+                <a14:m>
+                  <m:oMath xmlns:m="http://schemas.openxmlformats.org/officeDocument/2006/math">
+                    <m:r>
+                      <a:rPr lang="en-US" sz="1200" i="1" dirty="0">
+                        <a:latin typeface="Cambria Math" panose="02040503050406030204" pitchFamily="18" charset="0"/>
+                      </a:rPr>
+                      <m:t>𝑡</m:t>
+                    </m:r>
+                  </m:oMath>
+                </a14:m>
+                <a:endParaRPr lang="en-US" sz="1200" dirty="0"/>
+              </a:p>
+              <a:p>
+                <a:pPr marL="0" indent="0">
+                  <a:lnSpc>
+                    <a:spcPct val="100000"/>
+                  </a:lnSpc>
+                  <a:spcBef>
+                    <a:spcPts val="0"/>
+                  </a:spcBef>
+                  <a:buNone/>
+                </a:pPr>
+                <a14:m>
+                  <m:oMath xmlns:m="http://schemas.openxmlformats.org/officeDocument/2006/math">
+                    <m:sSub>
+                      <m:sSubPr>
+                        <m:ctrlPr>
+                          <a:rPr lang="en-US" sz="1200" i="1" dirty="0">
+                            <a:solidFill>
+                              <a:schemeClr val="tx1"/>
+                            </a:solidFill>
+                            <a:latin typeface="Cambria Math" panose="02040503050406030204" pitchFamily="18" charset="0"/>
+                          </a:rPr>
+                        </m:ctrlPr>
+                      </m:sSubPr>
+                      <m:e>
+                        <m:r>
+                          <a:rPr lang="en-US" sz="1200" i="1" dirty="0">
+                            <a:solidFill>
+                              <a:schemeClr val="tx1"/>
+                            </a:solidFill>
+                            <a:latin typeface="Cambria Math" panose="02040503050406030204" pitchFamily="18" charset="0"/>
+                          </a:rPr>
+                          <m:t>𝐺</m:t>
+                        </m:r>
+                      </m:e>
+                      <m:sub>
+                        <m:r>
+                          <a:rPr lang="en-US" sz="1200" i="1" dirty="0">
+                            <a:solidFill>
+                              <a:schemeClr val="tx1"/>
+                            </a:solidFill>
+                            <a:latin typeface="Cambria Math" panose="02040503050406030204" pitchFamily="18" charset="0"/>
+                          </a:rPr>
+                          <m:t>𝑡</m:t>
+                        </m:r>
+                        <m:r>
+                          <a:rPr lang="en-US" sz="1200" i="1" dirty="0">
+                            <a:solidFill>
+                              <a:schemeClr val="tx1"/>
+                            </a:solidFill>
+                            <a:latin typeface="Cambria Math" panose="02040503050406030204" pitchFamily="18" charset="0"/>
+                          </a:rPr>
+                          <m:t>:</m:t>
+                        </m:r>
+                        <m:r>
+                          <a:rPr lang="en-US" sz="1200" i="1" dirty="0">
+                            <a:solidFill>
+                              <a:schemeClr val="tx1"/>
+                            </a:solidFill>
+                            <a:latin typeface="Cambria Math" panose="02040503050406030204" pitchFamily="18" charset="0"/>
+                          </a:rPr>
+                          <m:t>h</m:t>
+                        </m:r>
+                      </m:sub>
+                    </m:sSub>
+                  </m:oMath>
+                </a14:m>
+                <a:r>
+                  <a:rPr lang="en-US" sz="1200" dirty="0">
+                    <a:solidFill>
+                      <a:schemeClr val="tx1"/>
+                    </a:solidFill>
+                  </a:rPr>
+                  <a:t>	return from </a:t>
+                </a:r>
+                <a14:m>
+                  <m:oMath xmlns:m="http://schemas.openxmlformats.org/officeDocument/2006/math">
+                    <m:r>
+                      <a:rPr lang="en-US" sz="1200" i="1" dirty="0">
+                        <a:solidFill>
+                          <a:schemeClr val="tx1"/>
+                        </a:solidFill>
+                        <a:latin typeface="Cambria Math" panose="02040503050406030204" pitchFamily="18" charset="0"/>
+                      </a:rPr>
+                      <m:t>𝑡</m:t>
+                    </m:r>
+                  </m:oMath>
+                </a14:m>
+                <a:r>
+                  <a:rPr lang="en-US" sz="1200" dirty="0">
+                    <a:solidFill>
+                      <a:schemeClr val="tx1"/>
+                    </a:solidFill>
+                  </a:rPr>
+                  <a:t> to </a:t>
+                </a:r>
+                <a14:m>
+                  <m:oMath xmlns:m="http://schemas.openxmlformats.org/officeDocument/2006/math">
+                    <m:r>
+                      <a:rPr lang="en-US" sz="1200" i="1" dirty="0">
+                        <a:solidFill>
+                          <a:schemeClr val="tx1"/>
+                        </a:solidFill>
+                        <a:latin typeface="Cambria Math" panose="02040503050406030204" pitchFamily="18" charset="0"/>
+                      </a:rPr>
+                      <m:t>h</m:t>
+                    </m:r>
+                  </m:oMath>
+                </a14:m>
+                <a:r>
+                  <a:rPr lang="en-US" sz="1200" dirty="0">
+                    <a:solidFill>
+                      <a:schemeClr val="tx1"/>
+                    </a:solidFill>
+                  </a:rPr>
+                  <a:t> (discounted and corrected)</a:t>
+                </a:r>
+                <a:endParaRPr lang="en-US" sz="1200" dirty="0"/>
+              </a:p>
+              <a:p>
+                <a:pPr marL="0" indent="0">
+                  <a:lnSpc>
+                    <a:spcPct val="100000"/>
+                  </a:lnSpc>
+                  <a:spcBef>
+                    <a:spcPts val="0"/>
+                  </a:spcBef>
+                  <a:buNone/>
+                </a:pPr>
+                <a:endParaRPr lang="en-US" sz="1200" i="1" dirty="0">
+                  <a:latin typeface="Cambria Math" panose="02040503050406030204" pitchFamily="18" charset="0"/>
+                </a:endParaRPr>
+              </a:p>
+              <a:p>
+                <a:pPr marL="0" indent="0">
+                  <a:lnSpc>
+                    <a:spcPct val="100000"/>
+                  </a:lnSpc>
+                  <a:spcBef>
+                    <a:spcPts val="0"/>
+                  </a:spcBef>
+                  <a:buNone/>
+                </a:pPr>
+                <a14:m>
+                  <m:oMath xmlns:m="http://schemas.openxmlformats.org/officeDocument/2006/math">
+                    <m:sSub>
+                      <m:sSubPr>
+                        <m:ctrlPr>
+                          <a:rPr lang="en-US" sz="1200" i="1" dirty="0">
+                            <a:latin typeface="Cambria Math" panose="02040503050406030204" pitchFamily="18" charset="0"/>
+                          </a:rPr>
+                        </m:ctrlPr>
+                      </m:sSubPr>
+                      <m:e>
+                        <m:r>
+                          <a:rPr lang="en-US" sz="1200" i="1" dirty="0">
+                            <a:latin typeface="Cambria Math" panose="02040503050406030204" pitchFamily="18" charset="0"/>
+                          </a:rPr>
+                          <m:t>𝑣</m:t>
+                        </m:r>
+                      </m:e>
+                      <m:sub>
+                        <m:r>
+                          <a:rPr lang="en-US" sz="1200" i="1" dirty="0">
+                            <a:latin typeface="Cambria Math" panose="02040503050406030204" pitchFamily="18" charset="0"/>
+                          </a:rPr>
+                          <m:t>𝜋</m:t>
+                        </m:r>
+                      </m:sub>
+                    </m:sSub>
+                    <m:r>
+                      <a:rPr lang="en-US" sz="1200" i="1" dirty="0">
+                        <a:latin typeface="Cambria Math" panose="02040503050406030204" pitchFamily="18" charset="0"/>
+                      </a:rPr>
+                      <m:t>(</m:t>
+                    </m:r>
+                    <m:r>
+                      <a:rPr lang="en-US" sz="1200" i="1" dirty="0">
+                        <a:latin typeface="Cambria Math" panose="02040503050406030204" pitchFamily="18" charset="0"/>
+                      </a:rPr>
+                      <m:t>𝑠</m:t>
+                    </m:r>
+                    <m:r>
+                      <a:rPr lang="en-US" sz="1200" i="1" dirty="0">
+                        <a:latin typeface="Cambria Math" panose="02040503050406030204" pitchFamily="18" charset="0"/>
+                      </a:rPr>
+                      <m:t>)</m:t>
+                    </m:r>
+                  </m:oMath>
+                </a14:m>
+                <a:r>
+                  <a:rPr lang="en-US" sz="1200" dirty="0"/>
+                  <a:t>	value of state </a:t>
+                </a:r>
+                <a14:m>
+                  <m:oMath xmlns:m="http://schemas.openxmlformats.org/officeDocument/2006/math">
+                    <m:r>
+                      <a:rPr lang="en-US" sz="1200" i="1" dirty="0">
+                        <a:latin typeface="Cambria Math" panose="02040503050406030204" pitchFamily="18" charset="0"/>
+                      </a:rPr>
+                      <m:t>𝑠</m:t>
+                    </m:r>
+                  </m:oMath>
+                </a14:m>
+                <a:r>
+                  <a:rPr lang="en-US" sz="1200" dirty="0"/>
+                  <a:t> under policy </a:t>
+                </a:r>
+                <a14:m>
+                  <m:oMath xmlns:m="http://schemas.openxmlformats.org/officeDocument/2006/math">
+                    <m:r>
+                      <a:rPr lang="en-US" sz="1200" i="1" dirty="0">
+                        <a:latin typeface="Cambria Math" panose="02040503050406030204" pitchFamily="18" charset="0"/>
+                      </a:rPr>
+                      <m:t>𝜋</m:t>
+                    </m:r>
+                  </m:oMath>
+                </a14:m>
+                <a:r>
+                  <a:rPr lang="en-US" sz="1200" dirty="0"/>
+                  <a:t> (expected return)</a:t>
+                </a:r>
+              </a:p>
+              <a:p>
+                <a:pPr marL="0" indent="0">
+                  <a:lnSpc>
+                    <a:spcPct val="100000"/>
+                  </a:lnSpc>
+                  <a:spcBef>
+                    <a:spcPts val="0"/>
+                  </a:spcBef>
+                  <a:buNone/>
+                </a:pPr>
+                <a14:m>
+                  <m:oMath xmlns:m="http://schemas.openxmlformats.org/officeDocument/2006/math">
+                    <m:sSub>
+                      <m:sSubPr>
+                        <m:ctrlPr>
+                          <a:rPr lang="en-US" sz="1200" i="1" dirty="0">
+                            <a:latin typeface="Cambria Math" panose="02040503050406030204" pitchFamily="18" charset="0"/>
+                          </a:rPr>
+                        </m:ctrlPr>
+                      </m:sSubPr>
+                      <m:e>
+                        <m:r>
+                          <a:rPr lang="en-US" sz="1200" i="1" dirty="0">
+                            <a:latin typeface="Cambria Math" panose="02040503050406030204" pitchFamily="18" charset="0"/>
+                          </a:rPr>
+                          <m:t>𝑣</m:t>
+                        </m:r>
+                      </m:e>
+                      <m:sub>
+                        <m:r>
+                          <a:rPr lang="en-US" sz="1200" i="1" dirty="0">
+                            <a:latin typeface="Cambria Math" panose="02040503050406030204" pitchFamily="18" charset="0"/>
+                          </a:rPr>
+                          <m:t>∗</m:t>
+                        </m:r>
+                      </m:sub>
+                    </m:sSub>
+                    <m:r>
+                      <a:rPr lang="en-US" sz="1200" i="1" dirty="0">
+                        <a:latin typeface="Cambria Math" panose="02040503050406030204" pitchFamily="18" charset="0"/>
+                      </a:rPr>
+                      <m:t>(</m:t>
+                    </m:r>
+                    <m:r>
+                      <a:rPr lang="en-US" sz="1200" i="1" dirty="0">
+                        <a:latin typeface="Cambria Math" panose="02040503050406030204" pitchFamily="18" charset="0"/>
+                      </a:rPr>
+                      <m:t>𝑠</m:t>
+                    </m:r>
+                    <m:r>
+                      <a:rPr lang="en-US" sz="1200" i="1" dirty="0">
+                        <a:latin typeface="Cambria Math" panose="02040503050406030204" pitchFamily="18" charset="0"/>
+                      </a:rPr>
+                      <m:t>)</m:t>
+                    </m:r>
+                  </m:oMath>
+                </a14:m>
+                <a:r>
+                  <a:rPr lang="en-US" sz="1200" dirty="0"/>
+                  <a:t>	value of state s under the optimal policy</a:t>
+                </a:r>
+              </a:p>
+              <a:p>
+                <a:pPr marL="0" indent="0">
+                  <a:lnSpc>
+                    <a:spcPct val="100000"/>
+                  </a:lnSpc>
+                  <a:spcBef>
+                    <a:spcPts val="0"/>
+                  </a:spcBef>
+                  <a:buNone/>
+                </a:pPr>
+                <a14:m>
+                  <m:oMath xmlns:m="http://schemas.openxmlformats.org/officeDocument/2006/math">
+                    <m:sSub>
+                      <m:sSubPr>
+                        <m:ctrlPr>
+                          <a:rPr lang="en-US" sz="1200" i="1" dirty="0">
+                            <a:latin typeface="Cambria Math" panose="02040503050406030204" pitchFamily="18" charset="0"/>
+                          </a:rPr>
+                        </m:ctrlPr>
+                      </m:sSubPr>
+                      <m:e>
+                        <m:r>
+                          <a:rPr lang="en-US" sz="1200" i="1" dirty="0">
+                            <a:latin typeface="Cambria Math" panose="02040503050406030204" pitchFamily="18" charset="0"/>
+                          </a:rPr>
+                          <m:t>𝑞</m:t>
+                        </m:r>
+                      </m:e>
+                      <m:sub>
+                        <m:r>
+                          <a:rPr lang="en-US" sz="1200" i="1" dirty="0">
+                            <a:latin typeface="Cambria Math" panose="02040503050406030204" pitchFamily="18" charset="0"/>
+                          </a:rPr>
+                          <m:t>𝜋</m:t>
+                        </m:r>
+                      </m:sub>
+                    </m:sSub>
+                    <m:r>
+                      <a:rPr lang="en-US" sz="1200" i="1" dirty="0">
+                        <a:latin typeface="Cambria Math" panose="02040503050406030204" pitchFamily="18" charset="0"/>
+                      </a:rPr>
+                      <m:t>(</m:t>
+                    </m:r>
+                    <m:r>
+                      <a:rPr lang="en-US" sz="1200" i="1" dirty="0">
+                        <a:latin typeface="Cambria Math" panose="02040503050406030204" pitchFamily="18" charset="0"/>
+                      </a:rPr>
+                      <m:t>𝑠</m:t>
+                    </m:r>
+                    <m:r>
+                      <a:rPr lang="en-US" sz="1200" i="1" dirty="0">
+                        <a:latin typeface="Cambria Math" panose="02040503050406030204" pitchFamily="18" charset="0"/>
+                      </a:rPr>
+                      <m:t>,</m:t>
+                    </m:r>
+                    <m:r>
+                      <a:rPr lang="en-US" sz="1200" i="1" dirty="0">
+                        <a:latin typeface="Cambria Math" panose="02040503050406030204" pitchFamily="18" charset="0"/>
+                      </a:rPr>
+                      <m:t>𝑎</m:t>
+                    </m:r>
+                    <m:r>
+                      <a:rPr lang="en-US" sz="1200" i="1" dirty="0">
+                        <a:latin typeface="Cambria Math" panose="02040503050406030204" pitchFamily="18" charset="0"/>
+                      </a:rPr>
+                      <m:t>)</m:t>
+                    </m:r>
+                  </m:oMath>
+                </a14:m>
+                <a:r>
+                  <a:rPr lang="en-US" sz="1200" dirty="0"/>
+                  <a:t>	value of taking action </a:t>
+                </a:r>
+                <a14:m>
+                  <m:oMath xmlns:m="http://schemas.openxmlformats.org/officeDocument/2006/math">
+                    <m:r>
+                      <a:rPr lang="en-US" sz="1200" i="1" dirty="0">
+                        <a:latin typeface="Cambria Math" panose="02040503050406030204" pitchFamily="18" charset="0"/>
+                      </a:rPr>
+                      <m:t>𝑎</m:t>
+                    </m:r>
+                  </m:oMath>
+                </a14:m>
+                <a:r>
+                  <a:rPr lang="en-US" sz="1200" dirty="0"/>
+                  <a:t> in state </a:t>
+                </a:r>
+                <a14:m>
+                  <m:oMath xmlns:m="http://schemas.openxmlformats.org/officeDocument/2006/math">
+                    <m:r>
+                      <a:rPr lang="en-US" sz="1200" i="1" dirty="0" smtClean="0">
+                        <a:latin typeface="Cambria Math" panose="02040503050406030204" pitchFamily="18" charset="0"/>
+                      </a:rPr>
+                      <m:t>𝑠</m:t>
+                    </m:r>
+                  </m:oMath>
+                </a14:m>
+                <a:r>
+                  <a:rPr lang="en-US" sz="1200" dirty="0"/>
+                  <a:t> under policy </a:t>
+                </a:r>
+                <a14:m>
+                  <m:oMath xmlns:m="http://schemas.openxmlformats.org/officeDocument/2006/math">
+                    <m:r>
+                      <a:rPr lang="en-US" sz="1200" i="1" dirty="0">
+                        <a:latin typeface="Cambria Math" panose="02040503050406030204" pitchFamily="18" charset="0"/>
+                      </a:rPr>
+                      <m:t>𝜋</m:t>
+                    </m:r>
+                  </m:oMath>
+                </a14:m>
+                <a:endParaRPr lang="en-US" sz="1200" dirty="0"/>
+              </a:p>
+              <a:p>
+                <a:pPr marL="0" indent="0">
+                  <a:lnSpc>
+                    <a:spcPct val="100000"/>
+                  </a:lnSpc>
+                  <a:spcBef>
+                    <a:spcPts val="0"/>
+                  </a:spcBef>
+                  <a:buNone/>
+                </a:pPr>
+                <a14:m>
+                  <m:oMath xmlns:m="http://schemas.openxmlformats.org/officeDocument/2006/math">
+                    <m:sSub>
+                      <m:sSubPr>
+                        <m:ctrlPr>
+                          <a:rPr lang="en-US" sz="1200" i="1" dirty="0">
+                            <a:latin typeface="Cambria Math" panose="02040503050406030204" pitchFamily="18" charset="0"/>
+                          </a:rPr>
+                        </m:ctrlPr>
+                      </m:sSubPr>
+                      <m:e>
+                        <m:r>
+                          <a:rPr lang="en-US" sz="1200" i="1" dirty="0">
+                            <a:latin typeface="Cambria Math" panose="02040503050406030204" pitchFamily="18" charset="0"/>
+                          </a:rPr>
+                          <m:t>𝑞</m:t>
+                        </m:r>
+                      </m:e>
+                      <m:sub>
+                        <m:r>
+                          <a:rPr lang="en-US" sz="1200" i="1" dirty="0">
+                            <a:latin typeface="Cambria Math" panose="02040503050406030204" pitchFamily="18" charset="0"/>
+                          </a:rPr>
+                          <m:t>∗</m:t>
+                        </m:r>
+                      </m:sub>
+                    </m:sSub>
+                    <m:r>
+                      <a:rPr lang="en-US" sz="1200" i="1" dirty="0">
+                        <a:latin typeface="Cambria Math" panose="02040503050406030204" pitchFamily="18" charset="0"/>
+                      </a:rPr>
+                      <m:t>(</m:t>
+                    </m:r>
+                    <m:r>
+                      <a:rPr lang="en-US" sz="1200" i="1" dirty="0">
+                        <a:latin typeface="Cambria Math" panose="02040503050406030204" pitchFamily="18" charset="0"/>
+                      </a:rPr>
+                      <m:t>𝑠</m:t>
+                    </m:r>
+                    <m:r>
+                      <a:rPr lang="en-US" sz="1200" i="1" dirty="0">
+                        <a:latin typeface="Cambria Math" panose="02040503050406030204" pitchFamily="18" charset="0"/>
+                      </a:rPr>
+                      <m:t>,</m:t>
+                    </m:r>
+                    <m:r>
+                      <a:rPr lang="en-US" sz="1200" i="1" dirty="0">
+                        <a:latin typeface="Cambria Math" panose="02040503050406030204" pitchFamily="18" charset="0"/>
+                      </a:rPr>
+                      <m:t>𝑎</m:t>
+                    </m:r>
+                    <m:r>
+                      <a:rPr lang="en-US" sz="1200" i="1" dirty="0">
+                        <a:latin typeface="Cambria Math" panose="02040503050406030204" pitchFamily="18" charset="0"/>
+                      </a:rPr>
+                      <m:t>)</m:t>
+                    </m:r>
+                  </m:oMath>
+                </a14:m>
+                <a:r>
+                  <a:rPr lang="en-US" sz="1200" dirty="0"/>
+                  <a:t>	value of taking action </a:t>
+                </a:r>
+                <a14:m>
+                  <m:oMath xmlns:m="http://schemas.openxmlformats.org/officeDocument/2006/math">
+                    <m:r>
+                      <a:rPr lang="en-US" sz="1200" i="1" dirty="0">
+                        <a:latin typeface="Cambria Math" panose="02040503050406030204" pitchFamily="18" charset="0"/>
+                      </a:rPr>
+                      <m:t>𝑎</m:t>
+                    </m:r>
+                  </m:oMath>
+                </a14:m>
+                <a:r>
+                  <a:rPr lang="en-US" sz="1200" dirty="0"/>
+                  <a:t> in state </a:t>
+                </a:r>
+                <a14:m>
+                  <m:oMath xmlns:m="http://schemas.openxmlformats.org/officeDocument/2006/math">
+                    <m:r>
+                      <a:rPr lang="en-US" sz="1200" i="1" dirty="0" smtClean="0">
+                        <a:latin typeface="Cambria Math" panose="02040503050406030204" pitchFamily="18" charset="0"/>
+                      </a:rPr>
+                      <m:t>𝑠</m:t>
+                    </m:r>
+                  </m:oMath>
+                </a14:m>
+                <a:r>
+                  <a:rPr lang="en-US" sz="1200" dirty="0"/>
+                  <a:t> under the optimal policy</a:t>
+                </a:r>
+              </a:p>
+              <a:p>
+                <a:pPr marL="0" indent="0">
+                  <a:spcBef>
+                    <a:spcPts val="0"/>
+                  </a:spcBef>
+                  <a:buNone/>
+                </a:pPr>
+                <a14:m>
+                  <m:oMath xmlns:m="http://schemas.openxmlformats.org/officeDocument/2006/math">
+                    <m:r>
+                      <a:rPr lang="en-US" sz="1200" i="1" dirty="0">
+                        <a:solidFill>
+                          <a:schemeClr val="tx1"/>
+                        </a:solidFill>
+                        <a:latin typeface="Cambria Math" panose="02040503050406030204" pitchFamily="18" charset="0"/>
+                      </a:rPr>
+                      <m:t>𝑉</m:t>
+                    </m:r>
+                    <m:r>
+                      <a:rPr lang="en-US" sz="1200" i="1" dirty="0">
+                        <a:solidFill>
+                          <a:schemeClr val="tx1"/>
+                        </a:solidFill>
+                        <a:latin typeface="Cambria Math" panose="02040503050406030204" pitchFamily="18" charset="0"/>
+                      </a:rPr>
+                      <m:t>, </m:t>
+                    </m:r>
+                    <m:sSub>
+                      <m:sSubPr>
+                        <m:ctrlPr>
+                          <a:rPr lang="en-US" sz="1200" i="1" dirty="0">
+                            <a:solidFill>
+                              <a:schemeClr val="tx1"/>
+                            </a:solidFill>
+                            <a:latin typeface="Cambria Math" panose="02040503050406030204" pitchFamily="18" charset="0"/>
+                          </a:rPr>
+                        </m:ctrlPr>
+                      </m:sSubPr>
+                      <m:e>
+                        <m:r>
+                          <a:rPr lang="en-US" sz="1200" i="1" dirty="0">
+                            <a:solidFill>
+                              <a:schemeClr val="tx1"/>
+                            </a:solidFill>
+                            <a:latin typeface="Cambria Math" panose="02040503050406030204" pitchFamily="18" charset="0"/>
+                          </a:rPr>
+                          <m:t>𝑉</m:t>
+                        </m:r>
+                      </m:e>
+                      <m:sub>
+                        <m:r>
+                          <a:rPr lang="en-US" sz="1200" i="1" dirty="0">
+                            <a:solidFill>
+                              <a:schemeClr val="tx1"/>
+                            </a:solidFill>
+                            <a:latin typeface="Cambria Math" panose="02040503050406030204" pitchFamily="18" charset="0"/>
+                          </a:rPr>
+                          <m:t>𝑡</m:t>
+                        </m:r>
+                      </m:sub>
+                    </m:sSub>
+                    <m:r>
+                      <a:rPr lang="en-US" sz="1200" i="1" dirty="0">
+                        <a:solidFill>
+                          <a:schemeClr val="tx1"/>
+                        </a:solidFill>
+                        <a:latin typeface="Cambria Math" panose="02040503050406030204" pitchFamily="18" charset="0"/>
+                      </a:rPr>
+                      <m:t> </m:t>
+                    </m:r>
+                  </m:oMath>
+                </a14:m>
+                <a:r>
+                  <a:rPr lang="en-US" sz="1200" dirty="0">
+                    <a:solidFill>
+                      <a:schemeClr val="tx1"/>
+                    </a:solidFill>
+                  </a:rPr>
+                  <a:t>	array estimates of state-value function </a:t>
+                </a:r>
+                <a14:m>
+                  <m:oMath xmlns:m="http://schemas.openxmlformats.org/officeDocument/2006/math">
+                    <m:sSub>
+                      <m:sSubPr>
+                        <m:ctrlPr>
+                          <a:rPr lang="en-US" sz="1200" i="1" dirty="0">
+                            <a:solidFill>
+                              <a:schemeClr val="tx1"/>
+                            </a:solidFill>
+                            <a:latin typeface="Cambria Math" panose="02040503050406030204" pitchFamily="18" charset="0"/>
+                          </a:rPr>
+                        </m:ctrlPr>
+                      </m:sSubPr>
+                      <m:e>
+                        <m:r>
+                          <a:rPr lang="en-US" sz="1200" i="1" dirty="0">
+                            <a:solidFill>
+                              <a:schemeClr val="tx1"/>
+                            </a:solidFill>
+                            <a:latin typeface="Cambria Math" panose="02040503050406030204" pitchFamily="18" charset="0"/>
+                          </a:rPr>
+                          <m:t>𝑣</m:t>
+                        </m:r>
+                      </m:e>
+                      <m:sub>
+                        <m:r>
+                          <a:rPr lang="en-US" sz="1200" i="1" dirty="0">
+                            <a:solidFill>
+                              <a:schemeClr val="tx1"/>
+                            </a:solidFill>
+                            <a:latin typeface="Cambria Math" panose="02040503050406030204" pitchFamily="18" charset="0"/>
+                          </a:rPr>
+                          <m:t>𝜋</m:t>
+                        </m:r>
+                      </m:sub>
+                    </m:sSub>
+                    <m:r>
+                      <a:rPr lang="en-US" sz="1200" i="1" dirty="0">
+                        <a:solidFill>
+                          <a:schemeClr val="tx1"/>
+                        </a:solidFill>
+                        <a:latin typeface="Cambria Math" panose="02040503050406030204" pitchFamily="18" charset="0"/>
+                      </a:rPr>
+                      <m:t> </m:t>
+                    </m:r>
+                  </m:oMath>
+                </a14:m>
+                <a:r>
+                  <a:rPr lang="en-US" sz="1200" dirty="0">
+                    <a:solidFill>
+                      <a:schemeClr val="tx1"/>
+                    </a:solidFill>
+                  </a:rPr>
+                  <a:t>or </a:t>
+                </a:r>
+                <a14:m>
+                  <m:oMath xmlns:m="http://schemas.openxmlformats.org/officeDocument/2006/math">
+                    <m:sSub>
+                      <m:sSubPr>
+                        <m:ctrlPr>
+                          <a:rPr lang="en-US" sz="1200" i="1" dirty="0">
+                            <a:solidFill>
+                              <a:schemeClr val="tx1"/>
+                            </a:solidFill>
+                            <a:latin typeface="Cambria Math" panose="02040503050406030204" pitchFamily="18" charset="0"/>
+                          </a:rPr>
+                        </m:ctrlPr>
+                      </m:sSubPr>
+                      <m:e>
+                        <m:r>
+                          <a:rPr lang="en-US" sz="1200" i="1" dirty="0">
+                            <a:solidFill>
+                              <a:schemeClr val="tx1"/>
+                            </a:solidFill>
+                            <a:latin typeface="Cambria Math" panose="02040503050406030204" pitchFamily="18" charset="0"/>
+                          </a:rPr>
+                          <m:t>𝑣</m:t>
+                        </m:r>
+                      </m:e>
+                      <m:sub>
+                        <m:r>
+                          <a:rPr lang="en-US" sz="1200" i="1" dirty="0">
+                            <a:solidFill>
+                              <a:schemeClr val="tx1"/>
+                            </a:solidFill>
+                            <a:latin typeface="Cambria Math" panose="02040503050406030204" pitchFamily="18" charset="0"/>
+                          </a:rPr>
+                          <m:t>∗</m:t>
+                        </m:r>
+                      </m:sub>
+                    </m:sSub>
+                    <m:r>
+                      <a:rPr lang="en-US" sz="1200" i="1" dirty="0">
+                        <a:solidFill>
+                          <a:schemeClr val="tx1"/>
+                        </a:solidFill>
+                        <a:latin typeface="Cambria Math" panose="02040503050406030204" pitchFamily="18" charset="0"/>
+                      </a:rPr>
+                      <m:t> </m:t>
+                    </m:r>
+                  </m:oMath>
+                </a14:m>
+                <a:endParaRPr lang="en-US" sz="1200" dirty="0">
+                  <a:solidFill>
+                    <a:schemeClr val="tx1"/>
+                  </a:solidFill>
+                </a:endParaRPr>
+              </a:p>
+              <a:p>
+                <a:pPr marL="0" indent="0">
+                  <a:spcBef>
+                    <a:spcPts val="0"/>
+                  </a:spcBef>
+                  <a:buNone/>
+                </a:pPr>
+                <a14:m>
+                  <m:oMath xmlns:m="http://schemas.openxmlformats.org/officeDocument/2006/math">
+                    <m:r>
+                      <a:rPr lang="en-US" sz="1200" i="1" dirty="0">
+                        <a:solidFill>
+                          <a:schemeClr val="tx1"/>
+                        </a:solidFill>
+                        <a:latin typeface="Cambria Math" panose="02040503050406030204" pitchFamily="18" charset="0"/>
+                      </a:rPr>
+                      <m:t>𝑄</m:t>
+                    </m:r>
+                    <m:r>
+                      <a:rPr lang="en-US" sz="1200" i="1" dirty="0">
+                        <a:solidFill>
+                          <a:schemeClr val="tx1"/>
+                        </a:solidFill>
+                        <a:latin typeface="Cambria Math" panose="02040503050406030204" pitchFamily="18" charset="0"/>
+                      </a:rPr>
+                      <m:t>,</m:t>
+                    </m:r>
+                    <m:sSub>
+                      <m:sSubPr>
+                        <m:ctrlPr>
+                          <a:rPr lang="en-US" sz="1200" i="1" dirty="0">
+                            <a:solidFill>
+                              <a:schemeClr val="tx1"/>
+                            </a:solidFill>
+                            <a:latin typeface="Cambria Math" panose="02040503050406030204" pitchFamily="18" charset="0"/>
+                          </a:rPr>
+                        </m:ctrlPr>
+                      </m:sSubPr>
+                      <m:e>
+                        <m:r>
+                          <a:rPr lang="en-US" sz="1200" i="1" dirty="0">
+                            <a:solidFill>
+                              <a:schemeClr val="tx1"/>
+                            </a:solidFill>
+                            <a:latin typeface="Cambria Math" panose="02040503050406030204" pitchFamily="18" charset="0"/>
+                          </a:rPr>
+                          <m:t>𝑄</m:t>
+                        </m:r>
+                      </m:e>
+                      <m:sub>
+                        <m:r>
+                          <a:rPr lang="en-US" sz="1200" i="1" dirty="0">
+                            <a:solidFill>
+                              <a:schemeClr val="tx1"/>
+                            </a:solidFill>
+                            <a:latin typeface="Cambria Math" panose="02040503050406030204" pitchFamily="18" charset="0"/>
+                          </a:rPr>
+                          <m:t>𝑡</m:t>
+                        </m:r>
+                      </m:sub>
+                    </m:sSub>
+                    <m:r>
+                      <a:rPr lang="en-US" sz="1200" i="1" dirty="0">
+                        <a:solidFill>
+                          <a:schemeClr val="tx1"/>
+                        </a:solidFill>
+                        <a:latin typeface="Cambria Math" panose="02040503050406030204" pitchFamily="18" charset="0"/>
+                      </a:rPr>
+                      <m:t> </m:t>
+                    </m:r>
+                  </m:oMath>
+                </a14:m>
+                <a:r>
+                  <a:rPr lang="en-US" sz="1200" dirty="0">
+                    <a:solidFill>
+                      <a:schemeClr val="tx1"/>
+                    </a:solidFill>
+                  </a:rPr>
+                  <a:t>	array estimates of action-value function </a:t>
+                </a:r>
+                <a14:m>
+                  <m:oMath xmlns:m="http://schemas.openxmlformats.org/officeDocument/2006/math">
+                    <m:sSub>
+                      <m:sSubPr>
+                        <m:ctrlPr>
+                          <a:rPr lang="en-US" sz="1200" i="1" dirty="0">
+                            <a:solidFill>
+                              <a:schemeClr val="tx1"/>
+                            </a:solidFill>
+                            <a:latin typeface="Cambria Math" panose="02040503050406030204" pitchFamily="18" charset="0"/>
+                          </a:rPr>
+                        </m:ctrlPr>
+                      </m:sSubPr>
+                      <m:e>
+                        <m:r>
+                          <a:rPr lang="en-US" sz="1200" i="1" dirty="0">
+                            <a:solidFill>
+                              <a:schemeClr val="tx1"/>
+                            </a:solidFill>
+                            <a:latin typeface="Cambria Math" panose="02040503050406030204" pitchFamily="18" charset="0"/>
+                          </a:rPr>
+                          <m:t>𝑞</m:t>
+                        </m:r>
+                      </m:e>
+                      <m:sub>
+                        <m:r>
+                          <a:rPr lang="en-US" sz="1200" i="1" dirty="0">
+                            <a:solidFill>
+                              <a:schemeClr val="tx1"/>
+                            </a:solidFill>
+                            <a:latin typeface="Cambria Math" panose="02040503050406030204" pitchFamily="18" charset="0"/>
+                          </a:rPr>
+                          <m:t>𝜋</m:t>
+                        </m:r>
+                      </m:sub>
+                    </m:sSub>
+                    <m:r>
+                      <a:rPr lang="en-US" sz="1200" i="1" dirty="0">
+                        <a:solidFill>
+                          <a:schemeClr val="tx1"/>
+                        </a:solidFill>
+                        <a:latin typeface="Cambria Math" panose="02040503050406030204" pitchFamily="18" charset="0"/>
+                      </a:rPr>
+                      <m:t> </m:t>
+                    </m:r>
+                  </m:oMath>
+                </a14:m>
+                <a:r>
+                  <a:rPr lang="en-US" sz="1200" dirty="0">
+                    <a:solidFill>
+                      <a:schemeClr val="tx1"/>
+                    </a:solidFill>
+                  </a:rPr>
+                  <a:t>or </a:t>
+                </a:r>
+                <a14:m>
+                  <m:oMath xmlns:m="http://schemas.openxmlformats.org/officeDocument/2006/math">
+                    <m:sSub>
+                      <m:sSubPr>
+                        <m:ctrlPr>
+                          <a:rPr lang="en-US" sz="1200" i="1" dirty="0">
+                            <a:solidFill>
+                              <a:schemeClr val="tx1"/>
+                            </a:solidFill>
+                            <a:latin typeface="Cambria Math" panose="02040503050406030204" pitchFamily="18" charset="0"/>
+                          </a:rPr>
+                        </m:ctrlPr>
+                      </m:sSubPr>
+                      <m:e>
+                        <m:r>
+                          <a:rPr lang="en-US" sz="1200" i="1" dirty="0">
+                            <a:solidFill>
+                              <a:schemeClr val="tx1"/>
+                            </a:solidFill>
+                            <a:latin typeface="Cambria Math" panose="02040503050406030204" pitchFamily="18" charset="0"/>
+                          </a:rPr>
+                          <m:t>𝑣</m:t>
+                        </m:r>
+                      </m:e>
+                      <m:sub>
+                        <m:r>
+                          <a:rPr lang="en-US" sz="1200" i="1" dirty="0">
+                            <a:solidFill>
+                              <a:schemeClr val="tx1"/>
+                            </a:solidFill>
+                            <a:latin typeface="Cambria Math" panose="02040503050406030204" pitchFamily="18" charset="0"/>
+                          </a:rPr>
+                          <m:t>∗</m:t>
+                        </m:r>
+                      </m:sub>
+                    </m:sSub>
+                  </m:oMath>
+                </a14:m>
+                <a:endParaRPr lang="en-US" sz="1200" dirty="0">
+                  <a:solidFill>
+                    <a:schemeClr val="tx1"/>
+                  </a:solidFill>
+                </a:endParaRPr>
+              </a:p>
+            </p:txBody>
+          </p:sp>
+        </mc:Choice>
+        <mc:Fallback xmlns="">
+          <p:sp>
+            <p:nvSpPr>
+              <p:cNvPr id="3" name="Content Placeholder 2">
+                <a:extLst>
+                  <a:ext uri="{FF2B5EF4-FFF2-40B4-BE49-F238E27FC236}">
+                    <a16:creationId xmlns:a16="http://schemas.microsoft.com/office/drawing/2014/main" id="{47E69C9C-42B6-9B0F-9AE0-20D17703E490}"/>
+                  </a:ext>
+                </a:extLst>
+              </p:cNvPr>
+              <p:cNvSpPr>
+                <a:spLocks noGrp="1" noRot="1" noChangeAspect="1" noMove="1" noResize="1" noEditPoints="1" noAdjustHandles="1" noChangeArrowheads="1" noChangeShapeType="1" noTextEdit="1"/>
+              </p:cNvSpPr>
+              <p:nvPr>
+                <p:ph idx="1"/>
+              </p:nvPr>
+            </p:nvSpPr>
+            <p:spPr>
+              <a:xfrm>
+                <a:off x="822819" y="3658891"/>
+                <a:ext cx="5273179" cy="1902124"/>
+              </a:xfrm>
+              <a:blipFill>
+                <a:blip r:embed="rId2"/>
+                <a:stretch>
+                  <a:fillRect b="-952"/>
+                </a:stretch>
+              </a:blipFill>
+            </p:spPr>
+            <p:txBody>
+              <a:bodyPr/>
+              <a:lstStyle/>
+              <a:p>
+                <a:r>
+                  <a:rPr lang="en-US">
+                    <a:noFill/>
+                  </a:rPr>
+                  <a:t> </a:t>
+                </a:r>
+              </a:p>
+            </p:txBody>
+          </p:sp>
+        </mc:Fallback>
+      </mc:AlternateContent>
+      <mc:AlternateContent xmlns:mc="http://schemas.openxmlformats.org/markup-compatibility/2006" xmlns:a14="http://schemas.microsoft.com/office/drawing/2010/main">
+        <mc:Choice Requires="a14">
+          <p:sp>
+            <p:nvSpPr>
+              <p:cNvPr id="10" name="TextBox 9">
+                <a:extLst>
+                  <a:ext uri="{FF2B5EF4-FFF2-40B4-BE49-F238E27FC236}">
+                    <a16:creationId xmlns:a16="http://schemas.microsoft.com/office/drawing/2014/main" id="{5CD475E5-BE3B-5594-57DC-46A17411F2F9}"/>
+                  </a:ext>
+                </a:extLst>
+              </p:cNvPr>
+              <p:cNvSpPr txBox="1"/>
+              <p:nvPr/>
+            </p:nvSpPr>
+            <p:spPr>
+              <a:xfrm>
+                <a:off x="822820" y="1124198"/>
+                <a:ext cx="5273179" cy="2308324"/>
+              </a:xfrm>
+              <a:prstGeom prst="rect">
+                <a:avLst/>
+              </a:prstGeom>
+            </p:spPr>
+            <p:style>
+              <a:lnRef idx="2">
+                <a:schemeClr val="accent2"/>
+              </a:lnRef>
+              <a:fillRef idx="1">
+                <a:schemeClr val="lt1"/>
+              </a:fillRef>
+              <a:effectRef idx="0">
+                <a:schemeClr val="accent2"/>
+              </a:effectRef>
+              <a:fontRef idx="minor">
+                <a:schemeClr val="dk1"/>
+              </a:fontRef>
+            </p:style>
+            <p:txBody>
+              <a:bodyPr wrap="square">
+                <a:spAutoFit/>
+              </a:bodyPr>
+              <a:lstStyle/>
+              <a:p>
+                <a:r>
+                  <a:rPr lang="en-US" sz="1200" b="1" dirty="0"/>
+                  <a:t>General</a:t>
+                </a:r>
+                <a:endParaRPr lang="en-US" sz="1200" dirty="0"/>
+              </a:p>
+              <a:p>
+                <a14:m>
+                  <m:oMath xmlns:m="http://schemas.openxmlformats.org/officeDocument/2006/math">
+                    <m:r>
+                      <a:rPr lang="en-US" sz="1200" i="1" dirty="0" smtClean="0">
+                        <a:latin typeface="Cambria Math" panose="02040503050406030204" pitchFamily="18" charset="0"/>
+                      </a:rPr>
+                      <m:t>𝑋</m:t>
+                    </m:r>
+                  </m:oMath>
+                </a14:m>
+                <a:r>
+                  <a:rPr lang="en-US" sz="1200" dirty="0"/>
+                  <a:t>	capital letters: random variables</a:t>
+                </a:r>
+                <a:br>
+                  <a:rPr lang="en-US" sz="1200" dirty="0"/>
+                </a:br>
+                <a14:m>
+                  <m:oMath xmlns:m="http://schemas.openxmlformats.org/officeDocument/2006/math">
+                    <m:r>
+                      <a:rPr lang="en-US" sz="1200" b="0" i="1" smtClean="0">
+                        <a:latin typeface="Cambria Math" panose="02040503050406030204" pitchFamily="18" charset="0"/>
+                      </a:rPr>
+                      <m:t>𝑥</m:t>
+                    </m:r>
+                    <m:r>
+                      <a:rPr lang="en-US" sz="1200" b="0" i="0" smtClean="0">
+                        <a:latin typeface="Cambria Math" panose="02040503050406030204" pitchFamily="18" charset="0"/>
+                      </a:rPr>
+                      <m:t>, </m:t>
+                    </m:r>
+                    <m:r>
+                      <a:rPr lang="en-US" sz="1200" b="0" i="1" smtClean="0">
+                        <a:latin typeface="Cambria Math" panose="02040503050406030204" pitchFamily="18" charset="0"/>
+                      </a:rPr>
+                      <m:t>𝑝</m:t>
+                    </m:r>
+                  </m:oMath>
+                </a14:m>
+                <a:r>
+                  <a:rPr lang="en-US" sz="1200" dirty="0"/>
+                  <a:t>	lower-case letters: realizations of random variables </a:t>
+                </a:r>
+                <a:br>
+                  <a:rPr lang="en-US" sz="1200" dirty="0"/>
+                </a:br>
+                <a:r>
+                  <a:rPr lang="en-US" sz="1200" dirty="0"/>
+                  <a:t>	or scalar functions</a:t>
+                </a:r>
+              </a:p>
+              <a:p>
+                <a14:m>
+                  <m:oMath xmlns:m="http://schemas.openxmlformats.org/officeDocument/2006/math">
+                    <m:r>
+                      <a:rPr lang="en-US" sz="1200" b="1" i="1" smtClean="0">
+                        <a:latin typeface="Cambria Math" panose="02040503050406030204" pitchFamily="18" charset="0"/>
+                      </a:rPr>
+                      <m:t>𝒘</m:t>
+                    </m:r>
+                  </m:oMath>
+                </a14:m>
+                <a:r>
+                  <a:rPr lang="en-US" sz="1200" dirty="0"/>
+                  <a:t> 	Bold lower-case letters: real-valued vectors </a:t>
+                </a:r>
+                <a:br>
+                  <a:rPr lang="en-US" sz="1200" dirty="0"/>
+                </a:br>
+                <a:r>
+                  <a:rPr lang="en-US" sz="1200" dirty="0"/>
+                  <a:t>	(even if random variables)</a:t>
+                </a:r>
+              </a:p>
+              <a:p>
+                <a14:m>
+                  <m:oMath xmlns:m="http://schemas.openxmlformats.org/officeDocument/2006/math">
+                    <m:r>
+                      <a:rPr lang="en-US" sz="1200" b="1" i="1" smtClean="0">
+                        <a:latin typeface="Cambria Math" panose="02040503050406030204" pitchFamily="18" charset="0"/>
+                      </a:rPr>
+                      <m:t>𝑾</m:t>
+                    </m:r>
+                  </m:oMath>
+                </a14:m>
+                <a:r>
+                  <a:rPr lang="en-US" sz="1200" dirty="0"/>
+                  <a:t>	bold capitals: matrices</a:t>
+                </a:r>
+              </a:p>
+              <a:p>
+                <a14:m>
+                  <m:oMath xmlns:m="http://schemas.openxmlformats.org/officeDocument/2006/math">
+                    <m:r>
+                      <a:rPr lang="en-US" sz="1200" b="0" i="1" smtClean="0">
+                        <a:latin typeface="Cambria Math" panose="02040503050406030204" pitchFamily="18" charset="0"/>
+                      </a:rPr>
+                      <m:t>𝛼</m:t>
+                    </m:r>
+                  </m:oMath>
+                </a14:m>
+                <a:r>
+                  <a:rPr lang="en-US" sz="1200" dirty="0"/>
+                  <a:t>	Greek letters: parameters (vectors if in bolt)</a:t>
+                </a:r>
+              </a:p>
+              <a:p>
+                <a14:m>
+                  <m:oMath xmlns:m="http://schemas.openxmlformats.org/officeDocument/2006/math">
+                    <m:r>
+                      <m:rPr>
+                        <m:sty m:val="p"/>
+                      </m:rPr>
+                      <a:rPr lang="en-US" sz="1200" i="1" dirty="0">
+                        <a:latin typeface="Cambria Math" panose="02040503050406030204" pitchFamily="18" charset="0"/>
+                      </a:rPr>
+                      <m:t>Pr</m:t>
+                    </m:r>
+                    <m:r>
+                      <a:rPr lang="en-US" sz="1200" i="1" dirty="0">
+                        <a:latin typeface="Cambria Math" panose="02040503050406030204" pitchFamily="18" charset="0"/>
+                      </a:rPr>
+                      <m:t>⁡{</m:t>
+                    </m:r>
+                    <m:r>
+                      <a:rPr lang="en-US" sz="1200" i="1" dirty="0">
+                        <a:latin typeface="Cambria Math" panose="02040503050406030204" pitchFamily="18" charset="0"/>
+                      </a:rPr>
+                      <m:t>𝑋</m:t>
+                    </m:r>
+                    <m:r>
+                      <a:rPr lang="en-US" sz="1200" i="1" dirty="0">
+                        <a:latin typeface="Cambria Math" panose="02040503050406030204" pitchFamily="18" charset="0"/>
+                      </a:rPr>
+                      <m:t>=</m:t>
+                    </m:r>
+                    <m:r>
+                      <a:rPr lang="en-US" sz="1200" i="1" dirty="0">
+                        <a:latin typeface="Cambria Math" panose="02040503050406030204" pitchFamily="18" charset="0"/>
+                      </a:rPr>
+                      <m:t>𝑥</m:t>
+                    </m:r>
+                    <m:r>
+                      <a:rPr lang="en-US" sz="1200" i="1" dirty="0">
+                        <a:latin typeface="Cambria Math" panose="02040503050406030204" pitchFamily="18" charset="0"/>
+                      </a:rPr>
+                      <m:t>}</m:t>
+                    </m:r>
+                  </m:oMath>
+                </a14:m>
+                <a:r>
+                  <a:rPr lang="en-US" sz="1200" dirty="0"/>
+                  <a:t>	probability that a random variable </a:t>
+                </a:r>
+                <a14:m>
+                  <m:oMath xmlns:m="http://schemas.openxmlformats.org/officeDocument/2006/math">
+                    <m:r>
+                      <a:rPr lang="en-US" sz="1200" i="1" dirty="0">
+                        <a:latin typeface="Cambria Math" panose="02040503050406030204" pitchFamily="18" charset="0"/>
+                      </a:rPr>
+                      <m:t>𝑋</m:t>
+                    </m:r>
+                  </m:oMath>
+                </a14:m>
+                <a:r>
+                  <a:rPr lang="en-US" sz="1200" dirty="0"/>
+                  <a:t> takes on the value </a:t>
+                </a:r>
+                <a14:m>
+                  <m:oMath xmlns:m="http://schemas.openxmlformats.org/officeDocument/2006/math">
+                    <m:r>
+                      <a:rPr lang="en-US" sz="1200" i="1" dirty="0">
+                        <a:latin typeface="Cambria Math" panose="02040503050406030204" pitchFamily="18" charset="0"/>
+                      </a:rPr>
+                      <m:t>𝑥</m:t>
+                    </m:r>
+                  </m:oMath>
+                </a14:m>
+                <a:endParaRPr lang="en-US" sz="1200" dirty="0"/>
+              </a:p>
+              <a:p>
+                <a14:m>
+                  <m:oMath xmlns:m="http://schemas.openxmlformats.org/officeDocument/2006/math">
+                    <m:r>
+                      <a:rPr lang="en-US" sz="1200" i="1" dirty="0">
+                        <a:latin typeface="Cambria Math" panose="02040503050406030204" pitchFamily="18" charset="0"/>
+                      </a:rPr>
+                      <m:t>𝑋</m:t>
+                    </m:r>
+                    <m:r>
+                      <a:rPr lang="en-US" sz="1200" i="1" dirty="0">
+                        <a:latin typeface="Cambria Math" panose="02040503050406030204" pitchFamily="18" charset="0"/>
+                      </a:rPr>
+                      <m:t>~</m:t>
+                    </m:r>
+                    <m:r>
+                      <a:rPr lang="en-US" sz="1200" i="1" dirty="0">
+                        <a:latin typeface="Cambria Math" panose="02040503050406030204" pitchFamily="18" charset="0"/>
+                      </a:rPr>
+                      <m:t>𝑝</m:t>
+                    </m:r>
+                  </m:oMath>
+                </a14:m>
+                <a:r>
+                  <a:rPr lang="en-US" sz="1200" dirty="0"/>
+                  <a:t>	random variable </a:t>
+                </a:r>
+                <a14:m>
+                  <m:oMath xmlns:m="http://schemas.openxmlformats.org/officeDocument/2006/math">
+                    <m:r>
+                      <a:rPr lang="en-US" sz="1200" i="1" dirty="0">
+                        <a:latin typeface="Cambria Math" panose="02040503050406030204" pitchFamily="18" charset="0"/>
+                      </a:rPr>
+                      <m:t>𝑋</m:t>
+                    </m:r>
+                  </m:oMath>
+                </a14:m>
+                <a:r>
+                  <a:rPr lang="en-US" sz="1200" dirty="0"/>
+                  <a:t> selected from distribution </a:t>
+                </a:r>
+                <a14:m>
+                  <m:oMath xmlns:m="http://schemas.openxmlformats.org/officeDocument/2006/math">
+                    <m:r>
+                      <a:rPr lang="en-US" sz="1200" i="1">
+                        <a:latin typeface="Cambria Math" panose="02040503050406030204" pitchFamily="18" charset="0"/>
+                      </a:rPr>
+                      <m:t>𝑝</m:t>
+                    </m:r>
+                    <m:d>
+                      <m:dPr>
+                        <m:ctrlPr>
+                          <a:rPr lang="en-US" sz="1200" i="1">
+                            <a:latin typeface="Cambria Math" panose="02040503050406030204" pitchFamily="18" charset="0"/>
+                          </a:rPr>
+                        </m:ctrlPr>
+                      </m:dPr>
+                      <m:e>
+                        <m:r>
+                          <a:rPr lang="en-US" sz="1200" i="1">
+                            <a:latin typeface="Cambria Math" panose="02040503050406030204" pitchFamily="18" charset="0"/>
+                          </a:rPr>
+                          <m:t>𝑥</m:t>
+                        </m:r>
+                      </m:e>
+                    </m:d>
+                    <m:r>
+                      <a:rPr lang="en-US" sz="1200" i="1">
+                        <a:latin typeface="Cambria Math" panose="02040503050406030204" pitchFamily="18" charset="0"/>
+                      </a:rPr>
+                      <m:t>=</m:t>
+                    </m:r>
+                    <m:r>
+                      <m:rPr>
+                        <m:sty m:val="p"/>
+                      </m:rPr>
+                      <a:rPr lang="en-US" sz="1200">
+                        <a:latin typeface="Cambria Math" panose="02040503050406030204" pitchFamily="18" charset="0"/>
+                      </a:rPr>
+                      <m:t>Pr</m:t>
+                    </m:r>
+                    <m:r>
+                      <a:rPr lang="en-US" sz="1200" i="1">
+                        <a:latin typeface="Cambria Math" panose="02040503050406030204" pitchFamily="18" charset="0"/>
+                      </a:rPr>
+                      <m:t>⁡{</m:t>
+                    </m:r>
+                    <m:r>
+                      <a:rPr lang="en-US" sz="1200" i="1">
+                        <a:latin typeface="Cambria Math" panose="02040503050406030204" pitchFamily="18" charset="0"/>
+                      </a:rPr>
+                      <m:t>𝑋</m:t>
+                    </m:r>
+                    <m:r>
+                      <a:rPr lang="en-US" sz="1200" i="1">
+                        <a:latin typeface="Cambria Math" panose="02040503050406030204" pitchFamily="18" charset="0"/>
+                      </a:rPr>
+                      <m:t>=</m:t>
+                    </m:r>
+                    <m:r>
+                      <a:rPr lang="en-US" sz="1200" i="1">
+                        <a:latin typeface="Cambria Math" panose="02040503050406030204" pitchFamily="18" charset="0"/>
+                      </a:rPr>
+                      <m:t>𝑥</m:t>
+                    </m:r>
+                    <m:r>
+                      <a:rPr lang="en-US" sz="1200" i="1">
+                        <a:latin typeface="Cambria Math" panose="02040503050406030204" pitchFamily="18" charset="0"/>
+                      </a:rPr>
+                      <m:t>}</m:t>
+                    </m:r>
+                  </m:oMath>
+                </a14:m>
+                <a:endParaRPr lang="en-US" sz="1200" dirty="0"/>
+              </a:p>
+              <a:p>
+                <a14:m>
+                  <m:oMath xmlns:m="http://schemas.openxmlformats.org/officeDocument/2006/math">
+                    <m:r>
+                      <a:rPr lang="en-US" sz="1200" i="1">
+                        <a:latin typeface="Cambria Math" panose="02040503050406030204" pitchFamily="18" charset="0"/>
+                        <a:ea typeface="Cambria Math" panose="02040503050406030204" pitchFamily="18" charset="0"/>
+                      </a:rPr>
+                      <m:t>𝔼</m:t>
+                    </m:r>
+                    <m:r>
+                      <a:rPr lang="en-US" sz="1200" i="1">
+                        <a:latin typeface="Cambria Math" panose="02040503050406030204" pitchFamily="18" charset="0"/>
+                        <a:ea typeface="Cambria Math" panose="02040503050406030204" pitchFamily="18" charset="0"/>
+                      </a:rPr>
+                      <m:t>[</m:t>
+                    </m:r>
+                    <m:r>
+                      <a:rPr lang="en-US" sz="1200" i="1">
+                        <a:latin typeface="Cambria Math" panose="02040503050406030204" pitchFamily="18" charset="0"/>
+                        <a:ea typeface="Cambria Math" panose="02040503050406030204" pitchFamily="18" charset="0"/>
+                      </a:rPr>
+                      <m:t>𝑋</m:t>
+                    </m:r>
+                    <m:r>
+                      <a:rPr lang="en-US" sz="1200" i="1">
+                        <a:latin typeface="Cambria Math" panose="02040503050406030204" pitchFamily="18" charset="0"/>
+                        <a:ea typeface="Cambria Math" panose="02040503050406030204" pitchFamily="18" charset="0"/>
+                      </a:rPr>
+                      <m:t>]</m:t>
+                    </m:r>
+                  </m:oMath>
+                </a14:m>
+                <a:r>
+                  <a:rPr lang="en-US" sz="1200" dirty="0"/>
+                  <a:t>	expectation of a random variable </a:t>
+                </a:r>
+                <a14:m>
+                  <m:oMath xmlns:m="http://schemas.openxmlformats.org/officeDocument/2006/math">
+                    <m:r>
+                      <a:rPr lang="en-US" sz="1200" i="1" dirty="0">
+                        <a:latin typeface="Cambria Math" panose="02040503050406030204" pitchFamily="18" charset="0"/>
+                      </a:rPr>
+                      <m:t>𝑋</m:t>
+                    </m:r>
+                  </m:oMath>
+                </a14:m>
+                <a:r>
+                  <a:rPr lang="en-US" sz="1200" dirty="0"/>
+                  <a:t>, i.e., </a:t>
+                </a:r>
+                <a14:m>
+                  <m:oMath xmlns:m="http://schemas.openxmlformats.org/officeDocument/2006/math">
+                    <m:r>
+                      <a:rPr lang="en-US" sz="1200" i="1">
+                        <a:latin typeface="Cambria Math" panose="02040503050406030204" pitchFamily="18" charset="0"/>
+                        <a:ea typeface="Cambria Math" panose="02040503050406030204" pitchFamily="18" charset="0"/>
+                      </a:rPr>
+                      <m:t>𝔼</m:t>
+                    </m:r>
+                    <m:d>
+                      <m:dPr>
+                        <m:begChr m:val="["/>
+                        <m:endChr m:val="]"/>
+                        <m:ctrlPr>
+                          <a:rPr lang="en-US" sz="1200" i="1">
+                            <a:latin typeface="Cambria Math" panose="02040503050406030204" pitchFamily="18" charset="0"/>
+                            <a:ea typeface="Cambria Math" panose="02040503050406030204" pitchFamily="18" charset="0"/>
+                          </a:rPr>
+                        </m:ctrlPr>
+                      </m:dPr>
+                      <m:e>
+                        <m:r>
+                          <a:rPr lang="en-US" sz="1200" i="1">
+                            <a:latin typeface="Cambria Math" panose="02040503050406030204" pitchFamily="18" charset="0"/>
+                            <a:ea typeface="Cambria Math" panose="02040503050406030204" pitchFamily="18" charset="0"/>
+                          </a:rPr>
+                          <m:t>𝑋</m:t>
+                        </m:r>
+                      </m:e>
+                    </m:d>
+                    <m:r>
+                      <a:rPr lang="en-US" sz="1200" i="1">
+                        <a:latin typeface="Cambria Math" panose="02040503050406030204" pitchFamily="18" charset="0"/>
+                        <a:ea typeface="Cambria Math" panose="02040503050406030204" pitchFamily="18" charset="0"/>
+                      </a:rPr>
+                      <m:t>=</m:t>
+                    </m:r>
+                    <m:nary>
+                      <m:naryPr>
+                        <m:chr m:val="∑"/>
+                        <m:supHide m:val="on"/>
+                        <m:ctrlPr>
+                          <a:rPr lang="en-US" sz="1200" i="1">
+                            <a:latin typeface="Cambria Math" panose="02040503050406030204" pitchFamily="18" charset="0"/>
+                            <a:ea typeface="Cambria Math" panose="02040503050406030204" pitchFamily="18" charset="0"/>
+                          </a:rPr>
+                        </m:ctrlPr>
+                      </m:naryPr>
+                      <m:sub>
+                        <m:r>
+                          <a:rPr lang="en-US" sz="1200" i="1">
+                            <a:latin typeface="Cambria Math" panose="02040503050406030204" pitchFamily="18" charset="0"/>
+                            <a:ea typeface="Cambria Math" panose="02040503050406030204" pitchFamily="18" charset="0"/>
+                          </a:rPr>
+                          <m:t>𝑥</m:t>
+                        </m:r>
+                      </m:sub>
+                      <m:sup/>
+                      <m:e>
+                        <m:r>
+                          <a:rPr lang="en-US" sz="1200" i="1">
+                            <a:latin typeface="Cambria Math" panose="02040503050406030204" pitchFamily="18" charset="0"/>
+                            <a:ea typeface="Cambria Math" panose="02040503050406030204" pitchFamily="18" charset="0"/>
+                          </a:rPr>
+                          <m:t>𝑝</m:t>
+                        </m:r>
+                        <m:d>
+                          <m:dPr>
+                            <m:ctrlPr>
+                              <a:rPr lang="en-US" sz="1200" i="1">
+                                <a:latin typeface="Cambria Math" panose="02040503050406030204" pitchFamily="18" charset="0"/>
+                                <a:ea typeface="Cambria Math" panose="02040503050406030204" pitchFamily="18" charset="0"/>
+                              </a:rPr>
+                            </m:ctrlPr>
+                          </m:dPr>
+                          <m:e>
+                            <m:r>
+                              <a:rPr lang="en-US" sz="1200" i="1">
+                                <a:latin typeface="Cambria Math" panose="02040503050406030204" pitchFamily="18" charset="0"/>
+                                <a:ea typeface="Cambria Math" panose="02040503050406030204" pitchFamily="18" charset="0"/>
+                              </a:rPr>
+                              <m:t>𝑥</m:t>
+                            </m:r>
+                          </m:e>
+                        </m:d>
+                        <m:r>
+                          <a:rPr lang="en-US" sz="1200" i="1">
+                            <a:latin typeface="Cambria Math" panose="02040503050406030204" pitchFamily="18" charset="0"/>
+                            <a:ea typeface="Cambria Math" panose="02040503050406030204" pitchFamily="18" charset="0"/>
+                          </a:rPr>
+                          <m:t>𝑥</m:t>
+                        </m:r>
+                      </m:e>
+                    </m:nary>
+                  </m:oMath>
+                </a14:m>
+                <a:endParaRPr lang="en-US" sz="1200" dirty="0">
+                  <a:ea typeface="Cambria Math" panose="02040503050406030204" pitchFamily="18" charset="0"/>
+                </a:endParaRPr>
+              </a:p>
+              <a:p>
+                <a14:m>
+                  <m:oMath xmlns:m="http://schemas.openxmlformats.org/officeDocument/2006/math">
+                    <m:sSub>
+                      <m:sSubPr>
+                        <m:ctrlPr>
+                          <a:rPr lang="en-US" sz="1200" i="1" dirty="0">
+                            <a:latin typeface="Cambria Math" panose="02040503050406030204" pitchFamily="18" charset="0"/>
+                          </a:rPr>
+                        </m:ctrlPr>
+                      </m:sSubPr>
+                      <m:e>
+                        <m:r>
+                          <m:rPr>
+                            <m:sty m:val="p"/>
+                          </m:rPr>
+                          <a:rPr lang="en-US" sz="1200" dirty="0">
+                            <a:latin typeface="Cambria Math" panose="02040503050406030204" pitchFamily="18" charset="0"/>
+                          </a:rPr>
+                          <m:t>argmax</m:t>
+                        </m:r>
+                      </m:e>
+                      <m:sub>
+                        <m:r>
+                          <m:rPr>
+                            <m:sty m:val="p"/>
+                          </m:rPr>
+                          <a:rPr lang="en-US" sz="1200" dirty="0">
+                            <a:latin typeface="Cambria Math" panose="02040503050406030204" pitchFamily="18" charset="0"/>
+                          </a:rPr>
+                          <m:t>a</m:t>
+                        </m:r>
+                      </m:sub>
+                    </m:sSub>
+                    <m:r>
+                      <a:rPr lang="en-US" sz="1200" dirty="0">
+                        <a:latin typeface="Cambria Math" panose="02040503050406030204" pitchFamily="18" charset="0"/>
+                      </a:rPr>
+                      <m:t> </m:t>
+                    </m:r>
+                    <m:r>
+                      <a:rPr lang="en-US" sz="1200" i="1" dirty="0">
+                        <a:latin typeface="Cambria Math" panose="02040503050406030204" pitchFamily="18" charset="0"/>
+                      </a:rPr>
+                      <m:t>𝑓</m:t>
+                    </m:r>
+                    <m:r>
+                      <a:rPr lang="en-US" sz="1200" i="1" dirty="0">
+                        <a:latin typeface="Cambria Math" panose="02040503050406030204" pitchFamily="18" charset="0"/>
+                      </a:rPr>
+                      <m:t>(</m:t>
+                    </m:r>
+                    <m:r>
+                      <a:rPr lang="en-US" sz="1200" i="1" dirty="0">
+                        <a:latin typeface="Cambria Math" panose="02040503050406030204" pitchFamily="18" charset="0"/>
+                      </a:rPr>
+                      <m:t>𝑎</m:t>
+                    </m:r>
+                    <m:r>
+                      <a:rPr lang="en-US" sz="1200" i="1" dirty="0">
+                        <a:latin typeface="Cambria Math" panose="02040503050406030204" pitchFamily="18" charset="0"/>
+                      </a:rPr>
+                      <m:t>)</m:t>
+                    </m:r>
+                  </m:oMath>
+                </a14:m>
+                <a:r>
+                  <a:rPr lang="en-US" sz="1200" dirty="0"/>
+                  <a:t> a value of action </a:t>
+                </a:r>
+                <a14:m>
+                  <m:oMath xmlns:m="http://schemas.openxmlformats.org/officeDocument/2006/math">
+                    <m:r>
+                      <a:rPr lang="en-US" sz="1200" i="1" dirty="0">
+                        <a:latin typeface="Cambria Math" panose="02040503050406030204" pitchFamily="18" charset="0"/>
+                      </a:rPr>
+                      <m:t>𝑎</m:t>
+                    </m:r>
+                  </m:oMath>
+                </a14:m>
+                <a:r>
+                  <a:rPr lang="en-US" sz="1200" dirty="0"/>
+                  <a:t> at which </a:t>
+                </a:r>
+                <a14:m>
+                  <m:oMath xmlns:m="http://schemas.openxmlformats.org/officeDocument/2006/math">
+                    <m:r>
+                      <a:rPr lang="en-US" sz="1200" i="1" dirty="0">
+                        <a:latin typeface="Cambria Math" panose="02040503050406030204" pitchFamily="18" charset="0"/>
+                      </a:rPr>
+                      <m:t>𝑓</m:t>
+                    </m:r>
+                    <m:r>
+                      <a:rPr lang="en-US" sz="1200" i="1" dirty="0">
+                        <a:latin typeface="Cambria Math" panose="02040503050406030204" pitchFamily="18" charset="0"/>
+                      </a:rPr>
+                      <m:t>(</m:t>
+                    </m:r>
+                    <m:r>
+                      <a:rPr lang="en-US" sz="1200" i="1" dirty="0">
+                        <a:latin typeface="Cambria Math" panose="02040503050406030204" pitchFamily="18" charset="0"/>
+                      </a:rPr>
+                      <m:t>𝑎</m:t>
+                    </m:r>
+                    <m:r>
+                      <a:rPr lang="en-US" sz="1200" i="1" dirty="0">
+                        <a:latin typeface="Cambria Math" panose="02040503050406030204" pitchFamily="18" charset="0"/>
+                      </a:rPr>
+                      <m:t>)</m:t>
+                    </m:r>
+                  </m:oMath>
+                </a14:m>
+                <a:r>
+                  <a:rPr lang="en-US" sz="1200" dirty="0"/>
+                  <a:t> takes its maximal value</a:t>
+                </a:r>
+              </a:p>
+            </p:txBody>
+          </p:sp>
+        </mc:Choice>
+        <mc:Fallback xmlns="">
+          <p:sp>
+            <p:nvSpPr>
+              <p:cNvPr id="10" name="TextBox 9">
+                <a:extLst>
+                  <a:ext uri="{FF2B5EF4-FFF2-40B4-BE49-F238E27FC236}">
+                    <a16:creationId xmlns:a16="http://schemas.microsoft.com/office/drawing/2014/main" id="{5CD475E5-BE3B-5594-57DC-46A17411F2F9}"/>
+                  </a:ext>
+                </a:extLst>
+              </p:cNvPr>
+              <p:cNvSpPr txBox="1">
+                <a:spLocks noRot="1" noChangeAspect="1" noMove="1" noResize="1" noEditPoints="1" noAdjustHandles="1" noChangeArrowheads="1" noChangeShapeType="1" noTextEdit="1"/>
+              </p:cNvSpPr>
+              <p:nvPr/>
+            </p:nvSpPr>
+            <p:spPr>
+              <a:xfrm>
+                <a:off x="822820" y="1124198"/>
+                <a:ext cx="5273179" cy="2308324"/>
+              </a:xfrm>
+              <a:prstGeom prst="rect">
+                <a:avLst/>
+              </a:prstGeom>
+              <a:blipFill>
+                <a:blip r:embed="rId3"/>
+                <a:stretch>
+                  <a:fillRect b="-9424"/>
+                </a:stretch>
+              </a:blipFill>
+            </p:spPr>
+            <p:txBody>
+              <a:bodyPr/>
+              <a:lstStyle/>
+              <a:p>
+                <a:r>
+                  <a:rPr lang="en-US">
+                    <a:noFill/>
+                  </a:rPr>
+                  <a:t> </a:t>
+                </a:r>
+              </a:p>
+            </p:txBody>
+          </p:sp>
+        </mc:Fallback>
+      </mc:AlternateContent>
+      <mc:AlternateContent xmlns:mc="http://schemas.openxmlformats.org/markup-compatibility/2006" xmlns:a14="http://schemas.microsoft.com/office/drawing/2010/main">
+        <mc:Choice Requires="a14">
+          <p:sp>
+            <p:nvSpPr>
+              <p:cNvPr id="11" name="Content Placeholder 2">
+                <a:extLst>
+                  <a:ext uri="{FF2B5EF4-FFF2-40B4-BE49-F238E27FC236}">
+                    <a16:creationId xmlns:a16="http://schemas.microsoft.com/office/drawing/2014/main" id="{6F45EA4F-65F9-5141-0B09-C395CF9CA7A0}"/>
+                  </a:ext>
+                </a:extLst>
+              </p:cNvPr>
+              <p:cNvSpPr txBox="1">
+                <a:spLocks/>
+              </p:cNvSpPr>
+              <p:nvPr/>
+            </p:nvSpPr>
+            <p:spPr>
+              <a:xfrm>
+                <a:off x="6267338" y="1124198"/>
+                <a:ext cx="5273179" cy="3693383"/>
+              </a:xfrm>
+              <a:prstGeom prst="rect">
+                <a:avLst/>
+              </a:prstGeom>
+            </p:spPr>
+            <p:style>
+              <a:lnRef idx="2">
+                <a:schemeClr val="accent2"/>
+              </a:lnRef>
+              <a:fillRef idx="1">
+                <a:schemeClr val="lt1"/>
+              </a:fillRef>
+              <a:effectRef idx="0">
+                <a:schemeClr val="accent2"/>
+              </a:effectRef>
+              <a:fontRef idx="minor">
+                <a:schemeClr val="dk1"/>
+              </a:fontRef>
+            </p:style>
+            <p:txBody>
+              <a:bodyPr vert="horz" wrap="square" lIns="91440" tIns="45720" rIns="91440" bIns="45720" rtlCol="0">
+                <a:spAutoFit/>
+              </a:bodyPr>
+              <a:lstStyle>
+                <a:lvl1pPr marL="228600" indent="-228600" algn="l" defTabSz="914400" rtl="0" eaLnBrk="1" latinLnBrk="0" hangingPunct="1">
+                  <a:lnSpc>
+                    <a:spcPct val="90000"/>
+                  </a:lnSpc>
+                  <a:spcBef>
+                    <a:spcPts val="1000"/>
+                  </a:spcBef>
+                  <a:buFont typeface="Arial" panose="020B0604020202020204" pitchFamily="34" charset="0"/>
+                  <a:buChar char="•"/>
+                  <a:defRPr sz="2800" kern="1200">
+                    <a:solidFill>
+                      <a:schemeClr val="tx1"/>
+                    </a:solidFill>
+                    <a:latin typeface="+mn-lt"/>
+                    <a:ea typeface="+mn-ea"/>
+                    <a:cs typeface="+mn-cs"/>
+                  </a:defRPr>
+                </a:lvl1pPr>
+                <a:lvl2pPr marL="685800" indent="-228600" algn="l" defTabSz="914400" rtl="0" eaLnBrk="1" latinLnBrk="0" hangingPunct="1">
+                  <a:lnSpc>
+                    <a:spcPct val="90000"/>
+                  </a:lnSpc>
+                  <a:spcBef>
+                    <a:spcPts val="500"/>
+                  </a:spcBef>
+                  <a:buFont typeface="Arial" panose="020B0604020202020204" pitchFamily="34" charset="0"/>
+                  <a:buChar char="•"/>
+                  <a:defRPr sz="2400" kern="1200">
+                    <a:solidFill>
+                      <a:schemeClr val="tx1"/>
+                    </a:solidFill>
+                    <a:latin typeface="+mn-lt"/>
+                    <a:ea typeface="+mn-ea"/>
+                    <a:cs typeface="+mn-cs"/>
+                  </a:defRPr>
+                </a:lvl2pPr>
+                <a:lvl3pPr marL="1143000" indent="-228600" algn="l" defTabSz="914400" rtl="0" eaLnBrk="1" latinLnBrk="0" hangingPunct="1">
+                  <a:lnSpc>
+                    <a:spcPct val="90000"/>
+                  </a:lnSpc>
+                  <a:spcBef>
+                    <a:spcPts val="500"/>
+                  </a:spcBef>
+                  <a:buFont typeface="Arial" panose="020B0604020202020204" pitchFamily="34" charset="0"/>
+                  <a:buChar char="•"/>
+                  <a:defRPr sz="2000" kern="1200">
+                    <a:solidFill>
+                      <a:schemeClr val="tx1"/>
+                    </a:solidFill>
+                    <a:latin typeface="+mn-lt"/>
+                    <a:ea typeface="+mn-ea"/>
+                    <a:cs typeface="+mn-cs"/>
+                  </a:defRPr>
+                </a:lvl3pPr>
+                <a:lvl4pPr marL="1600200" indent="-228600" algn="l" defTabSz="914400" rtl="0" eaLnBrk="1" latinLnBrk="0" hangingPunct="1">
+                  <a:lnSpc>
+                    <a:spcPct val="90000"/>
+                  </a:lnSpc>
+                  <a:spcBef>
+                    <a:spcPts val="500"/>
+                  </a:spcBef>
+                  <a:buFont typeface="Arial" panose="020B0604020202020204" pitchFamily="34" charset="0"/>
+                  <a:buChar char="•"/>
+                  <a:defRPr sz="1800" kern="1200">
+                    <a:solidFill>
+                      <a:schemeClr val="tx1"/>
+                    </a:solidFill>
+                    <a:latin typeface="+mn-lt"/>
+                    <a:ea typeface="+mn-ea"/>
+                    <a:cs typeface="+mn-cs"/>
+                  </a:defRPr>
+                </a:lvl4pPr>
+                <a:lvl5pPr marL="2057400" indent="-228600" algn="l" defTabSz="914400" rtl="0" eaLnBrk="1" latinLnBrk="0" hangingPunct="1">
+                  <a:lnSpc>
+                    <a:spcPct val="90000"/>
+                  </a:lnSpc>
+                  <a:spcBef>
+                    <a:spcPts val="500"/>
+                  </a:spcBef>
+                  <a:buFont typeface="Arial" panose="020B0604020202020204" pitchFamily="34" charset="0"/>
+                  <a:buChar char="•"/>
+                  <a:defRPr sz="1800" kern="1200">
+                    <a:solidFill>
+                      <a:schemeClr val="tx1"/>
+                    </a:solidFill>
+                    <a:latin typeface="+mn-lt"/>
+                    <a:ea typeface="+mn-ea"/>
+                    <a:cs typeface="+mn-cs"/>
+                  </a:defRPr>
+                </a:lvl5pPr>
+                <a:lvl6pPr marL="2514600" indent="-228600" algn="l" defTabSz="914400" rtl="0" eaLnBrk="1" latinLnBrk="0" hangingPunct="1">
+                  <a:lnSpc>
+                    <a:spcPct val="90000"/>
+                  </a:lnSpc>
+                  <a:spcBef>
+                    <a:spcPts val="500"/>
+                  </a:spcBef>
+                  <a:buFont typeface="Arial" panose="020B0604020202020204" pitchFamily="34" charset="0"/>
+                  <a:buChar char="•"/>
+                  <a:defRPr sz="1800" kern="1200">
+                    <a:solidFill>
+                      <a:schemeClr val="tx1"/>
+                    </a:solidFill>
+                    <a:latin typeface="+mn-lt"/>
+                    <a:ea typeface="+mn-ea"/>
+                    <a:cs typeface="+mn-cs"/>
+                  </a:defRPr>
+                </a:lvl6pPr>
+                <a:lvl7pPr marL="2971800" indent="-228600" algn="l" defTabSz="914400" rtl="0" eaLnBrk="1" latinLnBrk="0" hangingPunct="1">
+                  <a:lnSpc>
+                    <a:spcPct val="90000"/>
+                  </a:lnSpc>
+                  <a:spcBef>
+                    <a:spcPts val="500"/>
+                  </a:spcBef>
+                  <a:buFont typeface="Arial" panose="020B0604020202020204" pitchFamily="34" charset="0"/>
+                  <a:buChar char="•"/>
+                  <a:defRPr sz="1800" kern="1200">
+                    <a:solidFill>
+                      <a:schemeClr val="tx1"/>
+                    </a:solidFill>
+                    <a:latin typeface="+mn-lt"/>
+                    <a:ea typeface="+mn-ea"/>
+                    <a:cs typeface="+mn-cs"/>
+                  </a:defRPr>
+                </a:lvl7pPr>
+                <a:lvl8pPr marL="3429000" indent="-228600" algn="l" defTabSz="914400" rtl="0" eaLnBrk="1" latinLnBrk="0" hangingPunct="1">
+                  <a:lnSpc>
+                    <a:spcPct val="90000"/>
+                  </a:lnSpc>
+                  <a:spcBef>
+                    <a:spcPts val="500"/>
+                  </a:spcBef>
+                  <a:buFont typeface="Arial" panose="020B0604020202020204" pitchFamily="34" charset="0"/>
+                  <a:buChar char="•"/>
+                  <a:defRPr sz="1800" kern="1200">
+                    <a:solidFill>
+                      <a:schemeClr val="tx1"/>
+                    </a:solidFill>
+                    <a:latin typeface="+mn-lt"/>
+                    <a:ea typeface="+mn-ea"/>
+                    <a:cs typeface="+mn-cs"/>
+                  </a:defRPr>
+                </a:lvl8pPr>
+                <a:lvl9pPr marL="3886200" indent="-228600" algn="l" defTabSz="914400" rtl="0" eaLnBrk="1" latinLnBrk="0" hangingPunct="1">
+                  <a:lnSpc>
+                    <a:spcPct val="90000"/>
+                  </a:lnSpc>
+                  <a:spcBef>
+                    <a:spcPts val="500"/>
+                  </a:spcBef>
+                  <a:buFont typeface="Arial" panose="020B0604020202020204" pitchFamily="34" charset="0"/>
+                  <a:buChar char="•"/>
+                  <a:defRPr sz="1800" kern="1200">
+                    <a:solidFill>
+                      <a:schemeClr val="tx1"/>
+                    </a:solidFill>
+                    <a:latin typeface="+mn-lt"/>
+                    <a:ea typeface="+mn-ea"/>
+                    <a:cs typeface="+mn-cs"/>
+                  </a:defRPr>
+                </a:lvl9pPr>
+              </a:lstStyle>
+              <a:p>
+                <a:pPr marL="0" indent="0">
+                  <a:spcBef>
+                    <a:spcPts val="0"/>
+                  </a:spcBef>
+                  <a:buNone/>
+                </a:pPr>
+                <a:r>
+                  <a:rPr lang="en-US" sz="1200" b="1" dirty="0"/>
+                  <a:t>MDP</a:t>
+                </a:r>
+              </a:p>
+              <a:p>
+                <a:pPr marL="0" indent="0">
+                  <a:spcBef>
+                    <a:spcPts val="0"/>
+                  </a:spcBef>
+                  <a:buNone/>
+                </a:pPr>
+                <a14:m>
+                  <m:oMath xmlns:m="http://schemas.openxmlformats.org/officeDocument/2006/math">
+                    <m:r>
+                      <a:rPr lang="en-US" sz="1200" i="1" dirty="0" smtClean="0">
+                        <a:latin typeface="Cambria Math" panose="02040503050406030204" pitchFamily="18" charset="0"/>
+                      </a:rPr>
+                      <m:t>𝑠</m:t>
+                    </m:r>
+                    <m:r>
+                      <a:rPr lang="en-US" sz="1200" i="1" dirty="0" smtClean="0">
+                        <a:latin typeface="Cambria Math" panose="02040503050406030204" pitchFamily="18" charset="0"/>
+                      </a:rPr>
+                      <m:t>, </m:t>
+                    </m:r>
+                    <m:r>
+                      <a:rPr lang="en-US" sz="1200" i="1" dirty="0" smtClean="0">
+                        <a:latin typeface="Cambria Math" panose="02040503050406030204" pitchFamily="18" charset="0"/>
+                      </a:rPr>
+                      <m:t>𝑠</m:t>
+                    </m:r>
+                    <m:r>
+                      <a:rPr lang="en-US" sz="1200" b="0" i="1" dirty="0" smtClean="0">
+                        <a:latin typeface="Cambria Math" panose="02040503050406030204" pitchFamily="18" charset="0"/>
+                      </a:rPr>
+                      <m:t>′</m:t>
+                    </m:r>
+                  </m:oMath>
+                </a14:m>
+                <a:r>
+                  <a:rPr lang="en-US" sz="1200" dirty="0"/>
+                  <a:t> 	states</a:t>
+                </a:r>
+              </a:p>
+              <a:p>
+                <a:pPr marL="0" indent="0">
+                  <a:spcBef>
+                    <a:spcPts val="0"/>
+                  </a:spcBef>
+                  <a:buNone/>
+                </a:pPr>
+                <a14:m>
+                  <m:oMath xmlns:m="http://schemas.openxmlformats.org/officeDocument/2006/math">
+                    <m:r>
+                      <a:rPr lang="en-US" sz="1200" i="1" dirty="0" smtClean="0">
+                        <a:latin typeface="Cambria Math" panose="02040503050406030204" pitchFamily="18" charset="0"/>
+                      </a:rPr>
+                      <m:t>𝑎</m:t>
+                    </m:r>
+                  </m:oMath>
+                </a14:m>
+                <a:r>
+                  <a:rPr lang="en-US" sz="1200" dirty="0"/>
+                  <a:t> 	an action</a:t>
+                </a:r>
+              </a:p>
+              <a:p>
+                <a:pPr marL="0" indent="0">
+                  <a:spcBef>
+                    <a:spcPts val="0"/>
+                  </a:spcBef>
+                  <a:buNone/>
+                </a:pPr>
+                <a14:m>
+                  <m:oMath xmlns:m="http://schemas.openxmlformats.org/officeDocument/2006/math">
+                    <m:r>
+                      <a:rPr lang="en-US" sz="1200" i="1" dirty="0" smtClean="0">
+                        <a:latin typeface="Cambria Math" panose="02040503050406030204" pitchFamily="18" charset="0"/>
+                      </a:rPr>
+                      <m:t>𝑟</m:t>
+                    </m:r>
+                  </m:oMath>
+                </a14:m>
+                <a:r>
+                  <a:rPr lang="en-US" sz="1200" dirty="0"/>
+                  <a:t> 	a reward</a:t>
+                </a:r>
+              </a:p>
+              <a:p>
+                <a:pPr marL="0" indent="0">
+                  <a:spcBef>
+                    <a:spcPts val="0"/>
+                  </a:spcBef>
+                  <a:buNone/>
+                </a:pPr>
+                <a14:m>
+                  <m:oMath xmlns:m="http://schemas.openxmlformats.org/officeDocument/2006/math">
+                    <m:r>
+                      <a:rPr lang="en-US" sz="1200" i="1" dirty="0" smtClean="0">
+                        <a:latin typeface="Cambria Math" panose="02040503050406030204" pitchFamily="18" charset="0"/>
+                        <a:ea typeface="Cambria Math" panose="02040503050406030204" pitchFamily="18" charset="0"/>
+                      </a:rPr>
+                      <m:t>𝒮</m:t>
+                    </m:r>
+                  </m:oMath>
+                </a14:m>
+                <a:r>
+                  <a:rPr lang="en-US" sz="1200" dirty="0"/>
+                  <a:t> 	set of all (nonterminal) states, </a:t>
+                </a:r>
+                <a14:m>
+                  <m:oMath xmlns:m="http://schemas.openxmlformats.org/officeDocument/2006/math">
+                    <m:sSup>
+                      <m:sSupPr>
+                        <m:ctrlPr>
+                          <a:rPr lang="en-US" sz="1200" b="0" i="1" dirty="0" smtClean="0">
+                            <a:latin typeface="Cambria Math" panose="02040503050406030204" pitchFamily="18" charset="0"/>
+                            <a:ea typeface="Cambria Math" panose="02040503050406030204" pitchFamily="18" charset="0"/>
+                          </a:rPr>
+                        </m:ctrlPr>
+                      </m:sSupPr>
+                      <m:e>
+                        <m:r>
+                          <a:rPr lang="en-US" sz="1200" i="1" dirty="0">
+                            <a:latin typeface="Cambria Math" panose="02040503050406030204" pitchFamily="18" charset="0"/>
+                            <a:ea typeface="Cambria Math" panose="02040503050406030204" pitchFamily="18" charset="0"/>
+                          </a:rPr>
+                          <m:t>𝒮</m:t>
+                        </m:r>
+                      </m:e>
+                      <m:sup>
+                        <m:r>
+                          <a:rPr lang="en-US" sz="1200" b="0" i="1" dirty="0" smtClean="0">
+                            <a:latin typeface="Cambria Math" panose="02040503050406030204" pitchFamily="18" charset="0"/>
+                            <a:ea typeface="Cambria Math" panose="02040503050406030204" pitchFamily="18" charset="0"/>
+                          </a:rPr>
+                          <m:t>+</m:t>
+                        </m:r>
+                      </m:sup>
+                    </m:sSup>
+                  </m:oMath>
+                </a14:m>
+                <a:r>
+                  <a:rPr lang="en-US" sz="1200" dirty="0"/>
+                  <a:t> are all states </a:t>
+                </a:r>
+              </a:p>
+              <a:p>
+                <a:pPr marL="0" indent="0">
+                  <a:spcBef>
+                    <a:spcPts val="0"/>
+                  </a:spcBef>
+                  <a:buNone/>
+                </a:pPr>
+                <a14:m>
+                  <m:oMath xmlns:m="http://schemas.openxmlformats.org/officeDocument/2006/math">
+                    <m:r>
+                      <a:rPr lang="en-US" sz="1200" i="1" dirty="0" smtClean="0">
+                        <a:latin typeface="Cambria Math" panose="02040503050406030204" pitchFamily="18" charset="0"/>
+                        <a:ea typeface="Cambria Math" panose="02040503050406030204" pitchFamily="18" charset="0"/>
+                      </a:rPr>
+                      <m:t>𝒜</m:t>
+                    </m:r>
+                    <m:r>
+                      <a:rPr lang="en-US" sz="1200" i="1" dirty="0">
+                        <a:latin typeface="Cambria Math" panose="02040503050406030204" pitchFamily="18" charset="0"/>
+                      </a:rPr>
+                      <m:t>(</m:t>
+                    </m:r>
+                    <m:r>
+                      <a:rPr lang="en-US" sz="1200" i="1" dirty="0">
+                        <a:latin typeface="Cambria Math" panose="02040503050406030204" pitchFamily="18" charset="0"/>
+                      </a:rPr>
+                      <m:t>𝑠</m:t>
+                    </m:r>
+                    <m:r>
+                      <a:rPr lang="en-US" sz="1200" i="1" dirty="0">
+                        <a:latin typeface="Cambria Math" panose="02040503050406030204" pitchFamily="18" charset="0"/>
+                      </a:rPr>
+                      <m:t>)</m:t>
+                    </m:r>
+                  </m:oMath>
+                </a14:m>
+                <a:r>
+                  <a:rPr lang="en-US" sz="1200" dirty="0"/>
+                  <a:t>	set of all actions available in state </a:t>
+                </a:r>
+                <a14:m>
+                  <m:oMath xmlns:m="http://schemas.openxmlformats.org/officeDocument/2006/math">
+                    <m:r>
+                      <a:rPr lang="en-US" sz="1200" i="1" dirty="0" smtClean="0">
+                        <a:latin typeface="Cambria Math" panose="02040503050406030204" pitchFamily="18" charset="0"/>
+                      </a:rPr>
+                      <m:t>𝑠</m:t>
+                    </m:r>
+                  </m:oMath>
+                </a14:m>
+                <a:endParaRPr lang="en-US" sz="1200" dirty="0"/>
+              </a:p>
+              <a:p>
+                <a:pPr marL="0" indent="0">
+                  <a:spcBef>
+                    <a:spcPts val="0"/>
+                  </a:spcBef>
+                  <a:buNone/>
+                </a:pPr>
+                <a14:m>
+                  <m:oMath xmlns:m="http://schemas.openxmlformats.org/officeDocument/2006/math">
+                    <m:r>
+                      <a:rPr lang="en-US" sz="1200" i="1">
+                        <a:latin typeface="Cambria Math" panose="02040503050406030204" pitchFamily="18" charset="0"/>
+                      </a:rPr>
+                      <m:t>𝛾</m:t>
+                    </m:r>
+                  </m:oMath>
+                </a14:m>
+                <a:r>
+                  <a:rPr lang="en-US" sz="1200" dirty="0"/>
+                  <a:t> 	discount-rate parameter</a:t>
+                </a:r>
+                <a:endParaRPr lang="en-US" sz="1200" i="1" dirty="0">
+                  <a:latin typeface="Cambria Math" panose="02040503050406030204" pitchFamily="18" charset="0"/>
+                </a:endParaRPr>
+              </a:p>
+              <a:p>
+                <a:pPr marL="0" indent="0">
+                  <a:spcBef>
+                    <a:spcPts val="0"/>
+                  </a:spcBef>
+                  <a:buNone/>
+                </a:pPr>
+                <a14:m>
+                  <m:oMath xmlns:m="http://schemas.openxmlformats.org/officeDocument/2006/math">
+                    <m:r>
+                      <a:rPr lang="en-US" sz="1200" i="1" dirty="0" smtClean="0">
+                        <a:latin typeface="Cambria Math" panose="02040503050406030204" pitchFamily="18" charset="0"/>
+                      </a:rPr>
+                      <m:t>𝑡</m:t>
+                    </m:r>
+                  </m:oMath>
+                </a14:m>
+                <a:r>
+                  <a:rPr lang="en-US" sz="1200" dirty="0"/>
+                  <a:t> 	discrete time step</a:t>
+                </a:r>
+              </a:p>
+              <a:p>
+                <a:pPr marL="0" indent="0">
+                  <a:spcBef>
+                    <a:spcPts val="0"/>
+                  </a:spcBef>
+                  <a:buNone/>
+                </a:pPr>
+                <a14:m>
+                  <m:oMath xmlns:m="http://schemas.openxmlformats.org/officeDocument/2006/math">
+                    <m:r>
+                      <a:rPr lang="en-US" sz="1200" i="1" dirty="0" smtClean="0">
+                        <a:latin typeface="Cambria Math" panose="02040503050406030204" pitchFamily="18" charset="0"/>
+                      </a:rPr>
+                      <m:t>𝑇</m:t>
+                    </m:r>
+                  </m:oMath>
+                </a14:m>
+                <a:r>
+                  <a:rPr lang="en-US" sz="1200" dirty="0"/>
+                  <a:t> 	final time step of an episode (a.k.a. horizon)</a:t>
+                </a:r>
+              </a:p>
+              <a:p>
+                <a:pPr marL="0" indent="0">
+                  <a:spcBef>
+                    <a:spcPts val="0"/>
+                  </a:spcBef>
+                  <a:buNone/>
+                </a:pPr>
+                <a14:m>
+                  <m:oMath xmlns:m="http://schemas.openxmlformats.org/officeDocument/2006/math">
+                    <m:sSub>
+                      <m:sSubPr>
+                        <m:ctrlPr>
+                          <a:rPr lang="en-US" sz="1200" b="0" i="1" dirty="0" smtClean="0">
+                            <a:latin typeface="Cambria Math" panose="02040503050406030204" pitchFamily="18" charset="0"/>
+                          </a:rPr>
+                        </m:ctrlPr>
+                      </m:sSubPr>
+                      <m:e>
+                        <m:r>
+                          <a:rPr lang="en-US" sz="1200" i="1" dirty="0" smtClean="0">
+                            <a:latin typeface="Cambria Math" panose="02040503050406030204" pitchFamily="18" charset="0"/>
+                          </a:rPr>
+                          <m:t>𝐴</m:t>
+                        </m:r>
+                      </m:e>
+                      <m:sub>
+                        <m:r>
+                          <a:rPr lang="en-US" sz="1200" b="0" i="1" dirty="0" smtClean="0">
+                            <a:latin typeface="Cambria Math" panose="02040503050406030204" pitchFamily="18" charset="0"/>
+                          </a:rPr>
+                          <m:t>𝑡</m:t>
+                        </m:r>
+                      </m:sub>
+                    </m:sSub>
+                  </m:oMath>
+                </a14:m>
+                <a:r>
+                  <a:rPr lang="en-US" sz="1200" dirty="0"/>
+                  <a:t> 	random variable for the action at time </a:t>
+                </a:r>
+                <a14:m>
+                  <m:oMath xmlns:m="http://schemas.openxmlformats.org/officeDocument/2006/math">
+                    <m:r>
+                      <a:rPr lang="en-US" sz="1200" i="1" dirty="0" smtClean="0">
+                        <a:latin typeface="Cambria Math" panose="02040503050406030204" pitchFamily="18" charset="0"/>
+                      </a:rPr>
+                      <m:t>𝑡</m:t>
+                    </m:r>
+                  </m:oMath>
+                </a14:m>
+                <a:endParaRPr lang="en-US" sz="1200" dirty="0"/>
+              </a:p>
+              <a:p>
+                <a:pPr marL="0" indent="0">
+                  <a:spcBef>
+                    <a:spcPts val="0"/>
+                  </a:spcBef>
+                  <a:buNone/>
+                </a:pPr>
+                <a14:m>
+                  <m:oMath xmlns:m="http://schemas.openxmlformats.org/officeDocument/2006/math">
+                    <m:sSub>
+                      <m:sSubPr>
+                        <m:ctrlPr>
+                          <a:rPr lang="en-US" sz="1200" b="0" i="1" dirty="0" smtClean="0">
+                            <a:latin typeface="Cambria Math" panose="02040503050406030204" pitchFamily="18" charset="0"/>
+                          </a:rPr>
+                        </m:ctrlPr>
+                      </m:sSubPr>
+                      <m:e>
+                        <m:r>
+                          <a:rPr lang="en-US" sz="1200" i="1" dirty="0" smtClean="0">
+                            <a:latin typeface="Cambria Math" panose="02040503050406030204" pitchFamily="18" charset="0"/>
+                          </a:rPr>
+                          <m:t>𝑆</m:t>
+                        </m:r>
+                      </m:e>
+                      <m:sub>
+                        <m:r>
+                          <a:rPr lang="en-US" sz="1200" b="0" i="1" dirty="0" smtClean="0">
+                            <a:latin typeface="Cambria Math" panose="02040503050406030204" pitchFamily="18" charset="0"/>
+                          </a:rPr>
+                          <m:t>𝑡</m:t>
+                        </m:r>
+                      </m:sub>
+                    </m:sSub>
+                  </m:oMath>
+                </a14:m>
+                <a:r>
+                  <a:rPr lang="en-US" sz="1200" dirty="0"/>
+                  <a:t>	random variable for the state at time </a:t>
+                </a:r>
+                <a14:m>
+                  <m:oMath xmlns:m="http://schemas.openxmlformats.org/officeDocument/2006/math">
+                    <m:r>
+                      <a:rPr lang="en-US" sz="1200" i="1" dirty="0" smtClean="0">
+                        <a:latin typeface="Cambria Math" panose="02040503050406030204" pitchFamily="18" charset="0"/>
+                      </a:rPr>
+                      <m:t>𝑡</m:t>
+                    </m:r>
+                  </m:oMath>
+                </a14:m>
+                <a:endParaRPr lang="en-US" sz="1200" dirty="0"/>
+              </a:p>
+              <a:p>
+                <a:pPr marL="0" indent="0">
+                  <a:spcBef>
+                    <a:spcPts val="0"/>
+                  </a:spcBef>
+                  <a:buNone/>
+                </a:pPr>
+                <a14:m>
+                  <m:oMath xmlns:m="http://schemas.openxmlformats.org/officeDocument/2006/math">
+                    <m:sSub>
+                      <m:sSubPr>
+                        <m:ctrlPr>
+                          <a:rPr lang="en-US" sz="1200" b="0" i="1" dirty="0" smtClean="0">
+                            <a:latin typeface="Cambria Math" panose="02040503050406030204" pitchFamily="18" charset="0"/>
+                          </a:rPr>
+                        </m:ctrlPr>
+                      </m:sSubPr>
+                      <m:e>
+                        <m:r>
+                          <a:rPr lang="en-US" sz="1200" i="1" dirty="0" smtClean="0">
+                            <a:latin typeface="Cambria Math" panose="02040503050406030204" pitchFamily="18" charset="0"/>
+                          </a:rPr>
+                          <m:t>𝑅</m:t>
+                        </m:r>
+                      </m:e>
+                      <m:sub>
+                        <m:r>
+                          <a:rPr lang="en-US" sz="1200" b="0" i="1" dirty="0" smtClean="0">
+                            <a:latin typeface="Cambria Math" panose="02040503050406030204" pitchFamily="18" charset="0"/>
+                          </a:rPr>
+                          <m:t>𝑡</m:t>
+                        </m:r>
+                      </m:sub>
+                    </m:sSub>
+                  </m:oMath>
+                </a14:m>
+                <a:r>
+                  <a:rPr lang="en-US" sz="1200" dirty="0"/>
+                  <a:t> 	random variable for the reward at time </a:t>
+                </a:r>
+                <a14:m>
+                  <m:oMath xmlns:m="http://schemas.openxmlformats.org/officeDocument/2006/math">
+                    <m:r>
+                      <a:rPr lang="en-US" sz="1200" i="1" dirty="0" smtClean="0">
+                        <a:latin typeface="Cambria Math" panose="02040503050406030204" pitchFamily="18" charset="0"/>
+                      </a:rPr>
+                      <m:t>𝑡</m:t>
+                    </m:r>
+                  </m:oMath>
+                </a14:m>
+                <a:endParaRPr lang="en-US" sz="1200" dirty="0"/>
+              </a:p>
+              <a:p>
+                <a:pPr marL="0" indent="0">
+                  <a:lnSpc>
+                    <a:spcPct val="100000"/>
+                  </a:lnSpc>
+                  <a:spcBef>
+                    <a:spcPts val="0"/>
+                  </a:spcBef>
+                  <a:buNone/>
+                </a:pPr>
+                <a:endParaRPr lang="en-US" sz="1200" i="1" dirty="0">
+                  <a:latin typeface="Cambria Math" panose="02040503050406030204" pitchFamily="18" charset="0"/>
+                </a:endParaRPr>
+              </a:p>
+              <a:p>
+                <a:pPr marL="0" indent="0">
+                  <a:lnSpc>
+                    <a:spcPct val="100000"/>
+                  </a:lnSpc>
+                  <a:spcBef>
+                    <a:spcPts val="0"/>
+                  </a:spcBef>
+                  <a:buNone/>
+                </a:pPr>
+                <a14:m>
+                  <m:oMath xmlns:m="http://schemas.openxmlformats.org/officeDocument/2006/math">
+                    <m:r>
+                      <a:rPr lang="en-US" sz="1200" i="1" dirty="0">
+                        <a:latin typeface="Cambria Math" panose="02040503050406030204" pitchFamily="18" charset="0"/>
+                      </a:rPr>
+                      <m:t>𝑝</m:t>
+                    </m:r>
+                    <m:d>
+                      <m:dPr>
+                        <m:endChr m:val="|"/>
+                        <m:ctrlPr>
+                          <a:rPr lang="en-US" sz="1200" i="1" dirty="0">
+                            <a:latin typeface="Cambria Math" panose="02040503050406030204" pitchFamily="18" charset="0"/>
+                          </a:rPr>
+                        </m:ctrlPr>
+                      </m:dPr>
+                      <m:e>
+                        <m:sSup>
+                          <m:sSupPr>
+                            <m:ctrlPr>
+                              <a:rPr lang="en-US" sz="1200" i="1" dirty="0">
+                                <a:latin typeface="Cambria Math" panose="02040503050406030204" pitchFamily="18" charset="0"/>
+                              </a:rPr>
+                            </m:ctrlPr>
+                          </m:sSupPr>
+                          <m:e>
+                            <m:r>
+                              <a:rPr lang="en-US" sz="1200" i="1" dirty="0">
+                                <a:latin typeface="Cambria Math" panose="02040503050406030204" pitchFamily="18" charset="0"/>
+                              </a:rPr>
+                              <m:t>𝑠</m:t>
+                            </m:r>
+                          </m:e>
+                          <m:sup>
+                            <m:r>
+                              <a:rPr lang="en-US" sz="1200" i="1" dirty="0">
+                                <a:latin typeface="Cambria Math" panose="02040503050406030204" pitchFamily="18" charset="0"/>
+                              </a:rPr>
+                              <m:t>′</m:t>
+                            </m:r>
+                          </m:sup>
+                        </m:sSup>
+                        <m:r>
+                          <a:rPr lang="en-US" sz="1200" b="0" i="1" dirty="0" smtClean="0">
+                            <a:latin typeface="Cambria Math" panose="02040503050406030204" pitchFamily="18" charset="0"/>
+                          </a:rPr>
+                          <m:t>,</m:t>
+                        </m:r>
+                        <m:r>
+                          <a:rPr lang="en-US" sz="1200" b="0" i="1" dirty="0" smtClean="0">
+                            <a:latin typeface="Cambria Math" panose="02040503050406030204" pitchFamily="18" charset="0"/>
+                          </a:rPr>
+                          <m:t>𝑟</m:t>
+                        </m:r>
+                        <m:r>
+                          <a:rPr lang="en-US" sz="1200" i="1" dirty="0">
+                            <a:latin typeface="Cambria Math" panose="02040503050406030204" pitchFamily="18" charset="0"/>
+                          </a:rPr>
+                          <m:t> </m:t>
+                        </m:r>
+                      </m:e>
+                    </m:d>
+                    <m:r>
+                      <a:rPr lang="en-US" sz="1200" i="1" dirty="0">
+                        <a:latin typeface="Cambria Math" panose="02040503050406030204" pitchFamily="18" charset="0"/>
+                      </a:rPr>
+                      <m:t>𝑠</m:t>
+                    </m:r>
+                    <m:r>
+                      <a:rPr lang="en-US" sz="1200" i="1" dirty="0">
+                        <a:latin typeface="Cambria Math" panose="02040503050406030204" pitchFamily="18" charset="0"/>
+                      </a:rPr>
+                      <m:t>, </m:t>
+                    </m:r>
+                    <m:r>
+                      <a:rPr lang="en-US" sz="1200" i="1" dirty="0">
+                        <a:latin typeface="Cambria Math" panose="02040503050406030204" pitchFamily="18" charset="0"/>
+                      </a:rPr>
+                      <m:t>𝑎</m:t>
+                    </m:r>
+                    <m:r>
+                      <a:rPr lang="en-US" sz="1200" i="1" dirty="0">
+                        <a:latin typeface="Cambria Math" panose="02040503050406030204" pitchFamily="18" charset="0"/>
+                      </a:rPr>
+                      <m:t>)</m:t>
+                    </m:r>
+                  </m:oMath>
+                </a14:m>
+                <a:r>
+                  <a:rPr lang="en-US" sz="1200" dirty="0"/>
+                  <a:t>	probability of transition to state </a:t>
+                </a:r>
+                <a14:m>
+                  <m:oMath xmlns:m="http://schemas.openxmlformats.org/officeDocument/2006/math">
+                    <m:r>
+                      <a:rPr lang="en-US" sz="1200" i="1" dirty="0">
+                        <a:latin typeface="Cambria Math" panose="02040503050406030204" pitchFamily="18" charset="0"/>
+                      </a:rPr>
+                      <m:t>𝑠</m:t>
+                    </m:r>
+                    <m:r>
+                      <a:rPr lang="en-US" sz="1200" i="1" dirty="0">
+                        <a:latin typeface="Cambria Math" panose="02040503050406030204" pitchFamily="18" charset="0"/>
+                      </a:rPr>
+                      <m:t>′</m:t>
+                    </m:r>
+                  </m:oMath>
+                </a14:m>
+                <a:r>
+                  <a:rPr lang="en-US" sz="1200" dirty="0"/>
+                  <a:t> and receiving reward </a:t>
+                </a:r>
+                <a14:m>
+                  <m:oMath xmlns:m="http://schemas.openxmlformats.org/officeDocument/2006/math">
+                    <m:r>
+                      <a:rPr lang="en-US" sz="1200" b="0" i="1" smtClean="0">
+                        <a:latin typeface="Cambria Math" panose="02040503050406030204" pitchFamily="18" charset="0"/>
+                      </a:rPr>
+                      <m:t>𝑟</m:t>
+                    </m:r>
+                  </m:oMath>
+                </a14:m>
+                <a:r>
+                  <a:rPr lang="en-US" sz="1200" dirty="0"/>
+                  <a:t>, </a:t>
+                </a:r>
+                <a:br>
+                  <a:rPr lang="en-US" sz="1200" dirty="0"/>
+                </a:br>
+                <a:r>
+                  <a:rPr lang="en-US" sz="1200" dirty="0"/>
+                  <a:t>	from state </a:t>
+                </a:r>
+                <a14:m>
+                  <m:oMath xmlns:m="http://schemas.openxmlformats.org/officeDocument/2006/math">
+                    <m:r>
+                      <a:rPr lang="en-US" sz="1200" i="1" dirty="0">
+                        <a:latin typeface="Cambria Math" panose="02040503050406030204" pitchFamily="18" charset="0"/>
+                      </a:rPr>
+                      <m:t>𝑠</m:t>
+                    </m:r>
+                  </m:oMath>
+                </a14:m>
+                <a:r>
+                  <a:rPr lang="en-US" sz="1200" dirty="0"/>
+                  <a:t> taking action </a:t>
+                </a:r>
+                <a14:m>
+                  <m:oMath xmlns:m="http://schemas.openxmlformats.org/officeDocument/2006/math">
+                    <m:r>
+                      <a:rPr lang="en-US" sz="1200" i="1" dirty="0">
+                        <a:latin typeface="Cambria Math" panose="02040503050406030204" pitchFamily="18" charset="0"/>
+                      </a:rPr>
+                      <m:t>𝑎</m:t>
+                    </m:r>
+                  </m:oMath>
+                </a14:m>
+                <a:r>
+                  <a:rPr lang="en-US" sz="1200" dirty="0"/>
+                  <a:t>.</a:t>
+                </a:r>
+              </a:p>
+              <a:p>
+                <a:pPr marL="0" indent="0">
+                  <a:lnSpc>
+                    <a:spcPct val="100000"/>
+                  </a:lnSpc>
+                  <a:spcBef>
+                    <a:spcPts val="0"/>
+                  </a:spcBef>
+                  <a:buNone/>
+                </a:pPr>
+                <a14:m>
+                  <m:oMath xmlns:m="http://schemas.openxmlformats.org/officeDocument/2006/math">
+                    <m:r>
+                      <a:rPr lang="en-US" sz="1200" i="1" dirty="0">
+                        <a:latin typeface="Cambria Math" panose="02040503050406030204" pitchFamily="18" charset="0"/>
+                      </a:rPr>
+                      <m:t>𝑝</m:t>
+                    </m:r>
+                    <m:d>
+                      <m:dPr>
+                        <m:endChr m:val="|"/>
+                        <m:ctrlPr>
+                          <a:rPr lang="en-US" sz="1200" i="1" dirty="0">
+                            <a:latin typeface="Cambria Math" panose="02040503050406030204" pitchFamily="18" charset="0"/>
+                          </a:rPr>
+                        </m:ctrlPr>
+                      </m:dPr>
+                      <m:e>
+                        <m:sSup>
+                          <m:sSupPr>
+                            <m:ctrlPr>
+                              <a:rPr lang="en-US" sz="1200" i="1" dirty="0">
+                                <a:latin typeface="Cambria Math" panose="02040503050406030204" pitchFamily="18" charset="0"/>
+                              </a:rPr>
+                            </m:ctrlPr>
+                          </m:sSupPr>
+                          <m:e>
+                            <m:r>
+                              <a:rPr lang="en-US" sz="1200" i="1" dirty="0">
+                                <a:latin typeface="Cambria Math" panose="02040503050406030204" pitchFamily="18" charset="0"/>
+                              </a:rPr>
+                              <m:t>𝑠</m:t>
+                            </m:r>
+                          </m:e>
+                          <m:sup>
+                            <m:r>
+                              <a:rPr lang="en-US" sz="1200" i="1" dirty="0">
+                                <a:latin typeface="Cambria Math" panose="02040503050406030204" pitchFamily="18" charset="0"/>
+                              </a:rPr>
+                              <m:t>′</m:t>
+                            </m:r>
+                          </m:sup>
+                        </m:sSup>
+                      </m:e>
+                    </m:d>
+                    <m:r>
+                      <a:rPr lang="en-US" sz="1200" i="1" dirty="0">
+                        <a:latin typeface="Cambria Math" panose="02040503050406030204" pitchFamily="18" charset="0"/>
+                      </a:rPr>
+                      <m:t>𝑠</m:t>
+                    </m:r>
+                    <m:r>
+                      <a:rPr lang="en-US" sz="1200" i="1" dirty="0">
+                        <a:latin typeface="Cambria Math" panose="02040503050406030204" pitchFamily="18" charset="0"/>
+                      </a:rPr>
+                      <m:t>, </m:t>
+                    </m:r>
+                    <m:r>
+                      <a:rPr lang="en-US" sz="1200" i="1" dirty="0">
+                        <a:latin typeface="Cambria Math" panose="02040503050406030204" pitchFamily="18" charset="0"/>
+                      </a:rPr>
+                      <m:t>𝑎</m:t>
+                    </m:r>
+                    <m:r>
+                      <a:rPr lang="en-US" sz="1200" i="1" dirty="0">
+                        <a:latin typeface="Cambria Math" panose="02040503050406030204" pitchFamily="18" charset="0"/>
+                      </a:rPr>
+                      <m:t>)</m:t>
+                    </m:r>
+                  </m:oMath>
+                </a14:m>
+                <a:r>
+                  <a:rPr lang="en-US" sz="1200" dirty="0"/>
+                  <a:t> 	probability of transition to state </a:t>
+                </a:r>
+                <a14:m>
+                  <m:oMath xmlns:m="http://schemas.openxmlformats.org/officeDocument/2006/math">
+                    <m:r>
+                      <a:rPr lang="en-US" sz="1200" i="1" dirty="0">
+                        <a:latin typeface="Cambria Math" panose="02040503050406030204" pitchFamily="18" charset="0"/>
+                      </a:rPr>
+                      <m:t>𝑠</m:t>
+                    </m:r>
+                    <m:r>
+                      <a:rPr lang="en-US" sz="1200" i="1" dirty="0">
+                        <a:latin typeface="Cambria Math" panose="02040503050406030204" pitchFamily="18" charset="0"/>
+                      </a:rPr>
+                      <m:t>′</m:t>
+                    </m:r>
+                  </m:oMath>
+                </a14:m>
+                <a:r>
+                  <a:rPr lang="en-US" sz="1200" dirty="0"/>
+                  <a:t> fom state </a:t>
+                </a:r>
+                <a14:m>
+                  <m:oMath xmlns:m="http://schemas.openxmlformats.org/officeDocument/2006/math">
+                    <m:r>
+                      <a:rPr lang="en-US" sz="1200" i="1" dirty="0">
+                        <a:latin typeface="Cambria Math" panose="02040503050406030204" pitchFamily="18" charset="0"/>
+                      </a:rPr>
+                      <m:t>𝑠</m:t>
+                    </m:r>
+                  </m:oMath>
+                </a14:m>
+                <a:r>
+                  <a:rPr lang="en-US" sz="1200" dirty="0"/>
+                  <a:t> taking action </a:t>
+                </a:r>
+                <a14:m>
+                  <m:oMath xmlns:m="http://schemas.openxmlformats.org/officeDocument/2006/math">
+                    <m:r>
+                      <a:rPr lang="en-US" sz="1200" i="1" dirty="0">
+                        <a:latin typeface="Cambria Math" panose="02040503050406030204" pitchFamily="18" charset="0"/>
+                      </a:rPr>
+                      <m:t>𝑎</m:t>
+                    </m:r>
+                  </m:oMath>
+                </a14:m>
+                <a:r>
+                  <a:rPr lang="en-US" sz="1200" dirty="0"/>
+                  <a:t>.</a:t>
+                </a:r>
+              </a:p>
+              <a:p>
+                <a:pPr marL="0" indent="0">
+                  <a:lnSpc>
+                    <a:spcPct val="100000"/>
+                  </a:lnSpc>
+                  <a:spcBef>
+                    <a:spcPts val="0"/>
+                  </a:spcBef>
+                  <a:buNone/>
+                </a:pPr>
+                <a14:m>
+                  <m:oMath xmlns:m="http://schemas.openxmlformats.org/officeDocument/2006/math">
+                    <m:r>
+                      <a:rPr lang="en-US" sz="1200" b="0" i="1" smtClean="0">
+                        <a:latin typeface="Cambria Math" panose="02040503050406030204" pitchFamily="18" charset="0"/>
+                      </a:rPr>
+                      <m:t>𝑟</m:t>
+                    </m:r>
+                    <m:r>
+                      <a:rPr lang="en-US" sz="1200" b="0" i="1" smtClean="0">
+                        <a:latin typeface="Cambria Math" panose="02040503050406030204" pitchFamily="18" charset="0"/>
+                      </a:rPr>
+                      <m:t>(</m:t>
+                    </m:r>
+                    <m:r>
+                      <a:rPr lang="en-US" sz="1200" b="0" i="1" smtClean="0">
+                        <a:latin typeface="Cambria Math" panose="02040503050406030204" pitchFamily="18" charset="0"/>
+                      </a:rPr>
+                      <m:t>𝑠</m:t>
+                    </m:r>
+                    <m:r>
+                      <a:rPr lang="en-US" sz="1200" b="0" i="1" smtClean="0">
+                        <a:latin typeface="Cambria Math" panose="02040503050406030204" pitchFamily="18" charset="0"/>
+                      </a:rPr>
+                      <m:t>,</m:t>
+                    </m:r>
+                    <m:r>
+                      <a:rPr lang="en-US" sz="1200" b="0" i="1" smtClean="0">
+                        <a:latin typeface="Cambria Math" panose="02040503050406030204" pitchFamily="18" charset="0"/>
+                      </a:rPr>
+                      <m:t>𝑎</m:t>
+                    </m:r>
+                    <m:r>
+                      <a:rPr lang="en-US" sz="1200" b="0" i="1" smtClean="0">
+                        <a:latin typeface="Cambria Math" panose="02040503050406030204" pitchFamily="18" charset="0"/>
+                      </a:rPr>
+                      <m:t>)</m:t>
+                    </m:r>
+                  </m:oMath>
+                </a14:m>
+                <a:r>
+                  <a:rPr lang="en-US" sz="1200" dirty="0"/>
+                  <a:t>	expected immediate reward from state </a:t>
+                </a:r>
+                <a14:m>
+                  <m:oMath xmlns:m="http://schemas.openxmlformats.org/officeDocument/2006/math">
+                    <m:r>
+                      <a:rPr lang="en-US" sz="1200" i="1" dirty="0">
+                        <a:latin typeface="Cambria Math" panose="02040503050406030204" pitchFamily="18" charset="0"/>
+                      </a:rPr>
+                      <m:t>𝑠</m:t>
+                    </m:r>
+                  </m:oMath>
+                </a14:m>
+                <a:r>
+                  <a:rPr lang="en-US" sz="1200" dirty="0"/>
+                  <a:t> after action </a:t>
+                </a:r>
+                <a14:m>
+                  <m:oMath xmlns:m="http://schemas.openxmlformats.org/officeDocument/2006/math">
+                    <m:r>
+                      <a:rPr lang="en-US" sz="1200" i="1" dirty="0">
+                        <a:latin typeface="Cambria Math" panose="02040503050406030204" pitchFamily="18" charset="0"/>
+                      </a:rPr>
+                      <m:t>𝑎</m:t>
+                    </m:r>
+                    <m:r>
+                      <a:rPr lang="en-US" sz="1200" b="0" i="1" dirty="0" smtClean="0">
+                        <a:latin typeface="Cambria Math" panose="02040503050406030204" pitchFamily="18" charset="0"/>
+                      </a:rPr>
+                      <m:t>.</m:t>
+                    </m:r>
+                  </m:oMath>
+                </a14:m>
+                <a:endParaRPr lang="en-US" sz="1200" b="0" dirty="0"/>
+              </a:p>
+              <a:p>
+                <a:pPr marL="0" indent="0">
+                  <a:lnSpc>
+                    <a:spcPct val="100000"/>
+                  </a:lnSpc>
+                  <a:spcBef>
+                    <a:spcPts val="0"/>
+                  </a:spcBef>
+                  <a:buNone/>
+                </a:pPr>
+                <a14:m>
+                  <m:oMath xmlns:m="http://schemas.openxmlformats.org/officeDocument/2006/math">
+                    <m:r>
+                      <a:rPr lang="en-US" sz="1200" i="1">
+                        <a:latin typeface="Cambria Math" panose="02040503050406030204" pitchFamily="18" charset="0"/>
+                      </a:rPr>
+                      <m:t>𝑟</m:t>
+                    </m:r>
+                    <m:r>
+                      <a:rPr lang="en-US" sz="1200" i="1">
+                        <a:latin typeface="Cambria Math" panose="02040503050406030204" pitchFamily="18" charset="0"/>
+                      </a:rPr>
+                      <m:t>(</m:t>
+                    </m:r>
+                    <m:r>
+                      <a:rPr lang="en-US" sz="1200" i="1">
+                        <a:latin typeface="Cambria Math" panose="02040503050406030204" pitchFamily="18" charset="0"/>
+                      </a:rPr>
+                      <m:t>𝑠</m:t>
+                    </m:r>
+                    <m:r>
+                      <a:rPr lang="en-US" sz="1200" i="1">
+                        <a:latin typeface="Cambria Math" panose="02040503050406030204" pitchFamily="18" charset="0"/>
+                      </a:rPr>
+                      <m:t>,</m:t>
+                    </m:r>
+                    <m:r>
+                      <a:rPr lang="en-US" sz="1200" i="1">
+                        <a:latin typeface="Cambria Math" panose="02040503050406030204" pitchFamily="18" charset="0"/>
+                      </a:rPr>
+                      <m:t>𝑎</m:t>
+                    </m:r>
+                    <m:r>
+                      <a:rPr lang="en-US" sz="1200" b="0" i="1" smtClean="0">
+                        <a:latin typeface="Cambria Math" panose="02040503050406030204" pitchFamily="18" charset="0"/>
+                      </a:rPr>
+                      <m:t>,</m:t>
+                    </m:r>
+                    <m:r>
+                      <a:rPr lang="en-US" sz="1200" b="0" i="1" smtClean="0">
+                        <a:latin typeface="Cambria Math" panose="02040503050406030204" pitchFamily="18" charset="0"/>
+                      </a:rPr>
+                      <m:t>𝑠</m:t>
+                    </m:r>
+                    <m:r>
+                      <a:rPr lang="en-US" sz="1200" b="0" i="1" smtClean="0">
+                        <a:latin typeface="Cambria Math" panose="02040503050406030204" pitchFamily="18" charset="0"/>
+                      </a:rPr>
+                      <m:t>′)</m:t>
+                    </m:r>
+                  </m:oMath>
+                </a14:m>
+                <a:r>
+                  <a:rPr lang="en-US" sz="1200" dirty="0"/>
+                  <a:t>	expected immediate reward from state </a:t>
+                </a:r>
+                <a14:m>
+                  <m:oMath xmlns:m="http://schemas.openxmlformats.org/officeDocument/2006/math">
+                    <m:r>
+                      <a:rPr lang="en-US" sz="1200" i="1" dirty="0">
+                        <a:latin typeface="Cambria Math" panose="02040503050406030204" pitchFamily="18" charset="0"/>
+                      </a:rPr>
+                      <m:t>𝑠</m:t>
+                    </m:r>
+                  </m:oMath>
+                </a14:m>
+                <a:r>
+                  <a:rPr lang="en-US" sz="1200" dirty="0"/>
+                  <a:t> to </a:t>
+                </a:r>
+                <a14:m>
+                  <m:oMath xmlns:m="http://schemas.openxmlformats.org/officeDocument/2006/math">
+                    <m:sSup>
+                      <m:sSupPr>
+                        <m:ctrlPr>
+                          <a:rPr lang="en-US" sz="1200" b="0" i="1" smtClean="0">
+                            <a:latin typeface="Cambria Math" panose="02040503050406030204" pitchFamily="18" charset="0"/>
+                          </a:rPr>
+                        </m:ctrlPr>
+                      </m:sSupPr>
+                      <m:e>
+                        <m:r>
+                          <a:rPr lang="en-US" sz="1200" b="0" i="1" smtClean="0">
+                            <a:latin typeface="Cambria Math" panose="02040503050406030204" pitchFamily="18" charset="0"/>
+                          </a:rPr>
+                          <m:t>𝑠</m:t>
+                        </m:r>
+                      </m:e>
+                      <m:sup>
+                        <m:r>
+                          <a:rPr lang="en-US" sz="1200" b="0" i="1" smtClean="0">
+                            <a:latin typeface="Cambria Math" panose="02040503050406030204" pitchFamily="18" charset="0"/>
+                          </a:rPr>
+                          <m:t>′</m:t>
+                        </m:r>
+                      </m:sup>
+                    </m:sSup>
+                  </m:oMath>
+                </a14:m>
+                <a:r>
+                  <a:rPr lang="en-US" sz="1200" dirty="0"/>
+                  <a:t> with action </a:t>
+                </a:r>
+                <a14:m>
+                  <m:oMath xmlns:m="http://schemas.openxmlformats.org/officeDocument/2006/math">
+                    <m:r>
+                      <a:rPr lang="en-US" sz="1200" i="1" dirty="0">
+                        <a:latin typeface="Cambria Math" panose="02040503050406030204" pitchFamily="18" charset="0"/>
+                      </a:rPr>
+                      <m:t>𝑎</m:t>
+                    </m:r>
+                    <m:r>
+                      <a:rPr lang="en-US" sz="1200" b="0" i="1" dirty="0" smtClean="0">
+                        <a:latin typeface="Cambria Math" panose="02040503050406030204" pitchFamily="18" charset="0"/>
+                      </a:rPr>
+                      <m:t>.</m:t>
+                    </m:r>
+                  </m:oMath>
+                </a14:m>
+                <a:endParaRPr lang="en-US" sz="1200" i="1" dirty="0">
+                  <a:latin typeface="Cambria Math" panose="02040503050406030204" pitchFamily="18" charset="0"/>
+                </a:endParaRPr>
+              </a:p>
+              <a:p>
+                <a:pPr marL="0" indent="0">
+                  <a:spcBef>
+                    <a:spcPts val="0"/>
+                  </a:spcBef>
+                  <a:buNone/>
+                </a:pPr>
+                <a:endParaRPr lang="en-US" sz="1200" i="1" dirty="0">
+                  <a:latin typeface="Cambria Math" panose="02040503050406030204" pitchFamily="18" charset="0"/>
+                </a:endParaRPr>
+              </a:p>
+              <a:p>
+                <a:pPr marL="0" indent="0">
+                  <a:spcBef>
+                    <a:spcPts val="0"/>
+                  </a:spcBef>
+                  <a:buNone/>
+                </a:pPr>
+                <a14:m>
+                  <m:oMath xmlns:m="http://schemas.openxmlformats.org/officeDocument/2006/math">
+                    <m:r>
+                      <a:rPr lang="en-US" sz="1200" i="1" dirty="0">
+                        <a:latin typeface="Cambria Math" panose="02040503050406030204" pitchFamily="18" charset="0"/>
+                      </a:rPr>
+                      <m:t>𝜋</m:t>
+                    </m:r>
+                    <m:r>
+                      <a:rPr lang="en-US" sz="1200" i="1" dirty="0">
+                        <a:latin typeface="Cambria Math" panose="02040503050406030204" pitchFamily="18" charset="0"/>
+                      </a:rPr>
+                      <m:t>(</m:t>
+                    </m:r>
+                    <m:r>
+                      <a:rPr lang="en-US" sz="1200" i="1" dirty="0" err="1">
+                        <a:latin typeface="Cambria Math" panose="02040503050406030204" pitchFamily="18" charset="0"/>
+                      </a:rPr>
+                      <m:t>𝑎</m:t>
+                    </m:r>
+                    <m:r>
+                      <a:rPr lang="en-US" sz="1200" i="1" dirty="0" err="1">
+                        <a:latin typeface="Cambria Math" panose="02040503050406030204" pitchFamily="18" charset="0"/>
+                      </a:rPr>
+                      <m:t>|</m:t>
+                    </m:r>
+                    <m:r>
+                      <a:rPr lang="en-US" sz="1200" i="1" dirty="0" err="1">
+                        <a:latin typeface="Cambria Math" panose="02040503050406030204" pitchFamily="18" charset="0"/>
+                      </a:rPr>
+                      <m:t>𝑠</m:t>
+                    </m:r>
+                    <m:r>
+                      <a:rPr lang="en-US" sz="1200" i="1" dirty="0">
+                        <a:latin typeface="Cambria Math" panose="02040503050406030204" pitchFamily="18" charset="0"/>
+                      </a:rPr>
+                      <m:t>)</m:t>
+                    </m:r>
+                  </m:oMath>
+                </a14:m>
+                <a:r>
+                  <a:rPr lang="en-US" sz="1200" dirty="0"/>
+                  <a:t>	probability of taking action </a:t>
+                </a:r>
+                <a14:m>
+                  <m:oMath xmlns:m="http://schemas.openxmlformats.org/officeDocument/2006/math">
+                    <m:r>
+                      <a:rPr lang="en-US" sz="1200" i="1" dirty="0">
+                        <a:latin typeface="Cambria Math" panose="02040503050406030204" pitchFamily="18" charset="0"/>
+                      </a:rPr>
+                      <m:t>𝑎</m:t>
+                    </m:r>
+                  </m:oMath>
+                </a14:m>
+                <a:r>
+                  <a:rPr lang="en-US" sz="1200" dirty="0"/>
+                  <a:t> in state </a:t>
+                </a:r>
+                <a14:m>
+                  <m:oMath xmlns:m="http://schemas.openxmlformats.org/officeDocument/2006/math">
+                    <m:r>
+                      <a:rPr lang="en-US" sz="1200" i="1" dirty="0">
+                        <a:latin typeface="Cambria Math" panose="02040503050406030204" pitchFamily="18" charset="0"/>
+                      </a:rPr>
+                      <m:t>𝑠</m:t>
+                    </m:r>
+                  </m:oMath>
+                </a14:m>
+                <a:r>
+                  <a:rPr lang="en-US" sz="1200" dirty="0"/>
+                  <a:t> under stochastic policy </a:t>
+                </a:r>
+                <a14:m>
+                  <m:oMath xmlns:m="http://schemas.openxmlformats.org/officeDocument/2006/math">
+                    <m:r>
+                      <a:rPr lang="en-US" sz="1200" i="1" dirty="0">
+                        <a:latin typeface="Cambria Math" panose="02040503050406030204" pitchFamily="18" charset="0"/>
+                      </a:rPr>
+                      <m:t>𝜋</m:t>
+                    </m:r>
+                  </m:oMath>
+                </a14:m>
+                <a:endParaRPr lang="en-US" sz="1200" dirty="0">
+                  <a:ea typeface="Cambria Math" panose="02040503050406030204" pitchFamily="18" charset="0"/>
+                </a:endParaRPr>
+              </a:p>
+              <a:p>
+                <a:pPr marL="0" indent="0">
+                  <a:spcBef>
+                    <a:spcPts val="0"/>
+                  </a:spcBef>
+                  <a:buNone/>
+                </a:pPr>
+                <a14:m>
+                  <m:oMath xmlns:m="http://schemas.openxmlformats.org/officeDocument/2006/math">
+                    <m:r>
+                      <a:rPr lang="en-US" sz="1200" i="1" dirty="0" smtClean="0">
+                        <a:latin typeface="Cambria Math" panose="02040503050406030204" pitchFamily="18" charset="0"/>
+                      </a:rPr>
+                      <m:t>𝜋</m:t>
+                    </m:r>
+                    <m:r>
+                      <a:rPr lang="en-US" sz="1200" i="1" dirty="0" smtClean="0">
+                        <a:latin typeface="Cambria Math" panose="02040503050406030204" pitchFamily="18" charset="0"/>
+                      </a:rPr>
+                      <m:t>(</m:t>
+                    </m:r>
+                    <m:r>
+                      <a:rPr lang="en-US" sz="1200" i="1" dirty="0" smtClean="0">
+                        <a:latin typeface="Cambria Math" panose="02040503050406030204" pitchFamily="18" charset="0"/>
+                      </a:rPr>
+                      <m:t>𝑠</m:t>
+                    </m:r>
+                    <m:r>
+                      <a:rPr lang="en-US" sz="1200" i="1" dirty="0" smtClean="0">
+                        <a:latin typeface="Cambria Math" panose="02040503050406030204" pitchFamily="18" charset="0"/>
+                      </a:rPr>
+                      <m:t>)</m:t>
+                    </m:r>
+                  </m:oMath>
+                </a14:m>
+                <a:r>
+                  <a:rPr lang="en-US" sz="1200" dirty="0"/>
+                  <a:t>	action taken in state </a:t>
+                </a:r>
+                <a14:m>
+                  <m:oMath xmlns:m="http://schemas.openxmlformats.org/officeDocument/2006/math">
+                    <m:r>
+                      <a:rPr lang="en-US" sz="1200" i="1" dirty="0" smtClean="0">
+                        <a:latin typeface="Cambria Math" panose="02040503050406030204" pitchFamily="18" charset="0"/>
+                      </a:rPr>
+                      <m:t>𝑠</m:t>
+                    </m:r>
+                  </m:oMath>
+                </a14:m>
+                <a:r>
+                  <a:rPr lang="en-US" sz="1200" dirty="0"/>
+                  <a:t> under deterministic policy </a:t>
+                </a:r>
+                <a14:m>
+                  <m:oMath xmlns:m="http://schemas.openxmlformats.org/officeDocument/2006/math">
+                    <m:r>
+                      <a:rPr lang="en-US" sz="1200" b="0" i="1" dirty="0" smtClean="0">
+                        <a:latin typeface="Cambria Math" panose="02040503050406030204" pitchFamily="18" charset="0"/>
+                      </a:rPr>
+                      <m:t>𝜋</m:t>
+                    </m:r>
+                  </m:oMath>
+                </a14:m>
+                <a:endParaRPr lang="en-US" sz="1200" dirty="0"/>
+              </a:p>
+            </p:txBody>
+          </p:sp>
+        </mc:Choice>
+        <mc:Fallback xmlns="">
+          <p:sp>
+            <p:nvSpPr>
+              <p:cNvPr id="11" name="Content Placeholder 2">
+                <a:extLst>
+                  <a:ext uri="{FF2B5EF4-FFF2-40B4-BE49-F238E27FC236}">
+                    <a16:creationId xmlns:a16="http://schemas.microsoft.com/office/drawing/2014/main" id="{6F45EA4F-65F9-5141-0B09-C395CF9CA7A0}"/>
+                  </a:ext>
+                </a:extLst>
+              </p:cNvPr>
+              <p:cNvSpPr txBox="1">
+                <a:spLocks noRot="1" noChangeAspect="1" noMove="1" noResize="1" noEditPoints="1" noAdjustHandles="1" noChangeArrowheads="1" noChangeShapeType="1" noTextEdit="1"/>
+              </p:cNvSpPr>
+              <p:nvPr/>
+            </p:nvSpPr>
+            <p:spPr>
+              <a:xfrm>
+                <a:off x="6267338" y="1124198"/>
+                <a:ext cx="5273179" cy="3693383"/>
+              </a:xfrm>
+              <a:prstGeom prst="rect">
+                <a:avLst/>
+              </a:prstGeom>
+              <a:blipFill>
+                <a:blip r:embed="rId4"/>
+                <a:stretch>
+                  <a:fillRect t="-328"/>
+                </a:stretch>
+              </a:blipFill>
+            </p:spPr>
+            <p:txBody>
+              <a:bodyPr/>
+              <a:lstStyle/>
+              <a:p>
+                <a:r>
+                  <a:rPr lang="en-US">
+                    <a:noFill/>
+                  </a:rPr>
+                  <a:t> </a:t>
+                </a:r>
+              </a:p>
+            </p:txBody>
+          </p:sp>
+        </mc:Fallback>
+      </mc:AlternateContent>
+    </p:spTree>
+    <p:extLst>
+      <p:ext uri="{BB962C8B-B14F-4D97-AF65-F5344CB8AC3E}">
+        <p14:creationId xmlns:p14="http://schemas.microsoft.com/office/powerpoint/2010/main" val="3945362088"/>
+      </p:ext>
+    </p:extLst>
+  </p:cSld>
+  <p:clrMapOvr>
+    <a:masterClrMapping/>
+  </p:clrMapOvr>
+</p:sld>
+</file>
+
+<file path=ppt/slides/slide30.xml><?xml version="1.0" encoding="utf-8"?>
 <p:sld xmlns:a="http://schemas.openxmlformats.org/drawingml/2006/main" xmlns:r="http://schemas.openxmlformats.org/officeDocument/2006/relationships" xmlns:p="http://schemas.openxmlformats.org/presentationml/2006/main">
   <p:cSld>
     <p:spTree>
@@ -25182,7 +26275,408 @@
 </p:sld>
 </file>
 
-<file path=ppt/slides/slide3.xml><?xml version="1.0" encoding="utf-8"?>
+<file path=ppt/slides/slide31.xml><?xml version="1.0" encoding="utf-8"?>
+<p:sld xmlns:a="http://schemas.openxmlformats.org/drawingml/2006/main" xmlns:r="http://schemas.openxmlformats.org/officeDocument/2006/relationships" xmlns:p="http://schemas.openxmlformats.org/presentationml/2006/main">
+  <p:cSld>
+    <p:spTree>
+      <p:nvGrpSpPr>
+        <p:cNvPr id="1" name=""/>
+        <p:cNvGrpSpPr/>
+        <p:nvPr/>
+      </p:nvGrpSpPr>
+      <p:grpSpPr>
+        <a:xfrm>
+          <a:off x="0" y="0"/>
+          <a:ext cx="0" cy="0"/>
+          <a:chOff x="0" y="0"/>
+          <a:chExt cx="0" cy="0"/>
+        </a:xfrm>
+      </p:grpSpPr>
+      <p:sp>
+        <p:nvSpPr>
+          <p:cNvPr id="4" name="Title 3">
+            <a:extLst>
+              <a:ext uri="{FF2B5EF4-FFF2-40B4-BE49-F238E27FC236}">
+                <a16:creationId xmlns:a16="http://schemas.microsoft.com/office/drawing/2014/main" id="{BBC6B8A3-7ED4-5685-3BE8-640126A45847}"/>
+              </a:ext>
+            </a:extLst>
+          </p:cNvPr>
+          <p:cNvSpPr>
+            <a:spLocks noGrp="1"/>
+          </p:cNvSpPr>
+          <p:nvPr>
+            <p:ph type="title"/>
+          </p:nvPr>
+        </p:nvSpPr>
+        <p:spPr/>
+        <p:txBody>
+          <a:bodyPr/>
+          <a:lstStyle/>
+          <a:p>
+            <a:r>
+              <a:rPr lang="en-US" dirty="0"/>
+              <a:t>Summary</a:t>
+            </a:r>
+          </a:p>
+        </p:txBody>
+      </p:sp>
+      <p:sp>
+        <p:nvSpPr>
+          <p:cNvPr id="5" name="Text Placeholder 4">
+            <a:extLst>
+              <a:ext uri="{FF2B5EF4-FFF2-40B4-BE49-F238E27FC236}">
+                <a16:creationId xmlns:a16="http://schemas.microsoft.com/office/drawing/2014/main" id="{BD366EC9-7756-561D-0729-0CFAAB4A80CD}"/>
+              </a:ext>
+            </a:extLst>
+          </p:cNvPr>
+          <p:cNvSpPr>
+            <a:spLocks noGrp="1"/>
+          </p:cNvSpPr>
+          <p:nvPr>
+            <p:ph type="body" idx="1"/>
+          </p:nvPr>
+        </p:nvSpPr>
+        <p:spPr/>
+        <p:txBody>
+          <a:bodyPr/>
+          <a:lstStyle/>
+          <a:p>
+            <a:endParaRPr lang="en-US"/>
+          </a:p>
+        </p:txBody>
+      </p:sp>
+    </p:spTree>
+    <p:extLst>
+      <p:ext uri="{BB962C8B-B14F-4D97-AF65-F5344CB8AC3E}">
+        <p14:creationId xmlns:p14="http://schemas.microsoft.com/office/powerpoint/2010/main" val="4190536015"/>
+      </p:ext>
+    </p:extLst>
+  </p:cSld>
+  <p:clrMapOvr>
+    <a:masterClrMapping/>
+  </p:clrMapOvr>
+</p:sld>
+</file>
+
+<file path=ppt/slides/slide32.xml><?xml version="1.0" encoding="utf-8"?>
+<p:sld xmlns:a="http://schemas.openxmlformats.org/drawingml/2006/main" xmlns:r="http://schemas.openxmlformats.org/officeDocument/2006/relationships" xmlns:p="http://schemas.openxmlformats.org/presentationml/2006/main">
+  <p:cSld>
+    <p:spTree>
+      <p:nvGrpSpPr>
+        <p:cNvPr id="1" name=""/>
+        <p:cNvGrpSpPr/>
+        <p:nvPr/>
+      </p:nvGrpSpPr>
+      <p:grpSpPr>
+        <a:xfrm>
+          <a:off x="0" y="0"/>
+          <a:ext cx="0" cy="0"/>
+          <a:chOff x="0" y="0"/>
+          <a:chExt cx="0" cy="0"/>
+        </a:xfrm>
+      </p:grpSpPr>
+      <p:sp>
+        <p:nvSpPr>
+          <p:cNvPr id="2" name="Title 1">
+            <a:extLst>
+              <a:ext uri="{FF2B5EF4-FFF2-40B4-BE49-F238E27FC236}">
+                <a16:creationId xmlns:a16="http://schemas.microsoft.com/office/drawing/2014/main" id="{8B52DFC2-AEEE-62B9-A8E6-BC79CBBA3E68}"/>
+              </a:ext>
+            </a:extLst>
+          </p:cNvPr>
+          <p:cNvSpPr>
+            <a:spLocks noGrp="1"/>
+          </p:cNvSpPr>
+          <p:nvPr>
+            <p:ph type="title"/>
+          </p:nvPr>
+        </p:nvSpPr>
+        <p:spPr/>
+        <p:txBody>
+          <a:bodyPr/>
+          <a:lstStyle/>
+          <a:p>
+            <a:r>
+              <a:rPr lang="en-US" dirty="0"/>
+              <a:t>Summary</a:t>
+            </a:r>
+          </a:p>
+        </p:txBody>
+      </p:sp>
+      <mc:AlternateContent xmlns:mc="http://schemas.openxmlformats.org/markup-compatibility/2006" xmlns:a14="http://schemas.microsoft.com/office/drawing/2010/main">
+        <mc:Choice Requires="a14">
+          <p:sp>
+            <p:nvSpPr>
+              <p:cNvPr id="3" name="Content Placeholder 2">
+                <a:extLst>
+                  <a:ext uri="{FF2B5EF4-FFF2-40B4-BE49-F238E27FC236}">
+                    <a16:creationId xmlns:a16="http://schemas.microsoft.com/office/drawing/2014/main" id="{609A1CBE-008E-3619-0BBC-A7F9B6DA6878}"/>
+                  </a:ext>
+                </a:extLst>
+              </p:cNvPr>
+              <p:cNvSpPr>
+                <a:spLocks noGrp="1"/>
+              </p:cNvSpPr>
+              <p:nvPr>
+                <p:ph idx="1"/>
+              </p:nvPr>
+            </p:nvSpPr>
+            <p:spPr/>
+            <p:txBody>
+              <a:bodyPr/>
+              <a:lstStyle/>
+              <a:p>
+                <a:r>
+                  <a:rPr lang="en-US" dirty="0"/>
+                  <a:t>Approximate the value function using parametrized functions: 					</a:t>
+                </a:r>
+                <a14:m>
+                  <m:oMath xmlns:m="http://schemas.openxmlformats.org/officeDocument/2006/math">
+                    <m:acc>
+                      <m:accPr>
+                        <m:chr m:val="̂"/>
+                        <m:ctrlPr>
+                          <a:rPr lang="en-US" i="1">
+                            <a:latin typeface="Cambria Math" panose="02040503050406030204" pitchFamily="18" charset="0"/>
+                          </a:rPr>
+                        </m:ctrlPr>
+                      </m:accPr>
+                      <m:e>
+                        <m:r>
+                          <a:rPr lang="en-US" b="0" i="1" smtClean="0">
+                            <a:latin typeface="Cambria Math" panose="02040503050406030204" pitchFamily="18" charset="0"/>
+                          </a:rPr>
+                          <m:t>𝑣</m:t>
+                        </m:r>
+                      </m:e>
+                    </m:acc>
+                    <m:d>
+                      <m:dPr>
+                        <m:ctrlPr>
+                          <a:rPr lang="en-US" i="1" dirty="0">
+                            <a:latin typeface="Cambria Math" panose="02040503050406030204" pitchFamily="18" charset="0"/>
+                          </a:rPr>
+                        </m:ctrlPr>
+                      </m:dPr>
+                      <m:e>
+                        <m:r>
+                          <a:rPr lang="en-US" i="1" dirty="0">
+                            <a:latin typeface="Cambria Math" panose="02040503050406030204" pitchFamily="18" charset="0"/>
+                          </a:rPr>
+                          <m:t>𝑠</m:t>
+                        </m:r>
+                        <m:r>
+                          <a:rPr lang="en-US" i="1" dirty="0">
+                            <a:latin typeface="Cambria Math" panose="02040503050406030204" pitchFamily="18" charset="0"/>
+                          </a:rPr>
+                          <m:t>,</m:t>
+                        </m:r>
+                        <m:r>
+                          <a:rPr lang="en-US" b="1" i="1" dirty="0">
+                            <a:latin typeface="Cambria Math" panose="02040503050406030204" pitchFamily="18" charset="0"/>
+                          </a:rPr>
+                          <m:t>𝒘</m:t>
+                        </m:r>
+                      </m:e>
+                    </m:d>
+                  </m:oMath>
+                </a14:m>
+                <a:r>
+                  <a:rPr lang="en-US" dirty="0"/>
+                  <a:t>or </a:t>
+                </a:r>
+                <a14:m>
+                  <m:oMath xmlns:m="http://schemas.openxmlformats.org/officeDocument/2006/math">
+                    <m:acc>
+                      <m:accPr>
+                        <m:chr m:val="̂"/>
+                        <m:ctrlPr>
+                          <a:rPr lang="en-US" i="1">
+                            <a:latin typeface="Cambria Math" panose="02040503050406030204" pitchFamily="18" charset="0"/>
+                          </a:rPr>
+                        </m:ctrlPr>
+                      </m:accPr>
+                      <m:e>
+                        <m:r>
+                          <a:rPr lang="en-US" i="1">
+                            <a:latin typeface="Cambria Math" panose="02040503050406030204" pitchFamily="18" charset="0"/>
+                          </a:rPr>
+                          <m:t>𝑞</m:t>
+                        </m:r>
+                      </m:e>
+                    </m:acc>
+                    <m:d>
+                      <m:dPr>
+                        <m:ctrlPr>
+                          <a:rPr lang="en-US" i="1" dirty="0">
+                            <a:latin typeface="Cambria Math" panose="02040503050406030204" pitchFamily="18" charset="0"/>
+                          </a:rPr>
+                        </m:ctrlPr>
+                      </m:dPr>
+                      <m:e>
+                        <m:r>
+                          <a:rPr lang="en-US" i="1" dirty="0">
+                            <a:latin typeface="Cambria Math" panose="02040503050406030204" pitchFamily="18" charset="0"/>
+                          </a:rPr>
+                          <m:t>𝑠</m:t>
+                        </m:r>
+                        <m:r>
+                          <a:rPr lang="en-US" i="1" dirty="0">
+                            <a:latin typeface="Cambria Math" panose="02040503050406030204" pitchFamily="18" charset="0"/>
+                          </a:rPr>
+                          <m:t>,</m:t>
+                        </m:r>
+                        <m:r>
+                          <a:rPr lang="en-US" i="1" dirty="0">
+                            <a:latin typeface="Cambria Math" panose="02040503050406030204" pitchFamily="18" charset="0"/>
+                          </a:rPr>
+                          <m:t>𝑎</m:t>
+                        </m:r>
+                        <m:r>
+                          <a:rPr lang="en-US" i="1" dirty="0">
+                            <a:latin typeface="Cambria Math" panose="02040503050406030204" pitchFamily="18" charset="0"/>
+                          </a:rPr>
+                          <m:t>,</m:t>
+                        </m:r>
+                        <m:r>
+                          <a:rPr lang="en-US" b="1" i="1" dirty="0">
+                            <a:latin typeface="Cambria Math" panose="02040503050406030204" pitchFamily="18" charset="0"/>
+                          </a:rPr>
+                          <m:t>𝒘</m:t>
+                        </m:r>
+                      </m:e>
+                    </m:d>
+                  </m:oMath>
+                </a14:m>
+                <a:endParaRPr lang="en-US" dirty="0"/>
+              </a:p>
+              <a:p>
+                <a:endParaRPr lang="en-US" dirty="0"/>
+              </a:p>
+              <a:p>
+                <a:r>
+                  <a:rPr lang="en-US" dirty="0"/>
+                  <a:t>We need to create features that take the interaction of state components into account. Popular are: </a:t>
+                </a:r>
+              </a:p>
+              <a:p>
+                <a:pPr lvl="1"/>
+                <a:r>
+                  <a:rPr lang="en-US" dirty="0"/>
+                  <a:t>Fourier basis features </a:t>
+                </a:r>
+              </a:p>
+              <a:p>
+                <a:pPr lvl="1"/>
+                <a:r>
+                  <a:rPr lang="en-US" dirty="0"/>
+                  <a:t>Tile coding.</a:t>
+                </a:r>
+              </a:p>
+              <a:p>
+                <a:endParaRPr lang="en-US"/>
+              </a:p>
+              <a:p>
+                <a:r>
+                  <a:rPr lang="en-US"/>
+                  <a:t>Use </a:t>
+                </a:r>
+                <a:r>
+                  <a:rPr lang="en-US" dirty="0"/>
+                  <a:t>semi-gradient descent to learn </a:t>
+                </a:r>
+                <a14:m>
+                  <m:oMath xmlns:m="http://schemas.openxmlformats.org/officeDocument/2006/math">
+                    <m:r>
+                      <a:rPr lang="en-US" b="1" i="1" smtClean="0">
+                        <a:latin typeface="Cambria Math" panose="02040503050406030204" pitchFamily="18" charset="0"/>
+                      </a:rPr>
+                      <m:t>𝒘</m:t>
+                    </m:r>
+                  </m:oMath>
+                </a14:m>
+                <a:r>
+                  <a:rPr lang="en-US" dirty="0"/>
+                  <a:t>.</a:t>
+                </a:r>
+              </a:p>
+              <a:p>
+                <a:r>
+                  <a:rPr lang="en-US" dirty="0"/>
+                  <a:t>Issues are the choice of </a:t>
+                </a:r>
+                <a14:m>
+                  <m:oMath xmlns:m="http://schemas.openxmlformats.org/officeDocument/2006/math">
+                    <m:r>
+                      <a:rPr lang="en-US" b="0" i="1" smtClean="0">
+                        <a:latin typeface="Cambria Math" panose="02040503050406030204" pitchFamily="18" charset="0"/>
+                      </a:rPr>
+                      <m:t>𝛼</m:t>
+                    </m:r>
+                  </m:oMath>
+                </a14:m>
+                <a:r>
+                  <a:rPr lang="en-US" dirty="0"/>
+                  <a:t>.</a:t>
+                </a:r>
+              </a:p>
+            </p:txBody>
+          </p:sp>
+        </mc:Choice>
+        <mc:Fallback xmlns="">
+          <p:sp>
+            <p:nvSpPr>
+              <p:cNvPr id="3" name="Content Placeholder 2">
+                <a:extLst>
+                  <a:ext uri="{FF2B5EF4-FFF2-40B4-BE49-F238E27FC236}">
+                    <a16:creationId xmlns:a16="http://schemas.microsoft.com/office/drawing/2014/main" id="{609A1CBE-008E-3619-0BBC-A7F9B6DA6878}"/>
+                  </a:ext>
+                </a:extLst>
+              </p:cNvPr>
+              <p:cNvSpPr>
+                <a:spLocks noGrp="1" noRot="1" noChangeAspect="1" noMove="1" noResize="1" noEditPoints="1" noAdjustHandles="1" noChangeArrowheads="1" noChangeShapeType="1" noTextEdit="1"/>
+              </p:cNvSpPr>
+              <p:nvPr>
+                <p:ph idx="1"/>
+              </p:nvPr>
+            </p:nvSpPr>
+            <p:spPr>
+              <a:blipFill>
+                <a:blip r:embed="rId2"/>
+                <a:stretch>
+                  <a:fillRect l="-1043" t="-2168"/>
+                </a:stretch>
+              </a:blipFill>
+            </p:spPr>
+            <p:txBody>
+              <a:bodyPr/>
+              <a:lstStyle/>
+              <a:p>
+                <a:r>
+                  <a:rPr lang="en-US">
+                    <a:noFill/>
+                  </a:rPr>
+                  <a:t> </a:t>
+                </a:r>
+              </a:p>
+            </p:txBody>
+          </p:sp>
+        </mc:Fallback>
+      </mc:AlternateContent>
+    </p:spTree>
+    <p:extLst>
+      <p:ext uri="{BB962C8B-B14F-4D97-AF65-F5344CB8AC3E}">
+        <p14:creationId xmlns:p14="http://schemas.microsoft.com/office/powerpoint/2010/main" val="2931045978"/>
+      </p:ext>
+    </p:extLst>
+  </p:cSld>
+  <p:clrMapOvr>
+    <a:masterClrMapping/>
+  </p:clrMapOvr>
+</p:sld>
+</file>
+
+<file path=ppt/slides/slide4.xml><?xml version="1.0" encoding="utf-8"?>
 <p:sld xmlns:a="http://schemas.openxmlformats.org/drawingml/2006/main" xmlns:r="http://schemas.openxmlformats.org/officeDocument/2006/relationships" xmlns:p="http://schemas.openxmlformats.org/presentationml/2006/main">
   <p:cSld>
     <p:spTree>
@@ -25271,408 +26765,7 @@
 </p:sld>
 </file>
 
-<file path=ppt/slides/slide30.xml><?xml version="1.0" encoding="utf-8"?>
-<p:sld xmlns:a="http://schemas.openxmlformats.org/drawingml/2006/main" xmlns:r="http://schemas.openxmlformats.org/officeDocument/2006/relationships" xmlns:p="http://schemas.openxmlformats.org/presentationml/2006/main">
-  <p:cSld>
-    <p:spTree>
-      <p:nvGrpSpPr>
-        <p:cNvPr id="1" name=""/>
-        <p:cNvGrpSpPr/>
-        <p:nvPr/>
-      </p:nvGrpSpPr>
-      <p:grpSpPr>
-        <a:xfrm>
-          <a:off x="0" y="0"/>
-          <a:ext cx="0" cy="0"/>
-          <a:chOff x="0" y="0"/>
-          <a:chExt cx="0" cy="0"/>
-        </a:xfrm>
-      </p:grpSpPr>
-      <p:sp>
-        <p:nvSpPr>
-          <p:cNvPr id="4" name="Title 3">
-            <a:extLst>
-              <a:ext uri="{FF2B5EF4-FFF2-40B4-BE49-F238E27FC236}">
-                <a16:creationId xmlns:a16="http://schemas.microsoft.com/office/drawing/2014/main" id="{BBC6B8A3-7ED4-5685-3BE8-640126A45847}"/>
-              </a:ext>
-            </a:extLst>
-          </p:cNvPr>
-          <p:cNvSpPr>
-            <a:spLocks noGrp="1"/>
-          </p:cNvSpPr>
-          <p:nvPr>
-            <p:ph type="title"/>
-          </p:nvPr>
-        </p:nvSpPr>
-        <p:spPr/>
-        <p:txBody>
-          <a:bodyPr/>
-          <a:lstStyle/>
-          <a:p>
-            <a:r>
-              <a:rPr lang="en-US" dirty="0"/>
-              <a:t>Summary</a:t>
-            </a:r>
-          </a:p>
-        </p:txBody>
-      </p:sp>
-      <p:sp>
-        <p:nvSpPr>
-          <p:cNvPr id="5" name="Text Placeholder 4">
-            <a:extLst>
-              <a:ext uri="{FF2B5EF4-FFF2-40B4-BE49-F238E27FC236}">
-                <a16:creationId xmlns:a16="http://schemas.microsoft.com/office/drawing/2014/main" id="{BD366EC9-7756-561D-0729-0CFAAB4A80CD}"/>
-              </a:ext>
-            </a:extLst>
-          </p:cNvPr>
-          <p:cNvSpPr>
-            <a:spLocks noGrp="1"/>
-          </p:cNvSpPr>
-          <p:nvPr>
-            <p:ph type="body" idx="1"/>
-          </p:nvPr>
-        </p:nvSpPr>
-        <p:spPr/>
-        <p:txBody>
-          <a:bodyPr/>
-          <a:lstStyle/>
-          <a:p>
-            <a:endParaRPr lang="en-US"/>
-          </a:p>
-        </p:txBody>
-      </p:sp>
-    </p:spTree>
-    <p:extLst>
-      <p:ext uri="{BB962C8B-B14F-4D97-AF65-F5344CB8AC3E}">
-        <p14:creationId xmlns:p14="http://schemas.microsoft.com/office/powerpoint/2010/main" val="4190536015"/>
-      </p:ext>
-    </p:extLst>
-  </p:cSld>
-  <p:clrMapOvr>
-    <a:masterClrMapping/>
-  </p:clrMapOvr>
-</p:sld>
-</file>
-
-<file path=ppt/slides/slide31.xml><?xml version="1.0" encoding="utf-8"?>
-<p:sld xmlns:a="http://schemas.openxmlformats.org/drawingml/2006/main" xmlns:r="http://schemas.openxmlformats.org/officeDocument/2006/relationships" xmlns:p="http://schemas.openxmlformats.org/presentationml/2006/main">
-  <p:cSld>
-    <p:spTree>
-      <p:nvGrpSpPr>
-        <p:cNvPr id="1" name=""/>
-        <p:cNvGrpSpPr/>
-        <p:nvPr/>
-      </p:nvGrpSpPr>
-      <p:grpSpPr>
-        <a:xfrm>
-          <a:off x="0" y="0"/>
-          <a:ext cx="0" cy="0"/>
-          <a:chOff x="0" y="0"/>
-          <a:chExt cx="0" cy="0"/>
-        </a:xfrm>
-      </p:grpSpPr>
-      <p:sp>
-        <p:nvSpPr>
-          <p:cNvPr id="2" name="Title 1">
-            <a:extLst>
-              <a:ext uri="{FF2B5EF4-FFF2-40B4-BE49-F238E27FC236}">
-                <a16:creationId xmlns:a16="http://schemas.microsoft.com/office/drawing/2014/main" id="{8B52DFC2-AEEE-62B9-A8E6-BC79CBBA3E68}"/>
-              </a:ext>
-            </a:extLst>
-          </p:cNvPr>
-          <p:cNvSpPr>
-            <a:spLocks noGrp="1"/>
-          </p:cNvSpPr>
-          <p:nvPr>
-            <p:ph type="title"/>
-          </p:nvPr>
-        </p:nvSpPr>
-        <p:spPr/>
-        <p:txBody>
-          <a:bodyPr/>
-          <a:lstStyle/>
-          <a:p>
-            <a:r>
-              <a:rPr lang="en-US" dirty="0"/>
-              <a:t>Summary</a:t>
-            </a:r>
-          </a:p>
-        </p:txBody>
-      </p:sp>
-      <mc:AlternateContent xmlns:mc="http://schemas.openxmlformats.org/markup-compatibility/2006" xmlns:a14="http://schemas.microsoft.com/office/drawing/2010/main">
-        <mc:Choice Requires="a14">
-          <p:sp>
-            <p:nvSpPr>
-              <p:cNvPr id="3" name="Content Placeholder 2">
-                <a:extLst>
-                  <a:ext uri="{FF2B5EF4-FFF2-40B4-BE49-F238E27FC236}">
-                    <a16:creationId xmlns:a16="http://schemas.microsoft.com/office/drawing/2014/main" id="{609A1CBE-008E-3619-0BBC-A7F9B6DA6878}"/>
-                  </a:ext>
-                </a:extLst>
-              </p:cNvPr>
-              <p:cNvSpPr>
-                <a:spLocks noGrp="1"/>
-              </p:cNvSpPr>
-              <p:nvPr>
-                <p:ph idx="1"/>
-              </p:nvPr>
-            </p:nvSpPr>
-            <p:spPr/>
-            <p:txBody>
-              <a:bodyPr/>
-              <a:lstStyle/>
-              <a:p>
-                <a:r>
-                  <a:rPr lang="en-US" dirty="0"/>
-                  <a:t>Approximate the value function using parametrized functions: 					</a:t>
-                </a:r>
-                <a14:m>
-                  <m:oMath xmlns:m="http://schemas.openxmlformats.org/officeDocument/2006/math">
-                    <m:acc>
-                      <m:accPr>
-                        <m:chr m:val="̂"/>
-                        <m:ctrlPr>
-                          <a:rPr lang="en-US" i="1">
-                            <a:latin typeface="Cambria Math" panose="02040503050406030204" pitchFamily="18" charset="0"/>
-                          </a:rPr>
-                        </m:ctrlPr>
-                      </m:accPr>
-                      <m:e>
-                        <m:r>
-                          <a:rPr lang="en-US" b="0" i="1" smtClean="0">
-                            <a:latin typeface="Cambria Math" panose="02040503050406030204" pitchFamily="18" charset="0"/>
-                          </a:rPr>
-                          <m:t>𝑣</m:t>
-                        </m:r>
-                      </m:e>
-                    </m:acc>
-                    <m:d>
-                      <m:dPr>
-                        <m:ctrlPr>
-                          <a:rPr lang="en-US" i="1" dirty="0">
-                            <a:latin typeface="Cambria Math" panose="02040503050406030204" pitchFamily="18" charset="0"/>
-                          </a:rPr>
-                        </m:ctrlPr>
-                      </m:dPr>
-                      <m:e>
-                        <m:r>
-                          <a:rPr lang="en-US" i="1" dirty="0">
-                            <a:latin typeface="Cambria Math" panose="02040503050406030204" pitchFamily="18" charset="0"/>
-                          </a:rPr>
-                          <m:t>𝑠</m:t>
-                        </m:r>
-                        <m:r>
-                          <a:rPr lang="en-US" i="1" dirty="0">
-                            <a:latin typeface="Cambria Math" panose="02040503050406030204" pitchFamily="18" charset="0"/>
-                          </a:rPr>
-                          <m:t>,</m:t>
-                        </m:r>
-                        <m:r>
-                          <a:rPr lang="en-US" b="1" i="1" dirty="0">
-                            <a:latin typeface="Cambria Math" panose="02040503050406030204" pitchFamily="18" charset="0"/>
-                          </a:rPr>
-                          <m:t>𝒘</m:t>
-                        </m:r>
-                      </m:e>
-                    </m:d>
-                  </m:oMath>
-                </a14:m>
-                <a:r>
-                  <a:rPr lang="en-US" dirty="0"/>
-                  <a:t>or </a:t>
-                </a:r>
-                <a14:m>
-                  <m:oMath xmlns:m="http://schemas.openxmlformats.org/officeDocument/2006/math">
-                    <m:acc>
-                      <m:accPr>
-                        <m:chr m:val="̂"/>
-                        <m:ctrlPr>
-                          <a:rPr lang="en-US" i="1">
-                            <a:latin typeface="Cambria Math" panose="02040503050406030204" pitchFamily="18" charset="0"/>
-                          </a:rPr>
-                        </m:ctrlPr>
-                      </m:accPr>
-                      <m:e>
-                        <m:r>
-                          <a:rPr lang="en-US" i="1">
-                            <a:latin typeface="Cambria Math" panose="02040503050406030204" pitchFamily="18" charset="0"/>
-                          </a:rPr>
-                          <m:t>𝑞</m:t>
-                        </m:r>
-                      </m:e>
-                    </m:acc>
-                    <m:d>
-                      <m:dPr>
-                        <m:ctrlPr>
-                          <a:rPr lang="en-US" i="1" dirty="0">
-                            <a:latin typeface="Cambria Math" panose="02040503050406030204" pitchFamily="18" charset="0"/>
-                          </a:rPr>
-                        </m:ctrlPr>
-                      </m:dPr>
-                      <m:e>
-                        <m:r>
-                          <a:rPr lang="en-US" i="1" dirty="0">
-                            <a:latin typeface="Cambria Math" panose="02040503050406030204" pitchFamily="18" charset="0"/>
-                          </a:rPr>
-                          <m:t>𝑠</m:t>
-                        </m:r>
-                        <m:r>
-                          <a:rPr lang="en-US" i="1" dirty="0">
-                            <a:latin typeface="Cambria Math" panose="02040503050406030204" pitchFamily="18" charset="0"/>
-                          </a:rPr>
-                          <m:t>,</m:t>
-                        </m:r>
-                        <m:r>
-                          <a:rPr lang="en-US" i="1" dirty="0">
-                            <a:latin typeface="Cambria Math" panose="02040503050406030204" pitchFamily="18" charset="0"/>
-                          </a:rPr>
-                          <m:t>𝑎</m:t>
-                        </m:r>
-                        <m:r>
-                          <a:rPr lang="en-US" i="1" dirty="0">
-                            <a:latin typeface="Cambria Math" panose="02040503050406030204" pitchFamily="18" charset="0"/>
-                          </a:rPr>
-                          <m:t>,</m:t>
-                        </m:r>
-                        <m:r>
-                          <a:rPr lang="en-US" b="1" i="1" dirty="0">
-                            <a:latin typeface="Cambria Math" panose="02040503050406030204" pitchFamily="18" charset="0"/>
-                          </a:rPr>
-                          <m:t>𝒘</m:t>
-                        </m:r>
-                      </m:e>
-                    </m:d>
-                  </m:oMath>
-                </a14:m>
-                <a:endParaRPr lang="en-US" dirty="0"/>
-              </a:p>
-              <a:p>
-                <a:endParaRPr lang="en-US" dirty="0"/>
-              </a:p>
-              <a:p>
-                <a:r>
-                  <a:rPr lang="en-US" dirty="0"/>
-                  <a:t>We need to create features that take the interaction of state components into account. Popular are: </a:t>
-                </a:r>
-              </a:p>
-              <a:p>
-                <a:pPr lvl="1"/>
-                <a:r>
-                  <a:rPr lang="en-US" dirty="0"/>
-                  <a:t>Fourier basis features </a:t>
-                </a:r>
-              </a:p>
-              <a:p>
-                <a:pPr lvl="1"/>
-                <a:r>
-                  <a:rPr lang="en-US" dirty="0"/>
-                  <a:t>Tile coding.</a:t>
-                </a:r>
-              </a:p>
-              <a:p>
-                <a:endParaRPr lang="en-US"/>
-              </a:p>
-              <a:p>
-                <a:r>
-                  <a:rPr lang="en-US"/>
-                  <a:t>Use </a:t>
-                </a:r>
-                <a:r>
-                  <a:rPr lang="en-US" dirty="0"/>
-                  <a:t>semi-gradient descent to learn </a:t>
-                </a:r>
-                <a14:m>
-                  <m:oMath xmlns:m="http://schemas.openxmlformats.org/officeDocument/2006/math">
-                    <m:r>
-                      <a:rPr lang="en-US" b="1" i="1" smtClean="0">
-                        <a:latin typeface="Cambria Math" panose="02040503050406030204" pitchFamily="18" charset="0"/>
-                      </a:rPr>
-                      <m:t>𝒘</m:t>
-                    </m:r>
-                  </m:oMath>
-                </a14:m>
-                <a:r>
-                  <a:rPr lang="en-US" dirty="0"/>
-                  <a:t>.</a:t>
-                </a:r>
-              </a:p>
-              <a:p>
-                <a:r>
-                  <a:rPr lang="en-US" dirty="0"/>
-                  <a:t>Issues are the choice of </a:t>
-                </a:r>
-                <a14:m>
-                  <m:oMath xmlns:m="http://schemas.openxmlformats.org/officeDocument/2006/math">
-                    <m:r>
-                      <a:rPr lang="en-US" b="0" i="1" smtClean="0">
-                        <a:latin typeface="Cambria Math" panose="02040503050406030204" pitchFamily="18" charset="0"/>
-                      </a:rPr>
-                      <m:t>𝛼</m:t>
-                    </m:r>
-                  </m:oMath>
-                </a14:m>
-                <a:r>
-                  <a:rPr lang="en-US" dirty="0"/>
-                  <a:t>.</a:t>
-                </a:r>
-              </a:p>
-            </p:txBody>
-          </p:sp>
-        </mc:Choice>
-        <mc:Fallback xmlns="">
-          <p:sp>
-            <p:nvSpPr>
-              <p:cNvPr id="3" name="Content Placeholder 2">
-                <a:extLst>
-                  <a:ext uri="{FF2B5EF4-FFF2-40B4-BE49-F238E27FC236}">
-                    <a16:creationId xmlns:a16="http://schemas.microsoft.com/office/drawing/2014/main" id="{609A1CBE-008E-3619-0BBC-A7F9B6DA6878}"/>
-                  </a:ext>
-                </a:extLst>
-              </p:cNvPr>
-              <p:cNvSpPr>
-                <a:spLocks noGrp="1" noRot="1" noChangeAspect="1" noMove="1" noResize="1" noEditPoints="1" noAdjustHandles="1" noChangeArrowheads="1" noChangeShapeType="1" noTextEdit="1"/>
-              </p:cNvSpPr>
-              <p:nvPr>
-                <p:ph idx="1"/>
-              </p:nvPr>
-            </p:nvSpPr>
-            <p:spPr>
-              <a:blipFill>
-                <a:blip r:embed="rId2"/>
-                <a:stretch>
-                  <a:fillRect l="-1043" t="-2168"/>
-                </a:stretch>
-              </a:blipFill>
-            </p:spPr>
-            <p:txBody>
-              <a:bodyPr/>
-              <a:lstStyle/>
-              <a:p>
-                <a:r>
-                  <a:rPr lang="en-US">
-                    <a:noFill/>
-                  </a:rPr>
-                  <a:t> </a:t>
-                </a:r>
-              </a:p>
-            </p:txBody>
-          </p:sp>
-        </mc:Fallback>
-      </mc:AlternateContent>
-    </p:spTree>
-    <p:extLst>
-      <p:ext uri="{BB962C8B-B14F-4D97-AF65-F5344CB8AC3E}">
-        <p14:creationId xmlns:p14="http://schemas.microsoft.com/office/powerpoint/2010/main" val="2931045978"/>
-      </p:ext>
-    </p:extLst>
-  </p:cSld>
-  <p:clrMapOvr>
-    <a:masterClrMapping/>
-  </p:clrMapOvr>
-</p:sld>
-</file>
-
-<file path=ppt/slides/slide4.xml><?xml version="1.0" encoding="utf-8"?>
+<file path=ppt/slides/slide5.xml><?xml version="1.0" encoding="utf-8"?>
 <p:sld xmlns:a="http://schemas.openxmlformats.org/drawingml/2006/main" xmlns:r="http://schemas.openxmlformats.org/officeDocument/2006/relationships" xmlns:p="http://schemas.openxmlformats.org/presentationml/2006/main">
   <p:cSld>
     <p:spTree>
@@ -25717,8 +26810,8 @@
           </a:p>
         </p:txBody>
       </p:sp>
-      <mc:AlternateContent xmlns:mc="http://schemas.openxmlformats.org/markup-compatibility/2006">
-        <mc:Choice xmlns:a14="http://schemas.microsoft.com/office/drawing/2010/main" Requires="a14">
+      <mc:AlternateContent xmlns:mc="http://schemas.openxmlformats.org/markup-compatibility/2006" xmlns:a14="http://schemas.microsoft.com/office/drawing/2010/main">
+        <mc:Choice Requires="a14">
           <p:sp>
             <p:nvSpPr>
               <p:cNvPr id="5" name="Content Placeholder 4">
@@ -25964,7 +27057,7 @@
             </p:txBody>
           </p:sp>
         </mc:Choice>
-        <mc:Fallback>
+        <mc:Fallback xmlns="">
           <p:sp>
             <p:nvSpPr>
               <p:cNvPr id="5" name="Content Placeholder 4">
@@ -26017,7 +27110,7 @@
 </p:sld>
 </file>
 
-<file path=ppt/slides/slide5.xml><?xml version="1.0" encoding="utf-8"?>
+<file path=ppt/slides/slide6.xml><?xml version="1.0" encoding="utf-8"?>
 <p:sld xmlns:a="http://schemas.openxmlformats.org/drawingml/2006/main" xmlns:r="http://schemas.openxmlformats.org/officeDocument/2006/relationships" xmlns:p="http://schemas.openxmlformats.org/presentationml/2006/main">
   <p:cSld>
     <p:spTree>
@@ -26877,7 +27970,7 @@
 </p:sld>
 </file>
 
-<file path=ppt/slides/slide6.xml><?xml version="1.0" encoding="utf-8"?>
+<file path=ppt/slides/slide7.xml><?xml version="1.0" encoding="utf-8"?>
 <p:sld xmlns:a="http://schemas.openxmlformats.org/drawingml/2006/main" xmlns:r="http://schemas.openxmlformats.org/officeDocument/2006/relationships" xmlns:p="http://schemas.openxmlformats.org/presentationml/2006/main">
   <p:cSld>
     <p:spTree>
@@ -27582,7 +28675,7 @@
 </p:sld>
 </file>
 
-<file path=ppt/slides/slide7.xml><?xml version="1.0" encoding="utf-8"?>
+<file path=ppt/slides/slide8.xml><?xml version="1.0" encoding="utf-8"?>
 <p:sld xmlns:a="http://schemas.openxmlformats.org/drawingml/2006/main" xmlns:r="http://schemas.openxmlformats.org/officeDocument/2006/relationships" xmlns:p="http://schemas.openxmlformats.org/presentationml/2006/main">
   <p:cSld>
     <p:spTree>
@@ -27947,7 +29040,7 @@
 </p:sld>
 </file>
 
-<file path=ppt/slides/slide8.xml><?xml version="1.0" encoding="utf-8"?>
+<file path=ppt/slides/slide9.xml><?xml version="1.0" encoding="utf-8"?>
 <p:sld xmlns:a="http://schemas.openxmlformats.org/drawingml/2006/main" xmlns:r="http://schemas.openxmlformats.org/officeDocument/2006/relationships" xmlns:p="http://schemas.openxmlformats.org/presentationml/2006/main">
   <p:cSld>
     <p:spTree>
@@ -28028,739 +29121,6 @@
     <p:extLst>
       <p:ext uri="{BB962C8B-B14F-4D97-AF65-F5344CB8AC3E}">
         <p14:creationId xmlns:p14="http://schemas.microsoft.com/office/powerpoint/2010/main" val="3955007695"/>
-      </p:ext>
-    </p:extLst>
-  </p:cSld>
-  <p:clrMapOvr>
-    <a:masterClrMapping/>
-  </p:clrMapOvr>
-</p:sld>
-</file>
-
-<file path=ppt/slides/slide9.xml><?xml version="1.0" encoding="utf-8"?>
-<p:sld xmlns:a="http://schemas.openxmlformats.org/drawingml/2006/main" xmlns:r="http://schemas.openxmlformats.org/officeDocument/2006/relationships" xmlns:p="http://schemas.openxmlformats.org/presentationml/2006/main">
-  <p:cSld>
-    <p:spTree>
-      <p:nvGrpSpPr>
-        <p:cNvPr id="1" name=""/>
-        <p:cNvGrpSpPr/>
-        <p:nvPr/>
-      </p:nvGrpSpPr>
-      <p:grpSpPr>
-        <a:xfrm>
-          <a:off x="0" y="0"/>
-          <a:ext cx="0" cy="0"/>
-          <a:chOff x="0" y="0"/>
-          <a:chExt cx="0" cy="0"/>
-        </a:xfrm>
-      </p:grpSpPr>
-      <p:sp>
-        <p:nvSpPr>
-          <p:cNvPr id="2" name="Title 1">
-            <a:extLst>
-              <a:ext uri="{FF2B5EF4-FFF2-40B4-BE49-F238E27FC236}">
-                <a16:creationId xmlns:a16="http://schemas.microsoft.com/office/drawing/2014/main" id="{A1B4BBCF-186E-BC4F-CAA3-DBB46E3E57A9}"/>
-              </a:ext>
-            </a:extLst>
-          </p:cNvPr>
-          <p:cNvSpPr>
-            <a:spLocks noGrp="1"/>
-          </p:cNvSpPr>
-          <p:nvPr>
-            <p:ph type="title"/>
-          </p:nvPr>
-        </p:nvSpPr>
-        <p:spPr/>
-        <p:txBody>
-          <a:bodyPr/>
-          <a:lstStyle/>
-          <a:p>
-            <a:r>
-              <a:rPr lang="en-US" dirty="0"/>
-              <a:t>Learning Method</a:t>
-            </a:r>
-          </a:p>
-        </p:txBody>
-      </p:sp>
-      <mc:AlternateContent xmlns:mc="http://schemas.openxmlformats.org/markup-compatibility/2006" xmlns:a14="http://schemas.microsoft.com/office/drawing/2010/main">
-        <mc:Choice Requires="a14">
-          <p:sp>
-            <p:nvSpPr>
-              <p:cNvPr id="3" name="Content Placeholder 2">
-                <a:extLst>
-                  <a:ext uri="{FF2B5EF4-FFF2-40B4-BE49-F238E27FC236}">
-                    <a16:creationId xmlns:a16="http://schemas.microsoft.com/office/drawing/2014/main" id="{429671F6-58E1-5895-8D89-7778F6212AA2}"/>
-                  </a:ext>
-                </a:extLst>
-              </p:cNvPr>
-              <p:cNvSpPr>
-                <a:spLocks noGrp="1"/>
-              </p:cNvSpPr>
-              <p:nvPr>
-                <p:ph idx="1"/>
-              </p:nvPr>
-            </p:nvSpPr>
-            <p:spPr/>
-            <p:txBody>
-              <a:bodyPr>
-                <a:normAutofit lnSpcReduction="10000"/>
-              </a:bodyPr>
-              <a:lstStyle/>
-              <a:p>
-                <a:pPr marL="0" indent="0">
-                  <a:buNone/>
-                </a:pPr>
-                <a:r>
-                  <a:rPr lang="en-US" b="1" dirty="0"/>
-                  <a:t>Setup</a:t>
-                </a:r>
-              </a:p>
-              <a:p>
-                <a:r>
-                  <a:rPr lang="en-US" dirty="0"/>
-                  <a:t>We use </a:t>
-                </a:r>
-                <a14:m>
-                  <m:oMath xmlns:m="http://schemas.openxmlformats.org/officeDocument/2006/math">
-                    <m:r>
-                      <a:rPr lang="en-US" b="1" i="1">
-                        <a:latin typeface="Cambria Math" panose="02040503050406030204" pitchFamily="18" charset="0"/>
-                      </a:rPr>
-                      <m:t>𝒘</m:t>
-                    </m:r>
-                    <m:r>
-                      <a:rPr lang="en-US" b="1" i="1">
-                        <a:latin typeface="Cambria Math" panose="02040503050406030204" pitchFamily="18" charset="0"/>
-                      </a:rPr>
-                      <m:t> </m:t>
-                    </m:r>
-                    <m:r>
-                      <a:rPr lang="en-US" i="1">
-                        <a:latin typeface="Cambria Math" panose="02040503050406030204" pitchFamily="18" charset="0"/>
-                      </a:rPr>
-                      <m:t>≝</m:t>
-                    </m:r>
-                    <m:sSup>
-                      <m:sSupPr>
-                        <m:ctrlPr>
-                          <a:rPr lang="en-US" i="1">
-                            <a:latin typeface="Cambria Math" panose="02040503050406030204" pitchFamily="18" charset="0"/>
-                          </a:rPr>
-                        </m:ctrlPr>
-                      </m:sSupPr>
-                      <m:e>
-                        <m:d>
-                          <m:dPr>
-                            <m:ctrlPr>
-                              <a:rPr lang="en-US" i="1">
-                                <a:latin typeface="Cambria Math" panose="02040503050406030204" pitchFamily="18" charset="0"/>
-                              </a:rPr>
-                            </m:ctrlPr>
-                          </m:dPr>
-                          <m:e>
-                            <m:sSub>
-                              <m:sSubPr>
-                                <m:ctrlPr>
-                                  <a:rPr lang="en-US" i="1">
-                                    <a:latin typeface="Cambria Math" panose="02040503050406030204" pitchFamily="18" charset="0"/>
-                                  </a:rPr>
-                                </m:ctrlPr>
-                              </m:sSubPr>
-                              <m:e>
-                                <m:r>
-                                  <a:rPr lang="en-US" i="1">
-                                    <a:latin typeface="Cambria Math" panose="02040503050406030204" pitchFamily="18" charset="0"/>
-                                  </a:rPr>
-                                  <m:t>𝑤</m:t>
-                                </m:r>
-                              </m:e>
-                              <m:sub>
-                                <m:r>
-                                  <a:rPr lang="en-US" i="1">
-                                    <a:latin typeface="Cambria Math" panose="02040503050406030204" pitchFamily="18" charset="0"/>
-                                  </a:rPr>
-                                  <m:t>1</m:t>
-                                </m:r>
-                              </m:sub>
-                            </m:sSub>
-                            <m:r>
-                              <a:rPr lang="en-US" i="1">
-                                <a:latin typeface="Cambria Math" panose="02040503050406030204" pitchFamily="18" charset="0"/>
-                              </a:rPr>
-                              <m:t>,</m:t>
-                            </m:r>
-                            <m:sSub>
-                              <m:sSubPr>
-                                <m:ctrlPr>
-                                  <a:rPr lang="en-US" i="1">
-                                    <a:latin typeface="Cambria Math" panose="02040503050406030204" pitchFamily="18" charset="0"/>
-                                  </a:rPr>
-                                </m:ctrlPr>
-                              </m:sSubPr>
-                              <m:e>
-                                <m:r>
-                                  <a:rPr lang="en-US" i="1">
-                                    <a:latin typeface="Cambria Math" panose="02040503050406030204" pitchFamily="18" charset="0"/>
-                                  </a:rPr>
-                                  <m:t>𝑤</m:t>
-                                </m:r>
-                              </m:e>
-                              <m:sub>
-                                <m:r>
-                                  <a:rPr lang="en-US" i="1">
-                                    <a:latin typeface="Cambria Math" panose="02040503050406030204" pitchFamily="18" charset="0"/>
-                                  </a:rPr>
-                                  <m:t>2</m:t>
-                                </m:r>
-                              </m:sub>
-                            </m:sSub>
-                            <m:r>
-                              <a:rPr lang="en-US" i="1">
-                                <a:latin typeface="Cambria Math" panose="02040503050406030204" pitchFamily="18" charset="0"/>
-                              </a:rPr>
-                              <m:t>,…,</m:t>
-                            </m:r>
-                            <m:sSub>
-                              <m:sSubPr>
-                                <m:ctrlPr>
-                                  <a:rPr lang="en-US" i="1">
-                                    <a:latin typeface="Cambria Math" panose="02040503050406030204" pitchFamily="18" charset="0"/>
-                                  </a:rPr>
-                                </m:ctrlPr>
-                              </m:sSubPr>
-                              <m:e>
-                                <m:r>
-                                  <a:rPr lang="en-US" i="1">
-                                    <a:latin typeface="Cambria Math" panose="02040503050406030204" pitchFamily="18" charset="0"/>
-                                  </a:rPr>
-                                  <m:t>𝑤</m:t>
-                                </m:r>
-                              </m:e>
-                              <m:sub>
-                                <m:r>
-                                  <a:rPr lang="en-US" i="1">
-                                    <a:latin typeface="Cambria Math" panose="02040503050406030204" pitchFamily="18" charset="0"/>
-                                  </a:rPr>
-                                  <m:t>𝑑</m:t>
-                                </m:r>
-                              </m:sub>
-                            </m:sSub>
-                          </m:e>
-                        </m:d>
-                      </m:e>
-                      <m:sup>
-                        <m:r>
-                          <a:rPr lang="en-US" i="1">
-                            <a:latin typeface="Cambria Math" panose="02040503050406030204" pitchFamily="18" charset="0"/>
-                          </a:rPr>
-                          <m:t>⊤</m:t>
-                        </m:r>
-                      </m:sup>
-                    </m:sSup>
-                    <m:r>
-                      <a:rPr lang="en-US" i="1">
-                        <a:latin typeface="Cambria Math" panose="02040503050406030204" pitchFamily="18" charset="0"/>
-                        <a:ea typeface="Cambria Math" panose="02040503050406030204" pitchFamily="18" charset="0"/>
-                      </a:rPr>
-                      <m:t> </m:t>
-                    </m:r>
-                  </m:oMath>
-                </a14:m>
-                <a:endParaRPr lang="en-US" dirty="0"/>
-              </a:p>
-              <a:p>
-                <a:r>
-                  <a:rPr lang="en-US" dirty="0"/>
-                  <a:t>C</a:t>
-                </a:r>
-                <a14:m>
-                  <m:oMath xmlns:m="http://schemas.openxmlformats.org/officeDocument/2006/math">
-                    <m:r>
-                      <m:rPr>
-                        <m:sty m:val="p"/>
-                      </m:rPr>
-                      <a:rPr lang="en-US" b="0" i="0" smtClean="0">
-                        <a:latin typeface="Cambria Math" panose="02040503050406030204" pitchFamily="18" charset="0"/>
-                      </a:rPr>
-                      <m:t>hoo</m:t>
-                    </m:r>
-                    <m:r>
-                      <a:rPr lang="en-US" b="0" i="1" smtClean="0">
-                        <a:latin typeface="Cambria Math" panose="02040503050406030204" pitchFamily="18" charset="0"/>
-                      </a:rPr>
-                      <m:t>𝑠𝑒</m:t>
-                    </m:r>
-                    <m:r>
-                      <a:rPr lang="en-US" b="0" i="1" smtClean="0">
-                        <a:latin typeface="Cambria Math" panose="02040503050406030204" pitchFamily="18" charset="0"/>
-                      </a:rPr>
-                      <m:t> </m:t>
-                    </m:r>
-                    <m:acc>
-                      <m:accPr>
-                        <m:chr m:val="̂"/>
-                        <m:ctrlPr>
-                          <a:rPr lang="en-US" i="1">
-                            <a:latin typeface="Cambria Math" panose="02040503050406030204" pitchFamily="18" charset="0"/>
-                          </a:rPr>
-                        </m:ctrlPr>
-                      </m:accPr>
-                      <m:e>
-                        <m:r>
-                          <a:rPr lang="en-US" i="1">
-                            <a:latin typeface="Cambria Math" panose="02040503050406030204" pitchFamily="18" charset="0"/>
-                          </a:rPr>
-                          <m:t>𝑣</m:t>
-                        </m:r>
-                      </m:e>
-                    </m:acc>
-                    <m:d>
-                      <m:dPr>
-                        <m:ctrlPr>
-                          <a:rPr lang="en-US" i="1" dirty="0">
-                            <a:latin typeface="Cambria Math" panose="02040503050406030204" pitchFamily="18" charset="0"/>
-                          </a:rPr>
-                        </m:ctrlPr>
-                      </m:dPr>
-                      <m:e>
-                        <m:r>
-                          <a:rPr lang="en-US" i="1">
-                            <a:latin typeface="Cambria Math" panose="02040503050406030204" pitchFamily="18" charset="0"/>
-                          </a:rPr>
-                          <m:t>𝑠</m:t>
-                        </m:r>
-                        <m:r>
-                          <a:rPr lang="en-US" i="1">
-                            <a:latin typeface="Cambria Math" panose="02040503050406030204" pitchFamily="18" charset="0"/>
-                          </a:rPr>
-                          <m:t>,</m:t>
-                        </m:r>
-                        <m:r>
-                          <a:rPr lang="en-US" b="1" i="1">
-                            <a:latin typeface="Cambria Math" panose="02040503050406030204" pitchFamily="18" charset="0"/>
-                          </a:rPr>
-                          <m:t>𝒘</m:t>
-                        </m:r>
-                      </m:e>
-                    </m:d>
-                    <m:r>
-                      <a:rPr lang="en-US" i="1">
-                        <a:latin typeface="Cambria Math" panose="02040503050406030204" pitchFamily="18" charset="0"/>
-                      </a:rPr>
-                      <m:t>≈</m:t>
-                    </m:r>
-                    <m:sSub>
-                      <m:sSubPr>
-                        <m:ctrlPr>
-                          <a:rPr lang="en-US" i="1">
-                            <a:latin typeface="Cambria Math" panose="02040503050406030204" pitchFamily="18" charset="0"/>
-                          </a:rPr>
-                        </m:ctrlPr>
-                      </m:sSubPr>
-                      <m:e>
-                        <m:r>
-                          <a:rPr lang="en-US" i="1">
-                            <a:latin typeface="Cambria Math" panose="02040503050406030204" pitchFamily="18" charset="0"/>
-                          </a:rPr>
-                          <m:t>𝑣</m:t>
-                        </m:r>
-                      </m:e>
-                      <m:sub>
-                        <m:r>
-                          <a:rPr lang="en-US" i="1">
-                            <a:latin typeface="Cambria Math" panose="02040503050406030204" pitchFamily="18" charset="0"/>
-                          </a:rPr>
-                          <m:t>𝜋</m:t>
-                        </m:r>
-                      </m:sub>
-                    </m:sSub>
-                  </m:oMath>
-                </a14:m>
-                <a:r>
-                  <a:rPr lang="en-US" dirty="0"/>
-                  <a:t> as a </a:t>
-                </a:r>
-                <a:r>
-                  <a:rPr lang="en-US" b="1" dirty="0"/>
-                  <a:t>differentiable function </a:t>
-                </a:r>
-                <a:r>
-                  <a:rPr lang="en-US" dirty="0"/>
-                  <a:t>of </a:t>
-                </a:r>
-                <a14:m>
-                  <m:oMath xmlns:m="http://schemas.openxmlformats.org/officeDocument/2006/math">
-                    <m:r>
-                      <a:rPr lang="en-US" b="1" i="1" smtClean="0">
-                        <a:latin typeface="Cambria Math" panose="02040503050406030204" pitchFamily="18" charset="0"/>
-                      </a:rPr>
-                      <m:t>𝒘</m:t>
-                    </m:r>
-                  </m:oMath>
-                </a14:m>
-                <a:r>
-                  <a:rPr lang="en-US" dirty="0"/>
-                  <a:t> for all </a:t>
-                </a:r>
-                <a14:m>
-                  <m:oMath xmlns:m="http://schemas.openxmlformats.org/officeDocument/2006/math">
-                    <m:r>
-                      <a:rPr lang="en-US" b="0" i="1" smtClean="0">
-                        <a:latin typeface="Cambria Math" panose="02040503050406030204" pitchFamily="18" charset="0"/>
-                      </a:rPr>
-                      <m:t>𝑠</m:t>
-                    </m:r>
-                    <m:r>
-                      <a:rPr lang="en-US" b="0" i="1" smtClean="0">
-                        <a:latin typeface="Cambria Math" panose="02040503050406030204" pitchFamily="18" charset="0"/>
-                        <a:ea typeface="Cambria Math" panose="02040503050406030204" pitchFamily="18" charset="0"/>
-                      </a:rPr>
-                      <m:t>=</m:t>
-                    </m:r>
-                    <m:r>
-                      <a:rPr lang="en-US" b="0" i="1" smtClean="0">
-                        <a:latin typeface="Cambria Math" panose="02040503050406030204" pitchFamily="18" charset="0"/>
-                        <a:ea typeface="Cambria Math" panose="02040503050406030204" pitchFamily="18" charset="0"/>
-                      </a:rPr>
-                      <m:t>𝒮</m:t>
-                    </m:r>
-                  </m:oMath>
-                </a14:m>
-                <a:endParaRPr lang="en-US" b="0" dirty="0">
-                  <a:ea typeface="Cambria Math" panose="02040503050406030204" pitchFamily="18" charset="0"/>
-                </a:endParaRPr>
-              </a:p>
-              <a:p>
-                <a:endParaRPr lang="en-US" dirty="0"/>
-              </a:p>
-              <a:p>
-                <a:pPr marL="0" indent="0">
-                  <a:buNone/>
-                </a:pPr>
-                <a:r>
-                  <a:rPr lang="en-US" b="1" dirty="0"/>
-                  <a:t>Updates</a:t>
-                </a:r>
-              </a:p>
-              <a:p>
-                <a:r>
-                  <a:rPr lang="en-US" dirty="0"/>
-                  <a:t>Following </a:t>
-                </a:r>
-                <a14:m>
-                  <m:oMath xmlns:m="http://schemas.openxmlformats.org/officeDocument/2006/math">
-                    <m:r>
-                      <a:rPr lang="en-US" b="0" i="1" smtClean="0">
-                        <a:latin typeface="Cambria Math" panose="02040503050406030204" pitchFamily="18" charset="0"/>
-                      </a:rPr>
-                      <m:t>𝜋</m:t>
-                    </m:r>
-                  </m:oMath>
-                </a14:m>
-                <a:r>
-                  <a:rPr lang="en-US" dirty="0"/>
-                  <a:t>, we observe at each discrete time step </a:t>
-                </a:r>
-                <a14:m>
-                  <m:oMath xmlns:m="http://schemas.openxmlformats.org/officeDocument/2006/math">
-                    <m:r>
-                      <a:rPr lang="en-US" b="0" i="1" smtClean="0">
-                        <a:latin typeface="Cambria Math" panose="02040503050406030204" pitchFamily="18" charset="0"/>
-                      </a:rPr>
-                      <m:t>𝑡</m:t>
-                    </m:r>
-                    <m:r>
-                      <a:rPr lang="en-US" b="0" i="1" smtClean="0">
-                        <a:latin typeface="Cambria Math" panose="02040503050406030204" pitchFamily="18" charset="0"/>
-                      </a:rPr>
-                      <m:t>=0, 1, 2, 3, …</m:t>
-                    </m:r>
-                    <m:r>
-                      <a:rPr lang="en-US" b="1" i="0" smtClean="0">
-                        <a:latin typeface="Cambria Math" panose="02040503050406030204" pitchFamily="18" charset="0"/>
-                      </a:rPr>
-                      <m:t> </m:t>
-                    </m:r>
-                  </m:oMath>
-                </a14:m>
-                <a:r>
-                  <a:rPr lang="en-US" dirty="0"/>
-                  <a:t>a new examples </a:t>
-                </a:r>
-                <a14:m>
-                  <m:oMath xmlns:m="http://schemas.openxmlformats.org/officeDocument/2006/math">
-                    <m:sSub>
-                      <m:sSubPr>
-                        <m:ctrlPr>
-                          <a:rPr lang="en-US" b="0" i="1" smtClean="0">
-                            <a:latin typeface="Cambria Math" panose="02040503050406030204" pitchFamily="18" charset="0"/>
-                          </a:rPr>
-                        </m:ctrlPr>
-                      </m:sSubPr>
-                      <m:e>
-                        <m:r>
-                          <a:rPr lang="en-US" b="0" i="1" smtClean="0">
-                            <a:latin typeface="Cambria Math" panose="02040503050406030204" pitchFamily="18" charset="0"/>
-                          </a:rPr>
-                          <m:t>𝑆</m:t>
-                        </m:r>
-                      </m:e>
-                      <m:sub>
-                        <m:r>
-                          <a:rPr lang="en-US" b="0" i="1" smtClean="0">
-                            <a:latin typeface="Cambria Math" panose="02040503050406030204" pitchFamily="18" charset="0"/>
-                          </a:rPr>
-                          <m:t>𝑡</m:t>
-                        </m:r>
-                      </m:sub>
-                    </m:sSub>
-                    <m:r>
-                      <a:rPr lang="en-US" b="0" i="1" smtClean="0">
-                        <a:latin typeface="Cambria Math" panose="02040503050406030204" pitchFamily="18" charset="0"/>
-                        <a:ea typeface="Cambria Math" panose="02040503050406030204" pitchFamily="18" charset="0"/>
-                      </a:rPr>
-                      <m:t>↦</m:t>
-                    </m:r>
-                    <m:sSub>
-                      <m:sSubPr>
-                        <m:ctrlPr>
-                          <a:rPr lang="en-US" b="0" i="1" smtClean="0">
-                            <a:latin typeface="Cambria Math" panose="02040503050406030204" pitchFamily="18" charset="0"/>
-                            <a:ea typeface="Cambria Math" panose="02040503050406030204" pitchFamily="18" charset="0"/>
-                          </a:rPr>
-                        </m:ctrlPr>
-                      </m:sSubPr>
-                      <m:e>
-                        <m:r>
-                          <a:rPr lang="en-US" b="0" i="1" smtClean="0">
-                            <a:latin typeface="Cambria Math" panose="02040503050406030204" pitchFamily="18" charset="0"/>
-                            <a:ea typeface="Cambria Math" panose="02040503050406030204" pitchFamily="18" charset="0"/>
-                          </a:rPr>
-                          <m:t>𝑣</m:t>
-                        </m:r>
-                      </m:e>
-                      <m:sub>
-                        <m:r>
-                          <a:rPr lang="en-US" b="0" i="1" smtClean="0">
-                            <a:latin typeface="Cambria Math" panose="02040503050406030204" pitchFamily="18" charset="0"/>
-                            <a:ea typeface="Cambria Math" panose="02040503050406030204" pitchFamily="18" charset="0"/>
-                          </a:rPr>
-                          <m:t>𝜋</m:t>
-                        </m:r>
-                      </m:sub>
-                    </m:sSub>
-                    <m:r>
-                      <a:rPr lang="en-US" b="0" i="1" smtClean="0">
-                        <a:latin typeface="Cambria Math" panose="02040503050406030204" pitchFamily="18" charset="0"/>
-                        <a:ea typeface="Cambria Math" panose="02040503050406030204" pitchFamily="18" charset="0"/>
-                      </a:rPr>
-                      <m:t>(</m:t>
-                    </m:r>
-                    <m:sSub>
-                      <m:sSubPr>
-                        <m:ctrlPr>
-                          <a:rPr lang="en-US" b="0" i="1" smtClean="0">
-                            <a:latin typeface="Cambria Math" panose="02040503050406030204" pitchFamily="18" charset="0"/>
-                            <a:ea typeface="Cambria Math" panose="02040503050406030204" pitchFamily="18" charset="0"/>
-                          </a:rPr>
-                        </m:ctrlPr>
-                      </m:sSubPr>
-                      <m:e>
-                        <m:r>
-                          <a:rPr lang="en-US" b="0" i="1" smtClean="0">
-                            <a:latin typeface="Cambria Math" panose="02040503050406030204" pitchFamily="18" charset="0"/>
-                            <a:ea typeface="Cambria Math" panose="02040503050406030204" pitchFamily="18" charset="0"/>
-                          </a:rPr>
-                          <m:t>𝑆</m:t>
-                        </m:r>
-                      </m:e>
-                      <m:sub>
-                        <m:r>
-                          <a:rPr lang="en-US" b="0" i="1" smtClean="0">
-                            <a:latin typeface="Cambria Math" panose="02040503050406030204" pitchFamily="18" charset="0"/>
-                            <a:ea typeface="Cambria Math" panose="02040503050406030204" pitchFamily="18" charset="0"/>
-                          </a:rPr>
-                          <m:t>𝑡</m:t>
-                        </m:r>
-                      </m:sub>
-                    </m:sSub>
-                    <m:r>
-                      <a:rPr lang="en-US" b="0" i="1" smtClean="0">
-                        <a:latin typeface="Cambria Math" panose="02040503050406030204" pitchFamily="18" charset="0"/>
-                        <a:ea typeface="Cambria Math" panose="02040503050406030204" pitchFamily="18" charset="0"/>
-                      </a:rPr>
-                      <m:t>)</m:t>
-                    </m:r>
-                  </m:oMath>
-                </a14:m>
-                <a:r>
-                  <a:rPr lang="en-US" dirty="0"/>
-                  <a:t>.</a:t>
-                </a:r>
-              </a:p>
-              <a:p>
-                <a:r>
-                  <a:rPr lang="en-US" dirty="0"/>
-                  <a:t>We assume examples appear following the distribution </a:t>
-                </a:r>
-                <a14:m>
-                  <m:oMath xmlns:m="http://schemas.openxmlformats.org/officeDocument/2006/math">
-                    <m:r>
-                      <a:rPr lang="en-US" b="0" i="1" smtClean="0">
-                        <a:latin typeface="Cambria Math" panose="02040503050406030204" pitchFamily="18" charset="0"/>
-                      </a:rPr>
-                      <m:t>𝜇</m:t>
-                    </m:r>
-                  </m:oMath>
-                </a14:m>
-                <a:r>
-                  <a:rPr lang="en-US" dirty="0"/>
-                  <a:t>.</a:t>
-                </a:r>
-              </a:p>
-              <a:p>
-                <a:r>
-                  <a:rPr lang="en-US" dirty="0"/>
-                  <a:t>Update </a:t>
-                </a:r>
-                <a14:m>
-                  <m:oMath xmlns:m="http://schemas.openxmlformats.org/officeDocument/2006/math">
-                    <m:r>
-                      <a:rPr lang="en-US" b="1" i="1">
-                        <a:latin typeface="Cambria Math" panose="02040503050406030204" pitchFamily="18" charset="0"/>
-                      </a:rPr>
-                      <m:t>𝒘</m:t>
-                    </m:r>
-                  </m:oMath>
-                </a14:m>
-                <a:r>
-                  <a:rPr lang="en-US" dirty="0"/>
-                  <a:t> (we use </a:t>
-                </a:r>
-                <a14:m>
-                  <m:oMath xmlns:m="http://schemas.openxmlformats.org/officeDocument/2006/math">
-                    <m:sSub>
-                      <m:sSubPr>
-                        <m:ctrlPr>
-                          <a:rPr lang="en-US" b="1" i="1" smtClean="0">
-                            <a:latin typeface="Cambria Math" panose="02040503050406030204" pitchFamily="18" charset="0"/>
-                          </a:rPr>
-                        </m:ctrlPr>
-                      </m:sSubPr>
-                      <m:e>
-                        <m:r>
-                          <a:rPr lang="en-US" b="1" i="1">
-                            <a:latin typeface="Cambria Math" panose="02040503050406030204" pitchFamily="18" charset="0"/>
-                          </a:rPr>
-                          <m:t>𝒘</m:t>
-                        </m:r>
-                      </m:e>
-                      <m:sub>
-                        <m:r>
-                          <a:rPr lang="en-US" b="0" i="1" smtClean="0">
-                            <a:latin typeface="Cambria Math" panose="02040503050406030204" pitchFamily="18" charset="0"/>
-                          </a:rPr>
-                          <m:t>𝑡</m:t>
-                        </m:r>
-                      </m:sub>
-                    </m:sSub>
-                  </m:oMath>
-                </a14:m>
-                <a:r>
-                  <a:rPr lang="en-US" dirty="0"/>
-                  <a:t> for the weights at time </a:t>
-                </a:r>
-                <a14:m>
-                  <m:oMath xmlns:m="http://schemas.openxmlformats.org/officeDocument/2006/math">
-                    <m:r>
-                      <a:rPr lang="en-US" b="0" i="1" smtClean="0">
-                        <a:latin typeface="Cambria Math" panose="02040503050406030204" pitchFamily="18" charset="0"/>
-                      </a:rPr>
-                      <m:t>𝑡</m:t>
-                    </m:r>
-                  </m:oMath>
-                </a14:m>
-                <a:r>
-                  <a:rPr lang="en-US" dirty="0"/>
-                  <a:t>) to minimize </a:t>
-                </a:r>
-                <a14:m>
-                  <m:oMath xmlns:m="http://schemas.openxmlformats.org/officeDocument/2006/math">
-                    <m:acc>
-                      <m:accPr>
-                        <m:chr m:val="̅"/>
-                        <m:ctrlPr>
-                          <a:rPr lang="en-US" i="1" smtClean="0">
-                            <a:latin typeface="Cambria Math" panose="02040503050406030204" pitchFamily="18" charset="0"/>
-                          </a:rPr>
-                        </m:ctrlPr>
-                      </m:accPr>
-                      <m:e>
-                        <m:r>
-                          <a:rPr lang="en-US" b="0" i="1" smtClean="0">
-                            <a:latin typeface="Cambria Math" panose="02040503050406030204" pitchFamily="18" charset="0"/>
-                          </a:rPr>
-                          <m:t>𝑉𝐸</m:t>
-                        </m:r>
-                      </m:e>
-                    </m:acc>
-                  </m:oMath>
-                </a14:m>
-                <a:endParaRPr lang="en-US" dirty="0"/>
-              </a:p>
-              <a:p>
-                <a:endParaRPr lang="en-US" dirty="0"/>
-              </a:p>
-              <a:p>
-                <a:endParaRPr lang="en-US" dirty="0"/>
-              </a:p>
-            </p:txBody>
-          </p:sp>
-        </mc:Choice>
-        <mc:Fallback xmlns="">
-          <p:sp>
-            <p:nvSpPr>
-              <p:cNvPr id="3" name="Content Placeholder 2">
-                <a:extLst>
-                  <a:ext uri="{FF2B5EF4-FFF2-40B4-BE49-F238E27FC236}">
-                    <a16:creationId xmlns:a16="http://schemas.microsoft.com/office/drawing/2014/main" id="{429671F6-58E1-5895-8D89-7778F6212AA2}"/>
-                  </a:ext>
-                </a:extLst>
-              </p:cNvPr>
-              <p:cNvSpPr>
-                <a:spLocks noGrp="1" noRot="1" noChangeAspect="1" noMove="1" noResize="1" noEditPoints="1" noAdjustHandles="1" noChangeArrowheads="1" noChangeShapeType="1" noTextEdit="1"/>
-              </p:cNvSpPr>
-              <p:nvPr>
-                <p:ph idx="1"/>
-              </p:nvPr>
-            </p:nvSpPr>
-            <p:spPr>
-              <a:blipFill>
-                <a:blip r:embed="rId2"/>
-                <a:stretch>
-                  <a:fillRect l="-1217" t="-2806"/>
-                </a:stretch>
-              </a:blipFill>
-            </p:spPr>
-            <p:txBody>
-              <a:bodyPr/>
-              <a:lstStyle/>
-              <a:p>
-                <a:r>
-                  <a:rPr lang="en-US">
-                    <a:noFill/>
-                  </a:rPr>
-                  <a:t> </a:t>
-                </a:r>
-              </a:p>
-            </p:txBody>
-          </p:sp>
-        </mc:Fallback>
-      </mc:AlternateContent>
-    </p:spTree>
-    <p:extLst>
-      <p:ext uri="{BB962C8B-B14F-4D97-AF65-F5344CB8AC3E}">
-        <p14:creationId xmlns:p14="http://schemas.microsoft.com/office/powerpoint/2010/main" val="764715246"/>
       </p:ext>
     </p:extLst>
   </p:cSld>

--- a/slides/Lecture_Chapter09.pptx
+++ b/slides/Lecture_Chapter09.pptx
@@ -290,7 +290,7 @@
           <a:p>
             <a:fld id="{2987FC57-34F3-4A88-970B-010E7C0EC943}" type="datetimeFigureOut">
               <a:rPr lang="en-US" smtClean="0"/>
-              <a:t>2/25/2026</a:t>
+              <a:t>3/23/2026</a:t>
             </a:fld>
             <a:endParaRPr lang="en-US"/>
           </a:p>
@@ -872,7 +872,7 @@
           <a:p>
             <a:fld id="{3E22BF2E-04DA-469E-97C5-BB68A0368813}" type="datetimeFigureOut">
               <a:rPr lang="en-US" smtClean="0"/>
-              <a:t>2/25/2026</a:t>
+              <a:t>3/23/2026</a:t>
             </a:fld>
             <a:endParaRPr lang="en-US"/>
           </a:p>
@@ -1070,7 +1070,7 @@
           <a:p>
             <a:fld id="{3E22BF2E-04DA-469E-97C5-BB68A0368813}" type="datetimeFigureOut">
               <a:rPr lang="en-US" smtClean="0"/>
-              <a:t>2/25/2026</a:t>
+              <a:t>3/23/2026</a:t>
             </a:fld>
             <a:endParaRPr lang="en-US"/>
           </a:p>
@@ -1278,7 +1278,7 @@
           <a:p>
             <a:fld id="{3E22BF2E-04DA-469E-97C5-BB68A0368813}" type="datetimeFigureOut">
               <a:rPr lang="en-US" smtClean="0"/>
-              <a:t>2/25/2026</a:t>
+              <a:t>3/23/2026</a:t>
             </a:fld>
             <a:endParaRPr lang="en-US"/>
           </a:p>
@@ -1486,7 +1486,7 @@
           <a:p>
             <a:fld id="{3E22BF2E-04DA-469E-97C5-BB68A0368813}" type="datetimeFigureOut">
               <a:rPr lang="en-US" smtClean="0"/>
-              <a:t>2/25/2026</a:t>
+              <a:t>3/23/2026</a:t>
             </a:fld>
             <a:endParaRPr lang="en-US"/>
           </a:p>
@@ -1761,7 +1761,7 @@
           <a:p>
             <a:fld id="{3E22BF2E-04DA-469E-97C5-BB68A0368813}" type="datetimeFigureOut">
               <a:rPr lang="en-US" smtClean="0"/>
-              <a:t>2/25/2026</a:t>
+              <a:t>3/23/2026</a:t>
             </a:fld>
             <a:endParaRPr lang="en-US"/>
           </a:p>
@@ -2026,7 +2026,7 @@
           <a:p>
             <a:fld id="{3E22BF2E-04DA-469E-97C5-BB68A0368813}" type="datetimeFigureOut">
               <a:rPr lang="en-US" smtClean="0"/>
-              <a:t>2/25/2026</a:t>
+              <a:t>3/23/2026</a:t>
             </a:fld>
             <a:endParaRPr lang="en-US"/>
           </a:p>
@@ -2438,7 +2438,7 @@
           <a:p>
             <a:fld id="{3E22BF2E-04DA-469E-97C5-BB68A0368813}" type="datetimeFigureOut">
               <a:rPr lang="en-US" smtClean="0"/>
-              <a:t>2/25/2026</a:t>
+              <a:t>3/23/2026</a:t>
             </a:fld>
             <a:endParaRPr lang="en-US"/>
           </a:p>
@@ -2579,7 +2579,7 @@
           <a:p>
             <a:fld id="{3E22BF2E-04DA-469E-97C5-BB68A0368813}" type="datetimeFigureOut">
               <a:rPr lang="en-US" smtClean="0"/>
-              <a:t>2/25/2026</a:t>
+              <a:t>3/23/2026</a:t>
             </a:fld>
             <a:endParaRPr lang="en-US"/>
           </a:p>
@@ -2692,7 +2692,7 @@
           <a:p>
             <a:fld id="{3E22BF2E-04DA-469E-97C5-BB68A0368813}" type="datetimeFigureOut">
               <a:rPr lang="en-US" smtClean="0"/>
-              <a:t>2/25/2026</a:t>
+              <a:t>3/23/2026</a:t>
             </a:fld>
             <a:endParaRPr lang="en-US"/>
           </a:p>
@@ -3003,7 +3003,7 @@
           <a:p>
             <a:fld id="{3E22BF2E-04DA-469E-97C5-BB68A0368813}" type="datetimeFigureOut">
               <a:rPr lang="en-US" smtClean="0"/>
-              <a:t>2/25/2026</a:t>
+              <a:t>3/23/2026</a:t>
             </a:fld>
             <a:endParaRPr lang="en-US"/>
           </a:p>
@@ -3291,7 +3291,7 @@
           <a:p>
             <a:fld id="{3E22BF2E-04DA-469E-97C5-BB68A0368813}" type="datetimeFigureOut">
               <a:rPr lang="en-US" smtClean="0"/>
-              <a:t>2/25/2026</a:t>
+              <a:t>3/23/2026</a:t>
             </a:fld>
             <a:endParaRPr lang="en-US"/>
           </a:p>
@@ -3532,7 +3532,7 @@
           <a:p>
             <a:fld id="{3E22BF2E-04DA-469E-97C5-BB68A0368813}" type="datetimeFigureOut">
               <a:rPr lang="en-US" smtClean="0"/>
-              <a:t>2/25/2026</a:t>
+              <a:t>3/23/2026</a:t>
             </a:fld>
             <a:endParaRPr lang="en-US"/>
           </a:p>
@@ -5098,6 +5098,9 @@
                     </m:r>
                   </m:oMath>
                 </a14:m>
+                <a:br>
+                  <a:rPr lang="en-US" dirty="0"/>
+                </a:br>
                 <a:r>
                   <a:rPr lang="en-US" dirty="0"/>
                   <a:t>a new example </a:t>
@@ -5281,7 +5284,7 @@
                 </a14:m>
                 <a:r>
                   <a:rPr lang="en-US" dirty="0"/>
-                  <a:t> (i.e., make </a:t>
+                  <a:t>. I.e., make </a:t>
                 </a:r>
                 <a14:m>
                   <m:oMath xmlns:m="http://schemas.openxmlformats.org/officeDocument/2006/math">
@@ -5372,7 +5375,7 @@
                 </a14:m>
                 <a:r>
                   <a:rPr lang="en-US" dirty="0"/>
-                  <a:t>).</a:t>
+                  <a:t>.</a:t>
                 </a:r>
                 <a:br>
                   <a:rPr lang="en-US" dirty="0"/>
@@ -5460,8 +5463,8 @@
           </p:sp>
         </mc:Fallback>
       </mc:AlternateContent>
-      <mc:AlternateContent xmlns:mc="http://schemas.openxmlformats.org/markup-compatibility/2006">
-        <mc:Choice xmlns:a14="http://schemas.microsoft.com/office/drawing/2010/main" Requires="a14">
+      <mc:AlternateContent xmlns:mc="http://schemas.openxmlformats.org/markup-compatibility/2006" xmlns:a14="http://schemas.microsoft.com/office/drawing/2010/main">
+        <mc:Choice Requires="a14">
           <p:sp>
             <p:nvSpPr>
               <p:cNvPr id="4" name="Speech Bubble: Rectangle with Corners Rounded 3">
@@ -5591,7 +5594,7 @@
             </p:txBody>
           </p:sp>
         </mc:Choice>
-        <mc:Fallback>
+        <mc:Fallback xmlns="">
           <p:sp>
             <p:nvSpPr>
               <p:cNvPr id="4" name="Speech Bubble: Rectangle with Corners Rounded 3">
@@ -5640,8 +5643,8 @@
           </p:sp>
         </mc:Fallback>
       </mc:AlternateContent>
-      <mc:AlternateContent xmlns:mc="http://schemas.openxmlformats.org/markup-compatibility/2006">
-        <mc:Choice xmlns:a14="http://schemas.microsoft.com/office/drawing/2010/main" Requires="a14">
+      <mc:AlternateContent xmlns:mc="http://schemas.openxmlformats.org/markup-compatibility/2006" xmlns:a14="http://schemas.microsoft.com/office/drawing/2010/main">
+        <mc:Choice Requires="a14">
           <p:sp>
             <p:nvSpPr>
               <p:cNvPr id="6" name="TextBox 5">
@@ -5899,7 +5902,7 @@
             </p:txBody>
           </p:sp>
         </mc:Choice>
-        <mc:Fallback>
+        <mc:Fallback xmlns="">
           <p:sp>
             <p:nvSpPr>
               <p:cNvPr id="6" name="TextBox 5">
@@ -6036,33 +6039,15 @@
                                   </p:childTnLst>
                                 </p:cTn>
                               </p:par>
-                            </p:childTnLst>
-                          </p:cTn>
-                        </p:par>
-                      </p:childTnLst>
-                    </p:cTn>
-                  </p:par>
-                  <p:par>
-                    <p:cTn id="9" fill="hold">
-                      <p:stCondLst>
-                        <p:cond delay="indefinite"/>
-                      </p:stCondLst>
-                      <p:childTnLst>
-                        <p:par>
-                          <p:cTn id="10" fill="hold">
-                            <p:stCondLst>
-                              <p:cond delay="0"/>
-                            </p:stCondLst>
-                            <p:childTnLst>
                               <p:par>
-                                <p:cTn id="11" presetID="1" presetClass="entr" presetSubtype="0" fill="hold" grpId="0" nodeType="clickEffect">
+                                <p:cTn id="9" presetID="1" presetClass="entr" presetSubtype="0" fill="hold" grpId="0" nodeType="withEffect">
                                   <p:stCondLst>
                                     <p:cond delay="0"/>
                                   </p:stCondLst>
                                   <p:childTnLst>
                                     <p:set>
                                       <p:cBhvr>
-                                        <p:cTn id="12" dur="1" fill="hold">
+                                        <p:cTn id="10" dur="1" fill="hold">
                                           <p:stCondLst>
                                             <p:cond delay="0"/>
                                           </p:stCondLst>
@@ -6088,26 +6073,26 @@
                     </p:cTn>
                   </p:par>
                   <p:par>
-                    <p:cTn id="13" fill="hold">
+                    <p:cTn id="11" fill="hold">
                       <p:stCondLst>
                         <p:cond delay="indefinite"/>
                       </p:stCondLst>
                       <p:childTnLst>
                         <p:par>
-                          <p:cTn id="14" fill="hold">
+                          <p:cTn id="12" fill="hold">
                             <p:stCondLst>
                               <p:cond delay="0"/>
                             </p:stCondLst>
                             <p:childTnLst>
                               <p:par>
-                                <p:cTn id="15" presetID="1" presetClass="entr" presetSubtype="0" fill="hold" nodeType="clickEffect">
+                                <p:cTn id="13" presetID="1" presetClass="entr" presetSubtype="0" fill="hold" nodeType="clickEffect">
                                   <p:stCondLst>
                                     <p:cond delay="0"/>
                                   </p:stCondLst>
                                   <p:childTnLst>
                                     <p:set>
                                       <p:cBhvr>
-                                        <p:cTn id="16" dur="1" fill="hold">
+                                        <p:cTn id="14" dur="1" fill="hold">
                                           <p:stCondLst>
                                             <p:cond delay="0"/>
                                           </p:stCondLst>
@@ -6131,14 +6116,14 @@
                                 </p:cTn>
                               </p:par>
                               <p:par>
-                                <p:cTn id="17" presetID="1" presetClass="entr" presetSubtype="0" fill="hold" grpId="0" nodeType="withEffect">
+                                <p:cTn id="15" presetID="1" presetClass="entr" presetSubtype="0" fill="hold" grpId="0" nodeType="withEffect">
                                   <p:stCondLst>
                                     <p:cond delay="0"/>
                                   </p:stCondLst>
                                   <p:childTnLst>
                                     <p:set>
                                       <p:cBhvr>
-                                        <p:cTn id="18" dur="1" fill="hold">
+                                        <p:cTn id="16" dur="1" fill="hold">
                                           <p:stCondLst>
                                             <p:cond delay="0"/>
                                           </p:stCondLst>
@@ -6209,8 +6194,8 @@
           <a:chExt cx="0" cy="0"/>
         </a:xfrm>
       </p:grpSpPr>
-      <mc:AlternateContent xmlns:mc="http://schemas.openxmlformats.org/markup-compatibility/2006">
-        <mc:Choice xmlns:a14="http://schemas.microsoft.com/office/drawing/2010/main" Requires="a14">
+      <mc:AlternateContent xmlns:mc="http://schemas.openxmlformats.org/markup-compatibility/2006" xmlns:a14="http://schemas.microsoft.com/office/drawing/2010/main">
+        <mc:Choice Requires="a14">
           <p:sp>
             <p:nvSpPr>
               <p:cNvPr id="3" name="Content Placeholder 2">
@@ -6862,13 +6847,7 @@
                       <a:rPr lang="en-US" b="0" i="1" smtClean="0">
                         <a:latin typeface="Cambria Math" panose="02040503050406030204" pitchFamily="18" charset="0"/>
                       </a:rPr>
-                      <m:t>                         </m:t>
-                    </m:r>
-                    <m:r>
-                      <a:rPr lang="en-US" b="0" i="1" smtClean="0">
-                        <a:latin typeface="Cambria Math" panose="02040503050406030204" pitchFamily="18" charset="0"/>
-                      </a:rPr>
-                      <m:t>= </m:t>
+                      <m:t>                         = </m:t>
                     </m:r>
                     <m:sSub>
                       <m:sSubPr>
@@ -7644,7 +7623,7 @@
             </p:txBody>
           </p:sp>
         </mc:Choice>
-        <mc:Fallback>
+        <mc:Fallback xmlns="">
           <p:sp>
             <p:nvSpPr>
               <p:cNvPr id="3" name="Content Placeholder 2">
@@ -7711,7 +7690,7 @@
           <a:p>
             <a:r>
               <a:rPr lang="en-US" dirty="0"/>
-              <a:t>Stochastic-gradient Descend (SGD)</a:t>
+              <a:t>SGD: Stochastic-gradient Descend</a:t>
             </a:r>
           </a:p>
         </p:txBody>
@@ -8324,10 +8303,15 @@
                 <p:ph idx="1"/>
               </p:nvPr>
             </p:nvSpPr>
-            <p:spPr/>
+            <p:spPr>
+              <a:xfrm>
+                <a:off x="838200" y="1397330"/>
+                <a:ext cx="10515600" cy="4980024"/>
+              </a:xfrm>
+            </p:spPr>
             <p:txBody>
               <a:bodyPr>
-                <a:normAutofit fontScale="70000" lnSpcReduction="20000"/>
+                <a:normAutofit fontScale="62500" lnSpcReduction="20000"/>
               </a:bodyPr>
               <a:lstStyle/>
               <a:p>
@@ -8349,7 +8333,7 @@
                 </a:r>
                 <a:r>
                   <a:rPr lang="en-US" dirty="0"/>
-                  <a:t>is met:</a:t>
+                  <a:t>(Robbins–Monro conditions) is met:</a:t>
                 </a:r>
                 <a:br>
                   <a:rPr lang="en-US" dirty="0"/>
@@ -8780,7 +8764,7 @@
                 </a14:m>
                 <a:r>
                   <a:rPr lang="en-US" dirty="0"/>
-                  <a:t>    leads to sample averaging.  Not appropriate for TD or approximation!</a:t>
+                  <a:t>   which leads to sample averaging.  Not appropriate for TD or approximation!</a:t>
                 </a:r>
               </a:p>
               <a:p>
@@ -8801,13 +8785,7 @@
                       <a:rPr lang="en-US" i="1">
                         <a:latin typeface="Cambria Math" panose="02040503050406030204" pitchFamily="18" charset="0"/>
                       </a:rPr>
-                      <m:t>=</m:t>
-                    </m:r>
-                    <m:r>
-                      <a:rPr lang="en-US" i="1">
-                        <a:latin typeface="Cambria Math" panose="02040503050406030204" pitchFamily="18" charset="0"/>
-                      </a:rPr>
-                      <m:t>1/</m:t>
+                      <m:t>=1/</m:t>
                     </m:r>
                     <m:r>
                       <a:rPr lang="en-US" i="1">
@@ -8954,35 +8932,46 @@
               <a:p>
                 <a:r>
                   <a:rPr lang="en-US" b="1" dirty="0"/>
-                  <a:t>How to Choose in Practice</a:t>
+                  <a:t>How to choose </a:t>
+                </a:r>
+                <a14:m>
+                  <m:oMath xmlns:m="http://schemas.openxmlformats.org/officeDocument/2006/math">
+                    <m:r>
+                      <a:rPr lang="en-US" b="1" i="1" smtClean="0">
+                        <a:latin typeface="Cambria Math" panose="02040503050406030204" pitchFamily="18" charset="0"/>
+                      </a:rPr>
+                      <m:t>𝜶</m:t>
+                    </m:r>
+                  </m:oMath>
+                </a14:m>
+                <a:r>
+                  <a:rPr lang="en-US" b="1" dirty="0"/>
+                  <a:t> in practice</a:t>
                 </a:r>
               </a:p>
               <a:p>
                 <a:pPr lvl="1"/>
                 <a:r>
                   <a:rPr lang="en-US" dirty="0"/>
-                  <a:t>If learning diverges: reduce </a:t>
+                  <a:t>Typical values: </a:t>
                 </a:r>
                 <a14:m>
                   <m:oMath xmlns:m="http://schemas.openxmlformats.org/officeDocument/2006/math">
                     <m:r>
-                      <a:rPr lang="en-US" b="0" i="1" smtClean="0">
-                        <a:latin typeface="Cambria Math" panose="02040503050406030204" pitchFamily="18" charset="0"/>
-                      </a:rPr>
-                      <m:t>𝛼</m:t>
+                      <a:rPr lang="en-US" i="1" dirty="0" smtClean="0">
+                        <a:latin typeface="Cambria Math" panose="02040503050406030204" pitchFamily="18" charset="0"/>
+                      </a:rPr>
+                      <m:t>0.1, 0.01, 0.001</m:t>
                     </m:r>
                   </m:oMath>
                 </a14:m>
-                <a:r>
-                  <a:rPr lang="en-US" dirty="0"/>
-                  <a:t> by a factor of 10</a:t>
-                </a:r>
+                <a:endParaRPr lang="en-US" dirty="0"/>
               </a:p>
               <a:p>
                 <a:pPr lvl="1"/>
                 <a:r>
                   <a:rPr lang="en-US" dirty="0"/>
-                  <a:t>If learning is too slow: increase </a:t>
+                  <a:t>If learning diverges: reduce </a:t>
                 </a:r>
                 <a14:m>
                   <m:oMath xmlns:m="http://schemas.openxmlformats.org/officeDocument/2006/math">
@@ -8996,21 +8985,36 @@
                 </a14:m>
                 <a:r>
                   <a:rPr lang="en-US" dirty="0"/>
-                  <a:t> bey a factor of 2 to 5.</a:t>
+                  <a:t> by a factor of 10</a:t>
                 </a:r>
               </a:p>
               <a:p>
                 <a:pPr lvl="1"/>
                 <a:r>
                   <a:rPr lang="en-US" dirty="0"/>
-                  <a:t>Plot learning curve.</a:t>
+                  <a:t>If learning is too slow: increase </a:t>
+                </a:r>
+                <a14:m>
+                  <m:oMath xmlns:m="http://schemas.openxmlformats.org/officeDocument/2006/math">
+                    <m:r>
+                      <a:rPr lang="en-US" b="0" i="1" smtClean="0">
+                        <a:latin typeface="Cambria Math" panose="02040503050406030204" pitchFamily="18" charset="0"/>
+                      </a:rPr>
+                      <m:t>𝛼</m:t>
+                    </m:r>
+                  </m:oMath>
+                </a14:m>
+                <a:r>
+                  <a:rPr lang="en-US" dirty="0"/>
+                  <a:t> bey a factor of 2 to 5.</a:t>
                 </a:r>
               </a:p>
               <a:p>
-                <a:endParaRPr lang="en-US" dirty="0"/>
-              </a:p>
-              <a:p>
-                <a:endParaRPr lang="en-US" dirty="0"/>
+                <a:pPr lvl="1"/>
+                <a:r>
+                  <a:rPr lang="en-US" dirty="0"/>
+                  <a:t>Plot learning curve.</a:t>
+                </a:r>
               </a:p>
             </p:txBody>
           </p:sp>
@@ -9033,10 +9037,14 @@
               </p:nvPr>
             </p:nvSpPr>
             <p:spPr>
+              <a:xfrm>
+                <a:off x="838200" y="1397330"/>
+                <a:ext cx="10515600" cy="4980024"/>
+              </a:xfrm>
               <a:blipFill>
                 <a:blip r:embed="rId2"/>
                 <a:stretch>
-                  <a:fillRect l="-522" t="-15816" r="-580" b="-1913"/>
+                  <a:fillRect l="-406" t="-9547"/>
                 </a:stretch>
               </a:blipFill>
             </p:spPr>
@@ -9069,13 +9077,13 @@
         </p:nvSpPr>
         <p:spPr>
           <a:xfrm>
-            <a:off x="4579494" y="5041021"/>
+            <a:off x="4593562" y="4867519"/>
             <a:ext cx="2570813" cy="292307"/>
           </a:xfrm>
           <a:prstGeom prst="wedgeRoundRectCallout">
             <a:avLst>
-              <a:gd name="adj1" fmla="val -100544"/>
-              <a:gd name="adj2" fmla="val -128955"/>
+              <a:gd name="adj1" fmla="val -110029"/>
+              <a:gd name="adj2" fmla="val -100079"/>
               <a:gd name="adj3" fmla="val 16667"/>
             </a:avLst>
           </a:prstGeom>
@@ -9510,6 +9518,37 @@
                                   </p:childTnLst>
                                 </p:cTn>
                               </p:par>
+                              <p:par>
+                                <p:cTn id="27" presetID="1" presetClass="entr" presetSubtype="0" fill="hold" nodeType="withEffect">
+                                  <p:stCondLst>
+                                    <p:cond delay="0"/>
+                                  </p:stCondLst>
+                                  <p:childTnLst>
+                                    <p:set>
+                                      <p:cBhvr>
+                                        <p:cTn id="28" dur="1" fill="hold">
+                                          <p:stCondLst>
+                                            <p:cond delay="0"/>
+                                          </p:stCondLst>
+                                        </p:cTn>
+                                        <p:tgtEl>
+                                          <p:spTgt spid="3">
+                                            <p:txEl>
+                                              <p:pRg st="13" end="13"/>
+                                            </p:txEl>
+                                          </p:spTgt>
+                                        </p:tgtEl>
+                                        <p:attrNameLst>
+                                          <p:attrName>style.visibility</p:attrName>
+                                        </p:attrNameLst>
+                                      </p:cBhvr>
+                                      <p:to>
+                                        <p:strVal val="visible"/>
+                                      </p:to>
+                                    </p:set>
+                                  </p:childTnLst>
+                                </p:cTn>
+                              </p:par>
                             </p:childTnLst>
                           </p:cTn>
                         </p:par>
@@ -10552,161 +10591,174 @@
                   <a:rPr lang="en-US" dirty="0"/>
                   <a:t>. I.e., </a:t>
                 </a:r>
+                <a:br>
+                  <a:rPr lang="en-US" dirty="0"/>
+                </a:br>
+                <a:br>
+                  <a:rPr lang="en-US" dirty="0"/>
+                </a:br>
                 <a14:m>
-                  <m:oMath xmlns:m="http://schemas.openxmlformats.org/officeDocument/2006/math">
-                    <m:r>
-                      <a:rPr lang="en-US" i="1">
-                        <a:latin typeface="Cambria Math" panose="02040503050406030204" pitchFamily="18" charset="0"/>
-                        <a:ea typeface="Cambria Math" panose="02040503050406030204" pitchFamily="18" charset="0"/>
-                      </a:rPr>
-                      <m:t>𝔼</m:t>
-                    </m:r>
-                    <m:d>
-                      <m:dPr>
-                        <m:ctrlPr>
-                          <a:rPr lang="en-US" i="1">
-                            <a:latin typeface="Cambria Math" panose="02040503050406030204" pitchFamily="18" charset="0"/>
-                            <a:ea typeface="Cambria Math" panose="02040503050406030204" pitchFamily="18" charset="0"/>
-                          </a:rPr>
-                        </m:ctrlPr>
-                      </m:dPr>
-                      <m:e>
-                        <m:sSub>
-                          <m:sSubPr>
-                            <m:ctrlPr>
-                              <a:rPr lang="en-US" i="1">
-                                <a:latin typeface="Cambria Math" panose="02040503050406030204" pitchFamily="18" charset="0"/>
-                                <a:ea typeface="Cambria Math" panose="02040503050406030204" pitchFamily="18" charset="0"/>
-                              </a:rPr>
-                            </m:ctrlPr>
-                          </m:sSubPr>
-                          <m:e>
-                            <m:r>
-                              <a:rPr lang="en-US" i="1">
-                                <a:latin typeface="Cambria Math" panose="02040503050406030204" pitchFamily="18" charset="0"/>
-                                <a:ea typeface="Cambria Math" panose="02040503050406030204" pitchFamily="18" charset="0"/>
-                              </a:rPr>
-                              <m:t>𝑈</m:t>
-                            </m:r>
-                          </m:e>
-                          <m:sub>
-                            <m:r>
-                              <a:rPr lang="en-US" i="1">
-                                <a:latin typeface="Cambria Math" panose="02040503050406030204" pitchFamily="18" charset="0"/>
-                                <a:ea typeface="Cambria Math" panose="02040503050406030204" pitchFamily="18" charset="0"/>
-                              </a:rPr>
-                              <m:t>𝑡</m:t>
-                            </m:r>
-                          </m:sub>
-                        </m:sSub>
-                      </m:e>
-                      <m:e>
-                        <m:sSub>
-                          <m:sSubPr>
-                            <m:ctrlPr>
-                              <a:rPr lang="en-US" i="1">
-                                <a:latin typeface="Cambria Math" panose="02040503050406030204" pitchFamily="18" charset="0"/>
-                                <a:ea typeface="Cambria Math" panose="02040503050406030204" pitchFamily="18" charset="0"/>
-                              </a:rPr>
-                            </m:ctrlPr>
-                          </m:sSubPr>
-                          <m:e>
-                            <m:r>
-                              <a:rPr lang="en-US" i="1">
-                                <a:latin typeface="Cambria Math" panose="02040503050406030204" pitchFamily="18" charset="0"/>
-                                <a:ea typeface="Cambria Math" panose="02040503050406030204" pitchFamily="18" charset="0"/>
-                              </a:rPr>
-                              <m:t>𝑆</m:t>
-                            </m:r>
-                          </m:e>
-                          <m:sub>
-                            <m:r>
-                              <a:rPr lang="en-US" i="1">
-                                <a:latin typeface="Cambria Math" panose="02040503050406030204" pitchFamily="18" charset="0"/>
-                                <a:ea typeface="Cambria Math" panose="02040503050406030204" pitchFamily="18" charset="0"/>
-                              </a:rPr>
-                              <m:t>𝑡</m:t>
-                            </m:r>
-                          </m:sub>
-                        </m:sSub>
-                        <m:r>
-                          <a:rPr lang="en-US" i="1">
-                            <a:latin typeface="Cambria Math" panose="02040503050406030204" pitchFamily="18" charset="0"/>
-                            <a:ea typeface="Cambria Math" panose="02040503050406030204" pitchFamily="18" charset="0"/>
-                          </a:rPr>
-                          <m:t>=</m:t>
-                        </m:r>
-                        <m:r>
-                          <a:rPr lang="en-US" i="1">
-                            <a:latin typeface="Cambria Math" panose="02040503050406030204" pitchFamily="18" charset="0"/>
-                            <a:ea typeface="Cambria Math" panose="02040503050406030204" pitchFamily="18" charset="0"/>
-                          </a:rPr>
-                          <m:t>𝑠</m:t>
-                        </m:r>
-                      </m:e>
-                    </m:d>
-                    <m:r>
-                      <a:rPr lang="en-US" i="1">
-                        <a:latin typeface="Cambria Math" panose="02040503050406030204" pitchFamily="18" charset="0"/>
-                        <a:ea typeface="Cambria Math" panose="02040503050406030204" pitchFamily="18" charset="0"/>
-                      </a:rPr>
-                      <m:t>=</m:t>
-                    </m:r>
-                    <m:sSub>
-                      <m:sSubPr>
-                        <m:ctrlPr>
-                          <a:rPr lang="en-US" i="1">
-                            <a:latin typeface="Cambria Math" panose="02040503050406030204" pitchFamily="18" charset="0"/>
-                            <a:ea typeface="Cambria Math" panose="02040503050406030204" pitchFamily="18" charset="0"/>
-                          </a:rPr>
-                        </m:ctrlPr>
-                      </m:sSubPr>
-                      <m:e>
-                        <m:r>
-                          <a:rPr lang="en-US" i="1">
-                            <a:latin typeface="Cambria Math" panose="02040503050406030204" pitchFamily="18" charset="0"/>
-                            <a:ea typeface="Cambria Math" panose="02040503050406030204" pitchFamily="18" charset="0"/>
-                          </a:rPr>
-                          <m:t>𝑣</m:t>
-                        </m:r>
-                      </m:e>
-                      <m:sub>
-                        <m:r>
-                          <a:rPr lang="en-US" i="1">
-                            <a:latin typeface="Cambria Math" panose="02040503050406030204" pitchFamily="18" charset="0"/>
-                            <a:ea typeface="Cambria Math" panose="02040503050406030204" pitchFamily="18" charset="0"/>
-                          </a:rPr>
-                          <m:t>𝜋</m:t>
-                        </m:r>
-                      </m:sub>
-                    </m:sSub>
-                    <m:r>
-                      <a:rPr lang="en-US" i="1">
-                        <a:latin typeface="Cambria Math" panose="02040503050406030204" pitchFamily="18" charset="0"/>
-                        <a:ea typeface="Cambria Math" panose="02040503050406030204" pitchFamily="18" charset="0"/>
-                      </a:rPr>
-                      <m:t>(</m:t>
-                    </m:r>
-                    <m:r>
-                      <a:rPr lang="en-US" i="1">
-                        <a:latin typeface="Cambria Math" panose="02040503050406030204" pitchFamily="18" charset="0"/>
-                        <a:ea typeface="Cambria Math" panose="02040503050406030204" pitchFamily="18" charset="0"/>
-                      </a:rPr>
-                      <m:t>𝑠</m:t>
-                    </m:r>
-                    <m:r>
-                      <a:rPr lang="en-US" i="1">
-                        <a:latin typeface="Cambria Math" panose="02040503050406030204" pitchFamily="18" charset="0"/>
-                        <a:ea typeface="Cambria Math" panose="02040503050406030204" pitchFamily="18" charset="0"/>
-                      </a:rPr>
-                      <m:t>)</m:t>
-                    </m:r>
-                  </m:oMath>
+                  <m:oMathPara xmlns:m="http://schemas.openxmlformats.org/officeDocument/2006/math">
+                    <m:oMathParaPr>
+                      <m:jc m:val="centerGroup"/>
+                    </m:oMathParaPr>
+                    <m:oMath xmlns:m="http://schemas.openxmlformats.org/officeDocument/2006/math">
+                      <m:r>
+                        <a:rPr lang="en-US" i="1">
+                          <a:latin typeface="Cambria Math" panose="02040503050406030204" pitchFamily="18" charset="0"/>
+                          <a:ea typeface="Cambria Math" panose="02040503050406030204" pitchFamily="18" charset="0"/>
+                        </a:rPr>
+                        <m:t>𝔼</m:t>
+                      </m:r>
+                      <m:d>
+                        <m:dPr>
+                          <m:ctrlPr>
+                            <a:rPr lang="en-US" i="1">
+                              <a:latin typeface="Cambria Math" panose="02040503050406030204" pitchFamily="18" charset="0"/>
+                              <a:ea typeface="Cambria Math" panose="02040503050406030204" pitchFamily="18" charset="0"/>
+                            </a:rPr>
+                          </m:ctrlPr>
+                        </m:dPr>
+                        <m:e>
+                          <m:sSub>
+                            <m:sSubPr>
+                              <m:ctrlPr>
+                                <a:rPr lang="en-US" i="1">
+                                  <a:latin typeface="Cambria Math" panose="02040503050406030204" pitchFamily="18" charset="0"/>
+                                  <a:ea typeface="Cambria Math" panose="02040503050406030204" pitchFamily="18" charset="0"/>
+                                </a:rPr>
+                              </m:ctrlPr>
+                            </m:sSubPr>
+                            <m:e>
+                              <m:r>
+                                <a:rPr lang="en-US" i="1">
+                                  <a:latin typeface="Cambria Math" panose="02040503050406030204" pitchFamily="18" charset="0"/>
+                                  <a:ea typeface="Cambria Math" panose="02040503050406030204" pitchFamily="18" charset="0"/>
+                                </a:rPr>
+                                <m:t>𝑈</m:t>
+                              </m:r>
+                            </m:e>
+                            <m:sub>
+                              <m:r>
+                                <a:rPr lang="en-US" i="1">
+                                  <a:latin typeface="Cambria Math" panose="02040503050406030204" pitchFamily="18" charset="0"/>
+                                  <a:ea typeface="Cambria Math" panose="02040503050406030204" pitchFamily="18" charset="0"/>
+                                </a:rPr>
+                                <m:t>𝑡</m:t>
+                              </m:r>
+                            </m:sub>
+                          </m:sSub>
+                        </m:e>
+                        <m:e>
+                          <m:sSub>
+                            <m:sSubPr>
+                              <m:ctrlPr>
+                                <a:rPr lang="en-US" i="1">
+                                  <a:latin typeface="Cambria Math" panose="02040503050406030204" pitchFamily="18" charset="0"/>
+                                  <a:ea typeface="Cambria Math" panose="02040503050406030204" pitchFamily="18" charset="0"/>
+                                </a:rPr>
+                              </m:ctrlPr>
+                            </m:sSubPr>
+                            <m:e>
+                              <m:r>
+                                <a:rPr lang="en-US" i="1">
+                                  <a:latin typeface="Cambria Math" panose="02040503050406030204" pitchFamily="18" charset="0"/>
+                                  <a:ea typeface="Cambria Math" panose="02040503050406030204" pitchFamily="18" charset="0"/>
+                                </a:rPr>
+                                <m:t>𝑆</m:t>
+                              </m:r>
+                            </m:e>
+                            <m:sub>
+                              <m:r>
+                                <a:rPr lang="en-US" i="1">
+                                  <a:latin typeface="Cambria Math" panose="02040503050406030204" pitchFamily="18" charset="0"/>
+                                  <a:ea typeface="Cambria Math" panose="02040503050406030204" pitchFamily="18" charset="0"/>
+                                </a:rPr>
+                                <m:t>𝑡</m:t>
+                              </m:r>
+                            </m:sub>
+                          </m:sSub>
+                          <m:r>
+                            <a:rPr lang="en-US" i="1">
+                              <a:latin typeface="Cambria Math" panose="02040503050406030204" pitchFamily="18" charset="0"/>
+                              <a:ea typeface="Cambria Math" panose="02040503050406030204" pitchFamily="18" charset="0"/>
+                            </a:rPr>
+                            <m:t>=</m:t>
+                          </m:r>
+                          <m:r>
+                            <a:rPr lang="en-US" i="1">
+                              <a:latin typeface="Cambria Math" panose="02040503050406030204" pitchFamily="18" charset="0"/>
+                              <a:ea typeface="Cambria Math" panose="02040503050406030204" pitchFamily="18" charset="0"/>
+                            </a:rPr>
+                            <m:t>𝑠</m:t>
+                          </m:r>
+                        </m:e>
+                      </m:d>
+                      <m:r>
+                        <a:rPr lang="en-US" i="1">
+                          <a:latin typeface="Cambria Math" panose="02040503050406030204" pitchFamily="18" charset="0"/>
+                          <a:ea typeface="Cambria Math" panose="02040503050406030204" pitchFamily="18" charset="0"/>
+                        </a:rPr>
+                        <m:t>=</m:t>
+                      </m:r>
+                      <m:sSub>
+                        <m:sSubPr>
+                          <m:ctrlPr>
+                            <a:rPr lang="en-US" i="1">
+                              <a:latin typeface="Cambria Math" panose="02040503050406030204" pitchFamily="18" charset="0"/>
+                              <a:ea typeface="Cambria Math" panose="02040503050406030204" pitchFamily="18" charset="0"/>
+                            </a:rPr>
+                          </m:ctrlPr>
+                        </m:sSubPr>
+                        <m:e>
+                          <m:r>
+                            <a:rPr lang="en-US" i="1">
+                              <a:latin typeface="Cambria Math" panose="02040503050406030204" pitchFamily="18" charset="0"/>
+                              <a:ea typeface="Cambria Math" panose="02040503050406030204" pitchFamily="18" charset="0"/>
+                            </a:rPr>
+                            <m:t>𝑣</m:t>
+                          </m:r>
+                        </m:e>
+                        <m:sub>
+                          <m:r>
+                            <a:rPr lang="en-US" i="1">
+                              <a:latin typeface="Cambria Math" panose="02040503050406030204" pitchFamily="18" charset="0"/>
+                              <a:ea typeface="Cambria Math" panose="02040503050406030204" pitchFamily="18" charset="0"/>
+                            </a:rPr>
+                            <m:t>𝜋</m:t>
+                          </m:r>
+                        </m:sub>
+                      </m:sSub>
+                      <m:d>
+                        <m:dPr>
+                          <m:ctrlPr>
+                            <a:rPr lang="en-US" i="1">
+                              <a:latin typeface="Cambria Math" panose="02040503050406030204" pitchFamily="18" charset="0"/>
+                              <a:ea typeface="Cambria Math" panose="02040503050406030204" pitchFamily="18" charset="0"/>
+                            </a:rPr>
+                          </m:ctrlPr>
+                        </m:dPr>
+                        <m:e>
+                          <m:r>
+                            <a:rPr lang="en-US" i="1">
+                              <a:latin typeface="Cambria Math" panose="02040503050406030204" pitchFamily="18" charset="0"/>
+                              <a:ea typeface="Cambria Math" panose="02040503050406030204" pitchFamily="18" charset="0"/>
+                            </a:rPr>
+                            <m:t>𝑠</m:t>
+                          </m:r>
+                        </m:e>
+                      </m:d>
+                      <m:r>
+                        <a:rPr lang="en-US" b="0" i="1" smtClean="0">
+                          <a:latin typeface="Cambria Math" panose="02040503050406030204" pitchFamily="18" charset="0"/>
+                          <a:ea typeface="Cambria Math" panose="02040503050406030204" pitchFamily="18" charset="0"/>
+                        </a:rPr>
+                        <m:t>.</m:t>
+                      </m:r>
+                    </m:oMath>
+                  </m:oMathPara>
                 </a14:m>
-                <a:r>
-                  <a:rPr lang="en-US" dirty="0"/>
-                  <a:t>. </a:t>
-                </a:r>
+                <a:endParaRPr lang="en-US" dirty="0"/>
               </a:p>
               <a:p>
                 <a:endParaRPr lang="en-US" dirty="0"/>
@@ -11079,8 +11131,8 @@
           </a:prstGeom>
         </p:spPr>
       </p:pic>
-      <mc:AlternateContent xmlns:mc="http://schemas.openxmlformats.org/markup-compatibility/2006">
-        <mc:Choice xmlns:a14="http://schemas.microsoft.com/office/drawing/2010/main" Requires="a14">
+      <mc:AlternateContent xmlns:mc="http://schemas.openxmlformats.org/markup-compatibility/2006" xmlns:a14="http://schemas.microsoft.com/office/drawing/2010/main">
+        <mc:Choice Requires="a14">
           <p:sp>
             <p:nvSpPr>
               <p:cNvPr id="7" name="TextBox 6">
@@ -11283,7 +11335,7 @@
             </p:txBody>
           </p:sp>
         </mc:Choice>
-        <mc:Fallback>
+        <mc:Fallback xmlns="">
           <p:sp>
             <p:nvSpPr>
               <p:cNvPr id="7" name="TextBox 6">
@@ -11447,6 +11499,9 @@
                   <a:rPr lang="en-US" dirty="0"/>
                   <a:t>.</a:t>
                 </a:r>
+                <a:br>
+                  <a:rPr lang="en-US" dirty="0"/>
+                </a:br>
                 <a:br>
                   <a:rPr lang="en-US" dirty="0"/>
                 </a:br>
@@ -12023,9 +12078,12 @@
                 <a:br>
                   <a:rPr lang="en-US" dirty="0"/>
                 </a:br>
-                <a:r>
+                <a:br>
                   <a:rPr lang="en-US" dirty="0"/>
-                  <a:t>This does not result in a true gradient and convergence cannot be guaranteed.</a:t>
+                </a:br>
+                <a:r>
+                  <a:rPr lang="en-US" dirty="0"/>
+                  <a:t>This does not result in a true gradient, and convergence cannot be guaranteed.</a:t>
                 </a:r>
               </a:p>
               <a:p>
@@ -12046,7 +12104,7 @@
               <a:p>
                 <a:r>
                   <a:rPr lang="en-US" dirty="0"/>
-                  <a:t>If we still use the approach with a biased target estimate, then it is called a semi-gradient method.</a:t>
+                  <a:t>If we use the approach with a biased target estimate, then this is called a semi-gradient method.</a:t>
                 </a:r>
               </a:p>
               <a:p>
@@ -12073,21 +12131,7 @@
                 <a:pPr lvl="1"/>
                 <a:r>
                   <a:rPr lang="en-US" dirty="0"/>
-                  <a:t>TD can learn online and use </a:t>
-                </a:r>
-                <a14:m>
-                  <m:oMath xmlns:m="http://schemas.openxmlformats.org/officeDocument/2006/math">
-                    <m:r>
-                      <a:rPr lang="en-US" b="0" i="1" smtClean="0">
-                        <a:latin typeface="Cambria Math" panose="02040503050406030204" pitchFamily="18" charset="0"/>
-                      </a:rPr>
-                      <m:t>𝑅</m:t>
-                    </m:r>
-                  </m:oMath>
-                </a14:m>
-                <a:r>
-                  <a:rPr lang="en-US" dirty="0"/>
-                  <a:t> directly for the update.</a:t>
+                  <a:t>TD can learn online.</a:t>
                 </a:r>
               </a:p>
             </p:txBody>
@@ -12546,8 +12590,8 @@
           </a:fontRef>
         </p:style>
       </p:cxnSp>
-      <mc:AlternateContent xmlns:mc="http://schemas.openxmlformats.org/markup-compatibility/2006">
-        <mc:Choice xmlns:a14="http://schemas.microsoft.com/office/drawing/2010/main" Requires="a14">
+      <mc:AlternateContent xmlns:mc="http://schemas.openxmlformats.org/markup-compatibility/2006" xmlns:a14="http://schemas.microsoft.com/office/drawing/2010/main">
+        <mc:Choice Requires="a14">
           <p:sp>
             <p:nvSpPr>
               <p:cNvPr id="9" name="Speech Bubble: Rectangle with Corners Rounded 8">
@@ -12645,7 +12689,7 @@
             </p:txBody>
           </p:sp>
         </mc:Choice>
-        <mc:Fallback>
+        <mc:Fallback xmlns="">
           <p:sp>
             <p:nvSpPr>
               <p:cNvPr id="9" name="Speech Bubble: Rectangle with Corners Rounded 8">
@@ -12752,31 +12796,129 @@
           </a:p>
         </p:txBody>
       </p:sp>
-      <p:sp>
-        <p:nvSpPr>
-          <p:cNvPr id="5" name="Text Placeholder 4">
-            <a:extLst>
-              <a:ext uri="{FF2B5EF4-FFF2-40B4-BE49-F238E27FC236}">
-                <a16:creationId xmlns:a16="http://schemas.microsoft.com/office/drawing/2014/main" id="{30D0F8F0-5C2B-42CF-9485-B7064784A25E}"/>
-              </a:ext>
-            </a:extLst>
-          </p:cNvPr>
-          <p:cNvSpPr>
-            <a:spLocks noGrp="1"/>
-          </p:cNvSpPr>
-          <p:nvPr>
-            <p:ph type="body" idx="1"/>
-          </p:nvPr>
-        </p:nvSpPr>
-        <p:spPr/>
-        <p:txBody>
-          <a:bodyPr/>
-          <a:lstStyle/>
-          <a:p>
-            <a:endParaRPr lang="en-US" dirty="0"/>
-          </a:p>
-        </p:txBody>
-      </p:sp>
+      <mc:AlternateContent xmlns:mc="http://schemas.openxmlformats.org/markup-compatibility/2006">
+        <mc:Choice xmlns:a14="http://schemas.microsoft.com/office/drawing/2010/main" Requires="a14">
+          <p:sp>
+            <p:nvSpPr>
+              <p:cNvPr id="5" name="Text Placeholder 4">
+                <a:extLst>
+                  <a:ext uri="{FF2B5EF4-FFF2-40B4-BE49-F238E27FC236}">
+                    <a16:creationId xmlns:a16="http://schemas.microsoft.com/office/drawing/2014/main" id="{30D0F8F0-5C2B-42CF-9485-B7064784A25E}"/>
+                  </a:ext>
+                </a:extLst>
+              </p:cNvPr>
+              <p:cNvSpPr>
+                <a:spLocks noGrp="1"/>
+              </p:cNvSpPr>
+              <p:nvPr>
+                <p:ph type="body" idx="1"/>
+              </p:nvPr>
+            </p:nvSpPr>
+            <p:spPr/>
+            <p:txBody>
+              <a:bodyPr/>
+              <a:lstStyle/>
+              <a:p>
+                <a:r>
+                  <a:rPr lang="en-US" dirty="0"/>
+                  <a:t>The approximation function </a:t>
+                </a:r>
+                <a14:m>
+                  <m:oMath xmlns:m="http://schemas.openxmlformats.org/officeDocument/2006/math">
+                    <m:acc>
+                      <m:accPr>
+                        <m:chr m:val="̂"/>
+                        <m:ctrlPr>
+                          <a:rPr lang="en-US" i="1">
+                            <a:latin typeface="Cambria Math" panose="02040503050406030204" pitchFamily="18" charset="0"/>
+                          </a:rPr>
+                        </m:ctrlPr>
+                      </m:accPr>
+                      <m:e>
+                        <m:r>
+                          <a:rPr lang="en-US" i="1">
+                            <a:latin typeface="Cambria Math" panose="02040503050406030204" pitchFamily="18" charset="0"/>
+                          </a:rPr>
+                          <m:t>𝑣</m:t>
+                        </m:r>
+                      </m:e>
+                    </m:acc>
+                    <m:d>
+                      <m:dPr>
+                        <m:ctrlPr>
+                          <a:rPr lang="en-US" i="1">
+                            <a:latin typeface="Cambria Math" panose="02040503050406030204" pitchFamily="18" charset="0"/>
+                          </a:rPr>
+                        </m:ctrlPr>
+                      </m:dPr>
+                      <m:e>
+                        <m:r>
+                          <a:rPr lang="en-US" i="1">
+                            <a:latin typeface="Cambria Math" panose="02040503050406030204" pitchFamily="18" charset="0"/>
+                          </a:rPr>
+                          <m:t>𝑠</m:t>
+                        </m:r>
+                        <m:r>
+                          <a:rPr lang="en-US" i="1">
+                            <a:latin typeface="Cambria Math" panose="02040503050406030204" pitchFamily="18" charset="0"/>
+                          </a:rPr>
+                          <m:t>,</m:t>
+                        </m:r>
+                        <m:r>
+                          <a:rPr lang="en-US" b="1" i="1">
+                            <a:latin typeface="Cambria Math" panose="02040503050406030204" pitchFamily="18" charset="0"/>
+                          </a:rPr>
+                          <m:t>𝒘</m:t>
+                        </m:r>
+                      </m:e>
+                    </m:d>
+                  </m:oMath>
+                </a14:m>
+                <a:endParaRPr lang="en-US" dirty="0"/>
+              </a:p>
+            </p:txBody>
+          </p:sp>
+        </mc:Choice>
+        <mc:Fallback>
+          <p:sp>
+            <p:nvSpPr>
+              <p:cNvPr id="5" name="Text Placeholder 4">
+                <a:extLst>
+                  <a:ext uri="{FF2B5EF4-FFF2-40B4-BE49-F238E27FC236}">
+                    <a16:creationId xmlns:a16="http://schemas.microsoft.com/office/drawing/2014/main" id="{30D0F8F0-5C2B-42CF-9485-B7064784A25E}"/>
+                  </a:ext>
+                </a:extLst>
+              </p:cNvPr>
+              <p:cNvSpPr>
+                <a:spLocks noGrp="1" noRot="1" noChangeAspect="1" noMove="1" noResize="1" noEditPoints="1" noAdjustHandles="1" noChangeArrowheads="1" noChangeShapeType="1" noTextEdit="1"/>
+              </p:cNvSpPr>
+              <p:nvPr>
+                <p:ph type="body" idx="1"/>
+              </p:nvPr>
+            </p:nvSpPr>
+            <p:spPr>
+              <a:blipFill>
+                <a:blip r:embed="rId2"/>
+                <a:stretch>
+                  <a:fillRect l="-870" t="-5285"/>
+                </a:stretch>
+              </a:blipFill>
+            </p:spPr>
+            <p:txBody>
+              <a:bodyPr/>
+              <a:lstStyle/>
+              <a:p>
+                <a:r>
+                  <a:rPr lang="en-US">
+                    <a:noFill/>
+                  </a:rPr>
+                  <a:t> </a:t>
+                </a:r>
+              </a:p>
+            </p:txBody>
+          </p:sp>
+        </mc:Fallback>
+      </mc:AlternateContent>
     </p:spTree>
     <p:extLst>
       <p:ext uri="{BB962C8B-B14F-4D97-AF65-F5344CB8AC3E}">
@@ -12835,8 +12977,8 @@
           </a:p>
         </p:txBody>
       </p:sp>
-      <mc:AlternateContent xmlns:mc="http://schemas.openxmlformats.org/markup-compatibility/2006">
-        <mc:Choice xmlns:a14="http://schemas.microsoft.com/office/drawing/2010/main" Requires="a14">
+      <mc:AlternateContent xmlns:mc="http://schemas.openxmlformats.org/markup-compatibility/2006" xmlns:a14="http://schemas.microsoft.com/office/drawing/2010/main">
+        <mc:Choice Requires="a14">
           <p:sp>
             <p:nvSpPr>
               <p:cNvPr id="3" name="Content Placeholder 2">
@@ -13677,7 +13819,7 @@
             </p:txBody>
           </p:sp>
         </mc:Choice>
-        <mc:Fallback>
+        <mc:Fallback xmlns="">
           <p:sp>
             <p:nvSpPr>
               <p:cNvPr id="3" name="Content Placeholder 2">
@@ -14009,33 +14151,15 @@
                                   </p:childTnLst>
                                 </p:cTn>
                               </p:par>
-                            </p:childTnLst>
-                          </p:cTn>
-                        </p:par>
-                      </p:childTnLst>
-                    </p:cTn>
-                  </p:par>
-                  <p:par>
-                    <p:cTn id="21" fill="hold">
-                      <p:stCondLst>
-                        <p:cond delay="indefinite"/>
-                      </p:stCondLst>
-                      <p:childTnLst>
-                        <p:par>
-                          <p:cTn id="22" fill="hold">
-                            <p:stCondLst>
-                              <p:cond delay="0"/>
-                            </p:stCondLst>
-                            <p:childTnLst>
                               <p:par>
-                                <p:cTn id="23" presetID="1" presetClass="entr" presetSubtype="0" fill="hold" grpId="0" nodeType="clickEffect">
+                                <p:cTn id="21" presetID="1" presetClass="entr" presetSubtype="0" fill="hold" grpId="0" nodeType="withEffect">
                                   <p:stCondLst>
                                     <p:cond delay="0"/>
                                   </p:stCondLst>
                                   <p:childTnLst>
                                     <p:set>
                                       <p:cBhvr>
-                                        <p:cTn id="24" dur="1" fill="hold">
+                                        <p:cTn id="22" dur="1" fill="hold">
                                           <p:stCondLst>
                                             <p:cond delay="0"/>
                                           </p:stCondLst>
@@ -14061,26 +14185,26 @@
                     </p:cTn>
                   </p:par>
                   <p:par>
-                    <p:cTn id="25" fill="hold">
+                    <p:cTn id="23" fill="hold">
                       <p:stCondLst>
                         <p:cond delay="indefinite"/>
                       </p:stCondLst>
                       <p:childTnLst>
                         <p:par>
-                          <p:cTn id="26" fill="hold">
+                          <p:cTn id="24" fill="hold">
                             <p:stCondLst>
                               <p:cond delay="0"/>
                             </p:stCondLst>
                             <p:childTnLst>
                               <p:par>
-                                <p:cTn id="27" presetID="1" presetClass="entr" presetSubtype="0" fill="hold" nodeType="clickEffect">
+                                <p:cTn id="25" presetID="1" presetClass="entr" presetSubtype="0" fill="hold" nodeType="clickEffect">
                                   <p:stCondLst>
                                     <p:cond delay="0"/>
                                   </p:stCondLst>
                                   <p:childTnLst>
                                     <p:set>
                                       <p:cBhvr>
-                                        <p:cTn id="28" dur="1" fill="hold">
+                                        <p:cTn id="26" dur="1" fill="hold">
                                           <p:stCondLst>
                                             <p:cond delay="0"/>
                                           </p:stCondLst>
@@ -14359,8 +14483,12 @@
                   <a:rPr lang="en-US" dirty="0"/>
                   <a:t>. </a:t>
                 </a:r>
-              </a:p>
-              <a:p>
+                <a:br>
+                  <a:rPr lang="en-US" dirty="0"/>
+                </a:br>
+                <a:br>
+                  <a:rPr lang="en-US" dirty="0"/>
+                </a:br>
                 <a:r>
                   <a:rPr lang="en-US" dirty="0"/>
                   <a:t>This leads to </a:t>
@@ -14443,7 +14571,7 @@
               <a:blipFill>
                 <a:blip r:embed="rId2"/>
                 <a:stretch>
-                  <a:fillRect l="-1043" t="-2806" r="-1623"/>
+                  <a:fillRect l="-1043" t="-2806" r="-1623" b="-1658"/>
                 </a:stretch>
               </a:blipFill>
             </p:spPr>
@@ -14472,6 +14600,248 @@
   <p:clrMapOvr>
     <a:masterClrMapping/>
   </p:clrMapOvr>
+  <p:timing>
+    <p:tnLst>
+      <p:par>
+        <p:cTn id="1" dur="indefinite" restart="never" nodeType="tmRoot">
+          <p:childTnLst>
+            <p:seq concurrent="1" nextAc="seek">
+              <p:cTn id="2" dur="indefinite" nodeType="mainSeq">
+                <p:childTnLst>
+                  <p:par>
+                    <p:cTn id="3" fill="hold">
+                      <p:stCondLst>
+                        <p:cond delay="indefinite"/>
+                      </p:stCondLst>
+                      <p:childTnLst>
+                        <p:par>
+                          <p:cTn id="4" fill="hold">
+                            <p:stCondLst>
+                              <p:cond delay="0"/>
+                            </p:stCondLst>
+                            <p:childTnLst>
+                              <p:par>
+                                <p:cTn id="5" presetID="1" presetClass="entr" presetSubtype="0" fill="hold" grpId="0" nodeType="clickEffect">
+                                  <p:stCondLst>
+                                    <p:cond delay="0"/>
+                                  </p:stCondLst>
+                                  <p:childTnLst>
+                                    <p:set>
+                                      <p:cBhvr>
+                                        <p:cTn id="6" dur="1" fill="hold">
+                                          <p:stCondLst>
+                                            <p:cond delay="0"/>
+                                          </p:stCondLst>
+                                        </p:cTn>
+                                        <p:tgtEl>
+                                          <p:spTgt spid="3">
+                                            <p:txEl>
+                                              <p:pRg st="0" end="0"/>
+                                            </p:txEl>
+                                          </p:spTgt>
+                                        </p:tgtEl>
+                                        <p:attrNameLst>
+                                          <p:attrName>style.visibility</p:attrName>
+                                        </p:attrNameLst>
+                                      </p:cBhvr>
+                                      <p:to>
+                                        <p:strVal val="visible"/>
+                                      </p:to>
+                                    </p:set>
+                                  </p:childTnLst>
+                                </p:cTn>
+                              </p:par>
+                            </p:childTnLst>
+                          </p:cTn>
+                        </p:par>
+                      </p:childTnLst>
+                    </p:cTn>
+                  </p:par>
+                  <p:par>
+                    <p:cTn id="7" fill="hold">
+                      <p:stCondLst>
+                        <p:cond delay="indefinite"/>
+                      </p:stCondLst>
+                      <p:childTnLst>
+                        <p:par>
+                          <p:cTn id="8" fill="hold">
+                            <p:stCondLst>
+                              <p:cond delay="0"/>
+                            </p:stCondLst>
+                            <p:childTnLst>
+                              <p:par>
+                                <p:cTn id="9" presetID="1" presetClass="entr" presetSubtype="0" fill="hold" grpId="0" nodeType="clickEffect">
+                                  <p:stCondLst>
+                                    <p:cond delay="0"/>
+                                  </p:stCondLst>
+                                  <p:childTnLst>
+                                    <p:set>
+                                      <p:cBhvr>
+                                        <p:cTn id="10" dur="1" fill="hold">
+                                          <p:stCondLst>
+                                            <p:cond delay="0"/>
+                                          </p:stCondLst>
+                                        </p:cTn>
+                                        <p:tgtEl>
+                                          <p:spTgt spid="3">
+                                            <p:txEl>
+                                              <p:pRg st="2" end="2"/>
+                                            </p:txEl>
+                                          </p:spTgt>
+                                        </p:tgtEl>
+                                        <p:attrNameLst>
+                                          <p:attrName>style.visibility</p:attrName>
+                                        </p:attrNameLst>
+                                      </p:cBhvr>
+                                      <p:to>
+                                        <p:strVal val="visible"/>
+                                      </p:to>
+                                    </p:set>
+                                  </p:childTnLst>
+                                </p:cTn>
+                              </p:par>
+                            </p:childTnLst>
+                          </p:cTn>
+                        </p:par>
+                      </p:childTnLst>
+                    </p:cTn>
+                  </p:par>
+                  <p:par>
+                    <p:cTn id="11" fill="hold">
+                      <p:stCondLst>
+                        <p:cond delay="indefinite"/>
+                      </p:stCondLst>
+                      <p:childTnLst>
+                        <p:par>
+                          <p:cTn id="12" fill="hold">
+                            <p:stCondLst>
+                              <p:cond delay="0"/>
+                            </p:stCondLst>
+                            <p:childTnLst>
+                              <p:par>
+                                <p:cTn id="13" presetID="1" presetClass="entr" presetSubtype="0" fill="hold" grpId="0" nodeType="clickEffect">
+                                  <p:stCondLst>
+                                    <p:cond delay="0"/>
+                                  </p:stCondLst>
+                                  <p:childTnLst>
+                                    <p:set>
+                                      <p:cBhvr>
+                                        <p:cTn id="14" dur="1" fill="hold">
+                                          <p:stCondLst>
+                                            <p:cond delay="0"/>
+                                          </p:stCondLst>
+                                        </p:cTn>
+                                        <p:tgtEl>
+                                          <p:spTgt spid="3">
+                                            <p:txEl>
+                                              <p:pRg st="4" end="4"/>
+                                            </p:txEl>
+                                          </p:spTgt>
+                                        </p:tgtEl>
+                                        <p:attrNameLst>
+                                          <p:attrName>style.visibility</p:attrName>
+                                        </p:attrNameLst>
+                                      </p:cBhvr>
+                                      <p:to>
+                                        <p:strVal val="visible"/>
+                                      </p:to>
+                                    </p:set>
+                                  </p:childTnLst>
+                                </p:cTn>
+                              </p:par>
+                              <p:par>
+                                <p:cTn id="15" presetID="1" presetClass="entr" presetSubtype="0" fill="hold" grpId="0" nodeType="withEffect">
+                                  <p:stCondLst>
+                                    <p:cond delay="0"/>
+                                  </p:stCondLst>
+                                  <p:childTnLst>
+                                    <p:set>
+                                      <p:cBhvr>
+                                        <p:cTn id="16" dur="1" fill="hold">
+                                          <p:stCondLst>
+                                            <p:cond delay="0"/>
+                                          </p:stCondLst>
+                                        </p:cTn>
+                                        <p:tgtEl>
+                                          <p:spTgt spid="3">
+                                            <p:txEl>
+                                              <p:pRg st="5" end="5"/>
+                                            </p:txEl>
+                                          </p:spTgt>
+                                        </p:tgtEl>
+                                        <p:attrNameLst>
+                                          <p:attrName>style.visibility</p:attrName>
+                                        </p:attrNameLst>
+                                      </p:cBhvr>
+                                      <p:to>
+                                        <p:strVal val="visible"/>
+                                      </p:to>
+                                    </p:set>
+                                  </p:childTnLst>
+                                </p:cTn>
+                              </p:par>
+                              <p:par>
+                                <p:cTn id="17" presetID="1" presetClass="entr" presetSubtype="0" fill="hold" grpId="0" nodeType="withEffect">
+                                  <p:stCondLst>
+                                    <p:cond delay="0"/>
+                                  </p:stCondLst>
+                                  <p:childTnLst>
+                                    <p:set>
+                                      <p:cBhvr>
+                                        <p:cTn id="18" dur="1" fill="hold">
+                                          <p:stCondLst>
+                                            <p:cond delay="0"/>
+                                          </p:stCondLst>
+                                        </p:cTn>
+                                        <p:tgtEl>
+                                          <p:spTgt spid="3">
+                                            <p:txEl>
+                                              <p:pRg st="6" end="6"/>
+                                            </p:txEl>
+                                          </p:spTgt>
+                                        </p:tgtEl>
+                                        <p:attrNameLst>
+                                          <p:attrName>style.visibility</p:attrName>
+                                        </p:attrNameLst>
+                                      </p:cBhvr>
+                                      <p:to>
+                                        <p:strVal val="visible"/>
+                                      </p:to>
+                                    </p:set>
+                                  </p:childTnLst>
+                                </p:cTn>
+                              </p:par>
+                            </p:childTnLst>
+                          </p:cTn>
+                        </p:par>
+                      </p:childTnLst>
+                    </p:cTn>
+                  </p:par>
+                </p:childTnLst>
+              </p:cTn>
+              <p:prevCondLst>
+                <p:cond evt="onPrev" delay="0">
+                  <p:tgtEl>
+                    <p:sldTgt/>
+                  </p:tgtEl>
+                </p:cond>
+              </p:prevCondLst>
+              <p:nextCondLst>
+                <p:cond evt="onNext" delay="0">
+                  <p:tgtEl>
+                    <p:sldTgt/>
+                  </p:tgtEl>
+                </p:cond>
+              </p:nextCondLst>
+            </p:seq>
+          </p:childTnLst>
+        </p:cTn>
+      </p:par>
+    </p:tnLst>
+    <p:bldLst>
+      <p:bldP spid="3" grpId="0" build="p"/>
+    </p:bldLst>
+  </p:timing>
 </p:sld>
 </file>
 
@@ -15406,8 +15776,8 @@
           </a:p>
         </p:txBody>
       </p:sp>
-      <mc:AlternateContent xmlns:mc="http://schemas.openxmlformats.org/markup-compatibility/2006">
-        <mc:Choice xmlns:a14="http://schemas.microsoft.com/office/drawing/2010/main" Requires="a14">
+      <mc:AlternateContent xmlns:mc="http://schemas.openxmlformats.org/markup-compatibility/2006" xmlns:a14="http://schemas.microsoft.com/office/drawing/2010/main">
+        <mc:Choice Requires="a14">
           <p:sp>
             <p:nvSpPr>
               <p:cNvPr id="3" name="Content Placeholder 2">
@@ -15705,7 +16075,7 @@
             </p:txBody>
           </p:sp>
         </mc:Choice>
-        <mc:Fallback>
+        <mc:Fallback xmlns="">
           <p:sp>
             <p:nvSpPr>
               <p:cNvPr id="3" name="Content Placeholder 2">
@@ -15749,8 +16119,8 @@
           </p:sp>
         </mc:Fallback>
       </mc:AlternateContent>
-      <mc:AlternateContent xmlns:mc="http://schemas.openxmlformats.org/markup-compatibility/2006">
-        <mc:Choice xmlns:a14="http://schemas.microsoft.com/office/drawing/2010/main" Requires="a14">
+      <mc:AlternateContent xmlns:mc="http://schemas.openxmlformats.org/markup-compatibility/2006" xmlns:a14="http://schemas.microsoft.com/office/drawing/2010/main">
+        <mc:Choice Requires="a14">
           <p:sp>
             <p:nvSpPr>
               <p:cNvPr id="32" name="Rectangle: Rounded Corners 31">
@@ -15815,7 +16185,7 @@
             </p:txBody>
           </p:sp>
         </mc:Choice>
-        <mc:Fallback>
+        <mc:Fallback xmlns="">
           <p:sp>
             <p:nvSpPr>
               <p:cNvPr id="32" name="Rectangle: Rounded Corners 31">
@@ -16533,8 +16903,8 @@
                 </a:fontRef>
               </p:style>
             </p:cxnSp>
-            <mc:AlternateContent xmlns:mc="http://schemas.openxmlformats.org/markup-compatibility/2006">
-              <mc:Choice xmlns:a14="http://schemas.microsoft.com/office/drawing/2010/main" Requires="a14">
+            <mc:AlternateContent xmlns:mc="http://schemas.openxmlformats.org/markup-compatibility/2006" xmlns:a14="http://schemas.microsoft.com/office/drawing/2010/main">
+              <mc:Choice Requires="a14">
                 <p:sp>
                   <p:nvSpPr>
                     <p:cNvPr id="24" name="TextBox 23">
@@ -16584,7 +16954,7 @@
                   </p:txBody>
                 </p:sp>
               </mc:Choice>
-              <mc:Fallback>
+              <mc:Fallback xmlns="">
                 <p:sp>
                   <p:nvSpPr>
                     <p:cNvPr id="24" name="TextBox 23">
@@ -16671,8 +17041,8 @@
               </p:style>
             </p:cxnSp>
           </p:grpSp>
-          <mc:AlternateContent xmlns:mc="http://schemas.openxmlformats.org/markup-compatibility/2006">
-            <mc:Choice xmlns:a14="http://schemas.microsoft.com/office/drawing/2010/main" Requires="a14">
+          <mc:AlternateContent xmlns:mc="http://schemas.openxmlformats.org/markup-compatibility/2006" xmlns:a14="http://schemas.microsoft.com/office/drawing/2010/main">
+            <mc:Choice Requires="a14">
               <p:sp>
                 <p:nvSpPr>
                   <p:cNvPr id="29" name="TextBox 28">
@@ -16733,7 +17103,7 @@
                 </p:txBody>
               </p:sp>
             </mc:Choice>
-            <mc:Fallback>
+            <mc:Fallback xmlns="">
               <p:sp>
                 <p:nvSpPr>
                   <p:cNvPr id="29" name="TextBox 28">
@@ -16779,8 +17149,8 @@
             </mc:Fallback>
           </mc:AlternateContent>
         </p:grpSp>
-        <mc:AlternateContent xmlns:mc="http://schemas.openxmlformats.org/markup-compatibility/2006">
-          <mc:Choice xmlns:a14="http://schemas.microsoft.com/office/drawing/2010/main" Requires="a14">
+        <mc:AlternateContent xmlns:mc="http://schemas.openxmlformats.org/markup-compatibility/2006" xmlns:a14="http://schemas.microsoft.com/office/drawing/2010/main">
+          <mc:Choice Requires="a14">
             <p:sp>
               <p:nvSpPr>
                 <p:cNvPr id="15" name="TextBox 14">
@@ -16866,7 +17236,7 @@
               </p:txBody>
             </p:sp>
           </mc:Choice>
-          <mc:Fallback>
+          <mc:Fallback xmlns="">
             <p:sp>
               <p:nvSpPr>
                 <p:cNvPr id="15" name="TextBox 14">
@@ -17034,8 +17404,8 @@
             </a:fontRef>
           </p:style>
         </p:cxnSp>
-        <mc:AlternateContent xmlns:mc="http://schemas.openxmlformats.org/markup-compatibility/2006">
-          <mc:Choice xmlns:a14="http://schemas.microsoft.com/office/drawing/2010/main" Requires="a14">
+        <mc:AlternateContent xmlns:mc="http://schemas.openxmlformats.org/markup-compatibility/2006" xmlns:a14="http://schemas.microsoft.com/office/drawing/2010/main">
+          <mc:Choice Requires="a14">
             <p:sp>
               <p:nvSpPr>
                 <p:cNvPr id="25" name="TextBox 24">
@@ -17114,7 +17484,7 @@
               </p:txBody>
             </p:sp>
           </mc:Choice>
-          <mc:Fallback>
+          <mc:Fallback xmlns="">
             <p:sp>
               <p:nvSpPr>
                 <p:cNvPr id="25" name="TextBox 24">
@@ -18184,8 +18554,8 @@
           </a:p>
         </p:txBody>
       </p:sp>
-      <mc:AlternateContent xmlns:mc="http://schemas.openxmlformats.org/markup-compatibility/2006">
-        <mc:Choice xmlns:a14="http://schemas.microsoft.com/office/drawing/2010/main" Requires="a14">
+      <mc:AlternateContent xmlns:mc="http://schemas.openxmlformats.org/markup-compatibility/2006" xmlns:a14="http://schemas.microsoft.com/office/drawing/2010/main">
+        <mc:Choice Requires="a14">
           <p:sp>
             <p:nvSpPr>
               <p:cNvPr id="41" name="TextBox 40">
@@ -19267,7 +19637,7 @@
             </p:txBody>
           </p:sp>
         </mc:Choice>
-        <mc:Fallback>
+        <mc:Fallback xmlns="">
           <p:sp>
             <p:nvSpPr>
               <p:cNvPr id="41" name="TextBox 40">
@@ -20402,8 +20772,8 @@
           </p:txBody>
         </p:sp>
       </p:grpSp>
-      <mc:AlternateContent xmlns:mc="http://schemas.openxmlformats.org/markup-compatibility/2006">
-        <mc:Choice xmlns:a14="http://schemas.microsoft.com/office/drawing/2010/main" Requires="a14">
+      <mc:AlternateContent xmlns:mc="http://schemas.openxmlformats.org/markup-compatibility/2006" xmlns:a14="http://schemas.microsoft.com/office/drawing/2010/main">
+        <mc:Choice Requires="a14">
           <p:sp>
             <p:nvSpPr>
               <p:cNvPr id="46" name="Speech Bubble: Rectangle with Corners Rounded 45">
@@ -20495,7 +20865,7 @@
             </p:txBody>
           </p:sp>
         </mc:Choice>
-        <mc:Fallback>
+        <mc:Fallback xmlns="">
           <p:sp>
             <p:nvSpPr>
               <p:cNvPr id="46" name="Speech Bubble: Rectangle with Corners Rounded 45">
@@ -20909,8 +21279,8 @@
           </a:p>
         </p:txBody>
       </p:sp>
-      <mc:AlternateContent xmlns:mc="http://schemas.openxmlformats.org/markup-compatibility/2006">
-        <mc:Choice xmlns:a14="http://schemas.microsoft.com/office/drawing/2010/main" Requires="a14">
+      <mc:AlternateContent xmlns:mc="http://schemas.openxmlformats.org/markup-compatibility/2006" xmlns:a14="http://schemas.microsoft.com/office/drawing/2010/main">
+        <mc:Choice Requires="a14">
           <p:sp>
             <p:nvSpPr>
               <p:cNvPr id="3" name="Content Placeholder 2">
@@ -21048,7 +21418,7 @@
             </p:txBody>
           </p:sp>
         </mc:Choice>
-        <mc:Fallback>
+        <mc:Fallback xmlns="">
           <p:sp>
             <p:nvSpPr>
               <p:cNvPr id="3" name="Content Placeholder 2">
@@ -31599,8 +31969,8 @@
           </a:p>
         </p:txBody>
       </p:sp>
-      <mc:AlternateContent xmlns:mc="http://schemas.openxmlformats.org/markup-compatibility/2006" xmlns:a14="http://schemas.microsoft.com/office/drawing/2010/main">
-        <mc:Choice Requires="a14">
+      <mc:AlternateContent xmlns:mc="http://schemas.openxmlformats.org/markup-compatibility/2006">
+        <mc:Choice xmlns:a14="http://schemas.microsoft.com/office/drawing/2010/main" Requires="a14">
           <p:sp>
             <p:nvSpPr>
               <p:cNvPr id="5" name="Content Placeholder 4">
@@ -31680,7 +32050,7 @@
                 </a14:m>
                 <a:r>
                   <a:rPr lang="en-US" dirty="0"/>
-                  <a:t> entriesas a table.</a:t>
+                  <a:t> entries as a table.</a:t>
                 </a:r>
               </a:p>
               <a:p>
@@ -31917,11 +32287,11 @@
                 </a:r>
                 <a:r>
                   <a:rPr lang="en-US" b="1" dirty="0"/>
-                  <a:t>manageable number of parameters </a:t>
+                  <a:t>manageable number of parameters, </a:t>
                 </a:r>
                 <a:r>
                   <a:rPr lang="en-US" dirty="0"/>
-                  <a:t>(weight vector </a:t>
+                  <a:t>the weight vector </a:t>
                 </a:r>
                 <a14:m>
                   <m:oMath xmlns:m="http://schemas.openxmlformats.org/officeDocument/2006/math">
@@ -31931,60 +32301,76 @@
                       </a:rPr>
                       <m:t>𝒘</m:t>
                     </m:r>
+                    <m:r>
+                      <a:rPr lang="en-US" b="0" i="0" dirty="0" smtClean="0">
+                        <a:latin typeface="Cambria Math" panose="02040503050406030204" pitchFamily="18" charset="0"/>
+                      </a:rPr>
+                      <m:t>. </m:t>
+                    </m:r>
                   </m:oMath>
                 </a14:m>
                 <a:r>
                   <a:rPr lang="en-US" dirty="0"/>
-                  <a:t>) and can be calculated from features of state </a:t>
+                  <a:t>I.e., </a:t>
                 </a:r>
                 <a14:m>
                   <m:oMath xmlns:m="http://schemas.openxmlformats.org/officeDocument/2006/math">
                     <m:r>
-                      <a:rPr lang="en-US" b="0" i="1" smtClean="0">
-                        <a:latin typeface="Cambria Math" panose="02040503050406030204" pitchFamily="18" charset="0"/>
-                      </a:rPr>
-                      <m:t>𝑠</m:t>
+                      <a:rPr lang="en-US" i="1">
+                        <a:latin typeface="Cambria Math" panose="02040503050406030204" pitchFamily="18" charset="0"/>
+                      </a:rPr>
+                      <m:t>𝑑</m:t>
+                    </m:r>
+                    <m:r>
+                      <a:rPr lang="en-US" i="1">
+                        <a:latin typeface="Cambria Math" panose="02040503050406030204" pitchFamily="18" charset="0"/>
+                      </a:rPr>
+                      <m:t>≪ |</m:t>
+                    </m:r>
+                    <m:r>
+                      <a:rPr lang="en-US" i="1">
+                        <a:latin typeface="Cambria Math" panose="02040503050406030204" pitchFamily="18" charset="0"/>
+                        <a:ea typeface="Cambria Math" panose="02040503050406030204" pitchFamily="18" charset="0"/>
+                      </a:rPr>
+                      <m:t>𝒮</m:t>
+                    </m:r>
+                    <m:r>
+                      <a:rPr lang="en-US" i="1">
+                        <a:latin typeface="Cambria Math" panose="02040503050406030204" pitchFamily="18" charset="0"/>
+                      </a:rPr>
+                      <m:t>|</m:t>
                     </m:r>
                   </m:oMath>
                 </a14:m>
                 <a:r>
                   <a:rPr lang="en-US" dirty="0"/>
-                  <a:t>. I.e., </a:t>
-                </a:r>
-                <a14:m>
-                  <m:oMath xmlns:m="http://schemas.openxmlformats.org/officeDocument/2006/math">
-                    <m:r>
-                      <a:rPr lang="en-US" i="1">
-                        <a:latin typeface="Cambria Math" panose="02040503050406030204" pitchFamily="18" charset="0"/>
-                      </a:rPr>
-                      <m:t>𝑑</m:t>
-                    </m:r>
-                    <m:r>
-                      <a:rPr lang="en-US" i="1">
-                        <a:latin typeface="Cambria Math" panose="02040503050406030204" pitchFamily="18" charset="0"/>
-                      </a:rPr>
-                      <m:t>≪ |</m:t>
-                    </m:r>
-                    <m:r>
-                      <a:rPr lang="en-US" i="1">
-                        <a:latin typeface="Cambria Math" panose="02040503050406030204" pitchFamily="18" charset="0"/>
-                        <a:ea typeface="Cambria Math" panose="02040503050406030204" pitchFamily="18" charset="0"/>
-                      </a:rPr>
-                      <m:t>𝒮</m:t>
-                    </m:r>
-                    <m:r>
-                      <a:rPr lang="en-US" i="1">
-                        <a:latin typeface="Cambria Math" panose="02040503050406030204" pitchFamily="18" charset="0"/>
-                      </a:rPr>
-                      <m:t>|</m:t>
-                    </m:r>
-                  </m:oMath>
-                </a14:m>
-                <a:endParaRPr lang="en-US" dirty="0"/>
+                  <a:t>.</a:t>
+                </a:r>
               </a:p>
               <a:p>
                 <a:pPr lvl="1"/>
-                <a:endParaRPr lang="en-US" dirty="0"/>
+                <a:r>
+                  <a:rPr lang="en-US" dirty="0"/>
+                  <a:t>The function can only depend on </a:t>
+                </a:r>
+                <a:r>
+                  <a:rPr lang="en-US" b="1" dirty="0"/>
+                  <a:t>features of state </a:t>
+                </a:r>
+                <a14:m>
+                  <m:oMath xmlns:m="http://schemas.openxmlformats.org/officeDocument/2006/math">
+                    <m:r>
+                      <a:rPr lang="en-US" b="1" i="1" smtClean="0">
+                        <a:latin typeface="Cambria Math" panose="02040503050406030204" pitchFamily="18" charset="0"/>
+                      </a:rPr>
+                      <m:t>𝒔</m:t>
+                    </m:r>
+                  </m:oMath>
+                </a14:m>
+                <a:r>
+                  <a:rPr lang="en-US" dirty="0"/>
+                  <a:t>. </a:t>
+                </a:r>
               </a:p>
               <a:p>
                 <a:pPr lvl="1"/>
@@ -31998,7 +32384,14 @@
                 </a:r>
                 <a:r>
                   <a:rPr lang="en-US" dirty="0"/>
-                  <a:t>, so states with similar features get a similar value. Approximation functions do this automatically, since all states share the weight vector and will be affected by changes in the weights.</a:t>
+                  <a:t>, so states with similar features get a similar value. </a:t>
+                </a:r>
+                <a:br>
+                  <a:rPr lang="en-US" dirty="0"/>
+                </a:br>
+                <a:r>
+                  <a:rPr lang="en-US" dirty="0"/>
+                  <a:t>Note: Approximation functions do this automatically, since all states share the weight vector and will be affected by changes in the weights.</a:t>
                 </a:r>
               </a:p>
               <a:p>
@@ -32008,7 +32401,7 @@
             </p:txBody>
           </p:sp>
         </mc:Choice>
-        <mc:Fallback xmlns="">
+        <mc:Fallback>
           <p:sp>
             <p:nvSpPr>
               <p:cNvPr id="5" name="Content Placeholder 4">
@@ -32029,7 +32422,7 @@
               <a:blipFill>
                 <a:blip r:embed="rId3"/>
                 <a:stretch>
-                  <a:fillRect l="-754" t="-2551" r="-232" b="-1276"/>
+                  <a:fillRect l="-754" t="-2551" b="-1276"/>
                 </a:stretch>
               </a:blipFill>
             </p:spPr>
@@ -32236,6 +32629,37 @@
                                         <p:tgtEl>
                                           <p:spTgt spid="5">
                                             <p:txEl>
+                                              <p:pRg st="9" end="9"/>
+                                            </p:txEl>
+                                          </p:spTgt>
+                                        </p:tgtEl>
+                                        <p:attrNameLst>
+                                          <p:attrName>style.visibility</p:attrName>
+                                        </p:attrNameLst>
+                                      </p:cBhvr>
+                                      <p:to>
+                                        <p:strVal val="visible"/>
+                                      </p:to>
+                                    </p:set>
+                                  </p:childTnLst>
+                                </p:cTn>
+                              </p:par>
+                              <p:par>
+                                <p:cTn id="17" presetID="1" presetClass="entr" presetSubtype="0" fill="hold" nodeType="withEffect">
+                                  <p:stCondLst>
+                                    <p:cond delay="0"/>
+                                  </p:stCondLst>
+                                  <p:childTnLst>
+                                    <p:set>
+                                      <p:cBhvr>
+                                        <p:cTn id="18" dur="1" fill="hold">
+                                          <p:stCondLst>
+                                            <p:cond delay="0"/>
+                                          </p:stCondLst>
+                                        </p:cTn>
+                                        <p:tgtEl>
+                                          <p:spTgt spid="5">
+                                            <p:txEl>
                                               <p:pRg st="10" end="10"/>
                                             </p:txEl>
                                           </p:spTgt>
@@ -32329,8 +32753,8 @@
           </a:p>
         </p:txBody>
       </p:sp>
-      <mc:AlternateContent xmlns:mc="http://schemas.openxmlformats.org/markup-compatibility/2006" xmlns:a14="http://schemas.microsoft.com/office/drawing/2010/main">
-        <mc:Choice Requires="a14">
+      <mc:AlternateContent xmlns:mc="http://schemas.openxmlformats.org/markup-compatibility/2006">
+        <mc:Choice xmlns:a14="http://schemas.microsoft.com/office/drawing/2010/main" Requires="a14">
           <p:sp>
             <p:nvSpPr>
               <p:cNvPr id="3" name="Content Placeholder 2">
@@ -32350,7 +32774,7 @@
             <p:spPr/>
             <p:txBody>
               <a:bodyPr>
-                <a:normAutofit fontScale="92500"/>
+                <a:normAutofit/>
               </a:bodyPr>
               <a:lstStyle/>
               <a:p>
@@ -32457,35 +32881,6 @@
                 </a:r>
               </a:p>
               <a:p>
-                <a:pPr lvl="1"/>
-                <a:r>
-                  <a:rPr lang="en-US" dirty="0"/>
-                  <a:t>The learning algorithm will update the weights </a:t>
-                </a:r>
-                <a14:m>
-                  <m:oMath xmlns:m="http://schemas.openxmlformats.org/officeDocument/2006/math">
-                    <m:r>
-                      <a:rPr lang="en-US" b="1">
-                        <a:latin typeface="Cambria Math" panose="02040503050406030204" pitchFamily="18" charset="0"/>
-                        <a:ea typeface="Cambria Math" panose="02040503050406030204" pitchFamily="18" charset="0"/>
-                      </a:rPr>
-                      <m:t>𝐰</m:t>
-                    </m:r>
-                  </m:oMath>
-                </a14:m>
-                <a:r>
-                  <a:rPr lang="en-US" dirty="0"/>
-                  <a:t> to reduce the prediction error.</a:t>
-                </a:r>
-                <a:br>
-                  <a:rPr lang="en-US" dirty="0"/>
-                </a:br>
-                <a:r>
-                  <a:rPr lang="en-US" dirty="0"/>
-                  <a:t>Note: this change will also affect the prediction for other states!</a:t>
-                </a:r>
-              </a:p>
-              <a:p>
                 <a:endParaRPr lang="en-US" dirty="0"/>
               </a:p>
               <a:p>
@@ -32540,11 +32935,11 @@
                       <m:t>⟼</m:t>
                     </m:r>
                     <m:r>
-                      <a:rPr lang="en-US" i="1">
+                      <a:rPr lang="en-US" b="0" i="1" smtClean="0">
                         <a:latin typeface="Cambria Math" panose="02040503050406030204" pitchFamily="18" charset="0"/>
                         <a:ea typeface="Cambria Math" panose="02040503050406030204" pitchFamily="18" charset="0"/>
                       </a:rPr>
-                      <m:t>𝑢</m:t>
+                      <m:t>𝑈</m:t>
                     </m:r>
                   </m:oMath>
                 </a14:m>
@@ -32818,23 +33213,20 @@
                           </m:sSubPr>
                           <m:e>
                             <m:r>
-                              <a:rPr lang="en-US" b="1" i="0" smtClean="0">
+                              <a:rPr lang="en-US" b="1" i="1" smtClean="0">
                                 <a:latin typeface="Cambria Math" panose="02040503050406030204" pitchFamily="18" charset="0"/>
                                 <a:ea typeface="Cambria Math" panose="02040503050406030204" pitchFamily="18" charset="0"/>
                               </a:rPr>
-                              <m:t>𝐰</m:t>
+                              <m:t>𝒘</m:t>
                             </m:r>
                           </m:e>
                           <m:sub>
                             <m:r>
-                              <m:rPr>
-                                <m:sty m:val="p"/>
-                              </m:rPr>
-                              <a:rPr lang="en-US" b="0" i="0" smtClean="0">
+                              <a:rPr lang="en-US" b="0" i="1" smtClean="0">
                                 <a:latin typeface="Cambria Math" panose="02040503050406030204" pitchFamily="18" charset="0"/>
                                 <a:ea typeface="Cambria Math" panose="02040503050406030204" pitchFamily="18" charset="0"/>
                               </a:rPr>
-                              <m:t>t</m:t>
+                              <m:t>𝑡</m:t>
                             </m:r>
                           </m:sub>
                         </m:sSub>
@@ -33065,23 +33457,20 @@
                           </m:sSubPr>
                           <m:e>
                             <m:r>
-                              <a:rPr lang="en-US" b="1">
+                              <a:rPr lang="en-US" b="1" i="1">
                                 <a:latin typeface="Cambria Math" panose="02040503050406030204" pitchFamily="18" charset="0"/>
                                 <a:ea typeface="Cambria Math" panose="02040503050406030204" pitchFamily="18" charset="0"/>
                               </a:rPr>
-                              <m:t>𝐰</m:t>
+                              <m:t>𝒘</m:t>
                             </m:r>
                           </m:e>
                           <m:sub>
                             <m:r>
-                              <m:rPr>
-                                <m:sty m:val="p"/>
-                              </m:rPr>
-                              <a:rPr lang="en-US">
+                              <a:rPr lang="en-US" i="1">
                                 <a:latin typeface="Cambria Math" panose="02040503050406030204" pitchFamily="18" charset="0"/>
                                 <a:ea typeface="Cambria Math" panose="02040503050406030204" pitchFamily="18" charset="0"/>
                               </a:rPr>
-                              <m:t>t</m:t>
+                              <m:t>𝑡</m:t>
                             </m:r>
                           </m:sub>
                         </m:sSub>
@@ -33101,7 +33490,7 @@
             </p:txBody>
           </p:sp>
         </mc:Choice>
-        <mc:Fallback xmlns="">
+        <mc:Fallback>
           <p:sp>
             <p:nvSpPr>
               <p:cNvPr id="3" name="Content Placeholder 2">
@@ -33122,7 +33511,7 @@
               <a:blipFill>
                 <a:blip r:embed="rId2"/>
                 <a:stretch>
-                  <a:fillRect l="-1043" t="-1913" b="-2168"/>
+                  <a:fillRect l="-1217" t="-2168"/>
                 </a:stretch>
               </a:blipFill>
             </p:spPr>
@@ -33334,7 +33723,7 @@
                                         <p:tgtEl>
                                           <p:spTgt spid="3">
                                             <p:txEl>
-                                              <p:pRg st="4" end="4"/>
+                                              <p:pRg st="3" end="3"/>
                                             </p:txEl>
                                           </p:spTgt>
                                         </p:tgtEl>
@@ -33365,7 +33754,7 @@
                                         <p:tgtEl>
                                           <p:spTgt spid="3">
                                             <p:txEl>
-                                              <p:pRg st="5" end="5"/>
+                                              <p:pRg st="4" end="4"/>
                                             </p:txEl>
                                           </p:spTgt>
                                         </p:tgtEl>
@@ -33396,7 +33785,7 @@
                                         <p:tgtEl>
                                           <p:spTgt spid="3">
                                             <p:txEl>
-                                              <p:pRg st="6" end="6"/>
+                                              <p:pRg st="5" end="5"/>
                                             </p:txEl>
                                           </p:spTgt>
                                         </p:tgtEl>
@@ -33427,7 +33816,7 @@
                                         <p:tgtEl>
                                           <p:spTgt spid="3">
                                             <p:txEl>
-                                              <p:pRg st="7" end="7"/>
+                                              <p:pRg st="6" end="6"/>
                                             </p:txEl>
                                           </p:spTgt>
                                         </p:tgtEl>
@@ -33655,19 +34044,147 @@
             </p:nvSpPr>
             <p:spPr>
               <a:xfrm>
-                <a:off x="838200" y="1397330"/>
-                <a:ext cx="10515600" cy="3128531"/>
+                <a:off x="838200" y="1162930"/>
+                <a:ext cx="10515600" cy="3362932"/>
               </a:xfrm>
             </p:spPr>
             <p:txBody>
               <a:bodyPr>
-                <a:normAutofit fontScale="62500" lnSpcReduction="20000"/>
+                <a:normAutofit fontScale="47500" lnSpcReduction="20000"/>
               </a:bodyPr>
               <a:lstStyle/>
               <a:p>
                 <a:r>
+                  <a:rPr lang="en-US" b="1" dirty="0"/>
+                  <a:t>Learning algorithm</a:t>
+                </a:r>
+                <a:r>
                   <a:rPr lang="en-US" dirty="0"/>
-                  <a:t>Prediction error for state s: </a:t>
+                  <a:t>: Update the weights </a:t>
+                </a:r>
+                <a14:m>
+                  <m:oMath xmlns:m="http://schemas.openxmlformats.org/officeDocument/2006/math">
+                    <m:r>
+                      <a:rPr lang="en-US" b="1">
+                        <a:latin typeface="Cambria Math" panose="02040503050406030204" pitchFamily="18" charset="0"/>
+                        <a:ea typeface="Cambria Math" panose="02040503050406030204" pitchFamily="18" charset="0"/>
+                      </a:rPr>
+                      <m:t>𝐰</m:t>
+                    </m:r>
+                  </m:oMath>
+                </a14:m>
+                <a:r>
+                  <a:rPr lang="en-US" dirty="0"/>
+                  <a:t> to reduce the error for </a:t>
+                </a:r>
+                <a14:m>
+                  <m:oMath xmlns:m="http://schemas.openxmlformats.org/officeDocument/2006/math">
+                    <m:acc>
+                      <m:accPr>
+                        <m:chr m:val="̂"/>
+                        <m:ctrlPr>
+                          <a:rPr lang="en-US" i="1">
+                            <a:latin typeface="Cambria Math" panose="02040503050406030204" pitchFamily="18" charset="0"/>
+                          </a:rPr>
+                        </m:ctrlPr>
+                      </m:accPr>
+                      <m:e>
+                        <m:r>
+                          <a:rPr lang="en-US" i="1">
+                            <a:latin typeface="Cambria Math" panose="02040503050406030204" pitchFamily="18" charset="0"/>
+                          </a:rPr>
+                          <m:t>𝑣</m:t>
+                        </m:r>
+                      </m:e>
+                    </m:acc>
+                    <m:d>
+                      <m:dPr>
+                        <m:ctrlPr>
+                          <a:rPr lang="en-US" i="1" dirty="0">
+                            <a:latin typeface="Cambria Math" panose="02040503050406030204" pitchFamily="18" charset="0"/>
+                          </a:rPr>
+                        </m:ctrlPr>
+                      </m:dPr>
+                      <m:e>
+                        <m:r>
+                          <a:rPr lang="en-US" i="1">
+                            <a:latin typeface="Cambria Math" panose="02040503050406030204" pitchFamily="18" charset="0"/>
+                          </a:rPr>
+                          <m:t>𝑠</m:t>
+                        </m:r>
+                        <m:r>
+                          <a:rPr lang="en-US" i="1">
+                            <a:latin typeface="Cambria Math" panose="02040503050406030204" pitchFamily="18" charset="0"/>
+                          </a:rPr>
+                          <m:t>,</m:t>
+                        </m:r>
+                        <m:r>
+                          <a:rPr lang="en-US" b="1" i="1">
+                            <a:latin typeface="Cambria Math" panose="02040503050406030204" pitchFamily="18" charset="0"/>
+                          </a:rPr>
+                          <m:t>𝒘</m:t>
+                        </m:r>
+                      </m:e>
+                    </m:d>
+                    <m:r>
+                      <a:rPr lang="en-US" i="1">
+                        <a:latin typeface="Cambria Math" panose="02040503050406030204" pitchFamily="18" charset="0"/>
+                      </a:rPr>
+                      <m:t>≈</m:t>
+                    </m:r>
+                    <m:sSub>
+                      <m:sSubPr>
+                        <m:ctrlPr>
+                          <a:rPr lang="en-US" i="1">
+                            <a:latin typeface="Cambria Math" panose="02040503050406030204" pitchFamily="18" charset="0"/>
+                          </a:rPr>
+                        </m:ctrlPr>
+                      </m:sSubPr>
+                      <m:e>
+                        <m:r>
+                          <a:rPr lang="en-US" i="1">
+                            <a:latin typeface="Cambria Math" panose="02040503050406030204" pitchFamily="18" charset="0"/>
+                          </a:rPr>
+                          <m:t>𝑣</m:t>
+                        </m:r>
+                      </m:e>
+                      <m:sub>
+                        <m:r>
+                          <a:rPr lang="en-US" i="1">
+                            <a:latin typeface="Cambria Math" panose="02040503050406030204" pitchFamily="18" charset="0"/>
+                          </a:rPr>
+                          <m:t>𝜋</m:t>
+                        </m:r>
+                      </m:sub>
+                    </m:sSub>
+                    <m:r>
+                      <a:rPr lang="en-US" i="1">
+                        <a:latin typeface="Cambria Math" panose="02040503050406030204" pitchFamily="18" charset="0"/>
+                      </a:rPr>
+                      <m:t> </m:t>
+                    </m:r>
+                  </m:oMath>
+                </a14:m>
+                <a:endParaRPr lang="en-US" dirty="0"/>
+              </a:p>
+              <a:p>
+                <a:r>
+                  <a:rPr lang="en-US" b="1" dirty="0"/>
+                  <a:t>Note on generalization</a:t>
+                </a:r>
+                <a:r>
+                  <a:rPr lang="en-US" dirty="0"/>
+                  <a:t>: Any change will also affect the prediction for other states and thus reduce or increase their error!</a:t>
+                </a:r>
+              </a:p>
+              <a:p>
+                <a:r>
+                  <a:rPr lang="en-US" b="1" dirty="0"/>
+                  <a:t>Prediction error </a:t>
+                </a:r>
+                <a:r>
+                  <a:rPr lang="en-US" dirty="0"/>
+                  <a:t>for state s: </a:t>
                 </a:r>
                 <a:br>
                   <a:rPr lang="en-US" dirty="0"/>
@@ -33714,7 +34231,19 @@
                           <a:rPr lang="en-US" b="0" i="1" smtClean="0">
                             <a:latin typeface="Cambria Math" panose="02040503050406030204" pitchFamily="18" charset="0"/>
                           </a:rPr>
-                          <m:t>−</m:t>
+                          <m:t>(</m:t>
+                        </m:r>
+                        <m:r>
+                          <a:rPr lang="en-US" b="0" i="1" smtClean="0">
+                            <a:latin typeface="Cambria Math" panose="02040503050406030204" pitchFamily="18" charset="0"/>
+                          </a:rPr>
+                          <m:t>𝑠</m:t>
+                        </m:r>
+                        <m:r>
+                          <a:rPr lang="en-US" b="0" i="1" smtClean="0">
+                            <a:latin typeface="Cambria Math" panose="02040503050406030204" pitchFamily="18" charset="0"/>
+                          </a:rPr>
+                          <m:t>)−</m:t>
                         </m:r>
                         <m:acc>
                           <m:accPr>
@@ -33787,10 +34316,9 @@
                 <a:br>
                   <a:rPr lang="en-US" dirty="0"/>
                 </a:br>
-                <a:r>
+                <a:br>
                   <a:rPr lang="en-US" dirty="0"/>
-                  <a:t>				 </a:t>
-                </a:r>
+                </a:br>
                 <a14:m>
                   <m:oMath xmlns:m="http://schemas.openxmlformats.org/officeDocument/2006/math">
                     <m:r>
@@ -33820,7 +34348,7 @@
                       <a:rPr lang="en-US" b="0" i="1" smtClean="0">
                         <a:latin typeface="Cambria Math" panose="02040503050406030204" pitchFamily="18" charset="0"/>
                       </a:rPr>
-                      <m:t>≥0;</m:t>
+                      <m:t>≥0;     </m:t>
                     </m:r>
                     <m:nary>
                       <m:naryPr>
@@ -33883,23 +34411,36 @@
                 </a:endParaRPr>
               </a:p>
               <a:p>
-                <a:r>
-                  <a:rPr lang="en-US" dirty="0"/>
-                  <a:t>Since we will work with data obtained by following a policy </a:t>
-                </a:r>
                 <a14:m>
                   <m:oMath xmlns:m="http://schemas.openxmlformats.org/officeDocument/2006/math">
                     <m:r>
-                      <a:rPr lang="en-US" b="0" i="1" smtClean="0">
-                        <a:latin typeface="Cambria Math" panose="02040503050406030204" pitchFamily="18" charset="0"/>
-                      </a:rPr>
-                      <m:t>𝜋</m:t>
-                    </m:r>
+                      <a:rPr lang="en-US" i="1">
+                        <a:latin typeface="Cambria Math" panose="02040503050406030204" pitchFamily="18" charset="0"/>
+                      </a:rPr>
+                      <m:t>𝜇</m:t>
+                    </m:r>
+                    <m:d>
+                      <m:dPr>
+                        <m:ctrlPr>
+                          <a:rPr lang="en-US" i="1">
+                            <a:latin typeface="Cambria Math" panose="02040503050406030204" pitchFamily="18" charset="0"/>
+                          </a:rPr>
+                        </m:ctrlPr>
+                      </m:dPr>
+                      <m:e>
+                        <m:r>
+                          <a:rPr lang="en-US" i="1">
+                            <a:latin typeface="Cambria Math" panose="02040503050406030204" pitchFamily="18" charset="0"/>
+                          </a:rPr>
+                          <m:t>𝑠</m:t>
+                        </m:r>
+                      </m:e>
+                    </m:d>
                   </m:oMath>
                 </a14:m>
                 <a:r>
                   <a:rPr lang="en-US" dirty="0"/>
-                  <a:t>, </a:t>
+                  <a:t> is typically the fraction of time spent in </a:t>
                 </a:r>
                 <a14:m>
                   <m:oMath xmlns:m="http://schemas.openxmlformats.org/officeDocument/2006/math">
@@ -33907,31 +34448,13 @@
                       <a:rPr lang="en-US" i="1">
                         <a:latin typeface="Cambria Math" panose="02040503050406030204" pitchFamily="18" charset="0"/>
                       </a:rPr>
-                      <m:t>𝜇</m:t>
-                    </m:r>
-                    <m:r>
-                      <a:rPr lang="en-US" i="1">
-                        <a:latin typeface="Cambria Math" panose="02040503050406030204" pitchFamily="18" charset="0"/>
-                      </a:rPr>
-                      <m:t>(</m:t>
-                    </m:r>
-                    <m:r>
-                      <a:rPr lang="en-US" i="1">
-                        <a:latin typeface="Cambria Math" panose="02040503050406030204" pitchFamily="18" charset="0"/>
-                      </a:rPr>
                       <m:t>𝑠</m:t>
-                    </m:r>
-                    <m:r>
-                      <a:rPr lang="en-US" i="1">
-                        <a:latin typeface="Cambria Math" panose="02040503050406030204" pitchFamily="18" charset="0"/>
-                      </a:rPr>
-                      <m:t>)</m:t>
                     </m:r>
                   </m:oMath>
                 </a14:m>
                 <a:r>
                   <a:rPr lang="en-US" dirty="0"/>
-                  <a:t> is implicitly used as the fraction of time spent in </a:t>
+                  <a:t> when following </a:t>
                 </a:r>
                 <a14:m>
                   <m:oMath xmlns:m="http://schemas.openxmlformats.org/officeDocument/2006/math">
@@ -33939,13 +34462,13 @@
                       <a:rPr lang="en-US" i="1">
                         <a:latin typeface="Cambria Math" panose="02040503050406030204" pitchFamily="18" charset="0"/>
                       </a:rPr>
-                      <m:t>𝑠</m:t>
+                      <m:t>𝜋</m:t>
                     </m:r>
                   </m:oMath>
                 </a14:m>
                 <a:r>
                   <a:rPr lang="en-US" dirty="0"/>
-                  <a:t> when following </a:t>
+                  <a:t>. We obtain data by following a policy </a:t>
                 </a:r>
                 <a14:m>
                   <m:oMath xmlns:m="http://schemas.openxmlformats.org/officeDocument/2006/math">
@@ -33959,21 +34482,52 @@
                 </a14:m>
                 <a:r>
                   <a:rPr lang="en-US" dirty="0"/>
-                  <a:t>. </a:t>
+                  <a:t> so samples already comes from this distribution.</a:t>
                 </a:r>
               </a:p>
               <a:p>
                 <a:pPr lvl="1"/>
                 <a:r>
                   <a:rPr lang="en-US" dirty="0"/>
-                  <a:t>For continuous tasks, this is a stationary distribution called the on-policy distribution. </a:t>
+                  <a:t>For continuous tasks, </a:t>
+                </a:r>
+                <a14:m>
+                  <m:oMath xmlns:m="http://schemas.openxmlformats.org/officeDocument/2006/math">
+                    <m:r>
+                      <a:rPr lang="en-US" i="1">
+                        <a:latin typeface="Cambria Math" panose="02040503050406030204" pitchFamily="18" charset="0"/>
+                      </a:rPr>
+                      <m:t>𝜇</m:t>
+                    </m:r>
+                    <m:d>
+                      <m:dPr>
+                        <m:ctrlPr>
+                          <a:rPr lang="en-US" i="1">
+                            <a:latin typeface="Cambria Math" panose="02040503050406030204" pitchFamily="18" charset="0"/>
+                          </a:rPr>
+                        </m:ctrlPr>
+                      </m:dPr>
+                      <m:e>
+                        <m:r>
+                          <a:rPr lang="en-US" i="1">
+                            <a:latin typeface="Cambria Math" panose="02040503050406030204" pitchFamily="18" charset="0"/>
+                          </a:rPr>
+                          <m:t>𝑠</m:t>
+                        </m:r>
+                      </m:e>
+                    </m:d>
+                  </m:oMath>
+                </a14:m>
+                <a:r>
+                  <a:rPr lang="en-US" dirty="0"/>
+                  <a:t> is a stationary distribution called the on-policy distribution. </a:t>
                 </a:r>
               </a:p>
               <a:p>
                 <a:pPr lvl="1"/>
                 <a:r>
                   <a:rPr lang="en-US" dirty="0"/>
-                  <a:t>For episodic tasks a near stationary distribution only exists for large horizons on ergodic</a:t>
+                  <a:t>For episodic tasks a near stationary distribution only exists for ergodic</a:t>
                 </a:r>
                 <a:r>
                   <a:rPr lang="en-US" baseline="30000" dirty="0"/>
@@ -33981,7 +34535,7 @@
                 </a:r>
                 <a:r>
                   <a:rPr lang="en-US" dirty="0"/>
-                  <a:t> MDPs.</a:t>
+                  <a:t> MDPs with large horizons.</a:t>
                 </a:r>
               </a:p>
               <a:p>
@@ -34014,13 +34568,13 @@
             </p:nvSpPr>
             <p:spPr>
               <a:xfrm>
-                <a:off x="838200" y="1397330"/>
-                <a:ext cx="10515600" cy="3128531"/>
+                <a:off x="838200" y="1162930"/>
+                <a:ext cx="10515600" cy="3362932"/>
               </a:xfrm>
               <a:blipFill>
                 <a:blip r:embed="rId3"/>
                 <a:stretch>
-                  <a:fillRect l="-406" t="-2924"/>
+                  <a:fillRect l="-58" t="-1452"/>
                 </a:stretch>
               </a:blipFill>
             </p:spPr>
@@ -34039,8 +34593,8 @@
           </p:sp>
         </mc:Fallback>
       </mc:AlternateContent>
-      <mc:AlternateContent xmlns:mc="http://schemas.openxmlformats.org/markup-compatibility/2006">
-        <mc:Choice xmlns:a14="http://schemas.microsoft.com/office/drawing/2010/main" Requires="a14">
+      <mc:AlternateContent xmlns:mc="http://schemas.openxmlformats.org/markup-compatibility/2006" xmlns:a14="http://schemas.microsoft.com/office/drawing/2010/main">
+        <mc:Choice Requires="a14">
           <p:sp>
             <p:nvSpPr>
               <p:cNvPr id="5" name="TextBox 4">
@@ -34312,7 +34866,7 @@
             </p:txBody>
           </p:sp>
         </mc:Choice>
-        <mc:Fallback>
+        <mc:Fallback xmlns="">
           <p:sp>
             <p:nvSpPr>
               <p:cNvPr id="5" name="TextBox 4">
@@ -34391,7 +34945,64 @@
             </a:r>
             <a:r>
               <a:rPr lang="en-US" sz="1400" dirty="0"/>
-              <a:t>Ergodic means: That a Markov process is irreducible and aperiodic.  </a:t>
+              <a:t>Ergodic: The Markov process is irreducible (all states are reachable) and aperiodic (does not get stuck).</a:t>
+            </a:r>
+          </a:p>
+        </p:txBody>
+      </p:sp>
+      <p:sp>
+        <p:nvSpPr>
+          <p:cNvPr id="6" name="Speech Bubble: Rectangle with Corners Rounded 5">
+            <a:extLst>
+              <a:ext uri="{FF2B5EF4-FFF2-40B4-BE49-F238E27FC236}">
+                <a16:creationId xmlns:a16="http://schemas.microsoft.com/office/drawing/2014/main" id="{C4A1D900-BB11-07B0-E2D8-31AC1D55EED5}"/>
+              </a:ext>
+            </a:extLst>
+          </p:cNvPr>
+          <p:cNvSpPr/>
+          <p:nvPr/>
+        </p:nvSpPr>
+        <p:spPr>
+          <a:xfrm>
+            <a:off x="9500382" y="4468837"/>
+            <a:ext cx="2400886" cy="1176997"/>
+          </a:xfrm>
+          <a:prstGeom prst="wedgeRoundRectCallout">
+            <a:avLst>
+              <a:gd name="adj1" fmla="val -118735"/>
+              <a:gd name="adj2" fmla="val 34611"/>
+              <a:gd name="adj3" fmla="val 16667"/>
+            </a:avLst>
+          </a:prstGeom>
+        </p:spPr>
+        <p:style>
+          <a:lnRef idx="2">
+            <a:schemeClr val="accent1">
+              <a:shade val="15000"/>
+            </a:schemeClr>
+          </a:lnRef>
+          <a:fillRef idx="1">
+            <a:schemeClr val="accent1"/>
+          </a:fillRef>
+          <a:effectRef idx="0">
+            <a:schemeClr val="accent1"/>
+          </a:effectRef>
+          <a:fontRef idx="minor">
+            <a:schemeClr val="lt1"/>
+          </a:fontRef>
+        </p:style>
+        <p:txBody>
+          <a:bodyPr rtlCol="0" anchor="ctr"/>
+          <a:lstStyle/>
+          <a:p>
+            <a:pPr algn="ctr"/>
+            <a:r>
+              <a:rPr lang="en-US" sz="1200" b="1" dirty="0"/>
+              <a:t>Remember</a:t>
+            </a:r>
+            <a:r>
+              <a:rPr lang="en-US" sz="1200" dirty="0"/>
+              <a:t>: Squared errors useful mathematical and statistical properties that make learning and optimization easier and more effective.</a:t>
             </a:r>
           </a:p>
         </p:txBody>
@@ -34427,7 +35038,7 @@
                             </p:stCondLst>
                             <p:childTnLst>
                               <p:par>
-                                <p:cTn id="5" presetID="1" presetClass="entr" presetSubtype="0" fill="hold" nodeType="clickEffect">
+                                <p:cTn id="5" presetID="1" presetClass="entr" presetSubtype="0" fill="hold" grpId="0" nodeType="clickEffect">
                                   <p:stCondLst>
                                     <p:cond delay="0"/>
                                   </p:stCondLst>
@@ -34442,7 +35053,7 @@
                                         <p:tgtEl>
                                           <p:spTgt spid="3">
                                             <p:txEl>
-                                              <p:pRg st="2" end="2"/>
+                                              <p:pRg st="0" end="0"/>
                                             </p:txEl>
                                           </p:spTgt>
                                         </p:tgtEl>
@@ -34457,15 +35068,33 @@
                                   </p:childTnLst>
                                 </p:cTn>
                               </p:par>
+                            </p:childTnLst>
+                          </p:cTn>
+                        </p:par>
+                      </p:childTnLst>
+                    </p:cTn>
+                  </p:par>
+                  <p:par>
+                    <p:cTn id="7" fill="hold">
+                      <p:stCondLst>
+                        <p:cond delay="indefinite"/>
+                      </p:stCondLst>
+                      <p:childTnLst>
+                        <p:par>
+                          <p:cTn id="8" fill="hold">
+                            <p:stCondLst>
+                              <p:cond delay="0"/>
+                            </p:stCondLst>
+                            <p:childTnLst>
                               <p:par>
-                                <p:cTn id="7" presetID="1" presetClass="entr" presetSubtype="0" fill="hold" nodeType="withEffect">
+                                <p:cTn id="9" presetID="1" presetClass="entr" presetSubtype="0" fill="hold" grpId="0" nodeType="clickEffect">
                                   <p:stCondLst>
                                     <p:cond delay="0"/>
                                   </p:stCondLst>
                                   <p:childTnLst>
                                     <p:set>
                                       <p:cBhvr>
-                                        <p:cTn id="8" dur="1" fill="hold">
+                                        <p:cTn id="10" dur="1" fill="hold">
                                           <p:stCondLst>
                                             <p:cond delay="0"/>
                                           </p:stCondLst>
@@ -34473,7 +35102,7 @@
                                         <p:tgtEl>
                                           <p:spTgt spid="3">
                                             <p:txEl>
-                                              <p:pRg st="4" end="4"/>
+                                              <p:pRg st="1" end="1"/>
                                             </p:txEl>
                                           </p:spTgt>
                                         </p:tgtEl>
@@ -34488,70 +35117,26 @@
                                   </p:childTnLst>
                                 </p:cTn>
                               </p:par>
+                            </p:childTnLst>
+                          </p:cTn>
+                        </p:par>
+                      </p:childTnLst>
+                    </p:cTn>
+                  </p:par>
+                  <p:par>
+                    <p:cTn id="11" fill="hold">
+                      <p:stCondLst>
+                        <p:cond delay="indefinite"/>
+                      </p:stCondLst>
+                      <p:childTnLst>
+                        <p:par>
+                          <p:cTn id="12" fill="hold">
+                            <p:stCondLst>
+                              <p:cond delay="0"/>
+                            </p:stCondLst>
+                            <p:childTnLst>
                               <p:par>
-                                <p:cTn id="9" presetID="1" presetClass="entr" presetSubtype="0" fill="hold" nodeType="withEffect">
-                                  <p:stCondLst>
-                                    <p:cond delay="0"/>
-                                  </p:stCondLst>
-                                  <p:childTnLst>
-                                    <p:set>
-                                      <p:cBhvr>
-                                        <p:cTn id="10" dur="1" fill="hold">
-                                          <p:stCondLst>
-                                            <p:cond delay="0"/>
-                                          </p:stCondLst>
-                                        </p:cTn>
-                                        <p:tgtEl>
-                                          <p:spTgt spid="3">
-                                            <p:txEl>
-                                              <p:pRg st="5" end="5"/>
-                                            </p:txEl>
-                                          </p:spTgt>
-                                        </p:tgtEl>
-                                        <p:attrNameLst>
-                                          <p:attrName>style.visibility</p:attrName>
-                                        </p:attrNameLst>
-                                      </p:cBhvr>
-                                      <p:to>
-                                        <p:strVal val="visible"/>
-                                      </p:to>
-                                    </p:set>
-                                  </p:childTnLst>
-                                </p:cTn>
-                              </p:par>
-                              <p:par>
-                                <p:cTn id="11" presetID="1" presetClass="entr" presetSubtype="0" fill="hold" nodeType="withEffect">
-                                  <p:stCondLst>
-                                    <p:cond delay="0"/>
-                                  </p:stCondLst>
-                                  <p:childTnLst>
-                                    <p:set>
-                                      <p:cBhvr>
-                                        <p:cTn id="12" dur="1" fill="hold">
-                                          <p:stCondLst>
-                                            <p:cond delay="0"/>
-                                          </p:stCondLst>
-                                        </p:cTn>
-                                        <p:tgtEl>
-                                          <p:spTgt spid="3">
-                                            <p:txEl>
-                                              <p:pRg st="6" end="6"/>
-                                            </p:txEl>
-                                          </p:spTgt>
-                                        </p:tgtEl>
-                                        <p:attrNameLst>
-                                          <p:attrName>style.visibility</p:attrName>
-                                        </p:attrNameLst>
-                                      </p:cBhvr>
-                                      <p:to>
-                                        <p:strVal val="visible"/>
-                                      </p:to>
-                                    </p:set>
-                                  </p:childTnLst>
-                                </p:cTn>
-                              </p:par>
-                              <p:par>
-                                <p:cTn id="13" presetID="1" presetClass="entr" presetSubtype="0" fill="hold" grpId="0" nodeType="withEffect">
+                                <p:cTn id="13" presetID="1" presetClass="entr" presetSubtype="0" fill="hold" grpId="0" nodeType="clickEffect">
                                   <p:stCondLst>
                                     <p:cond delay="0"/>
                                   </p:stCondLst>
@@ -34564,7 +35149,11 @@
                                           </p:stCondLst>
                                         </p:cTn>
                                         <p:tgtEl>
-                                          <p:spTgt spid="4"/>
+                                          <p:spTgt spid="3">
+                                            <p:txEl>
+                                              <p:pRg st="2" end="2"/>
+                                            </p:txEl>
+                                          </p:spTgt>
                                         </p:tgtEl>
                                         <p:attrNameLst>
                                           <p:attrName>style.visibility</p:attrName>
@@ -34609,7 +35198,203 @@
                                           </p:stCondLst>
                                         </p:cTn>
                                         <p:tgtEl>
+                                          <p:spTgt spid="3">
+                                            <p:txEl>
+                                              <p:pRg st="4" end="4"/>
+                                            </p:txEl>
+                                          </p:spTgt>
+                                        </p:tgtEl>
+                                        <p:attrNameLst>
+                                          <p:attrName>style.visibility</p:attrName>
+                                        </p:attrNameLst>
+                                      </p:cBhvr>
+                                      <p:to>
+                                        <p:strVal val="visible"/>
+                                      </p:to>
+                                    </p:set>
+                                  </p:childTnLst>
+                                </p:cTn>
+                              </p:par>
+                              <p:par>
+                                <p:cTn id="19" presetID="1" presetClass="entr" presetSubtype="0" fill="hold" grpId="0" nodeType="withEffect">
+                                  <p:stCondLst>
+                                    <p:cond delay="0"/>
+                                  </p:stCondLst>
+                                  <p:childTnLst>
+                                    <p:set>
+                                      <p:cBhvr>
+                                        <p:cTn id="20" dur="1" fill="hold">
+                                          <p:stCondLst>
+                                            <p:cond delay="0"/>
+                                          </p:stCondLst>
+                                        </p:cTn>
+                                        <p:tgtEl>
+                                          <p:spTgt spid="3">
+                                            <p:txEl>
+                                              <p:pRg st="6" end="6"/>
+                                            </p:txEl>
+                                          </p:spTgt>
+                                        </p:tgtEl>
+                                        <p:attrNameLst>
+                                          <p:attrName>style.visibility</p:attrName>
+                                        </p:attrNameLst>
+                                      </p:cBhvr>
+                                      <p:to>
+                                        <p:strVal val="visible"/>
+                                      </p:to>
+                                    </p:set>
+                                  </p:childTnLst>
+                                </p:cTn>
+                              </p:par>
+                              <p:par>
+                                <p:cTn id="21" presetID="1" presetClass="entr" presetSubtype="0" fill="hold" grpId="0" nodeType="withEffect">
+                                  <p:stCondLst>
+                                    <p:cond delay="0"/>
+                                  </p:stCondLst>
+                                  <p:childTnLst>
+                                    <p:set>
+                                      <p:cBhvr>
+                                        <p:cTn id="22" dur="1" fill="hold">
+                                          <p:stCondLst>
+                                            <p:cond delay="0"/>
+                                          </p:stCondLst>
+                                        </p:cTn>
+                                        <p:tgtEl>
+                                          <p:spTgt spid="3">
+                                            <p:txEl>
+                                              <p:pRg st="7" end="7"/>
+                                            </p:txEl>
+                                          </p:spTgt>
+                                        </p:tgtEl>
+                                        <p:attrNameLst>
+                                          <p:attrName>style.visibility</p:attrName>
+                                        </p:attrNameLst>
+                                      </p:cBhvr>
+                                      <p:to>
+                                        <p:strVal val="visible"/>
+                                      </p:to>
+                                    </p:set>
+                                  </p:childTnLst>
+                                </p:cTn>
+                              </p:par>
+                              <p:par>
+                                <p:cTn id="23" presetID="1" presetClass="entr" presetSubtype="0" fill="hold" grpId="0" nodeType="withEffect">
+                                  <p:stCondLst>
+                                    <p:cond delay="0"/>
+                                  </p:stCondLst>
+                                  <p:childTnLst>
+                                    <p:set>
+                                      <p:cBhvr>
+                                        <p:cTn id="24" dur="1" fill="hold">
+                                          <p:stCondLst>
+                                            <p:cond delay="0"/>
+                                          </p:stCondLst>
+                                        </p:cTn>
+                                        <p:tgtEl>
+                                          <p:spTgt spid="3">
+                                            <p:txEl>
+                                              <p:pRg st="8" end="8"/>
+                                            </p:txEl>
+                                          </p:spTgt>
+                                        </p:tgtEl>
+                                        <p:attrNameLst>
+                                          <p:attrName>style.visibility</p:attrName>
+                                        </p:attrNameLst>
+                                      </p:cBhvr>
+                                      <p:to>
+                                        <p:strVal val="visible"/>
+                                      </p:to>
+                                    </p:set>
+                                  </p:childTnLst>
+                                </p:cTn>
+                              </p:par>
+                              <p:par>
+                                <p:cTn id="25" presetID="1" presetClass="entr" presetSubtype="0" fill="hold" grpId="0" nodeType="withEffect">
+                                  <p:stCondLst>
+                                    <p:cond delay="0"/>
+                                  </p:stCondLst>
+                                  <p:childTnLst>
+                                    <p:set>
+                                      <p:cBhvr>
+                                        <p:cTn id="26" dur="1" fill="hold">
+                                          <p:stCondLst>
+                                            <p:cond delay="0"/>
+                                          </p:stCondLst>
+                                        </p:cTn>
+                                        <p:tgtEl>
+                                          <p:spTgt spid="4"/>
+                                        </p:tgtEl>
+                                        <p:attrNameLst>
+                                          <p:attrName>style.visibility</p:attrName>
+                                        </p:attrNameLst>
+                                      </p:cBhvr>
+                                      <p:to>
+                                        <p:strVal val="visible"/>
+                                      </p:to>
+                                    </p:set>
+                                  </p:childTnLst>
+                                </p:cTn>
+                              </p:par>
+                            </p:childTnLst>
+                          </p:cTn>
+                        </p:par>
+                      </p:childTnLst>
+                    </p:cTn>
+                  </p:par>
+                  <p:par>
+                    <p:cTn id="27" fill="hold">
+                      <p:stCondLst>
+                        <p:cond delay="indefinite"/>
+                      </p:stCondLst>
+                      <p:childTnLst>
+                        <p:par>
+                          <p:cTn id="28" fill="hold">
+                            <p:stCondLst>
+                              <p:cond delay="0"/>
+                            </p:stCondLst>
+                            <p:childTnLst>
+                              <p:par>
+                                <p:cTn id="29" presetID="1" presetClass="entr" presetSubtype="0" fill="hold" grpId="0" nodeType="clickEffect">
+                                  <p:stCondLst>
+                                    <p:cond delay="0"/>
+                                  </p:stCondLst>
+                                  <p:childTnLst>
+                                    <p:set>
+                                      <p:cBhvr>
+                                        <p:cTn id="30" dur="1" fill="hold">
+                                          <p:stCondLst>
+                                            <p:cond delay="0"/>
+                                          </p:stCondLst>
+                                        </p:cTn>
+                                        <p:tgtEl>
                                           <p:spTgt spid="5"/>
+                                        </p:tgtEl>
+                                        <p:attrNameLst>
+                                          <p:attrName>style.visibility</p:attrName>
+                                        </p:attrNameLst>
+                                      </p:cBhvr>
+                                      <p:to>
+                                        <p:strVal val="visible"/>
+                                      </p:to>
+                                    </p:set>
+                                  </p:childTnLst>
+                                </p:cTn>
+                              </p:par>
+                              <p:par>
+                                <p:cTn id="31" presetID="1" presetClass="entr" presetSubtype="0" fill="hold" grpId="0" nodeType="withEffect">
+                                  <p:stCondLst>
+                                    <p:cond delay="0"/>
+                                  </p:stCondLst>
+                                  <p:childTnLst>
+                                    <p:set>
+                                      <p:cBhvr>
+                                        <p:cTn id="32" dur="1" fill="hold">
+                                          <p:stCondLst>
+                                            <p:cond delay="0"/>
+                                          </p:stCondLst>
+                                        </p:cTn>
+                                        <p:tgtEl>
+                                          <p:spTgt spid="6"/>
                                         </p:tgtEl>
                                         <p:attrNameLst>
                                           <p:attrName>style.visibility</p:attrName>
@@ -34650,8 +35435,10 @@
       </p:par>
     </p:tnLst>
     <p:bldLst>
+      <p:bldP spid="3" grpId="0" uiExpand="1" build="p"/>
       <p:bldP spid="5" grpId="0" animBg="1"/>
       <p:bldP spid="4" grpId="0"/>
+      <p:bldP spid="6" grpId="0" animBg="1"/>
     </p:bldLst>
   </p:timing>
 </p:sld>
@@ -34723,27 +35510,27 @@
             <p:spPr/>
             <p:txBody>
               <a:bodyPr>
-                <a:normAutofit/>
+                <a:normAutofit fontScale="77500" lnSpcReduction="20000"/>
               </a:bodyPr>
               <a:lstStyle/>
               <a:p>
                 <a:r>
                   <a:rPr lang="en-US" dirty="0"/>
-                  <a:t>Find the global optimum </a:t>
+                  <a:t>Find the parameter vector </a:t>
                 </a:r>
                 <a14:m>
                   <m:oMath xmlns:m="http://schemas.openxmlformats.org/officeDocument/2006/math">
                     <m:sSup>
                       <m:sSupPr>
                         <m:ctrlPr>
-                          <a:rPr lang="en-US" b="0" i="1" smtClean="0">
+                          <a:rPr lang="en-US" i="1">
                             <a:latin typeface="Cambria Math" panose="02040503050406030204" pitchFamily="18" charset="0"/>
                           </a:rPr>
                         </m:ctrlPr>
                       </m:sSupPr>
                       <m:e>
                         <m:r>
-                          <a:rPr lang="en-US" b="1" i="1" smtClean="0">
+                          <a:rPr lang="en-US" b="1" i="1">
                             <a:latin typeface="Cambria Math" panose="02040503050406030204" pitchFamily="18" charset="0"/>
                           </a:rPr>
                           <m:t>𝒘</m:t>
@@ -34751,7 +35538,7 @@
                       </m:e>
                       <m:sup>
                         <m:r>
-                          <a:rPr lang="en-US" b="0" i="1" smtClean="0">
+                          <a:rPr lang="en-US" i="1">
                             <a:latin typeface="Cambria Math" panose="02040503050406030204" pitchFamily="18" charset="0"/>
                           </a:rPr>
                           <m:t>∗</m:t>
@@ -34766,7 +35553,15 @@
                 </a:r>
                 <a:r>
                   <a:rPr lang="en-US" dirty="0"/>
-                  <a:t>with</a:t>
+                  <a:t>that</a:t>
+                </a:r>
+                <a:r>
+                  <a:rPr lang="en-US" b="1" dirty="0"/>
+                  <a:t> </a:t>
+                </a:r>
+                <a:r>
+                  <a:rPr lang="en-US" dirty="0"/>
+                  <a:t>leads to the smallest error (the global optimum):</a:t>
                 </a:r>
                 <a:br>
                   <a:rPr lang="en-US" dirty="0"/>
@@ -34970,6 +35765,9 @@
                 <a:br>
                   <a:rPr lang="en-US" dirty="0"/>
                 </a:br>
+                <a:br>
+                  <a:rPr lang="en-US" dirty="0"/>
+                </a:br>
                 <a:r>
                   <a:rPr lang="en-US" b="1" dirty="0"/>
                   <a:t>Note</a:t>
@@ -34978,6 +35776,33 @@
                   <a:rPr lang="en-US" dirty="0"/>
                   <a:t>: Policies converge typically way before the value function converges so finding the global optimal value function may not be necessary.</a:t>
                 </a:r>
+              </a:p>
+              <a:p>
+                <a:endParaRPr lang="en-US" dirty="0"/>
+              </a:p>
+              <a:p>
+                <a:r>
+                  <a:rPr lang="en-US" b="1" dirty="0"/>
+                  <a:t>Convergence</a:t>
+                </a:r>
+                <a:r>
+                  <a:rPr lang="en-US" dirty="0"/>
+                  <a:t>: Convergence to the global or a local optimum depends on the used approximation and the learning method. We will discuss this for each method.</a:t>
+                </a:r>
+              </a:p>
+              <a:p>
+                <a:r>
+                  <a:rPr lang="en-US" b="1" dirty="0"/>
+                  <a:t>Bias</a:t>
+                </a:r>
+                <a:r>
+                  <a:rPr lang="en-US" dirty="0"/>
+                  <a:t>: Different approximation methods have different bias (are not able to represent the true value function).</a:t>
+                </a:r>
+                <a:br>
+                  <a:rPr lang="en-US" dirty="0"/>
+                </a:br>
+                <a:endParaRPr lang="en-US" dirty="0"/>
               </a:p>
             </p:txBody>
           </p:sp>
@@ -35003,7 +35828,7 @@
               <a:blipFill>
                 <a:blip r:embed="rId2"/>
                 <a:stretch>
-                  <a:fillRect l="-1043" t="-2168" r="-638" b="-1913"/>
+                  <a:fillRect l="-696" t="-2551" r="-580"/>
                 </a:stretch>
               </a:blipFill>
             </p:spPr>
@@ -35032,6 +35857,183 @@
   <p:clrMapOvr>
     <a:masterClrMapping/>
   </p:clrMapOvr>
+  <p:timing>
+    <p:tnLst>
+      <p:par>
+        <p:cTn id="1" dur="indefinite" restart="never" nodeType="tmRoot">
+          <p:childTnLst>
+            <p:seq concurrent="1" nextAc="seek">
+              <p:cTn id="2" dur="indefinite" nodeType="mainSeq">
+                <p:childTnLst>
+                  <p:par>
+                    <p:cTn id="3" fill="hold">
+                      <p:stCondLst>
+                        <p:cond delay="indefinite"/>
+                      </p:stCondLst>
+                      <p:childTnLst>
+                        <p:par>
+                          <p:cTn id="4" fill="hold">
+                            <p:stCondLst>
+                              <p:cond delay="0"/>
+                            </p:stCondLst>
+                            <p:childTnLst>
+                              <p:par>
+                                <p:cTn id="5" presetID="1" presetClass="entr" presetSubtype="0" fill="hold" nodeType="clickEffect">
+                                  <p:stCondLst>
+                                    <p:cond delay="0"/>
+                                  </p:stCondLst>
+                                  <p:childTnLst>
+                                    <p:set>
+                                      <p:cBhvr>
+                                        <p:cTn id="6" dur="1" fill="hold">
+                                          <p:stCondLst>
+                                            <p:cond delay="0"/>
+                                          </p:stCondLst>
+                                        </p:cTn>
+                                        <p:tgtEl>
+                                          <p:spTgt spid="3">
+                                            <p:txEl>
+                                              <p:pRg st="3" end="3"/>
+                                            </p:txEl>
+                                          </p:spTgt>
+                                        </p:tgtEl>
+                                        <p:attrNameLst>
+                                          <p:attrName>style.visibility</p:attrName>
+                                        </p:attrNameLst>
+                                      </p:cBhvr>
+                                      <p:to>
+                                        <p:strVal val="visible"/>
+                                      </p:to>
+                                    </p:set>
+                                  </p:childTnLst>
+                                </p:cTn>
+                              </p:par>
+                            </p:childTnLst>
+                          </p:cTn>
+                        </p:par>
+                      </p:childTnLst>
+                    </p:cTn>
+                  </p:par>
+                  <p:par>
+                    <p:cTn id="7" fill="hold">
+                      <p:stCondLst>
+                        <p:cond delay="indefinite"/>
+                      </p:stCondLst>
+                      <p:childTnLst>
+                        <p:par>
+                          <p:cTn id="8" fill="hold">
+                            <p:stCondLst>
+                              <p:cond delay="0"/>
+                            </p:stCondLst>
+                            <p:childTnLst>
+                              <p:par>
+                                <p:cTn id="9" presetID="1" presetClass="entr" presetSubtype="0" fill="hold" nodeType="clickEffect">
+                                  <p:stCondLst>
+                                    <p:cond delay="0"/>
+                                  </p:stCondLst>
+                                  <p:childTnLst>
+                                    <p:set>
+                                      <p:cBhvr>
+                                        <p:cTn id="10" dur="1" fill="hold">
+                                          <p:stCondLst>
+                                            <p:cond delay="0"/>
+                                          </p:stCondLst>
+                                        </p:cTn>
+                                        <p:tgtEl>
+                                          <p:spTgt spid="3">
+                                            <p:txEl>
+                                              <p:pRg st="5" end="5"/>
+                                            </p:txEl>
+                                          </p:spTgt>
+                                        </p:tgtEl>
+                                        <p:attrNameLst>
+                                          <p:attrName>style.visibility</p:attrName>
+                                        </p:attrNameLst>
+                                      </p:cBhvr>
+                                      <p:to>
+                                        <p:strVal val="visible"/>
+                                      </p:to>
+                                    </p:set>
+                                  </p:childTnLst>
+                                </p:cTn>
+                              </p:par>
+                            </p:childTnLst>
+                          </p:cTn>
+                        </p:par>
+                      </p:childTnLst>
+                    </p:cTn>
+                  </p:par>
+                  <p:par>
+                    <p:cTn id="11" fill="hold">
+                      <p:stCondLst>
+                        <p:cond delay="indefinite"/>
+                      </p:stCondLst>
+                      <p:childTnLst>
+                        <p:par>
+                          <p:cTn id="12" fill="hold">
+                            <p:stCondLst>
+                              <p:cond delay="0"/>
+                            </p:stCondLst>
+                            <p:childTnLst>
+                              <p:par>
+                                <p:cTn id="13" presetID="1" presetClass="entr" presetSubtype="0" fill="hold" nodeType="clickEffect">
+                                  <p:stCondLst>
+                                    <p:cond delay="0"/>
+                                  </p:stCondLst>
+                                  <p:childTnLst>
+                                    <p:set>
+                                      <p:cBhvr>
+                                        <p:cTn id="14" dur="1" fill="hold">
+                                          <p:stCondLst>
+                                            <p:cond delay="0"/>
+                                          </p:stCondLst>
+                                        </p:cTn>
+                                        <p:tgtEl>
+                                          <p:spTgt spid="3">
+                                            <p:txEl>
+                                              <p:pRg st="6" end="6"/>
+                                            </p:txEl>
+                                          </p:spTgt>
+                                        </p:tgtEl>
+                                        <p:attrNameLst>
+                                          <p:attrName>style.visibility</p:attrName>
+                                        </p:attrNameLst>
+                                      </p:cBhvr>
+                                      <p:to>
+                                        <p:strVal val="visible"/>
+                                      </p:to>
+                                    </p:set>
+                                  </p:childTnLst>
+                                </p:cTn>
+                              </p:par>
+                            </p:childTnLst>
+                          </p:cTn>
+                        </p:par>
+                      </p:childTnLst>
+                    </p:cTn>
+                  </p:par>
+                </p:childTnLst>
+              </p:cTn>
+              <p:prevCondLst>
+                <p:cond evt="onPrev" delay="0">
+                  <p:tgtEl>
+                    <p:sldTgt/>
+                  </p:tgtEl>
+                </p:cond>
+              </p:prevCondLst>
+              <p:nextCondLst>
+                <p:cond evt="onNext" delay="0">
+                  <p:tgtEl>
+                    <p:sldTgt/>
+                  </p:tgtEl>
+                </p:cond>
+              </p:nextCondLst>
+            </p:seq>
+          </p:childTnLst>
+        </p:cTn>
+      </p:par>
+    </p:tnLst>
+  </p:timing>
 </p:sld>
 </file>
 

--- a/slides/Lecture_Chapter09.pptx
+++ b/slides/Lecture_Chapter09.pptx
@@ -33,13 +33,13 @@
     <p:sldId id="417" r:id="rId24"/>
     <p:sldId id="418" r:id="rId25"/>
     <p:sldId id="412" r:id="rId26"/>
-    <p:sldId id="410" r:id="rId27"/>
-    <p:sldId id="411" r:id="rId28"/>
-    <p:sldId id="414" r:id="rId29"/>
-    <p:sldId id="421" r:id="rId30"/>
-    <p:sldId id="415" r:id="rId31"/>
-    <p:sldId id="422" r:id="rId32"/>
-    <p:sldId id="423" r:id="rId33"/>
+    <p:sldId id="482" r:id="rId27"/>
+    <p:sldId id="410" r:id="rId28"/>
+    <p:sldId id="411" r:id="rId29"/>
+    <p:sldId id="414" r:id="rId30"/>
+    <p:sldId id="421" r:id="rId31"/>
+    <p:sldId id="415" r:id="rId32"/>
+    <p:sldId id="422" r:id="rId33"/>
     <p:sldId id="424" r:id="rId34"/>
   </p:sldIdLst>
   <p:sldSz cx="12192000" cy="6858000"/>
@@ -181,6 +181,7 @@
             <p14:sldId id="417"/>
             <p14:sldId id="418"/>
             <p14:sldId id="412"/>
+            <p14:sldId id="482"/>
           </p14:sldIdLst>
         </p14:section>
         <p14:section name="Non-Linear Approximation" id="{10B68F28-6DBA-44FD-8764-061354D77D32}">
@@ -195,7 +196,10 @@
             <p14:sldId id="421"/>
             <p14:sldId id="415"/>
             <p14:sldId id="422"/>
-            <p14:sldId id="423"/>
+          </p14:sldIdLst>
+        </p14:section>
+        <p14:section name="Summary" id="{94AB0469-3691-476F-8BF6-D8643C9AFED4}">
+          <p14:sldIdLst>
             <p14:sldId id="424"/>
           </p14:sldIdLst>
         </p14:section>
@@ -290,7 +294,7 @@
           <a:p>
             <a:fld id="{2987FC57-34F3-4A88-970B-010E7C0EC943}" type="datetimeFigureOut">
               <a:rPr lang="en-US" smtClean="0"/>
-              <a:t>3/23/2026</a:t>
+              <a:t>3/26/2026</a:t>
             </a:fld>
             <a:endParaRPr lang="en-US"/>
           </a:p>
@@ -872,7 +876,7 @@
           <a:p>
             <a:fld id="{3E22BF2E-04DA-469E-97C5-BB68A0368813}" type="datetimeFigureOut">
               <a:rPr lang="en-US" smtClean="0"/>
-              <a:t>3/23/2026</a:t>
+              <a:t>3/26/2026</a:t>
             </a:fld>
             <a:endParaRPr lang="en-US"/>
           </a:p>
@@ -1070,7 +1074,7 @@
           <a:p>
             <a:fld id="{3E22BF2E-04DA-469E-97C5-BB68A0368813}" type="datetimeFigureOut">
               <a:rPr lang="en-US" smtClean="0"/>
-              <a:t>3/23/2026</a:t>
+              <a:t>3/26/2026</a:t>
             </a:fld>
             <a:endParaRPr lang="en-US"/>
           </a:p>
@@ -1278,7 +1282,7 @@
           <a:p>
             <a:fld id="{3E22BF2E-04DA-469E-97C5-BB68A0368813}" type="datetimeFigureOut">
               <a:rPr lang="en-US" smtClean="0"/>
-              <a:t>3/23/2026</a:t>
+              <a:t>3/26/2026</a:t>
             </a:fld>
             <a:endParaRPr lang="en-US"/>
           </a:p>
@@ -1486,7 +1490,7 @@
           <a:p>
             <a:fld id="{3E22BF2E-04DA-469E-97C5-BB68A0368813}" type="datetimeFigureOut">
               <a:rPr lang="en-US" smtClean="0"/>
-              <a:t>3/23/2026</a:t>
+              <a:t>3/26/2026</a:t>
             </a:fld>
             <a:endParaRPr lang="en-US"/>
           </a:p>
@@ -1761,7 +1765,7 @@
           <a:p>
             <a:fld id="{3E22BF2E-04DA-469E-97C5-BB68A0368813}" type="datetimeFigureOut">
               <a:rPr lang="en-US" smtClean="0"/>
-              <a:t>3/23/2026</a:t>
+              <a:t>3/26/2026</a:t>
             </a:fld>
             <a:endParaRPr lang="en-US"/>
           </a:p>
@@ -2026,7 +2030,7 @@
           <a:p>
             <a:fld id="{3E22BF2E-04DA-469E-97C5-BB68A0368813}" type="datetimeFigureOut">
               <a:rPr lang="en-US" smtClean="0"/>
-              <a:t>3/23/2026</a:t>
+              <a:t>3/26/2026</a:t>
             </a:fld>
             <a:endParaRPr lang="en-US"/>
           </a:p>
@@ -2438,7 +2442,7 @@
           <a:p>
             <a:fld id="{3E22BF2E-04DA-469E-97C5-BB68A0368813}" type="datetimeFigureOut">
               <a:rPr lang="en-US" smtClean="0"/>
-              <a:t>3/23/2026</a:t>
+              <a:t>3/26/2026</a:t>
             </a:fld>
             <a:endParaRPr lang="en-US"/>
           </a:p>
@@ -2579,7 +2583,7 @@
           <a:p>
             <a:fld id="{3E22BF2E-04DA-469E-97C5-BB68A0368813}" type="datetimeFigureOut">
               <a:rPr lang="en-US" smtClean="0"/>
-              <a:t>3/23/2026</a:t>
+              <a:t>3/26/2026</a:t>
             </a:fld>
             <a:endParaRPr lang="en-US"/>
           </a:p>
@@ -2692,7 +2696,7 @@
           <a:p>
             <a:fld id="{3E22BF2E-04DA-469E-97C5-BB68A0368813}" type="datetimeFigureOut">
               <a:rPr lang="en-US" smtClean="0"/>
-              <a:t>3/23/2026</a:t>
+              <a:t>3/26/2026</a:t>
             </a:fld>
             <a:endParaRPr lang="en-US"/>
           </a:p>
@@ -3003,7 +3007,7 @@
           <a:p>
             <a:fld id="{3E22BF2E-04DA-469E-97C5-BB68A0368813}" type="datetimeFigureOut">
               <a:rPr lang="en-US" smtClean="0"/>
-              <a:t>3/23/2026</a:t>
+              <a:t>3/26/2026</a:t>
             </a:fld>
             <a:endParaRPr lang="en-US"/>
           </a:p>
@@ -3291,7 +3295,7 @@
           <a:p>
             <a:fld id="{3E22BF2E-04DA-469E-97C5-BB68A0368813}" type="datetimeFigureOut">
               <a:rPr lang="en-US" smtClean="0"/>
-              <a:t>3/23/2026</a:t>
+              <a:t>3/26/2026</a:t>
             </a:fld>
             <a:endParaRPr lang="en-US"/>
           </a:p>
@@ -3532,7 +3536,7 @@
           <a:p>
             <a:fld id="{3E22BF2E-04DA-469E-97C5-BB68A0368813}" type="datetimeFigureOut">
               <a:rPr lang="en-US" smtClean="0"/>
-              <a:t>3/23/2026</a:t>
+              <a:t>3/26/2026</a:t>
             </a:fld>
             <a:endParaRPr lang="en-US"/>
           </a:p>
@@ -4614,8 +4618,8 @@
           </a:p>
         </p:txBody>
       </p:sp>
-      <mc:AlternateContent xmlns:mc="http://schemas.openxmlformats.org/markup-compatibility/2006">
-        <mc:Choice xmlns:a14="http://schemas.microsoft.com/office/drawing/2010/main" Requires="a14">
+      <mc:AlternateContent xmlns:mc="http://schemas.openxmlformats.org/markup-compatibility/2006" xmlns:a14="http://schemas.microsoft.com/office/drawing/2010/main">
+        <mc:Choice Requires="a14">
           <p:sp>
             <p:nvSpPr>
               <p:cNvPr id="3" name="Content Placeholder 2">
@@ -5419,7 +5423,7 @@
             </p:txBody>
           </p:sp>
         </mc:Choice>
-        <mc:Fallback>
+        <mc:Fallback xmlns="">
           <p:sp>
             <p:nvSpPr>
               <p:cNvPr id="3" name="Content Placeholder 2">
@@ -6194,8 +6198,8 @@
           <a:chExt cx="0" cy="0"/>
         </a:xfrm>
       </p:grpSpPr>
-      <mc:AlternateContent xmlns:mc="http://schemas.openxmlformats.org/markup-compatibility/2006" xmlns:a14="http://schemas.microsoft.com/office/drawing/2010/main">
-        <mc:Choice Requires="a14">
+      <mc:AlternateContent xmlns:mc="http://schemas.openxmlformats.org/markup-compatibility/2006">
+        <mc:Choice xmlns:a14="http://schemas.microsoft.com/office/drawing/2010/main" Requires="a14">
           <p:sp>
             <p:nvSpPr>
               <p:cNvPr id="3" name="Content Placeholder 2">
@@ -6456,7 +6460,49 @@
                 </a:r>
                 <a:r>
                   <a:rPr lang="en-US" dirty="0"/>
-                  <a:t> to change </a:t>
+                  <a:t>: For one</a:t>
+                </a:r>
+                <a:r>
+                  <a:rPr lang="en-US" dirty="0">
+                    <a:ea typeface="Cambria Math" panose="02040503050406030204" pitchFamily="18" charset="0"/>
+                  </a:rPr>
+                  <a:t> </a:t>
+                </a:r>
+                <a14:m>
+                  <m:oMath xmlns:m="http://schemas.openxmlformats.org/officeDocument/2006/math">
+                    <m:sSub>
+                      <m:sSubPr>
+                        <m:ctrlPr>
+                          <a:rPr lang="en-US" i="1">
+                            <a:latin typeface="Cambria Math" panose="02040503050406030204" pitchFamily="18" charset="0"/>
+                            <a:ea typeface="Cambria Math" panose="02040503050406030204" pitchFamily="18" charset="0"/>
+                          </a:rPr>
+                        </m:ctrlPr>
+                      </m:sSubPr>
+                      <m:e>
+                        <m:r>
+                          <a:rPr lang="en-US" i="1">
+                            <a:latin typeface="Cambria Math" panose="02040503050406030204" pitchFamily="18" charset="0"/>
+                            <a:ea typeface="Cambria Math" panose="02040503050406030204" pitchFamily="18" charset="0"/>
+                          </a:rPr>
+                          <m:t>𝑆</m:t>
+                        </m:r>
+                      </m:e>
+                      <m:sub>
+                        <m:r>
+                          <a:rPr lang="en-US" i="1">
+                            <a:latin typeface="Cambria Math" panose="02040503050406030204" pitchFamily="18" charset="0"/>
+                            <a:ea typeface="Cambria Math" panose="02040503050406030204" pitchFamily="18" charset="0"/>
+                          </a:rPr>
+                          <m:t>𝑡</m:t>
+                        </m:r>
+                      </m:sub>
+                    </m:sSub>
+                  </m:oMath>
+                </a14:m>
+                <a:r>
+                  <a:rPr lang="en-US" dirty="0"/>
+                  <a:t>, we change </a:t>
                 </a:r>
                 <a14:m>
                   <m:oMath xmlns:m="http://schemas.openxmlformats.org/officeDocument/2006/math">
@@ -7566,7 +7612,43 @@
                 </a:r>
                 <a:r>
                   <a:rPr lang="en-US" dirty="0"/>
-                  <a:t>: because update is on a single example that has been sampled stochastically.</a:t>
+                  <a:t>: because update is on a single (randomly chosen) example </a:t>
+                </a:r>
+                <a14:m>
+                  <m:oMath xmlns:m="http://schemas.openxmlformats.org/officeDocument/2006/math">
+                    <m:sSub>
+                      <m:sSubPr>
+                        <m:ctrlPr>
+                          <a:rPr lang="en-US" i="1">
+                            <a:latin typeface="Cambria Math" panose="02040503050406030204" pitchFamily="18" charset="0"/>
+                            <a:ea typeface="Cambria Math" panose="02040503050406030204" pitchFamily="18" charset="0"/>
+                          </a:rPr>
+                        </m:ctrlPr>
+                      </m:sSubPr>
+                      <m:e>
+                        <m:r>
+                          <a:rPr lang="en-US" i="1">
+                            <a:latin typeface="Cambria Math" panose="02040503050406030204" pitchFamily="18" charset="0"/>
+                            <a:ea typeface="Cambria Math" panose="02040503050406030204" pitchFamily="18" charset="0"/>
+                          </a:rPr>
+                          <m:t>𝑆</m:t>
+                        </m:r>
+                      </m:e>
+                      <m:sub>
+                        <m:r>
+                          <a:rPr lang="en-US" i="1">
+                            <a:latin typeface="Cambria Math" panose="02040503050406030204" pitchFamily="18" charset="0"/>
+                            <a:ea typeface="Cambria Math" panose="02040503050406030204" pitchFamily="18" charset="0"/>
+                          </a:rPr>
+                          <m:t>𝑡</m:t>
+                        </m:r>
+                      </m:sub>
+                    </m:sSub>
+                  </m:oMath>
+                </a14:m>
+                <a:r>
+                  <a:rPr lang="en-US" dirty="0"/>
+                  <a:t>.</a:t>
                 </a:r>
               </a:p>
               <a:p>
@@ -7623,7 +7705,7 @@
             </p:txBody>
           </p:sp>
         </mc:Choice>
-        <mc:Fallback xmlns="">
+        <mc:Fallback>
           <p:sp>
             <p:nvSpPr>
               <p:cNvPr id="3" name="Content Placeholder 2">
@@ -7648,7 +7730,7 @@
               <a:blipFill>
                 <a:blip r:embed="rId2"/>
                 <a:stretch>
-                  <a:fillRect l="-754" t="-12576" b="-726"/>
+                  <a:fillRect l="-754" t="-12576"/>
                 </a:stretch>
               </a:blipFill>
             </p:spPr>
@@ -7690,13 +7772,13 @@
           <a:p>
             <a:r>
               <a:rPr lang="en-US" dirty="0"/>
-              <a:t>SGD: Stochastic-gradient Descend</a:t>
+              <a:t>SGD: Stochastic-Gradient Descend</a:t>
             </a:r>
           </a:p>
         </p:txBody>
       </p:sp>
-      <mc:AlternateContent xmlns:mc="http://schemas.openxmlformats.org/markup-compatibility/2006" xmlns:a14="http://schemas.microsoft.com/office/drawing/2010/main">
-        <mc:Choice Requires="a14">
+      <mc:AlternateContent xmlns:mc="http://schemas.openxmlformats.org/markup-compatibility/2006">
+        <mc:Choice xmlns:a14="http://schemas.microsoft.com/office/drawing/2010/main" Requires="a14">
           <p:sp>
             <p:nvSpPr>
               <p:cNvPr id="6" name="Speech Bubble: Rectangle with Corners Rounded 5">
@@ -7711,13 +7793,13 @@
             </p:nvSpPr>
             <p:spPr>
               <a:xfrm>
-                <a:off x="6924309" y="1374294"/>
-                <a:ext cx="3252752" cy="572372"/>
+                <a:off x="9583748" y="715662"/>
+                <a:ext cx="2498896" cy="1039650"/>
               </a:xfrm>
               <a:prstGeom prst="wedgeRoundRectCallout">
                 <a:avLst>
-                  <a:gd name="adj1" fmla="val -44009"/>
-                  <a:gd name="adj2" fmla="val 130793"/>
+                  <a:gd name="adj1" fmla="val -88796"/>
+                  <a:gd name="adj2" fmla="val 131331"/>
                   <a:gd name="adj3" fmla="val 16667"/>
                 </a:avLst>
               </a:prstGeom>
@@ -7861,7 +7943,7 @@
             </p:txBody>
           </p:sp>
         </mc:Choice>
-        <mc:Fallback xmlns="">
+        <mc:Fallback>
           <p:sp>
             <p:nvSpPr>
               <p:cNvPr id="6" name="Speech Bubble: Rectangle with Corners Rounded 5">
@@ -7878,20 +7960,20 @@
             </p:nvSpPr>
             <p:spPr>
               <a:xfrm>
-                <a:off x="6924309" y="1374294"/>
-                <a:ext cx="3252752" cy="572372"/>
+                <a:off x="9583748" y="715662"/>
+                <a:ext cx="2498896" cy="1039650"/>
               </a:xfrm>
               <a:prstGeom prst="wedgeRoundRectCallout">
                 <a:avLst>
-                  <a:gd name="adj1" fmla="val -44009"/>
-                  <a:gd name="adj2" fmla="val 130793"/>
+                  <a:gd name="adj1" fmla="val -88796"/>
+                  <a:gd name="adj2" fmla="val 131331"/>
                   <a:gd name="adj3" fmla="val 16667"/>
                 </a:avLst>
               </a:prstGeom>
               <a:blipFill>
                 <a:blip r:embed="rId3"/>
                 <a:stretch>
-                  <a:fillRect t="-5143"/>
+                  <a:fillRect/>
                 </a:stretch>
               </a:blipFill>
             </p:spPr>
@@ -8104,134 +8186,6 @@
   <p:clrMapOvr>
     <a:masterClrMapping/>
   </p:clrMapOvr>
-  <p:timing>
-    <p:tnLst>
-      <p:par>
-        <p:cTn id="1" dur="indefinite" restart="never" nodeType="tmRoot">
-          <p:childTnLst>
-            <p:seq concurrent="1" nextAc="seek">
-              <p:cTn id="2" dur="indefinite" nodeType="mainSeq">
-                <p:childTnLst>
-                  <p:par>
-                    <p:cTn id="3" fill="hold">
-                      <p:stCondLst>
-                        <p:cond delay="indefinite"/>
-                      </p:stCondLst>
-                      <p:childTnLst>
-                        <p:par>
-                          <p:cTn id="4" fill="hold">
-                            <p:stCondLst>
-                              <p:cond delay="0"/>
-                            </p:stCondLst>
-                            <p:childTnLst>
-                              <p:par>
-                                <p:cTn id="5" presetID="1" presetClass="entr" presetSubtype="0" fill="hold" nodeType="clickEffect">
-                                  <p:stCondLst>
-                                    <p:cond delay="0"/>
-                                  </p:stCondLst>
-                                  <p:childTnLst>
-                                    <p:set>
-                                      <p:cBhvr>
-                                        <p:cTn id="6" dur="1" fill="hold">
-                                          <p:stCondLst>
-                                            <p:cond delay="0"/>
-                                          </p:stCondLst>
-                                        </p:cTn>
-                                        <p:tgtEl>
-                                          <p:spTgt spid="3">
-                                            <p:txEl>
-                                              <p:pRg st="7" end="7"/>
-                                            </p:txEl>
-                                          </p:spTgt>
-                                        </p:tgtEl>
-                                        <p:attrNameLst>
-                                          <p:attrName>style.visibility</p:attrName>
-                                        </p:attrNameLst>
-                                      </p:cBhvr>
-                                      <p:to>
-                                        <p:strVal val="visible"/>
-                                      </p:to>
-                                    </p:set>
-                                  </p:childTnLst>
-                                </p:cTn>
-                              </p:par>
-                            </p:childTnLst>
-                          </p:cTn>
-                        </p:par>
-                      </p:childTnLst>
-                    </p:cTn>
-                  </p:par>
-                  <p:par>
-                    <p:cTn id="7" fill="hold">
-                      <p:stCondLst>
-                        <p:cond delay="indefinite"/>
-                      </p:stCondLst>
-                      <p:childTnLst>
-                        <p:par>
-                          <p:cTn id="8" fill="hold">
-                            <p:stCondLst>
-                              <p:cond delay="0"/>
-                            </p:stCondLst>
-                            <p:childTnLst>
-                              <p:par>
-                                <p:cTn id="9" presetID="1" presetClass="entr" presetSubtype="0" fill="hold" nodeType="clickEffect">
-                                  <p:stCondLst>
-                                    <p:cond delay="0"/>
-                                  </p:stCondLst>
-                                  <p:childTnLst>
-                                    <p:set>
-                                      <p:cBhvr>
-                                        <p:cTn id="10" dur="1" fill="hold">
-                                          <p:stCondLst>
-                                            <p:cond delay="0"/>
-                                          </p:stCondLst>
-                                        </p:cTn>
-                                        <p:tgtEl>
-                                          <p:spTgt spid="3">
-                                            <p:txEl>
-                                              <p:pRg st="8" end="8"/>
-                                            </p:txEl>
-                                          </p:spTgt>
-                                        </p:tgtEl>
-                                        <p:attrNameLst>
-                                          <p:attrName>style.visibility</p:attrName>
-                                        </p:attrNameLst>
-                                      </p:cBhvr>
-                                      <p:to>
-                                        <p:strVal val="visible"/>
-                                      </p:to>
-                                    </p:set>
-                                  </p:childTnLst>
-                                </p:cTn>
-                              </p:par>
-                            </p:childTnLst>
-                          </p:cTn>
-                        </p:par>
-                      </p:childTnLst>
-                    </p:cTn>
-                  </p:par>
-                </p:childTnLst>
-              </p:cTn>
-              <p:prevCondLst>
-                <p:cond evt="onPrev" delay="0">
-                  <p:tgtEl>
-                    <p:sldTgt/>
-                  </p:tgtEl>
-                </p:cond>
-              </p:prevCondLst>
-              <p:nextCondLst>
-                <p:cond evt="onNext" delay="0">
-                  <p:tgtEl>
-                    <p:sldTgt/>
-                  </p:tgtEl>
-                </p:cond>
-              </p:nextCondLst>
-            </p:seq>
-          </p:childTnLst>
-        </p:cTn>
-      </p:par>
-    </p:tnLst>
-  </p:timing>
 </p:sld>
 </file>
 
@@ -8285,8 +8239,8 @@
           </a:p>
         </p:txBody>
       </p:sp>
-      <mc:AlternateContent xmlns:mc="http://schemas.openxmlformats.org/markup-compatibility/2006">
-        <mc:Choice xmlns:a14="http://schemas.microsoft.com/office/drawing/2010/main" Requires="a14">
+      <mc:AlternateContent xmlns:mc="http://schemas.openxmlformats.org/markup-compatibility/2006" xmlns:a14="http://schemas.microsoft.com/office/drawing/2010/main">
+        <mc:Choice Requires="a14">
           <p:sp>
             <p:nvSpPr>
               <p:cNvPr id="3" name="Content Placeholder 2">
@@ -9019,7 +8973,7 @@
             </p:txBody>
           </p:sp>
         </mc:Choice>
-        <mc:Fallback>
+        <mc:Fallback xmlns="">
           <p:sp>
             <p:nvSpPr>
               <p:cNvPr id="3" name="Content Placeholder 2">
@@ -9846,7 +9800,10 @@
                           <m:sSub>
                             <m:sSubPr>
                               <m:ctrlPr>
-                                <a:rPr lang="en-US" i="1">
+                                <a:rPr lang="en-US" i="1" smtClean="0">
+                                  <a:solidFill>
+                                    <a:srgbClr val="FF0000"/>
+                                  </a:solidFill>
                                   <a:latin typeface="Cambria Math" panose="02040503050406030204" pitchFamily="18" charset="0"/>
                                   <a:ea typeface="Cambria Math" panose="02040503050406030204" pitchFamily="18" charset="0"/>
                                 </a:rPr>
@@ -9855,6 +9812,9 @@
                             <m:e>
                               <m:r>
                                 <a:rPr lang="en-US" i="1">
+                                  <a:solidFill>
+                                    <a:srgbClr val="FF0000"/>
+                                  </a:solidFill>
                                   <a:latin typeface="Cambria Math" panose="02040503050406030204" pitchFamily="18" charset="0"/>
                                   <a:ea typeface="Cambria Math" panose="02040503050406030204" pitchFamily="18" charset="0"/>
                                 </a:rPr>
@@ -9864,6 +9824,9 @@
                             <m:sub>
                               <m:r>
                                 <a:rPr lang="en-US" i="1">
+                                  <a:solidFill>
+                                    <a:srgbClr val="FF0000"/>
+                                  </a:solidFill>
                                   <a:latin typeface="Cambria Math" panose="02040503050406030204" pitchFamily="18" charset="0"/>
                                   <a:ea typeface="Cambria Math" panose="02040503050406030204" pitchFamily="18" charset="0"/>
                                 </a:rPr>
@@ -9875,6 +9838,9 @@
                             <m:dPr>
                               <m:ctrlPr>
                                 <a:rPr lang="en-US" i="1">
+                                  <a:solidFill>
+                                    <a:srgbClr val="FF0000"/>
+                                  </a:solidFill>
                                   <a:latin typeface="Cambria Math" panose="02040503050406030204" pitchFamily="18" charset="0"/>
                                   <a:ea typeface="Cambria Math" panose="02040503050406030204" pitchFamily="18" charset="0"/>
                                 </a:rPr>
@@ -9885,6 +9851,9 @@
                                 <m:sSubPr>
                                   <m:ctrlPr>
                                     <a:rPr lang="en-US" i="1">
+                                      <a:solidFill>
+                                        <a:srgbClr val="FF0000"/>
+                                      </a:solidFill>
                                       <a:latin typeface="Cambria Math" panose="02040503050406030204" pitchFamily="18" charset="0"/>
                                       <a:ea typeface="Cambria Math" panose="02040503050406030204" pitchFamily="18" charset="0"/>
                                     </a:rPr>
@@ -9893,6 +9862,9 @@
                                 <m:e>
                                   <m:r>
                                     <a:rPr lang="en-US" i="1">
+                                      <a:solidFill>
+                                        <a:srgbClr val="FF0000"/>
+                                      </a:solidFill>
                                       <a:latin typeface="Cambria Math" panose="02040503050406030204" pitchFamily="18" charset="0"/>
                                       <a:ea typeface="Cambria Math" panose="02040503050406030204" pitchFamily="18" charset="0"/>
                                     </a:rPr>
@@ -9902,6 +9874,9 @@
                                 <m:sub>
                                   <m:r>
                                     <a:rPr lang="en-US" i="1">
+                                      <a:solidFill>
+                                        <a:srgbClr val="FF0000"/>
+                                      </a:solidFill>
                                       <a:latin typeface="Cambria Math" panose="02040503050406030204" pitchFamily="18" charset="0"/>
                                       <a:ea typeface="Cambria Math" panose="02040503050406030204" pitchFamily="18" charset="0"/>
                                     </a:rPr>
@@ -10138,7 +10113,43 @@
                 </a:br>
                 <a:r>
                   <a:rPr lang="en-US" dirty="0"/>
-                  <a:t>but that is not the case when we sample.</a:t>
+                  <a:t>but that is not the case in RL where we want to learn </a:t>
+                </a:r>
+                <a14:m>
+                  <m:oMath xmlns:m="http://schemas.openxmlformats.org/officeDocument/2006/math">
+                    <m:sSub>
+                      <m:sSubPr>
+                        <m:ctrlPr>
+                          <a:rPr lang="en-US" i="1">
+                            <a:latin typeface="Cambria Math" panose="02040503050406030204" pitchFamily="18" charset="0"/>
+                            <a:ea typeface="Cambria Math" panose="02040503050406030204" pitchFamily="18" charset="0"/>
+                          </a:rPr>
+                        </m:ctrlPr>
+                      </m:sSubPr>
+                      <m:e>
+                        <m:r>
+                          <a:rPr lang="en-US" i="1">
+                            <a:latin typeface="Cambria Math" panose="02040503050406030204" pitchFamily="18" charset="0"/>
+                            <a:ea typeface="Cambria Math" panose="02040503050406030204" pitchFamily="18" charset="0"/>
+                          </a:rPr>
+                          <m:t>𝑣</m:t>
+                        </m:r>
+                      </m:e>
+                      <m:sub>
+                        <m:r>
+                          <a:rPr lang="en-US" i="1">
+                            <a:latin typeface="Cambria Math" panose="02040503050406030204" pitchFamily="18" charset="0"/>
+                            <a:ea typeface="Cambria Math" panose="02040503050406030204" pitchFamily="18" charset="0"/>
+                          </a:rPr>
+                          <m:t>𝜋</m:t>
+                        </m:r>
+                      </m:sub>
+                    </m:sSub>
+                  </m:oMath>
+                </a14:m>
+                <a:r>
+                  <a:rPr lang="en-US" dirty="0"/>
+                  <a:t>.</a:t>
                 </a:r>
               </a:p>
               <a:p>
@@ -10290,7 +10301,10 @@
                           <m:sSub>
                             <m:sSubPr>
                               <m:ctrlPr>
-                                <a:rPr lang="en-US" i="1">
+                                <a:rPr lang="en-US" i="1" smtClean="0">
+                                  <a:solidFill>
+                                    <a:srgbClr val="FF0000"/>
+                                  </a:solidFill>
                                   <a:latin typeface="Cambria Math" panose="02040503050406030204" pitchFamily="18" charset="0"/>
                                   <a:ea typeface="Cambria Math" panose="02040503050406030204" pitchFamily="18" charset="0"/>
                                 </a:rPr>
@@ -10299,6 +10313,9 @@
                             <m:e>
                               <m:r>
                                 <a:rPr lang="en-US" i="1">
+                                  <a:solidFill>
+                                    <a:srgbClr val="FF0000"/>
+                                  </a:solidFill>
                                   <a:latin typeface="Cambria Math" panose="02040503050406030204" pitchFamily="18" charset="0"/>
                                   <a:ea typeface="Cambria Math" panose="02040503050406030204" pitchFamily="18" charset="0"/>
                                 </a:rPr>
@@ -10308,6 +10325,9 @@
                             <m:sub>
                               <m:r>
                                 <a:rPr lang="en-US" i="1">
+                                  <a:solidFill>
+                                    <a:srgbClr val="FF0000"/>
+                                  </a:solidFill>
                                   <a:latin typeface="Cambria Math" panose="02040503050406030204" pitchFamily="18" charset="0"/>
                                   <a:ea typeface="Cambria Math" panose="02040503050406030204" pitchFamily="18" charset="0"/>
                                 </a:rPr>
@@ -10769,11 +10789,17 @@
                 </a:pPr>
                 <a:r>
                   <a:rPr lang="en-US" b="1" dirty="0"/>
-                  <a:t>Example</a:t>
+                  <a:t>Examples</a:t>
                 </a:r>
                 <a:r>
                   <a:rPr lang="en-US" dirty="0"/>
-                  <a:t>: The Gradient Monte Carlo method uses the unbiased MC estimate </a:t>
+                  <a:t>: </a:t>
+                </a:r>
+              </a:p>
+              <a:p>
+                <a:r>
+                  <a:rPr lang="en-US" dirty="0"/>
+                  <a:t>The Gradient Monte Carlo method uses the unbiased MC estimate </a:t>
                 </a:r>
                 <a14:m>
                   <m:oMath xmlns:m="http://schemas.openxmlformats.org/officeDocument/2006/math">
@@ -11011,6 +11037,55 @@
                                           <p:spTgt spid="3">
                                             <p:txEl>
                                               <p:pRg st="6" end="6"/>
+                                            </p:txEl>
+                                          </p:spTgt>
+                                        </p:tgtEl>
+                                        <p:attrNameLst>
+                                          <p:attrName>style.visibility</p:attrName>
+                                        </p:attrNameLst>
+                                      </p:cBhvr>
+                                      <p:to>
+                                        <p:strVal val="visible"/>
+                                      </p:to>
+                                    </p:set>
+                                  </p:childTnLst>
+                                </p:cTn>
+                              </p:par>
+                            </p:childTnLst>
+                          </p:cTn>
+                        </p:par>
+                      </p:childTnLst>
+                    </p:cTn>
+                  </p:par>
+                  <p:par>
+                    <p:cTn id="13" fill="hold">
+                      <p:stCondLst>
+                        <p:cond delay="indefinite"/>
+                      </p:stCondLst>
+                      <p:childTnLst>
+                        <p:par>
+                          <p:cTn id="14" fill="hold">
+                            <p:stCondLst>
+                              <p:cond delay="0"/>
+                            </p:stCondLst>
+                            <p:childTnLst>
+                              <p:par>
+                                <p:cTn id="15" presetID="1" presetClass="entr" presetSubtype="0" fill="hold" nodeType="clickEffect">
+                                  <p:stCondLst>
+                                    <p:cond delay="0"/>
+                                  </p:stCondLst>
+                                  <p:childTnLst>
+                                    <p:set>
+                                      <p:cBhvr>
+                                        <p:cTn id="16" dur="1" fill="hold">
+                                          <p:stCondLst>
+                                            <p:cond delay="0"/>
+                                          </p:stCondLst>
+                                        </p:cTn>
+                                        <p:tgtEl>
+                                          <p:spTgt spid="3">
+                                            <p:txEl>
+                                              <p:pRg st="7" end="7"/>
                                             </p:txEl>
                                           </p:spTgt>
                                         </p:tgtEl>
@@ -11437,7 +11512,7 @@
           <a:p>
             <a:r>
               <a:rPr lang="en-US" dirty="0"/>
-              <a:t>Bootstrapping and Semi-gradient Methods</a:t>
+              <a:t>Bootstrapping and Semi-Gradient Methods</a:t>
             </a:r>
           </a:p>
         </p:txBody>
@@ -11476,14 +11551,15 @@
                   <a:buNone/>
                 </a:pPr>
                 <a:r>
-                  <a:rPr lang="en-US" b="1" dirty="0"/>
+                  <a:rPr lang="en-US" b="1" dirty="0" err="1"/>
                   <a:t>Issue:</a:t>
                 </a:r>
+                <a:endParaRPr lang="en-US" b="1" dirty="0"/>
               </a:p>
               <a:p>
                 <a:r>
                   <a:rPr lang="en-US" dirty="0"/>
-                  <a:t>To get the true gradient requires, the target has to be fixed and only the prediction can depend on </a:t>
+                  <a:t>To get the true gradient requires, the target has to be unbiased, fixed and only the prediction can depend on </a:t>
                 </a:r>
                 <a14:m>
                   <m:oMath xmlns:m="http://schemas.openxmlformats.org/officeDocument/2006/math">
@@ -11848,17 +11924,16 @@
                 <a:endParaRPr lang="en-US" b="1" dirty="0"/>
               </a:p>
               <a:p>
+                <a:pPr marL="0" indent="0">
+                  <a:buNone/>
+                </a:pPr>
+                <a:r>
+                  <a:rPr lang="en-US" b="1" dirty="0"/>
+                  <a:t>Gradient Monte Carlo Algorithm: </a:t>
+                </a:r>
                 <a:r>
                   <a:rPr lang="en-US" dirty="0"/>
-                  <a:t>The</a:t>
-                </a:r>
-                <a:r>
-                  <a:rPr lang="en-US" b="1" dirty="0"/>
-                  <a:t> </a:t>
-                </a:r>
-                <a:r>
-                  <a:rPr lang="en-US" dirty="0"/>
-                  <a:t>Gradient Monte Carlo Algorithm has this property since </a:t>
+                  <a:t>Works since </a:t>
                 </a:r>
                 <a14:m>
                   <m:oMath xmlns:m="http://schemas.openxmlformats.org/officeDocument/2006/math">
@@ -11887,11 +11962,46 @@
                         </m:r>
                       </m:sub>
                     </m:sSub>
+                    <m:r>
+                      <a:rPr lang="en-US" b="0" i="0" smtClean="0">
+                        <a:latin typeface="Cambria Math" panose="02040503050406030204" pitchFamily="18" charset="0"/>
+                      </a:rPr>
+                      <m:t>=</m:t>
+                    </m:r>
+                    <m:sSub>
+                      <m:sSubPr>
+                        <m:ctrlPr>
+                          <a:rPr lang="en-US" b="0" i="1" smtClean="0">
+                            <a:latin typeface="Cambria Math" panose="02040503050406030204" pitchFamily="18" charset="0"/>
+                          </a:rPr>
+                        </m:ctrlPr>
+                      </m:sSubPr>
+                      <m:e>
+                        <m:r>
+                          <a:rPr lang="en-US" b="0" i="1" smtClean="0">
+                            <a:latin typeface="Cambria Math" panose="02040503050406030204" pitchFamily="18" charset="0"/>
+                          </a:rPr>
+                          <m:t>𝐺</m:t>
+                        </m:r>
+                      </m:e>
+                      <m:sub>
+                        <m:r>
+                          <a:rPr lang="en-US" b="0" i="1" smtClean="0">
+                            <a:latin typeface="Cambria Math" panose="02040503050406030204" pitchFamily="18" charset="0"/>
+                          </a:rPr>
+                          <m:t>𝑡</m:t>
+                        </m:r>
+                      </m:sub>
+                    </m:sSub>
                   </m:oMath>
                 </a14:m>
                 <a:r>
+                  <a:rPr lang="en-US" i="1" dirty="0"/>
+                  <a:t> </a:t>
+                </a:r>
+                <a:r>
                   <a:rPr lang="en-US" dirty="0"/>
-                  <a:t> is the result of sampled rewards which are independent of </a:t>
+                  <a:t>is the result of only sampled rewards which are independent of </a:t>
                 </a:r>
                 <a14:m>
                   <m:oMath xmlns:m="http://schemas.openxmlformats.org/officeDocument/2006/math">
@@ -11910,13 +12020,19 @@
                 <a:endParaRPr lang="en-US" b="1" dirty="0"/>
               </a:p>
               <a:p>
-                <a:r>
+                <a:pPr marL="0" indent="0">
+                  <a:buNone/>
+                </a:pPr>
+                <a:br>
                   <a:rPr lang="en-US" b="1" dirty="0"/>
-                  <a:t>Bootstrapping</a:t>
+                </a:br>
+                <a:r>
+                  <a:rPr lang="en-US" b="1" dirty="0"/>
+                  <a:t>Bootstrapping methods </a:t>
                 </a:r>
                 <a:r>
                   <a:rPr lang="en-US" dirty="0"/>
-                  <a:t> methods (e.g., </a:t>
+                  <a:t>(e.g., </a:t>
                 </a:r>
                 <a14:m>
                   <m:oMath xmlns:m="http://schemas.openxmlformats.org/officeDocument/2006/math">
@@ -11930,7 +12046,7 @@
                 </a14:m>
                 <a:r>
                   <a:rPr lang="en-US" dirty="0"/>
-                  <a:t>-step TD) break this requirement because </a:t>
+                  <a:t>-step TD): break this requirement because </a:t>
                 </a:r>
                 <a14:m>
                   <m:oMath xmlns:m="http://schemas.openxmlformats.org/officeDocument/2006/math">
@@ -12073,11 +12189,8 @@
                 </a14:m>
                 <a:r>
                   <a:rPr lang="en-US" dirty="0"/>
-                  <a:t>.</a:t>
-                </a:r>
-                <a:br>
-                  <a:rPr lang="en-US" dirty="0"/>
-                </a:br>
+                  <a:t>. </a:t>
+                </a:r>
                 <a:br>
                   <a:rPr lang="en-US" dirty="0"/>
                 </a:br>
@@ -12162,7 +12275,7 @@
               <a:blipFill>
                 <a:blip r:embed="rId2"/>
                 <a:stretch>
-                  <a:fillRect l="-522" t="-1836" r="-58"/>
+                  <a:fillRect l="-522" t="-1836"/>
                 </a:stretch>
               </a:blipFill>
             </p:spPr>
@@ -12203,6 +12316,9 @@
                     <p:cTn id="3" fill="hold">
                       <p:stCondLst>
                         <p:cond delay="indefinite"/>
+                        <p:cond evt="onBegin" delay="0">
+                          <p:tn val="2"/>
+                        </p:cond>
                       </p:stCondLst>
                       <p:childTnLst>
                         <p:par>
@@ -12212,7 +12328,7 @@
                             </p:stCondLst>
                             <p:childTnLst>
                               <p:par>
-                                <p:cTn id="5" presetID="1" presetClass="entr" presetSubtype="0" fill="hold" nodeType="clickEffect">
+                                <p:cTn id="5" presetID="1" presetClass="entr" presetSubtype="0" fill="hold" grpId="0" nodeType="withEffect">
                                   <p:stCondLst>
                                     <p:cond delay="0"/>
                                   </p:stCondLst>
@@ -12220,6 +12336,135 @@
                                     <p:set>
                                       <p:cBhvr>
                                         <p:cTn id="6" dur="1" fill="hold">
+                                          <p:stCondLst>
+                                            <p:cond delay="0"/>
+                                          </p:stCondLst>
+                                        </p:cTn>
+                                        <p:tgtEl>
+                                          <p:spTgt spid="3">
+                                            <p:txEl>
+                                              <p:pRg st="0" end="0"/>
+                                            </p:txEl>
+                                          </p:spTgt>
+                                        </p:tgtEl>
+                                        <p:attrNameLst>
+                                          <p:attrName>style.visibility</p:attrName>
+                                        </p:attrNameLst>
+                                      </p:cBhvr>
+                                      <p:to>
+                                        <p:strVal val="visible"/>
+                                      </p:to>
+                                    </p:set>
+                                  </p:childTnLst>
+                                </p:cTn>
+                              </p:par>
+                              <p:par>
+                                <p:cTn id="7" presetID="1" presetClass="entr" presetSubtype="0" fill="hold" grpId="0" nodeType="withEffect">
+                                  <p:stCondLst>
+                                    <p:cond delay="0"/>
+                                  </p:stCondLst>
+                                  <p:childTnLst>
+                                    <p:set>
+                                      <p:cBhvr>
+                                        <p:cTn id="8" dur="1" fill="hold">
+                                          <p:stCondLst>
+                                            <p:cond delay="0"/>
+                                          </p:stCondLst>
+                                        </p:cTn>
+                                        <p:tgtEl>
+                                          <p:spTgt spid="3">
+                                            <p:txEl>
+                                              <p:pRg st="1" end="1"/>
+                                            </p:txEl>
+                                          </p:spTgt>
+                                        </p:tgtEl>
+                                        <p:attrNameLst>
+                                          <p:attrName>style.visibility</p:attrName>
+                                        </p:attrNameLst>
+                                      </p:cBhvr>
+                                      <p:to>
+                                        <p:strVal val="visible"/>
+                                      </p:to>
+                                    </p:set>
+                                  </p:childTnLst>
+                                </p:cTn>
+                              </p:par>
+                            </p:childTnLst>
+                          </p:cTn>
+                        </p:par>
+                      </p:childTnLst>
+                    </p:cTn>
+                  </p:par>
+                  <p:par>
+                    <p:cTn id="9" fill="hold">
+                      <p:stCondLst>
+                        <p:cond delay="indefinite"/>
+                      </p:stCondLst>
+                      <p:childTnLst>
+                        <p:par>
+                          <p:cTn id="10" fill="hold">
+                            <p:stCondLst>
+                              <p:cond delay="0"/>
+                            </p:stCondLst>
+                            <p:childTnLst>
+                              <p:par>
+                                <p:cTn id="11" presetID="1" presetClass="entr" presetSubtype="0" fill="hold" grpId="0" nodeType="clickEffect">
+                                  <p:stCondLst>
+                                    <p:cond delay="0"/>
+                                  </p:stCondLst>
+                                  <p:childTnLst>
+                                    <p:set>
+                                      <p:cBhvr>
+                                        <p:cTn id="12" dur="1" fill="hold">
+                                          <p:stCondLst>
+                                            <p:cond delay="0"/>
+                                          </p:stCondLst>
+                                        </p:cTn>
+                                        <p:tgtEl>
+                                          <p:spTgt spid="3">
+                                            <p:txEl>
+                                              <p:pRg st="3" end="3"/>
+                                            </p:txEl>
+                                          </p:spTgt>
+                                        </p:tgtEl>
+                                        <p:attrNameLst>
+                                          <p:attrName>style.visibility</p:attrName>
+                                        </p:attrNameLst>
+                                      </p:cBhvr>
+                                      <p:to>
+                                        <p:strVal val="visible"/>
+                                      </p:to>
+                                    </p:set>
+                                  </p:childTnLst>
+                                </p:cTn>
+                              </p:par>
+                            </p:childTnLst>
+                          </p:cTn>
+                        </p:par>
+                      </p:childTnLst>
+                    </p:cTn>
+                  </p:par>
+                  <p:par>
+                    <p:cTn id="13" fill="hold">
+                      <p:stCondLst>
+                        <p:cond delay="indefinite"/>
+                      </p:stCondLst>
+                      <p:childTnLst>
+                        <p:par>
+                          <p:cTn id="14" fill="hold">
+                            <p:stCondLst>
+                              <p:cond delay="0"/>
+                            </p:stCondLst>
+                            <p:childTnLst>
+                              <p:par>
+                                <p:cTn id="15" presetID="1" presetClass="entr" presetSubtype="0" fill="hold" grpId="0" nodeType="clickEffect">
+                                  <p:stCondLst>
+                                    <p:cond delay="0"/>
+                                  </p:stCondLst>
+                                  <p:childTnLst>
+                                    <p:set>
+                                      <p:cBhvr>
+                                        <p:cTn id="16" dur="1" fill="hold">
                                           <p:stCondLst>
                                             <p:cond delay="0"/>
                                           </p:stCondLst>
@@ -12249,26 +12494,26 @@
                     </p:cTn>
                   </p:par>
                   <p:par>
-                    <p:cTn id="7" fill="hold">
+                    <p:cTn id="17" fill="hold">
                       <p:stCondLst>
                         <p:cond delay="indefinite"/>
                       </p:stCondLst>
                       <p:childTnLst>
                         <p:par>
-                          <p:cTn id="8" fill="hold">
+                          <p:cTn id="18" fill="hold">
                             <p:stCondLst>
                               <p:cond delay="0"/>
                             </p:stCondLst>
                             <p:childTnLst>
                               <p:par>
-                                <p:cTn id="9" presetID="1" presetClass="entr" presetSubtype="0" fill="hold" nodeType="clickEffect">
+                                <p:cTn id="19" presetID="1" presetClass="entr" presetSubtype="0" fill="hold" grpId="0" nodeType="clickEffect">
                                   <p:stCondLst>
                                     <p:cond delay="0"/>
                                   </p:stCondLst>
                                   <p:childTnLst>
                                     <p:set>
                                       <p:cBhvr>
-                                        <p:cTn id="10" dur="1" fill="hold">
+                                        <p:cTn id="20" dur="1" fill="hold">
                                           <p:stCondLst>
                                             <p:cond delay="0"/>
                                           </p:stCondLst>
@@ -12292,14 +12537,14 @@
                                 </p:cTn>
                               </p:par>
                               <p:par>
-                                <p:cTn id="11" presetID="1" presetClass="entr" presetSubtype="0" fill="hold" nodeType="withEffect">
+                                <p:cTn id="21" presetID="1" presetClass="entr" presetSubtype="0" fill="hold" grpId="0" nodeType="withEffect">
                                   <p:stCondLst>
                                     <p:cond delay="0"/>
                                   </p:stCondLst>
                                   <p:childTnLst>
                                     <p:set>
                                       <p:cBhvr>
-                                        <p:cTn id="12" dur="1" fill="hold">
+                                        <p:cTn id="22" dur="1" fill="hold">
                                           <p:stCondLst>
                                             <p:cond delay="0"/>
                                           </p:stCondLst>
@@ -12322,15 +12567,33 @@
                                   </p:childTnLst>
                                 </p:cTn>
                               </p:par>
+                            </p:childTnLst>
+                          </p:cTn>
+                        </p:par>
+                      </p:childTnLst>
+                    </p:cTn>
+                  </p:par>
+                  <p:par>
+                    <p:cTn id="23" fill="hold">
+                      <p:stCondLst>
+                        <p:cond delay="indefinite"/>
+                      </p:stCondLst>
+                      <p:childTnLst>
+                        <p:par>
+                          <p:cTn id="24" fill="hold">
+                            <p:stCondLst>
+                              <p:cond delay="0"/>
+                            </p:stCondLst>
+                            <p:childTnLst>
                               <p:par>
-                                <p:cTn id="13" presetID="1" presetClass="entr" presetSubtype="0" fill="hold" nodeType="withEffect">
+                                <p:cTn id="25" presetID="1" presetClass="entr" presetSubtype="0" fill="hold" grpId="0" nodeType="clickEffect">
                                   <p:stCondLst>
                                     <p:cond delay="0"/>
                                   </p:stCondLst>
                                   <p:childTnLst>
                                     <p:set>
                                       <p:cBhvr>
-                                        <p:cTn id="14" dur="1" fill="hold">
+                                        <p:cTn id="26" dur="1" fill="hold">
                                           <p:stCondLst>
                                             <p:cond delay="0"/>
                                           </p:stCondLst>
@@ -12354,14 +12617,14 @@
                                 </p:cTn>
                               </p:par>
                               <p:par>
-                                <p:cTn id="15" presetID="1" presetClass="entr" presetSubtype="0" fill="hold" nodeType="withEffect">
+                                <p:cTn id="27" presetID="1" presetClass="entr" presetSubtype="0" fill="hold" grpId="0" nodeType="withEffect">
                                   <p:stCondLst>
                                     <p:cond delay="0"/>
                                   </p:stCondLst>
                                   <p:childTnLst>
                                     <p:set>
                                       <p:cBhvr>
-                                        <p:cTn id="16" dur="1" fill="hold">
+                                        <p:cTn id="28" dur="1" fill="hold">
                                           <p:stCondLst>
                                             <p:cond delay="0"/>
                                           </p:stCondLst>
@@ -12385,14 +12648,14 @@
                                 </p:cTn>
                               </p:par>
                               <p:par>
-                                <p:cTn id="17" presetID="1" presetClass="entr" presetSubtype="0" fill="hold" nodeType="withEffect">
+                                <p:cTn id="29" presetID="1" presetClass="entr" presetSubtype="0" fill="hold" grpId="0" nodeType="withEffect">
                                   <p:stCondLst>
                                     <p:cond delay="0"/>
                                   </p:stCondLst>
                                   <p:childTnLst>
                                     <p:set>
                                       <p:cBhvr>
-                                        <p:cTn id="18" dur="1" fill="hold">
+                                        <p:cTn id="30" dur="1" fill="hold">
                                           <p:stCondLst>
                                             <p:cond delay="0"/>
                                           </p:stCondLst>
@@ -12416,14 +12679,14 @@
                                 </p:cTn>
                               </p:par>
                               <p:par>
-                                <p:cTn id="19" presetID="1" presetClass="entr" presetSubtype="0" fill="hold" nodeType="withEffect">
+                                <p:cTn id="31" presetID="1" presetClass="entr" presetSubtype="0" fill="hold" grpId="0" nodeType="withEffect">
                                   <p:stCondLst>
                                     <p:cond delay="0"/>
                                   </p:stCondLst>
                                   <p:childTnLst>
                                     <p:set>
                                       <p:cBhvr>
-                                        <p:cTn id="20" dur="1" fill="hold">
+                                        <p:cTn id="32" dur="1" fill="hold">
                                           <p:stCondLst>
                                             <p:cond delay="0"/>
                                           </p:stCondLst>
@@ -12473,6 +12736,9 @@
         </p:cTn>
       </p:par>
     </p:tnLst>
+    <p:bldLst>
+      <p:bldP spid="3" grpId="0" uiExpand="1" build="p"/>
+    </p:bldLst>
   </p:timing>
 </p:sld>
 </file>
@@ -12796,8 +13062,8 @@
           </a:p>
         </p:txBody>
       </p:sp>
-      <mc:AlternateContent xmlns:mc="http://schemas.openxmlformats.org/markup-compatibility/2006">
-        <mc:Choice xmlns:a14="http://schemas.microsoft.com/office/drawing/2010/main" Requires="a14">
+      <mc:AlternateContent xmlns:mc="http://schemas.openxmlformats.org/markup-compatibility/2006" xmlns:a14="http://schemas.microsoft.com/office/drawing/2010/main">
+        <mc:Choice Requires="a14">
           <p:sp>
             <p:nvSpPr>
               <p:cNvPr id="5" name="Text Placeholder 4">
@@ -12879,7 +13145,7 @@
             </p:txBody>
           </p:sp>
         </mc:Choice>
-        <mc:Fallback>
+        <mc:Fallback xmlns="">
           <p:sp>
             <p:nvSpPr>
               <p:cNvPr id="5" name="Text Placeholder 4">
@@ -14306,8 +14572,8 @@
           </a:p>
         </p:txBody>
       </p:sp>
-      <mc:AlternateContent xmlns:mc="http://schemas.openxmlformats.org/markup-compatibility/2006">
-        <mc:Choice xmlns:a14="http://schemas.microsoft.com/office/drawing/2010/main" Requires="a14">
+      <mc:AlternateContent xmlns:mc="http://schemas.openxmlformats.org/markup-compatibility/2006" xmlns:a14="http://schemas.microsoft.com/office/drawing/2010/main">
+        <mc:Choice Requires="a14">
           <p:sp>
             <p:nvSpPr>
               <p:cNvPr id="3" name="Content Placeholder 2">
@@ -14550,7 +14816,7 @@
             </p:txBody>
           </p:sp>
         </mc:Choice>
-        <mc:Fallback>
+        <mc:Fallback xmlns="">
           <p:sp>
             <p:nvSpPr>
               <p:cNvPr id="3" name="Content Placeholder 2">
@@ -15094,8 +15360,8 @@
         </p:nvSpPr>
         <p:spPr>
           <a:xfrm>
-            <a:off x="2818700" y="1245930"/>
-            <a:ext cx="5663489" cy="369332"/>
+            <a:off x="1220597" y="1211552"/>
+            <a:ext cx="8829413" cy="369332"/>
           </a:xfrm>
           <a:prstGeom prst="rect">
             <a:avLst/>
@@ -15111,7 +15377,7 @@
             <a:pPr algn="ctr"/>
             <a:r>
               <a:rPr lang="en-US" dirty="0"/>
-              <a:t>Semi-gradient Sarsa cannot solve the L-Maze</a:t>
+              <a:t>Semi-gradient Sarsa (see Control later) with linear features cannot solve the L-Maze</a:t>
             </a:r>
           </a:p>
         </p:txBody>
@@ -15138,7 +15404,7 @@
         </p:blipFill>
         <p:spPr>
           <a:xfrm>
-            <a:off x="5915201" y="1736993"/>
+            <a:off x="950111" y="1871905"/>
             <a:ext cx="5133975" cy="4143375"/>
           </a:xfrm>
           <a:prstGeom prst="rect">
@@ -15168,7 +15434,7 @@
         </p:blipFill>
         <p:spPr>
           <a:xfrm>
-            <a:off x="619640" y="1736992"/>
+            <a:off x="6293417" y="1811943"/>
             <a:ext cx="4791075" cy="4143375"/>
           </a:xfrm>
           <a:prstGeom prst="rect">
@@ -21147,7 +21413,7 @@
         </p:blipFill>
         <p:spPr>
           <a:xfrm>
-            <a:off x="6021643" y="1715458"/>
+            <a:off x="838200" y="1797904"/>
             <a:ext cx="5133975" cy="4143375"/>
           </a:xfrm>
           <a:prstGeom prst="rect">
@@ -21177,7 +21443,7 @@
         </p:blipFill>
         <p:spPr>
           <a:xfrm>
-            <a:off x="747537" y="1736994"/>
+            <a:off x="6196462" y="1703266"/>
             <a:ext cx="4791075" cy="4143375"/>
           </a:xfrm>
           <a:prstGeom prst="rect">
@@ -21199,8 +21465,8 @@
         </p:nvSpPr>
         <p:spPr>
           <a:xfrm>
-            <a:off x="2818700" y="1245930"/>
-            <a:ext cx="5663489" cy="369332"/>
+            <a:off x="1921078" y="1229066"/>
+            <a:ext cx="7466203" cy="369332"/>
           </a:xfrm>
           <a:prstGeom prst="rect">
             <a:avLst/>
@@ -21216,7 +21482,7 @@
             <a:pPr algn="ctr"/>
             <a:r>
               <a:rPr lang="en-US" dirty="0"/>
-              <a:t>Semi-gradient Sarsa can solve the L-Maze</a:t>
+              <a:t>Semi-gradient Sarsa with order-2 Fourier Features can solve the L-Maze</a:t>
             </a:r>
           </a:p>
         </p:txBody>
@@ -22613,6 +22879,176 @@
   <p:cSld>
     <p:spTree>
       <p:nvGrpSpPr>
+        <p:cNvPr id="1" name="">
+          <a:extLst>
+            <a:ext uri="{FF2B5EF4-FFF2-40B4-BE49-F238E27FC236}">
+              <a16:creationId xmlns:a16="http://schemas.microsoft.com/office/drawing/2014/main" id="{F3714A2D-1578-7476-D7A6-187BF2D3D1EB}"/>
+            </a:ext>
+          </a:extLst>
+        </p:cNvPr>
+        <p:cNvGrpSpPr/>
+        <p:nvPr/>
+      </p:nvGrpSpPr>
+      <p:grpSpPr>
+        <a:xfrm>
+          <a:off x="0" y="0"/>
+          <a:ext cx="0" cy="0"/>
+          <a:chOff x="0" y="0"/>
+          <a:chExt cx="0" cy="0"/>
+        </a:xfrm>
+      </p:grpSpPr>
+      <p:sp>
+        <p:nvSpPr>
+          <p:cNvPr id="2" name="Title 1">
+            <a:extLst>
+              <a:ext uri="{FF2B5EF4-FFF2-40B4-BE49-F238E27FC236}">
+                <a16:creationId xmlns:a16="http://schemas.microsoft.com/office/drawing/2014/main" id="{3136B23E-3A9D-87D2-B4D6-4F55B2044A65}"/>
+              </a:ext>
+            </a:extLst>
+          </p:cNvPr>
+          <p:cNvSpPr>
+            <a:spLocks noGrp="1"/>
+          </p:cNvSpPr>
+          <p:nvPr>
+            <p:ph type="title"/>
+          </p:nvPr>
+        </p:nvSpPr>
+        <p:spPr/>
+        <p:txBody>
+          <a:bodyPr>
+            <a:normAutofit/>
+          </a:bodyPr>
+          <a:lstStyle/>
+          <a:p>
+            <a:r>
+              <a:rPr lang="en-US" dirty="0"/>
+              <a:t>Example: L-Maze with Tile Coding</a:t>
+            </a:r>
+          </a:p>
+        </p:txBody>
+      </p:sp>
+      <p:sp>
+        <p:nvSpPr>
+          <p:cNvPr id="10" name="TextBox 9">
+            <a:extLst>
+              <a:ext uri="{FF2B5EF4-FFF2-40B4-BE49-F238E27FC236}">
+                <a16:creationId xmlns:a16="http://schemas.microsoft.com/office/drawing/2014/main" id="{4A558498-9506-9F88-1789-8BB02A9A5A63}"/>
+              </a:ext>
+            </a:extLst>
+          </p:cNvPr>
+          <p:cNvSpPr txBox="1"/>
+          <p:nvPr/>
+        </p:nvSpPr>
+        <p:spPr>
+          <a:xfrm>
+            <a:off x="962025" y="1229066"/>
+            <a:ext cx="10016456" cy="369332"/>
+          </a:xfrm>
+          <a:prstGeom prst="rect">
+            <a:avLst/>
+          </a:prstGeom>
+          <a:noFill/>
+        </p:spPr>
+        <p:txBody>
+          <a:bodyPr wrap="square" rtlCol="0">
+            <a:spAutoFit/>
+          </a:bodyPr>
+          <a:lstStyle/>
+          <a:p>
+            <a:pPr algn="ctr"/>
+            <a:r>
+              <a:rPr lang="en-US" dirty="0"/>
+              <a:t>Semi-gradient Sarsa with Tile Coding (4 </a:t>
+            </a:r>
+            <a:r>
+              <a:rPr lang="en-US" dirty="0" err="1"/>
+              <a:t>tilings</a:t>
+            </a:r>
+            <a:r>
+              <a:rPr lang="en-US" dirty="0"/>
+              <a:t>, 4 tiles per dimension) can solve the L-Maze</a:t>
+            </a:r>
+          </a:p>
+        </p:txBody>
+      </p:sp>
+      <p:pic>
+        <p:nvPicPr>
+          <p:cNvPr id="4" name="Picture 3">
+            <a:extLst>
+              <a:ext uri="{FF2B5EF4-FFF2-40B4-BE49-F238E27FC236}">
+                <a16:creationId xmlns:a16="http://schemas.microsoft.com/office/drawing/2014/main" id="{FE08F3D6-8964-CAE2-4ADA-BAAE74BB05BD}"/>
+              </a:ext>
+            </a:extLst>
+          </p:cNvPr>
+          <p:cNvPicPr>
+            <a:picLocks noChangeAspect="1"/>
+          </p:cNvPicPr>
+          <p:nvPr/>
+        </p:nvPicPr>
+        <p:blipFill>
+          <a:blip r:embed="rId2"/>
+          <a:stretch>
+            <a:fillRect/>
+          </a:stretch>
+        </p:blipFill>
+        <p:spPr>
+          <a:xfrm>
+            <a:off x="962025" y="1703266"/>
+            <a:ext cx="5133975" cy="4143375"/>
+          </a:xfrm>
+          <a:prstGeom prst="rect">
+            <a:avLst/>
+          </a:prstGeom>
+        </p:spPr>
+      </p:pic>
+      <p:pic>
+        <p:nvPicPr>
+          <p:cNvPr id="8" name="Picture 7">
+            <a:extLst>
+              <a:ext uri="{FF2B5EF4-FFF2-40B4-BE49-F238E27FC236}">
+                <a16:creationId xmlns:a16="http://schemas.microsoft.com/office/drawing/2014/main" id="{51DFED3D-EFF1-6553-1DCD-D229508CD3A0}"/>
+              </a:ext>
+            </a:extLst>
+          </p:cNvPr>
+          <p:cNvPicPr>
+            <a:picLocks noChangeAspect="1"/>
+          </p:cNvPicPr>
+          <p:nvPr/>
+        </p:nvPicPr>
+        <p:blipFill>
+          <a:blip r:embed="rId3"/>
+          <a:stretch>
+            <a:fillRect/>
+          </a:stretch>
+        </p:blipFill>
+        <p:spPr>
+          <a:xfrm>
+            <a:off x="6317718" y="1703266"/>
+            <a:ext cx="4791075" cy="4143375"/>
+          </a:xfrm>
+          <a:prstGeom prst="rect">
+            <a:avLst/>
+          </a:prstGeom>
+        </p:spPr>
+      </p:pic>
+    </p:spTree>
+    <p:extLst>
+      <p:ext uri="{BB962C8B-B14F-4D97-AF65-F5344CB8AC3E}">
+        <p14:creationId xmlns:p14="http://schemas.microsoft.com/office/powerpoint/2010/main" val="4202041830"/>
+      </p:ext>
+    </p:extLst>
+  </p:cSld>
+  <p:clrMapOvr>
+    <a:masterClrMapping/>
+  </p:clrMapOvr>
+</p:sld>
+</file>
+
+<file path=ppt/slides/slide27.xml><?xml version="1.0" encoding="utf-8"?>
+<p:sld xmlns:a="http://schemas.openxmlformats.org/drawingml/2006/main" xmlns:r="http://schemas.openxmlformats.org/officeDocument/2006/relationships" xmlns:p="http://schemas.openxmlformats.org/presentationml/2006/main">
+  <p:cSld>
+    <p:spTree>
+      <p:nvGrpSpPr>
         <p:cNvPr id="1" name=""/>
         <p:cNvGrpSpPr/>
         <p:nvPr/>
@@ -22694,7 +23130,7 @@
 </p:sld>
 </file>
 
-<file path=ppt/slides/slide27.xml><?xml version="1.0" encoding="utf-8"?>
+<file path=ppt/slides/slide28.xml><?xml version="1.0" encoding="utf-8"?>
 <p:sld xmlns:a="http://schemas.openxmlformats.org/drawingml/2006/main" xmlns:r="http://schemas.openxmlformats.org/officeDocument/2006/relationships" xmlns:p="http://schemas.openxmlformats.org/presentationml/2006/main">
   <p:cSld>
     <p:spTree>
@@ -26181,7 +26617,7 @@
 </p:sld>
 </file>
 
-<file path=ppt/slides/slide28.xml><?xml version="1.0" encoding="utf-8"?>
+<file path=ppt/slides/slide29.xml><?xml version="1.0" encoding="utf-8"?>
 <p:sld xmlns:a="http://schemas.openxmlformats.org/drawingml/2006/main" xmlns:r="http://schemas.openxmlformats.org/officeDocument/2006/relationships" xmlns:p="http://schemas.openxmlformats.org/presentationml/2006/main">
   <p:cSld>
     <p:spTree>
@@ -26255,1341 +26691,6 @@
     <p:extLst>
       <p:ext uri="{BB962C8B-B14F-4D97-AF65-F5344CB8AC3E}">
         <p14:creationId xmlns:p14="http://schemas.microsoft.com/office/powerpoint/2010/main" val="587571508"/>
-      </p:ext>
-    </p:extLst>
-  </p:cSld>
-  <p:clrMapOvr>
-    <a:masterClrMapping/>
-  </p:clrMapOvr>
-</p:sld>
-</file>
-
-<file path=ppt/slides/slide29.xml><?xml version="1.0" encoding="utf-8"?>
-<p:sld xmlns:a="http://schemas.openxmlformats.org/drawingml/2006/main" xmlns:r="http://schemas.openxmlformats.org/officeDocument/2006/relationships" xmlns:p="http://schemas.openxmlformats.org/presentationml/2006/main">
-  <p:cSld>
-    <p:spTree>
-      <p:nvGrpSpPr>
-        <p:cNvPr id="1" name=""/>
-        <p:cNvGrpSpPr/>
-        <p:nvPr/>
-      </p:nvGrpSpPr>
-      <p:grpSpPr>
-        <a:xfrm>
-          <a:off x="0" y="0"/>
-          <a:ext cx="0" cy="0"/>
-          <a:chOff x="0" y="0"/>
-          <a:chExt cx="0" cy="0"/>
-        </a:xfrm>
-      </p:grpSpPr>
-      <p:sp>
-        <p:nvSpPr>
-          <p:cNvPr id="4" name="Title 3">
-            <a:extLst>
-              <a:ext uri="{FF2B5EF4-FFF2-40B4-BE49-F238E27FC236}">
-                <a16:creationId xmlns:a16="http://schemas.microsoft.com/office/drawing/2014/main" id="{689C127B-86A4-4CC5-9EE1-A0FDA5771BE2}"/>
-              </a:ext>
-            </a:extLst>
-          </p:cNvPr>
-          <p:cNvSpPr>
-            <a:spLocks noGrp="1"/>
-          </p:cNvSpPr>
-          <p:nvPr>
-            <p:ph type="title"/>
-          </p:nvPr>
-        </p:nvSpPr>
-        <p:spPr/>
-        <p:txBody>
-          <a:bodyPr/>
-          <a:lstStyle/>
-          <a:p>
-            <a:r>
-              <a:rPr lang="en-US" dirty="0"/>
-              <a:t>Control Problem</a:t>
-            </a:r>
-          </a:p>
-        </p:txBody>
-      </p:sp>
-      <mc:AlternateContent xmlns:mc="http://schemas.openxmlformats.org/markup-compatibility/2006" xmlns:a14="http://schemas.microsoft.com/office/drawing/2010/main">
-        <mc:Choice Requires="a14">
-          <p:sp>
-            <p:nvSpPr>
-              <p:cNvPr id="5" name="Content Placeholder 4">
-                <a:extLst>
-                  <a:ext uri="{FF2B5EF4-FFF2-40B4-BE49-F238E27FC236}">
-                    <a16:creationId xmlns:a16="http://schemas.microsoft.com/office/drawing/2014/main" id="{DF5B41B1-2FAA-67FF-A039-06F08FE693F6}"/>
-                  </a:ext>
-                </a:extLst>
-              </p:cNvPr>
-              <p:cNvSpPr>
-                <a:spLocks noGrp="1"/>
-              </p:cNvSpPr>
-              <p:nvPr>
-                <p:ph idx="1"/>
-              </p:nvPr>
-            </p:nvSpPr>
-            <p:spPr/>
-            <p:txBody>
-              <a:bodyPr>
-                <a:normAutofit fontScale="77500" lnSpcReduction="20000"/>
-              </a:bodyPr>
-              <a:lstStyle/>
-              <a:p>
-                <a:r>
-                  <a:rPr lang="en-US" dirty="0"/>
-                  <a:t>Estimate a parametric approximation for value-action pairs.</a:t>
-                </a:r>
-                <a:br>
-                  <a:rPr lang="en-US" dirty="0"/>
-                </a:br>
-                <a:br>
-                  <a:rPr lang="en-US" dirty="0"/>
-                </a:br>
-                <a14:m>
-                  <m:oMath xmlns:m="http://schemas.openxmlformats.org/officeDocument/2006/math">
-                    <m:acc>
-                      <m:accPr>
-                        <m:chr m:val="̂"/>
-                        <m:ctrlPr>
-                          <a:rPr lang="en-US" b="0" i="1" smtClean="0">
-                            <a:latin typeface="Cambria Math" panose="02040503050406030204" pitchFamily="18" charset="0"/>
-                          </a:rPr>
-                        </m:ctrlPr>
-                      </m:accPr>
-                      <m:e>
-                        <m:r>
-                          <a:rPr lang="en-US" b="0" i="1" smtClean="0">
-                            <a:latin typeface="Cambria Math" panose="02040503050406030204" pitchFamily="18" charset="0"/>
-                          </a:rPr>
-                          <m:t>𝑞</m:t>
-                        </m:r>
-                      </m:e>
-                    </m:acc>
-                    <m:d>
-                      <m:dPr>
-                        <m:ctrlPr>
-                          <a:rPr lang="en-US" b="0" i="1" dirty="0" smtClean="0">
-                            <a:latin typeface="Cambria Math" panose="02040503050406030204" pitchFamily="18" charset="0"/>
-                          </a:rPr>
-                        </m:ctrlPr>
-                      </m:dPr>
-                      <m:e>
-                        <m:r>
-                          <a:rPr lang="en-US" b="0" i="1" dirty="0" smtClean="0">
-                            <a:latin typeface="Cambria Math" panose="02040503050406030204" pitchFamily="18" charset="0"/>
-                          </a:rPr>
-                          <m:t>𝑠</m:t>
-                        </m:r>
-                        <m:r>
-                          <a:rPr lang="en-US" b="0" i="1" dirty="0" smtClean="0">
-                            <a:latin typeface="Cambria Math" panose="02040503050406030204" pitchFamily="18" charset="0"/>
-                          </a:rPr>
-                          <m:t>,</m:t>
-                        </m:r>
-                        <m:r>
-                          <a:rPr lang="en-US" b="0" i="1" dirty="0" smtClean="0">
-                            <a:latin typeface="Cambria Math" panose="02040503050406030204" pitchFamily="18" charset="0"/>
-                          </a:rPr>
-                          <m:t>𝑎</m:t>
-                        </m:r>
-                        <m:r>
-                          <a:rPr lang="en-US" b="0" i="1" dirty="0" smtClean="0">
-                            <a:latin typeface="Cambria Math" panose="02040503050406030204" pitchFamily="18" charset="0"/>
-                          </a:rPr>
-                          <m:t>,</m:t>
-                        </m:r>
-                        <m:r>
-                          <a:rPr lang="en-US" b="1" i="1" dirty="0" smtClean="0">
-                            <a:latin typeface="Cambria Math" panose="02040503050406030204" pitchFamily="18" charset="0"/>
-                          </a:rPr>
-                          <m:t>𝒘</m:t>
-                        </m:r>
-                      </m:e>
-                    </m:d>
-                    <m:r>
-                      <a:rPr lang="en-US" b="0" i="1" dirty="0" smtClean="0">
-                        <a:latin typeface="Cambria Math" panose="02040503050406030204" pitchFamily="18" charset="0"/>
-                      </a:rPr>
-                      <m:t>≈</m:t>
-                    </m:r>
-                    <m:sSub>
-                      <m:sSubPr>
-                        <m:ctrlPr>
-                          <a:rPr lang="en-US" b="0" i="1" dirty="0" smtClean="0">
-                            <a:latin typeface="Cambria Math" panose="02040503050406030204" pitchFamily="18" charset="0"/>
-                          </a:rPr>
-                        </m:ctrlPr>
-                      </m:sSubPr>
-                      <m:e>
-                        <m:r>
-                          <a:rPr lang="en-US" b="0" i="1" dirty="0" smtClean="0">
-                            <a:latin typeface="Cambria Math" panose="02040503050406030204" pitchFamily="18" charset="0"/>
-                          </a:rPr>
-                          <m:t>𝑞</m:t>
-                        </m:r>
-                      </m:e>
-                      <m:sub>
-                        <m:r>
-                          <a:rPr lang="en-US" b="0" i="1" dirty="0" smtClean="0">
-                            <a:latin typeface="Cambria Math" panose="02040503050406030204" pitchFamily="18" charset="0"/>
-                          </a:rPr>
-                          <m:t>∗</m:t>
-                        </m:r>
-                      </m:sub>
-                    </m:sSub>
-                    <m:r>
-                      <a:rPr lang="en-US" b="0" i="1" dirty="0" smtClean="0">
-                        <a:latin typeface="Cambria Math" panose="02040503050406030204" pitchFamily="18" charset="0"/>
-                      </a:rPr>
-                      <m:t>(</m:t>
-                    </m:r>
-                    <m:r>
-                      <a:rPr lang="en-US" b="0" i="1" dirty="0" smtClean="0">
-                        <a:latin typeface="Cambria Math" panose="02040503050406030204" pitchFamily="18" charset="0"/>
-                      </a:rPr>
-                      <m:t>𝑠</m:t>
-                    </m:r>
-                    <m:r>
-                      <a:rPr lang="en-US" b="0" i="1" dirty="0" smtClean="0">
-                        <a:latin typeface="Cambria Math" panose="02040503050406030204" pitchFamily="18" charset="0"/>
-                      </a:rPr>
-                      <m:t>,</m:t>
-                    </m:r>
-                    <m:r>
-                      <a:rPr lang="en-US" b="0" i="1" dirty="0" smtClean="0">
-                        <a:latin typeface="Cambria Math" panose="02040503050406030204" pitchFamily="18" charset="0"/>
-                      </a:rPr>
-                      <m:t>𝑎</m:t>
-                    </m:r>
-                    <m:r>
-                      <a:rPr lang="en-US" b="0" i="1" dirty="0" smtClean="0">
-                        <a:latin typeface="Cambria Math" panose="02040503050406030204" pitchFamily="18" charset="0"/>
-                      </a:rPr>
-                      <m:t>)</m:t>
-                    </m:r>
-                  </m:oMath>
-                </a14:m>
-                <a:endParaRPr lang="en-US" dirty="0"/>
-              </a:p>
-              <a:p>
-                <a:endParaRPr lang="en-US" dirty="0"/>
-              </a:p>
-              <a:p>
-                <a:r>
-                  <a:rPr lang="en-US" dirty="0"/>
-                  <a:t>Training data is now: </a:t>
-                </a:r>
-                <a14:m>
-                  <m:oMath xmlns:m="http://schemas.openxmlformats.org/officeDocument/2006/math">
-                    <m:sSub>
-                      <m:sSubPr>
-                        <m:ctrlPr>
-                          <a:rPr lang="en-US" b="0" i="1" smtClean="0">
-                            <a:latin typeface="Cambria Math" panose="02040503050406030204" pitchFamily="18" charset="0"/>
-                          </a:rPr>
-                        </m:ctrlPr>
-                      </m:sSubPr>
-                      <m:e>
-                        <m:r>
-                          <a:rPr lang="en-US" b="0" i="1" smtClean="0">
-                            <a:latin typeface="Cambria Math" panose="02040503050406030204" pitchFamily="18" charset="0"/>
-                          </a:rPr>
-                          <m:t>𝑆</m:t>
-                        </m:r>
-                      </m:e>
-                      <m:sub>
-                        <m:r>
-                          <a:rPr lang="en-US" b="0" i="1" smtClean="0">
-                            <a:latin typeface="Cambria Math" panose="02040503050406030204" pitchFamily="18" charset="0"/>
-                          </a:rPr>
-                          <m:t>𝑡</m:t>
-                        </m:r>
-                      </m:sub>
-                    </m:sSub>
-                    <m:r>
-                      <a:rPr lang="en-US" b="0" i="1" smtClean="0">
-                        <a:latin typeface="Cambria Math" panose="02040503050406030204" pitchFamily="18" charset="0"/>
-                      </a:rPr>
-                      <m:t>,</m:t>
-                    </m:r>
-                    <m:sSub>
-                      <m:sSubPr>
-                        <m:ctrlPr>
-                          <a:rPr lang="en-US" b="0" i="1" smtClean="0">
-                            <a:latin typeface="Cambria Math" panose="02040503050406030204" pitchFamily="18" charset="0"/>
-                          </a:rPr>
-                        </m:ctrlPr>
-                      </m:sSubPr>
-                      <m:e>
-                        <m:r>
-                          <a:rPr lang="en-US" b="0" i="1" smtClean="0">
-                            <a:latin typeface="Cambria Math" panose="02040503050406030204" pitchFamily="18" charset="0"/>
-                          </a:rPr>
-                          <m:t>𝐴</m:t>
-                        </m:r>
-                      </m:e>
-                      <m:sub>
-                        <m:r>
-                          <a:rPr lang="en-US" b="0" i="1" smtClean="0">
-                            <a:latin typeface="Cambria Math" panose="02040503050406030204" pitchFamily="18" charset="0"/>
-                          </a:rPr>
-                          <m:t>𝑡</m:t>
-                        </m:r>
-                      </m:sub>
-                    </m:sSub>
-                    <m:r>
-                      <a:rPr lang="en-US" i="1">
-                        <a:latin typeface="Cambria Math" panose="02040503050406030204" pitchFamily="18" charset="0"/>
-                        <a:ea typeface="Cambria Math" panose="02040503050406030204" pitchFamily="18" charset="0"/>
-                      </a:rPr>
-                      <m:t>↦</m:t>
-                    </m:r>
-                    <m:sSub>
-                      <m:sSubPr>
-                        <m:ctrlPr>
-                          <a:rPr lang="en-US" b="0" i="1" smtClean="0">
-                            <a:latin typeface="Cambria Math" panose="02040503050406030204" pitchFamily="18" charset="0"/>
-                            <a:ea typeface="Cambria Math" panose="02040503050406030204" pitchFamily="18" charset="0"/>
-                          </a:rPr>
-                        </m:ctrlPr>
-                      </m:sSubPr>
-                      <m:e>
-                        <m:r>
-                          <a:rPr lang="en-US" b="0" i="1" smtClean="0">
-                            <a:latin typeface="Cambria Math" panose="02040503050406030204" pitchFamily="18" charset="0"/>
-                            <a:ea typeface="Cambria Math" panose="02040503050406030204" pitchFamily="18" charset="0"/>
-                          </a:rPr>
-                          <m:t>𝑈</m:t>
-                        </m:r>
-                      </m:e>
-                      <m:sub>
-                        <m:r>
-                          <a:rPr lang="en-US" b="0" i="1" smtClean="0">
-                            <a:latin typeface="Cambria Math" panose="02040503050406030204" pitchFamily="18" charset="0"/>
-                            <a:ea typeface="Cambria Math" panose="02040503050406030204" pitchFamily="18" charset="0"/>
-                          </a:rPr>
-                          <m:t>𝑡</m:t>
-                        </m:r>
-                      </m:sub>
-                    </m:sSub>
-                  </m:oMath>
-                </a14:m>
-                <a:endParaRPr lang="en-US" dirty="0"/>
-              </a:p>
-              <a:p>
-                <a:r>
-                  <a:rPr lang="en-US" dirty="0"/>
-                  <a:t>Update: </a:t>
-                </a:r>
-                <a14:m>
-                  <m:oMath xmlns:m="http://schemas.openxmlformats.org/officeDocument/2006/math">
-                    <m:sSub>
-                      <m:sSubPr>
-                        <m:ctrlPr>
-                          <a:rPr lang="en-US" i="1">
-                            <a:latin typeface="Cambria Math" panose="02040503050406030204" pitchFamily="18" charset="0"/>
-                          </a:rPr>
-                        </m:ctrlPr>
-                      </m:sSubPr>
-                      <m:e>
-                        <m:r>
-                          <a:rPr lang="en-US" b="1" i="1">
-                            <a:latin typeface="Cambria Math" panose="02040503050406030204" pitchFamily="18" charset="0"/>
-                          </a:rPr>
-                          <m:t>𝒘</m:t>
-                        </m:r>
-                      </m:e>
-                      <m:sub>
-                        <m:r>
-                          <a:rPr lang="en-US" i="1">
-                            <a:latin typeface="Cambria Math" panose="02040503050406030204" pitchFamily="18" charset="0"/>
-                          </a:rPr>
-                          <m:t>𝑡</m:t>
-                        </m:r>
-                        <m:r>
-                          <a:rPr lang="en-US" i="1">
-                            <a:latin typeface="Cambria Math" panose="02040503050406030204" pitchFamily="18" charset="0"/>
-                          </a:rPr>
-                          <m:t>+1</m:t>
-                        </m:r>
-                      </m:sub>
-                    </m:sSub>
-                    <m:r>
-                      <a:rPr lang="en-US" i="1">
-                        <a:latin typeface="Cambria Math" panose="02040503050406030204" pitchFamily="18" charset="0"/>
-                      </a:rPr>
-                      <m:t>= </m:t>
-                    </m:r>
-                    <m:sSub>
-                      <m:sSubPr>
-                        <m:ctrlPr>
-                          <a:rPr lang="en-US" i="1">
-                            <a:latin typeface="Cambria Math" panose="02040503050406030204" pitchFamily="18" charset="0"/>
-                          </a:rPr>
-                        </m:ctrlPr>
-                      </m:sSubPr>
-                      <m:e>
-                        <m:r>
-                          <a:rPr lang="en-US" b="1" i="1">
-                            <a:latin typeface="Cambria Math" panose="02040503050406030204" pitchFamily="18" charset="0"/>
-                          </a:rPr>
-                          <m:t>𝒘</m:t>
-                        </m:r>
-                      </m:e>
-                      <m:sub>
-                        <m:r>
-                          <a:rPr lang="en-US" i="1">
-                            <a:latin typeface="Cambria Math" panose="02040503050406030204" pitchFamily="18" charset="0"/>
-                          </a:rPr>
-                          <m:t>𝑡</m:t>
-                        </m:r>
-                      </m:sub>
-                    </m:sSub>
-                    <m:r>
-                      <a:rPr lang="en-US" i="1">
-                        <a:latin typeface="Cambria Math" panose="02040503050406030204" pitchFamily="18" charset="0"/>
-                      </a:rPr>
-                      <m:t>+</m:t>
-                    </m:r>
-                    <m:r>
-                      <a:rPr lang="en-US" i="1">
-                        <a:latin typeface="Cambria Math" panose="02040503050406030204" pitchFamily="18" charset="0"/>
-                      </a:rPr>
-                      <m:t>𝛼</m:t>
-                    </m:r>
-                    <m:d>
-                      <m:dPr>
-                        <m:begChr m:val="["/>
-                        <m:endChr m:val="]"/>
-                        <m:ctrlPr>
-                          <a:rPr lang="en-US" i="1">
-                            <a:latin typeface="Cambria Math" panose="02040503050406030204" pitchFamily="18" charset="0"/>
-                            <a:ea typeface="Cambria Math" panose="02040503050406030204" pitchFamily="18" charset="0"/>
-                          </a:rPr>
-                        </m:ctrlPr>
-                      </m:dPr>
-                      <m:e>
-                        <m:sSub>
-                          <m:sSubPr>
-                            <m:ctrlPr>
-                              <a:rPr lang="en-US" i="1">
-                                <a:latin typeface="Cambria Math" panose="02040503050406030204" pitchFamily="18" charset="0"/>
-                                <a:ea typeface="Cambria Math" panose="02040503050406030204" pitchFamily="18" charset="0"/>
-                              </a:rPr>
-                            </m:ctrlPr>
-                          </m:sSubPr>
-                          <m:e>
-                            <m:r>
-                              <a:rPr lang="en-US" i="1">
-                                <a:latin typeface="Cambria Math" panose="02040503050406030204" pitchFamily="18" charset="0"/>
-                                <a:ea typeface="Cambria Math" panose="02040503050406030204" pitchFamily="18" charset="0"/>
-                              </a:rPr>
-                              <m:t>𝑈</m:t>
-                            </m:r>
-                          </m:e>
-                          <m:sub>
-                            <m:r>
-                              <a:rPr lang="en-US" i="1">
-                                <a:latin typeface="Cambria Math" panose="02040503050406030204" pitchFamily="18" charset="0"/>
-                                <a:ea typeface="Cambria Math" panose="02040503050406030204" pitchFamily="18" charset="0"/>
-                              </a:rPr>
-                              <m:t>𝑡</m:t>
-                            </m:r>
-                          </m:sub>
-                        </m:sSub>
-                        <m:r>
-                          <a:rPr lang="en-US" i="1">
-                            <a:latin typeface="Cambria Math" panose="02040503050406030204" pitchFamily="18" charset="0"/>
-                            <a:ea typeface="Cambria Math" panose="02040503050406030204" pitchFamily="18" charset="0"/>
-                          </a:rPr>
-                          <m:t>−</m:t>
-                        </m:r>
-                        <m:acc>
-                          <m:accPr>
-                            <m:chr m:val="̂"/>
-                            <m:ctrlPr>
-                              <a:rPr lang="en-US" i="1">
-                                <a:latin typeface="Cambria Math" panose="02040503050406030204" pitchFamily="18" charset="0"/>
-                                <a:ea typeface="Cambria Math" panose="02040503050406030204" pitchFamily="18" charset="0"/>
-                              </a:rPr>
-                            </m:ctrlPr>
-                          </m:accPr>
-                          <m:e>
-                            <m:r>
-                              <a:rPr lang="en-US" b="0" i="1" smtClean="0">
-                                <a:latin typeface="Cambria Math" panose="02040503050406030204" pitchFamily="18" charset="0"/>
-                                <a:ea typeface="Cambria Math" panose="02040503050406030204" pitchFamily="18" charset="0"/>
-                              </a:rPr>
-                              <m:t>𝑞</m:t>
-                            </m:r>
-                          </m:e>
-                        </m:acc>
-                        <m:d>
-                          <m:dPr>
-                            <m:ctrlPr>
-                              <a:rPr lang="en-US" i="1">
-                                <a:latin typeface="Cambria Math" panose="02040503050406030204" pitchFamily="18" charset="0"/>
-                                <a:ea typeface="Cambria Math" panose="02040503050406030204" pitchFamily="18" charset="0"/>
-                              </a:rPr>
-                            </m:ctrlPr>
-                          </m:dPr>
-                          <m:e>
-                            <m:sSub>
-                              <m:sSubPr>
-                                <m:ctrlPr>
-                                  <a:rPr lang="en-US" i="1">
-                                    <a:latin typeface="Cambria Math" panose="02040503050406030204" pitchFamily="18" charset="0"/>
-                                    <a:ea typeface="Cambria Math" panose="02040503050406030204" pitchFamily="18" charset="0"/>
-                                  </a:rPr>
-                                </m:ctrlPr>
-                              </m:sSubPr>
-                              <m:e>
-                                <m:r>
-                                  <a:rPr lang="en-US" i="1">
-                                    <a:latin typeface="Cambria Math" panose="02040503050406030204" pitchFamily="18" charset="0"/>
-                                    <a:ea typeface="Cambria Math" panose="02040503050406030204" pitchFamily="18" charset="0"/>
-                                  </a:rPr>
-                                  <m:t>𝑆</m:t>
-                                </m:r>
-                              </m:e>
-                              <m:sub>
-                                <m:r>
-                                  <a:rPr lang="en-US" i="1">
-                                    <a:latin typeface="Cambria Math" panose="02040503050406030204" pitchFamily="18" charset="0"/>
-                                    <a:ea typeface="Cambria Math" panose="02040503050406030204" pitchFamily="18" charset="0"/>
-                                  </a:rPr>
-                                  <m:t>𝑡</m:t>
-                                </m:r>
-                              </m:sub>
-                            </m:sSub>
-                            <m:r>
-                              <a:rPr lang="en-US" i="1">
-                                <a:latin typeface="Cambria Math" panose="02040503050406030204" pitchFamily="18" charset="0"/>
-                                <a:ea typeface="Cambria Math" panose="02040503050406030204" pitchFamily="18" charset="0"/>
-                              </a:rPr>
-                              <m:t>,</m:t>
-                            </m:r>
-                            <m:sSub>
-                              <m:sSubPr>
-                                <m:ctrlPr>
-                                  <a:rPr lang="en-US" b="0" i="1" smtClean="0">
-                                    <a:latin typeface="Cambria Math" panose="02040503050406030204" pitchFamily="18" charset="0"/>
-                                    <a:ea typeface="Cambria Math" panose="02040503050406030204" pitchFamily="18" charset="0"/>
-                                  </a:rPr>
-                                </m:ctrlPr>
-                              </m:sSubPr>
-                              <m:e>
-                                <m:r>
-                                  <a:rPr lang="en-US" b="0" i="1" smtClean="0">
-                                    <a:latin typeface="Cambria Math" panose="02040503050406030204" pitchFamily="18" charset="0"/>
-                                    <a:ea typeface="Cambria Math" panose="02040503050406030204" pitchFamily="18" charset="0"/>
-                                  </a:rPr>
-                                  <m:t>𝐴</m:t>
-                                </m:r>
-                              </m:e>
-                              <m:sub>
-                                <m:r>
-                                  <a:rPr lang="en-US" b="0" i="1" smtClean="0">
-                                    <a:latin typeface="Cambria Math" panose="02040503050406030204" pitchFamily="18" charset="0"/>
-                                    <a:ea typeface="Cambria Math" panose="02040503050406030204" pitchFamily="18" charset="0"/>
-                                  </a:rPr>
-                                  <m:t>𝑡</m:t>
-                                </m:r>
-                              </m:sub>
-                            </m:sSub>
-                            <m:r>
-                              <a:rPr lang="en-US" b="0" i="1" smtClean="0">
-                                <a:latin typeface="Cambria Math" panose="02040503050406030204" pitchFamily="18" charset="0"/>
-                                <a:ea typeface="Cambria Math" panose="02040503050406030204" pitchFamily="18" charset="0"/>
-                              </a:rPr>
-                              <m:t>, </m:t>
-                            </m:r>
-                            <m:sSub>
-                              <m:sSubPr>
-                                <m:ctrlPr>
-                                  <a:rPr lang="en-US" i="1">
-                                    <a:latin typeface="Cambria Math" panose="02040503050406030204" pitchFamily="18" charset="0"/>
-                                    <a:ea typeface="Cambria Math" panose="02040503050406030204" pitchFamily="18" charset="0"/>
-                                  </a:rPr>
-                                </m:ctrlPr>
-                              </m:sSubPr>
-                              <m:e>
-                                <m:r>
-                                  <a:rPr lang="en-US" b="1" i="1">
-                                    <a:latin typeface="Cambria Math" panose="02040503050406030204" pitchFamily="18" charset="0"/>
-                                    <a:ea typeface="Cambria Math" panose="02040503050406030204" pitchFamily="18" charset="0"/>
-                                  </a:rPr>
-                                  <m:t>𝒘</m:t>
-                                </m:r>
-                              </m:e>
-                              <m:sub>
-                                <m:r>
-                                  <a:rPr lang="en-US" i="1">
-                                    <a:latin typeface="Cambria Math" panose="02040503050406030204" pitchFamily="18" charset="0"/>
-                                    <a:ea typeface="Cambria Math" panose="02040503050406030204" pitchFamily="18" charset="0"/>
-                                  </a:rPr>
-                                  <m:t>𝑡</m:t>
-                                </m:r>
-                              </m:sub>
-                            </m:sSub>
-                          </m:e>
-                        </m:d>
-                      </m:e>
-                    </m:d>
-                  </m:oMath>
-                </a14:m>
-                <a:r>
-                  <a:rPr lang="en-US" dirty="0">
-                    <a:ea typeface="Cambria Math" panose="02040503050406030204" pitchFamily="18" charset="0"/>
-                  </a:rPr>
-                  <a:t> </a:t>
-                </a:r>
-                <a14:m>
-                  <m:oMath xmlns:m="http://schemas.openxmlformats.org/officeDocument/2006/math">
-                    <m:r>
-                      <m:rPr>
-                        <m:sty m:val="p"/>
-                      </m:rPr>
-                      <a:rPr lang="en-US" i="1">
-                        <a:latin typeface="Cambria Math" panose="02040503050406030204" pitchFamily="18" charset="0"/>
-                        <a:ea typeface="Cambria Math" panose="02040503050406030204" pitchFamily="18" charset="0"/>
-                      </a:rPr>
-                      <m:t>∇</m:t>
-                    </m:r>
-                  </m:oMath>
-                </a14:m>
-                <a:r>
-                  <a:rPr lang="en-US" dirty="0">
-                    <a:ea typeface="Cambria Math" panose="02040503050406030204" pitchFamily="18" charset="0"/>
-                  </a:rPr>
-                  <a:t> </a:t>
-                </a:r>
-                <a14:m>
-                  <m:oMath xmlns:m="http://schemas.openxmlformats.org/officeDocument/2006/math">
-                    <m:acc>
-                      <m:accPr>
-                        <m:chr m:val="̂"/>
-                        <m:ctrlPr>
-                          <a:rPr lang="en-US" i="1">
-                            <a:latin typeface="Cambria Math" panose="02040503050406030204" pitchFamily="18" charset="0"/>
-                            <a:ea typeface="Cambria Math" panose="02040503050406030204" pitchFamily="18" charset="0"/>
-                          </a:rPr>
-                        </m:ctrlPr>
-                      </m:accPr>
-                      <m:e>
-                        <m:r>
-                          <a:rPr lang="en-US" b="0" i="1" smtClean="0">
-                            <a:latin typeface="Cambria Math" panose="02040503050406030204" pitchFamily="18" charset="0"/>
-                            <a:ea typeface="Cambria Math" panose="02040503050406030204" pitchFamily="18" charset="0"/>
-                          </a:rPr>
-                          <m:t>𝑞</m:t>
-                        </m:r>
-                      </m:e>
-                    </m:acc>
-                    <m:d>
-                      <m:dPr>
-                        <m:ctrlPr>
-                          <a:rPr lang="en-US" i="1">
-                            <a:latin typeface="Cambria Math" panose="02040503050406030204" pitchFamily="18" charset="0"/>
-                            <a:ea typeface="Cambria Math" panose="02040503050406030204" pitchFamily="18" charset="0"/>
-                          </a:rPr>
-                        </m:ctrlPr>
-                      </m:dPr>
-                      <m:e>
-                        <m:sSub>
-                          <m:sSubPr>
-                            <m:ctrlPr>
-                              <a:rPr lang="en-US" i="1">
-                                <a:latin typeface="Cambria Math" panose="02040503050406030204" pitchFamily="18" charset="0"/>
-                                <a:ea typeface="Cambria Math" panose="02040503050406030204" pitchFamily="18" charset="0"/>
-                              </a:rPr>
-                            </m:ctrlPr>
-                          </m:sSubPr>
-                          <m:e>
-                            <m:r>
-                              <a:rPr lang="en-US" i="1">
-                                <a:latin typeface="Cambria Math" panose="02040503050406030204" pitchFamily="18" charset="0"/>
-                                <a:ea typeface="Cambria Math" panose="02040503050406030204" pitchFamily="18" charset="0"/>
-                              </a:rPr>
-                              <m:t>𝑆</m:t>
-                            </m:r>
-                          </m:e>
-                          <m:sub>
-                            <m:r>
-                              <a:rPr lang="en-US" i="1">
-                                <a:latin typeface="Cambria Math" panose="02040503050406030204" pitchFamily="18" charset="0"/>
-                                <a:ea typeface="Cambria Math" panose="02040503050406030204" pitchFamily="18" charset="0"/>
-                              </a:rPr>
-                              <m:t>𝑡</m:t>
-                            </m:r>
-                          </m:sub>
-                        </m:sSub>
-                        <m:r>
-                          <a:rPr lang="en-US" i="1">
-                            <a:latin typeface="Cambria Math" panose="02040503050406030204" pitchFamily="18" charset="0"/>
-                            <a:ea typeface="Cambria Math" panose="02040503050406030204" pitchFamily="18" charset="0"/>
-                          </a:rPr>
-                          <m:t>,</m:t>
-                        </m:r>
-                        <m:sSub>
-                          <m:sSubPr>
-                            <m:ctrlPr>
-                              <a:rPr lang="en-US" b="0" i="1" smtClean="0">
-                                <a:latin typeface="Cambria Math" panose="02040503050406030204" pitchFamily="18" charset="0"/>
-                                <a:ea typeface="Cambria Math" panose="02040503050406030204" pitchFamily="18" charset="0"/>
-                              </a:rPr>
-                            </m:ctrlPr>
-                          </m:sSubPr>
-                          <m:e>
-                            <m:r>
-                              <a:rPr lang="en-US" b="0" i="1" smtClean="0">
-                                <a:latin typeface="Cambria Math" panose="02040503050406030204" pitchFamily="18" charset="0"/>
-                                <a:ea typeface="Cambria Math" panose="02040503050406030204" pitchFamily="18" charset="0"/>
-                              </a:rPr>
-                              <m:t>𝐴</m:t>
-                            </m:r>
-                          </m:e>
-                          <m:sub>
-                            <m:r>
-                              <a:rPr lang="en-US" b="0" i="1" smtClean="0">
-                                <a:latin typeface="Cambria Math" panose="02040503050406030204" pitchFamily="18" charset="0"/>
-                                <a:ea typeface="Cambria Math" panose="02040503050406030204" pitchFamily="18" charset="0"/>
-                              </a:rPr>
-                              <m:t>𝑡</m:t>
-                            </m:r>
-                          </m:sub>
-                        </m:sSub>
-                        <m:r>
-                          <a:rPr lang="en-US" b="0" i="1" smtClean="0">
-                            <a:latin typeface="Cambria Math" panose="02040503050406030204" pitchFamily="18" charset="0"/>
-                            <a:ea typeface="Cambria Math" panose="02040503050406030204" pitchFamily="18" charset="0"/>
-                          </a:rPr>
-                          <m:t>,</m:t>
-                        </m:r>
-                        <m:sSub>
-                          <m:sSubPr>
-                            <m:ctrlPr>
-                              <a:rPr lang="en-US" i="1">
-                                <a:latin typeface="Cambria Math" panose="02040503050406030204" pitchFamily="18" charset="0"/>
-                                <a:ea typeface="Cambria Math" panose="02040503050406030204" pitchFamily="18" charset="0"/>
-                              </a:rPr>
-                            </m:ctrlPr>
-                          </m:sSubPr>
-                          <m:e>
-                            <m:r>
-                              <a:rPr lang="en-US" b="1" i="1">
-                                <a:latin typeface="Cambria Math" panose="02040503050406030204" pitchFamily="18" charset="0"/>
-                                <a:ea typeface="Cambria Math" panose="02040503050406030204" pitchFamily="18" charset="0"/>
-                              </a:rPr>
-                              <m:t>𝒘</m:t>
-                            </m:r>
-                          </m:e>
-                          <m:sub>
-                            <m:r>
-                              <a:rPr lang="en-US" i="1">
-                                <a:latin typeface="Cambria Math" panose="02040503050406030204" pitchFamily="18" charset="0"/>
-                                <a:ea typeface="Cambria Math" panose="02040503050406030204" pitchFamily="18" charset="0"/>
-                              </a:rPr>
-                              <m:t>𝑡</m:t>
-                            </m:r>
-                          </m:sub>
-                        </m:sSub>
-                      </m:e>
-                    </m:d>
-                  </m:oMath>
-                </a14:m>
-                <a:endParaRPr lang="en-US" dirty="0"/>
-              </a:p>
-              <a:p>
-                <a14:m>
-                  <m:oMath xmlns:m="http://schemas.openxmlformats.org/officeDocument/2006/math">
-                    <m:sSub>
-                      <m:sSubPr>
-                        <m:ctrlPr>
-                          <a:rPr lang="en-US" b="0" i="1" smtClean="0">
-                            <a:latin typeface="Cambria Math" panose="02040503050406030204" pitchFamily="18" charset="0"/>
-                          </a:rPr>
-                        </m:ctrlPr>
-                      </m:sSubPr>
-                      <m:e>
-                        <m:r>
-                          <a:rPr lang="en-US" b="0" i="1" smtClean="0">
-                            <a:latin typeface="Cambria Math" panose="02040503050406030204" pitchFamily="18" charset="0"/>
-                          </a:rPr>
-                          <m:t>𝑈</m:t>
-                        </m:r>
-                      </m:e>
-                      <m:sub>
-                        <m:r>
-                          <a:rPr lang="en-US" b="0" i="1" smtClean="0">
-                            <a:latin typeface="Cambria Math" panose="02040503050406030204" pitchFamily="18" charset="0"/>
-                          </a:rPr>
-                          <m:t>𝑡</m:t>
-                        </m:r>
-                      </m:sub>
-                    </m:sSub>
-                  </m:oMath>
-                </a14:m>
-                <a:r>
-                  <a:rPr lang="en-US" dirty="0"/>
-                  <a:t> can be any approximation:</a:t>
-                </a:r>
-              </a:p>
-              <a:p>
-                <a:pPr lvl="1"/>
-                <a:r>
-                  <a:rPr lang="en-US" dirty="0"/>
-                  <a:t>MC’s </a:t>
-                </a:r>
-                <a14:m>
-                  <m:oMath xmlns:m="http://schemas.openxmlformats.org/officeDocument/2006/math">
-                    <m:sSub>
-                      <m:sSubPr>
-                        <m:ctrlPr>
-                          <a:rPr lang="en-US" b="0" i="1" smtClean="0">
-                            <a:latin typeface="Cambria Math" panose="02040503050406030204" pitchFamily="18" charset="0"/>
-                          </a:rPr>
-                        </m:ctrlPr>
-                      </m:sSubPr>
-                      <m:e>
-                        <m:r>
-                          <a:rPr lang="en-US" b="0" i="1" smtClean="0">
-                            <a:latin typeface="Cambria Math" panose="02040503050406030204" pitchFamily="18" charset="0"/>
-                          </a:rPr>
-                          <m:t>𝑈</m:t>
-                        </m:r>
-                      </m:e>
-                      <m:sub>
-                        <m:r>
-                          <a:rPr lang="en-US" b="0" i="1" smtClean="0">
-                            <a:latin typeface="Cambria Math" panose="02040503050406030204" pitchFamily="18" charset="0"/>
-                          </a:rPr>
-                          <m:t>𝑡</m:t>
-                        </m:r>
-                      </m:sub>
-                    </m:sSub>
-                    <m:r>
-                      <a:rPr lang="en-US" b="0" i="1" smtClean="0">
-                        <a:latin typeface="Cambria Math" panose="02040503050406030204" pitchFamily="18" charset="0"/>
-                      </a:rPr>
-                      <m:t>= </m:t>
-                    </m:r>
-                    <m:sSub>
-                      <m:sSubPr>
-                        <m:ctrlPr>
-                          <a:rPr lang="en-US" b="0" i="1" smtClean="0">
-                            <a:latin typeface="Cambria Math" panose="02040503050406030204" pitchFamily="18" charset="0"/>
-                          </a:rPr>
-                        </m:ctrlPr>
-                      </m:sSubPr>
-                      <m:e>
-                        <m:r>
-                          <a:rPr lang="en-US" b="0" i="1" smtClean="0">
-                            <a:latin typeface="Cambria Math" panose="02040503050406030204" pitchFamily="18" charset="0"/>
-                          </a:rPr>
-                          <m:t>𝐺</m:t>
-                        </m:r>
-                      </m:e>
-                      <m:sub>
-                        <m:r>
-                          <a:rPr lang="en-US" b="0" i="1" smtClean="0">
-                            <a:latin typeface="Cambria Math" panose="02040503050406030204" pitchFamily="18" charset="0"/>
-                          </a:rPr>
-                          <m:t>𝑡</m:t>
-                        </m:r>
-                      </m:sub>
-                    </m:sSub>
-                  </m:oMath>
-                </a14:m>
-                <a:endParaRPr lang="en-US" b="0" i="1" dirty="0"/>
-              </a:p>
-              <a:p>
-                <a:pPr lvl="1"/>
-                <a:r>
-                  <a:rPr lang="en-US" dirty="0"/>
-                  <a:t>1-step SARSA’s </a:t>
-                </a:r>
-                <a14:m>
-                  <m:oMath xmlns:m="http://schemas.openxmlformats.org/officeDocument/2006/math">
-                    <m:sSub>
-                      <m:sSubPr>
-                        <m:ctrlPr>
-                          <a:rPr lang="en-US" i="1">
-                            <a:latin typeface="Cambria Math" panose="02040503050406030204" pitchFamily="18" charset="0"/>
-                          </a:rPr>
-                        </m:ctrlPr>
-                      </m:sSubPr>
-                      <m:e>
-                        <m:r>
-                          <a:rPr lang="en-US" i="1">
-                            <a:latin typeface="Cambria Math" panose="02040503050406030204" pitchFamily="18" charset="0"/>
-                          </a:rPr>
-                          <m:t>𝑈</m:t>
-                        </m:r>
-                      </m:e>
-                      <m:sub>
-                        <m:r>
-                          <a:rPr lang="en-US" i="1">
-                            <a:latin typeface="Cambria Math" panose="02040503050406030204" pitchFamily="18" charset="0"/>
-                          </a:rPr>
-                          <m:t>𝑡</m:t>
-                        </m:r>
-                      </m:sub>
-                    </m:sSub>
-                    <m:r>
-                      <a:rPr lang="en-US" i="1">
-                        <a:latin typeface="Cambria Math" panose="02040503050406030204" pitchFamily="18" charset="0"/>
-                      </a:rPr>
-                      <m:t>=</m:t>
-                    </m:r>
-                    <m:sSub>
-                      <m:sSubPr>
-                        <m:ctrlPr>
-                          <a:rPr lang="en-US" b="0" i="1" smtClean="0">
-                            <a:latin typeface="Cambria Math" panose="02040503050406030204" pitchFamily="18" charset="0"/>
-                          </a:rPr>
-                        </m:ctrlPr>
-                      </m:sSubPr>
-                      <m:e>
-                        <m:r>
-                          <a:rPr lang="en-US" b="0" i="1" smtClean="0">
-                            <a:latin typeface="Cambria Math" panose="02040503050406030204" pitchFamily="18" charset="0"/>
-                          </a:rPr>
-                          <m:t>𝑅</m:t>
-                        </m:r>
-                      </m:e>
-                      <m:sub>
-                        <m:r>
-                          <a:rPr lang="en-US" b="0" i="1" smtClean="0">
-                            <a:latin typeface="Cambria Math" panose="02040503050406030204" pitchFamily="18" charset="0"/>
-                          </a:rPr>
-                          <m:t>𝑡</m:t>
-                        </m:r>
-                        <m:r>
-                          <a:rPr lang="en-US" b="0" i="1" smtClean="0">
-                            <a:latin typeface="Cambria Math" panose="02040503050406030204" pitchFamily="18" charset="0"/>
-                          </a:rPr>
-                          <m:t>+1</m:t>
-                        </m:r>
-                      </m:sub>
-                    </m:sSub>
-                    <m:r>
-                      <a:rPr lang="en-US" b="0" i="1" smtClean="0">
-                        <a:latin typeface="Cambria Math" panose="02040503050406030204" pitchFamily="18" charset="0"/>
-                      </a:rPr>
-                      <m:t>+</m:t>
-                    </m:r>
-                    <m:r>
-                      <a:rPr lang="en-US" b="0" i="1" smtClean="0">
-                        <a:latin typeface="Cambria Math" panose="02040503050406030204" pitchFamily="18" charset="0"/>
-                      </a:rPr>
-                      <m:t>𝛾</m:t>
-                    </m:r>
-                    <m:acc>
-                      <m:accPr>
-                        <m:chr m:val="̂"/>
-                        <m:ctrlPr>
-                          <a:rPr lang="en-US" b="0" i="1" smtClean="0">
-                            <a:latin typeface="Cambria Math" panose="02040503050406030204" pitchFamily="18" charset="0"/>
-                          </a:rPr>
-                        </m:ctrlPr>
-                      </m:accPr>
-                      <m:e>
-                        <m:r>
-                          <a:rPr lang="en-US" b="0" i="1" smtClean="0">
-                            <a:latin typeface="Cambria Math" panose="02040503050406030204" pitchFamily="18" charset="0"/>
-                          </a:rPr>
-                          <m:t>𝑞</m:t>
-                        </m:r>
-                      </m:e>
-                    </m:acc>
-                    <m:r>
-                      <a:rPr lang="en-US" b="0" i="1" smtClean="0">
-                        <a:latin typeface="Cambria Math" panose="02040503050406030204" pitchFamily="18" charset="0"/>
-                      </a:rPr>
-                      <m:t>(</m:t>
-                    </m:r>
-                    <m:sSub>
-                      <m:sSubPr>
-                        <m:ctrlPr>
-                          <a:rPr lang="en-US" b="0" i="1" smtClean="0">
-                            <a:latin typeface="Cambria Math" panose="02040503050406030204" pitchFamily="18" charset="0"/>
-                          </a:rPr>
-                        </m:ctrlPr>
-                      </m:sSubPr>
-                      <m:e>
-                        <m:r>
-                          <a:rPr lang="en-US" b="0" i="1" smtClean="0">
-                            <a:latin typeface="Cambria Math" panose="02040503050406030204" pitchFamily="18" charset="0"/>
-                          </a:rPr>
-                          <m:t>𝑆</m:t>
-                        </m:r>
-                      </m:e>
-                      <m:sub>
-                        <m:r>
-                          <a:rPr lang="en-US" b="0" i="1" smtClean="0">
-                            <a:latin typeface="Cambria Math" panose="02040503050406030204" pitchFamily="18" charset="0"/>
-                          </a:rPr>
-                          <m:t>𝑡</m:t>
-                        </m:r>
-                      </m:sub>
-                    </m:sSub>
-                    <m:r>
-                      <a:rPr lang="en-US" b="0" i="1" smtClean="0">
-                        <a:latin typeface="Cambria Math" panose="02040503050406030204" pitchFamily="18" charset="0"/>
-                      </a:rPr>
-                      <m:t>, </m:t>
-                    </m:r>
-                    <m:sSub>
-                      <m:sSubPr>
-                        <m:ctrlPr>
-                          <a:rPr lang="en-US" b="0" i="1" smtClean="0">
-                            <a:latin typeface="Cambria Math" panose="02040503050406030204" pitchFamily="18" charset="0"/>
-                          </a:rPr>
-                        </m:ctrlPr>
-                      </m:sSubPr>
-                      <m:e>
-                        <m:r>
-                          <a:rPr lang="en-US" b="0" i="1" smtClean="0">
-                            <a:latin typeface="Cambria Math" panose="02040503050406030204" pitchFamily="18" charset="0"/>
-                          </a:rPr>
-                          <m:t>𝐴</m:t>
-                        </m:r>
-                      </m:e>
-                      <m:sub>
-                        <m:r>
-                          <a:rPr lang="en-US" b="0" i="1" smtClean="0">
-                            <a:latin typeface="Cambria Math" panose="02040503050406030204" pitchFamily="18" charset="0"/>
-                          </a:rPr>
-                          <m:t>𝑡</m:t>
-                        </m:r>
-                      </m:sub>
-                    </m:sSub>
-                    <m:r>
-                      <a:rPr lang="en-US" b="0" i="1" smtClean="0">
-                        <a:latin typeface="Cambria Math" panose="02040503050406030204" pitchFamily="18" charset="0"/>
-                      </a:rPr>
-                      <m:t>,</m:t>
-                    </m:r>
-                    <m:sSub>
-                      <m:sSubPr>
-                        <m:ctrlPr>
-                          <a:rPr lang="en-US" b="0" i="1" smtClean="0">
-                            <a:latin typeface="Cambria Math" panose="02040503050406030204" pitchFamily="18" charset="0"/>
-                          </a:rPr>
-                        </m:ctrlPr>
-                      </m:sSubPr>
-                      <m:e>
-                        <m:r>
-                          <a:rPr lang="en-US" b="1" i="1" smtClean="0">
-                            <a:latin typeface="Cambria Math" panose="02040503050406030204" pitchFamily="18" charset="0"/>
-                          </a:rPr>
-                          <m:t>𝒘</m:t>
-                        </m:r>
-                      </m:e>
-                      <m:sub>
-                        <m:r>
-                          <a:rPr lang="en-US" b="0" i="1" smtClean="0">
-                            <a:latin typeface="Cambria Math" panose="02040503050406030204" pitchFamily="18" charset="0"/>
-                          </a:rPr>
-                          <m:t>𝑡</m:t>
-                        </m:r>
-                      </m:sub>
-                    </m:sSub>
-                    <m:r>
-                      <a:rPr lang="en-US" b="0" i="1" smtClean="0">
-                        <a:latin typeface="Cambria Math" panose="02040503050406030204" pitchFamily="18" charset="0"/>
-                      </a:rPr>
-                      <m:t>)</m:t>
-                    </m:r>
-                  </m:oMath>
-                </a14:m>
-                <a:endParaRPr lang="en-US" dirty="0"/>
-              </a:p>
-              <a:p>
-                <a:pPr lvl="1"/>
-                <a:r>
-                  <a:rPr lang="en-US" dirty="0"/>
-                  <a:t>n-step SARSA</a:t>
-                </a:r>
-              </a:p>
-              <a:p>
-                <a:r>
-                  <a:rPr lang="en-US" dirty="0"/>
-                  <a:t>Policy improvement: update policy with greedy action </a:t>
-                </a:r>
-                <a:br>
-                  <a:rPr lang="en-US" b="0" i="1" dirty="0">
-                    <a:latin typeface="Cambria Math" panose="02040503050406030204" pitchFamily="18" charset="0"/>
-                  </a:rPr>
-                </a:br>
-                <a:br>
-                  <a:rPr lang="en-US" b="0" i="1" dirty="0">
-                    <a:latin typeface="Cambria Math" panose="02040503050406030204" pitchFamily="18" charset="0"/>
-                  </a:rPr>
-                </a:br>
-                <a14:m>
-                  <m:oMath xmlns:m="http://schemas.openxmlformats.org/officeDocument/2006/math">
-                    <m:sSubSup>
-                      <m:sSubSupPr>
-                        <m:ctrlPr>
-                          <a:rPr lang="en-US" b="0" i="1" smtClean="0">
-                            <a:latin typeface="Cambria Math" panose="02040503050406030204" pitchFamily="18" charset="0"/>
-                          </a:rPr>
-                        </m:ctrlPr>
-                      </m:sSubSupPr>
-                      <m:e>
-                        <m:r>
-                          <a:rPr lang="en-US" b="0" i="1" smtClean="0">
-                            <a:latin typeface="Cambria Math" panose="02040503050406030204" pitchFamily="18" charset="0"/>
-                          </a:rPr>
-                          <m:t>𝐴</m:t>
-                        </m:r>
-                      </m:e>
-                      <m:sub>
-                        <m:r>
-                          <a:rPr lang="en-US" b="0" i="1" smtClean="0">
-                            <a:latin typeface="Cambria Math" panose="02040503050406030204" pitchFamily="18" charset="0"/>
-                          </a:rPr>
-                          <m:t>𝑡</m:t>
-                        </m:r>
-                        <m:r>
-                          <a:rPr lang="en-US" b="0" i="1" smtClean="0">
-                            <a:latin typeface="Cambria Math" panose="02040503050406030204" pitchFamily="18" charset="0"/>
-                          </a:rPr>
-                          <m:t>+1</m:t>
-                        </m:r>
-                      </m:sub>
-                      <m:sup>
-                        <m:r>
-                          <a:rPr lang="en-US" b="0" i="1" smtClean="0">
-                            <a:latin typeface="Cambria Math" panose="02040503050406030204" pitchFamily="18" charset="0"/>
-                          </a:rPr>
-                          <m:t>∗</m:t>
-                        </m:r>
-                      </m:sup>
-                    </m:sSubSup>
-                    <m:r>
-                      <a:rPr lang="en-US" b="0" i="1" smtClean="0">
-                        <a:latin typeface="Cambria Math" panose="02040503050406030204" pitchFamily="18" charset="0"/>
-                      </a:rPr>
-                      <m:t>=</m:t>
-                    </m:r>
-                    <m:func>
-                      <m:funcPr>
-                        <m:ctrlPr>
-                          <a:rPr lang="en-US" b="0" i="1" smtClean="0">
-                            <a:latin typeface="Cambria Math" panose="02040503050406030204" pitchFamily="18" charset="0"/>
-                          </a:rPr>
-                        </m:ctrlPr>
-                      </m:funcPr>
-                      <m:fName>
-                        <m:limLow>
-                          <m:limLowPr>
-                            <m:ctrlPr>
-                              <a:rPr lang="en-US" b="0" i="1" smtClean="0">
-                                <a:latin typeface="Cambria Math" panose="02040503050406030204" pitchFamily="18" charset="0"/>
-                              </a:rPr>
-                            </m:ctrlPr>
-                          </m:limLowPr>
-                          <m:e>
-                            <m:r>
-                              <m:rPr>
-                                <m:sty m:val="p"/>
-                              </m:rPr>
-                              <a:rPr lang="en-US" b="0" i="0" smtClean="0">
-                                <a:latin typeface="Cambria Math" panose="02040503050406030204" pitchFamily="18" charset="0"/>
-                              </a:rPr>
-                              <m:t>argmax</m:t>
-                            </m:r>
-                          </m:e>
-                          <m:lim>
-                            <m:r>
-                              <a:rPr lang="en-US" b="0" i="1" smtClean="0">
-                                <a:latin typeface="Cambria Math" panose="02040503050406030204" pitchFamily="18" charset="0"/>
-                              </a:rPr>
-                              <m:t>𝑎</m:t>
-                            </m:r>
-                          </m:lim>
-                        </m:limLow>
-                      </m:fName>
-                      <m:e>
-                        <m:acc>
-                          <m:accPr>
-                            <m:chr m:val="̂"/>
-                            <m:ctrlPr>
-                              <a:rPr lang="en-US" b="0" i="1" smtClean="0">
-                                <a:latin typeface="Cambria Math" panose="02040503050406030204" pitchFamily="18" charset="0"/>
-                              </a:rPr>
-                            </m:ctrlPr>
-                          </m:accPr>
-                          <m:e>
-                            <m:r>
-                              <a:rPr lang="en-US" b="0" i="1" smtClean="0">
-                                <a:latin typeface="Cambria Math" panose="02040503050406030204" pitchFamily="18" charset="0"/>
-                              </a:rPr>
-                              <m:t>𝑞</m:t>
-                            </m:r>
-                          </m:e>
-                        </m:acc>
-                        <m:r>
-                          <a:rPr lang="en-US" b="0" i="1" dirty="0" smtClean="0">
-                            <a:latin typeface="Cambria Math" panose="02040503050406030204" pitchFamily="18" charset="0"/>
-                          </a:rPr>
-                          <m:t>(</m:t>
-                        </m:r>
-                        <m:sSub>
-                          <m:sSubPr>
-                            <m:ctrlPr>
-                              <a:rPr lang="en-US" b="0" i="1" dirty="0" smtClean="0">
-                                <a:latin typeface="Cambria Math" panose="02040503050406030204" pitchFamily="18" charset="0"/>
-                              </a:rPr>
-                            </m:ctrlPr>
-                          </m:sSubPr>
-                          <m:e>
-                            <m:r>
-                              <a:rPr lang="en-US" b="0" i="1" dirty="0" smtClean="0">
-                                <a:latin typeface="Cambria Math" panose="02040503050406030204" pitchFamily="18" charset="0"/>
-                              </a:rPr>
-                              <m:t>𝑆</m:t>
-                            </m:r>
-                          </m:e>
-                          <m:sub>
-                            <m:r>
-                              <a:rPr lang="en-US" b="0" i="1" dirty="0" smtClean="0">
-                                <a:latin typeface="Cambria Math" panose="02040503050406030204" pitchFamily="18" charset="0"/>
-                              </a:rPr>
-                              <m:t>𝑡</m:t>
-                            </m:r>
-                            <m:r>
-                              <a:rPr lang="en-US" b="0" i="1" dirty="0" smtClean="0">
-                                <a:latin typeface="Cambria Math" panose="02040503050406030204" pitchFamily="18" charset="0"/>
-                              </a:rPr>
-                              <m:t>+1</m:t>
-                            </m:r>
-                          </m:sub>
-                        </m:sSub>
-                        <m:r>
-                          <a:rPr lang="en-US" b="0" i="1" dirty="0" smtClean="0">
-                            <a:latin typeface="Cambria Math" panose="02040503050406030204" pitchFamily="18" charset="0"/>
-                          </a:rPr>
-                          <m:t>,</m:t>
-                        </m:r>
-                        <m:r>
-                          <a:rPr lang="en-US" b="0" i="1" dirty="0" smtClean="0">
-                            <a:latin typeface="Cambria Math" panose="02040503050406030204" pitchFamily="18" charset="0"/>
-                          </a:rPr>
-                          <m:t>𝑎</m:t>
-                        </m:r>
-                        <m:r>
-                          <a:rPr lang="en-US" b="0" i="1" dirty="0" smtClean="0">
-                            <a:latin typeface="Cambria Math" panose="02040503050406030204" pitchFamily="18" charset="0"/>
-                          </a:rPr>
-                          <m:t>, </m:t>
-                        </m:r>
-                        <m:sSub>
-                          <m:sSubPr>
-                            <m:ctrlPr>
-                              <a:rPr lang="en-US" b="0" i="1" dirty="0" smtClean="0">
-                                <a:latin typeface="Cambria Math" panose="02040503050406030204" pitchFamily="18" charset="0"/>
-                              </a:rPr>
-                            </m:ctrlPr>
-                          </m:sSubPr>
-                          <m:e>
-                            <m:r>
-                              <a:rPr lang="en-US" b="1" i="1" dirty="0" smtClean="0">
-                                <a:latin typeface="Cambria Math" panose="02040503050406030204" pitchFamily="18" charset="0"/>
-                              </a:rPr>
-                              <m:t>𝒘</m:t>
-                            </m:r>
-                          </m:e>
-                          <m:sub>
-                            <m:r>
-                              <a:rPr lang="en-US" b="0" i="1" dirty="0" smtClean="0">
-                                <a:latin typeface="Cambria Math" panose="02040503050406030204" pitchFamily="18" charset="0"/>
-                              </a:rPr>
-                              <m:t>𝑡</m:t>
-                            </m:r>
-                          </m:sub>
-                        </m:sSub>
-                        <m:r>
-                          <a:rPr lang="en-US" b="0" i="1" dirty="0" smtClean="0">
-                            <a:latin typeface="Cambria Math" panose="02040503050406030204" pitchFamily="18" charset="0"/>
-                          </a:rPr>
-                          <m:t>)</m:t>
-                        </m:r>
-                      </m:e>
-                    </m:func>
-                  </m:oMath>
-                </a14:m>
-                <a:endParaRPr lang="en-US" dirty="0"/>
-              </a:p>
-              <a:p>
-                <a:r>
-                  <a:rPr lang="en-US" dirty="0"/>
-                  <a:t>For on-policy control, use a soft approximation to the greedy policy (e.g., </a:t>
-                </a:r>
-                <a14:m>
-                  <m:oMath xmlns:m="http://schemas.openxmlformats.org/officeDocument/2006/math">
-                    <m:r>
-                      <a:rPr lang="en-US" b="0" i="1" smtClean="0">
-                        <a:latin typeface="Cambria Math" panose="02040503050406030204" pitchFamily="18" charset="0"/>
-                      </a:rPr>
-                      <m:t>𝜖</m:t>
-                    </m:r>
-                  </m:oMath>
-                </a14:m>
-                <a:r>
-                  <a:rPr lang="en-US" dirty="0"/>
-                  <a:t>-greedy)</a:t>
-                </a:r>
-              </a:p>
-            </p:txBody>
-          </p:sp>
-        </mc:Choice>
-        <mc:Fallback xmlns="">
-          <p:sp>
-            <p:nvSpPr>
-              <p:cNvPr id="5" name="Content Placeholder 4">
-                <a:extLst>
-                  <a:ext uri="{FF2B5EF4-FFF2-40B4-BE49-F238E27FC236}">
-                    <a16:creationId xmlns:a16="http://schemas.microsoft.com/office/drawing/2014/main" id="{DF5B41B1-2FAA-67FF-A039-06F08FE693F6}"/>
-                  </a:ext>
-                </a:extLst>
-              </p:cNvPr>
-              <p:cNvSpPr>
-                <a:spLocks noGrp="1" noRot="1" noChangeAspect="1" noMove="1" noResize="1" noEditPoints="1" noAdjustHandles="1" noChangeArrowheads="1" noChangeShapeType="1" noTextEdit="1"/>
-              </p:cNvSpPr>
-              <p:nvPr>
-                <p:ph idx="1"/>
-              </p:nvPr>
-            </p:nvSpPr>
-            <p:spPr>
-              <a:blipFill>
-                <a:blip r:embed="rId2"/>
-                <a:stretch>
-                  <a:fillRect l="-696" t="-2551"/>
-                </a:stretch>
-              </a:blipFill>
-            </p:spPr>
-            <p:txBody>
-              <a:bodyPr/>
-              <a:lstStyle/>
-              <a:p>
-                <a:r>
-                  <a:rPr lang="en-US">
-                    <a:noFill/>
-                  </a:rPr>
-                  <a:t> </a:t>
-                </a:r>
-              </a:p>
-            </p:txBody>
-          </p:sp>
-        </mc:Fallback>
-      </mc:AlternateContent>
-    </p:spTree>
-    <p:extLst>
-      <p:ext uri="{BB962C8B-B14F-4D97-AF65-F5344CB8AC3E}">
-        <p14:creationId xmlns:p14="http://schemas.microsoft.com/office/powerpoint/2010/main" val="2868951675"/>
       </p:ext>
     </p:extLst>
   </p:cSld>
@@ -31180,6 +30281,1715 @@
           <p:cNvPr id="4" name="Title 3">
             <a:extLst>
               <a:ext uri="{FF2B5EF4-FFF2-40B4-BE49-F238E27FC236}">
+                <a16:creationId xmlns:a16="http://schemas.microsoft.com/office/drawing/2014/main" id="{689C127B-86A4-4CC5-9EE1-A0FDA5771BE2}"/>
+              </a:ext>
+            </a:extLst>
+          </p:cNvPr>
+          <p:cNvSpPr>
+            <a:spLocks noGrp="1"/>
+          </p:cNvSpPr>
+          <p:nvPr>
+            <p:ph type="title"/>
+          </p:nvPr>
+        </p:nvSpPr>
+        <p:spPr/>
+        <p:txBody>
+          <a:bodyPr/>
+          <a:lstStyle/>
+          <a:p>
+            <a:r>
+              <a:rPr lang="en-US" dirty="0"/>
+              <a:t>Control Problem</a:t>
+            </a:r>
+          </a:p>
+        </p:txBody>
+      </p:sp>
+      <mc:AlternateContent xmlns:mc="http://schemas.openxmlformats.org/markup-compatibility/2006">
+        <mc:Choice xmlns:a14="http://schemas.microsoft.com/office/drawing/2010/main" Requires="a14">
+          <p:sp>
+            <p:nvSpPr>
+              <p:cNvPr id="5" name="Content Placeholder 4">
+                <a:extLst>
+                  <a:ext uri="{FF2B5EF4-FFF2-40B4-BE49-F238E27FC236}">
+                    <a16:creationId xmlns:a16="http://schemas.microsoft.com/office/drawing/2014/main" id="{DF5B41B1-2FAA-67FF-A039-06F08FE693F6}"/>
+                  </a:ext>
+                </a:extLst>
+              </p:cNvPr>
+              <p:cNvSpPr>
+                <a:spLocks noGrp="1"/>
+              </p:cNvSpPr>
+              <p:nvPr>
+                <p:ph idx="1"/>
+              </p:nvPr>
+            </p:nvSpPr>
+            <p:spPr/>
+            <p:txBody>
+              <a:bodyPr>
+                <a:normAutofit fontScale="77500" lnSpcReduction="20000"/>
+              </a:bodyPr>
+              <a:lstStyle/>
+              <a:p>
+                <a:r>
+                  <a:rPr lang="en-US" dirty="0"/>
+                  <a:t>Estimate a parametric approximation for value-action function.</a:t>
+                </a:r>
+                <a:br>
+                  <a:rPr lang="en-US" dirty="0"/>
+                </a:br>
+                <a:br>
+                  <a:rPr lang="en-US" dirty="0"/>
+                </a:br>
+                <a14:m>
+                  <m:oMath xmlns:m="http://schemas.openxmlformats.org/officeDocument/2006/math">
+                    <m:acc>
+                      <m:accPr>
+                        <m:chr m:val="̂"/>
+                        <m:ctrlPr>
+                          <a:rPr lang="en-US" b="0" i="1" smtClean="0">
+                            <a:latin typeface="Cambria Math" panose="02040503050406030204" pitchFamily="18" charset="0"/>
+                          </a:rPr>
+                        </m:ctrlPr>
+                      </m:accPr>
+                      <m:e>
+                        <m:r>
+                          <a:rPr lang="en-US" b="0" i="1" smtClean="0">
+                            <a:latin typeface="Cambria Math" panose="02040503050406030204" pitchFamily="18" charset="0"/>
+                          </a:rPr>
+                          <m:t>𝑞</m:t>
+                        </m:r>
+                      </m:e>
+                    </m:acc>
+                    <m:d>
+                      <m:dPr>
+                        <m:ctrlPr>
+                          <a:rPr lang="en-US" b="0" i="1" dirty="0" smtClean="0">
+                            <a:latin typeface="Cambria Math" panose="02040503050406030204" pitchFamily="18" charset="0"/>
+                          </a:rPr>
+                        </m:ctrlPr>
+                      </m:dPr>
+                      <m:e>
+                        <m:r>
+                          <a:rPr lang="en-US" b="0" i="1" dirty="0" smtClean="0">
+                            <a:latin typeface="Cambria Math" panose="02040503050406030204" pitchFamily="18" charset="0"/>
+                          </a:rPr>
+                          <m:t>𝑠</m:t>
+                        </m:r>
+                        <m:r>
+                          <a:rPr lang="en-US" b="0" i="1" dirty="0" smtClean="0">
+                            <a:latin typeface="Cambria Math" panose="02040503050406030204" pitchFamily="18" charset="0"/>
+                          </a:rPr>
+                          <m:t>,</m:t>
+                        </m:r>
+                        <m:r>
+                          <a:rPr lang="en-US" b="0" i="1" dirty="0" smtClean="0">
+                            <a:latin typeface="Cambria Math" panose="02040503050406030204" pitchFamily="18" charset="0"/>
+                          </a:rPr>
+                          <m:t>𝑎</m:t>
+                        </m:r>
+                        <m:r>
+                          <a:rPr lang="en-US" b="0" i="1" dirty="0" smtClean="0">
+                            <a:latin typeface="Cambria Math" panose="02040503050406030204" pitchFamily="18" charset="0"/>
+                          </a:rPr>
+                          <m:t>,</m:t>
+                        </m:r>
+                        <m:r>
+                          <a:rPr lang="en-US" b="1" i="1" dirty="0" smtClean="0">
+                            <a:latin typeface="Cambria Math" panose="02040503050406030204" pitchFamily="18" charset="0"/>
+                          </a:rPr>
+                          <m:t>𝒘</m:t>
+                        </m:r>
+                      </m:e>
+                    </m:d>
+                    <m:r>
+                      <a:rPr lang="en-US" b="0" i="1" dirty="0" smtClean="0">
+                        <a:latin typeface="Cambria Math" panose="02040503050406030204" pitchFamily="18" charset="0"/>
+                      </a:rPr>
+                      <m:t>≈</m:t>
+                    </m:r>
+                    <m:sSub>
+                      <m:sSubPr>
+                        <m:ctrlPr>
+                          <a:rPr lang="en-US" b="0" i="1" dirty="0" smtClean="0">
+                            <a:latin typeface="Cambria Math" panose="02040503050406030204" pitchFamily="18" charset="0"/>
+                          </a:rPr>
+                        </m:ctrlPr>
+                      </m:sSubPr>
+                      <m:e>
+                        <m:r>
+                          <a:rPr lang="en-US" b="0" i="1" dirty="0" smtClean="0">
+                            <a:latin typeface="Cambria Math" panose="02040503050406030204" pitchFamily="18" charset="0"/>
+                          </a:rPr>
+                          <m:t>𝑞</m:t>
+                        </m:r>
+                      </m:e>
+                      <m:sub>
+                        <m:r>
+                          <a:rPr lang="en-US" b="0" i="1" dirty="0" smtClean="0">
+                            <a:latin typeface="Cambria Math" panose="02040503050406030204" pitchFamily="18" charset="0"/>
+                          </a:rPr>
+                          <m:t>∗</m:t>
+                        </m:r>
+                      </m:sub>
+                    </m:sSub>
+                    <m:r>
+                      <a:rPr lang="en-US" b="0" i="1" dirty="0" smtClean="0">
+                        <a:latin typeface="Cambria Math" panose="02040503050406030204" pitchFamily="18" charset="0"/>
+                      </a:rPr>
+                      <m:t>(</m:t>
+                    </m:r>
+                    <m:r>
+                      <a:rPr lang="en-US" b="0" i="1" dirty="0" smtClean="0">
+                        <a:latin typeface="Cambria Math" panose="02040503050406030204" pitchFamily="18" charset="0"/>
+                      </a:rPr>
+                      <m:t>𝑠</m:t>
+                    </m:r>
+                    <m:r>
+                      <a:rPr lang="en-US" b="0" i="1" dirty="0" smtClean="0">
+                        <a:latin typeface="Cambria Math" panose="02040503050406030204" pitchFamily="18" charset="0"/>
+                      </a:rPr>
+                      <m:t>,</m:t>
+                    </m:r>
+                    <m:r>
+                      <a:rPr lang="en-US" b="0" i="1" dirty="0" smtClean="0">
+                        <a:latin typeface="Cambria Math" panose="02040503050406030204" pitchFamily="18" charset="0"/>
+                      </a:rPr>
+                      <m:t>𝑎</m:t>
+                    </m:r>
+                    <m:r>
+                      <a:rPr lang="en-US" b="0" i="1" dirty="0" smtClean="0">
+                        <a:latin typeface="Cambria Math" panose="02040503050406030204" pitchFamily="18" charset="0"/>
+                      </a:rPr>
+                      <m:t>)</m:t>
+                    </m:r>
+                  </m:oMath>
+                </a14:m>
+                <a:endParaRPr lang="en-US" dirty="0"/>
+              </a:p>
+              <a:p>
+                <a:endParaRPr lang="en-US" dirty="0"/>
+              </a:p>
+              <a:p>
+                <a:r>
+                  <a:rPr lang="en-US" b="1" dirty="0"/>
+                  <a:t>Training data</a:t>
+                </a:r>
+                <a:r>
+                  <a:rPr lang="en-US" dirty="0"/>
+                  <a:t>: </a:t>
+                </a:r>
+                <a14:m>
+                  <m:oMath xmlns:m="http://schemas.openxmlformats.org/officeDocument/2006/math">
+                    <m:sSub>
+                      <m:sSubPr>
+                        <m:ctrlPr>
+                          <a:rPr lang="en-US" b="0" i="1" smtClean="0">
+                            <a:latin typeface="Cambria Math" panose="02040503050406030204" pitchFamily="18" charset="0"/>
+                          </a:rPr>
+                        </m:ctrlPr>
+                      </m:sSubPr>
+                      <m:e>
+                        <m:r>
+                          <a:rPr lang="en-US" b="0" i="1" smtClean="0">
+                            <a:latin typeface="Cambria Math" panose="02040503050406030204" pitchFamily="18" charset="0"/>
+                          </a:rPr>
+                          <m:t>                              </m:t>
+                        </m:r>
+                        <m:r>
+                          <a:rPr lang="en-US" b="0" i="1" smtClean="0">
+                            <a:latin typeface="Cambria Math" panose="02040503050406030204" pitchFamily="18" charset="0"/>
+                          </a:rPr>
+                          <m:t>𝑆</m:t>
+                        </m:r>
+                      </m:e>
+                      <m:sub>
+                        <m:r>
+                          <a:rPr lang="en-US" b="0" i="1" smtClean="0">
+                            <a:latin typeface="Cambria Math" panose="02040503050406030204" pitchFamily="18" charset="0"/>
+                          </a:rPr>
+                          <m:t>𝑡</m:t>
+                        </m:r>
+                      </m:sub>
+                    </m:sSub>
+                    <m:r>
+                      <a:rPr lang="en-US" b="0" i="1" smtClean="0">
+                        <a:latin typeface="Cambria Math" panose="02040503050406030204" pitchFamily="18" charset="0"/>
+                      </a:rPr>
+                      <m:t>,</m:t>
+                    </m:r>
+                    <m:sSub>
+                      <m:sSubPr>
+                        <m:ctrlPr>
+                          <a:rPr lang="en-US" b="0" i="1" smtClean="0">
+                            <a:latin typeface="Cambria Math" panose="02040503050406030204" pitchFamily="18" charset="0"/>
+                          </a:rPr>
+                        </m:ctrlPr>
+                      </m:sSubPr>
+                      <m:e>
+                        <m:r>
+                          <a:rPr lang="en-US" b="0" i="1" smtClean="0">
+                            <a:latin typeface="Cambria Math" panose="02040503050406030204" pitchFamily="18" charset="0"/>
+                          </a:rPr>
+                          <m:t>𝐴</m:t>
+                        </m:r>
+                      </m:e>
+                      <m:sub>
+                        <m:r>
+                          <a:rPr lang="en-US" b="0" i="1" smtClean="0">
+                            <a:latin typeface="Cambria Math" panose="02040503050406030204" pitchFamily="18" charset="0"/>
+                          </a:rPr>
+                          <m:t>𝑡</m:t>
+                        </m:r>
+                      </m:sub>
+                    </m:sSub>
+                    <m:r>
+                      <a:rPr lang="en-US" i="1">
+                        <a:latin typeface="Cambria Math" panose="02040503050406030204" pitchFamily="18" charset="0"/>
+                        <a:ea typeface="Cambria Math" panose="02040503050406030204" pitchFamily="18" charset="0"/>
+                      </a:rPr>
+                      <m:t>↦</m:t>
+                    </m:r>
+                    <m:sSub>
+                      <m:sSubPr>
+                        <m:ctrlPr>
+                          <a:rPr lang="en-US" b="0" i="1" smtClean="0">
+                            <a:latin typeface="Cambria Math" panose="02040503050406030204" pitchFamily="18" charset="0"/>
+                            <a:ea typeface="Cambria Math" panose="02040503050406030204" pitchFamily="18" charset="0"/>
+                          </a:rPr>
+                        </m:ctrlPr>
+                      </m:sSubPr>
+                      <m:e>
+                        <m:r>
+                          <a:rPr lang="en-US" b="0" i="1" smtClean="0">
+                            <a:latin typeface="Cambria Math" panose="02040503050406030204" pitchFamily="18" charset="0"/>
+                            <a:ea typeface="Cambria Math" panose="02040503050406030204" pitchFamily="18" charset="0"/>
+                          </a:rPr>
+                          <m:t>𝑈</m:t>
+                        </m:r>
+                      </m:e>
+                      <m:sub>
+                        <m:r>
+                          <a:rPr lang="en-US" b="0" i="1" smtClean="0">
+                            <a:latin typeface="Cambria Math" panose="02040503050406030204" pitchFamily="18" charset="0"/>
+                            <a:ea typeface="Cambria Math" panose="02040503050406030204" pitchFamily="18" charset="0"/>
+                          </a:rPr>
+                          <m:t>𝑡</m:t>
+                        </m:r>
+                      </m:sub>
+                    </m:sSub>
+                  </m:oMath>
+                </a14:m>
+                <a:endParaRPr lang="en-US" dirty="0"/>
+              </a:p>
+              <a:p>
+                <a:r>
+                  <a:rPr lang="en-US" b="1" dirty="0"/>
+                  <a:t>Update</a:t>
+                </a:r>
+                <a:r>
+                  <a:rPr lang="en-US" dirty="0"/>
+                  <a:t>: </a:t>
+                </a:r>
+                <a14:m>
+                  <m:oMath xmlns:m="http://schemas.openxmlformats.org/officeDocument/2006/math">
+                    <m:sSub>
+                      <m:sSubPr>
+                        <m:ctrlPr>
+                          <a:rPr lang="en-US" i="1">
+                            <a:latin typeface="Cambria Math" panose="02040503050406030204" pitchFamily="18" charset="0"/>
+                          </a:rPr>
+                        </m:ctrlPr>
+                      </m:sSubPr>
+                      <m:e>
+                        <m:r>
+                          <a:rPr lang="en-US" b="1" i="1" smtClean="0">
+                            <a:latin typeface="Cambria Math" panose="02040503050406030204" pitchFamily="18" charset="0"/>
+                          </a:rPr>
+                          <m:t>               </m:t>
+                        </m:r>
+                        <m:r>
+                          <a:rPr lang="en-US" b="1" i="1">
+                            <a:latin typeface="Cambria Math" panose="02040503050406030204" pitchFamily="18" charset="0"/>
+                          </a:rPr>
+                          <m:t>𝒘</m:t>
+                        </m:r>
+                      </m:e>
+                      <m:sub>
+                        <m:r>
+                          <a:rPr lang="en-US" i="1">
+                            <a:latin typeface="Cambria Math" panose="02040503050406030204" pitchFamily="18" charset="0"/>
+                          </a:rPr>
+                          <m:t>𝑡</m:t>
+                        </m:r>
+                        <m:r>
+                          <a:rPr lang="en-US" i="1">
+                            <a:latin typeface="Cambria Math" panose="02040503050406030204" pitchFamily="18" charset="0"/>
+                          </a:rPr>
+                          <m:t>+1</m:t>
+                        </m:r>
+                      </m:sub>
+                    </m:sSub>
+                    <m:r>
+                      <a:rPr lang="en-US" i="1">
+                        <a:latin typeface="Cambria Math" panose="02040503050406030204" pitchFamily="18" charset="0"/>
+                      </a:rPr>
+                      <m:t>= </m:t>
+                    </m:r>
+                    <m:sSub>
+                      <m:sSubPr>
+                        <m:ctrlPr>
+                          <a:rPr lang="en-US" i="1">
+                            <a:latin typeface="Cambria Math" panose="02040503050406030204" pitchFamily="18" charset="0"/>
+                          </a:rPr>
+                        </m:ctrlPr>
+                      </m:sSubPr>
+                      <m:e>
+                        <m:r>
+                          <a:rPr lang="en-US" b="1" i="1">
+                            <a:latin typeface="Cambria Math" panose="02040503050406030204" pitchFamily="18" charset="0"/>
+                          </a:rPr>
+                          <m:t>𝒘</m:t>
+                        </m:r>
+                      </m:e>
+                      <m:sub>
+                        <m:r>
+                          <a:rPr lang="en-US" i="1">
+                            <a:latin typeface="Cambria Math" panose="02040503050406030204" pitchFamily="18" charset="0"/>
+                          </a:rPr>
+                          <m:t>𝑡</m:t>
+                        </m:r>
+                      </m:sub>
+                    </m:sSub>
+                    <m:r>
+                      <a:rPr lang="en-US" i="1">
+                        <a:latin typeface="Cambria Math" panose="02040503050406030204" pitchFamily="18" charset="0"/>
+                      </a:rPr>
+                      <m:t>+</m:t>
+                    </m:r>
+                    <m:r>
+                      <a:rPr lang="en-US" i="1">
+                        <a:latin typeface="Cambria Math" panose="02040503050406030204" pitchFamily="18" charset="0"/>
+                      </a:rPr>
+                      <m:t>𝛼</m:t>
+                    </m:r>
+                    <m:d>
+                      <m:dPr>
+                        <m:begChr m:val="["/>
+                        <m:endChr m:val="]"/>
+                        <m:ctrlPr>
+                          <a:rPr lang="en-US" i="1">
+                            <a:latin typeface="Cambria Math" panose="02040503050406030204" pitchFamily="18" charset="0"/>
+                            <a:ea typeface="Cambria Math" panose="02040503050406030204" pitchFamily="18" charset="0"/>
+                          </a:rPr>
+                        </m:ctrlPr>
+                      </m:dPr>
+                      <m:e>
+                        <m:sSub>
+                          <m:sSubPr>
+                            <m:ctrlPr>
+                              <a:rPr lang="en-US" i="1">
+                                <a:latin typeface="Cambria Math" panose="02040503050406030204" pitchFamily="18" charset="0"/>
+                                <a:ea typeface="Cambria Math" panose="02040503050406030204" pitchFamily="18" charset="0"/>
+                              </a:rPr>
+                            </m:ctrlPr>
+                          </m:sSubPr>
+                          <m:e>
+                            <m:r>
+                              <a:rPr lang="en-US" i="1">
+                                <a:latin typeface="Cambria Math" panose="02040503050406030204" pitchFamily="18" charset="0"/>
+                                <a:ea typeface="Cambria Math" panose="02040503050406030204" pitchFamily="18" charset="0"/>
+                              </a:rPr>
+                              <m:t>𝑈</m:t>
+                            </m:r>
+                          </m:e>
+                          <m:sub>
+                            <m:r>
+                              <a:rPr lang="en-US" i="1">
+                                <a:latin typeface="Cambria Math" panose="02040503050406030204" pitchFamily="18" charset="0"/>
+                                <a:ea typeface="Cambria Math" panose="02040503050406030204" pitchFamily="18" charset="0"/>
+                              </a:rPr>
+                              <m:t>𝑡</m:t>
+                            </m:r>
+                          </m:sub>
+                        </m:sSub>
+                        <m:r>
+                          <a:rPr lang="en-US" i="1">
+                            <a:latin typeface="Cambria Math" panose="02040503050406030204" pitchFamily="18" charset="0"/>
+                            <a:ea typeface="Cambria Math" panose="02040503050406030204" pitchFamily="18" charset="0"/>
+                          </a:rPr>
+                          <m:t>−</m:t>
+                        </m:r>
+                        <m:acc>
+                          <m:accPr>
+                            <m:chr m:val="̂"/>
+                            <m:ctrlPr>
+                              <a:rPr lang="en-US" i="1">
+                                <a:latin typeface="Cambria Math" panose="02040503050406030204" pitchFamily="18" charset="0"/>
+                                <a:ea typeface="Cambria Math" panose="02040503050406030204" pitchFamily="18" charset="0"/>
+                              </a:rPr>
+                            </m:ctrlPr>
+                          </m:accPr>
+                          <m:e>
+                            <m:r>
+                              <a:rPr lang="en-US" b="0" i="1" smtClean="0">
+                                <a:latin typeface="Cambria Math" panose="02040503050406030204" pitchFamily="18" charset="0"/>
+                                <a:ea typeface="Cambria Math" panose="02040503050406030204" pitchFamily="18" charset="0"/>
+                              </a:rPr>
+                              <m:t>𝑞</m:t>
+                            </m:r>
+                          </m:e>
+                        </m:acc>
+                        <m:d>
+                          <m:dPr>
+                            <m:ctrlPr>
+                              <a:rPr lang="en-US" i="1">
+                                <a:latin typeface="Cambria Math" panose="02040503050406030204" pitchFamily="18" charset="0"/>
+                                <a:ea typeface="Cambria Math" panose="02040503050406030204" pitchFamily="18" charset="0"/>
+                              </a:rPr>
+                            </m:ctrlPr>
+                          </m:dPr>
+                          <m:e>
+                            <m:sSub>
+                              <m:sSubPr>
+                                <m:ctrlPr>
+                                  <a:rPr lang="en-US" i="1">
+                                    <a:latin typeface="Cambria Math" panose="02040503050406030204" pitchFamily="18" charset="0"/>
+                                    <a:ea typeface="Cambria Math" panose="02040503050406030204" pitchFamily="18" charset="0"/>
+                                  </a:rPr>
+                                </m:ctrlPr>
+                              </m:sSubPr>
+                              <m:e>
+                                <m:r>
+                                  <a:rPr lang="en-US" i="1">
+                                    <a:latin typeface="Cambria Math" panose="02040503050406030204" pitchFamily="18" charset="0"/>
+                                    <a:ea typeface="Cambria Math" panose="02040503050406030204" pitchFamily="18" charset="0"/>
+                                  </a:rPr>
+                                  <m:t>𝑆</m:t>
+                                </m:r>
+                              </m:e>
+                              <m:sub>
+                                <m:r>
+                                  <a:rPr lang="en-US" i="1">
+                                    <a:latin typeface="Cambria Math" panose="02040503050406030204" pitchFamily="18" charset="0"/>
+                                    <a:ea typeface="Cambria Math" panose="02040503050406030204" pitchFamily="18" charset="0"/>
+                                  </a:rPr>
+                                  <m:t>𝑡</m:t>
+                                </m:r>
+                              </m:sub>
+                            </m:sSub>
+                            <m:r>
+                              <a:rPr lang="en-US" i="1">
+                                <a:latin typeface="Cambria Math" panose="02040503050406030204" pitchFamily="18" charset="0"/>
+                                <a:ea typeface="Cambria Math" panose="02040503050406030204" pitchFamily="18" charset="0"/>
+                              </a:rPr>
+                              <m:t>,</m:t>
+                            </m:r>
+                            <m:sSub>
+                              <m:sSubPr>
+                                <m:ctrlPr>
+                                  <a:rPr lang="en-US" b="0" i="1" smtClean="0">
+                                    <a:latin typeface="Cambria Math" panose="02040503050406030204" pitchFamily="18" charset="0"/>
+                                    <a:ea typeface="Cambria Math" panose="02040503050406030204" pitchFamily="18" charset="0"/>
+                                  </a:rPr>
+                                </m:ctrlPr>
+                              </m:sSubPr>
+                              <m:e>
+                                <m:r>
+                                  <a:rPr lang="en-US" b="0" i="1" smtClean="0">
+                                    <a:latin typeface="Cambria Math" panose="02040503050406030204" pitchFamily="18" charset="0"/>
+                                    <a:ea typeface="Cambria Math" panose="02040503050406030204" pitchFamily="18" charset="0"/>
+                                  </a:rPr>
+                                  <m:t>𝐴</m:t>
+                                </m:r>
+                              </m:e>
+                              <m:sub>
+                                <m:r>
+                                  <a:rPr lang="en-US" b="0" i="1" smtClean="0">
+                                    <a:latin typeface="Cambria Math" panose="02040503050406030204" pitchFamily="18" charset="0"/>
+                                    <a:ea typeface="Cambria Math" panose="02040503050406030204" pitchFamily="18" charset="0"/>
+                                  </a:rPr>
+                                  <m:t>𝑡</m:t>
+                                </m:r>
+                              </m:sub>
+                            </m:sSub>
+                            <m:r>
+                              <a:rPr lang="en-US" b="0" i="1" smtClean="0">
+                                <a:latin typeface="Cambria Math" panose="02040503050406030204" pitchFamily="18" charset="0"/>
+                                <a:ea typeface="Cambria Math" panose="02040503050406030204" pitchFamily="18" charset="0"/>
+                              </a:rPr>
+                              <m:t>, </m:t>
+                            </m:r>
+                            <m:sSub>
+                              <m:sSubPr>
+                                <m:ctrlPr>
+                                  <a:rPr lang="en-US" i="1">
+                                    <a:latin typeface="Cambria Math" panose="02040503050406030204" pitchFamily="18" charset="0"/>
+                                    <a:ea typeface="Cambria Math" panose="02040503050406030204" pitchFamily="18" charset="0"/>
+                                  </a:rPr>
+                                </m:ctrlPr>
+                              </m:sSubPr>
+                              <m:e>
+                                <m:r>
+                                  <a:rPr lang="en-US" b="1" i="1">
+                                    <a:latin typeface="Cambria Math" panose="02040503050406030204" pitchFamily="18" charset="0"/>
+                                    <a:ea typeface="Cambria Math" panose="02040503050406030204" pitchFamily="18" charset="0"/>
+                                  </a:rPr>
+                                  <m:t>𝒘</m:t>
+                                </m:r>
+                              </m:e>
+                              <m:sub>
+                                <m:r>
+                                  <a:rPr lang="en-US" i="1">
+                                    <a:latin typeface="Cambria Math" panose="02040503050406030204" pitchFamily="18" charset="0"/>
+                                    <a:ea typeface="Cambria Math" panose="02040503050406030204" pitchFamily="18" charset="0"/>
+                                  </a:rPr>
+                                  <m:t>𝑡</m:t>
+                                </m:r>
+                              </m:sub>
+                            </m:sSub>
+                          </m:e>
+                        </m:d>
+                      </m:e>
+                    </m:d>
+                  </m:oMath>
+                </a14:m>
+                <a:r>
+                  <a:rPr lang="en-US" dirty="0">
+                    <a:ea typeface="Cambria Math" panose="02040503050406030204" pitchFamily="18" charset="0"/>
+                  </a:rPr>
+                  <a:t> </a:t>
+                </a:r>
+                <a14:m>
+                  <m:oMath xmlns:m="http://schemas.openxmlformats.org/officeDocument/2006/math">
+                    <m:r>
+                      <m:rPr>
+                        <m:sty m:val="p"/>
+                      </m:rPr>
+                      <a:rPr lang="en-US" i="1">
+                        <a:latin typeface="Cambria Math" panose="02040503050406030204" pitchFamily="18" charset="0"/>
+                        <a:ea typeface="Cambria Math" panose="02040503050406030204" pitchFamily="18" charset="0"/>
+                      </a:rPr>
+                      <m:t>∇</m:t>
+                    </m:r>
+                  </m:oMath>
+                </a14:m>
+                <a:r>
+                  <a:rPr lang="en-US" dirty="0">
+                    <a:ea typeface="Cambria Math" panose="02040503050406030204" pitchFamily="18" charset="0"/>
+                  </a:rPr>
+                  <a:t> </a:t>
+                </a:r>
+                <a14:m>
+                  <m:oMath xmlns:m="http://schemas.openxmlformats.org/officeDocument/2006/math">
+                    <m:acc>
+                      <m:accPr>
+                        <m:chr m:val="̂"/>
+                        <m:ctrlPr>
+                          <a:rPr lang="en-US" i="1">
+                            <a:latin typeface="Cambria Math" panose="02040503050406030204" pitchFamily="18" charset="0"/>
+                            <a:ea typeface="Cambria Math" panose="02040503050406030204" pitchFamily="18" charset="0"/>
+                          </a:rPr>
+                        </m:ctrlPr>
+                      </m:accPr>
+                      <m:e>
+                        <m:r>
+                          <a:rPr lang="en-US" b="0" i="1" smtClean="0">
+                            <a:latin typeface="Cambria Math" panose="02040503050406030204" pitchFamily="18" charset="0"/>
+                            <a:ea typeface="Cambria Math" panose="02040503050406030204" pitchFamily="18" charset="0"/>
+                          </a:rPr>
+                          <m:t>𝑞</m:t>
+                        </m:r>
+                      </m:e>
+                    </m:acc>
+                    <m:d>
+                      <m:dPr>
+                        <m:ctrlPr>
+                          <a:rPr lang="en-US" i="1">
+                            <a:latin typeface="Cambria Math" panose="02040503050406030204" pitchFamily="18" charset="0"/>
+                            <a:ea typeface="Cambria Math" panose="02040503050406030204" pitchFamily="18" charset="0"/>
+                          </a:rPr>
+                        </m:ctrlPr>
+                      </m:dPr>
+                      <m:e>
+                        <m:sSub>
+                          <m:sSubPr>
+                            <m:ctrlPr>
+                              <a:rPr lang="en-US" i="1">
+                                <a:latin typeface="Cambria Math" panose="02040503050406030204" pitchFamily="18" charset="0"/>
+                                <a:ea typeface="Cambria Math" panose="02040503050406030204" pitchFamily="18" charset="0"/>
+                              </a:rPr>
+                            </m:ctrlPr>
+                          </m:sSubPr>
+                          <m:e>
+                            <m:r>
+                              <a:rPr lang="en-US" i="1">
+                                <a:latin typeface="Cambria Math" panose="02040503050406030204" pitchFamily="18" charset="0"/>
+                                <a:ea typeface="Cambria Math" panose="02040503050406030204" pitchFamily="18" charset="0"/>
+                              </a:rPr>
+                              <m:t>𝑆</m:t>
+                            </m:r>
+                          </m:e>
+                          <m:sub>
+                            <m:r>
+                              <a:rPr lang="en-US" i="1">
+                                <a:latin typeface="Cambria Math" panose="02040503050406030204" pitchFamily="18" charset="0"/>
+                                <a:ea typeface="Cambria Math" panose="02040503050406030204" pitchFamily="18" charset="0"/>
+                              </a:rPr>
+                              <m:t>𝑡</m:t>
+                            </m:r>
+                          </m:sub>
+                        </m:sSub>
+                        <m:r>
+                          <a:rPr lang="en-US" i="1">
+                            <a:latin typeface="Cambria Math" panose="02040503050406030204" pitchFamily="18" charset="0"/>
+                            <a:ea typeface="Cambria Math" panose="02040503050406030204" pitchFamily="18" charset="0"/>
+                          </a:rPr>
+                          <m:t>,</m:t>
+                        </m:r>
+                        <m:sSub>
+                          <m:sSubPr>
+                            <m:ctrlPr>
+                              <a:rPr lang="en-US" b="0" i="1" smtClean="0">
+                                <a:latin typeface="Cambria Math" panose="02040503050406030204" pitchFamily="18" charset="0"/>
+                                <a:ea typeface="Cambria Math" panose="02040503050406030204" pitchFamily="18" charset="0"/>
+                              </a:rPr>
+                            </m:ctrlPr>
+                          </m:sSubPr>
+                          <m:e>
+                            <m:r>
+                              <a:rPr lang="en-US" b="0" i="1" smtClean="0">
+                                <a:latin typeface="Cambria Math" panose="02040503050406030204" pitchFamily="18" charset="0"/>
+                                <a:ea typeface="Cambria Math" panose="02040503050406030204" pitchFamily="18" charset="0"/>
+                              </a:rPr>
+                              <m:t>𝐴</m:t>
+                            </m:r>
+                          </m:e>
+                          <m:sub>
+                            <m:r>
+                              <a:rPr lang="en-US" b="0" i="1" smtClean="0">
+                                <a:latin typeface="Cambria Math" panose="02040503050406030204" pitchFamily="18" charset="0"/>
+                                <a:ea typeface="Cambria Math" panose="02040503050406030204" pitchFamily="18" charset="0"/>
+                              </a:rPr>
+                              <m:t>𝑡</m:t>
+                            </m:r>
+                          </m:sub>
+                        </m:sSub>
+                        <m:r>
+                          <a:rPr lang="en-US" b="0" i="1" smtClean="0">
+                            <a:latin typeface="Cambria Math" panose="02040503050406030204" pitchFamily="18" charset="0"/>
+                            <a:ea typeface="Cambria Math" panose="02040503050406030204" pitchFamily="18" charset="0"/>
+                          </a:rPr>
+                          <m:t>,</m:t>
+                        </m:r>
+                        <m:sSub>
+                          <m:sSubPr>
+                            <m:ctrlPr>
+                              <a:rPr lang="en-US" i="1">
+                                <a:latin typeface="Cambria Math" panose="02040503050406030204" pitchFamily="18" charset="0"/>
+                                <a:ea typeface="Cambria Math" panose="02040503050406030204" pitchFamily="18" charset="0"/>
+                              </a:rPr>
+                            </m:ctrlPr>
+                          </m:sSubPr>
+                          <m:e>
+                            <m:r>
+                              <a:rPr lang="en-US" b="1" i="1">
+                                <a:latin typeface="Cambria Math" panose="02040503050406030204" pitchFamily="18" charset="0"/>
+                                <a:ea typeface="Cambria Math" panose="02040503050406030204" pitchFamily="18" charset="0"/>
+                              </a:rPr>
+                              <m:t>𝒘</m:t>
+                            </m:r>
+                          </m:e>
+                          <m:sub>
+                            <m:r>
+                              <a:rPr lang="en-US" i="1">
+                                <a:latin typeface="Cambria Math" panose="02040503050406030204" pitchFamily="18" charset="0"/>
+                                <a:ea typeface="Cambria Math" panose="02040503050406030204" pitchFamily="18" charset="0"/>
+                              </a:rPr>
+                              <m:t>𝑡</m:t>
+                            </m:r>
+                          </m:sub>
+                        </m:sSub>
+                      </m:e>
+                    </m:d>
+                  </m:oMath>
+                </a14:m>
+                <a:endParaRPr lang="en-US" dirty="0"/>
+              </a:p>
+              <a:p>
+                <a:pPr lvl="1"/>
+                <a14:m>
+                  <m:oMath xmlns:m="http://schemas.openxmlformats.org/officeDocument/2006/math">
+                    <m:sSub>
+                      <m:sSubPr>
+                        <m:ctrlPr>
+                          <a:rPr lang="en-US" b="0" i="1" smtClean="0">
+                            <a:latin typeface="Cambria Math" panose="02040503050406030204" pitchFamily="18" charset="0"/>
+                          </a:rPr>
+                        </m:ctrlPr>
+                      </m:sSubPr>
+                      <m:e>
+                        <m:r>
+                          <a:rPr lang="en-US" b="0" i="1" smtClean="0">
+                            <a:latin typeface="Cambria Math" panose="02040503050406030204" pitchFamily="18" charset="0"/>
+                          </a:rPr>
+                          <m:t>𝑈</m:t>
+                        </m:r>
+                      </m:e>
+                      <m:sub>
+                        <m:r>
+                          <a:rPr lang="en-US" b="0" i="1" smtClean="0">
+                            <a:latin typeface="Cambria Math" panose="02040503050406030204" pitchFamily="18" charset="0"/>
+                          </a:rPr>
+                          <m:t>𝑡</m:t>
+                        </m:r>
+                      </m:sub>
+                    </m:sSub>
+                  </m:oMath>
+                </a14:m>
+                <a:r>
+                  <a:rPr lang="en-US" dirty="0"/>
+                  <a:t> can be any approximation:</a:t>
+                </a:r>
+              </a:p>
+              <a:p>
+                <a:pPr lvl="2"/>
+                <a:r>
+                  <a:rPr lang="en-US" dirty="0"/>
+                  <a:t>MC: </a:t>
+                </a:r>
+                <a14:m>
+                  <m:oMath xmlns:m="http://schemas.openxmlformats.org/officeDocument/2006/math">
+                    <m:sSub>
+                      <m:sSubPr>
+                        <m:ctrlPr>
+                          <a:rPr lang="en-US" b="0" i="1" smtClean="0">
+                            <a:latin typeface="Cambria Math" panose="02040503050406030204" pitchFamily="18" charset="0"/>
+                          </a:rPr>
+                        </m:ctrlPr>
+                      </m:sSubPr>
+                      <m:e>
+                        <m:r>
+                          <a:rPr lang="en-US" b="0" i="1" smtClean="0">
+                            <a:latin typeface="Cambria Math" panose="02040503050406030204" pitchFamily="18" charset="0"/>
+                          </a:rPr>
+                          <m:t>𝑈</m:t>
+                        </m:r>
+                      </m:e>
+                      <m:sub>
+                        <m:r>
+                          <a:rPr lang="en-US" b="0" i="1" smtClean="0">
+                            <a:latin typeface="Cambria Math" panose="02040503050406030204" pitchFamily="18" charset="0"/>
+                          </a:rPr>
+                          <m:t>𝑡</m:t>
+                        </m:r>
+                      </m:sub>
+                    </m:sSub>
+                    <m:r>
+                      <a:rPr lang="en-US" b="0" i="1" smtClean="0">
+                        <a:latin typeface="Cambria Math" panose="02040503050406030204" pitchFamily="18" charset="0"/>
+                      </a:rPr>
+                      <m:t>= </m:t>
+                    </m:r>
+                    <m:sSub>
+                      <m:sSubPr>
+                        <m:ctrlPr>
+                          <a:rPr lang="en-US" b="0" i="1" smtClean="0">
+                            <a:latin typeface="Cambria Math" panose="02040503050406030204" pitchFamily="18" charset="0"/>
+                          </a:rPr>
+                        </m:ctrlPr>
+                      </m:sSubPr>
+                      <m:e>
+                        <m:r>
+                          <a:rPr lang="en-US" b="0" i="1" smtClean="0">
+                            <a:latin typeface="Cambria Math" panose="02040503050406030204" pitchFamily="18" charset="0"/>
+                          </a:rPr>
+                          <m:t>𝐺</m:t>
+                        </m:r>
+                      </m:e>
+                      <m:sub>
+                        <m:r>
+                          <a:rPr lang="en-US" b="0" i="1" smtClean="0">
+                            <a:latin typeface="Cambria Math" panose="02040503050406030204" pitchFamily="18" charset="0"/>
+                          </a:rPr>
+                          <m:t>𝑡</m:t>
+                        </m:r>
+                      </m:sub>
+                    </m:sSub>
+                  </m:oMath>
+                </a14:m>
+                <a:endParaRPr lang="en-US" b="0" i="1" dirty="0"/>
+              </a:p>
+              <a:p>
+                <a:pPr lvl="2"/>
+                <a:r>
+                  <a:rPr lang="en-US" dirty="0"/>
+                  <a:t>1-step TD: </a:t>
+                </a:r>
+                <a14:m>
+                  <m:oMath xmlns:m="http://schemas.openxmlformats.org/officeDocument/2006/math">
+                    <m:sSub>
+                      <m:sSubPr>
+                        <m:ctrlPr>
+                          <a:rPr lang="en-US" i="1">
+                            <a:latin typeface="Cambria Math" panose="02040503050406030204" pitchFamily="18" charset="0"/>
+                          </a:rPr>
+                        </m:ctrlPr>
+                      </m:sSubPr>
+                      <m:e>
+                        <m:r>
+                          <a:rPr lang="en-US" i="1">
+                            <a:latin typeface="Cambria Math" panose="02040503050406030204" pitchFamily="18" charset="0"/>
+                          </a:rPr>
+                          <m:t>𝑈</m:t>
+                        </m:r>
+                      </m:e>
+                      <m:sub>
+                        <m:r>
+                          <a:rPr lang="en-US" i="1">
+                            <a:latin typeface="Cambria Math" panose="02040503050406030204" pitchFamily="18" charset="0"/>
+                          </a:rPr>
+                          <m:t>𝑡</m:t>
+                        </m:r>
+                      </m:sub>
+                    </m:sSub>
+                    <m:r>
+                      <a:rPr lang="en-US" i="1">
+                        <a:latin typeface="Cambria Math" panose="02040503050406030204" pitchFamily="18" charset="0"/>
+                      </a:rPr>
+                      <m:t>=</m:t>
+                    </m:r>
+                    <m:sSub>
+                      <m:sSubPr>
+                        <m:ctrlPr>
+                          <a:rPr lang="en-US" b="0" i="1" smtClean="0">
+                            <a:latin typeface="Cambria Math" panose="02040503050406030204" pitchFamily="18" charset="0"/>
+                          </a:rPr>
+                        </m:ctrlPr>
+                      </m:sSubPr>
+                      <m:e>
+                        <m:r>
+                          <a:rPr lang="en-US" b="0" i="1" smtClean="0">
+                            <a:latin typeface="Cambria Math" panose="02040503050406030204" pitchFamily="18" charset="0"/>
+                          </a:rPr>
+                          <m:t>𝑅</m:t>
+                        </m:r>
+                      </m:e>
+                      <m:sub>
+                        <m:r>
+                          <a:rPr lang="en-US" b="0" i="1" smtClean="0">
+                            <a:latin typeface="Cambria Math" panose="02040503050406030204" pitchFamily="18" charset="0"/>
+                          </a:rPr>
+                          <m:t>𝑡</m:t>
+                        </m:r>
+                        <m:r>
+                          <a:rPr lang="en-US" b="0" i="1" smtClean="0">
+                            <a:latin typeface="Cambria Math" panose="02040503050406030204" pitchFamily="18" charset="0"/>
+                          </a:rPr>
+                          <m:t>+1</m:t>
+                        </m:r>
+                      </m:sub>
+                    </m:sSub>
+                    <m:r>
+                      <a:rPr lang="en-US" b="0" i="1" smtClean="0">
+                        <a:latin typeface="Cambria Math" panose="02040503050406030204" pitchFamily="18" charset="0"/>
+                      </a:rPr>
+                      <m:t>+</m:t>
+                    </m:r>
+                    <m:r>
+                      <a:rPr lang="en-US" b="0" i="1" smtClean="0">
+                        <a:latin typeface="Cambria Math" panose="02040503050406030204" pitchFamily="18" charset="0"/>
+                      </a:rPr>
+                      <m:t>𝛾</m:t>
+                    </m:r>
+                    <m:acc>
+                      <m:accPr>
+                        <m:chr m:val="̂"/>
+                        <m:ctrlPr>
+                          <a:rPr lang="en-US" b="0" i="1" smtClean="0">
+                            <a:latin typeface="Cambria Math" panose="02040503050406030204" pitchFamily="18" charset="0"/>
+                          </a:rPr>
+                        </m:ctrlPr>
+                      </m:accPr>
+                      <m:e>
+                        <m:r>
+                          <a:rPr lang="en-US" b="0" i="1" smtClean="0">
+                            <a:latin typeface="Cambria Math" panose="02040503050406030204" pitchFamily="18" charset="0"/>
+                          </a:rPr>
+                          <m:t>𝑞</m:t>
+                        </m:r>
+                      </m:e>
+                    </m:acc>
+                    <m:r>
+                      <a:rPr lang="en-US" b="0" i="1" smtClean="0">
+                        <a:latin typeface="Cambria Math" panose="02040503050406030204" pitchFamily="18" charset="0"/>
+                      </a:rPr>
+                      <m:t>(</m:t>
+                    </m:r>
+                    <m:sSub>
+                      <m:sSubPr>
+                        <m:ctrlPr>
+                          <a:rPr lang="en-US" b="0" i="1" smtClean="0">
+                            <a:latin typeface="Cambria Math" panose="02040503050406030204" pitchFamily="18" charset="0"/>
+                          </a:rPr>
+                        </m:ctrlPr>
+                      </m:sSubPr>
+                      <m:e>
+                        <m:r>
+                          <a:rPr lang="en-US" b="0" i="1" smtClean="0">
+                            <a:latin typeface="Cambria Math" panose="02040503050406030204" pitchFamily="18" charset="0"/>
+                          </a:rPr>
+                          <m:t>𝑆</m:t>
+                        </m:r>
+                      </m:e>
+                      <m:sub>
+                        <m:r>
+                          <a:rPr lang="en-US" b="0" i="1" smtClean="0">
+                            <a:latin typeface="Cambria Math" panose="02040503050406030204" pitchFamily="18" charset="0"/>
+                          </a:rPr>
+                          <m:t>𝑡</m:t>
+                        </m:r>
+                      </m:sub>
+                    </m:sSub>
+                    <m:r>
+                      <a:rPr lang="en-US" b="0" i="1" smtClean="0">
+                        <a:latin typeface="Cambria Math" panose="02040503050406030204" pitchFamily="18" charset="0"/>
+                      </a:rPr>
+                      <m:t>, </m:t>
+                    </m:r>
+                    <m:sSub>
+                      <m:sSubPr>
+                        <m:ctrlPr>
+                          <a:rPr lang="en-US" b="0" i="1" smtClean="0">
+                            <a:latin typeface="Cambria Math" panose="02040503050406030204" pitchFamily="18" charset="0"/>
+                          </a:rPr>
+                        </m:ctrlPr>
+                      </m:sSubPr>
+                      <m:e>
+                        <m:r>
+                          <a:rPr lang="en-US" b="0" i="1" smtClean="0">
+                            <a:latin typeface="Cambria Math" panose="02040503050406030204" pitchFamily="18" charset="0"/>
+                          </a:rPr>
+                          <m:t>𝐴</m:t>
+                        </m:r>
+                      </m:e>
+                      <m:sub>
+                        <m:r>
+                          <a:rPr lang="en-US" b="0" i="1" smtClean="0">
+                            <a:latin typeface="Cambria Math" panose="02040503050406030204" pitchFamily="18" charset="0"/>
+                          </a:rPr>
+                          <m:t>𝑡</m:t>
+                        </m:r>
+                      </m:sub>
+                    </m:sSub>
+                    <m:r>
+                      <a:rPr lang="en-US" b="0" i="1" smtClean="0">
+                        <a:latin typeface="Cambria Math" panose="02040503050406030204" pitchFamily="18" charset="0"/>
+                      </a:rPr>
+                      <m:t>,</m:t>
+                    </m:r>
+                    <m:sSub>
+                      <m:sSubPr>
+                        <m:ctrlPr>
+                          <a:rPr lang="en-US" b="0" i="1" smtClean="0">
+                            <a:latin typeface="Cambria Math" panose="02040503050406030204" pitchFamily="18" charset="0"/>
+                          </a:rPr>
+                        </m:ctrlPr>
+                      </m:sSubPr>
+                      <m:e>
+                        <m:r>
+                          <a:rPr lang="en-US" b="1" i="1" smtClean="0">
+                            <a:latin typeface="Cambria Math" panose="02040503050406030204" pitchFamily="18" charset="0"/>
+                          </a:rPr>
+                          <m:t>𝒘</m:t>
+                        </m:r>
+                      </m:e>
+                      <m:sub>
+                        <m:r>
+                          <a:rPr lang="en-US" b="0" i="1" smtClean="0">
+                            <a:latin typeface="Cambria Math" panose="02040503050406030204" pitchFamily="18" charset="0"/>
+                          </a:rPr>
+                          <m:t>𝑡</m:t>
+                        </m:r>
+                      </m:sub>
+                    </m:sSub>
+                    <m:r>
+                      <a:rPr lang="en-US" b="0" i="1" smtClean="0">
+                        <a:latin typeface="Cambria Math" panose="02040503050406030204" pitchFamily="18" charset="0"/>
+                      </a:rPr>
+                      <m:t>)</m:t>
+                    </m:r>
+                  </m:oMath>
+                </a14:m>
+                <a:endParaRPr lang="en-US" dirty="0"/>
+              </a:p>
+              <a:p>
+                <a:endParaRPr lang="en-US" dirty="0"/>
+              </a:p>
+              <a:p>
+                <a:r>
+                  <a:rPr lang="en-US" b="1" dirty="0"/>
+                  <a:t>Policy improvement</a:t>
+                </a:r>
+                <a:r>
+                  <a:rPr lang="en-US" dirty="0"/>
+                  <a:t>: update policy with greedy action </a:t>
+                </a:r>
+                <a:br>
+                  <a:rPr lang="en-US" b="0" i="1" dirty="0">
+                    <a:latin typeface="Cambria Math" panose="02040503050406030204" pitchFamily="18" charset="0"/>
+                  </a:rPr>
+                </a:br>
+                <a:br>
+                  <a:rPr lang="en-US" b="0" i="1" dirty="0">
+                    <a:latin typeface="Cambria Math" panose="02040503050406030204" pitchFamily="18" charset="0"/>
+                  </a:rPr>
+                </a:br>
+                <a14:m>
+                  <m:oMath xmlns:m="http://schemas.openxmlformats.org/officeDocument/2006/math">
+                    <m:sSubSup>
+                      <m:sSubSupPr>
+                        <m:ctrlPr>
+                          <a:rPr lang="en-US" b="0" i="1" smtClean="0">
+                            <a:latin typeface="Cambria Math" panose="02040503050406030204" pitchFamily="18" charset="0"/>
+                          </a:rPr>
+                        </m:ctrlPr>
+                      </m:sSubSupPr>
+                      <m:e>
+                        <m:r>
+                          <a:rPr lang="en-US" b="0" i="1" smtClean="0">
+                            <a:latin typeface="Cambria Math" panose="02040503050406030204" pitchFamily="18" charset="0"/>
+                          </a:rPr>
+                          <m:t>𝐴</m:t>
+                        </m:r>
+                      </m:e>
+                      <m:sub>
+                        <m:r>
+                          <a:rPr lang="en-US" b="0" i="1" smtClean="0">
+                            <a:latin typeface="Cambria Math" panose="02040503050406030204" pitchFamily="18" charset="0"/>
+                          </a:rPr>
+                          <m:t>𝑡</m:t>
+                        </m:r>
+                        <m:r>
+                          <a:rPr lang="en-US" b="0" i="1" smtClean="0">
+                            <a:latin typeface="Cambria Math" panose="02040503050406030204" pitchFamily="18" charset="0"/>
+                          </a:rPr>
+                          <m:t>+1</m:t>
+                        </m:r>
+                      </m:sub>
+                      <m:sup>
+                        <m:r>
+                          <a:rPr lang="en-US" b="0" i="1" smtClean="0">
+                            <a:latin typeface="Cambria Math" panose="02040503050406030204" pitchFamily="18" charset="0"/>
+                          </a:rPr>
+                          <m:t>∗</m:t>
+                        </m:r>
+                      </m:sup>
+                    </m:sSubSup>
+                    <m:r>
+                      <a:rPr lang="en-US" b="0" i="1" smtClean="0">
+                        <a:latin typeface="Cambria Math" panose="02040503050406030204" pitchFamily="18" charset="0"/>
+                      </a:rPr>
+                      <m:t>=</m:t>
+                    </m:r>
+                    <m:func>
+                      <m:funcPr>
+                        <m:ctrlPr>
+                          <a:rPr lang="en-US" b="0" i="1" smtClean="0">
+                            <a:latin typeface="Cambria Math" panose="02040503050406030204" pitchFamily="18" charset="0"/>
+                          </a:rPr>
+                        </m:ctrlPr>
+                      </m:funcPr>
+                      <m:fName>
+                        <m:limLow>
+                          <m:limLowPr>
+                            <m:ctrlPr>
+                              <a:rPr lang="en-US" b="0" i="1" smtClean="0">
+                                <a:latin typeface="Cambria Math" panose="02040503050406030204" pitchFamily="18" charset="0"/>
+                              </a:rPr>
+                            </m:ctrlPr>
+                          </m:limLowPr>
+                          <m:e>
+                            <m:r>
+                              <m:rPr>
+                                <m:sty m:val="p"/>
+                              </m:rPr>
+                              <a:rPr lang="en-US" b="0" i="0" smtClean="0">
+                                <a:latin typeface="Cambria Math" panose="02040503050406030204" pitchFamily="18" charset="0"/>
+                              </a:rPr>
+                              <m:t>argmax</m:t>
+                            </m:r>
+                          </m:e>
+                          <m:lim>
+                            <m:r>
+                              <a:rPr lang="en-US" b="0" i="1" smtClean="0">
+                                <a:latin typeface="Cambria Math" panose="02040503050406030204" pitchFamily="18" charset="0"/>
+                              </a:rPr>
+                              <m:t>𝑎</m:t>
+                            </m:r>
+                          </m:lim>
+                        </m:limLow>
+                      </m:fName>
+                      <m:e>
+                        <m:acc>
+                          <m:accPr>
+                            <m:chr m:val="̂"/>
+                            <m:ctrlPr>
+                              <a:rPr lang="en-US" b="0" i="1" smtClean="0">
+                                <a:latin typeface="Cambria Math" panose="02040503050406030204" pitchFamily="18" charset="0"/>
+                              </a:rPr>
+                            </m:ctrlPr>
+                          </m:accPr>
+                          <m:e>
+                            <m:r>
+                              <a:rPr lang="en-US" b="0" i="1" smtClean="0">
+                                <a:latin typeface="Cambria Math" panose="02040503050406030204" pitchFamily="18" charset="0"/>
+                              </a:rPr>
+                              <m:t>𝑞</m:t>
+                            </m:r>
+                          </m:e>
+                        </m:acc>
+                        <m:r>
+                          <a:rPr lang="en-US" b="0" i="1" dirty="0" smtClean="0">
+                            <a:latin typeface="Cambria Math" panose="02040503050406030204" pitchFamily="18" charset="0"/>
+                          </a:rPr>
+                          <m:t>(</m:t>
+                        </m:r>
+                        <m:sSub>
+                          <m:sSubPr>
+                            <m:ctrlPr>
+                              <a:rPr lang="en-US" b="0" i="1" dirty="0" smtClean="0">
+                                <a:latin typeface="Cambria Math" panose="02040503050406030204" pitchFamily="18" charset="0"/>
+                              </a:rPr>
+                            </m:ctrlPr>
+                          </m:sSubPr>
+                          <m:e>
+                            <m:r>
+                              <a:rPr lang="en-US" b="0" i="1" dirty="0" smtClean="0">
+                                <a:latin typeface="Cambria Math" panose="02040503050406030204" pitchFamily="18" charset="0"/>
+                              </a:rPr>
+                              <m:t>𝑆</m:t>
+                            </m:r>
+                          </m:e>
+                          <m:sub>
+                            <m:r>
+                              <a:rPr lang="en-US" b="0" i="1" dirty="0" smtClean="0">
+                                <a:latin typeface="Cambria Math" panose="02040503050406030204" pitchFamily="18" charset="0"/>
+                              </a:rPr>
+                              <m:t>𝑡</m:t>
+                            </m:r>
+                            <m:r>
+                              <a:rPr lang="en-US" b="0" i="1" dirty="0" smtClean="0">
+                                <a:latin typeface="Cambria Math" panose="02040503050406030204" pitchFamily="18" charset="0"/>
+                              </a:rPr>
+                              <m:t>+1</m:t>
+                            </m:r>
+                          </m:sub>
+                        </m:sSub>
+                        <m:r>
+                          <a:rPr lang="en-US" b="0" i="1" dirty="0" smtClean="0">
+                            <a:latin typeface="Cambria Math" panose="02040503050406030204" pitchFamily="18" charset="0"/>
+                          </a:rPr>
+                          <m:t>,</m:t>
+                        </m:r>
+                        <m:r>
+                          <a:rPr lang="en-US" b="0" i="1" dirty="0" smtClean="0">
+                            <a:latin typeface="Cambria Math" panose="02040503050406030204" pitchFamily="18" charset="0"/>
+                          </a:rPr>
+                          <m:t>𝑎</m:t>
+                        </m:r>
+                        <m:r>
+                          <a:rPr lang="en-US" b="0" i="1" dirty="0" smtClean="0">
+                            <a:latin typeface="Cambria Math" panose="02040503050406030204" pitchFamily="18" charset="0"/>
+                          </a:rPr>
+                          <m:t>, </m:t>
+                        </m:r>
+                        <m:sSub>
+                          <m:sSubPr>
+                            <m:ctrlPr>
+                              <a:rPr lang="en-US" b="0" i="1" dirty="0" smtClean="0">
+                                <a:latin typeface="Cambria Math" panose="02040503050406030204" pitchFamily="18" charset="0"/>
+                              </a:rPr>
+                            </m:ctrlPr>
+                          </m:sSubPr>
+                          <m:e>
+                            <m:r>
+                              <a:rPr lang="en-US" b="1" i="1" dirty="0" smtClean="0">
+                                <a:latin typeface="Cambria Math" panose="02040503050406030204" pitchFamily="18" charset="0"/>
+                              </a:rPr>
+                              <m:t>𝒘</m:t>
+                            </m:r>
+                          </m:e>
+                          <m:sub>
+                            <m:r>
+                              <a:rPr lang="en-US" b="0" i="1" dirty="0" smtClean="0">
+                                <a:latin typeface="Cambria Math" panose="02040503050406030204" pitchFamily="18" charset="0"/>
+                              </a:rPr>
+                              <m:t>𝑡</m:t>
+                            </m:r>
+                          </m:sub>
+                        </m:sSub>
+                        <m:r>
+                          <a:rPr lang="en-US" b="0" i="1" dirty="0" smtClean="0">
+                            <a:latin typeface="Cambria Math" panose="02040503050406030204" pitchFamily="18" charset="0"/>
+                          </a:rPr>
+                          <m:t>)</m:t>
+                        </m:r>
+                      </m:e>
+                    </m:func>
+                  </m:oMath>
+                </a14:m>
+                <a:endParaRPr lang="en-US" dirty="0"/>
+              </a:p>
+              <a:p>
+                <a:r>
+                  <a:rPr lang="en-US" dirty="0"/>
+                  <a:t>For on-policy control, use a soft approximation to the greedy policy (e.g., </a:t>
+                </a:r>
+                <a14:m>
+                  <m:oMath xmlns:m="http://schemas.openxmlformats.org/officeDocument/2006/math">
+                    <m:r>
+                      <a:rPr lang="en-US" b="0" i="1" smtClean="0">
+                        <a:latin typeface="Cambria Math" panose="02040503050406030204" pitchFamily="18" charset="0"/>
+                      </a:rPr>
+                      <m:t>𝜖</m:t>
+                    </m:r>
+                  </m:oMath>
+                </a14:m>
+                <a:r>
+                  <a:rPr lang="en-US" dirty="0"/>
+                  <a:t>-greedy).</a:t>
+                </a:r>
+              </a:p>
+            </p:txBody>
+          </p:sp>
+        </mc:Choice>
+        <mc:Fallback>
+          <p:sp>
+            <p:nvSpPr>
+              <p:cNvPr id="5" name="Content Placeholder 4">
+                <a:extLst>
+                  <a:ext uri="{FF2B5EF4-FFF2-40B4-BE49-F238E27FC236}">
+                    <a16:creationId xmlns:a16="http://schemas.microsoft.com/office/drawing/2014/main" id="{DF5B41B1-2FAA-67FF-A039-06F08FE693F6}"/>
+                  </a:ext>
+                </a:extLst>
+              </p:cNvPr>
+              <p:cNvSpPr>
+                <a:spLocks noGrp="1" noRot="1" noChangeAspect="1" noMove="1" noResize="1" noEditPoints="1" noAdjustHandles="1" noChangeArrowheads="1" noChangeShapeType="1" noTextEdit="1"/>
+              </p:cNvSpPr>
+              <p:nvPr>
+                <p:ph idx="1"/>
+              </p:nvPr>
+            </p:nvSpPr>
+            <p:spPr>
+              <a:blipFill>
+                <a:blip r:embed="rId2"/>
+                <a:stretch>
+                  <a:fillRect l="-696" t="-2551"/>
+                </a:stretch>
+              </a:blipFill>
+            </p:spPr>
+            <p:txBody>
+              <a:bodyPr/>
+              <a:lstStyle/>
+              <a:p>
+                <a:r>
+                  <a:rPr lang="en-US">
+                    <a:noFill/>
+                  </a:rPr>
+                  <a:t> </a:t>
+                </a:r>
+              </a:p>
+            </p:txBody>
+          </p:sp>
+        </mc:Fallback>
+      </mc:AlternateContent>
+    </p:spTree>
+    <p:extLst>
+      <p:ext uri="{BB962C8B-B14F-4D97-AF65-F5344CB8AC3E}">
+        <p14:creationId xmlns:p14="http://schemas.microsoft.com/office/powerpoint/2010/main" val="2868951675"/>
+      </p:ext>
+    </p:extLst>
+  </p:cSld>
+  <p:clrMapOvr>
+    <a:masterClrMapping/>
+  </p:clrMapOvr>
+  <p:timing>
+    <p:tnLst>
+      <p:par>
+        <p:cTn id="1" dur="indefinite" restart="never" nodeType="tmRoot">
+          <p:childTnLst>
+            <p:seq concurrent="1" nextAc="seek">
+              <p:cTn id="2" dur="indefinite" nodeType="mainSeq">
+                <p:childTnLst>
+                  <p:par>
+                    <p:cTn id="3" fill="hold">
+                      <p:stCondLst>
+                        <p:cond delay="indefinite"/>
+                      </p:stCondLst>
+                      <p:childTnLst>
+                        <p:par>
+                          <p:cTn id="4" fill="hold">
+                            <p:stCondLst>
+                              <p:cond delay="0"/>
+                            </p:stCondLst>
+                            <p:childTnLst>
+                              <p:par>
+                                <p:cTn id="5" presetID="1" presetClass="entr" presetSubtype="0" fill="hold" grpId="0" nodeType="clickEffect">
+                                  <p:stCondLst>
+                                    <p:cond delay="0"/>
+                                  </p:stCondLst>
+                                  <p:childTnLst>
+                                    <p:set>
+                                      <p:cBhvr>
+                                        <p:cTn id="6" dur="1" fill="hold">
+                                          <p:stCondLst>
+                                            <p:cond delay="0"/>
+                                          </p:stCondLst>
+                                        </p:cTn>
+                                        <p:tgtEl>
+                                          <p:spTgt spid="5">
+                                            <p:txEl>
+                                              <p:pRg st="0" end="0"/>
+                                            </p:txEl>
+                                          </p:spTgt>
+                                        </p:tgtEl>
+                                        <p:attrNameLst>
+                                          <p:attrName>style.visibility</p:attrName>
+                                        </p:attrNameLst>
+                                      </p:cBhvr>
+                                      <p:to>
+                                        <p:strVal val="visible"/>
+                                      </p:to>
+                                    </p:set>
+                                  </p:childTnLst>
+                                </p:cTn>
+                              </p:par>
+                            </p:childTnLst>
+                          </p:cTn>
+                        </p:par>
+                      </p:childTnLst>
+                    </p:cTn>
+                  </p:par>
+                  <p:par>
+                    <p:cTn id="7" fill="hold">
+                      <p:stCondLst>
+                        <p:cond delay="indefinite"/>
+                      </p:stCondLst>
+                      <p:childTnLst>
+                        <p:par>
+                          <p:cTn id="8" fill="hold">
+                            <p:stCondLst>
+                              <p:cond delay="0"/>
+                            </p:stCondLst>
+                            <p:childTnLst>
+                              <p:par>
+                                <p:cTn id="9" presetID="1" presetClass="entr" presetSubtype="0" fill="hold" grpId="0" nodeType="clickEffect">
+                                  <p:stCondLst>
+                                    <p:cond delay="0"/>
+                                  </p:stCondLst>
+                                  <p:childTnLst>
+                                    <p:set>
+                                      <p:cBhvr>
+                                        <p:cTn id="10" dur="1" fill="hold">
+                                          <p:stCondLst>
+                                            <p:cond delay="0"/>
+                                          </p:stCondLst>
+                                        </p:cTn>
+                                        <p:tgtEl>
+                                          <p:spTgt spid="5">
+                                            <p:txEl>
+                                              <p:pRg st="2" end="2"/>
+                                            </p:txEl>
+                                          </p:spTgt>
+                                        </p:tgtEl>
+                                        <p:attrNameLst>
+                                          <p:attrName>style.visibility</p:attrName>
+                                        </p:attrNameLst>
+                                      </p:cBhvr>
+                                      <p:to>
+                                        <p:strVal val="visible"/>
+                                      </p:to>
+                                    </p:set>
+                                  </p:childTnLst>
+                                </p:cTn>
+                              </p:par>
+                            </p:childTnLst>
+                          </p:cTn>
+                        </p:par>
+                      </p:childTnLst>
+                    </p:cTn>
+                  </p:par>
+                  <p:par>
+                    <p:cTn id="11" fill="hold">
+                      <p:stCondLst>
+                        <p:cond delay="indefinite"/>
+                      </p:stCondLst>
+                      <p:childTnLst>
+                        <p:par>
+                          <p:cTn id="12" fill="hold">
+                            <p:stCondLst>
+                              <p:cond delay="0"/>
+                            </p:stCondLst>
+                            <p:childTnLst>
+                              <p:par>
+                                <p:cTn id="13" presetID="1" presetClass="entr" presetSubtype="0" fill="hold" grpId="0" nodeType="clickEffect">
+                                  <p:stCondLst>
+                                    <p:cond delay="0"/>
+                                  </p:stCondLst>
+                                  <p:childTnLst>
+                                    <p:set>
+                                      <p:cBhvr>
+                                        <p:cTn id="14" dur="1" fill="hold">
+                                          <p:stCondLst>
+                                            <p:cond delay="0"/>
+                                          </p:stCondLst>
+                                        </p:cTn>
+                                        <p:tgtEl>
+                                          <p:spTgt spid="5">
+                                            <p:txEl>
+                                              <p:pRg st="3" end="3"/>
+                                            </p:txEl>
+                                          </p:spTgt>
+                                        </p:tgtEl>
+                                        <p:attrNameLst>
+                                          <p:attrName>style.visibility</p:attrName>
+                                        </p:attrNameLst>
+                                      </p:cBhvr>
+                                      <p:to>
+                                        <p:strVal val="visible"/>
+                                      </p:to>
+                                    </p:set>
+                                  </p:childTnLst>
+                                </p:cTn>
+                              </p:par>
+                              <p:par>
+                                <p:cTn id="15" presetID="1" presetClass="entr" presetSubtype="0" fill="hold" grpId="0" nodeType="withEffect">
+                                  <p:stCondLst>
+                                    <p:cond delay="0"/>
+                                  </p:stCondLst>
+                                  <p:childTnLst>
+                                    <p:set>
+                                      <p:cBhvr>
+                                        <p:cTn id="16" dur="1" fill="hold">
+                                          <p:stCondLst>
+                                            <p:cond delay="0"/>
+                                          </p:stCondLst>
+                                        </p:cTn>
+                                        <p:tgtEl>
+                                          <p:spTgt spid="5">
+                                            <p:txEl>
+                                              <p:pRg st="4" end="4"/>
+                                            </p:txEl>
+                                          </p:spTgt>
+                                        </p:tgtEl>
+                                        <p:attrNameLst>
+                                          <p:attrName>style.visibility</p:attrName>
+                                        </p:attrNameLst>
+                                      </p:cBhvr>
+                                      <p:to>
+                                        <p:strVal val="visible"/>
+                                      </p:to>
+                                    </p:set>
+                                  </p:childTnLst>
+                                </p:cTn>
+                              </p:par>
+                              <p:par>
+                                <p:cTn id="17" presetID="1" presetClass="entr" presetSubtype="0" fill="hold" grpId="0" nodeType="withEffect">
+                                  <p:stCondLst>
+                                    <p:cond delay="0"/>
+                                  </p:stCondLst>
+                                  <p:childTnLst>
+                                    <p:set>
+                                      <p:cBhvr>
+                                        <p:cTn id="18" dur="1" fill="hold">
+                                          <p:stCondLst>
+                                            <p:cond delay="0"/>
+                                          </p:stCondLst>
+                                        </p:cTn>
+                                        <p:tgtEl>
+                                          <p:spTgt spid="5">
+                                            <p:txEl>
+                                              <p:pRg st="5" end="5"/>
+                                            </p:txEl>
+                                          </p:spTgt>
+                                        </p:tgtEl>
+                                        <p:attrNameLst>
+                                          <p:attrName>style.visibility</p:attrName>
+                                        </p:attrNameLst>
+                                      </p:cBhvr>
+                                      <p:to>
+                                        <p:strVal val="visible"/>
+                                      </p:to>
+                                    </p:set>
+                                  </p:childTnLst>
+                                </p:cTn>
+                              </p:par>
+                              <p:par>
+                                <p:cTn id="19" presetID="1" presetClass="entr" presetSubtype="0" fill="hold" grpId="0" nodeType="withEffect">
+                                  <p:stCondLst>
+                                    <p:cond delay="0"/>
+                                  </p:stCondLst>
+                                  <p:childTnLst>
+                                    <p:set>
+                                      <p:cBhvr>
+                                        <p:cTn id="20" dur="1" fill="hold">
+                                          <p:stCondLst>
+                                            <p:cond delay="0"/>
+                                          </p:stCondLst>
+                                        </p:cTn>
+                                        <p:tgtEl>
+                                          <p:spTgt spid="5">
+                                            <p:txEl>
+                                              <p:pRg st="6" end="6"/>
+                                            </p:txEl>
+                                          </p:spTgt>
+                                        </p:tgtEl>
+                                        <p:attrNameLst>
+                                          <p:attrName>style.visibility</p:attrName>
+                                        </p:attrNameLst>
+                                      </p:cBhvr>
+                                      <p:to>
+                                        <p:strVal val="visible"/>
+                                      </p:to>
+                                    </p:set>
+                                  </p:childTnLst>
+                                </p:cTn>
+                              </p:par>
+                            </p:childTnLst>
+                          </p:cTn>
+                        </p:par>
+                      </p:childTnLst>
+                    </p:cTn>
+                  </p:par>
+                  <p:par>
+                    <p:cTn id="21" fill="hold">
+                      <p:stCondLst>
+                        <p:cond delay="indefinite"/>
+                      </p:stCondLst>
+                      <p:childTnLst>
+                        <p:par>
+                          <p:cTn id="22" fill="hold">
+                            <p:stCondLst>
+                              <p:cond delay="0"/>
+                            </p:stCondLst>
+                            <p:childTnLst>
+                              <p:par>
+                                <p:cTn id="23" presetID="1" presetClass="entr" presetSubtype="0" fill="hold" grpId="0" nodeType="clickEffect">
+                                  <p:stCondLst>
+                                    <p:cond delay="0"/>
+                                  </p:stCondLst>
+                                  <p:childTnLst>
+                                    <p:set>
+                                      <p:cBhvr>
+                                        <p:cTn id="24" dur="1" fill="hold">
+                                          <p:stCondLst>
+                                            <p:cond delay="0"/>
+                                          </p:stCondLst>
+                                        </p:cTn>
+                                        <p:tgtEl>
+                                          <p:spTgt spid="5">
+                                            <p:txEl>
+                                              <p:pRg st="8" end="8"/>
+                                            </p:txEl>
+                                          </p:spTgt>
+                                        </p:tgtEl>
+                                        <p:attrNameLst>
+                                          <p:attrName>style.visibility</p:attrName>
+                                        </p:attrNameLst>
+                                      </p:cBhvr>
+                                      <p:to>
+                                        <p:strVal val="visible"/>
+                                      </p:to>
+                                    </p:set>
+                                  </p:childTnLst>
+                                </p:cTn>
+                              </p:par>
+                              <p:par>
+                                <p:cTn id="25" presetID="1" presetClass="entr" presetSubtype="0" fill="hold" grpId="0" nodeType="withEffect">
+                                  <p:stCondLst>
+                                    <p:cond delay="0"/>
+                                  </p:stCondLst>
+                                  <p:childTnLst>
+                                    <p:set>
+                                      <p:cBhvr>
+                                        <p:cTn id="26" dur="1" fill="hold">
+                                          <p:stCondLst>
+                                            <p:cond delay="0"/>
+                                          </p:stCondLst>
+                                        </p:cTn>
+                                        <p:tgtEl>
+                                          <p:spTgt spid="5">
+                                            <p:txEl>
+                                              <p:pRg st="9" end="9"/>
+                                            </p:txEl>
+                                          </p:spTgt>
+                                        </p:tgtEl>
+                                        <p:attrNameLst>
+                                          <p:attrName>style.visibility</p:attrName>
+                                        </p:attrNameLst>
+                                      </p:cBhvr>
+                                      <p:to>
+                                        <p:strVal val="visible"/>
+                                      </p:to>
+                                    </p:set>
+                                  </p:childTnLst>
+                                </p:cTn>
+                              </p:par>
+                            </p:childTnLst>
+                          </p:cTn>
+                        </p:par>
+                      </p:childTnLst>
+                    </p:cTn>
+                  </p:par>
+                </p:childTnLst>
+              </p:cTn>
+              <p:prevCondLst>
+                <p:cond evt="onPrev" delay="0">
+                  <p:tgtEl>
+                    <p:sldTgt/>
+                  </p:tgtEl>
+                </p:cond>
+              </p:prevCondLst>
+              <p:nextCondLst>
+                <p:cond evt="onNext" delay="0">
+                  <p:tgtEl>
+                    <p:sldTgt/>
+                  </p:tgtEl>
+                </p:cond>
+              </p:nextCondLst>
+            </p:seq>
+          </p:childTnLst>
+        </p:cTn>
+      </p:par>
+    </p:tnLst>
+    <p:bldLst>
+      <p:bldP spid="5" grpId="0" uiExpand="1" build="p"/>
+    </p:bldLst>
+  </p:timing>
+</p:sld>
+</file>
+
+<file path=ppt/slides/slide31.xml><?xml version="1.0" encoding="utf-8"?>
+<p:sld xmlns:a="http://schemas.openxmlformats.org/drawingml/2006/main" xmlns:r="http://schemas.openxmlformats.org/officeDocument/2006/relationships" xmlns:p="http://schemas.openxmlformats.org/presentationml/2006/main">
+  <p:cSld>
+    <p:spTree>
+      <p:nvGrpSpPr>
+        <p:cNvPr id="1" name=""/>
+        <p:cNvGrpSpPr/>
+        <p:nvPr/>
+      </p:nvGrpSpPr>
+      <p:grpSpPr>
+        <a:xfrm>
+          <a:off x="0" y="0"/>
+          <a:ext cx="0" cy="0"/>
+          <a:chOff x="0" y="0"/>
+          <a:chExt cx="0" cy="0"/>
+        </a:xfrm>
+      </p:grpSpPr>
+      <p:sp>
+        <p:nvSpPr>
+          <p:cNvPr id="4" name="Title 3">
+            <a:extLst>
+              <a:ext uri="{FF2B5EF4-FFF2-40B4-BE49-F238E27FC236}">
                 <a16:creationId xmlns:a16="http://schemas.microsoft.com/office/drawing/2014/main" id="{137BBAE3-1454-E6F7-DE64-4F54666FFD0D}"/>
               </a:ext>
             </a:extLst>
@@ -31205,10 +32015,10 @@
       </p:sp>
       <p:pic>
         <p:nvPicPr>
-          <p:cNvPr id="7" name="Picture 6">
+          <p:cNvPr id="2" name="Picture 1">
             <a:extLst>
               <a:ext uri="{FF2B5EF4-FFF2-40B4-BE49-F238E27FC236}">
-                <a16:creationId xmlns:a16="http://schemas.microsoft.com/office/drawing/2014/main" id="{1DA48653-5D6C-7EF0-B7C4-A8F581FE1A54}"/>
+                <a16:creationId xmlns:a16="http://schemas.microsoft.com/office/drawing/2014/main" id="{3193575F-E8F9-5F2D-1974-DE55A1327E88}"/>
               </a:ext>
             </a:extLst>
           </p:cNvPr>
@@ -31225,14 +32035,165 @@
         </p:blipFill>
         <p:spPr>
           <a:xfrm>
-            <a:off x="1027813" y="1453707"/>
-            <a:ext cx="8832112" cy="4719942"/>
+            <a:off x="92279" y="1065548"/>
+            <a:ext cx="7943487" cy="3808603"/>
           </a:xfrm>
           <a:prstGeom prst="rect">
             <a:avLst/>
           </a:prstGeom>
         </p:spPr>
       </p:pic>
+      <p:pic>
+        <p:nvPicPr>
+          <p:cNvPr id="7" name="Picture 6">
+            <a:extLst>
+              <a:ext uri="{FF2B5EF4-FFF2-40B4-BE49-F238E27FC236}">
+                <a16:creationId xmlns:a16="http://schemas.microsoft.com/office/drawing/2014/main" id="{1DA48653-5D6C-7EF0-B7C4-A8F581FE1A54}"/>
+              </a:ext>
+            </a:extLst>
+          </p:cNvPr>
+          <p:cNvPicPr>
+            <a:picLocks noChangeAspect="1"/>
+          </p:cNvPicPr>
+          <p:nvPr/>
+        </p:nvPicPr>
+        <p:blipFill>
+          <a:blip r:embed="rId3"/>
+          <a:srcRect l="2041" t="1717"/>
+          <a:stretch>
+            <a:fillRect/>
+          </a:stretch>
+        </p:blipFill>
+        <p:spPr>
+          <a:xfrm>
+            <a:off x="3447875" y="2093257"/>
+            <a:ext cx="8651846" cy="4638907"/>
+          </a:xfrm>
+          <a:prstGeom prst="rect">
+            <a:avLst/>
+          </a:prstGeom>
+        </p:spPr>
+      </p:pic>
+      <p:cxnSp>
+        <p:nvCxnSpPr>
+          <p:cNvPr id="5" name="Straight Connector 4">
+            <a:extLst>
+              <a:ext uri="{FF2B5EF4-FFF2-40B4-BE49-F238E27FC236}">
+                <a16:creationId xmlns:a16="http://schemas.microsoft.com/office/drawing/2014/main" id="{19ABAE24-325C-3516-E8B7-56FE6C1F323D}"/>
+              </a:ext>
+            </a:extLst>
+          </p:cNvPr>
+          <p:cNvCxnSpPr/>
+          <p:nvPr/>
+        </p:nvCxnSpPr>
+        <p:spPr>
+          <a:xfrm>
+            <a:off x="2565243" y="4189682"/>
+            <a:ext cx="679508" cy="0"/>
+          </a:xfrm>
+          <a:prstGeom prst="line">
+            <a:avLst/>
+          </a:prstGeom>
+        </p:spPr>
+        <p:style>
+          <a:lnRef idx="2">
+            <a:schemeClr val="accent2"/>
+          </a:lnRef>
+          <a:fillRef idx="0">
+            <a:schemeClr val="accent2"/>
+          </a:fillRef>
+          <a:effectRef idx="1">
+            <a:schemeClr val="accent2"/>
+          </a:effectRef>
+          <a:fontRef idx="minor">
+            <a:schemeClr val="tx1"/>
+          </a:fontRef>
+        </p:style>
+      </p:cxnSp>
+      <p:cxnSp>
+        <p:nvCxnSpPr>
+          <p:cNvPr id="6" name="Straight Connector 5">
+            <a:extLst>
+              <a:ext uri="{FF2B5EF4-FFF2-40B4-BE49-F238E27FC236}">
+                <a16:creationId xmlns:a16="http://schemas.microsoft.com/office/drawing/2014/main" id="{9246A066-BD10-513C-EF26-FA8D503A0BAB}"/>
+              </a:ext>
+            </a:extLst>
+          </p:cNvPr>
+          <p:cNvCxnSpPr>
+            <a:cxnSpLocks/>
+          </p:cNvCxnSpPr>
+          <p:nvPr/>
+        </p:nvCxnSpPr>
+        <p:spPr>
+          <a:xfrm>
+            <a:off x="6088505" y="5943531"/>
+            <a:ext cx="1136754" cy="0"/>
+          </a:xfrm>
+          <a:prstGeom prst="line">
+            <a:avLst/>
+          </a:prstGeom>
+        </p:spPr>
+        <p:style>
+          <a:lnRef idx="2">
+            <a:schemeClr val="accent2"/>
+          </a:lnRef>
+          <a:fillRef idx="0">
+            <a:schemeClr val="accent2"/>
+          </a:fillRef>
+          <a:effectRef idx="1">
+            <a:schemeClr val="accent2"/>
+          </a:effectRef>
+          <a:fontRef idx="minor">
+            <a:schemeClr val="tx1"/>
+          </a:fontRef>
+        </p:style>
+      </p:cxnSp>
+      <p:sp>
+        <p:nvSpPr>
+          <p:cNvPr id="9" name="Arrow: Right 8">
+            <a:extLst>
+              <a:ext uri="{FF2B5EF4-FFF2-40B4-BE49-F238E27FC236}">
+                <a16:creationId xmlns:a16="http://schemas.microsoft.com/office/drawing/2014/main" id="{56C5154D-4D1E-F9B2-DAE2-2A9F1475F6A5}"/>
+              </a:ext>
+            </a:extLst>
+          </p:cNvPr>
+          <p:cNvSpPr/>
+          <p:nvPr/>
+        </p:nvSpPr>
+        <p:spPr>
+          <a:xfrm>
+            <a:off x="2975548" y="3260361"/>
+            <a:ext cx="614596" cy="569626"/>
+          </a:xfrm>
+          <a:prstGeom prst="rightArrow">
+            <a:avLst/>
+          </a:prstGeom>
+        </p:spPr>
+        <p:style>
+          <a:lnRef idx="2">
+            <a:schemeClr val="accent1">
+              <a:shade val="15000"/>
+            </a:schemeClr>
+          </a:lnRef>
+          <a:fillRef idx="1">
+            <a:schemeClr val="accent1"/>
+          </a:fillRef>
+          <a:effectRef idx="0">
+            <a:schemeClr val="accent1"/>
+          </a:effectRef>
+          <a:fontRef idx="minor">
+            <a:schemeClr val="lt1"/>
+          </a:fontRef>
+        </p:style>
+        <p:txBody>
+          <a:bodyPr rtlCol="0" anchor="ctr"/>
+          <a:lstStyle/>
+          <a:p>
+            <a:pPr algn="ctr"/>
+            <a:endParaRPr lang="en-US"/>
+          </a:p>
+        </p:txBody>
+      </p:sp>
     </p:spTree>
     <p:extLst>
       <p:ext uri="{BB962C8B-B14F-4D97-AF65-F5344CB8AC3E}">
@@ -31246,7 +32207,7 @@
 </p:sld>
 </file>
 
-<file path=ppt/slides/slide31.xml><?xml version="1.0" encoding="utf-8"?>
+<file path=ppt/slides/slide32.xml><?xml version="1.0" encoding="utf-8"?>
 <p:sld xmlns:a="http://schemas.openxmlformats.org/drawingml/2006/main" xmlns:r="http://schemas.openxmlformats.org/officeDocument/2006/relationships" xmlns:p="http://schemas.openxmlformats.org/presentationml/2006/main">
   <p:cSld>
     <p:spTree>
@@ -31291,8 +32252,8 @@
           </a:p>
         </p:txBody>
       </p:sp>
-      <mc:AlternateContent xmlns:mc="http://schemas.openxmlformats.org/markup-compatibility/2006" xmlns:a14="http://schemas.microsoft.com/office/drawing/2010/main">
-        <mc:Choice Requires="a14">
+      <mc:AlternateContent xmlns:mc="http://schemas.openxmlformats.org/markup-compatibility/2006">
+        <mc:Choice xmlns:a14="http://schemas.microsoft.com/office/drawing/2010/main" Requires="a14">
           <p:sp>
             <p:nvSpPr>
               <p:cNvPr id="3" name="Content Placeholder 2">
@@ -31311,74 +32272,583 @@
             </p:nvSpPr>
             <p:spPr/>
             <p:txBody>
-              <a:bodyPr/>
+              <a:bodyPr>
+                <a:normAutofit fontScale="70000" lnSpcReduction="20000"/>
+              </a:bodyPr>
               <a:lstStyle/>
               <a:p>
-                <a:r>
-                  <a:rPr lang="en-US" dirty="0"/>
-                  <a:t>Discounting is used for tabular methods because returns for each state are separately identified and averaged. </a:t>
+                <a:pPr marL="0" indent="0">
+                  <a:buNone/>
+                </a:pPr>
+                <a:r>
+                  <a:rPr lang="en-US" b="1" dirty="0"/>
+                  <a:t>Discounting vs. Average Reward</a:t>
                 </a:r>
               </a:p>
               <a:p>
                 <a:r>
                   <a:rPr lang="en-US" dirty="0"/>
-                  <a:t>With approximation, returns are shared between states and it is better to focus on average rewards instead of discounting.</a:t>
-                </a:r>
+                  <a:t>Discounted rewards (</a:t>
+                </a:r>
+                <a14:m>
+                  <m:oMath xmlns:m="http://schemas.openxmlformats.org/officeDocument/2006/math">
+                    <m:r>
+                      <a:rPr lang="en-US" b="0" i="1" smtClean="0">
+                        <a:latin typeface="Cambria Math" panose="02040503050406030204" pitchFamily="18" charset="0"/>
+                      </a:rPr>
+                      <m:t>𝛾</m:t>
+                    </m:r>
+                  </m:oMath>
+                </a14:m>
+                <a:r>
+                  <a:rPr lang="en-US" dirty="0"/>
+                  <a:t>-returns) are used for tabular methods because returns for each state are separately identified and averaged. </a:t>
+                </a:r>
+                <a:br>
+                  <a:rPr lang="en-US" dirty="0"/>
+                </a:br>
+                <a14:m>
+                  <m:oMath xmlns:m="http://schemas.openxmlformats.org/officeDocument/2006/math">
+                    <m:sSub>
+                      <m:sSubPr>
+                        <m:ctrlPr>
+                          <a:rPr lang="en-US" b="0" i="1" smtClean="0">
+                            <a:latin typeface="Cambria Math" panose="02040503050406030204" pitchFamily="18" charset="0"/>
+                          </a:rPr>
+                        </m:ctrlPr>
+                      </m:sSubPr>
+                      <m:e>
+                        <m:r>
+                          <a:rPr lang="en-US" b="0" i="1" smtClean="0">
+                            <a:latin typeface="Cambria Math" panose="02040503050406030204" pitchFamily="18" charset="0"/>
+                          </a:rPr>
+                          <m:t>𝐺</m:t>
+                        </m:r>
+                      </m:e>
+                      <m:sub>
+                        <m:r>
+                          <a:rPr lang="en-US" b="0" i="1" smtClean="0">
+                            <a:latin typeface="Cambria Math" panose="02040503050406030204" pitchFamily="18" charset="0"/>
+                          </a:rPr>
+                          <m:t>𝑡</m:t>
+                        </m:r>
+                      </m:sub>
+                    </m:sSub>
+                    <m:r>
+                      <a:rPr lang="en-US" b="0" i="1" smtClean="0">
+                        <a:latin typeface="Cambria Math" panose="02040503050406030204" pitchFamily="18" charset="0"/>
+                      </a:rPr>
+                      <m:t>=</m:t>
+                    </m:r>
+                    <m:sSub>
+                      <m:sSubPr>
+                        <m:ctrlPr>
+                          <a:rPr lang="en-US" b="0" i="1" smtClean="0">
+                            <a:latin typeface="Cambria Math" panose="02040503050406030204" pitchFamily="18" charset="0"/>
+                          </a:rPr>
+                        </m:ctrlPr>
+                      </m:sSubPr>
+                      <m:e>
+                        <m:r>
+                          <a:rPr lang="en-US" b="0" i="1" smtClean="0">
+                            <a:latin typeface="Cambria Math" panose="02040503050406030204" pitchFamily="18" charset="0"/>
+                          </a:rPr>
+                          <m:t>𝑅</m:t>
+                        </m:r>
+                      </m:e>
+                      <m:sub>
+                        <m:r>
+                          <a:rPr lang="en-US" b="0" i="1" smtClean="0">
+                            <a:latin typeface="Cambria Math" panose="02040503050406030204" pitchFamily="18" charset="0"/>
+                          </a:rPr>
+                          <m:t>𝑡</m:t>
+                        </m:r>
+                        <m:r>
+                          <a:rPr lang="en-US" b="0" i="1" smtClean="0">
+                            <a:latin typeface="Cambria Math" panose="02040503050406030204" pitchFamily="18" charset="0"/>
+                          </a:rPr>
+                          <m:t>+1</m:t>
+                        </m:r>
+                      </m:sub>
+                    </m:sSub>
+                    <m:r>
+                      <a:rPr lang="en-US" b="0" i="1" smtClean="0">
+                        <a:latin typeface="Cambria Math" panose="02040503050406030204" pitchFamily="18" charset="0"/>
+                      </a:rPr>
+                      <m:t>+</m:t>
+                    </m:r>
+                    <m:r>
+                      <a:rPr lang="en-US" b="0" i="1" smtClean="0">
+                        <a:latin typeface="Cambria Math" panose="02040503050406030204" pitchFamily="18" charset="0"/>
+                      </a:rPr>
+                      <m:t>𝛾</m:t>
+                    </m:r>
+                    <m:sSub>
+                      <m:sSubPr>
+                        <m:ctrlPr>
+                          <a:rPr lang="en-US" i="1">
+                            <a:latin typeface="Cambria Math" panose="02040503050406030204" pitchFamily="18" charset="0"/>
+                          </a:rPr>
+                        </m:ctrlPr>
+                      </m:sSubPr>
+                      <m:e>
+                        <m:r>
+                          <a:rPr lang="en-US" i="1">
+                            <a:latin typeface="Cambria Math" panose="02040503050406030204" pitchFamily="18" charset="0"/>
+                          </a:rPr>
+                          <m:t>𝑅</m:t>
+                        </m:r>
+                      </m:e>
+                      <m:sub>
+                        <m:r>
+                          <a:rPr lang="en-US" i="1">
+                            <a:latin typeface="Cambria Math" panose="02040503050406030204" pitchFamily="18" charset="0"/>
+                          </a:rPr>
+                          <m:t>𝑡</m:t>
+                        </m:r>
+                        <m:r>
+                          <a:rPr lang="en-US" i="1">
+                            <a:latin typeface="Cambria Math" panose="02040503050406030204" pitchFamily="18" charset="0"/>
+                          </a:rPr>
+                          <m:t>+2</m:t>
+                        </m:r>
+                      </m:sub>
+                    </m:sSub>
+                    <m:r>
+                      <a:rPr lang="en-US" i="1">
+                        <a:latin typeface="Cambria Math" panose="02040503050406030204" pitchFamily="18" charset="0"/>
+                      </a:rPr>
+                      <m:t>+</m:t>
+                    </m:r>
+                    <m:sSup>
+                      <m:sSupPr>
+                        <m:ctrlPr>
+                          <a:rPr lang="en-US" b="0" i="1" smtClean="0">
+                            <a:latin typeface="Cambria Math" panose="02040503050406030204" pitchFamily="18" charset="0"/>
+                          </a:rPr>
+                        </m:ctrlPr>
+                      </m:sSupPr>
+                      <m:e>
+                        <m:r>
+                          <a:rPr lang="en-US" i="1">
+                            <a:latin typeface="Cambria Math" panose="02040503050406030204" pitchFamily="18" charset="0"/>
+                          </a:rPr>
+                          <m:t>𝛾</m:t>
+                        </m:r>
+                      </m:e>
+                      <m:sup>
+                        <m:r>
+                          <a:rPr lang="en-US" b="0" i="1" smtClean="0">
+                            <a:latin typeface="Cambria Math" panose="02040503050406030204" pitchFamily="18" charset="0"/>
+                          </a:rPr>
+                          <m:t>2</m:t>
+                        </m:r>
+                      </m:sup>
+                    </m:sSup>
+                    <m:sSub>
+                      <m:sSubPr>
+                        <m:ctrlPr>
+                          <a:rPr lang="en-US" i="1">
+                            <a:latin typeface="Cambria Math" panose="02040503050406030204" pitchFamily="18" charset="0"/>
+                          </a:rPr>
+                        </m:ctrlPr>
+                      </m:sSubPr>
+                      <m:e>
+                        <m:r>
+                          <a:rPr lang="en-US" i="1">
+                            <a:latin typeface="Cambria Math" panose="02040503050406030204" pitchFamily="18" charset="0"/>
+                          </a:rPr>
+                          <m:t>𝑅</m:t>
+                        </m:r>
+                      </m:e>
+                      <m:sub>
+                        <m:r>
+                          <a:rPr lang="en-US" i="1">
+                            <a:latin typeface="Cambria Math" panose="02040503050406030204" pitchFamily="18" charset="0"/>
+                          </a:rPr>
+                          <m:t>𝑡</m:t>
+                        </m:r>
+                        <m:r>
+                          <a:rPr lang="en-US" i="1">
+                            <a:latin typeface="Cambria Math" panose="02040503050406030204" pitchFamily="18" charset="0"/>
+                          </a:rPr>
+                          <m:t>+3</m:t>
+                        </m:r>
+                      </m:sub>
+                    </m:sSub>
+                    <m:r>
+                      <a:rPr lang="en-US" b="0" i="1" smtClean="0">
+                        <a:latin typeface="Cambria Math" panose="02040503050406030204" pitchFamily="18" charset="0"/>
+                      </a:rPr>
+                      <m:t>+…</m:t>
+                    </m:r>
+                  </m:oMath>
+                </a14:m>
+                <a:endParaRPr lang="en-US" dirty="0"/>
               </a:p>
               <a:p>
+                <a:endParaRPr lang="en-US" dirty="0"/>
+              </a:p>
+              <a:p>
                 <a:r>
                   <a:rPr lang="en-US" dirty="0"/>
-                  <a:t>It is often helpful to use differences between the reward and the  average returns known as differential returns </a:t>
-                </a:r>
+                  <a:t>With approximation, returns are shared (generalized) between states and it is often better to focus on the long-run </a:t>
+                </a:r>
+                <a:r>
+                  <a:rPr lang="en-US" b="1" dirty="0"/>
+                  <a:t>average reward </a:t>
+                </a:r>
+                <a:r>
+                  <a:rPr lang="en-US" dirty="0"/>
+                  <a:t>per time step.</a:t>
+                </a:r>
+                <a:br>
+                  <a:rPr lang="en-US" dirty="0"/>
+                </a:br>
+                <a:br>
+                  <a:rPr lang="en-US" dirty="0"/>
+                </a:br>
                 <a14:m>
                   <m:oMath xmlns:m="http://schemas.openxmlformats.org/officeDocument/2006/math">
                     <m:r>
-                      <a:rPr lang="en-US" i="1">
-                        <a:latin typeface="Cambria Math" panose="02040503050406030204" pitchFamily="18" charset="0"/>
-                      </a:rPr>
-                      <m:t>𝑅</m:t>
-                    </m:r>
-                    <m:r>
-                      <a:rPr lang="en-US" i="1">
-                        <a:latin typeface="Cambria Math" panose="02040503050406030204" pitchFamily="18" charset="0"/>
-                      </a:rPr>
-                      <m:t>−</m:t>
-                    </m:r>
-                    <m:r>
-                      <a:rPr lang="en-US" i="1">
+                      <a:rPr lang="en-US" b="0" i="1" smtClean="0">
                         <a:latin typeface="Cambria Math" panose="02040503050406030204" pitchFamily="18" charset="0"/>
                       </a:rPr>
                       <m:t>𝑟</m:t>
                     </m:r>
-                    <m:r>
-                      <a:rPr lang="en-US" i="1">
-                        <a:latin typeface="Cambria Math" panose="02040503050406030204" pitchFamily="18" charset="0"/>
-                      </a:rPr>
-                      <m:t>(</m:t>
-                    </m:r>
-                    <m:r>
-                      <a:rPr lang="en-US" i="1">
-                        <a:latin typeface="Cambria Math" panose="02040503050406030204" pitchFamily="18" charset="0"/>
-                      </a:rPr>
-                      <m:t>𝜋</m:t>
-                    </m:r>
-                    <m:r>
-                      <a:rPr lang="en-US" i="1">
-                        <a:latin typeface="Cambria Math" panose="02040503050406030204" pitchFamily="18" charset="0"/>
-                      </a:rPr>
-                      <m:t>)</m:t>
-                    </m:r>
+                    <m:d>
+                      <m:dPr>
+                        <m:ctrlPr>
+                          <a:rPr lang="en-US" b="0" i="1" smtClean="0">
+                            <a:latin typeface="Cambria Math" panose="02040503050406030204" pitchFamily="18" charset="0"/>
+                          </a:rPr>
+                        </m:ctrlPr>
+                      </m:dPr>
+                      <m:e>
+                        <m:r>
+                          <a:rPr lang="en-US" b="0" i="1" smtClean="0">
+                            <a:latin typeface="Cambria Math" panose="02040503050406030204" pitchFamily="18" charset="0"/>
+                          </a:rPr>
+                          <m:t>𝜋</m:t>
+                        </m:r>
+                      </m:e>
+                    </m:d>
+                    <m:r>
+                      <a:rPr lang="en-US" b="0" i="1" smtClean="0">
+                        <a:latin typeface="Cambria Math" panose="02040503050406030204" pitchFamily="18" charset="0"/>
+                      </a:rPr>
+                      <m:t>=</m:t>
+                    </m:r>
+                    <m:func>
+                      <m:funcPr>
+                        <m:ctrlPr>
+                          <a:rPr lang="en-US" b="0" i="1" smtClean="0">
+                            <a:latin typeface="Cambria Math" panose="02040503050406030204" pitchFamily="18" charset="0"/>
+                          </a:rPr>
+                        </m:ctrlPr>
+                      </m:funcPr>
+                      <m:fName>
+                        <m:limLow>
+                          <m:limLowPr>
+                            <m:ctrlPr>
+                              <a:rPr lang="en-US" b="0" i="1" smtClean="0">
+                                <a:latin typeface="Cambria Math" panose="02040503050406030204" pitchFamily="18" charset="0"/>
+                              </a:rPr>
+                            </m:ctrlPr>
+                          </m:limLowPr>
+                          <m:e>
+                            <m:r>
+                              <m:rPr>
+                                <m:sty m:val="p"/>
+                              </m:rPr>
+                              <a:rPr lang="en-US" b="0" i="0" smtClean="0">
+                                <a:latin typeface="Cambria Math" panose="02040503050406030204" pitchFamily="18" charset="0"/>
+                              </a:rPr>
+                              <m:t>lim</m:t>
+                            </m:r>
+                          </m:e>
+                          <m:lim>
+                            <m:r>
+                              <a:rPr lang="en-US" b="0" i="1" smtClean="0">
+                                <a:latin typeface="Cambria Math" panose="02040503050406030204" pitchFamily="18" charset="0"/>
+                              </a:rPr>
+                              <m:t>𝑇</m:t>
+                            </m:r>
+                            <m:r>
+                              <a:rPr lang="en-US" b="0" i="1" smtClean="0">
+                                <a:latin typeface="Cambria Math" panose="02040503050406030204" pitchFamily="18" charset="0"/>
+                              </a:rPr>
+                              <m:t>→∞</m:t>
+                            </m:r>
+                          </m:lim>
+                        </m:limLow>
+                      </m:fName>
+                      <m:e>
+                        <m:f>
+                          <m:fPr>
+                            <m:ctrlPr>
+                              <a:rPr lang="en-US" b="0" i="1" smtClean="0">
+                                <a:latin typeface="Cambria Math" panose="02040503050406030204" pitchFamily="18" charset="0"/>
+                              </a:rPr>
+                            </m:ctrlPr>
+                          </m:fPr>
+                          <m:num>
+                            <m:r>
+                              <a:rPr lang="en-US" b="0" i="1" smtClean="0">
+                                <a:latin typeface="Cambria Math" panose="02040503050406030204" pitchFamily="18" charset="0"/>
+                              </a:rPr>
+                              <m:t>1</m:t>
+                            </m:r>
+                          </m:num>
+                          <m:den>
+                            <m:r>
+                              <a:rPr lang="en-US" b="0" i="1" smtClean="0">
+                                <a:latin typeface="Cambria Math" panose="02040503050406030204" pitchFamily="18" charset="0"/>
+                              </a:rPr>
+                              <m:t>𝑇</m:t>
+                            </m:r>
+                          </m:den>
+                        </m:f>
+                        <m:nary>
+                          <m:naryPr>
+                            <m:chr m:val="∑"/>
+                            <m:limLoc m:val="subSup"/>
+                            <m:ctrlPr>
+                              <a:rPr lang="en-US" b="0" i="1" smtClean="0">
+                                <a:latin typeface="Cambria Math" panose="02040503050406030204" pitchFamily="18" charset="0"/>
+                              </a:rPr>
+                            </m:ctrlPr>
+                          </m:naryPr>
+                          <m:sub>
+                            <m:r>
+                              <m:rPr>
+                                <m:brk m:alnAt="25"/>
+                              </m:rPr>
+                              <a:rPr lang="en-US" b="0" i="1" smtClean="0">
+                                <a:latin typeface="Cambria Math" panose="02040503050406030204" pitchFamily="18" charset="0"/>
+                              </a:rPr>
+                              <m:t>𝑡</m:t>
+                            </m:r>
+                            <m:r>
+                              <a:rPr lang="en-US" b="0" i="1" smtClean="0">
+                                <a:latin typeface="Cambria Math" panose="02040503050406030204" pitchFamily="18" charset="0"/>
+                              </a:rPr>
+                              <m:t>=1</m:t>
+                            </m:r>
+                          </m:sub>
+                          <m:sup>
+                            <m:r>
+                              <a:rPr lang="en-US" b="0" i="1" smtClean="0">
+                                <a:latin typeface="Cambria Math" panose="02040503050406030204" pitchFamily="18" charset="0"/>
+                              </a:rPr>
+                              <m:t>𝑇</m:t>
+                            </m:r>
+                          </m:sup>
+                          <m:e>
+                            <m:sSub>
+                              <m:sSubPr>
+                                <m:ctrlPr>
+                                  <a:rPr lang="en-US" b="0" i="1" smtClean="0">
+                                    <a:latin typeface="Cambria Math" panose="02040503050406030204" pitchFamily="18" charset="0"/>
+                                  </a:rPr>
+                                </m:ctrlPr>
+                              </m:sSubPr>
+                              <m:e>
+                                <m:r>
+                                  <a:rPr lang="en-US" b="0" i="1" smtClean="0">
+                                    <a:latin typeface="Cambria Math" panose="02040503050406030204" pitchFamily="18" charset="0"/>
+                                  </a:rPr>
+                                  <m:t>𝑅</m:t>
+                                </m:r>
+                              </m:e>
+                              <m:sub>
+                                <m:r>
+                                  <a:rPr lang="en-US" b="0" i="1" smtClean="0">
+                                    <a:latin typeface="Cambria Math" panose="02040503050406030204" pitchFamily="18" charset="0"/>
+                                  </a:rPr>
+                                  <m:t>𝑡</m:t>
+                                </m:r>
+                              </m:sub>
+                            </m:sSub>
+                          </m:e>
+                        </m:nary>
+                      </m:e>
+                    </m:func>
                   </m:oMath>
                 </a14:m>
+                <a:endParaRPr lang="en-US" dirty="0"/>
+              </a:p>
+              <a:p>
+                <a:endParaRPr lang="en-US" dirty="0"/>
+              </a:p>
+              <a:p>
+                <a:pPr marL="0" indent="0">
+                  <a:buNone/>
+                </a:pPr>
+                <a:r>
+                  <a:rPr lang="en-US" b="1" dirty="0"/>
+                  <a:t>Differential Returns</a:t>
+                </a:r>
+              </a:p>
+              <a:p>
                 <a:r>
                   <a:rPr lang="en-US" dirty="0"/>
-                  <a:t>.</a:t>
-                </a:r>
+                  <a:t>It is often helpful to use differences between the reward and the average returns known as differential returns indicating how much better (or worse) each reward is than average:</a:t>
+                </a:r>
+                <a:br>
+                  <a:rPr lang="en-US" dirty="0"/>
+                </a:br>
+                <a:br>
+                  <a:rPr lang="en-US" dirty="0"/>
+                </a:br>
+                <a14:m>
+                  <m:oMath xmlns:m="http://schemas.openxmlformats.org/officeDocument/2006/math">
+                    <m:sSub>
+                      <m:sSubPr>
+                        <m:ctrlPr>
+                          <a:rPr lang="en-US" b="0" i="0" smtClean="0">
+                            <a:latin typeface="Cambria Math" panose="02040503050406030204" pitchFamily="18" charset="0"/>
+                          </a:rPr>
+                        </m:ctrlPr>
+                      </m:sSubPr>
+                      <m:e>
+                        <m:r>
+                          <m:rPr>
+                            <m:sty m:val="p"/>
+                          </m:rPr>
+                          <a:rPr lang="en-US" b="0" i="0" smtClean="0">
+                            <a:latin typeface="Cambria Math" panose="02040503050406030204" pitchFamily="18" charset="0"/>
+                          </a:rPr>
+                          <m:t>G</m:t>
+                        </m:r>
+                      </m:e>
+                      <m:sub>
+                        <m:r>
+                          <m:rPr>
+                            <m:sty m:val="p"/>
+                          </m:rPr>
+                          <a:rPr lang="en-US" b="0" i="0" smtClean="0">
+                            <a:latin typeface="Cambria Math" panose="02040503050406030204" pitchFamily="18" charset="0"/>
+                          </a:rPr>
+                          <m:t>t</m:t>
+                        </m:r>
+                      </m:sub>
+                    </m:sSub>
+                    <m:r>
+                      <a:rPr lang="en-US" b="0" i="0" smtClean="0">
+                        <a:latin typeface="Cambria Math" panose="02040503050406030204" pitchFamily="18" charset="0"/>
+                      </a:rPr>
+                      <m:t>=</m:t>
+                    </m:r>
+                    <m:nary>
+                      <m:naryPr>
+                        <m:chr m:val="∑"/>
+                        <m:supHide m:val="on"/>
+                        <m:ctrlPr>
+                          <a:rPr lang="en-US" b="0" i="1" smtClean="0">
+                            <a:latin typeface="Cambria Math" panose="02040503050406030204" pitchFamily="18" charset="0"/>
+                          </a:rPr>
+                        </m:ctrlPr>
+                      </m:naryPr>
+                      <m:sub>
+                        <m:r>
+                          <a:rPr lang="en-US" b="0" i="1" smtClean="0">
+                            <a:latin typeface="Cambria Math" panose="02040503050406030204" pitchFamily="18" charset="0"/>
+                          </a:rPr>
+                          <m:t>𝑘</m:t>
+                        </m:r>
+                        <m:r>
+                          <a:rPr lang="en-US" b="0" i="1" smtClean="0">
+                            <a:latin typeface="Cambria Math" panose="02040503050406030204" pitchFamily="18" charset="0"/>
+                          </a:rPr>
+                          <m:t>=0</m:t>
+                        </m:r>
+                      </m:sub>
+                      <m:sup/>
+                      <m:e>
+                        <m:sSub>
+                          <m:sSubPr>
+                            <m:ctrlPr>
+                              <a:rPr lang="en-US" b="0" i="1" smtClean="0">
+                                <a:latin typeface="Cambria Math" panose="02040503050406030204" pitchFamily="18" charset="0"/>
+                              </a:rPr>
+                            </m:ctrlPr>
+                          </m:sSubPr>
+                          <m:e>
+                            <m:r>
+                              <a:rPr lang="en-US" b="0" i="1" smtClean="0">
+                                <a:latin typeface="Cambria Math" panose="02040503050406030204" pitchFamily="18" charset="0"/>
+                              </a:rPr>
+                              <m:t>𝑅</m:t>
+                            </m:r>
+                          </m:e>
+                          <m:sub>
+                            <m:r>
+                              <a:rPr lang="en-US" b="0" i="1" smtClean="0">
+                                <a:latin typeface="Cambria Math" panose="02040503050406030204" pitchFamily="18" charset="0"/>
+                              </a:rPr>
+                              <m:t>𝑡</m:t>
+                            </m:r>
+                            <m:r>
+                              <a:rPr lang="en-US" b="0" i="1" smtClean="0">
+                                <a:latin typeface="Cambria Math" panose="02040503050406030204" pitchFamily="18" charset="0"/>
+                              </a:rPr>
+                              <m:t>+</m:t>
+                            </m:r>
+                            <m:r>
+                              <a:rPr lang="en-US" b="0" i="1" smtClean="0">
+                                <a:latin typeface="Cambria Math" panose="02040503050406030204" pitchFamily="18" charset="0"/>
+                              </a:rPr>
+                              <m:t>𝑘</m:t>
+                            </m:r>
+                            <m:r>
+                              <a:rPr lang="en-US" b="0" i="1" smtClean="0">
+                                <a:latin typeface="Cambria Math" panose="02040503050406030204" pitchFamily="18" charset="0"/>
+                              </a:rPr>
+                              <m:t>+1</m:t>
+                            </m:r>
+                          </m:sub>
+                        </m:sSub>
+                      </m:e>
+                    </m:nary>
+                    <m:r>
+                      <a:rPr lang="en-US" i="1">
+                        <a:latin typeface="Cambria Math" panose="02040503050406030204" pitchFamily="18" charset="0"/>
+                      </a:rPr>
+                      <m:t>−</m:t>
+                    </m:r>
+                    <m:r>
+                      <a:rPr lang="en-US" i="1">
+                        <a:latin typeface="Cambria Math" panose="02040503050406030204" pitchFamily="18" charset="0"/>
+                      </a:rPr>
+                      <m:t>𝑟</m:t>
+                    </m:r>
+                    <m:r>
+                      <a:rPr lang="en-US" i="1">
+                        <a:latin typeface="Cambria Math" panose="02040503050406030204" pitchFamily="18" charset="0"/>
+                      </a:rPr>
+                      <m:t>(</m:t>
+                    </m:r>
+                    <m:r>
+                      <a:rPr lang="en-US" i="1">
+                        <a:latin typeface="Cambria Math" panose="02040503050406030204" pitchFamily="18" charset="0"/>
+                      </a:rPr>
+                      <m:t>𝜋</m:t>
+                    </m:r>
+                    <m:r>
+                      <a:rPr lang="en-US" i="1">
+                        <a:latin typeface="Cambria Math" panose="02040503050406030204" pitchFamily="18" charset="0"/>
+                      </a:rPr>
+                      <m:t>)</m:t>
+                    </m:r>
+                  </m:oMath>
+                </a14:m>
+                <a:endParaRPr lang="en-US" dirty="0"/>
               </a:p>
             </p:txBody>
           </p:sp>
         </mc:Choice>
-        <mc:Fallback xmlns="">
+        <mc:Fallback>
           <p:sp>
             <p:nvSpPr>
               <p:cNvPr id="3" name="Content Placeholder 2">
@@ -31399,7 +32869,7 @@
               <a:blipFill>
                 <a:blip r:embed="rId2"/>
                 <a:stretch>
-                  <a:fillRect l="-1043" t="-2168" r="-928"/>
+                  <a:fillRect l="-638" t="-2168" r="-290" b="-28444"/>
                 </a:stretch>
               </a:blipFill>
             </p:spPr>
@@ -31428,12 +32898,130 @@
   <p:clrMapOvr>
     <a:masterClrMapping/>
   </p:clrMapOvr>
+  <p:timing>
+    <p:tnLst>
+      <p:par>
+        <p:cTn id="1" dur="indefinite" restart="never" nodeType="tmRoot">
+          <p:childTnLst>
+            <p:seq concurrent="1" nextAc="seek">
+              <p:cTn id="2" dur="indefinite" nodeType="mainSeq">
+                <p:childTnLst>
+                  <p:par>
+                    <p:cTn id="3" fill="hold">
+                      <p:stCondLst>
+                        <p:cond delay="indefinite"/>
+                      </p:stCondLst>
+                      <p:childTnLst>
+                        <p:par>
+                          <p:cTn id="4" fill="hold">
+                            <p:stCondLst>
+                              <p:cond delay="0"/>
+                            </p:stCondLst>
+                            <p:childTnLst>
+                              <p:par>
+                                <p:cTn id="5" presetID="1" presetClass="entr" presetSubtype="0" fill="hold" nodeType="clickEffect">
+                                  <p:stCondLst>
+                                    <p:cond delay="0"/>
+                                  </p:stCondLst>
+                                  <p:childTnLst>
+                                    <p:set>
+                                      <p:cBhvr>
+                                        <p:cTn id="6" dur="1" fill="hold">
+                                          <p:stCondLst>
+                                            <p:cond delay="0"/>
+                                          </p:stCondLst>
+                                        </p:cTn>
+                                        <p:tgtEl>
+                                          <p:spTgt spid="3">
+                                            <p:txEl>
+                                              <p:pRg st="5" end="5"/>
+                                            </p:txEl>
+                                          </p:spTgt>
+                                        </p:tgtEl>
+                                        <p:attrNameLst>
+                                          <p:attrName>style.visibility</p:attrName>
+                                        </p:attrNameLst>
+                                      </p:cBhvr>
+                                      <p:to>
+                                        <p:strVal val="visible"/>
+                                      </p:to>
+                                    </p:set>
+                                  </p:childTnLst>
+                                </p:cTn>
+                              </p:par>
+                              <p:par>
+                                <p:cTn id="7" presetID="1" presetClass="entr" presetSubtype="0" fill="hold" nodeType="withEffect">
+                                  <p:stCondLst>
+                                    <p:cond delay="0"/>
+                                  </p:stCondLst>
+                                  <p:childTnLst>
+                                    <p:set>
+                                      <p:cBhvr>
+                                        <p:cTn id="8" dur="1" fill="hold">
+                                          <p:stCondLst>
+                                            <p:cond delay="0"/>
+                                          </p:stCondLst>
+                                        </p:cTn>
+                                        <p:tgtEl>
+                                          <p:spTgt spid="3">
+                                            <p:txEl>
+                                              <p:pRg st="6" end="6"/>
+                                            </p:txEl>
+                                          </p:spTgt>
+                                        </p:tgtEl>
+                                        <p:attrNameLst>
+                                          <p:attrName>style.visibility</p:attrName>
+                                        </p:attrNameLst>
+                                      </p:cBhvr>
+                                      <p:to>
+                                        <p:strVal val="visible"/>
+                                      </p:to>
+                                    </p:set>
+                                  </p:childTnLst>
+                                </p:cTn>
+                              </p:par>
+                            </p:childTnLst>
+                          </p:cTn>
+                        </p:par>
+                      </p:childTnLst>
+                    </p:cTn>
+                  </p:par>
+                </p:childTnLst>
+              </p:cTn>
+              <p:prevCondLst>
+                <p:cond evt="onPrev" delay="0">
+                  <p:tgtEl>
+                    <p:sldTgt/>
+                  </p:tgtEl>
+                </p:cond>
+              </p:prevCondLst>
+              <p:nextCondLst>
+                <p:cond evt="onNext" delay="0">
+                  <p:tgtEl>
+                    <p:sldTgt/>
+                  </p:tgtEl>
+                </p:cond>
+              </p:nextCondLst>
+            </p:seq>
+          </p:childTnLst>
+        </p:cTn>
+      </p:par>
+    </p:tnLst>
+  </p:timing>
 </p:sld>
 </file>
 
-<file path=ppt/slides/slide32.xml><?xml version="1.0" encoding="utf-8"?>
+<file path=ppt/slides/slide33.xml><?xml version="1.0" encoding="utf-8"?>
 <p:sld xmlns:a="http://schemas.openxmlformats.org/drawingml/2006/main" xmlns:r="http://schemas.openxmlformats.org/officeDocument/2006/relationships" xmlns:p="http://schemas.openxmlformats.org/presentationml/2006/main">
   <p:cSld>
+    <p:bg>
+      <p:bgPr>
+        <a:solidFill>
+          <a:schemeClr val="bg1"/>
+        </a:solidFill>
+        <a:effectLst/>
+      </p:bgPr>
+    </p:bg>
     <p:spTree>
       <p:nvGrpSpPr>
         <p:cNvPr id="1" name=""/>
@@ -31448,89 +33036,66 @@
           <a:chExt cx="0" cy="0"/>
         </a:xfrm>
       </p:grpSpPr>
-      <p:sp>
+      <p:sp useBgFill="1">
         <p:nvSpPr>
-          <p:cNvPr id="4" name="Title 3">
+          <p:cNvPr id="9" name="Rectangle 8">
             <a:extLst>
               <a:ext uri="{FF2B5EF4-FFF2-40B4-BE49-F238E27FC236}">
-                <a16:creationId xmlns:a16="http://schemas.microsoft.com/office/drawing/2014/main" id="{BBC6B8A3-7ED4-5685-3BE8-640126A45847}"/>
+                <a16:creationId xmlns:a16="http://schemas.microsoft.com/office/drawing/2014/main" id="{79BB35BC-D5C2-4C8B-A22A-A71E6191913B}"/>
+              </a:ext>
+              <a:ext uri="{C183D7F6-B498-43B3-948B-1728B52AA6E4}">
+                <adec:decorative xmlns:adec="http://schemas.microsoft.com/office/drawing/2017/decorative" val="1"/>
               </a:ext>
             </a:extLst>
           </p:cNvPr>
           <p:cNvSpPr>
-            <a:spLocks noGrp="1"/>
+            <a:spLocks noGrp="1" noRot="1" noChangeAspect="1" noMove="1" noResize="1" noEditPoints="1" noAdjustHandles="1" noChangeArrowheads="1" noChangeShapeType="1" noTextEdit="1"/>
           </p:cNvSpPr>
           <p:nvPr>
-            <p:ph type="title"/>
+            <p:extLst>
+              <p:ext uri="{386F3935-93C4-4BCD-93E2-E3B085C9AB24}">
+                <p16:designElem xmlns:p16="http://schemas.microsoft.com/office/powerpoint/2015/main" val="1"/>
+              </p:ext>
+            </p:extLst>
           </p:nvPr>
         </p:nvSpPr>
-        <p:spPr/>
+        <p:spPr>
+          <a:xfrm>
+            <a:off x="0" y="0"/>
+            <a:ext cx="12188952" cy="6858000"/>
+          </a:xfrm>
+          <a:prstGeom prst="rect">
+            <a:avLst/>
+          </a:prstGeom>
+          <a:ln>
+            <a:noFill/>
+          </a:ln>
+        </p:spPr>
+        <p:style>
+          <a:lnRef idx="2">
+            <a:schemeClr val="accent1">
+              <a:shade val="50000"/>
+            </a:schemeClr>
+          </a:lnRef>
+          <a:fillRef idx="1">
+            <a:schemeClr val="accent1"/>
+          </a:fillRef>
+          <a:effectRef idx="0">
+            <a:schemeClr val="accent1"/>
+          </a:effectRef>
+          <a:fontRef idx="minor">
+            <a:schemeClr val="lt1"/>
+          </a:fontRef>
+        </p:style>
         <p:txBody>
-          <a:bodyPr/>
+          <a:bodyPr rtlCol="0" anchor="ctr"/>
           <a:lstStyle/>
           <a:p>
-            <a:r>
-              <a:rPr lang="en-US" dirty="0"/>
-              <a:t>Summary</a:t>
-            </a:r>
-          </a:p>
-        </p:txBody>
-      </p:sp>
-      <p:sp>
-        <p:nvSpPr>
-          <p:cNvPr id="5" name="Text Placeholder 4">
-            <a:extLst>
-              <a:ext uri="{FF2B5EF4-FFF2-40B4-BE49-F238E27FC236}">
-                <a16:creationId xmlns:a16="http://schemas.microsoft.com/office/drawing/2014/main" id="{BD366EC9-7756-561D-0729-0CFAAB4A80CD}"/>
-              </a:ext>
-            </a:extLst>
-          </p:cNvPr>
-          <p:cNvSpPr>
-            <a:spLocks noGrp="1"/>
-          </p:cNvSpPr>
-          <p:nvPr>
-            <p:ph type="body" idx="1"/>
-          </p:nvPr>
-        </p:nvSpPr>
-        <p:spPr/>
-        <p:txBody>
-          <a:bodyPr/>
-          <a:lstStyle/>
-          <a:p>
+            <a:pPr algn="ctr"/>
             <a:endParaRPr lang="en-US"/>
           </a:p>
         </p:txBody>
       </p:sp>
-    </p:spTree>
-    <p:extLst>
-      <p:ext uri="{BB962C8B-B14F-4D97-AF65-F5344CB8AC3E}">
-        <p14:creationId xmlns:p14="http://schemas.microsoft.com/office/powerpoint/2010/main" val="4190536015"/>
-      </p:ext>
-    </p:extLst>
-  </p:cSld>
-  <p:clrMapOvr>
-    <a:masterClrMapping/>
-  </p:clrMapOvr>
-</p:sld>
-</file>
-
-<file path=ppt/slides/slide33.xml><?xml version="1.0" encoding="utf-8"?>
-<p:sld xmlns:a="http://schemas.openxmlformats.org/drawingml/2006/main" xmlns:r="http://schemas.openxmlformats.org/officeDocument/2006/relationships" xmlns:p="http://schemas.openxmlformats.org/presentationml/2006/main">
-  <p:cSld>
-    <p:spTree>
-      <p:nvGrpSpPr>
-        <p:cNvPr id="1" name=""/>
-        <p:cNvGrpSpPr/>
-        <p:nvPr/>
-      </p:nvGrpSpPr>
-      <p:grpSpPr>
-        <a:xfrm>
-          <a:off x="0" y="0"/>
-          <a:ext cx="0" cy="0"/>
-          <a:chOff x="0" y="0"/>
-          <a:chExt cx="0" cy="0"/>
-        </a:xfrm>
-      </p:grpSpPr>
       <p:sp>
         <p:nvSpPr>
           <p:cNvPr id="2" name="Title 1">
@@ -31547,20 +33112,425 @@
             <p:ph type="title"/>
           </p:nvPr>
         </p:nvSpPr>
-        <p:spPr/>
+        <p:spPr>
+          <a:xfrm>
+            <a:off x="5433934" y="365125"/>
+            <a:ext cx="5919864" cy="1807305"/>
+          </a:xfrm>
+        </p:spPr>
         <p:txBody>
-          <a:bodyPr/>
+          <a:bodyPr>
+            <a:normAutofit/>
+          </a:bodyPr>
           <a:lstStyle/>
           <a:p>
             <a:r>
-              <a:rPr lang="en-US" dirty="0"/>
-              <a:t>Summary</a:t>
+              <a:rPr lang="en-US" sz="4000" dirty="0"/>
+              <a:t>What You should Know</a:t>
             </a:r>
           </a:p>
         </p:txBody>
       </p:sp>
-      <mc:AlternateContent xmlns:mc="http://schemas.openxmlformats.org/markup-compatibility/2006" xmlns:a14="http://schemas.microsoft.com/office/drawing/2010/main">
-        <mc:Choice Requires="a14">
+      <p:pic>
+        <p:nvPicPr>
+          <p:cNvPr id="4" name="Picture 3">
+            <a:extLst>
+              <a:ext uri="{FF2B5EF4-FFF2-40B4-BE49-F238E27FC236}">
+                <a16:creationId xmlns:a16="http://schemas.microsoft.com/office/drawing/2014/main" id="{906430D7-ABA0-57D9-90CF-7908FE47A102}"/>
+              </a:ext>
+              <a:ext uri="{C183D7F6-B498-43B3-948B-1728B52AA6E4}">
+                <adec:decorative xmlns:adec="http://schemas.microsoft.com/office/drawing/2017/decorative" val="1"/>
+              </a:ext>
+            </a:extLst>
+          </p:cNvPr>
+          <p:cNvPicPr>
+            <a:picLocks noChangeAspect="1" noChangeArrowheads="1"/>
+          </p:cNvPicPr>
+          <p:nvPr/>
+        </p:nvPicPr>
+        <p:blipFill rotWithShape="1">
+          <a:blip r:embed="rId2">
+            <a:extLst>
+              <a:ext uri="{28A0092B-C50C-407E-A947-70E740481C1C}">
+                <a14:useLocalDpi xmlns:a14="http://schemas.microsoft.com/office/drawing/2010/main" val="0"/>
+              </a:ext>
+            </a:extLst>
+          </a:blip>
+          <a:srcRect l="17158" r="23307" b="-1"/>
+          <a:stretch>
+            <a:fillRect/>
+          </a:stretch>
+        </p:blipFill>
+        <p:spPr bwMode="auto">
+          <a:xfrm>
+            <a:off x="20" y="10"/>
+            <a:ext cx="6116549" cy="6857990"/>
+          </a:xfrm>
+          <a:custGeom>
+            <a:avLst/>
+            <a:gdLst/>
+            <a:ahLst/>
+            <a:cxnLst/>
+            <a:rect l="l" t="t" r="r" b="b"/>
+            <a:pathLst>
+              <a:path w="6116569" h="6879321">
+                <a:moveTo>
+                  <a:pt x="0" y="0"/>
+                </a:moveTo>
+                <a:lnTo>
+                  <a:pt x="2935851" y="0"/>
+                </a:lnTo>
+                <a:cubicBezTo>
+                  <a:pt x="3035710" y="10660"/>
+                  <a:pt x="3138421" y="17767"/>
+                  <a:pt x="3238280" y="31980"/>
+                </a:cubicBezTo>
+                <a:cubicBezTo>
+                  <a:pt x="3817462" y="106602"/>
+                  <a:pt x="3127009" y="277163"/>
+                  <a:pt x="3660541" y="550772"/>
+                </a:cubicBezTo>
+                <a:cubicBezTo>
+                  <a:pt x="3706191" y="575645"/>
+                  <a:pt x="3757546" y="579199"/>
+                  <a:pt x="3808902" y="589860"/>
+                </a:cubicBezTo>
+                <a:cubicBezTo>
+                  <a:pt x="4008620" y="625393"/>
+                  <a:pt x="4211192" y="618286"/>
+                  <a:pt x="4413762" y="625393"/>
+                </a:cubicBezTo>
+                <a:cubicBezTo>
+                  <a:pt x="4465118" y="628946"/>
+                  <a:pt x="4525033" y="625393"/>
+                  <a:pt x="4567830" y="721333"/>
+                </a:cubicBezTo>
+                <a:cubicBezTo>
+                  <a:pt x="4425175" y="724888"/>
+                  <a:pt x="4305344" y="731994"/>
+                  <a:pt x="4171247" y="792401"/>
+                </a:cubicBezTo>
+                <a:cubicBezTo>
+                  <a:pt x="4239722" y="859916"/>
+                  <a:pt x="4322462" y="795955"/>
+                  <a:pt x="4376671" y="842148"/>
+                </a:cubicBezTo>
+                <a:cubicBezTo>
+                  <a:pt x="4428027" y="888342"/>
+                  <a:pt x="4470824" y="891896"/>
+                  <a:pt x="4527887" y="813722"/>
+                </a:cubicBezTo>
+                <a:cubicBezTo>
+                  <a:pt x="4556417" y="774634"/>
+                  <a:pt x="4604920" y="778187"/>
+                  <a:pt x="4633452" y="799508"/>
+                </a:cubicBezTo>
+                <a:cubicBezTo>
+                  <a:pt x="4781813" y="913216"/>
+                  <a:pt x="4778960" y="909662"/>
+                  <a:pt x="4947293" y="870576"/>
+                </a:cubicBezTo>
+                <a:cubicBezTo>
+                  <a:pt x="5055712" y="845701"/>
+                  <a:pt x="5166983" y="806615"/>
+                  <a:pt x="5263988" y="820828"/>
+                </a:cubicBezTo>
+                <a:cubicBezTo>
+                  <a:pt x="5275401" y="867022"/>
+                  <a:pt x="5263988" y="888342"/>
+                  <a:pt x="5249723" y="895449"/>
+                </a:cubicBezTo>
+                <a:cubicBezTo>
+                  <a:pt x="5021475" y="1005604"/>
+                  <a:pt x="4975825" y="1122864"/>
+                  <a:pt x="4744723" y="1197485"/>
+                </a:cubicBezTo>
+                <a:cubicBezTo>
+                  <a:pt x="4724751" y="1268552"/>
+                  <a:pt x="4807491" y="1275660"/>
+                  <a:pt x="4767548" y="1346727"/>
+                </a:cubicBezTo>
+                <a:cubicBezTo>
+                  <a:pt x="4693367" y="1407134"/>
+                  <a:pt x="4610627" y="1346727"/>
+                  <a:pt x="4539299" y="1421348"/>
+                </a:cubicBezTo>
+                <a:cubicBezTo>
+                  <a:pt x="4550712" y="1471094"/>
+                  <a:pt x="4610627" y="1432008"/>
+                  <a:pt x="4607773" y="1485309"/>
+                </a:cubicBezTo>
+                <a:cubicBezTo>
+                  <a:pt x="4604920" y="1517288"/>
+                  <a:pt x="4593508" y="1527948"/>
+                  <a:pt x="4579242" y="1535055"/>
+                </a:cubicBezTo>
+                <a:cubicBezTo>
+                  <a:pt x="4776107" y="1538608"/>
+                  <a:pt x="5383820" y="1574142"/>
+                  <a:pt x="5278255" y="1609676"/>
+                </a:cubicBezTo>
+                <a:cubicBezTo>
+                  <a:pt x="5418057" y="1698511"/>
+                  <a:pt x="5623481" y="1609676"/>
+                  <a:pt x="5771843" y="1630997"/>
+                </a:cubicBezTo>
+                <a:cubicBezTo>
+                  <a:pt x="5925911" y="1652316"/>
+                  <a:pt x="6171278" y="1719830"/>
+                  <a:pt x="6105656" y="1748257"/>
+                </a:cubicBezTo>
+                <a:cubicBezTo>
+                  <a:pt x="6031475" y="1780238"/>
+                  <a:pt x="5766136" y="2146235"/>
+                  <a:pt x="5691955" y="2167555"/>
+                </a:cubicBezTo>
+                <a:cubicBezTo>
+                  <a:pt x="5606362" y="2188875"/>
+                  <a:pt x="5589243" y="2217302"/>
+                  <a:pt x="5475118" y="2348776"/>
+                </a:cubicBezTo>
+                <a:cubicBezTo>
+                  <a:pt x="5398085" y="2437610"/>
+                  <a:pt x="5709074" y="2238623"/>
+                  <a:pt x="5826051" y="2291922"/>
+                </a:cubicBezTo>
+                <a:cubicBezTo>
+                  <a:pt x="5868848" y="2309690"/>
+                  <a:pt x="5552153" y="2554872"/>
+                  <a:pt x="5552153" y="2597513"/>
+                </a:cubicBezTo>
+                <a:cubicBezTo>
+                  <a:pt x="5549300" y="2640153"/>
+                  <a:pt x="5577831" y="2647260"/>
+                  <a:pt x="5603508" y="2647260"/>
+                </a:cubicBezTo>
+                <a:cubicBezTo>
+                  <a:pt x="5660571" y="2647260"/>
+                  <a:pt x="5640599" y="2686346"/>
+                  <a:pt x="5700515" y="2679240"/>
+                </a:cubicBezTo>
+                <a:cubicBezTo>
+                  <a:pt x="5523622" y="2800055"/>
+                  <a:pt x="5418057" y="2778734"/>
+                  <a:pt x="5246870" y="2888889"/>
+                </a:cubicBezTo>
+                <a:cubicBezTo>
+                  <a:pt x="5164130" y="2942189"/>
+                  <a:pt x="4921615" y="3119857"/>
+                  <a:pt x="4836022" y="3169605"/>
+                </a:cubicBezTo>
+                <a:cubicBezTo>
+                  <a:pt x="4801785" y="3187371"/>
+                  <a:pt x="4758988" y="3173158"/>
+                  <a:pt x="4736163" y="3233565"/>
+                </a:cubicBezTo>
+                <a:cubicBezTo>
+                  <a:pt x="4770400" y="3279759"/>
+                  <a:pt x="4816050" y="3254885"/>
+                  <a:pt x="4853141" y="3233565"/>
+                </a:cubicBezTo>
+                <a:cubicBezTo>
+                  <a:pt x="4944440" y="3176711"/>
+                  <a:pt x="4935881" y="3190925"/>
+                  <a:pt x="4944440" y="3226459"/>
+                </a:cubicBezTo>
+                <a:cubicBezTo>
+                  <a:pt x="4972972" y="3350827"/>
+                  <a:pt x="5044300" y="3308186"/>
+                  <a:pt x="5109921" y="3283313"/>
+                </a:cubicBezTo>
+                <a:cubicBezTo>
+                  <a:pt x="5303932" y="3208692"/>
+                  <a:pt x="5500797" y="3215799"/>
+                  <a:pt x="5694809" y="3141178"/>
+                </a:cubicBezTo>
+                <a:cubicBezTo>
+                  <a:pt x="5714781" y="3134070"/>
+                  <a:pt x="5612068" y="3283313"/>
+                  <a:pt x="5566419" y="3301079"/>
+                </a:cubicBezTo>
+                <a:cubicBezTo>
+                  <a:pt x="5515063" y="3322399"/>
+                  <a:pt x="5452294" y="3311739"/>
+                  <a:pt x="5415203" y="3397020"/>
+                </a:cubicBezTo>
+                <a:cubicBezTo>
+                  <a:pt x="5477972" y="3414787"/>
+                  <a:pt x="5552153" y="3372147"/>
+                  <a:pt x="5612068" y="3432554"/>
+                </a:cubicBezTo>
+                <a:cubicBezTo>
+                  <a:pt x="5469413" y="3528494"/>
+                  <a:pt x="5329610" y="3535601"/>
+                  <a:pt x="5206927" y="3599562"/>
+                </a:cubicBezTo>
+                <a:cubicBezTo>
+                  <a:pt x="5192661" y="3706163"/>
+                  <a:pt x="5272548" y="3663523"/>
+                  <a:pt x="5301079" y="3723930"/>
+                </a:cubicBezTo>
+                <a:cubicBezTo>
+                  <a:pt x="5072830" y="3844745"/>
+                  <a:pt x="4564977" y="4232062"/>
+                  <a:pt x="4507915" y="4306683"/>
+                </a:cubicBezTo>
+                <a:cubicBezTo>
+                  <a:pt x="4390937" y="4463031"/>
+                  <a:pt x="3900202" y="4562525"/>
+                  <a:pt x="3982942" y="4587399"/>
+                </a:cubicBezTo>
+                <a:cubicBezTo>
+                  <a:pt x="4051417" y="4608719"/>
+                  <a:pt x="4119891" y="4587399"/>
+                  <a:pt x="4185513" y="4541205"/>
+                </a:cubicBezTo>
+                <a:cubicBezTo>
+                  <a:pt x="4291078" y="4466584"/>
+                  <a:pt x="5010062" y="4523438"/>
+                  <a:pt x="5212633" y="4455924"/>
+                </a:cubicBezTo>
+                <a:cubicBezTo>
+                  <a:pt x="5241164" y="4445264"/>
+                  <a:pt x="5283960" y="4409730"/>
+                  <a:pt x="5312492" y="4473691"/>
+                </a:cubicBezTo>
+                <a:cubicBezTo>
+                  <a:pt x="5098508" y="4704659"/>
+                  <a:pt x="4833169" y="4654913"/>
+                  <a:pt x="4596361" y="4818368"/>
+                </a:cubicBezTo>
+                <a:cubicBezTo>
+                  <a:pt x="4684807" y="4917861"/>
+                  <a:pt x="4776107" y="4907202"/>
+                  <a:pt x="4873113" y="4885882"/>
+                </a:cubicBezTo>
+                <a:cubicBezTo>
+                  <a:pt x="4895938" y="4878775"/>
+                  <a:pt x="4930175" y="4871668"/>
+                  <a:pt x="4935881" y="4914309"/>
+                </a:cubicBezTo>
+                <a:cubicBezTo>
+                  <a:pt x="4941587" y="4967609"/>
+                  <a:pt x="4898790" y="4978270"/>
+                  <a:pt x="4873113" y="5003143"/>
+                </a:cubicBezTo>
+                <a:cubicBezTo>
+                  <a:pt x="4833169" y="5038676"/>
+                  <a:pt x="4773254" y="4999590"/>
+                  <a:pt x="4721898" y="5095530"/>
+                </a:cubicBezTo>
+                <a:cubicBezTo>
+                  <a:pt x="4873113" y="5067104"/>
+                  <a:pt x="4998650" y="5020910"/>
+                  <a:pt x="5132745" y="4949842"/>
+                </a:cubicBezTo>
+                <a:cubicBezTo>
+                  <a:pt x="5121333" y="5006696"/>
+                  <a:pt x="5081390" y="5035123"/>
+                  <a:pt x="5101362" y="5081317"/>
+                </a:cubicBezTo>
+                <a:cubicBezTo>
+                  <a:pt x="5118480" y="5116850"/>
+                  <a:pt x="5164130" y="5131063"/>
+                  <a:pt x="5138452" y="5198578"/>
+                </a:cubicBezTo>
+                <a:cubicBezTo>
+                  <a:pt x="5067125" y="5273199"/>
+                  <a:pt x="4967265" y="5258986"/>
+                  <a:pt x="4904497" y="5362033"/>
+                </a:cubicBezTo>
+                <a:cubicBezTo>
+                  <a:pt x="4818903" y="5507721"/>
+                  <a:pt x="4684807" y="5564575"/>
+                  <a:pt x="4579242" y="5674729"/>
+                </a:cubicBezTo>
+                <a:cubicBezTo>
+                  <a:pt x="4545005" y="5713816"/>
+                  <a:pt x="4313903" y="5841738"/>
+                  <a:pt x="4253988" y="5884379"/>
+                </a:cubicBezTo>
+                <a:cubicBezTo>
+                  <a:pt x="4168395" y="5944786"/>
+                  <a:pt x="4071389" y="5966106"/>
+                  <a:pt x="3985795" y="6069153"/>
+                </a:cubicBezTo>
+                <a:cubicBezTo>
+                  <a:pt x="4065682" y="6086921"/>
+                  <a:pt x="4134157" y="5990979"/>
+                  <a:pt x="4231163" y="6030066"/>
+                </a:cubicBezTo>
+                <a:cubicBezTo>
+                  <a:pt x="4074242" y="6133114"/>
+                  <a:pt x="3931586" y="6182861"/>
+                  <a:pt x="3814609" y="6317889"/>
+                </a:cubicBezTo>
+                <a:cubicBezTo>
+                  <a:pt x="3800343" y="6335656"/>
+                  <a:pt x="3771812" y="6332102"/>
+                  <a:pt x="3751840" y="6339209"/>
+                </a:cubicBezTo>
+                <a:cubicBezTo>
+                  <a:pt x="3529298" y="6406723"/>
+                  <a:pt x="3309608" y="6467130"/>
+                  <a:pt x="3089919" y="6563071"/>
+                </a:cubicBezTo>
+                <a:cubicBezTo>
+                  <a:pt x="3041416" y="6584392"/>
+                  <a:pt x="2955823" y="6595052"/>
+                  <a:pt x="2961529" y="6662566"/>
+                </a:cubicBezTo>
+                <a:cubicBezTo>
+                  <a:pt x="2972941" y="6765613"/>
+                  <a:pt x="3055681" y="6687439"/>
+                  <a:pt x="3107038" y="6673226"/>
+                </a:cubicBezTo>
+                <a:cubicBezTo>
+                  <a:pt x="3269664" y="6634138"/>
+                  <a:pt x="3432292" y="6570178"/>
+                  <a:pt x="3594919" y="6591499"/>
+                </a:cubicBezTo>
+                <a:cubicBezTo>
+                  <a:pt x="3483648" y="6637693"/>
+                  <a:pt x="3372376" y="6680332"/>
+                  <a:pt x="3261106" y="6726527"/>
+                </a:cubicBezTo>
+                <a:cubicBezTo>
+                  <a:pt x="3386642" y="6705206"/>
+                  <a:pt x="3495061" y="6786934"/>
+                  <a:pt x="3620597" y="6740740"/>
+                </a:cubicBezTo>
+                <a:cubicBezTo>
+                  <a:pt x="3660541" y="6726527"/>
+                  <a:pt x="3700484" y="6765613"/>
+                  <a:pt x="3703337" y="6826020"/>
+                </a:cubicBezTo>
+                <a:cubicBezTo>
+                  <a:pt x="3706191" y="6847340"/>
+                  <a:pt x="3700484" y="6865108"/>
+                  <a:pt x="3689072" y="6879321"/>
+                </a:cubicBezTo>
+                <a:lnTo>
+                  <a:pt x="0" y="6879321"/>
+                </a:lnTo>
+                <a:close/>
+              </a:path>
+            </a:pathLst>
+          </a:custGeom>
+          <a:noFill/>
+          <a:extLst>
+            <a:ext uri="{909E8E84-426E-40DD-AFC4-6F175D3DCCD1}">
+              <a14:hiddenFill xmlns:a14="http://schemas.microsoft.com/office/drawing/2010/main">
+                <a:solidFill>
+                  <a:srgbClr val="FFFFFF"/>
+                </a:solidFill>
+              </a14:hiddenFill>
+            </a:ext>
+          </a:extLst>
+        </p:spPr>
+      </p:pic>
+      <mc:AlternateContent xmlns:mc="http://schemas.openxmlformats.org/markup-compatibility/2006">
+        <mc:Choice xmlns:a14="http://schemas.microsoft.com/office/drawing/2010/main" Requires="a14">
           <p:sp>
             <p:nvSpPr>
               <p:cNvPr id="3" name="Content Placeholder 2">
@@ -31577,29 +33547,55 @@
                 <p:ph idx="1"/>
               </p:nvPr>
             </p:nvSpPr>
-            <p:spPr/>
+            <p:spPr>
+              <a:xfrm>
+                <a:off x="5531370" y="1873770"/>
+                <a:ext cx="5822428" cy="4303193"/>
+              </a:xfrm>
+            </p:spPr>
             <p:txBody>
-              <a:bodyPr/>
+              <a:bodyPr>
+                <a:normAutofit fontScale="92500" lnSpcReduction="10000"/>
+              </a:bodyPr>
               <a:lstStyle/>
               <a:p>
-                <a:r>
-                  <a:rPr lang="en-US" dirty="0"/>
-                  <a:t>Approximate the value function using parametrized functions: 					</a:t>
-                </a:r>
+                <a:pPr algn="ctr"/>
+                <a:r>
+                  <a:rPr lang="en-US" sz="1700" dirty="0"/>
+                  <a:t>Approximate the value function using parametrized functions: 	</a:t>
+                </a:r>
+                <a:br>
+                  <a:rPr lang="en-US" sz="1700" dirty="0"/>
+                </a:br>
+                <a14:m>
+                  <m:oMath xmlns:m="http://schemas.openxmlformats.org/officeDocument/2006/math">
+                    <m:r>
+                      <a:rPr lang="en-US" sz="1700" b="0" i="0" smtClean="0">
+                        <a:latin typeface="Cambria Math" panose="02040503050406030204" pitchFamily="18" charset="0"/>
+                      </a:rPr>
+                      <m:t>             </m:t>
+                    </m:r>
+                  </m:oMath>
+                </a14:m>
+                <a:br>
+                  <a:rPr lang="en-US" sz="1700" b="0" i="0" dirty="0">
+                    <a:latin typeface="Cambria Math" panose="02040503050406030204" pitchFamily="18" charset="0"/>
+                  </a:rPr>
+                </a:br>
                 <a14:m>
                   <m:oMath xmlns:m="http://schemas.openxmlformats.org/officeDocument/2006/math">
                     <m:acc>
                       <m:accPr>
                         <m:chr m:val="̂"/>
                         <m:ctrlPr>
-                          <a:rPr lang="en-US" i="1">
+                          <a:rPr lang="en-US" sz="1700" i="1">
                             <a:latin typeface="Cambria Math" panose="02040503050406030204" pitchFamily="18" charset="0"/>
                           </a:rPr>
                         </m:ctrlPr>
                       </m:accPr>
                       <m:e>
                         <m:r>
-                          <a:rPr lang="en-US" b="0" i="1" smtClean="0">
+                          <a:rPr lang="en-US" sz="1700" b="0" i="1">
                             <a:latin typeface="Cambria Math" panose="02040503050406030204" pitchFamily="18" charset="0"/>
                           </a:rPr>
                           <m:t>𝑣</m:t>
@@ -31609,26 +33605,26 @@
                     <m:d>
                       <m:dPr>
                         <m:ctrlPr>
-                          <a:rPr lang="en-US" i="1" dirty="0">
+                          <a:rPr lang="en-US" sz="1700" i="1">
                             <a:latin typeface="Cambria Math" panose="02040503050406030204" pitchFamily="18" charset="0"/>
                           </a:rPr>
                         </m:ctrlPr>
                       </m:dPr>
                       <m:e>
                         <m:r>
-                          <a:rPr lang="en-US" i="1" dirty="0">
+                          <a:rPr lang="en-US" sz="1700" i="1">
                             <a:latin typeface="Cambria Math" panose="02040503050406030204" pitchFamily="18" charset="0"/>
                           </a:rPr>
                           <m:t>𝑠</m:t>
                         </m:r>
                         <m:r>
-                          <a:rPr lang="en-US" i="1" dirty="0">
+                          <a:rPr lang="en-US" sz="1700" i="1">
                             <a:latin typeface="Cambria Math" panose="02040503050406030204" pitchFamily="18" charset="0"/>
                           </a:rPr>
                           <m:t>,</m:t>
                         </m:r>
                         <m:r>
-                          <a:rPr lang="en-US" b="1" i="1" dirty="0">
+                          <a:rPr lang="en-US" sz="1700" b="1" i="1">
                             <a:latin typeface="Cambria Math" panose="02040503050406030204" pitchFamily="18" charset="0"/>
                           </a:rPr>
                           <m:t>𝒘</m:t>
@@ -31638,8 +33634,8 @@
                   </m:oMath>
                 </a14:m>
                 <a:r>
-                  <a:rPr lang="en-US" dirty="0"/>
-                  <a:t>or </a:t>
+                  <a:rPr lang="en-US" sz="1700" dirty="0"/>
+                  <a:t>  or   </a:t>
                 </a:r>
                 <a14:m>
                   <m:oMath xmlns:m="http://schemas.openxmlformats.org/officeDocument/2006/math">
@@ -31647,14 +33643,14 @@
                       <m:accPr>
                         <m:chr m:val="̂"/>
                         <m:ctrlPr>
-                          <a:rPr lang="en-US" i="1">
+                          <a:rPr lang="en-US" sz="1700" i="1">
                             <a:latin typeface="Cambria Math" panose="02040503050406030204" pitchFamily="18" charset="0"/>
                           </a:rPr>
                         </m:ctrlPr>
                       </m:accPr>
                       <m:e>
                         <m:r>
-                          <a:rPr lang="en-US" i="1">
+                          <a:rPr lang="en-US" sz="1700" i="1">
                             <a:latin typeface="Cambria Math" panose="02040503050406030204" pitchFamily="18" charset="0"/>
                           </a:rPr>
                           <m:t>𝑞</m:t>
@@ -31664,38 +33660,38 @@
                     <m:d>
                       <m:dPr>
                         <m:ctrlPr>
-                          <a:rPr lang="en-US" i="1" dirty="0">
+                          <a:rPr lang="en-US" sz="1700" i="1">
                             <a:latin typeface="Cambria Math" panose="02040503050406030204" pitchFamily="18" charset="0"/>
                           </a:rPr>
                         </m:ctrlPr>
                       </m:dPr>
                       <m:e>
                         <m:r>
-                          <a:rPr lang="en-US" i="1" dirty="0">
+                          <a:rPr lang="en-US" sz="1700" i="1">
                             <a:latin typeface="Cambria Math" panose="02040503050406030204" pitchFamily="18" charset="0"/>
                           </a:rPr>
                           <m:t>𝑠</m:t>
                         </m:r>
                         <m:r>
-                          <a:rPr lang="en-US" i="1" dirty="0">
+                          <a:rPr lang="en-US" sz="1700" i="1">
                             <a:latin typeface="Cambria Math" panose="02040503050406030204" pitchFamily="18" charset="0"/>
                           </a:rPr>
                           <m:t>,</m:t>
                         </m:r>
                         <m:r>
-                          <a:rPr lang="en-US" i="1" dirty="0">
+                          <a:rPr lang="en-US" sz="1700" i="1">
                             <a:latin typeface="Cambria Math" panose="02040503050406030204" pitchFamily="18" charset="0"/>
                           </a:rPr>
                           <m:t>𝑎</m:t>
                         </m:r>
                         <m:r>
-                          <a:rPr lang="en-US" i="1" dirty="0">
+                          <a:rPr lang="en-US" sz="1700" i="1">
                             <a:latin typeface="Cambria Math" panose="02040503050406030204" pitchFamily="18" charset="0"/>
                           </a:rPr>
                           <m:t>,</m:t>
                         </m:r>
                         <m:r>
-                          <a:rPr lang="en-US" b="1" i="1" dirty="0">
+                          <a:rPr lang="en-US" sz="1700" b="1" i="1">
                             <a:latin typeface="Cambria Math" panose="02040503050406030204" pitchFamily="18" charset="0"/>
                           </a:rPr>
                           <m:t>𝒘</m:t>
@@ -31704,47 +33700,59 @@
                     </m:d>
                   </m:oMath>
                 </a14:m>
-                <a:endParaRPr lang="en-US" dirty="0"/>
+                <a:endParaRPr lang="en-US" sz="1700" dirty="0"/>
               </a:p>
               <a:p>
-                <a:endParaRPr lang="en-US" dirty="0"/>
+                <a:endParaRPr lang="en-US" sz="1700" dirty="0"/>
               </a:p>
               <a:p>
                 <a:r>
-                  <a:rPr lang="en-US" dirty="0"/>
-                  <a:t>We need to create features that take the interaction of state components into account. Popular are: </a:t>
+                  <a:rPr lang="en-US" sz="1700" dirty="0"/>
+                  <a:t>We need to create </a:t>
+                </a:r>
+                <a:r>
+                  <a:rPr lang="en-US" sz="1700" b="1" dirty="0"/>
+                  <a:t>features</a:t>
+                </a:r>
+                <a:r>
+                  <a:rPr lang="en-US" sz="1700" dirty="0"/>
+                  <a:t> that take the interaction of state components into account. Popular are: </a:t>
                 </a:r>
               </a:p>
               <a:p>
                 <a:pPr lvl="1"/>
                 <a:r>
-                  <a:rPr lang="en-US" dirty="0"/>
+                  <a:rPr lang="en-US" sz="1700" dirty="0"/>
                   <a:t>Fourier basis features </a:t>
                 </a:r>
               </a:p>
               <a:p>
                 <a:pPr lvl="1"/>
                 <a:r>
-                  <a:rPr lang="en-US" dirty="0"/>
-                  <a:t>Tile coding.</a:t>
+                  <a:rPr lang="en-US" sz="1700" dirty="0"/>
+                  <a:t>Tile coding</a:t>
                 </a:r>
               </a:p>
               <a:p>
-                <a:endParaRPr lang="en-US"/>
+                <a:endParaRPr lang="en-US" sz="1700" dirty="0"/>
               </a:p>
               <a:p>
                 <a:r>
-                  <a:rPr lang="en-US"/>
+                  <a:rPr lang="en-US" sz="1700" dirty="0"/>
                   <a:t>Use </a:t>
                 </a:r>
                 <a:r>
-                  <a:rPr lang="en-US" dirty="0"/>
-                  <a:t>semi-gradient descent to learn </a:t>
+                  <a:rPr lang="en-US" sz="1700" b="1" dirty="0"/>
+                  <a:t>SGD or semi-gradient descent </a:t>
+                </a:r>
+                <a:r>
+                  <a:rPr lang="en-US" sz="1700" dirty="0"/>
+                  <a:t>to learn </a:t>
                 </a:r>
                 <a14:m>
                   <m:oMath xmlns:m="http://schemas.openxmlformats.org/officeDocument/2006/math">
                     <m:r>
-                      <a:rPr lang="en-US" b="1" i="1" smtClean="0">
+                      <a:rPr lang="en-US" sz="1700" b="1" i="1">
                         <a:latin typeface="Cambria Math" panose="02040503050406030204" pitchFamily="18" charset="0"/>
                       </a:rPr>
                       <m:t>𝒘</m:t>
@@ -31752,34 +33760,122 @@
                   </m:oMath>
                 </a14:m>
                 <a:r>
-                  <a:rPr lang="en-US" dirty="0"/>
-                  <a:t>.</a:t>
-                </a:r>
+                  <a:rPr lang="en-US" sz="1700" dirty="0"/>
+                  <a:t> from samples by minimizing </a:t>
+                </a:r>
+                <a14:m>
+                  <m:oMath xmlns:m="http://schemas.openxmlformats.org/officeDocument/2006/math">
+                    <m:acc>
+                      <m:accPr>
+                        <m:chr m:val="̅"/>
+                        <m:ctrlPr>
+                          <a:rPr lang="en-US" sz="1800" i="1">
+                            <a:latin typeface="Cambria Math" panose="02040503050406030204" pitchFamily="18" charset="0"/>
+                          </a:rPr>
+                        </m:ctrlPr>
+                      </m:accPr>
+                      <m:e>
+                        <m:r>
+                          <a:rPr lang="en-US" sz="1800" i="1">
+                            <a:latin typeface="Cambria Math" panose="02040503050406030204" pitchFamily="18" charset="0"/>
+                          </a:rPr>
+                          <m:t>𝑉𝐸</m:t>
+                        </m:r>
+                      </m:e>
+                    </m:acc>
+                  </m:oMath>
+                </a14:m>
+                <a:r>
+                  <a:rPr lang="en-US" sz="1700" dirty="0"/>
+                  <a:t>. The samples already follow the on-policy distribution </a:t>
+                </a:r>
+                <a14:m>
+                  <m:oMath xmlns:m="http://schemas.openxmlformats.org/officeDocument/2006/math">
+                    <m:r>
+                      <a:rPr lang="en-US" sz="1700" b="0" i="1" smtClean="0">
+                        <a:latin typeface="Cambria Math" panose="02040503050406030204" pitchFamily="18" charset="0"/>
+                      </a:rPr>
+                      <m:t>𝜇</m:t>
+                    </m:r>
+                    <m:d>
+                      <m:dPr>
+                        <m:ctrlPr>
+                          <a:rPr lang="en-US" sz="1700" b="0" i="1" smtClean="0">
+                            <a:latin typeface="Cambria Math" panose="02040503050406030204" pitchFamily="18" charset="0"/>
+                          </a:rPr>
+                        </m:ctrlPr>
+                      </m:dPr>
+                      <m:e>
+                        <m:r>
+                          <a:rPr lang="en-US" sz="1700" b="0" i="1" smtClean="0">
+                            <a:latin typeface="Cambria Math" panose="02040503050406030204" pitchFamily="18" charset="0"/>
+                          </a:rPr>
+                          <m:t>𝑠</m:t>
+                        </m:r>
+                      </m:e>
+                    </m:d>
+                    <m:r>
+                      <a:rPr lang="en-US" sz="1700" b="0" i="1" smtClean="0">
+                        <a:latin typeface="Cambria Math" panose="02040503050406030204" pitchFamily="18" charset="0"/>
+                      </a:rPr>
+                      <m:t>.</m:t>
+                    </m:r>
+                  </m:oMath>
+                </a14:m>
+                <a:endParaRPr lang="en-US" sz="1700" dirty="0"/>
               </a:p>
               <a:p>
                 <a:r>
-                  <a:rPr lang="en-US" dirty="0"/>
-                  <a:t>Issues are the choice of </a:t>
+                  <a:rPr lang="en-US" sz="1700" dirty="0"/>
+                  <a:t>Issue: </a:t>
+                </a:r>
+                <a:r>
+                  <a:rPr lang="en-US" sz="1700" b="1" dirty="0"/>
+                  <a:t>Convergence</a:t>
+                </a:r>
+              </a:p>
+              <a:p>
+                <a:pPr lvl="1"/>
+                <a:r>
+                  <a:rPr lang="en-US" sz="1300" dirty="0"/>
+                  <a:t>Biased target estimates?</a:t>
+                </a:r>
+              </a:p>
+              <a:p>
+                <a:pPr lvl="1"/>
+                <a:r>
+                  <a:rPr lang="en-US" sz="1300" dirty="0"/>
+                  <a:t>Linear vs. non-linear approximation.</a:t>
+                </a:r>
+              </a:p>
+              <a:p>
+                <a:pPr lvl="1"/>
+                <a:r>
+                  <a:rPr lang="en-US" sz="1300" dirty="0"/>
+                  <a:t>choice of </a:t>
                 </a:r>
                 <a14:m>
                   <m:oMath xmlns:m="http://schemas.openxmlformats.org/officeDocument/2006/math">
                     <m:r>
-                      <a:rPr lang="en-US" b="0" i="1" smtClean="0">
+                      <a:rPr lang="en-US" sz="1300" b="0" i="1">
                         <a:latin typeface="Cambria Math" panose="02040503050406030204" pitchFamily="18" charset="0"/>
                       </a:rPr>
                       <m:t>𝛼</m:t>
+                    </m:r>
+                    <m:r>
+                      <a:rPr lang="en-US" sz="1300" b="0" i="1" smtClean="0">
+                        <a:latin typeface="Cambria Math" panose="02040503050406030204" pitchFamily="18" charset="0"/>
+                      </a:rPr>
+                      <m:t>.</m:t>
                     </m:r>
                   </m:oMath>
                 </a14:m>
-                <a:r>
-                  <a:rPr lang="en-US" dirty="0"/>
-                  <a:t>.</a:t>
-                </a:r>
+                <a:endParaRPr lang="en-US" sz="1300" dirty="0"/>
               </a:p>
             </p:txBody>
           </p:sp>
         </mc:Choice>
-        <mc:Fallback xmlns="">
+        <mc:Fallback>
           <p:sp>
             <p:nvSpPr>
               <p:cNvPr id="3" name="Content Placeholder 2">
@@ -31797,10 +33893,14 @@
               </p:nvPr>
             </p:nvSpPr>
             <p:spPr>
+              <a:xfrm>
+                <a:off x="5531370" y="1873770"/>
+                <a:ext cx="5822428" cy="4303193"/>
+              </a:xfrm>
               <a:blipFill>
-                <a:blip r:embed="rId2"/>
+                <a:blip r:embed="rId3"/>
                 <a:stretch>
-                  <a:fillRect l="-1043" t="-2168"/>
+                  <a:fillRect l="-419" t="-1416" r="-1257"/>
                 </a:stretch>
               </a:blipFill>
             </p:spPr>
@@ -31829,6 +33929,390 @@
   <p:clrMapOvr>
     <a:masterClrMapping/>
   </p:clrMapOvr>
+  <p:timing>
+    <p:tnLst>
+      <p:par>
+        <p:cTn id="1" dur="indefinite" restart="never" nodeType="tmRoot">
+          <p:childTnLst>
+            <p:seq concurrent="1" nextAc="seek">
+              <p:cTn id="2" dur="indefinite" nodeType="mainSeq">
+                <p:childTnLst>
+                  <p:par>
+                    <p:cTn id="3" fill="hold">
+                      <p:stCondLst>
+                        <p:cond delay="indefinite"/>
+                      </p:stCondLst>
+                      <p:childTnLst>
+                        <p:par>
+                          <p:cTn id="4" fill="hold">
+                            <p:stCondLst>
+                              <p:cond delay="0"/>
+                            </p:stCondLst>
+                            <p:childTnLst>
+                              <p:par>
+                                <p:cTn id="5" presetID="1" presetClass="entr" presetSubtype="0" fill="hold" grpId="0" nodeType="clickEffect">
+                                  <p:stCondLst>
+                                    <p:cond delay="0"/>
+                                  </p:stCondLst>
+                                  <p:childTnLst>
+                                    <p:set>
+                                      <p:cBhvr>
+                                        <p:cTn id="6" dur="1" fill="hold">
+                                          <p:stCondLst>
+                                            <p:cond delay="0"/>
+                                          </p:stCondLst>
+                                        </p:cTn>
+                                        <p:tgtEl>
+                                          <p:spTgt spid="3">
+                                            <p:txEl>
+                                              <p:pRg st="0" end="0"/>
+                                            </p:txEl>
+                                          </p:spTgt>
+                                        </p:tgtEl>
+                                        <p:attrNameLst>
+                                          <p:attrName>style.visibility</p:attrName>
+                                        </p:attrNameLst>
+                                      </p:cBhvr>
+                                      <p:to>
+                                        <p:strVal val="visible"/>
+                                      </p:to>
+                                    </p:set>
+                                  </p:childTnLst>
+                                </p:cTn>
+                              </p:par>
+                            </p:childTnLst>
+                          </p:cTn>
+                        </p:par>
+                      </p:childTnLst>
+                    </p:cTn>
+                  </p:par>
+                  <p:par>
+                    <p:cTn id="7" fill="hold">
+                      <p:stCondLst>
+                        <p:cond delay="indefinite"/>
+                      </p:stCondLst>
+                      <p:childTnLst>
+                        <p:par>
+                          <p:cTn id="8" fill="hold">
+                            <p:stCondLst>
+                              <p:cond delay="0"/>
+                            </p:stCondLst>
+                            <p:childTnLst>
+                              <p:par>
+                                <p:cTn id="9" presetID="1" presetClass="entr" presetSubtype="0" fill="hold" grpId="0" nodeType="clickEffect">
+                                  <p:stCondLst>
+                                    <p:cond delay="0"/>
+                                  </p:stCondLst>
+                                  <p:childTnLst>
+                                    <p:set>
+                                      <p:cBhvr>
+                                        <p:cTn id="10" dur="1" fill="hold">
+                                          <p:stCondLst>
+                                            <p:cond delay="0"/>
+                                          </p:stCondLst>
+                                        </p:cTn>
+                                        <p:tgtEl>
+                                          <p:spTgt spid="3">
+                                            <p:txEl>
+                                              <p:pRg st="2" end="2"/>
+                                            </p:txEl>
+                                          </p:spTgt>
+                                        </p:tgtEl>
+                                        <p:attrNameLst>
+                                          <p:attrName>style.visibility</p:attrName>
+                                        </p:attrNameLst>
+                                      </p:cBhvr>
+                                      <p:to>
+                                        <p:strVal val="visible"/>
+                                      </p:to>
+                                    </p:set>
+                                  </p:childTnLst>
+                                </p:cTn>
+                              </p:par>
+                              <p:par>
+                                <p:cTn id="11" presetID="1" presetClass="entr" presetSubtype="0" fill="hold" grpId="0" nodeType="withEffect">
+                                  <p:stCondLst>
+                                    <p:cond delay="0"/>
+                                  </p:stCondLst>
+                                  <p:childTnLst>
+                                    <p:set>
+                                      <p:cBhvr>
+                                        <p:cTn id="12" dur="1" fill="hold">
+                                          <p:stCondLst>
+                                            <p:cond delay="0"/>
+                                          </p:stCondLst>
+                                        </p:cTn>
+                                        <p:tgtEl>
+                                          <p:spTgt spid="3">
+                                            <p:txEl>
+                                              <p:pRg st="3" end="3"/>
+                                            </p:txEl>
+                                          </p:spTgt>
+                                        </p:tgtEl>
+                                        <p:attrNameLst>
+                                          <p:attrName>style.visibility</p:attrName>
+                                        </p:attrNameLst>
+                                      </p:cBhvr>
+                                      <p:to>
+                                        <p:strVal val="visible"/>
+                                      </p:to>
+                                    </p:set>
+                                  </p:childTnLst>
+                                </p:cTn>
+                              </p:par>
+                              <p:par>
+                                <p:cTn id="13" presetID="1" presetClass="entr" presetSubtype="0" fill="hold" grpId="0" nodeType="withEffect">
+                                  <p:stCondLst>
+                                    <p:cond delay="0"/>
+                                  </p:stCondLst>
+                                  <p:childTnLst>
+                                    <p:set>
+                                      <p:cBhvr>
+                                        <p:cTn id="14" dur="1" fill="hold">
+                                          <p:stCondLst>
+                                            <p:cond delay="0"/>
+                                          </p:stCondLst>
+                                        </p:cTn>
+                                        <p:tgtEl>
+                                          <p:spTgt spid="3">
+                                            <p:txEl>
+                                              <p:pRg st="4" end="4"/>
+                                            </p:txEl>
+                                          </p:spTgt>
+                                        </p:tgtEl>
+                                        <p:attrNameLst>
+                                          <p:attrName>style.visibility</p:attrName>
+                                        </p:attrNameLst>
+                                      </p:cBhvr>
+                                      <p:to>
+                                        <p:strVal val="visible"/>
+                                      </p:to>
+                                    </p:set>
+                                  </p:childTnLst>
+                                </p:cTn>
+                              </p:par>
+                            </p:childTnLst>
+                          </p:cTn>
+                        </p:par>
+                      </p:childTnLst>
+                    </p:cTn>
+                  </p:par>
+                  <p:par>
+                    <p:cTn id="15" fill="hold">
+                      <p:stCondLst>
+                        <p:cond delay="indefinite"/>
+                      </p:stCondLst>
+                      <p:childTnLst>
+                        <p:par>
+                          <p:cTn id="16" fill="hold">
+                            <p:stCondLst>
+                              <p:cond delay="0"/>
+                            </p:stCondLst>
+                            <p:childTnLst>
+                              <p:par>
+                                <p:cTn id="17" presetID="1" presetClass="entr" presetSubtype="0" fill="hold" grpId="0" nodeType="clickEffect">
+                                  <p:stCondLst>
+                                    <p:cond delay="0"/>
+                                  </p:stCondLst>
+                                  <p:childTnLst>
+                                    <p:set>
+                                      <p:cBhvr>
+                                        <p:cTn id="18" dur="1" fill="hold">
+                                          <p:stCondLst>
+                                            <p:cond delay="0"/>
+                                          </p:stCondLst>
+                                        </p:cTn>
+                                        <p:tgtEl>
+                                          <p:spTgt spid="3">
+                                            <p:txEl>
+                                              <p:pRg st="6" end="6"/>
+                                            </p:txEl>
+                                          </p:spTgt>
+                                        </p:tgtEl>
+                                        <p:attrNameLst>
+                                          <p:attrName>style.visibility</p:attrName>
+                                        </p:attrNameLst>
+                                      </p:cBhvr>
+                                      <p:to>
+                                        <p:strVal val="visible"/>
+                                      </p:to>
+                                    </p:set>
+                                  </p:childTnLst>
+                                </p:cTn>
+                              </p:par>
+                            </p:childTnLst>
+                          </p:cTn>
+                        </p:par>
+                      </p:childTnLst>
+                    </p:cTn>
+                  </p:par>
+                  <p:par>
+                    <p:cTn id="19" fill="hold">
+                      <p:stCondLst>
+                        <p:cond delay="indefinite"/>
+                      </p:stCondLst>
+                      <p:childTnLst>
+                        <p:par>
+                          <p:cTn id="20" fill="hold">
+                            <p:stCondLst>
+                              <p:cond delay="0"/>
+                            </p:stCondLst>
+                            <p:childTnLst>
+                              <p:par>
+                                <p:cTn id="21" presetID="1" presetClass="entr" presetSubtype="0" fill="hold" grpId="0" nodeType="clickEffect">
+                                  <p:stCondLst>
+                                    <p:cond delay="0"/>
+                                  </p:stCondLst>
+                                  <p:childTnLst>
+                                    <p:set>
+                                      <p:cBhvr>
+                                        <p:cTn id="22" dur="1" fill="hold">
+                                          <p:stCondLst>
+                                            <p:cond delay="0"/>
+                                          </p:stCondLst>
+                                        </p:cTn>
+                                        <p:tgtEl>
+                                          <p:spTgt spid="3">
+                                            <p:txEl>
+                                              <p:pRg st="7" end="7"/>
+                                            </p:txEl>
+                                          </p:spTgt>
+                                        </p:tgtEl>
+                                        <p:attrNameLst>
+                                          <p:attrName>style.visibility</p:attrName>
+                                        </p:attrNameLst>
+                                      </p:cBhvr>
+                                      <p:to>
+                                        <p:strVal val="visible"/>
+                                      </p:to>
+                                    </p:set>
+                                  </p:childTnLst>
+                                </p:cTn>
+                              </p:par>
+                              <p:par>
+                                <p:cTn id="23" presetID="1" presetClass="entr" presetSubtype="0" fill="hold" grpId="0" nodeType="withEffect">
+                                  <p:stCondLst>
+                                    <p:cond delay="0"/>
+                                  </p:stCondLst>
+                                  <p:childTnLst>
+                                    <p:set>
+                                      <p:cBhvr>
+                                        <p:cTn id="24" dur="1" fill="hold">
+                                          <p:stCondLst>
+                                            <p:cond delay="0"/>
+                                          </p:stCondLst>
+                                        </p:cTn>
+                                        <p:tgtEl>
+                                          <p:spTgt spid="3">
+                                            <p:txEl>
+                                              <p:pRg st="8" end="8"/>
+                                            </p:txEl>
+                                          </p:spTgt>
+                                        </p:tgtEl>
+                                        <p:attrNameLst>
+                                          <p:attrName>style.visibility</p:attrName>
+                                        </p:attrNameLst>
+                                      </p:cBhvr>
+                                      <p:to>
+                                        <p:strVal val="visible"/>
+                                      </p:to>
+                                    </p:set>
+                                  </p:childTnLst>
+                                </p:cTn>
+                              </p:par>
+                              <p:par>
+                                <p:cTn id="25" presetID="1" presetClass="entr" presetSubtype="0" fill="hold" grpId="0" nodeType="withEffect">
+                                  <p:stCondLst>
+                                    <p:cond delay="0"/>
+                                  </p:stCondLst>
+                                  <p:childTnLst>
+                                    <p:set>
+                                      <p:cBhvr>
+                                        <p:cTn id="26" dur="1" fill="hold">
+                                          <p:stCondLst>
+                                            <p:cond delay="0"/>
+                                          </p:stCondLst>
+                                        </p:cTn>
+                                        <p:tgtEl>
+                                          <p:spTgt spid="3">
+                                            <p:txEl>
+                                              <p:pRg st="9" end="9"/>
+                                            </p:txEl>
+                                          </p:spTgt>
+                                        </p:tgtEl>
+                                        <p:attrNameLst>
+                                          <p:attrName>style.visibility</p:attrName>
+                                        </p:attrNameLst>
+                                      </p:cBhvr>
+                                      <p:to>
+                                        <p:strVal val="visible"/>
+                                      </p:to>
+                                    </p:set>
+                                  </p:childTnLst>
+                                </p:cTn>
+                              </p:par>
+                              <p:par>
+                                <p:cTn id="27" presetID="1" presetClass="entr" presetSubtype="0" fill="hold" grpId="0" nodeType="withEffect">
+                                  <p:stCondLst>
+                                    <p:cond delay="0"/>
+                                  </p:stCondLst>
+                                  <p:childTnLst>
+                                    <p:set>
+                                      <p:cBhvr>
+                                        <p:cTn id="28" dur="1" fill="hold">
+                                          <p:stCondLst>
+                                            <p:cond delay="0"/>
+                                          </p:stCondLst>
+                                        </p:cTn>
+                                        <p:tgtEl>
+                                          <p:spTgt spid="3">
+                                            <p:txEl>
+                                              <p:pRg st="10" end="10"/>
+                                            </p:txEl>
+                                          </p:spTgt>
+                                        </p:tgtEl>
+                                        <p:attrNameLst>
+                                          <p:attrName>style.visibility</p:attrName>
+                                        </p:attrNameLst>
+                                      </p:cBhvr>
+                                      <p:to>
+                                        <p:strVal val="visible"/>
+                                      </p:to>
+                                    </p:set>
+                                  </p:childTnLst>
+                                </p:cTn>
+                              </p:par>
+                            </p:childTnLst>
+                          </p:cTn>
+                        </p:par>
+                      </p:childTnLst>
+                    </p:cTn>
+                  </p:par>
+                </p:childTnLst>
+              </p:cTn>
+              <p:prevCondLst>
+                <p:cond evt="onPrev" delay="0">
+                  <p:tgtEl>
+                    <p:sldTgt/>
+                  </p:tgtEl>
+                </p:cond>
+              </p:prevCondLst>
+              <p:nextCondLst>
+                <p:cond evt="onNext" delay="0">
+                  <p:tgtEl>
+                    <p:sldTgt/>
+                  </p:tgtEl>
+                </p:cond>
+              </p:nextCondLst>
+            </p:seq>
+          </p:childTnLst>
+        </p:cTn>
+      </p:par>
+    </p:tnLst>
+    <p:bldLst>
+      <p:bldP spid="3" grpId="0" build="p"/>
+    </p:bldLst>
+  </p:timing>
 </p:sld>
 </file>
 
@@ -31969,8 +34453,8 @@
           </a:p>
         </p:txBody>
       </p:sp>
-      <mc:AlternateContent xmlns:mc="http://schemas.openxmlformats.org/markup-compatibility/2006">
-        <mc:Choice xmlns:a14="http://schemas.microsoft.com/office/drawing/2010/main" Requires="a14">
+      <mc:AlternateContent xmlns:mc="http://schemas.openxmlformats.org/markup-compatibility/2006" xmlns:a14="http://schemas.microsoft.com/office/drawing/2010/main">
+        <mc:Choice Requires="a14">
           <p:sp>
             <p:nvSpPr>
               <p:cNvPr id="5" name="Content Placeholder 4">
@@ -32401,7 +34885,7 @@
             </p:txBody>
           </p:sp>
         </mc:Choice>
-        <mc:Fallback>
+        <mc:Fallback xmlns="">
           <p:sp>
             <p:nvSpPr>
               <p:cNvPr id="5" name="Content Placeholder 4">
@@ -32753,8 +35237,8 @@
           </a:p>
         </p:txBody>
       </p:sp>
-      <mc:AlternateContent xmlns:mc="http://schemas.openxmlformats.org/markup-compatibility/2006">
-        <mc:Choice xmlns:a14="http://schemas.microsoft.com/office/drawing/2010/main" Requires="a14">
+      <mc:AlternateContent xmlns:mc="http://schemas.openxmlformats.org/markup-compatibility/2006" xmlns:a14="http://schemas.microsoft.com/office/drawing/2010/main">
+        <mc:Choice Requires="a14">
           <p:sp>
             <p:nvSpPr>
               <p:cNvPr id="3" name="Content Placeholder 2">
@@ -33490,7 +35974,7 @@
             </p:txBody>
           </p:sp>
         </mc:Choice>
-        <mc:Fallback>
+        <mc:Fallback xmlns="">
           <p:sp>
             <p:nvSpPr>
               <p:cNvPr id="3" name="Content Placeholder 2">
@@ -34024,8 +36508,8 @@
           </p:sp>
         </mc:Fallback>
       </mc:AlternateContent>
-      <mc:AlternateContent xmlns:mc="http://schemas.openxmlformats.org/markup-compatibility/2006">
-        <mc:Choice xmlns:a14="http://schemas.microsoft.com/office/drawing/2010/main" Requires="a14">
+      <mc:AlternateContent xmlns:mc="http://schemas.openxmlformats.org/markup-compatibility/2006" xmlns:a14="http://schemas.microsoft.com/office/drawing/2010/main">
+        <mc:Choice Requires="a14">
           <p:sp>
             <p:nvSpPr>
               <p:cNvPr id="3" name="Content Placeholder 2">
@@ -34050,7 +36534,7 @@
             </p:spPr>
             <p:txBody>
               <a:bodyPr>
-                <a:normAutofit fontScale="47500" lnSpcReduction="20000"/>
+                <a:normAutofit fontScale="55000" lnSpcReduction="20000"/>
               </a:bodyPr>
               <a:lstStyle/>
               <a:p>
@@ -34065,11 +36549,11 @@
                 <a14:m>
                   <m:oMath xmlns:m="http://schemas.openxmlformats.org/officeDocument/2006/math">
                     <m:r>
-                      <a:rPr lang="en-US" b="1">
+                      <a:rPr lang="en-US" b="1" i="1">
                         <a:latin typeface="Cambria Math" panose="02040503050406030204" pitchFamily="18" charset="0"/>
                         <a:ea typeface="Cambria Math" panose="02040503050406030204" pitchFamily="18" charset="0"/>
                       </a:rPr>
-                      <m:t>𝐰</m:t>
+                      <m:t>𝒘</m:t>
                     </m:r>
                   </m:oMath>
                 </a14:m>
@@ -34174,7 +36658,29 @@
                 </a:r>
                 <a:r>
                   <a:rPr lang="en-US" dirty="0"/>
-                  <a:t>: Any change will also affect the prediction for other states and thus reduce or increase their error!</a:t>
+                  <a:t>: Any change of </a:t>
+                </a:r>
+                <a14:m>
+                  <m:oMath xmlns:m="http://schemas.openxmlformats.org/officeDocument/2006/math">
+                    <m:r>
+                      <a:rPr lang="en-US" b="1" i="1">
+                        <a:latin typeface="Cambria Math" panose="02040503050406030204" pitchFamily="18" charset="0"/>
+                        <a:ea typeface="Cambria Math" panose="02040503050406030204" pitchFamily="18" charset="0"/>
+                      </a:rPr>
+                      <m:t>𝒘</m:t>
+                    </m:r>
+                    <m:r>
+                      <a:rPr lang="en-US" b="1" i="1">
+                        <a:latin typeface="Cambria Math" panose="02040503050406030204" pitchFamily="18" charset="0"/>
+                        <a:ea typeface="Cambria Math" panose="02040503050406030204" pitchFamily="18" charset="0"/>
+                      </a:rPr>
+                      <m:t> </m:t>
+                    </m:r>
+                  </m:oMath>
+                </a14:m>
+                <a:r>
+                  <a:rPr lang="en-US" dirty="0"/>
+                  <a:t>will also affect the prediction for other states and thus reduce or increase their error!</a:t>
                 </a:r>
               </a:p>
               <a:p>
@@ -34184,11 +36690,8 @@
                 </a:r>
                 <a:r>
                   <a:rPr lang="en-US" dirty="0"/>
-                  <a:t>for state s: </a:t>
-                </a:r>
-                <a:br>
-                  <a:rPr lang="en-US" dirty="0"/>
-                </a:br>
+                  <a:t>for state s:                                                  </a:t>
+                </a:r>
                 <a14:m>
                   <m:oMath xmlns:m="http://schemas.openxmlformats.org/officeDocument/2006/math">
                     <m:d>
@@ -34316,9 +36819,6 @@
                 <a:br>
                   <a:rPr lang="en-US" dirty="0"/>
                 </a:br>
-                <a:br>
-                  <a:rPr lang="en-US" dirty="0"/>
-                </a:br>
                 <a14:m>
                   <m:oMath xmlns:m="http://schemas.openxmlformats.org/officeDocument/2006/math">
                     <m:r>
@@ -34403,9 +36903,6 @@
                     </m:r>
                   </m:oMath>
                 </a14:m>
-                <a:endParaRPr lang="en-US" dirty="0"/>
-              </a:p>
-              <a:p>
                 <a:endParaRPr lang="en-US" i="1" dirty="0">
                   <a:latin typeface="Cambria Math" panose="02040503050406030204" pitchFamily="18" charset="0"/>
                 </a:endParaRPr>
@@ -34549,7 +37046,7 @@
             </p:txBody>
           </p:sp>
         </mc:Choice>
-        <mc:Fallback>
+        <mc:Fallback xmlns="">
           <p:sp>
             <p:nvSpPr>
               <p:cNvPr id="3" name="Content Placeholder 2">
@@ -34574,7 +37071,7 @@
               <a:blipFill>
                 <a:blip r:embed="rId3"/>
                 <a:stretch>
-                  <a:fillRect l="-58" t="-1452"/>
+                  <a:fillRect l="-174" t="-1815" b="-1633"/>
                 </a:stretch>
               </a:blipFill>
             </p:spPr>
@@ -34911,45 +37408,107 @@
           </p:sp>
         </mc:Fallback>
       </mc:AlternateContent>
-      <p:sp>
-        <p:nvSpPr>
-          <p:cNvPr id="4" name="TextBox 3">
-            <a:extLst>
-              <a:ext uri="{FF2B5EF4-FFF2-40B4-BE49-F238E27FC236}">
-                <a16:creationId xmlns:a16="http://schemas.microsoft.com/office/drawing/2014/main" id="{95FF9CD1-DC49-A6AF-FFC2-346163866CD0}"/>
-              </a:ext>
-            </a:extLst>
-          </p:cNvPr>
-          <p:cNvSpPr txBox="1"/>
-          <p:nvPr/>
-        </p:nvSpPr>
-        <p:spPr>
-          <a:xfrm>
-            <a:off x="956281" y="6185097"/>
-            <a:ext cx="10114241" cy="307777"/>
-          </a:xfrm>
-          <a:prstGeom prst="rect">
-            <a:avLst/>
-          </a:prstGeom>
-          <a:noFill/>
-        </p:spPr>
-        <p:txBody>
-          <a:bodyPr wrap="square" rtlCol="0">
-            <a:spAutoFit/>
-          </a:bodyPr>
-          <a:lstStyle/>
-          <a:p>
-            <a:r>
-              <a:rPr lang="en-US" sz="1400" baseline="30000" dirty="0"/>
-              <a:t>*</a:t>
-            </a:r>
-            <a:r>
-              <a:rPr lang="en-US" sz="1400" dirty="0"/>
-              <a:t>Ergodic: The Markov process is irreducible (all states are reachable) and aperiodic (does not get stuck).</a:t>
-            </a:r>
-          </a:p>
-        </p:txBody>
-      </p:sp>
+      <mc:AlternateContent xmlns:mc="http://schemas.openxmlformats.org/markup-compatibility/2006" xmlns:a14="http://schemas.microsoft.com/office/drawing/2010/main">
+        <mc:Choice Requires="a14">
+          <p:sp>
+            <p:nvSpPr>
+              <p:cNvPr id="4" name="TextBox 3">
+                <a:extLst>
+                  <a:ext uri="{FF2B5EF4-FFF2-40B4-BE49-F238E27FC236}">
+                    <a16:creationId xmlns:a16="http://schemas.microsoft.com/office/drawing/2014/main" id="{95FF9CD1-DC49-A6AF-FFC2-346163866CD0}"/>
+                  </a:ext>
+                </a:extLst>
+              </p:cNvPr>
+              <p:cNvSpPr txBox="1"/>
+              <p:nvPr/>
+            </p:nvSpPr>
+            <p:spPr>
+              <a:xfrm>
+                <a:off x="956281" y="6185097"/>
+                <a:ext cx="10114241" cy="307777"/>
+              </a:xfrm>
+              <a:prstGeom prst="rect">
+                <a:avLst/>
+              </a:prstGeom>
+              <a:noFill/>
+            </p:spPr>
+            <p:txBody>
+              <a:bodyPr wrap="square" rtlCol="0">
+                <a:spAutoFit/>
+              </a:bodyPr>
+              <a:lstStyle/>
+              <a:p>
+                <a:r>
+                  <a:rPr lang="en-US" sz="1400" baseline="30000" dirty="0"/>
+                  <a:t>*</a:t>
+                </a:r>
+                <a:r>
+                  <a:rPr lang="en-US" sz="1400" dirty="0"/>
+                  <a:t>Ergodic: The Markov process when following </a:t>
+                </a:r>
+                <a14:m>
+                  <m:oMath xmlns:m="http://schemas.openxmlformats.org/officeDocument/2006/math">
+                    <m:r>
+                      <a:rPr lang="en-US" sz="1400" b="0" i="1" smtClean="0">
+                        <a:latin typeface="Cambria Math" panose="02040503050406030204" pitchFamily="18" charset="0"/>
+                      </a:rPr>
+                      <m:t>𝜋</m:t>
+                    </m:r>
+                  </m:oMath>
+                </a14:m>
+                <a:r>
+                  <a:rPr lang="en-US" sz="1400" dirty="0"/>
+                  <a:t> is irreducible (all states are reachable) and aperiodic (does not get stuck).</a:t>
+                </a:r>
+              </a:p>
+            </p:txBody>
+          </p:sp>
+        </mc:Choice>
+        <mc:Fallback xmlns="">
+          <p:sp>
+            <p:nvSpPr>
+              <p:cNvPr id="4" name="TextBox 3">
+                <a:extLst>
+                  <a:ext uri="{FF2B5EF4-FFF2-40B4-BE49-F238E27FC236}">
+                    <a16:creationId xmlns:a16="http://schemas.microsoft.com/office/drawing/2014/main" id="{95FF9CD1-DC49-A6AF-FFC2-346163866CD0}"/>
+                  </a:ext>
+                </a:extLst>
+              </p:cNvPr>
+              <p:cNvSpPr txBox="1">
+                <a:spLocks noRot="1" noChangeAspect="1" noMove="1" noResize="1" noEditPoints="1" noAdjustHandles="1" noChangeArrowheads="1" noChangeShapeType="1" noTextEdit="1"/>
+              </p:cNvSpPr>
+              <p:nvPr/>
+            </p:nvSpPr>
+            <p:spPr>
+              <a:xfrm>
+                <a:off x="956281" y="6185097"/>
+                <a:ext cx="10114241" cy="307777"/>
+              </a:xfrm>
+              <a:prstGeom prst="rect">
+                <a:avLst/>
+              </a:prstGeom>
+              <a:blipFill>
+                <a:blip r:embed="rId5"/>
+                <a:stretch>
+                  <a:fillRect t="-4000" b="-20000"/>
+                </a:stretch>
+              </a:blipFill>
+            </p:spPr>
+            <p:txBody>
+              <a:bodyPr/>
+              <a:lstStyle/>
+              <a:p>
+                <a:r>
+                  <a:rPr lang="en-US">
+                    <a:noFill/>
+                  </a:rPr>
+                  <a:t> </a:t>
+                </a:r>
+              </a:p>
+            </p:txBody>
+          </p:sp>
+        </mc:Fallback>
+      </mc:AlternateContent>
       <p:sp>
         <p:nvSpPr>
           <p:cNvPr id="6" name="Speech Bubble: Rectangle with Corners Rounded 5">
@@ -35003,6 +37562,57 @@
             <a:r>
               <a:rPr lang="en-US" sz="1200" dirty="0"/>
               <a:t>: Squared errors useful mathematical and statistical properties that make learning and optimization easier and more effective.</a:t>
+            </a:r>
+          </a:p>
+        </p:txBody>
+      </p:sp>
+      <p:sp>
+        <p:nvSpPr>
+          <p:cNvPr id="7" name="TextBox 6">
+            <a:extLst>
+              <a:ext uri="{FF2B5EF4-FFF2-40B4-BE49-F238E27FC236}">
+                <a16:creationId xmlns:a16="http://schemas.microsoft.com/office/drawing/2014/main" id="{4DBB76A8-1014-AF99-CD8E-82278A692321}"/>
+              </a:ext>
+            </a:extLst>
+          </p:cNvPr>
+          <p:cNvSpPr txBox="1"/>
+          <p:nvPr/>
+        </p:nvSpPr>
+        <p:spPr>
+          <a:xfrm>
+            <a:off x="9978705" y="3888297"/>
+            <a:ext cx="1263635" cy="369332"/>
+          </a:xfrm>
+          <a:prstGeom prst="rect">
+            <a:avLst/>
+          </a:prstGeom>
+        </p:spPr>
+        <p:style>
+          <a:lnRef idx="2">
+            <a:schemeClr val="accent2">
+              <a:shade val="15000"/>
+            </a:schemeClr>
+          </a:lnRef>
+          <a:fillRef idx="1">
+            <a:schemeClr val="accent2"/>
+          </a:fillRef>
+          <a:effectRef idx="0">
+            <a:schemeClr val="accent2"/>
+          </a:effectRef>
+          <a:fontRef idx="minor">
+            <a:schemeClr val="lt1"/>
+          </a:fontRef>
+        </p:style>
+        <p:txBody>
+          <a:bodyPr wrap="square" rtlCol="0">
+            <a:spAutoFit/>
+          </a:bodyPr>
+          <a:lstStyle/>
+          <a:p>
+            <a:pPr algn="ctr"/>
+            <a:r>
+              <a:rPr lang="en-US" dirty="0"/>
+              <a:t>See Code</a:t>
             </a:r>
           </a:p>
         </p:txBody>
@@ -35215,39 +37825,26 @@
                                   </p:childTnLst>
                                 </p:cTn>
                               </p:par>
+                            </p:childTnLst>
+                          </p:cTn>
+                        </p:par>
+                      </p:childTnLst>
+                    </p:cTn>
+                  </p:par>
+                  <p:par>
+                    <p:cTn id="19" fill="hold">
+                      <p:stCondLst>
+                        <p:cond delay="indefinite"/>
+                      </p:stCondLst>
+                      <p:childTnLst>
+                        <p:par>
+                          <p:cTn id="20" fill="hold">
+                            <p:stCondLst>
+                              <p:cond delay="0"/>
+                            </p:stCondLst>
+                            <p:childTnLst>
                               <p:par>
-                                <p:cTn id="19" presetID="1" presetClass="entr" presetSubtype="0" fill="hold" grpId="0" nodeType="withEffect">
-                                  <p:stCondLst>
-                                    <p:cond delay="0"/>
-                                  </p:stCondLst>
-                                  <p:childTnLst>
-                                    <p:set>
-                                      <p:cBhvr>
-                                        <p:cTn id="20" dur="1" fill="hold">
-                                          <p:stCondLst>
-                                            <p:cond delay="0"/>
-                                          </p:stCondLst>
-                                        </p:cTn>
-                                        <p:tgtEl>
-                                          <p:spTgt spid="3">
-                                            <p:txEl>
-                                              <p:pRg st="6" end="6"/>
-                                            </p:txEl>
-                                          </p:spTgt>
-                                        </p:tgtEl>
-                                        <p:attrNameLst>
-                                          <p:attrName>style.visibility</p:attrName>
-                                        </p:attrNameLst>
-                                      </p:cBhvr>
-                                      <p:to>
-                                        <p:strVal val="visible"/>
-                                      </p:to>
-                                    </p:set>
-                                  </p:childTnLst>
-                                </p:cTn>
-                              </p:par>
-                              <p:par>
-                                <p:cTn id="21" presetID="1" presetClass="entr" presetSubtype="0" fill="hold" grpId="0" nodeType="withEffect">
+                                <p:cTn id="21" presetID="1" presetClass="entr" presetSubtype="0" fill="hold" grpId="0" nodeType="clickEffect">
                                   <p:stCondLst>
                                     <p:cond delay="0"/>
                                   </p:stCondLst>
@@ -35262,7 +37859,7 @@
                                         <p:tgtEl>
                                           <p:spTgt spid="3">
                                             <p:txEl>
-                                              <p:pRg st="7" end="7"/>
+                                              <p:pRg st="5" end="5"/>
                                             </p:txEl>
                                           </p:spTgt>
                                         </p:tgtEl>
@@ -35293,7 +37890,7 @@
                                         <p:tgtEl>
                                           <p:spTgt spid="3">
                                             <p:txEl>
-                                              <p:pRg st="8" end="8"/>
+                                              <p:pRg st="6" end="6"/>
                                             </p:txEl>
                                           </p:spTgt>
                                         </p:tgtEl>
@@ -35322,6 +37919,37 @@
                                           </p:stCondLst>
                                         </p:cTn>
                                         <p:tgtEl>
+                                          <p:spTgt spid="3">
+                                            <p:txEl>
+                                              <p:pRg st="7" end="7"/>
+                                            </p:txEl>
+                                          </p:spTgt>
+                                        </p:tgtEl>
+                                        <p:attrNameLst>
+                                          <p:attrName>style.visibility</p:attrName>
+                                        </p:attrNameLst>
+                                      </p:cBhvr>
+                                      <p:to>
+                                        <p:strVal val="visible"/>
+                                      </p:to>
+                                    </p:set>
+                                  </p:childTnLst>
+                                </p:cTn>
+                              </p:par>
+                              <p:par>
+                                <p:cTn id="27" presetID="1" presetClass="entr" presetSubtype="0" fill="hold" grpId="0" nodeType="withEffect">
+                                  <p:stCondLst>
+                                    <p:cond delay="0"/>
+                                  </p:stCondLst>
+                                  <p:childTnLst>
+                                    <p:set>
+                                      <p:cBhvr>
+                                        <p:cTn id="28" dur="1" fill="hold">
+                                          <p:stCondLst>
+                                            <p:cond delay="0"/>
+                                          </p:stCondLst>
+                                        </p:cTn>
+                                        <p:tgtEl>
                                           <p:spTgt spid="4"/>
                                         </p:tgtEl>
                                         <p:attrNameLst>
@@ -35342,26 +37970,26 @@
                     </p:cTn>
                   </p:par>
                   <p:par>
-                    <p:cTn id="27" fill="hold">
+                    <p:cTn id="29" fill="hold">
                       <p:stCondLst>
                         <p:cond delay="indefinite"/>
                       </p:stCondLst>
                       <p:childTnLst>
                         <p:par>
-                          <p:cTn id="28" fill="hold">
+                          <p:cTn id="30" fill="hold">
                             <p:stCondLst>
                               <p:cond delay="0"/>
                             </p:stCondLst>
                             <p:childTnLst>
                               <p:par>
-                                <p:cTn id="29" presetID="1" presetClass="entr" presetSubtype="0" fill="hold" grpId="0" nodeType="clickEffect">
+                                <p:cTn id="31" presetID="1" presetClass="entr" presetSubtype="0" fill="hold" grpId="0" nodeType="clickEffect">
                                   <p:stCondLst>
                                     <p:cond delay="0"/>
                                   </p:stCondLst>
                                   <p:childTnLst>
                                     <p:set>
                                       <p:cBhvr>
-                                        <p:cTn id="30" dur="1" fill="hold">
+                                        <p:cTn id="32" dur="1" fill="hold">
                                           <p:stCondLst>
                                             <p:cond delay="0"/>
                                           </p:stCondLst>
@@ -35381,20 +38009,65 @@
                                 </p:cTn>
                               </p:par>
                               <p:par>
-                                <p:cTn id="31" presetID="1" presetClass="entr" presetSubtype="0" fill="hold" grpId="0" nodeType="withEffect">
+                                <p:cTn id="33" presetID="1" presetClass="entr" presetSubtype="0" fill="hold" grpId="0" nodeType="withEffect">
                                   <p:stCondLst>
                                     <p:cond delay="0"/>
                                   </p:stCondLst>
                                   <p:childTnLst>
                                     <p:set>
                                       <p:cBhvr>
-                                        <p:cTn id="32" dur="1" fill="hold">
+                                        <p:cTn id="34" dur="1" fill="hold">
                                           <p:stCondLst>
                                             <p:cond delay="0"/>
                                           </p:stCondLst>
                                         </p:cTn>
                                         <p:tgtEl>
                                           <p:spTgt spid="6"/>
+                                        </p:tgtEl>
+                                        <p:attrNameLst>
+                                          <p:attrName>style.visibility</p:attrName>
+                                        </p:attrNameLst>
+                                      </p:cBhvr>
+                                      <p:to>
+                                        <p:strVal val="visible"/>
+                                      </p:to>
+                                    </p:set>
+                                  </p:childTnLst>
+                                </p:cTn>
+                              </p:par>
+                            </p:childTnLst>
+                          </p:cTn>
+                        </p:par>
+                      </p:childTnLst>
+                    </p:cTn>
+                  </p:par>
+                  <p:par>
+                    <p:cTn id="35" fill="hold">
+                      <p:stCondLst>
+                        <p:cond delay="indefinite"/>
+                      </p:stCondLst>
+                      <p:childTnLst>
+                        <p:par>
+                          <p:cTn id="36" fill="hold">
+                            <p:stCondLst>
+                              <p:cond delay="0"/>
+                            </p:stCondLst>
+                            <p:childTnLst>
+                              <p:par>
+                                <p:cTn id="37" presetID="1" presetClass="entr" presetSubtype="0" fill="hold" grpId="0" nodeType="clickEffect">
+                                  <p:stCondLst>
+                                    <p:cond delay="0"/>
+                                  </p:stCondLst>
+                                  <p:childTnLst>
+                                    <p:set>
+                                      <p:cBhvr>
+                                        <p:cTn id="38" dur="1" fill="hold">
+                                          <p:stCondLst>
+                                            <p:cond delay="0"/>
+                                          </p:stCondLst>
+                                        </p:cTn>
+                                        <p:tgtEl>
+                                          <p:spTgt spid="7"/>
                                         </p:tgtEl>
                                         <p:attrNameLst>
                                           <p:attrName>style.visibility</p:attrName>
@@ -35435,10 +38108,11 @@
       </p:par>
     </p:tnLst>
     <p:bldLst>
-      <p:bldP spid="3" grpId="0" uiExpand="1" build="p"/>
+      <p:bldP spid="3" grpId="0" build="p"/>
       <p:bldP spid="5" grpId="0" animBg="1"/>
       <p:bldP spid="4" grpId="0"/>
       <p:bldP spid="6" grpId="0" animBg="1"/>
+      <p:bldP spid="7" grpId="0" animBg="1"/>
     </p:bldLst>
   </p:timing>
 </p:sld>
@@ -35489,8 +38163,8 @@
           </a:p>
         </p:txBody>
       </p:sp>
-      <mc:AlternateContent xmlns:mc="http://schemas.openxmlformats.org/markup-compatibility/2006">
-        <mc:Choice xmlns:a14="http://schemas.microsoft.com/office/drawing/2010/main" Requires="a14">
+      <mc:AlternateContent xmlns:mc="http://schemas.openxmlformats.org/markup-compatibility/2006" xmlns:a14="http://schemas.microsoft.com/office/drawing/2010/main">
+        <mc:Choice Requires="a14">
           <p:sp>
             <p:nvSpPr>
               <p:cNvPr id="3" name="Content Placeholder 2">
@@ -35807,7 +38481,7 @@
             </p:txBody>
           </p:sp>
         </mc:Choice>
-        <mc:Fallback>
+        <mc:Fallback xmlns="">
           <p:sp>
             <p:nvSpPr>
               <p:cNvPr id="3" name="Content Placeholder 2">

--- a/slides/Lecture_Chapter09.pptx
+++ b/slides/Lecture_Chapter09.pptx
@@ -294,7 +294,7 @@
           <a:p>
             <a:fld id="{2987FC57-34F3-4A88-970B-010E7C0EC943}" type="datetimeFigureOut">
               <a:rPr lang="en-US" smtClean="0"/>
-              <a:t>3/26/2026</a:t>
+              <a:t>3/30/2026</a:t>
             </a:fld>
             <a:endParaRPr lang="en-US"/>
           </a:p>
@@ -876,7 +876,7 @@
           <a:p>
             <a:fld id="{3E22BF2E-04DA-469E-97C5-BB68A0368813}" type="datetimeFigureOut">
               <a:rPr lang="en-US" smtClean="0"/>
-              <a:t>3/26/2026</a:t>
+              <a:t>3/30/2026</a:t>
             </a:fld>
             <a:endParaRPr lang="en-US"/>
           </a:p>
@@ -1074,7 +1074,7 @@
           <a:p>
             <a:fld id="{3E22BF2E-04DA-469E-97C5-BB68A0368813}" type="datetimeFigureOut">
               <a:rPr lang="en-US" smtClean="0"/>
-              <a:t>3/26/2026</a:t>
+              <a:t>3/30/2026</a:t>
             </a:fld>
             <a:endParaRPr lang="en-US"/>
           </a:p>
@@ -1282,7 +1282,7 @@
           <a:p>
             <a:fld id="{3E22BF2E-04DA-469E-97C5-BB68A0368813}" type="datetimeFigureOut">
               <a:rPr lang="en-US" smtClean="0"/>
-              <a:t>3/26/2026</a:t>
+              <a:t>3/30/2026</a:t>
             </a:fld>
             <a:endParaRPr lang="en-US"/>
           </a:p>
@@ -1490,7 +1490,7 @@
           <a:p>
             <a:fld id="{3E22BF2E-04DA-469E-97C5-BB68A0368813}" type="datetimeFigureOut">
               <a:rPr lang="en-US" smtClean="0"/>
-              <a:t>3/26/2026</a:t>
+              <a:t>3/30/2026</a:t>
             </a:fld>
             <a:endParaRPr lang="en-US"/>
           </a:p>
@@ -1765,7 +1765,7 @@
           <a:p>
             <a:fld id="{3E22BF2E-04DA-469E-97C5-BB68A0368813}" type="datetimeFigureOut">
               <a:rPr lang="en-US" smtClean="0"/>
-              <a:t>3/26/2026</a:t>
+              <a:t>3/30/2026</a:t>
             </a:fld>
             <a:endParaRPr lang="en-US"/>
           </a:p>
@@ -2030,7 +2030,7 @@
           <a:p>
             <a:fld id="{3E22BF2E-04DA-469E-97C5-BB68A0368813}" type="datetimeFigureOut">
               <a:rPr lang="en-US" smtClean="0"/>
-              <a:t>3/26/2026</a:t>
+              <a:t>3/30/2026</a:t>
             </a:fld>
             <a:endParaRPr lang="en-US"/>
           </a:p>
@@ -2442,7 +2442,7 @@
           <a:p>
             <a:fld id="{3E22BF2E-04DA-469E-97C5-BB68A0368813}" type="datetimeFigureOut">
               <a:rPr lang="en-US" smtClean="0"/>
-              <a:t>3/26/2026</a:t>
+              <a:t>3/30/2026</a:t>
             </a:fld>
             <a:endParaRPr lang="en-US"/>
           </a:p>
@@ -2583,7 +2583,7 @@
           <a:p>
             <a:fld id="{3E22BF2E-04DA-469E-97C5-BB68A0368813}" type="datetimeFigureOut">
               <a:rPr lang="en-US" smtClean="0"/>
-              <a:t>3/26/2026</a:t>
+              <a:t>3/30/2026</a:t>
             </a:fld>
             <a:endParaRPr lang="en-US"/>
           </a:p>
@@ -2696,7 +2696,7 @@
           <a:p>
             <a:fld id="{3E22BF2E-04DA-469E-97C5-BB68A0368813}" type="datetimeFigureOut">
               <a:rPr lang="en-US" smtClean="0"/>
-              <a:t>3/26/2026</a:t>
+              <a:t>3/30/2026</a:t>
             </a:fld>
             <a:endParaRPr lang="en-US"/>
           </a:p>
@@ -3007,7 +3007,7 @@
           <a:p>
             <a:fld id="{3E22BF2E-04DA-469E-97C5-BB68A0368813}" type="datetimeFigureOut">
               <a:rPr lang="en-US" smtClean="0"/>
-              <a:t>3/26/2026</a:t>
+              <a:t>3/30/2026</a:t>
             </a:fld>
             <a:endParaRPr lang="en-US"/>
           </a:p>
@@ -3295,7 +3295,7 @@
           <a:p>
             <a:fld id="{3E22BF2E-04DA-469E-97C5-BB68A0368813}" type="datetimeFigureOut">
               <a:rPr lang="en-US" smtClean="0"/>
-              <a:t>3/26/2026</a:t>
+              <a:t>3/30/2026</a:t>
             </a:fld>
             <a:endParaRPr lang="en-US"/>
           </a:p>
@@ -3536,7 +3536,7 @@
           <a:p>
             <a:fld id="{3E22BF2E-04DA-469E-97C5-BB68A0368813}" type="datetimeFigureOut">
               <a:rPr lang="en-US" smtClean="0"/>
-              <a:t>3/26/2026</a:t>
+              <a:t>3/30/2026</a:t>
             </a:fld>
             <a:endParaRPr lang="en-US"/>
           </a:p>
@@ -4560,6 +4560,87 @@
           </a:extLst>
         </p:spPr>
       </p:pic>
+      <p:grpSp>
+        <p:nvGrpSpPr>
+          <p:cNvPr id="7" name="Group 6">
+            <a:extLst>
+              <a:ext uri="{FF2B5EF4-FFF2-40B4-BE49-F238E27FC236}">
+                <a16:creationId xmlns:a16="http://schemas.microsoft.com/office/drawing/2014/main" id="{DA1C6744-BD97-2C10-F393-A0B726F71E7A}"/>
+              </a:ext>
+            </a:extLst>
+          </p:cNvPr>
+          <p:cNvGrpSpPr/>
+          <p:nvPr/>
+        </p:nvGrpSpPr>
+        <p:grpSpPr>
+          <a:xfrm>
+            <a:off x="10961015" y="4868822"/>
+            <a:ext cx="1037459" cy="1303078"/>
+            <a:chOff x="5248582" y="2401735"/>
+            <a:chExt cx="1694835" cy="2054530"/>
+          </a:xfrm>
+        </p:grpSpPr>
+        <p:pic>
+          <p:nvPicPr>
+            <p:cNvPr id="8" name="Picture 7">
+              <a:extLst>
+                <a:ext uri="{FF2B5EF4-FFF2-40B4-BE49-F238E27FC236}">
+                  <a16:creationId xmlns:a16="http://schemas.microsoft.com/office/drawing/2014/main" id="{2F5FC233-1ACF-0EE9-5B1F-F0A29270EECF}"/>
+                </a:ext>
+              </a:extLst>
+            </p:cNvPr>
+            <p:cNvPicPr>
+              <a:picLocks noChangeAspect="1"/>
+            </p:cNvPicPr>
+            <p:nvPr/>
+          </p:nvPicPr>
+          <p:blipFill>
+            <a:blip r:embed="rId6"/>
+            <a:stretch>
+              <a:fillRect/>
+            </a:stretch>
+          </p:blipFill>
+          <p:spPr>
+            <a:xfrm>
+              <a:off x="5248582" y="2401735"/>
+              <a:ext cx="1694835" cy="2054530"/>
+            </a:xfrm>
+            <a:prstGeom prst="rect">
+              <a:avLst/>
+            </a:prstGeom>
+          </p:spPr>
+        </p:pic>
+        <p:pic>
+          <p:nvPicPr>
+            <p:cNvPr id="9" name="Picture 8">
+              <a:extLst>
+                <a:ext uri="{FF2B5EF4-FFF2-40B4-BE49-F238E27FC236}">
+                  <a16:creationId xmlns:a16="http://schemas.microsoft.com/office/drawing/2014/main" id="{26CB3135-CE78-1137-FBA3-29AA8592D8FA}"/>
+                </a:ext>
+              </a:extLst>
+            </p:cNvPr>
+            <p:cNvPicPr>
+              <a:picLocks noChangeAspect="1"/>
+            </p:cNvPicPr>
+            <p:nvPr/>
+          </p:nvPicPr>
+          <p:blipFill>
+            <a:blip r:embed="rId7"/>
+            <a:stretch>
+              <a:fillRect/>
+            </a:stretch>
+          </p:blipFill>
+          <p:spPr>
+            <a:xfrm>
+              <a:off x="5315643" y="2435129"/>
+              <a:ext cx="1560711" cy="1560711"/>
+            </a:xfrm>
+            <a:prstGeom prst="rect">
+              <a:avLst/>
+            </a:prstGeom>
+          </p:spPr>
+        </p:pic>
+      </p:grpSp>
     </p:spTree>
     <p:extLst>
       <p:ext uri="{BB962C8B-B14F-4D97-AF65-F5344CB8AC3E}">
@@ -6198,8 +6279,8 @@
           <a:chExt cx="0" cy="0"/>
         </a:xfrm>
       </p:grpSpPr>
-      <mc:AlternateContent xmlns:mc="http://schemas.openxmlformats.org/markup-compatibility/2006">
-        <mc:Choice xmlns:a14="http://schemas.microsoft.com/office/drawing/2010/main" Requires="a14">
+      <mc:AlternateContent xmlns:mc="http://schemas.openxmlformats.org/markup-compatibility/2006" xmlns:a14="http://schemas.microsoft.com/office/drawing/2010/main">
+        <mc:Choice Requires="a14">
           <p:sp>
             <p:nvSpPr>
               <p:cNvPr id="3" name="Content Placeholder 2">
@@ -7705,7 +7786,7 @@
             </p:txBody>
           </p:sp>
         </mc:Choice>
-        <mc:Fallback>
+        <mc:Fallback xmlns="">
           <p:sp>
             <p:nvSpPr>
               <p:cNvPr id="3" name="Content Placeholder 2">
@@ -7777,8 +7858,8 @@
           </a:p>
         </p:txBody>
       </p:sp>
-      <mc:AlternateContent xmlns:mc="http://schemas.openxmlformats.org/markup-compatibility/2006">
-        <mc:Choice xmlns:a14="http://schemas.microsoft.com/office/drawing/2010/main" Requires="a14">
+      <mc:AlternateContent xmlns:mc="http://schemas.openxmlformats.org/markup-compatibility/2006" xmlns:a14="http://schemas.microsoft.com/office/drawing/2010/main">
+        <mc:Choice Requires="a14">
           <p:sp>
             <p:nvSpPr>
               <p:cNvPr id="6" name="Speech Bubble: Rectangle with Corners Rounded 5">
@@ -7943,7 +8024,7 @@
             </p:txBody>
           </p:sp>
         </mc:Choice>
-        <mc:Fallback>
+        <mc:Fallback xmlns="">
           <p:sp>
             <p:nvSpPr>
               <p:cNvPr id="6" name="Speech Bubble: Rectangle with Corners Rounded 5">
@@ -9582,8 +9663,8 @@
           </a:p>
         </p:txBody>
       </p:sp>
-      <mc:AlternateContent xmlns:mc="http://schemas.openxmlformats.org/markup-compatibility/2006">
-        <mc:Choice xmlns:a14="http://schemas.microsoft.com/office/drawing/2010/main" Requires="a14">
+      <mc:AlternateContent xmlns:mc="http://schemas.openxmlformats.org/markup-compatibility/2006" xmlns:a14="http://schemas.microsoft.com/office/drawing/2010/main">
+        <mc:Choice Requires="a14">
           <p:sp>
             <p:nvSpPr>
               <p:cNvPr id="3" name="Content Placeholder 2">
@@ -10866,7 +10947,7 @@
             </p:txBody>
           </p:sp>
         </mc:Choice>
-        <mc:Fallback>
+        <mc:Fallback xmlns="">
           <p:sp>
             <p:nvSpPr>
               <p:cNvPr id="3" name="Content Placeholder 2">
@@ -11517,8 +11598,8 @@
           </a:p>
         </p:txBody>
       </p:sp>
-      <mc:AlternateContent xmlns:mc="http://schemas.openxmlformats.org/markup-compatibility/2006">
-        <mc:Choice xmlns:a14="http://schemas.microsoft.com/office/drawing/2010/main" Requires="a14">
+      <mc:AlternateContent xmlns:mc="http://schemas.openxmlformats.org/markup-compatibility/2006" xmlns:a14="http://schemas.microsoft.com/office/drawing/2010/main">
+        <mc:Choice Requires="a14">
           <p:sp>
             <p:nvSpPr>
               <p:cNvPr id="3" name="Content Placeholder 2">
@@ -12250,7 +12331,7 @@
             </p:txBody>
           </p:sp>
         </mc:Choice>
-        <mc:Fallback>
+        <mc:Fallback xmlns="">
           <p:sp>
             <p:nvSpPr>
               <p:cNvPr id="3" name="Content Placeholder 2">
@@ -16042,8 +16123,8 @@
           </a:p>
         </p:txBody>
       </p:sp>
-      <mc:AlternateContent xmlns:mc="http://schemas.openxmlformats.org/markup-compatibility/2006" xmlns:a14="http://schemas.microsoft.com/office/drawing/2010/main">
-        <mc:Choice Requires="a14">
+      <mc:AlternateContent xmlns:mc="http://schemas.openxmlformats.org/markup-compatibility/2006">
+        <mc:Choice xmlns:a14="http://schemas.microsoft.com/office/drawing/2010/main" Requires="a14">
           <p:sp>
             <p:nvSpPr>
               <p:cNvPr id="3" name="Content Placeholder 2">
@@ -16063,7 +16144,7 @@
             <p:spPr>
               <a:xfrm>
                 <a:off x="838200" y="1161569"/>
-                <a:ext cx="10515600" cy="2943670"/>
+                <a:ext cx="8579126" cy="2943670"/>
               </a:xfrm>
             </p:spPr>
             <p:txBody>
@@ -16074,32 +16155,25 @@
               <a:p>
                 <a:r>
                   <a:rPr lang="en-US" dirty="0"/>
-                  <a:t>A Fourier series (Fourier transform) represents a periodic function as a weighted sum of sine and cosine basis functions of increasing frequencies.</a:t>
+                  <a:t>A </a:t>
+                </a:r>
+                <a:r>
+                  <a:rPr lang="en-US" b="1" dirty="0"/>
+                  <a:t>Fourier series </a:t>
+                </a:r>
+                <a:r>
+                  <a:rPr lang="en-US" dirty="0"/>
+                  <a:t>(Fourier transform) represents a periodic function as a weighted sum of sine and cosine basis functions of increasing frequencies.</a:t>
                 </a:r>
               </a:p>
               <a:p>
                 <a:r>
                   <a:rPr lang="en-US" dirty="0"/>
-                  <a:t>State features are not periodic, so we consider only a single period, chosen so we only need to use cosine basis functions. </a:t>
-                </a:r>
-              </a:p>
-              <a:p>
-                <a:r>
-                  <a:rPr lang="en-US" dirty="0"/>
-                  <a:t>Strong theoretical foundation: Fourier series can approximate any function.</a:t>
+                  <a:t>State features are not periodic, so we consider only a single period, chosen so that we only need to use cosine basis functions. </a:t>
                 </a:r>
                 <a:endParaRPr lang="en-US" b="1" dirty="0"/>
               </a:p>
               <a:p>
-                <a:pPr marL="0" indent="0">
-                  <a:buNone/>
-                </a:pPr>
-                <a:endParaRPr lang="en-US" b="1" dirty="0"/>
-              </a:p>
-              <a:p>
-                <a:pPr marL="0" indent="0">
-                  <a:buNone/>
-                </a:pPr>
                 <a:r>
                   <a:rPr lang="en-US" b="1" dirty="0"/>
                   <a:t>On dimensional case</a:t>
@@ -16150,198 +16224,197 @@
                   <a:rPr lang="en-US" b="0" dirty="0"/>
                 </a:br>
                 <a14:m>
-                  <m:oMathPara xmlns:m="http://schemas.openxmlformats.org/officeDocument/2006/math">
-                    <m:oMathParaPr>
-                      <m:jc m:val="centerGroup"/>
-                    </m:oMathParaPr>
-                    <m:oMath xmlns:m="http://schemas.openxmlformats.org/officeDocument/2006/math">
-                      <m:sSub>
-                        <m:sSubPr>
-                          <m:ctrlPr>
-                            <a:rPr lang="en-US" b="0" i="1" smtClean="0">
-                              <a:latin typeface="Cambria Math" panose="02040503050406030204" pitchFamily="18" charset="0"/>
-                            </a:rPr>
-                          </m:ctrlPr>
-                        </m:sSubPr>
-                        <m:e>
-                          <m:r>
-                            <a:rPr lang="en-US" b="0" i="1" smtClean="0">
-                              <a:latin typeface="Cambria Math" panose="02040503050406030204" pitchFamily="18" charset="0"/>
-                            </a:rPr>
-                            <m:t>𝑥</m:t>
-                          </m:r>
-                        </m:e>
-                        <m:sub>
-                          <m:r>
-                            <a:rPr lang="en-US" b="0" i="1" smtClean="0">
-                              <a:latin typeface="Cambria Math" panose="02040503050406030204" pitchFamily="18" charset="0"/>
-                            </a:rPr>
-                            <m:t>𝑖</m:t>
-                          </m:r>
-                        </m:sub>
-                      </m:sSub>
-                      <m:d>
-                        <m:dPr>
-                          <m:ctrlPr>
-                            <a:rPr lang="en-US" b="0" i="1" smtClean="0">
-                              <a:latin typeface="Cambria Math" panose="02040503050406030204" pitchFamily="18" charset="0"/>
-                            </a:rPr>
-                          </m:ctrlPr>
-                        </m:dPr>
-                        <m:e>
-                          <m:r>
-                            <a:rPr lang="en-US" b="0" i="1" smtClean="0">
-                              <a:latin typeface="Cambria Math" panose="02040503050406030204" pitchFamily="18" charset="0"/>
-                            </a:rPr>
-                            <m:t>𝑠</m:t>
-                          </m:r>
-                        </m:e>
-                      </m:d>
-                      <m:r>
-                        <a:rPr lang="en-US" b="0" i="1" smtClean="0">
-                          <a:latin typeface="Cambria Math" panose="02040503050406030204" pitchFamily="18" charset="0"/>
-                        </a:rPr>
-                        <m:t>=</m:t>
-                      </m:r>
-                      <m:func>
-                        <m:funcPr>
-                          <m:ctrlPr>
-                            <a:rPr lang="en-US" b="0" i="1" smtClean="0">
-                              <a:latin typeface="Cambria Math" panose="02040503050406030204" pitchFamily="18" charset="0"/>
-                            </a:rPr>
-                          </m:ctrlPr>
-                        </m:funcPr>
-                        <m:fName>
-                          <m:r>
-                            <m:rPr>
-                              <m:sty m:val="p"/>
-                            </m:rPr>
-                            <a:rPr lang="en-US" b="0" i="0" smtClean="0">
-                              <a:latin typeface="Cambria Math" panose="02040503050406030204" pitchFamily="18" charset="0"/>
-                            </a:rPr>
-                            <m:t>cos</m:t>
-                          </m:r>
-                        </m:fName>
-                        <m:e>
-                          <m:r>
-                            <a:rPr lang="en-US" b="0" i="1" smtClean="0">
-                              <a:latin typeface="Cambria Math" panose="02040503050406030204" pitchFamily="18" charset="0"/>
-                            </a:rPr>
-                            <m:t>(</m:t>
-                          </m:r>
-                          <m:r>
-                            <a:rPr lang="en-US" b="0" i="1" smtClean="0">
-                              <a:latin typeface="Cambria Math" panose="02040503050406030204" pitchFamily="18" charset="0"/>
-                            </a:rPr>
-                            <m:t>𝑖</m:t>
-                          </m:r>
-                          <m:r>
-                            <a:rPr lang="en-US" b="0" i="1" smtClean="0">
-                              <a:latin typeface="Cambria Math" panose="02040503050406030204" pitchFamily="18" charset="0"/>
-                            </a:rPr>
-                            <m:t>𝜋</m:t>
-                          </m:r>
-                          <m:r>
-                            <a:rPr lang="en-US" b="0" i="1" smtClean="0">
-                              <a:latin typeface="Cambria Math" panose="02040503050406030204" pitchFamily="18" charset="0"/>
-                            </a:rPr>
-                            <m:t>𝑠</m:t>
-                          </m:r>
-                          <m:r>
-                            <a:rPr lang="en-US" b="0" i="1" smtClean="0">
-                              <a:latin typeface="Cambria Math" panose="02040503050406030204" pitchFamily="18" charset="0"/>
-                            </a:rPr>
-                            <m:t>)</m:t>
-                          </m:r>
-                        </m:e>
-                      </m:func>
-                    </m:oMath>
-                  </m:oMathPara>
+                  <m:oMath xmlns:m="http://schemas.openxmlformats.org/officeDocument/2006/math">
+                    <m:sSub>
+                      <m:sSubPr>
+                        <m:ctrlPr>
+                          <a:rPr lang="en-US" b="0" i="1" smtClean="0">
+                            <a:latin typeface="Cambria Math" panose="02040503050406030204" pitchFamily="18" charset="0"/>
+                          </a:rPr>
+                        </m:ctrlPr>
+                      </m:sSubPr>
+                      <m:e>
+                        <m:r>
+                          <a:rPr lang="en-US" b="0" i="1" smtClean="0">
+                            <a:latin typeface="Cambria Math" panose="02040503050406030204" pitchFamily="18" charset="0"/>
+                          </a:rPr>
+                          <m:t>𝑥</m:t>
+                        </m:r>
+                      </m:e>
+                      <m:sub>
+                        <m:r>
+                          <a:rPr lang="en-US" b="0" i="1" smtClean="0">
+                            <a:latin typeface="Cambria Math" panose="02040503050406030204" pitchFamily="18" charset="0"/>
+                          </a:rPr>
+                          <m:t>𝑖</m:t>
+                        </m:r>
+                      </m:sub>
+                    </m:sSub>
+                    <m:d>
+                      <m:dPr>
+                        <m:ctrlPr>
+                          <a:rPr lang="en-US" b="0" i="1" smtClean="0">
+                            <a:latin typeface="Cambria Math" panose="02040503050406030204" pitchFamily="18" charset="0"/>
+                          </a:rPr>
+                        </m:ctrlPr>
+                      </m:dPr>
+                      <m:e>
+                        <m:r>
+                          <a:rPr lang="en-US" b="0" i="1" smtClean="0">
+                            <a:latin typeface="Cambria Math" panose="02040503050406030204" pitchFamily="18" charset="0"/>
+                          </a:rPr>
+                          <m:t>𝑠</m:t>
+                        </m:r>
+                      </m:e>
+                    </m:d>
+                    <m:r>
+                      <a:rPr lang="en-US" b="0" i="1" smtClean="0">
+                        <a:latin typeface="Cambria Math" panose="02040503050406030204" pitchFamily="18" charset="0"/>
+                      </a:rPr>
+                      <m:t>=</m:t>
+                    </m:r>
+                    <m:func>
+                      <m:funcPr>
+                        <m:ctrlPr>
+                          <a:rPr lang="en-US" b="0" i="1" smtClean="0">
+                            <a:latin typeface="Cambria Math" panose="02040503050406030204" pitchFamily="18" charset="0"/>
+                          </a:rPr>
+                        </m:ctrlPr>
+                      </m:funcPr>
+                      <m:fName>
+                        <m:r>
+                          <m:rPr>
+                            <m:sty m:val="p"/>
+                          </m:rPr>
+                          <a:rPr lang="en-US" b="0" i="0" smtClean="0">
+                            <a:latin typeface="Cambria Math" panose="02040503050406030204" pitchFamily="18" charset="0"/>
+                          </a:rPr>
+                          <m:t>cos</m:t>
+                        </m:r>
+                      </m:fName>
+                      <m:e>
+                        <m:r>
+                          <a:rPr lang="en-US" b="0" i="1" smtClean="0">
+                            <a:latin typeface="Cambria Math" panose="02040503050406030204" pitchFamily="18" charset="0"/>
+                          </a:rPr>
+                          <m:t>(</m:t>
+                        </m:r>
+                        <m:r>
+                          <a:rPr lang="en-US" b="0" i="1" smtClean="0">
+                            <a:latin typeface="Cambria Math" panose="02040503050406030204" pitchFamily="18" charset="0"/>
+                          </a:rPr>
+                          <m:t>𝑖</m:t>
+                        </m:r>
+                        <m:r>
+                          <a:rPr lang="en-US" b="0" i="1" smtClean="0">
+                            <a:latin typeface="Cambria Math" panose="02040503050406030204" pitchFamily="18" charset="0"/>
+                          </a:rPr>
+                          <m:t>𝜋</m:t>
+                        </m:r>
+                        <m:r>
+                          <a:rPr lang="en-US" b="0" i="1" smtClean="0">
+                            <a:latin typeface="Cambria Math" panose="02040503050406030204" pitchFamily="18" charset="0"/>
+                          </a:rPr>
+                          <m:t>𝑠</m:t>
+                        </m:r>
+                        <m:r>
+                          <a:rPr lang="en-US" b="0" i="1" smtClean="0">
+                            <a:latin typeface="Cambria Math" panose="02040503050406030204" pitchFamily="18" charset="0"/>
+                          </a:rPr>
+                          <m:t>)</m:t>
+                        </m:r>
+                      </m:e>
+                    </m:func>
+                  </m:oMath>
                 </a14:m>
-                <a:endParaRPr lang="en-US" b="0" i="1" dirty="0">
-                  <a:latin typeface="Cambria Math" panose="02040503050406030204" pitchFamily="18" charset="0"/>
-                </a:endParaRPr>
+                <a:br>
+                  <a:rPr lang="en-US" b="0" dirty="0"/>
+                </a:br>
+                <a:br>
+                  <a:rPr lang="en-US" b="0" dirty="0"/>
+                </a:br>
+                <a:r>
+                  <a:rPr lang="en-US" b="0" dirty="0"/>
+                  <a:t>	with</a:t>
+                </a:r>
+                <a14:m>
+                  <m:oMath xmlns:m="http://schemas.openxmlformats.org/officeDocument/2006/math">
+                    <m:r>
+                      <a:rPr lang="en-US" b="0" i="0" smtClean="0">
+                        <a:latin typeface="Cambria Math" panose="02040503050406030204" pitchFamily="18" charset="0"/>
+                      </a:rPr>
+                      <m:t> </m:t>
+                    </m:r>
+                    <m:r>
+                      <a:rPr lang="en-US" i="1">
+                        <a:latin typeface="Cambria Math" panose="02040503050406030204" pitchFamily="18" charset="0"/>
+                      </a:rPr>
+                      <m:t>𝑖</m:t>
+                    </m:r>
+                    <m:r>
+                      <a:rPr lang="en-US" i="1">
+                        <a:latin typeface="Cambria Math" panose="02040503050406030204" pitchFamily="18" charset="0"/>
+                      </a:rPr>
+                      <m:t>=0,…,</m:t>
+                    </m:r>
+                    <m:r>
+                      <a:rPr lang="en-US" i="1">
+                        <a:latin typeface="Cambria Math" panose="02040503050406030204" pitchFamily="18" charset="0"/>
+                      </a:rPr>
+                      <m:t>𝑛</m:t>
+                    </m:r>
+                  </m:oMath>
+                </a14:m>
+                <a:r>
+                  <a:rPr lang="en-US" dirty="0"/>
+                  <a:t> where </a:t>
+                </a:r>
+                <a14:m>
+                  <m:oMath xmlns:m="http://schemas.openxmlformats.org/officeDocument/2006/math">
+                    <m:r>
+                      <a:rPr lang="en-US" b="0" i="1" smtClean="0">
+                        <a:latin typeface="Cambria Math" panose="02040503050406030204" pitchFamily="18" charset="0"/>
+                      </a:rPr>
+                      <m:t>𝑖</m:t>
+                    </m:r>
+                  </m:oMath>
+                </a14:m>
+                <a:r>
+                  <a:rPr lang="en-US" dirty="0"/>
+                  <a:t> is the frequency and </a:t>
+                </a:r>
+                <a14:m>
+                  <m:oMath xmlns:m="http://schemas.openxmlformats.org/officeDocument/2006/math">
+                    <m:r>
+                      <a:rPr lang="en-US" b="0" i="1" smtClean="0">
+                        <a:latin typeface="Cambria Math" panose="02040503050406030204" pitchFamily="18" charset="0"/>
+                      </a:rPr>
+                      <m:t>𝑛</m:t>
+                    </m:r>
+                  </m:oMath>
+                </a14:m>
+                <a:r>
+                  <a:rPr lang="en-US" dirty="0"/>
+                  <a:t> is the order of the Fourier basis function</a:t>
+                </a:r>
+              </a:p>
+              <a:p>
+                <a:r>
+                  <a:rPr lang="en-US" dirty="0"/>
+                  <a:t>Strong theoretical foundation: Fourier series can approximate any function.</a:t>
+                </a:r>
+                <a:endParaRPr lang="en-US" b="1" dirty="0"/>
               </a:p>
               <a:p>
                 <a:pPr marL="0" indent="0">
                   <a:buNone/>
                 </a:pPr>
-                <a:r>
-                  <a:rPr lang="en-US" b="0" dirty="0"/>
-                  <a:t>	</a:t>
-                </a:r>
-                <a:br>
-                  <a:rPr lang="en-US" b="0" dirty="0"/>
-                </a:br>
-                <a:r>
-                  <a:rPr lang="en-US" b="0" dirty="0"/>
-                  <a:t>	with</a:t>
-                </a:r>
-                <a14:m>
-                  <m:oMath xmlns:m="http://schemas.openxmlformats.org/officeDocument/2006/math">
-                    <m:r>
-                      <a:rPr lang="en-US" b="0" i="0" smtClean="0">
-                        <a:latin typeface="Cambria Math" panose="02040503050406030204" pitchFamily="18" charset="0"/>
-                      </a:rPr>
-                      <m:t> </m:t>
-                    </m:r>
-                    <m:r>
-                      <a:rPr lang="en-US" i="1">
-                        <a:latin typeface="Cambria Math" panose="02040503050406030204" pitchFamily="18" charset="0"/>
-                      </a:rPr>
-                      <m:t>𝑖</m:t>
-                    </m:r>
-                    <m:r>
-                      <a:rPr lang="en-US" i="1">
-                        <a:latin typeface="Cambria Math" panose="02040503050406030204" pitchFamily="18" charset="0"/>
-                      </a:rPr>
-                      <m:t>=0,…,</m:t>
-                    </m:r>
-                    <m:r>
-                      <a:rPr lang="en-US" i="1">
-                        <a:latin typeface="Cambria Math" panose="02040503050406030204" pitchFamily="18" charset="0"/>
-                      </a:rPr>
-                      <m:t>𝑛</m:t>
-                    </m:r>
-                  </m:oMath>
-                </a14:m>
-                <a:r>
-                  <a:rPr lang="en-US" dirty="0"/>
-                  <a:t> where </a:t>
-                </a:r>
-                <a14:m>
-                  <m:oMath xmlns:m="http://schemas.openxmlformats.org/officeDocument/2006/math">
-                    <m:r>
-                      <a:rPr lang="en-US" b="0" i="1" smtClean="0">
-                        <a:latin typeface="Cambria Math" panose="02040503050406030204" pitchFamily="18" charset="0"/>
-                      </a:rPr>
-                      <m:t>𝑖</m:t>
-                    </m:r>
-                  </m:oMath>
-                </a14:m>
-                <a:r>
-                  <a:rPr lang="en-US" dirty="0"/>
-                  <a:t> is the frequency and </a:t>
-                </a:r>
-                <a14:m>
-                  <m:oMath xmlns:m="http://schemas.openxmlformats.org/officeDocument/2006/math">
-                    <m:r>
-                      <a:rPr lang="en-US" b="0" i="1" smtClean="0">
-                        <a:latin typeface="Cambria Math" panose="02040503050406030204" pitchFamily="18" charset="0"/>
-                      </a:rPr>
-                      <m:t>𝑛</m:t>
-                    </m:r>
-                  </m:oMath>
-                </a14:m>
-                <a:r>
-                  <a:rPr lang="en-US" dirty="0"/>
-                  <a:t> is the order of the Fourier basis function</a:t>
-                </a:r>
+                <a:endParaRPr lang="en-US" dirty="0"/>
               </a:p>
             </p:txBody>
           </p:sp>
         </mc:Choice>
-        <mc:Fallback xmlns="">
+        <mc:Fallback>
           <p:sp>
             <p:nvSpPr>
               <p:cNvPr id="3" name="Content Placeholder 2">
@@ -16361,123 +16434,12 @@
             <p:spPr>
               <a:xfrm>
                 <a:off x="838200" y="1161569"/>
-                <a:ext cx="10515600" cy="2943670"/>
+                <a:ext cx="8579126" cy="2943670"/>
               </a:xfrm>
               <a:blipFill>
                 <a:blip r:embed="rId2"/>
                 <a:stretch>
-                  <a:fillRect l="-522" t="-3320" r="-812" b="-622"/>
-                </a:stretch>
-              </a:blipFill>
-            </p:spPr>
-            <p:txBody>
-              <a:bodyPr/>
-              <a:lstStyle/>
-              <a:p>
-                <a:r>
-                  <a:rPr lang="en-US">
-                    <a:noFill/>
-                  </a:rPr>
-                  <a:t> </a:t>
-                </a:r>
-              </a:p>
-            </p:txBody>
-          </p:sp>
-        </mc:Fallback>
-      </mc:AlternateContent>
-      <mc:AlternateContent xmlns:mc="http://schemas.openxmlformats.org/markup-compatibility/2006" xmlns:a14="http://schemas.microsoft.com/office/drawing/2010/main">
-        <mc:Choice Requires="a14">
-          <p:sp>
-            <p:nvSpPr>
-              <p:cNvPr id="32" name="Rectangle: Rounded Corners 31">
-                <a:extLst>
-                  <a:ext uri="{FF2B5EF4-FFF2-40B4-BE49-F238E27FC236}">
-                    <a16:creationId xmlns:a16="http://schemas.microsoft.com/office/drawing/2014/main" id="{7350A765-B62B-4ADE-CD38-637FA7EC305A}"/>
-                  </a:ext>
-                </a:extLst>
-              </p:cNvPr>
-              <p:cNvSpPr/>
-              <p:nvPr/>
-            </p:nvSpPr>
-            <p:spPr>
-              <a:xfrm>
-                <a:off x="10014097" y="2543767"/>
-                <a:ext cx="1339703" cy="878958"/>
-              </a:xfrm>
-              <a:prstGeom prst="roundRect">
-                <a:avLst/>
-              </a:prstGeom>
-            </p:spPr>
-            <p:style>
-              <a:lnRef idx="2">
-                <a:schemeClr val="accent1">
-                  <a:shade val="15000"/>
-                </a:schemeClr>
-              </a:lnRef>
-              <a:fillRef idx="1">
-                <a:schemeClr val="accent1"/>
-              </a:fillRef>
-              <a:effectRef idx="0">
-                <a:schemeClr val="accent1"/>
-              </a:effectRef>
-              <a:fontRef idx="minor">
-                <a:schemeClr val="lt1"/>
-              </a:fontRef>
-            </p:style>
-            <p:txBody>
-              <a:bodyPr rtlCol="0" anchor="ctr"/>
-              <a:lstStyle/>
-              <a:p>
-                <a:pPr algn="ctr"/>
-                <a:r>
-                  <a:rPr lang="en-US" sz="1400" dirty="0"/>
-                  <a:t>Note: </a:t>
-                </a:r>
-                <a14:m>
-                  <m:oMath xmlns:m="http://schemas.openxmlformats.org/officeDocument/2006/math">
-                    <m:r>
-                      <a:rPr lang="en-US" sz="1400" i="1" dirty="0">
-                        <a:latin typeface="Cambria Math" panose="02040503050406030204" pitchFamily="18" charset="0"/>
-                      </a:rPr>
-                      <m:t>𝜋</m:t>
-                    </m:r>
-                  </m:oMath>
-                </a14:m>
-                <a:r>
-                  <a:rPr lang="en-US" sz="1400" dirty="0"/>
-                  <a:t> is 180° in radians</a:t>
-                </a:r>
-              </a:p>
-            </p:txBody>
-          </p:sp>
-        </mc:Choice>
-        <mc:Fallback xmlns="">
-          <p:sp>
-            <p:nvSpPr>
-              <p:cNvPr id="32" name="Rectangle: Rounded Corners 31">
-                <a:extLst>
-                  <a:ext uri="{FF2B5EF4-FFF2-40B4-BE49-F238E27FC236}">
-                    <a16:creationId xmlns:a16="http://schemas.microsoft.com/office/drawing/2014/main" id="{7350A765-B62B-4ADE-CD38-637FA7EC305A}"/>
-                  </a:ext>
-                </a:extLst>
-              </p:cNvPr>
-              <p:cNvSpPr>
-                <a:spLocks noRot="1" noChangeAspect="1" noMove="1" noResize="1" noEditPoints="1" noAdjustHandles="1" noChangeArrowheads="1" noChangeShapeType="1" noTextEdit="1"/>
-              </p:cNvSpPr>
-              <p:nvPr/>
-            </p:nvSpPr>
-            <p:spPr>
-              <a:xfrm>
-                <a:off x="10014097" y="2543767"/>
-                <a:ext cx="1339703" cy="878958"/>
-              </a:xfrm>
-              <a:prstGeom prst="roundRect">
-                <a:avLst/>
-              </a:prstGeom>
-              <a:blipFill>
-                <a:blip r:embed="rId3"/>
-                <a:stretch>
-                  <a:fillRect/>
+                  <a:fillRect l="-498" t="-3320"/>
                 </a:stretch>
               </a:blipFill>
             </p:spPr>
@@ -16511,9 +16473,9 @@
         <p:grpSpPr>
           <a:xfrm>
             <a:off x="608001" y="4105239"/>
-            <a:ext cx="10975998" cy="2454194"/>
+            <a:ext cx="10975998" cy="2423416"/>
             <a:chOff x="555214" y="4273987"/>
-            <a:chExt cx="10975998" cy="2454194"/>
+            <a:chExt cx="10975998" cy="2423416"/>
           </a:xfrm>
         </p:grpSpPr>
         <p:grpSp>
@@ -16591,7 +16553,7 @@
                   <p:nvPr/>
                 </p:nvPicPr>
                 <p:blipFill>
-                  <a:blip r:embed="rId4"/>
+                  <a:blip r:embed="rId3"/>
                   <a:stretch>
                     <a:fillRect/>
                   </a:stretch>
@@ -17670,8 +17632,8 @@
             </a:fontRef>
           </p:style>
         </p:cxnSp>
-        <mc:AlternateContent xmlns:mc="http://schemas.openxmlformats.org/markup-compatibility/2006" xmlns:a14="http://schemas.microsoft.com/office/drawing/2010/main">
-          <mc:Choice Requires="a14">
+        <mc:AlternateContent xmlns:mc="http://schemas.openxmlformats.org/markup-compatibility/2006">
+          <mc:Choice xmlns:a14="http://schemas.microsoft.com/office/drawing/2010/main" Requires="a14">
             <p:sp>
               <p:nvSpPr>
                 <p:cNvPr id="25" name="TextBox 24">
@@ -17687,7 +17649,7 @@
               <p:spPr>
                 <a:xfrm>
                   <a:off x="4464397" y="6358849"/>
-                  <a:ext cx="2969416" cy="369332"/>
+                  <a:ext cx="2969416" cy="338554"/>
                 </a:xfrm>
                 <a:prstGeom prst="rect">
                   <a:avLst/>
@@ -17708,7 +17670,7 @@
                       </m:oMathParaPr>
                       <m:oMath xmlns:m="http://schemas.openxmlformats.org/officeDocument/2006/math">
                         <m:r>
-                          <a:rPr lang="en-US" b="1" i="1" smtClean="0">
+                          <a:rPr lang="en-US" sz="1600" b="1" i="1" smtClean="0">
                             <a:latin typeface="Cambria Math" panose="02040503050406030204" pitchFamily="18" charset="0"/>
                           </a:rPr>
                           <m:t>𝒙</m:t>
@@ -17716,14 +17678,14 @@
                         <m:d>
                           <m:dPr>
                             <m:ctrlPr>
-                              <a:rPr lang="en-US" b="0" i="1" smtClean="0">
+                              <a:rPr lang="en-US" sz="1600" b="0" i="1" smtClean="0">
                                 <a:latin typeface="Cambria Math" panose="02040503050406030204" pitchFamily="18" charset="0"/>
                               </a:rPr>
                             </m:ctrlPr>
                           </m:dPr>
                           <m:e>
                             <m:r>
-                              <a:rPr lang="en-US" b="0" i="1" smtClean="0">
+                              <a:rPr lang="en-US" sz="1600" b="0" i="1" smtClean="0">
                                 <a:latin typeface="Cambria Math" panose="02040503050406030204" pitchFamily="18" charset="0"/>
                               </a:rPr>
                               <m:t>.2</m:t>
@@ -17731,13 +17693,13 @@
                           </m:e>
                         </m:d>
                         <m:r>
-                          <a:rPr lang="en-US" b="0" i="1" smtClean="0">
+                          <a:rPr lang="en-US" sz="1600" b="0" i="1" smtClean="0">
                             <a:latin typeface="Cambria Math" panose="02040503050406030204" pitchFamily="18" charset="0"/>
                           </a:rPr>
                           <m:t>=</m:t>
                         </m:r>
                         <m:r>
-                          <a:rPr lang="en-US" b="0" i="0" smtClean="0">
+                          <a:rPr lang="en-US" sz="1600" b="0" i="0" smtClean="0">
                             <a:latin typeface="Cambria Math" panose="02040503050406030204" pitchFamily="18" charset="0"/>
                           </a:rPr>
                           <m:t>(1, .9,.65, .35,. 1)</m:t>
@@ -17745,12 +17707,12 @@
                       </m:oMath>
                     </m:oMathPara>
                   </a14:m>
-                  <a:endParaRPr lang="en-US" dirty="0"/>
+                  <a:endParaRPr lang="en-US" sz="1600" dirty="0"/>
                 </a:p>
               </p:txBody>
             </p:sp>
           </mc:Choice>
-          <mc:Fallback xmlns="">
+          <mc:Fallback>
             <p:sp>
               <p:nvSpPr>
                 <p:cNvPr id="25" name="TextBox 24">
@@ -17768,7 +17730,7 @@
               <p:spPr>
                 <a:xfrm>
                   <a:off x="4464397" y="6358849"/>
-                  <a:ext cx="2969416" cy="369332"/>
+                  <a:ext cx="2969416" cy="338554"/>
                 </a:xfrm>
                 <a:prstGeom prst="rect">
                   <a:avLst/>
@@ -17776,7 +17738,7 @@
                 <a:blipFill>
                   <a:blip r:embed="rId12"/>
                   <a:stretch>
-                    <a:fillRect b="-13115"/>
+                    <a:fillRect b="-8929"/>
                   </a:stretch>
                 </a:blipFill>
               </p:spPr>
@@ -17795,6 +17757,319 @@
             </p:sp>
           </mc:Fallback>
         </mc:AlternateContent>
+      </p:grpSp>
+      <mc:AlternateContent xmlns:mc="http://schemas.openxmlformats.org/markup-compatibility/2006">
+        <mc:Choice xmlns:a14="http://schemas.microsoft.com/office/drawing/2010/main" Requires="a14">
+          <p:sp>
+            <p:nvSpPr>
+              <p:cNvPr id="10" name="Speech Bubble: Rectangle with Corners Rounded 9">
+                <a:extLst>
+                  <a:ext uri="{FF2B5EF4-FFF2-40B4-BE49-F238E27FC236}">
+                    <a16:creationId xmlns:a16="http://schemas.microsoft.com/office/drawing/2014/main" id="{C8AC6A20-B8CB-1187-C462-562359C18B3A}"/>
+                  </a:ext>
+                </a:extLst>
+              </p:cNvPr>
+              <p:cNvSpPr/>
+              <p:nvPr/>
+            </p:nvSpPr>
+            <p:spPr>
+              <a:xfrm>
+                <a:off x="6437818" y="2529410"/>
+                <a:ext cx="1698771" cy="365954"/>
+              </a:xfrm>
+              <a:prstGeom prst="wedgeRoundRectCallout">
+                <a:avLst>
+                  <a:gd name="adj1" fmla="val -80755"/>
+                  <a:gd name="adj2" fmla="val -24610"/>
+                  <a:gd name="adj3" fmla="val 16667"/>
+                </a:avLst>
+              </a:prstGeom>
+            </p:spPr>
+            <p:style>
+              <a:lnRef idx="2">
+                <a:schemeClr val="accent1">
+                  <a:shade val="15000"/>
+                </a:schemeClr>
+              </a:lnRef>
+              <a:fillRef idx="1">
+                <a:schemeClr val="accent1"/>
+              </a:fillRef>
+              <a:effectRef idx="0">
+                <a:schemeClr val="accent1"/>
+              </a:effectRef>
+              <a:fontRef idx="minor">
+                <a:schemeClr val="lt1"/>
+              </a:fontRef>
+            </p:style>
+            <p:txBody>
+              <a:bodyPr rtlCol="0" anchor="ctr"/>
+              <a:lstStyle/>
+              <a:p>
+                <a:pPr algn="ctr"/>
+                <a14:m>
+                  <m:oMath xmlns:m="http://schemas.openxmlformats.org/officeDocument/2006/math">
+                    <m:r>
+                      <a:rPr lang="en-US" sz="1200" i="1" dirty="0">
+                        <a:latin typeface="Cambria Math" panose="02040503050406030204" pitchFamily="18" charset="0"/>
+                      </a:rPr>
+                      <m:t>𝜋</m:t>
+                    </m:r>
+                  </m:oMath>
+                </a14:m>
+                <a:r>
+                  <a:rPr lang="en-US" sz="1200" dirty="0"/>
+                  <a:t> is 180° in radians</a:t>
+                </a:r>
+              </a:p>
+            </p:txBody>
+          </p:sp>
+        </mc:Choice>
+        <mc:Fallback>
+          <p:sp>
+            <p:nvSpPr>
+              <p:cNvPr id="10" name="Speech Bubble: Rectangle with Corners Rounded 9">
+                <a:extLst>
+                  <a:ext uri="{FF2B5EF4-FFF2-40B4-BE49-F238E27FC236}">
+                    <a16:creationId xmlns:a16="http://schemas.microsoft.com/office/drawing/2014/main" id="{C8AC6A20-B8CB-1187-C462-562359C18B3A}"/>
+                  </a:ext>
+                </a:extLst>
+              </p:cNvPr>
+              <p:cNvSpPr>
+                <a:spLocks noRot="1" noChangeAspect="1" noMove="1" noResize="1" noEditPoints="1" noAdjustHandles="1" noChangeArrowheads="1" noChangeShapeType="1" noTextEdit="1"/>
+              </p:cNvSpPr>
+              <p:nvPr/>
+            </p:nvSpPr>
+            <p:spPr>
+              <a:xfrm>
+                <a:off x="6437818" y="2529410"/>
+                <a:ext cx="1698771" cy="365954"/>
+              </a:xfrm>
+              <a:prstGeom prst="wedgeRoundRectCallout">
+                <a:avLst>
+                  <a:gd name="adj1" fmla="val -80755"/>
+                  <a:gd name="adj2" fmla="val -24610"/>
+                  <a:gd name="adj3" fmla="val 16667"/>
+                </a:avLst>
+              </a:prstGeom>
+              <a:blipFill>
+                <a:blip r:embed="rId13"/>
+                <a:stretch>
+                  <a:fillRect/>
+                </a:stretch>
+              </a:blipFill>
+            </p:spPr>
+            <p:txBody>
+              <a:bodyPr/>
+              <a:lstStyle/>
+              <a:p>
+                <a:r>
+                  <a:rPr lang="en-US">
+                    <a:noFill/>
+                  </a:rPr>
+                  <a:t> </a:t>
+                </a:r>
+              </a:p>
+            </p:txBody>
+          </p:sp>
+        </mc:Fallback>
+      </mc:AlternateContent>
+      <p:grpSp>
+        <p:nvGrpSpPr>
+          <p:cNvPr id="13" name="Group 12">
+            <a:extLst>
+              <a:ext uri="{FF2B5EF4-FFF2-40B4-BE49-F238E27FC236}">
+                <a16:creationId xmlns:a16="http://schemas.microsoft.com/office/drawing/2014/main" id="{38876022-5188-C8C5-E2FF-F9F27D5220A1}"/>
+              </a:ext>
+            </a:extLst>
+          </p:cNvPr>
+          <p:cNvGrpSpPr/>
+          <p:nvPr/>
+        </p:nvGrpSpPr>
+        <p:grpSpPr>
+          <a:xfrm>
+            <a:off x="9287350" y="1161569"/>
+            <a:ext cx="2654378" cy="2539225"/>
+            <a:chOff x="9371240" y="792237"/>
+            <a:chExt cx="2654378" cy="2539225"/>
+          </a:xfrm>
+        </p:grpSpPr>
+        <p:pic>
+          <p:nvPicPr>
+            <p:cNvPr id="1028" name="Picture 4" descr="Function '&quot;`UNIQ--postMath-00000001-QINU`&quot;' (in red) is a Fourier series sum of 6 harmonically related sine waves (in blue). Its Fourier transform '&quot;`UNIQ--postMath-00000002-QINU`&quot;' is a frequency-domain representation that reveals the amplitudes of the summed sine waves.">
+              <a:extLst>
+                <a:ext uri="{FF2B5EF4-FFF2-40B4-BE49-F238E27FC236}">
+                  <a16:creationId xmlns:a16="http://schemas.microsoft.com/office/drawing/2014/main" id="{1E00C4C1-B0C6-8D46-6D83-4982BDA32576}"/>
+                </a:ext>
+              </a:extLst>
+            </p:cNvPr>
+            <p:cNvPicPr>
+              <a:picLocks noChangeAspect="1" noChangeArrowheads="1"/>
+            </p:cNvPicPr>
+            <p:nvPr/>
+          </p:nvPicPr>
+          <p:blipFill>
+            <a:blip r:embed="rId14">
+              <a:extLst>
+                <a:ext uri="{28A0092B-C50C-407E-A947-70E740481C1C}">
+                  <a14:useLocalDpi xmlns:a14="http://schemas.microsoft.com/office/drawing/2010/main" val="0"/>
+                </a:ext>
+              </a:extLst>
+            </a:blip>
+            <a:srcRect/>
+            <a:stretch>
+              <a:fillRect/>
+            </a:stretch>
+          </p:blipFill>
+          <p:spPr bwMode="auto">
+            <a:xfrm>
+              <a:off x="9501712" y="1016040"/>
+              <a:ext cx="2381250" cy="1905000"/>
+            </a:xfrm>
+            <a:prstGeom prst="rect">
+              <a:avLst/>
+            </a:prstGeom>
+            <a:noFill/>
+            <a:extLst>
+              <a:ext uri="{909E8E84-426E-40DD-AFC4-6F175D3DCCD1}">
+                <a14:hiddenFill xmlns:a14="http://schemas.microsoft.com/office/drawing/2010/main">
+                  <a:solidFill>
+                    <a:srgbClr val="FFFFFF"/>
+                  </a:solidFill>
+                </a14:hiddenFill>
+              </a:ext>
+            </a:extLst>
+          </p:spPr>
+        </p:pic>
+        <p:sp>
+          <p:nvSpPr>
+            <p:cNvPr id="4" name="TextBox 3">
+              <a:extLst>
+                <a:ext uri="{FF2B5EF4-FFF2-40B4-BE49-F238E27FC236}">
+                  <a16:creationId xmlns:a16="http://schemas.microsoft.com/office/drawing/2014/main" id="{4BEBFB7D-EF21-EEA1-D0B5-97D0785E5CE8}"/>
+                </a:ext>
+              </a:extLst>
+            </p:cNvPr>
+            <p:cNvSpPr txBox="1"/>
+            <p:nvPr/>
+          </p:nvSpPr>
+          <p:spPr>
+            <a:xfrm>
+              <a:off x="9679818" y="3017680"/>
+              <a:ext cx="2136913" cy="261610"/>
+            </a:xfrm>
+            <a:prstGeom prst="rect">
+              <a:avLst/>
+            </a:prstGeom>
+            <a:noFill/>
+          </p:spPr>
+          <p:txBody>
+            <a:bodyPr wrap="square" rtlCol="0">
+              <a:spAutoFit/>
+            </a:bodyPr>
+            <a:lstStyle/>
+            <a:p>
+              <a:pPr algn="ctr"/>
+              <a:r>
+                <a:rPr lang="en-US" sz="1050" dirty="0"/>
+                <a:t>Source: Wikipedia</a:t>
+              </a:r>
+            </a:p>
+          </p:txBody>
+        </p:sp>
+        <p:sp>
+          <p:nvSpPr>
+            <p:cNvPr id="11" name="TextBox 10">
+              <a:extLst>
+                <a:ext uri="{FF2B5EF4-FFF2-40B4-BE49-F238E27FC236}">
+                  <a16:creationId xmlns:a16="http://schemas.microsoft.com/office/drawing/2014/main" id="{4F1CDC3E-E49F-497B-6FDE-BA313756B65E}"/>
+                </a:ext>
+              </a:extLst>
+            </p:cNvPr>
+            <p:cNvSpPr txBox="1"/>
+            <p:nvPr/>
+          </p:nvSpPr>
+          <p:spPr>
+            <a:xfrm>
+              <a:off x="9584743" y="861799"/>
+              <a:ext cx="2136913" cy="261610"/>
+            </a:xfrm>
+            <a:prstGeom prst="rect">
+              <a:avLst/>
+            </a:prstGeom>
+            <a:noFill/>
+          </p:spPr>
+          <p:txBody>
+            <a:bodyPr wrap="square" rtlCol="0">
+              <a:spAutoFit/>
+            </a:bodyPr>
+            <a:lstStyle/>
+            <a:p>
+              <a:pPr algn="ctr"/>
+              <a:r>
+                <a:rPr lang="en-US" sz="1050" b="1" dirty="0"/>
+                <a:t>Example</a:t>
+              </a:r>
+              <a:r>
+                <a:rPr lang="en-US" sz="1050" dirty="0"/>
+                <a:t>: Fourier Transform</a:t>
+              </a:r>
+            </a:p>
+          </p:txBody>
+        </p:sp>
+        <p:sp>
+          <p:nvSpPr>
+            <p:cNvPr id="12" name="Rectangle 11">
+              <a:extLst>
+                <a:ext uri="{FF2B5EF4-FFF2-40B4-BE49-F238E27FC236}">
+                  <a16:creationId xmlns:a16="http://schemas.microsoft.com/office/drawing/2014/main" id="{6F1A2B57-5D62-E99D-69BF-688E1CEF2542}"/>
+                </a:ext>
+              </a:extLst>
+            </p:cNvPr>
+            <p:cNvSpPr/>
+            <p:nvPr/>
+          </p:nvSpPr>
+          <p:spPr>
+            <a:xfrm>
+              <a:off x="9371240" y="792237"/>
+              <a:ext cx="2654378" cy="2539225"/>
+            </a:xfrm>
+            <a:prstGeom prst="rect">
+              <a:avLst/>
+            </a:prstGeom>
+            <a:noFill/>
+            <a:ln w="9525" cap="flat" cmpd="sng" algn="ctr">
+              <a:solidFill>
+                <a:schemeClr val="dk1"/>
+              </a:solidFill>
+              <a:prstDash val="solid"/>
+              <a:round/>
+              <a:headEnd type="none" w="med" len="med"/>
+              <a:tailEnd type="none" w="med" len="med"/>
+            </a:ln>
+          </p:spPr>
+          <p:style>
+            <a:lnRef idx="0">
+              <a:scrgbClr r="0" g="0" b="0"/>
+            </a:lnRef>
+            <a:fillRef idx="0">
+              <a:scrgbClr r="0" g="0" b="0"/>
+            </a:fillRef>
+            <a:effectRef idx="0">
+              <a:scrgbClr r="0" g="0" b="0"/>
+            </a:effectRef>
+            <a:fontRef idx="minor">
+              <a:schemeClr val="dk1"/>
+            </a:fontRef>
+          </p:style>
+          <p:txBody>
+            <a:bodyPr rtlCol="0" anchor="ctr"/>
+            <a:lstStyle/>
+            <a:p>
+              <a:pPr algn="ctr"/>
+              <a:endParaRPr lang="en-US"/>
+            </a:p>
+          </p:txBody>
+        </p:sp>
       </p:grpSp>
     </p:spTree>
     <p:extLst>
@@ -17840,6 +18115,144 @@
                                           </p:stCondLst>
                                         </p:cTn>
                                         <p:tgtEl>
+                                          <p:spTgt spid="3">
+                                            <p:txEl>
+                                              <p:pRg st="1" end="1"/>
+                                            </p:txEl>
+                                          </p:spTgt>
+                                        </p:tgtEl>
+                                        <p:attrNameLst>
+                                          <p:attrName>style.visibility</p:attrName>
+                                        </p:attrNameLst>
+                                      </p:cBhvr>
+                                      <p:to>
+                                        <p:strVal val="visible"/>
+                                      </p:to>
+                                    </p:set>
+                                  </p:childTnLst>
+                                </p:cTn>
+                              </p:par>
+                              <p:par>
+                                <p:cTn id="7" presetID="1" presetClass="entr" presetSubtype="0" fill="hold" nodeType="withEffect">
+                                  <p:stCondLst>
+                                    <p:cond delay="0"/>
+                                  </p:stCondLst>
+                                  <p:childTnLst>
+                                    <p:set>
+                                      <p:cBhvr>
+                                        <p:cTn id="8" dur="1" fill="hold">
+                                          <p:stCondLst>
+                                            <p:cond delay="0"/>
+                                          </p:stCondLst>
+                                        </p:cTn>
+                                        <p:tgtEl>
+                                          <p:spTgt spid="3">
+                                            <p:txEl>
+                                              <p:pRg st="2" end="2"/>
+                                            </p:txEl>
+                                          </p:spTgt>
+                                        </p:tgtEl>
+                                        <p:attrNameLst>
+                                          <p:attrName>style.visibility</p:attrName>
+                                        </p:attrNameLst>
+                                      </p:cBhvr>
+                                      <p:to>
+                                        <p:strVal val="visible"/>
+                                      </p:to>
+                                    </p:set>
+                                  </p:childTnLst>
+                                </p:cTn>
+                              </p:par>
+                              <p:par>
+                                <p:cTn id="9" presetID="1" presetClass="entr" presetSubtype="0" fill="hold" nodeType="withEffect">
+                                  <p:stCondLst>
+                                    <p:cond delay="0"/>
+                                  </p:stCondLst>
+                                  <p:childTnLst>
+                                    <p:set>
+                                      <p:cBhvr>
+                                        <p:cTn id="10" dur="1" fill="hold">
+                                          <p:stCondLst>
+                                            <p:cond delay="0"/>
+                                          </p:stCondLst>
+                                        </p:cTn>
+                                        <p:tgtEl>
+                                          <p:spTgt spid="3">
+                                            <p:txEl>
+                                              <p:pRg st="3" end="3"/>
+                                            </p:txEl>
+                                          </p:spTgt>
+                                        </p:tgtEl>
+                                        <p:attrNameLst>
+                                          <p:attrName>style.visibility</p:attrName>
+                                        </p:attrNameLst>
+                                      </p:cBhvr>
+                                      <p:to>
+                                        <p:strVal val="visible"/>
+                                      </p:to>
+                                    </p:set>
+                                  </p:childTnLst>
+                                </p:cTn>
+                              </p:par>
+                              <p:par>
+                                <p:cTn id="11" presetID="1" presetClass="entr" presetSubtype="0" fill="hold" grpId="0" nodeType="withEffect">
+                                  <p:stCondLst>
+                                    <p:cond delay="0"/>
+                                  </p:stCondLst>
+                                  <p:childTnLst>
+                                    <p:set>
+                                      <p:cBhvr>
+                                        <p:cTn id="12" dur="1" fill="hold">
+                                          <p:stCondLst>
+                                            <p:cond delay="0"/>
+                                          </p:stCondLst>
+                                        </p:cTn>
+                                        <p:tgtEl>
+                                          <p:spTgt spid="10"/>
+                                        </p:tgtEl>
+                                        <p:attrNameLst>
+                                          <p:attrName>style.visibility</p:attrName>
+                                        </p:attrNameLst>
+                                      </p:cBhvr>
+                                      <p:to>
+                                        <p:strVal val="visible"/>
+                                      </p:to>
+                                    </p:set>
+                                  </p:childTnLst>
+                                </p:cTn>
+                              </p:par>
+                            </p:childTnLst>
+                          </p:cTn>
+                        </p:par>
+                      </p:childTnLst>
+                    </p:cTn>
+                  </p:par>
+                  <p:par>
+                    <p:cTn id="13" fill="hold">
+                      <p:stCondLst>
+                        <p:cond delay="indefinite"/>
+                      </p:stCondLst>
+                      <p:childTnLst>
+                        <p:par>
+                          <p:cTn id="14" fill="hold">
+                            <p:stCondLst>
+                              <p:cond delay="0"/>
+                            </p:stCondLst>
+                            <p:childTnLst>
+                              <p:par>
+                                <p:cTn id="15" presetID="1" presetClass="entr" presetSubtype="0" fill="hold" nodeType="clickEffect">
+                                  <p:stCondLst>
+                                    <p:cond delay="0"/>
+                                  </p:stCondLst>
+                                  <p:childTnLst>
+                                    <p:set>
+                                      <p:cBhvr>
+                                        <p:cTn id="16" dur="1" fill="hold">
+                                          <p:stCondLst>
+                                            <p:cond delay="0"/>
+                                          </p:stCondLst>
+                                        </p:cTn>
+                                        <p:tgtEl>
                                           <p:spTgt spid="28"/>
                                         </p:tgtEl>
                                         <p:attrNameLst>
@@ -17880,6 +18293,9 @@
         </p:cTn>
       </p:par>
     </p:tnLst>
+    <p:bldLst>
+      <p:bldP spid="10" grpId="0" animBg="1"/>
+    </p:bldLst>
   </p:timing>
 </p:sld>
 </file>
@@ -21038,8 +21454,8 @@
           </p:txBody>
         </p:sp>
       </p:grpSp>
-      <mc:AlternateContent xmlns:mc="http://schemas.openxmlformats.org/markup-compatibility/2006" xmlns:a14="http://schemas.microsoft.com/office/drawing/2010/main">
-        <mc:Choice Requires="a14">
+      <mc:AlternateContent xmlns:mc="http://schemas.openxmlformats.org/markup-compatibility/2006">
+        <mc:Choice xmlns:a14="http://schemas.microsoft.com/office/drawing/2010/main" Requires="a14">
           <p:sp>
             <p:nvSpPr>
               <p:cNvPr id="46" name="Speech Bubble: Rectangle with Corners Rounded 45">
@@ -21111,7 +21527,7 @@
                 </a:pPr>
                 <a:r>
                   <a:rPr lang="en-US" sz="1400" dirty="0"/>
-                  <a:t>Use a different </a:t>
+                  <a:t>We can use a different </a:t>
                 </a:r>
                 <a14:m>
                   <m:oMath xmlns:m="http://schemas.openxmlformats.org/officeDocument/2006/math">
@@ -21131,7 +21547,7 @@
             </p:txBody>
           </p:sp>
         </mc:Choice>
-        <mc:Fallback xmlns="">
+        <mc:Fallback>
           <p:sp>
             <p:nvSpPr>
               <p:cNvPr id="46" name="Speech Bubble: Rectangle with Corners Rounded 45">
@@ -21545,8 +21961,8 @@
           </a:p>
         </p:txBody>
       </p:sp>
-      <mc:AlternateContent xmlns:mc="http://schemas.openxmlformats.org/markup-compatibility/2006" xmlns:a14="http://schemas.microsoft.com/office/drawing/2010/main">
-        <mc:Choice Requires="a14">
+      <mc:AlternateContent xmlns:mc="http://schemas.openxmlformats.org/markup-compatibility/2006">
+        <mc:Choice xmlns:a14="http://schemas.microsoft.com/office/drawing/2010/main" Requires="a14">
           <p:sp>
             <p:nvSpPr>
               <p:cNvPr id="3" name="Content Placeholder 2">
@@ -21577,19 +21993,39 @@
               <a:p>
                 <a:r>
                   <a:rPr lang="en-US" dirty="0"/>
-                  <a:t>Partition the space using several overlapping grids.</a:t>
+                  <a:t>Partition the space using several </a:t>
+                </a:r>
+                <a:r>
+                  <a:rPr lang="en-US" b="1" dirty="0"/>
+                  <a:t>overlapping grids</a:t>
+                </a:r>
+                <a:r>
+                  <a:rPr lang="en-US" dirty="0"/>
+                  <a:t>.</a:t>
                 </a:r>
               </a:p>
               <a:p>
                 <a:r>
                   <a:rPr lang="en-US" dirty="0"/>
-                  <a:t>Represent the state by the “active” tiles in the grids.</a:t>
+                  <a:t>Represent the state by the </a:t>
+                </a:r>
+                <a:r>
+                  <a:rPr lang="en-US" b="1" dirty="0"/>
+                  <a:t>“active” tiles </a:t>
+                </a:r>
+                <a:r>
+                  <a:rPr lang="en-US" dirty="0"/>
+                  <a:t>in the grids.</a:t>
                 </a:r>
               </a:p>
               <a:p>
                 <a:r>
+                  <a:rPr lang="en-US" b="1" dirty="0"/>
+                  <a:t>Similar states will share active tiles</a:t>
+                </a:r>
+                <a:r>
                   <a:rPr lang="en-US" dirty="0"/>
-                  <a:t>Similar states will share active tiles. Leads to a local generalization.</a:t>
+                  <a:t>. Leads to a local generalization.</a:t>
                 </a:r>
               </a:p>
               <a:p>
@@ -21684,7 +22120,7 @@
             </p:txBody>
           </p:sp>
         </mc:Choice>
-        <mc:Fallback xmlns="">
+        <mc:Fallback>
           <p:sp>
             <p:nvSpPr>
               <p:cNvPr id="3" name="Content Placeholder 2">
@@ -23031,6 +23467,167 @@
           </a:prstGeom>
         </p:spPr>
       </p:pic>
+      <p:sp>
+        <p:nvSpPr>
+          <p:cNvPr id="7" name="Rectangle 6">
+            <a:extLst>
+              <a:ext uri="{FF2B5EF4-FFF2-40B4-BE49-F238E27FC236}">
+                <a16:creationId xmlns:a16="http://schemas.microsoft.com/office/drawing/2014/main" id="{E94AC593-803B-989F-4D87-FCF5A79AE08B}"/>
+              </a:ext>
+            </a:extLst>
+          </p:cNvPr>
+          <p:cNvSpPr/>
+          <p:nvPr/>
+        </p:nvSpPr>
+        <p:spPr>
+          <a:xfrm>
+            <a:off x="1247335" y="4562623"/>
+            <a:ext cx="1022253" cy="961292"/>
+          </a:xfrm>
+          <a:prstGeom prst="rect">
+            <a:avLst/>
+          </a:prstGeom>
+          <a:noFill/>
+          <a:ln w="9525" cap="flat" cmpd="sng" algn="ctr">
+            <a:solidFill>
+              <a:schemeClr val="accent3"/>
+            </a:solidFill>
+            <a:prstDash val="solid"/>
+            <a:round/>
+            <a:headEnd type="none" w="med" len="med"/>
+            <a:tailEnd type="none" w="med" len="med"/>
+          </a:ln>
+        </p:spPr>
+        <p:style>
+          <a:lnRef idx="0">
+            <a:scrgbClr r="0" g="0" b="0"/>
+          </a:lnRef>
+          <a:fillRef idx="0">
+            <a:scrgbClr r="0" g="0" b="0"/>
+          </a:fillRef>
+          <a:effectRef idx="0">
+            <a:scrgbClr r="0" g="0" b="0"/>
+          </a:effectRef>
+          <a:fontRef idx="minor">
+            <a:schemeClr val="accent3"/>
+          </a:fontRef>
+        </p:style>
+        <p:txBody>
+          <a:bodyPr rtlCol="0" anchor="ctr"/>
+          <a:lstStyle/>
+          <a:p>
+            <a:pPr algn="ctr"/>
+            <a:endParaRPr lang="en-US"/>
+          </a:p>
+        </p:txBody>
+      </p:sp>
+      <p:sp>
+        <p:nvSpPr>
+          <p:cNvPr id="13" name="Rectangle 12">
+            <a:extLst>
+              <a:ext uri="{FF2B5EF4-FFF2-40B4-BE49-F238E27FC236}">
+                <a16:creationId xmlns:a16="http://schemas.microsoft.com/office/drawing/2014/main" id="{6A5D3011-61ED-2F34-FB57-19C3D99CB1AA}"/>
+              </a:ext>
+            </a:extLst>
+          </p:cNvPr>
+          <p:cNvSpPr/>
+          <p:nvPr/>
+        </p:nvSpPr>
+        <p:spPr>
+          <a:xfrm>
+            <a:off x="1445895" y="4335195"/>
+            <a:ext cx="1022253" cy="961292"/>
+          </a:xfrm>
+          <a:prstGeom prst="rect">
+            <a:avLst/>
+          </a:prstGeom>
+          <a:noFill/>
+          <a:ln w="9525" cap="flat" cmpd="sng" algn="ctr">
+            <a:solidFill>
+              <a:schemeClr val="accent3"/>
+            </a:solidFill>
+            <a:prstDash val="solid"/>
+            <a:round/>
+            <a:headEnd type="none" w="med" len="med"/>
+            <a:tailEnd type="none" w="med" len="med"/>
+          </a:ln>
+        </p:spPr>
+        <p:style>
+          <a:lnRef idx="0">
+            <a:scrgbClr r="0" g="0" b="0"/>
+          </a:lnRef>
+          <a:fillRef idx="0">
+            <a:scrgbClr r="0" g="0" b="0"/>
+          </a:fillRef>
+          <a:effectRef idx="0">
+            <a:scrgbClr r="0" g="0" b="0"/>
+          </a:effectRef>
+          <a:fontRef idx="minor">
+            <a:schemeClr val="accent3"/>
+          </a:fontRef>
+        </p:style>
+        <p:txBody>
+          <a:bodyPr rtlCol="0" anchor="ctr"/>
+          <a:lstStyle/>
+          <a:p>
+            <a:pPr algn="ctr"/>
+            <a:endParaRPr lang="en-US"/>
+          </a:p>
+        </p:txBody>
+      </p:sp>
+      <p:sp>
+        <p:nvSpPr>
+          <p:cNvPr id="14" name="Speech Bubble: Rectangle with Corners Rounded 13">
+            <a:extLst>
+              <a:ext uri="{FF2B5EF4-FFF2-40B4-BE49-F238E27FC236}">
+                <a16:creationId xmlns:a16="http://schemas.microsoft.com/office/drawing/2014/main" id="{8CC8CCF1-F8F1-331B-B2FC-C34026341DC5}"/>
+              </a:ext>
+            </a:extLst>
+          </p:cNvPr>
+          <p:cNvSpPr/>
+          <p:nvPr/>
+        </p:nvSpPr>
+        <p:spPr>
+          <a:xfrm>
+            <a:off x="1366178" y="5951509"/>
+            <a:ext cx="1681822" cy="378953"/>
+          </a:xfrm>
+          <a:prstGeom prst="wedgeRoundRectCallout">
+            <a:avLst>
+              <a:gd name="adj1" fmla="val -25235"/>
+              <a:gd name="adj2" fmla="val -222768"/>
+              <a:gd name="adj3" fmla="val 16667"/>
+            </a:avLst>
+          </a:prstGeom>
+        </p:spPr>
+        <p:style>
+          <a:lnRef idx="2">
+            <a:schemeClr val="accent3">
+              <a:shade val="15000"/>
+            </a:schemeClr>
+          </a:lnRef>
+          <a:fillRef idx="1">
+            <a:schemeClr val="accent3"/>
+          </a:fillRef>
+          <a:effectRef idx="0">
+            <a:schemeClr val="accent3"/>
+          </a:effectRef>
+          <a:fontRef idx="minor">
+            <a:schemeClr val="lt1"/>
+          </a:fontRef>
+        </p:style>
+        <p:txBody>
+          <a:bodyPr rtlCol="0" anchor="ctr"/>
+          <a:lstStyle/>
+          <a:p>
+            <a:pPr algn="ctr"/>
+            <a:r>
+              <a:rPr lang="en-US" dirty="0"/>
+              <a:t>Example tiles</a:t>
+            </a:r>
+          </a:p>
+        </p:txBody>
+      </p:sp>
     </p:spTree>
     <p:extLst>
       <p:ext uri="{BB962C8B-B14F-4D97-AF65-F5344CB8AC3E}">
@@ -26683,7 +27280,10 @@
           <a:bodyPr/>
           <a:lstStyle/>
           <a:p>
-            <a:endParaRPr lang="en-US"/>
+            <a:r>
+              <a:rPr lang="en-US" dirty="0"/>
+              <a:t>Semi-Gradient Sarsa</a:t>
+            </a:r>
           </a:p>
         </p:txBody>
       </p:sp>
@@ -30325,7 +30925,7 @@
             <p:spPr/>
             <p:txBody>
               <a:bodyPr>
-                <a:normAutofit fontScale="77500" lnSpcReduction="20000"/>
+                <a:normAutofit fontScale="70000" lnSpcReduction="20000"/>
               </a:bodyPr>
               <a:lstStyle/>
               <a:p>
@@ -31322,6 +31922,13 @@
                 <a:endParaRPr lang="en-US" dirty="0"/>
               </a:p>
               <a:p>
+                <a:pPr lvl="2"/>
+                <a:r>
+                  <a:rPr lang="en-US" dirty="0"/>
+                  <a:t>…</a:t>
+                </a:r>
+              </a:p>
+              <a:p>
                 <a:endParaRPr lang="en-US" dirty="0"/>
               </a:p>
               <a:p>
@@ -31540,6 +32147,9 @@
                 <a:endParaRPr lang="en-US" dirty="0"/>
               </a:p>
               <a:p>
+                <a:endParaRPr lang="en-US" dirty="0"/>
+              </a:p>
+              <a:p>
                 <a:r>
                   <a:rPr lang="en-US" dirty="0"/>
                   <a:t>For on-policy control, use a soft approximation to the greedy policy (e.g., </a:t>
@@ -31583,7 +32193,7 @@
               <a:blipFill>
                 <a:blip r:embed="rId2"/>
                 <a:stretch>
-                  <a:fillRect l="-696" t="-2551"/>
+                  <a:fillRect l="-522" t="-2168"/>
                 </a:stretch>
               </a:blipFill>
             </p:spPr>
@@ -31854,6 +32464,37 @@
                                   </p:childTnLst>
                                 </p:cTn>
                               </p:par>
+                              <p:par>
+                                <p:cTn id="21" presetID="1" presetClass="entr" presetSubtype="0" fill="hold" grpId="0" nodeType="withEffect">
+                                  <p:stCondLst>
+                                    <p:cond delay="0"/>
+                                  </p:stCondLst>
+                                  <p:childTnLst>
+                                    <p:set>
+                                      <p:cBhvr>
+                                        <p:cTn id="22" dur="1" fill="hold">
+                                          <p:stCondLst>
+                                            <p:cond delay="0"/>
+                                          </p:stCondLst>
+                                        </p:cTn>
+                                        <p:tgtEl>
+                                          <p:spTgt spid="5">
+                                            <p:txEl>
+                                              <p:pRg st="7" end="7"/>
+                                            </p:txEl>
+                                          </p:spTgt>
+                                        </p:tgtEl>
+                                        <p:attrNameLst>
+                                          <p:attrName>style.visibility</p:attrName>
+                                        </p:attrNameLst>
+                                      </p:cBhvr>
+                                      <p:to>
+                                        <p:strVal val="visible"/>
+                                      </p:to>
+                                    </p:set>
+                                  </p:childTnLst>
+                                </p:cTn>
+                              </p:par>
                             </p:childTnLst>
                           </p:cTn>
                         </p:par>
@@ -31861,26 +32502,26 @@
                     </p:cTn>
                   </p:par>
                   <p:par>
-                    <p:cTn id="21" fill="hold">
+                    <p:cTn id="23" fill="hold">
                       <p:stCondLst>
                         <p:cond delay="indefinite"/>
                       </p:stCondLst>
                       <p:childTnLst>
                         <p:par>
-                          <p:cTn id="22" fill="hold">
+                          <p:cTn id="24" fill="hold">
                             <p:stCondLst>
                               <p:cond delay="0"/>
                             </p:stCondLst>
                             <p:childTnLst>
                               <p:par>
-                                <p:cTn id="23" presetID="1" presetClass="entr" presetSubtype="0" fill="hold" grpId="0" nodeType="clickEffect">
+                                <p:cTn id="25" presetID="1" presetClass="entr" presetSubtype="0" fill="hold" grpId="0" nodeType="clickEffect">
                                   <p:stCondLst>
                                     <p:cond delay="0"/>
                                   </p:stCondLst>
                                   <p:childTnLst>
                                     <p:set>
                                       <p:cBhvr>
-                                        <p:cTn id="24" dur="1" fill="hold">
+                                        <p:cTn id="26" dur="1" fill="hold">
                                           <p:stCondLst>
                                             <p:cond delay="0"/>
                                           </p:stCondLst>
@@ -31888,7 +32529,7 @@
                                         <p:tgtEl>
                                           <p:spTgt spid="5">
                                             <p:txEl>
-                                              <p:pRg st="8" end="8"/>
+                                              <p:pRg st="9" end="9"/>
                                             </p:txEl>
                                           </p:spTgt>
                                         </p:tgtEl>
@@ -31904,14 +32545,14 @@
                                 </p:cTn>
                               </p:par>
                               <p:par>
-                                <p:cTn id="25" presetID="1" presetClass="entr" presetSubtype="0" fill="hold" grpId="0" nodeType="withEffect">
+                                <p:cTn id="27" presetID="1" presetClass="entr" presetSubtype="0" fill="hold" grpId="0" nodeType="withEffect">
                                   <p:stCondLst>
                                     <p:cond delay="0"/>
                                   </p:stCondLst>
                                   <p:childTnLst>
                                     <p:set>
                                       <p:cBhvr>
-                                        <p:cTn id="26" dur="1" fill="hold">
+                                        <p:cTn id="28" dur="1" fill="hold">
                                           <p:stCondLst>
                                             <p:cond delay="0"/>
                                           </p:stCondLst>
@@ -31919,7 +32560,7 @@
                                         <p:tgtEl>
                                           <p:spTgt spid="5">
                                             <p:txEl>
-                                              <p:pRg st="9" end="9"/>
+                                              <p:pRg st="11" end="11"/>
                                             </p:txEl>
                                           </p:spTgt>
                                         </p:tgtEl>
@@ -32273,7 +32914,7 @@
             <p:spPr/>
             <p:txBody>
               <a:bodyPr>
-                <a:normAutofit fontScale="70000" lnSpcReduction="20000"/>
+                <a:normAutofit fontScale="62500" lnSpcReduction="20000"/>
               </a:bodyPr>
               <a:lstStyle/>
               <a:p>
@@ -32693,7 +33334,21 @@
               <a:p>
                 <a:r>
                   <a:rPr lang="en-US" dirty="0"/>
-                  <a:t>It is often helpful to use differences between the reward and the average returns known as differential returns indicating how much better (or worse) each reward is than average:</a:t>
+                  <a:t>It is often helpful to use differences between the immediate rewards and the average reward given policy </a:t>
+                </a:r>
+                <a14:m>
+                  <m:oMath xmlns:m="http://schemas.openxmlformats.org/officeDocument/2006/math">
+                    <m:r>
+                      <a:rPr lang="en-US" b="0" i="1" smtClean="0">
+                        <a:latin typeface="Cambria Math" panose="02040503050406030204" pitchFamily="18" charset="0"/>
+                      </a:rPr>
+                      <m:t>𝜋</m:t>
+                    </m:r>
+                  </m:oMath>
+                </a14:m>
+                <a:r>
+                  <a:rPr lang="en-US" dirty="0"/>
+                  <a:t>.</a:t>
                 </a:r>
                 <a:br>
                   <a:rPr lang="en-US" dirty="0"/>
@@ -32706,7 +33361,7 @@
                     <m:sSub>
                       <m:sSubPr>
                         <m:ctrlPr>
-                          <a:rPr lang="en-US" b="0" i="0" smtClean="0">
+                          <a:rPr lang="en-US" b="0" i="1" smtClean="0">
                             <a:latin typeface="Cambria Math" panose="02040503050406030204" pitchFamily="18" charset="0"/>
                           </a:rPr>
                         </m:ctrlPr>
@@ -32743,7 +33398,7 @@
                     <m:nary>
                       <m:naryPr>
                         <m:chr m:val="∑"/>
-                        <m:supHide m:val="on"/>
+                        <m:limLoc m:val="subSup"/>
                         <m:ctrlPr>
                           <a:rPr lang="en-US" b="0" i="1" smtClean="0">
                             <a:latin typeface="Cambria Math" panose="02040503050406030204" pitchFamily="18" charset="0"/>
@@ -32752,6 +33407,9 @@
                       </m:naryPr>
                       <m:sub>
                         <m:r>
+                          <m:rPr>
+                            <m:brk m:alnAt="25"/>
+                          </m:rPr>
                           <a:rPr lang="en-US" b="0" i="1" smtClean="0">
                             <a:latin typeface="Cambria Math" panose="02040503050406030204" pitchFamily="18" charset="0"/>
                           </a:rPr>
@@ -32761,89 +33419,112 @@
                           <a:rPr lang="en-US" b="0" i="1" smtClean="0">
                             <a:latin typeface="Cambria Math" panose="02040503050406030204" pitchFamily="18" charset="0"/>
                           </a:rPr>
-                          <m:t>=0</m:t>
+                          <m:t>=1</m:t>
                         </m:r>
                       </m:sub>
-                      <m:sup/>
+                      <m:sup>
+                        <m:r>
+                          <a:rPr lang="en-US" b="0" i="1" smtClean="0">
+                            <a:latin typeface="Cambria Math" panose="02040503050406030204" pitchFamily="18" charset="0"/>
+                          </a:rPr>
+                          <m:t>∞</m:t>
+                        </m:r>
+                      </m:sup>
                       <m:e>
-                        <m:sSub>
-                          <m:sSubPr>
+                        <m:d>
+                          <m:dPr>
                             <m:ctrlPr>
-                              <a:rPr lang="en-US" b="0" i="1" smtClean="0">
+                              <a:rPr lang="en-US" i="1">
                                 <a:latin typeface="Cambria Math" panose="02040503050406030204" pitchFamily="18" charset="0"/>
                               </a:rPr>
                             </m:ctrlPr>
-                          </m:sSubPr>
+                          </m:dPr>
                           <m:e>
+                            <m:sSub>
+                              <m:sSubPr>
+                                <m:ctrlPr>
+                                  <a:rPr lang="en-US" i="1">
+                                    <a:latin typeface="Cambria Math" panose="02040503050406030204" pitchFamily="18" charset="0"/>
+                                  </a:rPr>
+                                </m:ctrlPr>
+                              </m:sSubPr>
+                              <m:e>
+                                <m:r>
+                                  <a:rPr lang="en-US" i="1">
+                                    <a:latin typeface="Cambria Math" panose="02040503050406030204" pitchFamily="18" charset="0"/>
+                                  </a:rPr>
+                                  <m:t>𝑅</m:t>
+                                </m:r>
+                              </m:e>
+                              <m:sub>
+                                <m:r>
+                                  <a:rPr lang="en-US" i="1">
+                                    <a:latin typeface="Cambria Math" panose="02040503050406030204" pitchFamily="18" charset="0"/>
+                                  </a:rPr>
+                                  <m:t>𝑡</m:t>
+                                </m:r>
+                                <m:r>
+                                  <a:rPr lang="en-US" i="1">
+                                    <a:latin typeface="Cambria Math" panose="02040503050406030204" pitchFamily="18" charset="0"/>
+                                  </a:rPr>
+                                  <m:t>+</m:t>
+                                </m:r>
+                                <m:r>
+                                  <a:rPr lang="en-US" i="1">
+                                    <a:latin typeface="Cambria Math" panose="02040503050406030204" pitchFamily="18" charset="0"/>
+                                  </a:rPr>
+                                  <m:t>𝑘</m:t>
+                                </m:r>
+                                <m:r>
+                                  <a:rPr lang="en-US" i="1">
+                                    <a:latin typeface="Cambria Math" panose="02040503050406030204" pitchFamily="18" charset="0"/>
+                                  </a:rPr>
+                                  <m:t>+1</m:t>
+                                </m:r>
+                              </m:sub>
+                            </m:sSub>
                             <m:r>
-                              <a:rPr lang="en-US" b="0" i="1" smtClean="0">
+                              <a:rPr lang="en-US" i="1">
                                 <a:latin typeface="Cambria Math" panose="02040503050406030204" pitchFamily="18" charset="0"/>
                               </a:rPr>
-                              <m:t>𝑅</m:t>
+                              <m:t>−</m:t>
                             </m:r>
-                          </m:e>
-                          <m:sub>
                             <m:r>
-                              <a:rPr lang="en-US" b="0" i="1" smtClean="0">
+                              <a:rPr lang="en-US" i="1">
                                 <a:latin typeface="Cambria Math" panose="02040503050406030204" pitchFamily="18" charset="0"/>
                               </a:rPr>
-                              <m:t>𝑡</m:t>
+                              <m:t>𝑟</m:t>
                             </m:r>
-                            <m:r>
-                              <a:rPr lang="en-US" b="0" i="1" smtClean="0">
-                                <a:latin typeface="Cambria Math" panose="02040503050406030204" pitchFamily="18" charset="0"/>
-                              </a:rPr>
-                              <m:t>+</m:t>
-                            </m:r>
-                            <m:r>
-                              <a:rPr lang="en-US" b="0" i="1" smtClean="0">
-                                <a:latin typeface="Cambria Math" panose="02040503050406030204" pitchFamily="18" charset="0"/>
-                              </a:rPr>
-                              <m:t>𝑘</m:t>
-                            </m:r>
-                            <m:r>
-                              <a:rPr lang="en-US" b="0" i="1" smtClean="0">
-                                <a:latin typeface="Cambria Math" panose="02040503050406030204" pitchFamily="18" charset="0"/>
-                              </a:rPr>
-                              <m:t>+1</m:t>
-                            </m:r>
-                          </m:sub>
-                        </m:sSub>
+                            <m:d>
+                              <m:dPr>
+                                <m:ctrlPr>
+                                  <a:rPr lang="en-US" i="1">
+                                    <a:latin typeface="Cambria Math" panose="02040503050406030204" pitchFamily="18" charset="0"/>
+                                  </a:rPr>
+                                </m:ctrlPr>
+                              </m:dPr>
+                              <m:e>
+                                <m:r>
+                                  <a:rPr lang="en-US" i="1">
+                                    <a:latin typeface="Cambria Math" panose="02040503050406030204" pitchFamily="18" charset="0"/>
+                                  </a:rPr>
+                                  <m:t>𝜋</m:t>
+                                </m:r>
+                              </m:e>
+                            </m:d>
+                          </m:e>
+                        </m:d>
                       </m:e>
                     </m:nary>
-                    <m:r>
-                      <a:rPr lang="en-US" i="1">
-                        <a:latin typeface="Cambria Math" panose="02040503050406030204" pitchFamily="18" charset="0"/>
-                      </a:rPr>
-                      <m:t>−</m:t>
-                    </m:r>
-                    <m:r>
-                      <a:rPr lang="en-US" i="1">
-                        <a:latin typeface="Cambria Math" panose="02040503050406030204" pitchFamily="18" charset="0"/>
-                      </a:rPr>
-                      <m:t>𝑟</m:t>
-                    </m:r>
-                    <m:r>
-                      <a:rPr lang="en-US" i="1">
-                        <a:latin typeface="Cambria Math" panose="02040503050406030204" pitchFamily="18" charset="0"/>
-                      </a:rPr>
-                      <m:t>(</m:t>
-                    </m:r>
-                    <m:r>
-                      <a:rPr lang="en-US" i="1">
-                        <a:latin typeface="Cambria Math" panose="02040503050406030204" pitchFamily="18" charset="0"/>
-                      </a:rPr>
-                      <m:t>𝜋</m:t>
-                    </m:r>
-                    <m:r>
-                      <a:rPr lang="en-US" i="1">
-                        <a:latin typeface="Cambria Math" panose="02040503050406030204" pitchFamily="18" charset="0"/>
-                      </a:rPr>
-                      <m:t>)</m:t>
-                    </m:r>
                   </m:oMath>
                 </a14:m>
                 <a:endParaRPr lang="en-US" dirty="0"/>
+              </a:p>
+              <a:p>
+                <a:r>
+                  <a:rPr lang="en-US" dirty="0"/>
+                  <a:t>This leads to a differential value function. </a:t>
+                </a:r>
               </a:p>
             </p:txBody>
           </p:sp>
@@ -32869,7 +33550,7 @@
               <a:blipFill>
                 <a:blip r:embed="rId2"/>
                 <a:stretch>
-                  <a:fillRect l="-638" t="-2168" r="-290" b="-28444"/>
+                  <a:fillRect l="-522" t="-1913" b="-17474"/>
                 </a:stretch>
               </a:blipFill>
             </p:spPr>
@@ -32898,116 +33579,6 @@
   <p:clrMapOvr>
     <a:masterClrMapping/>
   </p:clrMapOvr>
-  <p:timing>
-    <p:tnLst>
-      <p:par>
-        <p:cTn id="1" dur="indefinite" restart="never" nodeType="tmRoot">
-          <p:childTnLst>
-            <p:seq concurrent="1" nextAc="seek">
-              <p:cTn id="2" dur="indefinite" nodeType="mainSeq">
-                <p:childTnLst>
-                  <p:par>
-                    <p:cTn id="3" fill="hold">
-                      <p:stCondLst>
-                        <p:cond delay="indefinite"/>
-                      </p:stCondLst>
-                      <p:childTnLst>
-                        <p:par>
-                          <p:cTn id="4" fill="hold">
-                            <p:stCondLst>
-                              <p:cond delay="0"/>
-                            </p:stCondLst>
-                            <p:childTnLst>
-                              <p:par>
-                                <p:cTn id="5" presetID="1" presetClass="entr" presetSubtype="0" fill="hold" nodeType="clickEffect">
-                                  <p:stCondLst>
-                                    <p:cond delay="0"/>
-                                  </p:stCondLst>
-                                  <p:childTnLst>
-                                    <p:set>
-                                      <p:cBhvr>
-                                        <p:cTn id="6" dur="1" fill="hold">
-                                          <p:stCondLst>
-                                            <p:cond delay="0"/>
-                                          </p:stCondLst>
-                                        </p:cTn>
-                                        <p:tgtEl>
-                                          <p:spTgt spid="3">
-                                            <p:txEl>
-                                              <p:pRg st="5" end="5"/>
-                                            </p:txEl>
-                                          </p:spTgt>
-                                        </p:tgtEl>
-                                        <p:attrNameLst>
-                                          <p:attrName>style.visibility</p:attrName>
-                                        </p:attrNameLst>
-                                      </p:cBhvr>
-                                      <p:to>
-                                        <p:strVal val="visible"/>
-                                      </p:to>
-                                    </p:set>
-                                  </p:childTnLst>
-                                </p:cTn>
-                              </p:par>
-                              <p:par>
-                                <p:cTn id="7" presetID="1" presetClass="entr" presetSubtype="0" fill="hold" nodeType="withEffect">
-                                  <p:stCondLst>
-                                    <p:cond delay="0"/>
-                                  </p:stCondLst>
-                                  <p:childTnLst>
-                                    <p:set>
-                                      <p:cBhvr>
-                                        <p:cTn id="8" dur="1" fill="hold">
-                                          <p:stCondLst>
-                                            <p:cond delay="0"/>
-                                          </p:stCondLst>
-                                        </p:cTn>
-                                        <p:tgtEl>
-                                          <p:spTgt spid="3">
-                                            <p:txEl>
-                                              <p:pRg st="6" end="6"/>
-                                            </p:txEl>
-                                          </p:spTgt>
-                                        </p:tgtEl>
-                                        <p:attrNameLst>
-                                          <p:attrName>style.visibility</p:attrName>
-                                        </p:attrNameLst>
-                                      </p:cBhvr>
-                                      <p:to>
-                                        <p:strVal val="visible"/>
-                                      </p:to>
-                                    </p:set>
-                                  </p:childTnLst>
-                                </p:cTn>
-                              </p:par>
-                            </p:childTnLst>
-                          </p:cTn>
-                        </p:par>
-                      </p:childTnLst>
-                    </p:cTn>
-                  </p:par>
-                </p:childTnLst>
-              </p:cTn>
-              <p:prevCondLst>
-                <p:cond evt="onPrev" delay="0">
-                  <p:tgtEl>
-                    <p:sldTgt/>
-                  </p:tgtEl>
-                </p:cond>
-              </p:prevCondLst>
-              <p:nextCondLst>
-                <p:cond evt="onNext" delay="0">
-                  <p:tgtEl>
-                    <p:sldTgt/>
-                  </p:tgtEl>
-                </p:cond>
-              </p:nextCondLst>
-            </p:seq>
-          </p:childTnLst>
-        </p:cTn>
-      </p:par>
-    </p:tnLst>
-  </p:timing>
 </p:sld>
 </file>
 
@@ -33555,7 +34126,7 @@
             </p:spPr>
             <p:txBody>
               <a:bodyPr>
-                <a:normAutofit fontScale="92500" lnSpcReduction="10000"/>
+                <a:normAutofit fontScale="85000" lnSpcReduction="10000"/>
               </a:bodyPr>
               <a:lstStyle/>
               <a:p>
@@ -33708,7 +34279,7 @@
               <a:p>
                 <a:r>
                   <a:rPr lang="en-US" sz="1700" dirty="0"/>
-                  <a:t>We need to create </a:t>
+                  <a:t>For linear approximation, we need to create </a:t>
                 </a:r>
                 <a:r>
                   <a:rPr lang="en-US" sz="1700" b="1" dirty="0"/>
@@ -33716,7 +34287,7 @@
                 </a:r>
                 <a:r>
                   <a:rPr lang="en-US" sz="1700" dirty="0"/>
-                  <a:t> that take the interaction of state components into account. Popular are: </a:t>
+                  <a:t> that take non-linearities and the interaction of state components into account. Popular are: </a:t>
                 </a:r>
               </a:p>
               <a:p>
@@ -33822,6 +34393,9 @@
                     </m:r>
                   </m:oMath>
                 </a14:m>
+                <a:endParaRPr lang="en-US" sz="1700" dirty="0"/>
+              </a:p>
+              <a:p>
                 <a:endParaRPr lang="en-US" sz="1700" dirty="0"/>
               </a:p>
               <a:p>
@@ -33900,7 +34474,7 @@
               <a:blipFill>
                 <a:blip r:embed="rId3"/>
                 <a:stretch>
-                  <a:fillRect l="-419" t="-1416" r="-1257"/>
+                  <a:fillRect l="-105" t="-992"/>
                 </a:stretch>
               </a:blipFill>
             </p:spPr>
@@ -34174,7 +34748,7 @@
                                         <p:tgtEl>
                                           <p:spTgt spid="3">
                                             <p:txEl>
-                                              <p:pRg st="7" end="7"/>
+                                              <p:pRg st="8" end="8"/>
                                             </p:txEl>
                                           </p:spTgt>
                                         </p:tgtEl>
@@ -34205,7 +34779,7 @@
                                         <p:tgtEl>
                                           <p:spTgt spid="3">
                                             <p:txEl>
-                                              <p:pRg st="8" end="8"/>
+                                              <p:pRg st="9" end="9"/>
                                             </p:txEl>
                                           </p:spTgt>
                                         </p:tgtEl>
@@ -34236,7 +34810,7 @@
                                         <p:tgtEl>
                                           <p:spTgt spid="3">
                                             <p:txEl>
-                                              <p:pRg st="9" end="9"/>
+                                              <p:pRg st="10" end="10"/>
                                             </p:txEl>
                                           </p:spTgt>
                                         </p:tgtEl>
@@ -34267,7 +34841,7 @@
                                         <p:tgtEl>
                                           <p:spTgt spid="3">
                                             <p:txEl>
-                                              <p:pRg st="10" end="10"/>
+                                              <p:pRg st="11" end="11"/>
                                             </p:txEl>
                                           </p:spTgt>
                                         </p:tgtEl>

--- a/slides/Lecture_Chapter09.pptx
+++ b/slides/Lecture_Chapter09.pptx
@@ -5,7 +5,7 @@
     <p:sldMasterId id="2147483648" r:id="rId1"/>
   </p:sldMasterIdLst>
   <p:notesMasterIdLst>
-    <p:notesMasterId r:id="rId35"/>
+    <p:notesMasterId r:id="rId36"/>
   </p:notesMasterIdLst>
   <p:sldIdLst>
     <p:sldId id="256" r:id="rId2"/>
@@ -34,13 +34,14 @@
     <p:sldId id="418" r:id="rId25"/>
     <p:sldId id="412" r:id="rId26"/>
     <p:sldId id="482" r:id="rId27"/>
-    <p:sldId id="410" r:id="rId28"/>
-    <p:sldId id="411" r:id="rId29"/>
-    <p:sldId id="414" r:id="rId30"/>
-    <p:sldId id="421" r:id="rId31"/>
-    <p:sldId id="415" r:id="rId32"/>
-    <p:sldId id="422" r:id="rId33"/>
-    <p:sldId id="424" r:id="rId34"/>
+    <p:sldId id="483" r:id="rId28"/>
+    <p:sldId id="410" r:id="rId29"/>
+    <p:sldId id="411" r:id="rId30"/>
+    <p:sldId id="414" r:id="rId31"/>
+    <p:sldId id="421" r:id="rId32"/>
+    <p:sldId id="415" r:id="rId33"/>
+    <p:sldId id="422" r:id="rId34"/>
+    <p:sldId id="424" r:id="rId35"/>
   </p:sldIdLst>
   <p:sldSz cx="12192000" cy="6858000"/>
   <p:notesSz cx="6858000" cy="9144000"/>
@@ -182,6 +183,7 @@
             <p14:sldId id="418"/>
             <p14:sldId id="412"/>
             <p14:sldId id="482"/>
+            <p14:sldId id="483"/>
           </p14:sldIdLst>
         </p14:section>
         <p14:section name="Non-Linear Approximation" id="{10B68F28-6DBA-44FD-8764-061354D77D32}">
@@ -16123,8 +16125,8 @@
           </a:p>
         </p:txBody>
       </p:sp>
-      <mc:AlternateContent xmlns:mc="http://schemas.openxmlformats.org/markup-compatibility/2006">
-        <mc:Choice xmlns:a14="http://schemas.microsoft.com/office/drawing/2010/main" Requires="a14">
+      <mc:AlternateContent xmlns:mc="http://schemas.openxmlformats.org/markup-compatibility/2006" xmlns:a14="http://schemas.microsoft.com/office/drawing/2010/main">
+        <mc:Choice Requires="a14">
           <p:sp>
             <p:nvSpPr>
               <p:cNvPr id="3" name="Content Placeholder 2">
@@ -16414,7 +16416,7 @@
             </p:txBody>
           </p:sp>
         </mc:Choice>
-        <mc:Fallback>
+        <mc:Fallback xmlns="">
           <p:sp>
             <p:nvSpPr>
               <p:cNvPr id="3" name="Content Placeholder 2">
@@ -17632,8 +17634,8 @@
             </a:fontRef>
           </p:style>
         </p:cxnSp>
-        <mc:AlternateContent xmlns:mc="http://schemas.openxmlformats.org/markup-compatibility/2006">
-          <mc:Choice xmlns:a14="http://schemas.microsoft.com/office/drawing/2010/main" Requires="a14">
+        <mc:AlternateContent xmlns:mc="http://schemas.openxmlformats.org/markup-compatibility/2006" xmlns:a14="http://schemas.microsoft.com/office/drawing/2010/main">
+          <mc:Choice Requires="a14">
             <p:sp>
               <p:nvSpPr>
                 <p:cNvPr id="25" name="TextBox 24">
@@ -17712,7 +17714,7 @@
               </p:txBody>
             </p:sp>
           </mc:Choice>
-          <mc:Fallback>
+          <mc:Fallback xmlns="">
             <p:sp>
               <p:nvSpPr>
                 <p:cNvPr id="25" name="TextBox 24">
@@ -17758,8 +17760,8 @@
           </mc:Fallback>
         </mc:AlternateContent>
       </p:grpSp>
-      <mc:AlternateContent xmlns:mc="http://schemas.openxmlformats.org/markup-compatibility/2006">
-        <mc:Choice xmlns:a14="http://schemas.microsoft.com/office/drawing/2010/main" Requires="a14">
+      <mc:AlternateContent xmlns:mc="http://schemas.openxmlformats.org/markup-compatibility/2006" xmlns:a14="http://schemas.microsoft.com/office/drawing/2010/main">
+        <mc:Choice Requires="a14">
           <p:sp>
             <p:nvSpPr>
               <p:cNvPr id="10" name="Speech Bubble: Rectangle with Corners Rounded 9">
@@ -17824,7 +17826,7 @@
             </p:txBody>
           </p:sp>
         </mc:Choice>
-        <mc:Fallback>
+        <mc:Fallback xmlns="">
           <p:sp>
             <p:nvSpPr>
               <p:cNvPr id="10" name="Speech Bubble: Rectangle with Corners Rounded 9">
@@ -21454,8 +21456,8 @@
           </p:txBody>
         </p:sp>
       </p:grpSp>
-      <mc:AlternateContent xmlns:mc="http://schemas.openxmlformats.org/markup-compatibility/2006">
-        <mc:Choice xmlns:a14="http://schemas.microsoft.com/office/drawing/2010/main" Requires="a14">
+      <mc:AlternateContent xmlns:mc="http://schemas.openxmlformats.org/markup-compatibility/2006" xmlns:a14="http://schemas.microsoft.com/office/drawing/2010/main">
+        <mc:Choice Requires="a14">
           <p:sp>
             <p:nvSpPr>
               <p:cNvPr id="46" name="Speech Bubble: Rectangle with Corners Rounded 45">
@@ -21547,7 +21549,7 @@
             </p:txBody>
           </p:sp>
         </mc:Choice>
-        <mc:Fallback>
+        <mc:Fallback xmlns="">
           <p:sp>
             <p:nvSpPr>
               <p:cNvPr id="46" name="Speech Bubble: Rectangle with Corners Rounded 45">
@@ -21961,8 +21963,8 @@
           </a:p>
         </p:txBody>
       </p:sp>
-      <mc:AlternateContent xmlns:mc="http://schemas.openxmlformats.org/markup-compatibility/2006">
-        <mc:Choice xmlns:a14="http://schemas.microsoft.com/office/drawing/2010/main" Requires="a14">
+      <mc:AlternateContent xmlns:mc="http://schemas.openxmlformats.org/markup-compatibility/2006" xmlns:a14="http://schemas.microsoft.com/office/drawing/2010/main">
+        <mc:Choice Requires="a14">
           <p:sp>
             <p:nvSpPr>
               <p:cNvPr id="3" name="Content Placeholder 2">
@@ -22120,7 +22122,7 @@
             </p:txBody>
           </p:sp>
         </mc:Choice>
-        <mc:Fallback>
+        <mc:Fallback xmlns="">
           <p:sp>
             <p:nvSpPr>
               <p:cNvPr id="3" name="Content Placeholder 2">
@@ -23660,6 +23662,205 @@
       </p:grpSpPr>
       <p:sp>
         <p:nvSpPr>
+          <p:cNvPr id="2" name="Title 1">
+            <a:extLst>
+              <a:ext uri="{FF2B5EF4-FFF2-40B4-BE49-F238E27FC236}">
+                <a16:creationId xmlns:a16="http://schemas.microsoft.com/office/drawing/2014/main" id="{08FDE7C5-DE21-E0E4-C7C7-7B5888EF3D67}"/>
+              </a:ext>
+            </a:extLst>
+          </p:cNvPr>
+          <p:cNvSpPr>
+            <a:spLocks noGrp="1"/>
+          </p:cNvSpPr>
+          <p:nvPr>
+            <p:ph type="title"/>
+          </p:nvPr>
+        </p:nvSpPr>
+        <p:spPr/>
+        <p:txBody>
+          <a:bodyPr/>
+          <a:lstStyle/>
+          <a:p>
+            <a:r>
+              <a:rPr lang="en-US" dirty="0"/>
+              <a:t>Partially Observable Environments</a:t>
+            </a:r>
+          </a:p>
+        </p:txBody>
+      </p:sp>
+      <p:sp>
+        <p:nvSpPr>
+          <p:cNvPr id="3" name="Content Placeholder 2">
+            <a:extLst>
+              <a:ext uri="{FF2B5EF4-FFF2-40B4-BE49-F238E27FC236}">
+                <a16:creationId xmlns:a16="http://schemas.microsoft.com/office/drawing/2014/main" id="{9D32DF0D-2EFB-FF05-D343-80D8EA27BD77}"/>
+              </a:ext>
+            </a:extLst>
+          </p:cNvPr>
+          <p:cNvSpPr>
+            <a:spLocks noGrp="1"/>
+          </p:cNvSpPr>
+          <p:nvPr>
+            <p:ph idx="1"/>
+          </p:nvPr>
+        </p:nvSpPr>
+        <p:spPr/>
+        <p:txBody>
+          <a:bodyPr>
+            <a:normAutofit fontScale="85000" lnSpcReduction="20000"/>
+          </a:bodyPr>
+          <a:lstStyle/>
+          <a:p>
+            <a:r>
+              <a:rPr lang="en-US" dirty="0"/>
+              <a:t>Observations may be incomplete or noisy.</a:t>
+            </a:r>
+          </a:p>
+          <a:p>
+            <a:endParaRPr lang="en-US" dirty="0"/>
+          </a:p>
+          <a:p>
+            <a:r>
+              <a:rPr lang="en-US" dirty="0"/>
+              <a:t>Standard model</a:t>
+            </a:r>
+            <a:r>
+              <a:rPr lang="en-US" b="1" dirty="0"/>
+              <a:t>: POMDP</a:t>
+            </a:r>
+            <a:r>
+              <a:rPr lang="en-US" dirty="0"/>
+              <a:t> with belief states</a:t>
+            </a:r>
+          </a:p>
+          <a:p>
+            <a:pPr lvl="1"/>
+            <a:r>
+              <a:rPr lang="en-US" dirty="0"/>
+              <a:t>A key feature is that it learns </a:t>
+            </a:r>
+            <a:r>
+              <a:rPr lang="en-US" b="1" dirty="0"/>
+              <a:t>hidden states </a:t>
+            </a:r>
+            <a:r>
+              <a:rPr lang="en-US" dirty="0"/>
+              <a:t>depending on the history of actions and observations.</a:t>
+            </a:r>
+          </a:p>
+          <a:p>
+            <a:pPr lvl="1"/>
+            <a:r>
+              <a:rPr lang="en-US" b="1" dirty="0"/>
+              <a:t>Impractical</a:t>
+            </a:r>
+            <a:r>
+              <a:rPr lang="en-US" dirty="0"/>
+              <a:t> due to the size of the belief state space.</a:t>
+            </a:r>
+          </a:p>
+          <a:p>
+            <a:endParaRPr lang="en-US" dirty="0"/>
+          </a:p>
+          <a:p>
+            <a:r>
+              <a:rPr lang="en-US" dirty="0"/>
+              <a:t>Practical approach: RL</a:t>
+            </a:r>
+          </a:p>
+          <a:p>
+            <a:pPr marL="971550" lvl="1" indent="-514350">
+              <a:buFont typeface="+mj-lt"/>
+              <a:buAutoNum type="arabicPeriod"/>
+            </a:pPr>
+            <a:r>
+              <a:rPr lang="en-US" dirty="0"/>
+              <a:t>Build a </a:t>
+            </a:r>
+            <a:r>
+              <a:rPr lang="en-US" b="1" dirty="0"/>
+              <a:t>compressed representation </a:t>
+            </a:r>
+            <a:r>
+              <a:rPr lang="en-US" dirty="0"/>
+              <a:t>with features from current observations and the observation history</a:t>
+            </a:r>
+          </a:p>
+          <a:p>
+            <a:pPr marL="971550" lvl="1" indent="-514350">
+              <a:buFont typeface="+mj-lt"/>
+              <a:buAutoNum type="arabicPeriod"/>
+            </a:pPr>
+            <a:r>
+              <a:rPr lang="en-US" b="1" dirty="0"/>
+              <a:t>Use a (non) linear approximator </a:t>
+            </a:r>
+            <a:r>
+              <a:rPr lang="en-US" dirty="0"/>
+              <a:t>on those features</a:t>
+            </a:r>
+          </a:p>
+          <a:p>
+            <a:pPr marL="971550" lvl="1" indent="-514350">
+              <a:buFont typeface="+mj-lt"/>
+              <a:buAutoNum type="arabicPeriod"/>
+            </a:pPr>
+            <a:r>
+              <a:rPr lang="en-US" dirty="0"/>
+              <a:t>Learn a value function or policy from the compressed representation.</a:t>
+            </a:r>
+          </a:p>
+          <a:p>
+            <a:pPr marL="971550" lvl="1" indent="-514350">
+              <a:buFont typeface="+mj-lt"/>
+              <a:buAutoNum type="arabicPeriod"/>
+            </a:pPr>
+            <a:endParaRPr lang="en-US" dirty="0"/>
+          </a:p>
+          <a:p>
+            <a:r>
+              <a:rPr lang="en-US" b="1" dirty="0"/>
+              <a:t>Example</a:t>
+            </a:r>
+            <a:r>
+              <a:rPr lang="en-US" dirty="0"/>
+              <a:t>: Maze solver where the x and y coordinates are noisy. Using the change in coordinates for the last few steps helps.</a:t>
+            </a:r>
+          </a:p>
+        </p:txBody>
+      </p:sp>
+    </p:spTree>
+    <p:extLst>
+      <p:ext uri="{BB962C8B-B14F-4D97-AF65-F5344CB8AC3E}">
+        <p14:creationId xmlns:p14="http://schemas.microsoft.com/office/powerpoint/2010/main" val="1605762469"/>
+      </p:ext>
+    </p:extLst>
+  </p:cSld>
+  <p:clrMapOvr>
+    <a:masterClrMapping/>
+  </p:clrMapOvr>
+</p:sld>
+</file>
+
+<file path=ppt/slides/slide28.xml><?xml version="1.0" encoding="utf-8"?>
+<p:sld xmlns:a="http://schemas.openxmlformats.org/drawingml/2006/main" xmlns:r="http://schemas.openxmlformats.org/officeDocument/2006/relationships" xmlns:p="http://schemas.openxmlformats.org/presentationml/2006/main">
+  <p:cSld>
+    <p:spTree>
+      <p:nvGrpSpPr>
+        <p:cNvPr id="1" name=""/>
+        <p:cNvGrpSpPr/>
+        <p:nvPr/>
+      </p:nvGrpSpPr>
+      <p:grpSpPr>
+        <a:xfrm>
+          <a:off x="0" y="0"/>
+          <a:ext cx="0" cy="0"/>
+          <a:chOff x="0" y="0"/>
+          <a:chExt cx="0" cy="0"/>
+        </a:xfrm>
+      </p:grpSpPr>
+      <p:sp>
+        <p:nvSpPr>
           <p:cNvPr id="4" name="Title 3">
             <a:extLst>
               <a:ext uri="{FF2B5EF4-FFF2-40B4-BE49-F238E27FC236}">
@@ -23727,7 +23928,7 @@
 </p:sld>
 </file>
 
-<file path=ppt/slides/slide28.xml><?xml version="1.0" encoding="utf-8"?>
+<file path=ppt/slides/slide29.xml><?xml version="1.0" encoding="utf-8"?>
 <p:sld xmlns:a="http://schemas.openxmlformats.org/drawingml/2006/main" xmlns:r="http://schemas.openxmlformats.org/officeDocument/2006/relationships" xmlns:p="http://schemas.openxmlformats.org/presentationml/2006/main">
   <p:cSld>
     <p:spTree>
@@ -27214,92 +27415,6 @@
 </p:sld>
 </file>
 
-<file path=ppt/slides/slide29.xml><?xml version="1.0" encoding="utf-8"?>
-<p:sld xmlns:a="http://schemas.openxmlformats.org/drawingml/2006/main" xmlns:r="http://schemas.openxmlformats.org/officeDocument/2006/relationships" xmlns:p="http://schemas.openxmlformats.org/presentationml/2006/main">
-  <p:cSld>
-    <p:spTree>
-      <p:nvGrpSpPr>
-        <p:cNvPr id="1" name=""/>
-        <p:cNvGrpSpPr/>
-        <p:nvPr/>
-      </p:nvGrpSpPr>
-      <p:grpSpPr>
-        <a:xfrm>
-          <a:off x="0" y="0"/>
-          <a:ext cx="0" cy="0"/>
-          <a:chOff x="0" y="0"/>
-          <a:chExt cx="0" cy="0"/>
-        </a:xfrm>
-      </p:grpSpPr>
-      <p:sp>
-        <p:nvSpPr>
-          <p:cNvPr id="4" name="Title 3">
-            <a:extLst>
-              <a:ext uri="{FF2B5EF4-FFF2-40B4-BE49-F238E27FC236}">
-                <a16:creationId xmlns:a16="http://schemas.microsoft.com/office/drawing/2014/main" id="{9E182CA9-B2B3-3610-B1BD-640968AE75D6}"/>
-              </a:ext>
-            </a:extLst>
-          </p:cNvPr>
-          <p:cNvSpPr>
-            <a:spLocks noGrp="1"/>
-          </p:cNvSpPr>
-          <p:nvPr>
-            <p:ph type="title"/>
-          </p:nvPr>
-        </p:nvSpPr>
-        <p:spPr/>
-        <p:txBody>
-          <a:bodyPr/>
-          <a:lstStyle/>
-          <a:p>
-            <a:r>
-              <a:rPr lang="en-US" dirty="0"/>
-              <a:t>On-Policy Control with Approximation</a:t>
-            </a:r>
-          </a:p>
-        </p:txBody>
-      </p:sp>
-      <p:sp>
-        <p:nvSpPr>
-          <p:cNvPr id="5" name="Text Placeholder 4">
-            <a:extLst>
-              <a:ext uri="{FF2B5EF4-FFF2-40B4-BE49-F238E27FC236}">
-                <a16:creationId xmlns:a16="http://schemas.microsoft.com/office/drawing/2014/main" id="{199EDDEC-CF29-5DBC-259F-0192484A92B0}"/>
-              </a:ext>
-            </a:extLst>
-          </p:cNvPr>
-          <p:cNvSpPr>
-            <a:spLocks noGrp="1"/>
-          </p:cNvSpPr>
-          <p:nvPr>
-            <p:ph type="body" idx="1"/>
-          </p:nvPr>
-        </p:nvSpPr>
-        <p:spPr/>
-        <p:txBody>
-          <a:bodyPr/>
-          <a:lstStyle/>
-          <a:p>
-            <a:r>
-              <a:rPr lang="en-US" dirty="0"/>
-              <a:t>Semi-Gradient Sarsa</a:t>
-            </a:r>
-          </a:p>
-        </p:txBody>
-      </p:sp>
-    </p:spTree>
-    <p:extLst>
-      <p:ext uri="{BB962C8B-B14F-4D97-AF65-F5344CB8AC3E}">
-        <p14:creationId xmlns:p14="http://schemas.microsoft.com/office/powerpoint/2010/main" val="587571508"/>
-      </p:ext>
-    </p:extLst>
-  </p:cSld>
-  <p:clrMapOvr>
-    <a:masterClrMapping/>
-  </p:clrMapOvr>
-</p:sld>
-</file>
-
 <file path=ppt/slides/slide3.xml><?xml version="1.0" encoding="utf-8"?>
 <p:sld xmlns:a="http://schemas.openxmlformats.org/drawingml/2006/main" xmlns:r="http://schemas.openxmlformats.org/officeDocument/2006/relationships" xmlns:p="http://schemas.openxmlformats.org/presentationml/2006/main">
   <p:cSld>
@@ -30881,6 +30996,92 @@
           <p:cNvPr id="4" name="Title 3">
             <a:extLst>
               <a:ext uri="{FF2B5EF4-FFF2-40B4-BE49-F238E27FC236}">
+                <a16:creationId xmlns:a16="http://schemas.microsoft.com/office/drawing/2014/main" id="{9E182CA9-B2B3-3610-B1BD-640968AE75D6}"/>
+              </a:ext>
+            </a:extLst>
+          </p:cNvPr>
+          <p:cNvSpPr>
+            <a:spLocks noGrp="1"/>
+          </p:cNvSpPr>
+          <p:nvPr>
+            <p:ph type="title"/>
+          </p:nvPr>
+        </p:nvSpPr>
+        <p:spPr/>
+        <p:txBody>
+          <a:bodyPr/>
+          <a:lstStyle/>
+          <a:p>
+            <a:r>
+              <a:rPr lang="en-US" dirty="0"/>
+              <a:t>On-Policy Control with Approximation</a:t>
+            </a:r>
+          </a:p>
+        </p:txBody>
+      </p:sp>
+      <p:sp>
+        <p:nvSpPr>
+          <p:cNvPr id="5" name="Text Placeholder 4">
+            <a:extLst>
+              <a:ext uri="{FF2B5EF4-FFF2-40B4-BE49-F238E27FC236}">
+                <a16:creationId xmlns:a16="http://schemas.microsoft.com/office/drawing/2014/main" id="{199EDDEC-CF29-5DBC-259F-0192484A92B0}"/>
+              </a:ext>
+            </a:extLst>
+          </p:cNvPr>
+          <p:cNvSpPr>
+            <a:spLocks noGrp="1"/>
+          </p:cNvSpPr>
+          <p:nvPr>
+            <p:ph type="body" idx="1"/>
+          </p:nvPr>
+        </p:nvSpPr>
+        <p:spPr/>
+        <p:txBody>
+          <a:bodyPr/>
+          <a:lstStyle/>
+          <a:p>
+            <a:r>
+              <a:rPr lang="en-US" dirty="0"/>
+              <a:t>Semi-Gradient Sarsa</a:t>
+            </a:r>
+          </a:p>
+        </p:txBody>
+      </p:sp>
+    </p:spTree>
+    <p:extLst>
+      <p:ext uri="{BB962C8B-B14F-4D97-AF65-F5344CB8AC3E}">
+        <p14:creationId xmlns:p14="http://schemas.microsoft.com/office/powerpoint/2010/main" val="587571508"/>
+      </p:ext>
+    </p:extLst>
+  </p:cSld>
+  <p:clrMapOvr>
+    <a:masterClrMapping/>
+  </p:clrMapOvr>
+</p:sld>
+</file>
+
+<file path=ppt/slides/slide31.xml><?xml version="1.0" encoding="utf-8"?>
+<p:sld xmlns:a="http://schemas.openxmlformats.org/drawingml/2006/main" xmlns:r="http://schemas.openxmlformats.org/officeDocument/2006/relationships" xmlns:p="http://schemas.openxmlformats.org/presentationml/2006/main">
+  <p:cSld>
+    <p:spTree>
+      <p:nvGrpSpPr>
+        <p:cNvPr id="1" name=""/>
+        <p:cNvGrpSpPr/>
+        <p:nvPr/>
+      </p:nvGrpSpPr>
+      <p:grpSpPr>
+        <a:xfrm>
+          <a:off x="0" y="0"/>
+          <a:ext cx="0" cy="0"/>
+          <a:chOff x="0" y="0"/>
+          <a:chExt cx="0" cy="0"/>
+        </a:xfrm>
+      </p:grpSpPr>
+      <p:sp>
+        <p:nvSpPr>
+          <p:cNvPr id="4" name="Title 3">
+            <a:extLst>
+              <a:ext uri="{FF2B5EF4-FFF2-40B4-BE49-F238E27FC236}">
                 <a16:creationId xmlns:a16="http://schemas.microsoft.com/office/drawing/2014/main" id="{689C127B-86A4-4CC5-9EE1-A0FDA5771BE2}"/>
               </a:ext>
             </a:extLst>
@@ -30904,8 +31105,8 @@
           </a:p>
         </p:txBody>
       </p:sp>
-      <mc:AlternateContent xmlns:mc="http://schemas.openxmlformats.org/markup-compatibility/2006">
-        <mc:Choice xmlns:a14="http://schemas.microsoft.com/office/drawing/2010/main" Requires="a14">
+      <mc:AlternateContent xmlns:mc="http://schemas.openxmlformats.org/markup-compatibility/2006" xmlns:a14="http://schemas.microsoft.com/office/drawing/2010/main">
+        <mc:Choice Requires="a14">
           <p:sp>
             <p:nvSpPr>
               <p:cNvPr id="5" name="Content Placeholder 4">
@@ -32172,7 +32373,7 @@
             </p:txBody>
           </p:sp>
         </mc:Choice>
-        <mc:Fallback>
+        <mc:Fallback xmlns="">
           <p:sp>
             <p:nvSpPr>
               <p:cNvPr id="5" name="Content Placeholder 4">
@@ -32609,7 +32810,7 @@
 </p:sld>
 </file>
 
-<file path=ppt/slides/slide31.xml><?xml version="1.0" encoding="utf-8"?>
+<file path=ppt/slides/slide32.xml><?xml version="1.0" encoding="utf-8"?>
 <p:sld xmlns:a="http://schemas.openxmlformats.org/drawingml/2006/main" xmlns:r="http://schemas.openxmlformats.org/officeDocument/2006/relationships" xmlns:p="http://schemas.openxmlformats.org/presentationml/2006/main">
   <p:cSld>
     <p:spTree>
@@ -32848,7 +33049,7 @@
 </p:sld>
 </file>
 
-<file path=ppt/slides/slide32.xml><?xml version="1.0" encoding="utf-8"?>
+<file path=ppt/slides/slide33.xml><?xml version="1.0" encoding="utf-8"?>
 <p:sld xmlns:a="http://schemas.openxmlformats.org/drawingml/2006/main" xmlns:r="http://schemas.openxmlformats.org/officeDocument/2006/relationships" xmlns:p="http://schemas.openxmlformats.org/presentationml/2006/main">
   <p:cSld>
     <p:spTree>
@@ -32893,8 +33094,8 @@
           </a:p>
         </p:txBody>
       </p:sp>
-      <mc:AlternateContent xmlns:mc="http://schemas.openxmlformats.org/markup-compatibility/2006">
-        <mc:Choice xmlns:a14="http://schemas.microsoft.com/office/drawing/2010/main" Requires="a14">
+      <mc:AlternateContent xmlns:mc="http://schemas.openxmlformats.org/markup-compatibility/2006" xmlns:a14="http://schemas.microsoft.com/office/drawing/2010/main">
+        <mc:Choice Requires="a14">
           <p:sp>
             <p:nvSpPr>
               <p:cNvPr id="3" name="Content Placeholder 2">
@@ -33529,7 +33730,7 @@
             </p:txBody>
           </p:sp>
         </mc:Choice>
-        <mc:Fallback>
+        <mc:Fallback xmlns="">
           <p:sp>
             <p:nvSpPr>
               <p:cNvPr id="3" name="Content Placeholder 2">
@@ -33582,7 +33783,7 @@
 </p:sld>
 </file>
 
-<file path=ppt/slides/slide33.xml><?xml version="1.0" encoding="utf-8"?>
+<file path=ppt/slides/slide34.xml><?xml version="1.0" encoding="utf-8"?>
 <p:sld xmlns:a="http://schemas.openxmlformats.org/drawingml/2006/main" xmlns:r="http://schemas.openxmlformats.org/officeDocument/2006/relationships" xmlns:p="http://schemas.openxmlformats.org/presentationml/2006/main">
   <p:cSld>
     <p:bg>
@@ -34100,8 +34301,8 @@
           </a:extLst>
         </p:spPr>
       </p:pic>
-      <mc:AlternateContent xmlns:mc="http://schemas.openxmlformats.org/markup-compatibility/2006">
-        <mc:Choice xmlns:a14="http://schemas.microsoft.com/office/drawing/2010/main" Requires="a14">
+      <mc:AlternateContent xmlns:mc="http://schemas.openxmlformats.org/markup-compatibility/2006" xmlns:a14="http://schemas.microsoft.com/office/drawing/2010/main">
+        <mc:Choice Requires="a14">
           <p:sp>
             <p:nvSpPr>
               <p:cNvPr id="3" name="Content Placeholder 2">
@@ -34449,7 +34650,7 @@
             </p:txBody>
           </p:sp>
         </mc:Choice>
-        <mc:Fallback>
+        <mc:Fallback xmlns="">
           <p:sp>
             <p:nvSpPr>
               <p:cNvPr id="3" name="Content Placeholder 2">

--- a/slides/Lecture_Chapter09.pptx
+++ b/slides/Lecture_Chapter09.pptx
@@ -296,7 +296,7 @@
           <a:p>
             <a:fld id="{2987FC57-34F3-4A88-970B-010E7C0EC943}" type="datetimeFigureOut">
               <a:rPr lang="en-US" smtClean="0"/>
-              <a:t>3/30/2026</a:t>
+              <a:t>4/1/2026</a:t>
             </a:fld>
             <a:endParaRPr lang="en-US"/>
           </a:p>
@@ -878,7 +878,7 @@
           <a:p>
             <a:fld id="{3E22BF2E-04DA-469E-97C5-BB68A0368813}" type="datetimeFigureOut">
               <a:rPr lang="en-US" smtClean="0"/>
-              <a:t>3/30/2026</a:t>
+              <a:t>4/1/2026</a:t>
             </a:fld>
             <a:endParaRPr lang="en-US"/>
           </a:p>
@@ -1076,7 +1076,7 @@
           <a:p>
             <a:fld id="{3E22BF2E-04DA-469E-97C5-BB68A0368813}" type="datetimeFigureOut">
               <a:rPr lang="en-US" smtClean="0"/>
-              <a:t>3/30/2026</a:t>
+              <a:t>4/1/2026</a:t>
             </a:fld>
             <a:endParaRPr lang="en-US"/>
           </a:p>
@@ -1284,7 +1284,7 @@
           <a:p>
             <a:fld id="{3E22BF2E-04DA-469E-97C5-BB68A0368813}" type="datetimeFigureOut">
               <a:rPr lang="en-US" smtClean="0"/>
-              <a:t>3/30/2026</a:t>
+              <a:t>4/1/2026</a:t>
             </a:fld>
             <a:endParaRPr lang="en-US"/>
           </a:p>
@@ -1492,7 +1492,7 @@
           <a:p>
             <a:fld id="{3E22BF2E-04DA-469E-97C5-BB68A0368813}" type="datetimeFigureOut">
               <a:rPr lang="en-US" smtClean="0"/>
-              <a:t>3/30/2026</a:t>
+              <a:t>4/1/2026</a:t>
             </a:fld>
             <a:endParaRPr lang="en-US"/>
           </a:p>
@@ -1767,7 +1767,7 @@
           <a:p>
             <a:fld id="{3E22BF2E-04DA-469E-97C5-BB68A0368813}" type="datetimeFigureOut">
               <a:rPr lang="en-US" smtClean="0"/>
-              <a:t>3/30/2026</a:t>
+              <a:t>4/1/2026</a:t>
             </a:fld>
             <a:endParaRPr lang="en-US"/>
           </a:p>
@@ -2032,7 +2032,7 @@
           <a:p>
             <a:fld id="{3E22BF2E-04DA-469E-97C5-BB68A0368813}" type="datetimeFigureOut">
               <a:rPr lang="en-US" smtClean="0"/>
-              <a:t>3/30/2026</a:t>
+              <a:t>4/1/2026</a:t>
             </a:fld>
             <a:endParaRPr lang="en-US"/>
           </a:p>
@@ -2444,7 +2444,7 @@
           <a:p>
             <a:fld id="{3E22BF2E-04DA-469E-97C5-BB68A0368813}" type="datetimeFigureOut">
               <a:rPr lang="en-US" smtClean="0"/>
-              <a:t>3/30/2026</a:t>
+              <a:t>4/1/2026</a:t>
             </a:fld>
             <a:endParaRPr lang="en-US"/>
           </a:p>
@@ -2585,7 +2585,7 @@
           <a:p>
             <a:fld id="{3E22BF2E-04DA-469E-97C5-BB68A0368813}" type="datetimeFigureOut">
               <a:rPr lang="en-US" smtClean="0"/>
-              <a:t>3/30/2026</a:t>
+              <a:t>4/1/2026</a:t>
             </a:fld>
             <a:endParaRPr lang="en-US"/>
           </a:p>
@@ -2698,7 +2698,7 @@
           <a:p>
             <a:fld id="{3E22BF2E-04DA-469E-97C5-BB68A0368813}" type="datetimeFigureOut">
               <a:rPr lang="en-US" smtClean="0"/>
-              <a:t>3/30/2026</a:t>
+              <a:t>4/1/2026</a:t>
             </a:fld>
             <a:endParaRPr lang="en-US"/>
           </a:p>
@@ -3009,7 +3009,7 @@
           <a:p>
             <a:fld id="{3E22BF2E-04DA-469E-97C5-BB68A0368813}" type="datetimeFigureOut">
               <a:rPr lang="en-US" smtClean="0"/>
-              <a:t>3/30/2026</a:t>
+              <a:t>4/1/2026</a:t>
             </a:fld>
             <a:endParaRPr lang="en-US"/>
           </a:p>
@@ -3297,7 +3297,7 @@
           <a:p>
             <a:fld id="{3E22BF2E-04DA-469E-97C5-BB68A0368813}" type="datetimeFigureOut">
               <a:rPr lang="en-US" smtClean="0"/>
-              <a:t>3/30/2026</a:t>
+              <a:t>4/1/2026</a:t>
             </a:fld>
             <a:endParaRPr lang="en-US"/>
           </a:p>
@@ -3538,7 +3538,7 @@
           <a:p>
             <a:fld id="{3E22BF2E-04DA-469E-97C5-BB68A0368813}" type="datetimeFigureOut">
               <a:rPr lang="en-US" smtClean="0"/>
-              <a:t>3/30/2026</a:t>
+              <a:t>4/1/2026</a:t>
             </a:fld>
             <a:endParaRPr lang="en-US"/>
           </a:p>
@@ -6281,8 +6281,8 @@
           <a:chExt cx="0" cy="0"/>
         </a:xfrm>
       </p:grpSpPr>
-      <mc:AlternateContent xmlns:mc="http://schemas.openxmlformats.org/markup-compatibility/2006" xmlns:a14="http://schemas.microsoft.com/office/drawing/2010/main">
-        <mc:Choice Requires="a14">
+      <mc:AlternateContent xmlns:mc="http://schemas.openxmlformats.org/markup-compatibility/2006">
+        <mc:Choice xmlns:a14="http://schemas.microsoft.com/office/drawing/2010/main" Requires="a14">
           <p:sp>
             <p:nvSpPr>
               <p:cNvPr id="3" name="Content Placeholder 2">
@@ -6302,12 +6302,12 @@
             <p:spPr>
               <a:xfrm>
                 <a:off x="838200" y="1235487"/>
-                <a:ext cx="10515600" cy="5045391"/>
+                <a:ext cx="7797521" cy="5010117"/>
               </a:xfrm>
             </p:spPr>
             <p:txBody>
               <a:bodyPr>
-                <a:normAutofit fontScale="77500" lnSpcReduction="20000"/>
+                <a:normAutofit fontScale="62500" lnSpcReduction="20000"/>
               </a:bodyPr>
               <a:lstStyle/>
               <a:p>
@@ -6320,7 +6320,7 @@
                 </a:r>
                 <a:r>
                   <a:rPr lang="en-US" dirty="0"/>
-                  <a:t>: </a:t>
+                  <a:t> </a:t>
                 </a:r>
                 <a14:m>
                   <m:oMath xmlns:m="http://schemas.openxmlformats.org/officeDocument/2006/math">
@@ -6525,6 +6525,419 @@
                     </m:nary>
                   </m:oMath>
                 </a14:m>
+                <a:r>
+                  <a:rPr lang="en-US" dirty="0"/>
+                  <a:t> by moving </a:t>
+                </a:r>
+                <a14:m>
+                  <m:oMath xmlns:m="http://schemas.openxmlformats.org/officeDocument/2006/math">
+                    <m:r>
+                      <a:rPr lang="en-US" b="1" i="1" smtClean="0">
+                        <a:latin typeface="Cambria Math" panose="02040503050406030204" pitchFamily="18" charset="0"/>
+                      </a:rPr>
+                      <m:t>𝒘</m:t>
+                    </m:r>
+                  </m:oMath>
+                </a14:m>
+                <a:r>
+                  <a:rPr lang="en-US" dirty="0"/>
+                  <a:t> in the direction </a:t>
+                </a:r>
+                <a14:m>
+                  <m:oMath xmlns:m="http://schemas.openxmlformats.org/officeDocument/2006/math">
+                    <m:r>
+                      <m:rPr>
+                        <m:sty m:val="p"/>
+                      </m:rPr>
+                      <a:rPr lang="en-US" i="1">
+                        <a:latin typeface="Cambria Math" panose="02040503050406030204" pitchFamily="18" charset="0"/>
+                        <a:ea typeface="Cambria Math" panose="02040503050406030204" pitchFamily="18" charset="0"/>
+                      </a:rPr>
+                      <m:t>∇</m:t>
+                    </m:r>
+                    <m:acc>
+                      <m:accPr>
+                        <m:chr m:val="̅"/>
+                        <m:ctrlPr>
+                          <a:rPr lang="en-US" i="1">
+                            <a:latin typeface="Cambria Math" panose="02040503050406030204" pitchFamily="18" charset="0"/>
+                          </a:rPr>
+                        </m:ctrlPr>
+                      </m:accPr>
+                      <m:e>
+                        <m:r>
+                          <a:rPr lang="en-US" i="1">
+                            <a:latin typeface="Cambria Math" panose="02040503050406030204" pitchFamily="18" charset="0"/>
+                          </a:rPr>
+                          <m:t>𝑉𝐸</m:t>
+                        </m:r>
+                      </m:e>
+                    </m:acc>
+                  </m:oMath>
+                </a14:m>
+                <a:r>
+                  <a:rPr lang="en-US" dirty="0"/>
+                  <a:t>.</a:t>
+                </a:r>
+              </a:p>
+              <a:p>
+                <a:pPr marL="0" indent="0">
+                  <a:buNone/>
+                </a:pPr>
+                <a:endParaRPr lang="en-US" dirty="0"/>
+              </a:p>
+              <a:p>
+                <a:pPr marL="0" indent="0">
+                  <a:buNone/>
+                </a:pPr>
+                <a:r>
+                  <a:rPr lang="en-US" b="1" dirty="0"/>
+                  <a:t>Definition</a:t>
+                </a:r>
+                <a:r>
+                  <a:rPr lang="en-US" dirty="0"/>
+                  <a:t> of the gradient: </a:t>
+                </a:r>
+                <a14:m>
+                  <m:oMath xmlns:m="http://schemas.openxmlformats.org/officeDocument/2006/math">
+                    <m:r>
+                      <m:rPr>
+                        <m:sty m:val="p"/>
+                      </m:rPr>
+                      <a:rPr lang="en-US" i="1">
+                        <a:latin typeface="Cambria Math" panose="02040503050406030204" pitchFamily="18" charset="0"/>
+                        <a:ea typeface="Cambria Math" panose="02040503050406030204" pitchFamily="18" charset="0"/>
+                      </a:rPr>
+                      <m:t>∇</m:t>
+                    </m:r>
+                    <m:r>
+                      <a:rPr lang="en-US" i="1">
+                        <a:latin typeface="Cambria Math" panose="02040503050406030204" pitchFamily="18" charset="0"/>
+                        <a:ea typeface="Cambria Math" panose="02040503050406030204" pitchFamily="18" charset="0"/>
+                      </a:rPr>
+                      <m:t>𝑓</m:t>
+                    </m:r>
+                    <m:d>
+                      <m:dPr>
+                        <m:ctrlPr>
+                          <a:rPr lang="en-US" b="1" i="1">
+                            <a:latin typeface="Cambria Math" panose="02040503050406030204" pitchFamily="18" charset="0"/>
+                            <a:ea typeface="Cambria Math" panose="02040503050406030204" pitchFamily="18" charset="0"/>
+                          </a:rPr>
+                        </m:ctrlPr>
+                      </m:dPr>
+                      <m:e>
+                        <m:r>
+                          <a:rPr lang="en-US" b="1" i="1">
+                            <a:latin typeface="Cambria Math" panose="02040503050406030204" pitchFamily="18" charset="0"/>
+                            <a:ea typeface="Cambria Math" panose="02040503050406030204" pitchFamily="18" charset="0"/>
+                          </a:rPr>
+                          <m:t>𝒘</m:t>
+                        </m:r>
+                      </m:e>
+                    </m:d>
+                    <m:r>
+                      <a:rPr lang="en-US" i="1">
+                        <a:latin typeface="Cambria Math" panose="02040503050406030204" pitchFamily="18" charset="0"/>
+                        <a:ea typeface="Cambria Math" panose="02040503050406030204" pitchFamily="18" charset="0"/>
+                      </a:rPr>
+                      <m:t>=</m:t>
+                    </m:r>
+                    <m:sSup>
+                      <m:sSupPr>
+                        <m:ctrlPr>
+                          <a:rPr lang="en-US" i="1">
+                            <a:latin typeface="Cambria Math" panose="02040503050406030204" pitchFamily="18" charset="0"/>
+                            <a:ea typeface="Cambria Math" panose="02040503050406030204" pitchFamily="18" charset="0"/>
+                          </a:rPr>
+                        </m:ctrlPr>
+                      </m:sSupPr>
+                      <m:e>
+                        <m:d>
+                          <m:dPr>
+                            <m:ctrlPr>
+                              <a:rPr lang="en-US" i="1">
+                                <a:latin typeface="Cambria Math" panose="02040503050406030204" pitchFamily="18" charset="0"/>
+                                <a:ea typeface="Cambria Math" panose="02040503050406030204" pitchFamily="18" charset="0"/>
+                              </a:rPr>
+                            </m:ctrlPr>
+                          </m:dPr>
+                          <m:e>
+                            <m:f>
+                              <m:fPr>
+                                <m:ctrlPr>
+                                  <a:rPr lang="en-US" i="1">
+                                    <a:latin typeface="Cambria Math" panose="02040503050406030204" pitchFamily="18" charset="0"/>
+                                    <a:ea typeface="Cambria Math" panose="02040503050406030204" pitchFamily="18" charset="0"/>
+                                  </a:rPr>
+                                </m:ctrlPr>
+                              </m:fPr>
+                              <m:num>
+                                <m:r>
+                                  <a:rPr lang="en-US" i="1">
+                                    <a:latin typeface="Cambria Math" panose="02040503050406030204" pitchFamily="18" charset="0"/>
+                                    <a:ea typeface="Cambria Math" panose="02040503050406030204" pitchFamily="18" charset="0"/>
+                                  </a:rPr>
+                                  <m:t>𝜕</m:t>
+                                </m:r>
+                                <m:r>
+                                  <a:rPr lang="en-US" i="1">
+                                    <a:latin typeface="Cambria Math" panose="02040503050406030204" pitchFamily="18" charset="0"/>
+                                    <a:ea typeface="Cambria Math" panose="02040503050406030204" pitchFamily="18" charset="0"/>
+                                  </a:rPr>
+                                  <m:t>𝑓</m:t>
+                                </m:r>
+                                <m:d>
+                                  <m:dPr>
+                                    <m:ctrlPr>
+                                      <a:rPr lang="en-US" b="1" i="1" smtClean="0">
+                                        <a:latin typeface="Cambria Math" panose="02040503050406030204" pitchFamily="18" charset="0"/>
+                                        <a:ea typeface="Cambria Math" panose="02040503050406030204" pitchFamily="18" charset="0"/>
+                                      </a:rPr>
+                                    </m:ctrlPr>
+                                  </m:dPr>
+                                  <m:e>
+                                    <m:r>
+                                      <a:rPr lang="en-US" b="1" i="1">
+                                        <a:latin typeface="Cambria Math" panose="02040503050406030204" pitchFamily="18" charset="0"/>
+                                        <a:ea typeface="Cambria Math" panose="02040503050406030204" pitchFamily="18" charset="0"/>
+                                      </a:rPr>
+                                      <m:t>𝒘</m:t>
+                                    </m:r>
+                                  </m:e>
+                                </m:d>
+                              </m:num>
+                              <m:den>
+                                <m:r>
+                                  <a:rPr lang="en-US" i="1">
+                                    <a:latin typeface="Cambria Math" panose="02040503050406030204" pitchFamily="18" charset="0"/>
+                                    <a:ea typeface="Cambria Math" panose="02040503050406030204" pitchFamily="18" charset="0"/>
+                                  </a:rPr>
+                                  <m:t>𝜕</m:t>
+                                </m:r>
+                                <m:sSub>
+                                  <m:sSubPr>
+                                    <m:ctrlPr>
+                                      <a:rPr lang="en-US" i="1">
+                                        <a:latin typeface="Cambria Math" panose="02040503050406030204" pitchFamily="18" charset="0"/>
+                                        <a:ea typeface="Cambria Math" panose="02040503050406030204" pitchFamily="18" charset="0"/>
+                                      </a:rPr>
+                                    </m:ctrlPr>
+                                  </m:sSubPr>
+                                  <m:e>
+                                    <m:r>
+                                      <a:rPr lang="en-US" i="1">
+                                        <a:latin typeface="Cambria Math" panose="02040503050406030204" pitchFamily="18" charset="0"/>
+                                        <a:ea typeface="Cambria Math" panose="02040503050406030204" pitchFamily="18" charset="0"/>
+                                      </a:rPr>
+                                      <m:t>𝑤</m:t>
+                                    </m:r>
+                                  </m:e>
+                                  <m:sub>
+                                    <m:r>
+                                      <a:rPr lang="en-US" i="1">
+                                        <a:latin typeface="Cambria Math" panose="02040503050406030204" pitchFamily="18" charset="0"/>
+                                        <a:ea typeface="Cambria Math" panose="02040503050406030204" pitchFamily="18" charset="0"/>
+                                      </a:rPr>
+                                      <m:t>1</m:t>
+                                    </m:r>
+                                  </m:sub>
+                                </m:sSub>
+                              </m:den>
+                            </m:f>
+                            <m:r>
+                              <a:rPr lang="en-US" i="1">
+                                <a:latin typeface="Cambria Math" panose="02040503050406030204" pitchFamily="18" charset="0"/>
+                                <a:ea typeface="Cambria Math" panose="02040503050406030204" pitchFamily="18" charset="0"/>
+                              </a:rPr>
+                              <m:t>,</m:t>
+                            </m:r>
+                            <m:f>
+                              <m:fPr>
+                                <m:ctrlPr>
+                                  <a:rPr lang="en-US" i="1">
+                                    <a:latin typeface="Cambria Math" panose="02040503050406030204" pitchFamily="18" charset="0"/>
+                                    <a:ea typeface="Cambria Math" panose="02040503050406030204" pitchFamily="18" charset="0"/>
+                                  </a:rPr>
+                                </m:ctrlPr>
+                              </m:fPr>
+                              <m:num>
+                                <m:r>
+                                  <a:rPr lang="en-US" i="1">
+                                    <a:latin typeface="Cambria Math" panose="02040503050406030204" pitchFamily="18" charset="0"/>
+                                    <a:ea typeface="Cambria Math" panose="02040503050406030204" pitchFamily="18" charset="0"/>
+                                  </a:rPr>
+                                  <m:t>𝜕</m:t>
+                                </m:r>
+                                <m:r>
+                                  <a:rPr lang="en-US" i="1">
+                                    <a:latin typeface="Cambria Math" panose="02040503050406030204" pitchFamily="18" charset="0"/>
+                                    <a:ea typeface="Cambria Math" panose="02040503050406030204" pitchFamily="18" charset="0"/>
+                                  </a:rPr>
+                                  <m:t>𝑓</m:t>
+                                </m:r>
+                                <m:d>
+                                  <m:dPr>
+                                    <m:ctrlPr>
+                                      <a:rPr lang="en-US" b="1" i="1">
+                                        <a:latin typeface="Cambria Math" panose="02040503050406030204" pitchFamily="18" charset="0"/>
+                                        <a:ea typeface="Cambria Math" panose="02040503050406030204" pitchFamily="18" charset="0"/>
+                                      </a:rPr>
+                                    </m:ctrlPr>
+                                  </m:dPr>
+                                  <m:e>
+                                    <m:r>
+                                      <a:rPr lang="en-US" b="1" i="1">
+                                        <a:latin typeface="Cambria Math" panose="02040503050406030204" pitchFamily="18" charset="0"/>
+                                        <a:ea typeface="Cambria Math" panose="02040503050406030204" pitchFamily="18" charset="0"/>
+                                      </a:rPr>
+                                      <m:t>𝒘</m:t>
+                                    </m:r>
+                                  </m:e>
+                                </m:d>
+                              </m:num>
+                              <m:den>
+                                <m:r>
+                                  <a:rPr lang="en-US" i="1">
+                                    <a:latin typeface="Cambria Math" panose="02040503050406030204" pitchFamily="18" charset="0"/>
+                                    <a:ea typeface="Cambria Math" panose="02040503050406030204" pitchFamily="18" charset="0"/>
+                                  </a:rPr>
+                                  <m:t>𝜕</m:t>
+                                </m:r>
+                                <m:sSub>
+                                  <m:sSubPr>
+                                    <m:ctrlPr>
+                                      <a:rPr lang="en-US" i="1">
+                                        <a:latin typeface="Cambria Math" panose="02040503050406030204" pitchFamily="18" charset="0"/>
+                                        <a:ea typeface="Cambria Math" panose="02040503050406030204" pitchFamily="18" charset="0"/>
+                                      </a:rPr>
+                                    </m:ctrlPr>
+                                  </m:sSubPr>
+                                  <m:e>
+                                    <m:r>
+                                      <a:rPr lang="en-US" i="1">
+                                        <a:latin typeface="Cambria Math" panose="02040503050406030204" pitchFamily="18" charset="0"/>
+                                        <a:ea typeface="Cambria Math" panose="02040503050406030204" pitchFamily="18" charset="0"/>
+                                      </a:rPr>
+                                      <m:t>𝑤</m:t>
+                                    </m:r>
+                                  </m:e>
+                                  <m:sub>
+                                    <m:r>
+                                      <a:rPr lang="en-US" i="1">
+                                        <a:latin typeface="Cambria Math" panose="02040503050406030204" pitchFamily="18" charset="0"/>
+                                        <a:ea typeface="Cambria Math" panose="02040503050406030204" pitchFamily="18" charset="0"/>
+                                      </a:rPr>
+                                      <m:t>2</m:t>
+                                    </m:r>
+                                  </m:sub>
+                                </m:sSub>
+                              </m:den>
+                            </m:f>
+                            <m:r>
+                              <a:rPr lang="en-US" i="1">
+                                <a:latin typeface="Cambria Math" panose="02040503050406030204" pitchFamily="18" charset="0"/>
+                                <a:ea typeface="Cambria Math" panose="02040503050406030204" pitchFamily="18" charset="0"/>
+                              </a:rPr>
+                              <m:t>,…,</m:t>
+                            </m:r>
+                            <m:f>
+                              <m:fPr>
+                                <m:ctrlPr>
+                                  <a:rPr lang="en-US" i="1">
+                                    <a:latin typeface="Cambria Math" panose="02040503050406030204" pitchFamily="18" charset="0"/>
+                                    <a:ea typeface="Cambria Math" panose="02040503050406030204" pitchFamily="18" charset="0"/>
+                                  </a:rPr>
+                                </m:ctrlPr>
+                              </m:fPr>
+                              <m:num>
+                                <m:r>
+                                  <a:rPr lang="en-US" i="1">
+                                    <a:latin typeface="Cambria Math" panose="02040503050406030204" pitchFamily="18" charset="0"/>
+                                    <a:ea typeface="Cambria Math" panose="02040503050406030204" pitchFamily="18" charset="0"/>
+                                  </a:rPr>
+                                  <m:t>𝜕</m:t>
+                                </m:r>
+                                <m:r>
+                                  <a:rPr lang="en-US" i="1">
+                                    <a:latin typeface="Cambria Math" panose="02040503050406030204" pitchFamily="18" charset="0"/>
+                                    <a:ea typeface="Cambria Math" panose="02040503050406030204" pitchFamily="18" charset="0"/>
+                                  </a:rPr>
+                                  <m:t>𝑓</m:t>
+                                </m:r>
+                                <m:d>
+                                  <m:dPr>
+                                    <m:ctrlPr>
+                                      <a:rPr lang="en-US" b="1" i="1">
+                                        <a:latin typeface="Cambria Math" panose="02040503050406030204" pitchFamily="18" charset="0"/>
+                                        <a:ea typeface="Cambria Math" panose="02040503050406030204" pitchFamily="18" charset="0"/>
+                                      </a:rPr>
+                                    </m:ctrlPr>
+                                  </m:dPr>
+                                  <m:e>
+                                    <m:r>
+                                      <a:rPr lang="en-US" b="1" i="1">
+                                        <a:latin typeface="Cambria Math" panose="02040503050406030204" pitchFamily="18" charset="0"/>
+                                        <a:ea typeface="Cambria Math" panose="02040503050406030204" pitchFamily="18" charset="0"/>
+                                      </a:rPr>
+                                      <m:t>𝒘</m:t>
+                                    </m:r>
+                                  </m:e>
+                                </m:d>
+                              </m:num>
+                              <m:den>
+                                <m:r>
+                                  <a:rPr lang="en-US" i="1">
+                                    <a:latin typeface="Cambria Math" panose="02040503050406030204" pitchFamily="18" charset="0"/>
+                                    <a:ea typeface="Cambria Math" panose="02040503050406030204" pitchFamily="18" charset="0"/>
+                                  </a:rPr>
+                                  <m:t>𝜕</m:t>
+                                </m:r>
+                                <m:sSub>
+                                  <m:sSubPr>
+                                    <m:ctrlPr>
+                                      <a:rPr lang="en-US" i="1">
+                                        <a:latin typeface="Cambria Math" panose="02040503050406030204" pitchFamily="18" charset="0"/>
+                                        <a:ea typeface="Cambria Math" panose="02040503050406030204" pitchFamily="18" charset="0"/>
+                                      </a:rPr>
+                                    </m:ctrlPr>
+                                  </m:sSubPr>
+                                  <m:e>
+                                    <m:r>
+                                      <a:rPr lang="en-US" i="1">
+                                        <a:latin typeface="Cambria Math" panose="02040503050406030204" pitchFamily="18" charset="0"/>
+                                        <a:ea typeface="Cambria Math" panose="02040503050406030204" pitchFamily="18" charset="0"/>
+                                      </a:rPr>
+                                      <m:t>𝑤</m:t>
+                                    </m:r>
+                                  </m:e>
+                                  <m:sub>
+                                    <m:r>
+                                      <a:rPr lang="en-US" i="1">
+                                        <a:latin typeface="Cambria Math" panose="02040503050406030204" pitchFamily="18" charset="0"/>
+                                        <a:ea typeface="Cambria Math" panose="02040503050406030204" pitchFamily="18" charset="0"/>
+                                      </a:rPr>
+                                      <m:t>𝑑</m:t>
+                                    </m:r>
+                                  </m:sub>
+                                </m:sSub>
+                              </m:den>
+                            </m:f>
+                          </m:e>
+                        </m:d>
+                      </m:e>
+                      <m:sup>
+                        <m:r>
+                          <a:rPr lang="en-US" i="1">
+                            <a:latin typeface="Cambria Math" panose="02040503050406030204" pitchFamily="18" charset="0"/>
+                            <a:ea typeface="Cambria Math" panose="02040503050406030204" pitchFamily="18" charset="0"/>
+                          </a:rPr>
+                          <m:t>⊤</m:t>
+                        </m:r>
+                      </m:sup>
+                    </m:sSup>
+                  </m:oMath>
+                </a14:m>
                 <a:endParaRPr lang="en-US" dirty="0"/>
               </a:p>
               <a:p>
@@ -6543,7 +6956,7 @@
                 </a:r>
                 <a:r>
                   <a:rPr lang="en-US" dirty="0"/>
-                  <a:t>: For one</a:t>
+                  <a:t> for one observation:</a:t>
                 </a:r>
                 <a:r>
                   <a:rPr lang="en-US" dirty="0">
@@ -6584,49 +6997,94 @@
                   </m:oMath>
                 </a14:m>
                 <a:r>
-                  <a:rPr lang="en-US" dirty="0"/>
-                  <a:t>, we change </a:t>
+                  <a:rPr lang="en-US" dirty="0">
+                    <a:ea typeface="Cambria Math" panose="02040503050406030204" pitchFamily="18" charset="0"/>
+                  </a:rPr>
+                  <a:t> </a:t>
                 </a:r>
                 <a14:m>
                   <m:oMath xmlns:m="http://schemas.openxmlformats.org/officeDocument/2006/math">
                     <m:r>
-                      <a:rPr lang="en-US" b="1" i="1" dirty="0" smtClean="0">
+                      <a:rPr lang="en-US" i="1">
                         <a:latin typeface="Cambria Math" panose="02040503050406030204" pitchFamily="18" charset="0"/>
+                        <a:ea typeface="Cambria Math" panose="02040503050406030204" pitchFamily="18" charset="0"/>
                       </a:rPr>
-                      <m:t>𝒘</m:t>
+                      <m:t>↦</m:t>
                     </m:r>
-                  </m:oMath>
-                </a14:m>
-                <a:r>
-                  <a:rPr lang="en-US" dirty="0"/>
-                  <a:t> to reduce </a:t>
-                </a:r>
-                <a14:m>
-                  <m:oMath xmlns:m="http://schemas.openxmlformats.org/officeDocument/2006/math">
-                    <m:acc>
-                      <m:accPr>
-                        <m:chr m:val="̅"/>
+                    <m:sSub>
+                      <m:sSubPr>
                         <m:ctrlPr>
                           <a:rPr lang="en-US" i="1">
                             <a:latin typeface="Cambria Math" panose="02040503050406030204" pitchFamily="18" charset="0"/>
+                            <a:ea typeface="Cambria Math" panose="02040503050406030204" pitchFamily="18" charset="0"/>
                           </a:rPr>
                         </m:ctrlPr>
-                      </m:accPr>
+                      </m:sSubPr>
                       <m:e>
                         <m:r>
                           <a:rPr lang="en-US" i="1">
                             <a:latin typeface="Cambria Math" panose="02040503050406030204" pitchFamily="18" charset="0"/>
-                          </a:rPr>
-                          <m:t>𝑉𝐸</m:t>
+                            <a:ea typeface="Cambria Math" panose="02040503050406030204" pitchFamily="18" charset="0"/>
+                          </a:rPr>
+                          <m:t>𝑣</m:t>
                         </m:r>
                       </m:e>
-                    </m:acc>
+                      <m:sub>
+                        <m:r>
+                          <a:rPr lang="en-US" i="1">
+                            <a:latin typeface="Cambria Math" panose="02040503050406030204" pitchFamily="18" charset="0"/>
+                            <a:ea typeface="Cambria Math" panose="02040503050406030204" pitchFamily="18" charset="0"/>
+                          </a:rPr>
+                          <m:t>𝜋</m:t>
+                        </m:r>
+                      </m:sub>
+                    </m:sSub>
+                    <m:d>
+                      <m:dPr>
+                        <m:ctrlPr>
+                          <a:rPr lang="en-US" i="1">
+                            <a:latin typeface="Cambria Math" panose="02040503050406030204" pitchFamily="18" charset="0"/>
+                            <a:ea typeface="Cambria Math" panose="02040503050406030204" pitchFamily="18" charset="0"/>
+                          </a:rPr>
+                        </m:ctrlPr>
+                      </m:dPr>
+                      <m:e>
+                        <m:sSub>
+                          <m:sSubPr>
+                            <m:ctrlPr>
+                              <a:rPr lang="en-US" i="1">
+                                <a:latin typeface="Cambria Math" panose="02040503050406030204" pitchFamily="18" charset="0"/>
+                                <a:ea typeface="Cambria Math" panose="02040503050406030204" pitchFamily="18" charset="0"/>
+                              </a:rPr>
+                            </m:ctrlPr>
+                          </m:sSubPr>
+                          <m:e>
+                            <m:r>
+                              <a:rPr lang="en-US" i="1">
+                                <a:latin typeface="Cambria Math" panose="02040503050406030204" pitchFamily="18" charset="0"/>
+                                <a:ea typeface="Cambria Math" panose="02040503050406030204" pitchFamily="18" charset="0"/>
+                              </a:rPr>
+                              <m:t>𝑆</m:t>
+                            </m:r>
+                          </m:e>
+                          <m:sub>
+                            <m:r>
+                              <a:rPr lang="en-US" i="1">
+                                <a:latin typeface="Cambria Math" panose="02040503050406030204" pitchFamily="18" charset="0"/>
+                                <a:ea typeface="Cambria Math" panose="02040503050406030204" pitchFamily="18" charset="0"/>
+                              </a:rPr>
+                              <m:t>𝑡</m:t>
+                            </m:r>
+                          </m:sub>
+                        </m:sSub>
+                      </m:e>
+                    </m:d>
                   </m:oMath>
                 </a14:m>
-                <a:r>
+                <a:br>
                   <a:rPr lang="en-US" dirty="0"/>
-                  <a:t> </a:t>
-                </a:r>
+                </a:br>
+                <a:endParaRPr lang="en-US" dirty="0"/>
               </a:p>
               <a:p>
                 <a:pPr marL="0" indent="0" algn="ctr">
@@ -7219,16 +7677,6 @@
                       </a:rPr>
                       <m:t>∇</m:t>
                     </m:r>
-                  </m:oMath>
-                </a14:m>
-                <a:r>
-                  <a:rPr lang="en-US" dirty="0">
-                    <a:ea typeface="Cambria Math" panose="02040503050406030204" pitchFamily="18" charset="0"/>
-                  </a:rPr>
-                  <a:t> </a:t>
-                </a:r>
-                <a14:m>
-                  <m:oMath xmlns:m="http://schemas.openxmlformats.org/officeDocument/2006/math">
                     <m:acc>
                       <m:accPr>
                         <m:chr m:val="̂"/>
@@ -7329,373 +7777,27 @@
                 <a:endParaRPr lang="en-US" dirty="0"/>
               </a:p>
               <a:p>
-                <a:pPr marL="0" indent="0">
-                  <a:buNone/>
-                </a:pPr>
                 <a:endParaRPr lang="en-US" dirty="0"/>
               </a:p>
               <a:p>
-                <a:endParaRPr lang="en-US" dirty="0"/>
+                <a:r>
+                  <a:rPr lang="en-US" b="1" dirty="0"/>
+                  <a:t>Important property of SGD</a:t>
+                </a:r>
+                <a:r>
+                  <a:rPr lang="en-US" dirty="0"/>
+                  <a:t>: Only depends on the gradient of the loss function. Does not need the gradient of the unknown value function!</a:t>
+                </a:r>
+                <a:endParaRPr lang="en-US" b="1" dirty="0"/>
               </a:p>
               <a:p>
-                <a:pPr marL="0" indent="0">
-                  <a:buNone/>
-                </a:pPr>
-                <a14:m>
-                  <m:oMathPara xmlns:m="http://schemas.openxmlformats.org/officeDocument/2006/math">
-                    <m:oMathParaPr>
-                      <m:jc m:val="centerGroup"/>
-                    </m:oMathParaPr>
-                    <m:oMath xmlns:m="http://schemas.openxmlformats.org/officeDocument/2006/math">
-                      <m:r>
-                        <m:rPr>
-                          <m:sty m:val="p"/>
-                        </m:rPr>
-                        <a:rPr lang="en-US" i="1" smtClean="0">
-                          <a:latin typeface="Cambria Math" panose="02040503050406030204" pitchFamily="18" charset="0"/>
-                          <a:ea typeface="Cambria Math" panose="02040503050406030204" pitchFamily="18" charset="0"/>
-                        </a:rPr>
-                        <m:t>∇</m:t>
-                      </m:r>
-                      <m:r>
-                        <a:rPr lang="en-US" b="0" i="1" smtClean="0">
-                          <a:latin typeface="Cambria Math" panose="02040503050406030204" pitchFamily="18" charset="0"/>
-                          <a:ea typeface="Cambria Math" panose="02040503050406030204" pitchFamily="18" charset="0"/>
-                        </a:rPr>
-                        <m:t>𝑓</m:t>
-                      </m:r>
-                      <m:d>
-                        <m:dPr>
-                          <m:ctrlPr>
-                            <a:rPr lang="en-US" b="1" i="1" smtClean="0">
-                              <a:latin typeface="Cambria Math" panose="02040503050406030204" pitchFamily="18" charset="0"/>
-                              <a:ea typeface="Cambria Math" panose="02040503050406030204" pitchFamily="18" charset="0"/>
-                            </a:rPr>
-                          </m:ctrlPr>
-                        </m:dPr>
-                        <m:e>
-                          <m:r>
-                            <a:rPr lang="en-US" b="1" i="1" smtClean="0">
-                              <a:latin typeface="Cambria Math" panose="02040503050406030204" pitchFamily="18" charset="0"/>
-                              <a:ea typeface="Cambria Math" panose="02040503050406030204" pitchFamily="18" charset="0"/>
-                            </a:rPr>
-                            <m:t>𝒘</m:t>
-                          </m:r>
-                        </m:e>
-                      </m:d>
-                      <m:r>
-                        <a:rPr lang="en-US" b="0" i="1" smtClean="0">
-                          <a:latin typeface="Cambria Math" panose="02040503050406030204" pitchFamily="18" charset="0"/>
-                          <a:ea typeface="Cambria Math" panose="02040503050406030204" pitchFamily="18" charset="0"/>
-                        </a:rPr>
-                        <m:t>=</m:t>
-                      </m:r>
-                      <m:sSup>
-                        <m:sSupPr>
-                          <m:ctrlPr>
-                            <a:rPr lang="en-US" b="0" i="1" smtClean="0">
-                              <a:latin typeface="Cambria Math" panose="02040503050406030204" pitchFamily="18" charset="0"/>
-                              <a:ea typeface="Cambria Math" panose="02040503050406030204" pitchFamily="18" charset="0"/>
-                            </a:rPr>
-                          </m:ctrlPr>
-                        </m:sSupPr>
-                        <m:e>
-                          <m:d>
-                            <m:dPr>
-                              <m:ctrlPr>
-                                <a:rPr lang="en-US" b="0" i="1" smtClean="0">
-                                  <a:latin typeface="Cambria Math" panose="02040503050406030204" pitchFamily="18" charset="0"/>
-                                  <a:ea typeface="Cambria Math" panose="02040503050406030204" pitchFamily="18" charset="0"/>
-                                </a:rPr>
-                              </m:ctrlPr>
-                            </m:dPr>
-                            <m:e>
-                              <m:f>
-                                <m:fPr>
-                                  <m:ctrlPr>
-                                    <a:rPr lang="en-US" b="0" i="1" smtClean="0">
-                                      <a:latin typeface="Cambria Math" panose="02040503050406030204" pitchFamily="18" charset="0"/>
-                                      <a:ea typeface="Cambria Math" panose="02040503050406030204" pitchFamily="18" charset="0"/>
-                                    </a:rPr>
-                                  </m:ctrlPr>
-                                </m:fPr>
-                                <m:num>
-                                  <m:r>
-                                    <a:rPr lang="en-US" b="0" i="1" smtClean="0">
-                                      <a:latin typeface="Cambria Math" panose="02040503050406030204" pitchFamily="18" charset="0"/>
-                                      <a:ea typeface="Cambria Math" panose="02040503050406030204" pitchFamily="18" charset="0"/>
-                                    </a:rPr>
-                                    <m:t>𝜕</m:t>
-                                  </m:r>
-                                  <m:r>
-                                    <a:rPr lang="en-US" b="0" i="1" smtClean="0">
-                                      <a:latin typeface="Cambria Math" panose="02040503050406030204" pitchFamily="18" charset="0"/>
-                                      <a:ea typeface="Cambria Math" panose="02040503050406030204" pitchFamily="18" charset="0"/>
-                                    </a:rPr>
-                                    <m:t>𝑓</m:t>
-                                  </m:r>
-                                  <m:d>
-                                    <m:dPr>
-                                      <m:ctrlPr>
-                                        <a:rPr lang="en-US" b="0" i="1" smtClean="0">
-                                          <a:latin typeface="Cambria Math" panose="02040503050406030204" pitchFamily="18" charset="0"/>
-                                          <a:ea typeface="Cambria Math" panose="02040503050406030204" pitchFamily="18" charset="0"/>
-                                        </a:rPr>
-                                      </m:ctrlPr>
-                                    </m:dPr>
-                                    <m:e>
-                                      <m:r>
-                                        <a:rPr lang="en-US" b="0" i="1" smtClean="0">
-                                          <a:latin typeface="Cambria Math" panose="02040503050406030204" pitchFamily="18" charset="0"/>
-                                          <a:ea typeface="Cambria Math" panose="02040503050406030204" pitchFamily="18" charset="0"/>
-                                        </a:rPr>
-                                        <m:t>𝑤</m:t>
-                                      </m:r>
-                                    </m:e>
-                                  </m:d>
-                                </m:num>
-                                <m:den>
-                                  <m:r>
-                                    <a:rPr lang="en-US" b="0" i="1" smtClean="0">
-                                      <a:latin typeface="Cambria Math" panose="02040503050406030204" pitchFamily="18" charset="0"/>
-                                      <a:ea typeface="Cambria Math" panose="02040503050406030204" pitchFamily="18" charset="0"/>
-                                    </a:rPr>
-                                    <m:t>𝜕</m:t>
-                                  </m:r>
-                                  <m:sSub>
-                                    <m:sSubPr>
-                                      <m:ctrlPr>
-                                        <a:rPr lang="en-US" b="0" i="1" smtClean="0">
-                                          <a:latin typeface="Cambria Math" panose="02040503050406030204" pitchFamily="18" charset="0"/>
-                                          <a:ea typeface="Cambria Math" panose="02040503050406030204" pitchFamily="18" charset="0"/>
-                                        </a:rPr>
-                                      </m:ctrlPr>
-                                    </m:sSubPr>
-                                    <m:e>
-                                      <m:r>
-                                        <a:rPr lang="en-US" b="0" i="1" smtClean="0">
-                                          <a:latin typeface="Cambria Math" panose="02040503050406030204" pitchFamily="18" charset="0"/>
-                                          <a:ea typeface="Cambria Math" panose="02040503050406030204" pitchFamily="18" charset="0"/>
-                                        </a:rPr>
-                                        <m:t>𝑤</m:t>
-                                      </m:r>
-                                    </m:e>
-                                    <m:sub>
-                                      <m:r>
-                                        <a:rPr lang="en-US" b="0" i="1" smtClean="0">
-                                          <a:latin typeface="Cambria Math" panose="02040503050406030204" pitchFamily="18" charset="0"/>
-                                          <a:ea typeface="Cambria Math" panose="02040503050406030204" pitchFamily="18" charset="0"/>
-                                        </a:rPr>
-                                        <m:t>1</m:t>
-                                      </m:r>
-                                    </m:sub>
-                                  </m:sSub>
-                                </m:den>
-                              </m:f>
-                              <m:r>
-                                <a:rPr lang="en-US" b="0" i="1" smtClean="0">
-                                  <a:latin typeface="Cambria Math" panose="02040503050406030204" pitchFamily="18" charset="0"/>
-                                  <a:ea typeface="Cambria Math" panose="02040503050406030204" pitchFamily="18" charset="0"/>
-                                </a:rPr>
-                                <m:t>,</m:t>
-                              </m:r>
-                              <m:f>
-                                <m:fPr>
-                                  <m:ctrlPr>
-                                    <a:rPr lang="en-US" i="1">
-                                      <a:latin typeface="Cambria Math" panose="02040503050406030204" pitchFamily="18" charset="0"/>
-                                      <a:ea typeface="Cambria Math" panose="02040503050406030204" pitchFamily="18" charset="0"/>
-                                    </a:rPr>
-                                  </m:ctrlPr>
-                                </m:fPr>
-                                <m:num>
-                                  <m:r>
-                                    <a:rPr lang="en-US" i="1">
-                                      <a:latin typeface="Cambria Math" panose="02040503050406030204" pitchFamily="18" charset="0"/>
-                                      <a:ea typeface="Cambria Math" panose="02040503050406030204" pitchFamily="18" charset="0"/>
-                                    </a:rPr>
-                                    <m:t>𝜕</m:t>
-                                  </m:r>
-                                  <m:r>
-                                    <a:rPr lang="en-US" i="1">
-                                      <a:latin typeface="Cambria Math" panose="02040503050406030204" pitchFamily="18" charset="0"/>
-                                      <a:ea typeface="Cambria Math" panose="02040503050406030204" pitchFamily="18" charset="0"/>
-                                    </a:rPr>
-                                    <m:t>𝑓</m:t>
-                                  </m:r>
-                                  <m:d>
-                                    <m:dPr>
-                                      <m:ctrlPr>
-                                        <a:rPr lang="en-US" i="1">
-                                          <a:latin typeface="Cambria Math" panose="02040503050406030204" pitchFamily="18" charset="0"/>
-                                          <a:ea typeface="Cambria Math" panose="02040503050406030204" pitchFamily="18" charset="0"/>
-                                        </a:rPr>
-                                      </m:ctrlPr>
-                                    </m:dPr>
-                                    <m:e>
-                                      <m:r>
-                                        <a:rPr lang="en-US" i="1">
-                                          <a:latin typeface="Cambria Math" panose="02040503050406030204" pitchFamily="18" charset="0"/>
-                                          <a:ea typeface="Cambria Math" panose="02040503050406030204" pitchFamily="18" charset="0"/>
-                                        </a:rPr>
-                                        <m:t>𝑤</m:t>
-                                      </m:r>
-                                    </m:e>
-                                  </m:d>
-                                </m:num>
-                                <m:den>
-                                  <m:r>
-                                    <a:rPr lang="en-US" i="1">
-                                      <a:latin typeface="Cambria Math" panose="02040503050406030204" pitchFamily="18" charset="0"/>
-                                      <a:ea typeface="Cambria Math" panose="02040503050406030204" pitchFamily="18" charset="0"/>
-                                    </a:rPr>
-                                    <m:t>𝜕</m:t>
-                                  </m:r>
-                                  <m:sSub>
-                                    <m:sSubPr>
-                                      <m:ctrlPr>
-                                        <a:rPr lang="en-US" i="1">
-                                          <a:latin typeface="Cambria Math" panose="02040503050406030204" pitchFamily="18" charset="0"/>
-                                          <a:ea typeface="Cambria Math" panose="02040503050406030204" pitchFamily="18" charset="0"/>
-                                        </a:rPr>
-                                      </m:ctrlPr>
-                                    </m:sSubPr>
-                                    <m:e>
-                                      <m:r>
-                                        <a:rPr lang="en-US" i="1">
-                                          <a:latin typeface="Cambria Math" panose="02040503050406030204" pitchFamily="18" charset="0"/>
-                                          <a:ea typeface="Cambria Math" panose="02040503050406030204" pitchFamily="18" charset="0"/>
-                                        </a:rPr>
-                                        <m:t>𝑤</m:t>
-                                      </m:r>
-                                    </m:e>
-                                    <m:sub>
-                                      <m:r>
-                                        <a:rPr lang="en-US" b="0" i="1" smtClean="0">
-                                          <a:latin typeface="Cambria Math" panose="02040503050406030204" pitchFamily="18" charset="0"/>
-                                          <a:ea typeface="Cambria Math" panose="02040503050406030204" pitchFamily="18" charset="0"/>
-                                        </a:rPr>
-                                        <m:t>2</m:t>
-                                      </m:r>
-                                    </m:sub>
-                                  </m:sSub>
-                                </m:den>
-                              </m:f>
-                              <m:r>
-                                <a:rPr lang="en-US" b="0" i="1" smtClean="0">
-                                  <a:latin typeface="Cambria Math" panose="02040503050406030204" pitchFamily="18" charset="0"/>
-                                  <a:ea typeface="Cambria Math" panose="02040503050406030204" pitchFamily="18" charset="0"/>
-                                </a:rPr>
-                                <m:t>,…,</m:t>
-                              </m:r>
-                              <m:f>
-                                <m:fPr>
-                                  <m:ctrlPr>
-                                    <a:rPr lang="en-US" i="1">
-                                      <a:latin typeface="Cambria Math" panose="02040503050406030204" pitchFamily="18" charset="0"/>
-                                      <a:ea typeface="Cambria Math" panose="02040503050406030204" pitchFamily="18" charset="0"/>
-                                    </a:rPr>
-                                  </m:ctrlPr>
-                                </m:fPr>
-                                <m:num>
-                                  <m:r>
-                                    <a:rPr lang="en-US" i="1">
-                                      <a:latin typeface="Cambria Math" panose="02040503050406030204" pitchFamily="18" charset="0"/>
-                                      <a:ea typeface="Cambria Math" panose="02040503050406030204" pitchFamily="18" charset="0"/>
-                                    </a:rPr>
-                                    <m:t>𝜕</m:t>
-                                  </m:r>
-                                  <m:r>
-                                    <a:rPr lang="en-US" i="1">
-                                      <a:latin typeface="Cambria Math" panose="02040503050406030204" pitchFamily="18" charset="0"/>
-                                      <a:ea typeface="Cambria Math" panose="02040503050406030204" pitchFamily="18" charset="0"/>
-                                    </a:rPr>
-                                    <m:t>𝑓</m:t>
-                                  </m:r>
-                                  <m:d>
-                                    <m:dPr>
-                                      <m:ctrlPr>
-                                        <a:rPr lang="en-US" i="1">
-                                          <a:latin typeface="Cambria Math" panose="02040503050406030204" pitchFamily="18" charset="0"/>
-                                          <a:ea typeface="Cambria Math" panose="02040503050406030204" pitchFamily="18" charset="0"/>
-                                        </a:rPr>
-                                      </m:ctrlPr>
-                                    </m:dPr>
-                                    <m:e>
-                                      <m:r>
-                                        <a:rPr lang="en-US" i="1">
-                                          <a:latin typeface="Cambria Math" panose="02040503050406030204" pitchFamily="18" charset="0"/>
-                                          <a:ea typeface="Cambria Math" panose="02040503050406030204" pitchFamily="18" charset="0"/>
-                                        </a:rPr>
-                                        <m:t>𝑤</m:t>
-                                      </m:r>
-                                    </m:e>
-                                  </m:d>
-                                </m:num>
-                                <m:den>
-                                  <m:r>
-                                    <a:rPr lang="en-US" i="1">
-                                      <a:latin typeface="Cambria Math" panose="02040503050406030204" pitchFamily="18" charset="0"/>
-                                      <a:ea typeface="Cambria Math" panose="02040503050406030204" pitchFamily="18" charset="0"/>
-                                    </a:rPr>
-                                    <m:t>𝜕</m:t>
-                                  </m:r>
-                                  <m:sSub>
-                                    <m:sSubPr>
-                                      <m:ctrlPr>
-                                        <a:rPr lang="en-US" i="1">
-                                          <a:latin typeface="Cambria Math" panose="02040503050406030204" pitchFamily="18" charset="0"/>
-                                          <a:ea typeface="Cambria Math" panose="02040503050406030204" pitchFamily="18" charset="0"/>
-                                        </a:rPr>
-                                      </m:ctrlPr>
-                                    </m:sSubPr>
-                                    <m:e>
-                                      <m:r>
-                                        <a:rPr lang="en-US" i="1">
-                                          <a:latin typeface="Cambria Math" panose="02040503050406030204" pitchFamily="18" charset="0"/>
-                                          <a:ea typeface="Cambria Math" panose="02040503050406030204" pitchFamily="18" charset="0"/>
-                                        </a:rPr>
-                                        <m:t>𝑤</m:t>
-                                      </m:r>
-                                    </m:e>
-                                    <m:sub>
-                                      <m:r>
-                                        <a:rPr lang="en-US" b="0" i="1" smtClean="0">
-                                          <a:latin typeface="Cambria Math" panose="02040503050406030204" pitchFamily="18" charset="0"/>
-                                          <a:ea typeface="Cambria Math" panose="02040503050406030204" pitchFamily="18" charset="0"/>
-                                        </a:rPr>
-                                        <m:t>𝑑</m:t>
-                                      </m:r>
-                                    </m:sub>
-                                  </m:sSub>
-                                </m:den>
-                              </m:f>
-                            </m:e>
-                          </m:d>
-                        </m:e>
-                        <m:sup>
-                          <m:r>
-                            <a:rPr lang="en-US" b="0" i="1" smtClean="0">
-                              <a:latin typeface="Cambria Math" panose="02040503050406030204" pitchFamily="18" charset="0"/>
-                              <a:ea typeface="Cambria Math" panose="02040503050406030204" pitchFamily="18" charset="0"/>
-                            </a:rPr>
-                            <m:t>⊤</m:t>
-                          </m:r>
-                        </m:sup>
-                      </m:sSup>
-                    </m:oMath>
-                  </m:oMathPara>
-                </a14:m>
-                <a:endParaRPr lang="en-US" dirty="0"/>
-              </a:p>
-              <a:p>
                 <a:r>
                   <a:rPr lang="en-US" b="1" dirty="0"/>
                   <a:t>Stochastic</a:t>
                 </a:r>
                 <a:r>
                   <a:rPr lang="en-US" dirty="0"/>
-                  <a:t>: because update is on a single (randomly chosen) example </a:t>
+                  <a:t>: because update is on a single (randomly chosen) example for </a:t>
                 </a:r>
                 <a14:m>
                   <m:oMath xmlns:m="http://schemas.openxmlformats.org/officeDocument/2006/math">
@@ -7731,8 +7833,9 @@
                 </a14:m>
                 <a:r>
                   <a:rPr lang="en-US" dirty="0"/>
-                  <a:t>.</a:t>
-                </a:r>
+                  <a:t>. This is why there is no sum in the update.</a:t>
+                </a:r>
+                <a:endParaRPr lang="en-US" b="1" dirty="0"/>
               </a:p>
               <a:p>
                 <a:r>
@@ -7788,7 +7891,7 @@
             </p:txBody>
           </p:sp>
         </mc:Choice>
-        <mc:Fallback xmlns="">
+        <mc:Fallback>
           <p:sp>
             <p:nvSpPr>
               <p:cNvPr id="3" name="Content Placeholder 2">
@@ -7808,12 +7911,12 @@
             <p:spPr>
               <a:xfrm>
                 <a:off x="838200" y="1235487"/>
-                <a:ext cx="10515600" cy="5045391"/>
+                <a:ext cx="7797521" cy="5010117"/>
               </a:xfrm>
               <a:blipFill>
                 <a:blip r:embed="rId2"/>
                 <a:stretch>
-                  <a:fillRect l="-754" t="-12576"/>
+                  <a:fillRect l="-704" t="-10219"/>
                 </a:stretch>
               </a:blipFill>
             </p:spPr>
@@ -7860,14 +7963,14 @@
           </a:p>
         </p:txBody>
       </p:sp>
-      <mc:AlternateContent xmlns:mc="http://schemas.openxmlformats.org/markup-compatibility/2006" xmlns:a14="http://schemas.microsoft.com/office/drawing/2010/main">
-        <mc:Choice Requires="a14">
+      <mc:AlternateContent xmlns:mc="http://schemas.openxmlformats.org/markup-compatibility/2006">
+        <mc:Choice xmlns:a14="http://schemas.microsoft.com/office/drawing/2010/main" Requires="a14">
           <p:sp>
             <p:nvSpPr>
-              <p:cNvPr id="6" name="Speech Bubble: Rectangle with Corners Rounded 5">
+              <p:cNvPr id="4" name="Speech Bubble: Rectangle with Corners Rounded 3">
                 <a:extLst>
                   <a:ext uri="{FF2B5EF4-FFF2-40B4-BE49-F238E27FC236}">
-                    <a16:creationId xmlns:a16="http://schemas.microsoft.com/office/drawing/2014/main" id="{739989E6-5A55-C21A-86FA-282AE61529FA}"/>
+                    <a16:creationId xmlns:a16="http://schemas.microsoft.com/office/drawing/2014/main" id="{BA5FC1EA-408E-750E-8302-14FB867FDECE}"/>
                   </a:ext>
                 </a:extLst>
               </p:cNvPr>
@@ -7876,13 +7979,13 @@
             </p:nvSpPr>
             <p:spPr>
               <a:xfrm>
-                <a:off x="9583748" y="715662"/>
-                <a:ext cx="2498896" cy="1039650"/>
+                <a:off x="8621075" y="3379239"/>
+                <a:ext cx="3215791" cy="1201925"/>
               </a:xfrm>
               <a:prstGeom prst="wedgeRoundRectCallout">
                 <a:avLst>
-                  <a:gd name="adj1" fmla="val -88796"/>
-                  <a:gd name="adj2" fmla="val 131331"/>
+                  <a:gd name="adj1" fmla="val -87712"/>
+                  <a:gd name="adj2" fmla="val -9290"/>
                   <a:gd name="adj3" fmla="val 16667"/>
                 </a:avLst>
               </a:prstGeom>
@@ -7909,130 +8012,64 @@
               <a:p>
                 <a:pPr algn="ctr"/>
                 <a:r>
-                  <a:rPr lang="en-US" dirty="0"/>
-                  <a:t>Gradient of the squared error for the example </a:t>
+                  <a:rPr lang="en-US" sz="1400" dirty="0"/>
+                  <a:t>Applying the chain rule* shows that we only need the gradient of the approximation function. </a:t>
+                </a:r>
+                <a:br>
+                  <a:rPr lang="en-US" sz="1400" dirty="0"/>
+                </a:br>
+                <a:r>
+                  <a:rPr lang="en-US" sz="1400" dirty="0"/>
+                  <a:t>Notes: the sign changes and  </a:t>
                 </a:r>
                 <a14:m>
                   <m:oMath xmlns:m="http://schemas.openxmlformats.org/officeDocument/2006/math">
-                    <m:sSub>
-                      <m:sSubPr>
+                    <m:f>
+                      <m:fPr>
                         <m:ctrlPr>
-                          <a:rPr lang="en-US" i="1">
+                          <a:rPr lang="en-US" sz="1400" b="0" i="1" smtClean="0">
                             <a:latin typeface="Cambria Math" panose="02040503050406030204" pitchFamily="18" charset="0"/>
                           </a:rPr>
                         </m:ctrlPr>
-                      </m:sSubPr>
-                      <m:e>
+                      </m:fPr>
+                      <m:num>
                         <m:r>
-                          <a:rPr lang="en-US" i="1">
-                            <a:latin typeface="Cambria Math" panose="02040503050406030204" pitchFamily="18" charset="0"/>
-                          </a:rPr>
-                          <m:t>𝑆</m:t>
+                          <a:rPr lang="en-US" sz="1400" b="0" i="1" smtClean="0">
+                            <a:latin typeface="Cambria Math" panose="02040503050406030204" pitchFamily="18" charset="0"/>
+                          </a:rPr>
+                          <m:t>1</m:t>
                         </m:r>
-                      </m:e>
-                      <m:sub>
+                      </m:num>
+                      <m:den>
                         <m:r>
-                          <a:rPr lang="en-US" i="1">
-                            <a:latin typeface="Cambria Math" panose="02040503050406030204" pitchFamily="18" charset="0"/>
-                          </a:rPr>
-                          <m:t>𝑡</m:t>
+                          <a:rPr lang="en-US" sz="1400" b="0" i="1" smtClean="0">
+                            <a:latin typeface="Cambria Math" panose="02040503050406030204" pitchFamily="18" charset="0"/>
+                          </a:rPr>
+                          <m:t>2</m:t>
                         </m:r>
-                      </m:sub>
-                    </m:sSub>
-                    <m:r>
-                      <a:rPr lang="en-US" i="1">
-                        <a:latin typeface="Cambria Math" panose="02040503050406030204" pitchFamily="18" charset="0"/>
-                        <a:ea typeface="Cambria Math" panose="02040503050406030204" pitchFamily="18" charset="0"/>
-                      </a:rPr>
-                      <m:t>↦</m:t>
-                    </m:r>
-                    <m:sSub>
-                      <m:sSubPr>
-                        <m:ctrlPr>
-                          <a:rPr lang="en-US" i="1">
-                            <a:latin typeface="Cambria Math" panose="02040503050406030204" pitchFamily="18" charset="0"/>
-                            <a:ea typeface="Cambria Math" panose="02040503050406030204" pitchFamily="18" charset="0"/>
-                          </a:rPr>
-                        </m:ctrlPr>
-                      </m:sSubPr>
-                      <m:e>
-                        <m:r>
-                          <a:rPr lang="en-US" i="1">
-                            <a:latin typeface="Cambria Math" panose="02040503050406030204" pitchFamily="18" charset="0"/>
-                            <a:ea typeface="Cambria Math" panose="02040503050406030204" pitchFamily="18" charset="0"/>
-                          </a:rPr>
-                          <m:t>𝑣</m:t>
-                        </m:r>
-                      </m:e>
-                      <m:sub>
-                        <m:r>
-                          <a:rPr lang="en-US" i="1">
-                            <a:latin typeface="Cambria Math" panose="02040503050406030204" pitchFamily="18" charset="0"/>
-                            <a:ea typeface="Cambria Math" panose="02040503050406030204" pitchFamily="18" charset="0"/>
-                          </a:rPr>
-                          <m:t>𝜋</m:t>
-                        </m:r>
-                      </m:sub>
-                    </m:sSub>
-                    <m:r>
-                      <a:rPr lang="en-US" i="1">
-                        <a:latin typeface="Cambria Math" panose="02040503050406030204" pitchFamily="18" charset="0"/>
-                        <a:ea typeface="Cambria Math" panose="02040503050406030204" pitchFamily="18" charset="0"/>
-                      </a:rPr>
-                      <m:t>(</m:t>
-                    </m:r>
-                    <m:sSub>
-                      <m:sSubPr>
-                        <m:ctrlPr>
-                          <a:rPr lang="en-US" i="1">
-                            <a:latin typeface="Cambria Math" panose="02040503050406030204" pitchFamily="18" charset="0"/>
-                            <a:ea typeface="Cambria Math" panose="02040503050406030204" pitchFamily="18" charset="0"/>
-                          </a:rPr>
-                        </m:ctrlPr>
-                      </m:sSubPr>
-                      <m:e>
-                        <m:r>
-                          <a:rPr lang="en-US" i="1">
-                            <a:latin typeface="Cambria Math" panose="02040503050406030204" pitchFamily="18" charset="0"/>
-                            <a:ea typeface="Cambria Math" panose="02040503050406030204" pitchFamily="18" charset="0"/>
-                          </a:rPr>
-                          <m:t>𝑆</m:t>
-                        </m:r>
-                      </m:e>
-                      <m:sub>
-                        <m:r>
-                          <a:rPr lang="en-US" i="1">
-                            <a:latin typeface="Cambria Math" panose="02040503050406030204" pitchFamily="18" charset="0"/>
-                            <a:ea typeface="Cambria Math" panose="02040503050406030204" pitchFamily="18" charset="0"/>
-                          </a:rPr>
-                          <m:t>𝑡</m:t>
-                        </m:r>
-                      </m:sub>
-                    </m:sSub>
-                    <m:r>
-                      <a:rPr lang="en-US" i="1">
-                        <a:latin typeface="Cambria Math" panose="02040503050406030204" pitchFamily="18" charset="0"/>
-                        <a:ea typeface="Cambria Math" panose="02040503050406030204" pitchFamily="18" charset="0"/>
-                      </a:rPr>
-                      <m:t>)</m:t>
-                    </m:r>
+                      </m:den>
+                    </m:f>
                   </m:oMath>
                 </a14:m>
                 <a:r>
-                  <a:rPr lang="en-US" dirty="0"/>
-                  <a:t>.</a:t>
+                  <a:rPr lang="en-US" sz="1400" b="1" dirty="0"/>
+                  <a:t> </a:t>
+                </a:r>
+                <a:r>
+                  <a:rPr lang="en-US" sz="1400" dirty="0"/>
+                  <a:t>was chosen for convenience.</a:t>
                 </a:r>
               </a:p>
             </p:txBody>
           </p:sp>
         </mc:Choice>
-        <mc:Fallback xmlns="">
+        <mc:Fallback>
           <p:sp>
             <p:nvSpPr>
-              <p:cNvPr id="6" name="Speech Bubble: Rectangle with Corners Rounded 5">
+              <p:cNvPr id="4" name="Speech Bubble: Rectangle with Corners Rounded 3">
                 <a:extLst>
                   <a:ext uri="{FF2B5EF4-FFF2-40B4-BE49-F238E27FC236}">
-                    <a16:creationId xmlns:a16="http://schemas.microsoft.com/office/drawing/2014/main" id="{739989E6-5A55-C21A-86FA-282AE61529FA}"/>
+                    <a16:creationId xmlns:a16="http://schemas.microsoft.com/office/drawing/2014/main" id="{BA5FC1EA-408E-750E-8302-14FB867FDECE}"/>
                   </a:ext>
                 </a:extLst>
               </p:cNvPr>
@@ -8043,20 +8080,20 @@
             </p:nvSpPr>
             <p:spPr>
               <a:xfrm>
-                <a:off x="9583748" y="715662"/>
-                <a:ext cx="2498896" cy="1039650"/>
+                <a:off x="8621075" y="3379239"/>
+                <a:ext cx="3215791" cy="1201925"/>
               </a:xfrm>
               <a:prstGeom prst="wedgeRoundRectCallout">
                 <a:avLst>
-                  <a:gd name="adj1" fmla="val -88796"/>
-                  <a:gd name="adj2" fmla="val 131331"/>
+                  <a:gd name="adj1" fmla="val -87712"/>
+                  <a:gd name="adj2" fmla="val -9290"/>
                   <a:gd name="adj3" fmla="val 16667"/>
                 </a:avLst>
               </a:prstGeom>
               <a:blipFill>
                 <a:blip r:embed="rId3"/>
                 <a:stretch>
-                  <a:fillRect/>
+                  <a:fillRect t="-1990" b="-5473"/>
                 </a:stretch>
               </a:blipFill>
             </p:spPr>
@@ -8075,172 +8112,847 @@
           </p:sp>
         </mc:Fallback>
       </mc:AlternateContent>
-      <p:sp>
-        <p:nvSpPr>
-          <p:cNvPr id="9" name="Rectangle 8">
+      <p:grpSp>
+        <p:nvGrpSpPr>
+          <p:cNvPr id="15" name="Group 14">
             <a:extLst>
               <a:ext uri="{FF2B5EF4-FFF2-40B4-BE49-F238E27FC236}">
-                <a16:creationId xmlns:a16="http://schemas.microsoft.com/office/drawing/2014/main" id="{C4F1ECF5-079F-37F0-8938-06EDE4B9A314}"/>
+                <a16:creationId xmlns:a16="http://schemas.microsoft.com/office/drawing/2014/main" id="{27A2F1BA-E1F0-0F40-5826-097EAD324210}"/>
               </a:ext>
             </a:extLst>
           </p:cNvPr>
-          <p:cNvSpPr/>
+          <p:cNvGrpSpPr/>
           <p:nvPr/>
-        </p:nvSpPr>
-        <p:spPr>
+        </p:nvGrpSpPr>
+        <p:grpSpPr>
           <a:xfrm>
-            <a:off x="5730705" y="2330586"/>
-            <a:ext cx="2826962" cy="419594"/>
+            <a:off x="8636467" y="1235487"/>
+            <a:ext cx="3169663" cy="1991944"/>
+            <a:chOff x="8665828" y="1015068"/>
+            <a:chExt cx="3169663" cy="1991944"/>
           </a:xfrm>
-          <a:prstGeom prst="rect">
-            <a:avLst/>
-          </a:prstGeom>
-          <a:noFill/>
-          <a:ln w="9525" cap="flat" cmpd="sng" algn="ctr">
-            <a:solidFill>
-              <a:schemeClr val="accent3"/>
-            </a:solidFill>
-            <a:prstDash val="solid"/>
-            <a:round/>
-            <a:headEnd type="none" w="med" len="med"/>
-            <a:tailEnd type="none" w="med" len="med"/>
-          </a:ln>
-        </p:spPr>
-        <p:style>
-          <a:lnRef idx="0">
-            <a:scrgbClr r="0" g="0" b="0"/>
-          </a:lnRef>
-          <a:fillRef idx="0">
-            <a:scrgbClr r="0" g="0" b="0"/>
-          </a:fillRef>
-          <a:effectRef idx="0">
-            <a:scrgbClr r="0" g="0" b="0"/>
-          </a:effectRef>
-          <a:fontRef idx="minor">
-            <a:schemeClr val="accent3"/>
-          </a:fontRef>
-        </p:style>
-        <p:txBody>
-          <a:bodyPr rtlCol="0" anchor="ctr"/>
-          <a:lstStyle/>
-          <a:p>
-            <a:pPr algn="ctr"/>
-            <a:endParaRPr lang="en-US"/>
-          </a:p>
-        </p:txBody>
-      </p:sp>
-      <mc:AlternateContent xmlns:mc="http://schemas.openxmlformats.org/markup-compatibility/2006" xmlns:a14="http://schemas.microsoft.com/office/drawing/2010/main">
-        <mc:Choice Requires="a14">
+        </p:grpSpPr>
+        <p:pic>
+          <p:nvPicPr>
+            <p:cNvPr id="1026" name="Picture 2" descr="image">
+              <a:extLst>
+                <a:ext uri="{FF2B5EF4-FFF2-40B4-BE49-F238E27FC236}">
+                  <a16:creationId xmlns:a16="http://schemas.microsoft.com/office/drawing/2014/main" id="{9DB133E6-6974-8668-496C-211BA8ECF05F}"/>
+                </a:ext>
+              </a:extLst>
+            </p:cNvPr>
+            <p:cNvPicPr>
+              <a:picLocks noChangeAspect="1" noChangeArrowheads="1"/>
+            </p:cNvPicPr>
+            <p:nvPr/>
+          </p:nvPicPr>
+          <p:blipFill>
+            <a:blip r:embed="rId4">
+              <a:extLst>
+                <a:ext uri="{28A0092B-C50C-407E-A947-70E740481C1C}">
+                  <a14:useLocalDpi xmlns:a14="http://schemas.microsoft.com/office/drawing/2010/main" val="0"/>
+                </a:ext>
+              </a:extLst>
+            </a:blip>
+            <a:srcRect/>
+            <a:stretch>
+              <a:fillRect/>
+            </a:stretch>
+          </p:blipFill>
+          <p:spPr bwMode="auto">
+            <a:xfrm>
+              <a:off x="8665828" y="1015068"/>
+              <a:ext cx="3169663" cy="1991944"/>
+            </a:xfrm>
+            <a:prstGeom prst="rect">
+              <a:avLst/>
+            </a:prstGeom>
+            <a:noFill/>
+            <a:ln>
+              <a:solidFill>
+                <a:schemeClr val="tx1"/>
+              </a:solidFill>
+            </a:ln>
+            <a:extLst>
+              <a:ext uri="{909E8E84-426E-40DD-AFC4-6F175D3DCCD1}">
+                <a14:hiddenFill xmlns:a14="http://schemas.microsoft.com/office/drawing/2010/main">
+                  <a:solidFill>
+                    <a:srgbClr val="FFFFFF"/>
+                  </a:solidFill>
+                </a14:hiddenFill>
+              </a:ext>
+            </a:extLst>
+          </p:spPr>
+        </p:pic>
+        <mc:AlternateContent xmlns:mc="http://schemas.openxmlformats.org/markup-compatibility/2006">
+          <mc:Choice xmlns:a14="http://schemas.microsoft.com/office/drawing/2010/main" Requires="a14">
+            <p:sp>
+              <p:nvSpPr>
+                <p:cNvPr id="7" name="TextBox 6">
+                  <a:extLst>
+                    <a:ext uri="{FF2B5EF4-FFF2-40B4-BE49-F238E27FC236}">
+                      <a16:creationId xmlns:a16="http://schemas.microsoft.com/office/drawing/2014/main" id="{D7CAA104-4550-BD6D-56DD-A22FA63743F8}"/>
+                    </a:ext>
+                  </a:extLst>
+                </p:cNvPr>
+                <p:cNvSpPr txBox="1"/>
+                <p:nvPr/>
+              </p:nvSpPr>
+              <p:spPr>
+                <a:xfrm>
+                  <a:off x="9102055" y="2663505"/>
+                  <a:ext cx="374910" cy="261610"/>
+                </a:xfrm>
+                <a:prstGeom prst="rect">
+                  <a:avLst/>
+                </a:prstGeom>
+                <a:noFill/>
+              </p:spPr>
+              <p:txBody>
+                <a:bodyPr wrap="none" rtlCol="0">
+                  <a:spAutoFit/>
+                </a:bodyPr>
+                <a:lstStyle/>
+                <a:p>
+                  <a14:m>
+                    <m:oMathPara xmlns:m="http://schemas.openxmlformats.org/officeDocument/2006/math">
+                      <m:oMathParaPr>
+                        <m:jc m:val="centerGroup"/>
+                      </m:oMathParaPr>
+                      <m:oMath xmlns:m="http://schemas.openxmlformats.org/officeDocument/2006/math">
+                        <m:sSub>
+                          <m:sSubPr>
+                            <m:ctrlPr>
+                              <a:rPr lang="en-US" sz="1100" b="0" i="1" smtClean="0">
+                                <a:latin typeface="Cambria Math" panose="02040503050406030204" pitchFamily="18" charset="0"/>
+                              </a:rPr>
+                            </m:ctrlPr>
+                          </m:sSubPr>
+                          <m:e>
+                            <m:r>
+                              <a:rPr lang="en-US" sz="1100" b="0" i="1" smtClean="0">
+                                <a:latin typeface="Cambria Math" panose="02040503050406030204" pitchFamily="18" charset="0"/>
+                              </a:rPr>
+                              <m:t>𝑤</m:t>
+                            </m:r>
+                          </m:e>
+                          <m:sub>
+                            <m:r>
+                              <a:rPr lang="en-US" sz="1100" b="0" i="1" smtClean="0">
+                                <a:latin typeface="Cambria Math" panose="02040503050406030204" pitchFamily="18" charset="0"/>
+                              </a:rPr>
+                              <m:t>1</m:t>
+                            </m:r>
+                          </m:sub>
+                        </m:sSub>
+                      </m:oMath>
+                    </m:oMathPara>
+                  </a14:m>
+                  <a:endParaRPr lang="en-US" sz="1100" dirty="0"/>
+                </a:p>
+              </p:txBody>
+            </p:sp>
+          </mc:Choice>
+          <mc:Fallback>
+            <p:sp>
+              <p:nvSpPr>
+                <p:cNvPr id="7" name="TextBox 6">
+                  <a:extLst>
+                    <a:ext uri="{FF2B5EF4-FFF2-40B4-BE49-F238E27FC236}">
+                      <a16:creationId xmlns:a16="http://schemas.microsoft.com/office/drawing/2014/main" id="{D7CAA104-4550-BD6D-56DD-A22FA63743F8}"/>
+                    </a:ext>
+                  </a:extLst>
+                </p:cNvPr>
+                <p:cNvSpPr txBox="1">
+                  <a:spLocks noRot="1" noChangeAspect="1" noMove="1" noResize="1" noEditPoints="1" noAdjustHandles="1" noChangeArrowheads="1" noChangeShapeType="1" noTextEdit="1"/>
+                </p:cNvSpPr>
+                <p:nvPr/>
+              </p:nvSpPr>
+              <p:spPr>
+                <a:xfrm>
+                  <a:off x="9102055" y="2663505"/>
+                  <a:ext cx="374910" cy="261610"/>
+                </a:xfrm>
+                <a:prstGeom prst="rect">
+                  <a:avLst/>
+                </a:prstGeom>
+                <a:blipFill>
+                  <a:blip r:embed="rId5"/>
+                  <a:stretch>
+                    <a:fillRect/>
+                  </a:stretch>
+                </a:blipFill>
+              </p:spPr>
+              <p:txBody>
+                <a:bodyPr/>
+                <a:lstStyle/>
+                <a:p>
+                  <a:r>
+                    <a:rPr lang="en-US">
+                      <a:noFill/>
+                    </a:rPr>
+                    <a:t> </a:t>
+                  </a:r>
+                </a:p>
+              </p:txBody>
+            </p:sp>
+          </mc:Fallback>
+        </mc:AlternateContent>
+        <mc:AlternateContent xmlns:mc="http://schemas.openxmlformats.org/markup-compatibility/2006">
+          <mc:Choice xmlns:a14="http://schemas.microsoft.com/office/drawing/2010/main" Requires="a14">
+            <p:sp>
+              <p:nvSpPr>
+                <p:cNvPr id="8" name="TextBox 7">
+                  <a:extLst>
+                    <a:ext uri="{FF2B5EF4-FFF2-40B4-BE49-F238E27FC236}">
+                      <a16:creationId xmlns:a16="http://schemas.microsoft.com/office/drawing/2014/main" id="{CBC8F59E-37BC-8A67-5B3D-4B2F5FBFF36F}"/>
+                    </a:ext>
+                  </a:extLst>
+                </p:cNvPr>
+                <p:cNvSpPr txBox="1"/>
+                <p:nvPr/>
+              </p:nvSpPr>
+              <p:spPr>
+                <a:xfrm>
+                  <a:off x="11091644" y="2706848"/>
+                  <a:ext cx="378180" cy="261610"/>
+                </a:xfrm>
+                <a:prstGeom prst="rect">
+                  <a:avLst/>
+                </a:prstGeom>
+                <a:noFill/>
+              </p:spPr>
+              <p:txBody>
+                <a:bodyPr wrap="none" rtlCol="0">
+                  <a:spAutoFit/>
+                </a:bodyPr>
+                <a:lstStyle/>
+                <a:p>
+                  <a14:m>
+                    <m:oMathPara xmlns:m="http://schemas.openxmlformats.org/officeDocument/2006/math">
+                      <m:oMathParaPr>
+                        <m:jc m:val="centerGroup"/>
+                      </m:oMathParaPr>
+                      <m:oMath xmlns:m="http://schemas.openxmlformats.org/officeDocument/2006/math">
+                        <m:sSub>
+                          <m:sSubPr>
+                            <m:ctrlPr>
+                              <a:rPr lang="en-US" sz="1100" b="0" i="1" smtClean="0">
+                                <a:latin typeface="Cambria Math" panose="02040503050406030204" pitchFamily="18" charset="0"/>
+                              </a:rPr>
+                            </m:ctrlPr>
+                          </m:sSubPr>
+                          <m:e>
+                            <m:r>
+                              <a:rPr lang="en-US" sz="1100" b="0" i="1" smtClean="0">
+                                <a:latin typeface="Cambria Math" panose="02040503050406030204" pitchFamily="18" charset="0"/>
+                              </a:rPr>
+                              <m:t>𝑤</m:t>
+                            </m:r>
+                          </m:e>
+                          <m:sub>
+                            <m:r>
+                              <a:rPr lang="en-US" sz="1100" b="0" i="1" smtClean="0">
+                                <a:latin typeface="Cambria Math" panose="02040503050406030204" pitchFamily="18" charset="0"/>
+                              </a:rPr>
+                              <m:t>2</m:t>
+                            </m:r>
+                          </m:sub>
+                        </m:sSub>
+                      </m:oMath>
+                    </m:oMathPara>
+                  </a14:m>
+                  <a:endParaRPr lang="en-US" sz="1100" dirty="0"/>
+                </a:p>
+              </p:txBody>
+            </p:sp>
+          </mc:Choice>
+          <mc:Fallback>
+            <p:sp>
+              <p:nvSpPr>
+                <p:cNvPr id="8" name="TextBox 7">
+                  <a:extLst>
+                    <a:ext uri="{FF2B5EF4-FFF2-40B4-BE49-F238E27FC236}">
+                      <a16:creationId xmlns:a16="http://schemas.microsoft.com/office/drawing/2014/main" id="{CBC8F59E-37BC-8A67-5B3D-4B2F5FBFF36F}"/>
+                    </a:ext>
+                  </a:extLst>
+                </p:cNvPr>
+                <p:cNvSpPr txBox="1">
+                  <a:spLocks noRot="1" noChangeAspect="1" noMove="1" noResize="1" noEditPoints="1" noAdjustHandles="1" noChangeArrowheads="1" noChangeShapeType="1" noTextEdit="1"/>
+                </p:cNvSpPr>
+                <p:nvPr/>
+              </p:nvSpPr>
+              <p:spPr>
+                <a:xfrm>
+                  <a:off x="11091644" y="2706848"/>
+                  <a:ext cx="378180" cy="261610"/>
+                </a:xfrm>
+                <a:prstGeom prst="rect">
+                  <a:avLst/>
+                </a:prstGeom>
+                <a:blipFill>
+                  <a:blip r:embed="rId6"/>
+                  <a:stretch>
+                    <a:fillRect/>
+                  </a:stretch>
+                </a:blipFill>
+              </p:spPr>
+              <p:txBody>
+                <a:bodyPr/>
+                <a:lstStyle/>
+                <a:p>
+                  <a:r>
+                    <a:rPr lang="en-US">
+                      <a:noFill/>
+                    </a:rPr>
+                    <a:t> </a:t>
+                  </a:r>
+                </a:p>
+              </p:txBody>
+            </p:sp>
+          </mc:Fallback>
+        </mc:AlternateContent>
+        <mc:AlternateContent xmlns:mc="http://schemas.openxmlformats.org/markup-compatibility/2006">
+          <mc:Choice xmlns:a14="http://schemas.microsoft.com/office/drawing/2010/main" Requires="a14">
+            <p:sp>
+              <p:nvSpPr>
+                <p:cNvPr id="11" name="TextBox 10">
+                  <a:extLst>
+                    <a:ext uri="{FF2B5EF4-FFF2-40B4-BE49-F238E27FC236}">
+                      <a16:creationId xmlns:a16="http://schemas.microsoft.com/office/drawing/2014/main" id="{D4AC81AC-BB68-87B3-206F-FBBC280799AC}"/>
+                    </a:ext>
+                  </a:extLst>
+                </p:cNvPr>
+                <p:cNvSpPr txBox="1"/>
+                <p:nvPr/>
+              </p:nvSpPr>
+              <p:spPr>
+                <a:xfrm>
+                  <a:off x="8665828" y="1211027"/>
+                  <a:ext cx="294568" cy="261610"/>
+                </a:xfrm>
+                <a:prstGeom prst="rect">
+                  <a:avLst/>
+                </a:prstGeom>
+                <a:noFill/>
+              </p:spPr>
+              <p:txBody>
+                <a:bodyPr wrap="none" rtlCol="0">
+                  <a:spAutoFit/>
+                </a:bodyPr>
+                <a:lstStyle/>
+                <a:p>
+                  <a14:m>
+                    <m:oMathPara xmlns:m="http://schemas.openxmlformats.org/officeDocument/2006/math">
+                      <m:oMathParaPr>
+                        <m:jc m:val="centerGroup"/>
+                      </m:oMathParaPr>
+                      <m:oMath xmlns:m="http://schemas.openxmlformats.org/officeDocument/2006/math">
+                        <m:r>
+                          <a:rPr lang="en-US" sz="1100" i="1" dirty="0" smtClean="0">
+                            <a:latin typeface="Cambria Math" panose="02040503050406030204" pitchFamily="18" charset="0"/>
+                          </a:rPr>
+                          <m:t>𝑓</m:t>
+                        </m:r>
+                      </m:oMath>
+                    </m:oMathPara>
+                  </a14:m>
+                  <a:endParaRPr lang="en-US" sz="1100" dirty="0"/>
+                </a:p>
+              </p:txBody>
+            </p:sp>
+          </mc:Choice>
+          <mc:Fallback>
+            <p:sp>
+              <p:nvSpPr>
+                <p:cNvPr id="11" name="TextBox 10">
+                  <a:extLst>
+                    <a:ext uri="{FF2B5EF4-FFF2-40B4-BE49-F238E27FC236}">
+                      <a16:creationId xmlns:a16="http://schemas.microsoft.com/office/drawing/2014/main" id="{D4AC81AC-BB68-87B3-206F-FBBC280799AC}"/>
+                    </a:ext>
+                  </a:extLst>
+                </p:cNvPr>
+                <p:cNvSpPr txBox="1">
+                  <a:spLocks noRot="1" noChangeAspect="1" noMove="1" noResize="1" noEditPoints="1" noAdjustHandles="1" noChangeArrowheads="1" noChangeShapeType="1" noTextEdit="1"/>
+                </p:cNvSpPr>
+                <p:nvPr/>
+              </p:nvSpPr>
+              <p:spPr>
+                <a:xfrm>
+                  <a:off x="8665828" y="1211027"/>
+                  <a:ext cx="294568" cy="261610"/>
+                </a:xfrm>
+                <a:prstGeom prst="rect">
+                  <a:avLst/>
+                </a:prstGeom>
+                <a:blipFill>
+                  <a:blip r:embed="rId7"/>
+                  <a:stretch>
+                    <a:fillRect b="-2326"/>
+                  </a:stretch>
+                </a:blipFill>
+              </p:spPr>
+              <p:txBody>
+                <a:bodyPr/>
+                <a:lstStyle/>
+                <a:p>
+                  <a:r>
+                    <a:rPr lang="en-US">
+                      <a:noFill/>
+                    </a:rPr>
+                    <a:t> </a:t>
+                  </a:r>
+                </a:p>
+              </p:txBody>
+            </p:sp>
+          </mc:Fallback>
+        </mc:AlternateContent>
+        <mc:AlternateContent xmlns:mc="http://schemas.openxmlformats.org/markup-compatibility/2006">
+          <mc:Choice xmlns:a14="http://schemas.microsoft.com/office/drawing/2010/main" Requires="a14">
+            <p:sp>
+              <p:nvSpPr>
+                <p:cNvPr id="12" name="TextBox 11">
+                  <a:extLst>
+                    <a:ext uri="{FF2B5EF4-FFF2-40B4-BE49-F238E27FC236}">
+                      <a16:creationId xmlns:a16="http://schemas.microsoft.com/office/drawing/2014/main" id="{D8B93170-B8DD-FFC8-7FE1-BE9B397B92C0}"/>
+                    </a:ext>
+                  </a:extLst>
+                </p:cNvPr>
+                <p:cNvSpPr txBox="1"/>
+                <p:nvPr/>
+              </p:nvSpPr>
+              <p:spPr>
+                <a:xfrm>
+                  <a:off x="10486029" y="1653913"/>
+                  <a:ext cx="605615" cy="261610"/>
+                </a:xfrm>
+                <a:prstGeom prst="rect">
+                  <a:avLst/>
+                </a:prstGeom>
+                <a:solidFill>
+                  <a:schemeClr val="dk1"/>
+                </a:solidFill>
+                <a:ln>
+                  <a:noFill/>
+                </a:ln>
+              </p:spPr>
+              <p:style>
+                <a:lnRef idx="0">
+                  <a:scrgbClr r="0" g="0" b="0"/>
+                </a:lnRef>
+                <a:fillRef idx="0">
+                  <a:scrgbClr r="0" g="0" b="0"/>
+                </a:fillRef>
+                <a:effectRef idx="0">
+                  <a:scrgbClr r="0" g="0" b="0"/>
+                </a:effectRef>
+                <a:fontRef idx="minor">
+                  <a:schemeClr val="lt1"/>
+                </a:fontRef>
+              </p:style>
+              <p:txBody>
+                <a:bodyPr wrap="none" rtlCol="0">
+                  <a:spAutoFit/>
+                </a:bodyPr>
+                <a:lstStyle/>
+                <a:p>
+                  <a14:m>
+                    <m:oMathPara xmlns:m="http://schemas.openxmlformats.org/officeDocument/2006/math">
+                      <m:oMathParaPr>
+                        <m:jc m:val="centerGroup"/>
+                      </m:oMathParaPr>
+                      <m:oMath xmlns:m="http://schemas.openxmlformats.org/officeDocument/2006/math">
+                        <m:r>
+                          <m:rPr>
+                            <m:sty m:val="p"/>
+                          </m:rPr>
+                          <a:rPr lang="en-US" sz="1100" i="1">
+                            <a:latin typeface="Cambria Math" panose="02040503050406030204" pitchFamily="18" charset="0"/>
+                            <a:ea typeface="Cambria Math" panose="02040503050406030204" pitchFamily="18" charset="0"/>
+                          </a:rPr>
+                          <m:t>∇</m:t>
+                        </m:r>
+                        <m:r>
+                          <a:rPr lang="en-US" sz="1100" i="1">
+                            <a:latin typeface="Cambria Math" panose="02040503050406030204" pitchFamily="18" charset="0"/>
+                            <a:ea typeface="Cambria Math" panose="02040503050406030204" pitchFamily="18" charset="0"/>
+                          </a:rPr>
+                          <m:t>𝑓</m:t>
+                        </m:r>
+                        <m:d>
+                          <m:dPr>
+                            <m:ctrlPr>
+                              <a:rPr lang="en-US" sz="1100" b="1" i="1">
+                                <a:latin typeface="Cambria Math" panose="02040503050406030204" pitchFamily="18" charset="0"/>
+                                <a:ea typeface="Cambria Math" panose="02040503050406030204" pitchFamily="18" charset="0"/>
+                              </a:rPr>
+                            </m:ctrlPr>
+                          </m:dPr>
+                          <m:e>
+                            <m:r>
+                              <a:rPr lang="en-US" sz="1100" b="1" i="1">
+                                <a:latin typeface="Cambria Math" panose="02040503050406030204" pitchFamily="18" charset="0"/>
+                                <a:ea typeface="Cambria Math" panose="02040503050406030204" pitchFamily="18" charset="0"/>
+                              </a:rPr>
+                              <m:t>𝒘</m:t>
+                            </m:r>
+                          </m:e>
+                        </m:d>
+                      </m:oMath>
+                    </m:oMathPara>
+                  </a14:m>
+                  <a:endParaRPr lang="en-US" sz="1100" dirty="0"/>
+                </a:p>
+              </p:txBody>
+            </p:sp>
+          </mc:Choice>
+          <mc:Fallback>
+            <p:sp>
+              <p:nvSpPr>
+                <p:cNvPr id="12" name="TextBox 11">
+                  <a:extLst>
+                    <a:ext uri="{FF2B5EF4-FFF2-40B4-BE49-F238E27FC236}">
+                      <a16:creationId xmlns:a16="http://schemas.microsoft.com/office/drawing/2014/main" id="{D8B93170-B8DD-FFC8-7FE1-BE9B397B92C0}"/>
+                    </a:ext>
+                  </a:extLst>
+                </p:cNvPr>
+                <p:cNvSpPr txBox="1">
+                  <a:spLocks noRot="1" noChangeAspect="1" noMove="1" noResize="1" noEditPoints="1" noAdjustHandles="1" noChangeArrowheads="1" noChangeShapeType="1" noTextEdit="1"/>
+                </p:cNvSpPr>
+                <p:nvPr/>
+              </p:nvSpPr>
+              <p:spPr>
+                <a:xfrm>
+                  <a:off x="10486029" y="1653913"/>
+                  <a:ext cx="605615" cy="261610"/>
+                </a:xfrm>
+                <a:prstGeom prst="rect">
+                  <a:avLst/>
+                </a:prstGeom>
+                <a:blipFill>
+                  <a:blip r:embed="rId8"/>
+                  <a:stretch>
+                    <a:fillRect b="-4651"/>
+                  </a:stretch>
+                </a:blipFill>
+                <a:ln>
+                  <a:noFill/>
+                </a:ln>
+              </p:spPr>
+              <p:txBody>
+                <a:bodyPr/>
+                <a:lstStyle/>
+                <a:p>
+                  <a:r>
+                    <a:rPr lang="en-US">
+                      <a:noFill/>
+                    </a:rPr>
+                    <a:t> </a:t>
+                  </a:r>
+                </a:p>
+              </p:txBody>
+            </p:sp>
+          </mc:Fallback>
+        </mc:AlternateContent>
+        <p:cxnSp>
+          <p:nvCxnSpPr>
+            <p:cNvPr id="14" name="Straight Arrow Connector 13">
+              <a:extLst>
+                <a:ext uri="{FF2B5EF4-FFF2-40B4-BE49-F238E27FC236}">
+                  <a16:creationId xmlns:a16="http://schemas.microsoft.com/office/drawing/2014/main" id="{918AFD0D-1261-061C-9731-56427D17F16A}"/>
+                </a:ext>
+              </a:extLst>
+            </p:cNvPr>
+            <p:cNvCxnSpPr/>
+            <p:nvPr/>
+          </p:nvCxnSpPr>
+          <p:spPr>
+            <a:xfrm flipH="1">
+              <a:off x="10377182" y="1589714"/>
+              <a:ext cx="71306" cy="218114"/>
+            </a:xfrm>
+            <a:prstGeom prst="straightConnector1">
+              <a:avLst/>
+            </a:prstGeom>
+            <a:ln>
+              <a:tailEnd type="triangle"/>
+            </a:ln>
+          </p:spPr>
+          <p:style>
+            <a:lnRef idx="2">
+              <a:schemeClr val="dk1"/>
+            </a:lnRef>
+            <a:fillRef idx="0">
+              <a:schemeClr val="dk1"/>
+            </a:fillRef>
+            <a:effectRef idx="1">
+              <a:schemeClr val="dk1"/>
+            </a:effectRef>
+            <a:fontRef idx="minor">
+              <a:schemeClr val="tx1"/>
+            </a:fontRef>
+          </p:style>
+        </p:cxnSp>
+      </p:grpSp>
+      <mc:AlternateContent xmlns:mc="http://schemas.openxmlformats.org/markup-compatibility/2006">
+        <mc:Choice xmlns:a14="http://schemas.microsoft.com/office/drawing/2010/main" Requires="a14">
           <p:sp>
             <p:nvSpPr>
-              <p:cNvPr id="10" name="Speech Bubble: Rectangle with Corners Rounded 9">
+              <p:cNvPr id="16" name="TextBox 15">
                 <a:extLst>
                   <a:ext uri="{FF2B5EF4-FFF2-40B4-BE49-F238E27FC236}">
-                    <a16:creationId xmlns:a16="http://schemas.microsoft.com/office/drawing/2014/main" id="{AFF6DCB0-4965-FDB7-9EF0-10B824BF7C4E}"/>
+                    <a16:creationId xmlns:a16="http://schemas.microsoft.com/office/drawing/2014/main" id="{751B930F-43AF-8B6E-3F69-D8CF3DDE50A5}"/>
                   </a:ext>
                 </a:extLst>
               </p:cNvPr>
-              <p:cNvSpPr/>
+              <p:cNvSpPr txBox="1"/>
               <p:nvPr/>
             </p:nvSpPr>
             <p:spPr>
               <a:xfrm>
-                <a:off x="1001650" y="3429000"/>
-                <a:ext cx="1881153" cy="837606"/>
+                <a:off x="8724655" y="4776328"/>
+                <a:ext cx="3023277" cy="954107"/>
               </a:xfrm>
-              <a:prstGeom prst="wedgeRoundRectCallout">
-                <a:avLst>
-                  <a:gd name="adj1" fmla="val 95035"/>
-                  <a:gd name="adj2" fmla="val 54474"/>
-                  <a:gd name="adj3" fmla="val 16667"/>
-                </a:avLst>
+              <a:prstGeom prst="rect">
+                <a:avLst/>
               </a:prstGeom>
             </p:spPr>
             <p:style>
               <a:lnRef idx="2">
-                <a:schemeClr val="accent3">
+                <a:schemeClr val="dk1">
                   <a:shade val="15000"/>
                 </a:schemeClr>
               </a:lnRef>
               <a:fillRef idx="1">
-                <a:schemeClr val="accent3"/>
+                <a:schemeClr val="dk1"/>
               </a:fillRef>
               <a:effectRef idx="0">
-                <a:schemeClr val="accent3"/>
+                <a:schemeClr val="dk1"/>
               </a:effectRef>
               <a:fontRef idx="minor">
                 <a:schemeClr val="lt1"/>
               </a:fontRef>
             </p:style>
             <p:txBody>
-              <a:bodyPr rtlCol="0" anchor="ctr"/>
+              <a:bodyPr wrap="square" rtlCol="0">
+                <a:spAutoFit/>
+              </a:bodyPr>
               <a:lstStyle/>
               <a:p>
-                <a:pPr algn="ctr"/>
-                <a:r>
-                  <a:rPr lang="en-US" dirty="0"/>
-                  <a:t>Gradient of </a:t>
-                </a:r>
+                <a:r>
+                  <a:rPr lang="en-US" sz="1400" b="1" dirty="0"/>
+                  <a:t>*Chain rule </a:t>
+                </a:r>
+                <a:r>
+                  <a:rPr lang="en-US" sz="1400" dirty="0"/>
+                  <a:t>(of differentiation)</a:t>
+                </a:r>
+                <a:endParaRPr lang="en-US" sz="1400" b="1" dirty="0"/>
+              </a:p>
+              <a:p>
                 <a14:m>
-                  <m:oMath xmlns:m="http://schemas.openxmlformats.org/officeDocument/2006/math">
-                    <m:r>
-                      <a:rPr lang="en-US" b="0" i="1" smtClean="0">
-                        <a:latin typeface="Cambria Math" panose="02040503050406030204" pitchFamily="18" charset="0"/>
-                      </a:rPr>
-                      <m:t>𝑓</m:t>
-                    </m:r>
-                  </m:oMath>
+                  <m:oMathPara xmlns:m="http://schemas.openxmlformats.org/officeDocument/2006/math">
+                    <m:oMathParaPr>
+                      <m:jc m:val="centerGroup"/>
+                    </m:oMathParaPr>
+                    <m:oMath xmlns:m="http://schemas.openxmlformats.org/officeDocument/2006/math">
+                      <m:r>
+                        <a:rPr lang="en-US" sz="1400" i="1">
+                          <a:latin typeface="Cambria Math" panose="02040503050406030204" pitchFamily="18" charset="0"/>
+                        </a:rPr>
+                        <m:t>h</m:t>
+                      </m:r>
+                      <m:r>
+                        <a:rPr lang="en-US" sz="1400" i="1">
+                          <a:latin typeface="Cambria Math" panose="02040503050406030204" pitchFamily="18" charset="0"/>
+                        </a:rPr>
+                        <m:t>(</m:t>
+                      </m:r>
+                      <m:r>
+                        <a:rPr lang="en-US" sz="1400" i="1">
+                          <a:latin typeface="Cambria Math" panose="02040503050406030204" pitchFamily="18" charset="0"/>
+                        </a:rPr>
+                        <m:t>𝑥</m:t>
+                      </m:r>
+                      <m:r>
+                        <a:rPr lang="en-US" sz="1400" i="1">
+                          <a:latin typeface="Cambria Math" panose="02040503050406030204" pitchFamily="18" charset="0"/>
+                        </a:rPr>
+                        <m:t>)=</m:t>
+                      </m:r>
+                      <m:r>
+                        <a:rPr lang="en-US" sz="1400" i="1">
+                          <a:latin typeface="Cambria Math" panose="02040503050406030204" pitchFamily="18" charset="0"/>
+                        </a:rPr>
+                        <m:t>𝑧</m:t>
+                      </m:r>
+                      <m:r>
+                        <a:rPr lang="en-US" sz="1400" i="1">
+                          <a:latin typeface="Cambria Math" panose="02040503050406030204" pitchFamily="18" charset="0"/>
+                        </a:rPr>
+                        <m:t>(</m:t>
+                      </m:r>
+                      <m:r>
+                        <a:rPr lang="en-US" sz="1400" i="1">
+                          <a:latin typeface="Cambria Math" panose="02040503050406030204" pitchFamily="18" charset="0"/>
+                        </a:rPr>
+                        <m:t>𝑦</m:t>
+                      </m:r>
+                      <m:r>
+                        <a:rPr lang="en-US" sz="1400" i="1">
+                          <a:latin typeface="Cambria Math" panose="02040503050406030204" pitchFamily="18" charset="0"/>
+                        </a:rPr>
+                        <m:t>(</m:t>
+                      </m:r>
+                      <m:r>
+                        <a:rPr lang="en-US" sz="1400" i="1">
+                          <a:latin typeface="Cambria Math" panose="02040503050406030204" pitchFamily="18" charset="0"/>
+                        </a:rPr>
+                        <m:t>𝑥</m:t>
+                      </m:r>
+                      <m:r>
+                        <a:rPr lang="en-US" sz="1400" i="1">
+                          <a:latin typeface="Cambria Math" panose="02040503050406030204" pitchFamily="18" charset="0"/>
+                        </a:rPr>
+                        <m:t>))</m:t>
+                      </m:r>
+                    </m:oMath>
+                  </m:oMathPara>
                 </a14:m>
-                <a:r>
-                  <a:rPr lang="en-US" dirty="0"/>
-                  <a:t> with respect to </a:t>
-                </a:r>
+                <a:endParaRPr lang="en-US" sz="1400" dirty="0"/>
+              </a:p>
+              <a:p>
+                <a:r>
+                  <a:rPr lang="en-US" sz="1400" dirty="0"/>
+                  <a:t>is equivalent to</a:t>
+                </a:r>
+              </a:p>
+              <a:p>
                 <a14:m>
-                  <m:oMath xmlns:m="http://schemas.openxmlformats.org/officeDocument/2006/math">
-                    <m:r>
-                      <a:rPr lang="en-US" b="1" i="1" smtClean="0">
-                        <a:latin typeface="Cambria Math" panose="02040503050406030204" pitchFamily="18" charset="0"/>
-                      </a:rPr>
-                      <m:t>𝒘</m:t>
-                    </m:r>
-                  </m:oMath>
+                  <m:oMathPara xmlns:m="http://schemas.openxmlformats.org/officeDocument/2006/math">
+                    <m:oMathParaPr>
+                      <m:jc m:val="centerGroup"/>
+                    </m:oMathParaPr>
+                    <m:oMath xmlns:m="http://schemas.openxmlformats.org/officeDocument/2006/math">
+                      <m:r>
+                        <a:rPr lang="es-ES" sz="1400" i="1">
+                          <a:latin typeface="Cambria Math" panose="02040503050406030204" pitchFamily="18" charset="0"/>
+                        </a:rPr>
+                        <m:t>h</m:t>
+                      </m:r>
+                      <m:r>
+                        <a:rPr lang="es-ES" sz="1400" i="1">
+                          <a:latin typeface="Cambria Math" panose="02040503050406030204" pitchFamily="18" charset="0"/>
+                        </a:rPr>
+                        <m:t>'(</m:t>
+                      </m:r>
+                      <m:r>
+                        <a:rPr lang="es-ES" sz="1400" i="1">
+                          <a:latin typeface="Cambria Math" panose="02040503050406030204" pitchFamily="18" charset="0"/>
+                        </a:rPr>
+                        <m:t>𝑥</m:t>
+                      </m:r>
+                      <m:r>
+                        <a:rPr lang="es-ES" sz="1400" i="1">
+                          <a:latin typeface="Cambria Math" panose="02040503050406030204" pitchFamily="18" charset="0"/>
+                        </a:rPr>
+                        <m:t>) = </m:t>
+                      </m:r>
+                      <m:r>
+                        <a:rPr lang="es-ES" sz="1400" i="1">
+                          <a:latin typeface="Cambria Math" panose="02040503050406030204" pitchFamily="18" charset="0"/>
+                        </a:rPr>
+                        <m:t>𝑧</m:t>
+                      </m:r>
+                      <m:r>
+                        <a:rPr lang="es-ES" sz="1400" i="1">
+                          <a:latin typeface="Cambria Math" panose="02040503050406030204" pitchFamily="18" charset="0"/>
+                        </a:rPr>
+                        <m:t>'(</m:t>
+                      </m:r>
+                      <m:r>
+                        <a:rPr lang="es-ES" sz="1400" i="1">
+                          <a:latin typeface="Cambria Math" panose="02040503050406030204" pitchFamily="18" charset="0"/>
+                        </a:rPr>
+                        <m:t>𝑦</m:t>
+                      </m:r>
+                      <m:r>
+                        <a:rPr lang="es-ES" sz="1400" i="1">
+                          <a:latin typeface="Cambria Math" panose="02040503050406030204" pitchFamily="18" charset="0"/>
+                        </a:rPr>
+                        <m:t>(</m:t>
+                      </m:r>
+                      <m:r>
+                        <a:rPr lang="es-ES" sz="1400" i="1">
+                          <a:latin typeface="Cambria Math" panose="02040503050406030204" pitchFamily="18" charset="0"/>
+                        </a:rPr>
+                        <m:t>𝑥</m:t>
+                      </m:r>
+                      <m:r>
+                        <a:rPr lang="es-ES" sz="1400" i="1">
+                          <a:latin typeface="Cambria Math" panose="02040503050406030204" pitchFamily="18" charset="0"/>
+                        </a:rPr>
+                        <m:t>)) </m:t>
+                      </m:r>
+                      <m:r>
+                        <a:rPr lang="es-ES" sz="1400" i="1">
+                          <a:latin typeface="Cambria Math" panose="02040503050406030204" pitchFamily="18" charset="0"/>
+                        </a:rPr>
+                        <m:t>𝑦</m:t>
+                      </m:r>
+                      <m:r>
+                        <a:rPr lang="es-ES" sz="1400" i="1">
+                          <a:latin typeface="Cambria Math" panose="02040503050406030204" pitchFamily="18" charset="0"/>
+                        </a:rPr>
+                        <m:t>'(</m:t>
+                      </m:r>
+                      <m:r>
+                        <a:rPr lang="es-ES" sz="1400" i="1">
+                          <a:latin typeface="Cambria Math" panose="02040503050406030204" pitchFamily="18" charset="0"/>
+                        </a:rPr>
+                        <m:t>𝑥</m:t>
+                      </m:r>
+                      <m:r>
+                        <a:rPr lang="es-ES" sz="1400" i="1">
+                          <a:latin typeface="Cambria Math" panose="02040503050406030204" pitchFamily="18" charset="0"/>
+                        </a:rPr>
+                        <m:t>)</m:t>
+                      </m:r>
+                    </m:oMath>
+                  </m:oMathPara>
                 </a14:m>
-                <a:endParaRPr lang="en-US" b="1" dirty="0"/>
+                <a:endParaRPr lang="en-US" sz="1400" dirty="0"/>
               </a:p>
             </p:txBody>
           </p:sp>
         </mc:Choice>
-        <mc:Fallback xmlns="">
+        <mc:Fallback>
           <p:sp>
             <p:nvSpPr>
-              <p:cNvPr id="10" name="Speech Bubble: Rectangle with Corners Rounded 9">
+              <p:cNvPr id="16" name="TextBox 15">
                 <a:extLst>
                   <a:ext uri="{FF2B5EF4-FFF2-40B4-BE49-F238E27FC236}">
-                    <a16:creationId xmlns:a16="http://schemas.microsoft.com/office/drawing/2014/main" id="{AFF6DCB0-4965-FDB7-9EF0-10B824BF7C4E}"/>
+                    <a16:creationId xmlns:a16="http://schemas.microsoft.com/office/drawing/2014/main" id="{751B930F-43AF-8B6E-3F69-D8CF3DDE50A5}"/>
                   </a:ext>
                 </a:extLst>
               </p:cNvPr>
-              <p:cNvSpPr>
+              <p:cNvSpPr txBox="1">
                 <a:spLocks noRot="1" noChangeAspect="1" noMove="1" noResize="1" noEditPoints="1" noAdjustHandles="1" noChangeArrowheads="1" noChangeShapeType="1" noTextEdit="1"/>
               </p:cNvSpPr>
               <p:nvPr/>
             </p:nvSpPr>
             <p:spPr>
               <a:xfrm>
-                <a:off x="1001650" y="3429000"/>
-                <a:ext cx="1881153" cy="837606"/>
+                <a:off x="8724655" y="4776328"/>
+                <a:ext cx="3023277" cy="954107"/>
               </a:xfrm>
-              <a:prstGeom prst="wedgeRoundRectCallout">
-                <a:avLst>
-                  <a:gd name="adj1" fmla="val 95035"/>
-                  <a:gd name="adj2" fmla="val 54474"/>
-                  <a:gd name="adj3" fmla="val 16667"/>
-                </a:avLst>
+              <a:prstGeom prst="rect">
+                <a:avLst/>
               </a:prstGeom>
               <a:blipFill>
-                <a:blip r:embed="rId4"/>
+                <a:blip r:embed="rId9"/>
                 <a:stretch>
-                  <a:fillRect t="-6711"/>
+                  <a:fillRect l="-401" t="-629" b="-629"/>
                 </a:stretch>
               </a:blipFill>
             </p:spPr>
@@ -8269,6 +8981,465 @@
   <p:clrMapOvr>
     <a:masterClrMapping/>
   </p:clrMapOvr>
+  <p:timing>
+    <p:tnLst>
+      <p:par>
+        <p:cTn id="1" dur="indefinite" restart="never" nodeType="tmRoot">
+          <p:childTnLst>
+            <p:seq concurrent="1" nextAc="seek">
+              <p:cTn id="2" dur="indefinite" nodeType="mainSeq">
+                <p:childTnLst>
+                  <p:par>
+                    <p:cTn id="3" fill="hold">
+                      <p:stCondLst>
+                        <p:cond delay="indefinite"/>
+                      </p:stCondLst>
+                      <p:childTnLst>
+                        <p:par>
+                          <p:cTn id="4" fill="hold">
+                            <p:stCondLst>
+                              <p:cond delay="0"/>
+                            </p:stCondLst>
+                            <p:childTnLst>
+                              <p:par>
+                                <p:cTn id="5" presetID="1" presetClass="entr" presetSubtype="0" fill="hold" grpId="0" nodeType="clickEffect">
+                                  <p:stCondLst>
+                                    <p:cond delay="0"/>
+                                  </p:stCondLst>
+                                  <p:childTnLst>
+                                    <p:set>
+                                      <p:cBhvr>
+                                        <p:cTn id="6" dur="1" fill="hold">
+                                          <p:stCondLst>
+                                            <p:cond delay="0"/>
+                                          </p:stCondLst>
+                                        </p:cTn>
+                                        <p:tgtEl>
+                                          <p:spTgt spid="3">
+                                            <p:txEl>
+                                              <p:pRg st="0" end="0"/>
+                                            </p:txEl>
+                                          </p:spTgt>
+                                        </p:tgtEl>
+                                        <p:attrNameLst>
+                                          <p:attrName>style.visibility</p:attrName>
+                                        </p:attrNameLst>
+                                      </p:cBhvr>
+                                      <p:to>
+                                        <p:strVal val="visible"/>
+                                      </p:to>
+                                    </p:set>
+                                  </p:childTnLst>
+                                </p:cTn>
+                              </p:par>
+                              <p:par>
+                                <p:cTn id="7" presetID="1" presetClass="entr" presetSubtype="0" fill="hold" nodeType="withEffect">
+                                  <p:stCondLst>
+                                    <p:cond delay="0"/>
+                                  </p:stCondLst>
+                                  <p:childTnLst>
+                                    <p:set>
+                                      <p:cBhvr>
+                                        <p:cTn id="8" dur="1" fill="hold">
+                                          <p:stCondLst>
+                                            <p:cond delay="0"/>
+                                          </p:stCondLst>
+                                        </p:cTn>
+                                        <p:tgtEl>
+                                          <p:spTgt spid="15"/>
+                                        </p:tgtEl>
+                                        <p:attrNameLst>
+                                          <p:attrName>style.visibility</p:attrName>
+                                        </p:attrNameLst>
+                                      </p:cBhvr>
+                                      <p:to>
+                                        <p:strVal val="visible"/>
+                                      </p:to>
+                                    </p:set>
+                                  </p:childTnLst>
+                                </p:cTn>
+                              </p:par>
+                            </p:childTnLst>
+                          </p:cTn>
+                        </p:par>
+                      </p:childTnLst>
+                    </p:cTn>
+                  </p:par>
+                  <p:par>
+                    <p:cTn id="9" fill="hold">
+                      <p:stCondLst>
+                        <p:cond delay="indefinite"/>
+                      </p:stCondLst>
+                      <p:childTnLst>
+                        <p:par>
+                          <p:cTn id="10" fill="hold">
+                            <p:stCondLst>
+                              <p:cond delay="0"/>
+                            </p:stCondLst>
+                            <p:childTnLst>
+                              <p:par>
+                                <p:cTn id="11" presetID="1" presetClass="entr" presetSubtype="0" fill="hold" grpId="0" nodeType="clickEffect">
+                                  <p:stCondLst>
+                                    <p:cond delay="0"/>
+                                  </p:stCondLst>
+                                  <p:childTnLst>
+                                    <p:set>
+                                      <p:cBhvr>
+                                        <p:cTn id="12" dur="1" fill="hold">
+                                          <p:stCondLst>
+                                            <p:cond delay="0"/>
+                                          </p:stCondLst>
+                                        </p:cTn>
+                                        <p:tgtEl>
+                                          <p:spTgt spid="3">
+                                            <p:txEl>
+                                              <p:pRg st="2" end="2"/>
+                                            </p:txEl>
+                                          </p:spTgt>
+                                        </p:tgtEl>
+                                        <p:attrNameLst>
+                                          <p:attrName>style.visibility</p:attrName>
+                                        </p:attrNameLst>
+                                      </p:cBhvr>
+                                      <p:to>
+                                        <p:strVal val="visible"/>
+                                      </p:to>
+                                    </p:set>
+                                  </p:childTnLst>
+                                </p:cTn>
+                              </p:par>
+                            </p:childTnLst>
+                          </p:cTn>
+                        </p:par>
+                      </p:childTnLst>
+                    </p:cTn>
+                  </p:par>
+                  <p:par>
+                    <p:cTn id="13" fill="hold">
+                      <p:stCondLst>
+                        <p:cond delay="indefinite"/>
+                      </p:stCondLst>
+                      <p:childTnLst>
+                        <p:par>
+                          <p:cTn id="14" fill="hold">
+                            <p:stCondLst>
+                              <p:cond delay="0"/>
+                            </p:stCondLst>
+                            <p:childTnLst>
+                              <p:par>
+                                <p:cTn id="15" presetID="1" presetClass="entr" presetSubtype="0" fill="hold" grpId="0" nodeType="clickEffect">
+                                  <p:stCondLst>
+                                    <p:cond delay="0"/>
+                                  </p:stCondLst>
+                                  <p:childTnLst>
+                                    <p:set>
+                                      <p:cBhvr>
+                                        <p:cTn id="16" dur="1" fill="hold">
+                                          <p:stCondLst>
+                                            <p:cond delay="0"/>
+                                          </p:stCondLst>
+                                        </p:cTn>
+                                        <p:tgtEl>
+                                          <p:spTgt spid="3">
+                                            <p:txEl>
+                                              <p:pRg st="4" end="4"/>
+                                            </p:txEl>
+                                          </p:spTgt>
+                                        </p:tgtEl>
+                                        <p:attrNameLst>
+                                          <p:attrName>style.visibility</p:attrName>
+                                        </p:attrNameLst>
+                                      </p:cBhvr>
+                                      <p:to>
+                                        <p:strVal val="visible"/>
+                                      </p:to>
+                                    </p:set>
+                                  </p:childTnLst>
+                                </p:cTn>
+                              </p:par>
+                            </p:childTnLst>
+                          </p:cTn>
+                        </p:par>
+                      </p:childTnLst>
+                    </p:cTn>
+                  </p:par>
+                  <p:par>
+                    <p:cTn id="17" fill="hold">
+                      <p:stCondLst>
+                        <p:cond delay="indefinite"/>
+                      </p:stCondLst>
+                      <p:childTnLst>
+                        <p:par>
+                          <p:cTn id="18" fill="hold">
+                            <p:stCondLst>
+                              <p:cond delay="0"/>
+                            </p:stCondLst>
+                            <p:childTnLst>
+                              <p:par>
+                                <p:cTn id="19" presetID="1" presetClass="entr" presetSubtype="0" fill="hold" grpId="0" nodeType="clickEffect">
+                                  <p:stCondLst>
+                                    <p:cond delay="0"/>
+                                  </p:stCondLst>
+                                  <p:childTnLst>
+                                    <p:set>
+                                      <p:cBhvr>
+                                        <p:cTn id="20" dur="1" fill="hold">
+                                          <p:stCondLst>
+                                            <p:cond delay="0"/>
+                                          </p:stCondLst>
+                                        </p:cTn>
+                                        <p:tgtEl>
+                                          <p:spTgt spid="3">
+                                            <p:txEl>
+                                              <p:pRg st="5" end="5"/>
+                                            </p:txEl>
+                                          </p:spTgt>
+                                        </p:tgtEl>
+                                        <p:attrNameLst>
+                                          <p:attrName>style.visibility</p:attrName>
+                                        </p:attrNameLst>
+                                      </p:cBhvr>
+                                      <p:to>
+                                        <p:strVal val="visible"/>
+                                      </p:to>
+                                    </p:set>
+                                  </p:childTnLst>
+                                </p:cTn>
+                              </p:par>
+                              <p:par>
+                                <p:cTn id="21" presetID="1" presetClass="entr" presetSubtype="0" fill="hold" grpId="0" nodeType="withEffect">
+                                  <p:stCondLst>
+                                    <p:cond delay="0"/>
+                                  </p:stCondLst>
+                                  <p:childTnLst>
+                                    <p:set>
+                                      <p:cBhvr>
+                                        <p:cTn id="22" dur="1" fill="hold">
+                                          <p:stCondLst>
+                                            <p:cond delay="0"/>
+                                          </p:stCondLst>
+                                        </p:cTn>
+                                        <p:tgtEl>
+                                          <p:spTgt spid="4"/>
+                                        </p:tgtEl>
+                                        <p:attrNameLst>
+                                          <p:attrName>style.visibility</p:attrName>
+                                        </p:attrNameLst>
+                                      </p:cBhvr>
+                                      <p:to>
+                                        <p:strVal val="visible"/>
+                                      </p:to>
+                                    </p:set>
+                                  </p:childTnLst>
+                                </p:cTn>
+                              </p:par>
+                              <p:par>
+                                <p:cTn id="23" presetID="1" presetClass="entr" presetSubtype="0" fill="hold" grpId="0" nodeType="withEffect">
+                                  <p:stCondLst>
+                                    <p:cond delay="0"/>
+                                  </p:stCondLst>
+                                  <p:childTnLst>
+                                    <p:set>
+                                      <p:cBhvr>
+                                        <p:cTn id="24" dur="1" fill="hold">
+                                          <p:stCondLst>
+                                            <p:cond delay="0"/>
+                                          </p:stCondLst>
+                                        </p:cTn>
+                                        <p:tgtEl>
+                                          <p:spTgt spid="16"/>
+                                        </p:tgtEl>
+                                        <p:attrNameLst>
+                                          <p:attrName>style.visibility</p:attrName>
+                                        </p:attrNameLst>
+                                      </p:cBhvr>
+                                      <p:to>
+                                        <p:strVal val="visible"/>
+                                      </p:to>
+                                    </p:set>
+                                  </p:childTnLst>
+                                </p:cTn>
+                              </p:par>
+                            </p:childTnLst>
+                          </p:cTn>
+                        </p:par>
+                      </p:childTnLst>
+                    </p:cTn>
+                  </p:par>
+                  <p:par>
+                    <p:cTn id="25" fill="hold">
+                      <p:stCondLst>
+                        <p:cond delay="indefinite"/>
+                      </p:stCondLst>
+                      <p:childTnLst>
+                        <p:par>
+                          <p:cTn id="26" fill="hold">
+                            <p:stCondLst>
+                              <p:cond delay="0"/>
+                            </p:stCondLst>
+                            <p:childTnLst>
+                              <p:par>
+                                <p:cTn id="27" presetID="1" presetClass="entr" presetSubtype="0" fill="hold" grpId="0" nodeType="clickEffect">
+                                  <p:stCondLst>
+                                    <p:cond delay="0"/>
+                                  </p:stCondLst>
+                                  <p:childTnLst>
+                                    <p:set>
+                                      <p:cBhvr>
+                                        <p:cTn id="28" dur="1" fill="hold">
+                                          <p:stCondLst>
+                                            <p:cond delay="0"/>
+                                          </p:stCondLst>
+                                        </p:cTn>
+                                        <p:tgtEl>
+                                          <p:spTgt spid="3">
+                                            <p:txEl>
+                                              <p:pRg st="7" end="7"/>
+                                            </p:txEl>
+                                          </p:spTgt>
+                                        </p:tgtEl>
+                                        <p:attrNameLst>
+                                          <p:attrName>style.visibility</p:attrName>
+                                        </p:attrNameLst>
+                                      </p:cBhvr>
+                                      <p:to>
+                                        <p:strVal val="visible"/>
+                                      </p:to>
+                                    </p:set>
+                                  </p:childTnLst>
+                                </p:cTn>
+                              </p:par>
+                            </p:childTnLst>
+                          </p:cTn>
+                        </p:par>
+                      </p:childTnLst>
+                    </p:cTn>
+                  </p:par>
+                  <p:par>
+                    <p:cTn id="29" fill="hold">
+                      <p:stCondLst>
+                        <p:cond delay="indefinite"/>
+                      </p:stCondLst>
+                      <p:childTnLst>
+                        <p:par>
+                          <p:cTn id="30" fill="hold">
+                            <p:stCondLst>
+                              <p:cond delay="0"/>
+                            </p:stCondLst>
+                            <p:childTnLst>
+                              <p:par>
+                                <p:cTn id="31" presetID="1" presetClass="entr" presetSubtype="0" fill="hold" grpId="0" nodeType="clickEffect">
+                                  <p:stCondLst>
+                                    <p:cond delay="0"/>
+                                  </p:stCondLst>
+                                  <p:childTnLst>
+                                    <p:set>
+                                      <p:cBhvr>
+                                        <p:cTn id="32" dur="1" fill="hold">
+                                          <p:stCondLst>
+                                            <p:cond delay="0"/>
+                                          </p:stCondLst>
+                                        </p:cTn>
+                                        <p:tgtEl>
+                                          <p:spTgt spid="3">
+                                            <p:txEl>
+                                              <p:pRg st="8" end="8"/>
+                                            </p:txEl>
+                                          </p:spTgt>
+                                        </p:tgtEl>
+                                        <p:attrNameLst>
+                                          <p:attrName>style.visibility</p:attrName>
+                                        </p:attrNameLst>
+                                      </p:cBhvr>
+                                      <p:to>
+                                        <p:strVal val="visible"/>
+                                      </p:to>
+                                    </p:set>
+                                  </p:childTnLst>
+                                </p:cTn>
+                              </p:par>
+                            </p:childTnLst>
+                          </p:cTn>
+                        </p:par>
+                      </p:childTnLst>
+                    </p:cTn>
+                  </p:par>
+                  <p:par>
+                    <p:cTn id="33" fill="hold">
+                      <p:stCondLst>
+                        <p:cond delay="indefinite"/>
+                      </p:stCondLst>
+                      <p:childTnLst>
+                        <p:par>
+                          <p:cTn id="34" fill="hold">
+                            <p:stCondLst>
+                              <p:cond delay="0"/>
+                            </p:stCondLst>
+                            <p:childTnLst>
+                              <p:par>
+                                <p:cTn id="35" presetID="1" presetClass="entr" presetSubtype="0" fill="hold" grpId="0" nodeType="clickEffect">
+                                  <p:stCondLst>
+                                    <p:cond delay="0"/>
+                                  </p:stCondLst>
+                                  <p:childTnLst>
+                                    <p:set>
+                                      <p:cBhvr>
+                                        <p:cTn id="36" dur="1" fill="hold">
+                                          <p:stCondLst>
+                                            <p:cond delay="0"/>
+                                          </p:stCondLst>
+                                        </p:cTn>
+                                        <p:tgtEl>
+                                          <p:spTgt spid="3">
+                                            <p:txEl>
+                                              <p:pRg st="9" end="9"/>
+                                            </p:txEl>
+                                          </p:spTgt>
+                                        </p:tgtEl>
+                                        <p:attrNameLst>
+                                          <p:attrName>style.visibility</p:attrName>
+                                        </p:attrNameLst>
+                                      </p:cBhvr>
+                                      <p:to>
+                                        <p:strVal val="visible"/>
+                                      </p:to>
+                                    </p:set>
+                                  </p:childTnLst>
+                                </p:cTn>
+                              </p:par>
+                            </p:childTnLst>
+                          </p:cTn>
+                        </p:par>
+                      </p:childTnLst>
+                    </p:cTn>
+                  </p:par>
+                </p:childTnLst>
+              </p:cTn>
+              <p:prevCondLst>
+                <p:cond evt="onPrev" delay="0">
+                  <p:tgtEl>
+                    <p:sldTgt/>
+                  </p:tgtEl>
+                </p:cond>
+              </p:prevCondLst>
+              <p:nextCondLst>
+                <p:cond evt="onNext" delay="0">
+                  <p:tgtEl>
+                    <p:sldTgt/>
+                  </p:tgtEl>
+                </p:cond>
+              </p:nextCondLst>
+            </p:seq>
+          </p:childTnLst>
+        </p:cTn>
+      </p:par>
+    </p:tnLst>
+    <p:bldLst>
+      <p:bldP spid="3" grpId="0" uiExpand="1" build="p"/>
+      <p:bldP spid="4" grpId="0" animBg="1"/>
+      <p:bldP spid="16" grpId="0" animBg="1"/>
+    </p:bldLst>
+  </p:timing>
 </p:sld>
 </file>
 
@@ -8322,8 +9493,8 @@
           </a:p>
         </p:txBody>
       </p:sp>
-      <mc:AlternateContent xmlns:mc="http://schemas.openxmlformats.org/markup-compatibility/2006" xmlns:a14="http://schemas.microsoft.com/office/drawing/2010/main">
-        <mc:Choice Requires="a14">
+      <mc:AlternateContent xmlns:mc="http://schemas.openxmlformats.org/markup-compatibility/2006">
+        <mc:Choice xmlns:a14="http://schemas.microsoft.com/office/drawing/2010/main" Requires="a14">
           <p:sp>
             <p:nvSpPr>
               <p:cNvPr id="3" name="Content Placeholder 2">
@@ -8801,7 +9972,15 @@
                 </a14:m>
                 <a:r>
                   <a:rPr lang="en-US" dirty="0"/>
-                  <a:t>   which leads to sample averaging.  Not appropriate for TD or approximation!</a:t>
+                  <a:t>   which leads to sample averaging.  </a:t>
+                </a:r>
+                <a:r>
+                  <a:rPr lang="en-US" b="1" dirty="0"/>
+                  <a:t>Not appropriate for TD or approximation</a:t>
+                </a:r>
+                <a:r>
+                  <a:rPr lang="en-US" dirty="0"/>
+                  <a:t>!</a:t>
                 </a:r>
               </a:p>
               <a:p>
@@ -8834,7 +10013,7 @@
                 </a14:m>
                 <a:r>
                   <a:rPr lang="en-US" dirty="0"/>
-                  <a:t> keeps learning and means a tabular estimate would approach to the mean target after </a:t>
+                  <a:t> means a tabular estimate would approach to the mean target after </a:t>
                 </a:r>
                 <a14:m>
                   <m:oMath xmlns:m="http://schemas.openxmlformats.org/officeDocument/2006/math">
@@ -8848,118 +10027,7 @@
                 </a14:m>
                 <a:r>
                   <a:rPr lang="en-US" dirty="0"/>
-                  <a:t> experiences.</a:t>
-                </a:r>
-              </a:p>
-              <a:p>
-                <a:pPr lvl="1"/>
-                <a:r>
-                  <a:rPr lang="en-US" dirty="0"/>
-                  <a:t>For SGD </a:t>
-                </a:r>
-                <a14:m>
-                  <m:oMath xmlns:m="http://schemas.openxmlformats.org/officeDocument/2006/math">
-                    <m:r>
-                      <a:rPr lang="en-US" i="1" smtClean="0">
-                        <a:latin typeface="Cambria Math" panose="02040503050406030204" pitchFamily="18" charset="0"/>
-                      </a:rPr>
-                      <m:t>𝛼</m:t>
-                    </m:r>
-                    <m:r>
-                      <a:rPr lang="en-US" b="0" i="0" smtClean="0">
-                        <a:latin typeface="Cambria Math" panose="02040503050406030204" pitchFamily="18" charset="0"/>
-                      </a:rPr>
-                      <m:t>=</m:t>
-                    </m:r>
-                    <m:f>
-                      <m:fPr>
-                        <m:ctrlPr>
-                          <a:rPr lang="en-US" i="1">
-                            <a:latin typeface="Cambria Math" panose="02040503050406030204" pitchFamily="18" charset="0"/>
-                          </a:rPr>
-                        </m:ctrlPr>
-                      </m:fPr>
-                      <m:num>
-                        <m:r>
-                          <a:rPr lang="en-US" i="1">
-                            <a:latin typeface="Cambria Math" panose="02040503050406030204" pitchFamily="18" charset="0"/>
-                          </a:rPr>
-                          <m:t>1</m:t>
-                        </m:r>
-                      </m:num>
-                      <m:den>
-                        <m:r>
-                          <a:rPr lang="en-US" i="1">
-                            <a:latin typeface="Cambria Math" panose="02040503050406030204" pitchFamily="18" charset="0"/>
-                          </a:rPr>
-                          <m:t>𝜏</m:t>
-                        </m:r>
-                        <m:sSup>
-                          <m:sSupPr>
-                            <m:ctrlPr>
-                              <a:rPr lang="en-US" b="0" i="1" smtClean="0">
-                                <a:latin typeface="Cambria Math" panose="02040503050406030204" pitchFamily="18" charset="0"/>
-                              </a:rPr>
-                            </m:ctrlPr>
-                          </m:sSupPr>
-                          <m:e>
-                            <m:d>
-                              <m:dPr>
-                                <m:begChr m:val="‖"/>
-                                <m:endChr m:val="‖"/>
-                                <m:ctrlPr>
-                                  <a:rPr lang="en-US" i="1" smtClean="0">
-                                    <a:latin typeface="Cambria Math" panose="02040503050406030204" pitchFamily="18" charset="0"/>
-                                  </a:rPr>
-                                </m:ctrlPr>
-                              </m:dPr>
-                              <m:e>
-                                <m:r>
-                                  <a:rPr lang="en-US" b="1" i="1" smtClean="0">
-                                    <a:latin typeface="Cambria Math" panose="02040503050406030204" pitchFamily="18" charset="0"/>
-                                  </a:rPr>
-                                  <m:t>𝒙</m:t>
-                                </m:r>
-                              </m:e>
-                            </m:d>
-                          </m:e>
-                          <m:sup>
-                            <m:r>
-                              <a:rPr lang="en-US" b="0" i="1" smtClean="0">
-                                <a:latin typeface="Cambria Math" panose="02040503050406030204" pitchFamily="18" charset="0"/>
-                              </a:rPr>
-                              <m:t>2</m:t>
-                            </m:r>
-                          </m:sup>
-                        </m:sSup>
-                      </m:den>
-                    </m:f>
-                    <m:r>
-                      <a:rPr lang="en-US" b="0" i="0" smtClean="0">
-                        <a:latin typeface="Cambria Math" panose="02040503050406030204" pitchFamily="18" charset="0"/>
-                        <a:ea typeface="Cambria Math" panose="02040503050406030204" pitchFamily="18" charset="0"/>
-                      </a:rPr>
-                      <m:t> </m:t>
-                    </m:r>
-                  </m:oMath>
-                </a14:m>
-                <a:r>
-                  <a:rPr lang="en-US" dirty="0"/>
-                  <a:t>where </a:t>
-                </a:r>
-                <a14:m>
-                  <m:oMath xmlns:m="http://schemas.openxmlformats.org/officeDocument/2006/math">
-                    <m:r>
-                      <a:rPr lang="en-US" b="1" i="1">
-                        <a:latin typeface="Cambria Math" panose="02040503050406030204" pitchFamily="18" charset="0"/>
-                      </a:rPr>
-                      <m:t>𝒙</m:t>
-                    </m:r>
-                  </m:oMath>
-                </a14:m>
-                <a:r>
-                  <a:rPr lang="en-US" dirty="0"/>
-                  <a:t> is a random feature vector chosen from the input vector distribution.</a:t>
+                  <a:t> experiences + keeps learning.</a:t>
                 </a:r>
               </a:p>
               <a:p>
@@ -9056,7 +10124,7 @@
             </p:txBody>
           </p:sp>
         </mc:Choice>
-        <mc:Fallback xmlns="">
+        <mc:Fallback>
           <p:sp>
             <p:nvSpPr>
               <p:cNvPr id="3" name="Content Placeholder 2">
@@ -9102,10 +10170,10 @@
       </mc:AlternateContent>
       <p:sp>
         <p:nvSpPr>
-          <p:cNvPr id="4" name="Speech Bubble: Rectangle with Corners Rounded 3">
+          <p:cNvPr id="5" name="Speech Bubble: Rectangle with Corners Rounded 4">
             <a:extLst>
               <a:ext uri="{FF2B5EF4-FFF2-40B4-BE49-F238E27FC236}">
-                <a16:creationId xmlns:a16="http://schemas.microsoft.com/office/drawing/2014/main" id="{C2741C91-B039-5B18-326F-F78C9583198F}"/>
+                <a16:creationId xmlns:a16="http://schemas.microsoft.com/office/drawing/2014/main" id="{CB080493-DE1F-1886-C258-BECEA4EBB212}"/>
               </a:ext>
             </a:extLst>
           </p:cNvPr>
@@ -9114,13 +10182,13 @@
         </p:nvSpPr>
         <p:spPr>
           <a:xfrm>
-            <a:off x="4593562" y="4867519"/>
-            <a:ext cx="2570813" cy="292307"/>
+            <a:off x="6149130" y="4492304"/>
+            <a:ext cx="2940341" cy="536896"/>
           </a:xfrm>
           <a:prstGeom prst="wedgeRoundRectCallout">
             <a:avLst>
-              <a:gd name="adj1" fmla="val -110029"/>
-              <a:gd name="adj2" fmla="val -100079"/>
+              <a:gd name="adj1" fmla="val -159257"/>
+              <a:gd name="adj2" fmla="val -90947"/>
               <a:gd name="adj3" fmla="val 16667"/>
             </a:avLst>
           </a:prstGeom>
@@ -9147,69 +10215,8 @@
           <a:p>
             <a:pPr algn="ctr"/>
             <a:r>
-              <a:rPr lang="en-US" sz="1600" dirty="0"/>
-              <a:t>To normalize the features</a:t>
-            </a:r>
-          </a:p>
-        </p:txBody>
-      </p:sp>
-      <p:sp>
-        <p:nvSpPr>
-          <p:cNvPr id="5" name="Speech Bubble: Rectangle with Corners Rounded 4">
-            <a:extLst>
-              <a:ext uri="{FF2B5EF4-FFF2-40B4-BE49-F238E27FC236}">
-                <a16:creationId xmlns:a16="http://schemas.microsoft.com/office/drawing/2014/main" id="{CB080493-DE1F-1886-C258-BECEA4EBB212}"/>
-              </a:ext>
-            </a:extLst>
-          </p:cNvPr>
-          <p:cNvSpPr/>
-          <p:nvPr/>
-        </p:nvSpPr>
-        <p:spPr>
-          <a:xfrm>
-            <a:off x="8874177" y="2567065"/>
-            <a:ext cx="2315980" cy="861935"/>
-          </a:xfrm>
-          <a:prstGeom prst="wedgeRoundRectCallout">
-            <a:avLst>
-              <a:gd name="adj1" fmla="val -65493"/>
-              <a:gd name="adj2" fmla="val 88032"/>
-              <a:gd name="adj3" fmla="val 16667"/>
-            </a:avLst>
-          </a:prstGeom>
-        </p:spPr>
-        <p:style>
-          <a:lnRef idx="2">
-            <a:schemeClr val="accent1">
-              <a:shade val="15000"/>
-            </a:schemeClr>
-          </a:lnRef>
-          <a:fillRef idx="1">
-            <a:schemeClr val="accent1"/>
-          </a:fillRef>
-          <a:effectRef idx="0">
-            <a:schemeClr val="accent1"/>
-          </a:effectRef>
-          <a:fontRef idx="minor">
-            <a:schemeClr val="lt1"/>
-          </a:fontRef>
-        </p:style>
-        <p:txBody>
-          <a:bodyPr rtlCol="0" anchor="ctr"/>
-          <a:lstStyle/>
-          <a:p>
-            <a:pPr algn="ctr"/>
-            <a:r>
-              <a:rPr lang="en-US" dirty="0"/>
-              <a:t>Only this satisfies the </a:t>
-            </a:r>
-            <a:r>
-              <a:rPr lang="en-US" dirty="0" err="1"/>
-              <a:t>stoch</a:t>
-            </a:r>
-            <a:r>
-              <a:rPr lang="en-US" dirty="0"/>
-              <a:t>. approx. criterion.</a:t>
+              <a:rPr lang="en-US" sz="1400" dirty="0"/>
+              <a:t>A constant does not satisfy the stochastic approx. criterion.</a:t>
             </a:r>
           </a:p>
         </p:txBody>
@@ -9337,37 +10344,6 @@
                                   </p:childTnLst>
                                 </p:cTn>
                               </p:par>
-                              <p:par>
-                                <p:cTn id="11" presetID="1" presetClass="entr" presetSubtype="0" fill="hold" nodeType="withEffect">
-                                  <p:stCondLst>
-                                    <p:cond delay="0"/>
-                                  </p:stCondLst>
-                                  <p:childTnLst>
-                                    <p:set>
-                                      <p:cBhvr>
-                                        <p:cTn id="12" dur="1" fill="hold">
-                                          <p:stCondLst>
-                                            <p:cond delay="0"/>
-                                          </p:stCondLst>
-                                        </p:cTn>
-                                        <p:tgtEl>
-                                          <p:spTgt spid="3">
-                                            <p:txEl>
-                                              <p:pRg st="7" end="7"/>
-                                            </p:txEl>
-                                          </p:spTgt>
-                                        </p:tgtEl>
-                                        <p:attrNameLst>
-                                          <p:attrName>style.visibility</p:attrName>
-                                        </p:attrNameLst>
-                                      </p:cBhvr>
-                                      <p:to>
-                                        <p:strVal val="visible"/>
-                                      </p:to>
-                                    </p:set>
-                                  </p:childTnLst>
-                                </p:cTn>
-                              </p:par>
                             </p:childTnLst>
                           </p:cTn>
                         </p:par>
@@ -9375,26 +10351,26 @@
                     </p:cTn>
                   </p:par>
                   <p:par>
-                    <p:cTn id="13" fill="hold">
+                    <p:cTn id="11" fill="hold">
                       <p:stCondLst>
                         <p:cond delay="indefinite"/>
                       </p:stCondLst>
                       <p:childTnLst>
                         <p:par>
-                          <p:cTn id="14" fill="hold">
+                          <p:cTn id="12" fill="hold">
                             <p:stCondLst>
                               <p:cond delay="0"/>
                             </p:stCondLst>
                             <p:childTnLst>
                               <p:par>
-                                <p:cTn id="15" presetID="1" presetClass="entr" presetSubtype="0" fill="hold" grpId="0" nodeType="clickEffect">
+                                <p:cTn id="13" presetID="1" presetClass="entr" presetSubtype="0" fill="hold" grpId="0" nodeType="clickEffect">
                                   <p:stCondLst>
                                     <p:cond delay="0"/>
                                   </p:stCondLst>
                                   <p:childTnLst>
                                     <p:set>
                                       <p:cBhvr>
-                                        <p:cTn id="16" dur="1" fill="hold">
+                                        <p:cTn id="14" dur="1" fill="hold">
                                           <p:stCondLst>
                                             <p:cond delay="0"/>
                                           </p:stCondLst>
@@ -9420,19 +10396,50 @@
                     </p:cTn>
                   </p:par>
                   <p:par>
-                    <p:cTn id="17" fill="hold">
+                    <p:cTn id="15" fill="hold">
                       <p:stCondLst>
                         <p:cond delay="indefinite"/>
                       </p:stCondLst>
                       <p:childTnLst>
                         <p:par>
-                          <p:cTn id="18" fill="hold">
+                          <p:cTn id="16" fill="hold">
                             <p:stCondLst>
                               <p:cond delay="0"/>
                             </p:stCondLst>
                             <p:childTnLst>
                               <p:par>
-                                <p:cTn id="19" presetID="1" presetClass="entr" presetSubtype="0" fill="hold" nodeType="clickEffect">
+                                <p:cTn id="17" presetID="1" presetClass="entr" presetSubtype="0" fill="hold" nodeType="clickEffect">
+                                  <p:stCondLst>
+                                    <p:cond delay="0"/>
+                                  </p:stCondLst>
+                                  <p:childTnLst>
+                                    <p:set>
+                                      <p:cBhvr>
+                                        <p:cTn id="18" dur="1" fill="hold">
+                                          <p:stCondLst>
+                                            <p:cond delay="0"/>
+                                          </p:stCondLst>
+                                        </p:cTn>
+                                        <p:tgtEl>
+                                          <p:spTgt spid="3">
+                                            <p:txEl>
+                                              <p:pRg st="8" end="8"/>
+                                            </p:txEl>
+                                          </p:spTgt>
+                                        </p:tgtEl>
+                                        <p:attrNameLst>
+                                          <p:attrName>style.visibility</p:attrName>
+                                        </p:attrNameLst>
+                                      </p:cBhvr>
+                                      <p:to>
+                                        <p:strVal val="visible"/>
+                                      </p:to>
+                                    </p:set>
+                                  </p:childTnLst>
+                                </p:cTn>
+                              </p:par>
+                              <p:par>
+                                <p:cTn id="19" presetID="1" presetClass="entr" presetSubtype="0" fill="hold" nodeType="withEffect">
                                   <p:stCondLst>
                                     <p:cond delay="0"/>
                                   </p:stCondLst>
@@ -9541,37 +10548,6 @@
                                           <p:spTgt spid="3">
                                             <p:txEl>
                                               <p:pRg st="12" end="12"/>
-                                            </p:txEl>
-                                          </p:spTgt>
-                                        </p:tgtEl>
-                                        <p:attrNameLst>
-                                          <p:attrName>style.visibility</p:attrName>
-                                        </p:attrNameLst>
-                                      </p:cBhvr>
-                                      <p:to>
-                                        <p:strVal val="visible"/>
-                                      </p:to>
-                                    </p:set>
-                                  </p:childTnLst>
-                                </p:cTn>
-                              </p:par>
-                              <p:par>
-                                <p:cTn id="27" presetID="1" presetClass="entr" presetSubtype="0" fill="hold" nodeType="withEffect">
-                                  <p:stCondLst>
-                                    <p:cond delay="0"/>
-                                  </p:stCondLst>
-                                  <p:childTnLst>
-                                    <p:set>
-                                      <p:cBhvr>
-                                        <p:cTn id="28" dur="1" fill="hold">
-                                          <p:stCondLst>
-                                            <p:cond delay="0"/>
-                                          </p:stCondLst>
-                                        </p:cTn>
-                                        <p:tgtEl>
-                                          <p:spTgt spid="3">
-                                            <p:txEl>
-                                              <p:pRg st="13" end="13"/>
                                             </p:txEl>
                                           </p:spTgt>
                                         </p:tgtEl>
@@ -13326,8 +14302,8 @@
           </a:p>
         </p:txBody>
       </p:sp>
-      <mc:AlternateContent xmlns:mc="http://schemas.openxmlformats.org/markup-compatibility/2006" xmlns:a14="http://schemas.microsoft.com/office/drawing/2010/main">
-        <mc:Choice Requires="a14">
+      <mc:AlternateContent xmlns:mc="http://schemas.openxmlformats.org/markup-compatibility/2006">
+        <mc:Choice xmlns:a14="http://schemas.microsoft.com/office/drawing/2010/main" Requires="a14">
           <p:sp>
             <p:nvSpPr>
               <p:cNvPr id="3" name="Content Placeholder 2">
@@ -13687,8 +14663,8 @@
               </a:p>
               <a:p>
                 <a:r>
-                  <a:rPr lang="en-US" b="1" dirty="0"/>
-                  <a:t>Gradient</a:t>
+                  <a:rPr lang="en-US" b="1"/>
+                  <a:t>SGD gradient</a:t>
                 </a:r>
                 <a:r>
                   <a:rPr lang="en-US" dirty="0"/>
@@ -13759,29 +14735,549 @@
                       </a:rPr>
                       <m:t>=</m:t>
                     </m:r>
+                    <m:sSup>
+                      <m:sSupPr>
+                        <m:ctrlPr>
+                          <a:rPr lang="en-US" i="1">
+                            <a:latin typeface="Cambria Math" panose="02040503050406030204" pitchFamily="18" charset="0"/>
+                            <a:ea typeface="Cambria Math" panose="02040503050406030204" pitchFamily="18" charset="0"/>
+                          </a:rPr>
+                        </m:ctrlPr>
+                      </m:sSupPr>
+                      <m:e>
+                        <m:d>
+                          <m:dPr>
+                            <m:ctrlPr>
+                              <a:rPr lang="en-US" i="1">
+                                <a:latin typeface="Cambria Math" panose="02040503050406030204" pitchFamily="18" charset="0"/>
+                                <a:ea typeface="Cambria Math" panose="02040503050406030204" pitchFamily="18" charset="0"/>
+                              </a:rPr>
+                            </m:ctrlPr>
+                          </m:dPr>
+                          <m:e>
+                            <m:f>
+                              <m:fPr>
+                                <m:ctrlPr>
+                                  <a:rPr lang="en-US" i="1">
+                                    <a:latin typeface="Cambria Math" panose="02040503050406030204" pitchFamily="18" charset="0"/>
+                                    <a:ea typeface="Cambria Math" panose="02040503050406030204" pitchFamily="18" charset="0"/>
+                                  </a:rPr>
+                                </m:ctrlPr>
+                              </m:fPr>
+                              <m:num>
+                                <m:r>
+                                  <a:rPr lang="en-US" i="1" smtClean="0">
+                                    <a:latin typeface="Cambria Math" panose="02040503050406030204" pitchFamily="18" charset="0"/>
+                                    <a:ea typeface="Cambria Math" panose="02040503050406030204" pitchFamily="18" charset="0"/>
+                                  </a:rPr>
+                                  <m:t>𝜕</m:t>
+                                </m:r>
+                                <m:acc>
+                                  <m:accPr>
+                                    <m:chr m:val="̂"/>
+                                    <m:ctrlPr>
+                                      <a:rPr lang="en-US" i="1">
+                                        <a:latin typeface="Cambria Math" panose="02040503050406030204" pitchFamily="18" charset="0"/>
+                                      </a:rPr>
+                                    </m:ctrlPr>
+                                  </m:accPr>
+                                  <m:e>
+                                    <m:r>
+                                      <a:rPr lang="en-US" i="1">
+                                        <a:latin typeface="Cambria Math" panose="02040503050406030204" pitchFamily="18" charset="0"/>
+                                      </a:rPr>
+                                      <m:t>𝑣</m:t>
+                                    </m:r>
+                                  </m:e>
+                                </m:acc>
+                                <m:d>
+                                  <m:dPr>
+                                    <m:ctrlPr>
+                                      <a:rPr lang="en-US" i="1">
+                                        <a:latin typeface="Cambria Math" panose="02040503050406030204" pitchFamily="18" charset="0"/>
+                                      </a:rPr>
+                                    </m:ctrlPr>
+                                  </m:dPr>
+                                  <m:e>
+                                    <m:r>
+                                      <a:rPr lang="en-US" i="1">
+                                        <a:latin typeface="Cambria Math" panose="02040503050406030204" pitchFamily="18" charset="0"/>
+                                      </a:rPr>
+                                      <m:t>𝑠</m:t>
+                                    </m:r>
+                                    <m:r>
+                                      <a:rPr lang="en-US" i="1">
+                                        <a:latin typeface="Cambria Math" panose="02040503050406030204" pitchFamily="18" charset="0"/>
+                                      </a:rPr>
+                                      <m:t>,</m:t>
+                                    </m:r>
+                                    <m:r>
+                                      <a:rPr lang="en-US" b="1" i="1">
+                                        <a:latin typeface="Cambria Math" panose="02040503050406030204" pitchFamily="18" charset="0"/>
+                                      </a:rPr>
+                                      <m:t>𝒘</m:t>
+                                    </m:r>
+                                  </m:e>
+                                </m:d>
+                              </m:num>
+                              <m:den>
+                                <m:r>
+                                  <a:rPr lang="en-US" i="1">
+                                    <a:latin typeface="Cambria Math" panose="02040503050406030204" pitchFamily="18" charset="0"/>
+                                    <a:ea typeface="Cambria Math" panose="02040503050406030204" pitchFamily="18" charset="0"/>
+                                  </a:rPr>
+                                  <m:t>𝜕</m:t>
+                                </m:r>
+                                <m:sSub>
+                                  <m:sSubPr>
+                                    <m:ctrlPr>
+                                      <a:rPr lang="en-US" i="1">
+                                        <a:latin typeface="Cambria Math" panose="02040503050406030204" pitchFamily="18" charset="0"/>
+                                        <a:ea typeface="Cambria Math" panose="02040503050406030204" pitchFamily="18" charset="0"/>
+                                      </a:rPr>
+                                    </m:ctrlPr>
+                                  </m:sSubPr>
+                                  <m:e>
+                                    <m:r>
+                                      <a:rPr lang="en-US" i="1">
+                                        <a:latin typeface="Cambria Math" panose="02040503050406030204" pitchFamily="18" charset="0"/>
+                                        <a:ea typeface="Cambria Math" panose="02040503050406030204" pitchFamily="18" charset="0"/>
+                                      </a:rPr>
+                                      <m:t>𝑤</m:t>
+                                    </m:r>
+                                  </m:e>
+                                  <m:sub>
+                                    <m:r>
+                                      <a:rPr lang="en-US" i="1">
+                                        <a:latin typeface="Cambria Math" panose="02040503050406030204" pitchFamily="18" charset="0"/>
+                                        <a:ea typeface="Cambria Math" panose="02040503050406030204" pitchFamily="18" charset="0"/>
+                                      </a:rPr>
+                                      <m:t>1</m:t>
+                                    </m:r>
+                                  </m:sub>
+                                </m:sSub>
+                              </m:den>
+                            </m:f>
+                            <m:r>
+                              <a:rPr lang="en-US" i="1">
+                                <a:latin typeface="Cambria Math" panose="02040503050406030204" pitchFamily="18" charset="0"/>
+                                <a:ea typeface="Cambria Math" panose="02040503050406030204" pitchFamily="18" charset="0"/>
+                              </a:rPr>
+                              <m:t>,</m:t>
+                            </m:r>
+                            <m:f>
+                              <m:fPr>
+                                <m:ctrlPr>
+                                  <a:rPr lang="en-US" i="1">
+                                    <a:latin typeface="Cambria Math" panose="02040503050406030204" pitchFamily="18" charset="0"/>
+                                    <a:ea typeface="Cambria Math" panose="02040503050406030204" pitchFamily="18" charset="0"/>
+                                  </a:rPr>
+                                </m:ctrlPr>
+                              </m:fPr>
+                              <m:num>
+                                <m:r>
+                                  <a:rPr lang="en-US" i="1">
+                                    <a:latin typeface="Cambria Math" panose="02040503050406030204" pitchFamily="18" charset="0"/>
+                                    <a:ea typeface="Cambria Math" panose="02040503050406030204" pitchFamily="18" charset="0"/>
+                                  </a:rPr>
+                                  <m:t>𝜕</m:t>
+                                </m:r>
+                                <m:acc>
+                                  <m:accPr>
+                                    <m:chr m:val="̂"/>
+                                    <m:ctrlPr>
+                                      <a:rPr lang="en-US" i="1">
+                                        <a:latin typeface="Cambria Math" panose="02040503050406030204" pitchFamily="18" charset="0"/>
+                                      </a:rPr>
+                                    </m:ctrlPr>
+                                  </m:accPr>
+                                  <m:e>
+                                    <m:r>
+                                      <a:rPr lang="en-US" i="1">
+                                        <a:latin typeface="Cambria Math" panose="02040503050406030204" pitchFamily="18" charset="0"/>
+                                      </a:rPr>
+                                      <m:t>𝑣</m:t>
+                                    </m:r>
+                                  </m:e>
+                                </m:acc>
+                                <m:d>
+                                  <m:dPr>
+                                    <m:ctrlPr>
+                                      <a:rPr lang="en-US" i="1">
+                                        <a:latin typeface="Cambria Math" panose="02040503050406030204" pitchFamily="18" charset="0"/>
+                                      </a:rPr>
+                                    </m:ctrlPr>
+                                  </m:dPr>
+                                  <m:e>
+                                    <m:r>
+                                      <a:rPr lang="en-US" i="1">
+                                        <a:latin typeface="Cambria Math" panose="02040503050406030204" pitchFamily="18" charset="0"/>
+                                      </a:rPr>
+                                      <m:t>𝑠</m:t>
+                                    </m:r>
+                                    <m:r>
+                                      <a:rPr lang="en-US" i="1">
+                                        <a:latin typeface="Cambria Math" panose="02040503050406030204" pitchFamily="18" charset="0"/>
+                                      </a:rPr>
+                                      <m:t>,</m:t>
+                                    </m:r>
+                                    <m:r>
+                                      <a:rPr lang="en-US" b="1" i="1">
+                                        <a:latin typeface="Cambria Math" panose="02040503050406030204" pitchFamily="18" charset="0"/>
+                                      </a:rPr>
+                                      <m:t>𝒘</m:t>
+                                    </m:r>
+                                  </m:e>
+                                </m:d>
+                              </m:num>
+                              <m:den>
+                                <m:r>
+                                  <a:rPr lang="en-US" i="1">
+                                    <a:latin typeface="Cambria Math" panose="02040503050406030204" pitchFamily="18" charset="0"/>
+                                    <a:ea typeface="Cambria Math" panose="02040503050406030204" pitchFamily="18" charset="0"/>
+                                  </a:rPr>
+                                  <m:t>𝜕</m:t>
+                                </m:r>
+                                <m:sSub>
+                                  <m:sSubPr>
+                                    <m:ctrlPr>
+                                      <a:rPr lang="en-US" i="1">
+                                        <a:latin typeface="Cambria Math" panose="02040503050406030204" pitchFamily="18" charset="0"/>
+                                        <a:ea typeface="Cambria Math" panose="02040503050406030204" pitchFamily="18" charset="0"/>
+                                      </a:rPr>
+                                    </m:ctrlPr>
+                                  </m:sSubPr>
+                                  <m:e>
+                                    <m:r>
+                                      <a:rPr lang="en-US" i="1">
+                                        <a:latin typeface="Cambria Math" panose="02040503050406030204" pitchFamily="18" charset="0"/>
+                                        <a:ea typeface="Cambria Math" panose="02040503050406030204" pitchFamily="18" charset="0"/>
+                                      </a:rPr>
+                                      <m:t>𝑤</m:t>
+                                    </m:r>
+                                  </m:e>
+                                  <m:sub>
+                                    <m:r>
+                                      <a:rPr lang="en-US" i="1">
+                                        <a:latin typeface="Cambria Math" panose="02040503050406030204" pitchFamily="18" charset="0"/>
+                                        <a:ea typeface="Cambria Math" panose="02040503050406030204" pitchFamily="18" charset="0"/>
+                                      </a:rPr>
+                                      <m:t>2</m:t>
+                                    </m:r>
+                                  </m:sub>
+                                </m:sSub>
+                              </m:den>
+                            </m:f>
+                            <m:r>
+                              <a:rPr lang="en-US" i="1">
+                                <a:latin typeface="Cambria Math" panose="02040503050406030204" pitchFamily="18" charset="0"/>
+                                <a:ea typeface="Cambria Math" panose="02040503050406030204" pitchFamily="18" charset="0"/>
+                              </a:rPr>
+                              <m:t>,…,</m:t>
+                            </m:r>
+                            <m:f>
+                              <m:fPr>
+                                <m:ctrlPr>
+                                  <a:rPr lang="en-US" i="1">
+                                    <a:latin typeface="Cambria Math" panose="02040503050406030204" pitchFamily="18" charset="0"/>
+                                    <a:ea typeface="Cambria Math" panose="02040503050406030204" pitchFamily="18" charset="0"/>
+                                  </a:rPr>
+                                </m:ctrlPr>
+                              </m:fPr>
+                              <m:num>
+                                <m:r>
+                                  <a:rPr lang="en-US" i="1">
+                                    <a:latin typeface="Cambria Math" panose="02040503050406030204" pitchFamily="18" charset="0"/>
+                                    <a:ea typeface="Cambria Math" panose="02040503050406030204" pitchFamily="18" charset="0"/>
+                                  </a:rPr>
+                                  <m:t>𝜕</m:t>
+                                </m:r>
+                                <m:acc>
+                                  <m:accPr>
+                                    <m:chr m:val="̂"/>
+                                    <m:ctrlPr>
+                                      <a:rPr lang="en-US" i="1">
+                                        <a:latin typeface="Cambria Math" panose="02040503050406030204" pitchFamily="18" charset="0"/>
+                                      </a:rPr>
+                                    </m:ctrlPr>
+                                  </m:accPr>
+                                  <m:e>
+                                    <m:r>
+                                      <a:rPr lang="en-US" i="1">
+                                        <a:latin typeface="Cambria Math" panose="02040503050406030204" pitchFamily="18" charset="0"/>
+                                      </a:rPr>
+                                      <m:t>𝑣</m:t>
+                                    </m:r>
+                                  </m:e>
+                                </m:acc>
+                                <m:d>
+                                  <m:dPr>
+                                    <m:ctrlPr>
+                                      <a:rPr lang="en-US" i="1">
+                                        <a:latin typeface="Cambria Math" panose="02040503050406030204" pitchFamily="18" charset="0"/>
+                                      </a:rPr>
+                                    </m:ctrlPr>
+                                  </m:dPr>
+                                  <m:e>
+                                    <m:r>
+                                      <a:rPr lang="en-US" i="1">
+                                        <a:latin typeface="Cambria Math" panose="02040503050406030204" pitchFamily="18" charset="0"/>
+                                      </a:rPr>
+                                      <m:t>𝑠</m:t>
+                                    </m:r>
+                                    <m:r>
+                                      <a:rPr lang="en-US" i="1">
+                                        <a:latin typeface="Cambria Math" panose="02040503050406030204" pitchFamily="18" charset="0"/>
+                                      </a:rPr>
+                                      <m:t>,</m:t>
+                                    </m:r>
+                                    <m:r>
+                                      <a:rPr lang="en-US" b="1" i="1">
+                                        <a:latin typeface="Cambria Math" panose="02040503050406030204" pitchFamily="18" charset="0"/>
+                                      </a:rPr>
+                                      <m:t>𝒘</m:t>
+                                    </m:r>
+                                  </m:e>
+                                </m:d>
+                              </m:num>
+                              <m:den>
+                                <m:r>
+                                  <a:rPr lang="en-US" i="1">
+                                    <a:latin typeface="Cambria Math" panose="02040503050406030204" pitchFamily="18" charset="0"/>
+                                    <a:ea typeface="Cambria Math" panose="02040503050406030204" pitchFamily="18" charset="0"/>
+                                  </a:rPr>
+                                  <m:t>𝜕</m:t>
+                                </m:r>
+                                <m:sSub>
+                                  <m:sSubPr>
+                                    <m:ctrlPr>
+                                      <a:rPr lang="en-US" i="1">
+                                        <a:latin typeface="Cambria Math" panose="02040503050406030204" pitchFamily="18" charset="0"/>
+                                        <a:ea typeface="Cambria Math" panose="02040503050406030204" pitchFamily="18" charset="0"/>
+                                      </a:rPr>
+                                    </m:ctrlPr>
+                                  </m:sSubPr>
+                                  <m:e>
+                                    <m:r>
+                                      <a:rPr lang="en-US" i="1">
+                                        <a:latin typeface="Cambria Math" panose="02040503050406030204" pitchFamily="18" charset="0"/>
+                                        <a:ea typeface="Cambria Math" panose="02040503050406030204" pitchFamily="18" charset="0"/>
+                                      </a:rPr>
+                                      <m:t>𝑤</m:t>
+                                    </m:r>
+                                  </m:e>
+                                  <m:sub>
+                                    <m:r>
+                                      <a:rPr lang="en-US" i="1">
+                                        <a:latin typeface="Cambria Math" panose="02040503050406030204" pitchFamily="18" charset="0"/>
+                                        <a:ea typeface="Cambria Math" panose="02040503050406030204" pitchFamily="18" charset="0"/>
+                                      </a:rPr>
+                                      <m:t>𝑑</m:t>
+                                    </m:r>
+                                  </m:sub>
+                                </m:sSub>
+                              </m:den>
+                            </m:f>
+                          </m:e>
+                        </m:d>
+                      </m:e>
+                      <m:sup>
+                        <m:r>
+                          <a:rPr lang="en-US" i="1">
+                            <a:latin typeface="Cambria Math" panose="02040503050406030204" pitchFamily="18" charset="0"/>
+                            <a:ea typeface="Cambria Math" panose="02040503050406030204" pitchFamily="18" charset="0"/>
+                          </a:rPr>
+                          <m:t>⊤</m:t>
+                        </m:r>
+                      </m:sup>
+                    </m:sSup>
+                    <m:r>
+                      <a:rPr lang="en-US" b="0" i="1" smtClean="0">
+                        <a:latin typeface="Cambria Math" panose="02040503050406030204" pitchFamily="18" charset="0"/>
+                        <a:ea typeface="Cambria Math" panose="02040503050406030204" pitchFamily="18" charset="0"/>
+                      </a:rPr>
+                      <m:t>=</m:t>
+                    </m:r>
+                    <m:sSup>
+                      <m:sSupPr>
+                        <m:ctrlPr>
+                          <a:rPr lang="en-US" b="0" i="1" smtClean="0">
+                            <a:latin typeface="Cambria Math" panose="02040503050406030204" pitchFamily="18" charset="0"/>
+                            <a:ea typeface="Cambria Math" panose="02040503050406030204" pitchFamily="18" charset="0"/>
+                          </a:rPr>
+                        </m:ctrlPr>
+                      </m:sSupPr>
+                      <m:e>
+                        <m:d>
+                          <m:dPr>
+                            <m:ctrlPr>
+                              <a:rPr lang="en-US" b="0" i="1" smtClean="0">
+                                <a:latin typeface="Cambria Math" panose="02040503050406030204" pitchFamily="18" charset="0"/>
+                                <a:ea typeface="Cambria Math" panose="02040503050406030204" pitchFamily="18" charset="0"/>
+                              </a:rPr>
+                            </m:ctrlPr>
+                          </m:dPr>
+                          <m:e>
+                            <m:sSub>
+                              <m:sSubPr>
+                                <m:ctrlPr>
+                                  <a:rPr lang="en-US" b="0" i="1" smtClean="0">
+                                    <a:latin typeface="Cambria Math" panose="02040503050406030204" pitchFamily="18" charset="0"/>
+                                    <a:ea typeface="Cambria Math" panose="02040503050406030204" pitchFamily="18" charset="0"/>
+                                  </a:rPr>
+                                </m:ctrlPr>
+                              </m:sSubPr>
+                              <m:e>
+                                <m:r>
+                                  <a:rPr lang="en-US" b="0" i="1" smtClean="0">
+                                    <a:latin typeface="Cambria Math" panose="02040503050406030204" pitchFamily="18" charset="0"/>
+                                    <a:ea typeface="Cambria Math" panose="02040503050406030204" pitchFamily="18" charset="0"/>
+                                  </a:rPr>
+                                  <m:t>𝑥</m:t>
+                                </m:r>
+                              </m:e>
+                              <m:sub>
+                                <m:r>
+                                  <a:rPr lang="en-US" b="0" i="1" smtClean="0">
+                                    <a:latin typeface="Cambria Math" panose="02040503050406030204" pitchFamily="18" charset="0"/>
+                                    <a:ea typeface="Cambria Math" panose="02040503050406030204" pitchFamily="18" charset="0"/>
+                                  </a:rPr>
+                                  <m:t>1</m:t>
+                                </m:r>
+                              </m:sub>
+                            </m:sSub>
+                            <m:r>
+                              <a:rPr lang="en-US" b="0" i="1" smtClean="0">
+                                <a:latin typeface="Cambria Math" panose="02040503050406030204" pitchFamily="18" charset="0"/>
+                                <a:ea typeface="Cambria Math" panose="02040503050406030204" pitchFamily="18" charset="0"/>
+                              </a:rPr>
+                              <m:t>, </m:t>
+                            </m:r>
+                            <m:sSub>
+                              <m:sSubPr>
+                                <m:ctrlPr>
+                                  <a:rPr lang="en-US" b="0" i="1" smtClean="0">
+                                    <a:latin typeface="Cambria Math" panose="02040503050406030204" pitchFamily="18" charset="0"/>
+                                    <a:ea typeface="Cambria Math" panose="02040503050406030204" pitchFamily="18" charset="0"/>
+                                  </a:rPr>
+                                </m:ctrlPr>
+                              </m:sSubPr>
+                              <m:e>
+                                <m:r>
+                                  <a:rPr lang="en-US" b="0" i="1" smtClean="0">
+                                    <a:latin typeface="Cambria Math" panose="02040503050406030204" pitchFamily="18" charset="0"/>
+                                    <a:ea typeface="Cambria Math" panose="02040503050406030204" pitchFamily="18" charset="0"/>
+                                  </a:rPr>
+                                  <m:t>𝑥</m:t>
+                                </m:r>
+                              </m:e>
+                              <m:sub>
+                                <m:r>
+                                  <a:rPr lang="en-US" b="0" i="1" smtClean="0">
+                                    <a:latin typeface="Cambria Math" panose="02040503050406030204" pitchFamily="18" charset="0"/>
+                                    <a:ea typeface="Cambria Math" panose="02040503050406030204" pitchFamily="18" charset="0"/>
+                                  </a:rPr>
+                                  <m:t>2</m:t>
+                                </m:r>
+                              </m:sub>
+                            </m:sSub>
+                            <m:r>
+                              <a:rPr lang="en-US" b="0" i="1" smtClean="0">
+                                <a:latin typeface="Cambria Math" panose="02040503050406030204" pitchFamily="18" charset="0"/>
+                                <a:ea typeface="Cambria Math" panose="02040503050406030204" pitchFamily="18" charset="0"/>
+                              </a:rPr>
+                              <m:t>,…,</m:t>
+                            </m:r>
+                            <m:sSub>
+                              <m:sSubPr>
+                                <m:ctrlPr>
+                                  <a:rPr lang="en-US" b="0" i="1" smtClean="0">
+                                    <a:latin typeface="Cambria Math" panose="02040503050406030204" pitchFamily="18" charset="0"/>
+                                    <a:ea typeface="Cambria Math" panose="02040503050406030204" pitchFamily="18" charset="0"/>
+                                  </a:rPr>
+                                </m:ctrlPr>
+                              </m:sSubPr>
+                              <m:e>
+                                <m:r>
+                                  <a:rPr lang="en-US" b="0" i="1" smtClean="0">
+                                    <a:latin typeface="Cambria Math" panose="02040503050406030204" pitchFamily="18" charset="0"/>
+                                    <a:ea typeface="Cambria Math" panose="02040503050406030204" pitchFamily="18" charset="0"/>
+                                  </a:rPr>
+                                  <m:t>𝑥</m:t>
+                                </m:r>
+                              </m:e>
+                              <m:sub>
+                                <m:r>
+                                  <a:rPr lang="en-US" b="0" i="1" smtClean="0">
+                                    <a:latin typeface="Cambria Math" panose="02040503050406030204" pitchFamily="18" charset="0"/>
+                                    <a:ea typeface="Cambria Math" panose="02040503050406030204" pitchFamily="18" charset="0"/>
+                                  </a:rPr>
+                                  <m:t>𝑑</m:t>
+                                </m:r>
+                              </m:sub>
+                            </m:sSub>
+                          </m:e>
+                        </m:d>
+                      </m:e>
+                      <m:sup>
+                        <m:r>
+                          <a:rPr lang="en-US" b="0" i="1" smtClean="0">
+                            <a:latin typeface="Cambria Math" panose="02040503050406030204" pitchFamily="18" charset="0"/>
+                            <a:ea typeface="Cambria Math" panose="02040503050406030204" pitchFamily="18" charset="0"/>
+                          </a:rPr>
+                          <m:t>⊤</m:t>
+                        </m:r>
+                      </m:sup>
+                    </m:sSup>
+                    <m:r>
+                      <a:rPr lang="en-US" b="1" i="1" smtClean="0">
+                        <a:latin typeface="Cambria Math" panose="02040503050406030204" pitchFamily="18" charset="0"/>
+                        <a:ea typeface="Cambria Math" panose="02040503050406030204" pitchFamily="18" charset="0"/>
+                      </a:rPr>
+                      <m:t>=</m:t>
+                    </m:r>
                     <m:r>
                       <a:rPr lang="en-US" b="1" i="1">
                         <a:latin typeface="Cambria Math" panose="02040503050406030204" pitchFamily="18" charset="0"/>
                       </a:rPr>
                       <m:t>𝒙</m:t>
                     </m:r>
-                    <m:d>
-                      <m:dPr>
+                    <m:sSup>
+                      <m:sSupPr>
                         <m:ctrlPr>
-                          <a:rPr lang="en-US" i="1">
+                          <a:rPr lang="en-US" b="0" i="1" smtClean="0">
                             <a:latin typeface="Cambria Math" panose="02040503050406030204" pitchFamily="18" charset="0"/>
                           </a:rPr>
                         </m:ctrlPr>
-                      </m:dPr>
+                      </m:sSupPr>
                       <m:e>
+                        <m:d>
+                          <m:dPr>
+                            <m:ctrlPr>
+                              <a:rPr lang="en-US" i="1">
+                                <a:latin typeface="Cambria Math" panose="02040503050406030204" pitchFamily="18" charset="0"/>
+                              </a:rPr>
+                            </m:ctrlPr>
+                          </m:dPr>
+                          <m:e>
+                            <m:r>
+                              <a:rPr lang="en-US" i="1">
+                                <a:latin typeface="Cambria Math" panose="02040503050406030204" pitchFamily="18" charset="0"/>
+                              </a:rPr>
+                              <m:t>𝑠</m:t>
+                            </m:r>
+                          </m:e>
+                        </m:d>
+                      </m:e>
+                      <m:sup>
                         <m:r>
-                          <a:rPr lang="en-US" i="1">
-                            <a:latin typeface="Cambria Math" panose="02040503050406030204" pitchFamily="18" charset="0"/>
-                          </a:rPr>
-                          <m:t>𝑠</m:t>
+                          <a:rPr lang="en-US" b="0" i="1" smtClean="0">
+                            <a:latin typeface="Cambria Math" panose="02040503050406030204" pitchFamily="18" charset="0"/>
+                          </a:rPr>
+                          <m:t>⊤</m:t>
                         </m:r>
-                      </m:e>
-                    </m:d>
+                      </m:sup>
+                    </m:sSup>
                   </m:oMath>
                 </a14:m>
                 <a:endParaRPr lang="en-US" dirty="0"/>
@@ -14168,7 +15664,7 @@
             </p:txBody>
           </p:sp>
         </mc:Choice>
-        <mc:Fallback xmlns="">
+        <mc:Fallback>
           <p:sp>
             <p:nvSpPr>
               <p:cNvPr id="3" name="Content Placeholder 2">
@@ -14189,7 +15685,7 @@
               <a:blipFill>
                 <a:blip r:embed="rId2"/>
                 <a:stretch>
-                  <a:fillRect l="-696" t="-2551"/>
+                  <a:fillRect l="-696" t="-2551" b="-1531"/>
                 </a:stretch>
               </a:blipFill>
             </p:spPr>
@@ -14222,8 +15718,8 @@
         </p:nvSpPr>
         <p:spPr>
           <a:xfrm>
-            <a:off x="8731771" y="4144781"/>
-            <a:ext cx="2196059" cy="697042"/>
+            <a:off x="8710798" y="4383868"/>
+            <a:ext cx="2408809" cy="697042"/>
           </a:xfrm>
           <a:prstGeom prst="wedgeRoundRectCallout">
             <a:avLst>
@@ -14256,7 +15752,7 @@
             <a:pPr algn="ctr"/>
             <a:r>
               <a:rPr lang="en-US" dirty="0"/>
-              <a:t>This is an extremely strong guarantee!</a:t>
+              <a:t>These are extremely strong guarantees!</a:t>
             </a:r>
           </a:p>
         </p:txBody>
@@ -14283,6 +15779,9 @@
                     <p:cTn id="3" fill="hold">
                       <p:stCondLst>
                         <p:cond delay="indefinite"/>
+                        <p:cond evt="onBegin" delay="0">
+                          <p:tn val="2"/>
+                        </p:cond>
                       </p:stCondLst>
                       <p:childTnLst>
                         <p:par>
@@ -14292,7 +15791,7 @@
                             </p:stCondLst>
                             <p:childTnLst>
                               <p:par>
-                                <p:cTn id="5" presetID="1" presetClass="entr" presetSubtype="0" fill="hold" nodeType="clickEffect">
+                                <p:cTn id="5" presetID="1" presetClass="entr" presetSubtype="0" fill="hold" grpId="0" nodeType="withEffect">
                                   <p:stCondLst>
                                     <p:cond delay="0"/>
                                   </p:stCondLst>
@@ -14305,265 +15804,7 @@
                                           </p:stCondLst>
                                         </p:cTn>
                                         <p:tgtEl>
-                                          <p:spTgt spid="3">
-                                            <p:txEl>
-                                              <p:pRg st="2" end="2"/>
-                                            </p:txEl>
-                                          </p:spTgt>
-                                        </p:tgtEl>
-                                        <p:attrNameLst>
-                                          <p:attrName>style.visibility</p:attrName>
-                                        </p:attrNameLst>
-                                      </p:cBhvr>
-                                      <p:to>
-                                        <p:strVal val="visible"/>
-                                      </p:to>
-                                    </p:set>
-                                  </p:childTnLst>
-                                </p:cTn>
-                              </p:par>
-                            </p:childTnLst>
-                          </p:cTn>
-                        </p:par>
-                      </p:childTnLst>
-                    </p:cTn>
-                  </p:par>
-                  <p:par>
-                    <p:cTn id="7" fill="hold">
-                      <p:stCondLst>
-                        <p:cond delay="indefinite"/>
-                      </p:stCondLst>
-                      <p:childTnLst>
-                        <p:par>
-                          <p:cTn id="8" fill="hold">
-                            <p:stCondLst>
-                              <p:cond delay="0"/>
-                            </p:stCondLst>
-                            <p:childTnLst>
-                              <p:par>
-                                <p:cTn id="9" presetID="1" presetClass="entr" presetSubtype="0" fill="hold" nodeType="clickEffect">
-                                  <p:stCondLst>
-                                    <p:cond delay="0"/>
-                                  </p:stCondLst>
-                                  <p:childTnLst>
-                                    <p:set>
-                                      <p:cBhvr>
-                                        <p:cTn id="10" dur="1" fill="hold">
-                                          <p:stCondLst>
-                                            <p:cond delay="0"/>
-                                          </p:stCondLst>
-                                        </p:cTn>
-                                        <p:tgtEl>
-                                          <p:spTgt spid="3">
-                                            <p:txEl>
-                                              <p:pRg st="3" end="3"/>
-                                            </p:txEl>
-                                          </p:spTgt>
-                                        </p:tgtEl>
-                                        <p:attrNameLst>
-                                          <p:attrName>style.visibility</p:attrName>
-                                        </p:attrNameLst>
-                                      </p:cBhvr>
-                                      <p:to>
-                                        <p:strVal val="visible"/>
-                                      </p:to>
-                                    </p:set>
-                                  </p:childTnLst>
-                                </p:cTn>
-                              </p:par>
-                            </p:childTnLst>
-                          </p:cTn>
-                        </p:par>
-                      </p:childTnLst>
-                    </p:cTn>
-                  </p:par>
-                  <p:par>
-                    <p:cTn id="11" fill="hold">
-                      <p:stCondLst>
-                        <p:cond delay="indefinite"/>
-                      </p:stCondLst>
-                      <p:childTnLst>
-                        <p:par>
-                          <p:cTn id="12" fill="hold">
-                            <p:stCondLst>
-                              <p:cond delay="0"/>
-                            </p:stCondLst>
-                            <p:childTnLst>
-                              <p:par>
-                                <p:cTn id="13" presetID="1" presetClass="entr" presetSubtype="0" fill="hold" nodeType="clickEffect">
-                                  <p:stCondLst>
-                                    <p:cond delay="0"/>
-                                  </p:stCondLst>
-                                  <p:childTnLst>
-                                    <p:set>
-                                      <p:cBhvr>
-                                        <p:cTn id="14" dur="1" fill="hold">
-                                          <p:stCondLst>
-                                            <p:cond delay="0"/>
-                                          </p:stCondLst>
-                                        </p:cTn>
-                                        <p:tgtEl>
-                                          <p:spTgt spid="3">
-                                            <p:txEl>
-                                              <p:pRg st="5" end="5"/>
-                                            </p:txEl>
-                                          </p:spTgt>
-                                        </p:tgtEl>
-                                        <p:attrNameLst>
-                                          <p:attrName>style.visibility</p:attrName>
-                                        </p:attrNameLst>
-                                      </p:cBhvr>
-                                      <p:to>
-                                        <p:strVal val="visible"/>
-                                      </p:to>
-                                    </p:set>
-                                  </p:childTnLst>
-                                </p:cTn>
-                              </p:par>
-                              <p:par>
-                                <p:cTn id="15" presetID="1" presetClass="entr" presetSubtype="0" fill="hold" nodeType="withEffect">
-                                  <p:stCondLst>
-                                    <p:cond delay="0"/>
-                                  </p:stCondLst>
-                                  <p:childTnLst>
-                                    <p:set>
-                                      <p:cBhvr>
-                                        <p:cTn id="16" dur="1" fill="hold">
-                                          <p:stCondLst>
-                                            <p:cond delay="0"/>
-                                          </p:stCondLst>
-                                        </p:cTn>
-                                        <p:tgtEl>
-                                          <p:spTgt spid="3">
-                                            <p:txEl>
-                                              <p:pRg st="6" end="6"/>
-                                            </p:txEl>
-                                          </p:spTgt>
-                                        </p:tgtEl>
-                                        <p:attrNameLst>
-                                          <p:attrName>style.visibility</p:attrName>
-                                        </p:attrNameLst>
-                                      </p:cBhvr>
-                                      <p:to>
-                                        <p:strVal val="visible"/>
-                                      </p:to>
-                                    </p:set>
-                                  </p:childTnLst>
-                                </p:cTn>
-                              </p:par>
-                            </p:childTnLst>
-                          </p:cTn>
-                        </p:par>
-                      </p:childTnLst>
-                    </p:cTn>
-                  </p:par>
-                  <p:par>
-                    <p:cTn id="17" fill="hold">
-                      <p:stCondLst>
-                        <p:cond delay="indefinite"/>
-                      </p:stCondLst>
-                      <p:childTnLst>
-                        <p:par>
-                          <p:cTn id="18" fill="hold">
-                            <p:stCondLst>
-                              <p:cond delay="0"/>
-                            </p:stCondLst>
-                            <p:childTnLst>
-                              <p:par>
-                                <p:cTn id="19" presetID="1" presetClass="entr" presetSubtype="0" fill="hold" nodeType="clickEffect">
-                                  <p:stCondLst>
-                                    <p:cond delay="0"/>
-                                  </p:stCondLst>
-                                  <p:childTnLst>
-                                    <p:set>
-                                      <p:cBhvr>
-                                        <p:cTn id="20" dur="1" fill="hold">
-                                          <p:stCondLst>
-                                            <p:cond delay="0"/>
-                                          </p:stCondLst>
-                                        </p:cTn>
-                                        <p:tgtEl>
-                                          <p:spTgt spid="3">
-                                            <p:txEl>
-                                              <p:pRg st="7" end="7"/>
-                                            </p:txEl>
-                                          </p:spTgt>
-                                        </p:tgtEl>
-                                        <p:attrNameLst>
-                                          <p:attrName>style.visibility</p:attrName>
-                                        </p:attrNameLst>
-                                      </p:cBhvr>
-                                      <p:to>
-                                        <p:strVal val="visible"/>
-                                      </p:to>
-                                    </p:set>
-                                  </p:childTnLst>
-                                </p:cTn>
-                              </p:par>
-                              <p:par>
-                                <p:cTn id="21" presetID="1" presetClass="entr" presetSubtype="0" fill="hold" grpId="0" nodeType="withEffect">
-                                  <p:stCondLst>
-                                    <p:cond delay="0"/>
-                                  </p:stCondLst>
-                                  <p:childTnLst>
-                                    <p:set>
-                                      <p:cBhvr>
-                                        <p:cTn id="22" dur="1" fill="hold">
-                                          <p:stCondLst>
-                                            <p:cond delay="0"/>
-                                          </p:stCondLst>
-                                        </p:cTn>
-                                        <p:tgtEl>
                                           <p:spTgt spid="4"/>
-                                        </p:tgtEl>
-                                        <p:attrNameLst>
-                                          <p:attrName>style.visibility</p:attrName>
-                                        </p:attrNameLst>
-                                      </p:cBhvr>
-                                      <p:to>
-                                        <p:strVal val="visible"/>
-                                      </p:to>
-                                    </p:set>
-                                  </p:childTnLst>
-                                </p:cTn>
-                              </p:par>
-                            </p:childTnLst>
-                          </p:cTn>
-                        </p:par>
-                      </p:childTnLst>
-                    </p:cTn>
-                  </p:par>
-                  <p:par>
-                    <p:cTn id="23" fill="hold">
-                      <p:stCondLst>
-                        <p:cond delay="indefinite"/>
-                      </p:stCondLst>
-                      <p:childTnLst>
-                        <p:par>
-                          <p:cTn id="24" fill="hold">
-                            <p:stCondLst>
-                              <p:cond delay="0"/>
-                            </p:stCondLst>
-                            <p:childTnLst>
-                              <p:par>
-                                <p:cTn id="25" presetID="1" presetClass="entr" presetSubtype="0" fill="hold" nodeType="clickEffect">
-                                  <p:stCondLst>
-                                    <p:cond delay="0"/>
-                                  </p:stCondLst>
-                                  <p:childTnLst>
-                                    <p:set>
-                                      <p:cBhvr>
-                                        <p:cTn id="26" dur="1" fill="hold">
-                                          <p:stCondLst>
-                                            <p:cond delay="0"/>
-                                          </p:stCondLst>
-                                        </p:cTn>
-                                        <p:tgtEl>
-                                          <p:spTgt spid="3">
-                                            <p:txEl>
-                                              <p:pRg st="8" end="8"/>
-                                            </p:txEl>
-                                          </p:spTgt>
                                         </p:tgtEl>
                                         <p:attrNameLst>
                                           <p:attrName>style.visibility</p:attrName>

--- a/slides/Lecture_Chapter09.pptx
+++ b/slides/Lecture_Chapter09.pptx
@@ -5,7 +5,7 @@
     <p:sldMasterId id="2147483648" r:id="rId1"/>
   </p:sldMasterIdLst>
   <p:notesMasterIdLst>
-    <p:notesMasterId r:id="rId36"/>
+    <p:notesMasterId r:id="rId37"/>
   </p:notesMasterIdLst>
   <p:sldIdLst>
     <p:sldId id="256" r:id="rId2"/>
@@ -39,9 +39,10 @@
     <p:sldId id="411" r:id="rId30"/>
     <p:sldId id="414" r:id="rId31"/>
     <p:sldId id="421" r:id="rId32"/>
-    <p:sldId id="415" r:id="rId33"/>
-    <p:sldId id="422" r:id="rId34"/>
-    <p:sldId id="424" r:id="rId35"/>
+    <p:sldId id="484" r:id="rId33"/>
+    <p:sldId id="415" r:id="rId34"/>
+    <p:sldId id="422" r:id="rId35"/>
+    <p:sldId id="424" r:id="rId36"/>
   </p:sldIdLst>
   <p:sldSz cx="12192000" cy="6858000"/>
   <p:notesSz cx="6858000" cy="9144000"/>
@@ -196,6 +197,7 @@
           <p14:sldIdLst>
             <p14:sldId id="414"/>
             <p14:sldId id="421"/>
+            <p14:sldId id="484"/>
             <p14:sldId id="415"/>
             <p14:sldId id="422"/>
           </p14:sldIdLst>
@@ -296,7 +298,7 @@
           <a:p>
             <a:fld id="{2987FC57-34F3-4A88-970B-010E7C0EC943}" type="datetimeFigureOut">
               <a:rPr lang="en-US" smtClean="0"/>
-              <a:t>4/1/2026</a:t>
+              <a:t>4/6/2026</a:t>
             </a:fld>
             <a:endParaRPr lang="en-US"/>
           </a:p>
@@ -878,7 +880,7 @@
           <a:p>
             <a:fld id="{3E22BF2E-04DA-469E-97C5-BB68A0368813}" type="datetimeFigureOut">
               <a:rPr lang="en-US" smtClean="0"/>
-              <a:t>4/1/2026</a:t>
+              <a:t>4/6/2026</a:t>
             </a:fld>
             <a:endParaRPr lang="en-US"/>
           </a:p>
@@ -1076,7 +1078,7 @@
           <a:p>
             <a:fld id="{3E22BF2E-04DA-469E-97C5-BB68A0368813}" type="datetimeFigureOut">
               <a:rPr lang="en-US" smtClean="0"/>
-              <a:t>4/1/2026</a:t>
+              <a:t>4/6/2026</a:t>
             </a:fld>
             <a:endParaRPr lang="en-US"/>
           </a:p>
@@ -1284,7 +1286,7 @@
           <a:p>
             <a:fld id="{3E22BF2E-04DA-469E-97C5-BB68A0368813}" type="datetimeFigureOut">
               <a:rPr lang="en-US" smtClean="0"/>
-              <a:t>4/1/2026</a:t>
+              <a:t>4/6/2026</a:t>
             </a:fld>
             <a:endParaRPr lang="en-US"/>
           </a:p>
@@ -1492,7 +1494,7 @@
           <a:p>
             <a:fld id="{3E22BF2E-04DA-469E-97C5-BB68A0368813}" type="datetimeFigureOut">
               <a:rPr lang="en-US" smtClean="0"/>
-              <a:t>4/1/2026</a:t>
+              <a:t>4/6/2026</a:t>
             </a:fld>
             <a:endParaRPr lang="en-US"/>
           </a:p>
@@ -1767,7 +1769,7 @@
           <a:p>
             <a:fld id="{3E22BF2E-04DA-469E-97C5-BB68A0368813}" type="datetimeFigureOut">
               <a:rPr lang="en-US" smtClean="0"/>
-              <a:t>4/1/2026</a:t>
+              <a:t>4/6/2026</a:t>
             </a:fld>
             <a:endParaRPr lang="en-US"/>
           </a:p>
@@ -2032,7 +2034,7 @@
           <a:p>
             <a:fld id="{3E22BF2E-04DA-469E-97C5-BB68A0368813}" type="datetimeFigureOut">
               <a:rPr lang="en-US" smtClean="0"/>
-              <a:t>4/1/2026</a:t>
+              <a:t>4/6/2026</a:t>
             </a:fld>
             <a:endParaRPr lang="en-US"/>
           </a:p>
@@ -2444,7 +2446,7 @@
           <a:p>
             <a:fld id="{3E22BF2E-04DA-469E-97C5-BB68A0368813}" type="datetimeFigureOut">
               <a:rPr lang="en-US" smtClean="0"/>
-              <a:t>4/1/2026</a:t>
+              <a:t>4/6/2026</a:t>
             </a:fld>
             <a:endParaRPr lang="en-US"/>
           </a:p>
@@ -2585,7 +2587,7 @@
           <a:p>
             <a:fld id="{3E22BF2E-04DA-469E-97C5-BB68A0368813}" type="datetimeFigureOut">
               <a:rPr lang="en-US" smtClean="0"/>
-              <a:t>4/1/2026</a:t>
+              <a:t>4/6/2026</a:t>
             </a:fld>
             <a:endParaRPr lang="en-US"/>
           </a:p>
@@ -2698,7 +2700,7 @@
           <a:p>
             <a:fld id="{3E22BF2E-04DA-469E-97C5-BB68A0368813}" type="datetimeFigureOut">
               <a:rPr lang="en-US" smtClean="0"/>
-              <a:t>4/1/2026</a:t>
+              <a:t>4/6/2026</a:t>
             </a:fld>
             <a:endParaRPr lang="en-US"/>
           </a:p>
@@ -3009,7 +3011,7 @@
           <a:p>
             <a:fld id="{3E22BF2E-04DA-469E-97C5-BB68A0368813}" type="datetimeFigureOut">
               <a:rPr lang="en-US" smtClean="0"/>
-              <a:t>4/1/2026</a:t>
+              <a:t>4/6/2026</a:t>
             </a:fld>
             <a:endParaRPr lang="en-US"/>
           </a:p>
@@ -3297,7 +3299,7 @@
           <a:p>
             <a:fld id="{3E22BF2E-04DA-469E-97C5-BB68A0368813}" type="datetimeFigureOut">
               <a:rPr lang="en-US" smtClean="0"/>
-              <a:t>4/1/2026</a:t>
+              <a:t>4/6/2026</a:t>
             </a:fld>
             <a:endParaRPr lang="en-US"/>
           </a:p>
@@ -3538,7 +3540,7 @@
           <a:p>
             <a:fld id="{3E22BF2E-04DA-469E-97C5-BB68A0368813}" type="datetimeFigureOut">
               <a:rPr lang="en-US" smtClean="0"/>
-              <a:t>4/1/2026</a:t>
+              <a:t>4/6/2026</a:t>
             </a:fld>
             <a:endParaRPr lang="en-US"/>
           </a:p>
@@ -6281,8 +6283,8 @@
           <a:chExt cx="0" cy="0"/>
         </a:xfrm>
       </p:grpSpPr>
-      <mc:AlternateContent xmlns:mc="http://schemas.openxmlformats.org/markup-compatibility/2006">
-        <mc:Choice xmlns:a14="http://schemas.microsoft.com/office/drawing/2010/main" Requires="a14">
+      <mc:AlternateContent xmlns:mc="http://schemas.openxmlformats.org/markup-compatibility/2006" xmlns:a14="http://schemas.microsoft.com/office/drawing/2010/main">
+        <mc:Choice Requires="a14">
           <p:sp>
             <p:nvSpPr>
               <p:cNvPr id="3" name="Content Placeholder 2">
@@ -7891,7 +7893,7 @@
             </p:txBody>
           </p:sp>
         </mc:Choice>
-        <mc:Fallback>
+        <mc:Fallback xmlns="">
           <p:sp>
             <p:nvSpPr>
               <p:cNvPr id="3" name="Content Placeholder 2">
@@ -7963,8 +7965,8 @@
           </a:p>
         </p:txBody>
       </p:sp>
-      <mc:AlternateContent xmlns:mc="http://schemas.openxmlformats.org/markup-compatibility/2006">
-        <mc:Choice xmlns:a14="http://schemas.microsoft.com/office/drawing/2010/main" Requires="a14">
+      <mc:AlternateContent xmlns:mc="http://schemas.openxmlformats.org/markup-compatibility/2006" xmlns:a14="http://schemas.microsoft.com/office/drawing/2010/main">
+        <mc:Choice Requires="a14">
           <p:sp>
             <p:nvSpPr>
               <p:cNvPr id="4" name="Speech Bubble: Rectangle with Corners Rounded 3">
@@ -8063,7 +8065,7 @@
             </p:txBody>
           </p:sp>
         </mc:Choice>
-        <mc:Fallback>
+        <mc:Fallback xmlns="">
           <p:sp>
             <p:nvSpPr>
               <p:cNvPr id="4" name="Speech Bubble: Rectangle with Corners Rounded 3">
@@ -8184,8 +8186,8 @@
             </a:extLst>
           </p:spPr>
         </p:pic>
-        <mc:AlternateContent xmlns:mc="http://schemas.openxmlformats.org/markup-compatibility/2006">
-          <mc:Choice xmlns:a14="http://schemas.microsoft.com/office/drawing/2010/main" Requires="a14">
+        <mc:AlternateContent xmlns:mc="http://schemas.openxmlformats.org/markup-compatibility/2006" xmlns:a14="http://schemas.microsoft.com/office/drawing/2010/main">
+          <mc:Choice Requires="a14">
             <p:sp>
               <p:nvSpPr>
                 <p:cNvPr id="7" name="TextBox 6">
@@ -8214,6 +8216,7 @@
                 </a:bodyPr>
                 <a:lstStyle/>
                 <a:p>
+                  <a:pPr/>
                   <a14:m>
                     <m:oMathPara xmlns:m="http://schemas.openxmlformats.org/officeDocument/2006/math">
                       <m:oMathParaPr>
@@ -8253,7 +8256,7 @@
               </p:txBody>
             </p:sp>
           </mc:Choice>
-          <mc:Fallback>
+          <mc:Fallback xmlns="">
             <p:sp>
               <p:nvSpPr>
                 <p:cNvPr id="7" name="TextBox 6">
@@ -8298,8 +8301,8 @@
             </p:sp>
           </mc:Fallback>
         </mc:AlternateContent>
-        <mc:AlternateContent xmlns:mc="http://schemas.openxmlformats.org/markup-compatibility/2006">
-          <mc:Choice xmlns:a14="http://schemas.microsoft.com/office/drawing/2010/main" Requires="a14">
+        <mc:AlternateContent xmlns:mc="http://schemas.openxmlformats.org/markup-compatibility/2006" xmlns:a14="http://schemas.microsoft.com/office/drawing/2010/main">
+          <mc:Choice Requires="a14">
             <p:sp>
               <p:nvSpPr>
                 <p:cNvPr id="8" name="TextBox 7">
@@ -8328,6 +8331,7 @@
                 </a:bodyPr>
                 <a:lstStyle/>
                 <a:p>
+                  <a:pPr/>
                   <a14:m>
                     <m:oMathPara xmlns:m="http://schemas.openxmlformats.org/officeDocument/2006/math">
                       <m:oMathParaPr>
@@ -8367,7 +8371,7 @@
               </p:txBody>
             </p:sp>
           </mc:Choice>
-          <mc:Fallback>
+          <mc:Fallback xmlns="">
             <p:sp>
               <p:nvSpPr>
                 <p:cNvPr id="8" name="TextBox 7">
@@ -8412,8 +8416,8 @@
             </p:sp>
           </mc:Fallback>
         </mc:AlternateContent>
-        <mc:AlternateContent xmlns:mc="http://schemas.openxmlformats.org/markup-compatibility/2006">
-          <mc:Choice xmlns:a14="http://schemas.microsoft.com/office/drawing/2010/main" Requires="a14">
+        <mc:AlternateContent xmlns:mc="http://schemas.openxmlformats.org/markup-compatibility/2006" xmlns:a14="http://schemas.microsoft.com/office/drawing/2010/main">
+          <mc:Choice Requires="a14">
             <p:sp>
               <p:nvSpPr>
                 <p:cNvPr id="11" name="TextBox 10">
@@ -8442,6 +8446,7 @@
                 </a:bodyPr>
                 <a:lstStyle/>
                 <a:p>
+                  <a:pPr/>
                   <a14:m>
                     <m:oMathPara xmlns:m="http://schemas.openxmlformats.org/officeDocument/2006/math">
                       <m:oMathParaPr>
@@ -8462,7 +8467,7 @@
               </p:txBody>
             </p:sp>
           </mc:Choice>
-          <mc:Fallback>
+          <mc:Fallback xmlns="">
             <p:sp>
               <p:nvSpPr>
                 <p:cNvPr id="11" name="TextBox 10">
@@ -8507,8 +8512,8 @@
             </p:sp>
           </mc:Fallback>
         </mc:AlternateContent>
-        <mc:AlternateContent xmlns:mc="http://schemas.openxmlformats.org/markup-compatibility/2006">
-          <mc:Choice xmlns:a14="http://schemas.microsoft.com/office/drawing/2010/main" Requires="a14">
+        <mc:AlternateContent xmlns:mc="http://schemas.openxmlformats.org/markup-compatibility/2006" xmlns:a14="http://schemas.microsoft.com/office/drawing/2010/main">
+          <mc:Choice Requires="a14">
             <p:sp>
               <p:nvSpPr>
                 <p:cNvPr id="12" name="TextBox 11">
@@ -8556,6 +8561,7 @@
                 </a:bodyPr>
                 <a:lstStyle/>
                 <a:p>
+                  <a:pPr/>
                   <a14:m>
                     <m:oMathPara xmlns:m="http://schemas.openxmlformats.org/officeDocument/2006/math">
                       <m:oMathParaPr>
@@ -8606,7 +8612,7 @@
               </p:txBody>
             </p:sp>
           </mc:Choice>
-          <mc:Fallback>
+          <mc:Fallback xmlns="">
             <p:sp>
               <p:nvSpPr>
                 <p:cNvPr id="12" name="TextBox 11">
@@ -8694,8 +8700,8 @@
           </p:style>
         </p:cxnSp>
       </p:grpSp>
-      <mc:AlternateContent xmlns:mc="http://schemas.openxmlformats.org/markup-compatibility/2006">
-        <mc:Choice xmlns:a14="http://schemas.microsoft.com/office/drawing/2010/main" Requires="a14">
+      <mc:AlternateContent xmlns:mc="http://schemas.openxmlformats.org/markup-compatibility/2006" xmlns:a14="http://schemas.microsoft.com/office/drawing/2010/main">
+        <mc:Choice Requires="a14">
           <p:sp>
             <p:nvSpPr>
               <p:cNvPr id="16" name="TextBox 15">
@@ -8750,6 +8756,7 @@
                 <a:endParaRPr lang="en-US" sz="1400" b="1" dirty="0"/>
               </a:p>
               <a:p>
+                <a:pPr/>
                 <a14:m>
                   <m:oMathPara xmlns:m="http://schemas.openxmlformats.org/officeDocument/2006/math">
                     <m:oMathParaPr>
@@ -8828,6 +8835,7 @@
                 </a:r>
               </a:p>
               <a:p>
+                <a:pPr/>
                 <a14:m>
                   <m:oMathPara xmlns:m="http://schemas.openxmlformats.org/officeDocument/2006/math">
                     <m:oMathParaPr>
@@ -8844,7 +8852,7 @@
                         <a:rPr lang="es-ES" sz="1400" i="1">
                           <a:latin typeface="Cambria Math" panose="02040503050406030204" pitchFamily="18" charset="0"/>
                         </a:rPr>
-                        <m:t>'(</m:t>
+                        <m:t>′(</m:t>
                       </m:r>
                       <m:r>
                         <a:rPr lang="es-ES" sz="1400" i="1">
@@ -8868,7 +8876,7 @@
                         <a:rPr lang="es-ES" sz="1400" i="1">
                           <a:latin typeface="Cambria Math" panose="02040503050406030204" pitchFamily="18" charset="0"/>
                         </a:rPr>
-                        <m:t>'(</m:t>
+                        <m:t>′(</m:t>
                       </m:r>
                       <m:r>
                         <a:rPr lang="es-ES" sz="1400" i="1">
@@ -8904,7 +8912,7 @@
                         <a:rPr lang="es-ES" sz="1400" i="1">
                           <a:latin typeface="Cambria Math" panose="02040503050406030204" pitchFamily="18" charset="0"/>
                         </a:rPr>
-                        <m:t>'(</m:t>
+                        <m:t>′(</m:t>
                       </m:r>
                       <m:r>
                         <a:rPr lang="es-ES" sz="1400" i="1">
@@ -8926,7 +8934,7 @@
             </p:txBody>
           </p:sp>
         </mc:Choice>
-        <mc:Fallback>
+        <mc:Fallback xmlns="">
           <p:sp>
             <p:nvSpPr>
               <p:cNvPr id="16" name="TextBox 15">
@@ -9493,8 +9501,8 @@
           </a:p>
         </p:txBody>
       </p:sp>
-      <mc:AlternateContent xmlns:mc="http://schemas.openxmlformats.org/markup-compatibility/2006">
-        <mc:Choice xmlns:a14="http://schemas.microsoft.com/office/drawing/2010/main" Requires="a14">
+      <mc:AlternateContent xmlns:mc="http://schemas.openxmlformats.org/markup-compatibility/2006" xmlns:a14="http://schemas.microsoft.com/office/drawing/2010/main">
+        <mc:Choice Requires="a14">
           <p:sp>
             <p:nvSpPr>
               <p:cNvPr id="3" name="Content Placeholder 2">
@@ -10124,7 +10132,7 @@
             </p:txBody>
           </p:sp>
         </mc:Choice>
-        <mc:Fallback>
+        <mc:Fallback xmlns="">
           <p:sp>
             <p:nvSpPr>
               <p:cNvPr id="3" name="Content Placeholder 2">
@@ -14302,8 +14310,8 @@
           </a:p>
         </p:txBody>
       </p:sp>
-      <mc:AlternateContent xmlns:mc="http://schemas.openxmlformats.org/markup-compatibility/2006">
-        <mc:Choice xmlns:a14="http://schemas.microsoft.com/office/drawing/2010/main" Requires="a14">
+      <mc:AlternateContent xmlns:mc="http://schemas.openxmlformats.org/markup-compatibility/2006" xmlns:a14="http://schemas.microsoft.com/office/drawing/2010/main">
+        <mc:Choice Requires="a14">
           <p:sp>
             <p:nvSpPr>
               <p:cNvPr id="3" name="Content Placeholder 2">
@@ -15664,7 +15672,7 @@
             </p:txBody>
           </p:sp>
         </mc:Choice>
-        <mc:Fallback>
+        <mc:Fallback xmlns="">
           <p:sp>
             <p:nvSpPr>
               <p:cNvPr id="3" name="Content Placeholder 2">
@@ -33654,6 +33662,59 @@
           </p:sp>
         </mc:Fallback>
       </mc:AlternateContent>
+      <p:sp>
+        <p:nvSpPr>
+          <p:cNvPr id="2" name="Speech Bubble: Rectangle with Corners Rounded 1">
+            <a:extLst>
+              <a:ext uri="{FF2B5EF4-FFF2-40B4-BE49-F238E27FC236}">
+                <a16:creationId xmlns:a16="http://schemas.microsoft.com/office/drawing/2014/main" id="{743764ED-EDD8-EBDA-9B21-C73D010EE92B}"/>
+              </a:ext>
+            </a:extLst>
+          </p:cNvPr>
+          <p:cNvSpPr/>
+          <p:nvPr/>
+        </p:nvSpPr>
+        <p:spPr>
+          <a:xfrm>
+            <a:off x="8816830" y="2613171"/>
+            <a:ext cx="1484852" cy="608202"/>
+          </a:xfrm>
+          <a:prstGeom prst="wedgeRoundRectCallout">
+            <a:avLst>
+              <a:gd name="adj1" fmla="val -260946"/>
+              <a:gd name="adj2" fmla="val -121638"/>
+              <a:gd name="adj3" fmla="val 16667"/>
+            </a:avLst>
+          </a:prstGeom>
+        </p:spPr>
+        <p:style>
+          <a:lnRef idx="2">
+            <a:schemeClr val="accent1">
+              <a:shade val="15000"/>
+            </a:schemeClr>
+          </a:lnRef>
+          <a:fillRef idx="1">
+            <a:schemeClr val="accent1"/>
+          </a:fillRef>
+          <a:effectRef idx="0">
+            <a:schemeClr val="accent1"/>
+          </a:effectRef>
+          <a:fontRef idx="minor">
+            <a:schemeClr val="lt1"/>
+          </a:fontRef>
+        </p:style>
+        <p:txBody>
+          <a:bodyPr rtlCol="0" anchor="ctr"/>
+          <a:lstStyle/>
+          <a:p>
+            <a:pPr algn="ctr"/>
+            <a:r>
+              <a:rPr lang="en-US" sz="1400" dirty="0"/>
+              <a:t>We need state-action features!</a:t>
+            </a:r>
+          </a:p>
+        </p:txBody>
+      </p:sp>
     </p:spTree>
     <p:extLst>
       <p:ext uri="{BB962C8B-B14F-4D97-AF65-F5344CB8AC3E}">
@@ -34023,6 +34084,51 @@
                       </p:childTnLst>
                     </p:cTn>
                   </p:par>
+                  <p:par>
+                    <p:cTn id="29" fill="hold">
+                      <p:stCondLst>
+                        <p:cond delay="indefinite"/>
+                      </p:stCondLst>
+                      <p:childTnLst>
+                        <p:par>
+                          <p:cTn id="30" fill="hold">
+                            <p:stCondLst>
+                              <p:cond delay="0"/>
+                            </p:stCondLst>
+                            <p:childTnLst>
+                              <p:par>
+                                <p:cTn id="31" presetID="1" presetClass="entr" presetSubtype="0" fill="hold" grpId="0" nodeType="clickEffect">
+                                  <p:stCondLst>
+                                    <p:cond delay="0"/>
+                                  </p:stCondLst>
+                                  <p:childTnLst>
+                                    <p:set>
+                                      <p:cBhvr>
+                                        <p:cTn id="32" dur="1" fill="hold">
+                                          <p:stCondLst>
+                                            <p:cond delay="0"/>
+                                          </p:stCondLst>
+                                        </p:cTn>
+                                        <p:tgtEl>
+                                          <p:spTgt spid="2"/>
+                                        </p:tgtEl>
+                                        <p:attrNameLst>
+                                          <p:attrName>style.visibility</p:attrName>
+                                        </p:attrNameLst>
+                                      </p:cBhvr>
+                                      <p:to>
+                                        <p:strVal val="visible"/>
+                                      </p:to>
+                                    </p:set>
+                                  </p:childTnLst>
+                                </p:cTn>
+                              </p:par>
+                            </p:childTnLst>
+                          </p:cTn>
+                        </p:par>
+                      </p:childTnLst>
+                    </p:cTn>
+                  </p:par>
                 </p:childTnLst>
               </p:cTn>
               <p:prevCondLst>
@@ -34046,12 +34152,721 @@
     </p:tnLst>
     <p:bldLst>
       <p:bldP spid="5" grpId="0" uiExpand="1" build="p"/>
+      <p:bldP spid="2" grpId="0" animBg="1"/>
     </p:bldLst>
   </p:timing>
 </p:sld>
 </file>
 
 <file path=ppt/slides/slide32.xml><?xml version="1.0" encoding="utf-8"?>
+<p:sld xmlns:a="http://schemas.openxmlformats.org/drawingml/2006/main" xmlns:r="http://schemas.openxmlformats.org/officeDocument/2006/relationships" xmlns:p="http://schemas.openxmlformats.org/presentationml/2006/main">
+  <p:cSld>
+    <p:spTree>
+      <p:nvGrpSpPr>
+        <p:cNvPr id="1" name=""/>
+        <p:cNvGrpSpPr/>
+        <p:nvPr/>
+      </p:nvGrpSpPr>
+      <p:grpSpPr>
+        <a:xfrm>
+          <a:off x="0" y="0"/>
+          <a:ext cx="0" cy="0"/>
+          <a:chOff x="0" y="0"/>
+          <a:chExt cx="0" cy="0"/>
+        </a:xfrm>
+      </p:grpSpPr>
+      <p:sp>
+        <p:nvSpPr>
+          <p:cNvPr id="2" name="Title 1">
+            <a:extLst>
+              <a:ext uri="{FF2B5EF4-FFF2-40B4-BE49-F238E27FC236}">
+                <a16:creationId xmlns:a16="http://schemas.microsoft.com/office/drawing/2014/main" id="{C7B99B3C-0397-11D2-6355-D1AF78CF478D}"/>
+              </a:ext>
+            </a:extLst>
+          </p:cNvPr>
+          <p:cNvSpPr>
+            <a:spLocks noGrp="1"/>
+          </p:cNvSpPr>
+          <p:nvPr>
+            <p:ph type="title"/>
+          </p:nvPr>
+        </p:nvSpPr>
+        <p:spPr/>
+        <p:txBody>
+          <a:bodyPr/>
+          <a:lstStyle/>
+          <a:p>
+            <a:r>
+              <a:rPr lang="en-US" dirty="0"/>
+              <a:t>State-Action Features</a:t>
+            </a:r>
+          </a:p>
+        </p:txBody>
+      </p:sp>
+      <mc:AlternateContent xmlns:mc="http://schemas.openxmlformats.org/markup-compatibility/2006">
+        <mc:Choice xmlns:a14="http://schemas.microsoft.com/office/drawing/2010/main" Requires="a14">
+          <p:sp>
+            <p:nvSpPr>
+              <p:cNvPr id="3" name="Content Placeholder 2">
+                <a:extLst>
+                  <a:ext uri="{FF2B5EF4-FFF2-40B4-BE49-F238E27FC236}">
+                    <a16:creationId xmlns:a16="http://schemas.microsoft.com/office/drawing/2014/main" id="{715F4879-4D97-8E21-D252-963C52345972}"/>
+                  </a:ext>
+                </a:extLst>
+              </p:cNvPr>
+              <p:cNvSpPr>
+                <a:spLocks noGrp="1"/>
+              </p:cNvSpPr>
+              <p:nvPr>
+                <p:ph idx="1"/>
+              </p:nvPr>
+            </p:nvSpPr>
+            <p:spPr/>
+            <p:txBody>
+              <a:bodyPr>
+                <a:normAutofit fontScale="85000" lnSpcReduction="10000"/>
+              </a:bodyPr>
+              <a:lstStyle/>
+              <a:p>
+                <a:r>
+                  <a:rPr lang="en-US" dirty="0"/>
+                  <a:t>We need to learn to predict </a:t>
+                </a:r>
+                <a14:m>
+                  <m:oMath xmlns:m="http://schemas.openxmlformats.org/officeDocument/2006/math">
+                    <m:acc>
+                      <m:accPr>
+                        <m:chr m:val="̂"/>
+                        <m:ctrlPr>
+                          <a:rPr lang="en-US" i="1">
+                            <a:latin typeface="Cambria Math" panose="02040503050406030204" pitchFamily="18" charset="0"/>
+                          </a:rPr>
+                        </m:ctrlPr>
+                      </m:accPr>
+                      <m:e>
+                        <m:r>
+                          <a:rPr lang="en-US" i="1">
+                            <a:latin typeface="Cambria Math" panose="02040503050406030204" pitchFamily="18" charset="0"/>
+                          </a:rPr>
+                          <m:t>𝑞</m:t>
+                        </m:r>
+                      </m:e>
+                    </m:acc>
+                    <m:d>
+                      <m:dPr>
+                        <m:ctrlPr>
+                          <a:rPr lang="en-US" i="1" dirty="0">
+                            <a:latin typeface="Cambria Math" panose="02040503050406030204" pitchFamily="18" charset="0"/>
+                          </a:rPr>
+                        </m:ctrlPr>
+                      </m:dPr>
+                      <m:e>
+                        <m:r>
+                          <a:rPr lang="en-US" i="1" dirty="0">
+                            <a:latin typeface="Cambria Math" panose="02040503050406030204" pitchFamily="18" charset="0"/>
+                          </a:rPr>
+                          <m:t>𝑠</m:t>
+                        </m:r>
+                        <m:r>
+                          <a:rPr lang="en-US" i="1" dirty="0">
+                            <a:latin typeface="Cambria Math" panose="02040503050406030204" pitchFamily="18" charset="0"/>
+                          </a:rPr>
+                          <m:t>,</m:t>
+                        </m:r>
+                        <m:r>
+                          <a:rPr lang="en-US" i="1" dirty="0">
+                            <a:latin typeface="Cambria Math" panose="02040503050406030204" pitchFamily="18" charset="0"/>
+                          </a:rPr>
+                          <m:t>𝑎</m:t>
+                        </m:r>
+                        <m:r>
+                          <a:rPr lang="en-US" i="1" dirty="0">
+                            <a:latin typeface="Cambria Math" panose="02040503050406030204" pitchFamily="18" charset="0"/>
+                          </a:rPr>
+                          <m:t>,</m:t>
+                        </m:r>
+                        <m:r>
+                          <a:rPr lang="en-US" b="1" i="1" dirty="0">
+                            <a:latin typeface="Cambria Math" panose="02040503050406030204" pitchFamily="18" charset="0"/>
+                          </a:rPr>
+                          <m:t>𝒘</m:t>
+                        </m:r>
+                      </m:e>
+                    </m:d>
+                  </m:oMath>
+                </a14:m>
+                <a:r>
+                  <a:rPr lang="en-US" dirty="0"/>
+                  <a:t> which should have a different value for each action.</a:t>
+                </a:r>
+              </a:p>
+              <a:p>
+                <a:r>
+                  <a:rPr lang="en-US" dirty="0" err="1"/>
+                  <a:t>Geramifard</a:t>
+                </a:r>
+                <a:r>
+                  <a:rPr lang="en-US" dirty="0"/>
+                  <a:t> et al. (2013)* suggest to have different state-feature weights for each action.</a:t>
+                </a:r>
+              </a:p>
+              <a:p>
+                <a:r>
+                  <a:rPr lang="en-US" b="1" dirty="0"/>
+                  <a:t>Example</a:t>
+                </a:r>
+                <a:r>
+                  <a:rPr lang="en-US" dirty="0"/>
+                  <a:t>: A state described by </a:t>
+                </a:r>
+                <a14:m>
+                  <m:oMath xmlns:m="http://schemas.openxmlformats.org/officeDocument/2006/math">
+                    <m:r>
+                      <a:rPr lang="en-US" b="0" i="1" smtClean="0">
+                        <a:latin typeface="Cambria Math" panose="02040503050406030204" pitchFamily="18" charset="0"/>
+                      </a:rPr>
+                      <m:t>𝑥</m:t>
+                    </m:r>
+                  </m:oMath>
+                </a14:m>
+                <a:r>
+                  <a:rPr lang="en-US" dirty="0"/>
+                  <a:t> and </a:t>
+                </a:r>
+                <a14:m>
+                  <m:oMath xmlns:m="http://schemas.openxmlformats.org/officeDocument/2006/math">
+                    <m:r>
+                      <a:rPr lang="en-US" b="0" i="1" smtClean="0">
+                        <a:latin typeface="Cambria Math" panose="02040503050406030204" pitchFamily="18" charset="0"/>
+                      </a:rPr>
+                      <m:t>𝑦</m:t>
+                    </m:r>
+                  </m:oMath>
+                </a14:m>
+                <a:r>
+                  <a:rPr lang="en-US" dirty="0"/>
+                  <a:t> and three actions, the weight vector would be</a:t>
+                </a:r>
+                <a:br>
+                  <a:rPr lang="en-US" dirty="0"/>
+                </a:br>
+                <a:br>
+                  <a:rPr lang="en-US" dirty="0"/>
+                </a:br>
+                <a14:m>
+                  <m:oMath xmlns:m="http://schemas.openxmlformats.org/officeDocument/2006/math">
+                    <m:r>
+                      <a:rPr lang="en-US" b="0" i="1" smtClean="0">
+                        <a:latin typeface="Cambria Math" panose="02040503050406030204" pitchFamily="18" charset="0"/>
+                      </a:rPr>
+                      <m:t>𝑤</m:t>
+                    </m:r>
+                    <m:r>
+                      <a:rPr lang="en-US" b="0" i="0" smtClean="0">
+                        <a:latin typeface="Cambria Math" panose="02040503050406030204" pitchFamily="18" charset="0"/>
+                      </a:rPr>
+                      <m:t>=(</m:t>
+                    </m:r>
+                    <m:sSub>
+                      <m:sSubPr>
+                        <m:ctrlPr>
+                          <a:rPr lang="en-US" b="0" i="0" smtClean="0">
+                            <a:latin typeface="Cambria Math" panose="02040503050406030204" pitchFamily="18" charset="0"/>
+                          </a:rPr>
+                        </m:ctrlPr>
+                      </m:sSubPr>
+                      <m:e>
+                        <m:r>
+                          <m:rPr>
+                            <m:sty m:val="p"/>
+                          </m:rPr>
+                          <a:rPr lang="en-US" b="0" i="0" smtClean="0">
+                            <a:latin typeface="Cambria Math" panose="02040503050406030204" pitchFamily="18" charset="0"/>
+                          </a:rPr>
+                          <m:t>w</m:t>
+                        </m:r>
+                      </m:e>
+                      <m:sub>
+                        <m:r>
+                          <m:rPr>
+                            <m:sty m:val="p"/>
+                          </m:rPr>
+                          <a:rPr lang="en-US" b="0" i="0" smtClean="0">
+                            <a:latin typeface="Cambria Math" panose="02040503050406030204" pitchFamily="18" charset="0"/>
+                          </a:rPr>
+                          <m:t>intercept</m:t>
+                        </m:r>
+                      </m:sub>
+                    </m:sSub>
+                    <m:r>
+                      <a:rPr lang="en-US" b="0" i="0" smtClean="0">
+                        <a:latin typeface="Cambria Math" panose="02040503050406030204" pitchFamily="18" charset="0"/>
+                      </a:rPr>
+                      <m:t>, </m:t>
+                    </m:r>
+                    <m:sSub>
+                      <m:sSubPr>
+                        <m:ctrlPr>
+                          <a:rPr lang="en-US" b="0" i="0" smtClean="0">
+                            <a:latin typeface="Cambria Math" panose="02040503050406030204" pitchFamily="18" charset="0"/>
+                          </a:rPr>
+                        </m:ctrlPr>
+                      </m:sSubPr>
+                      <m:e>
+                        <m:r>
+                          <m:rPr>
+                            <m:sty m:val="p"/>
+                          </m:rPr>
+                          <a:rPr lang="en-US" b="0" i="0" smtClean="0">
+                            <a:latin typeface="Cambria Math" panose="02040503050406030204" pitchFamily="18" charset="0"/>
+                          </a:rPr>
+                          <m:t>w</m:t>
+                        </m:r>
+                      </m:e>
+                      <m:sub>
+                        <m:r>
+                          <m:rPr>
+                            <m:sty m:val="p"/>
+                          </m:rPr>
+                          <a:rPr lang="en-US" b="0" i="0" smtClean="0">
+                            <a:latin typeface="Cambria Math" panose="02040503050406030204" pitchFamily="18" charset="0"/>
+                          </a:rPr>
+                          <m:t>x</m:t>
+                        </m:r>
+                        <m:r>
+                          <a:rPr lang="en-US" b="0" i="0" smtClean="0">
+                            <a:latin typeface="Cambria Math" panose="02040503050406030204" pitchFamily="18" charset="0"/>
+                          </a:rPr>
+                          <m:t>,</m:t>
+                        </m:r>
+                        <m:r>
+                          <m:rPr>
+                            <m:sty m:val="p"/>
+                          </m:rPr>
+                          <a:rPr lang="en-US" b="0" i="0" smtClean="0">
+                            <a:latin typeface="Cambria Math" panose="02040503050406030204" pitchFamily="18" charset="0"/>
+                          </a:rPr>
+                          <m:t>action</m:t>
+                        </m:r>
+                        <m:r>
+                          <a:rPr lang="en-US" b="0" i="0" smtClean="0">
+                            <a:latin typeface="Cambria Math" panose="02040503050406030204" pitchFamily="18" charset="0"/>
+                          </a:rPr>
+                          <m:t>1, </m:t>
+                        </m:r>
+                      </m:sub>
+                    </m:sSub>
+                    <m:sSub>
+                      <m:sSubPr>
+                        <m:ctrlPr>
+                          <a:rPr lang="en-US" i="1">
+                            <a:latin typeface="Cambria Math" panose="02040503050406030204" pitchFamily="18" charset="0"/>
+                          </a:rPr>
+                        </m:ctrlPr>
+                      </m:sSubPr>
+                      <m:e>
+                        <m:r>
+                          <m:rPr>
+                            <m:sty m:val="p"/>
+                          </m:rPr>
+                          <a:rPr lang="en-US">
+                            <a:latin typeface="Cambria Math" panose="02040503050406030204" pitchFamily="18" charset="0"/>
+                          </a:rPr>
+                          <m:t>w</m:t>
+                        </m:r>
+                      </m:e>
+                      <m:sub>
+                        <m:r>
+                          <m:rPr>
+                            <m:sty m:val="p"/>
+                          </m:rPr>
+                          <a:rPr lang="en-US" b="0" i="0" smtClean="0">
+                            <a:latin typeface="Cambria Math" panose="02040503050406030204" pitchFamily="18" charset="0"/>
+                          </a:rPr>
+                          <m:t>y</m:t>
+                        </m:r>
+                        <m:r>
+                          <a:rPr lang="en-US">
+                            <a:latin typeface="Cambria Math" panose="02040503050406030204" pitchFamily="18" charset="0"/>
+                          </a:rPr>
+                          <m:t>,</m:t>
+                        </m:r>
+                        <m:r>
+                          <m:rPr>
+                            <m:sty m:val="p"/>
+                          </m:rPr>
+                          <a:rPr lang="en-US">
+                            <a:latin typeface="Cambria Math" panose="02040503050406030204" pitchFamily="18" charset="0"/>
+                          </a:rPr>
+                          <m:t>action</m:t>
+                        </m:r>
+                        <m:r>
+                          <a:rPr lang="en-US">
+                            <a:latin typeface="Cambria Math" panose="02040503050406030204" pitchFamily="18" charset="0"/>
+                          </a:rPr>
+                          <m:t>1, </m:t>
+                        </m:r>
+                      </m:sub>
+                    </m:sSub>
+                    <m:sSub>
+                      <m:sSubPr>
+                        <m:ctrlPr>
+                          <a:rPr lang="en-US" i="1">
+                            <a:latin typeface="Cambria Math" panose="02040503050406030204" pitchFamily="18" charset="0"/>
+                          </a:rPr>
+                        </m:ctrlPr>
+                      </m:sSubPr>
+                      <m:e>
+                        <m:r>
+                          <m:rPr>
+                            <m:sty m:val="p"/>
+                          </m:rPr>
+                          <a:rPr lang="en-US">
+                            <a:latin typeface="Cambria Math" panose="02040503050406030204" pitchFamily="18" charset="0"/>
+                          </a:rPr>
+                          <m:t>w</m:t>
+                        </m:r>
+                      </m:e>
+                      <m:sub>
+                        <m:r>
+                          <m:rPr>
+                            <m:sty m:val="p"/>
+                          </m:rPr>
+                          <a:rPr lang="en-US">
+                            <a:latin typeface="Cambria Math" panose="02040503050406030204" pitchFamily="18" charset="0"/>
+                          </a:rPr>
+                          <m:t>x</m:t>
+                        </m:r>
+                        <m:r>
+                          <a:rPr lang="en-US">
+                            <a:latin typeface="Cambria Math" panose="02040503050406030204" pitchFamily="18" charset="0"/>
+                          </a:rPr>
+                          <m:t>,</m:t>
+                        </m:r>
+                        <m:r>
+                          <m:rPr>
+                            <m:sty m:val="p"/>
+                          </m:rPr>
+                          <a:rPr lang="en-US">
+                            <a:latin typeface="Cambria Math" panose="02040503050406030204" pitchFamily="18" charset="0"/>
+                          </a:rPr>
+                          <m:t>action</m:t>
+                        </m:r>
+                        <m:r>
+                          <a:rPr lang="en-US" b="0" i="0" smtClean="0">
+                            <a:latin typeface="Cambria Math" panose="02040503050406030204" pitchFamily="18" charset="0"/>
+                          </a:rPr>
+                          <m:t>2</m:t>
+                        </m:r>
+                        <m:r>
+                          <a:rPr lang="en-US">
+                            <a:latin typeface="Cambria Math" panose="02040503050406030204" pitchFamily="18" charset="0"/>
+                          </a:rPr>
+                          <m:t>, </m:t>
+                        </m:r>
+                      </m:sub>
+                    </m:sSub>
+                    <m:sSub>
+                      <m:sSubPr>
+                        <m:ctrlPr>
+                          <a:rPr lang="en-US" i="1">
+                            <a:latin typeface="Cambria Math" panose="02040503050406030204" pitchFamily="18" charset="0"/>
+                          </a:rPr>
+                        </m:ctrlPr>
+                      </m:sSubPr>
+                      <m:e>
+                        <m:r>
+                          <m:rPr>
+                            <m:sty m:val="p"/>
+                          </m:rPr>
+                          <a:rPr lang="en-US">
+                            <a:latin typeface="Cambria Math" panose="02040503050406030204" pitchFamily="18" charset="0"/>
+                          </a:rPr>
+                          <m:t>w</m:t>
+                        </m:r>
+                      </m:e>
+                      <m:sub>
+                        <m:r>
+                          <m:rPr>
+                            <m:sty m:val="p"/>
+                          </m:rPr>
+                          <a:rPr lang="en-US" b="0" i="0" smtClean="0">
+                            <a:latin typeface="Cambria Math" panose="02040503050406030204" pitchFamily="18" charset="0"/>
+                          </a:rPr>
+                          <m:t>y</m:t>
+                        </m:r>
+                        <m:r>
+                          <a:rPr lang="en-US">
+                            <a:latin typeface="Cambria Math" panose="02040503050406030204" pitchFamily="18" charset="0"/>
+                          </a:rPr>
+                          <m:t>,</m:t>
+                        </m:r>
+                        <m:r>
+                          <m:rPr>
+                            <m:sty m:val="p"/>
+                          </m:rPr>
+                          <a:rPr lang="en-US">
+                            <a:latin typeface="Cambria Math" panose="02040503050406030204" pitchFamily="18" charset="0"/>
+                          </a:rPr>
+                          <m:t>action</m:t>
+                        </m:r>
+                        <m:r>
+                          <a:rPr lang="en-US" b="0" i="0" smtClean="0">
+                            <a:latin typeface="Cambria Math" panose="02040503050406030204" pitchFamily="18" charset="0"/>
+                          </a:rPr>
+                          <m:t>2</m:t>
+                        </m:r>
+                        <m:r>
+                          <a:rPr lang="en-US">
+                            <a:latin typeface="Cambria Math" panose="02040503050406030204" pitchFamily="18" charset="0"/>
+                          </a:rPr>
+                          <m:t>, </m:t>
+                        </m:r>
+                      </m:sub>
+                    </m:sSub>
+                    <m:sSub>
+                      <m:sSubPr>
+                        <m:ctrlPr>
+                          <a:rPr lang="en-US" i="1">
+                            <a:latin typeface="Cambria Math" panose="02040503050406030204" pitchFamily="18" charset="0"/>
+                          </a:rPr>
+                        </m:ctrlPr>
+                      </m:sSubPr>
+                      <m:e>
+                        <m:r>
+                          <m:rPr>
+                            <m:sty m:val="p"/>
+                          </m:rPr>
+                          <a:rPr lang="en-US">
+                            <a:latin typeface="Cambria Math" panose="02040503050406030204" pitchFamily="18" charset="0"/>
+                          </a:rPr>
+                          <m:t>w</m:t>
+                        </m:r>
+                      </m:e>
+                      <m:sub>
+                        <m:r>
+                          <m:rPr>
+                            <m:sty m:val="p"/>
+                          </m:rPr>
+                          <a:rPr lang="en-US">
+                            <a:latin typeface="Cambria Math" panose="02040503050406030204" pitchFamily="18" charset="0"/>
+                          </a:rPr>
+                          <m:t>x</m:t>
+                        </m:r>
+                        <m:r>
+                          <a:rPr lang="en-US">
+                            <a:latin typeface="Cambria Math" panose="02040503050406030204" pitchFamily="18" charset="0"/>
+                          </a:rPr>
+                          <m:t>,</m:t>
+                        </m:r>
+                        <m:r>
+                          <m:rPr>
+                            <m:sty m:val="p"/>
+                          </m:rPr>
+                          <a:rPr lang="en-US">
+                            <a:latin typeface="Cambria Math" panose="02040503050406030204" pitchFamily="18" charset="0"/>
+                          </a:rPr>
+                          <m:t>action</m:t>
+                        </m:r>
+                        <m:r>
+                          <a:rPr lang="en-US" b="0" i="0" smtClean="0">
+                            <a:latin typeface="Cambria Math" panose="02040503050406030204" pitchFamily="18" charset="0"/>
+                          </a:rPr>
+                          <m:t>3</m:t>
+                        </m:r>
+                        <m:r>
+                          <a:rPr lang="en-US">
+                            <a:latin typeface="Cambria Math" panose="02040503050406030204" pitchFamily="18" charset="0"/>
+                          </a:rPr>
+                          <m:t>, </m:t>
+                        </m:r>
+                      </m:sub>
+                    </m:sSub>
+                    <m:sSub>
+                      <m:sSubPr>
+                        <m:ctrlPr>
+                          <a:rPr lang="en-US" i="1">
+                            <a:latin typeface="Cambria Math" panose="02040503050406030204" pitchFamily="18" charset="0"/>
+                          </a:rPr>
+                        </m:ctrlPr>
+                      </m:sSubPr>
+                      <m:e>
+                        <m:r>
+                          <m:rPr>
+                            <m:sty m:val="p"/>
+                          </m:rPr>
+                          <a:rPr lang="en-US">
+                            <a:latin typeface="Cambria Math" panose="02040503050406030204" pitchFamily="18" charset="0"/>
+                          </a:rPr>
+                          <m:t>w</m:t>
+                        </m:r>
+                      </m:e>
+                      <m:sub>
+                        <m:r>
+                          <m:rPr>
+                            <m:sty m:val="p"/>
+                          </m:rPr>
+                          <a:rPr lang="en-US" b="0" i="0" smtClean="0">
+                            <a:latin typeface="Cambria Math" panose="02040503050406030204" pitchFamily="18" charset="0"/>
+                          </a:rPr>
+                          <m:t>y</m:t>
+                        </m:r>
+                        <m:r>
+                          <a:rPr lang="en-US">
+                            <a:latin typeface="Cambria Math" panose="02040503050406030204" pitchFamily="18" charset="0"/>
+                          </a:rPr>
+                          <m:t>,</m:t>
+                        </m:r>
+                        <m:r>
+                          <m:rPr>
+                            <m:sty m:val="p"/>
+                          </m:rPr>
+                          <a:rPr lang="en-US">
+                            <a:latin typeface="Cambria Math" panose="02040503050406030204" pitchFamily="18" charset="0"/>
+                          </a:rPr>
+                          <m:t>action</m:t>
+                        </m:r>
+                        <m:r>
+                          <a:rPr lang="en-US" b="0" i="0" smtClean="0">
+                            <a:latin typeface="Cambria Math" panose="02040503050406030204" pitchFamily="18" charset="0"/>
+                          </a:rPr>
+                          <m:t>3</m:t>
+                        </m:r>
+                      </m:sub>
+                    </m:sSub>
+                    <m:r>
+                      <a:rPr lang="en-US" b="0" i="0" smtClean="0">
+                        <a:latin typeface="Cambria Math" panose="02040503050406030204" pitchFamily="18" charset="0"/>
+                      </a:rPr>
+                      <m:t>)</m:t>
+                    </m:r>
+                  </m:oMath>
+                </a14:m>
+                <a:br>
+                  <a:rPr lang="en-US" dirty="0"/>
+                </a:br>
+                <a:endParaRPr lang="en-US" dirty="0"/>
+              </a:p>
+              <a:p>
+                <a:pPr marL="0" indent="0">
+                  <a:buNone/>
+                </a:pPr>
+                <a:endParaRPr lang="en-US" dirty="0"/>
+              </a:p>
+              <a:p>
+                <a:r>
+                  <a:rPr lang="en-US" dirty="0"/>
+                  <a:t>In the prediction/update, only the intercept and the weights belonging to the action are used.</a:t>
+                </a:r>
+              </a:p>
+            </p:txBody>
+          </p:sp>
+        </mc:Choice>
+        <mc:Fallback>
+          <p:sp>
+            <p:nvSpPr>
+              <p:cNvPr id="3" name="Content Placeholder 2">
+                <a:extLst>
+                  <a:ext uri="{FF2B5EF4-FFF2-40B4-BE49-F238E27FC236}">
+                    <a16:creationId xmlns:a16="http://schemas.microsoft.com/office/drawing/2014/main" id="{715F4879-4D97-8E21-D252-963C52345972}"/>
+                  </a:ext>
+                </a:extLst>
+              </p:cNvPr>
+              <p:cNvSpPr>
+                <a:spLocks noGrp="1" noRot="1" noChangeAspect="1" noMove="1" noResize="1" noEditPoints="1" noAdjustHandles="1" noChangeArrowheads="1" noChangeShapeType="1" noTextEdit="1"/>
+              </p:cNvSpPr>
+              <p:nvPr>
+                <p:ph idx="1"/>
+              </p:nvPr>
+            </p:nvSpPr>
+            <p:spPr>
+              <a:blipFill>
+                <a:blip r:embed="rId2"/>
+                <a:stretch>
+                  <a:fillRect l="-812" t="-2296"/>
+                </a:stretch>
+              </a:blipFill>
+            </p:spPr>
+            <p:txBody>
+              <a:bodyPr/>
+              <a:lstStyle/>
+              <a:p>
+                <a:r>
+                  <a:rPr lang="en-US">
+                    <a:noFill/>
+                  </a:rPr>
+                  <a:t> </a:t>
+                </a:r>
+              </a:p>
+            </p:txBody>
+          </p:sp>
+        </mc:Fallback>
+      </mc:AlternateContent>
+      <p:sp>
+        <p:nvSpPr>
+          <p:cNvPr id="5" name="TextBox 4">
+            <a:extLst>
+              <a:ext uri="{FF2B5EF4-FFF2-40B4-BE49-F238E27FC236}">
+                <a16:creationId xmlns:a16="http://schemas.microsoft.com/office/drawing/2014/main" id="{098B0CDD-5EF7-42CA-4049-17719876723E}"/>
+              </a:ext>
+            </a:extLst>
+          </p:cNvPr>
+          <p:cNvSpPr txBox="1"/>
+          <p:nvPr/>
+        </p:nvSpPr>
+        <p:spPr>
+          <a:xfrm>
+            <a:off x="758504" y="6090407"/>
+            <a:ext cx="10595296" cy="523220"/>
+          </a:xfrm>
+          <a:prstGeom prst="rect">
+            <a:avLst/>
+          </a:prstGeom>
+          <a:noFill/>
+        </p:spPr>
+        <p:txBody>
+          <a:bodyPr wrap="square" rtlCol="0">
+            <a:spAutoFit/>
+          </a:bodyPr>
+          <a:lstStyle/>
+          <a:p>
+            <a:r>
+              <a:rPr lang="en-US" sz="1400" dirty="0"/>
+              <a:t>*Alborz </a:t>
+            </a:r>
+            <a:r>
+              <a:rPr lang="en-US" sz="1400" dirty="0" err="1"/>
+              <a:t>Geramifard</a:t>
+            </a:r>
+            <a:r>
+              <a:rPr lang="en-US" sz="1400" dirty="0"/>
+              <a:t>, Stefanie </a:t>
+            </a:r>
+            <a:r>
+              <a:rPr lang="en-US" sz="1400" dirty="0" err="1"/>
+              <a:t>Tellex</a:t>
+            </a:r>
+            <a:r>
+              <a:rPr lang="en-US" sz="1400" dirty="0"/>
+              <a:t>, and Thomas J. Walsh. A Tutorial on Linear Function Approximators for Dynamic Programming and Reinforcement Learning, Foundations and Trends in Machine Learning, Vol. 6, No. 4 (2013) 375–454 </a:t>
+            </a:r>
+          </a:p>
+        </p:txBody>
+      </p:sp>
+    </p:spTree>
+    <p:extLst>
+      <p:ext uri="{BB962C8B-B14F-4D97-AF65-F5344CB8AC3E}">
+        <p14:creationId xmlns:p14="http://schemas.microsoft.com/office/powerpoint/2010/main" val="1430297941"/>
+      </p:ext>
+    </p:extLst>
+  </p:cSld>
+  <p:clrMapOvr>
+    <a:masterClrMapping/>
+  </p:clrMapOvr>
+</p:sld>
+</file>
+
+<file path=ppt/slides/slide33.xml><?xml version="1.0" encoding="utf-8"?>
 <p:sld xmlns:a="http://schemas.openxmlformats.org/drawingml/2006/main" xmlns:r="http://schemas.openxmlformats.org/officeDocument/2006/relationships" xmlns:p="http://schemas.openxmlformats.org/presentationml/2006/main">
   <p:cSld>
     <p:spTree>
@@ -34290,7 +35105,7 @@
 </p:sld>
 </file>
 
-<file path=ppt/slides/slide33.xml><?xml version="1.0" encoding="utf-8"?>
+<file path=ppt/slides/slide34.xml><?xml version="1.0" encoding="utf-8"?>
 <p:sld xmlns:a="http://schemas.openxmlformats.org/drawingml/2006/main" xmlns:r="http://schemas.openxmlformats.org/officeDocument/2006/relationships" xmlns:p="http://schemas.openxmlformats.org/presentationml/2006/main">
   <p:cSld>
     <p:spTree>
@@ -35024,7 +35839,7 @@
 </p:sld>
 </file>
 
-<file path=ppt/slides/slide34.xml><?xml version="1.0" encoding="utf-8"?>
+<file path=ppt/slides/slide35.xml><?xml version="1.0" encoding="utf-8"?>
 <p:sld xmlns:a="http://schemas.openxmlformats.org/drawingml/2006/main" xmlns:r="http://schemas.openxmlformats.org/officeDocument/2006/relationships" xmlns:p="http://schemas.openxmlformats.org/presentationml/2006/main">
   <p:cSld>
     <p:bg>

--- a/slides/Lecture_Chapter09.pptx
+++ b/slides/Lecture_Chapter09.pptx
@@ -5,7 +5,7 @@
     <p:sldMasterId id="2147483648" r:id="rId1"/>
   </p:sldMasterIdLst>
   <p:notesMasterIdLst>
-    <p:notesMasterId r:id="rId37"/>
+    <p:notesMasterId r:id="rId38"/>
   </p:notesMasterIdLst>
   <p:sldIdLst>
     <p:sldId id="256" r:id="rId2"/>
@@ -13,36 +13,37 @@
     <p:sldId id="479" r:id="rId4"/>
     <p:sldId id="393" r:id="rId5"/>
     <p:sldId id="394" r:id="rId6"/>
-    <p:sldId id="395" r:id="rId7"/>
-    <p:sldId id="396" r:id="rId8"/>
-    <p:sldId id="397" r:id="rId9"/>
-    <p:sldId id="398" r:id="rId10"/>
-    <p:sldId id="399" r:id="rId11"/>
-    <p:sldId id="400" r:id="rId12"/>
-    <p:sldId id="401" r:id="rId13"/>
-    <p:sldId id="405" r:id="rId14"/>
-    <p:sldId id="403" r:id="rId15"/>
-    <p:sldId id="402" r:id="rId16"/>
-    <p:sldId id="404" r:id="rId17"/>
-    <p:sldId id="406" r:id="rId18"/>
-    <p:sldId id="407" r:id="rId19"/>
-    <p:sldId id="409" r:id="rId20"/>
-    <p:sldId id="480" r:id="rId21"/>
-    <p:sldId id="481" r:id="rId22"/>
-    <p:sldId id="413" r:id="rId23"/>
-    <p:sldId id="417" r:id="rId24"/>
-    <p:sldId id="418" r:id="rId25"/>
-    <p:sldId id="412" r:id="rId26"/>
-    <p:sldId id="482" r:id="rId27"/>
-    <p:sldId id="483" r:id="rId28"/>
-    <p:sldId id="410" r:id="rId29"/>
-    <p:sldId id="411" r:id="rId30"/>
-    <p:sldId id="414" r:id="rId31"/>
-    <p:sldId id="421" r:id="rId32"/>
-    <p:sldId id="484" r:id="rId33"/>
-    <p:sldId id="415" r:id="rId34"/>
-    <p:sldId id="422" r:id="rId35"/>
-    <p:sldId id="424" r:id="rId36"/>
+    <p:sldId id="420" r:id="rId7"/>
+    <p:sldId id="395" r:id="rId8"/>
+    <p:sldId id="396" r:id="rId9"/>
+    <p:sldId id="397" r:id="rId10"/>
+    <p:sldId id="398" r:id="rId11"/>
+    <p:sldId id="399" r:id="rId12"/>
+    <p:sldId id="400" r:id="rId13"/>
+    <p:sldId id="401" r:id="rId14"/>
+    <p:sldId id="405" r:id="rId15"/>
+    <p:sldId id="403" r:id="rId16"/>
+    <p:sldId id="402" r:id="rId17"/>
+    <p:sldId id="404" r:id="rId18"/>
+    <p:sldId id="406" r:id="rId19"/>
+    <p:sldId id="407" r:id="rId20"/>
+    <p:sldId id="409" r:id="rId21"/>
+    <p:sldId id="480" r:id="rId22"/>
+    <p:sldId id="481" r:id="rId23"/>
+    <p:sldId id="413" r:id="rId24"/>
+    <p:sldId id="417" r:id="rId25"/>
+    <p:sldId id="418" r:id="rId26"/>
+    <p:sldId id="412" r:id="rId27"/>
+    <p:sldId id="482" r:id="rId28"/>
+    <p:sldId id="483" r:id="rId29"/>
+    <p:sldId id="410" r:id="rId30"/>
+    <p:sldId id="411" r:id="rId31"/>
+    <p:sldId id="414" r:id="rId32"/>
+    <p:sldId id="421" r:id="rId33"/>
+    <p:sldId id="484" r:id="rId34"/>
+    <p:sldId id="415" r:id="rId35"/>
+    <p:sldId id="422" r:id="rId36"/>
+    <p:sldId id="424" r:id="rId37"/>
   </p:sldIdLst>
   <p:sldSz cx="12192000" cy="6858000"/>
   <p:notesSz cx="6858000" cy="9144000"/>
@@ -155,6 +156,7 @@
           <p14:sldIdLst>
             <p14:sldId id="393"/>
             <p14:sldId id="394"/>
+            <p14:sldId id="420"/>
             <p14:sldId id="395"/>
             <p14:sldId id="396"/>
             <p14:sldId id="397"/>
@@ -298,7 +300,7 @@
           <a:p>
             <a:fld id="{2987FC57-34F3-4A88-970B-010E7C0EC943}" type="datetimeFigureOut">
               <a:rPr lang="en-US" smtClean="0"/>
-              <a:t>4/6/2026</a:t>
+              <a:t>4/8/2026</a:t>
             </a:fld>
             <a:endParaRPr lang="en-US"/>
           </a:p>
@@ -714,7 +716,7 @@
           <a:p>
             <a:fld id="{68511844-9D4B-44EC-AD7B-A52B8DF8F904}" type="slidenum">
               <a:rPr lang="en-US" smtClean="0"/>
-              <a:t>21</a:t>
+              <a:t>22</a:t>
             </a:fld>
             <a:endParaRPr lang="en-US"/>
           </a:p>
@@ -880,7 +882,7 @@
           <a:p>
             <a:fld id="{3E22BF2E-04DA-469E-97C5-BB68A0368813}" type="datetimeFigureOut">
               <a:rPr lang="en-US" smtClean="0"/>
-              <a:t>4/6/2026</a:t>
+              <a:t>4/8/2026</a:t>
             </a:fld>
             <a:endParaRPr lang="en-US"/>
           </a:p>
@@ -1078,7 +1080,7 @@
           <a:p>
             <a:fld id="{3E22BF2E-04DA-469E-97C5-BB68A0368813}" type="datetimeFigureOut">
               <a:rPr lang="en-US" smtClean="0"/>
-              <a:t>4/6/2026</a:t>
+              <a:t>4/8/2026</a:t>
             </a:fld>
             <a:endParaRPr lang="en-US"/>
           </a:p>
@@ -1286,7 +1288,7 @@
           <a:p>
             <a:fld id="{3E22BF2E-04DA-469E-97C5-BB68A0368813}" type="datetimeFigureOut">
               <a:rPr lang="en-US" smtClean="0"/>
-              <a:t>4/6/2026</a:t>
+              <a:t>4/8/2026</a:t>
             </a:fld>
             <a:endParaRPr lang="en-US"/>
           </a:p>
@@ -1494,7 +1496,7 @@
           <a:p>
             <a:fld id="{3E22BF2E-04DA-469E-97C5-BB68A0368813}" type="datetimeFigureOut">
               <a:rPr lang="en-US" smtClean="0"/>
-              <a:t>4/6/2026</a:t>
+              <a:t>4/8/2026</a:t>
             </a:fld>
             <a:endParaRPr lang="en-US"/>
           </a:p>
@@ -1769,7 +1771,7 @@
           <a:p>
             <a:fld id="{3E22BF2E-04DA-469E-97C5-BB68A0368813}" type="datetimeFigureOut">
               <a:rPr lang="en-US" smtClean="0"/>
-              <a:t>4/6/2026</a:t>
+              <a:t>4/8/2026</a:t>
             </a:fld>
             <a:endParaRPr lang="en-US"/>
           </a:p>
@@ -2034,7 +2036,7 @@
           <a:p>
             <a:fld id="{3E22BF2E-04DA-469E-97C5-BB68A0368813}" type="datetimeFigureOut">
               <a:rPr lang="en-US" smtClean="0"/>
-              <a:t>4/6/2026</a:t>
+              <a:t>4/8/2026</a:t>
             </a:fld>
             <a:endParaRPr lang="en-US"/>
           </a:p>
@@ -2446,7 +2448,7 @@
           <a:p>
             <a:fld id="{3E22BF2E-04DA-469E-97C5-BB68A0368813}" type="datetimeFigureOut">
               <a:rPr lang="en-US" smtClean="0"/>
-              <a:t>4/6/2026</a:t>
+              <a:t>4/8/2026</a:t>
             </a:fld>
             <a:endParaRPr lang="en-US"/>
           </a:p>
@@ -2587,7 +2589,7 @@
           <a:p>
             <a:fld id="{3E22BF2E-04DA-469E-97C5-BB68A0368813}" type="datetimeFigureOut">
               <a:rPr lang="en-US" smtClean="0"/>
-              <a:t>4/6/2026</a:t>
+              <a:t>4/8/2026</a:t>
             </a:fld>
             <a:endParaRPr lang="en-US"/>
           </a:p>
@@ -2700,7 +2702,7 @@
           <a:p>
             <a:fld id="{3E22BF2E-04DA-469E-97C5-BB68A0368813}" type="datetimeFigureOut">
               <a:rPr lang="en-US" smtClean="0"/>
-              <a:t>4/6/2026</a:t>
+              <a:t>4/8/2026</a:t>
             </a:fld>
             <a:endParaRPr lang="en-US"/>
           </a:p>
@@ -3011,7 +3013,7 @@
           <a:p>
             <a:fld id="{3E22BF2E-04DA-469E-97C5-BB68A0368813}" type="datetimeFigureOut">
               <a:rPr lang="en-US" smtClean="0"/>
-              <a:t>4/6/2026</a:t>
+              <a:t>4/8/2026</a:t>
             </a:fld>
             <a:endParaRPr lang="en-US"/>
           </a:p>
@@ -3299,7 +3301,7 @@
           <a:p>
             <a:fld id="{3E22BF2E-04DA-469E-97C5-BB68A0368813}" type="datetimeFigureOut">
               <a:rPr lang="en-US" smtClean="0"/>
-              <a:t>4/6/2026</a:t>
+              <a:t>4/8/2026</a:t>
             </a:fld>
             <a:endParaRPr lang="en-US"/>
           </a:p>
@@ -3540,7 +3542,7 @@
           <a:p>
             <a:fld id="{3E22BF2E-04DA-469E-97C5-BB68A0368813}" type="datetimeFigureOut">
               <a:rPr lang="en-US" smtClean="0"/>
-              <a:t>4/6/2026</a:t>
+              <a:t>4/8/2026</a:t>
             </a:fld>
             <a:endParaRPr lang="en-US"/>
           </a:p>
@@ -4677,6 +4679,89 @@
       </p:grpSpPr>
       <p:sp>
         <p:nvSpPr>
+          <p:cNvPr id="4" name="Title 3">
+            <a:extLst>
+              <a:ext uri="{FF2B5EF4-FFF2-40B4-BE49-F238E27FC236}">
+                <a16:creationId xmlns:a16="http://schemas.microsoft.com/office/drawing/2014/main" id="{A4F2A783-50BF-C7E8-BE3C-FC01578518D2}"/>
+              </a:ext>
+            </a:extLst>
+          </p:cNvPr>
+          <p:cNvSpPr>
+            <a:spLocks noGrp="1"/>
+          </p:cNvSpPr>
+          <p:nvPr>
+            <p:ph type="title"/>
+          </p:nvPr>
+        </p:nvSpPr>
+        <p:spPr/>
+        <p:txBody>
+          <a:bodyPr/>
+          <a:lstStyle/>
+          <a:p>
+            <a:r>
+              <a:rPr lang="en-US" dirty="0"/>
+              <a:t>Gradient Methods for Prediction</a:t>
+            </a:r>
+          </a:p>
+        </p:txBody>
+      </p:sp>
+      <p:sp>
+        <p:nvSpPr>
+          <p:cNvPr id="5" name="Text Placeholder 4">
+            <a:extLst>
+              <a:ext uri="{FF2B5EF4-FFF2-40B4-BE49-F238E27FC236}">
+                <a16:creationId xmlns:a16="http://schemas.microsoft.com/office/drawing/2014/main" id="{A7EF6370-86D1-9264-5816-F21882AD1F8B}"/>
+              </a:ext>
+            </a:extLst>
+          </p:cNvPr>
+          <p:cNvSpPr>
+            <a:spLocks noGrp="1"/>
+          </p:cNvSpPr>
+          <p:nvPr>
+            <p:ph type="body" idx="1"/>
+          </p:nvPr>
+        </p:nvSpPr>
+        <p:spPr/>
+        <p:txBody>
+          <a:bodyPr/>
+          <a:lstStyle/>
+          <a:p>
+            <a:endParaRPr lang="en-US" dirty="0"/>
+          </a:p>
+        </p:txBody>
+      </p:sp>
+    </p:spTree>
+    <p:extLst>
+      <p:ext uri="{BB962C8B-B14F-4D97-AF65-F5344CB8AC3E}">
+        <p14:creationId xmlns:p14="http://schemas.microsoft.com/office/powerpoint/2010/main" val="3955007695"/>
+      </p:ext>
+    </p:extLst>
+  </p:cSld>
+  <p:clrMapOvr>
+    <a:masterClrMapping/>
+  </p:clrMapOvr>
+</p:sld>
+</file>
+
+<file path=ppt/slides/slide11.xml><?xml version="1.0" encoding="utf-8"?>
+<p:sld xmlns:a="http://schemas.openxmlformats.org/drawingml/2006/main" xmlns:r="http://schemas.openxmlformats.org/officeDocument/2006/relationships" xmlns:p="http://schemas.openxmlformats.org/presentationml/2006/main">
+  <p:cSld>
+    <p:spTree>
+      <p:nvGrpSpPr>
+        <p:cNvPr id="1" name=""/>
+        <p:cNvGrpSpPr/>
+        <p:nvPr/>
+      </p:nvGrpSpPr>
+      <p:grpSpPr>
+        <a:xfrm>
+          <a:off x="0" y="0"/>
+          <a:ext cx="0" cy="0"/>
+          <a:chOff x="0" y="0"/>
+          <a:chExt cx="0" cy="0"/>
+        </a:xfrm>
+      </p:grpSpPr>
+      <p:sp>
+        <p:nvSpPr>
           <p:cNvPr id="2" name="Title 1">
             <a:extLst>
               <a:ext uri="{FF2B5EF4-FFF2-40B4-BE49-F238E27FC236}">
@@ -6266,7 +6351,7 @@
 </p:sld>
 </file>
 
-<file path=ppt/slides/slide11.xml><?xml version="1.0" encoding="utf-8"?>
+<file path=ppt/slides/slide12.xml><?xml version="1.0" encoding="utf-8"?>
 <p:sld xmlns:a="http://schemas.openxmlformats.org/drawingml/2006/main" xmlns:r="http://schemas.openxmlformats.org/officeDocument/2006/relationships" xmlns:p="http://schemas.openxmlformats.org/presentationml/2006/main">
   <p:cSld>
     <p:spTree>
@@ -9451,7 +9536,7 @@
 </p:sld>
 </file>
 
-<file path=ppt/slides/slide12.xml><?xml version="1.0" encoding="utf-8"?>
+<file path=ppt/slides/slide13.xml><?xml version="1.0" encoding="utf-8"?>
 <p:sld xmlns:a="http://schemas.openxmlformats.org/drawingml/2006/main" xmlns:r="http://schemas.openxmlformats.org/officeDocument/2006/relationships" xmlns:p="http://schemas.openxmlformats.org/presentationml/2006/main">
   <p:cSld>
     <p:spTree>
@@ -10604,7 +10689,7 @@
 </p:sld>
 </file>
 
-<file path=ppt/slides/slide13.xml><?xml version="1.0" encoding="utf-8"?>
+<file path=ppt/slides/slide14.xml><?xml version="1.0" encoding="utf-8"?>
 <p:sld xmlns:a="http://schemas.openxmlformats.org/drawingml/2006/main" xmlns:r="http://schemas.openxmlformats.org/officeDocument/2006/relationships" xmlns:p="http://schemas.openxmlformats.org/presentationml/2006/main">
   <p:cSld>
     <p:spTree>
@@ -12198,7 +12283,7 @@
 </p:sld>
 </file>
 
-<file path=ppt/slides/slide14.xml><?xml version="1.0" encoding="utf-8"?>
+<file path=ppt/slides/slide15.xml><?xml version="1.0" encoding="utf-8"?>
 <p:sld xmlns:a="http://schemas.openxmlformats.org/drawingml/2006/main" xmlns:r="http://schemas.openxmlformats.org/officeDocument/2006/relationships" xmlns:p="http://schemas.openxmlformats.org/presentationml/2006/main">
   <p:cSld>
     <p:spTree>
@@ -12539,7 +12624,7 @@
 </p:sld>
 </file>
 
-<file path=ppt/slides/slide15.xml><?xml version="1.0" encoding="utf-8"?>
+<file path=ppt/slides/slide16.xml><?xml version="1.0" encoding="utf-8"?>
 <p:sld xmlns:a="http://schemas.openxmlformats.org/drawingml/2006/main" xmlns:r="http://schemas.openxmlformats.org/officeDocument/2006/relationships" xmlns:p="http://schemas.openxmlformats.org/presentationml/2006/main">
   <p:cSld>
     <p:spTree>
@@ -13810,7 +13895,7 @@
 </p:sld>
 </file>
 
-<file path=ppt/slides/slide16.xml><?xml version="1.0" encoding="utf-8"?>
+<file path=ppt/slides/slide17.xml><?xml version="1.0" encoding="utf-8"?>
 <p:sld xmlns:a="http://schemas.openxmlformats.org/drawingml/2006/main" xmlns:r="http://schemas.openxmlformats.org/officeDocument/2006/relationships" xmlns:p="http://schemas.openxmlformats.org/presentationml/2006/main">
   <p:cSld>
     <p:spTree>
@@ -14084,7 +14169,7 @@
 </p:sld>
 </file>
 
-<file path=ppt/slides/slide17.xml><?xml version="1.0" encoding="utf-8"?>
+<file path=ppt/slides/slide18.xml><?xml version="1.0" encoding="utf-8"?>
 <p:sld xmlns:a="http://schemas.openxmlformats.org/drawingml/2006/main" xmlns:r="http://schemas.openxmlformats.org/officeDocument/2006/relationships" xmlns:p="http://schemas.openxmlformats.org/presentationml/2006/main">
   <p:cSld>
     <p:spTree>
@@ -14265,7 +14350,7 @@
 </p:sld>
 </file>
 
-<file path=ppt/slides/slide18.xml><?xml version="1.0" encoding="utf-8"?>
+<file path=ppt/slides/slide19.xml><?xml version="1.0" encoding="utf-8"?>
 <p:sld xmlns:a="http://schemas.openxmlformats.org/drawingml/2006/main" xmlns:r="http://schemas.openxmlformats.org/officeDocument/2006/relationships" xmlns:p="http://schemas.openxmlformats.org/presentationml/2006/main">
   <p:cSld>
     <p:spTree>
@@ -15859,7 +15944,189 @@
 </p:sld>
 </file>
 
-<file path=ppt/slides/slide19.xml><?xml version="1.0" encoding="utf-8"?>
+<file path=ppt/slides/slide2.xml><?xml version="1.0" encoding="utf-8"?>
+<p:sld xmlns:a="http://schemas.openxmlformats.org/drawingml/2006/main" xmlns:r="http://schemas.openxmlformats.org/officeDocument/2006/relationships" xmlns:p="http://schemas.openxmlformats.org/presentationml/2006/main">
+  <p:cSld>
+    <p:spTree>
+      <p:nvGrpSpPr>
+        <p:cNvPr id="1" name=""/>
+        <p:cNvGrpSpPr/>
+        <p:nvPr/>
+      </p:nvGrpSpPr>
+      <p:grpSpPr>
+        <a:xfrm>
+          <a:off x="0" y="0"/>
+          <a:ext cx="0" cy="0"/>
+          <a:chOff x="0" y="0"/>
+          <a:chExt cx="0" cy="0"/>
+        </a:xfrm>
+      </p:grpSpPr>
+      <p:sp>
+        <p:nvSpPr>
+          <p:cNvPr id="2" name="Title 1">
+            <a:extLst>
+              <a:ext uri="{FF2B5EF4-FFF2-40B4-BE49-F238E27FC236}">
+                <a16:creationId xmlns:a16="http://schemas.microsoft.com/office/drawing/2014/main" id="{9E7A3493-2ED6-DF09-F569-7F3DCA81AB18}"/>
+              </a:ext>
+            </a:extLst>
+          </p:cNvPr>
+          <p:cNvSpPr>
+            <a:spLocks noGrp="1"/>
+          </p:cNvSpPr>
+          <p:nvPr>
+            <p:ph type="title"/>
+          </p:nvPr>
+        </p:nvSpPr>
+        <p:spPr/>
+        <p:txBody>
+          <a:bodyPr/>
+          <a:lstStyle/>
+          <a:p>
+            <a:r>
+              <a:rPr lang="en-US" dirty="0"/>
+              <a:t>Topics of this Course</a:t>
+            </a:r>
+          </a:p>
+        </p:txBody>
+      </p:sp>
+      <p:sp>
+        <p:nvSpPr>
+          <p:cNvPr id="3" name="Content Placeholder 2">
+            <a:extLst>
+              <a:ext uri="{FF2B5EF4-FFF2-40B4-BE49-F238E27FC236}">
+                <a16:creationId xmlns:a16="http://schemas.microsoft.com/office/drawing/2014/main" id="{8F95E019-92A5-79AC-D777-59B4926F61AA}"/>
+              </a:ext>
+            </a:extLst>
+          </p:cNvPr>
+          <p:cNvSpPr>
+            <a:spLocks noGrp="1"/>
+          </p:cNvSpPr>
+          <p:nvPr>
+            <p:ph idx="1"/>
+          </p:nvPr>
+        </p:nvSpPr>
+        <p:spPr/>
+        <p:txBody>
+          <a:bodyPr>
+            <a:normAutofit fontScale="85000" lnSpcReduction="20000"/>
+          </a:bodyPr>
+          <a:lstStyle/>
+          <a:p>
+            <a:r>
+              <a:rPr lang="en-US" dirty="0"/>
+              <a:t>Introduction to reinforcement learning</a:t>
+            </a:r>
+          </a:p>
+          <a:p>
+            <a:r>
+              <a:rPr lang="en-US" dirty="0"/>
+              <a:t>Markov decision processes</a:t>
+            </a:r>
+          </a:p>
+          <a:p>
+            <a:r>
+              <a:rPr lang="en-US" dirty="0"/>
+              <a:t>Part I: Tabular Methods</a:t>
+            </a:r>
+          </a:p>
+          <a:p>
+            <a:pPr lvl="1"/>
+            <a:r>
+              <a:rPr lang="en-US" dirty="0"/>
+              <a:t>Dynamic programming</a:t>
+            </a:r>
+          </a:p>
+          <a:p>
+            <a:pPr lvl="1"/>
+            <a:r>
+              <a:rPr lang="en-US" dirty="0"/>
+              <a:t>Monte Carlo methods</a:t>
+            </a:r>
+          </a:p>
+          <a:p>
+            <a:pPr lvl="1"/>
+            <a:r>
+              <a:rPr lang="en-US" dirty="0"/>
+              <a:t>Temporal-difference learning</a:t>
+            </a:r>
+          </a:p>
+          <a:p>
+            <a:pPr lvl="1"/>
+            <a:r>
+              <a:rPr lang="en-US" dirty="0"/>
+              <a:t>Multi-step bootstrapping</a:t>
+            </a:r>
+          </a:p>
+          <a:p>
+            <a:pPr lvl="1"/>
+            <a:r>
+              <a:rPr lang="en-US" dirty="0"/>
+              <a:t>Planning and learning with tabular methods</a:t>
+            </a:r>
+          </a:p>
+          <a:p>
+            <a:r>
+              <a:rPr lang="en-US" b="1" dirty="0"/>
+              <a:t>Part II: Approximate Solution Methods</a:t>
+            </a:r>
+          </a:p>
+          <a:p>
+            <a:pPr lvl="1"/>
+            <a:r>
+              <a:rPr lang="en-US" b="1" dirty="0"/>
+              <a:t>Prediction and Control using Approximation</a:t>
+            </a:r>
+          </a:p>
+          <a:p>
+            <a:pPr lvl="1"/>
+            <a:r>
+              <a:rPr lang="en-US" dirty="0"/>
+              <a:t>Eligibility Traces</a:t>
+            </a:r>
+          </a:p>
+          <a:p>
+            <a:pPr lvl="1"/>
+            <a:r>
+              <a:rPr lang="en-US" dirty="0"/>
+              <a:t>Policy Gradient Methods</a:t>
+            </a:r>
+          </a:p>
+          <a:p>
+            <a:r>
+              <a:rPr lang="en-US" dirty="0"/>
+              <a:t>Part III: Modern RL Methods</a:t>
+            </a:r>
+          </a:p>
+          <a:p>
+            <a:pPr lvl="1"/>
+            <a:r>
+              <a:rPr lang="en-US" dirty="0"/>
+              <a:t>Deep Reinforcement Learning</a:t>
+            </a:r>
+          </a:p>
+          <a:p>
+            <a:pPr lvl="1"/>
+            <a:r>
+              <a:rPr lang="en-US" dirty="0"/>
+              <a:t>Current Applications</a:t>
+            </a:r>
+          </a:p>
+        </p:txBody>
+      </p:sp>
+    </p:spTree>
+    <p:extLst>
+      <p:ext uri="{BB962C8B-B14F-4D97-AF65-F5344CB8AC3E}">
+        <p14:creationId xmlns:p14="http://schemas.microsoft.com/office/powerpoint/2010/main" val="3653367536"/>
+      </p:ext>
+    </p:extLst>
+  </p:cSld>
+  <p:clrMapOvr>
+    <a:masterClrMapping/>
+  </p:clrMapOvr>
+</p:sld>
+</file>
+
+<file path=ppt/slides/slide20.xml><?xml version="1.0" encoding="utf-8"?>
 <p:sld xmlns:a="http://schemas.openxmlformats.org/drawingml/2006/main" xmlns:r="http://schemas.openxmlformats.org/officeDocument/2006/relationships" xmlns:p="http://schemas.openxmlformats.org/presentationml/2006/main">
   <p:cSld>
     <p:spTree>
@@ -16443,189 +16710,7 @@
 </p:sld>
 </file>
 
-<file path=ppt/slides/slide2.xml><?xml version="1.0" encoding="utf-8"?>
-<p:sld xmlns:a="http://schemas.openxmlformats.org/drawingml/2006/main" xmlns:r="http://schemas.openxmlformats.org/officeDocument/2006/relationships" xmlns:p="http://schemas.openxmlformats.org/presentationml/2006/main">
-  <p:cSld>
-    <p:spTree>
-      <p:nvGrpSpPr>
-        <p:cNvPr id="1" name=""/>
-        <p:cNvGrpSpPr/>
-        <p:nvPr/>
-      </p:nvGrpSpPr>
-      <p:grpSpPr>
-        <a:xfrm>
-          <a:off x="0" y="0"/>
-          <a:ext cx="0" cy="0"/>
-          <a:chOff x="0" y="0"/>
-          <a:chExt cx="0" cy="0"/>
-        </a:xfrm>
-      </p:grpSpPr>
-      <p:sp>
-        <p:nvSpPr>
-          <p:cNvPr id="2" name="Title 1">
-            <a:extLst>
-              <a:ext uri="{FF2B5EF4-FFF2-40B4-BE49-F238E27FC236}">
-                <a16:creationId xmlns:a16="http://schemas.microsoft.com/office/drawing/2014/main" id="{9E7A3493-2ED6-DF09-F569-7F3DCA81AB18}"/>
-              </a:ext>
-            </a:extLst>
-          </p:cNvPr>
-          <p:cNvSpPr>
-            <a:spLocks noGrp="1"/>
-          </p:cNvSpPr>
-          <p:nvPr>
-            <p:ph type="title"/>
-          </p:nvPr>
-        </p:nvSpPr>
-        <p:spPr/>
-        <p:txBody>
-          <a:bodyPr/>
-          <a:lstStyle/>
-          <a:p>
-            <a:r>
-              <a:rPr lang="en-US" dirty="0"/>
-              <a:t>Topics of this Course</a:t>
-            </a:r>
-          </a:p>
-        </p:txBody>
-      </p:sp>
-      <p:sp>
-        <p:nvSpPr>
-          <p:cNvPr id="3" name="Content Placeholder 2">
-            <a:extLst>
-              <a:ext uri="{FF2B5EF4-FFF2-40B4-BE49-F238E27FC236}">
-                <a16:creationId xmlns:a16="http://schemas.microsoft.com/office/drawing/2014/main" id="{8F95E019-92A5-79AC-D777-59B4926F61AA}"/>
-              </a:ext>
-            </a:extLst>
-          </p:cNvPr>
-          <p:cNvSpPr>
-            <a:spLocks noGrp="1"/>
-          </p:cNvSpPr>
-          <p:nvPr>
-            <p:ph idx="1"/>
-          </p:nvPr>
-        </p:nvSpPr>
-        <p:spPr/>
-        <p:txBody>
-          <a:bodyPr>
-            <a:normAutofit fontScale="85000" lnSpcReduction="20000"/>
-          </a:bodyPr>
-          <a:lstStyle/>
-          <a:p>
-            <a:r>
-              <a:rPr lang="en-US" dirty="0"/>
-              <a:t>Introduction to reinforcement learning</a:t>
-            </a:r>
-          </a:p>
-          <a:p>
-            <a:r>
-              <a:rPr lang="en-US" dirty="0"/>
-              <a:t>Markov decision processes</a:t>
-            </a:r>
-          </a:p>
-          <a:p>
-            <a:r>
-              <a:rPr lang="en-US" dirty="0"/>
-              <a:t>Part I: Tabular Methods</a:t>
-            </a:r>
-          </a:p>
-          <a:p>
-            <a:pPr lvl="1"/>
-            <a:r>
-              <a:rPr lang="en-US" dirty="0"/>
-              <a:t>Dynamic programming</a:t>
-            </a:r>
-          </a:p>
-          <a:p>
-            <a:pPr lvl="1"/>
-            <a:r>
-              <a:rPr lang="en-US" dirty="0"/>
-              <a:t>Monte Carlo methods</a:t>
-            </a:r>
-          </a:p>
-          <a:p>
-            <a:pPr lvl="1"/>
-            <a:r>
-              <a:rPr lang="en-US" dirty="0"/>
-              <a:t>Temporal-difference learning</a:t>
-            </a:r>
-          </a:p>
-          <a:p>
-            <a:pPr lvl="1"/>
-            <a:r>
-              <a:rPr lang="en-US" dirty="0"/>
-              <a:t>Multi-step bootstrapping</a:t>
-            </a:r>
-          </a:p>
-          <a:p>
-            <a:pPr lvl="1"/>
-            <a:r>
-              <a:rPr lang="en-US" dirty="0"/>
-              <a:t>Planning and learning with tabular methods</a:t>
-            </a:r>
-          </a:p>
-          <a:p>
-            <a:r>
-              <a:rPr lang="en-US" b="1" dirty="0"/>
-              <a:t>Part II: Approximate Solution Methods</a:t>
-            </a:r>
-          </a:p>
-          <a:p>
-            <a:pPr lvl="1"/>
-            <a:r>
-              <a:rPr lang="en-US" b="1" dirty="0"/>
-              <a:t>Prediction and Control using Approximation</a:t>
-            </a:r>
-          </a:p>
-          <a:p>
-            <a:pPr lvl="1"/>
-            <a:r>
-              <a:rPr lang="en-US" dirty="0"/>
-              <a:t>Eligibility Traces</a:t>
-            </a:r>
-          </a:p>
-          <a:p>
-            <a:pPr lvl="1"/>
-            <a:r>
-              <a:rPr lang="en-US" dirty="0"/>
-              <a:t>Policy Gradient Methods</a:t>
-            </a:r>
-          </a:p>
-          <a:p>
-            <a:r>
-              <a:rPr lang="en-US" dirty="0"/>
-              <a:t>Part III: Modern RL Methods</a:t>
-            </a:r>
-          </a:p>
-          <a:p>
-            <a:pPr lvl="1"/>
-            <a:r>
-              <a:rPr lang="en-US" dirty="0"/>
-              <a:t>Deep Reinforcement Learning</a:t>
-            </a:r>
-          </a:p>
-          <a:p>
-            <a:pPr lvl="1"/>
-            <a:r>
-              <a:rPr lang="en-US" dirty="0"/>
-              <a:t>Current Applications</a:t>
-            </a:r>
-          </a:p>
-        </p:txBody>
-      </p:sp>
-    </p:spTree>
-    <p:extLst>
-      <p:ext uri="{BB962C8B-B14F-4D97-AF65-F5344CB8AC3E}">
-        <p14:creationId xmlns:p14="http://schemas.microsoft.com/office/powerpoint/2010/main" val="3653367536"/>
-      </p:ext>
-    </p:extLst>
-  </p:cSld>
-  <p:clrMapOvr>
-    <a:masterClrMapping/>
-  </p:clrMapOvr>
-</p:sld>
-</file>
-
-<file path=ppt/slides/slide20.xml><?xml version="1.0" encoding="utf-8"?>
+<file path=ppt/slides/slide21.xml><?xml version="1.0" encoding="utf-8"?>
 <p:sld xmlns:a="http://schemas.openxmlformats.org/drawingml/2006/main" xmlns:r="http://schemas.openxmlformats.org/officeDocument/2006/relationships" xmlns:p="http://schemas.openxmlformats.org/presentationml/2006/main">
   <p:cSld>
     <p:spTree>
@@ -16787,7 +16872,7 @@
 </p:sld>
 </file>
 
-<file path=ppt/slides/slide21.xml><?xml version="1.0" encoding="utf-8"?>
+<file path=ppt/slides/slide22.xml><?xml version="1.0" encoding="utf-8"?>
 <p:sld xmlns:a="http://schemas.openxmlformats.org/drawingml/2006/main" xmlns:r="http://schemas.openxmlformats.org/officeDocument/2006/relationships" xmlns:p="http://schemas.openxmlformats.org/presentationml/2006/main">
   <p:cSld>
     <p:spTree>
@@ -17329,7 +17414,7 @@
 </p:sld>
 </file>
 
-<file path=ppt/slides/slide22.xml><?xml version="1.0" encoding="utf-8"?>
+<file path=ppt/slides/slide23.xml><?xml version="1.0" encoding="utf-8"?>
 <p:sld xmlns:a="http://schemas.openxmlformats.org/drawingml/2006/main" xmlns:r="http://schemas.openxmlformats.org/officeDocument/2006/relationships" xmlns:p="http://schemas.openxmlformats.org/presentationml/2006/main">
   <p:cSld>
     <p:spTree>
@@ -19551,7 +19636,7 @@
 </p:sld>
 </file>
 
-<file path=ppt/slides/slide23.xml><?xml version="1.0" encoding="utf-8"?>
+<file path=ppt/slides/slide24.xml><?xml version="1.0" encoding="utf-8"?>
 <p:sld xmlns:a="http://schemas.openxmlformats.org/drawingml/2006/main" xmlns:r="http://schemas.openxmlformats.org/officeDocument/2006/relationships" xmlns:p="http://schemas.openxmlformats.org/presentationml/2006/main">
   <p:cSld>
     <p:spTree>
@@ -23011,7 +23096,7 @@
 </p:sld>
 </file>
 
-<file path=ppt/slides/slide24.xml><?xml version="1.0" encoding="utf-8"?>
+<file path=ppt/slides/slide25.xml><?xml version="1.0" encoding="utf-8"?>
 <p:sld xmlns:a="http://schemas.openxmlformats.org/drawingml/2006/main" xmlns:r="http://schemas.openxmlformats.org/officeDocument/2006/relationships" xmlns:p="http://schemas.openxmlformats.org/presentationml/2006/main">
   <p:cSld>
     <p:spTree>
@@ -23167,7 +23252,7 @@
 </p:sld>
 </file>
 
-<file path=ppt/slides/slide25.xml><?xml version="1.0" encoding="utf-8"?>
+<file path=ppt/slides/slide26.xml><?xml version="1.0" encoding="utf-8"?>
 <p:sld xmlns:a="http://schemas.openxmlformats.org/drawingml/2006/main" xmlns:r="http://schemas.openxmlformats.org/officeDocument/2006/relationships" xmlns:p="http://schemas.openxmlformats.org/presentationml/2006/main">
   <p:cSld>
     <p:spTree>
@@ -24561,7 +24646,7 @@
 </p:sld>
 </file>
 
-<file path=ppt/slides/slide26.xml><?xml version="1.0" encoding="utf-8"?>
+<file path=ppt/slides/slide27.xml><?xml version="1.0" encoding="utf-8"?>
 <p:sld xmlns:a="http://schemas.openxmlformats.org/drawingml/2006/main" xmlns:r="http://schemas.openxmlformats.org/officeDocument/2006/relationships" xmlns:p="http://schemas.openxmlformats.org/presentationml/2006/main">
   <p:cSld>
     <p:spTree>
@@ -24892,7 +24977,7 @@
 </p:sld>
 </file>
 
-<file path=ppt/slides/slide27.xml><?xml version="1.0" encoding="utf-8"?>
+<file path=ppt/slides/slide28.xml><?xml version="1.0" encoding="utf-8"?>
 <p:sld xmlns:a="http://schemas.openxmlformats.org/drawingml/2006/main" xmlns:r="http://schemas.openxmlformats.org/officeDocument/2006/relationships" xmlns:p="http://schemas.openxmlformats.org/presentationml/2006/main">
   <p:cSld>
     <p:spTree>
@@ -25091,7 +25176,7 @@
 </p:sld>
 </file>
 
-<file path=ppt/slides/slide28.xml><?xml version="1.0" encoding="utf-8"?>
+<file path=ppt/slides/slide29.xml><?xml version="1.0" encoding="utf-8"?>
 <p:sld xmlns:a="http://schemas.openxmlformats.org/drawingml/2006/main" xmlns:r="http://schemas.openxmlformats.org/officeDocument/2006/relationships" xmlns:p="http://schemas.openxmlformats.org/presentationml/2006/main">
   <p:cSld>
     <p:spTree>
@@ -25177,7 +25262,4358 @@
 </p:sld>
 </file>
 
-<file path=ppt/slides/slide29.xml><?xml version="1.0" encoding="utf-8"?>
+<file path=ppt/slides/slide3.xml><?xml version="1.0" encoding="utf-8"?>
+<p:sld xmlns:a="http://schemas.openxmlformats.org/drawingml/2006/main" xmlns:r="http://schemas.openxmlformats.org/officeDocument/2006/relationships" xmlns:p="http://schemas.openxmlformats.org/presentationml/2006/main">
+  <p:cSld>
+    <p:spTree>
+      <p:nvGrpSpPr>
+        <p:cNvPr id="1" name=""/>
+        <p:cNvGrpSpPr/>
+        <p:nvPr/>
+      </p:nvGrpSpPr>
+      <p:grpSpPr>
+        <a:xfrm>
+          <a:off x="0" y="0"/>
+          <a:ext cx="0" cy="0"/>
+          <a:chOff x="0" y="0"/>
+          <a:chExt cx="0" cy="0"/>
+        </a:xfrm>
+      </p:grpSpPr>
+      <p:sp>
+        <p:nvSpPr>
+          <p:cNvPr id="2" name="Title 1">
+            <a:extLst>
+              <a:ext uri="{FF2B5EF4-FFF2-40B4-BE49-F238E27FC236}">
+                <a16:creationId xmlns:a16="http://schemas.microsoft.com/office/drawing/2014/main" id="{5BA4E1A2-75E3-3C9C-6C10-EE078C5AD54A}"/>
+              </a:ext>
+            </a:extLst>
+          </p:cNvPr>
+          <p:cNvSpPr>
+            <a:spLocks noGrp="1"/>
+          </p:cNvSpPr>
+          <p:nvPr>
+            <p:ph type="title"/>
+          </p:nvPr>
+        </p:nvSpPr>
+        <p:spPr/>
+        <p:txBody>
+          <a:bodyPr/>
+          <a:lstStyle/>
+          <a:p>
+            <a:r>
+              <a:rPr lang="en-US" dirty="0"/>
+              <a:t>Summary of Notation</a:t>
+            </a:r>
+          </a:p>
+        </p:txBody>
+      </p:sp>
+      <mc:AlternateContent xmlns:mc="http://schemas.openxmlformats.org/markup-compatibility/2006">
+        <mc:Choice xmlns:a14="http://schemas.microsoft.com/office/drawing/2010/main" Requires="a14">
+          <p:sp>
+            <p:nvSpPr>
+              <p:cNvPr id="3" name="Content Placeholder 2">
+                <a:extLst>
+                  <a:ext uri="{FF2B5EF4-FFF2-40B4-BE49-F238E27FC236}">
+                    <a16:creationId xmlns:a16="http://schemas.microsoft.com/office/drawing/2014/main" id="{47E69C9C-42B6-9B0F-9AE0-20D17703E490}"/>
+                  </a:ext>
+                </a:extLst>
+              </p:cNvPr>
+              <p:cNvSpPr>
+                <a:spLocks noGrp="1"/>
+              </p:cNvSpPr>
+              <p:nvPr>
+                <p:ph idx="1"/>
+              </p:nvPr>
+            </p:nvSpPr>
+            <p:spPr>
+              <a:xfrm>
+                <a:off x="822817" y="3545635"/>
+                <a:ext cx="5273179" cy="1902124"/>
+              </a:xfrm>
+            </p:spPr>
+            <p:style>
+              <a:lnRef idx="2">
+                <a:schemeClr val="accent2"/>
+              </a:lnRef>
+              <a:fillRef idx="1">
+                <a:schemeClr val="lt1"/>
+              </a:fillRef>
+              <a:effectRef idx="0">
+                <a:schemeClr val="accent2"/>
+              </a:effectRef>
+              <a:fontRef idx="minor">
+                <a:schemeClr val="dk1"/>
+              </a:fontRef>
+            </p:style>
+            <p:txBody>
+              <a:bodyPr>
+                <a:spAutoFit/>
+              </a:bodyPr>
+              <a:lstStyle/>
+              <a:p>
+                <a:pPr marL="0" indent="0">
+                  <a:lnSpc>
+                    <a:spcPct val="100000"/>
+                  </a:lnSpc>
+                  <a:spcBef>
+                    <a:spcPts val="0"/>
+                  </a:spcBef>
+                  <a:buNone/>
+                </a:pPr>
+                <a:r>
+                  <a:rPr lang="en-US" sz="1200" b="1" dirty="0"/>
+                  <a:t>Value Function</a:t>
+                </a:r>
+                <a:endParaRPr lang="en-US" sz="1200" i="1" dirty="0">
+                  <a:latin typeface="Cambria Math" panose="02040503050406030204" pitchFamily="18" charset="0"/>
+                </a:endParaRPr>
+              </a:p>
+              <a:p>
+                <a:pPr marL="0" indent="0">
+                  <a:lnSpc>
+                    <a:spcPct val="100000"/>
+                  </a:lnSpc>
+                  <a:spcBef>
+                    <a:spcPts val="0"/>
+                  </a:spcBef>
+                  <a:buNone/>
+                </a:pPr>
+                <a14:m>
+                  <m:oMath xmlns:m="http://schemas.openxmlformats.org/officeDocument/2006/math">
+                    <m:sSub>
+                      <m:sSubPr>
+                        <m:ctrlPr>
+                          <a:rPr lang="en-US" sz="1200" i="1" dirty="0" smtClean="0">
+                            <a:latin typeface="Cambria Math" panose="02040503050406030204" pitchFamily="18" charset="0"/>
+                          </a:rPr>
+                        </m:ctrlPr>
+                      </m:sSubPr>
+                      <m:e>
+                        <m:r>
+                          <a:rPr lang="en-US" sz="1200" i="1" dirty="0">
+                            <a:latin typeface="Cambria Math" panose="02040503050406030204" pitchFamily="18" charset="0"/>
+                          </a:rPr>
+                          <m:t>𝐺</m:t>
+                        </m:r>
+                      </m:e>
+                      <m:sub>
+                        <m:r>
+                          <a:rPr lang="en-US" sz="1200" i="1" dirty="0">
+                            <a:latin typeface="Cambria Math" panose="02040503050406030204" pitchFamily="18" charset="0"/>
+                          </a:rPr>
+                          <m:t>𝑡</m:t>
+                        </m:r>
+                      </m:sub>
+                    </m:sSub>
+                  </m:oMath>
+                </a14:m>
+                <a:r>
+                  <a:rPr lang="en-US" sz="1200" dirty="0"/>
+                  <a:t> 	return (cumulative reward) following time </a:t>
+                </a:r>
+                <a14:m>
+                  <m:oMath xmlns:m="http://schemas.openxmlformats.org/officeDocument/2006/math">
+                    <m:r>
+                      <a:rPr lang="en-US" sz="1200" i="1" dirty="0">
+                        <a:latin typeface="Cambria Math" panose="02040503050406030204" pitchFamily="18" charset="0"/>
+                      </a:rPr>
+                      <m:t>𝑡</m:t>
+                    </m:r>
+                  </m:oMath>
+                </a14:m>
+                <a:endParaRPr lang="en-US" sz="1200" dirty="0"/>
+              </a:p>
+              <a:p>
+                <a:pPr marL="0" indent="0">
+                  <a:lnSpc>
+                    <a:spcPct val="100000"/>
+                  </a:lnSpc>
+                  <a:spcBef>
+                    <a:spcPts val="0"/>
+                  </a:spcBef>
+                  <a:buNone/>
+                </a:pPr>
+                <a14:m>
+                  <m:oMath xmlns:m="http://schemas.openxmlformats.org/officeDocument/2006/math">
+                    <m:sSub>
+                      <m:sSubPr>
+                        <m:ctrlPr>
+                          <a:rPr lang="en-US" sz="1200" i="1" dirty="0">
+                            <a:solidFill>
+                              <a:schemeClr val="tx1"/>
+                            </a:solidFill>
+                            <a:latin typeface="Cambria Math" panose="02040503050406030204" pitchFamily="18" charset="0"/>
+                          </a:rPr>
+                        </m:ctrlPr>
+                      </m:sSubPr>
+                      <m:e>
+                        <m:r>
+                          <a:rPr lang="en-US" sz="1200" i="1" dirty="0">
+                            <a:solidFill>
+                              <a:schemeClr val="tx1"/>
+                            </a:solidFill>
+                            <a:latin typeface="Cambria Math" panose="02040503050406030204" pitchFamily="18" charset="0"/>
+                          </a:rPr>
+                          <m:t>𝐺</m:t>
+                        </m:r>
+                      </m:e>
+                      <m:sub>
+                        <m:r>
+                          <a:rPr lang="en-US" sz="1200" i="1" dirty="0">
+                            <a:solidFill>
+                              <a:schemeClr val="tx1"/>
+                            </a:solidFill>
+                            <a:latin typeface="Cambria Math" panose="02040503050406030204" pitchFamily="18" charset="0"/>
+                          </a:rPr>
+                          <m:t>𝑡</m:t>
+                        </m:r>
+                        <m:r>
+                          <a:rPr lang="en-US" sz="1200" i="1" dirty="0">
+                            <a:solidFill>
+                              <a:schemeClr val="tx1"/>
+                            </a:solidFill>
+                            <a:latin typeface="Cambria Math" panose="02040503050406030204" pitchFamily="18" charset="0"/>
+                          </a:rPr>
+                          <m:t>:</m:t>
+                        </m:r>
+                        <m:r>
+                          <a:rPr lang="en-US" sz="1200" i="1" dirty="0">
+                            <a:solidFill>
+                              <a:schemeClr val="tx1"/>
+                            </a:solidFill>
+                            <a:latin typeface="Cambria Math" panose="02040503050406030204" pitchFamily="18" charset="0"/>
+                          </a:rPr>
+                          <m:t>h</m:t>
+                        </m:r>
+                      </m:sub>
+                    </m:sSub>
+                  </m:oMath>
+                </a14:m>
+                <a:r>
+                  <a:rPr lang="en-US" sz="1200" dirty="0">
+                    <a:solidFill>
+                      <a:schemeClr val="tx1"/>
+                    </a:solidFill>
+                  </a:rPr>
+                  <a:t>	return from </a:t>
+                </a:r>
+                <a14:m>
+                  <m:oMath xmlns:m="http://schemas.openxmlformats.org/officeDocument/2006/math">
+                    <m:r>
+                      <a:rPr lang="en-US" sz="1200" i="1" dirty="0">
+                        <a:solidFill>
+                          <a:schemeClr val="tx1"/>
+                        </a:solidFill>
+                        <a:latin typeface="Cambria Math" panose="02040503050406030204" pitchFamily="18" charset="0"/>
+                      </a:rPr>
+                      <m:t>𝑡</m:t>
+                    </m:r>
+                  </m:oMath>
+                </a14:m>
+                <a:r>
+                  <a:rPr lang="en-US" sz="1200" dirty="0">
+                    <a:solidFill>
+                      <a:schemeClr val="tx1"/>
+                    </a:solidFill>
+                  </a:rPr>
+                  <a:t> to </a:t>
+                </a:r>
+                <a14:m>
+                  <m:oMath xmlns:m="http://schemas.openxmlformats.org/officeDocument/2006/math">
+                    <m:r>
+                      <a:rPr lang="en-US" sz="1200" i="1" dirty="0">
+                        <a:solidFill>
+                          <a:schemeClr val="tx1"/>
+                        </a:solidFill>
+                        <a:latin typeface="Cambria Math" panose="02040503050406030204" pitchFamily="18" charset="0"/>
+                      </a:rPr>
+                      <m:t>h</m:t>
+                    </m:r>
+                  </m:oMath>
+                </a14:m>
+                <a:r>
+                  <a:rPr lang="en-US" sz="1200" dirty="0">
+                    <a:solidFill>
+                      <a:schemeClr val="tx1"/>
+                    </a:solidFill>
+                  </a:rPr>
+                  <a:t> (discounted and corrected)</a:t>
+                </a:r>
+                <a:endParaRPr lang="en-US" sz="1200" dirty="0"/>
+              </a:p>
+              <a:p>
+                <a:pPr marL="0" indent="0">
+                  <a:lnSpc>
+                    <a:spcPct val="100000"/>
+                  </a:lnSpc>
+                  <a:spcBef>
+                    <a:spcPts val="0"/>
+                  </a:spcBef>
+                  <a:buNone/>
+                </a:pPr>
+                <a:endParaRPr lang="en-US" sz="1200" i="1" dirty="0">
+                  <a:latin typeface="Cambria Math" panose="02040503050406030204" pitchFamily="18" charset="0"/>
+                </a:endParaRPr>
+              </a:p>
+              <a:p>
+                <a:pPr marL="0" indent="0">
+                  <a:lnSpc>
+                    <a:spcPct val="100000"/>
+                  </a:lnSpc>
+                  <a:spcBef>
+                    <a:spcPts val="0"/>
+                  </a:spcBef>
+                  <a:buNone/>
+                </a:pPr>
+                <a14:m>
+                  <m:oMath xmlns:m="http://schemas.openxmlformats.org/officeDocument/2006/math">
+                    <m:sSub>
+                      <m:sSubPr>
+                        <m:ctrlPr>
+                          <a:rPr lang="en-US" sz="1200" i="1" dirty="0">
+                            <a:latin typeface="Cambria Math" panose="02040503050406030204" pitchFamily="18" charset="0"/>
+                          </a:rPr>
+                        </m:ctrlPr>
+                      </m:sSubPr>
+                      <m:e>
+                        <m:r>
+                          <a:rPr lang="en-US" sz="1200" i="1" dirty="0">
+                            <a:latin typeface="Cambria Math" panose="02040503050406030204" pitchFamily="18" charset="0"/>
+                          </a:rPr>
+                          <m:t>𝑣</m:t>
+                        </m:r>
+                      </m:e>
+                      <m:sub>
+                        <m:r>
+                          <a:rPr lang="en-US" sz="1200" i="1" dirty="0">
+                            <a:latin typeface="Cambria Math" panose="02040503050406030204" pitchFamily="18" charset="0"/>
+                          </a:rPr>
+                          <m:t>𝜋</m:t>
+                        </m:r>
+                      </m:sub>
+                    </m:sSub>
+                    <m:r>
+                      <a:rPr lang="en-US" sz="1200" i="1" dirty="0">
+                        <a:latin typeface="Cambria Math" panose="02040503050406030204" pitchFamily="18" charset="0"/>
+                      </a:rPr>
+                      <m:t>(</m:t>
+                    </m:r>
+                    <m:r>
+                      <a:rPr lang="en-US" sz="1200" i="1" dirty="0">
+                        <a:latin typeface="Cambria Math" panose="02040503050406030204" pitchFamily="18" charset="0"/>
+                      </a:rPr>
+                      <m:t>𝑠</m:t>
+                    </m:r>
+                    <m:r>
+                      <a:rPr lang="en-US" sz="1200" i="1" dirty="0">
+                        <a:latin typeface="Cambria Math" panose="02040503050406030204" pitchFamily="18" charset="0"/>
+                      </a:rPr>
+                      <m:t>)</m:t>
+                    </m:r>
+                  </m:oMath>
+                </a14:m>
+                <a:r>
+                  <a:rPr lang="en-US" sz="1200" dirty="0"/>
+                  <a:t>	value of state </a:t>
+                </a:r>
+                <a14:m>
+                  <m:oMath xmlns:m="http://schemas.openxmlformats.org/officeDocument/2006/math">
+                    <m:r>
+                      <a:rPr lang="en-US" sz="1200" i="1" dirty="0">
+                        <a:latin typeface="Cambria Math" panose="02040503050406030204" pitchFamily="18" charset="0"/>
+                      </a:rPr>
+                      <m:t>𝑠</m:t>
+                    </m:r>
+                  </m:oMath>
+                </a14:m>
+                <a:r>
+                  <a:rPr lang="en-US" sz="1200" dirty="0"/>
+                  <a:t> under policy </a:t>
+                </a:r>
+                <a14:m>
+                  <m:oMath xmlns:m="http://schemas.openxmlformats.org/officeDocument/2006/math">
+                    <m:r>
+                      <a:rPr lang="en-US" sz="1200" i="1" dirty="0">
+                        <a:latin typeface="Cambria Math" panose="02040503050406030204" pitchFamily="18" charset="0"/>
+                      </a:rPr>
+                      <m:t>𝜋</m:t>
+                    </m:r>
+                  </m:oMath>
+                </a14:m>
+                <a:r>
+                  <a:rPr lang="en-US" sz="1200" dirty="0"/>
+                  <a:t> (expected return)</a:t>
+                </a:r>
+              </a:p>
+              <a:p>
+                <a:pPr marL="0" indent="0">
+                  <a:lnSpc>
+                    <a:spcPct val="100000"/>
+                  </a:lnSpc>
+                  <a:spcBef>
+                    <a:spcPts val="0"/>
+                  </a:spcBef>
+                  <a:buNone/>
+                </a:pPr>
+                <a14:m>
+                  <m:oMath xmlns:m="http://schemas.openxmlformats.org/officeDocument/2006/math">
+                    <m:sSub>
+                      <m:sSubPr>
+                        <m:ctrlPr>
+                          <a:rPr lang="en-US" sz="1200" i="1" dirty="0">
+                            <a:latin typeface="Cambria Math" panose="02040503050406030204" pitchFamily="18" charset="0"/>
+                          </a:rPr>
+                        </m:ctrlPr>
+                      </m:sSubPr>
+                      <m:e>
+                        <m:r>
+                          <a:rPr lang="en-US" sz="1200" i="1" dirty="0">
+                            <a:latin typeface="Cambria Math" panose="02040503050406030204" pitchFamily="18" charset="0"/>
+                          </a:rPr>
+                          <m:t>𝑣</m:t>
+                        </m:r>
+                      </m:e>
+                      <m:sub>
+                        <m:r>
+                          <a:rPr lang="en-US" sz="1200" i="1" dirty="0">
+                            <a:latin typeface="Cambria Math" panose="02040503050406030204" pitchFamily="18" charset="0"/>
+                          </a:rPr>
+                          <m:t>∗</m:t>
+                        </m:r>
+                      </m:sub>
+                    </m:sSub>
+                    <m:r>
+                      <a:rPr lang="en-US" sz="1200" i="1" dirty="0">
+                        <a:latin typeface="Cambria Math" panose="02040503050406030204" pitchFamily="18" charset="0"/>
+                      </a:rPr>
+                      <m:t>(</m:t>
+                    </m:r>
+                    <m:r>
+                      <a:rPr lang="en-US" sz="1200" i="1" dirty="0">
+                        <a:latin typeface="Cambria Math" panose="02040503050406030204" pitchFamily="18" charset="0"/>
+                      </a:rPr>
+                      <m:t>𝑠</m:t>
+                    </m:r>
+                    <m:r>
+                      <a:rPr lang="en-US" sz="1200" i="1" dirty="0">
+                        <a:latin typeface="Cambria Math" panose="02040503050406030204" pitchFamily="18" charset="0"/>
+                      </a:rPr>
+                      <m:t>)</m:t>
+                    </m:r>
+                  </m:oMath>
+                </a14:m>
+                <a:r>
+                  <a:rPr lang="en-US" sz="1200" dirty="0"/>
+                  <a:t>	value of state s under the optimal policy</a:t>
+                </a:r>
+              </a:p>
+              <a:p>
+                <a:pPr marL="0" indent="0">
+                  <a:lnSpc>
+                    <a:spcPct val="100000"/>
+                  </a:lnSpc>
+                  <a:spcBef>
+                    <a:spcPts val="0"/>
+                  </a:spcBef>
+                  <a:buNone/>
+                </a:pPr>
+                <a14:m>
+                  <m:oMath xmlns:m="http://schemas.openxmlformats.org/officeDocument/2006/math">
+                    <m:sSub>
+                      <m:sSubPr>
+                        <m:ctrlPr>
+                          <a:rPr lang="en-US" sz="1200" i="1" dirty="0">
+                            <a:latin typeface="Cambria Math" panose="02040503050406030204" pitchFamily="18" charset="0"/>
+                          </a:rPr>
+                        </m:ctrlPr>
+                      </m:sSubPr>
+                      <m:e>
+                        <m:r>
+                          <a:rPr lang="en-US" sz="1200" i="1" dirty="0">
+                            <a:latin typeface="Cambria Math" panose="02040503050406030204" pitchFamily="18" charset="0"/>
+                          </a:rPr>
+                          <m:t>𝑞</m:t>
+                        </m:r>
+                      </m:e>
+                      <m:sub>
+                        <m:r>
+                          <a:rPr lang="en-US" sz="1200" i="1" dirty="0">
+                            <a:latin typeface="Cambria Math" panose="02040503050406030204" pitchFamily="18" charset="0"/>
+                          </a:rPr>
+                          <m:t>𝜋</m:t>
+                        </m:r>
+                      </m:sub>
+                    </m:sSub>
+                    <m:r>
+                      <a:rPr lang="en-US" sz="1200" i="1" dirty="0">
+                        <a:latin typeface="Cambria Math" panose="02040503050406030204" pitchFamily="18" charset="0"/>
+                      </a:rPr>
+                      <m:t>(</m:t>
+                    </m:r>
+                    <m:r>
+                      <a:rPr lang="en-US" sz="1200" i="1" dirty="0">
+                        <a:latin typeface="Cambria Math" panose="02040503050406030204" pitchFamily="18" charset="0"/>
+                      </a:rPr>
+                      <m:t>𝑠</m:t>
+                    </m:r>
+                    <m:r>
+                      <a:rPr lang="en-US" sz="1200" i="1" dirty="0">
+                        <a:latin typeface="Cambria Math" panose="02040503050406030204" pitchFamily="18" charset="0"/>
+                      </a:rPr>
+                      <m:t>,</m:t>
+                    </m:r>
+                    <m:r>
+                      <a:rPr lang="en-US" sz="1200" i="1" dirty="0">
+                        <a:latin typeface="Cambria Math" panose="02040503050406030204" pitchFamily="18" charset="0"/>
+                      </a:rPr>
+                      <m:t>𝑎</m:t>
+                    </m:r>
+                    <m:r>
+                      <a:rPr lang="en-US" sz="1200" i="1" dirty="0">
+                        <a:latin typeface="Cambria Math" panose="02040503050406030204" pitchFamily="18" charset="0"/>
+                      </a:rPr>
+                      <m:t>)</m:t>
+                    </m:r>
+                  </m:oMath>
+                </a14:m>
+                <a:r>
+                  <a:rPr lang="en-US" sz="1200" dirty="0"/>
+                  <a:t>	value of taking action </a:t>
+                </a:r>
+                <a14:m>
+                  <m:oMath xmlns:m="http://schemas.openxmlformats.org/officeDocument/2006/math">
+                    <m:r>
+                      <a:rPr lang="en-US" sz="1200" i="1" dirty="0">
+                        <a:latin typeface="Cambria Math" panose="02040503050406030204" pitchFamily="18" charset="0"/>
+                      </a:rPr>
+                      <m:t>𝑎</m:t>
+                    </m:r>
+                  </m:oMath>
+                </a14:m>
+                <a:r>
+                  <a:rPr lang="en-US" sz="1200" dirty="0"/>
+                  <a:t> in state </a:t>
+                </a:r>
+                <a14:m>
+                  <m:oMath xmlns:m="http://schemas.openxmlformats.org/officeDocument/2006/math">
+                    <m:r>
+                      <a:rPr lang="en-US" sz="1200" i="1" dirty="0" smtClean="0">
+                        <a:latin typeface="Cambria Math" panose="02040503050406030204" pitchFamily="18" charset="0"/>
+                      </a:rPr>
+                      <m:t>𝑠</m:t>
+                    </m:r>
+                  </m:oMath>
+                </a14:m>
+                <a:r>
+                  <a:rPr lang="en-US" sz="1200" dirty="0"/>
+                  <a:t> under policy </a:t>
+                </a:r>
+                <a14:m>
+                  <m:oMath xmlns:m="http://schemas.openxmlformats.org/officeDocument/2006/math">
+                    <m:r>
+                      <a:rPr lang="en-US" sz="1200" i="1" dirty="0">
+                        <a:latin typeface="Cambria Math" panose="02040503050406030204" pitchFamily="18" charset="0"/>
+                      </a:rPr>
+                      <m:t>𝜋</m:t>
+                    </m:r>
+                  </m:oMath>
+                </a14:m>
+                <a:endParaRPr lang="en-US" sz="1200" dirty="0"/>
+              </a:p>
+              <a:p>
+                <a:pPr marL="0" indent="0">
+                  <a:lnSpc>
+                    <a:spcPct val="100000"/>
+                  </a:lnSpc>
+                  <a:spcBef>
+                    <a:spcPts val="0"/>
+                  </a:spcBef>
+                  <a:buNone/>
+                </a:pPr>
+                <a14:m>
+                  <m:oMath xmlns:m="http://schemas.openxmlformats.org/officeDocument/2006/math">
+                    <m:sSub>
+                      <m:sSubPr>
+                        <m:ctrlPr>
+                          <a:rPr lang="en-US" sz="1200" i="1" dirty="0">
+                            <a:latin typeface="Cambria Math" panose="02040503050406030204" pitchFamily="18" charset="0"/>
+                          </a:rPr>
+                        </m:ctrlPr>
+                      </m:sSubPr>
+                      <m:e>
+                        <m:r>
+                          <a:rPr lang="en-US" sz="1200" i="1" dirty="0">
+                            <a:latin typeface="Cambria Math" panose="02040503050406030204" pitchFamily="18" charset="0"/>
+                          </a:rPr>
+                          <m:t>𝑞</m:t>
+                        </m:r>
+                      </m:e>
+                      <m:sub>
+                        <m:r>
+                          <a:rPr lang="en-US" sz="1200" i="1" dirty="0">
+                            <a:latin typeface="Cambria Math" panose="02040503050406030204" pitchFamily="18" charset="0"/>
+                          </a:rPr>
+                          <m:t>∗</m:t>
+                        </m:r>
+                      </m:sub>
+                    </m:sSub>
+                    <m:r>
+                      <a:rPr lang="en-US" sz="1200" i="1" dirty="0">
+                        <a:latin typeface="Cambria Math" panose="02040503050406030204" pitchFamily="18" charset="0"/>
+                      </a:rPr>
+                      <m:t>(</m:t>
+                    </m:r>
+                    <m:r>
+                      <a:rPr lang="en-US" sz="1200" i="1" dirty="0">
+                        <a:latin typeface="Cambria Math" panose="02040503050406030204" pitchFamily="18" charset="0"/>
+                      </a:rPr>
+                      <m:t>𝑠</m:t>
+                    </m:r>
+                    <m:r>
+                      <a:rPr lang="en-US" sz="1200" i="1" dirty="0">
+                        <a:latin typeface="Cambria Math" panose="02040503050406030204" pitchFamily="18" charset="0"/>
+                      </a:rPr>
+                      <m:t>,</m:t>
+                    </m:r>
+                    <m:r>
+                      <a:rPr lang="en-US" sz="1200" i="1" dirty="0">
+                        <a:latin typeface="Cambria Math" panose="02040503050406030204" pitchFamily="18" charset="0"/>
+                      </a:rPr>
+                      <m:t>𝑎</m:t>
+                    </m:r>
+                    <m:r>
+                      <a:rPr lang="en-US" sz="1200" i="1" dirty="0">
+                        <a:latin typeface="Cambria Math" panose="02040503050406030204" pitchFamily="18" charset="0"/>
+                      </a:rPr>
+                      <m:t>)</m:t>
+                    </m:r>
+                  </m:oMath>
+                </a14:m>
+                <a:r>
+                  <a:rPr lang="en-US" sz="1200" dirty="0"/>
+                  <a:t>	value of taking action </a:t>
+                </a:r>
+                <a14:m>
+                  <m:oMath xmlns:m="http://schemas.openxmlformats.org/officeDocument/2006/math">
+                    <m:r>
+                      <a:rPr lang="en-US" sz="1200" i="1" dirty="0">
+                        <a:latin typeface="Cambria Math" panose="02040503050406030204" pitchFamily="18" charset="0"/>
+                      </a:rPr>
+                      <m:t>𝑎</m:t>
+                    </m:r>
+                  </m:oMath>
+                </a14:m>
+                <a:r>
+                  <a:rPr lang="en-US" sz="1200" dirty="0"/>
+                  <a:t> in state </a:t>
+                </a:r>
+                <a14:m>
+                  <m:oMath xmlns:m="http://schemas.openxmlformats.org/officeDocument/2006/math">
+                    <m:r>
+                      <a:rPr lang="en-US" sz="1200" i="1" dirty="0" smtClean="0">
+                        <a:latin typeface="Cambria Math" panose="02040503050406030204" pitchFamily="18" charset="0"/>
+                      </a:rPr>
+                      <m:t>𝑠</m:t>
+                    </m:r>
+                  </m:oMath>
+                </a14:m>
+                <a:r>
+                  <a:rPr lang="en-US" sz="1200" dirty="0"/>
+                  <a:t> under the optimal policy</a:t>
+                </a:r>
+              </a:p>
+              <a:p>
+                <a:pPr marL="0" indent="0">
+                  <a:spcBef>
+                    <a:spcPts val="0"/>
+                  </a:spcBef>
+                  <a:buNone/>
+                </a:pPr>
+                <a14:m>
+                  <m:oMath xmlns:m="http://schemas.openxmlformats.org/officeDocument/2006/math">
+                    <m:r>
+                      <a:rPr lang="en-US" sz="1200" i="1" dirty="0">
+                        <a:solidFill>
+                          <a:schemeClr val="tx1"/>
+                        </a:solidFill>
+                        <a:latin typeface="Cambria Math" panose="02040503050406030204" pitchFamily="18" charset="0"/>
+                      </a:rPr>
+                      <m:t>𝑉</m:t>
+                    </m:r>
+                    <m:r>
+                      <a:rPr lang="en-US" sz="1200" i="1" dirty="0">
+                        <a:solidFill>
+                          <a:schemeClr val="tx1"/>
+                        </a:solidFill>
+                        <a:latin typeface="Cambria Math" panose="02040503050406030204" pitchFamily="18" charset="0"/>
+                      </a:rPr>
+                      <m:t>, </m:t>
+                    </m:r>
+                    <m:sSub>
+                      <m:sSubPr>
+                        <m:ctrlPr>
+                          <a:rPr lang="en-US" sz="1200" i="1" dirty="0">
+                            <a:solidFill>
+                              <a:schemeClr val="tx1"/>
+                            </a:solidFill>
+                            <a:latin typeface="Cambria Math" panose="02040503050406030204" pitchFamily="18" charset="0"/>
+                          </a:rPr>
+                        </m:ctrlPr>
+                      </m:sSubPr>
+                      <m:e>
+                        <m:r>
+                          <a:rPr lang="en-US" sz="1200" i="1" dirty="0">
+                            <a:solidFill>
+                              <a:schemeClr val="tx1"/>
+                            </a:solidFill>
+                            <a:latin typeface="Cambria Math" panose="02040503050406030204" pitchFamily="18" charset="0"/>
+                          </a:rPr>
+                          <m:t>𝑉</m:t>
+                        </m:r>
+                      </m:e>
+                      <m:sub>
+                        <m:r>
+                          <a:rPr lang="en-US" sz="1200" i="1" dirty="0">
+                            <a:solidFill>
+                              <a:schemeClr val="tx1"/>
+                            </a:solidFill>
+                            <a:latin typeface="Cambria Math" panose="02040503050406030204" pitchFamily="18" charset="0"/>
+                          </a:rPr>
+                          <m:t>𝑡</m:t>
+                        </m:r>
+                      </m:sub>
+                    </m:sSub>
+                    <m:r>
+                      <a:rPr lang="en-US" sz="1200" i="1" dirty="0">
+                        <a:solidFill>
+                          <a:schemeClr val="tx1"/>
+                        </a:solidFill>
+                        <a:latin typeface="Cambria Math" panose="02040503050406030204" pitchFamily="18" charset="0"/>
+                      </a:rPr>
+                      <m:t> </m:t>
+                    </m:r>
+                  </m:oMath>
+                </a14:m>
+                <a:r>
+                  <a:rPr lang="en-US" sz="1200" dirty="0">
+                    <a:solidFill>
+                      <a:schemeClr val="tx1"/>
+                    </a:solidFill>
+                  </a:rPr>
+                  <a:t>	array estimates of state-value function </a:t>
+                </a:r>
+                <a14:m>
+                  <m:oMath xmlns:m="http://schemas.openxmlformats.org/officeDocument/2006/math">
+                    <m:sSub>
+                      <m:sSubPr>
+                        <m:ctrlPr>
+                          <a:rPr lang="en-US" sz="1200" i="1" dirty="0">
+                            <a:solidFill>
+                              <a:schemeClr val="tx1"/>
+                            </a:solidFill>
+                            <a:latin typeface="Cambria Math" panose="02040503050406030204" pitchFamily="18" charset="0"/>
+                          </a:rPr>
+                        </m:ctrlPr>
+                      </m:sSubPr>
+                      <m:e>
+                        <m:r>
+                          <a:rPr lang="en-US" sz="1200" i="1" dirty="0">
+                            <a:solidFill>
+                              <a:schemeClr val="tx1"/>
+                            </a:solidFill>
+                            <a:latin typeface="Cambria Math" panose="02040503050406030204" pitchFamily="18" charset="0"/>
+                          </a:rPr>
+                          <m:t>𝑣</m:t>
+                        </m:r>
+                      </m:e>
+                      <m:sub>
+                        <m:r>
+                          <a:rPr lang="en-US" sz="1200" i="1" dirty="0">
+                            <a:solidFill>
+                              <a:schemeClr val="tx1"/>
+                            </a:solidFill>
+                            <a:latin typeface="Cambria Math" panose="02040503050406030204" pitchFamily="18" charset="0"/>
+                          </a:rPr>
+                          <m:t>𝜋</m:t>
+                        </m:r>
+                      </m:sub>
+                    </m:sSub>
+                    <m:r>
+                      <a:rPr lang="en-US" sz="1200" i="1" dirty="0">
+                        <a:solidFill>
+                          <a:schemeClr val="tx1"/>
+                        </a:solidFill>
+                        <a:latin typeface="Cambria Math" panose="02040503050406030204" pitchFamily="18" charset="0"/>
+                      </a:rPr>
+                      <m:t> </m:t>
+                    </m:r>
+                  </m:oMath>
+                </a14:m>
+                <a:r>
+                  <a:rPr lang="en-US" sz="1200" dirty="0">
+                    <a:solidFill>
+                      <a:schemeClr val="tx1"/>
+                    </a:solidFill>
+                  </a:rPr>
+                  <a:t>or </a:t>
+                </a:r>
+                <a14:m>
+                  <m:oMath xmlns:m="http://schemas.openxmlformats.org/officeDocument/2006/math">
+                    <m:sSub>
+                      <m:sSubPr>
+                        <m:ctrlPr>
+                          <a:rPr lang="en-US" sz="1200" i="1" dirty="0">
+                            <a:solidFill>
+                              <a:schemeClr val="tx1"/>
+                            </a:solidFill>
+                            <a:latin typeface="Cambria Math" panose="02040503050406030204" pitchFamily="18" charset="0"/>
+                          </a:rPr>
+                        </m:ctrlPr>
+                      </m:sSubPr>
+                      <m:e>
+                        <m:r>
+                          <a:rPr lang="en-US" sz="1200" i="1" dirty="0">
+                            <a:solidFill>
+                              <a:schemeClr val="tx1"/>
+                            </a:solidFill>
+                            <a:latin typeface="Cambria Math" panose="02040503050406030204" pitchFamily="18" charset="0"/>
+                          </a:rPr>
+                          <m:t>𝑣</m:t>
+                        </m:r>
+                      </m:e>
+                      <m:sub>
+                        <m:r>
+                          <a:rPr lang="en-US" sz="1200" i="1" dirty="0">
+                            <a:solidFill>
+                              <a:schemeClr val="tx1"/>
+                            </a:solidFill>
+                            <a:latin typeface="Cambria Math" panose="02040503050406030204" pitchFamily="18" charset="0"/>
+                          </a:rPr>
+                          <m:t>∗</m:t>
+                        </m:r>
+                      </m:sub>
+                    </m:sSub>
+                    <m:r>
+                      <a:rPr lang="en-US" sz="1200" i="1" dirty="0">
+                        <a:solidFill>
+                          <a:schemeClr val="tx1"/>
+                        </a:solidFill>
+                        <a:latin typeface="Cambria Math" panose="02040503050406030204" pitchFamily="18" charset="0"/>
+                      </a:rPr>
+                      <m:t> </m:t>
+                    </m:r>
+                  </m:oMath>
+                </a14:m>
+                <a:endParaRPr lang="en-US" sz="1200" dirty="0">
+                  <a:solidFill>
+                    <a:schemeClr val="tx1"/>
+                  </a:solidFill>
+                </a:endParaRPr>
+              </a:p>
+              <a:p>
+                <a:pPr marL="0" indent="0">
+                  <a:spcBef>
+                    <a:spcPts val="0"/>
+                  </a:spcBef>
+                  <a:buNone/>
+                </a:pPr>
+                <a14:m>
+                  <m:oMath xmlns:m="http://schemas.openxmlformats.org/officeDocument/2006/math">
+                    <m:r>
+                      <a:rPr lang="en-US" sz="1200" i="1" dirty="0">
+                        <a:solidFill>
+                          <a:schemeClr val="tx1"/>
+                        </a:solidFill>
+                        <a:latin typeface="Cambria Math" panose="02040503050406030204" pitchFamily="18" charset="0"/>
+                      </a:rPr>
+                      <m:t>𝑄</m:t>
+                    </m:r>
+                    <m:r>
+                      <a:rPr lang="en-US" sz="1200" i="1" dirty="0">
+                        <a:solidFill>
+                          <a:schemeClr val="tx1"/>
+                        </a:solidFill>
+                        <a:latin typeface="Cambria Math" panose="02040503050406030204" pitchFamily="18" charset="0"/>
+                      </a:rPr>
+                      <m:t>,</m:t>
+                    </m:r>
+                    <m:sSub>
+                      <m:sSubPr>
+                        <m:ctrlPr>
+                          <a:rPr lang="en-US" sz="1200" i="1" dirty="0">
+                            <a:solidFill>
+                              <a:schemeClr val="tx1"/>
+                            </a:solidFill>
+                            <a:latin typeface="Cambria Math" panose="02040503050406030204" pitchFamily="18" charset="0"/>
+                          </a:rPr>
+                        </m:ctrlPr>
+                      </m:sSubPr>
+                      <m:e>
+                        <m:r>
+                          <a:rPr lang="en-US" sz="1200" i="1" dirty="0">
+                            <a:solidFill>
+                              <a:schemeClr val="tx1"/>
+                            </a:solidFill>
+                            <a:latin typeface="Cambria Math" panose="02040503050406030204" pitchFamily="18" charset="0"/>
+                          </a:rPr>
+                          <m:t>𝑄</m:t>
+                        </m:r>
+                      </m:e>
+                      <m:sub>
+                        <m:r>
+                          <a:rPr lang="en-US" sz="1200" i="1" dirty="0">
+                            <a:solidFill>
+                              <a:schemeClr val="tx1"/>
+                            </a:solidFill>
+                            <a:latin typeface="Cambria Math" panose="02040503050406030204" pitchFamily="18" charset="0"/>
+                          </a:rPr>
+                          <m:t>𝑡</m:t>
+                        </m:r>
+                      </m:sub>
+                    </m:sSub>
+                    <m:r>
+                      <a:rPr lang="en-US" sz="1200" i="1" dirty="0">
+                        <a:solidFill>
+                          <a:schemeClr val="tx1"/>
+                        </a:solidFill>
+                        <a:latin typeface="Cambria Math" panose="02040503050406030204" pitchFamily="18" charset="0"/>
+                      </a:rPr>
+                      <m:t> </m:t>
+                    </m:r>
+                  </m:oMath>
+                </a14:m>
+                <a:r>
+                  <a:rPr lang="en-US" sz="1200" dirty="0">
+                    <a:solidFill>
+                      <a:schemeClr val="tx1"/>
+                    </a:solidFill>
+                  </a:rPr>
+                  <a:t>	array estimates of action-value function </a:t>
+                </a:r>
+                <a14:m>
+                  <m:oMath xmlns:m="http://schemas.openxmlformats.org/officeDocument/2006/math">
+                    <m:sSub>
+                      <m:sSubPr>
+                        <m:ctrlPr>
+                          <a:rPr lang="en-US" sz="1200" i="1" dirty="0">
+                            <a:solidFill>
+                              <a:schemeClr val="tx1"/>
+                            </a:solidFill>
+                            <a:latin typeface="Cambria Math" panose="02040503050406030204" pitchFamily="18" charset="0"/>
+                          </a:rPr>
+                        </m:ctrlPr>
+                      </m:sSubPr>
+                      <m:e>
+                        <m:r>
+                          <a:rPr lang="en-US" sz="1200" i="1" dirty="0">
+                            <a:solidFill>
+                              <a:schemeClr val="tx1"/>
+                            </a:solidFill>
+                            <a:latin typeface="Cambria Math" panose="02040503050406030204" pitchFamily="18" charset="0"/>
+                          </a:rPr>
+                          <m:t>𝑞</m:t>
+                        </m:r>
+                      </m:e>
+                      <m:sub>
+                        <m:r>
+                          <a:rPr lang="en-US" sz="1200" i="1" dirty="0">
+                            <a:solidFill>
+                              <a:schemeClr val="tx1"/>
+                            </a:solidFill>
+                            <a:latin typeface="Cambria Math" panose="02040503050406030204" pitchFamily="18" charset="0"/>
+                          </a:rPr>
+                          <m:t>𝜋</m:t>
+                        </m:r>
+                      </m:sub>
+                    </m:sSub>
+                    <m:r>
+                      <a:rPr lang="en-US" sz="1200" i="1" dirty="0">
+                        <a:solidFill>
+                          <a:schemeClr val="tx1"/>
+                        </a:solidFill>
+                        <a:latin typeface="Cambria Math" panose="02040503050406030204" pitchFamily="18" charset="0"/>
+                      </a:rPr>
+                      <m:t> </m:t>
+                    </m:r>
+                  </m:oMath>
+                </a14:m>
+                <a:r>
+                  <a:rPr lang="en-US" sz="1200" dirty="0">
+                    <a:solidFill>
+                      <a:schemeClr val="tx1"/>
+                    </a:solidFill>
+                  </a:rPr>
+                  <a:t>or </a:t>
+                </a:r>
+                <a14:m>
+                  <m:oMath xmlns:m="http://schemas.openxmlformats.org/officeDocument/2006/math">
+                    <m:sSub>
+                      <m:sSubPr>
+                        <m:ctrlPr>
+                          <a:rPr lang="en-US" sz="1200" i="1" dirty="0">
+                            <a:solidFill>
+                              <a:schemeClr val="tx1"/>
+                            </a:solidFill>
+                            <a:latin typeface="Cambria Math" panose="02040503050406030204" pitchFamily="18" charset="0"/>
+                          </a:rPr>
+                        </m:ctrlPr>
+                      </m:sSubPr>
+                      <m:e>
+                        <m:r>
+                          <a:rPr lang="en-US" sz="1200" i="1" dirty="0">
+                            <a:solidFill>
+                              <a:schemeClr val="tx1"/>
+                            </a:solidFill>
+                            <a:latin typeface="Cambria Math" panose="02040503050406030204" pitchFamily="18" charset="0"/>
+                          </a:rPr>
+                          <m:t>𝑣</m:t>
+                        </m:r>
+                      </m:e>
+                      <m:sub>
+                        <m:r>
+                          <a:rPr lang="en-US" sz="1200" i="1" dirty="0">
+                            <a:solidFill>
+                              <a:schemeClr val="tx1"/>
+                            </a:solidFill>
+                            <a:latin typeface="Cambria Math" panose="02040503050406030204" pitchFamily="18" charset="0"/>
+                          </a:rPr>
+                          <m:t>∗</m:t>
+                        </m:r>
+                      </m:sub>
+                    </m:sSub>
+                  </m:oMath>
+                </a14:m>
+                <a:endParaRPr lang="en-US" sz="1200" dirty="0">
+                  <a:solidFill>
+                    <a:schemeClr val="tx1"/>
+                  </a:solidFill>
+                </a:endParaRPr>
+              </a:p>
+            </p:txBody>
+          </p:sp>
+        </mc:Choice>
+        <mc:Fallback>
+          <p:sp>
+            <p:nvSpPr>
+              <p:cNvPr id="3" name="Content Placeholder 2">
+                <a:extLst>
+                  <a:ext uri="{FF2B5EF4-FFF2-40B4-BE49-F238E27FC236}">
+                    <a16:creationId xmlns:a16="http://schemas.microsoft.com/office/drawing/2014/main" id="{47E69C9C-42B6-9B0F-9AE0-20D17703E490}"/>
+                  </a:ext>
+                </a:extLst>
+              </p:cNvPr>
+              <p:cNvSpPr>
+                <a:spLocks noGrp="1" noRot="1" noChangeAspect="1" noMove="1" noResize="1" noEditPoints="1" noAdjustHandles="1" noChangeArrowheads="1" noChangeShapeType="1" noTextEdit="1"/>
+              </p:cNvSpPr>
+              <p:nvPr>
+                <p:ph idx="1"/>
+              </p:nvPr>
+            </p:nvSpPr>
+            <p:spPr>
+              <a:xfrm>
+                <a:off x="822817" y="3545635"/>
+                <a:ext cx="5273179" cy="1902124"/>
+              </a:xfrm>
+              <a:blipFill>
+                <a:blip r:embed="rId2"/>
+                <a:stretch>
+                  <a:fillRect b="-952"/>
+                </a:stretch>
+              </a:blipFill>
+            </p:spPr>
+            <p:txBody>
+              <a:bodyPr/>
+              <a:lstStyle/>
+              <a:p>
+                <a:r>
+                  <a:rPr lang="en-US">
+                    <a:noFill/>
+                  </a:rPr>
+                  <a:t> </a:t>
+                </a:r>
+              </a:p>
+            </p:txBody>
+          </p:sp>
+        </mc:Fallback>
+      </mc:AlternateContent>
+      <mc:AlternateContent xmlns:mc="http://schemas.openxmlformats.org/markup-compatibility/2006" xmlns:a14="http://schemas.microsoft.com/office/drawing/2010/main">
+        <mc:Choice Requires="a14">
+          <p:sp>
+            <p:nvSpPr>
+              <p:cNvPr id="10" name="TextBox 9">
+                <a:extLst>
+                  <a:ext uri="{FF2B5EF4-FFF2-40B4-BE49-F238E27FC236}">
+                    <a16:creationId xmlns:a16="http://schemas.microsoft.com/office/drawing/2014/main" id="{5CD475E5-BE3B-5594-57DC-46A17411F2F9}"/>
+                  </a:ext>
+                </a:extLst>
+              </p:cNvPr>
+              <p:cNvSpPr txBox="1"/>
+              <p:nvPr/>
+            </p:nvSpPr>
+            <p:spPr>
+              <a:xfrm>
+                <a:off x="822820" y="1124198"/>
+                <a:ext cx="5273179" cy="2308324"/>
+              </a:xfrm>
+              <a:prstGeom prst="rect">
+                <a:avLst/>
+              </a:prstGeom>
+            </p:spPr>
+            <p:style>
+              <a:lnRef idx="2">
+                <a:schemeClr val="accent2"/>
+              </a:lnRef>
+              <a:fillRef idx="1">
+                <a:schemeClr val="lt1"/>
+              </a:fillRef>
+              <a:effectRef idx="0">
+                <a:schemeClr val="accent2"/>
+              </a:effectRef>
+              <a:fontRef idx="minor">
+                <a:schemeClr val="dk1"/>
+              </a:fontRef>
+            </p:style>
+            <p:txBody>
+              <a:bodyPr wrap="square">
+                <a:spAutoFit/>
+              </a:bodyPr>
+              <a:lstStyle/>
+              <a:p>
+                <a:r>
+                  <a:rPr lang="en-US" sz="1200" b="1" dirty="0"/>
+                  <a:t>General</a:t>
+                </a:r>
+                <a:endParaRPr lang="en-US" sz="1200" dirty="0"/>
+              </a:p>
+              <a:p>
+                <a14:m>
+                  <m:oMath xmlns:m="http://schemas.openxmlformats.org/officeDocument/2006/math">
+                    <m:r>
+                      <a:rPr lang="en-US" sz="1200" i="1" dirty="0" smtClean="0">
+                        <a:latin typeface="Cambria Math" panose="02040503050406030204" pitchFamily="18" charset="0"/>
+                      </a:rPr>
+                      <m:t>𝑋</m:t>
+                    </m:r>
+                  </m:oMath>
+                </a14:m>
+                <a:r>
+                  <a:rPr lang="en-US" sz="1200" dirty="0"/>
+                  <a:t>	capital letters: random variables</a:t>
+                </a:r>
+                <a:br>
+                  <a:rPr lang="en-US" sz="1200" dirty="0"/>
+                </a:br>
+                <a14:m>
+                  <m:oMath xmlns:m="http://schemas.openxmlformats.org/officeDocument/2006/math">
+                    <m:r>
+                      <a:rPr lang="en-US" sz="1200" b="0" i="1" smtClean="0">
+                        <a:latin typeface="Cambria Math" panose="02040503050406030204" pitchFamily="18" charset="0"/>
+                      </a:rPr>
+                      <m:t>𝑥</m:t>
+                    </m:r>
+                    <m:r>
+                      <a:rPr lang="en-US" sz="1200" b="0" i="0" smtClean="0">
+                        <a:latin typeface="Cambria Math" panose="02040503050406030204" pitchFamily="18" charset="0"/>
+                      </a:rPr>
+                      <m:t>, </m:t>
+                    </m:r>
+                    <m:r>
+                      <a:rPr lang="en-US" sz="1200" b="0" i="1" smtClean="0">
+                        <a:latin typeface="Cambria Math" panose="02040503050406030204" pitchFamily="18" charset="0"/>
+                      </a:rPr>
+                      <m:t>𝑝</m:t>
+                    </m:r>
+                  </m:oMath>
+                </a14:m>
+                <a:r>
+                  <a:rPr lang="en-US" sz="1200" dirty="0"/>
+                  <a:t>	lower-case letters: realizations of random variables </a:t>
+                </a:r>
+                <a:br>
+                  <a:rPr lang="en-US" sz="1200" dirty="0"/>
+                </a:br>
+                <a:r>
+                  <a:rPr lang="en-US" sz="1200" dirty="0"/>
+                  <a:t>	or scalar functions</a:t>
+                </a:r>
+              </a:p>
+              <a:p>
+                <a14:m>
+                  <m:oMath xmlns:m="http://schemas.openxmlformats.org/officeDocument/2006/math">
+                    <m:r>
+                      <a:rPr lang="en-US" sz="1200" b="1" i="1" smtClean="0">
+                        <a:latin typeface="Cambria Math" panose="02040503050406030204" pitchFamily="18" charset="0"/>
+                      </a:rPr>
+                      <m:t>𝒘</m:t>
+                    </m:r>
+                  </m:oMath>
+                </a14:m>
+                <a:r>
+                  <a:rPr lang="en-US" sz="1200" dirty="0"/>
+                  <a:t> 	Bold lower-case letters: real-valued vectors </a:t>
+                </a:r>
+                <a:br>
+                  <a:rPr lang="en-US" sz="1200" dirty="0"/>
+                </a:br>
+                <a:r>
+                  <a:rPr lang="en-US" sz="1200" dirty="0"/>
+                  <a:t>	(even if random variables)</a:t>
+                </a:r>
+              </a:p>
+              <a:p>
+                <a14:m>
+                  <m:oMath xmlns:m="http://schemas.openxmlformats.org/officeDocument/2006/math">
+                    <m:r>
+                      <a:rPr lang="en-US" sz="1200" b="1" i="1" smtClean="0">
+                        <a:latin typeface="Cambria Math" panose="02040503050406030204" pitchFamily="18" charset="0"/>
+                      </a:rPr>
+                      <m:t>𝑾</m:t>
+                    </m:r>
+                  </m:oMath>
+                </a14:m>
+                <a:r>
+                  <a:rPr lang="en-US" sz="1200" dirty="0"/>
+                  <a:t>	bold capitals: matrices</a:t>
+                </a:r>
+              </a:p>
+              <a:p>
+                <a14:m>
+                  <m:oMath xmlns:m="http://schemas.openxmlformats.org/officeDocument/2006/math">
+                    <m:r>
+                      <a:rPr lang="en-US" sz="1200" b="0" i="1" smtClean="0">
+                        <a:latin typeface="Cambria Math" panose="02040503050406030204" pitchFamily="18" charset="0"/>
+                      </a:rPr>
+                      <m:t>𝛼</m:t>
+                    </m:r>
+                  </m:oMath>
+                </a14:m>
+                <a:r>
+                  <a:rPr lang="en-US" sz="1200" dirty="0"/>
+                  <a:t>	Greek letters: parameters (vectors if in bolt)</a:t>
+                </a:r>
+              </a:p>
+              <a:p>
+                <a14:m>
+                  <m:oMath xmlns:m="http://schemas.openxmlformats.org/officeDocument/2006/math">
+                    <m:r>
+                      <m:rPr>
+                        <m:sty m:val="p"/>
+                      </m:rPr>
+                      <a:rPr lang="en-US" sz="1200" i="1" dirty="0">
+                        <a:latin typeface="Cambria Math" panose="02040503050406030204" pitchFamily="18" charset="0"/>
+                      </a:rPr>
+                      <m:t>Pr</m:t>
+                    </m:r>
+                    <m:r>
+                      <a:rPr lang="en-US" sz="1200" i="1" dirty="0">
+                        <a:latin typeface="Cambria Math" panose="02040503050406030204" pitchFamily="18" charset="0"/>
+                      </a:rPr>
+                      <m:t>⁡{</m:t>
+                    </m:r>
+                    <m:r>
+                      <a:rPr lang="en-US" sz="1200" i="1" dirty="0">
+                        <a:latin typeface="Cambria Math" panose="02040503050406030204" pitchFamily="18" charset="0"/>
+                      </a:rPr>
+                      <m:t>𝑋</m:t>
+                    </m:r>
+                    <m:r>
+                      <a:rPr lang="en-US" sz="1200" i="1" dirty="0">
+                        <a:latin typeface="Cambria Math" panose="02040503050406030204" pitchFamily="18" charset="0"/>
+                      </a:rPr>
+                      <m:t>=</m:t>
+                    </m:r>
+                    <m:r>
+                      <a:rPr lang="en-US" sz="1200" i="1" dirty="0">
+                        <a:latin typeface="Cambria Math" panose="02040503050406030204" pitchFamily="18" charset="0"/>
+                      </a:rPr>
+                      <m:t>𝑥</m:t>
+                    </m:r>
+                    <m:r>
+                      <a:rPr lang="en-US" sz="1200" i="1" dirty="0">
+                        <a:latin typeface="Cambria Math" panose="02040503050406030204" pitchFamily="18" charset="0"/>
+                      </a:rPr>
+                      <m:t>}</m:t>
+                    </m:r>
+                  </m:oMath>
+                </a14:m>
+                <a:r>
+                  <a:rPr lang="en-US" sz="1200" dirty="0"/>
+                  <a:t>	probability that a random variable </a:t>
+                </a:r>
+                <a14:m>
+                  <m:oMath xmlns:m="http://schemas.openxmlformats.org/officeDocument/2006/math">
+                    <m:r>
+                      <a:rPr lang="en-US" sz="1200" i="1" dirty="0">
+                        <a:latin typeface="Cambria Math" panose="02040503050406030204" pitchFamily="18" charset="0"/>
+                      </a:rPr>
+                      <m:t>𝑋</m:t>
+                    </m:r>
+                  </m:oMath>
+                </a14:m>
+                <a:r>
+                  <a:rPr lang="en-US" sz="1200" dirty="0"/>
+                  <a:t> takes on the value </a:t>
+                </a:r>
+                <a14:m>
+                  <m:oMath xmlns:m="http://schemas.openxmlformats.org/officeDocument/2006/math">
+                    <m:r>
+                      <a:rPr lang="en-US" sz="1200" i="1" dirty="0">
+                        <a:latin typeface="Cambria Math" panose="02040503050406030204" pitchFamily="18" charset="0"/>
+                      </a:rPr>
+                      <m:t>𝑥</m:t>
+                    </m:r>
+                  </m:oMath>
+                </a14:m>
+                <a:endParaRPr lang="en-US" sz="1200" dirty="0"/>
+              </a:p>
+              <a:p>
+                <a14:m>
+                  <m:oMath xmlns:m="http://schemas.openxmlformats.org/officeDocument/2006/math">
+                    <m:r>
+                      <a:rPr lang="en-US" sz="1200" i="1" dirty="0">
+                        <a:latin typeface="Cambria Math" panose="02040503050406030204" pitchFamily="18" charset="0"/>
+                      </a:rPr>
+                      <m:t>𝑋</m:t>
+                    </m:r>
+                    <m:r>
+                      <a:rPr lang="en-US" sz="1200" i="1" dirty="0">
+                        <a:latin typeface="Cambria Math" panose="02040503050406030204" pitchFamily="18" charset="0"/>
+                      </a:rPr>
+                      <m:t>~</m:t>
+                    </m:r>
+                    <m:r>
+                      <a:rPr lang="en-US" sz="1200" i="1" dirty="0">
+                        <a:latin typeface="Cambria Math" panose="02040503050406030204" pitchFamily="18" charset="0"/>
+                      </a:rPr>
+                      <m:t>𝑝</m:t>
+                    </m:r>
+                  </m:oMath>
+                </a14:m>
+                <a:r>
+                  <a:rPr lang="en-US" sz="1200" dirty="0"/>
+                  <a:t>	random variable </a:t>
+                </a:r>
+                <a14:m>
+                  <m:oMath xmlns:m="http://schemas.openxmlformats.org/officeDocument/2006/math">
+                    <m:r>
+                      <a:rPr lang="en-US" sz="1200" i="1" dirty="0">
+                        <a:latin typeface="Cambria Math" panose="02040503050406030204" pitchFamily="18" charset="0"/>
+                      </a:rPr>
+                      <m:t>𝑋</m:t>
+                    </m:r>
+                  </m:oMath>
+                </a14:m>
+                <a:r>
+                  <a:rPr lang="en-US" sz="1200" dirty="0"/>
+                  <a:t> selected from distribution </a:t>
+                </a:r>
+                <a14:m>
+                  <m:oMath xmlns:m="http://schemas.openxmlformats.org/officeDocument/2006/math">
+                    <m:r>
+                      <a:rPr lang="en-US" sz="1200" i="1">
+                        <a:latin typeface="Cambria Math" panose="02040503050406030204" pitchFamily="18" charset="0"/>
+                      </a:rPr>
+                      <m:t>𝑝</m:t>
+                    </m:r>
+                    <m:d>
+                      <m:dPr>
+                        <m:ctrlPr>
+                          <a:rPr lang="en-US" sz="1200" i="1">
+                            <a:latin typeface="Cambria Math" panose="02040503050406030204" pitchFamily="18" charset="0"/>
+                          </a:rPr>
+                        </m:ctrlPr>
+                      </m:dPr>
+                      <m:e>
+                        <m:r>
+                          <a:rPr lang="en-US" sz="1200" i="1">
+                            <a:latin typeface="Cambria Math" panose="02040503050406030204" pitchFamily="18" charset="0"/>
+                          </a:rPr>
+                          <m:t>𝑥</m:t>
+                        </m:r>
+                      </m:e>
+                    </m:d>
+                    <m:r>
+                      <a:rPr lang="en-US" sz="1200" i="1">
+                        <a:latin typeface="Cambria Math" panose="02040503050406030204" pitchFamily="18" charset="0"/>
+                      </a:rPr>
+                      <m:t>=</m:t>
+                    </m:r>
+                    <m:r>
+                      <m:rPr>
+                        <m:sty m:val="p"/>
+                      </m:rPr>
+                      <a:rPr lang="en-US" sz="1200">
+                        <a:latin typeface="Cambria Math" panose="02040503050406030204" pitchFamily="18" charset="0"/>
+                      </a:rPr>
+                      <m:t>Pr</m:t>
+                    </m:r>
+                    <m:r>
+                      <a:rPr lang="en-US" sz="1200" i="1">
+                        <a:latin typeface="Cambria Math" panose="02040503050406030204" pitchFamily="18" charset="0"/>
+                      </a:rPr>
+                      <m:t>⁡{</m:t>
+                    </m:r>
+                    <m:r>
+                      <a:rPr lang="en-US" sz="1200" i="1">
+                        <a:latin typeface="Cambria Math" panose="02040503050406030204" pitchFamily="18" charset="0"/>
+                      </a:rPr>
+                      <m:t>𝑋</m:t>
+                    </m:r>
+                    <m:r>
+                      <a:rPr lang="en-US" sz="1200" i="1">
+                        <a:latin typeface="Cambria Math" panose="02040503050406030204" pitchFamily="18" charset="0"/>
+                      </a:rPr>
+                      <m:t>=</m:t>
+                    </m:r>
+                    <m:r>
+                      <a:rPr lang="en-US" sz="1200" i="1">
+                        <a:latin typeface="Cambria Math" panose="02040503050406030204" pitchFamily="18" charset="0"/>
+                      </a:rPr>
+                      <m:t>𝑥</m:t>
+                    </m:r>
+                    <m:r>
+                      <a:rPr lang="en-US" sz="1200" i="1">
+                        <a:latin typeface="Cambria Math" panose="02040503050406030204" pitchFamily="18" charset="0"/>
+                      </a:rPr>
+                      <m:t>}</m:t>
+                    </m:r>
+                  </m:oMath>
+                </a14:m>
+                <a:endParaRPr lang="en-US" sz="1200" dirty="0"/>
+              </a:p>
+              <a:p>
+                <a14:m>
+                  <m:oMath xmlns:m="http://schemas.openxmlformats.org/officeDocument/2006/math">
+                    <m:r>
+                      <a:rPr lang="en-US" sz="1200" i="1">
+                        <a:latin typeface="Cambria Math" panose="02040503050406030204" pitchFamily="18" charset="0"/>
+                        <a:ea typeface="Cambria Math" panose="02040503050406030204" pitchFamily="18" charset="0"/>
+                      </a:rPr>
+                      <m:t>𝔼</m:t>
+                    </m:r>
+                    <m:r>
+                      <a:rPr lang="en-US" sz="1200" i="1">
+                        <a:latin typeface="Cambria Math" panose="02040503050406030204" pitchFamily="18" charset="0"/>
+                        <a:ea typeface="Cambria Math" panose="02040503050406030204" pitchFamily="18" charset="0"/>
+                      </a:rPr>
+                      <m:t>[</m:t>
+                    </m:r>
+                    <m:r>
+                      <a:rPr lang="en-US" sz="1200" i="1">
+                        <a:latin typeface="Cambria Math" panose="02040503050406030204" pitchFamily="18" charset="0"/>
+                        <a:ea typeface="Cambria Math" panose="02040503050406030204" pitchFamily="18" charset="0"/>
+                      </a:rPr>
+                      <m:t>𝑋</m:t>
+                    </m:r>
+                    <m:r>
+                      <a:rPr lang="en-US" sz="1200" i="1">
+                        <a:latin typeface="Cambria Math" panose="02040503050406030204" pitchFamily="18" charset="0"/>
+                        <a:ea typeface="Cambria Math" panose="02040503050406030204" pitchFamily="18" charset="0"/>
+                      </a:rPr>
+                      <m:t>]</m:t>
+                    </m:r>
+                  </m:oMath>
+                </a14:m>
+                <a:r>
+                  <a:rPr lang="en-US" sz="1200" dirty="0"/>
+                  <a:t>	expectation of a random variable </a:t>
+                </a:r>
+                <a14:m>
+                  <m:oMath xmlns:m="http://schemas.openxmlformats.org/officeDocument/2006/math">
+                    <m:r>
+                      <a:rPr lang="en-US" sz="1200" i="1" dirty="0">
+                        <a:latin typeface="Cambria Math" panose="02040503050406030204" pitchFamily="18" charset="0"/>
+                      </a:rPr>
+                      <m:t>𝑋</m:t>
+                    </m:r>
+                  </m:oMath>
+                </a14:m>
+                <a:r>
+                  <a:rPr lang="en-US" sz="1200" dirty="0"/>
+                  <a:t>, i.e., </a:t>
+                </a:r>
+                <a14:m>
+                  <m:oMath xmlns:m="http://schemas.openxmlformats.org/officeDocument/2006/math">
+                    <m:r>
+                      <a:rPr lang="en-US" sz="1200" i="1">
+                        <a:latin typeface="Cambria Math" panose="02040503050406030204" pitchFamily="18" charset="0"/>
+                        <a:ea typeface="Cambria Math" panose="02040503050406030204" pitchFamily="18" charset="0"/>
+                      </a:rPr>
+                      <m:t>𝔼</m:t>
+                    </m:r>
+                    <m:d>
+                      <m:dPr>
+                        <m:begChr m:val="["/>
+                        <m:endChr m:val="]"/>
+                        <m:ctrlPr>
+                          <a:rPr lang="en-US" sz="1200" i="1">
+                            <a:latin typeface="Cambria Math" panose="02040503050406030204" pitchFamily="18" charset="0"/>
+                            <a:ea typeface="Cambria Math" panose="02040503050406030204" pitchFamily="18" charset="0"/>
+                          </a:rPr>
+                        </m:ctrlPr>
+                      </m:dPr>
+                      <m:e>
+                        <m:r>
+                          <a:rPr lang="en-US" sz="1200" i="1">
+                            <a:latin typeface="Cambria Math" panose="02040503050406030204" pitchFamily="18" charset="0"/>
+                            <a:ea typeface="Cambria Math" panose="02040503050406030204" pitchFamily="18" charset="0"/>
+                          </a:rPr>
+                          <m:t>𝑋</m:t>
+                        </m:r>
+                      </m:e>
+                    </m:d>
+                    <m:r>
+                      <a:rPr lang="en-US" sz="1200" i="1">
+                        <a:latin typeface="Cambria Math" panose="02040503050406030204" pitchFamily="18" charset="0"/>
+                        <a:ea typeface="Cambria Math" panose="02040503050406030204" pitchFamily="18" charset="0"/>
+                      </a:rPr>
+                      <m:t>=</m:t>
+                    </m:r>
+                    <m:nary>
+                      <m:naryPr>
+                        <m:chr m:val="∑"/>
+                        <m:supHide m:val="on"/>
+                        <m:ctrlPr>
+                          <a:rPr lang="en-US" sz="1200" i="1">
+                            <a:latin typeface="Cambria Math" panose="02040503050406030204" pitchFamily="18" charset="0"/>
+                            <a:ea typeface="Cambria Math" panose="02040503050406030204" pitchFamily="18" charset="0"/>
+                          </a:rPr>
+                        </m:ctrlPr>
+                      </m:naryPr>
+                      <m:sub>
+                        <m:r>
+                          <a:rPr lang="en-US" sz="1200" i="1">
+                            <a:latin typeface="Cambria Math" panose="02040503050406030204" pitchFamily="18" charset="0"/>
+                            <a:ea typeface="Cambria Math" panose="02040503050406030204" pitchFamily="18" charset="0"/>
+                          </a:rPr>
+                          <m:t>𝑥</m:t>
+                        </m:r>
+                      </m:sub>
+                      <m:sup/>
+                      <m:e>
+                        <m:r>
+                          <a:rPr lang="en-US" sz="1200" i="1">
+                            <a:latin typeface="Cambria Math" panose="02040503050406030204" pitchFamily="18" charset="0"/>
+                            <a:ea typeface="Cambria Math" panose="02040503050406030204" pitchFamily="18" charset="0"/>
+                          </a:rPr>
+                          <m:t>𝑝</m:t>
+                        </m:r>
+                        <m:d>
+                          <m:dPr>
+                            <m:ctrlPr>
+                              <a:rPr lang="en-US" sz="1200" i="1">
+                                <a:latin typeface="Cambria Math" panose="02040503050406030204" pitchFamily="18" charset="0"/>
+                                <a:ea typeface="Cambria Math" panose="02040503050406030204" pitchFamily="18" charset="0"/>
+                              </a:rPr>
+                            </m:ctrlPr>
+                          </m:dPr>
+                          <m:e>
+                            <m:r>
+                              <a:rPr lang="en-US" sz="1200" i="1">
+                                <a:latin typeface="Cambria Math" panose="02040503050406030204" pitchFamily="18" charset="0"/>
+                                <a:ea typeface="Cambria Math" panose="02040503050406030204" pitchFamily="18" charset="0"/>
+                              </a:rPr>
+                              <m:t>𝑥</m:t>
+                            </m:r>
+                          </m:e>
+                        </m:d>
+                        <m:r>
+                          <a:rPr lang="en-US" sz="1200" i="1">
+                            <a:latin typeface="Cambria Math" panose="02040503050406030204" pitchFamily="18" charset="0"/>
+                            <a:ea typeface="Cambria Math" panose="02040503050406030204" pitchFamily="18" charset="0"/>
+                          </a:rPr>
+                          <m:t>𝑥</m:t>
+                        </m:r>
+                      </m:e>
+                    </m:nary>
+                  </m:oMath>
+                </a14:m>
+                <a:endParaRPr lang="en-US" sz="1200" dirty="0">
+                  <a:ea typeface="Cambria Math" panose="02040503050406030204" pitchFamily="18" charset="0"/>
+                </a:endParaRPr>
+              </a:p>
+              <a:p>
+                <a14:m>
+                  <m:oMath xmlns:m="http://schemas.openxmlformats.org/officeDocument/2006/math">
+                    <m:sSub>
+                      <m:sSubPr>
+                        <m:ctrlPr>
+                          <a:rPr lang="en-US" sz="1200" i="1" dirty="0">
+                            <a:latin typeface="Cambria Math" panose="02040503050406030204" pitchFamily="18" charset="0"/>
+                          </a:rPr>
+                        </m:ctrlPr>
+                      </m:sSubPr>
+                      <m:e>
+                        <m:r>
+                          <m:rPr>
+                            <m:sty m:val="p"/>
+                          </m:rPr>
+                          <a:rPr lang="en-US" sz="1200" dirty="0">
+                            <a:latin typeface="Cambria Math" panose="02040503050406030204" pitchFamily="18" charset="0"/>
+                          </a:rPr>
+                          <m:t>argmax</m:t>
+                        </m:r>
+                      </m:e>
+                      <m:sub>
+                        <m:r>
+                          <m:rPr>
+                            <m:sty m:val="p"/>
+                          </m:rPr>
+                          <a:rPr lang="en-US" sz="1200" dirty="0">
+                            <a:latin typeface="Cambria Math" panose="02040503050406030204" pitchFamily="18" charset="0"/>
+                          </a:rPr>
+                          <m:t>a</m:t>
+                        </m:r>
+                      </m:sub>
+                    </m:sSub>
+                    <m:r>
+                      <a:rPr lang="en-US" sz="1200" dirty="0">
+                        <a:latin typeface="Cambria Math" panose="02040503050406030204" pitchFamily="18" charset="0"/>
+                      </a:rPr>
+                      <m:t> </m:t>
+                    </m:r>
+                    <m:r>
+                      <a:rPr lang="en-US" sz="1200" i="1" dirty="0">
+                        <a:latin typeface="Cambria Math" panose="02040503050406030204" pitchFamily="18" charset="0"/>
+                      </a:rPr>
+                      <m:t>𝑓</m:t>
+                    </m:r>
+                    <m:r>
+                      <a:rPr lang="en-US" sz="1200" i="1" dirty="0">
+                        <a:latin typeface="Cambria Math" panose="02040503050406030204" pitchFamily="18" charset="0"/>
+                      </a:rPr>
+                      <m:t>(</m:t>
+                    </m:r>
+                    <m:r>
+                      <a:rPr lang="en-US" sz="1200" i="1" dirty="0">
+                        <a:latin typeface="Cambria Math" panose="02040503050406030204" pitchFamily="18" charset="0"/>
+                      </a:rPr>
+                      <m:t>𝑎</m:t>
+                    </m:r>
+                    <m:r>
+                      <a:rPr lang="en-US" sz="1200" i="1" dirty="0">
+                        <a:latin typeface="Cambria Math" panose="02040503050406030204" pitchFamily="18" charset="0"/>
+                      </a:rPr>
+                      <m:t>)</m:t>
+                    </m:r>
+                  </m:oMath>
+                </a14:m>
+                <a:r>
+                  <a:rPr lang="en-US" sz="1200" dirty="0"/>
+                  <a:t> a value of action </a:t>
+                </a:r>
+                <a14:m>
+                  <m:oMath xmlns:m="http://schemas.openxmlformats.org/officeDocument/2006/math">
+                    <m:r>
+                      <a:rPr lang="en-US" sz="1200" i="1" dirty="0">
+                        <a:latin typeface="Cambria Math" panose="02040503050406030204" pitchFamily="18" charset="0"/>
+                      </a:rPr>
+                      <m:t>𝑎</m:t>
+                    </m:r>
+                  </m:oMath>
+                </a14:m>
+                <a:r>
+                  <a:rPr lang="en-US" sz="1200" dirty="0"/>
+                  <a:t> at which </a:t>
+                </a:r>
+                <a14:m>
+                  <m:oMath xmlns:m="http://schemas.openxmlformats.org/officeDocument/2006/math">
+                    <m:r>
+                      <a:rPr lang="en-US" sz="1200" i="1" dirty="0">
+                        <a:latin typeface="Cambria Math" panose="02040503050406030204" pitchFamily="18" charset="0"/>
+                      </a:rPr>
+                      <m:t>𝑓</m:t>
+                    </m:r>
+                    <m:r>
+                      <a:rPr lang="en-US" sz="1200" i="1" dirty="0">
+                        <a:latin typeface="Cambria Math" panose="02040503050406030204" pitchFamily="18" charset="0"/>
+                      </a:rPr>
+                      <m:t>(</m:t>
+                    </m:r>
+                    <m:r>
+                      <a:rPr lang="en-US" sz="1200" i="1" dirty="0">
+                        <a:latin typeface="Cambria Math" panose="02040503050406030204" pitchFamily="18" charset="0"/>
+                      </a:rPr>
+                      <m:t>𝑎</m:t>
+                    </m:r>
+                    <m:r>
+                      <a:rPr lang="en-US" sz="1200" i="1" dirty="0">
+                        <a:latin typeface="Cambria Math" panose="02040503050406030204" pitchFamily="18" charset="0"/>
+                      </a:rPr>
+                      <m:t>)</m:t>
+                    </m:r>
+                  </m:oMath>
+                </a14:m>
+                <a:r>
+                  <a:rPr lang="en-US" sz="1200" dirty="0"/>
+                  <a:t> takes its maximal value</a:t>
+                </a:r>
+              </a:p>
+            </p:txBody>
+          </p:sp>
+        </mc:Choice>
+        <mc:Fallback xmlns="">
+          <p:sp>
+            <p:nvSpPr>
+              <p:cNvPr id="10" name="TextBox 9">
+                <a:extLst>
+                  <a:ext uri="{FF2B5EF4-FFF2-40B4-BE49-F238E27FC236}">
+                    <a16:creationId xmlns:a16="http://schemas.microsoft.com/office/drawing/2014/main" id="{5CD475E5-BE3B-5594-57DC-46A17411F2F9}"/>
+                  </a:ext>
+                </a:extLst>
+              </p:cNvPr>
+              <p:cNvSpPr txBox="1">
+                <a:spLocks noRot="1" noChangeAspect="1" noMove="1" noResize="1" noEditPoints="1" noAdjustHandles="1" noChangeArrowheads="1" noChangeShapeType="1" noTextEdit="1"/>
+              </p:cNvSpPr>
+              <p:nvPr/>
+            </p:nvSpPr>
+            <p:spPr>
+              <a:xfrm>
+                <a:off x="822820" y="1124198"/>
+                <a:ext cx="5273179" cy="2308324"/>
+              </a:xfrm>
+              <a:prstGeom prst="rect">
+                <a:avLst/>
+              </a:prstGeom>
+              <a:blipFill>
+                <a:blip r:embed="rId3"/>
+                <a:stretch>
+                  <a:fillRect b="-9424"/>
+                </a:stretch>
+              </a:blipFill>
+            </p:spPr>
+            <p:txBody>
+              <a:bodyPr/>
+              <a:lstStyle/>
+              <a:p>
+                <a:r>
+                  <a:rPr lang="en-US">
+                    <a:noFill/>
+                  </a:rPr>
+                  <a:t> </a:t>
+                </a:r>
+              </a:p>
+            </p:txBody>
+          </p:sp>
+        </mc:Fallback>
+      </mc:AlternateContent>
+      <mc:AlternateContent xmlns:mc="http://schemas.openxmlformats.org/markup-compatibility/2006" xmlns:a14="http://schemas.microsoft.com/office/drawing/2010/main">
+        <mc:Choice Requires="a14">
+          <p:sp>
+            <p:nvSpPr>
+              <p:cNvPr id="11" name="Content Placeholder 2">
+                <a:extLst>
+                  <a:ext uri="{FF2B5EF4-FFF2-40B4-BE49-F238E27FC236}">
+                    <a16:creationId xmlns:a16="http://schemas.microsoft.com/office/drawing/2014/main" id="{6F45EA4F-65F9-5141-0B09-C395CF9CA7A0}"/>
+                  </a:ext>
+                </a:extLst>
+              </p:cNvPr>
+              <p:cNvSpPr txBox="1">
+                <a:spLocks/>
+              </p:cNvSpPr>
+              <p:nvPr/>
+            </p:nvSpPr>
+            <p:spPr>
+              <a:xfrm>
+                <a:off x="6267338" y="1124198"/>
+                <a:ext cx="5273179" cy="3693383"/>
+              </a:xfrm>
+              <a:prstGeom prst="rect">
+                <a:avLst/>
+              </a:prstGeom>
+            </p:spPr>
+            <p:style>
+              <a:lnRef idx="2">
+                <a:schemeClr val="accent2"/>
+              </a:lnRef>
+              <a:fillRef idx="1">
+                <a:schemeClr val="lt1"/>
+              </a:fillRef>
+              <a:effectRef idx="0">
+                <a:schemeClr val="accent2"/>
+              </a:effectRef>
+              <a:fontRef idx="minor">
+                <a:schemeClr val="dk1"/>
+              </a:fontRef>
+            </p:style>
+            <p:txBody>
+              <a:bodyPr vert="horz" wrap="square" lIns="91440" tIns="45720" rIns="91440" bIns="45720" rtlCol="0">
+                <a:spAutoFit/>
+              </a:bodyPr>
+              <a:lstStyle>
+                <a:lvl1pPr marL="228600" indent="-228600" algn="l" defTabSz="914400" rtl="0" eaLnBrk="1" latinLnBrk="0" hangingPunct="1">
+                  <a:lnSpc>
+                    <a:spcPct val="90000"/>
+                  </a:lnSpc>
+                  <a:spcBef>
+                    <a:spcPts val="1000"/>
+                  </a:spcBef>
+                  <a:buFont typeface="Arial" panose="020B0604020202020204" pitchFamily="34" charset="0"/>
+                  <a:buChar char="•"/>
+                  <a:defRPr sz="2800" kern="1200">
+                    <a:solidFill>
+                      <a:schemeClr val="tx1"/>
+                    </a:solidFill>
+                    <a:latin typeface="+mn-lt"/>
+                    <a:ea typeface="+mn-ea"/>
+                    <a:cs typeface="+mn-cs"/>
+                  </a:defRPr>
+                </a:lvl1pPr>
+                <a:lvl2pPr marL="685800" indent="-228600" algn="l" defTabSz="914400" rtl="0" eaLnBrk="1" latinLnBrk="0" hangingPunct="1">
+                  <a:lnSpc>
+                    <a:spcPct val="90000"/>
+                  </a:lnSpc>
+                  <a:spcBef>
+                    <a:spcPts val="500"/>
+                  </a:spcBef>
+                  <a:buFont typeface="Arial" panose="020B0604020202020204" pitchFamily="34" charset="0"/>
+                  <a:buChar char="•"/>
+                  <a:defRPr sz="2400" kern="1200">
+                    <a:solidFill>
+                      <a:schemeClr val="tx1"/>
+                    </a:solidFill>
+                    <a:latin typeface="+mn-lt"/>
+                    <a:ea typeface="+mn-ea"/>
+                    <a:cs typeface="+mn-cs"/>
+                  </a:defRPr>
+                </a:lvl2pPr>
+                <a:lvl3pPr marL="1143000" indent="-228600" algn="l" defTabSz="914400" rtl="0" eaLnBrk="1" latinLnBrk="0" hangingPunct="1">
+                  <a:lnSpc>
+                    <a:spcPct val="90000"/>
+                  </a:lnSpc>
+                  <a:spcBef>
+                    <a:spcPts val="500"/>
+                  </a:spcBef>
+                  <a:buFont typeface="Arial" panose="020B0604020202020204" pitchFamily="34" charset="0"/>
+                  <a:buChar char="•"/>
+                  <a:defRPr sz="2000" kern="1200">
+                    <a:solidFill>
+                      <a:schemeClr val="tx1"/>
+                    </a:solidFill>
+                    <a:latin typeface="+mn-lt"/>
+                    <a:ea typeface="+mn-ea"/>
+                    <a:cs typeface="+mn-cs"/>
+                  </a:defRPr>
+                </a:lvl3pPr>
+                <a:lvl4pPr marL="1600200" indent="-228600" algn="l" defTabSz="914400" rtl="0" eaLnBrk="1" latinLnBrk="0" hangingPunct="1">
+                  <a:lnSpc>
+                    <a:spcPct val="90000"/>
+                  </a:lnSpc>
+                  <a:spcBef>
+                    <a:spcPts val="500"/>
+                  </a:spcBef>
+                  <a:buFont typeface="Arial" panose="020B0604020202020204" pitchFamily="34" charset="0"/>
+                  <a:buChar char="•"/>
+                  <a:defRPr sz="1800" kern="1200">
+                    <a:solidFill>
+                      <a:schemeClr val="tx1"/>
+                    </a:solidFill>
+                    <a:latin typeface="+mn-lt"/>
+                    <a:ea typeface="+mn-ea"/>
+                    <a:cs typeface="+mn-cs"/>
+                  </a:defRPr>
+                </a:lvl4pPr>
+                <a:lvl5pPr marL="2057400" indent="-228600" algn="l" defTabSz="914400" rtl="0" eaLnBrk="1" latinLnBrk="0" hangingPunct="1">
+                  <a:lnSpc>
+                    <a:spcPct val="90000"/>
+                  </a:lnSpc>
+                  <a:spcBef>
+                    <a:spcPts val="500"/>
+                  </a:spcBef>
+                  <a:buFont typeface="Arial" panose="020B0604020202020204" pitchFamily="34" charset="0"/>
+                  <a:buChar char="•"/>
+                  <a:defRPr sz="1800" kern="1200">
+                    <a:solidFill>
+                      <a:schemeClr val="tx1"/>
+                    </a:solidFill>
+                    <a:latin typeface="+mn-lt"/>
+                    <a:ea typeface="+mn-ea"/>
+                    <a:cs typeface="+mn-cs"/>
+                  </a:defRPr>
+                </a:lvl5pPr>
+                <a:lvl6pPr marL="2514600" indent="-228600" algn="l" defTabSz="914400" rtl="0" eaLnBrk="1" latinLnBrk="0" hangingPunct="1">
+                  <a:lnSpc>
+                    <a:spcPct val="90000"/>
+                  </a:lnSpc>
+                  <a:spcBef>
+                    <a:spcPts val="500"/>
+                  </a:spcBef>
+                  <a:buFont typeface="Arial" panose="020B0604020202020204" pitchFamily="34" charset="0"/>
+                  <a:buChar char="•"/>
+                  <a:defRPr sz="1800" kern="1200">
+                    <a:solidFill>
+                      <a:schemeClr val="tx1"/>
+                    </a:solidFill>
+                    <a:latin typeface="+mn-lt"/>
+                    <a:ea typeface="+mn-ea"/>
+                    <a:cs typeface="+mn-cs"/>
+                  </a:defRPr>
+                </a:lvl6pPr>
+                <a:lvl7pPr marL="2971800" indent="-228600" algn="l" defTabSz="914400" rtl="0" eaLnBrk="1" latinLnBrk="0" hangingPunct="1">
+                  <a:lnSpc>
+                    <a:spcPct val="90000"/>
+                  </a:lnSpc>
+                  <a:spcBef>
+                    <a:spcPts val="500"/>
+                  </a:spcBef>
+                  <a:buFont typeface="Arial" panose="020B0604020202020204" pitchFamily="34" charset="0"/>
+                  <a:buChar char="•"/>
+                  <a:defRPr sz="1800" kern="1200">
+                    <a:solidFill>
+                      <a:schemeClr val="tx1"/>
+                    </a:solidFill>
+                    <a:latin typeface="+mn-lt"/>
+                    <a:ea typeface="+mn-ea"/>
+                    <a:cs typeface="+mn-cs"/>
+                  </a:defRPr>
+                </a:lvl7pPr>
+                <a:lvl8pPr marL="3429000" indent="-228600" algn="l" defTabSz="914400" rtl="0" eaLnBrk="1" latinLnBrk="0" hangingPunct="1">
+                  <a:lnSpc>
+                    <a:spcPct val="90000"/>
+                  </a:lnSpc>
+                  <a:spcBef>
+                    <a:spcPts val="500"/>
+                  </a:spcBef>
+                  <a:buFont typeface="Arial" panose="020B0604020202020204" pitchFamily="34" charset="0"/>
+                  <a:buChar char="•"/>
+                  <a:defRPr sz="1800" kern="1200">
+                    <a:solidFill>
+                      <a:schemeClr val="tx1"/>
+                    </a:solidFill>
+                    <a:latin typeface="+mn-lt"/>
+                    <a:ea typeface="+mn-ea"/>
+                    <a:cs typeface="+mn-cs"/>
+                  </a:defRPr>
+                </a:lvl8pPr>
+                <a:lvl9pPr marL="3886200" indent="-228600" algn="l" defTabSz="914400" rtl="0" eaLnBrk="1" latinLnBrk="0" hangingPunct="1">
+                  <a:lnSpc>
+                    <a:spcPct val="90000"/>
+                  </a:lnSpc>
+                  <a:spcBef>
+                    <a:spcPts val="500"/>
+                  </a:spcBef>
+                  <a:buFont typeface="Arial" panose="020B0604020202020204" pitchFamily="34" charset="0"/>
+                  <a:buChar char="•"/>
+                  <a:defRPr sz="1800" kern="1200">
+                    <a:solidFill>
+                      <a:schemeClr val="tx1"/>
+                    </a:solidFill>
+                    <a:latin typeface="+mn-lt"/>
+                    <a:ea typeface="+mn-ea"/>
+                    <a:cs typeface="+mn-cs"/>
+                  </a:defRPr>
+                </a:lvl9pPr>
+              </a:lstStyle>
+              <a:p>
+                <a:pPr marL="0" indent="0">
+                  <a:spcBef>
+                    <a:spcPts val="0"/>
+                  </a:spcBef>
+                  <a:buNone/>
+                </a:pPr>
+                <a:r>
+                  <a:rPr lang="en-US" sz="1200" b="1" dirty="0"/>
+                  <a:t>MDP</a:t>
+                </a:r>
+              </a:p>
+              <a:p>
+                <a:pPr marL="0" indent="0">
+                  <a:spcBef>
+                    <a:spcPts val="0"/>
+                  </a:spcBef>
+                  <a:buNone/>
+                </a:pPr>
+                <a14:m>
+                  <m:oMath xmlns:m="http://schemas.openxmlformats.org/officeDocument/2006/math">
+                    <m:r>
+                      <a:rPr lang="en-US" sz="1200" i="1" dirty="0" smtClean="0">
+                        <a:latin typeface="Cambria Math" panose="02040503050406030204" pitchFamily="18" charset="0"/>
+                      </a:rPr>
+                      <m:t>𝑠</m:t>
+                    </m:r>
+                    <m:r>
+                      <a:rPr lang="en-US" sz="1200" i="1" dirty="0" smtClean="0">
+                        <a:latin typeface="Cambria Math" panose="02040503050406030204" pitchFamily="18" charset="0"/>
+                      </a:rPr>
+                      <m:t>, </m:t>
+                    </m:r>
+                    <m:r>
+                      <a:rPr lang="en-US" sz="1200" i="1" dirty="0" smtClean="0">
+                        <a:latin typeface="Cambria Math" panose="02040503050406030204" pitchFamily="18" charset="0"/>
+                      </a:rPr>
+                      <m:t>𝑠</m:t>
+                    </m:r>
+                    <m:r>
+                      <a:rPr lang="en-US" sz="1200" b="0" i="1" dirty="0" smtClean="0">
+                        <a:latin typeface="Cambria Math" panose="02040503050406030204" pitchFamily="18" charset="0"/>
+                      </a:rPr>
+                      <m:t>′</m:t>
+                    </m:r>
+                  </m:oMath>
+                </a14:m>
+                <a:r>
+                  <a:rPr lang="en-US" sz="1200" dirty="0"/>
+                  <a:t> 	states</a:t>
+                </a:r>
+              </a:p>
+              <a:p>
+                <a:pPr marL="0" indent="0">
+                  <a:spcBef>
+                    <a:spcPts val="0"/>
+                  </a:spcBef>
+                  <a:buNone/>
+                </a:pPr>
+                <a14:m>
+                  <m:oMath xmlns:m="http://schemas.openxmlformats.org/officeDocument/2006/math">
+                    <m:r>
+                      <a:rPr lang="en-US" sz="1200" i="1" dirty="0" smtClean="0">
+                        <a:latin typeface="Cambria Math" panose="02040503050406030204" pitchFamily="18" charset="0"/>
+                      </a:rPr>
+                      <m:t>𝑎</m:t>
+                    </m:r>
+                  </m:oMath>
+                </a14:m>
+                <a:r>
+                  <a:rPr lang="en-US" sz="1200" dirty="0"/>
+                  <a:t> 	an action</a:t>
+                </a:r>
+              </a:p>
+              <a:p>
+                <a:pPr marL="0" indent="0">
+                  <a:spcBef>
+                    <a:spcPts val="0"/>
+                  </a:spcBef>
+                  <a:buNone/>
+                </a:pPr>
+                <a14:m>
+                  <m:oMath xmlns:m="http://schemas.openxmlformats.org/officeDocument/2006/math">
+                    <m:r>
+                      <a:rPr lang="en-US" sz="1200" i="1" dirty="0" smtClean="0">
+                        <a:latin typeface="Cambria Math" panose="02040503050406030204" pitchFamily="18" charset="0"/>
+                      </a:rPr>
+                      <m:t>𝑟</m:t>
+                    </m:r>
+                  </m:oMath>
+                </a14:m>
+                <a:r>
+                  <a:rPr lang="en-US" sz="1200" dirty="0"/>
+                  <a:t> 	a reward</a:t>
+                </a:r>
+              </a:p>
+              <a:p>
+                <a:pPr marL="0" indent="0">
+                  <a:spcBef>
+                    <a:spcPts val="0"/>
+                  </a:spcBef>
+                  <a:buNone/>
+                </a:pPr>
+                <a14:m>
+                  <m:oMath xmlns:m="http://schemas.openxmlformats.org/officeDocument/2006/math">
+                    <m:r>
+                      <a:rPr lang="en-US" sz="1200" i="1" dirty="0" smtClean="0">
+                        <a:latin typeface="Cambria Math" panose="02040503050406030204" pitchFamily="18" charset="0"/>
+                        <a:ea typeface="Cambria Math" panose="02040503050406030204" pitchFamily="18" charset="0"/>
+                      </a:rPr>
+                      <m:t>𝒮</m:t>
+                    </m:r>
+                  </m:oMath>
+                </a14:m>
+                <a:r>
+                  <a:rPr lang="en-US" sz="1200" dirty="0"/>
+                  <a:t> 	set of all (nonterminal) states, </a:t>
+                </a:r>
+                <a14:m>
+                  <m:oMath xmlns:m="http://schemas.openxmlformats.org/officeDocument/2006/math">
+                    <m:sSup>
+                      <m:sSupPr>
+                        <m:ctrlPr>
+                          <a:rPr lang="en-US" sz="1200" b="0" i="1" dirty="0" smtClean="0">
+                            <a:latin typeface="Cambria Math" panose="02040503050406030204" pitchFamily="18" charset="0"/>
+                            <a:ea typeface="Cambria Math" panose="02040503050406030204" pitchFamily="18" charset="0"/>
+                          </a:rPr>
+                        </m:ctrlPr>
+                      </m:sSupPr>
+                      <m:e>
+                        <m:r>
+                          <a:rPr lang="en-US" sz="1200" i="1" dirty="0">
+                            <a:latin typeface="Cambria Math" panose="02040503050406030204" pitchFamily="18" charset="0"/>
+                            <a:ea typeface="Cambria Math" panose="02040503050406030204" pitchFamily="18" charset="0"/>
+                          </a:rPr>
+                          <m:t>𝒮</m:t>
+                        </m:r>
+                      </m:e>
+                      <m:sup>
+                        <m:r>
+                          <a:rPr lang="en-US" sz="1200" b="0" i="1" dirty="0" smtClean="0">
+                            <a:latin typeface="Cambria Math" panose="02040503050406030204" pitchFamily="18" charset="0"/>
+                            <a:ea typeface="Cambria Math" panose="02040503050406030204" pitchFamily="18" charset="0"/>
+                          </a:rPr>
+                          <m:t>+</m:t>
+                        </m:r>
+                      </m:sup>
+                    </m:sSup>
+                  </m:oMath>
+                </a14:m>
+                <a:r>
+                  <a:rPr lang="en-US" sz="1200" dirty="0"/>
+                  <a:t> are all states </a:t>
+                </a:r>
+              </a:p>
+              <a:p>
+                <a:pPr marL="0" indent="0">
+                  <a:spcBef>
+                    <a:spcPts val="0"/>
+                  </a:spcBef>
+                  <a:buNone/>
+                </a:pPr>
+                <a14:m>
+                  <m:oMath xmlns:m="http://schemas.openxmlformats.org/officeDocument/2006/math">
+                    <m:r>
+                      <a:rPr lang="en-US" sz="1200" i="1" dirty="0" smtClean="0">
+                        <a:latin typeface="Cambria Math" panose="02040503050406030204" pitchFamily="18" charset="0"/>
+                        <a:ea typeface="Cambria Math" panose="02040503050406030204" pitchFamily="18" charset="0"/>
+                      </a:rPr>
+                      <m:t>𝒜</m:t>
+                    </m:r>
+                    <m:r>
+                      <a:rPr lang="en-US" sz="1200" i="1" dirty="0">
+                        <a:latin typeface="Cambria Math" panose="02040503050406030204" pitchFamily="18" charset="0"/>
+                      </a:rPr>
+                      <m:t>(</m:t>
+                    </m:r>
+                    <m:r>
+                      <a:rPr lang="en-US" sz="1200" i="1" dirty="0">
+                        <a:latin typeface="Cambria Math" panose="02040503050406030204" pitchFamily="18" charset="0"/>
+                      </a:rPr>
+                      <m:t>𝑠</m:t>
+                    </m:r>
+                    <m:r>
+                      <a:rPr lang="en-US" sz="1200" i="1" dirty="0">
+                        <a:latin typeface="Cambria Math" panose="02040503050406030204" pitchFamily="18" charset="0"/>
+                      </a:rPr>
+                      <m:t>)</m:t>
+                    </m:r>
+                  </m:oMath>
+                </a14:m>
+                <a:r>
+                  <a:rPr lang="en-US" sz="1200" dirty="0"/>
+                  <a:t>	set of all actions available in state </a:t>
+                </a:r>
+                <a14:m>
+                  <m:oMath xmlns:m="http://schemas.openxmlformats.org/officeDocument/2006/math">
+                    <m:r>
+                      <a:rPr lang="en-US" sz="1200" i="1" dirty="0" smtClean="0">
+                        <a:latin typeface="Cambria Math" panose="02040503050406030204" pitchFamily="18" charset="0"/>
+                      </a:rPr>
+                      <m:t>𝑠</m:t>
+                    </m:r>
+                  </m:oMath>
+                </a14:m>
+                <a:endParaRPr lang="en-US" sz="1200" dirty="0"/>
+              </a:p>
+              <a:p>
+                <a:pPr marL="0" indent="0">
+                  <a:spcBef>
+                    <a:spcPts val="0"/>
+                  </a:spcBef>
+                  <a:buNone/>
+                </a:pPr>
+                <a14:m>
+                  <m:oMath xmlns:m="http://schemas.openxmlformats.org/officeDocument/2006/math">
+                    <m:r>
+                      <a:rPr lang="en-US" sz="1200" i="1">
+                        <a:latin typeface="Cambria Math" panose="02040503050406030204" pitchFamily="18" charset="0"/>
+                      </a:rPr>
+                      <m:t>𝛾</m:t>
+                    </m:r>
+                  </m:oMath>
+                </a14:m>
+                <a:r>
+                  <a:rPr lang="en-US" sz="1200" dirty="0"/>
+                  <a:t> 	discount-rate parameter</a:t>
+                </a:r>
+                <a:endParaRPr lang="en-US" sz="1200" i="1" dirty="0">
+                  <a:latin typeface="Cambria Math" panose="02040503050406030204" pitchFamily="18" charset="0"/>
+                </a:endParaRPr>
+              </a:p>
+              <a:p>
+                <a:pPr marL="0" indent="0">
+                  <a:spcBef>
+                    <a:spcPts val="0"/>
+                  </a:spcBef>
+                  <a:buNone/>
+                </a:pPr>
+                <a14:m>
+                  <m:oMath xmlns:m="http://schemas.openxmlformats.org/officeDocument/2006/math">
+                    <m:r>
+                      <a:rPr lang="en-US" sz="1200" i="1" dirty="0" smtClean="0">
+                        <a:latin typeface="Cambria Math" panose="02040503050406030204" pitchFamily="18" charset="0"/>
+                      </a:rPr>
+                      <m:t>𝑡</m:t>
+                    </m:r>
+                  </m:oMath>
+                </a14:m>
+                <a:r>
+                  <a:rPr lang="en-US" sz="1200" dirty="0"/>
+                  <a:t> 	discrete time step</a:t>
+                </a:r>
+              </a:p>
+              <a:p>
+                <a:pPr marL="0" indent="0">
+                  <a:spcBef>
+                    <a:spcPts val="0"/>
+                  </a:spcBef>
+                  <a:buNone/>
+                </a:pPr>
+                <a14:m>
+                  <m:oMath xmlns:m="http://schemas.openxmlformats.org/officeDocument/2006/math">
+                    <m:r>
+                      <a:rPr lang="en-US" sz="1200" i="1" dirty="0" smtClean="0">
+                        <a:latin typeface="Cambria Math" panose="02040503050406030204" pitchFamily="18" charset="0"/>
+                      </a:rPr>
+                      <m:t>𝑇</m:t>
+                    </m:r>
+                  </m:oMath>
+                </a14:m>
+                <a:r>
+                  <a:rPr lang="en-US" sz="1200" dirty="0"/>
+                  <a:t> 	final time step of an episode (a.k.a. horizon)</a:t>
+                </a:r>
+              </a:p>
+              <a:p>
+                <a:pPr marL="0" indent="0">
+                  <a:spcBef>
+                    <a:spcPts val="0"/>
+                  </a:spcBef>
+                  <a:buNone/>
+                </a:pPr>
+                <a14:m>
+                  <m:oMath xmlns:m="http://schemas.openxmlformats.org/officeDocument/2006/math">
+                    <m:sSub>
+                      <m:sSubPr>
+                        <m:ctrlPr>
+                          <a:rPr lang="en-US" sz="1200" b="0" i="1" dirty="0" smtClean="0">
+                            <a:latin typeface="Cambria Math" panose="02040503050406030204" pitchFamily="18" charset="0"/>
+                          </a:rPr>
+                        </m:ctrlPr>
+                      </m:sSubPr>
+                      <m:e>
+                        <m:r>
+                          <a:rPr lang="en-US" sz="1200" i="1" dirty="0" smtClean="0">
+                            <a:latin typeface="Cambria Math" panose="02040503050406030204" pitchFamily="18" charset="0"/>
+                          </a:rPr>
+                          <m:t>𝐴</m:t>
+                        </m:r>
+                      </m:e>
+                      <m:sub>
+                        <m:r>
+                          <a:rPr lang="en-US" sz="1200" b="0" i="1" dirty="0" smtClean="0">
+                            <a:latin typeface="Cambria Math" panose="02040503050406030204" pitchFamily="18" charset="0"/>
+                          </a:rPr>
+                          <m:t>𝑡</m:t>
+                        </m:r>
+                      </m:sub>
+                    </m:sSub>
+                  </m:oMath>
+                </a14:m>
+                <a:r>
+                  <a:rPr lang="en-US" sz="1200" dirty="0"/>
+                  <a:t> 	random variable for the action at time </a:t>
+                </a:r>
+                <a14:m>
+                  <m:oMath xmlns:m="http://schemas.openxmlformats.org/officeDocument/2006/math">
+                    <m:r>
+                      <a:rPr lang="en-US" sz="1200" i="1" dirty="0" smtClean="0">
+                        <a:latin typeface="Cambria Math" panose="02040503050406030204" pitchFamily="18" charset="0"/>
+                      </a:rPr>
+                      <m:t>𝑡</m:t>
+                    </m:r>
+                  </m:oMath>
+                </a14:m>
+                <a:endParaRPr lang="en-US" sz="1200" dirty="0"/>
+              </a:p>
+              <a:p>
+                <a:pPr marL="0" indent="0">
+                  <a:spcBef>
+                    <a:spcPts val="0"/>
+                  </a:spcBef>
+                  <a:buNone/>
+                </a:pPr>
+                <a14:m>
+                  <m:oMath xmlns:m="http://schemas.openxmlformats.org/officeDocument/2006/math">
+                    <m:sSub>
+                      <m:sSubPr>
+                        <m:ctrlPr>
+                          <a:rPr lang="en-US" sz="1200" b="0" i="1" dirty="0" smtClean="0">
+                            <a:latin typeface="Cambria Math" panose="02040503050406030204" pitchFamily="18" charset="0"/>
+                          </a:rPr>
+                        </m:ctrlPr>
+                      </m:sSubPr>
+                      <m:e>
+                        <m:r>
+                          <a:rPr lang="en-US" sz="1200" i="1" dirty="0" smtClean="0">
+                            <a:latin typeface="Cambria Math" panose="02040503050406030204" pitchFamily="18" charset="0"/>
+                          </a:rPr>
+                          <m:t>𝑆</m:t>
+                        </m:r>
+                      </m:e>
+                      <m:sub>
+                        <m:r>
+                          <a:rPr lang="en-US" sz="1200" b="0" i="1" dirty="0" smtClean="0">
+                            <a:latin typeface="Cambria Math" panose="02040503050406030204" pitchFamily="18" charset="0"/>
+                          </a:rPr>
+                          <m:t>𝑡</m:t>
+                        </m:r>
+                      </m:sub>
+                    </m:sSub>
+                  </m:oMath>
+                </a14:m>
+                <a:r>
+                  <a:rPr lang="en-US" sz="1200" dirty="0"/>
+                  <a:t>	random variable for the state at time </a:t>
+                </a:r>
+                <a14:m>
+                  <m:oMath xmlns:m="http://schemas.openxmlformats.org/officeDocument/2006/math">
+                    <m:r>
+                      <a:rPr lang="en-US" sz="1200" i="1" dirty="0" smtClean="0">
+                        <a:latin typeface="Cambria Math" panose="02040503050406030204" pitchFamily="18" charset="0"/>
+                      </a:rPr>
+                      <m:t>𝑡</m:t>
+                    </m:r>
+                  </m:oMath>
+                </a14:m>
+                <a:endParaRPr lang="en-US" sz="1200" dirty="0"/>
+              </a:p>
+              <a:p>
+                <a:pPr marL="0" indent="0">
+                  <a:spcBef>
+                    <a:spcPts val="0"/>
+                  </a:spcBef>
+                  <a:buNone/>
+                </a:pPr>
+                <a14:m>
+                  <m:oMath xmlns:m="http://schemas.openxmlformats.org/officeDocument/2006/math">
+                    <m:sSub>
+                      <m:sSubPr>
+                        <m:ctrlPr>
+                          <a:rPr lang="en-US" sz="1200" b="0" i="1" dirty="0" smtClean="0">
+                            <a:latin typeface="Cambria Math" panose="02040503050406030204" pitchFamily="18" charset="0"/>
+                          </a:rPr>
+                        </m:ctrlPr>
+                      </m:sSubPr>
+                      <m:e>
+                        <m:r>
+                          <a:rPr lang="en-US" sz="1200" i="1" dirty="0" smtClean="0">
+                            <a:latin typeface="Cambria Math" panose="02040503050406030204" pitchFamily="18" charset="0"/>
+                          </a:rPr>
+                          <m:t>𝑅</m:t>
+                        </m:r>
+                      </m:e>
+                      <m:sub>
+                        <m:r>
+                          <a:rPr lang="en-US" sz="1200" b="0" i="1" dirty="0" smtClean="0">
+                            <a:latin typeface="Cambria Math" panose="02040503050406030204" pitchFamily="18" charset="0"/>
+                          </a:rPr>
+                          <m:t>𝑡</m:t>
+                        </m:r>
+                      </m:sub>
+                    </m:sSub>
+                  </m:oMath>
+                </a14:m>
+                <a:r>
+                  <a:rPr lang="en-US" sz="1200" dirty="0"/>
+                  <a:t> 	random variable for the reward at time </a:t>
+                </a:r>
+                <a14:m>
+                  <m:oMath xmlns:m="http://schemas.openxmlformats.org/officeDocument/2006/math">
+                    <m:r>
+                      <a:rPr lang="en-US" sz="1200" i="1" dirty="0" smtClean="0">
+                        <a:latin typeface="Cambria Math" panose="02040503050406030204" pitchFamily="18" charset="0"/>
+                      </a:rPr>
+                      <m:t>𝑡</m:t>
+                    </m:r>
+                  </m:oMath>
+                </a14:m>
+                <a:endParaRPr lang="en-US" sz="1200" dirty="0"/>
+              </a:p>
+              <a:p>
+                <a:pPr marL="0" indent="0">
+                  <a:lnSpc>
+                    <a:spcPct val="100000"/>
+                  </a:lnSpc>
+                  <a:spcBef>
+                    <a:spcPts val="0"/>
+                  </a:spcBef>
+                  <a:buNone/>
+                </a:pPr>
+                <a:endParaRPr lang="en-US" sz="1200" i="1" dirty="0">
+                  <a:latin typeface="Cambria Math" panose="02040503050406030204" pitchFamily="18" charset="0"/>
+                </a:endParaRPr>
+              </a:p>
+              <a:p>
+                <a:pPr marL="0" indent="0">
+                  <a:lnSpc>
+                    <a:spcPct val="100000"/>
+                  </a:lnSpc>
+                  <a:spcBef>
+                    <a:spcPts val="0"/>
+                  </a:spcBef>
+                  <a:buNone/>
+                </a:pPr>
+                <a14:m>
+                  <m:oMath xmlns:m="http://schemas.openxmlformats.org/officeDocument/2006/math">
+                    <m:r>
+                      <a:rPr lang="en-US" sz="1200" i="1" dirty="0">
+                        <a:latin typeface="Cambria Math" panose="02040503050406030204" pitchFamily="18" charset="0"/>
+                      </a:rPr>
+                      <m:t>𝑝</m:t>
+                    </m:r>
+                    <m:d>
+                      <m:dPr>
+                        <m:endChr m:val="|"/>
+                        <m:ctrlPr>
+                          <a:rPr lang="en-US" sz="1200" i="1" dirty="0">
+                            <a:latin typeface="Cambria Math" panose="02040503050406030204" pitchFamily="18" charset="0"/>
+                          </a:rPr>
+                        </m:ctrlPr>
+                      </m:dPr>
+                      <m:e>
+                        <m:sSup>
+                          <m:sSupPr>
+                            <m:ctrlPr>
+                              <a:rPr lang="en-US" sz="1200" i="1" dirty="0">
+                                <a:latin typeface="Cambria Math" panose="02040503050406030204" pitchFamily="18" charset="0"/>
+                              </a:rPr>
+                            </m:ctrlPr>
+                          </m:sSupPr>
+                          <m:e>
+                            <m:r>
+                              <a:rPr lang="en-US" sz="1200" i="1" dirty="0">
+                                <a:latin typeface="Cambria Math" panose="02040503050406030204" pitchFamily="18" charset="0"/>
+                              </a:rPr>
+                              <m:t>𝑠</m:t>
+                            </m:r>
+                          </m:e>
+                          <m:sup>
+                            <m:r>
+                              <a:rPr lang="en-US" sz="1200" i="1" dirty="0">
+                                <a:latin typeface="Cambria Math" panose="02040503050406030204" pitchFamily="18" charset="0"/>
+                              </a:rPr>
+                              <m:t>′</m:t>
+                            </m:r>
+                          </m:sup>
+                        </m:sSup>
+                        <m:r>
+                          <a:rPr lang="en-US" sz="1200" b="0" i="1" dirty="0" smtClean="0">
+                            <a:latin typeface="Cambria Math" panose="02040503050406030204" pitchFamily="18" charset="0"/>
+                          </a:rPr>
+                          <m:t>,</m:t>
+                        </m:r>
+                        <m:r>
+                          <a:rPr lang="en-US" sz="1200" b="0" i="1" dirty="0" smtClean="0">
+                            <a:latin typeface="Cambria Math" panose="02040503050406030204" pitchFamily="18" charset="0"/>
+                          </a:rPr>
+                          <m:t>𝑟</m:t>
+                        </m:r>
+                        <m:r>
+                          <a:rPr lang="en-US" sz="1200" i="1" dirty="0">
+                            <a:latin typeface="Cambria Math" panose="02040503050406030204" pitchFamily="18" charset="0"/>
+                          </a:rPr>
+                          <m:t> </m:t>
+                        </m:r>
+                      </m:e>
+                    </m:d>
+                    <m:r>
+                      <a:rPr lang="en-US" sz="1200" i="1" dirty="0">
+                        <a:latin typeface="Cambria Math" panose="02040503050406030204" pitchFamily="18" charset="0"/>
+                      </a:rPr>
+                      <m:t>𝑠</m:t>
+                    </m:r>
+                    <m:r>
+                      <a:rPr lang="en-US" sz="1200" i="1" dirty="0">
+                        <a:latin typeface="Cambria Math" panose="02040503050406030204" pitchFamily="18" charset="0"/>
+                      </a:rPr>
+                      <m:t>, </m:t>
+                    </m:r>
+                    <m:r>
+                      <a:rPr lang="en-US" sz="1200" i="1" dirty="0">
+                        <a:latin typeface="Cambria Math" panose="02040503050406030204" pitchFamily="18" charset="0"/>
+                      </a:rPr>
+                      <m:t>𝑎</m:t>
+                    </m:r>
+                    <m:r>
+                      <a:rPr lang="en-US" sz="1200" i="1" dirty="0">
+                        <a:latin typeface="Cambria Math" panose="02040503050406030204" pitchFamily="18" charset="0"/>
+                      </a:rPr>
+                      <m:t>)</m:t>
+                    </m:r>
+                  </m:oMath>
+                </a14:m>
+                <a:r>
+                  <a:rPr lang="en-US" sz="1200" dirty="0"/>
+                  <a:t>	probability of transition to state </a:t>
+                </a:r>
+                <a14:m>
+                  <m:oMath xmlns:m="http://schemas.openxmlformats.org/officeDocument/2006/math">
+                    <m:r>
+                      <a:rPr lang="en-US" sz="1200" i="1" dirty="0">
+                        <a:latin typeface="Cambria Math" panose="02040503050406030204" pitchFamily="18" charset="0"/>
+                      </a:rPr>
+                      <m:t>𝑠</m:t>
+                    </m:r>
+                    <m:r>
+                      <a:rPr lang="en-US" sz="1200" i="1" dirty="0">
+                        <a:latin typeface="Cambria Math" panose="02040503050406030204" pitchFamily="18" charset="0"/>
+                      </a:rPr>
+                      <m:t>′</m:t>
+                    </m:r>
+                  </m:oMath>
+                </a14:m>
+                <a:r>
+                  <a:rPr lang="en-US" sz="1200" dirty="0"/>
+                  <a:t> and receiving reward </a:t>
+                </a:r>
+                <a14:m>
+                  <m:oMath xmlns:m="http://schemas.openxmlformats.org/officeDocument/2006/math">
+                    <m:r>
+                      <a:rPr lang="en-US" sz="1200" b="0" i="1" smtClean="0">
+                        <a:latin typeface="Cambria Math" panose="02040503050406030204" pitchFamily="18" charset="0"/>
+                      </a:rPr>
+                      <m:t>𝑟</m:t>
+                    </m:r>
+                  </m:oMath>
+                </a14:m>
+                <a:r>
+                  <a:rPr lang="en-US" sz="1200" dirty="0"/>
+                  <a:t>, </a:t>
+                </a:r>
+                <a:br>
+                  <a:rPr lang="en-US" sz="1200" dirty="0"/>
+                </a:br>
+                <a:r>
+                  <a:rPr lang="en-US" sz="1200" dirty="0"/>
+                  <a:t>	from state </a:t>
+                </a:r>
+                <a14:m>
+                  <m:oMath xmlns:m="http://schemas.openxmlformats.org/officeDocument/2006/math">
+                    <m:r>
+                      <a:rPr lang="en-US" sz="1200" i="1" dirty="0">
+                        <a:latin typeface="Cambria Math" panose="02040503050406030204" pitchFamily="18" charset="0"/>
+                      </a:rPr>
+                      <m:t>𝑠</m:t>
+                    </m:r>
+                  </m:oMath>
+                </a14:m>
+                <a:r>
+                  <a:rPr lang="en-US" sz="1200" dirty="0"/>
+                  <a:t> taking action </a:t>
+                </a:r>
+                <a14:m>
+                  <m:oMath xmlns:m="http://schemas.openxmlformats.org/officeDocument/2006/math">
+                    <m:r>
+                      <a:rPr lang="en-US" sz="1200" i="1" dirty="0">
+                        <a:latin typeface="Cambria Math" panose="02040503050406030204" pitchFamily="18" charset="0"/>
+                      </a:rPr>
+                      <m:t>𝑎</m:t>
+                    </m:r>
+                  </m:oMath>
+                </a14:m>
+                <a:r>
+                  <a:rPr lang="en-US" sz="1200" dirty="0"/>
+                  <a:t>.</a:t>
+                </a:r>
+              </a:p>
+              <a:p>
+                <a:pPr marL="0" indent="0">
+                  <a:lnSpc>
+                    <a:spcPct val="100000"/>
+                  </a:lnSpc>
+                  <a:spcBef>
+                    <a:spcPts val="0"/>
+                  </a:spcBef>
+                  <a:buNone/>
+                </a:pPr>
+                <a14:m>
+                  <m:oMath xmlns:m="http://schemas.openxmlformats.org/officeDocument/2006/math">
+                    <m:r>
+                      <a:rPr lang="en-US" sz="1200" i="1" dirty="0">
+                        <a:latin typeface="Cambria Math" panose="02040503050406030204" pitchFamily="18" charset="0"/>
+                      </a:rPr>
+                      <m:t>𝑝</m:t>
+                    </m:r>
+                    <m:d>
+                      <m:dPr>
+                        <m:endChr m:val="|"/>
+                        <m:ctrlPr>
+                          <a:rPr lang="en-US" sz="1200" i="1" dirty="0">
+                            <a:latin typeface="Cambria Math" panose="02040503050406030204" pitchFamily="18" charset="0"/>
+                          </a:rPr>
+                        </m:ctrlPr>
+                      </m:dPr>
+                      <m:e>
+                        <m:sSup>
+                          <m:sSupPr>
+                            <m:ctrlPr>
+                              <a:rPr lang="en-US" sz="1200" i="1" dirty="0">
+                                <a:latin typeface="Cambria Math" panose="02040503050406030204" pitchFamily="18" charset="0"/>
+                              </a:rPr>
+                            </m:ctrlPr>
+                          </m:sSupPr>
+                          <m:e>
+                            <m:r>
+                              <a:rPr lang="en-US" sz="1200" i="1" dirty="0">
+                                <a:latin typeface="Cambria Math" panose="02040503050406030204" pitchFamily="18" charset="0"/>
+                              </a:rPr>
+                              <m:t>𝑠</m:t>
+                            </m:r>
+                          </m:e>
+                          <m:sup>
+                            <m:r>
+                              <a:rPr lang="en-US" sz="1200" i="1" dirty="0">
+                                <a:latin typeface="Cambria Math" panose="02040503050406030204" pitchFamily="18" charset="0"/>
+                              </a:rPr>
+                              <m:t>′</m:t>
+                            </m:r>
+                          </m:sup>
+                        </m:sSup>
+                      </m:e>
+                    </m:d>
+                    <m:r>
+                      <a:rPr lang="en-US" sz="1200" i="1" dirty="0">
+                        <a:latin typeface="Cambria Math" panose="02040503050406030204" pitchFamily="18" charset="0"/>
+                      </a:rPr>
+                      <m:t>𝑠</m:t>
+                    </m:r>
+                    <m:r>
+                      <a:rPr lang="en-US" sz="1200" i="1" dirty="0">
+                        <a:latin typeface="Cambria Math" panose="02040503050406030204" pitchFamily="18" charset="0"/>
+                      </a:rPr>
+                      <m:t>, </m:t>
+                    </m:r>
+                    <m:r>
+                      <a:rPr lang="en-US" sz="1200" i="1" dirty="0">
+                        <a:latin typeface="Cambria Math" panose="02040503050406030204" pitchFamily="18" charset="0"/>
+                      </a:rPr>
+                      <m:t>𝑎</m:t>
+                    </m:r>
+                    <m:r>
+                      <a:rPr lang="en-US" sz="1200" i="1" dirty="0">
+                        <a:latin typeface="Cambria Math" panose="02040503050406030204" pitchFamily="18" charset="0"/>
+                      </a:rPr>
+                      <m:t>)</m:t>
+                    </m:r>
+                  </m:oMath>
+                </a14:m>
+                <a:r>
+                  <a:rPr lang="en-US" sz="1200" dirty="0"/>
+                  <a:t> 	probability of transition to state </a:t>
+                </a:r>
+                <a14:m>
+                  <m:oMath xmlns:m="http://schemas.openxmlformats.org/officeDocument/2006/math">
+                    <m:r>
+                      <a:rPr lang="en-US" sz="1200" i="1" dirty="0">
+                        <a:latin typeface="Cambria Math" panose="02040503050406030204" pitchFamily="18" charset="0"/>
+                      </a:rPr>
+                      <m:t>𝑠</m:t>
+                    </m:r>
+                    <m:r>
+                      <a:rPr lang="en-US" sz="1200" i="1" dirty="0">
+                        <a:latin typeface="Cambria Math" panose="02040503050406030204" pitchFamily="18" charset="0"/>
+                      </a:rPr>
+                      <m:t>′</m:t>
+                    </m:r>
+                  </m:oMath>
+                </a14:m>
+                <a:r>
+                  <a:rPr lang="en-US" sz="1200" dirty="0"/>
+                  <a:t> fom state </a:t>
+                </a:r>
+                <a14:m>
+                  <m:oMath xmlns:m="http://schemas.openxmlformats.org/officeDocument/2006/math">
+                    <m:r>
+                      <a:rPr lang="en-US" sz="1200" i="1" dirty="0">
+                        <a:latin typeface="Cambria Math" panose="02040503050406030204" pitchFamily="18" charset="0"/>
+                      </a:rPr>
+                      <m:t>𝑠</m:t>
+                    </m:r>
+                  </m:oMath>
+                </a14:m>
+                <a:r>
+                  <a:rPr lang="en-US" sz="1200" dirty="0"/>
+                  <a:t> taking action </a:t>
+                </a:r>
+                <a14:m>
+                  <m:oMath xmlns:m="http://schemas.openxmlformats.org/officeDocument/2006/math">
+                    <m:r>
+                      <a:rPr lang="en-US" sz="1200" i="1" dirty="0">
+                        <a:latin typeface="Cambria Math" panose="02040503050406030204" pitchFamily="18" charset="0"/>
+                      </a:rPr>
+                      <m:t>𝑎</m:t>
+                    </m:r>
+                  </m:oMath>
+                </a14:m>
+                <a:r>
+                  <a:rPr lang="en-US" sz="1200" dirty="0"/>
+                  <a:t>.</a:t>
+                </a:r>
+              </a:p>
+              <a:p>
+                <a:pPr marL="0" indent="0">
+                  <a:lnSpc>
+                    <a:spcPct val="100000"/>
+                  </a:lnSpc>
+                  <a:spcBef>
+                    <a:spcPts val="0"/>
+                  </a:spcBef>
+                  <a:buNone/>
+                </a:pPr>
+                <a14:m>
+                  <m:oMath xmlns:m="http://schemas.openxmlformats.org/officeDocument/2006/math">
+                    <m:r>
+                      <a:rPr lang="en-US" sz="1200" b="0" i="1" smtClean="0">
+                        <a:latin typeface="Cambria Math" panose="02040503050406030204" pitchFamily="18" charset="0"/>
+                      </a:rPr>
+                      <m:t>𝑟</m:t>
+                    </m:r>
+                    <m:r>
+                      <a:rPr lang="en-US" sz="1200" b="0" i="1" smtClean="0">
+                        <a:latin typeface="Cambria Math" panose="02040503050406030204" pitchFamily="18" charset="0"/>
+                      </a:rPr>
+                      <m:t>(</m:t>
+                    </m:r>
+                    <m:r>
+                      <a:rPr lang="en-US" sz="1200" b="0" i="1" smtClean="0">
+                        <a:latin typeface="Cambria Math" panose="02040503050406030204" pitchFamily="18" charset="0"/>
+                      </a:rPr>
+                      <m:t>𝑠</m:t>
+                    </m:r>
+                    <m:r>
+                      <a:rPr lang="en-US" sz="1200" b="0" i="1" smtClean="0">
+                        <a:latin typeface="Cambria Math" panose="02040503050406030204" pitchFamily="18" charset="0"/>
+                      </a:rPr>
+                      <m:t>,</m:t>
+                    </m:r>
+                    <m:r>
+                      <a:rPr lang="en-US" sz="1200" b="0" i="1" smtClean="0">
+                        <a:latin typeface="Cambria Math" panose="02040503050406030204" pitchFamily="18" charset="0"/>
+                      </a:rPr>
+                      <m:t>𝑎</m:t>
+                    </m:r>
+                    <m:r>
+                      <a:rPr lang="en-US" sz="1200" b="0" i="1" smtClean="0">
+                        <a:latin typeface="Cambria Math" panose="02040503050406030204" pitchFamily="18" charset="0"/>
+                      </a:rPr>
+                      <m:t>)</m:t>
+                    </m:r>
+                  </m:oMath>
+                </a14:m>
+                <a:r>
+                  <a:rPr lang="en-US" sz="1200" dirty="0"/>
+                  <a:t>	expected immediate reward from state </a:t>
+                </a:r>
+                <a14:m>
+                  <m:oMath xmlns:m="http://schemas.openxmlformats.org/officeDocument/2006/math">
+                    <m:r>
+                      <a:rPr lang="en-US" sz="1200" i="1" dirty="0">
+                        <a:latin typeface="Cambria Math" panose="02040503050406030204" pitchFamily="18" charset="0"/>
+                      </a:rPr>
+                      <m:t>𝑠</m:t>
+                    </m:r>
+                  </m:oMath>
+                </a14:m>
+                <a:r>
+                  <a:rPr lang="en-US" sz="1200" dirty="0"/>
+                  <a:t> after action </a:t>
+                </a:r>
+                <a14:m>
+                  <m:oMath xmlns:m="http://schemas.openxmlformats.org/officeDocument/2006/math">
+                    <m:r>
+                      <a:rPr lang="en-US" sz="1200" i="1" dirty="0">
+                        <a:latin typeface="Cambria Math" panose="02040503050406030204" pitchFamily="18" charset="0"/>
+                      </a:rPr>
+                      <m:t>𝑎</m:t>
+                    </m:r>
+                    <m:r>
+                      <a:rPr lang="en-US" sz="1200" b="0" i="1" dirty="0" smtClean="0">
+                        <a:latin typeface="Cambria Math" panose="02040503050406030204" pitchFamily="18" charset="0"/>
+                      </a:rPr>
+                      <m:t>.</m:t>
+                    </m:r>
+                  </m:oMath>
+                </a14:m>
+                <a:endParaRPr lang="en-US" sz="1200" b="0" dirty="0"/>
+              </a:p>
+              <a:p>
+                <a:pPr marL="0" indent="0">
+                  <a:lnSpc>
+                    <a:spcPct val="100000"/>
+                  </a:lnSpc>
+                  <a:spcBef>
+                    <a:spcPts val="0"/>
+                  </a:spcBef>
+                  <a:buNone/>
+                </a:pPr>
+                <a14:m>
+                  <m:oMath xmlns:m="http://schemas.openxmlformats.org/officeDocument/2006/math">
+                    <m:r>
+                      <a:rPr lang="en-US" sz="1200" i="1">
+                        <a:latin typeface="Cambria Math" panose="02040503050406030204" pitchFamily="18" charset="0"/>
+                      </a:rPr>
+                      <m:t>𝑟</m:t>
+                    </m:r>
+                    <m:r>
+                      <a:rPr lang="en-US" sz="1200" i="1">
+                        <a:latin typeface="Cambria Math" panose="02040503050406030204" pitchFamily="18" charset="0"/>
+                      </a:rPr>
+                      <m:t>(</m:t>
+                    </m:r>
+                    <m:r>
+                      <a:rPr lang="en-US" sz="1200" i="1">
+                        <a:latin typeface="Cambria Math" panose="02040503050406030204" pitchFamily="18" charset="0"/>
+                      </a:rPr>
+                      <m:t>𝑠</m:t>
+                    </m:r>
+                    <m:r>
+                      <a:rPr lang="en-US" sz="1200" i="1">
+                        <a:latin typeface="Cambria Math" panose="02040503050406030204" pitchFamily="18" charset="0"/>
+                      </a:rPr>
+                      <m:t>,</m:t>
+                    </m:r>
+                    <m:r>
+                      <a:rPr lang="en-US" sz="1200" i="1">
+                        <a:latin typeface="Cambria Math" panose="02040503050406030204" pitchFamily="18" charset="0"/>
+                      </a:rPr>
+                      <m:t>𝑎</m:t>
+                    </m:r>
+                    <m:r>
+                      <a:rPr lang="en-US" sz="1200" b="0" i="1" smtClean="0">
+                        <a:latin typeface="Cambria Math" panose="02040503050406030204" pitchFamily="18" charset="0"/>
+                      </a:rPr>
+                      <m:t>,</m:t>
+                    </m:r>
+                    <m:r>
+                      <a:rPr lang="en-US" sz="1200" b="0" i="1" smtClean="0">
+                        <a:latin typeface="Cambria Math" panose="02040503050406030204" pitchFamily="18" charset="0"/>
+                      </a:rPr>
+                      <m:t>𝑠</m:t>
+                    </m:r>
+                    <m:r>
+                      <a:rPr lang="en-US" sz="1200" b="0" i="1" smtClean="0">
+                        <a:latin typeface="Cambria Math" panose="02040503050406030204" pitchFamily="18" charset="0"/>
+                      </a:rPr>
+                      <m:t>′)</m:t>
+                    </m:r>
+                  </m:oMath>
+                </a14:m>
+                <a:r>
+                  <a:rPr lang="en-US" sz="1200" dirty="0"/>
+                  <a:t>	expected immediate reward from state </a:t>
+                </a:r>
+                <a14:m>
+                  <m:oMath xmlns:m="http://schemas.openxmlformats.org/officeDocument/2006/math">
+                    <m:r>
+                      <a:rPr lang="en-US" sz="1200" i="1" dirty="0">
+                        <a:latin typeface="Cambria Math" panose="02040503050406030204" pitchFamily="18" charset="0"/>
+                      </a:rPr>
+                      <m:t>𝑠</m:t>
+                    </m:r>
+                  </m:oMath>
+                </a14:m>
+                <a:r>
+                  <a:rPr lang="en-US" sz="1200" dirty="0"/>
+                  <a:t> to </a:t>
+                </a:r>
+                <a14:m>
+                  <m:oMath xmlns:m="http://schemas.openxmlformats.org/officeDocument/2006/math">
+                    <m:sSup>
+                      <m:sSupPr>
+                        <m:ctrlPr>
+                          <a:rPr lang="en-US" sz="1200" b="0" i="1" smtClean="0">
+                            <a:latin typeface="Cambria Math" panose="02040503050406030204" pitchFamily="18" charset="0"/>
+                          </a:rPr>
+                        </m:ctrlPr>
+                      </m:sSupPr>
+                      <m:e>
+                        <m:r>
+                          <a:rPr lang="en-US" sz="1200" b="0" i="1" smtClean="0">
+                            <a:latin typeface="Cambria Math" panose="02040503050406030204" pitchFamily="18" charset="0"/>
+                          </a:rPr>
+                          <m:t>𝑠</m:t>
+                        </m:r>
+                      </m:e>
+                      <m:sup>
+                        <m:r>
+                          <a:rPr lang="en-US" sz="1200" b="0" i="1" smtClean="0">
+                            <a:latin typeface="Cambria Math" panose="02040503050406030204" pitchFamily="18" charset="0"/>
+                          </a:rPr>
+                          <m:t>′</m:t>
+                        </m:r>
+                      </m:sup>
+                    </m:sSup>
+                  </m:oMath>
+                </a14:m>
+                <a:r>
+                  <a:rPr lang="en-US" sz="1200" dirty="0"/>
+                  <a:t> with action </a:t>
+                </a:r>
+                <a14:m>
+                  <m:oMath xmlns:m="http://schemas.openxmlformats.org/officeDocument/2006/math">
+                    <m:r>
+                      <a:rPr lang="en-US" sz="1200" i="1" dirty="0">
+                        <a:latin typeface="Cambria Math" panose="02040503050406030204" pitchFamily="18" charset="0"/>
+                      </a:rPr>
+                      <m:t>𝑎</m:t>
+                    </m:r>
+                    <m:r>
+                      <a:rPr lang="en-US" sz="1200" b="0" i="1" dirty="0" smtClean="0">
+                        <a:latin typeface="Cambria Math" panose="02040503050406030204" pitchFamily="18" charset="0"/>
+                      </a:rPr>
+                      <m:t>.</m:t>
+                    </m:r>
+                  </m:oMath>
+                </a14:m>
+                <a:endParaRPr lang="en-US" sz="1200" i="1" dirty="0">
+                  <a:latin typeface="Cambria Math" panose="02040503050406030204" pitchFamily="18" charset="0"/>
+                </a:endParaRPr>
+              </a:p>
+              <a:p>
+                <a:pPr marL="0" indent="0">
+                  <a:spcBef>
+                    <a:spcPts val="0"/>
+                  </a:spcBef>
+                  <a:buNone/>
+                </a:pPr>
+                <a:endParaRPr lang="en-US" sz="1200" i="1" dirty="0">
+                  <a:latin typeface="Cambria Math" panose="02040503050406030204" pitchFamily="18" charset="0"/>
+                </a:endParaRPr>
+              </a:p>
+              <a:p>
+                <a:pPr marL="0" indent="0">
+                  <a:spcBef>
+                    <a:spcPts val="0"/>
+                  </a:spcBef>
+                  <a:buNone/>
+                </a:pPr>
+                <a14:m>
+                  <m:oMath xmlns:m="http://schemas.openxmlformats.org/officeDocument/2006/math">
+                    <m:r>
+                      <a:rPr lang="en-US" sz="1200" i="1" dirty="0">
+                        <a:latin typeface="Cambria Math" panose="02040503050406030204" pitchFamily="18" charset="0"/>
+                      </a:rPr>
+                      <m:t>𝜋</m:t>
+                    </m:r>
+                    <m:r>
+                      <a:rPr lang="en-US" sz="1200" i="1" dirty="0">
+                        <a:latin typeface="Cambria Math" panose="02040503050406030204" pitchFamily="18" charset="0"/>
+                      </a:rPr>
+                      <m:t>(</m:t>
+                    </m:r>
+                    <m:r>
+                      <a:rPr lang="en-US" sz="1200" i="1" dirty="0" err="1">
+                        <a:latin typeface="Cambria Math" panose="02040503050406030204" pitchFamily="18" charset="0"/>
+                      </a:rPr>
+                      <m:t>𝑎</m:t>
+                    </m:r>
+                    <m:r>
+                      <a:rPr lang="en-US" sz="1200" i="1" dirty="0" err="1">
+                        <a:latin typeface="Cambria Math" panose="02040503050406030204" pitchFamily="18" charset="0"/>
+                      </a:rPr>
+                      <m:t>|</m:t>
+                    </m:r>
+                    <m:r>
+                      <a:rPr lang="en-US" sz="1200" i="1" dirty="0" err="1">
+                        <a:latin typeface="Cambria Math" panose="02040503050406030204" pitchFamily="18" charset="0"/>
+                      </a:rPr>
+                      <m:t>𝑠</m:t>
+                    </m:r>
+                    <m:r>
+                      <a:rPr lang="en-US" sz="1200" i="1" dirty="0">
+                        <a:latin typeface="Cambria Math" panose="02040503050406030204" pitchFamily="18" charset="0"/>
+                      </a:rPr>
+                      <m:t>)</m:t>
+                    </m:r>
+                  </m:oMath>
+                </a14:m>
+                <a:r>
+                  <a:rPr lang="en-US" sz="1200" dirty="0"/>
+                  <a:t>	probability of taking action </a:t>
+                </a:r>
+                <a14:m>
+                  <m:oMath xmlns:m="http://schemas.openxmlformats.org/officeDocument/2006/math">
+                    <m:r>
+                      <a:rPr lang="en-US" sz="1200" i="1" dirty="0">
+                        <a:latin typeface="Cambria Math" panose="02040503050406030204" pitchFamily="18" charset="0"/>
+                      </a:rPr>
+                      <m:t>𝑎</m:t>
+                    </m:r>
+                  </m:oMath>
+                </a14:m>
+                <a:r>
+                  <a:rPr lang="en-US" sz="1200" dirty="0"/>
+                  <a:t> in state </a:t>
+                </a:r>
+                <a14:m>
+                  <m:oMath xmlns:m="http://schemas.openxmlformats.org/officeDocument/2006/math">
+                    <m:r>
+                      <a:rPr lang="en-US" sz="1200" i="1" dirty="0">
+                        <a:latin typeface="Cambria Math" panose="02040503050406030204" pitchFamily="18" charset="0"/>
+                      </a:rPr>
+                      <m:t>𝑠</m:t>
+                    </m:r>
+                  </m:oMath>
+                </a14:m>
+                <a:r>
+                  <a:rPr lang="en-US" sz="1200" dirty="0"/>
+                  <a:t> under stochastic policy </a:t>
+                </a:r>
+                <a14:m>
+                  <m:oMath xmlns:m="http://schemas.openxmlformats.org/officeDocument/2006/math">
+                    <m:r>
+                      <a:rPr lang="en-US" sz="1200" i="1" dirty="0">
+                        <a:latin typeface="Cambria Math" panose="02040503050406030204" pitchFamily="18" charset="0"/>
+                      </a:rPr>
+                      <m:t>𝜋</m:t>
+                    </m:r>
+                  </m:oMath>
+                </a14:m>
+                <a:endParaRPr lang="en-US" sz="1200" dirty="0">
+                  <a:ea typeface="Cambria Math" panose="02040503050406030204" pitchFamily="18" charset="0"/>
+                </a:endParaRPr>
+              </a:p>
+              <a:p>
+                <a:pPr marL="0" indent="0">
+                  <a:spcBef>
+                    <a:spcPts val="0"/>
+                  </a:spcBef>
+                  <a:buNone/>
+                </a:pPr>
+                <a14:m>
+                  <m:oMath xmlns:m="http://schemas.openxmlformats.org/officeDocument/2006/math">
+                    <m:r>
+                      <a:rPr lang="en-US" sz="1200" i="1" dirty="0" smtClean="0">
+                        <a:latin typeface="Cambria Math" panose="02040503050406030204" pitchFamily="18" charset="0"/>
+                      </a:rPr>
+                      <m:t>𝜋</m:t>
+                    </m:r>
+                    <m:r>
+                      <a:rPr lang="en-US" sz="1200" i="1" dirty="0" smtClean="0">
+                        <a:latin typeface="Cambria Math" panose="02040503050406030204" pitchFamily="18" charset="0"/>
+                      </a:rPr>
+                      <m:t>(</m:t>
+                    </m:r>
+                    <m:r>
+                      <a:rPr lang="en-US" sz="1200" i="1" dirty="0" smtClean="0">
+                        <a:latin typeface="Cambria Math" panose="02040503050406030204" pitchFamily="18" charset="0"/>
+                      </a:rPr>
+                      <m:t>𝑠</m:t>
+                    </m:r>
+                    <m:r>
+                      <a:rPr lang="en-US" sz="1200" i="1" dirty="0" smtClean="0">
+                        <a:latin typeface="Cambria Math" panose="02040503050406030204" pitchFamily="18" charset="0"/>
+                      </a:rPr>
+                      <m:t>)</m:t>
+                    </m:r>
+                  </m:oMath>
+                </a14:m>
+                <a:r>
+                  <a:rPr lang="en-US" sz="1200" dirty="0"/>
+                  <a:t>	action taken in state </a:t>
+                </a:r>
+                <a14:m>
+                  <m:oMath xmlns:m="http://schemas.openxmlformats.org/officeDocument/2006/math">
+                    <m:r>
+                      <a:rPr lang="en-US" sz="1200" i="1" dirty="0" smtClean="0">
+                        <a:latin typeface="Cambria Math" panose="02040503050406030204" pitchFamily="18" charset="0"/>
+                      </a:rPr>
+                      <m:t>𝑠</m:t>
+                    </m:r>
+                  </m:oMath>
+                </a14:m>
+                <a:r>
+                  <a:rPr lang="en-US" sz="1200" dirty="0"/>
+                  <a:t> under deterministic policy </a:t>
+                </a:r>
+                <a14:m>
+                  <m:oMath xmlns:m="http://schemas.openxmlformats.org/officeDocument/2006/math">
+                    <m:r>
+                      <a:rPr lang="en-US" sz="1200" b="0" i="1" dirty="0" smtClean="0">
+                        <a:latin typeface="Cambria Math" panose="02040503050406030204" pitchFamily="18" charset="0"/>
+                      </a:rPr>
+                      <m:t>𝜋</m:t>
+                    </m:r>
+                  </m:oMath>
+                </a14:m>
+                <a:endParaRPr lang="en-US" sz="1200" dirty="0"/>
+              </a:p>
+            </p:txBody>
+          </p:sp>
+        </mc:Choice>
+        <mc:Fallback xmlns="">
+          <p:sp>
+            <p:nvSpPr>
+              <p:cNvPr id="11" name="Content Placeholder 2">
+                <a:extLst>
+                  <a:ext uri="{FF2B5EF4-FFF2-40B4-BE49-F238E27FC236}">
+                    <a16:creationId xmlns:a16="http://schemas.microsoft.com/office/drawing/2014/main" id="{6F45EA4F-65F9-5141-0B09-C395CF9CA7A0}"/>
+                  </a:ext>
+                </a:extLst>
+              </p:cNvPr>
+              <p:cNvSpPr txBox="1">
+                <a:spLocks noRot="1" noChangeAspect="1" noMove="1" noResize="1" noEditPoints="1" noAdjustHandles="1" noChangeArrowheads="1" noChangeShapeType="1" noTextEdit="1"/>
+              </p:cNvSpPr>
+              <p:nvPr/>
+            </p:nvSpPr>
+            <p:spPr>
+              <a:xfrm>
+                <a:off x="6267338" y="1124198"/>
+                <a:ext cx="5273179" cy="3693383"/>
+              </a:xfrm>
+              <a:prstGeom prst="rect">
+                <a:avLst/>
+              </a:prstGeom>
+              <a:blipFill>
+                <a:blip r:embed="rId4"/>
+                <a:stretch>
+                  <a:fillRect t="-328"/>
+                </a:stretch>
+              </a:blipFill>
+            </p:spPr>
+            <p:txBody>
+              <a:bodyPr/>
+              <a:lstStyle/>
+              <a:p>
+                <a:r>
+                  <a:rPr lang="en-US">
+                    <a:noFill/>
+                  </a:rPr>
+                  <a:t> </a:t>
+                </a:r>
+              </a:p>
+            </p:txBody>
+          </p:sp>
+        </mc:Fallback>
+      </mc:AlternateContent>
+      <mc:AlternateContent xmlns:mc="http://schemas.openxmlformats.org/markup-compatibility/2006">
+        <mc:Choice xmlns:a14="http://schemas.microsoft.com/office/drawing/2010/main" Requires="a14">
+          <p:sp>
+            <p:nvSpPr>
+              <p:cNvPr id="4" name="Content Placeholder 2">
+                <a:extLst>
+                  <a:ext uri="{FF2B5EF4-FFF2-40B4-BE49-F238E27FC236}">
+                    <a16:creationId xmlns:a16="http://schemas.microsoft.com/office/drawing/2014/main" id="{4C5E539A-F9A7-F959-ACD3-4ADE5900F587}"/>
+                  </a:ext>
+                </a:extLst>
+              </p:cNvPr>
+              <p:cNvSpPr txBox="1">
+                <a:spLocks/>
+              </p:cNvSpPr>
+              <p:nvPr/>
+            </p:nvSpPr>
+            <p:spPr>
+              <a:xfrm>
+                <a:off x="822817" y="5567468"/>
+                <a:ext cx="5273179" cy="646331"/>
+              </a:xfrm>
+              <a:prstGeom prst="rect">
+                <a:avLst/>
+              </a:prstGeom>
+            </p:spPr>
+            <p:style>
+              <a:lnRef idx="2">
+                <a:schemeClr val="accent2"/>
+              </a:lnRef>
+              <a:fillRef idx="1">
+                <a:schemeClr val="lt1"/>
+              </a:fillRef>
+              <a:effectRef idx="0">
+                <a:schemeClr val="accent2"/>
+              </a:effectRef>
+              <a:fontRef idx="minor">
+                <a:schemeClr val="dk1"/>
+              </a:fontRef>
+            </p:style>
+            <p:txBody>
+              <a:bodyPr vert="horz" lIns="91440" tIns="45720" rIns="91440" bIns="45720" rtlCol="0">
+                <a:spAutoFit/>
+              </a:bodyPr>
+              <a:lstStyle>
+                <a:lvl1pPr marL="228600" indent="-228600" algn="l" defTabSz="914400" rtl="0" eaLnBrk="1" latinLnBrk="0" hangingPunct="1">
+                  <a:lnSpc>
+                    <a:spcPct val="90000"/>
+                  </a:lnSpc>
+                  <a:spcBef>
+                    <a:spcPts val="1000"/>
+                  </a:spcBef>
+                  <a:buFont typeface="Arial" panose="020B0604020202020204" pitchFamily="34" charset="0"/>
+                  <a:buChar char="•"/>
+                  <a:defRPr sz="2800" kern="1200">
+                    <a:solidFill>
+                      <a:schemeClr val="dk1"/>
+                    </a:solidFill>
+                    <a:latin typeface="+mn-lt"/>
+                    <a:ea typeface="+mn-ea"/>
+                    <a:cs typeface="+mn-cs"/>
+                  </a:defRPr>
+                </a:lvl1pPr>
+                <a:lvl2pPr marL="685800" indent="-228600" algn="l" defTabSz="914400" rtl="0" eaLnBrk="1" latinLnBrk="0" hangingPunct="1">
+                  <a:lnSpc>
+                    <a:spcPct val="90000"/>
+                  </a:lnSpc>
+                  <a:spcBef>
+                    <a:spcPts val="500"/>
+                  </a:spcBef>
+                  <a:buFont typeface="Arial" panose="020B0604020202020204" pitchFamily="34" charset="0"/>
+                  <a:buChar char="•"/>
+                  <a:defRPr sz="2400" kern="1200">
+                    <a:solidFill>
+                      <a:schemeClr val="dk1"/>
+                    </a:solidFill>
+                    <a:latin typeface="+mn-lt"/>
+                    <a:ea typeface="+mn-ea"/>
+                    <a:cs typeface="+mn-cs"/>
+                  </a:defRPr>
+                </a:lvl2pPr>
+                <a:lvl3pPr marL="1143000" indent="-228600" algn="l" defTabSz="914400" rtl="0" eaLnBrk="1" latinLnBrk="0" hangingPunct="1">
+                  <a:lnSpc>
+                    <a:spcPct val="90000"/>
+                  </a:lnSpc>
+                  <a:spcBef>
+                    <a:spcPts val="500"/>
+                  </a:spcBef>
+                  <a:buFont typeface="Arial" panose="020B0604020202020204" pitchFamily="34" charset="0"/>
+                  <a:buChar char="•"/>
+                  <a:defRPr sz="2000" kern="1200">
+                    <a:solidFill>
+                      <a:schemeClr val="dk1"/>
+                    </a:solidFill>
+                    <a:latin typeface="+mn-lt"/>
+                    <a:ea typeface="+mn-ea"/>
+                    <a:cs typeface="+mn-cs"/>
+                  </a:defRPr>
+                </a:lvl3pPr>
+                <a:lvl4pPr marL="1600200" indent="-228600" algn="l" defTabSz="914400" rtl="0" eaLnBrk="1" latinLnBrk="0" hangingPunct="1">
+                  <a:lnSpc>
+                    <a:spcPct val="90000"/>
+                  </a:lnSpc>
+                  <a:spcBef>
+                    <a:spcPts val="500"/>
+                  </a:spcBef>
+                  <a:buFont typeface="Arial" panose="020B0604020202020204" pitchFamily="34" charset="0"/>
+                  <a:buChar char="•"/>
+                  <a:defRPr sz="1800" kern="1200">
+                    <a:solidFill>
+                      <a:schemeClr val="dk1"/>
+                    </a:solidFill>
+                    <a:latin typeface="+mn-lt"/>
+                    <a:ea typeface="+mn-ea"/>
+                    <a:cs typeface="+mn-cs"/>
+                  </a:defRPr>
+                </a:lvl4pPr>
+                <a:lvl5pPr marL="2057400" indent="-228600" algn="l" defTabSz="914400" rtl="0" eaLnBrk="1" latinLnBrk="0" hangingPunct="1">
+                  <a:lnSpc>
+                    <a:spcPct val="90000"/>
+                  </a:lnSpc>
+                  <a:spcBef>
+                    <a:spcPts val="500"/>
+                  </a:spcBef>
+                  <a:buFont typeface="Arial" panose="020B0604020202020204" pitchFamily="34" charset="0"/>
+                  <a:buChar char="•"/>
+                  <a:defRPr sz="1800" kern="1200">
+                    <a:solidFill>
+                      <a:schemeClr val="dk1"/>
+                    </a:solidFill>
+                    <a:latin typeface="+mn-lt"/>
+                    <a:ea typeface="+mn-ea"/>
+                    <a:cs typeface="+mn-cs"/>
+                  </a:defRPr>
+                </a:lvl5pPr>
+                <a:lvl6pPr marL="2514600" indent="-228600" algn="l" defTabSz="914400" rtl="0" eaLnBrk="1" latinLnBrk="0" hangingPunct="1">
+                  <a:lnSpc>
+                    <a:spcPct val="90000"/>
+                  </a:lnSpc>
+                  <a:spcBef>
+                    <a:spcPts val="500"/>
+                  </a:spcBef>
+                  <a:buFont typeface="Arial" panose="020B0604020202020204" pitchFamily="34" charset="0"/>
+                  <a:buChar char="•"/>
+                  <a:defRPr sz="1800" kern="1200">
+                    <a:solidFill>
+                      <a:schemeClr val="dk1"/>
+                    </a:solidFill>
+                    <a:latin typeface="+mn-lt"/>
+                    <a:ea typeface="+mn-ea"/>
+                    <a:cs typeface="+mn-cs"/>
+                  </a:defRPr>
+                </a:lvl6pPr>
+                <a:lvl7pPr marL="2971800" indent="-228600" algn="l" defTabSz="914400" rtl="0" eaLnBrk="1" latinLnBrk="0" hangingPunct="1">
+                  <a:lnSpc>
+                    <a:spcPct val="90000"/>
+                  </a:lnSpc>
+                  <a:spcBef>
+                    <a:spcPts val="500"/>
+                  </a:spcBef>
+                  <a:buFont typeface="Arial" panose="020B0604020202020204" pitchFamily="34" charset="0"/>
+                  <a:buChar char="•"/>
+                  <a:defRPr sz="1800" kern="1200">
+                    <a:solidFill>
+                      <a:schemeClr val="dk1"/>
+                    </a:solidFill>
+                    <a:latin typeface="+mn-lt"/>
+                    <a:ea typeface="+mn-ea"/>
+                    <a:cs typeface="+mn-cs"/>
+                  </a:defRPr>
+                </a:lvl7pPr>
+                <a:lvl8pPr marL="3429000" indent="-228600" algn="l" defTabSz="914400" rtl="0" eaLnBrk="1" latinLnBrk="0" hangingPunct="1">
+                  <a:lnSpc>
+                    <a:spcPct val="90000"/>
+                  </a:lnSpc>
+                  <a:spcBef>
+                    <a:spcPts val="500"/>
+                  </a:spcBef>
+                  <a:buFont typeface="Arial" panose="020B0604020202020204" pitchFamily="34" charset="0"/>
+                  <a:buChar char="•"/>
+                  <a:defRPr sz="1800" kern="1200">
+                    <a:solidFill>
+                      <a:schemeClr val="dk1"/>
+                    </a:solidFill>
+                    <a:latin typeface="+mn-lt"/>
+                    <a:ea typeface="+mn-ea"/>
+                    <a:cs typeface="+mn-cs"/>
+                  </a:defRPr>
+                </a:lvl8pPr>
+                <a:lvl9pPr marL="3886200" indent="-228600" algn="l" defTabSz="914400" rtl="0" eaLnBrk="1" latinLnBrk="0" hangingPunct="1">
+                  <a:lnSpc>
+                    <a:spcPct val="90000"/>
+                  </a:lnSpc>
+                  <a:spcBef>
+                    <a:spcPts val="500"/>
+                  </a:spcBef>
+                  <a:buFont typeface="Arial" panose="020B0604020202020204" pitchFamily="34" charset="0"/>
+                  <a:buChar char="•"/>
+                  <a:defRPr sz="1800" kern="1200">
+                    <a:solidFill>
+                      <a:schemeClr val="dk1"/>
+                    </a:solidFill>
+                    <a:latin typeface="+mn-lt"/>
+                    <a:ea typeface="+mn-ea"/>
+                    <a:cs typeface="+mn-cs"/>
+                  </a:defRPr>
+                </a:lvl9pPr>
+              </a:lstStyle>
+              <a:p>
+                <a:pPr marL="0" indent="0">
+                  <a:lnSpc>
+                    <a:spcPct val="100000"/>
+                  </a:lnSpc>
+                  <a:spcBef>
+                    <a:spcPts val="0"/>
+                  </a:spcBef>
+                  <a:buFont typeface="Arial" panose="020B0604020202020204" pitchFamily="34" charset="0"/>
+                  <a:buNone/>
+                </a:pPr>
+                <a:r>
+                  <a:rPr lang="en-US" sz="1200" b="1" dirty="0"/>
+                  <a:t>Temporal Difference Learning</a:t>
+                </a:r>
+                <a:endParaRPr lang="en-US" sz="1200" i="1" dirty="0">
+                  <a:latin typeface="Cambria Math" panose="02040503050406030204" pitchFamily="18" charset="0"/>
+                </a:endParaRPr>
+              </a:p>
+              <a:p>
+                <a:pPr marL="0" indent="0">
+                  <a:lnSpc>
+                    <a:spcPct val="100000"/>
+                  </a:lnSpc>
+                  <a:spcBef>
+                    <a:spcPts val="0"/>
+                  </a:spcBef>
+                  <a:buNone/>
+                </a:pPr>
+                <a14:m>
+                  <m:oMath xmlns:m="http://schemas.openxmlformats.org/officeDocument/2006/math">
+                    <m:sSub>
+                      <m:sSubPr>
+                        <m:ctrlPr>
+                          <a:rPr lang="en-US" sz="1200" i="1" dirty="0">
+                            <a:solidFill>
+                              <a:schemeClr val="tx1"/>
+                            </a:solidFill>
+                            <a:latin typeface="Cambria Math" panose="02040503050406030204" pitchFamily="18" charset="0"/>
+                          </a:rPr>
+                        </m:ctrlPr>
+                      </m:sSubPr>
+                      <m:e>
+                        <m:r>
+                          <a:rPr lang="en-US" sz="1200" i="1" dirty="0">
+                            <a:solidFill>
+                              <a:schemeClr val="tx1"/>
+                            </a:solidFill>
+                            <a:latin typeface="Cambria Math" panose="02040503050406030204" pitchFamily="18" charset="0"/>
+                          </a:rPr>
+                          <m:t>𝑈</m:t>
+                        </m:r>
+                      </m:e>
+                      <m:sub>
+                        <m:r>
+                          <a:rPr lang="en-US" sz="1200" i="1" dirty="0">
+                            <a:solidFill>
+                              <a:schemeClr val="tx1"/>
+                            </a:solidFill>
+                            <a:latin typeface="Cambria Math" panose="02040503050406030204" pitchFamily="18" charset="0"/>
+                          </a:rPr>
+                          <m:t>𝑡</m:t>
+                        </m:r>
+                      </m:sub>
+                    </m:sSub>
+                  </m:oMath>
+                </a14:m>
+                <a:r>
+                  <a:rPr lang="en-US" sz="1200" dirty="0">
+                    <a:solidFill>
+                      <a:schemeClr val="tx1"/>
+                    </a:solidFill>
+                  </a:rPr>
+                  <a:t>	target for estimate at time</a:t>
+                </a:r>
+                <a14:m>
+                  <m:oMath xmlns:m="http://schemas.openxmlformats.org/officeDocument/2006/math">
+                    <m:r>
+                      <a:rPr lang="en-US" sz="1200" i="1" dirty="0">
+                        <a:solidFill>
+                          <a:schemeClr val="tx1"/>
+                        </a:solidFill>
+                        <a:latin typeface="Cambria Math" panose="02040503050406030204" pitchFamily="18" charset="0"/>
+                      </a:rPr>
+                      <m:t> </m:t>
+                    </m:r>
+                    <m:r>
+                      <a:rPr lang="en-US" sz="1200" i="1" dirty="0">
+                        <a:solidFill>
+                          <a:schemeClr val="tx1"/>
+                        </a:solidFill>
+                        <a:latin typeface="Cambria Math" panose="02040503050406030204" pitchFamily="18" charset="0"/>
+                      </a:rPr>
+                      <m:t>𝑡</m:t>
+                    </m:r>
+                  </m:oMath>
+                </a14:m>
+                <a:endParaRPr lang="en-US" sz="1200" dirty="0">
+                  <a:solidFill>
+                    <a:schemeClr val="tx1"/>
+                  </a:solidFill>
+                </a:endParaRPr>
+              </a:p>
+              <a:p>
+                <a:pPr marL="0" indent="0">
+                  <a:lnSpc>
+                    <a:spcPct val="100000"/>
+                  </a:lnSpc>
+                  <a:spcBef>
+                    <a:spcPts val="0"/>
+                  </a:spcBef>
+                  <a:buNone/>
+                </a:pPr>
+                <a14:m>
+                  <m:oMath xmlns:m="http://schemas.openxmlformats.org/officeDocument/2006/math">
+                    <m:sSub>
+                      <m:sSubPr>
+                        <m:ctrlPr>
+                          <a:rPr lang="en-US" sz="1200" i="1" dirty="0">
+                            <a:solidFill>
+                              <a:schemeClr val="tx1"/>
+                            </a:solidFill>
+                            <a:latin typeface="Cambria Math" panose="02040503050406030204" pitchFamily="18" charset="0"/>
+                          </a:rPr>
+                        </m:ctrlPr>
+                      </m:sSubPr>
+                      <m:e>
+                        <m:r>
+                          <a:rPr lang="en-US" sz="1200" b="0" i="1" dirty="0" smtClean="0">
+                            <a:solidFill>
+                              <a:schemeClr val="tx1"/>
+                            </a:solidFill>
+                            <a:latin typeface="Cambria Math" panose="02040503050406030204" pitchFamily="18" charset="0"/>
+                          </a:rPr>
+                          <m:t>𝛿</m:t>
+                        </m:r>
+                      </m:e>
+                      <m:sub>
+                        <m:r>
+                          <a:rPr lang="en-US" sz="1200" i="1" dirty="0">
+                            <a:solidFill>
+                              <a:schemeClr val="tx1"/>
+                            </a:solidFill>
+                            <a:latin typeface="Cambria Math" panose="02040503050406030204" pitchFamily="18" charset="0"/>
+                          </a:rPr>
+                          <m:t>𝑡</m:t>
+                        </m:r>
+                      </m:sub>
+                    </m:sSub>
+                  </m:oMath>
+                </a14:m>
+                <a:r>
+                  <a:rPr lang="en-US" sz="1200" dirty="0">
+                    <a:solidFill>
+                      <a:schemeClr val="tx1"/>
+                    </a:solidFill>
+                  </a:rPr>
+                  <a:t>	TD error</a:t>
+                </a:r>
+              </a:p>
+            </p:txBody>
+          </p:sp>
+        </mc:Choice>
+        <mc:Fallback>
+          <p:sp>
+            <p:nvSpPr>
+              <p:cNvPr id="4" name="Content Placeholder 2">
+                <a:extLst>
+                  <a:ext uri="{FF2B5EF4-FFF2-40B4-BE49-F238E27FC236}">
+                    <a16:creationId xmlns:a16="http://schemas.microsoft.com/office/drawing/2014/main" id="{4C5E539A-F9A7-F959-ACD3-4ADE5900F587}"/>
+                  </a:ext>
+                </a:extLst>
+              </p:cNvPr>
+              <p:cNvSpPr txBox="1">
+                <a:spLocks noRot="1" noChangeAspect="1" noMove="1" noResize="1" noEditPoints="1" noAdjustHandles="1" noChangeArrowheads="1" noChangeShapeType="1" noTextEdit="1"/>
+              </p:cNvSpPr>
+              <p:nvPr/>
+            </p:nvSpPr>
+            <p:spPr>
+              <a:xfrm>
+                <a:off x="822817" y="5567468"/>
+                <a:ext cx="5273179" cy="646331"/>
+              </a:xfrm>
+              <a:prstGeom prst="rect">
+                <a:avLst/>
+              </a:prstGeom>
+              <a:blipFill>
+                <a:blip r:embed="rId5"/>
+                <a:stretch>
+                  <a:fillRect b="-4587"/>
+                </a:stretch>
+              </a:blipFill>
+            </p:spPr>
+            <p:txBody>
+              <a:bodyPr/>
+              <a:lstStyle/>
+              <a:p>
+                <a:r>
+                  <a:rPr lang="en-US">
+                    <a:noFill/>
+                  </a:rPr>
+                  <a:t> </a:t>
+                </a:r>
+              </a:p>
+            </p:txBody>
+          </p:sp>
+        </mc:Fallback>
+      </mc:AlternateContent>
+      <mc:AlternateContent xmlns:mc="http://schemas.openxmlformats.org/markup-compatibility/2006">
+        <mc:Choice xmlns:a14="http://schemas.microsoft.com/office/drawing/2010/main" Requires="a14">
+          <p:sp>
+            <p:nvSpPr>
+              <p:cNvPr id="5" name="Content Placeholder 2">
+                <a:extLst>
+                  <a:ext uri="{FF2B5EF4-FFF2-40B4-BE49-F238E27FC236}">
+                    <a16:creationId xmlns:a16="http://schemas.microsoft.com/office/drawing/2014/main" id="{9FA76CFB-B55E-EFC6-DA3D-BEB7A8763838}"/>
+                  </a:ext>
+                </a:extLst>
+              </p:cNvPr>
+              <p:cNvSpPr txBox="1">
+                <a:spLocks/>
+              </p:cNvSpPr>
+              <p:nvPr/>
+            </p:nvSpPr>
+            <p:spPr>
+              <a:xfrm>
+                <a:off x="6267338" y="4942028"/>
+                <a:ext cx="5273179" cy="1574534"/>
+              </a:xfrm>
+              <a:prstGeom prst="rect">
+                <a:avLst/>
+              </a:prstGeom>
+            </p:spPr>
+            <p:style>
+              <a:lnRef idx="2">
+                <a:schemeClr val="accent2"/>
+              </a:lnRef>
+              <a:fillRef idx="1">
+                <a:schemeClr val="lt1"/>
+              </a:fillRef>
+              <a:effectRef idx="0">
+                <a:schemeClr val="accent2"/>
+              </a:effectRef>
+              <a:fontRef idx="minor">
+                <a:schemeClr val="dk1"/>
+              </a:fontRef>
+            </p:style>
+            <p:txBody>
+              <a:bodyPr vert="horz" lIns="91440" tIns="45720" rIns="91440" bIns="45720" rtlCol="0">
+                <a:spAutoFit/>
+              </a:bodyPr>
+              <a:lstStyle>
+                <a:lvl1pPr marL="228600" indent="-228600" algn="l" defTabSz="914400" rtl="0" eaLnBrk="1" latinLnBrk="0" hangingPunct="1">
+                  <a:lnSpc>
+                    <a:spcPct val="90000"/>
+                  </a:lnSpc>
+                  <a:spcBef>
+                    <a:spcPts val="1000"/>
+                  </a:spcBef>
+                  <a:buFont typeface="Arial" panose="020B0604020202020204" pitchFamily="34" charset="0"/>
+                  <a:buChar char="•"/>
+                  <a:defRPr sz="2800" kern="1200">
+                    <a:solidFill>
+                      <a:schemeClr val="dk1"/>
+                    </a:solidFill>
+                    <a:latin typeface="+mn-lt"/>
+                    <a:ea typeface="+mn-ea"/>
+                    <a:cs typeface="+mn-cs"/>
+                  </a:defRPr>
+                </a:lvl1pPr>
+                <a:lvl2pPr marL="685800" indent="-228600" algn="l" defTabSz="914400" rtl="0" eaLnBrk="1" latinLnBrk="0" hangingPunct="1">
+                  <a:lnSpc>
+                    <a:spcPct val="90000"/>
+                  </a:lnSpc>
+                  <a:spcBef>
+                    <a:spcPts val="500"/>
+                  </a:spcBef>
+                  <a:buFont typeface="Arial" panose="020B0604020202020204" pitchFamily="34" charset="0"/>
+                  <a:buChar char="•"/>
+                  <a:defRPr sz="2400" kern="1200">
+                    <a:solidFill>
+                      <a:schemeClr val="dk1"/>
+                    </a:solidFill>
+                    <a:latin typeface="+mn-lt"/>
+                    <a:ea typeface="+mn-ea"/>
+                    <a:cs typeface="+mn-cs"/>
+                  </a:defRPr>
+                </a:lvl2pPr>
+                <a:lvl3pPr marL="1143000" indent="-228600" algn="l" defTabSz="914400" rtl="0" eaLnBrk="1" latinLnBrk="0" hangingPunct="1">
+                  <a:lnSpc>
+                    <a:spcPct val="90000"/>
+                  </a:lnSpc>
+                  <a:spcBef>
+                    <a:spcPts val="500"/>
+                  </a:spcBef>
+                  <a:buFont typeface="Arial" panose="020B0604020202020204" pitchFamily="34" charset="0"/>
+                  <a:buChar char="•"/>
+                  <a:defRPr sz="2000" kern="1200">
+                    <a:solidFill>
+                      <a:schemeClr val="dk1"/>
+                    </a:solidFill>
+                    <a:latin typeface="+mn-lt"/>
+                    <a:ea typeface="+mn-ea"/>
+                    <a:cs typeface="+mn-cs"/>
+                  </a:defRPr>
+                </a:lvl3pPr>
+                <a:lvl4pPr marL="1600200" indent="-228600" algn="l" defTabSz="914400" rtl="0" eaLnBrk="1" latinLnBrk="0" hangingPunct="1">
+                  <a:lnSpc>
+                    <a:spcPct val="90000"/>
+                  </a:lnSpc>
+                  <a:spcBef>
+                    <a:spcPts val="500"/>
+                  </a:spcBef>
+                  <a:buFont typeface="Arial" panose="020B0604020202020204" pitchFamily="34" charset="0"/>
+                  <a:buChar char="•"/>
+                  <a:defRPr sz="1800" kern="1200">
+                    <a:solidFill>
+                      <a:schemeClr val="dk1"/>
+                    </a:solidFill>
+                    <a:latin typeface="+mn-lt"/>
+                    <a:ea typeface="+mn-ea"/>
+                    <a:cs typeface="+mn-cs"/>
+                  </a:defRPr>
+                </a:lvl4pPr>
+                <a:lvl5pPr marL="2057400" indent="-228600" algn="l" defTabSz="914400" rtl="0" eaLnBrk="1" latinLnBrk="0" hangingPunct="1">
+                  <a:lnSpc>
+                    <a:spcPct val="90000"/>
+                  </a:lnSpc>
+                  <a:spcBef>
+                    <a:spcPts val="500"/>
+                  </a:spcBef>
+                  <a:buFont typeface="Arial" panose="020B0604020202020204" pitchFamily="34" charset="0"/>
+                  <a:buChar char="•"/>
+                  <a:defRPr sz="1800" kern="1200">
+                    <a:solidFill>
+                      <a:schemeClr val="dk1"/>
+                    </a:solidFill>
+                    <a:latin typeface="+mn-lt"/>
+                    <a:ea typeface="+mn-ea"/>
+                    <a:cs typeface="+mn-cs"/>
+                  </a:defRPr>
+                </a:lvl5pPr>
+                <a:lvl6pPr marL="2514600" indent="-228600" algn="l" defTabSz="914400" rtl="0" eaLnBrk="1" latinLnBrk="0" hangingPunct="1">
+                  <a:lnSpc>
+                    <a:spcPct val="90000"/>
+                  </a:lnSpc>
+                  <a:spcBef>
+                    <a:spcPts val="500"/>
+                  </a:spcBef>
+                  <a:buFont typeface="Arial" panose="020B0604020202020204" pitchFamily="34" charset="0"/>
+                  <a:buChar char="•"/>
+                  <a:defRPr sz="1800" kern="1200">
+                    <a:solidFill>
+                      <a:schemeClr val="dk1"/>
+                    </a:solidFill>
+                    <a:latin typeface="+mn-lt"/>
+                    <a:ea typeface="+mn-ea"/>
+                    <a:cs typeface="+mn-cs"/>
+                  </a:defRPr>
+                </a:lvl6pPr>
+                <a:lvl7pPr marL="2971800" indent="-228600" algn="l" defTabSz="914400" rtl="0" eaLnBrk="1" latinLnBrk="0" hangingPunct="1">
+                  <a:lnSpc>
+                    <a:spcPct val="90000"/>
+                  </a:lnSpc>
+                  <a:spcBef>
+                    <a:spcPts val="500"/>
+                  </a:spcBef>
+                  <a:buFont typeface="Arial" panose="020B0604020202020204" pitchFamily="34" charset="0"/>
+                  <a:buChar char="•"/>
+                  <a:defRPr sz="1800" kern="1200">
+                    <a:solidFill>
+                      <a:schemeClr val="dk1"/>
+                    </a:solidFill>
+                    <a:latin typeface="+mn-lt"/>
+                    <a:ea typeface="+mn-ea"/>
+                    <a:cs typeface="+mn-cs"/>
+                  </a:defRPr>
+                </a:lvl7pPr>
+                <a:lvl8pPr marL="3429000" indent="-228600" algn="l" defTabSz="914400" rtl="0" eaLnBrk="1" latinLnBrk="0" hangingPunct="1">
+                  <a:lnSpc>
+                    <a:spcPct val="90000"/>
+                  </a:lnSpc>
+                  <a:spcBef>
+                    <a:spcPts val="500"/>
+                  </a:spcBef>
+                  <a:buFont typeface="Arial" panose="020B0604020202020204" pitchFamily="34" charset="0"/>
+                  <a:buChar char="•"/>
+                  <a:defRPr sz="1800" kern="1200">
+                    <a:solidFill>
+                      <a:schemeClr val="dk1"/>
+                    </a:solidFill>
+                    <a:latin typeface="+mn-lt"/>
+                    <a:ea typeface="+mn-ea"/>
+                    <a:cs typeface="+mn-cs"/>
+                  </a:defRPr>
+                </a:lvl8pPr>
+                <a:lvl9pPr marL="3886200" indent="-228600" algn="l" defTabSz="914400" rtl="0" eaLnBrk="1" latinLnBrk="0" hangingPunct="1">
+                  <a:lnSpc>
+                    <a:spcPct val="90000"/>
+                  </a:lnSpc>
+                  <a:spcBef>
+                    <a:spcPts val="500"/>
+                  </a:spcBef>
+                  <a:buFont typeface="Arial" panose="020B0604020202020204" pitchFamily="34" charset="0"/>
+                  <a:buChar char="•"/>
+                  <a:defRPr sz="1800" kern="1200">
+                    <a:solidFill>
+                      <a:schemeClr val="dk1"/>
+                    </a:solidFill>
+                    <a:latin typeface="+mn-lt"/>
+                    <a:ea typeface="+mn-ea"/>
+                    <a:cs typeface="+mn-cs"/>
+                  </a:defRPr>
+                </a:lvl9pPr>
+              </a:lstStyle>
+              <a:p>
+                <a:pPr marL="0" indent="0">
+                  <a:lnSpc>
+                    <a:spcPct val="100000"/>
+                  </a:lnSpc>
+                  <a:spcBef>
+                    <a:spcPts val="0"/>
+                  </a:spcBef>
+                  <a:buFont typeface="Arial" panose="020B0604020202020204" pitchFamily="34" charset="0"/>
+                  <a:buNone/>
+                </a:pPr>
+                <a:r>
+                  <a:rPr lang="en-US" sz="1200" b="1" dirty="0"/>
+                  <a:t>Approximation</a:t>
+                </a:r>
+                <a:endParaRPr lang="en-US" sz="1200" i="1" dirty="0">
+                  <a:latin typeface="Cambria Math" panose="02040503050406030204" pitchFamily="18" charset="0"/>
+                </a:endParaRPr>
+              </a:p>
+              <a:p>
+                <a:pPr marL="0" indent="0">
+                  <a:lnSpc>
+                    <a:spcPct val="100000"/>
+                  </a:lnSpc>
+                  <a:spcBef>
+                    <a:spcPts val="0"/>
+                  </a:spcBef>
+                  <a:buNone/>
+                </a:pPr>
+                <a14:m>
+                  <m:oMath xmlns:m="http://schemas.openxmlformats.org/officeDocument/2006/math">
+                    <m:r>
+                      <a:rPr lang="en-US" sz="1200" b="0" i="1" dirty="0" smtClean="0">
+                        <a:solidFill>
+                          <a:schemeClr val="tx1"/>
+                        </a:solidFill>
+                        <a:latin typeface="Cambria Math" panose="02040503050406030204" pitchFamily="18" charset="0"/>
+                      </a:rPr>
+                      <m:t>𝜇</m:t>
+                    </m:r>
+                    <m:r>
+                      <a:rPr lang="en-US" sz="1200" b="0" i="1" dirty="0" smtClean="0">
+                        <a:solidFill>
+                          <a:schemeClr val="tx1"/>
+                        </a:solidFill>
+                        <a:latin typeface="Cambria Math" panose="02040503050406030204" pitchFamily="18" charset="0"/>
+                      </a:rPr>
+                      <m:t>(</m:t>
+                    </m:r>
+                    <m:r>
+                      <a:rPr lang="en-US" sz="1200" b="0" i="1" dirty="0" smtClean="0">
+                        <a:solidFill>
+                          <a:schemeClr val="tx1"/>
+                        </a:solidFill>
+                        <a:latin typeface="Cambria Math" panose="02040503050406030204" pitchFamily="18" charset="0"/>
+                      </a:rPr>
+                      <m:t>𝑠</m:t>
+                    </m:r>
+                    <m:r>
+                      <a:rPr lang="en-US" sz="1200" b="0" i="1" dirty="0" smtClean="0">
+                        <a:solidFill>
+                          <a:schemeClr val="tx1"/>
+                        </a:solidFill>
+                        <a:latin typeface="Cambria Math" panose="02040503050406030204" pitchFamily="18" charset="0"/>
+                      </a:rPr>
+                      <m:t>)</m:t>
+                    </m:r>
+                  </m:oMath>
+                </a14:m>
+                <a:r>
+                  <a:rPr lang="en-US" sz="1200" dirty="0">
+                    <a:solidFill>
+                      <a:schemeClr val="tx1"/>
+                    </a:solidFill>
+                  </a:rPr>
+                  <a:t>	on policy distribution (fraction of time spent in state)</a:t>
+                </a:r>
+              </a:p>
+              <a:p>
+                <a:pPr marL="0" indent="0">
+                  <a:lnSpc>
+                    <a:spcPct val="100000"/>
+                  </a:lnSpc>
+                  <a:spcBef>
+                    <a:spcPts val="0"/>
+                  </a:spcBef>
+                  <a:buNone/>
+                </a:pPr>
+                <a14:m>
+                  <m:oMath xmlns:m="http://schemas.openxmlformats.org/officeDocument/2006/math">
+                    <m:r>
+                      <a:rPr lang="en-US" sz="1200" i="1" dirty="0" smtClean="0">
+                        <a:solidFill>
+                          <a:schemeClr val="tx1"/>
+                        </a:solidFill>
+                        <a:latin typeface="Cambria Math" panose="02040503050406030204" pitchFamily="18" charset="0"/>
+                      </a:rPr>
+                      <m:t>𝛼</m:t>
+                    </m:r>
+                  </m:oMath>
+                </a14:m>
+                <a:r>
+                  <a:rPr lang="en-US" sz="1200" dirty="0">
+                    <a:solidFill>
+                      <a:schemeClr val="tx1"/>
+                    </a:solidFill>
+                  </a:rPr>
+                  <a:t>	step size (gradient descent learning rate)</a:t>
+                </a:r>
+              </a:p>
+              <a:p>
+                <a:pPr marL="0" indent="0">
+                  <a:lnSpc>
+                    <a:spcPct val="100000"/>
+                  </a:lnSpc>
+                  <a:spcBef>
+                    <a:spcPts val="0"/>
+                  </a:spcBef>
+                  <a:buNone/>
+                </a:pPr>
+                <a14:m>
+                  <m:oMath xmlns:m="http://schemas.openxmlformats.org/officeDocument/2006/math">
+                    <m:acc>
+                      <m:accPr>
+                        <m:chr m:val="̂"/>
+                        <m:ctrlPr>
+                          <a:rPr lang="en-US" sz="1200" i="1" dirty="0" smtClean="0">
+                            <a:solidFill>
+                              <a:schemeClr val="tx1"/>
+                            </a:solidFill>
+                            <a:latin typeface="Cambria Math" panose="02040503050406030204" pitchFamily="18" charset="0"/>
+                          </a:rPr>
+                        </m:ctrlPr>
+                      </m:accPr>
+                      <m:e>
+                        <m:r>
+                          <a:rPr lang="en-US" sz="1200" b="0" i="1" dirty="0" smtClean="0">
+                            <a:solidFill>
+                              <a:schemeClr val="tx1"/>
+                            </a:solidFill>
+                            <a:latin typeface="Cambria Math" panose="02040503050406030204" pitchFamily="18" charset="0"/>
+                          </a:rPr>
+                          <m:t>𝑣</m:t>
+                        </m:r>
+                      </m:e>
+                    </m:acc>
+                    <m:r>
+                      <a:rPr lang="en-US" sz="1200" b="0" i="1" dirty="0" smtClean="0">
+                        <a:latin typeface="Cambria Math" panose="02040503050406030204" pitchFamily="18" charset="0"/>
+                      </a:rPr>
+                      <m:t>(</m:t>
+                    </m:r>
+                    <m:r>
+                      <a:rPr lang="en-US" sz="1200" b="0" i="1" dirty="0" smtClean="0">
+                        <a:latin typeface="Cambria Math" panose="02040503050406030204" pitchFamily="18" charset="0"/>
+                      </a:rPr>
+                      <m:t>𝑠</m:t>
+                    </m:r>
+                    <m:r>
+                      <a:rPr lang="en-US" sz="1200" b="0" i="1" dirty="0" smtClean="0">
+                        <a:latin typeface="Cambria Math" panose="02040503050406030204" pitchFamily="18" charset="0"/>
+                      </a:rPr>
+                      <m:t>, </m:t>
+                    </m:r>
+                    <m:r>
+                      <a:rPr lang="en-US" sz="1200" b="1" i="1" dirty="0" smtClean="0">
+                        <a:solidFill>
+                          <a:schemeClr val="tx1"/>
+                        </a:solidFill>
+                        <a:latin typeface="Cambria Math" panose="02040503050406030204" pitchFamily="18" charset="0"/>
+                      </a:rPr>
+                      <m:t>𝒘</m:t>
+                    </m:r>
+                    <m:r>
+                      <a:rPr lang="en-US" sz="1200" b="0" i="1" dirty="0" smtClean="0">
+                        <a:solidFill>
+                          <a:schemeClr val="tx1"/>
+                        </a:solidFill>
+                        <a:latin typeface="Cambria Math" panose="02040503050406030204" pitchFamily="18" charset="0"/>
+                      </a:rPr>
+                      <m:t>)</m:t>
+                    </m:r>
+                  </m:oMath>
+                </a14:m>
+                <a:r>
+                  <a:rPr lang="en-US" sz="1200" dirty="0">
+                    <a:solidFill>
+                      <a:schemeClr val="tx1"/>
+                    </a:solidFill>
+                  </a:rPr>
+                  <a:t>	approximate value function</a:t>
+                </a:r>
+                <a:br>
+                  <a:rPr lang="en-US" sz="1200" dirty="0">
+                    <a:solidFill>
+                      <a:schemeClr val="tx1"/>
+                    </a:solidFill>
+                  </a:rPr>
+                </a:br>
+                <a14:m>
+                  <m:oMath xmlns:m="http://schemas.openxmlformats.org/officeDocument/2006/math">
+                    <m:acc>
+                      <m:accPr>
+                        <m:chr m:val="̂"/>
+                        <m:ctrlPr>
+                          <a:rPr lang="en-US" sz="1200" i="1" dirty="0">
+                            <a:solidFill>
+                              <a:schemeClr val="tx1"/>
+                            </a:solidFill>
+                            <a:latin typeface="Cambria Math" panose="02040503050406030204" pitchFamily="18" charset="0"/>
+                          </a:rPr>
+                        </m:ctrlPr>
+                      </m:accPr>
+                      <m:e>
+                        <m:r>
+                          <a:rPr lang="en-US" sz="1200" b="0" i="1" dirty="0" smtClean="0">
+                            <a:solidFill>
+                              <a:schemeClr val="tx1"/>
+                            </a:solidFill>
+                            <a:latin typeface="Cambria Math" panose="02040503050406030204" pitchFamily="18" charset="0"/>
+                          </a:rPr>
+                          <m:t>𝑞</m:t>
+                        </m:r>
+                      </m:e>
+                    </m:acc>
+                    <m:r>
+                      <a:rPr lang="en-US" sz="1200" i="1" dirty="0">
+                        <a:latin typeface="Cambria Math" panose="02040503050406030204" pitchFamily="18" charset="0"/>
+                      </a:rPr>
+                      <m:t>(</m:t>
+                    </m:r>
+                    <m:r>
+                      <a:rPr lang="en-US" sz="1200" i="1" dirty="0">
+                        <a:latin typeface="Cambria Math" panose="02040503050406030204" pitchFamily="18" charset="0"/>
+                      </a:rPr>
+                      <m:t>𝑠</m:t>
+                    </m:r>
+                    <m:r>
+                      <a:rPr lang="en-US" sz="1200" i="1" dirty="0">
+                        <a:latin typeface="Cambria Math" panose="02040503050406030204" pitchFamily="18" charset="0"/>
+                      </a:rPr>
+                      <m:t>, </m:t>
+                    </m:r>
+                    <m:r>
+                      <a:rPr lang="en-US" sz="1200" b="0" i="1" dirty="0" smtClean="0">
+                        <a:latin typeface="Cambria Math" panose="02040503050406030204" pitchFamily="18" charset="0"/>
+                      </a:rPr>
+                      <m:t>𝑎</m:t>
+                    </m:r>
+                    <m:r>
+                      <a:rPr lang="en-US" sz="1200" b="0" i="1" dirty="0" smtClean="0">
+                        <a:latin typeface="Cambria Math" panose="02040503050406030204" pitchFamily="18" charset="0"/>
+                      </a:rPr>
+                      <m:t>, </m:t>
+                    </m:r>
+                    <m:r>
+                      <a:rPr lang="en-US" sz="1200" b="1" i="1" dirty="0">
+                        <a:solidFill>
+                          <a:schemeClr val="tx1"/>
+                        </a:solidFill>
+                        <a:latin typeface="Cambria Math" panose="02040503050406030204" pitchFamily="18" charset="0"/>
+                      </a:rPr>
+                      <m:t>𝒘</m:t>
+                    </m:r>
+                    <m:r>
+                      <a:rPr lang="en-US" sz="1200" i="1" dirty="0">
+                        <a:solidFill>
+                          <a:schemeClr val="tx1"/>
+                        </a:solidFill>
+                        <a:latin typeface="Cambria Math" panose="02040503050406030204" pitchFamily="18" charset="0"/>
+                      </a:rPr>
+                      <m:t>)</m:t>
+                    </m:r>
+                  </m:oMath>
+                </a14:m>
+                <a:r>
+                  <a:rPr lang="en-US" sz="1200" dirty="0">
+                    <a:solidFill>
+                      <a:schemeClr val="tx1"/>
+                    </a:solidFill>
+                  </a:rPr>
+                  <a:t>	approximate action-value function</a:t>
+                </a:r>
+                <a:br>
+                  <a:rPr lang="en-US" sz="1200" dirty="0">
+                    <a:solidFill>
+                      <a:schemeClr val="tx1"/>
+                    </a:solidFill>
+                  </a:rPr>
+                </a:br>
+                <a14:m>
+                  <m:oMath xmlns:m="http://schemas.openxmlformats.org/officeDocument/2006/math">
+                    <m:r>
+                      <a:rPr lang="en-US" sz="1200" b="0" i="1" smtClean="0">
+                        <a:solidFill>
+                          <a:schemeClr val="tx1"/>
+                        </a:solidFill>
+                        <a:latin typeface="Cambria Math" panose="02040503050406030204" pitchFamily="18" charset="0"/>
+                      </a:rPr>
+                      <m:t>𝜋</m:t>
+                    </m:r>
+                    <m:r>
+                      <a:rPr lang="en-US" sz="1200" b="0" i="1" smtClean="0">
+                        <a:solidFill>
+                          <a:schemeClr val="tx1"/>
+                        </a:solidFill>
+                        <a:latin typeface="Cambria Math" panose="02040503050406030204" pitchFamily="18" charset="0"/>
+                      </a:rPr>
+                      <m:t>(</m:t>
+                    </m:r>
+                    <m:r>
+                      <a:rPr lang="en-US" sz="1200" b="0" i="1" smtClean="0">
+                        <a:solidFill>
+                          <a:schemeClr val="tx1"/>
+                        </a:solidFill>
+                        <a:latin typeface="Cambria Math" panose="02040503050406030204" pitchFamily="18" charset="0"/>
+                      </a:rPr>
+                      <m:t>𝑎</m:t>
+                    </m:r>
+                    <m:r>
+                      <a:rPr lang="en-US" sz="1200" b="0" i="1" smtClean="0">
+                        <a:solidFill>
+                          <a:schemeClr val="tx1"/>
+                        </a:solidFill>
+                        <a:latin typeface="Cambria Math" panose="02040503050406030204" pitchFamily="18" charset="0"/>
+                      </a:rPr>
+                      <m:t>|</m:t>
+                    </m:r>
+                    <m:r>
+                      <a:rPr lang="en-US" sz="1200" b="0" i="1" smtClean="0">
+                        <a:solidFill>
+                          <a:schemeClr val="tx1"/>
+                        </a:solidFill>
+                        <a:latin typeface="Cambria Math" panose="02040503050406030204" pitchFamily="18" charset="0"/>
+                      </a:rPr>
+                      <m:t>𝑠</m:t>
+                    </m:r>
+                    <m:r>
+                      <a:rPr lang="en-US" sz="1200" b="0" i="1" smtClean="0">
+                        <a:solidFill>
+                          <a:schemeClr val="tx1"/>
+                        </a:solidFill>
+                        <a:latin typeface="Cambria Math" panose="02040503050406030204" pitchFamily="18" charset="0"/>
+                      </a:rPr>
+                      <m:t>,</m:t>
+                    </m:r>
+                    <m:r>
+                      <a:rPr lang="en-US" sz="1200" b="1" i="1" smtClean="0">
+                        <a:solidFill>
+                          <a:schemeClr val="tx1"/>
+                        </a:solidFill>
+                        <a:latin typeface="Cambria Math" panose="02040503050406030204" pitchFamily="18" charset="0"/>
+                      </a:rPr>
+                      <m:t>𝜽</m:t>
+                    </m:r>
+                    <m:r>
+                      <a:rPr lang="en-US" sz="1200" b="0" i="1" smtClean="0">
+                        <a:solidFill>
+                          <a:schemeClr val="tx1"/>
+                        </a:solidFill>
+                        <a:latin typeface="Cambria Math" panose="02040503050406030204" pitchFamily="18" charset="0"/>
+                      </a:rPr>
+                      <m:t>)</m:t>
+                    </m:r>
+                  </m:oMath>
+                </a14:m>
+                <a:r>
+                  <a:rPr lang="en-US" sz="1200" dirty="0">
+                    <a:solidFill>
+                      <a:schemeClr val="tx1"/>
+                    </a:solidFill>
+                  </a:rPr>
+                  <a:t>	approximate policy</a:t>
+                </a:r>
+              </a:p>
+              <a:p>
+                <a:pPr marL="0" indent="0">
+                  <a:lnSpc>
+                    <a:spcPct val="100000"/>
+                  </a:lnSpc>
+                  <a:spcBef>
+                    <a:spcPts val="0"/>
+                  </a:spcBef>
+                  <a:buNone/>
+                </a:pPr>
+                <a14:m>
+                  <m:oMath xmlns:m="http://schemas.openxmlformats.org/officeDocument/2006/math">
+                    <m:acc>
+                      <m:accPr>
+                        <m:chr m:val="̂"/>
+                        <m:ctrlPr>
+                          <a:rPr lang="en-US" sz="1200" i="1" dirty="0" smtClean="0">
+                            <a:solidFill>
+                              <a:schemeClr val="tx1"/>
+                            </a:solidFill>
+                            <a:latin typeface="Cambria Math" panose="02040503050406030204" pitchFamily="18" charset="0"/>
+                          </a:rPr>
+                        </m:ctrlPr>
+                      </m:accPr>
+                      <m:e>
+                        <m:r>
+                          <a:rPr lang="en-US" sz="1200" b="0" i="1" dirty="0" smtClean="0">
+                            <a:solidFill>
+                              <a:schemeClr val="tx1"/>
+                            </a:solidFill>
+                            <a:latin typeface="Cambria Math" panose="02040503050406030204" pitchFamily="18" charset="0"/>
+                          </a:rPr>
+                          <m:t>𝑉𝐸</m:t>
+                        </m:r>
+                      </m:e>
+                    </m:acc>
+                  </m:oMath>
+                </a14:m>
+                <a:r>
+                  <a:rPr lang="en-US" sz="1200" dirty="0">
+                    <a:solidFill>
+                      <a:schemeClr val="tx1"/>
+                    </a:solidFill>
+                  </a:rPr>
+                  <a:t>	mean squared value error</a:t>
+                </a:r>
+              </a:p>
+              <a:p>
+                <a:pPr marL="0" indent="0">
+                  <a:lnSpc>
+                    <a:spcPct val="100000"/>
+                  </a:lnSpc>
+                  <a:spcBef>
+                    <a:spcPts val="0"/>
+                  </a:spcBef>
+                  <a:buNone/>
+                </a:pPr>
+                <a14:m>
+                  <m:oMath xmlns:m="http://schemas.openxmlformats.org/officeDocument/2006/math">
+                    <m:r>
+                      <m:rPr>
+                        <m:sty m:val="p"/>
+                      </m:rPr>
+                      <a:rPr lang="en-US" sz="1200" i="1" dirty="0" smtClean="0">
+                        <a:solidFill>
+                          <a:schemeClr val="tx1"/>
+                        </a:solidFill>
+                        <a:latin typeface="Cambria Math" panose="02040503050406030204" pitchFamily="18" charset="0"/>
+                        <a:ea typeface="Cambria Math" panose="02040503050406030204" pitchFamily="18" charset="0"/>
+                      </a:rPr>
+                      <m:t>∇</m:t>
+                    </m:r>
+                    <m:r>
+                      <a:rPr lang="en-US" sz="1200" b="0" i="1" dirty="0" smtClean="0">
+                        <a:solidFill>
+                          <a:schemeClr val="tx1"/>
+                        </a:solidFill>
+                        <a:latin typeface="Cambria Math" panose="02040503050406030204" pitchFamily="18" charset="0"/>
+                        <a:ea typeface="Cambria Math" panose="02040503050406030204" pitchFamily="18" charset="0"/>
+                      </a:rPr>
+                      <m:t>𝑓</m:t>
+                    </m:r>
+                    <m:r>
+                      <a:rPr lang="en-US" sz="1200" b="0" i="1" dirty="0" smtClean="0">
+                        <a:solidFill>
+                          <a:schemeClr val="tx1"/>
+                        </a:solidFill>
+                        <a:latin typeface="Cambria Math" panose="02040503050406030204" pitchFamily="18" charset="0"/>
+                        <a:ea typeface="Cambria Math" panose="02040503050406030204" pitchFamily="18" charset="0"/>
+                      </a:rPr>
+                      <m:t>(</m:t>
+                    </m:r>
+                    <m:r>
+                      <a:rPr lang="en-US" sz="1200" b="0" i="1" dirty="0" smtClean="0">
+                        <a:solidFill>
+                          <a:schemeClr val="tx1"/>
+                        </a:solidFill>
+                        <a:latin typeface="Cambria Math" panose="02040503050406030204" pitchFamily="18" charset="0"/>
+                        <a:ea typeface="Cambria Math" panose="02040503050406030204" pitchFamily="18" charset="0"/>
+                      </a:rPr>
+                      <m:t>𝑥</m:t>
+                    </m:r>
+                    <m:r>
+                      <a:rPr lang="en-US" sz="1200" b="0" i="1" dirty="0" smtClean="0">
+                        <a:solidFill>
+                          <a:schemeClr val="tx1"/>
+                        </a:solidFill>
+                        <a:latin typeface="Cambria Math" panose="02040503050406030204" pitchFamily="18" charset="0"/>
+                        <a:ea typeface="Cambria Math" panose="02040503050406030204" pitchFamily="18" charset="0"/>
+                      </a:rPr>
+                      <m:t>)</m:t>
+                    </m:r>
+                  </m:oMath>
+                </a14:m>
+                <a:r>
+                  <a:rPr lang="en-US" sz="1200" dirty="0">
+                    <a:solidFill>
+                      <a:schemeClr val="tx1"/>
+                    </a:solidFill>
+                  </a:rPr>
+                  <a:t>	gradient of function </a:t>
+                </a:r>
+                <a14:m>
+                  <m:oMath xmlns:m="http://schemas.openxmlformats.org/officeDocument/2006/math">
+                    <m:r>
+                      <a:rPr lang="en-US" sz="1200" b="0" i="1" smtClean="0">
+                        <a:solidFill>
+                          <a:schemeClr val="tx1"/>
+                        </a:solidFill>
+                        <a:latin typeface="Cambria Math" panose="02040503050406030204" pitchFamily="18" charset="0"/>
+                      </a:rPr>
+                      <m:t>𝑓</m:t>
+                    </m:r>
+                  </m:oMath>
+                </a14:m>
+                <a:r>
+                  <a:rPr lang="en-US" sz="1200" dirty="0">
+                    <a:solidFill>
+                      <a:schemeClr val="tx1"/>
+                    </a:solidFill>
+                  </a:rPr>
+                  <a:t> evaluated at </a:t>
+                </a:r>
+                <a14:m>
+                  <m:oMath xmlns:m="http://schemas.openxmlformats.org/officeDocument/2006/math">
+                    <m:r>
+                      <a:rPr lang="en-US" sz="1200" b="0" i="1" smtClean="0">
+                        <a:solidFill>
+                          <a:schemeClr val="tx1"/>
+                        </a:solidFill>
+                        <a:latin typeface="Cambria Math" panose="02040503050406030204" pitchFamily="18" charset="0"/>
+                      </a:rPr>
+                      <m:t>𝑥</m:t>
+                    </m:r>
+                  </m:oMath>
+                </a14:m>
+                <a:endParaRPr lang="en-US" sz="1200" dirty="0">
+                  <a:solidFill>
+                    <a:schemeClr val="tx1"/>
+                  </a:solidFill>
+                </a:endParaRPr>
+              </a:p>
+            </p:txBody>
+          </p:sp>
+        </mc:Choice>
+        <mc:Fallback>
+          <p:sp>
+            <p:nvSpPr>
+              <p:cNvPr id="5" name="Content Placeholder 2">
+                <a:extLst>
+                  <a:ext uri="{FF2B5EF4-FFF2-40B4-BE49-F238E27FC236}">
+                    <a16:creationId xmlns:a16="http://schemas.microsoft.com/office/drawing/2014/main" id="{9FA76CFB-B55E-EFC6-DA3D-BEB7A8763838}"/>
+                  </a:ext>
+                </a:extLst>
+              </p:cNvPr>
+              <p:cNvSpPr txBox="1">
+                <a:spLocks noRot="1" noChangeAspect="1" noMove="1" noResize="1" noEditPoints="1" noAdjustHandles="1" noChangeArrowheads="1" noChangeShapeType="1" noTextEdit="1"/>
+              </p:cNvSpPr>
+              <p:nvPr/>
+            </p:nvSpPr>
+            <p:spPr>
+              <a:xfrm>
+                <a:off x="6267338" y="4942028"/>
+                <a:ext cx="5273179" cy="1574534"/>
+              </a:xfrm>
+              <a:prstGeom prst="rect">
+                <a:avLst/>
+              </a:prstGeom>
+              <a:blipFill>
+                <a:blip r:embed="rId6"/>
+                <a:stretch>
+                  <a:fillRect b="-1533"/>
+                </a:stretch>
+              </a:blipFill>
+            </p:spPr>
+            <p:txBody>
+              <a:bodyPr/>
+              <a:lstStyle/>
+              <a:p>
+                <a:r>
+                  <a:rPr lang="en-US">
+                    <a:noFill/>
+                  </a:rPr>
+                  <a:t> </a:t>
+                </a:r>
+              </a:p>
+            </p:txBody>
+          </p:sp>
+        </mc:Fallback>
+      </mc:AlternateContent>
+    </p:spTree>
+    <p:extLst>
+      <p:ext uri="{BB962C8B-B14F-4D97-AF65-F5344CB8AC3E}">
+        <p14:creationId xmlns:p14="http://schemas.microsoft.com/office/powerpoint/2010/main" val="920694018"/>
+      </p:ext>
+    </p:extLst>
+  </p:cSld>
+  <p:clrMapOvr>
+    <a:masterClrMapping/>
+  </p:clrMapOvr>
+</p:sld>
+</file>
+
+<file path=ppt/slides/slide30.xml><?xml version="1.0" encoding="utf-8"?>
 <p:sld xmlns:a="http://schemas.openxmlformats.org/drawingml/2006/main" xmlns:r="http://schemas.openxmlformats.org/officeDocument/2006/relationships" xmlns:p="http://schemas.openxmlformats.org/presentationml/2006/main">
   <p:cSld>
     <p:spTree>
@@ -28664,3566 +33100,7 @@
 </p:sld>
 </file>
 
-<file path=ppt/slides/slide3.xml><?xml version="1.0" encoding="utf-8"?>
-<p:sld xmlns:a="http://schemas.openxmlformats.org/drawingml/2006/main" xmlns:r="http://schemas.openxmlformats.org/officeDocument/2006/relationships" xmlns:p="http://schemas.openxmlformats.org/presentationml/2006/main">
-  <p:cSld>
-    <p:spTree>
-      <p:nvGrpSpPr>
-        <p:cNvPr id="1" name=""/>
-        <p:cNvGrpSpPr/>
-        <p:nvPr/>
-      </p:nvGrpSpPr>
-      <p:grpSpPr>
-        <a:xfrm>
-          <a:off x="0" y="0"/>
-          <a:ext cx="0" cy="0"/>
-          <a:chOff x="0" y="0"/>
-          <a:chExt cx="0" cy="0"/>
-        </a:xfrm>
-      </p:grpSpPr>
-      <p:sp>
-        <p:nvSpPr>
-          <p:cNvPr id="2" name="Title 1">
-            <a:extLst>
-              <a:ext uri="{FF2B5EF4-FFF2-40B4-BE49-F238E27FC236}">
-                <a16:creationId xmlns:a16="http://schemas.microsoft.com/office/drawing/2014/main" id="{5BA4E1A2-75E3-3C9C-6C10-EE078C5AD54A}"/>
-              </a:ext>
-            </a:extLst>
-          </p:cNvPr>
-          <p:cNvSpPr>
-            <a:spLocks noGrp="1"/>
-          </p:cNvSpPr>
-          <p:nvPr>
-            <p:ph type="title"/>
-          </p:nvPr>
-        </p:nvSpPr>
-        <p:spPr/>
-        <p:txBody>
-          <a:bodyPr/>
-          <a:lstStyle/>
-          <a:p>
-            <a:r>
-              <a:rPr lang="en-US" dirty="0"/>
-              <a:t>Summary of Notation</a:t>
-            </a:r>
-          </a:p>
-        </p:txBody>
-      </p:sp>
-      <mc:AlternateContent xmlns:mc="http://schemas.openxmlformats.org/markup-compatibility/2006" xmlns:a14="http://schemas.microsoft.com/office/drawing/2010/main">
-        <mc:Choice Requires="a14">
-          <p:sp>
-            <p:nvSpPr>
-              <p:cNvPr id="3" name="Content Placeholder 2">
-                <a:extLst>
-                  <a:ext uri="{FF2B5EF4-FFF2-40B4-BE49-F238E27FC236}">
-                    <a16:creationId xmlns:a16="http://schemas.microsoft.com/office/drawing/2014/main" id="{47E69C9C-42B6-9B0F-9AE0-20D17703E490}"/>
-                  </a:ext>
-                </a:extLst>
-              </p:cNvPr>
-              <p:cNvSpPr>
-                <a:spLocks noGrp="1"/>
-              </p:cNvSpPr>
-              <p:nvPr>
-                <p:ph idx="1"/>
-              </p:nvPr>
-            </p:nvSpPr>
-            <p:spPr>
-              <a:xfrm>
-                <a:off x="822819" y="3700831"/>
-                <a:ext cx="5273179" cy="1902124"/>
-              </a:xfrm>
-            </p:spPr>
-            <p:style>
-              <a:lnRef idx="2">
-                <a:schemeClr val="accent2"/>
-              </a:lnRef>
-              <a:fillRef idx="1">
-                <a:schemeClr val="lt1"/>
-              </a:fillRef>
-              <a:effectRef idx="0">
-                <a:schemeClr val="accent2"/>
-              </a:effectRef>
-              <a:fontRef idx="minor">
-                <a:schemeClr val="dk1"/>
-              </a:fontRef>
-            </p:style>
-            <p:txBody>
-              <a:bodyPr>
-                <a:spAutoFit/>
-              </a:bodyPr>
-              <a:lstStyle/>
-              <a:p>
-                <a:pPr marL="0" indent="0">
-                  <a:lnSpc>
-                    <a:spcPct val="100000"/>
-                  </a:lnSpc>
-                  <a:spcBef>
-                    <a:spcPts val="0"/>
-                  </a:spcBef>
-                  <a:buNone/>
-                </a:pPr>
-                <a:r>
-                  <a:rPr lang="en-US" sz="1200" b="1" dirty="0"/>
-                  <a:t>Value Function</a:t>
-                </a:r>
-                <a:endParaRPr lang="en-US" sz="1200" i="1" dirty="0">
-                  <a:latin typeface="Cambria Math" panose="02040503050406030204" pitchFamily="18" charset="0"/>
-                </a:endParaRPr>
-              </a:p>
-              <a:p>
-                <a:pPr marL="0" indent="0">
-                  <a:lnSpc>
-                    <a:spcPct val="100000"/>
-                  </a:lnSpc>
-                  <a:spcBef>
-                    <a:spcPts val="0"/>
-                  </a:spcBef>
-                  <a:buNone/>
-                </a:pPr>
-                <a14:m>
-                  <m:oMath xmlns:m="http://schemas.openxmlformats.org/officeDocument/2006/math">
-                    <m:sSub>
-                      <m:sSubPr>
-                        <m:ctrlPr>
-                          <a:rPr lang="en-US" sz="1200" i="1" dirty="0" smtClean="0">
-                            <a:latin typeface="Cambria Math" panose="02040503050406030204" pitchFamily="18" charset="0"/>
-                          </a:rPr>
-                        </m:ctrlPr>
-                      </m:sSubPr>
-                      <m:e>
-                        <m:r>
-                          <a:rPr lang="en-US" sz="1200" i="1" dirty="0">
-                            <a:latin typeface="Cambria Math" panose="02040503050406030204" pitchFamily="18" charset="0"/>
-                          </a:rPr>
-                          <m:t>𝐺</m:t>
-                        </m:r>
-                      </m:e>
-                      <m:sub>
-                        <m:r>
-                          <a:rPr lang="en-US" sz="1200" i="1" dirty="0">
-                            <a:latin typeface="Cambria Math" panose="02040503050406030204" pitchFamily="18" charset="0"/>
-                          </a:rPr>
-                          <m:t>𝑡</m:t>
-                        </m:r>
-                      </m:sub>
-                    </m:sSub>
-                  </m:oMath>
-                </a14:m>
-                <a:r>
-                  <a:rPr lang="en-US" sz="1200" dirty="0"/>
-                  <a:t> 	return (cumulative reward) following time </a:t>
-                </a:r>
-                <a14:m>
-                  <m:oMath xmlns:m="http://schemas.openxmlformats.org/officeDocument/2006/math">
-                    <m:r>
-                      <a:rPr lang="en-US" sz="1200" i="1" dirty="0">
-                        <a:latin typeface="Cambria Math" panose="02040503050406030204" pitchFamily="18" charset="0"/>
-                      </a:rPr>
-                      <m:t>𝑡</m:t>
-                    </m:r>
-                  </m:oMath>
-                </a14:m>
-                <a:endParaRPr lang="en-US" sz="1200" dirty="0"/>
-              </a:p>
-              <a:p>
-                <a:pPr marL="0" indent="0">
-                  <a:lnSpc>
-                    <a:spcPct val="100000"/>
-                  </a:lnSpc>
-                  <a:spcBef>
-                    <a:spcPts val="0"/>
-                  </a:spcBef>
-                  <a:buNone/>
-                </a:pPr>
-                <a14:m>
-                  <m:oMath xmlns:m="http://schemas.openxmlformats.org/officeDocument/2006/math">
-                    <m:sSub>
-                      <m:sSubPr>
-                        <m:ctrlPr>
-                          <a:rPr lang="en-US" sz="1200" i="1" dirty="0">
-                            <a:solidFill>
-                              <a:schemeClr val="tx1"/>
-                            </a:solidFill>
-                            <a:latin typeface="Cambria Math" panose="02040503050406030204" pitchFamily="18" charset="0"/>
-                          </a:rPr>
-                        </m:ctrlPr>
-                      </m:sSubPr>
-                      <m:e>
-                        <m:r>
-                          <a:rPr lang="en-US" sz="1200" i="1" dirty="0">
-                            <a:solidFill>
-                              <a:schemeClr val="tx1"/>
-                            </a:solidFill>
-                            <a:latin typeface="Cambria Math" panose="02040503050406030204" pitchFamily="18" charset="0"/>
-                          </a:rPr>
-                          <m:t>𝐺</m:t>
-                        </m:r>
-                      </m:e>
-                      <m:sub>
-                        <m:r>
-                          <a:rPr lang="en-US" sz="1200" i="1" dirty="0">
-                            <a:solidFill>
-                              <a:schemeClr val="tx1"/>
-                            </a:solidFill>
-                            <a:latin typeface="Cambria Math" panose="02040503050406030204" pitchFamily="18" charset="0"/>
-                          </a:rPr>
-                          <m:t>𝑡</m:t>
-                        </m:r>
-                        <m:r>
-                          <a:rPr lang="en-US" sz="1200" i="1" dirty="0">
-                            <a:solidFill>
-                              <a:schemeClr val="tx1"/>
-                            </a:solidFill>
-                            <a:latin typeface="Cambria Math" panose="02040503050406030204" pitchFamily="18" charset="0"/>
-                          </a:rPr>
-                          <m:t>:</m:t>
-                        </m:r>
-                        <m:r>
-                          <a:rPr lang="en-US" sz="1200" i="1" dirty="0">
-                            <a:solidFill>
-                              <a:schemeClr val="tx1"/>
-                            </a:solidFill>
-                            <a:latin typeface="Cambria Math" panose="02040503050406030204" pitchFamily="18" charset="0"/>
-                          </a:rPr>
-                          <m:t>h</m:t>
-                        </m:r>
-                      </m:sub>
-                    </m:sSub>
-                  </m:oMath>
-                </a14:m>
-                <a:r>
-                  <a:rPr lang="en-US" sz="1200" dirty="0">
-                    <a:solidFill>
-                      <a:schemeClr val="tx1"/>
-                    </a:solidFill>
-                  </a:rPr>
-                  <a:t>	return from </a:t>
-                </a:r>
-                <a14:m>
-                  <m:oMath xmlns:m="http://schemas.openxmlformats.org/officeDocument/2006/math">
-                    <m:r>
-                      <a:rPr lang="en-US" sz="1200" i="1" dirty="0">
-                        <a:solidFill>
-                          <a:schemeClr val="tx1"/>
-                        </a:solidFill>
-                        <a:latin typeface="Cambria Math" panose="02040503050406030204" pitchFamily="18" charset="0"/>
-                      </a:rPr>
-                      <m:t>𝑡</m:t>
-                    </m:r>
-                  </m:oMath>
-                </a14:m>
-                <a:r>
-                  <a:rPr lang="en-US" sz="1200" dirty="0">
-                    <a:solidFill>
-                      <a:schemeClr val="tx1"/>
-                    </a:solidFill>
-                  </a:rPr>
-                  <a:t> to </a:t>
-                </a:r>
-                <a14:m>
-                  <m:oMath xmlns:m="http://schemas.openxmlformats.org/officeDocument/2006/math">
-                    <m:r>
-                      <a:rPr lang="en-US" sz="1200" i="1" dirty="0">
-                        <a:solidFill>
-                          <a:schemeClr val="tx1"/>
-                        </a:solidFill>
-                        <a:latin typeface="Cambria Math" panose="02040503050406030204" pitchFamily="18" charset="0"/>
-                      </a:rPr>
-                      <m:t>h</m:t>
-                    </m:r>
-                  </m:oMath>
-                </a14:m>
-                <a:r>
-                  <a:rPr lang="en-US" sz="1200" dirty="0">
-                    <a:solidFill>
-                      <a:schemeClr val="tx1"/>
-                    </a:solidFill>
-                  </a:rPr>
-                  <a:t> (discounted and corrected)</a:t>
-                </a:r>
-                <a:endParaRPr lang="en-US" sz="1200" dirty="0"/>
-              </a:p>
-              <a:p>
-                <a:pPr marL="0" indent="0">
-                  <a:lnSpc>
-                    <a:spcPct val="100000"/>
-                  </a:lnSpc>
-                  <a:spcBef>
-                    <a:spcPts val="0"/>
-                  </a:spcBef>
-                  <a:buNone/>
-                </a:pPr>
-                <a:endParaRPr lang="en-US" sz="1200" i="1" dirty="0">
-                  <a:latin typeface="Cambria Math" panose="02040503050406030204" pitchFamily="18" charset="0"/>
-                </a:endParaRPr>
-              </a:p>
-              <a:p>
-                <a:pPr marL="0" indent="0">
-                  <a:lnSpc>
-                    <a:spcPct val="100000"/>
-                  </a:lnSpc>
-                  <a:spcBef>
-                    <a:spcPts val="0"/>
-                  </a:spcBef>
-                  <a:buNone/>
-                </a:pPr>
-                <a14:m>
-                  <m:oMath xmlns:m="http://schemas.openxmlformats.org/officeDocument/2006/math">
-                    <m:sSub>
-                      <m:sSubPr>
-                        <m:ctrlPr>
-                          <a:rPr lang="en-US" sz="1200" i="1" dirty="0">
-                            <a:latin typeface="Cambria Math" panose="02040503050406030204" pitchFamily="18" charset="0"/>
-                          </a:rPr>
-                        </m:ctrlPr>
-                      </m:sSubPr>
-                      <m:e>
-                        <m:r>
-                          <a:rPr lang="en-US" sz="1200" i="1" dirty="0">
-                            <a:latin typeface="Cambria Math" panose="02040503050406030204" pitchFamily="18" charset="0"/>
-                          </a:rPr>
-                          <m:t>𝑣</m:t>
-                        </m:r>
-                      </m:e>
-                      <m:sub>
-                        <m:r>
-                          <a:rPr lang="en-US" sz="1200" i="1" dirty="0">
-                            <a:latin typeface="Cambria Math" panose="02040503050406030204" pitchFamily="18" charset="0"/>
-                          </a:rPr>
-                          <m:t>𝜋</m:t>
-                        </m:r>
-                      </m:sub>
-                    </m:sSub>
-                    <m:r>
-                      <a:rPr lang="en-US" sz="1200" i="1" dirty="0">
-                        <a:latin typeface="Cambria Math" panose="02040503050406030204" pitchFamily="18" charset="0"/>
-                      </a:rPr>
-                      <m:t>(</m:t>
-                    </m:r>
-                    <m:r>
-                      <a:rPr lang="en-US" sz="1200" i="1" dirty="0">
-                        <a:latin typeface="Cambria Math" panose="02040503050406030204" pitchFamily="18" charset="0"/>
-                      </a:rPr>
-                      <m:t>𝑠</m:t>
-                    </m:r>
-                    <m:r>
-                      <a:rPr lang="en-US" sz="1200" i="1" dirty="0">
-                        <a:latin typeface="Cambria Math" panose="02040503050406030204" pitchFamily="18" charset="0"/>
-                      </a:rPr>
-                      <m:t>)</m:t>
-                    </m:r>
-                  </m:oMath>
-                </a14:m>
-                <a:r>
-                  <a:rPr lang="en-US" sz="1200" dirty="0"/>
-                  <a:t>	value of state </a:t>
-                </a:r>
-                <a14:m>
-                  <m:oMath xmlns:m="http://schemas.openxmlformats.org/officeDocument/2006/math">
-                    <m:r>
-                      <a:rPr lang="en-US" sz="1200" i="1" dirty="0">
-                        <a:latin typeface="Cambria Math" panose="02040503050406030204" pitchFamily="18" charset="0"/>
-                      </a:rPr>
-                      <m:t>𝑠</m:t>
-                    </m:r>
-                  </m:oMath>
-                </a14:m>
-                <a:r>
-                  <a:rPr lang="en-US" sz="1200" dirty="0"/>
-                  <a:t> under policy </a:t>
-                </a:r>
-                <a14:m>
-                  <m:oMath xmlns:m="http://schemas.openxmlformats.org/officeDocument/2006/math">
-                    <m:r>
-                      <a:rPr lang="en-US" sz="1200" i="1" dirty="0">
-                        <a:latin typeface="Cambria Math" panose="02040503050406030204" pitchFamily="18" charset="0"/>
-                      </a:rPr>
-                      <m:t>𝜋</m:t>
-                    </m:r>
-                  </m:oMath>
-                </a14:m>
-                <a:r>
-                  <a:rPr lang="en-US" sz="1200" dirty="0"/>
-                  <a:t> (expected return)</a:t>
-                </a:r>
-              </a:p>
-              <a:p>
-                <a:pPr marL="0" indent="0">
-                  <a:lnSpc>
-                    <a:spcPct val="100000"/>
-                  </a:lnSpc>
-                  <a:spcBef>
-                    <a:spcPts val="0"/>
-                  </a:spcBef>
-                  <a:buNone/>
-                </a:pPr>
-                <a14:m>
-                  <m:oMath xmlns:m="http://schemas.openxmlformats.org/officeDocument/2006/math">
-                    <m:sSub>
-                      <m:sSubPr>
-                        <m:ctrlPr>
-                          <a:rPr lang="en-US" sz="1200" i="1" dirty="0">
-                            <a:latin typeface="Cambria Math" panose="02040503050406030204" pitchFamily="18" charset="0"/>
-                          </a:rPr>
-                        </m:ctrlPr>
-                      </m:sSubPr>
-                      <m:e>
-                        <m:r>
-                          <a:rPr lang="en-US" sz="1200" i="1" dirty="0">
-                            <a:latin typeface="Cambria Math" panose="02040503050406030204" pitchFamily="18" charset="0"/>
-                          </a:rPr>
-                          <m:t>𝑣</m:t>
-                        </m:r>
-                      </m:e>
-                      <m:sub>
-                        <m:r>
-                          <a:rPr lang="en-US" sz="1200" i="1" dirty="0">
-                            <a:latin typeface="Cambria Math" panose="02040503050406030204" pitchFamily="18" charset="0"/>
-                          </a:rPr>
-                          <m:t>∗</m:t>
-                        </m:r>
-                      </m:sub>
-                    </m:sSub>
-                    <m:r>
-                      <a:rPr lang="en-US" sz="1200" i="1" dirty="0">
-                        <a:latin typeface="Cambria Math" panose="02040503050406030204" pitchFamily="18" charset="0"/>
-                      </a:rPr>
-                      <m:t>(</m:t>
-                    </m:r>
-                    <m:r>
-                      <a:rPr lang="en-US" sz="1200" i="1" dirty="0">
-                        <a:latin typeface="Cambria Math" panose="02040503050406030204" pitchFamily="18" charset="0"/>
-                      </a:rPr>
-                      <m:t>𝑠</m:t>
-                    </m:r>
-                    <m:r>
-                      <a:rPr lang="en-US" sz="1200" i="1" dirty="0">
-                        <a:latin typeface="Cambria Math" panose="02040503050406030204" pitchFamily="18" charset="0"/>
-                      </a:rPr>
-                      <m:t>)</m:t>
-                    </m:r>
-                  </m:oMath>
-                </a14:m>
-                <a:r>
-                  <a:rPr lang="en-US" sz="1200" dirty="0"/>
-                  <a:t>	value of state s under the optimal policy</a:t>
-                </a:r>
-              </a:p>
-              <a:p>
-                <a:pPr marL="0" indent="0">
-                  <a:lnSpc>
-                    <a:spcPct val="100000"/>
-                  </a:lnSpc>
-                  <a:spcBef>
-                    <a:spcPts val="0"/>
-                  </a:spcBef>
-                  <a:buNone/>
-                </a:pPr>
-                <a14:m>
-                  <m:oMath xmlns:m="http://schemas.openxmlformats.org/officeDocument/2006/math">
-                    <m:sSub>
-                      <m:sSubPr>
-                        <m:ctrlPr>
-                          <a:rPr lang="en-US" sz="1200" i="1" dirty="0">
-                            <a:latin typeface="Cambria Math" panose="02040503050406030204" pitchFamily="18" charset="0"/>
-                          </a:rPr>
-                        </m:ctrlPr>
-                      </m:sSubPr>
-                      <m:e>
-                        <m:r>
-                          <a:rPr lang="en-US" sz="1200" i="1" dirty="0">
-                            <a:latin typeface="Cambria Math" panose="02040503050406030204" pitchFamily="18" charset="0"/>
-                          </a:rPr>
-                          <m:t>𝑞</m:t>
-                        </m:r>
-                      </m:e>
-                      <m:sub>
-                        <m:r>
-                          <a:rPr lang="en-US" sz="1200" i="1" dirty="0">
-                            <a:latin typeface="Cambria Math" panose="02040503050406030204" pitchFamily="18" charset="0"/>
-                          </a:rPr>
-                          <m:t>𝜋</m:t>
-                        </m:r>
-                      </m:sub>
-                    </m:sSub>
-                    <m:r>
-                      <a:rPr lang="en-US" sz="1200" i="1" dirty="0">
-                        <a:latin typeface="Cambria Math" panose="02040503050406030204" pitchFamily="18" charset="0"/>
-                      </a:rPr>
-                      <m:t>(</m:t>
-                    </m:r>
-                    <m:r>
-                      <a:rPr lang="en-US" sz="1200" i="1" dirty="0">
-                        <a:latin typeface="Cambria Math" panose="02040503050406030204" pitchFamily="18" charset="0"/>
-                      </a:rPr>
-                      <m:t>𝑠</m:t>
-                    </m:r>
-                    <m:r>
-                      <a:rPr lang="en-US" sz="1200" i="1" dirty="0">
-                        <a:latin typeface="Cambria Math" panose="02040503050406030204" pitchFamily="18" charset="0"/>
-                      </a:rPr>
-                      <m:t>,</m:t>
-                    </m:r>
-                    <m:r>
-                      <a:rPr lang="en-US" sz="1200" i="1" dirty="0">
-                        <a:latin typeface="Cambria Math" panose="02040503050406030204" pitchFamily="18" charset="0"/>
-                      </a:rPr>
-                      <m:t>𝑎</m:t>
-                    </m:r>
-                    <m:r>
-                      <a:rPr lang="en-US" sz="1200" i="1" dirty="0">
-                        <a:latin typeface="Cambria Math" panose="02040503050406030204" pitchFamily="18" charset="0"/>
-                      </a:rPr>
-                      <m:t>)</m:t>
-                    </m:r>
-                  </m:oMath>
-                </a14:m>
-                <a:r>
-                  <a:rPr lang="en-US" sz="1200" dirty="0"/>
-                  <a:t>	value of taking action </a:t>
-                </a:r>
-                <a14:m>
-                  <m:oMath xmlns:m="http://schemas.openxmlformats.org/officeDocument/2006/math">
-                    <m:r>
-                      <a:rPr lang="en-US" sz="1200" i="1" dirty="0">
-                        <a:latin typeface="Cambria Math" panose="02040503050406030204" pitchFamily="18" charset="0"/>
-                      </a:rPr>
-                      <m:t>𝑎</m:t>
-                    </m:r>
-                  </m:oMath>
-                </a14:m>
-                <a:r>
-                  <a:rPr lang="en-US" sz="1200" dirty="0"/>
-                  <a:t> in state </a:t>
-                </a:r>
-                <a14:m>
-                  <m:oMath xmlns:m="http://schemas.openxmlformats.org/officeDocument/2006/math">
-                    <m:r>
-                      <a:rPr lang="en-US" sz="1200" i="1" dirty="0" smtClean="0">
-                        <a:latin typeface="Cambria Math" panose="02040503050406030204" pitchFamily="18" charset="0"/>
-                      </a:rPr>
-                      <m:t>𝑠</m:t>
-                    </m:r>
-                  </m:oMath>
-                </a14:m>
-                <a:r>
-                  <a:rPr lang="en-US" sz="1200" dirty="0"/>
-                  <a:t> under policy </a:t>
-                </a:r>
-                <a14:m>
-                  <m:oMath xmlns:m="http://schemas.openxmlformats.org/officeDocument/2006/math">
-                    <m:r>
-                      <a:rPr lang="en-US" sz="1200" i="1" dirty="0">
-                        <a:latin typeface="Cambria Math" panose="02040503050406030204" pitchFamily="18" charset="0"/>
-                      </a:rPr>
-                      <m:t>𝜋</m:t>
-                    </m:r>
-                  </m:oMath>
-                </a14:m>
-                <a:endParaRPr lang="en-US" sz="1200" dirty="0"/>
-              </a:p>
-              <a:p>
-                <a:pPr marL="0" indent="0">
-                  <a:lnSpc>
-                    <a:spcPct val="100000"/>
-                  </a:lnSpc>
-                  <a:spcBef>
-                    <a:spcPts val="0"/>
-                  </a:spcBef>
-                  <a:buNone/>
-                </a:pPr>
-                <a14:m>
-                  <m:oMath xmlns:m="http://schemas.openxmlformats.org/officeDocument/2006/math">
-                    <m:sSub>
-                      <m:sSubPr>
-                        <m:ctrlPr>
-                          <a:rPr lang="en-US" sz="1200" i="1" dirty="0">
-                            <a:latin typeface="Cambria Math" panose="02040503050406030204" pitchFamily="18" charset="0"/>
-                          </a:rPr>
-                        </m:ctrlPr>
-                      </m:sSubPr>
-                      <m:e>
-                        <m:r>
-                          <a:rPr lang="en-US" sz="1200" i="1" dirty="0">
-                            <a:latin typeface="Cambria Math" panose="02040503050406030204" pitchFamily="18" charset="0"/>
-                          </a:rPr>
-                          <m:t>𝑞</m:t>
-                        </m:r>
-                      </m:e>
-                      <m:sub>
-                        <m:r>
-                          <a:rPr lang="en-US" sz="1200" i="1" dirty="0">
-                            <a:latin typeface="Cambria Math" panose="02040503050406030204" pitchFamily="18" charset="0"/>
-                          </a:rPr>
-                          <m:t>∗</m:t>
-                        </m:r>
-                      </m:sub>
-                    </m:sSub>
-                    <m:r>
-                      <a:rPr lang="en-US" sz="1200" i="1" dirty="0">
-                        <a:latin typeface="Cambria Math" panose="02040503050406030204" pitchFamily="18" charset="0"/>
-                      </a:rPr>
-                      <m:t>(</m:t>
-                    </m:r>
-                    <m:r>
-                      <a:rPr lang="en-US" sz="1200" i="1" dirty="0">
-                        <a:latin typeface="Cambria Math" panose="02040503050406030204" pitchFamily="18" charset="0"/>
-                      </a:rPr>
-                      <m:t>𝑠</m:t>
-                    </m:r>
-                    <m:r>
-                      <a:rPr lang="en-US" sz="1200" i="1" dirty="0">
-                        <a:latin typeface="Cambria Math" panose="02040503050406030204" pitchFamily="18" charset="0"/>
-                      </a:rPr>
-                      <m:t>,</m:t>
-                    </m:r>
-                    <m:r>
-                      <a:rPr lang="en-US" sz="1200" i="1" dirty="0">
-                        <a:latin typeface="Cambria Math" panose="02040503050406030204" pitchFamily="18" charset="0"/>
-                      </a:rPr>
-                      <m:t>𝑎</m:t>
-                    </m:r>
-                    <m:r>
-                      <a:rPr lang="en-US" sz="1200" i="1" dirty="0">
-                        <a:latin typeface="Cambria Math" panose="02040503050406030204" pitchFamily="18" charset="0"/>
-                      </a:rPr>
-                      <m:t>)</m:t>
-                    </m:r>
-                  </m:oMath>
-                </a14:m>
-                <a:r>
-                  <a:rPr lang="en-US" sz="1200" dirty="0"/>
-                  <a:t>	value of taking action </a:t>
-                </a:r>
-                <a14:m>
-                  <m:oMath xmlns:m="http://schemas.openxmlformats.org/officeDocument/2006/math">
-                    <m:r>
-                      <a:rPr lang="en-US" sz="1200" i="1" dirty="0">
-                        <a:latin typeface="Cambria Math" panose="02040503050406030204" pitchFamily="18" charset="0"/>
-                      </a:rPr>
-                      <m:t>𝑎</m:t>
-                    </m:r>
-                  </m:oMath>
-                </a14:m>
-                <a:r>
-                  <a:rPr lang="en-US" sz="1200" dirty="0"/>
-                  <a:t> in state </a:t>
-                </a:r>
-                <a14:m>
-                  <m:oMath xmlns:m="http://schemas.openxmlformats.org/officeDocument/2006/math">
-                    <m:r>
-                      <a:rPr lang="en-US" sz="1200" i="1" dirty="0" smtClean="0">
-                        <a:latin typeface="Cambria Math" panose="02040503050406030204" pitchFamily="18" charset="0"/>
-                      </a:rPr>
-                      <m:t>𝑠</m:t>
-                    </m:r>
-                  </m:oMath>
-                </a14:m>
-                <a:r>
-                  <a:rPr lang="en-US" sz="1200" dirty="0"/>
-                  <a:t> under the optimal policy</a:t>
-                </a:r>
-              </a:p>
-              <a:p>
-                <a:pPr marL="0" indent="0">
-                  <a:spcBef>
-                    <a:spcPts val="0"/>
-                  </a:spcBef>
-                  <a:buNone/>
-                </a:pPr>
-                <a14:m>
-                  <m:oMath xmlns:m="http://schemas.openxmlformats.org/officeDocument/2006/math">
-                    <m:r>
-                      <a:rPr lang="en-US" sz="1200" i="1" dirty="0">
-                        <a:solidFill>
-                          <a:schemeClr val="tx1"/>
-                        </a:solidFill>
-                        <a:latin typeface="Cambria Math" panose="02040503050406030204" pitchFamily="18" charset="0"/>
-                      </a:rPr>
-                      <m:t>𝑉</m:t>
-                    </m:r>
-                    <m:r>
-                      <a:rPr lang="en-US" sz="1200" i="1" dirty="0">
-                        <a:solidFill>
-                          <a:schemeClr val="tx1"/>
-                        </a:solidFill>
-                        <a:latin typeface="Cambria Math" panose="02040503050406030204" pitchFamily="18" charset="0"/>
-                      </a:rPr>
-                      <m:t>, </m:t>
-                    </m:r>
-                    <m:sSub>
-                      <m:sSubPr>
-                        <m:ctrlPr>
-                          <a:rPr lang="en-US" sz="1200" i="1" dirty="0">
-                            <a:solidFill>
-                              <a:schemeClr val="tx1"/>
-                            </a:solidFill>
-                            <a:latin typeface="Cambria Math" panose="02040503050406030204" pitchFamily="18" charset="0"/>
-                          </a:rPr>
-                        </m:ctrlPr>
-                      </m:sSubPr>
-                      <m:e>
-                        <m:r>
-                          <a:rPr lang="en-US" sz="1200" i="1" dirty="0">
-                            <a:solidFill>
-                              <a:schemeClr val="tx1"/>
-                            </a:solidFill>
-                            <a:latin typeface="Cambria Math" panose="02040503050406030204" pitchFamily="18" charset="0"/>
-                          </a:rPr>
-                          <m:t>𝑉</m:t>
-                        </m:r>
-                      </m:e>
-                      <m:sub>
-                        <m:r>
-                          <a:rPr lang="en-US" sz="1200" i="1" dirty="0">
-                            <a:solidFill>
-                              <a:schemeClr val="tx1"/>
-                            </a:solidFill>
-                            <a:latin typeface="Cambria Math" panose="02040503050406030204" pitchFamily="18" charset="0"/>
-                          </a:rPr>
-                          <m:t>𝑡</m:t>
-                        </m:r>
-                      </m:sub>
-                    </m:sSub>
-                    <m:r>
-                      <a:rPr lang="en-US" sz="1200" i="1" dirty="0">
-                        <a:solidFill>
-                          <a:schemeClr val="tx1"/>
-                        </a:solidFill>
-                        <a:latin typeface="Cambria Math" panose="02040503050406030204" pitchFamily="18" charset="0"/>
-                      </a:rPr>
-                      <m:t> </m:t>
-                    </m:r>
-                  </m:oMath>
-                </a14:m>
-                <a:r>
-                  <a:rPr lang="en-US" sz="1200" dirty="0">
-                    <a:solidFill>
-                      <a:schemeClr val="tx1"/>
-                    </a:solidFill>
-                  </a:rPr>
-                  <a:t>	array estimates of state-value function </a:t>
-                </a:r>
-                <a14:m>
-                  <m:oMath xmlns:m="http://schemas.openxmlformats.org/officeDocument/2006/math">
-                    <m:sSub>
-                      <m:sSubPr>
-                        <m:ctrlPr>
-                          <a:rPr lang="en-US" sz="1200" i="1" dirty="0">
-                            <a:solidFill>
-                              <a:schemeClr val="tx1"/>
-                            </a:solidFill>
-                            <a:latin typeface="Cambria Math" panose="02040503050406030204" pitchFamily="18" charset="0"/>
-                          </a:rPr>
-                        </m:ctrlPr>
-                      </m:sSubPr>
-                      <m:e>
-                        <m:r>
-                          <a:rPr lang="en-US" sz="1200" i="1" dirty="0">
-                            <a:solidFill>
-                              <a:schemeClr val="tx1"/>
-                            </a:solidFill>
-                            <a:latin typeface="Cambria Math" panose="02040503050406030204" pitchFamily="18" charset="0"/>
-                          </a:rPr>
-                          <m:t>𝑣</m:t>
-                        </m:r>
-                      </m:e>
-                      <m:sub>
-                        <m:r>
-                          <a:rPr lang="en-US" sz="1200" i="1" dirty="0">
-                            <a:solidFill>
-                              <a:schemeClr val="tx1"/>
-                            </a:solidFill>
-                            <a:latin typeface="Cambria Math" panose="02040503050406030204" pitchFamily="18" charset="0"/>
-                          </a:rPr>
-                          <m:t>𝜋</m:t>
-                        </m:r>
-                      </m:sub>
-                    </m:sSub>
-                    <m:r>
-                      <a:rPr lang="en-US" sz="1200" i="1" dirty="0">
-                        <a:solidFill>
-                          <a:schemeClr val="tx1"/>
-                        </a:solidFill>
-                        <a:latin typeface="Cambria Math" panose="02040503050406030204" pitchFamily="18" charset="0"/>
-                      </a:rPr>
-                      <m:t> </m:t>
-                    </m:r>
-                  </m:oMath>
-                </a14:m>
-                <a:r>
-                  <a:rPr lang="en-US" sz="1200" dirty="0">
-                    <a:solidFill>
-                      <a:schemeClr val="tx1"/>
-                    </a:solidFill>
-                  </a:rPr>
-                  <a:t>or </a:t>
-                </a:r>
-                <a14:m>
-                  <m:oMath xmlns:m="http://schemas.openxmlformats.org/officeDocument/2006/math">
-                    <m:sSub>
-                      <m:sSubPr>
-                        <m:ctrlPr>
-                          <a:rPr lang="en-US" sz="1200" i="1" dirty="0">
-                            <a:solidFill>
-                              <a:schemeClr val="tx1"/>
-                            </a:solidFill>
-                            <a:latin typeface="Cambria Math" panose="02040503050406030204" pitchFamily="18" charset="0"/>
-                          </a:rPr>
-                        </m:ctrlPr>
-                      </m:sSubPr>
-                      <m:e>
-                        <m:r>
-                          <a:rPr lang="en-US" sz="1200" i="1" dirty="0">
-                            <a:solidFill>
-                              <a:schemeClr val="tx1"/>
-                            </a:solidFill>
-                            <a:latin typeface="Cambria Math" panose="02040503050406030204" pitchFamily="18" charset="0"/>
-                          </a:rPr>
-                          <m:t>𝑣</m:t>
-                        </m:r>
-                      </m:e>
-                      <m:sub>
-                        <m:r>
-                          <a:rPr lang="en-US" sz="1200" i="1" dirty="0">
-                            <a:solidFill>
-                              <a:schemeClr val="tx1"/>
-                            </a:solidFill>
-                            <a:latin typeface="Cambria Math" panose="02040503050406030204" pitchFamily="18" charset="0"/>
-                          </a:rPr>
-                          <m:t>∗</m:t>
-                        </m:r>
-                      </m:sub>
-                    </m:sSub>
-                    <m:r>
-                      <a:rPr lang="en-US" sz="1200" i="1" dirty="0">
-                        <a:solidFill>
-                          <a:schemeClr val="tx1"/>
-                        </a:solidFill>
-                        <a:latin typeface="Cambria Math" panose="02040503050406030204" pitchFamily="18" charset="0"/>
-                      </a:rPr>
-                      <m:t> </m:t>
-                    </m:r>
-                  </m:oMath>
-                </a14:m>
-                <a:endParaRPr lang="en-US" sz="1200" dirty="0">
-                  <a:solidFill>
-                    <a:schemeClr val="tx1"/>
-                  </a:solidFill>
-                </a:endParaRPr>
-              </a:p>
-              <a:p>
-                <a:pPr marL="0" indent="0">
-                  <a:spcBef>
-                    <a:spcPts val="0"/>
-                  </a:spcBef>
-                  <a:buNone/>
-                </a:pPr>
-                <a14:m>
-                  <m:oMath xmlns:m="http://schemas.openxmlformats.org/officeDocument/2006/math">
-                    <m:r>
-                      <a:rPr lang="en-US" sz="1200" i="1" dirty="0">
-                        <a:solidFill>
-                          <a:schemeClr val="tx1"/>
-                        </a:solidFill>
-                        <a:latin typeface="Cambria Math" panose="02040503050406030204" pitchFamily="18" charset="0"/>
-                      </a:rPr>
-                      <m:t>𝑄</m:t>
-                    </m:r>
-                    <m:r>
-                      <a:rPr lang="en-US" sz="1200" i="1" dirty="0">
-                        <a:solidFill>
-                          <a:schemeClr val="tx1"/>
-                        </a:solidFill>
-                        <a:latin typeface="Cambria Math" panose="02040503050406030204" pitchFamily="18" charset="0"/>
-                      </a:rPr>
-                      <m:t>,</m:t>
-                    </m:r>
-                    <m:sSub>
-                      <m:sSubPr>
-                        <m:ctrlPr>
-                          <a:rPr lang="en-US" sz="1200" i="1" dirty="0">
-                            <a:solidFill>
-                              <a:schemeClr val="tx1"/>
-                            </a:solidFill>
-                            <a:latin typeface="Cambria Math" panose="02040503050406030204" pitchFamily="18" charset="0"/>
-                          </a:rPr>
-                        </m:ctrlPr>
-                      </m:sSubPr>
-                      <m:e>
-                        <m:r>
-                          <a:rPr lang="en-US" sz="1200" i="1" dirty="0">
-                            <a:solidFill>
-                              <a:schemeClr val="tx1"/>
-                            </a:solidFill>
-                            <a:latin typeface="Cambria Math" panose="02040503050406030204" pitchFamily="18" charset="0"/>
-                          </a:rPr>
-                          <m:t>𝑄</m:t>
-                        </m:r>
-                      </m:e>
-                      <m:sub>
-                        <m:r>
-                          <a:rPr lang="en-US" sz="1200" i="1" dirty="0">
-                            <a:solidFill>
-                              <a:schemeClr val="tx1"/>
-                            </a:solidFill>
-                            <a:latin typeface="Cambria Math" panose="02040503050406030204" pitchFamily="18" charset="0"/>
-                          </a:rPr>
-                          <m:t>𝑡</m:t>
-                        </m:r>
-                      </m:sub>
-                    </m:sSub>
-                    <m:r>
-                      <a:rPr lang="en-US" sz="1200" i="1" dirty="0">
-                        <a:solidFill>
-                          <a:schemeClr val="tx1"/>
-                        </a:solidFill>
-                        <a:latin typeface="Cambria Math" panose="02040503050406030204" pitchFamily="18" charset="0"/>
-                      </a:rPr>
-                      <m:t> </m:t>
-                    </m:r>
-                  </m:oMath>
-                </a14:m>
-                <a:r>
-                  <a:rPr lang="en-US" sz="1200" dirty="0">
-                    <a:solidFill>
-                      <a:schemeClr val="tx1"/>
-                    </a:solidFill>
-                  </a:rPr>
-                  <a:t>	array estimates of action-value function </a:t>
-                </a:r>
-                <a14:m>
-                  <m:oMath xmlns:m="http://schemas.openxmlformats.org/officeDocument/2006/math">
-                    <m:sSub>
-                      <m:sSubPr>
-                        <m:ctrlPr>
-                          <a:rPr lang="en-US" sz="1200" i="1" dirty="0">
-                            <a:solidFill>
-                              <a:schemeClr val="tx1"/>
-                            </a:solidFill>
-                            <a:latin typeface="Cambria Math" panose="02040503050406030204" pitchFamily="18" charset="0"/>
-                          </a:rPr>
-                        </m:ctrlPr>
-                      </m:sSubPr>
-                      <m:e>
-                        <m:r>
-                          <a:rPr lang="en-US" sz="1200" i="1" dirty="0">
-                            <a:solidFill>
-                              <a:schemeClr val="tx1"/>
-                            </a:solidFill>
-                            <a:latin typeface="Cambria Math" panose="02040503050406030204" pitchFamily="18" charset="0"/>
-                          </a:rPr>
-                          <m:t>𝑞</m:t>
-                        </m:r>
-                      </m:e>
-                      <m:sub>
-                        <m:r>
-                          <a:rPr lang="en-US" sz="1200" i="1" dirty="0">
-                            <a:solidFill>
-                              <a:schemeClr val="tx1"/>
-                            </a:solidFill>
-                            <a:latin typeface="Cambria Math" panose="02040503050406030204" pitchFamily="18" charset="0"/>
-                          </a:rPr>
-                          <m:t>𝜋</m:t>
-                        </m:r>
-                      </m:sub>
-                    </m:sSub>
-                    <m:r>
-                      <a:rPr lang="en-US" sz="1200" i="1" dirty="0">
-                        <a:solidFill>
-                          <a:schemeClr val="tx1"/>
-                        </a:solidFill>
-                        <a:latin typeface="Cambria Math" panose="02040503050406030204" pitchFamily="18" charset="0"/>
-                      </a:rPr>
-                      <m:t> </m:t>
-                    </m:r>
-                  </m:oMath>
-                </a14:m>
-                <a:r>
-                  <a:rPr lang="en-US" sz="1200" dirty="0">
-                    <a:solidFill>
-                      <a:schemeClr val="tx1"/>
-                    </a:solidFill>
-                  </a:rPr>
-                  <a:t>or </a:t>
-                </a:r>
-                <a14:m>
-                  <m:oMath xmlns:m="http://schemas.openxmlformats.org/officeDocument/2006/math">
-                    <m:sSub>
-                      <m:sSubPr>
-                        <m:ctrlPr>
-                          <a:rPr lang="en-US" sz="1200" i="1" dirty="0">
-                            <a:solidFill>
-                              <a:schemeClr val="tx1"/>
-                            </a:solidFill>
-                            <a:latin typeface="Cambria Math" panose="02040503050406030204" pitchFamily="18" charset="0"/>
-                          </a:rPr>
-                        </m:ctrlPr>
-                      </m:sSubPr>
-                      <m:e>
-                        <m:r>
-                          <a:rPr lang="en-US" sz="1200" i="1" dirty="0">
-                            <a:solidFill>
-                              <a:schemeClr val="tx1"/>
-                            </a:solidFill>
-                            <a:latin typeface="Cambria Math" panose="02040503050406030204" pitchFamily="18" charset="0"/>
-                          </a:rPr>
-                          <m:t>𝑣</m:t>
-                        </m:r>
-                      </m:e>
-                      <m:sub>
-                        <m:r>
-                          <a:rPr lang="en-US" sz="1200" i="1" dirty="0">
-                            <a:solidFill>
-                              <a:schemeClr val="tx1"/>
-                            </a:solidFill>
-                            <a:latin typeface="Cambria Math" panose="02040503050406030204" pitchFamily="18" charset="0"/>
-                          </a:rPr>
-                          <m:t>∗</m:t>
-                        </m:r>
-                      </m:sub>
-                    </m:sSub>
-                  </m:oMath>
-                </a14:m>
-                <a:endParaRPr lang="en-US" sz="1200" dirty="0">
-                  <a:solidFill>
-                    <a:schemeClr val="tx1"/>
-                  </a:solidFill>
-                </a:endParaRPr>
-              </a:p>
-            </p:txBody>
-          </p:sp>
-        </mc:Choice>
-        <mc:Fallback xmlns="">
-          <p:sp>
-            <p:nvSpPr>
-              <p:cNvPr id="3" name="Content Placeholder 2">
-                <a:extLst>
-                  <a:ext uri="{FF2B5EF4-FFF2-40B4-BE49-F238E27FC236}">
-                    <a16:creationId xmlns:a16="http://schemas.microsoft.com/office/drawing/2014/main" id="{47E69C9C-42B6-9B0F-9AE0-20D17703E490}"/>
-                  </a:ext>
-                </a:extLst>
-              </p:cNvPr>
-              <p:cNvSpPr>
-                <a:spLocks noGrp="1" noRot="1" noChangeAspect="1" noMove="1" noResize="1" noEditPoints="1" noAdjustHandles="1" noChangeArrowheads="1" noChangeShapeType="1" noTextEdit="1"/>
-              </p:cNvSpPr>
-              <p:nvPr>
-                <p:ph idx="1"/>
-              </p:nvPr>
-            </p:nvSpPr>
-            <p:spPr>
-              <a:xfrm>
-                <a:off x="822819" y="3700831"/>
-                <a:ext cx="5273179" cy="1902124"/>
-              </a:xfrm>
-              <a:blipFill>
-                <a:blip r:embed="rId2"/>
-                <a:stretch>
-                  <a:fillRect b="-952"/>
-                </a:stretch>
-              </a:blipFill>
-            </p:spPr>
-            <p:txBody>
-              <a:bodyPr/>
-              <a:lstStyle/>
-              <a:p>
-                <a:r>
-                  <a:rPr lang="en-US">
-                    <a:noFill/>
-                  </a:rPr>
-                  <a:t> </a:t>
-                </a:r>
-              </a:p>
-            </p:txBody>
-          </p:sp>
-        </mc:Fallback>
-      </mc:AlternateContent>
-      <mc:AlternateContent xmlns:mc="http://schemas.openxmlformats.org/markup-compatibility/2006" xmlns:a14="http://schemas.microsoft.com/office/drawing/2010/main">
-        <mc:Choice Requires="a14">
-          <p:sp>
-            <p:nvSpPr>
-              <p:cNvPr id="10" name="TextBox 9">
-                <a:extLst>
-                  <a:ext uri="{FF2B5EF4-FFF2-40B4-BE49-F238E27FC236}">
-                    <a16:creationId xmlns:a16="http://schemas.microsoft.com/office/drawing/2014/main" id="{5CD475E5-BE3B-5594-57DC-46A17411F2F9}"/>
-                  </a:ext>
-                </a:extLst>
-              </p:cNvPr>
-              <p:cNvSpPr txBox="1"/>
-              <p:nvPr/>
-            </p:nvSpPr>
-            <p:spPr>
-              <a:xfrm>
-                <a:off x="822820" y="1124198"/>
-                <a:ext cx="5273179" cy="2308324"/>
-              </a:xfrm>
-              <a:prstGeom prst="rect">
-                <a:avLst/>
-              </a:prstGeom>
-            </p:spPr>
-            <p:style>
-              <a:lnRef idx="2">
-                <a:schemeClr val="accent2"/>
-              </a:lnRef>
-              <a:fillRef idx="1">
-                <a:schemeClr val="lt1"/>
-              </a:fillRef>
-              <a:effectRef idx="0">
-                <a:schemeClr val="accent2"/>
-              </a:effectRef>
-              <a:fontRef idx="minor">
-                <a:schemeClr val="dk1"/>
-              </a:fontRef>
-            </p:style>
-            <p:txBody>
-              <a:bodyPr wrap="square">
-                <a:spAutoFit/>
-              </a:bodyPr>
-              <a:lstStyle/>
-              <a:p>
-                <a:r>
-                  <a:rPr lang="en-US" sz="1200" b="1" dirty="0"/>
-                  <a:t>General</a:t>
-                </a:r>
-                <a:endParaRPr lang="en-US" sz="1200" dirty="0"/>
-              </a:p>
-              <a:p>
-                <a14:m>
-                  <m:oMath xmlns:m="http://schemas.openxmlformats.org/officeDocument/2006/math">
-                    <m:r>
-                      <a:rPr lang="en-US" sz="1200" i="1" dirty="0" smtClean="0">
-                        <a:latin typeface="Cambria Math" panose="02040503050406030204" pitchFamily="18" charset="0"/>
-                      </a:rPr>
-                      <m:t>𝑋</m:t>
-                    </m:r>
-                  </m:oMath>
-                </a14:m>
-                <a:r>
-                  <a:rPr lang="en-US" sz="1200" dirty="0"/>
-                  <a:t>	capital letters: random variables</a:t>
-                </a:r>
-                <a:br>
-                  <a:rPr lang="en-US" sz="1200" dirty="0"/>
-                </a:br>
-                <a14:m>
-                  <m:oMath xmlns:m="http://schemas.openxmlformats.org/officeDocument/2006/math">
-                    <m:r>
-                      <a:rPr lang="en-US" sz="1200" b="0" i="1" smtClean="0">
-                        <a:latin typeface="Cambria Math" panose="02040503050406030204" pitchFamily="18" charset="0"/>
-                      </a:rPr>
-                      <m:t>𝑥</m:t>
-                    </m:r>
-                    <m:r>
-                      <a:rPr lang="en-US" sz="1200" b="0" i="0" smtClean="0">
-                        <a:latin typeface="Cambria Math" panose="02040503050406030204" pitchFamily="18" charset="0"/>
-                      </a:rPr>
-                      <m:t>, </m:t>
-                    </m:r>
-                    <m:r>
-                      <a:rPr lang="en-US" sz="1200" b="0" i="1" smtClean="0">
-                        <a:latin typeface="Cambria Math" panose="02040503050406030204" pitchFamily="18" charset="0"/>
-                      </a:rPr>
-                      <m:t>𝑝</m:t>
-                    </m:r>
-                  </m:oMath>
-                </a14:m>
-                <a:r>
-                  <a:rPr lang="en-US" sz="1200" dirty="0"/>
-                  <a:t>	lower-case letters: realizations of random variables </a:t>
-                </a:r>
-                <a:br>
-                  <a:rPr lang="en-US" sz="1200" dirty="0"/>
-                </a:br>
-                <a:r>
-                  <a:rPr lang="en-US" sz="1200" dirty="0"/>
-                  <a:t>	or scalar functions</a:t>
-                </a:r>
-              </a:p>
-              <a:p>
-                <a14:m>
-                  <m:oMath xmlns:m="http://schemas.openxmlformats.org/officeDocument/2006/math">
-                    <m:r>
-                      <a:rPr lang="en-US" sz="1200" b="1" i="1" smtClean="0">
-                        <a:latin typeface="Cambria Math" panose="02040503050406030204" pitchFamily="18" charset="0"/>
-                      </a:rPr>
-                      <m:t>𝒘</m:t>
-                    </m:r>
-                  </m:oMath>
-                </a14:m>
-                <a:r>
-                  <a:rPr lang="en-US" sz="1200" dirty="0"/>
-                  <a:t> 	Bold lower-case letters: real-valued vectors </a:t>
-                </a:r>
-                <a:br>
-                  <a:rPr lang="en-US" sz="1200" dirty="0"/>
-                </a:br>
-                <a:r>
-                  <a:rPr lang="en-US" sz="1200" dirty="0"/>
-                  <a:t>	(even if random variables)</a:t>
-                </a:r>
-              </a:p>
-              <a:p>
-                <a14:m>
-                  <m:oMath xmlns:m="http://schemas.openxmlformats.org/officeDocument/2006/math">
-                    <m:r>
-                      <a:rPr lang="en-US" sz="1200" b="1" i="1" smtClean="0">
-                        <a:latin typeface="Cambria Math" panose="02040503050406030204" pitchFamily="18" charset="0"/>
-                      </a:rPr>
-                      <m:t>𝑾</m:t>
-                    </m:r>
-                  </m:oMath>
-                </a14:m>
-                <a:r>
-                  <a:rPr lang="en-US" sz="1200" dirty="0"/>
-                  <a:t>	bold capitals: matrices</a:t>
-                </a:r>
-              </a:p>
-              <a:p>
-                <a14:m>
-                  <m:oMath xmlns:m="http://schemas.openxmlformats.org/officeDocument/2006/math">
-                    <m:r>
-                      <a:rPr lang="en-US" sz="1200" b="0" i="1" smtClean="0">
-                        <a:latin typeface="Cambria Math" panose="02040503050406030204" pitchFamily="18" charset="0"/>
-                      </a:rPr>
-                      <m:t>𝛼</m:t>
-                    </m:r>
-                  </m:oMath>
-                </a14:m>
-                <a:r>
-                  <a:rPr lang="en-US" sz="1200" dirty="0"/>
-                  <a:t>	Greek letters: parameters (vectors if in bolt)</a:t>
-                </a:r>
-              </a:p>
-              <a:p>
-                <a14:m>
-                  <m:oMath xmlns:m="http://schemas.openxmlformats.org/officeDocument/2006/math">
-                    <m:r>
-                      <m:rPr>
-                        <m:sty m:val="p"/>
-                      </m:rPr>
-                      <a:rPr lang="en-US" sz="1200" i="1" dirty="0">
-                        <a:latin typeface="Cambria Math" panose="02040503050406030204" pitchFamily="18" charset="0"/>
-                      </a:rPr>
-                      <m:t>Pr</m:t>
-                    </m:r>
-                    <m:r>
-                      <a:rPr lang="en-US" sz="1200" i="1" dirty="0">
-                        <a:latin typeface="Cambria Math" panose="02040503050406030204" pitchFamily="18" charset="0"/>
-                      </a:rPr>
-                      <m:t>⁡{</m:t>
-                    </m:r>
-                    <m:r>
-                      <a:rPr lang="en-US" sz="1200" i="1" dirty="0">
-                        <a:latin typeface="Cambria Math" panose="02040503050406030204" pitchFamily="18" charset="0"/>
-                      </a:rPr>
-                      <m:t>𝑋</m:t>
-                    </m:r>
-                    <m:r>
-                      <a:rPr lang="en-US" sz="1200" i="1" dirty="0">
-                        <a:latin typeface="Cambria Math" panose="02040503050406030204" pitchFamily="18" charset="0"/>
-                      </a:rPr>
-                      <m:t>=</m:t>
-                    </m:r>
-                    <m:r>
-                      <a:rPr lang="en-US" sz="1200" i="1" dirty="0">
-                        <a:latin typeface="Cambria Math" panose="02040503050406030204" pitchFamily="18" charset="0"/>
-                      </a:rPr>
-                      <m:t>𝑥</m:t>
-                    </m:r>
-                    <m:r>
-                      <a:rPr lang="en-US" sz="1200" i="1" dirty="0">
-                        <a:latin typeface="Cambria Math" panose="02040503050406030204" pitchFamily="18" charset="0"/>
-                      </a:rPr>
-                      <m:t>}</m:t>
-                    </m:r>
-                  </m:oMath>
-                </a14:m>
-                <a:r>
-                  <a:rPr lang="en-US" sz="1200" dirty="0"/>
-                  <a:t>	probability that a random variable </a:t>
-                </a:r>
-                <a14:m>
-                  <m:oMath xmlns:m="http://schemas.openxmlformats.org/officeDocument/2006/math">
-                    <m:r>
-                      <a:rPr lang="en-US" sz="1200" i="1" dirty="0">
-                        <a:latin typeface="Cambria Math" panose="02040503050406030204" pitchFamily="18" charset="0"/>
-                      </a:rPr>
-                      <m:t>𝑋</m:t>
-                    </m:r>
-                  </m:oMath>
-                </a14:m>
-                <a:r>
-                  <a:rPr lang="en-US" sz="1200" dirty="0"/>
-                  <a:t> takes on the value </a:t>
-                </a:r>
-                <a14:m>
-                  <m:oMath xmlns:m="http://schemas.openxmlformats.org/officeDocument/2006/math">
-                    <m:r>
-                      <a:rPr lang="en-US" sz="1200" i="1" dirty="0">
-                        <a:latin typeface="Cambria Math" panose="02040503050406030204" pitchFamily="18" charset="0"/>
-                      </a:rPr>
-                      <m:t>𝑥</m:t>
-                    </m:r>
-                  </m:oMath>
-                </a14:m>
-                <a:endParaRPr lang="en-US" sz="1200" dirty="0"/>
-              </a:p>
-              <a:p>
-                <a14:m>
-                  <m:oMath xmlns:m="http://schemas.openxmlformats.org/officeDocument/2006/math">
-                    <m:r>
-                      <a:rPr lang="en-US" sz="1200" i="1" dirty="0">
-                        <a:latin typeface="Cambria Math" panose="02040503050406030204" pitchFamily="18" charset="0"/>
-                      </a:rPr>
-                      <m:t>𝑋</m:t>
-                    </m:r>
-                    <m:r>
-                      <a:rPr lang="en-US" sz="1200" i="1" dirty="0">
-                        <a:latin typeface="Cambria Math" panose="02040503050406030204" pitchFamily="18" charset="0"/>
-                      </a:rPr>
-                      <m:t>~</m:t>
-                    </m:r>
-                    <m:r>
-                      <a:rPr lang="en-US" sz="1200" i="1" dirty="0">
-                        <a:latin typeface="Cambria Math" panose="02040503050406030204" pitchFamily="18" charset="0"/>
-                      </a:rPr>
-                      <m:t>𝑝</m:t>
-                    </m:r>
-                  </m:oMath>
-                </a14:m>
-                <a:r>
-                  <a:rPr lang="en-US" sz="1200" dirty="0"/>
-                  <a:t>	random variable </a:t>
-                </a:r>
-                <a14:m>
-                  <m:oMath xmlns:m="http://schemas.openxmlformats.org/officeDocument/2006/math">
-                    <m:r>
-                      <a:rPr lang="en-US" sz="1200" i="1" dirty="0">
-                        <a:latin typeface="Cambria Math" panose="02040503050406030204" pitchFamily="18" charset="0"/>
-                      </a:rPr>
-                      <m:t>𝑋</m:t>
-                    </m:r>
-                  </m:oMath>
-                </a14:m>
-                <a:r>
-                  <a:rPr lang="en-US" sz="1200" dirty="0"/>
-                  <a:t> selected from distribution </a:t>
-                </a:r>
-                <a14:m>
-                  <m:oMath xmlns:m="http://schemas.openxmlformats.org/officeDocument/2006/math">
-                    <m:r>
-                      <a:rPr lang="en-US" sz="1200" i="1">
-                        <a:latin typeface="Cambria Math" panose="02040503050406030204" pitchFamily="18" charset="0"/>
-                      </a:rPr>
-                      <m:t>𝑝</m:t>
-                    </m:r>
-                    <m:d>
-                      <m:dPr>
-                        <m:ctrlPr>
-                          <a:rPr lang="en-US" sz="1200" i="1">
-                            <a:latin typeface="Cambria Math" panose="02040503050406030204" pitchFamily="18" charset="0"/>
-                          </a:rPr>
-                        </m:ctrlPr>
-                      </m:dPr>
-                      <m:e>
-                        <m:r>
-                          <a:rPr lang="en-US" sz="1200" i="1">
-                            <a:latin typeface="Cambria Math" panose="02040503050406030204" pitchFamily="18" charset="0"/>
-                          </a:rPr>
-                          <m:t>𝑥</m:t>
-                        </m:r>
-                      </m:e>
-                    </m:d>
-                    <m:r>
-                      <a:rPr lang="en-US" sz="1200" i="1">
-                        <a:latin typeface="Cambria Math" panose="02040503050406030204" pitchFamily="18" charset="0"/>
-                      </a:rPr>
-                      <m:t>=</m:t>
-                    </m:r>
-                    <m:r>
-                      <m:rPr>
-                        <m:sty m:val="p"/>
-                      </m:rPr>
-                      <a:rPr lang="en-US" sz="1200">
-                        <a:latin typeface="Cambria Math" panose="02040503050406030204" pitchFamily="18" charset="0"/>
-                      </a:rPr>
-                      <m:t>Pr</m:t>
-                    </m:r>
-                    <m:r>
-                      <a:rPr lang="en-US" sz="1200" i="1">
-                        <a:latin typeface="Cambria Math" panose="02040503050406030204" pitchFamily="18" charset="0"/>
-                      </a:rPr>
-                      <m:t>⁡{</m:t>
-                    </m:r>
-                    <m:r>
-                      <a:rPr lang="en-US" sz="1200" i="1">
-                        <a:latin typeface="Cambria Math" panose="02040503050406030204" pitchFamily="18" charset="0"/>
-                      </a:rPr>
-                      <m:t>𝑋</m:t>
-                    </m:r>
-                    <m:r>
-                      <a:rPr lang="en-US" sz="1200" i="1">
-                        <a:latin typeface="Cambria Math" panose="02040503050406030204" pitchFamily="18" charset="0"/>
-                      </a:rPr>
-                      <m:t>=</m:t>
-                    </m:r>
-                    <m:r>
-                      <a:rPr lang="en-US" sz="1200" i="1">
-                        <a:latin typeface="Cambria Math" panose="02040503050406030204" pitchFamily="18" charset="0"/>
-                      </a:rPr>
-                      <m:t>𝑥</m:t>
-                    </m:r>
-                    <m:r>
-                      <a:rPr lang="en-US" sz="1200" i="1">
-                        <a:latin typeface="Cambria Math" panose="02040503050406030204" pitchFamily="18" charset="0"/>
-                      </a:rPr>
-                      <m:t>}</m:t>
-                    </m:r>
-                  </m:oMath>
-                </a14:m>
-                <a:endParaRPr lang="en-US" sz="1200" dirty="0"/>
-              </a:p>
-              <a:p>
-                <a14:m>
-                  <m:oMath xmlns:m="http://schemas.openxmlformats.org/officeDocument/2006/math">
-                    <m:r>
-                      <a:rPr lang="en-US" sz="1200" i="1">
-                        <a:latin typeface="Cambria Math" panose="02040503050406030204" pitchFamily="18" charset="0"/>
-                        <a:ea typeface="Cambria Math" panose="02040503050406030204" pitchFamily="18" charset="0"/>
-                      </a:rPr>
-                      <m:t>𝔼</m:t>
-                    </m:r>
-                    <m:r>
-                      <a:rPr lang="en-US" sz="1200" i="1">
-                        <a:latin typeface="Cambria Math" panose="02040503050406030204" pitchFamily="18" charset="0"/>
-                        <a:ea typeface="Cambria Math" panose="02040503050406030204" pitchFamily="18" charset="0"/>
-                      </a:rPr>
-                      <m:t>[</m:t>
-                    </m:r>
-                    <m:r>
-                      <a:rPr lang="en-US" sz="1200" i="1">
-                        <a:latin typeface="Cambria Math" panose="02040503050406030204" pitchFamily="18" charset="0"/>
-                        <a:ea typeface="Cambria Math" panose="02040503050406030204" pitchFamily="18" charset="0"/>
-                      </a:rPr>
-                      <m:t>𝑋</m:t>
-                    </m:r>
-                    <m:r>
-                      <a:rPr lang="en-US" sz="1200" i="1">
-                        <a:latin typeface="Cambria Math" panose="02040503050406030204" pitchFamily="18" charset="0"/>
-                        <a:ea typeface="Cambria Math" panose="02040503050406030204" pitchFamily="18" charset="0"/>
-                      </a:rPr>
-                      <m:t>]</m:t>
-                    </m:r>
-                  </m:oMath>
-                </a14:m>
-                <a:r>
-                  <a:rPr lang="en-US" sz="1200" dirty="0"/>
-                  <a:t>	expectation of a random variable </a:t>
-                </a:r>
-                <a14:m>
-                  <m:oMath xmlns:m="http://schemas.openxmlformats.org/officeDocument/2006/math">
-                    <m:r>
-                      <a:rPr lang="en-US" sz="1200" i="1" dirty="0">
-                        <a:latin typeface="Cambria Math" panose="02040503050406030204" pitchFamily="18" charset="0"/>
-                      </a:rPr>
-                      <m:t>𝑋</m:t>
-                    </m:r>
-                  </m:oMath>
-                </a14:m>
-                <a:r>
-                  <a:rPr lang="en-US" sz="1200" dirty="0"/>
-                  <a:t>, i.e., </a:t>
-                </a:r>
-                <a14:m>
-                  <m:oMath xmlns:m="http://schemas.openxmlformats.org/officeDocument/2006/math">
-                    <m:r>
-                      <a:rPr lang="en-US" sz="1200" i="1">
-                        <a:latin typeface="Cambria Math" panose="02040503050406030204" pitchFamily="18" charset="0"/>
-                        <a:ea typeface="Cambria Math" panose="02040503050406030204" pitchFamily="18" charset="0"/>
-                      </a:rPr>
-                      <m:t>𝔼</m:t>
-                    </m:r>
-                    <m:d>
-                      <m:dPr>
-                        <m:begChr m:val="["/>
-                        <m:endChr m:val="]"/>
-                        <m:ctrlPr>
-                          <a:rPr lang="en-US" sz="1200" i="1">
-                            <a:latin typeface="Cambria Math" panose="02040503050406030204" pitchFamily="18" charset="0"/>
-                            <a:ea typeface="Cambria Math" panose="02040503050406030204" pitchFamily="18" charset="0"/>
-                          </a:rPr>
-                        </m:ctrlPr>
-                      </m:dPr>
-                      <m:e>
-                        <m:r>
-                          <a:rPr lang="en-US" sz="1200" i="1">
-                            <a:latin typeface="Cambria Math" panose="02040503050406030204" pitchFamily="18" charset="0"/>
-                            <a:ea typeface="Cambria Math" panose="02040503050406030204" pitchFamily="18" charset="0"/>
-                          </a:rPr>
-                          <m:t>𝑋</m:t>
-                        </m:r>
-                      </m:e>
-                    </m:d>
-                    <m:r>
-                      <a:rPr lang="en-US" sz="1200" i="1">
-                        <a:latin typeface="Cambria Math" panose="02040503050406030204" pitchFamily="18" charset="0"/>
-                        <a:ea typeface="Cambria Math" panose="02040503050406030204" pitchFamily="18" charset="0"/>
-                      </a:rPr>
-                      <m:t>=</m:t>
-                    </m:r>
-                    <m:nary>
-                      <m:naryPr>
-                        <m:chr m:val="∑"/>
-                        <m:supHide m:val="on"/>
-                        <m:ctrlPr>
-                          <a:rPr lang="en-US" sz="1200" i="1">
-                            <a:latin typeface="Cambria Math" panose="02040503050406030204" pitchFamily="18" charset="0"/>
-                            <a:ea typeface="Cambria Math" panose="02040503050406030204" pitchFamily="18" charset="0"/>
-                          </a:rPr>
-                        </m:ctrlPr>
-                      </m:naryPr>
-                      <m:sub>
-                        <m:r>
-                          <a:rPr lang="en-US" sz="1200" i="1">
-                            <a:latin typeface="Cambria Math" panose="02040503050406030204" pitchFamily="18" charset="0"/>
-                            <a:ea typeface="Cambria Math" panose="02040503050406030204" pitchFamily="18" charset="0"/>
-                          </a:rPr>
-                          <m:t>𝑥</m:t>
-                        </m:r>
-                      </m:sub>
-                      <m:sup/>
-                      <m:e>
-                        <m:r>
-                          <a:rPr lang="en-US" sz="1200" i="1">
-                            <a:latin typeface="Cambria Math" panose="02040503050406030204" pitchFamily="18" charset="0"/>
-                            <a:ea typeface="Cambria Math" panose="02040503050406030204" pitchFamily="18" charset="0"/>
-                          </a:rPr>
-                          <m:t>𝑝</m:t>
-                        </m:r>
-                        <m:d>
-                          <m:dPr>
-                            <m:ctrlPr>
-                              <a:rPr lang="en-US" sz="1200" i="1">
-                                <a:latin typeface="Cambria Math" panose="02040503050406030204" pitchFamily="18" charset="0"/>
-                                <a:ea typeface="Cambria Math" panose="02040503050406030204" pitchFamily="18" charset="0"/>
-                              </a:rPr>
-                            </m:ctrlPr>
-                          </m:dPr>
-                          <m:e>
-                            <m:r>
-                              <a:rPr lang="en-US" sz="1200" i="1">
-                                <a:latin typeface="Cambria Math" panose="02040503050406030204" pitchFamily="18" charset="0"/>
-                                <a:ea typeface="Cambria Math" panose="02040503050406030204" pitchFamily="18" charset="0"/>
-                              </a:rPr>
-                              <m:t>𝑥</m:t>
-                            </m:r>
-                          </m:e>
-                        </m:d>
-                        <m:r>
-                          <a:rPr lang="en-US" sz="1200" i="1">
-                            <a:latin typeface="Cambria Math" panose="02040503050406030204" pitchFamily="18" charset="0"/>
-                            <a:ea typeface="Cambria Math" panose="02040503050406030204" pitchFamily="18" charset="0"/>
-                          </a:rPr>
-                          <m:t>𝑥</m:t>
-                        </m:r>
-                      </m:e>
-                    </m:nary>
-                  </m:oMath>
-                </a14:m>
-                <a:endParaRPr lang="en-US" sz="1200" dirty="0">
-                  <a:ea typeface="Cambria Math" panose="02040503050406030204" pitchFamily="18" charset="0"/>
-                </a:endParaRPr>
-              </a:p>
-              <a:p>
-                <a14:m>
-                  <m:oMath xmlns:m="http://schemas.openxmlformats.org/officeDocument/2006/math">
-                    <m:sSub>
-                      <m:sSubPr>
-                        <m:ctrlPr>
-                          <a:rPr lang="en-US" sz="1200" i="1" dirty="0">
-                            <a:latin typeface="Cambria Math" panose="02040503050406030204" pitchFamily="18" charset="0"/>
-                          </a:rPr>
-                        </m:ctrlPr>
-                      </m:sSubPr>
-                      <m:e>
-                        <m:r>
-                          <m:rPr>
-                            <m:sty m:val="p"/>
-                          </m:rPr>
-                          <a:rPr lang="en-US" sz="1200" dirty="0">
-                            <a:latin typeface="Cambria Math" panose="02040503050406030204" pitchFamily="18" charset="0"/>
-                          </a:rPr>
-                          <m:t>argmax</m:t>
-                        </m:r>
-                      </m:e>
-                      <m:sub>
-                        <m:r>
-                          <m:rPr>
-                            <m:sty m:val="p"/>
-                          </m:rPr>
-                          <a:rPr lang="en-US" sz="1200" dirty="0">
-                            <a:latin typeface="Cambria Math" panose="02040503050406030204" pitchFamily="18" charset="0"/>
-                          </a:rPr>
-                          <m:t>a</m:t>
-                        </m:r>
-                      </m:sub>
-                    </m:sSub>
-                    <m:r>
-                      <a:rPr lang="en-US" sz="1200" dirty="0">
-                        <a:latin typeface="Cambria Math" panose="02040503050406030204" pitchFamily="18" charset="0"/>
-                      </a:rPr>
-                      <m:t> </m:t>
-                    </m:r>
-                    <m:r>
-                      <a:rPr lang="en-US" sz="1200" i="1" dirty="0">
-                        <a:latin typeface="Cambria Math" panose="02040503050406030204" pitchFamily="18" charset="0"/>
-                      </a:rPr>
-                      <m:t>𝑓</m:t>
-                    </m:r>
-                    <m:r>
-                      <a:rPr lang="en-US" sz="1200" i="1" dirty="0">
-                        <a:latin typeface="Cambria Math" panose="02040503050406030204" pitchFamily="18" charset="0"/>
-                      </a:rPr>
-                      <m:t>(</m:t>
-                    </m:r>
-                    <m:r>
-                      <a:rPr lang="en-US" sz="1200" i="1" dirty="0">
-                        <a:latin typeface="Cambria Math" panose="02040503050406030204" pitchFamily="18" charset="0"/>
-                      </a:rPr>
-                      <m:t>𝑎</m:t>
-                    </m:r>
-                    <m:r>
-                      <a:rPr lang="en-US" sz="1200" i="1" dirty="0">
-                        <a:latin typeface="Cambria Math" panose="02040503050406030204" pitchFamily="18" charset="0"/>
-                      </a:rPr>
-                      <m:t>)</m:t>
-                    </m:r>
-                  </m:oMath>
-                </a14:m>
-                <a:r>
-                  <a:rPr lang="en-US" sz="1200" dirty="0"/>
-                  <a:t> a value of action </a:t>
-                </a:r>
-                <a14:m>
-                  <m:oMath xmlns:m="http://schemas.openxmlformats.org/officeDocument/2006/math">
-                    <m:r>
-                      <a:rPr lang="en-US" sz="1200" i="1" dirty="0">
-                        <a:latin typeface="Cambria Math" panose="02040503050406030204" pitchFamily="18" charset="0"/>
-                      </a:rPr>
-                      <m:t>𝑎</m:t>
-                    </m:r>
-                  </m:oMath>
-                </a14:m>
-                <a:r>
-                  <a:rPr lang="en-US" sz="1200" dirty="0"/>
-                  <a:t> at which </a:t>
-                </a:r>
-                <a14:m>
-                  <m:oMath xmlns:m="http://schemas.openxmlformats.org/officeDocument/2006/math">
-                    <m:r>
-                      <a:rPr lang="en-US" sz="1200" i="1" dirty="0">
-                        <a:latin typeface="Cambria Math" panose="02040503050406030204" pitchFamily="18" charset="0"/>
-                      </a:rPr>
-                      <m:t>𝑓</m:t>
-                    </m:r>
-                    <m:r>
-                      <a:rPr lang="en-US" sz="1200" i="1" dirty="0">
-                        <a:latin typeface="Cambria Math" panose="02040503050406030204" pitchFamily="18" charset="0"/>
-                      </a:rPr>
-                      <m:t>(</m:t>
-                    </m:r>
-                    <m:r>
-                      <a:rPr lang="en-US" sz="1200" i="1" dirty="0">
-                        <a:latin typeface="Cambria Math" panose="02040503050406030204" pitchFamily="18" charset="0"/>
-                      </a:rPr>
-                      <m:t>𝑎</m:t>
-                    </m:r>
-                    <m:r>
-                      <a:rPr lang="en-US" sz="1200" i="1" dirty="0">
-                        <a:latin typeface="Cambria Math" panose="02040503050406030204" pitchFamily="18" charset="0"/>
-                      </a:rPr>
-                      <m:t>)</m:t>
-                    </m:r>
-                  </m:oMath>
-                </a14:m>
-                <a:r>
-                  <a:rPr lang="en-US" sz="1200" dirty="0"/>
-                  <a:t> takes its maximal value</a:t>
-                </a:r>
-              </a:p>
-            </p:txBody>
-          </p:sp>
-        </mc:Choice>
-        <mc:Fallback xmlns="">
-          <p:sp>
-            <p:nvSpPr>
-              <p:cNvPr id="10" name="TextBox 9">
-                <a:extLst>
-                  <a:ext uri="{FF2B5EF4-FFF2-40B4-BE49-F238E27FC236}">
-                    <a16:creationId xmlns:a16="http://schemas.microsoft.com/office/drawing/2014/main" id="{5CD475E5-BE3B-5594-57DC-46A17411F2F9}"/>
-                  </a:ext>
-                </a:extLst>
-              </p:cNvPr>
-              <p:cNvSpPr txBox="1">
-                <a:spLocks noRot="1" noChangeAspect="1" noMove="1" noResize="1" noEditPoints="1" noAdjustHandles="1" noChangeArrowheads="1" noChangeShapeType="1" noTextEdit="1"/>
-              </p:cNvSpPr>
-              <p:nvPr/>
-            </p:nvSpPr>
-            <p:spPr>
-              <a:xfrm>
-                <a:off x="822820" y="1124198"/>
-                <a:ext cx="5273179" cy="2308324"/>
-              </a:xfrm>
-              <a:prstGeom prst="rect">
-                <a:avLst/>
-              </a:prstGeom>
-              <a:blipFill>
-                <a:blip r:embed="rId3"/>
-                <a:stretch>
-                  <a:fillRect b="-9424"/>
-                </a:stretch>
-              </a:blipFill>
-            </p:spPr>
-            <p:txBody>
-              <a:bodyPr/>
-              <a:lstStyle/>
-              <a:p>
-                <a:r>
-                  <a:rPr lang="en-US">
-                    <a:noFill/>
-                  </a:rPr>
-                  <a:t> </a:t>
-                </a:r>
-              </a:p>
-            </p:txBody>
-          </p:sp>
-        </mc:Fallback>
-      </mc:AlternateContent>
-      <mc:AlternateContent xmlns:mc="http://schemas.openxmlformats.org/markup-compatibility/2006" xmlns:a14="http://schemas.microsoft.com/office/drawing/2010/main">
-        <mc:Choice Requires="a14">
-          <p:sp>
-            <p:nvSpPr>
-              <p:cNvPr id="11" name="Content Placeholder 2">
-                <a:extLst>
-                  <a:ext uri="{FF2B5EF4-FFF2-40B4-BE49-F238E27FC236}">
-                    <a16:creationId xmlns:a16="http://schemas.microsoft.com/office/drawing/2014/main" id="{6F45EA4F-65F9-5141-0B09-C395CF9CA7A0}"/>
-                  </a:ext>
-                </a:extLst>
-              </p:cNvPr>
-              <p:cNvSpPr txBox="1">
-                <a:spLocks/>
-              </p:cNvSpPr>
-              <p:nvPr/>
-            </p:nvSpPr>
-            <p:spPr>
-              <a:xfrm>
-                <a:off x="6267338" y="1124198"/>
-                <a:ext cx="5273179" cy="3693383"/>
-              </a:xfrm>
-              <a:prstGeom prst="rect">
-                <a:avLst/>
-              </a:prstGeom>
-            </p:spPr>
-            <p:style>
-              <a:lnRef idx="2">
-                <a:schemeClr val="accent2"/>
-              </a:lnRef>
-              <a:fillRef idx="1">
-                <a:schemeClr val="lt1"/>
-              </a:fillRef>
-              <a:effectRef idx="0">
-                <a:schemeClr val="accent2"/>
-              </a:effectRef>
-              <a:fontRef idx="minor">
-                <a:schemeClr val="dk1"/>
-              </a:fontRef>
-            </p:style>
-            <p:txBody>
-              <a:bodyPr vert="horz" wrap="square" lIns="91440" tIns="45720" rIns="91440" bIns="45720" rtlCol="0">
-                <a:spAutoFit/>
-              </a:bodyPr>
-              <a:lstStyle>
-                <a:lvl1pPr marL="228600" indent="-228600" algn="l" defTabSz="914400" rtl="0" eaLnBrk="1" latinLnBrk="0" hangingPunct="1">
-                  <a:lnSpc>
-                    <a:spcPct val="90000"/>
-                  </a:lnSpc>
-                  <a:spcBef>
-                    <a:spcPts val="1000"/>
-                  </a:spcBef>
-                  <a:buFont typeface="Arial" panose="020B0604020202020204" pitchFamily="34" charset="0"/>
-                  <a:buChar char="•"/>
-                  <a:defRPr sz="2800" kern="1200">
-                    <a:solidFill>
-                      <a:schemeClr val="tx1"/>
-                    </a:solidFill>
-                    <a:latin typeface="+mn-lt"/>
-                    <a:ea typeface="+mn-ea"/>
-                    <a:cs typeface="+mn-cs"/>
-                  </a:defRPr>
-                </a:lvl1pPr>
-                <a:lvl2pPr marL="685800" indent="-228600" algn="l" defTabSz="914400" rtl="0" eaLnBrk="1" latinLnBrk="0" hangingPunct="1">
-                  <a:lnSpc>
-                    <a:spcPct val="90000"/>
-                  </a:lnSpc>
-                  <a:spcBef>
-                    <a:spcPts val="500"/>
-                  </a:spcBef>
-                  <a:buFont typeface="Arial" panose="020B0604020202020204" pitchFamily="34" charset="0"/>
-                  <a:buChar char="•"/>
-                  <a:defRPr sz="2400" kern="1200">
-                    <a:solidFill>
-                      <a:schemeClr val="tx1"/>
-                    </a:solidFill>
-                    <a:latin typeface="+mn-lt"/>
-                    <a:ea typeface="+mn-ea"/>
-                    <a:cs typeface="+mn-cs"/>
-                  </a:defRPr>
-                </a:lvl2pPr>
-                <a:lvl3pPr marL="1143000" indent="-228600" algn="l" defTabSz="914400" rtl="0" eaLnBrk="1" latinLnBrk="0" hangingPunct="1">
-                  <a:lnSpc>
-                    <a:spcPct val="90000"/>
-                  </a:lnSpc>
-                  <a:spcBef>
-                    <a:spcPts val="500"/>
-                  </a:spcBef>
-                  <a:buFont typeface="Arial" panose="020B0604020202020204" pitchFamily="34" charset="0"/>
-                  <a:buChar char="•"/>
-                  <a:defRPr sz="2000" kern="1200">
-                    <a:solidFill>
-                      <a:schemeClr val="tx1"/>
-                    </a:solidFill>
-                    <a:latin typeface="+mn-lt"/>
-                    <a:ea typeface="+mn-ea"/>
-                    <a:cs typeface="+mn-cs"/>
-                  </a:defRPr>
-                </a:lvl3pPr>
-                <a:lvl4pPr marL="1600200" indent="-228600" algn="l" defTabSz="914400" rtl="0" eaLnBrk="1" latinLnBrk="0" hangingPunct="1">
-                  <a:lnSpc>
-                    <a:spcPct val="90000"/>
-                  </a:lnSpc>
-                  <a:spcBef>
-                    <a:spcPts val="500"/>
-                  </a:spcBef>
-                  <a:buFont typeface="Arial" panose="020B0604020202020204" pitchFamily="34" charset="0"/>
-                  <a:buChar char="•"/>
-                  <a:defRPr sz="1800" kern="1200">
-                    <a:solidFill>
-                      <a:schemeClr val="tx1"/>
-                    </a:solidFill>
-                    <a:latin typeface="+mn-lt"/>
-                    <a:ea typeface="+mn-ea"/>
-                    <a:cs typeface="+mn-cs"/>
-                  </a:defRPr>
-                </a:lvl4pPr>
-                <a:lvl5pPr marL="2057400" indent="-228600" algn="l" defTabSz="914400" rtl="0" eaLnBrk="1" latinLnBrk="0" hangingPunct="1">
-                  <a:lnSpc>
-                    <a:spcPct val="90000"/>
-                  </a:lnSpc>
-                  <a:spcBef>
-                    <a:spcPts val="500"/>
-                  </a:spcBef>
-                  <a:buFont typeface="Arial" panose="020B0604020202020204" pitchFamily="34" charset="0"/>
-                  <a:buChar char="•"/>
-                  <a:defRPr sz="1800" kern="1200">
-                    <a:solidFill>
-                      <a:schemeClr val="tx1"/>
-                    </a:solidFill>
-                    <a:latin typeface="+mn-lt"/>
-                    <a:ea typeface="+mn-ea"/>
-                    <a:cs typeface="+mn-cs"/>
-                  </a:defRPr>
-                </a:lvl5pPr>
-                <a:lvl6pPr marL="2514600" indent="-228600" algn="l" defTabSz="914400" rtl="0" eaLnBrk="1" latinLnBrk="0" hangingPunct="1">
-                  <a:lnSpc>
-                    <a:spcPct val="90000"/>
-                  </a:lnSpc>
-                  <a:spcBef>
-                    <a:spcPts val="500"/>
-                  </a:spcBef>
-                  <a:buFont typeface="Arial" panose="020B0604020202020204" pitchFamily="34" charset="0"/>
-                  <a:buChar char="•"/>
-                  <a:defRPr sz="1800" kern="1200">
-                    <a:solidFill>
-                      <a:schemeClr val="tx1"/>
-                    </a:solidFill>
-                    <a:latin typeface="+mn-lt"/>
-                    <a:ea typeface="+mn-ea"/>
-                    <a:cs typeface="+mn-cs"/>
-                  </a:defRPr>
-                </a:lvl6pPr>
-                <a:lvl7pPr marL="2971800" indent="-228600" algn="l" defTabSz="914400" rtl="0" eaLnBrk="1" latinLnBrk="0" hangingPunct="1">
-                  <a:lnSpc>
-                    <a:spcPct val="90000"/>
-                  </a:lnSpc>
-                  <a:spcBef>
-                    <a:spcPts val="500"/>
-                  </a:spcBef>
-                  <a:buFont typeface="Arial" panose="020B0604020202020204" pitchFamily="34" charset="0"/>
-                  <a:buChar char="•"/>
-                  <a:defRPr sz="1800" kern="1200">
-                    <a:solidFill>
-                      <a:schemeClr val="tx1"/>
-                    </a:solidFill>
-                    <a:latin typeface="+mn-lt"/>
-                    <a:ea typeface="+mn-ea"/>
-                    <a:cs typeface="+mn-cs"/>
-                  </a:defRPr>
-                </a:lvl7pPr>
-                <a:lvl8pPr marL="3429000" indent="-228600" algn="l" defTabSz="914400" rtl="0" eaLnBrk="1" latinLnBrk="0" hangingPunct="1">
-                  <a:lnSpc>
-                    <a:spcPct val="90000"/>
-                  </a:lnSpc>
-                  <a:spcBef>
-                    <a:spcPts val="500"/>
-                  </a:spcBef>
-                  <a:buFont typeface="Arial" panose="020B0604020202020204" pitchFamily="34" charset="0"/>
-                  <a:buChar char="•"/>
-                  <a:defRPr sz="1800" kern="1200">
-                    <a:solidFill>
-                      <a:schemeClr val="tx1"/>
-                    </a:solidFill>
-                    <a:latin typeface="+mn-lt"/>
-                    <a:ea typeface="+mn-ea"/>
-                    <a:cs typeface="+mn-cs"/>
-                  </a:defRPr>
-                </a:lvl8pPr>
-                <a:lvl9pPr marL="3886200" indent="-228600" algn="l" defTabSz="914400" rtl="0" eaLnBrk="1" latinLnBrk="0" hangingPunct="1">
-                  <a:lnSpc>
-                    <a:spcPct val="90000"/>
-                  </a:lnSpc>
-                  <a:spcBef>
-                    <a:spcPts val="500"/>
-                  </a:spcBef>
-                  <a:buFont typeface="Arial" panose="020B0604020202020204" pitchFamily="34" charset="0"/>
-                  <a:buChar char="•"/>
-                  <a:defRPr sz="1800" kern="1200">
-                    <a:solidFill>
-                      <a:schemeClr val="tx1"/>
-                    </a:solidFill>
-                    <a:latin typeface="+mn-lt"/>
-                    <a:ea typeface="+mn-ea"/>
-                    <a:cs typeface="+mn-cs"/>
-                  </a:defRPr>
-                </a:lvl9pPr>
-              </a:lstStyle>
-              <a:p>
-                <a:pPr marL="0" indent="0">
-                  <a:spcBef>
-                    <a:spcPts val="0"/>
-                  </a:spcBef>
-                  <a:buNone/>
-                </a:pPr>
-                <a:r>
-                  <a:rPr lang="en-US" sz="1200" b="1" dirty="0"/>
-                  <a:t>MDP</a:t>
-                </a:r>
-              </a:p>
-              <a:p>
-                <a:pPr marL="0" indent="0">
-                  <a:spcBef>
-                    <a:spcPts val="0"/>
-                  </a:spcBef>
-                  <a:buNone/>
-                </a:pPr>
-                <a14:m>
-                  <m:oMath xmlns:m="http://schemas.openxmlformats.org/officeDocument/2006/math">
-                    <m:r>
-                      <a:rPr lang="en-US" sz="1200" i="1" dirty="0" smtClean="0">
-                        <a:latin typeface="Cambria Math" panose="02040503050406030204" pitchFamily="18" charset="0"/>
-                      </a:rPr>
-                      <m:t>𝑠</m:t>
-                    </m:r>
-                    <m:r>
-                      <a:rPr lang="en-US" sz="1200" i="1" dirty="0" smtClean="0">
-                        <a:latin typeface="Cambria Math" panose="02040503050406030204" pitchFamily="18" charset="0"/>
-                      </a:rPr>
-                      <m:t>, </m:t>
-                    </m:r>
-                    <m:r>
-                      <a:rPr lang="en-US" sz="1200" i="1" dirty="0" smtClean="0">
-                        <a:latin typeface="Cambria Math" panose="02040503050406030204" pitchFamily="18" charset="0"/>
-                      </a:rPr>
-                      <m:t>𝑠</m:t>
-                    </m:r>
-                    <m:r>
-                      <a:rPr lang="en-US" sz="1200" b="0" i="1" dirty="0" smtClean="0">
-                        <a:latin typeface="Cambria Math" panose="02040503050406030204" pitchFamily="18" charset="0"/>
-                      </a:rPr>
-                      <m:t>′</m:t>
-                    </m:r>
-                  </m:oMath>
-                </a14:m>
-                <a:r>
-                  <a:rPr lang="en-US" sz="1200" dirty="0"/>
-                  <a:t> 	states</a:t>
-                </a:r>
-              </a:p>
-              <a:p>
-                <a:pPr marL="0" indent="0">
-                  <a:spcBef>
-                    <a:spcPts val="0"/>
-                  </a:spcBef>
-                  <a:buNone/>
-                </a:pPr>
-                <a14:m>
-                  <m:oMath xmlns:m="http://schemas.openxmlformats.org/officeDocument/2006/math">
-                    <m:r>
-                      <a:rPr lang="en-US" sz="1200" i="1" dirty="0" smtClean="0">
-                        <a:latin typeface="Cambria Math" panose="02040503050406030204" pitchFamily="18" charset="0"/>
-                      </a:rPr>
-                      <m:t>𝑎</m:t>
-                    </m:r>
-                  </m:oMath>
-                </a14:m>
-                <a:r>
-                  <a:rPr lang="en-US" sz="1200" dirty="0"/>
-                  <a:t> 	an action</a:t>
-                </a:r>
-              </a:p>
-              <a:p>
-                <a:pPr marL="0" indent="0">
-                  <a:spcBef>
-                    <a:spcPts val="0"/>
-                  </a:spcBef>
-                  <a:buNone/>
-                </a:pPr>
-                <a14:m>
-                  <m:oMath xmlns:m="http://schemas.openxmlformats.org/officeDocument/2006/math">
-                    <m:r>
-                      <a:rPr lang="en-US" sz="1200" i="1" dirty="0" smtClean="0">
-                        <a:latin typeface="Cambria Math" panose="02040503050406030204" pitchFamily="18" charset="0"/>
-                      </a:rPr>
-                      <m:t>𝑟</m:t>
-                    </m:r>
-                  </m:oMath>
-                </a14:m>
-                <a:r>
-                  <a:rPr lang="en-US" sz="1200" dirty="0"/>
-                  <a:t> 	a reward</a:t>
-                </a:r>
-              </a:p>
-              <a:p>
-                <a:pPr marL="0" indent="0">
-                  <a:spcBef>
-                    <a:spcPts val="0"/>
-                  </a:spcBef>
-                  <a:buNone/>
-                </a:pPr>
-                <a14:m>
-                  <m:oMath xmlns:m="http://schemas.openxmlformats.org/officeDocument/2006/math">
-                    <m:r>
-                      <a:rPr lang="en-US" sz="1200" i="1" dirty="0" smtClean="0">
-                        <a:latin typeface="Cambria Math" panose="02040503050406030204" pitchFamily="18" charset="0"/>
-                        <a:ea typeface="Cambria Math" panose="02040503050406030204" pitchFamily="18" charset="0"/>
-                      </a:rPr>
-                      <m:t>𝒮</m:t>
-                    </m:r>
-                  </m:oMath>
-                </a14:m>
-                <a:r>
-                  <a:rPr lang="en-US" sz="1200" dirty="0"/>
-                  <a:t> 	set of all (nonterminal) states, </a:t>
-                </a:r>
-                <a14:m>
-                  <m:oMath xmlns:m="http://schemas.openxmlformats.org/officeDocument/2006/math">
-                    <m:sSup>
-                      <m:sSupPr>
-                        <m:ctrlPr>
-                          <a:rPr lang="en-US" sz="1200" b="0" i="1" dirty="0" smtClean="0">
-                            <a:latin typeface="Cambria Math" panose="02040503050406030204" pitchFamily="18" charset="0"/>
-                            <a:ea typeface="Cambria Math" panose="02040503050406030204" pitchFamily="18" charset="0"/>
-                          </a:rPr>
-                        </m:ctrlPr>
-                      </m:sSupPr>
-                      <m:e>
-                        <m:r>
-                          <a:rPr lang="en-US" sz="1200" i="1" dirty="0">
-                            <a:latin typeface="Cambria Math" panose="02040503050406030204" pitchFamily="18" charset="0"/>
-                            <a:ea typeface="Cambria Math" panose="02040503050406030204" pitchFamily="18" charset="0"/>
-                          </a:rPr>
-                          <m:t>𝒮</m:t>
-                        </m:r>
-                      </m:e>
-                      <m:sup>
-                        <m:r>
-                          <a:rPr lang="en-US" sz="1200" b="0" i="1" dirty="0" smtClean="0">
-                            <a:latin typeface="Cambria Math" panose="02040503050406030204" pitchFamily="18" charset="0"/>
-                            <a:ea typeface="Cambria Math" panose="02040503050406030204" pitchFamily="18" charset="0"/>
-                          </a:rPr>
-                          <m:t>+</m:t>
-                        </m:r>
-                      </m:sup>
-                    </m:sSup>
-                  </m:oMath>
-                </a14:m>
-                <a:r>
-                  <a:rPr lang="en-US" sz="1200" dirty="0"/>
-                  <a:t> are all states </a:t>
-                </a:r>
-              </a:p>
-              <a:p>
-                <a:pPr marL="0" indent="0">
-                  <a:spcBef>
-                    <a:spcPts val="0"/>
-                  </a:spcBef>
-                  <a:buNone/>
-                </a:pPr>
-                <a14:m>
-                  <m:oMath xmlns:m="http://schemas.openxmlformats.org/officeDocument/2006/math">
-                    <m:r>
-                      <a:rPr lang="en-US" sz="1200" i="1" dirty="0" smtClean="0">
-                        <a:latin typeface="Cambria Math" panose="02040503050406030204" pitchFamily="18" charset="0"/>
-                        <a:ea typeface="Cambria Math" panose="02040503050406030204" pitchFamily="18" charset="0"/>
-                      </a:rPr>
-                      <m:t>𝒜</m:t>
-                    </m:r>
-                    <m:r>
-                      <a:rPr lang="en-US" sz="1200" i="1" dirty="0">
-                        <a:latin typeface="Cambria Math" panose="02040503050406030204" pitchFamily="18" charset="0"/>
-                      </a:rPr>
-                      <m:t>(</m:t>
-                    </m:r>
-                    <m:r>
-                      <a:rPr lang="en-US" sz="1200" i="1" dirty="0">
-                        <a:latin typeface="Cambria Math" panose="02040503050406030204" pitchFamily="18" charset="0"/>
-                      </a:rPr>
-                      <m:t>𝑠</m:t>
-                    </m:r>
-                    <m:r>
-                      <a:rPr lang="en-US" sz="1200" i="1" dirty="0">
-                        <a:latin typeface="Cambria Math" panose="02040503050406030204" pitchFamily="18" charset="0"/>
-                      </a:rPr>
-                      <m:t>)</m:t>
-                    </m:r>
-                  </m:oMath>
-                </a14:m>
-                <a:r>
-                  <a:rPr lang="en-US" sz="1200" dirty="0"/>
-                  <a:t>	set of all actions available in state </a:t>
-                </a:r>
-                <a14:m>
-                  <m:oMath xmlns:m="http://schemas.openxmlformats.org/officeDocument/2006/math">
-                    <m:r>
-                      <a:rPr lang="en-US" sz="1200" i="1" dirty="0" smtClean="0">
-                        <a:latin typeface="Cambria Math" panose="02040503050406030204" pitchFamily="18" charset="0"/>
-                      </a:rPr>
-                      <m:t>𝑠</m:t>
-                    </m:r>
-                  </m:oMath>
-                </a14:m>
-                <a:endParaRPr lang="en-US" sz="1200" dirty="0"/>
-              </a:p>
-              <a:p>
-                <a:pPr marL="0" indent="0">
-                  <a:spcBef>
-                    <a:spcPts val="0"/>
-                  </a:spcBef>
-                  <a:buNone/>
-                </a:pPr>
-                <a14:m>
-                  <m:oMath xmlns:m="http://schemas.openxmlformats.org/officeDocument/2006/math">
-                    <m:r>
-                      <a:rPr lang="en-US" sz="1200" i="1">
-                        <a:latin typeface="Cambria Math" panose="02040503050406030204" pitchFamily="18" charset="0"/>
-                      </a:rPr>
-                      <m:t>𝛾</m:t>
-                    </m:r>
-                  </m:oMath>
-                </a14:m>
-                <a:r>
-                  <a:rPr lang="en-US" sz="1200" dirty="0"/>
-                  <a:t> 	discount-rate parameter</a:t>
-                </a:r>
-                <a:endParaRPr lang="en-US" sz="1200" i="1" dirty="0">
-                  <a:latin typeface="Cambria Math" panose="02040503050406030204" pitchFamily="18" charset="0"/>
-                </a:endParaRPr>
-              </a:p>
-              <a:p>
-                <a:pPr marL="0" indent="0">
-                  <a:spcBef>
-                    <a:spcPts val="0"/>
-                  </a:spcBef>
-                  <a:buNone/>
-                </a:pPr>
-                <a14:m>
-                  <m:oMath xmlns:m="http://schemas.openxmlformats.org/officeDocument/2006/math">
-                    <m:r>
-                      <a:rPr lang="en-US" sz="1200" i="1" dirty="0" smtClean="0">
-                        <a:latin typeface="Cambria Math" panose="02040503050406030204" pitchFamily="18" charset="0"/>
-                      </a:rPr>
-                      <m:t>𝑡</m:t>
-                    </m:r>
-                  </m:oMath>
-                </a14:m>
-                <a:r>
-                  <a:rPr lang="en-US" sz="1200" dirty="0"/>
-                  <a:t> 	discrete time step</a:t>
-                </a:r>
-              </a:p>
-              <a:p>
-                <a:pPr marL="0" indent="0">
-                  <a:spcBef>
-                    <a:spcPts val="0"/>
-                  </a:spcBef>
-                  <a:buNone/>
-                </a:pPr>
-                <a14:m>
-                  <m:oMath xmlns:m="http://schemas.openxmlformats.org/officeDocument/2006/math">
-                    <m:r>
-                      <a:rPr lang="en-US" sz="1200" i="1" dirty="0" smtClean="0">
-                        <a:latin typeface="Cambria Math" panose="02040503050406030204" pitchFamily="18" charset="0"/>
-                      </a:rPr>
-                      <m:t>𝑇</m:t>
-                    </m:r>
-                  </m:oMath>
-                </a14:m>
-                <a:r>
-                  <a:rPr lang="en-US" sz="1200" dirty="0"/>
-                  <a:t> 	final time step of an episode (a.k.a. horizon)</a:t>
-                </a:r>
-              </a:p>
-              <a:p>
-                <a:pPr marL="0" indent="0">
-                  <a:spcBef>
-                    <a:spcPts val="0"/>
-                  </a:spcBef>
-                  <a:buNone/>
-                </a:pPr>
-                <a14:m>
-                  <m:oMath xmlns:m="http://schemas.openxmlformats.org/officeDocument/2006/math">
-                    <m:sSub>
-                      <m:sSubPr>
-                        <m:ctrlPr>
-                          <a:rPr lang="en-US" sz="1200" b="0" i="1" dirty="0" smtClean="0">
-                            <a:latin typeface="Cambria Math" panose="02040503050406030204" pitchFamily="18" charset="0"/>
-                          </a:rPr>
-                        </m:ctrlPr>
-                      </m:sSubPr>
-                      <m:e>
-                        <m:r>
-                          <a:rPr lang="en-US" sz="1200" i="1" dirty="0" smtClean="0">
-                            <a:latin typeface="Cambria Math" panose="02040503050406030204" pitchFamily="18" charset="0"/>
-                          </a:rPr>
-                          <m:t>𝐴</m:t>
-                        </m:r>
-                      </m:e>
-                      <m:sub>
-                        <m:r>
-                          <a:rPr lang="en-US" sz="1200" b="0" i="1" dirty="0" smtClean="0">
-                            <a:latin typeface="Cambria Math" panose="02040503050406030204" pitchFamily="18" charset="0"/>
-                          </a:rPr>
-                          <m:t>𝑡</m:t>
-                        </m:r>
-                      </m:sub>
-                    </m:sSub>
-                  </m:oMath>
-                </a14:m>
-                <a:r>
-                  <a:rPr lang="en-US" sz="1200" dirty="0"/>
-                  <a:t> 	random variable for the action at time </a:t>
-                </a:r>
-                <a14:m>
-                  <m:oMath xmlns:m="http://schemas.openxmlformats.org/officeDocument/2006/math">
-                    <m:r>
-                      <a:rPr lang="en-US" sz="1200" i="1" dirty="0" smtClean="0">
-                        <a:latin typeface="Cambria Math" panose="02040503050406030204" pitchFamily="18" charset="0"/>
-                      </a:rPr>
-                      <m:t>𝑡</m:t>
-                    </m:r>
-                  </m:oMath>
-                </a14:m>
-                <a:endParaRPr lang="en-US" sz="1200" dirty="0"/>
-              </a:p>
-              <a:p>
-                <a:pPr marL="0" indent="0">
-                  <a:spcBef>
-                    <a:spcPts val="0"/>
-                  </a:spcBef>
-                  <a:buNone/>
-                </a:pPr>
-                <a14:m>
-                  <m:oMath xmlns:m="http://schemas.openxmlformats.org/officeDocument/2006/math">
-                    <m:sSub>
-                      <m:sSubPr>
-                        <m:ctrlPr>
-                          <a:rPr lang="en-US" sz="1200" b="0" i="1" dirty="0" smtClean="0">
-                            <a:latin typeface="Cambria Math" panose="02040503050406030204" pitchFamily="18" charset="0"/>
-                          </a:rPr>
-                        </m:ctrlPr>
-                      </m:sSubPr>
-                      <m:e>
-                        <m:r>
-                          <a:rPr lang="en-US" sz="1200" i="1" dirty="0" smtClean="0">
-                            <a:latin typeface="Cambria Math" panose="02040503050406030204" pitchFamily="18" charset="0"/>
-                          </a:rPr>
-                          <m:t>𝑆</m:t>
-                        </m:r>
-                      </m:e>
-                      <m:sub>
-                        <m:r>
-                          <a:rPr lang="en-US" sz="1200" b="0" i="1" dirty="0" smtClean="0">
-                            <a:latin typeface="Cambria Math" panose="02040503050406030204" pitchFamily="18" charset="0"/>
-                          </a:rPr>
-                          <m:t>𝑡</m:t>
-                        </m:r>
-                      </m:sub>
-                    </m:sSub>
-                  </m:oMath>
-                </a14:m>
-                <a:r>
-                  <a:rPr lang="en-US" sz="1200" dirty="0"/>
-                  <a:t>	random variable for the state at time </a:t>
-                </a:r>
-                <a14:m>
-                  <m:oMath xmlns:m="http://schemas.openxmlformats.org/officeDocument/2006/math">
-                    <m:r>
-                      <a:rPr lang="en-US" sz="1200" i="1" dirty="0" smtClean="0">
-                        <a:latin typeface="Cambria Math" panose="02040503050406030204" pitchFamily="18" charset="0"/>
-                      </a:rPr>
-                      <m:t>𝑡</m:t>
-                    </m:r>
-                  </m:oMath>
-                </a14:m>
-                <a:endParaRPr lang="en-US" sz="1200" dirty="0"/>
-              </a:p>
-              <a:p>
-                <a:pPr marL="0" indent="0">
-                  <a:spcBef>
-                    <a:spcPts val="0"/>
-                  </a:spcBef>
-                  <a:buNone/>
-                </a:pPr>
-                <a14:m>
-                  <m:oMath xmlns:m="http://schemas.openxmlformats.org/officeDocument/2006/math">
-                    <m:sSub>
-                      <m:sSubPr>
-                        <m:ctrlPr>
-                          <a:rPr lang="en-US" sz="1200" b="0" i="1" dirty="0" smtClean="0">
-                            <a:latin typeface="Cambria Math" panose="02040503050406030204" pitchFamily="18" charset="0"/>
-                          </a:rPr>
-                        </m:ctrlPr>
-                      </m:sSubPr>
-                      <m:e>
-                        <m:r>
-                          <a:rPr lang="en-US" sz="1200" i="1" dirty="0" smtClean="0">
-                            <a:latin typeface="Cambria Math" panose="02040503050406030204" pitchFamily="18" charset="0"/>
-                          </a:rPr>
-                          <m:t>𝑅</m:t>
-                        </m:r>
-                      </m:e>
-                      <m:sub>
-                        <m:r>
-                          <a:rPr lang="en-US" sz="1200" b="0" i="1" dirty="0" smtClean="0">
-                            <a:latin typeface="Cambria Math" panose="02040503050406030204" pitchFamily="18" charset="0"/>
-                          </a:rPr>
-                          <m:t>𝑡</m:t>
-                        </m:r>
-                      </m:sub>
-                    </m:sSub>
-                  </m:oMath>
-                </a14:m>
-                <a:r>
-                  <a:rPr lang="en-US" sz="1200" dirty="0"/>
-                  <a:t> 	random variable for the reward at time </a:t>
-                </a:r>
-                <a14:m>
-                  <m:oMath xmlns:m="http://schemas.openxmlformats.org/officeDocument/2006/math">
-                    <m:r>
-                      <a:rPr lang="en-US" sz="1200" i="1" dirty="0" smtClean="0">
-                        <a:latin typeface="Cambria Math" panose="02040503050406030204" pitchFamily="18" charset="0"/>
-                      </a:rPr>
-                      <m:t>𝑡</m:t>
-                    </m:r>
-                  </m:oMath>
-                </a14:m>
-                <a:endParaRPr lang="en-US" sz="1200" dirty="0"/>
-              </a:p>
-              <a:p>
-                <a:pPr marL="0" indent="0">
-                  <a:lnSpc>
-                    <a:spcPct val="100000"/>
-                  </a:lnSpc>
-                  <a:spcBef>
-                    <a:spcPts val="0"/>
-                  </a:spcBef>
-                  <a:buNone/>
-                </a:pPr>
-                <a:endParaRPr lang="en-US" sz="1200" i="1" dirty="0">
-                  <a:latin typeface="Cambria Math" panose="02040503050406030204" pitchFamily="18" charset="0"/>
-                </a:endParaRPr>
-              </a:p>
-              <a:p>
-                <a:pPr marL="0" indent="0">
-                  <a:lnSpc>
-                    <a:spcPct val="100000"/>
-                  </a:lnSpc>
-                  <a:spcBef>
-                    <a:spcPts val="0"/>
-                  </a:spcBef>
-                  <a:buNone/>
-                </a:pPr>
-                <a14:m>
-                  <m:oMath xmlns:m="http://schemas.openxmlformats.org/officeDocument/2006/math">
-                    <m:r>
-                      <a:rPr lang="en-US" sz="1200" i="1" dirty="0">
-                        <a:latin typeface="Cambria Math" panose="02040503050406030204" pitchFamily="18" charset="0"/>
-                      </a:rPr>
-                      <m:t>𝑝</m:t>
-                    </m:r>
-                    <m:d>
-                      <m:dPr>
-                        <m:endChr m:val="|"/>
-                        <m:ctrlPr>
-                          <a:rPr lang="en-US" sz="1200" i="1" dirty="0">
-                            <a:latin typeface="Cambria Math" panose="02040503050406030204" pitchFamily="18" charset="0"/>
-                          </a:rPr>
-                        </m:ctrlPr>
-                      </m:dPr>
-                      <m:e>
-                        <m:sSup>
-                          <m:sSupPr>
-                            <m:ctrlPr>
-                              <a:rPr lang="en-US" sz="1200" i="1" dirty="0">
-                                <a:latin typeface="Cambria Math" panose="02040503050406030204" pitchFamily="18" charset="0"/>
-                              </a:rPr>
-                            </m:ctrlPr>
-                          </m:sSupPr>
-                          <m:e>
-                            <m:r>
-                              <a:rPr lang="en-US" sz="1200" i="1" dirty="0">
-                                <a:latin typeface="Cambria Math" panose="02040503050406030204" pitchFamily="18" charset="0"/>
-                              </a:rPr>
-                              <m:t>𝑠</m:t>
-                            </m:r>
-                          </m:e>
-                          <m:sup>
-                            <m:r>
-                              <a:rPr lang="en-US" sz="1200" i="1" dirty="0">
-                                <a:latin typeface="Cambria Math" panose="02040503050406030204" pitchFamily="18" charset="0"/>
-                              </a:rPr>
-                              <m:t>′</m:t>
-                            </m:r>
-                          </m:sup>
-                        </m:sSup>
-                        <m:r>
-                          <a:rPr lang="en-US" sz="1200" b="0" i="1" dirty="0" smtClean="0">
-                            <a:latin typeface="Cambria Math" panose="02040503050406030204" pitchFamily="18" charset="0"/>
-                          </a:rPr>
-                          <m:t>,</m:t>
-                        </m:r>
-                        <m:r>
-                          <a:rPr lang="en-US" sz="1200" b="0" i="1" dirty="0" smtClean="0">
-                            <a:latin typeface="Cambria Math" panose="02040503050406030204" pitchFamily="18" charset="0"/>
-                          </a:rPr>
-                          <m:t>𝑟</m:t>
-                        </m:r>
-                        <m:r>
-                          <a:rPr lang="en-US" sz="1200" i="1" dirty="0">
-                            <a:latin typeface="Cambria Math" panose="02040503050406030204" pitchFamily="18" charset="0"/>
-                          </a:rPr>
-                          <m:t> </m:t>
-                        </m:r>
-                      </m:e>
-                    </m:d>
-                    <m:r>
-                      <a:rPr lang="en-US" sz="1200" i="1" dirty="0">
-                        <a:latin typeface="Cambria Math" panose="02040503050406030204" pitchFamily="18" charset="0"/>
-                      </a:rPr>
-                      <m:t>𝑠</m:t>
-                    </m:r>
-                    <m:r>
-                      <a:rPr lang="en-US" sz="1200" i="1" dirty="0">
-                        <a:latin typeface="Cambria Math" panose="02040503050406030204" pitchFamily="18" charset="0"/>
-                      </a:rPr>
-                      <m:t>, </m:t>
-                    </m:r>
-                    <m:r>
-                      <a:rPr lang="en-US" sz="1200" i="1" dirty="0">
-                        <a:latin typeface="Cambria Math" panose="02040503050406030204" pitchFamily="18" charset="0"/>
-                      </a:rPr>
-                      <m:t>𝑎</m:t>
-                    </m:r>
-                    <m:r>
-                      <a:rPr lang="en-US" sz="1200" i="1" dirty="0">
-                        <a:latin typeface="Cambria Math" panose="02040503050406030204" pitchFamily="18" charset="0"/>
-                      </a:rPr>
-                      <m:t>)</m:t>
-                    </m:r>
-                  </m:oMath>
-                </a14:m>
-                <a:r>
-                  <a:rPr lang="en-US" sz="1200" dirty="0"/>
-                  <a:t>	probability of transition to state </a:t>
-                </a:r>
-                <a14:m>
-                  <m:oMath xmlns:m="http://schemas.openxmlformats.org/officeDocument/2006/math">
-                    <m:r>
-                      <a:rPr lang="en-US" sz="1200" i="1" dirty="0">
-                        <a:latin typeface="Cambria Math" panose="02040503050406030204" pitchFamily="18" charset="0"/>
-                      </a:rPr>
-                      <m:t>𝑠</m:t>
-                    </m:r>
-                    <m:r>
-                      <a:rPr lang="en-US" sz="1200" i="1" dirty="0">
-                        <a:latin typeface="Cambria Math" panose="02040503050406030204" pitchFamily="18" charset="0"/>
-                      </a:rPr>
-                      <m:t>′</m:t>
-                    </m:r>
-                  </m:oMath>
-                </a14:m>
-                <a:r>
-                  <a:rPr lang="en-US" sz="1200" dirty="0"/>
-                  <a:t> and receiving reward </a:t>
-                </a:r>
-                <a14:m>
-                  <m:oMath xmlns:m="http://schemas.openxmlformats.org/officeDocument/2006/math">
-                    <m:r>
-                      <a:rPr lang="en-US" sz="1200" b="0" i="1" smtClean="0">
-                        <a:latin typeface="Cambria Math" panose="02040503050406030204" pitchFamily="18" charset="0"/>
-                      </a:rPr>
-                      <m:t>𝑟</m:t>
-                    </m:r>
-                  </m:oMath>
-                </a14:m>
-                <a:r>
-                  <a:rPr lang="en-US" sz="1200" dirty="0"/>
-                  <a:t>, </a:t>
-                </a:r>
-                <a:br>
-                  <a:rPr lang="en-US" sz="1200" dirty="0"/>
-                </a:br>
-                <a:r>
-                  <a:rPr lang="en-US" sz="1200" dirty="0"/>
-                  <a:t>	from state </a:t>
-                </a:r>
-                <a14:m>
-                  <m:oMath xmlns:m="http://schemas.openxmlformats.org/officeDocument/2006/math">
-                    <m:r>
-                      <a:rPr lang="en-US" sz="1200" i="1" dirty="0">
-                        <a:latin typeface="Cambria Math" panose="02040503050406030204" pitchFamily="18" charset="0"/>
-                      </a:rPr>
-                      <m:t>𝑠</m:t>
-                    </m:r>
-                  </m:oMath>
-                </a14:m>
-                <a:r>
-                  <a:rPr lang="en-US" sz="1200" dirty="0"/>
-                  <a:t> taking action </a:t>
-                </a:r>
-                <a14:m>
-                  <m:oMath xmlns:m="http://schemas.openxmlformats.org/officeDocument/2006/math">
-                    <m:r>
-                      <a:rPr lang="en-US" sz="1200" i="1" dirty="0">
-                        <a:latin typeface="Cambria Math" panose="02040503050406030204" pitchFamily="18" charset="0"/>
-                      </a:rPr>
-                      <m:t>𝑎</m:t>
-                    </m:r>
-                  </m:oMath>
-                </a14:m>
-                <a:r>
-                  <a:rPr lang="en-US" sz="1200" dirty="0"/>
-                  <a:t>.</a:t>
-                </a:r>
-              </a:p>
-              <a:p>
-                <a:pPr marL="0" indent="0">
-                  <a:lnSpc>
-                    <a:spcPct val="100000"/>
-                  </a:lnSpc>
-                  <a:spcBef>
-                    <a:spcPts val="0"/>
-                  </a:spcBef>
-                  <a:buNone/>
-                </a:pPr>
-                <a14:m>
-                  <m:oMath xmlns:m="http://schemas.openxmlformats.org/officeDocument/2006/math">
-                    <m:r>
-                      <a:rPr lang="en-US" sz="1200" i="1" dirty="0">
-                        <a:latin typeface="Cambria Math" panose="02040503050406030204" pitchFamily="18" charset="0"/>
-                      </a:rPr>
-                      <m:t>𝑝</m:t>
-                    </m:r>
-                    <m:d>
-                      <m:dPr>
-                        <m:endChr m:val="|"/>
-                        <m:ctrlPr>
-                          <a:rPr lang="en-US" sz="1200" i="1" dirty="0">
-                            <a:latin typeface="Cambria Math" panose="02040503050406030204" pitchFamily="18" charset="0"/>
-                          </a:rPr>
-                        </m:ctrlPr>
-                      </m:dPr>
-                      <m:e>
-                        <m:sSup>
-                          <m:sSupPr>
-                            <m:ctrlPr>
-                              <a:rPr lang="en-US" sz="1200" i="1" dirty="0">
-                                <a:latin typeface="Cambria Math" panose="02040503050406030204" pitchFamily="18" charset="0"/>
-                              </a:rPr>
-                            </m:ctrlPr>
-                          </m:sSupPr>
-                          <m:e>
-                            <m:r>
-                              <a:rPr lang="en-US" sz="1200" i="1" dirty="0">
-                                <a:latin typeface="Cambria Math" panose="02040503050406030204" pitchFamily="18" charset="0"/>
-                              </a:rPr>
-                              <m:t>𝑠</m:t>
-                            </m:r>
-                          </m:e>
-                          <m:sup>
-                            <m:r>
-                              <a:rPr lang="en-US" sz="1200" i="1" dirty="0">
-                                <a:latin typeface="Cambria Math" panose="02040503050406030204" pitchFamily="18" charset="0"/>
-                              </a:rPr>
-                              <m:t>′</m:t>
-                            </m:r>
-                          </m:sup>
-                        </m:sSup>
-                      </m:e>
-                    </m:d>
-                    <m:r>
-                      <a:rPr lang="en-US" sz="1200" i="1" dirty="0">
-                        <a:latin typeface="Cambria Math" panose="02040503050406030204" pitchFamily="18" charset="0"/>
-                      </a:rPr>
-                      <m:t>𝑠</m:t>
-                    </m:r>
-                    <m:r>
-                      <a:rPr lang="en-US" sz="1200" i="1" dirty="0">
-                        <a:latin typeface="Cambria Math" panose="02040503050406030204" pitchFamily="18" charset="0"/>
-                      </a:rPr>
-                      <m:t>, </m:t>
-                    </m:r>
-                    <m:r>
-                      <a:rPr lang="en-US" sz="1200" i="1" dirty="0">
-                        <a:latin typeface="Cambria Math" panose="02040503050406030204" pitchFamily="18" charset="0"/>
-                      </a:rPr>
-                      <m:t>𝑎</m:t>
-                    </m:r>
-                    <m:r>
-                      <a:rPr lang="en-US" sz="1200" i="1" dirty="0">
-                        <a:latin typeface="Cambria Math" panose="02040503050406030204" pitchFamily="18" charset="0"/>
-                      </a:rPr>
-                      <m:t>)</m:t>
-                    </m:r>
-                  </m:oMath>
-                </a14:m>
-                <a:r>
-                  <a:rPr lang="en-US" sz="1200" dirty="0"/>
-                  <a:t> 	probability of transition to state </a:t>
-                </a:r>
-                <a14:m>
-                  <m:oMath xmlns:m="http://schemas.openxmlformats.org/officeDocument/2006/math">
-                    <m:r>
-                      <a:rPr lang="en-US" sz="1200" i="1" dirty="0">
-                        <a:latin typeface="Cambria Math" panose="02040503050406030204" pitchFamily="18" charset="0"/>
-                      </a:rPr>
-                      <m:t>𝑠</m:t>
-                    </m:r>
-                    <m:r>
-                      <a:rPr lang="en-US" sz="1200" i="1" dirty="0">
-                        <a:latin typeface="Cambria Math" panose="02040503050406030204" pitchFamily="18" charset="0"/>
-                      </a:rPr>
-                      <m:t>′</m:t>
-                    </m:r>
-                  </m:oMath>
-                </a14:m>
-                <a:r>
-                  <a:rPr lang="en-US" sz="1200" dirty="0"/>
-                  <a:t> fom state </a:t>
-                </a:r>
-                <a14:m>
-                  <m:oMath xmlns:m="http://schemas.openxmlformats.org/officeDocument/2006/math">
-                    <m:r>
-                      <a:rPr lang="en-US" sz="1200" i="1" dirty="0">
-                        <a:latin typeface="Cambria Math" panose="02040503050406030204" pitchFamily="18" charset="0"/>
-                      </a:rPr>
-                      <m:t>𝑠</m:t>
-                    </m:r>
-                  </m:oMath>
-                </a14:m>
-                <a:r>
-                  <a:rPr lang="en-US" sz="1200" dirty="0"/>
-                  <a:t> taking action </a:t>
-                </a:r>
-                <a14:m>
-                  <m:oMath xmlns:m="http://schemas.openxmlformats.org/officeDocument/2006/math">
-                    <m:r>
-                      <a:rPr lang="en-US" sz="1200" i="1" dirty="0">
-                        <a:latin typeface="Cambria Math" panose="02040503050406030204" pitchFamily="18" charset="0"/>
-                      </a:rPr>
-                      <m:t>𝑎</m:t>
-                    </m:r>
-                  </m:oMath>
-                </a14:m>
-                <a:r>
-                  <a:rPr lang="en-US" sz="1200" dirty="0"/>
-                  <a:t>.</a:t>
-                </a:r>
-              </a:p>
-              <a:p>
-                <a:pPr marL="0" indent="0">
-                  <a:lnSpc>
-                    <a:spcPct val="100000"/>
-                  </a:lnSpc>
-                  <a:spcBef>
-                    <a:spcPts val="0"/>
-                  </a:spcBef>
-                  <a:buNone/>
-                </a:pPr>
-                <a14:m>
-                  <m:oMath xmlns:m="http://schemas.openxmlformats.org/officeDocument/2006/math">
-                    <m:r>
-                      <a:rPr lang="en-US" sz="1200" b="0" i="1" smtClean="0">
-                        <a:latin typeface="Cambria Math" panose="02040503050406030204" pitchFamily="18" charset="0"/>
-                      </a:rPr>
-                      <m:t>𝑟</m:t>
-                    </m:r>
-                    <m:r>
-                      <a:rPr lang="en-US" sz="1200" b="0" i="1" smtClean="0">
-                        <a:latin typeface="Cambria Math" panose="02040503050406030204" pitchFamily="18" charset="0"/>
-                      </a:rPr>
-                      <m:t>(</m:t>
-                    </m:r>
-                    <m:r>
-                      <a:rPr lang="en-US" sz="1200" b="0" i="1" smtClean="0">
-                        <a:latin typeface="Cambria Math" panose="02040503050406030204" pitchFamily="18" charset="0"/>
-                      </a:rPr>
-                      <m:t>𝑠</m:t>
-                    </m:r>
-                    <m:r>
-                      <a:rPr lang="en-US" sz="1200" b="0" i="1" smtClean="0">
-                        <a:latin typeface="Cambria Math" panose="02040503050406030204" pitchFamily="18" charset="0"/>
-                      </a:rPr>
-                      <m:t>,</m:t>
-                    </m:r>
-                    <m:r>
-                      <a:rPr lang="en-US" sz="1200" b="0" i="1" smtClean="0">
-                        <a:latin typeface="Cambria Math" panose="02040503050406030204" pitchFamily="18" charset="0"/>
-                      </a:rPr>
-                      <m:t>𝑎</m:t>
-                    </m:r>
-                    <m:r>
-                      <a:rPr lang="en-US" sz="1200" b="0" i="1" smtClean="0">
-                        <a:latin typeface="Cambria Math" panose="02040503050406030204" pitchFamily="18" charset="0"/>
-                      </a:rPr>
-                      <m:t>)</m:t>
-                    </m:r>
-                  </m:oMath>
-                </a14:m>
-                <a:r>
-                  <a:rPr lang="en-US" sz="1200" dirty="0"/>
-                  <a:t>	expected immediate reward from state </a:t>
-                </a:r>
-                <a14:m>
-                  <m:oMath xmlns:m="http://schemas.openxmlformats.org/officeDocument/2006/math">
-                    <m:r>
-                      <a:rPr lang="en-US" sz="1200" i="1" dirty="0">
-                        <a:latin typeface="Cambria Math" panose="02040503050406030204" pitchFamily="18" charset="0"/>
-                      </a:rPr>
-                      <m:t>𝑠</m:t>
-                    </m:r>
-                  </m:oMath>
-                </a14:m>
-                <a:r>
-                  <a:rPr lang="en-US" sz="1200" dirty="0"/>
-                  <a:t> after action </a:t>
-                </a:r>
-                <a14:m>
-                  <m:oMath xmlns:m="http://schemas.openxmlformats.org/officeDocument/2006/math">
-                    <m:r>
-                      <a:rPr lang="en-US" sz="1200" i="1" dirty="0">
-                        <a:latin typeface="Cambria Math" panose="02040503050406030204" pitchFamily="18" charset="0"/>
-                      </a:rPr>
-                      <m:t>𝑎</m:t>
-                    </m:r>
-                    <m:r>
-                      <a:rPr lang="en-US" sz="1200" b="0" i="1" dirty="0" smtClean="0">
-                        <a:latin typeface="Cambria Math" panose="02040503050406030204" pitchFamily="18" charset="0"/>
-                      </a:rPr>
-                      <m:t>.</m:t>
-                    </m:r>
-                  </m:oMath>
-                </a14:m>
-                <a:endParaRPr lang="en-US" sz="1200" b="0" dirty="0"/>
-              </a:p>
-              <a:p>
-                <a:pPr marL="0" indent="0">
-                  <a:lnSpc>
-                    <a:spcPct val="100000"/>
-                  </a:lnSpc>
-                  <a:spcBef>
-                    <a:spcPts val="0"/>
-                  </a:spcBef>
-                  <a:buNone/>
-                </a:pPr>
-                <a14:m>
-                  <m:oMath xmlns:m="http://schemas.openxmlformats.org/officeDocument/2006/math">
-                    <m:r>
-                      <a:rPr lang="en-US" sz="1200" i="1">
-                        <a:latin typeface="Cambria Math" panose="02040503050406030204" pitchFamily="18" charset="0"/>
-                      </a:rPr>
-                      <m:t>𝑟</m:t>
-                    </m:r>
-                    <m:r>
-                      <a:rPr lang="en-US" sz="1200" i="1">
-                        <a:latin typeface="Cambria Math" panose="02040503050406030204" pitchFamily="18" charset="0"/>
-                      </a:rPr>
-                      <m:t>(</m:t>
-                    </m:r>
-                    <m:r>
-                      <a:rPr lang="en-US" sz="1200" i="1">
-                        <a:latin typeface="Cambria Math" panose="02040503050406030204" pitchFamily="18" charset="0"/>
-                      </a:rPr>
-                      <m:t>𝑠</m:t>
-                    </m:r>
-                    <m:r>
-                      <a:rPr lang="en-US" sz="1200" i="1">
-                        <a:latin typeface="Cambria Math" panose="02040503050406030204" pitchFamily="18" charset="0"/>
-                      </a:rPr>
-                      <m:t>,</m:t>
-                    </m:r>
-                    <m:r>
-                      <a:rPr lang="en-US" sz="1200" i="1">
-                        <a:latin typeface="Cambria Math" panose="02040503050406030204" pitchFamily="18" charset="0"/>
-                      </a:rPr>
-                      <m:t>𝑎</m:t>
-                    </m:r>
-                    <m:r>
-                      <a:rPr lang="en-US" sz="1200" b="0" i="1" smtClean="0">
-                        <a:latin typeface="Cambria Math" panose="02040503050406030204" pitchFamily="18" charset="0"/>
-                      </a:rPr>
-                      <m:t>,</m:t>
-                    </m:r>
-                    <m:r>
-                      <a:rPr lang="en-US" sz="1200" b="0" i="1" smtClean="0">
-                        <a:latin typeface="Cambria Math" panose="02040503050406030204" pitchFamily="18" charset="0"/>
-                      </a:rPr>
-                      <m:t>𝑠</m:t>
-                    </m:r>
-                    <m:r>
-                      <a:rPr lang="en-US" sz="1200" b="0" i="1" smtClean="0">
-                        <a:latin typeface="Cambria Math" panose="02040503050406030204" pitchFamily="18" charset="0"/>
-                      </a:rPr>
-                      <m:t>′)</m:t>
-                    </m:r>
-                  </m:oMath>
-                </a14:m>
-                <a:r>
-                  <a:rPr lang="en-US" sz="1200" dirty="0"/>
-                  <a:t>	expected immediate reward from state </a:t>
-                </a:r>
-                <a14:m>
-                  <m:oMath xmlns:m="http://schemas.openxmlformats.org/officeDocument/2006/math">
-                    <m:r>
-                      <a:rPr lang="en-US" sz="1200" i="1" dirty="0">
-                        <a:latin typeface="Cambria Math" panose="02040503050406030204" pitchFamily="18" charset="0"/>
-                      </a:rPr>
-                      <m:t>𝑠</m:t>
-                    </m:r>
-                  </m:oMath>
-                </a14:m>
-                <a:r>
-                  <a:rPr lang="en-US" sz="1200" dirty="0"/>
-                  <a:t> to </a:t>
-                </a:r>
-                <a14:m>
-                  <m:oMath xmlns:m="http://schemas.openxmlformats.org/officeDocument/2006/math">
-                    <m:sSup>
-                      <m:sSupPr>
-                        <m:ctrlPr>
-                          <a:rPr lang="en-US" sz="1200" b="0" i="1" smtClean="0">
-                            <a:latin typeface="Cambria Math" panose="02040503050406030204" pitchFamily="18" charset="0"/>
-                          </a:rPr>
-                        </m:ctrlPr>
-                      </m:sSupPr>
-                      <m:e>
-                        <m:r>
-                          <a:rPr lang="en-US" sz="1200" b="0" i="1" smtClean="0">
-                            <a:latin typeface="Cambria Math" panose="02040503050406030204" pitchFamily="18" charset="0"/>
-                          </a:rPr>
-                          <m:t>𝑠</m:t>
-                        </m:r>
-                      </m:e>
-                      <m:sup>
-                        <m:r>
-                          <a:rPr lang="en-US" sz="1200" b="0" i="1" smtClean="0">
-                            <a:latin typeface="Cambria Math" panose="02040503050406030204" pitchFamily="18" charset="0"/>
-                          </a:rPr>
-                          <m:t>′</m:t>
-                        </m:r>
-                      </m:sup>
-                    </m:sSup>
-                  </m:oMath>
-                </a14:m>
-                <a:r>
-                  <a:rPr lang="en-US" sz="1200" dirty="0"/>
-                  <a:t> with action </a:t>
-                </a:r>
-                <a14:m>
-                  <m:oMath xmlns:m="http://schemas.openxmlformats.org/officeDocument/2006/math">
-                    <m:r>
-                      <a:rPr lang="en-US" sz="1200" i="1" dirty="0">
-                        <a:latin typeface="Cambria Math" panose="02040503050406030204" pitchFamily="18" charset="0"/>
-                      </a:rPr>
-                      <m:t>𝑎</m:t>
-                    </m:r>
-                    <m:r>
-                      <a:rPr lang="en-US" sz="1200" b="0" i="1" dirty="0" smtClean="0">
-                        <a:latin typeface="Cambria Math" panose="02040503050406030204" pitchFamily="18" charset="0"/>
-                      </a:rPr>
-                      <m:t>.</m:t>
-                    </m:r>
-                  </m:oMath>
-                </a14:m>
-                <a:endParaRPr lang="en-US" sz="1200" i="1" dirty="0">
-                  <a:latin typeface="Cambria Math" panose="02040503050406030204" pitchFamily="18" charset="0"/>
-                </a:endParaRPr>
-              </a:p>
-              <a:p>
-                <a:pPr marL="0" indent="0">
-                  <a:spcBef>
-                    <a:spcPts val="0"/>
-                  </a:spcBef>
-                  <a:buNone/>
-                </a:pPr>
-                <a:endParaRPr lang="en-US" sz="1200" i="1" dirty="0">
-                  <a:latin typeface="Cambria Math" panose="02040503050406030204" pitchFamily="18" charset="0"/>
-                </a:endParaRPr>
-              </a:p>
-              <a:p>
-                <a:pPr marL="0" indent="0">
-                  <a:spcBef>
-                    <a:spcPts val="0"/>
-                  </a:spcBef>
-                  <a:buNone/>
-                </a:pPr>
-                <a14:m>
-                  <m:oMath xmlns:m="http://schemas.openxmlformats.org/officeDocument/2006/math">
-                    <m:r>
-                      <a:rPr lang="en-US" sz="1200" i="1" dirty="0">
-                        <a:latin typeface="Cambria Math" panose="02040503050406030204" pitchFamily="18" charset="0"/>
-                      </a:rPr>
-                      <m:t>𝜋</m:t>
-                    </m:r>
-                    <m:r>
-                      <a:rPr lang="en-US" sz="1200" i="1" dirty="0">
-                        <a:latin typeface="Cambria Math" panose="02040503050406030204" pitchFamily="18" charset="0"/>
-                      </a:rPr>
-                      <m:t>(</m:t>
-                    </m:r>
-                    <m:r>
-                      <a:rPr lang="en-US" sz="1200" i="1" dirty="0" err="1">
-                        <a:latin typeface="Cambria Math" panose="02040503050406030204" pitchFamily="18" charset="0"/>
-                      </a:rPr>
-                      <m:t>𝑎</m:t>
-                    </m:r>
-                    <m:r>
-                      <a:rPr lang="en-US" sz="1200" i="1" dirty="0" err="1">
-                        <a:latin typeface="Cambria Math" panose="02040503050406030204" pitchFamily="18" charset="0"/>
-                      </a:rPr>
-                      <m:t>|</m:t>
-                    </m:r>
-                    <m:r>
-                      <a:rPr lang="en-US" sz="1200" i="1" dirty="0" err="1">
-                        <a:latin typeface="Cambria Math" panose="02040503050406030204" pitchFamily="18" charset="0"/>
-                      </a:rPr>
-                      <m:t>𝑠</m:t>
-                    </m:r>
-                    <m:r>
-                      <a:rPr lang="en-US" sz="1200" i="1" dirty="0">
-                        <a:latin typeface="Cambria Math" panose="02040503050406030204" pitchFamily="18" charset="0"/>
-                      </a:rPr>
-                      <m:t>)</m:t>
-                    </m:r>
-                  </m:oMath>
-                </a14:m>
-                <a:r>
-                  <a:rPr lang="en-US" sz="1200" dirty="0"/>
-                  <a:t>	probability of taking action </a:t>
-                </a:r>
-                <a14:m>
-                  <m:oMath xmlns:m="http://schemas.openxmlformats.org/officeDocument/2006/math">
-                    <m:r>
-                      <a:rPr lang="en-US" sz="1200" i="1" dirty="0">
-                        <a:latin typeface="Cambria Math" panose="02040503050406030204" pitchFamily="18" charset="0"/>
-                      </a:rPr>
-                      <m:t>𝑎</m:t>
-                    </m:r>
-                  </m:oMath>
-                </a14:m>
-                <a:r>
-                  <a:rPr lang="en-US" sz="1200" dirty="0"/>
-                  <a:t> in state </a:t>
-                </a:r>
-                <a14:m>
-                  <m:oMath xmlns:m="http://schemas.openxmlformats.org/officeDocument/2006/math">
-                    <m:r>
-                      <a:rPr lang="en-US" sz="1200" i="1" dirty="0">
-                        <a:latin typeface="Cambria Math" panose="02040503050406030204" pitchFamily="18" charset="0"/>
-                      </a:rPr>
-                      <m:t>𝑠</m:t>
-                    </m:r>
-                  </m:oMath>
-                </a14:m>
-                <a:r>
-                  <a:rPr lang="en-US" sz="1200" dirty="0"/>
-                  <a:t> under stochastic policy </a:t>
-                </a:r>
-                <a14:m>
-                  <m:oMath xmlns:m="http://schemas.openxmlformats.org/officeDocument/2006/math">
-                    <m:r>
-                      <a:rPr lang="en-US" sz="1200" i="1" dirty="0">
-                        <a:latin typeface="Cambria Math" panose="02040503050406030204" pitchFamily="18" charset="0"/>
-                      </a:rPr>
-                      <m:t>𝜋</m:t>
-                    </m:r>
-                  </m:oMath>
-                </a14:m>
-                <a:endParaRPr lang="en-US" sz="1200" dirty="0">
-                  <a:ea typeface="Cambria Math" panose="02040503050406030204" pitchFamily="18" charset="0"/>
-                </a:endParaRPr>
-              </a:p>
-              <a:p>
-                <a:pPr marL="0" indent="0">
-                  <a:spcBef>
-                    <a:spcPts val="0"/>
-                  </a:spcBef>
-                  <a:buNone/>
-                </a:pPr>
-                <a14:m>
-                  <m:oMath xmlns:m="http://schemas.openxmlformats.org/officeDocument/2006/math">
-                    <m:r>
-                      <a:rPr lang="en-US" sz="1200" i="1" dirty="0" smtClean="0">
-                        <a:latin typeface="Cambria Math" panose="02040503050406030204" pitchFamily="18" charset="0"/>
-                      </a:rPr>
-                      <m:t>𝜋</m:t>
-                    </m:r>
-                    <m:r>
-                      <a:rPr lang="en-US" sz="1200" i="1" dirty="0" smtClean="0">
-                        <a:latin typeface="Cambria Math" panose="02040503050406030204" pitchFamily="18" charset="0"/>
-                      </a:rPr>
-                      <m:t>(</m:t>
-                    </m:r>
-                    <m:r>
-                      <a:rPr lang="en-US" sz="1200" i="1" dirty="0" smtClean="0">
-                        <a:latin typeface="Cambria Math" panose="02040503050406030204" pitchFamily="18" charset="0"/>
-                      </a:rPr>
-                      <m:t>𝑠</m:t>
-                    </m:r>
-                    <m:r>
-                      <a:rPr lang="en-US" sz="1200" i="1" dirty="0" smtClean="0">
-                        <a:latin typeface="Cambria Math" panose="02040503050406030204" pitchFamily="18" charset="0"/>
-                      </a:rPr>
-                      <m:t>)</m:t>
-                    </m:r>
-                  </m:oMath>
-                </a14:m>
-                <a:r>
-                  <a:rPr lang="en-US" sz="1200" dirty="0"/>
-                  <a:t>	action taken in state </a:t>
-                </a:r>
-                <a14:m>
-                  <m:oMath xmlns:m="http://schemas.openxmlformats.org/officeDocument/2006/math">
-                    <m:r>
-                      <a:rPr lang="en-US" sz="1200" i="1" dirty="0" smtClean="0">
-                        <a:latin typeface="Cambria Math" panose="02040503050406030204" pitchFamily="18" charset="0"/>
-                      </a:rPr>
-                      <m:t>𝑠</m:t>
-                    </m:r>
-                  </m:oMath>
-                </a14:m>
-                <a:r>
-                  <a:rPr lang="en-US" sz="1200" dirty="0"/>
-                  <a:t> under deterministic policy </a:t>
-                </a:r>
-                <a14:m>
-                  <m:oMath xmlns:m="http://schemas.openxmlformats.org/officeDocument/2006/math">
-                    <m:r>
-                      <a:rPr lang="en-US" sz="1200" b="0" i="1" dirty="0" smtClean="0">
-                        <a:latin typeface="Cambria Math" panose="02040503050406030204" pitchFamily="18" charset="0"/>
-                      </a:rPr>
-                      <m:t>𝜋</m:t>
-                    </m:r>
-                  </m:oMath>
-                </a14:m>
-                <a:endParaRPr lang="en-US" sz="1200" dirty="0"/>
-              </a:p>
-            </p:txBody>
-          </p:sp>
-        </mc:Choice>
-        <mc:Fallback xmlns="">
-          <p:sp>
-            <p:nvSpPr>
-              <p:cNvPr id="11" name="Content Placeholder 2">
-                <a:extLst>
-                  <a:ext uri="{FF2B5EF4-FFF2-40B4-BE49-F238E27FC236}">
-                    <a16:creationId xmlns:a16="http://schemas.microsoft.com/office/drawing/2014/main" id="{6F45EA4F-65F9-5141-0B09-C395CF9CA7A0}"/>
-                  </a:ext>
-                </a:extLst>
-              </p:cNvPr>
-              <p:cNvSpPr txBox="1">
-                <a:spLocks noRot="1" noChangeAspect="1" noMove="1" noResize="1" noEditPoints="1" noAdjustHandles="1" noChangeArrowheads="1" noChangeShapeType="1" noTextEdit="1"/>
-              </p:cNvSpPr>
-              <p:nvPr/>
-            </p:nvSpPr>
-            <p:spPr>
-              <a:xfrm>
-                <a:off x="6267338" y="1124198"/>
-                <a:ext cx="5273179" cy="3693383"/>
-              </a:xfrm>
-              <a:prstGeom prst="rect">
-                <a:avLst/>
-              </a:prstGeom>
-              <a:blipFill>
-                <a:blip r:embed="rId4"/>
-                <a:stretch>
-                  <a:fillRect t="-328"/>
-                </a:stretch>
-              </a:blipFill>
-            </p:spPr>
-            <p:txBody>
-              <a:bodyPr/>
-              <a:lstStyle/>
-              <a:p>
-                <a:r>
-                  <a:rPr lang="en-US">
-                    <a:noFill/>
-                  </a:rPr>
-                  <a:t> </a:t>
-                </a:r>
-              </a:p>
-            </p:txBody>
-          </p:sp>
-        </mc:Fallback>
-      </mc:AlternateContent>
-      <mc:AlternateContent xmlns:mc="http://schemas.openxmlformats.org/markup-compatibility/2006" xmlns:a14="http://schemas.microsoft.com/office/drawing/2010/main">
-        <mc:Choice Requires="a14">
-          <p:sp>
-            <p:nvSpPr>
-              <p:cNvPr id="4" name="Content Placeholder 2">
-                <a:extLst>
-                  <a:ext uri="{FF2B5EF4-FFF2-40B4-BE49-F238E27FC236}">
-                    <a16:creationId xmlns:a16="http://schemas.microsoft.com/office/drawing/2014/main" id="{4C5E539A-F9A7-F959-ACD3-4ADE5900F587}"/>
-                  </a:ext>
-                </a:extLst>
-              </p:cNvPr>
-              <p:cNvSpPr txBox="1">
-                <a:spLocks/>
-              </p:cNvSpPr>
-              <p:nvPr/>
-            </p:nvSpPr>
-            <p:spPr>
-              <a:xfrm>
-                <a:off x="6267338" y="4947712"/>
-                <a:ext cx="5273179" cy="646331"/>
-              </a:xfrm>
-              <a:prstGeom prst="rect">
-                <a:avLst/>
-              </a:prstGeom>
-            </p:spPr>
-            <p:style>
-              <a:lnRef idx="2">
-                <a:schemeClr val="accent2"/>
-              </a:lnRef>
-              <a:fillRef idx="1">
-                <a:schemeClr val="lt1"/>
-              </a:fillRef>
-              <a:effectRef idx="0">
-                <a:schemeClr val="accent2"/>
-              </a:effectRef>
-              <a:fontRef idx="minor">
-                <a:schemeClr val="dk1"/>
-              </a:fontRef>
-            </p:style>
-            <p:txBody>
-              <a:bodyPr vert="horz" lIns="91440" tIns="45720" rIns="91440" bIns="45720" rtlCol="0">
-                <a:spAutoFit/>
-              </a:bodyPr>
-              <a:lstStyle>
-                <a:lvl1pPr marL="228600" indent="-228600" algn="l" defTabSz="914400" rtl="0" eaLnBrk="1" latinLnBrk="0" hangingPunct="1">
-                  <a:lnSpc>
-                    <a:spcPct val="90000"/>
-                  </a:lnSpc>
-                  <a:spcBef>
-                    <a:spcPts val="1000"/>
-                  </a:spcBef>
-                  <a:buFont typeface="Arial" panose="020B0604020202020204" pitchFamily="34" charset="0"/>
-                  <a:buChar char="•"/>
-                  <a:defRPr sz="2800" kern="1200">
-                    <a:solidFill>
-                      <a:schemeClr val="dk1"/>
-                    </a:solidFill>
-                    <a:latin typeface="+mn-lt"/>
-                    <a:ea typeface="+mn-ea"/>
-                    <a:cs typeface="+mn-cs"/>
-                  </a:defRPr>
-                </a:lvl1pPr>
-                <a:lvl2pPr marL="685800" indent="-228600" algn="l" defTabSz="914400" rtl="0" eaLnBrk="1" latinLnBrk="0" hangingPunct="1">
-                  <a:lnSpc>
-                    <a:spcPct val="90000"/>
-                  </a:lnSpc>
-                  <a:spcBef>
-                    <a:spcPts val="500"/>
-                  </a:spcBef>
-                  <a:buFont typeface="Arial" panose="020B0604020202020204" pitchFamily="34" charset="0"/>
-                  <a:buChar char="•"/>
-                  <a:defRPr sz="2400" kern="1200">
-                    <a:solidFill>
-                      <a:schemeClr val="dk1"/>
-                    </a:solidFill>
-                    <a:latin typeface="+mn-lt"/>
-                    <a:ea typeface="+mn-ea"/>
-                    <a:cs typeface="+mn-cs"/>
-                  </a:defRPr>
-                </a:lvl2pPr>
-                <a:lvl3pPr marL="1143000" indent="-228600" algn="l" defTabSz="914400" rtl="0" eaLnBrk="1" latinLnBrk="0" hangingPunct="1">
-                  <a:lnSpc>
-                    <a:spcPct val="90000"/>
-                  </a:lnSpc>
-                  <a:spcBef>
-                    <a:spcPts val="500"/>
-                  </a:spcBef>
-                  <a:buFont typeface="Arial" panose="020B0604020202020204" pitchFamily="34" charset="0"/>
-                  <a:buChar char="•"/>
-                  <a:defRPr sz="2000" kern="1200">
-                    <a:solidFill>
-                      <a:schemeClr val="dk1"/>
-                    </a:solidFill>
-                    <a:latin typeface="+mn-lt"/>
-                    <a:ea typeface="+mn-ea"/>
-                    <a:cs typeface="+mn-cs"/>
-                  </a:defRPr>
-                </a:lvl3pPr>
-                <a:lvl4pPr marL="1600200" indent="-228600" algn="l" defTabSz="914400" rtl="0" eaLnBrk="1" latinLnBrk="0" hangingPunct="1">
-                  <a:lnSpc>
-                    <a:spcPct val="90000"/>
-                  </a:lnSpc>
-                  <a:spcBef>
-                    <a:spcPts val="500"/>
-                  </a:spcBef>
-                  <a:buFont typeface="Arial" panose="020B0604020202020204" pitchFamily="34" charset="0"/>
-                  <a:buChar char="•"/>
-                  <a:defRPr sz="1800" kern="1200">
-                    <a:solidFill>
-                      <a:schemeClr val="dk1"/>
-                    </a:solidFill>
-                    <a:latin typeface="+mn-lt"/>
-                    <a:ea typeface="+mn-ea"/>
-                    <a:cs typeface="+mn-cs"/>
-                  </a:defRPr>
-                </a:lvl4pPr>
-                <a:lvl5pPr marL="2057400" indent="-228600" algn="l" defTabSz="914400" rtl="0" eaLnBrk="1" latinLnBrk="0" hangingPunct="1">
-                  <a:lnSpc>
-                    <a:spcPct val="90000"/>
-                  </a:lnSpc>
-                  <a:spcBef>
-                    <a:spcPts val="500"/>
-                  </a:spcBef>
-                  <a:buFont typeface="Arial" panose="020B0604020202020204" pitchFamily="34" charset="0"/>
-                  <a:buChar char="•"/>
-                  <a:defRPr sz="1800" kern="1200">
-                    <a:solidFill>
-                      <a:schemeClr val="dk1"/>
-                    </a:solidFill>
-                    <a:latin typeface="+mn-lt"/>
-                    <a:ea typeface="+mn-ea"/>
-                    <a:cs typeface="+mn-cs"/>
-                  </a:defRPr>
-                </a:lvl5pPr>
-                <a:lvl6pPr marL="2514600" indent="-228600" algn="l" defTabSz="914400" rtl="0" eaLnBrk="1" latinLnBrk="0" hangingPunct="1">
-                  <a:lnSpc>
-                    <a:spcPct val="90000"/>
-                  </a:lnSpc>
-                  <a:spcBef>
-                    <a:spcPts val="500"/>
-                  </a:spcBef>
-                  <a:buFont typeface="Arial" panose="020B0604020202020204" pitchFamily="34" charset="0"/>
-                  <a:buChar char="•"/>
-                  <a:defRPr sz="1800" kern="1200">
-                    <a:solidFill>
-                      <a:schemeClr val="dk1"/>
-                    </a:solidFill>
-                    <a:latin typeface="+mn-lt"/>
-                    <a:ea typeface="+mn-ea"/>
-                    <a:cs typeface="+mn-cs"/>
-                  </a:defRPr>
-                </a:lvl6pPr>
-                <a:lvl7pPr marL="2971800" indent="-228600" algn="l" defTabSz="914400" rtl="0" eaLnBrk="1" latinLnBrk="0" hangingPunct="1">
-                  <a:lnSpc>
-                    <a:spcPct val="90000"/>
-                  </a:lnSpc>
-                  <a:spcBef>
-                    <a:spcPts val="500"/>
-                  </a:spcBef>
-                  <a:buFont typeface="Arial" panose="020B0604020202020204" pitchFamily="34" charset="0"/>
-                  <a:buChar char="•"/>
-                  <a:defRPr sz="1800" kern="1200">
-                    <a:solidFill>
-                      <a:schemeClr val="dk1"/>
-                    </a:solidFill>
-                    <a:latin typeface="+mn-lt"/>
-                    <a:ea typeface="+mn-ea"/>
-                    <a:cs typeface="+mn-cs"/>
-                  </a:defRPr>
-                </a:lvl7pPr>
-                <a:lvl8pPr marL="3429000" indent="-228600" algn="l" defTabSz="914400" rtl="0" eaLnBrk="1" latinLnBrk="0" hangingPunct="1">
-                  <a:lnSpc>
-                    <a:spcPct val="90000"/>
-                  </a:lnSpc>
-                  <a:spcBef>
-                    <a:spcPts val="500"/>
-                  </a:spcBef>
-                  <a:buFont typeface="Arial" panose="020B0604020202020204" pitchFamily="34" charset="0"/>
-                  <a:buChar char="•"/>
-                  <a:defRPr sz="1800" kern="1200">
-                    <a:solidFill>
-                      <a:schemeClr val="dk1"/>
-                    </a:solidFill>
-                    <a:latin typeface="+mn-lt"/>
-                    <a:ea typeface="+mn-ea"/>
-                    <a:cs typeface="+mn-cs"/>
-                  </a:defRPr>
-                </a:lvl8pPr>
-                <a:lvl9pPr marL="3886200" indent="-228600" algn="l" defTabSz="914400" rtl="0" eaLnBrk="1" latinLnBrk="0" hangingPunct="1">
-                  <a:lnSpc>
-                    <a:spcPct val="90000"/>
-                  </a:lnSpc>
-                  <a:spcBef>
-                    <a:spcPts val="500"/>
-                  </a:spcBef>
-                  <a:buFont typeface="Arial" panose="020B0604020202020204" pitchFamily="34" charset="0"/>
-                  <a:buChar char="•"/>
-                  <a:defRPr sz="1800" kern="1200">
-                    <a:solidFill>
-                      <a:schemeClr val="dk1"/>
-                    </a:solidFill>
-                    <a:latin typeface="+mn-lt"/>
-                    <a:ea typeface="+mn-ea"/>
-                    <a:cs typeface="+mn-cs"/>
-                  </a:defRPr>
-                </a:lvl9pPr>
-              </a:lstStyle>
-              <a:p>
-                <a:pPr marL="0" indent="0">
-                  <a:lnSpc>
-                    <a:spcPct val="100000"/>
-                  </a:lnSpc>
-                  <a:spcBef>
-                    <a:spcPts val="0"/>
-                  </a:spcBef>
-                  <a:buFont typeface="Arial" panose="020B0604020202020204" pitchFamily="34" charset="0"/>
-                  <a:buNone/>
-                </a:pPr>
-                <a:r>
-                  <a:rPr lang="en-US" sz="1200" b="1" dirty="0"/>
-                  <a:t>Temporal Difference Learning</a:t>
-                </a:r>
-                <a:endParaRPr lang="en-US" sz="1200" i="1" dirty="0">
-                  <a:latin typeface="Cambria Math" panose="02040503050406030204" pitchFamily="18" charset="0"/>
-                </a:endParaRPr>
-              </a:p>
-              <a:p>
-                <a:pPr marL="0" indent="0">
-                  <a:lnSpc>
-                    <a:spcPct val="100000"/>
-                  </a:lnSpc>
-                  <a:spcBef>
-                    <a:spcPts val="0"/>
-                  </a:spcBef>
-                  <a:buNone/>
-                </a:pPr>
-                <a14:m>
-                  <m:oMath xmlns:m="http://schemas.openxmlformats.org/officeDocument/2006/math">
-                    <m:sSub>
-                      <m:sSubPr>
-                        <m:ctrlPr>
-                          <a:rPr lang="en-US" sz="1200" i="1" dirty="0">
-                            <a:solidFill>
-                              <a:schemeClr val="tx1"/>
-                            </a:solidFill>
-                            <a:latin typeface="Cambria Math" panose="02040503050406030204" pitchFamily="18" charset="0"/>
-                          </a:rPr>
-                        </m:ctrlPr>
-                      </m:sSubPr>
-                      <m:e>
-                        <m:r>
-                          <a:rPr lang="en-US" sz="1200" i="1" dirty="0">
-                            <a:solidFill>
-                              <a:schemeClr val="tx1"/>
-                            </a:solidFill>
-                            <a:latin typeface="Cambria Math" panose="02040503050406030204" pitchFamily="18" charset="0"/>
-                          </a:rPr>
-                          <m:t>𝑈</m:t>
-                        </m:r>
-                      </m:e>
-                      <m:sub>
-                        <m:r>
-                          <a:rPr lang="en-US" sz="1200" i="1" dirty="0">
-                            <a:solidFill>
-                              <a:schemeClr val="tx1"/>
-                            </a:solidFill>
-                            <a:latin typeface="Cambria Math" panose="02040503050406030204" pitchFamily="18" charset="0"/>
-                          </a:rPr>
-                          <m:t>𝑡</m:t>
-                        </m:r>
-                      </m:sub>
-                    </m:sSub>
-                  </m:oMath>
-                </a14:m>
-                <a:r>
-                  <a:rPr lang="en-US" sz="1200" dirty="0">
-                    <a:solidFill>
-                      <a:schemeClr val="tx1"/>
-                    </a:solidFill>
-                  </a:rPr>
-                  <a:t>	target for estimate at time</a:t>
-                </a:r>
-                <a14:m>
-                  <m:oMath xmlns:m="http://schemas.openxmlformats.org/officeDocument/2006/math">
-                    <m:r>
-                      <a:rPr lang="en-US" sz="1200" i="1" dirty="0">
-                        <a:solidFill>
-                          <a:schemeClr val="tx1"/>
-                        </a:solidFill>
-                        <a:latin typeface="Cambria Math" panose="02040503050406030204" pitchFamily="18" charset="0"/>
-                      </a:rPr>
-                      <m:t> </m:t>
-                    </m:r>
-                    <m:r>
-                      <a:rPr lang="en-US" sz="1200" i="1" dirty="0">
-                        <a:solidFill>
-                          <a:schemeClr val="tx1"/>
-                        </a:solidFill>
-                        <a:latin typeface="Cambria Math" panose="02040503050406030204" pitchFamily="18" charset="0"/>
-                      </a:rPr>
-                      <m:t>𝑡</m:t>
-                    </m:r>
-                  </m:oMath>
-                </a14:m>
-                <a:endParaRPr lang="en-US" sz="1200" dirty="0">
-                  <a:solidFill>
-                    <a:schemeClr val="tx1"/>
-                  </a:solidFill>
-                </a:endParaRPr>
-              </a:p>
-              <a:p>
-                <a:pPr marL="0" indent="0">
-                  <a:lnSpc>
-                    <a:spcPct val="100000"/>
-                  </a:lnSpc>
-                  <a:spcBef>
-                    <a:spcPts val="0"/>
-                  </a:spcBef>
-                  <a:buNone/>
-                </a:pPr>
-                <a14:m>
-                  <m:oMath xmlns:m="http://schemas.openxmlformats.org/officeDocument/2006/math">
-                    <m:sSub>
-                      <m:sSubPr>
-                        <m:ctrlPr>
-                          <a:rPr lang="en-US" sz="1200" i="1" dirty="0">
-                            <a:solidFill>
-                              <a:schemeClr val="tx1"/>
-                            </a:solidFill>
-                            <a:latin typeface="Cambria Math" panose="02040503050406030204" pitchFamily="18" charset="0"/>
-                          </a:rPr>
-                        </m:ctrlPr>
-                      </m:sSubPr>
-                      <m:e>
-                        <m:r>
-                          <a:rPr lang="en-US" sz="1200" b="0" i="1" dirty="0" smtClean="0">
-                            <a:solidFill>
-                              <a:schemeClr val="tx1"/>
-                            </a:solidFill>
-                            <a:latin typeface="Cambria Math" panose="02040503050406030204" pitchFamily="18" charset="0"/>
-                          </a:rPr>
-                          <m:t>𝛿</m:t>
-                        </m:r>
-                      </m:e>
-                      <m:sub>
-                        <m:r>
-                          <a:rPr lang="en-US" sz="1200" i="1" dirty="0">
-                            <a:solidFill>
-                              <a:schemeClr val="tx1"/>
-                            </a:solidFill>
-                            <a:latin typeface="Cambria Math" panose="02040503050406030204" pitchFamily="18" charset="0"/>
-                          </a:rPr>
-                          <m:t>𝑡</m:t>
-                        </m:r>
-                      </m:sub>
-                    </m:sSub>
-                  </m:oMath>
-                </a14:m>
-                <a:r>
-                  <a:rPr lang="en-US" sz="1200" dirty="0">
-                    <a:solidFill>
-                      <a:schemeClr val="tx1"/>
-                    </a:solidFill>
-                  </a:rPr>
-                  <a:t>	TD error</a:t>
-                </a:r>
-              </a:p>
-            </p:txBody>
-          </p:sp>
-        </mc:Choice>
-        <mc:Fallback xmlns="">
-          <p:sp>
-            <p:nvSpPr>
-              <p:cNvPr id="4" name="Content Placeholder 2">
-                <a:extLst>
-                  <a:ext uri="{FF2B5EF4-FFF2-40B4-BE49-F238E27FC236}">
-                    <a16:creationId xmlns:a16="http://schemas.microsoft.com/office/drawing/2014/main" id="{4C5E539A-F9A7-F959-ACD3-4ADE5900F587}"/>
-                  </a:ext>
-                </a:extLst>
-              </p:cNvPr>
-              <p:cNvSpPr txBox="1">
-                <a:spLocks noRot="1" noChangeAspect="1" noMove="1" noResize="1" noEditPoints="1" noAdjustHandles="1" noChangeArrowheads="1" noChangeShapeType="1" noTextEdit="1"/>
-              </p:cNvSpPr>
-              <p:nvPr/>
-            </p:nvSpPr>
-            <p:spPr>
-              <a:xfrm>
-                <a:off x="6267338" y="4947712"/>
-                <a:ext cx="5273179" cy="646331"/>
-              </a:xfrm>
-              <a:prstGeom prst="rect">
-                <a:avLst/>
-              </a:prstGeom>
-              <a:blipFill>
-                <a:blip r:embed="rId5"/>
-                <a:stretch>
-                  <a:fillRect b="-4587"/>
-                </a:stretch>
-              </a:blipFill>
-            </p:spPr>
-            <p:txBody>
-              <a:bodyPr/>
-              <a:lstStyle/>
-              <a:p>
-                <a:r>
-                  <a:rPr lang="en-US">
-                    <a:noFill/>
-                  </a:rPr>
-                  <a:t> </a:t>
-                </a:r>
-              </a:p>
-            </p:txBody>
-          </p:sp>
-        </mc:Fallback>
-      </mc:AlternateContent>
-    </p:spTree>
-    <p:extLst>
-      <p:ext uri="{BB962C8B-B14F-4D97-AF65-F5344CB8AC3E}">
-        <p14:creationId xmlns:p14="http://schemas.microsoft.com/office/powerpoint/2010/main" val="920694018"/>
-      </p:ext>
-    </p:extLst>
-  </p:cSld>
-  <p:clrMapOvr>
-    <a:masterClrMapping/>
-  </p:clrMapOvr>
-</p:sld>
-</file>
-
-<file path=ppt/slides/slide30.xml><?xml version="1.0" encoding="utf-8"?>
+<file path=ppt/slides/slide31.xml><?xml version="1.0" encoding="utf-8"?>
 <p:sld xmlns:a="http://schemas.openxmlformats.org/drawingml/2006/main" xmlns:r="http://schemas.openxmlformats.org/officeDocument/2006/relationships" xmlns:p="http://schemas.openxmlformats.org/presentationml/2006/main">
   <p:cSld>
     <p:spTree>
@@ -32309,7 +33186,7 @@
 </p:sld>
 </file>
 
-<file path=ppt/slides/slide31.xml><?xml version="1.0" encoding="utf-8"?>
+<file path=ppt/slides/slide32.xml><?xml version="1.0" encoding="utf-8"?>
 <p:sld xmlns:a="http://schemas.openxmlformats.org/drawingml/2006/main" xmlns:r="http://schemas.openxmlformats.org/officeDocument/2006/relationships" xmlns:p="http://schemas.openxmlformats.org/presentationml/2006/main">
   <p:cSld>
     <p:spTree>
@@ -34158,7 +35035,7 @@
 </p:sld>
 </file>
 
-<file path=ppt/slides/slide32.xml><?xml version="1.0" encoding="utf-8"?>
+<file path=ppt/slides/slide33.xml><?xml version="1.0" encoding="utf-8"?>
 <p:sld xmlns:a="http://schemas.openxmlformats.org/drawingml/2006/main" xmlns:r="http://schemas.openxmlformats.org/officeDocument/2006/relationships" xmlns:p="http://schemas.openxmlformats.org/presentationml/2006/main">
   <p:cSld>
     <p:spTree>
@@ -34203,8 +35080,8 @@
           </a:p>
         </p:txBody>
       </p:sp>
-      <mc:AlternateContent xmlns:mc="http://schemas.openxmlformats.org/markup-compatibility/2006">
-        <mc:Choice xmlns:a14="http://schemas.microsoft.com/office/drawing/2010/main" Requires="a14">
+      <mc:AlternateContent xmlns:mc="http://schemas.openxmlformats.org/markup-compatibility/2006" xmlns:a14="http://schemas.microsoft.com/office/drawing/2010/main">
+        <mc:Choice Requires="a14">
           <p:sp>
             <p:nvSpPr>
               <p:cNvPr id="3" name="Content Placeholder 2">
@@ -34370,7 +35247,7 @@
                     <m:sSub>
                       <m:sSubPr>
                         <m:ctrlPr>
-                          <a:rPr lang="en-US" b="0" i="0" smtClean="0">
+                          <a:rPr lang="en-US" b="0" i="1" smtClean="0">
                             <a:latin typeface="Cambria Math" panose="02040503050406030204" pitchFamily="18" charset="0"/>
                           </a:rPr>
                         </m:ctrlPr>
@@ -34407,7 +35284,7 @@
                     <m:sSub>
                       <m:sSubPr>
                         <m:ctrlPr>
-                          <a:rPr lang="en-US" b="0" i="0" smtClean="0">
+                          <a:rPr lang="en-US" b="0" i="1" smtClean="0">
                             <a:latin typeface="Cambria Math" panose="02040503050406030204" pitchFamily="18" charset="0"/>
                           </a:rPr>
                         </m:ctrlPr>
@@ -34762,7 +35639,7 @@
             </p:txBody>
           </p:sp>
         </mc:Choice>
-        <mc:Fallback>
+        <mc:Fallback xmlns="">
           <p:sp>
             <p:nvSpPr>
               <p:cNvPr id="3" name="Content Placeholder 2">
@@ -34866,7 +35743,7 @@
 </p:sld>
 </file>
 
-<file path=ppt/slides/slide33.xml><?xml version="1.0" encoding="utf-8"?>
+<file path=ppt/slides/slide34.xml><?xml version="1.0" encoding="utf-8"?>
 <p:sld xmlns:a="http://schemas.openxmlformats.org/drawingml/2006/main" xmlns:r="http://schemas.openxmlformats.org/officeDocument/2006/relationships" xmlns:p="http://schemas.openxmlformats.org/presentationml/2006/main">
   <p:cSld>
     <p:spTree>
@@ -35105,7 +35982,7 @@
 </p:sld>
 </file>
 
-<file path=ppt/slides/slide34.xml><?xml version="1.0" encoding="utf-8"?>
+<file path=ppt/slides/slide35.xml><?xml version="1.0" encoding="utf-8"?>
 <p:sld xmlns:a="http://schemas.openxmlformats.org/drawingml/2006/main" xmlns:r="http://schemas.openxmlformats.org/officeDocument/2006/relationships" xmlns:p="http://schemas.openxmlformats.org/presentationml/2006/main">
   <p:cSld>
     <p:spTree>
@@ -35839,7 +36716,7 @@
 </p:sld>
 </file>
 
-<file path=ppt/slides/slide35.xml><?xml version="1.0" encoding="utf-8"?>
+<file path=ppt/slides/slide36.xml><?xml version="1.0" encoding="utf-8"?>
 <p:sld xmlns:a="http://schemas.openxmlformats.org/drawingml/2006/main" xmlns:r="http://schemas.openxmlformats.org/officeDocument/2006/relationships" xmlns:p="http://schemas.openxmlformats.org/presentationml/2006/main">
   <p:cSld>
     <p:bg>
@@ -38043,6 +38920,172 @@
           <p:cNvPr id="2" name="Title 1">
             <a:extLst>
               <a:ext uri="{FF2B5EF4-FFF2-40B4-BE49-F238E27FC236}">
+                <a16:creationId xmlns:a16="http://schemas.microsoft.com/office/drawing/2014/main" id="{AEF8D89A-90D3-B6F7-65DB-547701E1532C}"/>
+              </a:ext>
+            </a:extLst>
+          </p:cNvPr>
+          <p:cNvSpPr>
+            <a:spLocks noGrp="1"/>
+          </p:cNvSpPr>
+          <p:nvPr>
+            <p:ph type="title"/>
+          </p:nvPr>
+        </p:nvSpPr>
+        <p:spPr/>
+        <p:txBody>
+          <a:bodyPr/>
+          <a:lstStyle/>
+          <a:p>
+            <a:r>
+              <a:rPr lang="en-US" dirty="0"/>
+              <a:t>Goals of Generalization in RL</a:t>
+            </a:r>
+          </a:p>
+        </p:txBody>
+      </p:sp>
+      <p:sp>
+        <p:nvSpPr>
+          <p:cNvPr id="3" name="Content Placeholder 2">
+            <a:extLst>
+              <a:ext uri="{FF2B5EF4-FFF2-40B4-BE49-F238E27FC236}">
+                <a16:creationId xmlns:a16="http://schemas.microsoft.com/office/drawing/2014/main" id="{82574287-6A85-1532-501D-5E35BC918CD7}"/>
+              </a:ext>
+            </a:extLst>
+          </p:cNvPr>
+          <p:cNvSpPr>
+            <a:spLocks noGrp="1"/>
+          </p:cNvSpPr>
+          <p:nvPr>
+            <p:ph idx="1"/>
+          </p:nvPr>
+        </p:nvSpPr>
+        <p:spPr/>
+        <p:txBody>
+          <a:bodyPr>
+            <a:normAutofit/>
+          </a:bodyPr>
+          <a:lstStyle/>
+          <a:p>
+            <a:r>
+              <a:rPr lang="en-US" dirty="0"/>
+              <a:t>In ML: </a:t>
+            </a:r>
+            <a:r>
+              <a:rPr lang="en-US" b="1" dirty="0"/>
+              <a:t>Can we make predictions for new data?</a:t>
+            </a:r>
+            <a:br>
+              <a:rPr lang="en-US" b="1" dirty="0"/>
+            </a:br>
+            <a:r>
+              <a:rPr lang="en-US" i="1" dirty="0"/>
+              <a:t>“Generalization in machine learning is a model's ability to accurately predict outcomes or perform tasks on </a:t>
+            </a:r>
+            <a:r>
+              <a:rPr lang="en-US" b="1" i="1" dirty="0"/>
+              <a:t>new, unseen data</a:t>
+            </a:r>
+            <a:r>
+              <a:rPr lang="en-US" i="1" dirty="0"/>
+              <a:t>, having learned patterns only from a training dataset.”</a:t>
+            </a:r>
+          </a:p>
+          <a:p>
+            <a:pPr marL="514350" indent="-514350">
+              <a:buFont typeface="+mj-lt"/>
+              <a:buAutoNum type="alphaLcParenR"/>
+            </a:pPr>
+            <a:endParaRPr lang="en-US" dirty="0"/>
+          </a:p>
+          <a:p>
+            <a:r>
+              <a:rPr lang="en-US" dirty="0"/>
+              <a:t>In RL we consider different forms of generalization:</a:t>
+            </a:r>
+          </a:p>
+          <a:p>
+            <a:pPr marL="971550" lvl="1" indent="-514350">
+              <a:buFont typeface="+mj-lt"/>
+              <a:buAutoNum type="alphaLcParenR"/>
+            </a:pPr>
+            <a:r>
+              <a:rPr lang="en-US" b="1" dirty="0"/>
+              <a:t>How fast does the algorithm learn? </a:t>
+            </a:r>
+            <a:r>
+              <a:rPr lang="en-US" dirty="0"/>
+              <a:t>Does it perform well in an environment after limited data is gathered? (= </a:t>
+            </a:r>
+            <a:r>
+              <a:rPr lang="en-US" b="1" dirty="0"/>
+              <a:t>sample efficiency</a:t>
+            </a:r>
+            <a:r>
+              <a:rPr lang="en-US" dirty="0"/>
+              <a:t>)</a:t>
+            </a:r>
+          </a:p>
+          <a:p>
+            <a:pPr marL="971550" lvl="1" indent="-514350">
+              <a:buFont typeface="+mj-lt"/>
+              <a:buAutoNum type="alphaLcParenR"/>
+            </a:pPr>
+            <a:endParaRPr lang="en-US" dirty="0"/>
+          </a:p>
+          <a:p>
+            <a:pPr marL="971550" lvl="1" indent="-514350">
+              <a:buFont typeface="+mj-lt"/>
+              <a:buAutoNum type="alphaLcParenR"/>
+            </a:pPr>
+            <a:r>
+              <a:rPr lang="en-US" b="1" dirty="0"/>
+              <a:t>Can the algorithm adapt to changes in the environment? </a:t>
+            </a:r>
+            <a:r>
+              <a:rPr lang="en-US" dirty="0"/>
+              <a:t>Does it generalize for new, but related environment? (~ transfer learning) </a:t>
+            </a:r>
+          </a:p>
+          <a:p>
+            <a:endParaRPr lang="en-US" dirty="0"/>
+          </a:p>
+        </p:txBody>
+      </p:sp>
+    </p:spTree>
+    <p:extLst>
+      <p:ext uri="{BB962C8B-B14F-4D97-AF65-F5344CB8AC3E}">
+        <p14:creationId xmlns:p14="http://schemas.microsoft.com/office/powerpoint/2010/main" val="2958231934"/>
+      </p:ext>
+    </p:extLst>
+  </p:cSld>
+  <p:clrMapOvr>
+    <a:masterClrMapping/>
+  </p:clrMapOvr>
+</p:sld>
+</file>
+
+<file path=ppt/slides/slide7.xml><?xml version="1.0" encoding="utf-8"?>
+<p:sld xmlns:a="http://schemas.openxmlformats.org/drawingml/2006/main" xmlns:r="http://schemas.openxmlformats.org/officeDocument/2006/relationships" xmlns:p="http://schemas.openxmlformats.org/presentationml/2006/main">
+  <p:cSld>
+    <p:spTree>
+      <p:nvGrpSpPr>
+        <p:cNvPr id="1" name=""/>
+        <p:cNvGrpSpPr/>
+        <p:nvPr/>
+      </p:nvGrpSpPr>
+      <p:grpSpPr>
+        <a:xfrm>
+          <a:off x="0" y="0"/>
+          <a:ext cx="0" cy="0"/>
+          <a:chOff x="0" y="0"/>
+          <a:chExt cx="0" cy="0"/>
+        </a:xfrm>
+      </p:grpSpPr>
+      <p:sp>
+        <p:nvSpPr>
+          <p:cNvPr id="2" name="Title 1">
+            <a:extLst>
+              <a:ext uri="{FF2B5EF4-FFF2-40B4-BE49-F238E27FC236}">
                 <a16:creationId xmlns:a16="http://schemas.microsoft.com/office/drawing/2014/main" id="{52CDDD93-C91F-3B07-9010-4D03C66DCED2}"/>
               </a:ext>
             </a:extLst>
@@ -39225,7 +40268,7 @@
 </p:sld>
 </file>
 
-<file path=ppt/slides/slide7.xml><?xml version="1.0" encoding="utf-8"?>
+<file path=ppt/slides/slide8.xml><?xml version="1.0" encoding="utf-8"?>
 <p:sld xmlns:a="http://schemas.openxmlformats.org/drawingml/2006/main" xmlns:r="http://schemas.openxmlformats.org/officeDocument/2006/relationships" xmlns:p="http://schemas.openxmlformats.org/presentationml/2006/main">
   <p:cSld>
     <p:spTree>
@@ -40949,7 +41992,7 @@
 </p:sld>
 </file>
 
-<file path=ppt/slides/slide8.xml><?xml version="1.0" encoding="utf-8"?>
+<file path=ppt/slides/slide9.xml><?xml version="1.0" encoding="utf-8"?>
 <p:sld xmlns:a="http://schemas.openxmlformats.org/drawingml/2006/main" xmlns:r="http://schemas.openxmlformats.org/officeDocument/2006/relationships" xmlns:p="http://schemas.openxmlformats.org/presentationml/2006/main">
   <p:cSld>
     <p:spTree>
@@ -41539,89 +42582,6 @@
       </p:par>
     </p:tnLst>
   </p:timing>
-</p:sld>
-</file>
-
-<file path=ppt/slides/slide9.xml><?xml version="1.0" encoding="utf-8"?>
-<p:sld xmlns:a="http://schemas.openxmlformats.org/drawingml/2006/main" xmlns:r="http://schemas.openxmlformats.org/officeDocument/2006/relationships" xmlns:p="http://schemas.openxmlformats.org/presentationml/2006/main">
-  <p:cSld>
-    <p:spTree>
-      <p:nvGrpSpPr>
-        <p:cNvPr id="1" name=""/>
-        <p:cNvGrpSpPr/>
-        <p:nvPr/>
-      </p:nvGrpSpPr>
-      <p:grpSpPr>
-        <a:xfrm>
-          <a:off x="0" y="0"/>
-          <a:ext cx="0" cy="0"/>
-          <a:chOff x="0" y="0"/>
-          <a:chExt cx="0" cy="0"/>
-        </a:xfrm>
-      </p:grpSpPr>
-      <p:sp>
-        <p:nvSpPr>
-          <p:cNvPr id="4" name="Title 3">
-            <a:extLst>
-              <a:ext uri="{FF2B5EF4-FFF2-40B4-BE49-F238E27FC236}">
-                <a16:creationId xmlns:a16="http://schemas.microsoft.com/office/drawing/2014/main" id="{A4F2A783-50BF-C7E8-BE3C-FC01578518D2}"/>
-              </a:ext>
-            </a:extLst>
-          </p:cNvPr>
-          <p:cNvSpPr>
-            <a:spLocks noGrp="1"/>
-          </p:cNvSpPr>
-          <p:nvPr>
-            <p:ph type="title"/>
-          </p:nvPr>
-        </p:nvSpPr>
-        <p:spPr/>
-        <p:txBody>
-          <a:bodyPr/>
-          <a:lstStyle/>
-          <a:p>
-            <a:r>
-              <a:rPr lang="en-US" dirty="0"/>
-              <a:t>Gradient Methods for Prediction</a:t>
-            </a:r>
-          </a:p>
-        </p:txBody>
-      </p:sp>
-      <p:sp>
-        <p:nvSpPr>
-          <p:cNvPr id="5" name="Text Placeholder 4">
-            <a:extLst>
-              <a:ext uri="{FF2B5EF4-FFF2-40B4-BE49-F238E27FC236}">
-                <a16:creationId xmlns:a16="http://schemas.microsoft.com/office/drawing/2014/main" id="{A7EF6370-86D1-9264-5816-F21882AD1F8B}"/>
-              </a:ext>
-            </a:extLst>
-          </p:cNvPr>
-          <p:cNvSpPr>
-            <a:spLocks noGrp="1"/>
-          </p:cNvSpPr>
-          <p:nvPr>
-            <p:ph type="body" idx="1"/>
-          </p:nvPr>
-        </p:nvSpPr>
-        <p:spPr/>
-        <p:txBody>
-          <a:bodyPr/>
-          <a:lstStyle/>
-          <a:p>
-            <a:endParaRPr lang="en-US" dirty="0"/>
-          </a:p>
-        </p:txBody>
-      </p:sp>
-    </p:spTree>
-    <p:extLst>
-      <p:ext uri="{BB962C8B-B14F-4D97-AF65-F5344CB8AC3E}">
-        <p14:creationId xmlns:p14="http://schemas.microsoft.com/office/powerpoint/2010/main" val="3955007695"/>
-      </p:ext>
-    </p:extLst>
-  </p:cSld>
-  <p:clrMapOvr>
-    <a:masterClrMapping/>
-  </p:clrMapOvr>
 </p:sld>
 </file>
 

--- a/slides/Lecture_Chapter09.pptx
+++ b/slides/Lecture_Chapter09.pptx
@@ -16171,8 +16171,8 @@
           </a:p>
         </p:txBody>
       </p:sp>
-      <mc:AlternateContent xmlns:mc="http://schemas.openxmlformats.org/markup-compatibility/2006" xmlns:a14="http://schemas.microsoft.com/office/drawing/2010/main">
-        <mc:Choice Requires="a14">
+      <mc:AlternateContent xmlns:mc="http://schemas.openxmlformats.org/markup-compatibility/2006">
+        <mc:Choice xmlns:a14="http://schemas.microsoft.com/office/drawing/2010/main" Requires="a14">
           <p:sp>
             <p:nvSpPr>
               <p:cNvPr id="3" name="Content Placeholder 2">
@@ -16278,7 +16278,13 @@
                       <a:rPr lang="en-US" b="0" i="1" smtClean="0">
                         <a:latin typeface="Cambria Math" panose="02040503050406030204" pitchFamily="18" charset="0"/>
                       </a:rPr>
-                      <m:t>=(</m:t>
+                      <m:t>=</m:t>
+                    </m:r>
+                    <m:r>
+                      <a:rPr lang="en-US" b="0" i="1" smtClean="0">
+                        <a:latin typeface="Cambria Math" panose="02040503050406030204" pitchFamily="18" charset="0"/>
+                      </a:rPr>
+                      <m:t>(</m:t>
                     </m:r>
                     <m:sSub>
                       <m:sSubPr>
@@ -16415,7 +16421,7 @@
             </p:txBody>
           </p:sp>
         </mc:Choice>
-        <mc:Fallback xmlns="">
+        <mc:Fallback>
           <p:sp>
             <p:nvSpPr>
               <p:cNvPr id="3" name="Content Placeholder 2">
@@ -16923,118 +16929,240 @@
           </a:p>
         </p:txBody>
       </p:sp>
-      <p:sp>
-        <p:nvSpPr>
-          <p:cNvPr id="3" name="Content Placeholder 2">
-            <a:extLst>
-              <a:ext uri="{FF2B5EF4-FFF2-40B4-BE49-F238E27FC236}">
-                <a16:creationId xmlns:a16="http://schemas.microsoft.com/office/drawing/2014/main" id="{CA3F8D59-91BD-8D3F-17EC-9451FBDC8E5C}"/>
-              </a:ext>
-            </a:extLst>
-          </p:cNvPr>
-          <p:cNvSpPr>
-            <a:spLocks noGrp="1"/>
-          </p:cNvSpPr>
-          <p:nvPr>
-            <p:ph idx="1"/>
-          </p:nvPr>
-        </p:nvSpPr>
-        <p:spPr/>
-        <p:txBody>
-          <a:bodyPr>
-            <a:normAutofit fontScale="92500" lnSpcReduction="20000"/>
-          </a:bodyPr>
-          <a:lstStyle/>
-          <a:p>
-            <a:r>
-              <a:rPr lang="en-US" b="1" dirty="0"/>
-              <a:t>Idea</a:t>
-            </a:r>
-            <a:r>
-              <a:rPr lang="en-US" dirty="0"/>
-              <a:t>: Use a more flexible, non-linear transform of the state description to construct state features.</a:t>
-            </a:r>
-            <a:br>
-              <a:rPr lang="en-US" dirty="0"/>
-            </a:br>
-            <a:endParaRPr lang="en-US" dirty="0"/>
-          </a:p>
-          <a:p>
-            <a:r>
-              <a:rPr lang="en-US" dirty="0"/>
-              <a:t>We will focus on the most popular feature construction methods that work well for RL:</a:t>
-            </a:r>
-          </a:p>
-          <a:p>
-            <a:pPr lvl="1"/>
-            <a:r>
-              <a:rPr lang="en-US" b="1" dirty="0"/>
-              <a:t>Fourier Basis:</a:t>
-            </a:r>
-            <a:r>
-              <a:rPr lang="en-US" dirty="0"/>
-              <a:t> strong baseline; very efficient; strong guarantees. </a:t>
-            </a:r>
-          </a:p>
-          <a:p>
-            <a:pPr lvl="1"/>
-            <a:r>
-              <a:rPr lang="en-US" b="1" dirty="0"/>
-              <a:t>Tile Coding</a:t>
-            </a:r>
-            <a:r>
-              <a:rPr lang="en-US" dirty="0"/>
-              <a:t>: coarse coding using tiles, local generalization, very computationally efficient.</a:t>
-            </a:r>
-          </a:p>
-          <a:p>
-            <a:pPr marL="457200" lvl="1" indent="0">
-              <a:buNone/>
-            </a:pPr>
-            <a:endParaRPr lang="en-US" dirty="0"/>
-          </a:p>
-          <a:p>
-            <a:r>
-              <a:rPr lang="en-US" dirty="0"/>
-              <a:t>Other methods</a:t>
-            </a:r>
-          </a:p>
-          <a:p>
-            <a:pPr lvl="1"/>
-            <a:r>
-              <a:rPr lang="en-US" dirty="0"/>
-              <a:t>One-Hot Features: exact representation; no generalization (equivalent to tabular RL)</a:t>
-            </a:r>
-          </a:p>
-          <a:p>
-            <a:pPr lvl="1"/>
-            <a:r>
-              <a:rPr lang="en-US" dirty="0"/>
-              <a:t>Coarse Coding using spherical reception fields</a:t>
-            </a:r>
-          </a:p>
-          <a:p>
-            <a:pPr lvl="1"/>
-            <a:r>
-              <a:rPr lang="en-US" dirty="0"/>
-              <a:t>Polynomials Features: smooth global generalization.</a:t>
-            </a:r>
-          </a:p>
-          <a:p>
-            <a:pPr lvl="1"/>
-            <a:r>
-              <a:rPr lang="en-US" dirty="0"/>
-              <a:t>Radial Basis Functions: smooth local generalization</a:t>
-            </a:r>
-          </a:p>
-          <a:p>
-            <a:pPr marL="0" indent="0">
-              <a:buNone/>
-            </a:pPr>
-            <a:endParaRPr lang="en-US" dirty="0"/>
-          </a:p>
-        </p:txBody>
-      </p:sp>
+      <mc:AlternateContent xmlns:mc="http://schemas.openxmlformats.org/markup-compatibility/2006">
+        <mc:Choice xmlns:a14="http://schemas.microsoft.com/office/drawing/2010/main" Requires="a14">
+          <p:sp>
+            <p:nvSpPr>
+              <p:cNvPr id="3" name="Content Placeholder 2">
+                <a:extLst>
+                  <a:ext uri="{FF2B5EF4-FFF2-40B4-BE49-F238E27FC236}">
+                    <a16:creationId xmlns:a16="http://schemas.microsoft.com/office/drawing/2014/main" id="{CA3F8D59-91BD-8D3F-17EC-9451FBDC8E5C}"/>
+                  </a:ext>
+                </a:extLst>
+              </p:cNvPr>
+              <p:cNvSpPr>
+                <a:spLocks noGrp="1"/>
+              </p:cNvSpPr>
+              <p:nvPr>
+                <p:ph idx="1"/>
+              </p:nvPr>
+            </p:nvSpPr>
+            <p:spPr/>
+            <p:txBody>
+              <a:bodyPr>
+                <a:normAutofit fontScale="77500" lnSpcReduction="20000"/>
+              </a:bodyPr>
+              <a:lstStyle/>
+              <a:p>
+                <a:r>
+                  <a:rPr lang="en-US" b="1" dirty="0"/>
+                  <a:t>Idea</a:t>
+                </a:r>
+                <a:r>
+                  <a:rPr lang="en-US" dirty="0"/>
+                  <a:t>: Use a more flexible, non-linear transform </a:t>
+                </a:r>
+                <a14:m>
+                  <m:oMath xmlns:m="http://schemas.openxmlformats.org/officeDocument/2006/math">
+                    <m:r>
+                      <a:rPr lang="en-US" b="0" i="1" smtClean="0">
+                        <a:latin typeface="Cambria Math" panose="02040503050406030204" pitchFamily="18" charset="0"/>
+                      </a:rPr>
+                      <m:t>𝜙</m:t>
+                    </m:r>
+                  </m:oMath>
+                </a14:m>
+                <a:r>
+                  <a:rPr lang="en-US" dirty="0"/>
+                  <a:t> of the state description to construct state features.</a:t>
+                </a:r>
+                <a:br>
+                  <a:rPr lang="en-US" dirty="0"/>
+                </a:br>
+                <a:br>
+                  <a:rPr lang="en-US" dirty="0"/>
+                </a:br>
+                <a14:m>
+                  <m:oMath xmlns:m="http://schemas.openxmlformats.org/officeDocument/2006/math">
+                    <m:r>
+                      <a:rPr lang="en-US" b="1" i="1" smtClean="0">
+                        <a:latin typeface="Cambria Math" panose="02040503050406030204" pitchFamily="18" charset="0"/>
+                      </a:rPr>
+                      <m:t>𝒙</m:t>
+                    </m:r>
+                    <m:d>
+                      <m:dPr>
+                        <m:ctrlPr>
+                          <a:rPr lang="en-US" b="0" i="1" smtClean="0">
+                            <a:latin typeface="Cambria Math" panose="02040503050406030204" pitchFamily="18" charset="0"/>
+                          </a:rPr>
+                        </m:ctrlPr>
+                      </m:dPr>
+                      <m:e>
+                        <m:r>
+                          <a:rPr lang="en-US" b="0" i="1" smtClean="0">
+                            <a:latin typeface="Cambria Math" panose="02040503050406030204" pitchFamily="18" charset="0"/>
+                          </a:rPr>
+                          <m:t>𝑠</m:t>
+                        </m:r>
+                      </m:e>
+                    </m:d>
+                    <m:r>
+                      <a:rPr lang="en-US" b="0" i="1" smtClean="0">
+                        <a:latin typeface="Cambria Math" panose="02040503050406030204" pitchFamily="18" charset="0"/>
+                      </a:rPr>
+                      <m:t>=</m:t>
+                    </m:r>
+                    <m:r>
+                      <a:rPr lang="en-US" b="0" i="1" smtClean="0">
+                        <a:latin typeface="Cambria Math" panose="02040503050406030204" pitchFamily="18" charset="0"/>
+                      </a:rPr>
+                      <m:t>𝜙</m:t>
+                    </m:r>
+                    <m:d>
+                      <m:dPr>
+                        <m:ctrlPr>
+                          <a:rPr lang="en-US" b="0" i="1" smtClean="0">
+                            <a:latin typeface="Cambria Math" panose="02040503050406030204" pitchFamily="18" charset="0"/>
+                          </a:rPr>
+                        </m:ctrlPr>
+                      </m:dPr>
+                      <m:e>
+                        <m:r>
+                          <a:rPr lang="en-US" b="0" i="1" smtClean="0">
+                            <a:latin typeface="Cambria Math" panose="02040503050406030204" pitchFamily="18" charset="0"/>
+                          </a:rPr>
+                          <m:t>𝑠</m:t>
+                        </m:r>
+                      </m:e>
+                    </m:d>
+                  </m:oMath>
+                </a14:m>
+                <a:br>
+                  <a:rPr lang="en-US" dirty="0"/>
+                </a:br>
+                <a:br>
+                  <a:rPr lang="en-US" dirty="0"/>
+                </a:br>
+                <a:endParaRPr lang="en-US" dirty="0"/>
+              </a:p>
+              <a:p>
+                <a:r>
+                  <a:rPr lang="en-US" dirty="0"/>
+                  <a:t>We will focus on the most popular feature construction methods that work well for RL:</a:t>
+                </a:r>
+              </a:p>
+              <a:p>
+                <a:pPr lvl="1"/>
+                <a:r>
+                  <a:rPr lang="en-US" b="1" dirty="0"/>
+                  <a:t>Fourier Basis:</a:t>
+                </a:r>
+                <a:r>
+                  <a:rPr lang="en-US" dirty="0"/>
+                  <a:t> strong baseline; very efficient; strong guarantees. </a:t>
+                </a:r>
+              </a:p>
+              <a:p>
+                <a:pPr lvl="1"/>
+                <a:r>
+                  <a:rPr lang="en-US" b="1" dirty="0"/>
+                  <a:t>Tile Coding</a:t>
+                </a:r>
+                <a:r>
+                  <a:rPr lang="en-US" dirty="0"/>
+                  <a:t>: coarse coding using tiles, local generalization, very computationally efficient.</a:t>
+                </a:r>
+              </a:p>
+              <a:p>
+                <a:pPr marL="457200" lvl="1" indent="0">
+                  <a:buNone/>
+                </a:pPr>
+                <a:endParaRPr lang="en-US" dirty="0"/>
+              </a:p>
+              <a:p>
+                <a:r>
+                  <a:rPr lang="en-US" dirty="0"/>
+                  <a:t>Other methods</a:t>
+                </a:r>
+              </a:p>
+              <a:p>
+                <a:pPr lvl="1"/>
+                <a:r>
+                  <a:rPr lang="en-US" dirty="0"/>
+                  <a:t>One-Hot Features: exact representation; no generalization (equivalent to tabular RL)</a:t>
+                </a:r>
+              </a:p>
+              <a:p>
+                <a:pPr lvl="1"/>
+                <a:r>
+                  <a:rPr lang="en-US" dirty="0"/>
+                  <a:t>Coarse Coding using spherical reception fields</a:t>
+                </a:r>
+              </a:p>
+              <a:p>
+                <a:pPr lvl="1"/>
+                <a:r>
+                  <a:rPr lang="en-US" dirty="0"/>
+                  <a:t>Polynomials Features: smooth global generalization.</a:t>
+                </a:r>
+              </a:p>
+              <a:p>
+                <a:pPr lvl="1"/>
+                <a:r>
+                  <a:rPr lang="en-US" dirty="0"/>
+                  <a:t>Radial Basis Functions: smooth local generalization</a:t>
+                </a:r>
+              </a:p>
+              <a:p>
+                <a:pPr marL="0" indent="0">
+                  <a:buNone/>
+                </a:pPr>
+                <a:endParaRPr lang="en-US" dirty="0"/>
+              </a:p>
+            </p:txBody>
+          </p:sp>
+        </mc:Choice>
+        <mc:Fallback>
+          <p:sp>
+            <p:nvSpPr>
+              <p:cNvPr id="3" name="Content Placeholder 2">
+                <a:extLst>
+                  <a:ext uri="{FF2B5EF4-FFF2-40B4-BE49-F238E27FC236}">
+                    <a16:creationId xmlns:a16="http://schemas.microsoft.com/office/drawing/2014/main" id="{CA3F8D59-91BD-8D3F-17EC-9451FBDC8E5C}"/>
+                  </a:ext>
+                </a:extLst>
+              </p:cNvPr>
+              <p:cNvSpPr>
+                <a:spLocks noGrp="1" noRot="1" noChangeAspect="1" noMove="1" noResize="1" noEditPoints="1" noAdjustHandles="1" noChangeArrowheads="1" noChangeShapeType="1" noTextEdit="1"/>
+              </p:cNvSpPr>
+              <p:nvPr>
+                <p:ph idx="1"/>
+              </p:nvPr>
+            </p:nvSpPr>
+            <p:spPr>
+              <a:blipFill>
+                <a:blip r:embed="rId3"/>
+                <a:stretch>
+                  <a:fillRect l="-696" t="-2551"/>
+                </a:stretch>
+              </a:blipFill>
+            </p:spPr>
+            <p:txBody>
+              <a:bodyPr/>
+              <a:lstStyle/>
+              <a:p>
+                <a:r>
+                  <a:rPr lang="en-US">
+                    <a:noFill/>
+                  </a:rPr>
+                  <a:t> </a:t>
+                </a:r>
+              </a:p>
+            </p:txBody>
+          </p:sp>
+        </mc:Fallback>
+      </mc:AlternateContent>
     </p:spTree>
     <p:extLst>
       <p:ext uri="{BB962C8B-B14F-4D97-AF65-F5344CB8AC3E}">
@@ -19687,8 +19815,8 @@
           </a:p>
         </p:txBody>
       </p:sp>
-      <mc:AlternateContent xmlns:mc="http://schemas.openxmlformats.org/markup-compatibility/2006" xmlns:a14="http://schemas.microsoft.com/office/drawing/2010/main">
-        <mc:Choice Requires="a14">
+      <mc:AlternateContent xmlns:mc="http://schemas.openxmlformats.org/markup-compatibility/2006">
+        <mc:Choice xmlns:a14="http://schemas.microsoft.com/office/drawing/2010/main" Requires="a14">
           <p:sp>
             <p:nvSpPr>
               <p:cNvPr id="3" name="Content Placeholder 2">
@@ -19708,146 +19836,175 @@
             <p:spPr>
               <a:xfrm>
                 <a:off x="838200" y="1179646"/>
-                <a:ext cx="10515600" cy="1666944"/>
+                <a:ext cx="10515600" cy="1555396"/>
               </a:xfrm>
             </p:spPr>
             <p:txBody>
               <a:bodyPr>
-                <a:normAutofit fontScale="70000" lnSpcReduction="20000"/>
+                <a:normAutofit fontScale="62500" lnSpcReduction="20000"/>
               </a:bodyPr>
               <a:lstStyle/>
               <a:p>
                 <a:r>
                   <a:rPr lang="en-US" dirty="0"/>
-                  <a:t>State is represented by </a:t>
+                  <a:t>State is represented by the normalized features as vector </a:t>
                 </a:r>
                 <a14:m>
                   <m:oMath xmlns:m="http://schemas.openxmlformats.org/officeDocument/2006/math">
                     <m:r>
+                      <a:rPr lang="en-US" b="1" i="1" smtClean="0">
+                        <a:latin typeface="Cambria Math" panose="02040503050406030204" pitchFamily="18" charset="0"/>
+                      </a:rPr>
+                      <m:t>𝒔</m:t>
+                    </m:r>
+                    <m:r>
                       <a:rPr lang="en-US" b="0" i="1" smtClean="0">
                         <a:latin typeface="Cambria Math" panose="02040503050406030204" pitchFamily="18" charset="0"/>
                       </a:rPr>
-                      <m:t>𝑘</m:t>
-                    </m:r>
-                  </m:oMath>
-                </a14:m>
-                <a:r>
-                  <a:rPr lang="en-US" dirty="0"/>
-                  <a:t> numbers: </a:t>
-                </a:r>
-                <a14:m>
-                  <m:oMath xmlns:m="http://schemas.openxmlformats.org/officeDocument/2006/math">
-                    <m:r>
-                      <a:rPr lang="en-US" b="1" i="1" smtClean="0">
-                        <a:latin typeface="Cambria Math" panose="02040503050406030204" pitchFamily="18" charset="0"/>
-                      </a:rPr>
-                      <m:t>𝒔</m:t>
-                    </m:r>
-                    <m:r>
-                      <a:rPr lang="en-US" b="0" i="1" smtClean="0">
-                        <a:latin typeface="Cambria Math" panose="02040503050406030204" pitchFamily="18" charset="0"/>
-                      </a:rPr>
                       <m:t>=</m:t>
                     </m:r>
-                    <m:r>
-                      <a:rPr lang="en-US" i="1">
-                        <a:latin typeface="Cambria Math" panose="02040503050406030204" pitchFamily="18" charset="0"/>
-                      </a:rPr>
-                      <m:t>(</m:t>
-                    </m:r>
-                    <m:sSub>
-                      <m:sSubPr>
+                    <m:d>
+                      <m:dPr>
                         <m:ctrlPr>
                           <a:rPr lang="en-US" i="1">
                             <a:latin typeface="Cambria Math" panose="02040503050406030204" pitchFamily="18" charset="0"/>
                           </a:rPr>
                         </m:ctrlPr>
-                      </m:sSubPr>
+                      </m:dPr>
                       <m:e>
+                        <m:sSub>
+                          <m:sSubPr>
+                            <m:ctrlPr>
+                              <a:rPr lang="en-US" i="1">
+                                <a:latin typeface="Cambria Math" panose="02040503050406030204" pitchFamily="18" charset="0"/>
+                              </a:rPr>
+                            </m:ctrlPr>
+                          </m:sSubPr>
+                          <m:e>
+                            <m:r>
+                              <a:rPr lang="en-US" i="1">
+                                <a:latin typeface="Cambria Math" panose="02040503050406030204" pitchFamily="18" charset="0"/>
+                              </a:rPr>
+                              <m:t>𝑠</m:t>
+                            </m:r>
+                          </m:e>
+                          <m:sub>
+                            <m:r>
+                              <a:rPr lang="en-US" i="1">
+                                <a:latin typeface="Cambria Math" panose="02040503050406030204" pitchFamily="18" charset="0"/>
+                              </a:rPr>
+                              <m:t>1</m:t>
+                            </m:r>
+                          </m:sub>
+                        </m:sSub>
                         <m:r>
                           <a:rPr lang="en-US" i="1">
                             <a:latin typeface="Cambria Math" panose="02040503050406030204" pitchFamily="18" charset="0"/>
                           </a:rPr>
-                          <m:t>𝑠</m:t>
-                        </m:r>
+                          <m:t>,</m:t>
+                        </m:r>
+                        <m:sSub>
+                          <m:sSubPr>
+                            <m:ctrlPr>
+                              <a:rPr lang="en-US" i="1">
+                                <a:latin typeface="Cambria Math" panose="02040503050406030204" pitchFamily="18" charset="0"/>
+                              </a:rPr>
+                            </m:ctrlPr>
+                          </m:sSubPr>
+                          <m:e>
+                            <m:r>
+                              <a:rPr lang="en-US" i="1">
+                                <a:latin typeface="Cambria Math" panose="02040503050406030204" pitchFamily="18" charset="0"/>
+                              </a:rPr>
+                              <m:t>𝑠</m:t>
+                            </m:r>
+                          </m:e>
+                          <m:sub>
+                            <m:r>
+                              <a:rPr lang="en-US" i="1">
+                                <a:latin typeface="Cambria Math" panose="02040503050406030204" pitchFamily="18" charset="0"/>
+                              </a:rPr>
+                              <m:t>2</m:t>
+                            </m:r>
+                          </m:sub>
+                        </m:sSub>
+                        <m:r>
+                          <a:rPr lang="en-US" i="1">
+                            <a:latin typeface="Cambria Math" panose="02040503050406030204" pitchFamily="18" charset="0"/>
+                          </a:rPr>
+                          <m:t>,…,</m:t>
+                        </m:r>
+                        <m:sSub>
+                          <m:sSubPr>
+                            <m:ctrlPr>
+                              <a:rPr lang="en-US" i="1">
+                                <a:latin typeface="Cambria Math" panose="02040503050406030204" pitchFamily="18" charset="0"/>
+                              </a:rPr>
+                            </m:ctrlPr>
+                          </m:sSubPr>
+                          <m:e>
+                            <m:r>
+                              <a:rPr lang="en-US" i="1">
+                                <a:latin typeface="Cambria Math" panose="02040503050406030204" pitchFamily="18" charset="0"/>
+                              </a:rPr>
+                              <m:t>𝑠</m:t>
+                            </m:r>
+                          </m:e>
+                          <m:sub>
+                            <m:r>
+                              <a:rPr lang="en-US" i="1">
+                                <a:latin typeface="Cambria Math" panose="02040503050406030204" pitchFamily="18" charset="0"/>
+                              </a:rPr>
+                              <m:t>𝑘</m:t>
+                            </m:r>
+                          </m:sub>
+                        </m:sSub>
                       </m:e>
-                      <m:sub>
-                        <m:r>
-                          <a:rPr lang="en-US" i="1">
-                            <a:latin typeface="Cambria Math" panose="02040503050406030204" pitchFamily="18" charset="0"/>
-                          </a:rPr>
-                          <m:t>1</m:t>
-                        </m:r>
-                      </m:sub>
-                    </m:sSub>
-                    <m:r>
-                      <a:rPr lang="en-US" i="1">
-                        <a:latin typeface="Cambria Math" panose="02040503050406030204" pitchFamily="18" charset="0"/>
-                      </a:rPr>
-                      <m:t>,</m:t>
-                    </m:r>
-                    <m:sSub>
-                      <m:sSubPr>
+                    </m:d>
+                    <m:r>
+                      <a:rPr lang="en-US" b="0" i="1" smtClean="0">
+                        <a:latin typeface="Cambria Math" panose="02040503050406030204" pitchFamily="18" charset="0"/>
+                      </a:rPr>
+                      <m:t>∈</m:t>
+                    </m:r>
+                    <m:sSup>
+                      <m:sSupPr>
                         <m:ctrlPr>
-                          <a:rPr lang="en-US" i="1">
+                          <a:rPr lang="en-US" b="0" i="1" smtClean="0">
                             <a:latin typeface="Cambria Math" panose="02040503050406030204" pitchFamily="18" charset="0"/>
                           </a:rPr>
                         </m:ctrlPr>
-                      </m:sSubPr>
+                      </m:sSupPr>
                       <m:e>
-                        <m:r>
-                          <a:rPr lang="en-US" i="1">
-                            <a:latin typeface="Cambria Math" panose="02040503050406030204" pitchFamily="18" charset="0"/>
-                          </a:rPr>
-                          <m:t>𝑠</m:t>
-                        </m:r>
+                        <m:d>
+                          <m:dPr>
+                            <m:begChr m:val="["/>
+                            <m:endChr m:val="]"/>
+                            <m:ctrlPr>
+                              <a:rPr lang="en-US" b="0" i="1" smtClean="0">
+                                <a:latin typeface="Cambria Math" panose="02040503050406030204" pitchFamily="18" charset="0"/>
+                              </a:rPr>
+                            </m:ctrlPr>
+                          </m:dPr>
+                          <m:e>
+                            <m:r>
+                              <a:rPr lang="en-US" b="0" i="1" smtClean="0">
+                                <a:latin typeface="Cambria Math" panose="02040503050406030204" pitchFamily="18" charset="0"/>
+                              </a:rPr>
+                              <m:t>0,1</m:t>
+                            </m:r>
+                          </m:e>
+                        </m:d>
                       </m:e>
-                      <m:sub>
-                        <m:r>
-                          <a:rPr lang="en-US" i="1">
-                            <a:latin typeface="Cambria Math" panose="02040503050406030204" pitchFamily="18" charset="0"/>
-                          </a:rPr>
-                          <m:t>2</m:t>
-                        </m:r>
-                      </m:sub>
-                    </m:sSub>
-                    <m:r>
-                      <a:rPr lang="en-US" i="1">
-                        <a:latin typeface="Cambria Math" panose="02040503050406030204" pitchFamily="18" charset="0"/>
-                      </a:rPr>
-                      <m:t>,…,</m:t>
-                    </m:r>
-                    <m:sSub>
-                      <m:sSubPr>
-                        <m:ctrlPr>
-                          <a:rPr lang="en-US" i="1">
-                            <a:latin typeface="Cambria Math" panose="02040503050406030204" pitchFamily="18" charset="0"/>
-                          </a:rPr>
-                        </m:ctrlPr>
-                      </m:sSubPr>
-                      <m:e>
-                        <m:r>
-                          <a:rPr lang="en-US" i="1">
-                            <a:latin typeface="Cambria Math" panose="02040503050406030204" pitchFamily="18" charset="0"/>
-                          </a:rPr>
-                          <m:t>𝑠</m:t>
-                        </m:r>
-                      </m:e>
-                      <m:sub>
-                        <m:r>
-                          <a:rPr lang="en-US" i="1">
+                      <m:sup>
+                        <m:r>
+                          <a:rPr lang="en-US" b="0" i="1" smtClean="0">
                             <a:latin typeface="Cambria Math" panose="02040503050406030204" pitchFamily="18" charset="0"/>
                           </a:rPr>
                           <m:t>𝑘</m:t>
                         </m:r>
-                      </m:sub>
-                    </m:sSub>
-                    <m:r>
-                      <a:rPr lang="en-US" i="1">
-                        <a:latin typeface="Cambria Math" panose="02040503050406030204" pitchFamily="18" charset="0"/>
-                      </a:rPr>
-                      <m:t>)</m:t>
-                    </m:r>
+                      </m:sup>
+                    </m:sSup>
                   </m:oMath>
                 </a14:m>
                 <a:endParaRPr lang="en-US" dirty="0"/>
@@ -20016,7 +20173,7 @@
                 </a:pPr>
                 <a:r>
                   <a:rPr lang="en-US" dirty="0"/>
-                  <a:t>	where </a:t>
+                  <a:t>                  where </a:t>
                 </a:r>
                 <a14:m>
                   <m:oMath xmlns:m="http://schemas.openxmlformats.org/officeDocument/2006/math">
@@ -20291,7 +20448,7 @@
             </p:txBody>
           </p:sp>
         </mc:Choice>
-        <mc:Fallback xmlns="">
+        <mc:Fallback>
           <p:sp>
             <p:nvSpPr>
               <p:cNvPr id="3" name="Content Placeholder 2">
@@ -20311,12 +20468,12 @@
             <p:spPr>
               <a:xfrm>
                 <a:off x="838200" y="1179646"/>
-                <a:ext cx="10515600" cy="1666944"/>
+                <a:ext cx="10515600" cy="1555396"/>
               </a:xfrm>
               <a:blipFill>
                 <a:blip r:embed="rId2"/>
                 <a:stretch>
-                  <a:fillRect l="-522" t="-6593" b="-366"/>
+                  <a:fillRect l="-406" t="-6275"/>
                 </a:stretch>
               </a:blipFill>
             </p:spPr>
@@ -20366,8 +20523,8 @@
           </a:prstGeom>
         </p:spPr>
       </p:pic>
-      <mc:AlternateContent xmlns:mc="http://schemas.openxmlformats.org/markup-compatibility/2006" xmlns:a14="http://schemas.microsoft.com/office/drawing/2010/main">
-        <mc:Choice Requires="a14">
+      <mc:AlternateContent xmlns:mc="http://schemas.openxmlformats.org/markup-compatibility/2006">
+        <mc:Choice xmlns:a14="http://schemas.microsoft.com/office/drawing/2010/main" Requires="a14">
           <p:sp>
             <p:nvSpPr>
               <p:cNvPr id="5" name="TextBox 4">
@@ -20382,7 +20539,7 @@
             </p:nvSpPr>
             <p:spPr>
               <a:xfrm>
-                <a:off x="1641076" y="3014112"/>
+                <a:off x="1641076" y="2922198"/>
                 <a:ext cx="3483096" cy="646331"/>
               </a:xfrm>
               <a:prstGeom prst="rect">
@@ -20421,7 +20578,7 @@
             </p:txBody>
           </p:sp>
         </mc:Choice>
-        <mc:Fallback xmlns="">
+        <mc:Fallback>
           <p:sp>
             <p:nvSpPr>
               <p:cNvPr id="5" name="TextBox 4">
@@ -20438,7 +20595,7 @@
             </p:nvSpPr>
             <p:spPr>
               <a:xfrm>
-                <a:off x="1641076" y="3014112"/>
+                <a:off x="1641076" y="2922198"/>
                 <a:ext cx="3483096" cy="646331"/>
               </a:xfrm>
               <a:prstGeom prst="rect">
@@ -20572,8 +20729,8 @@
           </a:p>
         </p:txBody>
       </p:sp>
-      <mc:AlternateContent xmlns:mc="http://schemas.openxmlformats.org/markup-compatibility/2006" xmlns:a14="http://schemas.microsoft.com/office/drawing/2010/main">
-        <mc:Choice Requires="a14">
+      <mc:AlternateContent xmlns:mc="http://schemas.openxmlformats.org/markup-compatibility/2006">
+        <mc:Choice xmlns:a14="http://schemas.microsoft.com/office/drawing/2010/main" Requires="a14">
           <p:sp>
             <p:nvSpPr>
               <p:cNvPr id="41" name="TextBox 40">
@@ -20588,8 +20745,8 @@
             </p:nvSpPr>
             <p:spPr>
               <a:xfrm>
-                <a:off x="1662385" y="3660443"/>
-                <a:ext cx="3483096" cy="2031325"/>
+                <a:off x="1662385" y="3546028"/>
+                <a:ext cx="3483096" cy="2246769"/>
               </a:xfrm>
               <a:prstGeom prst="rect">
                 <a:avLst/>
@@ -20635,6 +20792,62 @@
                     <m:sSub>
                       <m:sSubPr>
                         <m:ctrlPr>
+                          <a:rPr lang="en-US" sz="1400" i="1">
+                            <a:latin typeface="Cambria Math" panose="02040503050406030204" pitchFamily="18" charset="0"/>
+                          </a:rPr>
+                        </m:ctrlPr>
+                      </m:sSubPr>
+                      <m:e>
+                        <m:r>
+                          <a:rPr lang="en-US" sz="1400" i="1">
+                            <a:latin typeface="Cambria Math" panose="02040503050406030204" pitchFamily="18" charset="0"/>
+                          </a:rPr>
+                          <m:t>𝑥</m:t>
+                        </m:r>
+                      </m:e>
+                      <m:sub>
+                        <m:r>
+                          <a:rPr lang="en-US" sz="1400" b="0" i="1" smtClean="0">
+                            <a:latin typeface="Cambria Math" panose="02040503050406030204" pitchFamily="18" charset="0"/>
+                          </a:rPr>
+                          <m:t>0</m:t>
+                        </m:r>
+                      </m:sub>
+                    </m:sSub>
+                    <m:r>
+                      <a:rPr lang="en-US" sz="1400" i="1">
+                        <a:latin typeface="Cambria Math" panose="02040503050406030204" pitchFamily="18" charset="0"/>
+                      </a:rPr>
+                      <m:t>(</m:t>
+                    </m:r>
+                    <m:r>
+                      <a:rPr lang="en-US" sz="1400" b="1" i="1">
+                        <a:latin typeface="Cambria Math" panose="02040503050406030204" pitchFamily="18" charset="0"/>
+                      </a:rPr>
+                      <m:t>𝒔</m:t>
+                    </m:r>
+                    <m:r>
+                      <a:rPr lang="en-US" sz="1400" i="1">
+                        <a:latin typeface="Cambria Math" panose="02040503050406030204" pitchFamily="18" charset="0"/>
+                      </a:rPr>
+                      <m:t>)</m:t>
+                    </m:r>
+                  </m:oMath>
+                </a14:m>
+                <a:r>
+                  <a:rPr lang="en-US" sz="1400" dirty="0"/>
+                  <a:t>= 1</a:t>
+                </a:r>
+                <a:endParaRPr lang="en-US" sz="1400" b="0" i="1" dirty="0">
+                  <a:latin typeface="Cambria Math" panose="02040503050406030204" pitchFamily="18" charset="0"/>
+                </a:endParaRPr>
+              </a:p>
+              <a:p>
+                <a14:m>
+                  <m:oMath xmlns:m="http://schemas.openxmlformats.org/officeDocument/2006/math">
+                    <m:sSub>
+                      <m:sSubPr>
+                        <m:ctrlPr>
                           <a:rPr lang="en-US" sz="1400" b="0" i="1" smtClean="0">
                             <a:latin typeface="Cambria Math" panose="02040503050406030204" pitchFamily="18" charset="0"/>
                           </a:rPr>
@@ -21655,7 +21868,7 @@
             </p:txBody>
           </p:sp>
         </mc:Choice>
-        <mc:Fallback xmlns="">
+        <mc:Fallback>
           <p:sp>
             <p:nvSpPr>
               <p:cNvPr id="41" name="TextBox 40">
@@ -21672,8 +21885,8 @@
             </p:nvSpPr>
             <p:spPr>
               <a:xfrm>
-                <a:off x="1662385" y="3660443"/>
-                <a:ext cx="3483096" cy="2031325"/>
+                <a:off x="1662385" y="3546028"/>
+                <a:ext cx="3483096" cy="2246769"/>
               </a:xfrm>
               <a:prstGeom prst="rect">
                 <a:avLst/>
@@ -22790,8 +23003,8 @@
           </p:txBody>
         </p:sp>
       </p:grpSp>
-      <mc:AlternateContent xmlns:mc="http://schemas.openxmlformats.org/markup-compatibility/2006" xmlns:a14="http://schemas.microsoft.com/office/drawing/2010/main">
-        <mc:Choice Requires="a14">
+      <mc:AlternateContent xmlns:mc="http://schemas.openxmlformats.org/markup-compatibility/2006">
+        <mc:Choice xmlns:a14="http://schemas.microsoft.com/office/drawing/2010/main" Requires="a14">
           <p:sp>
             <p:nvSpPr>
               <p:cNvPr id="46" name="Speech Bubble: Rectangle with Corners Rounded 45">
@@ -22806,7 +23019,7 @@
             </p:nvSpPr>
             <p:spPr>
               <a:xfrm>
-                <a:off x="359106" y="5741581"/>
+                <a:off x="359107" y="5816281"/>
                 <a:ext cx="4530045" cy="1006549"/>
               </a:xfrm>
               <a:prstGeom prst="wedgeRoundRectCallout">
@@ -22883,7 +23096,7 @@
             </p:txBody>
           </p:sp>
         </mc:Choice>
-        <mc:Fallback xmlns="">
+        <mc:Fallback>
           <p:sp>
             <p:nvSpPr>
               <p:cNvPr id="46" name="Speech Bubble: Rectangle with Corners Rounded 45">
@@ -22900,7 +23113,7 @@
             </p:nvSpPr>
             <p:spPr>
               <a:xfrm>
-                <a:off x="359106" y="5741581"/>
+                <a:off x="359107" y="5816281"/>
                 <a:ext cx="4530045" cy="1006549"/>
               </a:xfrm>
               <a:prstGeom prst="wedgeRoundRectCallout">
@@ -22913,7 +23126,7 @@
               <a:blipFill>
                 <a:blip r:embed="rId6"/>
                 <a:stretch>
-                  <a:fillRect b="-1395"/>
+                  <a:fillRect b="-1860"/>
                 </a:stretch>
               </a:blipFill>
             </p:spPr>
@@ -25307,8 +25520,8 @@
           </a:p>
         </p:txBody>
       </p:sp>
-      <mc:AlternateContent xmlns:mc="http://schemas.openxmlformats.org/markup-compatibility/2006">
-        <mc:Choice xmlns:a14="http://schemas.microsoft.com/office/drawing/2010/main" Requires="a14">
+      <mc:AlternateContent xmlns:mc="http://schemas.openxmlformats.org/markup-compatibility/2006" xmlns:a14="http://schemas.microsoft.com/office/drawing/2010/main">
+        <mc:Choice Requires="a14">
           <p:sp>
             <p:nvSpPr>
               <p:cNvPr id="3" name="Content Placeholder 2">
@@ -26292,7 +26505,7 @@
             </p:txBody>
           </p:sp>
         </mc:Choice>
-        <mc:Fallback>
+        <mc:Fallback xmlns="">
           <p:sp>
             <p:nvSpPr>
               <p:cNvPr id="3" name="Content Placeholder 2">
@@ -28393,8 +28606,8 @@
           </p:sp>
         </mc:Fallback>
       </mc:AlternateContent>
-      <mc:AlternateContent xmlns:mc="http://schemas.openxmlformats.org/markup-compatibility/2006">
-        <mc:Choice xmlns:a14="http://schemas.microsoft.com/office/drawing/2010/main" Requires="a14">
+      <mc:AlternateContent xmlns:mc="http://schemas.openxmlformats.org/markup-compatibility/2006" xmlns:a14="http://schemas.microsoft.com/office/drawing/2010/main">
+        <mc:Choice Requires="a14">
           <p:sp>
             <p:nvSpPr>
               <p:cNvPr id="4" name="Content Placeholder 2">
@@ -28763,7 +28976,7 @@
             </p:txBody>
           </p:sp>
         </mc:Choice>
-        <mc:Fallback>
+        <mc:Fallback xmlns="">
           <p:sp>
             <p:nvSpPr>
               <p:cNvPr id="4" name="Content Placeholder 2">
@@ -28808,8 +29021,8 @@
           </p:sp>
         </mc:Fallback>
       </mc:AlternateContent>
-      <mc:AlternateContent xmlns:mc="http://schemas.openxmlformats.org/markup-compatibility/2006">
-        <mc:Choice xmlns:a14="http://schemas.microsoft.com/office/drawing/2010/main" Requires="a14">
+      <mc:AlternateContent xmlns:mc="http://schemas.openxmlformats.org/markup-compatibility/2006" xmlns:a14="http://schemas.microsoft.com/office/drawing/2010/main">
+        <mc:Choice Requires="a14">
           <p:sp>
             <p:nvSpPr>
               <p:cNvPr id="5" name="Content Placeholder 2">
@@ -29555,7 +29768,7 @@
             </p:txBody>
           </p:sp>
         </mc:Choice>
-        <mc:Fallback>
+        <mc:Fallback xmlns="">
           <p:sp>
             <p:nvSpPr>
               <p:cNvPr id="5" name="Content Placeholder 2">

--- a/slides/Lecture_Chapter09.pptx
+++ b/slides/Lecture_Chapter09.pptx
@@ -300,7 +300,7 @@
           <a:p>
             <a:fld id="{2987FC57-34F3-4A88-970B-010E7C0EC943}" type="datetimeFigureOut">
               <a:rPr lang="en-US" smtClean="0"/>
-              <a:t>4/8/2026</a:t>
+              <a:t>5/31/2026</a:t>
             </a:fld>
             <a:endParaRPr lang="en-US"/>
           </a:p>
@@ -882,7 +882,7 @@
           <a:p>
             <a:fld id="{3E22BF2E-04DA-469E-97C5-BB68A0368813}" type="datetimeFigureOut">
               <a:rPr lang="en-US" smtClean="0"/>
-              <a:t>4/8/2026</a:t>
+              <a:t>5/31/2026</a:t>
             </a:fld>
             <a:endParaRPr lang="en-US"/>
           </a:p>
@@ -1080,7 +1080,7 @@
           <a:p>
             <a:fld id="{3E22BF2E-04DA-469E-97C5-BB68A0368813}" type="datetimeFigureOut">
               <a:rPr lang="en-US" smtClean="0"/>
-              <a:t>4/8/2026</a:t>
+              <a:t>5/31/2026</a:t>
             </a:fld>
             <a:endParaRPr lang="en-US"/>
           </a:p>
@@ -1288,7 +1288,7 @@
           <a:p>
             <a:fld id="{3E22BF2E-04DA-469E-97C5-BB68A0368813}" type="datetimeFigureOut">
               <a:rPr lang="en-US" smtClean="0"/>
-              <a:t>4/8/2026</a:t>
+              <a:t>5/31/2026</a:t>
             </a:fld>
             <a:endParaRPr lang="en-US"/>
           </a:p>
@@ -1496,7 +1496,7 @@
           <a:p>
             <a:fld id="{3E22BF2E-04DA-469E-97C5-BB68A0368813}" type="datetimeFigureOut">
               <a:rPr lang="en-US" smtClean="0"/>
-              <a:t>4/8/2026</a:t>
+              <a:t>5/31/2026</a:t>
             </a:fld>
             <a:endParaRPr lang="en-US"/>
           </a:p>
@@ -1771,7 +1771,7 @@
           <a:p>
             <a:fld id="{3E22BF2E-04DA-469E-97C5-BB68A0368813}" type="datetimeFigureOut">
               <a:rPr lang="en-US" smtClean="0"/>
-              <a:t>4/8/2026</a:t>
+              <a:t>5/31/2026</a:t>
             </a:fld>
             <a:endParaRPr lang="en-US"/>
           </a:p>
@@ -2036,7 +2036,7 @@
           <a:p>
             <a:fld id="{3E22BF2E-04DA-469E-97C5-BB68A0368813}" type="datetimeFigureOut">
               <a:rPr lang="en-US" smtClean="0"/>
-              <a:t>4/8/2026</a:t>
+              <a:t>5/31/2026</a:t>
             </a:fld>
             <a:endParaRPr lang="en-US"/>
           </a:p>
@@ -2448,7 +2448,7 @@
           <a:p>
             <a:fld id="{3E22BF2E-04DA-469E-97C5-BB68A0368813}" type="datetimeFigureOut">
               <a:rPr lang="en-US" smtClean="0"/>
-              <a:t>4/8/2026</a:t>
+              <a:t>5/31/2026</a:t>
             </a:fld>
             <a:endParaRPr lang="en-US"/>
           </a:p>
@@ -2589,7 +2589,7 @@
           <a:p>
             <a:fld id="{3E22BF2E-04DA-469E-97C5-BB68A0368813}" type="datetimeFigureOut">
               <a:rPr lang="en-US" smtClean="0"/>
-              <a:t>4/8/2026</a:t>
+              <a:t>5/31/2026</a:t>
             </a:fld>
             <a:endParaRPr lang="en-US"/>
           </a:p>
@@ -2702,7 +2702,7 @@
           <a:p>
             <a:fld id="{3E22BF2E-04DA-469E-97C5-BB68A0368813}" type="datetimeFigureOut">
               <a:rPr lang="en-US" smtClean="0"/>
-              <a:t>4/8/2026</a:t>
+              <a:t>5/31/2026</a:t>
             </a:fld>
             <a:endParaRPr lang="en-US"/>
           </a:p>
@@ -3013,7 +3013,7 @@
           <a:p>
             <a:fld id="{3E22BF2E-04DA-469E-97C5-BB68A0368813}" type="datetimeFigureOut">
               <a:rPr lang="en-US" smtClean="0"/>
-              <a:t>4/8/2026</a:t>
+              <a:t>5/31/2026</a:t>
             </a:fld>
             <a:endParaRPr lang="en-US"/>
           </a:p>
@@ -3301,7 +3301,7 @@
           <a:p>
             <a:fld id="{3E22BF2E-04DA-469E-97C5-BB68A0368813}" type="datetimeFigureOut">
               <a:rPr lang="en-US" smtClean="0"/>
-              <a:t>4/8/2026</a:t>
+              <a:t>5/31/2026</a:t>
             </a:fld>
             <a:endParaRPr lang="en-US"/>
           </a:p>
@@ -3542,7 +3542,7 @@
           <a:p>
             <a:fld id="{3E22BF2E-04DA-469E-97C5-BB68A0368813}" type="datetimeFigureOut">
               <a:rPr lang="en-US" smtClean="0"/>
-              <a:t>4/8/2026</a:t>
+              <a:t>5/31/2026</a:t>
             </a:fld>
             <a:endParaRPr lang="en-US"/>
           </a:p>
@@ -14395,8 +14395,8 @@
           </a:p>
         </p:txBody>
       </p:sp>
-      <mc:AlternateContent xmlns:mc="http://schemas.openxmlformats.org/markup-compatibility/2006" xmlns:a14="http://schemas.microsoft.com/office/drawing/2010/main">
-        <mc:Choice Requires="a14">
+      <mc:AlternateContent xmlns:mc="http://schemas.openxmlformats.org/markup-compatibility/2006">
+        <mc:Choice xmlns:a14="http://schemas.microsoft.com/office/drawing/2010/main" Requires="a14">
           <p:sp>
             <p:nvSpPr>
               <p:cNvPr id="3" name="Content Placeholder 2">
@@ -14688,7 +14688,7 @@
                 </a14:m>
                 <a:r>
                   <a:rPr lang="en-US" dirty="0"/>
-                  <a:t>… feature vector with </a:t>
+                  <a:t>… a state feature vector with </a:t>
                 </a:r>
                 <a14:m>
                   <m:oMath xmlns:m="http://schemas.openxmlformats.org/officeDocument/2006/math">
@@ -14756,7 +14756,7 @@
               </a:p>
               <a:p>
                 <a:r>
-                  <a:rPr lang="en-US" b="1"/>
+                  <a:rPr lang="en-US" b="1" dirty="0"/>
                   <a:t>SGD gradient</a:t>
                 </a:r>
                 <a:r>
@@ -15757,7 +15757,7 @@
             </p:txBody>
           </p:sp>
         </mc:Choice>
-        <mc:Fallback xmlns="">
+        <mc:Fallback>
           <p:sp>
             <p:nvSpPr>
               <p:cNvPr id="3" name="Content Placeholder 2">
@@ -16192,7 +16192,7 @@
             <p:spPr/>
             <p:txBody>
               <a:bodyPr>
-                <a:normAutofit lnSpcReduction="10000"/>
+                <a:normAutofit fontScale="92500" lnSpcReduction="10000"/>
               </a:bodyPr>
               <a:lstStyle/>
               <a:p>
@@ -16202,7 +16202,7 @@
                 </a:r>
                 <a:r>
                   <a:rPr lang="en-US" dirty="0"/>
-                  <a:t>: How do we construct the feature vector </a:t>
+                  <a:t>: How do we construct the state feature vector </a:t>
                 </a:r>
                 <a14:m>
                   <m:oMath xmlns:m="http://schemas.openxmlformats.org/officeDocument/2006/math">
@@ -16234,7 +16234,7 @@
                 </a14:m>
                 <a:r>
                   <a:rPr lang="en-US" dirty="0"/>
-                  <a:t> for a state?</a:t>
+                  <a:t>?</a:t>
                 </a:r>
               </a:p>
               <a:p>
@@ -16278,13 +16278,7 @@
                       <a:rPr lang="en-US" b="0" i="1" smtClean="0">
                         <a:latin typeface="Cambria Math" panose="02040503050406030204" pitchFamily="18" charset="0"/>
                       </a:rPr>
-                      <m:t>=</m:t>
-                    </m:r>
-                    <m:r>
-                      <a:rPr lang="en-US" b="0" i="1" smtClean="0">
-                        <a:latin typeface="Cambria Math" panose="02040503050406030204" pitchFamily="18" charset="0"/>
-                      </a:rPr>
-                      <m:t>(</m:t>
+                      <m:t>=(</m:t>
                     </m:r>
                     <m:sSub>
                       <m:sSubPr>
@@ -16442,7 +16436,7 @@
               <a:blipFill>
                 <a:blip r:embed="rId2"/>
                 <a:stretch>
-                  <a:fillRect l="-1043" t="-2806" r="-1623" b="-1658"/>
+                  <a:fillRect l="-928" t="-2551"/>
                 </a:stretch>
               </a:blipFill>
             </p:spPr>
@@ -16929,8 +16923,8 @@
           </a:p>
         </p:txBody>
       </p:sp>
-      <mc:AlternateContent xmlns:mc="http://schemas.openxmlformats.org/markup-compatibility/2006">
-        <mc:Choice xmlns:a14="http://schemas.microsoft.com/office/drawing/2010/main" Requires="a14">
+      <mc:AlternateContent xmlns:mc="http://schemas.openxmlformats.org/markup-compatibility/2006" xmlns:a14="http://schemas.microsoft.com/office/drawing/2010/main">
+        <mc:Choice Requires="a14">
           <p:sp>
             <p:nvSpPr>
               <p:cNvPr id="3" name="Content Placeholder 2">
@@ -17123,7 +17117,7 @@
             </p:txBody>
           </p:sp>
         </mc:Choice>
-        <mc:Fallback>
+        <mc:Fallback xmlns="">
           <p:sp>
             <p:nvSpPr>
               <p:cNvPr id="3" name="Content Placeholder 2">
@@ -19815,8 +19809,8 @@
           </a:p>
         </p:txBody>
       </p:sp>
-      <mc:AlternateContent xmlns:mc="http://schemas.openxmlformats.org/markup-compatibility/2006">
-        <mc:Choice xmlns:a14="http://schemas.microsoft.com/office/drawing/2010/main" Requires="a14">
+      <mc:AlternateContent xmlns:mc="http://schemas.openxmlformats.org/markup-compatibility/2006" xmlns:a14="http://schemas.microsoft.com/office/drawing/2010/main">
+        <mc:Choice Requires="a14">
           <p:sp>
             <p:nvSpPr>
               <p:cNvPr id="3" name="Content Placeholder 2">
@@ -20448,7 +20442,7 @@
             </p:txBody>
           </p:sp>
         </mc:Choice>
-        <mc:Fallback>
+        <mc:Fallback xmlns="">
           <p:sp>
             <p:nvSpPr>
               <p:cNvPr id="3" name="Content Placeholder 2">
@@ -20523,8 +20517,8 @@
           </a:prstGeom>
         </p:spPr>
       </p:pic>
-      <mc:AlternateContent xmlns:mc="http://schemas.openxmlformats.org/markup-compatibility/2006">
-        <mc:Choice xmlns:a14="http://schemas.microsoft.com/office/drawing/2010/main" Requires="a14">
+      <mc:AlternateContent xmlns:mc="http://schemas.openxmlformats.org/markup-compatibility/2006" xmlns:a14="http://schemas.microsoft.com/office/drawing/2010/main">
+        <mc:Choice Requires="a14">
           <p:sp>
             <p:nvSpPr>
               <p:cNvPr id="5" name="TextBox 4">
@@ -20578,7 +20572,7 @@
             </p:txBody>
           </p:sp>
         </mc:Choice>
-        <mc:Fallback>
+        <mc:Fallback xmlns="">
           <p:sp>
             <p:nvSpPr>
               <p:cNvPr id="5" name="TextBox 4">
@@ -20729,8 +20723,8 @@
           </a:p>
         </p:txBody>
       </p:sp>
-      <mc:AlternateContent xmlns:mc="http://schemas.openxmlformats.org/markup-compatibility/2006">
-        <mc:Choice xmlns:a14="http://schemas.microsoft.com/office/drawing/2010/main" Requires="a14">
+      <mc:AlternateContent xmlns:mc="http://schemas.openxmlformats.org/markup-compatibility/2006" xmlns:a14="http://schemas.microsoft.com/office/drawing/2010/main">
+        <mc:Choice Requires="a14">
           <p:sp>
             <p:nvSpPr>
               <p:cNvPr id="41" name="TextBox 40">
@@ -21868,7 +21862,7 @@
             </p:txBody>
           </p:sp>
         </mc:Choice>
-        <mc:Fallback>
+        <mc:Fallback xmlns="">
           <p:sp>
             <p:nvSpPr>
               <p:cNvPr id="41" name="TextBox 40">
@@ -23003,8 +22997,8 @@
           </p:txBody>
         </p:sp>
       </p:grpSp>
-      <mc:AlternateContent xmlns:mc="http://schemas.openxmlformats.org/markup-compatibility/2006">
-        <mc:Choice xmlns:a14="http://schemas.microsoft.com/office/drawing/2010/main" Requires="a14">
+      <mc:AlternateContent xmlns:mc="http://schemas.openxmlformats.org/markup-compatibility/2006" xmlns:a14="http://schemas.microsoft.com/office/drawing/2010/main">
+        <mc:Choice Requires="a14">
           <p:sp>
             <p:nvSpPr>
               <p:cNvPr id="46" name="Speech Bubble: Rectangle with Corners Rounded 45">
@@ -23096,7 +23090,7 @@
             </p:txBody>
           </p:sp>
         </mc:Choice>
-        <mc:Fallback>
+        <mc:Fallback xmlns="">
           <p:sp>
             <p:nvSpPr>
               <p:cNvPr id="46" name="Speech Bubble: Rectangle with Corners Rounded 45">
@@ -23531,12 +23525,12 @@
             <p:spPr>
               <a:xfrm>
                 <a:off x="838200" y="1124198"/>
-                <a:ext cx="10515600" cy="1783661"/>
+                <a:ext cx="10515600" cy="1571760"/>
               </a:xfrm>
             </p:spPr>
             <p:txBody>
               <a:bodyPr>
-                <a:normAutofit fontScale="70000" lnSpcReduction="20000"/>
+                <a:normAutofit fontScale="62500" lnSpcReduction="20000"/>
               </a:bodyPr>
               <a:lstStyle/>
               <a:p>
@@ -23689,12 +23683,12 @@
             <p:spPr>
               <a:xfrm>
                 <a:off x="838200" y="1124198"/>
-                <a:ext cx="10515600" cy="1783661"/>
+                <a:ext cx="10515600" cy="1571760"/>
               </a:xfrm>
               <a:blipFill>
                 <a:blip r:embed="rId2"/>
                 <a:stretch>
-                  <a:fillRect l="-522" t="-5802"/>
+                  <a:fillRect l="-406" t="-5814" b="-4651"/>
                 </a:stretch>
               </a:blipFill>
             </p:spPr>
@@ -23713,181 +23707,55 @@
           </p:sp>
         </mc:Fallback>
       </mc:AlternateContent>
-      <p:pic>
-        <p:nvPicPr>
-          <p:cNvPr id="5" name="Picture 4">
+      <p:sp>
+        <p:nvSpPr>
+          <p:cNvPr id="9" name="TextBox 8">
             <a:extLst>
               <a:ext uri="{FF2B5EF4-FFF2-40B4-BE49-F238E27FC236}">
-                <a16:creationId xmlns:a16="http://schemas.microsoft.com/office/drawing/2014/main" id="{AD66987A-C1A2-C925-E70B-BB4DA616A482}"/>
+                <a16:creationId xmlns:a16="http://schemas.microsoft.com/office/drawing/2014/main" id="{6C16D6BC-D653-3084-48E6-D30B7A3E47B8}"/>
               </a:ext>
             </a:extLst>
           </p:cNvPr>
-          <p:cNvPicPr>
-            <a:picLocks noChangeAspect="1"/>
-          </p:cNvPicPr>
+          <p:cNvSpPr txBox="1"/>
           <p:nvPr/>
-        </p:nvPicPr>
-        <p:blipFill>
-          <a:blip r:embed="rId3"/>
-          <a:stretch>
-            <a:fillRect/>
-          </a:stretch>
-        </p:blipFill>
+        </p:nvSpPr>
         <p:spPr>
           <a:xfrm>
-            <a:off x="4299097" y="3381561"/>
-            <a:ext cx="7279757" cy="2661807"/>
+            <a:off x="838199" y="5907977"/>
+            <a:ext cx="10651131" cy="646331"/>
           </a:xfrm>
           <a:prstGeom prst="rect">
             <a:avLst/>
           </a:prstGeom>
+          <a:noFill/>
         </p:spPr>
-      </p:pic>
-      <mc:AlternateContent xmlns:mc="http://schemas.openxmlformats.org/markup-compatibility/2006" xmlns:a14="http://schemas.microsoft.com/office/drawing/2010/main">
-        <mc:Choice Requires="a14">
-          <p:sp>
-            <p:nvSpPr>
-              <p:cNvPr id="6" name="TextBox 5">
-                <a:extLst>
-                  <a:ext uri="{FF2B5EF4-FFF2-40B4-BE49-F238E27FC236}">
-                    <a16:creationId xmlns:a16="http://schemas.microsoft.com/office/drawing/2014/main" id="{E82E76E1-445B-0C86-262C-5EA0DD4E509D}"/>
-                  </a:ext>
-                </a:extLst>
-              </p:cNvPr>
-              <p:cNvSpPr txBox="1"/>
-              <p:nvPr/>
-            </p:nvSpPr>
-            <p:spPr>
-              <a:xfrm>
-                <a:off x="936550" y="3429000"/>
-                <a:ext cx="3308498" cy="2554545"/>
-              </a:xfrm>
-              <a:prstGeom prst="rect">
-                <a:avLst/>
-              </a:prstGeom>
-              <a:noFill/>
-            </p:spPr>
-            <p:txBody>
-              <a:bodyPr wrap="square" rtlCol="0">
-                <a:spAutoFit/>
-              </a:bodyPr>
-              <a:lstStyle/>
-              <a:p>
-                <a:r>
-                  <a:rPr lang="en-US" sz="2000" b="1" dirty="0"/>
-                  <a:t>Example</a:t>
-                </a:r>
-                <a:r>
-                  <a:rPr lang="en-US" sz="2000" dirty="0"/>
-                  <a:t>: </a:t>
-                </a:r>
-              </a:p>
-              <a:p>
-                <a:pPr marL="285750" indent="-285750">
-                  <a:buFont typeface="Arial" panose="020B0604020202020204" pitchFamily="34" charset="0"/>
-                  <a:buChar char="•"/>
-                </a:pPr>
-                <a:r>
-                  <a:rPr lang="en-US" sz="2000" dirty="0"/>
-                  <a:t>State has two components.</a:t>
-                </a:r>
-              </a:p>
-              <a:p>
-                <a:pPr marL="285750" indent="-285750">
-                  <a:buFont typeface="Arial" panose="020B0604020202020204" pitchFamily="34" charset="0"/>
-                  <a:buChar char="•"/>
-                </a:pPr>
-                <a:r>
-                  <a:rPr lang="en-US" sz="2000" dirty="0"/>
-                  <a:t>4  </a:t>
-                </a:r>
-                <a14:m>
-                  <m:oMath xmlns:m="http://schemas.openxmlformats.org/officeDocument/2006/math">
-                    <m:r>
-                      <a:rPr lang="en-US" sz="2000" b="0" i="1" smtClean="0">
-                        <a:latin typeface="Cambria Math" panose="02040503050406030204" pitchFamily="18" charset="0"/>
-                      </a:rPr>
-                      <m:t>4×4</m:t>
-                    </m:r>
-                  </m:oMath>
-                </a14:m>
-                <a:r>
-                  <a:rPr lang="en-US" sz="2000" dirty="0"/>
-                  <a:t> overlapping </a:t>
-                </a:r>
-                <a:r>
-                  <a:rPr lang="en-US" sz="2000" dirty="0" err="1"/>
-                  <a:t>tilings</a:t>
-                </a:r>
-                <a:r>
-                  <a:rPr lang="en-US" sz="2000" dirty="0"/>
-                  <a:t> give 64 squares.</a:t>
-                </a:r>
-              </a:p>
-              <a:p>
-                <a:pPr marL="285750" indent="-285750">
-                  <a:buFont typeface="Arial" panose="020B0604020202020204" pitchFamily="34" charset="0"/>
-                  <a:buChar char="•"/>
-                </a:pPr>
-                <a:r>
-                  <a:rPr lang="en-US" sz="2000" dirty="0"/>
-                  <a:t>State features: 60 0s and only the four active tiles have a 1</a:t>
-                </a:r>
-              </a:p>
-            </p:txBody>
-          </p:sp>
-        </mc:Choice>
-        <mc:Fallback xmlns="">
-          <p:sp>
-            <p:nvSpPr>
-              <p:cNvPr id="6" name="TextBox 5">
-                <a:extLst>
-                  <a:ext uri="{FF2B5EF4-FFF2-40B4-BE49-F238E27FC236}">
-                    <a16:creationId xmlns:a16="http://schemas.microsoft.com/office/drawing/2014/main" id="{E82E76E1-445B-0C86-262C-5EA0DD4E509D}"/>
-                  </a:ext>
-                </a:extLst>
-              </p:cNvPr>
-              <p:cNvSpPr txBox="1">
-                <a:spLocks noRot="1" noChangeAspect="1" noMove="1" noResize="1" noEditPoints="1" noAdjustHandles="1" noChangeArrowheads="1" noChangeShapeType="1" noTextEdit="1"/>
-              </p:cNvSpPr>
-              <p:nvPr/>
-            </p:nvSpPr>
-            <p:spPr>
-              <a:xfrm>
-                <a:off x="936550" y="3429000"/>
-                <a:ext cx="3308498" cy="2554545"/>
-              </a:xfrm>
-              <a:prstGeom prst="rect">
-                <a:avLst/>
-              </a:prstGeom>
-              <a:blipFill>
-                <a:blip r:embed="rId4"/>
-                <a:stretch>
-                  <a:fillRect l="-2030" t="-1432" b="-3103"/>
-                </a:stretch>
-              </a:blipFill>
-            </p:spPr>
-            <p:txBody>
-              <a:bodyPr/>
-              <a:lstStyle/>
-              <a:p>
-                <a:r>
-                  <a:rPr lang="en-US">
-                    <a:noFill/>
-                  </a:rPr>
-                  <a:t> </a:t>
-                </a:r>
-              </a:p>
-            </p:txBody>
-          </p:sp>
-        </mc:Fallback>
-      </mc:AlternateContent>
+        <p:txBody>
+          <a:bodyPr wrap="square">
+            <a:spAutoFit/>
+          </a:bodyPr>
+          <a:lstStyle/>
+          <a:p>
+            <a:pPr marL="285750" indent="-285750">
+              <a:buFont typeface="Arial" panose="020B0604020202020204" pitchFamily="34" charset="0"/>
+              <a:buChar char="•"/>
+            </a:pPr>
+            <a:r>
+              <a:rPr lang="en-US" b="1" dirty="0"/>
+              <a:t>Issue</a:t>
+            </a:r>
+            <a:r>
+              <a:rPr lang="en-US" dirty="0"/>
+              <a:t>: High-dimensional state spaces lead to too long sparse feature vectors. Idea: Use index hash tables with limited capacity to focus on more frequently encountered states. </a:t>
+            </a:r>
+          </a:p>
+        </p:txBody>
+      </p:sp>
       <p:grpSp>
         <p:nvGrpSpPr>
-          <p:cNvPr id="40" name="Group 39">
+          <p:cNvPr id="11" name="Group 10">
             <a:extLst>
               <a:ext uri="{FF2B5EF4-FFF2-40B4-BE49-F238E27FC236}">
-                <a16:creationId xmlns:a16="http://schemas.microsoft.com/office/drawing/2014/main" id="{67A12649-C2C4-ED5F-5094-B6C4AD7830E1}"/>
+                <a16:creationId xmlns:a16="http://schemas.microsoft.com/office/drawing/2014/main" id="{D437D3AF-9CD5-44B6-815F-6BBB79164F9B}"/>
               </a:ext>
             </a:extLst>
           </p:cNvPr>
@@ -23896,39 +23764,1051 @@
         </p:nvGrpSpPr>
         <p:grpSpPr>
           <a:xfrm>
-            <a:off x="4479851" y="4849257"/>
-            <a:ext cx="1253106" cy="603874"/>
-            <a:chOff x="4442224" y="5428331"/>
-            <a:chExt cx="1253106" cy="603874"/>
+            <a:off x="838199" y="2913888"/>
+            <a:ext cx="10825636" cy="2819914"/>
+            <a:chOff x="838199" y="2913888"/>
+            <a:chExt cx="10825636" cy="2819914"/>
           </a:xfrm>
         </p:grpSpPr>
-        <p:cxnSp>
-          <p:nvCxnSpPr>
-            <p:cNvPr id="8" name="Straight Connector 7">
+        <p:pic>
+          <p:nvPicPr>
+            <p:cNvPr id="5" name="Picture 4">
               <a:extLst>
                 <a:ext uri="{FF2B5EF4-FFF2-40B4-BE49-F238E27FC236}">
-                  <a16:creationId xmlns:a16="http://schemas.microsoft.com/office/drawing/2014/main" id="{C5E45CF6-7235-3CD1-7DE8-C6E0659A42AE}"/>
+                  <a16:creationId xmlns:a16="http://schemas.microsoft.com/office/drawing/2014/main" id="{AD66987A-C1A2-C925-E70B-BB4DA616A482}"/>
                 </a:ext>
               </a:extLst>
             </p:cNvPr>
-            <p:cNvCxnSpPr>
-              <a:cxnSpLocks/>
-            </p:cNvCxnSpPr>
+            <p:cNvPicPr>
+              <a:picLocks noChangeAspect="1"/>
+            </p:cNvPicPr>
             <p:nvPr/>
-          </p:nvCxnSpPr>
+          </p:nvPicPr>
+          <p:blipFill>
+            <a:blip r:embed="rId3"/>
+            <a:stretch>
+              <a:fillRect/>
+            </a:stretch>
+          </p:blipFill>
           <p:spPr>
             <a:xfrm>
-              <a:off x="5695330" y="5428331"/>
-              <a:ext cx="0" cy="603874"/>
+              <a:off x="4299097" y="2913888"/>
+              <a:ext cx="7279757" cy="2661807"/>
             </a:xfrm>
-            <a:prstGeom prst="line">
+            <a:prstGeom prst="rect">
               <a:avLst/>
             </a:prstGeom>
-            <a:ln w="19050" cap="flat" cmpd="sng" algn="ctr">
+          </p:spPr>
+        </p:pic>
+        <mc:AlternateContent xmlns:mc="http://schemas.openxmlformats.org/markup-compatibility/2006" xmlns:a14="http://schemas.microsoft.com/office/drawing/2010/main">
+          <mc:Choice Requires="a14">
+            <p:sp>
+              <p:nvSpPr>
+                <p:cNvPr id="6" name="TextBox 5">
+                  <a:extLst>
+                    <a:ext uri="{FF2B5EF4-FFF2-40B4-BE49-F238E27FC236}">
+                      <a16:creationId xmlns:a16="http://schemas.microsoft.com/office/drawing/2014/main" id="{E82E76E1-445B-0C86-262C-5EA0DD4E509D}"/>
+                    </a:ext>
+                  </a:extLst>
+                </p:cNvPr>
+                <p:cNvSpPr txBox="1"/>
+                <p:nvPr/>
+              </p:nvSpPr>
+              <p:spPr>
+                <a:xfrm>
+                  <a:off x="936550" y="2961327"/>
+                  <a:ext cx="3308498" cy="2554545"/>
+                </a:xfrm>
+                <a:prstGeom prst="rect">
+                  <a:avLst/>
+                </a:prstGeom>
+                <a:noFill/>
+              </p:spPr>
+              <p:txBody>
+                <a:bodyPr wrap="square" rtlCol="0">
+                  <a:spAutoFit/>
+                </a:bodyPr>
+                <a:lstStyle/>
+                <a:p>
+                  <a:r>
+                    <a:rPr lang="en-US" sz="2000" b="1" dirty="0"/>
+                    <a:t>Example</a:t>
+                  </a:r>
+                  <a:r>
+                    <a:rPr lang="en-US" sz="2000" dirty="0"/>
+                    <a:t>: </a:t>
+                  </a:r>
+                </a:p>
+                <a:p>
+                  <a:pPr marL="285750" indent="-285750">
+                    <a:buFont typeface="Arial" panose="020B0604020202020204" pitchFamily="34" charset="0"/>
+                    <a:buChar char="•"/>
+                  </a:pPr>
+                  <a:r>
+                    <a:rPr lang="en-US" sz="2000" dirty="0"/>
+                    <a:t>State has two components.</a:t>
+                  </a:r>
+                </a:p>
+                <a:p>
+                  <a:pPr marL="285750" indent="-285750">
+                    <a:buFont typeface="Arial" panose="020B0604020202020204" pitchFamily="34" charset="0"/>
+                    <a:buChar char="•"/>
+                  </a:pPr>
+                  <a:r>
+                    <a:rPr lang="en-US" sz="2000" dirty="0"/>
+                    <a:t>4  </a:t>
+                  </a:r>
+                  <a14:m>
+                    <m:oMath xmlns:m="http://schemas.openxmlformats.org/officeDocument/2006/math">
+                      <m:r>
+                        <a:rPr lang="en-US" sz="2000" b="0" i="1" smtClean="0">
+                          <a:latin typeface="Cambria Math" panose="02040503050406030204" pitchFamily="18" charset="0"/>
+                        </a:rPr>
+                        <m:t>4×4</m:t>
+                      </m:r>
+                    </m:oMath>
+                  </a14:m>
+                  <a:r>
+                    <a:rPr lang="en-US" sz="2000" dirty="0"/>
+                    <a:t> overlapping </a:t>
+                  </a:r>
+                  <a:r>
+                    <a:rPr lang="en-US" sz="2000" dirty="0" err="1"/>
+                    <a:t>tilings</a:t>
+                  </a:r>
+                  <a:r>
+                    <a:rPr lang="en-US" sz="2000" dirty="0"/>
+                    <a:t> give 64 squares.</a:t>
+                  </a:r>
+                </a:p>
+                <a:p>
+                  <a:pPr marL="285750" indent="-285750">
+                    <a:buFont typeface="Arial" panose="020B0604020202020204" pitchFamily="34" charset="0"/>
+                    <a:buChar char="•"/>
+                  </a:pPr>
+                  <a:r>
+                    <a:rPr lang="en-US" sz="2000" dirty="0"/>
+                    <a:t>State features: 60 0s and only the four active tiles have a 1</a:t>
+                  </a:r>
+                </a:p>
+              </p:txBody>
+            </p:sp>
+          </mc:Choice>
+          <mc:Fallback xmlns="">
+            <p:sp>
+              <p:nvSpPr>
+                <p:cNvPr id="6" name="TextBox 5">
+                  <a:extLst>
+                    <a:ext uri="{FF2B5EF4-FFF2-40B4-BE49-F238E27FC236}">
+                      <a16:creationId xmlns:a16="http://schemas.microsoft.com/office/drawing/2014/main" id="{E82E76E1-445B-0C86-262C-5EA0DD4E509D}"/>
+                    </a:ext>
+                  </a:extLst>
+                </p:cNvPr>
+                <p:cNvSpPr txBox="1">
+                  <a:spLocks noRot="1" noChangeAspect="1" noMove="1" noResize="1" noEditPoints="1" noAdjustHandles="1" noChangeArrowheads="1" noChangeShapeType="1" noTextEdit="1"/>
+                </p:cNvSpPr>
+                <p:nvPr/>
+              </p:nvSpPr>
+              <p:spPr>
+                <a:xfrm>
+                  <a:off x="936550" y="2961327"/>
+                  <a:ext cx="3308498" cy="2554545"/>
+                </a:xfrm>
+                <a:prstGeom prst="rect">
+                  <a:avLst/>
+                </a:prstGeom>
+                <a:blipFill>
+                  <a:blip r:embed="rId4"/>
+                  <a:stretch>
+                    <a:fillRect l="-2030" t="-1432" b="-3341"/>
+                  </a:stretch>
+                </a:blipFill>
+              </p:spPr>
+              <p:txBody>
+                <a:bodyPr/>
+                <a:lstStyle/>
+                <a:p>
+                  <a:r>
+                    <a:rPr lang="en-US">
+                      <a:noFill/>
+                    </a:rPr>
+                    <a:t> </a:t>
+                  </a:r>
+                </a:p>
+              </p:txBody>
+            </p:sp>
+          </mc:Fallback>
+        </mc:AlternateContent>
+        <p:grpSp>
+          <p:nvGrpSpPr>
+            <p:cNvPr id="40" name="Group 39">
+              <a:extLst>
+                <a:ext uri="{FF2B5EF4-FFF2-40B4-BE49-F238E27FC236}">
+                  <a16:creationId xmlns:a16="http://schemas.microsoft.com/office/drawing/2014/main" id="{67A12649-C2C4-ED5F-5094-B6C4AD7830E1}"/>
+                </a:ext>
+              </a:extLst>
+            </p:cNvPr>
+            <p:cNvGrpSpPr/>
+            <p:nvPr/>
+          </p:nvGrpSpPr>
+          <p:grpSpPr>
+            <a:xfrm>
+              <a:off x="4479851" y="4381584"/>
+              <a:ext cx="1253106" cy="603874"/>
+              <a:chOff x="4442224" y="5428331"/>
+              <a:chExt cx="1253106" cy="603874"/>
+            </a:xfrm>
+          </p:grpSpPr>
+          <p:cxnSp>
+            <p:nvCxnSpPr>
+              <p:cNvPr id="8" name="Straight Connector 7">
+                <a:extLst>
+                  <a:ext uri="{FF2B5EF4-FFF2-40B4-BE49-F238E27FC236}">
+                    <a16:creationId xmlns:a16="http://schemas.microsoft.com/office/drawing/2014/main" id="{C5E45CF6-7235-3CD1-7DE8-C6E0659A42AE}"/>
+                  </a:ext>
+                </a:extLst>
+              </p:cNvPr>
+              <p:cNvCxnSpPr>
+                <a:cxnSpLocks/>
+              </p:cNvCxnSpPr>
+              <p:nvPr/>
+            </p:nvCxnSpPr>
+            <p:spPr>
+              <a:xfrm>
+                <a:off x="5695330" y="5428331"/>
+                <a:ext cx="0" cy="603874"/>
+              </a:xfrm>
+              <a:prstGeom prst="line">
+                <a:avLst/>
+              </a:prstGeom>
+              <a:ln w="19050" cap="flat" cmpd="sng" algn="ctr">
+                <a:solidFill>
+                  <a:schemeClr val="accent2"/>
+                </a:solidFill>
+                <a:prstDash val="dash"/>
+                <a:round/>
+                <a:headEnd type="none" w="med" len="med"/>
+                <a:tailEnd type="none" w="med" len="med"/>
+              </a:ln>
+            </p:spPr>
+            <p:style>
+              <a:lnRef idx="0">
+                <a:scrgbClr r="0" g="0" b="0"/>
+              </a:lnRef>
+              <a:fillRef idx="0">
+                <a:scrgbClr r="0" g="0" b="0"/>
+              </a:fillRef>
+              <a:effectRef idx="0">
+                <a:scrgbClr r="0" g="0" b="0"/>
+              </a:effectRef>
+              <a:fontRef idx="minor">
+                <a:schemeClr val="tx1"/>
+              </a:fontRef>
+            </p:style>
+          </p:cxnSp>
+          <p:cxnSp>
+            <p:nvCxnSpPr>
+              <p:cNvPr id="7" name="Straight Connector 6">
+                <a:extLst>
+                  <a:ext uri="{FF2B5EF4-FFF2-40B4-BE49-F238E27FC236}">
+                    <a16:creationId xmlns:a16="http://schemas.microsoft.com/office/drawing/2014/main" id="{D1ADE3D4-6EA3-99E2-AB67-C986C31EB857}"/>
+                  </a:ext>
+                </a:extLst>
+              </p:cNvPr>
+              <p:cNvCxnSpPr>
+                <a:cxnSpLocks/>
+              </p:cNvCxnSpPr>
+              <p:nvPr/>
+            </p:nvCxnSpPr>
+            <p:spPr>
+              <a:xfrm flipH="1">
+                <a:off x="4442224" y="5428331"/>
+                <a:ext cx="1253106" cy="0"/>
+              </a:xfrm>
+              <a:prstGeom prst="line">
+                <a:avLst/>
+              </a:prstGeom>
+              <a:ln w="19050" cap="flat" cmpd="sng" algn="ctr">
+                <a:solidFill>
+                  <a:schemeClr val="accent2"/>
+                </a:solidFill>
+                <a:prstDash val="dash"/>
+                <a:round/>
+                <a:headEnd type="none" w="med" len="med"/>
+                <a:tailEnd type="none" w="med" len="med"/>
+              </a:ln>
+            </p:spPr>
+            <p:style>
+              <a:lnRef idx="0">
+                <a:scrgbClr r="0" g="0" b="0"/>
+              </a:lnRef>
+              <a:fillRef idx="0">
+                <a:scrgbClr r="0" g="0" b="0"/>
+              </a:fillRef>
+              <a:effectRef idx="0">
+                <a:scrgbClr r="0" g="0" b="0"/>
+              </a:effectRef>
+              <a:fontRef idx="minor">
+                <a:schemeClr val="tx1"/>
+              </a:fontRef>
+            </p:style>
+          </p:cxnSp>
+        </p:grpSp>
+        <p:grpSp>
+          <p:nvGrpSpPr>
+            <p:cNvPr id="39" name="Group 38">
+              <a:extLst>
+                <a:ext uri="{FF2B5EF4-FFF2-40B4-BE49-F238E27FC236}">
+                  <a16:creationId xmlns:a16="http://schemas.microsoft.com/office/drawing/2014/main" id="{C7F69C6B-93B1-2F6A-CDA0-FB2EBF5957B9}"/>
+                </a:ext>
+              </a:extLst>
+            </p:cNvPr>
+            <p:cNvGrpSpPr/>
+            <p:nvPr/>
+          </p:nvGrpSpPr>
+          <p:grpSpPr>
+            <a:xfrm>
+              <a:off x="4382621" y="3166197"/>
+              <a:ext cx="1548574" cy="1601735"/>
+              <a:chOff x="4382621" y="3244007"/>
+              <a:chExt cx="1548574" cy="1601735"/>
+            </a:xfrm>
+          </p:grpSpPr>
+          <p:grpSp>
+            <p:nvGrpSpPr>
+              <p:cNvPr id="22" name="Group 21">
+                <a:extLst>
+                  <a:ext uri="{FF2B5EF4-FFF2-40B4-BE49-F238E27FC236}">
+                    <a16:creationId xmlns:a16="http://schemas.microsoft.com/office/drawing/2014/main" id="{7752AD79-CCF2-693C-5120-EF04065CEDF9}"/>
+                  </a:ext>
+                </a:extLst>
+              </p:cNvPr>
+              <p:cNvGrpSpPr/>
+              <p:nvPr/>
+            </p:nvGrpSpPr>
+            <p:grpSpPr>
+              <a:xfrm>
+                <a:off x="4414283" y="3685809"/>
+                <a:ext cx="1516912" cy="268969"/>
+                <a:chOff x="4414283" y="3685809"/>
+                <a:chExt cx="1516912" cy="268969"/>
+              </a:xfrm>
+            </p:grpSpPr>
+            <p:sp>
+              <p:nvSpPr>
+                <p:cNvPr id="17" name="TextBox 16">
+                  <a:extLst>
+                    <a:ext uri="{FF2B5EF4-FFF2-40B4-BE49-F238E27FC236}">
+                      <a16:creationId xmlns:a16="http://schemas.microsoft.com/office/drawing/2014/main" id="{DD30F41D-0B59-96B0-2086-05FD5E0665BF}"/>
+                    </a:ext>
+                  </a:extLst>
+                </p:cNvPr>
+                <p:cNvSpPr txBox="1"/>
+                <p:nvPr/>
+              </p:nvSpPr>
+              <p:spPr>
+                <a:xfrm>
+                  <a:off x="4414283" y="3693168"/>
+                  <a:ext cx="145312" cy="261610"/>
+                </a:xfrm>
+                <a:prstGeom prst="rect">
+                  <a:avLst/>
+                </a:prstGeom>
+                <a:noFill/>
+              </p:spPr>
+              <p:txBody>
+                <a:bodyPr wrap="square" rtlCol="0">
+                  <a:spAutoFit/>
+                </a:bodyPr>
+                <a:lstStyle/>
+                <a:p>
+                  <a:r>
+                    <a:rPr lang="en-US" sz="1100" dirty="0">
+                      <a:solidFill>
+                        <a:schemeClr val="accent2"/>
+                      </a:solidFill>
+                    </a:rPr>
+                    <a:t>0</a:t>
+                  </a:r>
+                </a:p>
+              </p:txBody>
+            </p:sp>
+            <p:sp>
+              <p:nvSpPr>
+                <p:cNvPr id="18" name="TextBox 17">
+                  <a:extLst>
+                    <a:ext uri="{FF2B5EF4-FFF2-40B4-BE49-F238E27FC236}">
+                      <a16:creationId xmlns:a16="http://schemas.microsoft.com/office/drawing/2014/main" id="{71FBB2C6-5931-2FAD-F938-FE1642874B61}"/>
+                    </a:ext>
+                  </a:extLst>
+                </p:cNvPr>
+                <p:cNvSpPr txBox="1"/>
+                <p:nvPr/>
+              </p:nvSpPr>
+              <p:spPr>
+                <a:xfrm>
+                  <a:off x="4876799" y="3693168"/>
+                  <a:ext cx="145312" cy="261610"/>
+                </a:xfrm>
+                <a:prstGeom prst="rect">
+                  <a:avLst/>
+                </a:prstGeom>
+                <a:noFill/>
+              </p:spPr>
+              <p:txBody>
+                <a:bodyPr wrap="square" rtlCol="0">
+                  <a:spAutoFit/>
+                </a:bodyPr>
+                <a:lstStyle/>
+                <a:p>
+                  <a:r>
+                    <a:rPr lang="en-US" sz="1100" dirty="0">
+                      <a:solidFill>
+                        <a:schemeClr val="accent2"/>
+                      </a:solidFill>
+                    </a:rPr>
+                    <a:t>0</a:t>
+                  </a:r>
+                </a:p>
+              </p:txBody>
+            </p:sp>
+            <p:sp>
+              <p:nvSpPr>
+                <p:cNvPr id="19" name="TextBox 18">
+                  <a:extLst>
+                    <a:ext uri="{FF2B5EF4-FFF2-40B4-BE49-F238E27FC236}">
+                      <a16:creationId xmlns:a16="http://schemas.microsoft.com/office/drawing/2014/main" id="{3AB7C7A7-F7C6-8ABF-E4F6-630D483A8138}"/>
+                    </a:ext>
+                  </a:extLst>
+                </p:cNvPr>
+                <p:cNvSpPr txBox="1"/>
+                <p:nvPr/>
+              </p:nvSpPr>
+              <p:spPr>
+                <a:xfrm>
+                  <a:off x="5310962" y="3685809"/>
+                  <a:ext cx="145312" cy="261610"/>
+                </a:xfrm>
+                <a:prstGeom prst="rect">
+                  <a:avLst/>
+                </a:prstGeom>
+                <a:noFill/>
+              </p:spPr>
+              <p:txBody>
+                <a:bodyPr wrap="square" rtlCol="0">
+                  <a:spAutoFit/>
+                </a:bodyPr>
+                <a:lstStyle/>
+                <a:p>
+                  <a:r>
+                    <a:rPr lang="en-US" sz="1100" dirty="0">
+                      <a:solidFill>
+                        <a:schemeClr val="accent2"/>
+                      </a:solidFill>
+                    </a:rPr>
+                    <a:t>0</a:t>
+                  </a:r>
+                </a:p>
+              </p:txBody>
+            </p:sp>
+            <p:sp>
+              <p:nvSpPr>
+                <p:cNvPr id="20" name="TextBox 19">
+                  <a:extLst>
+                    <a:ext uri="{FF2B5EF4-FFF2-40B4-BE49-F238E27FC236}">
+                      <a16:creationId xmlns:a16="http://schemas.microsoft.com/office/drawing/2014/main" id="{5E3262AC-24A6-C62A-08C6-BBEBA5DFDB2C}"/>
+                    </a:ext>
+                  </a:extLst>
+                </p:cNvPr>
+                <p:cNvSpPr txBox="1"/>
+                <p:nvPr/>
+              </p:nvSpPr>
+              <p:spPr>
+                <a:xfrm>
+                  <a:off x="5785883" y="3693168"/>
+                  <a:ext cx="145312" cy="261610"/>
+                </a:xfrm>
+                <a:prstGeom prst="rect">
+                  <a:avLst/>
+                </a:prstGeom>
+                <a:noFill/>
+              </p:spPr>
+              <p:txBody>
+                <a:bodyPr wrap="square" rtlCol="0">
+                  <a:spAutoFit/>
+                </a:bodyPr>
+                <a:lstStyle/>
+                <a:p>
+                  <a:r>
+                    <a:rPr lang="en-US" sz="1100" dirty="0">
+                      <a:solidFill>
+                        <a:schemeClr val="accent2"/>
+                      </a:solidFill>
+                    </a:rPr>
+                    <a:t>0</a:t>
+                  </a:r>
+                </a:p>
+              </p:txBody>
+            </p:sp>
+          </p:grpSp>
+          <p:grpSp>
+            <p:nvGrpSpPr>
+              <p:cNvPr id="23" name="Group 22">
+                <a:extLst>
+                  <a:ext uri="{FF2B5EF4-FFF2-40B4-BE49-F238E27FC236}">
+                    <a16:creationId xmlns:a16="http://schemas.microsoft.com/office/drawing/2014/main" id="{9B927CF8-AF38-CDF8-A9EF-EDEFC6BDA07E}"/>
+                  </a:ext>
+                </a:extLst>
+              </p:cNvPr>
+              <p:cNvGrpSpPr/>
+              <p:nvPr/>
+            </p:nvGrpSpPr>
+            <p:grpSpPr>
+              <a:xfrm>
+                <a:off x="4414283" y="4105864"/>
+                <a:ext cx="1516912" cy="268969"/>
+                <a:chOff x="4414283" y="3685809"/>
+                <a:chExt cx="1516912" cy="268969"/>
+              </a:xfrm>
+            </p:grpSpPr>
+            <p:sp>
+              <p:nvSpPr>
+                <p:cNvPr id="24" name="TextBox 23">
+                  <a:extLst>
+                    <a:ext uri="{FF2B5EF4-FFF2-40B4-BE49-F238E27FC236}">
+                      <a16:creationId xmlns:a16="http://schemas.microsoft.com/office/drawing/2014/main" id="{F6EEFEFE-7A14-E54F-9D20-88E0B74EA4AB}"/>
+                    </a:ext>
+                  </a:extLst>
+                </p:cNvPr>
+                <p:cNvSpPr txBox="1"/>
+                <p:nvPr/>
+              </p:nvSpPr>
+              <p:spPr>
+                <a:xfrm>
+                  <a:off x="4414283" y="3693168"/>
+                  <a:ext cx="145312" cy="261610"/>
+                </a:xfrm>
+                <a:prstGeom prst="rect">
+                  <a:avLst/>
+                </a:prstGeom>
+                <a:noFill/>
+              </p:spPr>
+              <p:txBody>
+                <a:bodyPr wrap="square" rtlCol="0">
+                  <a:spAutoFit/>
+                </a:bodyPr>
+                <a:lstStyle/>
+                <a:p>
+                  <a:r>
+                    <a:rPr lang="en-US" sz="1100" dirty="0">
+                      <a:solidFill>
+                        <a:schemeClr val="accent2"/>
+                      </a:solidFill>
+                    </a:rPr>
+                    <a:t>0</a:t>
+                  </a:r>
+                </a:p>
+              </p:txBody>
+            </p:sp>
+            <p:sp>
+              <p:nvSpPr>
+                <p:cNvPr id="25" name="TextBox 24">
+                  <a:extLst>
+                    <a:ext uri="{FF2B5EF4-FFF2-40B4-BE49-F238E27FC236}">
+                      <a16:creationId xmlns:a16="http://schemas.microsoft.com/office/drawing/2014/main" id="{CAB2F481-5134-3AD1-8D30-78CA8E73AB46}"/>
+                    </a:ext>
+                  </a:extLst>
+                </p:cNvPr>
+                <p:cNvSpPr txBox="1"/>
+                <p:nvPr/>
+              </p:nvSpPr>
+              <p:spPr>
+                <a:xfrm>
+                  <a:off x="4876799" y="3693168"/>
+                  <a:ext cx="145312" cy="261610"/>
+                </a:xfrm>
+                <a:prstGeom prst="rect">
+                  <a:avLst/>
+                </a:prstGeom>
+                <a:noFill/>
+              </p:spPr>
+              <p:txBody>
+                <a:bodyPr wrap="square" rtlCol="0">
+                  <a:spAutoFit/>
+                </a:bodyPr>
+                <a:lstStyle/>
+                <a:p>
+                  <a:r>
+                    <a:rPr lang="en-US" sz="1100" dirty="0">
+                      <a:solidFill>
+                        <a:schemeClr val="accent2"/>
+                      </a:solidFill>
+                    </a:rPr>
+                    <a:t>0</a:t>
+                  </a:r>
+                </a:p>
+              </p:txBody>
+            </p:sp>
+            <p:sp>
+              <p:nvSpPr>
+                <p:cNvPr id="26" name="TextBox 25">
+                  <a:extLst>
+                    <a:ext uri="{FF2B5EF4-FFF2-40B4-BE49-F238E27FC236}">
+                      <a16:creationId xmlns:a16="http://schemas.microsoft.com/office/drawing/2014/main" id="{C989634F-DCFC-FCEC-62BF-CEB7B663196E}"/>
+                    </a:ext>
+                  </a:extLst>
+                </p:cNvPr>
+                <p:cNvSpPr txBox="1"/>
+                <p:nvPr/>
+              </p:nvSpPr>
+              <p:spPr>
+                <a:xfrm>
+                  <a:off x="5310962" y="3685809"/>
+                  <a:ext cx="145312" cy="261610"/>
+                </a:xfrm>
+                <a:prstGeom prst="rect">
+                  <a:avLst/>
+                </a:prstGeom>
+                <a:noFill/>
+              </p:spPr>
+              <p:txBody>
+                <a:bodyPr wrap="square" rtlCol="0">
+                  <a:spAutoFit/>
+                </a:bodyPr>
+                <a:lstStyle/>
+                <a:p>
+                  <a:r>
+                    <a:rPr lang="en-US" sz="1100" b="1" dirty="0">
+                      <a:solidFill>
+                        <a:schemeClr val="accent2"/>
+                      </a:solidFill>
+                    </a:rPr>
+                    <a:t>1</a:t>
+                  </a:r>
+                </a:p>
+              </p:txBody>
+            </p:sp>
+            <p:sp>
+              <p:nvSpPr>
+                <p:cNvPr id="27" name="TextBox 26">
+                  <a:extLst>
+                    <a:ext uri="{FF2B5EF4-FFF2-40B4-BE49-F238E27FC236}">
+                      <a16:creationId xmlns:a16="http://schemas.microsoft.com/office/drawing/2014/main" id="{35237276-F6DD-3DB4-120C-72057CEE1C74}"/>
+                    </a:ext>
+                  </a:extLst>
+                </p:cNvPr>
+                <p:cNvSpPr txBox="1"/>
+                <p:nvPr/>
+              </p:nvSpPr>
+              <p:spPr>
+                <a:xfrm>
+                  <a:off x="5785883" y="3693168"/>
+                  <a:ext cx="145312" cy="261610"/>
+                </a:xfrm>
+                <a:prstGeom prst="rect">
+                  <a:avLst/>
+                </a:prstGeom>
+                <a:noFill/>
+              </p:spPr>
+              <p:txBody>
+                <a:bodyPr wrap="square" rtlCol="0">
+                  <a:spAutoFit/>
+                </a:bodyPr>
+                <a:lstStyle/>
+                <a:p>
+                  <a:r>
+                    <a:rPr lang="en-US" sz="1100" dirty="0">
+                      <a:solidFill>
+                        <a:schemeClr val="accent2"/>
+                      </a:solidFill>
+                    </a:rPr>
+                    <a:t>0</a:t>
+                  </a:r>
+                </a:p>
+              </p:txBody>
+            </p:sp>
+          </p:grpSp>
+          <p:grpSp>
+            <p:nvGrpSpPr>
+              <p:cNvPr id="28" name="Group 27">
+                <a:extLst>
+                  <a:ext uri="{FF2B5EF4-FFF2-40B4-BE49-F238E27FC236}">
+                    <a16:creationId xmlns:a16="http://schemas.microsoft.com/office/drawing/2014/main" id="{EE4B4C3A-C9DE-6BCC-E353-0E9585FE87C7}"/>
+                  </a:ext>
+                </a:extLst>
+              </p:cNvPr>
+              <p:cNvGrpSpPr/>
+              <p:nvPr/>
+            </p:nvGrpSpPr>
+            <p:grpSpPr>
+              <a:xfrm>
+                <a:off x="4382621" y="4576773"/>
+                <a:ext cx="1516912" cy="268969"/>
+                <a:chOff x="4414283" y="3685809"/>
+                <a:chExt cx="1516912" cy="268969"/>
+              </a:xfrm>
+            </p:grpSpPr>
+            <p:sp>
+              <p:nvSpPr>
+                <p:cNvPr id="29" name="TextBox 28">
+                  <a:extLst>
+                    <a:ext uri="{FF2B5EF4-FFF2-40B4-BE49-F238E27FC236}">
+                      <a16:creationId xmlns:a16="http://schemas.microsoft.com/office/drawing/2014/main" id="{91547886-135D-9E0C-681F-41CA25C716EA}"/>
+                    </a:ext>
+                  </a:extLst>
+                </p:cNvPr>
+                <p:cNvSpPr txBox="1"/>
+                <p:nvPr/>
+              </p:nvSpPr>
+              <p:spPr>
+                <a:xfrm>
+                  <a:off x="4414283" y="3693168"/>
+                  <a:ext cx="145312" cy="261610"/>
+                </a:xfrm>
+                <a:prstGeom prst="rect">
+                  <a:avLst/>
+                </a:prstGeom>
+                <a:noFill/>
+              </p:spPr>
+              <p:txBody>
+                <a:bodyPr wrap="square" rtlCol="0">
+                  <a:spAutoFit/>
+                </a:bodyPr>
+                <a:lstStyle/>
+                <a:p>
+                  <a:r>
+                    <a:rPr lang="en-US" sz="1100" dirty="0">
+                      <a:solidFill>
+                        <a:schemeClr val="accent2"/>
+                      </a:solidFill>
+                    </a:rPr>
+                    <a:t>0</a:t>
+                  </a:r>
+                </a:p>
+              </p:txBody>
+            </p:sp>
+            <p:sp>
+              <p:nvSpPr>
+                <p:cNvPr id="30" name="TextBox 29">
+                  <a:extLst>
+                    <a:ext uri="{FF2B5EF4-FFF2-40B4-BE49-F238E27FC236}">
+                      <a16:creationId xmlns:a16="http://schemas.microsoft.com/office/drawing/2014/main" id="{7E32D794-516D-E3FB-3973-FB912E8CE644}"/>
+                    </a:ext>
+                  </a:extLst>
+                </p:cNvPr>
+                <p:cNvSpPr txBox="1"/>
+                <p:nvPr/>
+              </p:nvSpPr>
+              <p:spPr>
+                <a:xfrm>
+                  <a:off x="4876799" y="3693168"/>
+                  <a:ext cx="145312" cy="261610"/>
+                </a:xfrm>
+                <a:prstGeom prst="rect">
+                  <a:avLst/>
+                </a:prstGeom>
+                <a:noFill/>
+              </p:spPr>
+              <p:txBody>
+                <a:bodyPr wrap="square" rtlCol="0">
+                  <a:spAutoFit/>
+                </a:bodyPr>
+                <a:lstStyle/>
+                <a:p>
+                  <a:r>
+                    <a:rPr lang="en-US" sz="1100" dirty="0">
+                      <a:solidFill>
+                        <a:schemeClr val="accent2"/>
+                      </a:solidFill>
+                    </a:rPr>
+                    <a:t>0</a:t>
+                  </a:r>
+                </a:p>
+              </p:txBody>
+            </p:sp>
+            <p:sp>
+              <p:nvSpPr>
+                <p:cNvPr id="31" name="TextBox 30">
+                  <a:extLst>
+                    <a:ext uri="{FF2B5EF4-FFF2-40B4-BE49-F238E27FC236}">
+                      <a16:creationId xmlns:a16="http://schemas.microsoft.com/office/drawing/2014/main" id="{0EA4B7BB-CAEA-8B05-10B1-251225217D35}"/>
+                    </a:ext>
+                  </a:extLst>
+                </p:cNvPr>
+                <p:cNvSpPr txBox="1"/>
+                <p:nvPr/>
+              </p:nvSpPr>
+              <p:spPr>
+                <a:xfrm>
+                  <a:off x="5310962" y="3685809"/>
+                  <a:ext cx="145312" cy="261610"/>
+                </a:xfrm>
+                <a:prstGeom prst="rect">
+                  <a:avLst/>
+                </a:prstGeom>
+                <a:noFill/>
+              </p:spPr>
+              <p:txBody>
+                <a:bodyPr wrap="square" rtlCol="0">
+                  <a:spAutoFit/>
+                </a:bodyPr>
+                <a:lstStyle/>
+                <a:p>
+                  <a:r>
+                    <a:rPr lang="en-US" sz="1100" dirty="0">
+                      <a:solidFill>
+                        <a:schemeClr val="accent2"/>
+                      </a:solidFill>
+                    </a:rPr>
+                    <a:t>0</a:t>
+                  </a:r>
+                </a:p>
+              </p:txBody>
+            </p:sp>
+            <p:sp>
+              <p:nvSpPr>
+                <p:cNvPr id="32" name="TextBox 31">
+                  <a:extLst>
+                    <a:ext uri="{FF2B5EF4-FFF2-40B4-BE49-F238E27FC236}">
+                      <a16:creationId xmlns:a16="http://schemas.microsoft.com/office/drawing/2014/main" id="{A1E2758A-527A-2EDE-0548-EDE57550686E}"/>
+                    </a:ext>
+                  </a:extLst>
+                </p:cNvPr>
+                <p:cNvSpPr txBox="1"/>
+                <p:nvPr/>
+              </p:nvSpPr>
+              <p:spPr>
+                <a:xfrm>
+                  <a:off x="5785883" y="3693168"/>
+                  <a:ext cx="145312" cy="261610"/>
+                </a:xfrm>
+                <a:prstGeom prst="rect">
+                  <a:avLst/>
+                </a:prstGeom>
+                <a:noFill/>
+              </p:spPr>
+              <p:txBody>
+                <a:bodyPr wrap="square" rtlCol="0">
+                  <a:spAutoFit/>
+                </a:bodyPr>
+                <a:lstStyle/>
+                <a:p>
+                  <a:r>
+                    <a:rPr lang="en-US" sz="1100" dirty="0">
+                      <a:solidFill>
+                        <a:schemeClr val="accent2"/>
+                      </a:solidFill>
+                    </a:rPr>
+                    <a:t>0</a:t>
+                  </a:r>
+                </a:p>
+              </p:txBody>
+            </p:sp>
+          </p:grpSp>
+          <p:grpSp>
+            <p:nvGrpSpPr>
+              <p:cNvPr id="33" name="Group 32">
+                <a:extLst>
+                  <a:ext uri="{FF2B5EF4-FFF2-40B4-BE49-F238E27FC236}">
+                    <a16:creationId xmlns:a16="http://schemas.microsoft.com/office/drawing/2014/main" id="{959E18F5-BC4F-0096-E7F1-99D143FB7D6F}"/>
+                  </a:ext>
+                </a:extLst>
+              </p:cNvPr>
+              <p:cNvGrpSpPr/>
+              <p:nvPr/>
+            </p:nvGrpSpPr>
+            <p:grpSpPr>
+              <a:xfrm>
+                <a:off x="4403650" y="3244007"/>
+                <a:ext cx="1516912" cy="268969"/>
+                <a:chOff x="4414283" y="3685809"/>
+                <a:chExt cx="1516912" cy="268969"/>
+              </a:xfrm>
+            </p:grpSpPr>
+            <p:sp>
+              <p:nvSpPr>
+                <p:cNvPr id="34" name="TextBox 33">
+                  <a:extLst>
+                    <a:ext uri="{FF2B5EF4-FFF2-40B4-BE49-F238E27FC236}">
+                      <a16:creationId xmlns:a16="http://schemas.microsoft.com/office/drawing/2014/main" id="{F9A9344C-3766-8050-5CDA-60FBC60ADFB5}"/>
+                    </a:ext>
+                  </a:extLst>
+                </p:cNvPr>
+                <p:cNvSpPr txBox="1"/>
+                <p:nvPr/>
+              </p:nvSpPr>
+              <p:spPr>
+                <a:xfrm>
+                  <a:off x="4414283" y="3693168"/>
+                  <a:ext cx="145312" cy="261610"/>
+                </a:xfrm>
+                <a:prstGeom prst="rect">
+                  <a:avLst/>
+                </a:prstGeom>
+                <a:noFill/>
+              </p:spPr>
+              <p:txBody>
+                <a:bodyPr wrap="square" rtlCol="0">
+                  <a:spAutoFit/>
+                </a:bodyPr>
+                <a:lstStyle/>
+                <a:p>
+                  <a:r>
+                    <a:rPr lang="en-US" sz="1100" dirty="0">
+                      <a:solidFill>
+                        <a:schemeClr val="accent2"/>
+                      </a:solidFill>
+                    </a:rPr>
+                    <a:t>0</a:t>
+                  </a:r>
+                </a:p>
+              </p:txBody>
+            </p:sp>
+            <p:sp>
+              <p:nvSpPr>
+                <p:cNvPr id="35" name="TextBox 34">
+                  <a:extLst>
+                    <a:ext uri="{FF2B5EF4-FFF2-40B4-BE49-F238E27FC236}">
+                      <a16:creationId xmlns:a16="http://schemas.microsoft.com/office/drawing/2014/main" id="{6E9A0132-2099-5363-2A6D-48396ADEE3E1}"/>
+                    </a:ext>
+                  </a:extLst>
+                </p:cNvPr>
+                <p:cNvSpPr txBox="1"/>
+                <p:nvPr/>
+              </p:nvSpPr>
+              <p:spPr>
+                <a:xfrm>
+                  <a:off x="4876799" y="3693168"/>
+                  <a:ext cx="145312" cy="261610"/>
+                </a:xfrm>
+                <a:prstGeom prst="rect">
+                  <a:avLst/>
+                </a:prstGeom>
+                <a:noFill/>
+              </p:spPr>
+              <p:txBody>
+                <a:bodyPr wrap="square" rtlCol="0">
+                  <a:spAutoFit/>
+                </a:bodyPr>
+                <a:lstStyle/>
+                <a:p>
+                  <a:r>
+                    <a:rPr lang="en-US" sz="1100" dirty="0">
+                      <a:solidFill>
+                        <a:schemeClr val="accent2"/>
+                      </a:solidFill>
+                    </a:rPr>
+                    <a:t>0</a:t>
+                  </a:r>
+                </a:p>
+              </p:txBody>
+            </p:sp>
+            <p:sp>
+              <p:nvSpPr>
+                <p:cNvPr id="36" name="TextBox 35">
+                  <a:extLst>
+                    <a:ext uri="{FF2B5EF4-FFF2-40B4-BE49-F238E27FC236}">
+                      <a16:creationId xmlns:a16="http://schemas.microsoft.com/office/drawing/2014/main" id="{3E926400-ADCA-23FE-2D72-7019F2656D5E}"/>
+                    </a:ext>
+                  </a:extLst>
+                </p:cNvPr>
+                <p:cNvSpPr txBox="1"/>
+                <p:nvPr/>
+              </p:nvSpPr>
+              <p:spPr>
+                <a:xfrm>
+                  <a:off x="5310962" y="3685809"/>
+                  <a:ext cx="145312" cy="261610"/>
+                </a:xfrm>
+                <a:prstGeom prst="rect">
+                  <a:avLst/>
+                </a:prstGeom>
+                <a:noFill/>
+              </p:spPr>
+              <p:txBody>
+                <a:bodyPr wrap="square" rtlCol="0">
+                  <a:spAutoFit/>
+                </a:bodyPr>
+                <a:lstStyle/>
+                <a:p>
+                  <a:r>
+                    <a:rPr lang="en-US" sz="1100" dirty="0">
+                  